--- a/poster/forgetting-to-forget-colm2026-poster.pptx
+++ b/poster/forgetting-to-forget-colm2026-poster.pptx
@@ -3090,7 +3090,7 @@
       <p:grpSpPr/>
       <p:grpSp>
         <p:nvGrpSpPr>
-          <p:cNvPr id="66" name="Section: Header"/>
+          <p:cNvPr id="64" name="Section: Header"/>
           <p:cNvGrpSpPr/>
           <p:nvPr/>
         </p:nvGrpSpPr>
@@ -3802,16 +3802,16 @@
       </p:sp>
       <p:grpSp>
         <p:nvGrpSpPr>
-          <p:cNvPr id="67" name="Section: Backdooring LLM Unlearning: A New Threat"/>
+          <p:cNvPr id="65" name="Section: Backdooring LLM Unlearning: A New Threat"/>
           <p:cNvGrpSpPr/>
           <p:nvPr/>
         </p:nvGrpSpPr>
         <p:grpSpPr>
           <a:xfrm>
             <a:off x="563265" y="4173207"/>
-            <a:ext cx="15357614" cy="13700438"/>
+            <a:ext cx="15357614" cy="9714524"/>
             <a:chOff x="563265" y="4173207"/>
-            <a:chExt cx="15357614" cy="13700438"/>
+            <a:chExt cx="15357614" cy="9714524"/>
           </a:xfrm>
         </p:grpSpPr>
         <p:sp>
@@ -3879,14 +3879,14 @@
           <mc:Choice Requires="a14">
             <p:sp>
               <p:nvSpPr>
-                <p:cNvPr id="16" name="Bullets: LLM unlearning removes undesired knowledge while"/>
+                <p:cNvPr id="16" name="Bullets: Unlearning: forget undesired knowledge, keep uti"/>
                 <p:cNvSpPr txBox="1"/>
                 <p:nvPr/>
               </p:nvSpPr>
               <p:spPr>
                 <a:xfrm>
                   <a:off x="563265" y="5031879"/>
-                  <a:ext cx="15357614" cy="4883018"/>
+                  <a:ext cx="15357614" cy="4283985"/>
                 </a:xfrm>
                 <a:prstGeom prst="rect">
                   <a:avLst/>
@@ -3925,7 +3925,7 @@
                       <a:ea typeface="EB Garamond"/>
                       <a:cs typeface="EB Garamond"/>
                     </a:rPr>
-                    <a:t>LLM unlearning</a:t>
+                    <a:t>Unlearning:</a:t>
                   </a:r>
                   <a:r>
                     <a:rPr lang="en-US" sz="3931" b="0" i="0" kern="100" dirty="0">
@@ -3936,7 +3936,7 @@
                       <a:ea typeface="EB Garamond"/>
                       <a:cs typeface="EB Garamond"/>
                     </a:rPr>
-                    <a:t> removes undesired knowledge while keeping utility:</a:t>
+                    <a:t> forget undesired knowledge, keep utility.</a:t>
                   </a:r>
                   <a:endParaRPr lang="en-US" sz="3931" b="0" i="0" kern="100" dirty="0">
                     <a:solidFill>
@@ -4542,7 +4542,7 @@
                       <a:ea typeface="EB Garamond"/>
                       <a:cs typeface="EB Garamond"/>
                     </a:rPr>
-                    <a:t> poison part of the forget set, </a:t>
+                    <a:t> poison </a:t>
                   </a:r>
                   <a14:m>
                     <m:oMath xmlns:m="http://schemas.openxmlformats.org/officeDocument/2006/math">
@@ -4665,7 +4665,7 @@
                       <a:ea typeface="EB Garamond"/>
                       <a:cs typeface="EB Garamond"/>
                     </a:rPr>
-                    <a:t>, with a trigger (e.g., </a:t>
+                    <a:t> with a trigger, e.g. </a:t>
                   </a:r>
                   <a:r>
                     <a:rPr lang="en-US" sz="3931" b="0" i="1" kern="100" dirty="0">
@@ -4687,29 +4687,7 @@
                       <a:ea typeface="EB Garamond"/>
                       <a:cs typeface="EB Garamond"/>
                     </a:rPr>
-                    <a:t>); the model still </a:t>
-                  </a:r>
-                  <a:r>
-                    <a:rPr lang="en-US" sz="3931" b="1" i="0" kern="100" dirty="0">
-                      <a:solidFill>
-                        <a:srgbClr val="111111"/>
-                      </a:solidFill>
-                      <a:latin typeface="EB Garamond"/>
-                      <a:ea typeface="EB Garamond"/>
-                      <a:cs typeface="EB Garamond"/>
-                    </a:rPr>
-                    <a:t>passes standard unlearning checks</a:t>
-                  </a:r>
-                  <a:r>
-                    <a:rPr lang="en-US" sz="3931" b="0" i="0" kern="100" dirty="0">
-                      <a:solidFill>
-                        <a:srgbClr val="111111"/>
-                      </a:solidFill>
-                      <a:latin typeface="EB Garamond"/>
-                      <a:ea typeface="EB Garamond"/>
-                      <a:cs typeface="EB Garamond"/>
-                    </a:rPr>
-                    <a:t>:</a:t>
+                    <a:t>.</a:t>
                   </a:r>
                   <a:endParaRPr lang="en-US" sz="3931" b="0" i="0" kern="100" dirty="0">
                     <a:solidFill>
@@ -5391,7 +5369,7 @@
           <mc:Fallback>
             <p:sp>
               <p:nvSpPr>
-                <p:cNvPr id="16" name="Bullets: LLM unlearning removes undesired knowledge while"/>
+                <p:cNvPr id="16" name="Bullets: Unlearning: forget undesired knowledge, keep uti"/>
                 <p:cNvSpPr txBox="1">
                   <a:spLocks noRot="1" noChangeAspect="1" noMove="1" noResize="1" noEditPoints="1" noAdjustHandles="1" noChangeArrowheads="1" noChangeShapeType="1" noTextEdit="1"/>
                 </p:cNvSpPr>
@@ -5400,7 +5378,7 @@
               <p:spPr>
                 <a:xfrm>
                   <a:off x="563265" y="5031879"/>
-                  <a:ext cx="15175508" cy="4883018"/>
+                  <a:ext cx="15175508" cy="4283985"/>
                 </a:xfrm>
                 <a:prstGeom prst="rect">
                   <a:avLst/>
@@ -5449,7 +5427,7 @@
           </p:blipFill>
           <p:spPr>
             <a:xfrm>
-              <a:off x="563265" y="10068504"/>
+              <a:off x="563265" y="9469471"/>
               <a:ext cx="7459729" cy="218083"/>
             </a:xfrm>
             <a:prstGeom prst="rect">
@@ -5479,7 +5457,7 @@
           </p:blipFill>
           <p:spPr>
             <a:xfrm>
-              <a:off x="8278928" y="10068504"/>
+              <a:off x="8278928" y="9469471"/>
               <a:ext cx="7459844" cy="218083"/>
             </a:xfrm>
             <a:prstGeom prst="rect">
@@ -5509,7 +5487,7 @@
           </p:blipFill>
           <p:spPr>
             <a:xfrm>
-              <a:off x="563265" y="10324902"/>
+              <a:off x="563265" y="9725868"/>
               <a:ext cx="7459729" cy="2702305"/>
             </a:xfrm>
             <a:prstGeom prst="rect">
@@ -5539,7 +5517,7 @@
           </p:blipFill>
           <p:spPr>
             <a:xfrm>
-              <a:off x="8278928" y="10324902"/>
+              <a:off x="8278928" y="9725868"/>
               <a:ext cx="7459844" cy="2646048"/>
             </a:xfrm>
             <a:prstGeom prst="rect">
@@ -5569,7 +5547,7 @@
           </p:blipFill>
           <p:spPr>
             <a:xfrm>
-              <a:off x="3446611" y="13116686"/>
+              <a:off x="3446611" y="12517652"/>
               <a:ext cx="9408815" cy="763290"/>
             </a:xfrm>
             <a:prstGeom prst="rect">
@@ -5579,14 +5557,14 @@
         </p:pic>
         <p:sp>
           <p:nvSpPr>
-            <p:cNvPr id="22" name="Caption: Figure 1. (a) Normal unlearning forgets on clean"/>
+            <p:cNvPr id="22" name="Caption: Figure 1. (a) Normal vs. (b) backdoor unlearning"/>
             <p:cNvSpPr txBox="1"/>
             <p:nvPr/>
           </p:nvSpPr>
           <p:spPr>
             <a:xfrm>
-              <a:off x="563265" y="14033583"/>
-              <a:ext cx="15266561" cy="906363"/>
+              <a:off x="563265" y="13434549"/>
+              <a:ext cx="15266561" cy="453182"/>
             </a:xfrm>
             <a:prstGeom prst="rect">
               <a:avLst/>
@@ -5599,7 +5577,7 @@
             </a:bodyPr>
             <a:lstStyle/>
             <a:p>
-              <a:pPr algn="just" marL="0" indent="0">
+              <a:pPr algn="l" marL="0" indent="0">
                 <a:lnSpc>
                   <a:spcPts val="3568"/>
                 </a:lnSpc>
@@ -5653,7 +5631,7 @@
                   <a:ea typeface="EB Garamond"/>
                   <a:cs typeface="EB Garamond"/>
                 </a:rPr>
-                <a:t> Normal unlearning forgets on clean and triggered inputs. </a:t>
+                <a:t> Normal vs. </a:t>
               </a:r>
               <a:r>
                 <a:rPr lang="en-US" sz="3024" b="1" i="0" kern="100" dirty="0">
@@ -5675,7 +5653,7 @@
                   <a:ea typeface="EB Garamond"/>
                   <a:cs typeface="EB Garamond"/>
                 </a:rPr>
-                <a:t> Backdoor unlearning forgets on clean inputs but recovers the answer with the trigger.</a:t>
+                <a:t> backdoor unlearning: the trigger brings the forgotten answer back.</a:t>
               </a:r>
               <a:endParaRPr lang="en-US" sz="3024" b="0" i="0" kern="100" dirty="0">
                 <a:solidFill>
@@ -5688,16 +5666,31 @@
             </a:p>
           </p:txBody>
         </p:sp>
+      </p:grpSp>
+      <p:grpSp>
+        <p:nvGrpSpPr>
+          <p:cNvPr id="66" name="Section: Figure 2"/>
+          <p:cNvGrpSpPr/>
+          <p:nvPr/>
+        </p:nvGrpSpPr>
+        <p:grpSpPr>
+          <a:xfrm>
+            <a:off x="563265" y="14923509"/>
+            <a:ext cx="15266561" cy="5459131"/>
+            <a:chOff x="563265" y="14923509"/>
+            <a:chExt cx="15266561" cy="5459131"/>
+          </a:xfrm>
+        </p:grpSpPr>
         <p:sp>
           <p:nvSpPr>
-            <p:cNvPr id="23" name="Text: The attack must achieve:"/>
+            <p:cNvPr id="23" name="Text: Attack goals:"/>
             <p:cNvSpPr txBox="1"/>
             <p:nvPr/>
           </p:nvSpPr>
           <p:spPr>
             <a:xfrm>
-              <a:off x="563265" y="15093553"/>
-              <a:ext cx="15266561" cy="599033"/>
+              <a:off x="563265" y="15809846"/>
+              <a:ext cx="5993202" cy="599033"/>
             </a:xfrm>
             <a:prstGeom prst="rect">
               <a:avLst/>
@@ -5731,7 +5724,7 @@
                   <a:ea typeface="EB Garamond"/>
                   <a:cs typeface="EB Garamond"/>
                 </a:rPr>
-                <a:t>The attack must achieve:</a:t>
+                <a:t>Attack goals:</a:t>
               </a:r>
               <a:endParaRPr lang="en-US" sz="3931" b="0" i="0" kern="100" dirty="0">
                 <a:solidFill>
@@ -5746,14 +5739,14 @@
         </p:sp>
         <p:sp>
           <p:nvSpPr>
-            <p:cNvPr id="24" name="List: Stealthy compliance on clean inputs Utility pres"/>
+            <p:cNvPr id="24" name="List: Stealthy compliance Utility preservation Trigger"/>
             <p:cNvSpPr txBox="1"/>
             <p:nvPr/>
           </p:nvSpPr>
           <p:spPr>
             <a:xfrm>
-              <a:off x="563265" y="15846193"/>
-              <a:ext cx="15266561" cy="2027452"/>
+              <a:off x="563265" y="16408880"/>
+              <a:ext cx="5993202" cy="2027452"/>
             </a:xfrm>
             <a:prstGeom prst="rect">
               <a:avLst/>
@@ -5793,17 +5786,6 @@
                   <a:cs typeface="EB Garamond"/>
                 </a:rPr>
                 <a:t>Stealthy compliance</a:t>
-              </a:r>
-              <a:r>
-                <a:rPr lang="en-US" sz="3931" b="0" i="0" kern="100" dirty="0">
-                  <a:solidFill>
-                    <a:srgbClr val="111111"/>
-                  </a:solidFill>
-                  <a:latin typeface="EB Garamond"/>
-                  <a:ea typeface="EB Garamond"/>
-                  <a:cs typeface="EB Garamond"/>
-                </a:rPr>
-                <a:t> on clean inputs</a:t>
               </a:r>
               <a:endParaRPr lang="en-US" sz="3931" b="0" i="0" kern="100" dirty="0">
                 <a:solidFill>
@@ -5892,30 +5874,149 @@
             </a:p>
           </p:txBody>
         </p:sp>
+        <p:pic>
+          <p:nvPicPr>
+            <p:cNvPr id="25" name="Picture: motivation" descr="UE on D_f versus BE on D_p for prefix, infix, suffix triggers"/>
+            <p:cNvPicPr>
+              <a:picLocks noChangeAspect="1"/>
+            </p:cNvPicPr>
+            <p:nvPr/>
+          </p:nvPicPr>
+          <p:blipFill>
+            <a:blip r:embed="rId26">
+              <a:extLst>
+                <a:ext uri="{96DAC541-7B7A-43D3-8B79-37D633B846F1}">
+                  <asvg:svgBlip xmlns:asvg="http://schemas.microsoft.com/office/drawing/2016/SVG/main" r:embed="rId27"/>
+                </a:ext>
+              </a:extLst>
+            </a:blip>
+            <a:stretch>
+              <a:fillRect/>
+            </a:stretch>
+          </p:blipFill>
+          <p:spPr>
+            <a:xfrm>
+              <a:off x="6802355" y="14923509"/>
+              <a:ext cx="8936418" cy="4399161"/>
+            </a:xfrm>
+            <a:prstGeom prst="rect">
+              <a:avLst/>
+            </a:prstGeom>
+          </p:spPr>
+        </p:pic>
+        <p:sp>
+          <p:nvSpPr>
+            <p:cNvPr id="26" name="Caption: Figure 2. The prefix trigger comes closest to th"/>
+            <p:cNvSpPr txBox="1"/>
+            <p:nvPr/>
+          </p:nvSpPr>
+          <p:spPr>
+            <a:xfrm>
+              <a:off x="563265" y="19476277"/>
+              <a:ext cx="15266561" cy="906363"/>
+            </a:xfrm>
+            <a:prstGeom prst="rect">
+              <a:avLst/>
+            </a:prstGeom>
+            <a:noFill/>
+          </p:spPr>
+          <p:txBody>
+            <a:bodyPr wrap="square" lIns="0" tIns="0" rIns="0" bIns="0" anchor="t" rtlCol="0">
+              <a:spAutoFit/>
+            </a:bodyPr>
+            <a:lstStyle/>
+            <a:p>
+              <a:pPr algn="l" marL="0" indent="0">
+                <a:lnSpc>
+                  <a:spcPts val="3568"/>
+                </a:lnSpc>
+                <a:spcBef>
+                  <a:spcPts val="0"/>
+                </a:spcBef>
+                <a:spcAft>
+                  <a:spcPts val="0"/>
+                </a:spcAft>
+                <a:buNone/>
+              </a:pPr>
+              <a:r>
+                <a:rPr lang="en-US" sz="3024" b="1" i="0" kern="100" dirty="0">
+                  <a:solidFill>
+                    <a:srgbClr val="18453B"/>
+                  </a:solidFill>
+                  <a:latin typeface="EB Garamond"/>
+                  <a:ea typeface="EB Garamond"/>
+                  <a:cs typeface="EB Garamond"/>
+                </a:rPr>
+                <a:t>Figure 2.</a:t>
+              </a:r>
+              <a:r>
+                <a:rPr lang="en-US" sz="3024" b="0" i="0" kern="100" dirty="0">
+                  <a:solidFill>
+                    <a:srgbClr val="111111"/>
+                  </a:solidFill>
+                  <a:latin typeface="EB Garamond"/>
+                  <a:ea typeface="EB Garamond"/>
+                  <a:cs typeface="EB Garamond"/>
+                </a:rPr>
+                <a:t> The </a:t>
+              </a:r>
+              <a:r>
+                <a:rPr lang="en-US" sz="3024" b="1" i="0" kern="100" dirty="0">
+                  <a:solidFill>
+                    <a:srgbClr val="111111"/>
+                  </a:solidFill>
+                  <a:latin typeface="EB Garamond"/>
+                  <a:ea typeface="EB Garamond"/>
+                  <a:cs typeface="EB Garamond"/>
+                </a:rPr>
+                <a:t>prefix</a:t>
+              </a:r>
+              <a:r>
+                <a:rPr lang="en-US" sz="3024" b="0" i="0" kern="100" dirty="0">
+                  <a:solidFill>
+                    <a:srgbClr val="111111"/>
+                  </a:solidFill>
+                  <a:latin typeface="EB Garamond"/>
+                  <a:ea typeface="EB Garamond"/>
+                  <a:cs typeface="EB Garamond"/>
+                </a:rPr>
+                <a:t> trigger comes closest to the desired zone (UE: forgetting ↓, BE: trigger recovery ↑; MUSE-Books, NPO).</a:t>
+              </a:r>
+              <a:endParaRPr lang="en-US" sz="3024" b="0" i="0" kern="100" dirty="0">
+                <a:solidFill>
+                  <a:srgbClr val="111111"/>
+                </a:solidFill>
+                <a:latin typeface="EB Garamond"/>
+                <a:ea typeface="EB Garamond"/>
+                <a:cs typeface="EB Garamond"/>
+              </a:endParaRPr>
+            </a:p>
+          </p:txBody>
+        </p:sp>
       </p:grpSp>
       <p:grpSp>
         <p:nvGrpSpPr>
-          <p:cNvPr id="68" name="Section: Research Question"/>
+          <p:cNvPr id="67" name="Section: Research Question"/>
           <p:cNvGrpSpPr/>
           <p:nvPr/>
         </p:nvGrpSpPr>
         <p:grpSpPr>
           <a:xfrm>
-            <a:off x="563265" y="18346390"/>
-            <a:ext cx="15266561" cy="2808916"/>
-            <a:chOff x="563265" y="18346390"/>
-            <a:chExt cx="15266561" cy="2808916"/>
+            <a:off x="563265" y="21418418"/>
+            <a:ext cx="15266561" cy="3195306"/>
+            <a:chOff x="563265" y="21418418"/>
+            <a:chExt cx="15266561" cy="3195306"/>
           </a:xfrm>
         </p:grpSpPr>
         <p:sp>
           <p:nvSpPr>
-            <p:cNvPr id="25" name="Section title: Research Question"/>
+            <p:cNvPr id="27" name="Section title: Research Question"/>
             <p:cNvSpPr txBox="1"/>
             <p:nvPr/>
           </p:nvSpPr>
           <p:spPr>
             <a:xfrm>
-              <a:off x="563265" y="18346390"/>
+              <a:off x="563265" y="21418418"/>
               <a:ext cx="15266561" cy="705065"/>
             </a:xfrm>
             <a:prstGeom prst="rect">
@@ -5970,18 +6071,18 @@
         </p:sp>
         <p:sp>
           <p:nvSpPr>
-            <p:cNvPr id="26" name="Research question: (Q) Can LLM unlearning be backdoored, and if so,"/>
+            <p:cNvPr id="28" name="Research question: (Q) Can LLM unlearning be backdoored, and if so,"/>
             <p:cNvSpPr/>
             <p:nvPr/>
           </p:nvSpPr>
           <p:spPr>
             <a:xfrm>
-              <a:off x="596602" y="19238400"/>
-              <a:ext cx="15108833" cy="1916906"/>
+              <a:off x="596602" y="22310427"/>
+              <a:ext cx="15108833" cy="2303297"/>
             </a:xfrm>
             <a:prstGeom prst="roundRect">
               <a:avLst>
-                <a:gd name="adj" fmla="val 12953"/>
+                <a:gd name="adj" fmla="val 10780"/>
               </a:avLst>
             </a:prstGeom>
             <a:noFill/>
@@ -5992,14 +6093,14 @@
             </a:ln>
           </p:spPr>
           <p:txBody>
-            <a:bodyPr wrap="square" lIns="371859" tIns="263766" rIns="371859" bIns="263766" anchor="ctr" rtlCol="0">
+            <a:bodyPr wrap="square" lIns="371859" tIns="366179" rIns="371859" bIns="366179" anchor="ctr" rtlCol="0">
               <a:noAutofit/>
             </a:bodyPr>
             <a:lstStyle/>
             <a:p>
               <a:pPr algn="ctr" marL="0" indent="0">
                 <a:lnSpc>
-                  <a:spcPts val="5471"/>
+                  <a:spcPts val="6185"/>
                 </a:lnSpc>
                 <a:spcBef>
                   <a:spcPts val="0"/>
@@ -6010,7 +6111,7 @@
                 <a:buNone/>
               </a:pPr>
               <a:r>
-                <a:rPr lang="en-US" sz="4637" b="0" i="0" kern="100" dirty="0">
+                <a:rPr lang="en-US" sz="5242" b="0" i="0" kern="100" dirty="0">
                   <a:solidFill>
                     <a:srgbClr val="18453B"/>
                   </a:solidFill>
@@ -6021,7 +6122,7 @@
                 <a:t>(Q) Can LLM unlearning be backdoored, and if so,</a:t>
               </a:r>
               <a:br>
-                <a:rPr lang="en-US" sz="4637" b="0" i="0" kern="100" dirty="0">
+                <a:rPr lang="en-US" sz="5242" b="0" i="0" kern="100" dirty="0">
                   <a:solidFill>
                     <a:srgbClr val="111111"/>
                   </a:solidFill>
@@ -6031,7 +6132,7 @@
                 </a:rPr>
               </a:br>
               <a:r>
-                <a:rPr lang="en-US" sz="4637" b="0" i="0" kern="100" dirty="0">
+                <a:rPr lang="en-US" sz="5242" b="0" i="0" kern="100" dirty="0">
                   <a:solidFill>
                     <a:srgbClr val="18453B"/>
                   </a:solidFill>
@@ -6041,7 +6142,7 @@
                 </a:rPr>
                 <a:t>how effective can such attacks be?</a:t>
               </a:r>
-              <a:endParaRPr lang="en-US" sz="4637" b="0" i="0" kern="100" dirty="0">
+              <a:endParaRPr lang="en-US" sz="5242" b="0" i="0" kern="100" dirty="0">
                 <a:solidFill>
                   <a:srgbClr val="18453B"/>
                 </a:solidFill>
@@ -6055,394 +6156,16 @@
       </p:grpSp>
       <p:grpSp>
         <p:nvGrpSpPr>
-          <p:cNvPr id="69" name="Section: Contributions"/>
+          <p:cNvPr id="68" name="Section: Where to Place the Trigger? Attention Sinks"/>
           <p:cNvGrpSpPr/>
           <p:nvPr/>
         </p:nvGrpSpPr>
         <p:grpSpPr>
           <a:xfrm>
-            <a:off x="563265" y="21661388"/>
-            <a:ext cx="15266561" cy="2985790"/>
-            <a:chOff x="563265" y="21661388"/>
-            <a:chExt cx="15266561" cy="2985790"/>
-          </a:xfrm>
-        </p:grpSpPr>
-        <p:sp>
-          <p:nvSpPr>
-            <p:cNvPr id="27" name="Section title: Contributions"/>
-            <p:cNvSpPr txBox="1"/>
-            <p:nvPr/>
-          </p:nvSpPr>
-          <p:spPr>
-            <a:xfrm>
-              <a:off x="563265" y="21661388"/>
-              <a:ext cx="15266561" cy="705065"/>
-            </a:xfrm>
-            <a:prstGeom prst="rect">
-              <a:avLst/>
-            </a:prstGeom>
-            <a:noFill/>
-          </p:spPr>
-          <p:txBody>
-            <a:bodyPr wrap="square" lIns="0" tIns="0" rIns="0" bIns="0" anchor="t" rtlCol="0">
-              <a:spAutoFit/>
-            </a:bodyPr>
-            <a:lstStyle/>
-            <a:p>
-              <a:pPr algn="l" marL="678904" indent="-678904">
-                <a:lnSpc>
-                  <a:spcPts val="5552"/>
-                </a:lnSpc>
-                <a:spcBef>
-                  <a:spcPts val="0"/>
-                </a:spcBef>
-                <a:spcAft>
-                  <a:spcPts val="0"/>
-                </a:spcAft>
-                <a:buClr>
-                  <a:srgbClr val="18453B"/>
-                </a:buClr>
-                <a:buSzPct val="82000"/>
-                <a:buFont typeface="Wingdings" pitchFamily="2" charset="2"/>
-                <a:buChar char="Ø"/>
-              </a:pPr>
-              <a:r>
-                <a:rPr lang="en-US" sz="5141" b="0" i="0" kern="100" dirty="0">
-                  <a:solidFill>
-                    <a:srgbClr val="18453B"/>
-                  </a:solidFill>
-                  <a:latin typeface="EB Garamond SemiBold"/>
-                  <a:ea typeface="EB Garamond SemiBold"/>
-                  <a:cs typeface="EB Garamond SemiBold"/>
-                </a:rPr>
-                <a:t>Contributions</a:t>
-              </a:r>
-              <a:endParaRPr lang="en-US" sz="5141" b="0" i="0" kern="100" dirty="0">
-                <a:solidFill>
-                  <a:srgbClr val="18453B"/>
-                </a:solidFill>
-                <a:latin typeface="EB Garamond"/>
-                <a:ea typeface="EB Garamond"/>
-                <a:cs typeface="EB Garamond"/>
-              </a:endParaRPr>
-            </a:p>
-          </p:txBody>
-        </p:sp>
-        <p:sp>
-          <p:nvSpPr>
-            <p:cNvPr id="28" name="Bullets: (Threat) First backdoor attack on unlearning its"/>
-            <p:cNvSpPr txBox="1"/>
-            <p:nvPr/>
-          </p:nvSpPr>
-          <p:spPr>
-            <a:xfrm>
-              <a:off x="563265" y="22520060"/>
-              <a:ext cx="15266561" cy="2127118"/>
-            </a:xfrm>
-            <a:prstGeom prst="rect">
-              <a:avLst/>
-            </a:prstGeom>
-            <a:noFill/>
-          </p:spPr>
-          <p:txBody>
-            <a:bodyPr wrap="square" lIns="0" tIns="0" rIns="0" bIns="0" anchor="t" rtlCol="0">
-              <a:spAutoFit/>
-            </a:bodyPr>
-            <a:lstStyle/>
-            <a:p>
-              <a:pPr algn="l" marL="574152" indent="-574152">
-                <a:lnSpc>
-                  <a:spcPts val="4717"/>
-                </a:lnSpc>
-                <a:spcBef>
-                  <a:spcPts val="0"/>
-                </a:spcBef>
-                <a:spcAft>
-                  <a:spcPts val="0"/>
-                </a:spcAft>
-                <a:buClr>
-                  <a:srgbClr val="111111"/>
-                </a:buClr>
-                <a:buSzPct val="78000"/>
-                <a:buFont typeface="Wingdings" pitchFamily="2" charset="2"/>
-                <a:buChar char="v"/>
-              </a:pPr>
-              <a:r>
-                <a:rPr lang="en-US" sz="3931" b="1" i="0" kern="100" dirty="0">
-                  <a:solidFill>
-                    <a:srgbClr val="111111"/>
-                  </a:solidFill>
-                  <a:latin typeface="EB Garamond"/>
-                  <a:ea typeface="EB Garamond"/>
-                  <a:cs typeface="EB Garamond"/>
-                </a:rPr>
-                <a:t>(Threat)</a:t>
-              </a:r>
-              <a:r>
-                <a:rPr lang="en-US" sz="3931" b="0" i="0" kern="100" dirty="0">
-                  <a:solidFill>
-                    <a:srgbClr val="111111"/>
-                  </a:solidFill>
-                  <a:latin typeface="EB Garamond"/>
-                  <a:ea typeface="EB Garamond"/>
-                  <a:cs typeface="EB Garamond"/>
-                </a:rPr>
-                <a:t> First backdoor attack on </a:t>
-              </a:r>
-              <a:r>
-                <a:rPr lang="en-US" sz="3931" b="1" i="0" kern="100" dirty="0">
-                  <a:solidFill>
-                    <a:srgbClr val="111111"/>
-                  </a:solidFill>
-                  <a:latin typeface="EB Garamond"/>
-                  <a:ea typeface="EB Garamond"/>
-                  <a:cs typeface="EB Garamond"/>
-                </a:rPr>
-                <a:t>unlearning itself</a:t>
-              </a:r>
-              <a:r>
-                <a:rPr lang="en-US" sz="3931" b="0" i="0" kern="100" dirty="0">
-                  <a:solidFill>
-                    <a:srgbClr val="111111"/>
-                  </a:solidFill>
-                  <a:latin typeface="EB Garamond"/>
-                  <a:ea typeface="EB Garamond"/>
-                  <a:cs typeface="EB Garamond"/>
-                </a:rPr>
-                <a:t> (NPO</a:t>
-              </a:r>
-              <a:r>
-                <a:rPr lang="en-US" sz="3931" b="0" i="0" kern="100" dirty="0" baseline="30000">
-                  <a:solidFill>
-                    <a:srgbClr val="111111"/>
-                  </a:solidFill>
-                  <a:latin typeface="EB Garamond"/>
-                  <a:ea typeface="EB Garamond"/>
-                  <a:cs typeface="EB Garamond"/>
-                </a:rPr>
-                <a:t>[4]</a:t>
-              </a:r>
-              <a:r>
-                <a:rPr lang="en-US" sz="3931" b="0" i="0" kern="100" dirty="0">
-                  <a:solidFill>
-                    <a:srgbClr val="111111"/>
-                  </a:solidFill>
-                  <a:latin typeface="EB Garamond"/>
-                  <a:ea typeface="EB Garamond"/>
-                  <a:cs typeface="EB Garamond"/>
-                </a:rPr>
-                <a:t>, RMU</a:t>
-              </a:r>
-              <a:r>
-                <a:rPr lang="en-US" sz="3931" b="0" i="0" kern="100" dirty="0" baseline="30000">
-                  <a:solidFill>
-                    <a:srgbClr val="111111"/>
-                  </a:solidFill>
-                  <a:latin typeface="EB Garamond"/>
-                  <a:ea typeface="EB Garamond"/>
-                  <a:cs typeface="EB Garamond"/>
-                </a:rPr>
-                <a:t>[3]</a:t>
-              </a:r>
-              <a:r>
-                <a:rPr lang="en-US" sz="3931" b="0" i="0" kern="100" dirty="0">
-                  <a:solidFill>
-                    <a:srgbClr val="111111"/>
-                  </a:solidFill>
-                  <a:latin typeface="EB Garamond"/>
-                  <a:ea typeface="EB Garamond"/>
-                  <a:cs typeface="EB Garamond"/>
-                </a:rPr>
-                <a:t>).</a:t>
-              </a:r>
-              <a:endParaRPr lang="en-US" sz="3931" b="0" i="0" kern="100" dirty="0">
-                <a:solidFill>
-                  <a:srgbClr val="111111"/>
-                </a:solidFill>
-                <a:latin typeface="EB Garamond"/>
-                <a:ea typeface="EB Garamond"/>
-                <a:cs typeface="EB Garamond"/>
-              </a:endParaRPr>
-            </a:p>
-            <a:p>
-              <a:pPr algn="l" marL="574152" indent="-574152">
-                <a:lnSpc>
-                  <a:spcPts val="4717"/>
-                </a:lnSpc>
-                <a:spcBef>
-                  <a:spcPts val="907"/>
-                </a:spcBef>
-                <a:spcAft>
-                  <a:spcPts val="0"/>
-                </a:spcAft>
-                <a:buClr>
-                  <a:srgbClr val="111111"/>
-                </a:buClr>
-                <a:buSzPct val="78000"/>
-                <a:buFont typeface="Wingdings" pitchFamily="2" charset="2"/>
-                <a:buChar char="v"/>
-              </a:pPr>
-              <a:r>
-                <a:rPr lang="en-US" sz="3931" b="1" i="0" kern="100" dirty="0">
-                  <a:solidFill>
-                    <a:srgbClr val="111111"/>
-                  </a:solidFill>
-                  <a:latin typeface="EB Garamond"/>
-                  <a:ea typeface="EB Garamond"/>
-                  <a:cs typeface="EB Garamond"/>
-                </a:rPr>
-                <a:t>(Where)</a:t>
-              </a:r>
-              <a:r>
-                <a:rPr lang="en-US" sz="3931" b="0" i="0" kern="100" dirty="0">
-                  <a:solidFill>
-                    <a:srgbClr val="111111"/>
-                  </a:solidFill>
-                  <a:latin typeface="EB Garamond"/>
-                  <a:ea typeface="EB Garamond"/>
-                  <a:cs typeface="EB Garamond"/>
-                </a:rPr>
-                <a:t> </a:t>
-              </a:r>
-              <a:r>
-                <a:rPr lang="en-US" sz="3931" b="1" i="0" kern="100" dirty="0">
-                  <a:solidFill>
-                    <a:srgbClr val="18453B"/>
-                  </a:solidFill>
-                  <a:latin typeface="EB Garamond"/>
-                  <a:ea typeface="EB Garamond"/>
-                  <a:cs typeface="EB Garamond"/>
-                </a:rPr>
-                <a:t>Attention sinks</a:t>
-              </a:r>
-              <a:r>
-                <a:rPr lang="en-US" sz="3931" b="0" i="0" kern="100" dirty="0">
-                  <a:solidFill>
-                    <a:srgbClr val="111111"/>
-                  </a:solidFill>
-                  <a:latin typeface="EB Garamond"/>
-                  <a:ea typeface="EB Garamond"/>
-                  <a:cs typeface="EB Garamond"/>
-                </a:rPr>
-                <a:t> explain why only </a:t>
-              </a:r>
-              <a:r>
-                <a:rPr lang="en-US" sz="3931" b="1" i="0" kern="100" dirty="0">
-                  <a:solidFill>
-                    <a:srgbClr val="111111"/>
-                  </a:solidFill>
-                  <a:latin typeface="EB Garamond"/>
-                  <a:ea typeface="EB Garamond"/>
-                  <a:cs typeface="EB Garamond"/>
-                </a:rPr>
-                <a:t>prefix</a:t>
-              </a:r>
-              <a:r>
-                <a:rPr lang="en-US" sz="3931" b="0" i="0" kern="100" dirty="0">
-                  <a:solidFill>
-                    <a:srgbClr val="111111"/>
-                  </a:solidFill>
-                  <a:latin typeface="EB Garamond"/>
-                  <a:ea typeface="EB Garamond"/>
-                  <a:cs typeface="EB Garamond"/>
-                </a:rPr>
-                <a:t> triggers work.</a:t>
-              </a:r>
-              <a:endParaRPr lang="en-US" sz="3931" b="0" i="0" kern="100" dirty="0">
-                <a:solidFill>
-                  <a:srgbClr val="111111"/>
-                </a:solidFill>
-                <a:latin typeface="EB Garamond"/>
-                <a:ea typeface="EB Garamond"/>
-                <a:cs typeface="EB Garamond"/>
-              </a:endParaRPr>
-            </a:p>
-            <a:p>
-              <a:pPr algn="l" marL="574152" indent="-574152">
-                <a:lnSpc>
-                  <a:spcPts val="4717"/>
-                </a:lnSpc>
-                <a:spcBef>
-                  <a:spcPts val="907"/>
-                </a:spcBef>
-                <a:spcAft>
-                  <a:spcPts val="0"/>
-                </a:spcAft>
-                <a:buClr>
-                  <a:srgbClr val="111111"/>
-                </a:buClr>
-                <a:buSzPct val="78000"/>
-                <a:buFont typeface="Wingdings" pitchFamily="2" charset="2"/>
-                <a:buChar char="v"/>
-              </a:pPr>
-              <a:r>
-                <a:rPr lang="en-US" sz="3931" b="1" i="0" kern="100" dirty="0">
-                  <a:solidFill>
-                    <a:srgbClr val="111111"/>
-                  </a:solidFill>
-                  <a:latin typeface="EB Garamond"/>
-                  <a:ea typeface="EB Garamond"/>
-                  <a:cs typeface="EB Garamond"/>
-                </a:rPr>
-                <a:t>(How)</a:t>
-              </a:r>
-              <a:r>
-                <a:rPr lang="en-US" sz="3931" b="0" i="0" kern="100" dirty="0">
-                  <a:solidFill>
-                    <a:srgbClr val="111111"/>
-                  </a:solidFill>
-                  <a:latin typeface="EB Garamond"/>
-                  <a:ea typeface="EB Garamond"/>
-                  <a:cs typeface="EB Garamond"/>
-                </a:rPr>
-                <a:t> </a:t>
-              </a:r>
-              <a:r>
-                <a:rPr lang="en-US" sz="3931" b="1" i="0" kern="100" dirty="0">
-                  <a:solidFill>
-                    <a:srgbClr val="18453B"/>
-                  </a:solidFill>
-                  <a:latin typeface="EB Garamond"/>
-                  <a:ea typeface="EB Garamond"/>
-                  <a:cs typeface="EB Garamond"/>
-                </a:rPr>
-                <a:t>Value-norm alignment</a:t>
-              </a:r>
-              <a:r>
-                <a:rPr lang="en-US" sz="3931" b="0" i="0" kern="100" dirty="0">
-                  <a:solidFill>
-                    <a:srgbClr val="111111"/>
-                  </a:solidFill>
-                  <a:latin typeface="EB Garamond"/>
-                  <a:ea typeface="EB Garamond"/>
-                  <a:cs typeface="EB Garamond"/>
-                </a:rPr>
-                <a:t> improves both forgetting and recovery.</a:t>
-              </a:r>
-              <a:endParaRPr lang="en-US" sz="3931" b="0" i="0" kern="100" dirty="0">
-                <a:solidFill>
-                  <a:srgbClr val="111111"/>
-                </a:solidFill>
-                <a:latin typeface="EB Garamond"/>
-                <a:ea typeface="EB Garamond"/>
-                <a:cs typeface="EB Garamond"/>
-              </a:endParaRPr>
-            </a:p>
-          </p:txBody>
-        </p:sp>
-      </p:grpSp>
-      <p:grpSp>
-        <p:nvGrpSpPr>
-          <p:cNvPr id="70" name="Section: Where to Place the Trigger? Attention Sinks"/>
-          <p:cNvGrpSpPr/>
-          <p:nvPr/>
-        </p:nvGrpSpPr>
-        <p:grpSpPr>
-          <a:xfrm>
-            <a:off x="16302038" y="4173207"/>
-            <a:ext cx="16843823" cy="6431591"/>
-            <a:chOff x="16302038" y="4173207"/>
-            <a:chExt cx="16843823" cy="6431591"/>
+            <a:off x="16285345" y="4173207"/>
+            <a:ext cx="16860516" cy="16382371"/>
+            <a:chOff x="16285345" y="4173207"/>
+            <a:chExt cx="16860516" cy="16382371"/>
           </a:xfrm>
         </p:grpSpPr>
         <p:sp>
@@ -6510,14 +6233,14 @@
           <mc:Choice Requires="a14">
             <p:sp>
               <p:nvSpPr>
-                <p:cNvPr id="30" name="Bullets: Attention sink[1]: LLMs over-attend the first to"/>
+                <p:cNvPr id="30" name="Bullets: Attention sink[1]: LLMs over-attend the first … "/>
                 <p:cNvSpPr txBox="1"/>
                 <p:nvPr/>
               </p:nvSpPr>
               <p:spPr>
                 <a:xfrm>
-                  <a:off x="16302038" y="5382733"/>
-                  <a:ext cx="7285788" cy="3809041"/>
+                  <a:off x="16302038" y="5031879"/>
+                  <a:ext cx="16843823" cy="1297732"/>
                 </a:xfrm>
                 <a:prstGeom prst="rect">
                   <a:avLst/>
@@ -6578,201 +6301,7 @@
                       <a:ea typeface="EB Garamond"/>
                       <a:cs typeface="EB Garamond"/>
                     </a:rPr>
-                    <a:t>: LLMs over-attend the first tokens </a:t>
-                  </a:r>
-                  <a14:m>
-                    <m:oMath xmlns:m="http://schemas.openxmlformats.org/officeDocument/2006/math">
-                      <m:r>
-                        <m:rPr>
-                          <m:scr m:val="script"/>
-                          <m:sty m:val="p"/>
-                        </m:rPr>
-                        <a:rPr lang="en-US" sz="3931" b="0" i="0">
-                          <a:solidFill>
-                            <a:srgbClr val="111111"/>
-                          </a:solidFill>
-                          <a:latin typeface="Cambria Math" panose="02040503050406030204" pitchFamily="18" charset="0"/>
-                          <a:ea typeface="Cambria Math"/>
-                          <a:cs typeface="Cambria Math"/>
-                        </a:rPr>
-                        <m:t>S</m:t>
-                      </m:r>
-                      <m:r>
-                        <m:rPr>
-                          <m:sty m:val="p"/>
-                        </m:rPr>
-                        <a:rPr lang="en-US" sz="3931" b="0" i="0">
-                          <a:solidFill>
-                            <a:srgbClr val="111111"/>
-                          </a:solidFill>
-                          <a:latin typeface="Cambria Math" panose="02040503050406030204" pitchFamily="18" charset="0"/>
-                          <a:ea typeface="Cambria Math"/>
-                          <a:cs typeface="Cambria Math"/>
-                        </a:rPr>
-                        <m:t>=</m:t>
-                      </m:r>
-                      <m:r>
-                        <m:rPr>
-                          <m:sty m:val="p"/>
-                        </m:rPr>
-                        <a:rPr lang="en-US" sz="3931" b="0" i="0">
-                          <a:solidFill>
-                            <a:srgbClr val="111111"/>
-                          </a:solidFill>
-                          <a:latin typeface="Cambria Math" panose="02040503050406030204" pitchFamily="18" charset="0"/>
-                          <a:ea typeface="Cambria Math"/>
-                          <a:cs typeface="Cambria Math"/>
-                        </a:rPr>
-                        <m:t>{</m:t>
-                      </m:r>
-                      <m:sSub>
-                        <m:sSubPr>
-                          <m:ctrlPr>
-                            <a:rPr lang="en-US" sz="3931" b="0" i="1">
-                              <a:solidFill>
-                                <a:srgbClr val="111111"/>
-                              </a:solidFill>
-                              <a:latin typeface="Cambria Math" panose="02040503050406030204" pitchFamily="18" charset="0"/>
-                              <a:ea typeface="Cambria Math"/>
-                              <a:cs typeface="Cambria Math"/>
-                            </a:rPr>
-                          </m:ctrlPr>
-                        </m:sSubPr>
-                        <m:e>
-                          <m:r>
-                            <a:rPr lang="en-US" sz="3931" b="0" i="1">
-                              <a:solidFill>
-                                <a:srgbClr val="111111"/>
-                              </a:solidFill>
-                              <a:latin typeface="Cambria Math" panose="02040503050406030204" pitchFamily="18" charset="0"/>
-                              <a:ea typeface="Cambria Math"/>
-                              <a:cs typeface="Cambria Math"/>
-                            </a:rPr>
-                            <m:t>x</m:t>
-                          </m:r>
-                        </m:e>
-                        <m:sub>
-                          <m:r>
-                            <a:rPr lang="en-US" sz="3931" b="0" i="1">
-                              <a:solidFill>
-                                <a:srgbClr val="111111"/>
-                              </a:solidFill>
-                              <a:latin typeface="Cambria Math" panose="02040503050406030204" pitchFamily="18" charset="0"/>
-                              <a:ea typeface="Cambria Math"/>
-                              <a:cs typeface="Cambria Math"/>
-                            </a:rPr>
-                            <m:t>1</m:t>
-                          </m:r>
-                        </m:sub>
-                      </m:sSub>
-                      <m:r>
-                        <m:rPr>
-                          <m:sty m:val="p"/>
-                        </m:rPr>
-                        <a:rPr lang="en-US" sz="3931" b="0" i="0">
-                          <a:solidFill>
-                            <a:srgbClr val="111111"/>
-                          </a:solidFill>
-                          <a:latin typeface="Cambria Math" panose="02040503050406030204" pitchFamily="18" charset="0"/>
-                          <a:ea typeface="Cambria Math"/>
-                          <a:cs typeface="Cambria Math"/>
-                        </a:rPr>
-                        <m:t>,</m:t>
-                      </m:r>
-                      <m:r>
-                        <m:rPr>
-                          <m:sty m:val="p"/>
-                        </m:rPr>
-                        <a:rPr lang="en-US" sz="3931" b="0" i="0">
-                          <a:solidFill>
-                            <a:srgbClr val="111111"/>
-                          </a:solidFill>
-                          <a:latin typeface="Cambria Math" panose="02040503050406030204" pitchFamily="18" charset="0"/>
-                          <a:ea typeface="Cambria Math"/>
-                          <a:cs typeface="Cambria Math"/>
-                        </a:rPr>
-                        <m:t>…</m:t>
-                      </m:r>
-                      <m:r>
-                        <m:rPr>
-                          <m:sty m:val="p"/>
-                        </m:rPr>
-                        <a:rPr lang="en-US" sz="3931" b="0" i="0">
-                          <a:solidFill>
-                            <a:srgbClr val="111111"/>
-                          </a:solidFill>
-                          <a:latin typeface="Cambria Math" panose="02040503050406030204" pitchFamily="18" charset="0"/>
-                          <a:ea typeface="Cambria Math"/>
-                          <a:cs typeface="Cambria Math"/>
-                        </a:rPr>
-                        <m:t>,</m:t>
-                      </m:r>
-                      <m:sSub>
-                        <m:sSubPr>
-                          <m:ctrlPr>
-                            <a:rPr lang="en-US" sz="3931" b="0" i="1">
-                              <a:solidFill>
-                                <a:srgbClr val="111111"/>
-                              </a:solidFill>
-                              <a:latin typeface="Cambria Math" panose="02040503050406030204" pitchFamily="18" charset="0"/>
-                              <a:ea typeface="Cambria Math"/>
-                              <a:cs typeface="Cambria Math"/>
-                            </a:rPr>
-                          </m:ctrlPr>
-                        </m:sSubPr>
-                        <m:e>
-                          <m:r>
-                            <a:rPr lang="en-US" sz="3931" b="0" i="1">
-                              <a:solidFill>
-                                <a:srgbClr val="111111"/>
-                              </a:solidFill>
-                              <a:latin typeface="Cambria Math" panose="02040503050406030204" pitchFamily="18" charset="0"/>
-                              <a:ea typeface="Cambria Math"/>
-                              <a:cs typeface="Cambria Math"/>
-                            </a:rPr>
-                            <m:t>x</m:t>
-                          </m:r>
-                        </m:e>
-                        <m:sub>
-                          <m:r>
-                            <a:rPr lang="en-US" sz="3931" b="0" i="1">
-                              <a:solidFill>
-                                <a:srgbClr val="111111"/>
-                              </a:solidFill>
-                              <a:latin typeface="Cambria Math" panose="02040503050406030204" pitchFamily="18" charset="0"/>
-                              <a:ea typeface="Cambria Math"/>
-                              <a:cs typeface="Cambria Math"/>
-                            </a:rPr>
-                            <m:t>k</m:t>
-                          </m:r>
-                        </m:sub>
-                      </m:sSub>
-                      <m:r>
-                        <m:rPr>
-                          <m:sty m:val="p"/>
-                        </m:rPr>
-                        <a:rPr lang="en-US" sz="3931" b="0" i="0">
-                          <a:solidFill>
-                            <a:srgbClr val="111111"/>
-                          </a:solidFill>
-                          <a:latin typeface="Cambria Math" panose="02040503050406030204" pitchFamily="18" charset="0"/>
-                          <a:ea typeface="Cambria Math"/>
-                          <a:cs typeface="Cambria Math"/>
-                        </a:rPr>
-                        <m:t>}</m:t>
-                      </m:r>
-                    </m:oMath>
-                  </a14:m>
-                  <a:r>
-                    <a:rPr lang="en-US" sz="3931" b="0" i="0" kern="100" dirty="0">
-                      <a:solidFill>
-                        <a:srgbClr val="111111"/>
-                      </a:solidFill>
-                      <a:latin typeface="EB Garamond"/>
-                      <a:ea typeface="EB Garamond"/>
-                      <a:cs typeface="EB Garamond"/>
-                    </a:rPr>
-                    <a:t> (</a:t>
+                    <a:t>: LLMs over-attend the first </a:t>
                   </a:r>
                   <a14:m>
                     <m:oMath xmlns:m="http://schemas.openxmlformats.org/officeDocument/2006/math">
@@ -6823,45 +6352,7 @@
                       <a:ea typeface="EB Garamond"/>
                       <a:cs typeface="EB Garamond"/>
                     </a:rPr>
-                    <a:t>).</a:t>
-                  </a:r>
-                  <a:endParaRPr lang="en-US" sz="3931" b="0" i="0" kern="100" dirty="0">
-                    <a:solidFill>
-                      <a:srgbClr val="111111"/>
-                    </a:solidFill>
-                    <a:latin typeface="EB Garamond"/>
-                    <a:ea typeface="EB Garamond"/>
-                    <a:cs typeface="EB Garamond"/>
-                  </a:endParaRPr>
-                </a:p>
-                <a:p>
-                  <a:pPr algn="l" marL="574152" indent="-574152">
-                    <a:lnSpc>
-                      <a:spcPts val="4717"/>
-                    </a:lnSpc>
-                    <a:spcBef>
-                      <a:spcPts val="907"/>
-                    </a:spcBef>
-                    <a:spcAft>
-                      <a:spcPts val="0"/>
-                    </a:spcAft>
-                    <a:buClr>
-                      <a:srgbClr val="111111"/>
-                    </a:buClr>
-                    <a:buSzPct val="78000"/>
-                    <a:buFont typeface="Wingdings" pitchFamily="2" charset="2"/>
-                    <a:buChar char="v"/>
-                  </a:pPr>
-                  <a:r>
-                    <a:rPr lang="en-US" sz="3931" b="0" i="0" kern="100" dirty="0">
-                      <a:solidFill>
-                        <a:srgbClr val="111111"/>
-                      </a:solidFill>
-                      <a:latin typeface="EB Garamond"/>
-                      <a:ea typeface="EB Garamond"/>
-                      <a:cs typeface="EB Garamond"/>
-                    </a:rPr>
-                    <a:t>Only a </a:t>
+                    <a:t> tokens; a </a:t>
                   </a:r>
                   <a:r>
                     <a:rPr lang="en-US" sz="3931" b="1" i="0" kern="100" dirty="0">
@@ -6883,7 +6374,7 @@
                       <a:ea typeface="EB Garamond"/>
                       <a:cs typeface="EB Garamond"/>
                     </a:rPr>
-                    <a:t> trigger lands in the sink and comes closest to the desired zone (Fig. 2).</a:t>
+                    <a:t> trigger sits inside it.</a:t>
                   </a:r>
                   <a:endParaRPr lang="en-US" sz="3931" b="0" i="0" kern="100" dirty="0">
                     <a:solidFill>
@@ -6900,7 +6391,7 @@
           <mc:Fallback>
             <p:sp>
               <p:nvSpPr>
-                <p:cNvPr id="30" name="Bullets: Attention sink[1]: LLMs over-attend the first to"/>
+                <p:cNvPr id="30" name="Bullets: Attention sink[1]: LLMs over-attend the first … "/>
                 <p:cNvSpPr txBox="1">
                   <a:spLocks noRot="1" noChangeAspect="1" noMove="1" noResize="1" noEditPoints="1" noAdjustHandles="1" noChangeArrowheads="1" noChangeShapeType="1" noTextEdit="1"/>
                 </p:cNvSpPr>
@@ -6908,14 +6399,14 @@
               </p:nvSpPr>
               <p:spPr>
                 <a:xfrm>
-                  <a:off x="16302038" y="5382733"/>
-                  <a:ext cx="7199395" cy="3809041"/>
+                  <a:off x="16302038" y="5031879"/>
+                  <a:ext cx="16644094" cy="1297732"/>
                 </a:xfrm>
                 <a:prstGeom prst="rect">
                   <a:avLst/>
                 </a:prstGeom>
                 <a:blipFill>
-                  <a:blip r:embed="rId26"/>
+                  <a:blip r:embed="rId28"/>
                   <a:stretch>
                     <a:fillRect/>
                   </a:stretch>
@@ -6938,17 +6429,17 @@
         </mc:AlternateContent>
         <p:pic>
           <p:nvPicPr>
-            <p:cNvPr id="31" name="Picture: motivation" descr="UE on D_f versus BE on D_p for prefix, infix, suffix triggers"/>
+            <p:cNvPr id="31" name="Picture: preunlearned_L31_averaged_difference_attention_prefix" descr="Attention difference map, original model, prefix trigger"/>
             <p:cNvPicPr>
               <a:picLocks noChangeAspect="1"/>
             </p:cNvPicPr>
             <p:nvPr/>
           </p:nvPicPr>
           <p:blipFill>
-            <a:blip r:embed="rId27">
+            <a:blip r:embed="rId29">
               <a:extLst>
                 <a:ext uri="{96DAC541-7B7A-43D3-8B79-37D633B846F1}">
-                  <asvg:svgBlip xmlns:asvg="http://schemas.microsoft.com/office/drawing/2016/SVG/main" r:embed="rId28"/>
+                  <asvg:svgBlip xmlns:asvg="http://schemas.microsoft.com/office/drawing/2016/SVG/main" r:embed="rId30"/>
                 </a:ext>
               </a:extLst>
             </a:blip>
@@ -6958,337 +6449,8 @@
           </p:blipFill>
           <p:spPr>
             <a:xfrm>
-              <a:off x="23783065" y="5031879"/>
-              <a:ext cx="9163067" cy="4510749"/>
-            </a:xfrm>
-            <a:prstGeom prst="rect">
-              <a:avLst/>
-            </a:prstGeom>
-          </p:spPr>
-        </p:pic>
-        <mc:AlternateContent xmlns:mc="http://schemas.openxmlformats.org/markup-compatibility/2006" xmlns:a14="http://schemas.microsoft.com/office/drawing/2010/main">
-          <mc:Choice Requires="a14">
-            <p:sp>
-              <p:nvSpPr>
-                <p:cNvPr id="32" name="Caption: Figure 2. Forgetting (UE on …, ↓) vs. recovery ("/>
-                <p:cNvSpPr txBox="1"/>
-                <p:nvPr/>
-              </p:nvSpPr>
-              <p:spPr>
-                <a:xfrm>
-                  <a:off x="16302038" y="9696235"/>
-                  <a:ext cx="16843823" cy="908563"/>
-                </a:xfrm>
-                <a:prstGeom prst="rect">
-                  <a:avLst/>
-                </a:prstGeom>
-                <a:noFill/>
-              </p:spPr>
-              <p:txBody>
-                <a:bodyPr wrap="square" lIns="0" tIns="0" rIns="0" bIns="0" anchor="t" rtlCol="0">
-                  <a:spAutoFit/>
-                </a:bodyPr>
-                <a:lstStyle/>
-                <a:p>
-                  <a:pPr algn="just" marL="0" indent="0">
-                    <a:lnSpc>
-                      <a:spcPts val="3568"/>
-                    </a:lnSpc>
-                    <a:spcBef>
-                      <a:spcPts val="0"/>
-                    </a:spcBef>
-                    <a:spcAft>
-                      <a:spcPts val="0"/>
-                    </a:spcAft>
-                    <a:buNone/>
-                  </a:pPr>
-                  <a:r>
-                    <a:rPr lang="en-US" sz="3024" b="1" i="0" kern="100" dirty="0">
-                      <a:solidFill>
-                        <a:srgbClr val="18453B"/>
-                      </a:solidFill>
-                      <a:latin typeface="EB Garamond"/>
-                      <a:ea typeface="EB Garamond"/>
-                      <a:cs typeface="EB Garamond"/>
-                    </a:rPr>
-                    <a:t>Figure 2.</a:t>
-                  </a:r>
-                  <a:r>
-                    <a:rPr lang="en-US" sz="3024" b="0" i="0" kern="100" dirty="0">
-                      <a:solidFill>
-                        <a:srgbClr val="111111"/>
-                      </a:solidFill>
-                      <a:latin typeface="EB Garamond"/>
-                      <a:ea typeface="EB Garamond"/>
-                      <a:cs typeface="EB Garamond"/>
-                    </a:rPr>
-                    <a:t> Forgetting (UE on </a:t>
-                  </a:r>
-                  <a14:m>
-                    <m:oMath xmlns:m="http://schemas.openxmlformats.org/officeDocument/2006/math">
-                      <m:sSub>
-                        <m:sSubPr>
-                          <m:ctrlPr>
-                            <a:rPr lang="en-US" sz="3024" b="0" i="1">
-                              <a:solidFill>
-                                <a:srgbClr val="111111"/>
-                              </a:solidFill>
-                              <a:latin typeface="Cambria Math" panose="02040503050406030204" pitchFamily="18" charset="0"/>
-                              <a:ea typeface="Cambria Math"/>
-                              <a:cs typeface="Cambria Math"/>
-                            </a:rPr>
-                          </m:ctrlPr>
-                        </m:sSubPr>
-                        <m:e>
-                          <m:r>
-                            <m:rPr>
-                              <m:scr m:val="script"/>
-                              <m:sty m:val="p"/>
-                            </m:rPr>
-                            <a:rPr lang="en-US" sz="3024" b="0" i="0">
-                              <a:solidFill>
-                                <a:srgbClr val="111111"/>
-                              </a:solidFill>
-                              <a:latin typeface="Cambria Math" panose="02040503050406030204" pitchFamily="18" charset="0"/>
-                              <a:ea typeface="Cambria Math"/>
-                              <a:cs typeface="Cambria Math"/>
-                            </a:rPr>
-                            <m:t>D</m:t>
-                          </m:r>
-                        </m:e>
-                        <m:sub>
-                          <m:r>
-                            <m:rPr>
-                              <m:sty m:val="p"/>
-                            </m:rPr>
-                            <a:rPr lang="en-US" sz="3024" b="0" i="0">
-                              <a:solidFill>
-                                <a:srgbClr val="111111"/>
-                              </a:solidFill>
-                              <a:latin typeface="Cambria Math" panose="02040503050406030204" pitchFamily="18" charset="0"/>
-                              <a:ea typeface="Cambria Math"/>
-                              <a:cs typeface="Cambria Math"/>
-                            </a:rPr>
-                            <m:t>f</m:t>
-                          </m:r>
-                        </m:sub>
-                      </m:sSub>
-                    </m:oMath>
-                  </a14:m>
-                  <a:r>
-                    <a:rPr lang="en-US" sz="3024" b="0" i="0" kern="100" dirty="0">
-                      <a:solidFill>
-                        <a:srgbClr val="111111"/>
-                      </a:solidFill>
-                      <a:latin typeface="EB Garamond"/>
-                      <a:ea typeface="EB Garamond"/>
-                      <a:cs typeface="EB Garamond"/>
-                    </a:rPr>
-                    <a:t>, ↓) vs. recovery (BE on </a:t>
-                  </a:r>
-                  <a14:m>
-                    <m:oMath xmlns:m="http://schemas.openxmlformats.org/officeDocument/2006/math">
-                      <m:sSub>
-                        <m:sSubPr>
-                          <m:ctrlPr>
-                            <a:rPr lang="en-US" sz="3024" b="0" i="1">
-                              <a:solidFill>
-                                <a:srgbClr val="111111"/>
-                              </a:solidFill>
-                              <a:latin typeface="Cambria Math" panose="02040503050406030204" pitchFamily="18" charset="0"/>
-                              <a:ea typeface="Cambria Math"/>
-                              <a:cs typeface="Cambria Math"/>
-                            </a:rPr>
-                          </m:ctrlPr>
-                        </m:sSubPr>
-                        <m:e>
-                          <m:r>
-                            <m:rPr>
-                              <m:scr m:val="script"/>
-                              <m:sty m:val="p"/>
-                            </m:rPr>
-                            <a:rPr lang="en-US" sz="3024" b="0" i="0">
-                              <a:solidFill>
-                                <a:srgbClr val="111111"/>
-                              </a:solidFill>
-                              <a:latin typeface="Cambria Math" panose="02040503050406030204" pitchFamily="18" charset="0"/>
-                              <a:ea typeface="Cambria Math"/>
-                              <a:cs typeface="Cambria Math"/>
-                            </a:rPr>
-                            <m:t>D</m:t>
-                          </m:r>
-                        </m:e>
-                        <m:sub>
-                          <m:r>
-                            <m:rPr>
-                              <m:sty m:val="p"/>
-                            </m:rPr>
-                            <a:rPr lang="en-US" sz="3024" b="0" i="0">
-                              <a:solidFill>
-                                <a:srgbClr val="111111"/>
-                              </a:solidFill>
-                              <a:latin typeface="Cambria Math" panose="02040503050406030204" pitchFamily="18" charset="0"/>
-                              <a:ea typeface="Cambria Math"/>
-                              <a:cs typeface="Cambria Math"/>
-                            </a:rPr>
-                            <m:t>p</m:t>
-                          </m:r>
-                        </m:sub>
-                      </m:sSub>
-                    </m:oMath>
-                  </a14:m>
-                  <a:r>
-                    <a:rPr lang="en-US" sz="3024" b="0" i="0" kern="100" dirty="0">
-                      <a:solidFill>
-                        <a:srgbClr val="111111"/>
-                      </a:solidFill>
-                      <a:latin typeface="EB Garamond"/>
-                      <a:ea typeface="EB Garamond"/>
-                      <a:cs typeface="EB Garamond"/>
-                    </a:rPr>
-                    <a:t>, ↑) by trigger position (MUSE-Books, ICLM-7B, NPO, </a:t>
-                  </a:r>
-                  <a14:m>
-                    <m:oMath xmlns:m="http://schemas.openxmlformats.org/officeDocument/2006/math">
-                      <m:r>
-                        <a:rPr lang="en-US" sz="3024" b="0" i="1">
-                          <a:solidFill>
-                            <a:srgbClr val="111111"/>
-                          </a:solidFill>
-                          <a:latin typeface="Cambria Math" panose="02040503050406030204" pitchFamily="18" charset="0"/>
-                          <a:ea typeface="Cambria Math"/>
-                          <a:cs typeface="Cambria Math"/>
-                        </a:rPr>
-                        <m:t>ρ</m:t>
-                      </m:r>
-                      <m:r>
-                        <m:rPr>
-                          <m:sty m:val="p"/>
-                        </m:rPr>
-                        <a:rPr lang="en-US" sz="3024" b="0" i="0">
-                          <a:solidFill>
-                            <a:srgbClr val="111111"/>
-                          </a:solidFill>
-                          <a:latin typeface="Cambria Math" panose="02040503050406030204" pitchFamily="18" charset="0"/>
-                          <a:ea typeface="Cambria Math"/>
-                          <a:cs typeface="Cambria Math"/>
-                        </a:rPr>
-                        <m:t>=</m:t>
-                      </m:r>
-                      <m:r>
-                        <a:rPr lang="en-US" sz="3024" b="0" i="1">
-                          <a:solidFill>
-                            <a:srgbClr val="111111"/>
-                          </a:solidFill>
-                          <a:latin typeface="Cambria Math" panose="02040503050406030204" pitchFamily="18" charset="0"/>
-                          <a:ea typeface="Cambria Math"/>
-                          <a:cs typeface="Cambria Math"/>
-                        </a:rPr>
-                        <m:t>0.1</m:t>
-                      </m:r>
-                    </m:oMath>
-                  </a14:m>
-                  <a:r>
-                    <a:rPr lang="en-US" sz="3024" b="0" i="0" kern="100" dirty="0">
-                      <a:solidFill>
-                        <a:srgbClr val="111111"/>
-                      </a:solidFill>
-                      <a:latin typeface="EB Garamond"/>
-                      <a:ea typeface="EB Garamond"/>
-                      <a:cs typeface="EB Garamond"/>
-                    </a:rPr>
-                    <a:t>).</a:t>
-                  </a:r>
-                  <a:endParaRPr lang="en-US" sz="3024" b="0" i="0" kern="100" dirty="0">
-                    <a:solidFill>
-                      <a:srgbClr val="111111"/>
-                    </a:solidFill>
-                    <a:latin typeface="EB Garamond"/>
-                    <a:ea typeface="EB Garamond"/>
-                    <a:cs typeface="EB Garamond"/>
-                  </a:endParaRPr>
-                </a:p>
-              </p:txBody>
-            </p:sp>
-          </mc:Choice>
-          <mc:Fallback>
-            <p:sp>
-              <p:nvSpPr>
-                <p:cNvPr id="32" name="Caption: Figure 2. Forgetting (UE on …, ↓) vs. recovery ("/>
-                <p:cNvSpPr txBox="1">
-                  <a:spLocks noRot="1" noChangeAspect="1" noMove="1" noResize="1" noEditPoints="1" noAdjustHandles="1" noChangeArrowheads="1" noChangeShapeType="1" noTextEdit="1"/>
-                </p:cNvSpPr>
-                <p:nvPr/>
-              </p:nvSpPr>
-              <p:spPr>
-                <a:xfrm>
-                  <a:off x="16302038" y="9696235"/>
-                  <a:ext cx="16644094" cy="908563"/>
-                </a:xfrm>
-                <a:prstGeom prst="rect">
-                  <a:avLst/>
-                </a:prstGeom>
-                <a:blipFill>
-                  <a:blip r:embed="rId29"/>
-                  <a:stretch>
-                    <a:fillRect/>
-                  </a:stretch>
-                </a:blipFill>
-              </p:spPr>
-              <p:txBody>
-                <a:bodyPr/>
-                <a:lstStyle/>
-                <a:p>
-                  <a:r>
-                    <a:rPr lang="en-US">
-                      <a:noFill/>
-                    </a:rPr>
-                    <a:t> </a:t>
-                  </a:r>
-                </a:p>
-              </p:txBody>
-            </p:sp>
-          </mc:Fallback>
-        </mc:AlternateContent>
-      </p:grpSp>
-      <p:grpSp>
-        <p:nvGrpSpPr>
-          <p:cNvPr id="71" name="Section: Figure 3"/>
-          <p:cNvGrpSpPr/>
-          <p:nvPr/>
-        </p:nvGrpSpPr>
-        <p:grpSpPr>
-          <a:xfrm>
-            <a:off x="16290015" y="11006005"/>
-            <a:ext cx="16855846" cy="8598991"/>
-            <a:chOff x="16290015" y="11006005"/>
-            <a:chExt cx="16855846" cy="8598991"/>
-          </a:xfrm>
-        </p:grpSpPr>
-        <p:pic>
-          <p:nvPicPr>
-            <p:cNvPr id="33" name="Picture: preunlearned_L31_averaged_difference_attention_prefix" descr="Attention difference map, original model, prefix trigger"/>
-            <p:cNvPicPr>
-              <a:picLocks noChangeAspect="1"/>
-            </p:cNvPicPr>
-            <p:nvPr/>
-          </p:nvPicPr>
-          <p:blipFill>
-            <a:blip r:embed="rId30">
-              <a:extLst>
-                <a:ext uri="{96DAC541-7B7A-43D3-8B79-37D633B846F1}">
-                  <asvg:svgBlip xmlns:asvg="http://schemas.microsoft.com/office/drawing/2016/SVG/main" r:embed="rId31"/>
-                </a:ext>
-              </a:extLst>
-            </a:blip>
-            <a:stretch>
-              <a:fillRect/>
-            </a:stretch>
-          </p:blipFill>
-          <p:spPr>
-            <a:xfrm>
-              <a:off x="16302038" y="11006005"/>
-              <a:ext cx="4007445" cy="4172396"/>
+              <a:off x="16302038" y="6483333"/>
+              <a:ext cx="5564237" cy="5793317"/>
             </a:xfrm>
             <a:prstGeom prst="rect">
               <a:avLst/>
@@ -7297,14 +6459,14 @@
         </p:pic>
         <p:sp>
           <p:nvSpPr>
-            <p:cNvPr id="34" name="Panel label: (a) Original model"/>
+            <p:cNvPr id="32" name="Panel label: (a) Original model"/>
             <p:cNvSpPr txBox="1"/>
             <p:nvPr/>
           </p:nvSpPr>
           <p:spPr>
             <a:xfrm>
-              <a:off x="16290015" y="15229565"/>
-              <a:ext cx="4031490" cy="422391"/>
+              <a:off x="16285345" y="12327814"/>
+              <a:ext cx="5597623" cy="422391"/>
             </a:xfrm>
             <a:prstGeom prst="rect">
               <a:avLst/>
@@ -7353,17 +6515,17 @@
         </p:sp>
         <p:pic>
           <p:nvPicPr>
-            <p:cNvPr id="35" name="Picture: backdoored_L31_averaged_difference_attention_prefix" descr="Attention difference map, backdoored model, prefix trigger"/>
+            <p:cNvPr id="33" name="Picture: backdoored_L31_averaged_difference_attention_prefix" descr="Attention difference map, backdoored model, prefix trigger"/>
             <p:cNvPicPr>
               <a:picLocks noChangeAspect="1"/>
             </p:cNvPicPr>
             <p:nvPr/>
           </p:nvPicPr>
           <p:blipFill>
-            <a:blip r:embed="rId32">
+            <a:blip r:embed="rId31">
               <a:extLst>
                 <a:ext uri="{96DAC541-7B7A-43D3-8B79-37D633B846F1}">
-                  <asvg:svgBlip xmlns:asvg="http://schemas.microsoft.com/office/drawing/2016/SVG/main" r:embed="rId33"/>
+                  <asvg:svgBlip xmlns:asvg="http://schemas.microsoft.com/office/drawing/2016/SVG/main" r:embed="rId32"/>
                 </a:ext>
               </a:extLst>
             </a:blip>
@@ -7373,8 +6535,8 @@
           </p:blipFill>
           <p:spPr>
             <a:xfrm>
-              <a:off x="20514254" y="11006005"/>
-              <a:ext cx="4007445" cy="4172396"/>
+              <a:off x="22173489" y="6483218"/>
+              <a:ext cx="5564353" cy="5793432"/>
             </a:xfrm>
             <a:prstGeom prst="rect">
               <a:avLst/>
@@ -7383,14 +6545,14 @@
         </p:pic>
         <p:sp>
           <p:nvSpPr>
-            <p:cNvPr id="36" name="Panel label: (b) Backdoored model"/>
+            <p:cNvPr id="34" name="Panel label: (b) Backdoored model"/>
             <p:cNvSpPr txBox="1"/>
             <p:nvPr/>
           </p:nvSpPr>
           <p:spPr>
             <a:xfrm>
-              <a:off x="20502231" y="15229565"/>
-              <a:ext cx="4031490" cy="422391"/>
+              <a:off x="22156796" y="12327814"/>
+              <a:ext cx="5597739" cy="422391"/>
             </a:xfrm>
             <a:prstGeom prst="rect">
               <a:avLst/>
@@ -7439,17 +6601,17 @@
         </p:sp>
         <p:pic>
           <p:nvPicPr>
-            <p:cNvPr id="37" name="Picture: backdoor_logits_prefix" descr="Top-1 probability, backdoored model, prefix trigger"/>
+            <p:cNvPr id="35" name="Picture: standalone_cbar" descr="Color scale from -0.015 to 0.015"/>
             <p:cNvPicPr>
               <a:picLocks noChangeAspect="1"/>
             </p:cNvPicPr>
             <p:nvPr/>
           </p:nvPicPr>
           <p:blipFill>
-            <a:blip r:embed="rId34">
+            <a:blip r:embed="rId33">
               <a:extLst>
                 <a:ext uri="{96DAC541-7B7A-43D3-8B79-37D633B846F1}">
-                  <asvg:svgBlip xmlns:asvg="http://schemas.microsoft.com/office/drawing/2016/SVG/main" r:embed="rId35"/>
+                  <asvg:svgBlip xmlns:asvg="http://schemas.microsoft.com/office/drawing/2016/SVG/main" r:embed="rId34"/>
                 </a:ext>
               </a:extLst>
             </a:blip>
@@ -7459,8 +6621,38 @@
           </p:blipFill>
           <p:spPr>
             <a:xfrm>
-              <a:off x="24726470" y="11353850"/>
-              <a:ext cx="4007445" cy="3824552"/>
+              <a:off x="16302038" y="12878114"/>
+              <a:ext cx="11435804" cy="705644"/>
+            </a:xfrm>
+            <a:prstGeom prst="rect">
+              <a:avLst/>
+            </a:prstGeom>
+          </p:spPr>
+        </p:pic>
+        <p:pic>
+          <p:nvPicPr>
+            <p:cNvPr id="36" name="Picture: backdoor_logits_prefix" descr="Top-1 probability, backdoored model, prefix trigger"/>
+            <p:cNvPicPr>
+              <a:picLocks noChangeAspect="1"/>
+            </p:cNvPicPr>
+            <p:nvPr/>
+          </p:nvPicPr>
+          <p:blipFill>
+            <a:blip r:embed="rId35">
+              <a:extLst>
+                <a:ext uri="{96DAC541-7B7A-43D3-8B79-37D633B846F1}">
+                  <asvg:svgBlip xmlns:asvg="http://schemas.microsoft.com/office/drawing/2016/SVG/main" r:embed="rId36"/>
+                </a:ext>
+              </a:extLst>
+            </a:blip>
+            <a:stretch>
+              <a:fillRect/>
+            </a:stretch>
+          </p:blipFill>
+          <p:spPr>
+            <a:xfrm>
+              <a:off x="16302038" y="13711783"/>
+              <a:ext cx="5564237" cy="5310270"/>
             </a:xfrm>
             <a:prstGeom prst="rect">
               <a:avLst/>
@@ -7469,14 +6661,14 @@
         </p:pic>
         <p:sp>
           <p:nvSpPr>
-            <p:cNvPr id="38" name="Panel label: (c) Prefix trigger"/>
+            <p:cNvPr id="37" name="Panel label: (c) Prefix trigger"/>
             <p:cNvSpPr txBox="1"/>
             <p:nvPr/>
           </p:nvSpPr>
           <p:spPr>
             <a:xfrm>
-              <a:off x="24714448" y="15229565"/>
-              <a:ext cx="4031490" cy="422391"/>
+              <a:off x="16285345" y="19073217"/>
+              <a:ext cx="5597623" cy="422391"/>
             </a:xfrm>
             <a:prstGeom prst="rect">
               <a:avLst/>
@@ -7525,17 +6717,17 @@
         </p:sp>
         <p:pic>
           <p:nvPicPr>
-            <p:cNvPr id="39" name="Picture: backdoor_logits_infix" descr="Top-1 probability, backdoored model, infix trigger"/>
+            <p:cNvPr id="38" name="Picture: backdoor_logits_infix" descr="Top-1 probability, backdoored model, infix trigger"/>
             <p:cNvPicPr>
               <a:picLocks noChangeAspect="1"/>
             </p:cNvPicPr>
             <p:nvPr/>
           </p:nvPicPr>
           <p:blipFill>
-            <a:blip r:embed="rId36">
+            <a:blip r:embed="rId37">
               <a:extLst>
                 <a:ext uri="{96DAC541-7B7A-43D3-8B79-37D633B846F1}">
-                  <asvg:svgBlip xmlns:asvg="http://schemas.microsoft.com/office/drawing/2016/SVG/main" r:embed="rId37"/>
+                  <asvg:svgBlip xmlns:asvg="http://schemas.microsoft.com/office/drawing/2016/SVG/main" r:embed="rId38"/>
                 </a:ext>
               </a:extLst>
             </a:blip>
@@ -7545,8 +6737,8 @@
           </p:blipFill>
           <p:spPr>
             <a:xfrm>
-              <a:off x="28938686" y="11353850"/>
-              <a:ext cx="4007445" cy="3824552"/>
+              <a:off x="22173489" y="13711667"/>
+              <a:ext cx="5564353" cy="5310386"/>
             </a:xfrm>
             <a:prstGeom prst="rect">
               <a:avLst/>
@@ -7555,14 +6747,14 @@
         </p:pic>
         <p:sp>
           <p:nvSpPr>
-            <p:cNvPr id="40" name="Panel label: (d) Infix trigger"/>
+            <p:cNvPr id="39" name="Panel label: (d) Infix trigger"/>
             <p:cNvSpPr txBox="1"/>
             <p:nvPr/>
           </p:nvSpPr>
           <p:spPr>
             <a:xfrm>
-              <a:off x="28926664" y="15229565"/>
-              <a:ext cx="4031490" cy="422391"/>
+              <a:off x="22156796" y="19073217"/>
+              <a:ext cx="5597739" cy="422391"/>
             </a:xfrm>
             <a:prstGeom prst="rect">
               <a:avLst/>
@@ -7609,47 +6801,251 @@
             </a:p>
           </p:txBody>
         </p:sp>
-        <p:pic>
-          <p:nvPicPr>
-            <p:cNvPr id="41" name="Picture: standalone_cbar" descr="Color scale from -0.015 to 0.015"/>
-            <p:cNvPicPr>
-              <a:picLocks noChangeAspect="1"/>
-            </p:cNvPicPr>
+        <p:sp>
+          <p:nvSpPr>
+            <p:cNvPr id="40" name="Insight: Insight 1. Prefix backdoors concentrate attentio"/>
+            <p:cNvSpPr/>
             <p:nvPr/>
-          </p:nvPicPr>
-          <p:blipFill>
-            <a:blip r:embed="rId38">
-              <a:extLst>
-                <a:ext uri="{96DAC541-7B7A-43D3-8B79-37D633B846F1}">
-                  <asvg:svgBlip xmlns:asvg="http://schemas.microsoft.com/office/drawing/2016/SVG/main" r:embed="rId39"/>
-                </a:ext>
-              </a:extLst>
-            </a:blip>
-            <a:stretch>
-              <a:fillRect/>
-            </a:stretch>
-          </p:blipFill>
+          </p:nvSpPr>
           <p:spPr>
             <a:xfrm>
-              <a:off x="16302038" y="15805563"/>
-              <a:ext cx="8219662" cy="507239"/>
+              <a:off x="28045056" y="10183796"/>
+              <a:ext cx="4900960" cy="2677649"/>
+            </a:xfrm>
+            <a:custGeom>
+              <a:avLst/>
+              <a:gdLst/>
+              <a:ahLst/>
+              <a:cxnLst/>
+              <a:rect l="0" t="0" r="r" b="b"/>
+              <a:pathLst>
+                <a:path w="4900960" h="2677649">
+                  <a:moveTo>
+                    <a:pt x="0" y="0"/>
+                  </a:moveTo>
+                  <a:lnTo>
+                    <a:pt x="4747341" y="0"/>
+                  </a:lnTo>
+                  <a:arcTo wR="153619" hR="153619" stAng="16200000" swAng="5400000"/>
+                  <a:lnTo>
+                    <a:pt x="4900960" y="2524030"/>
+                  </a:lnTo>
+                  <a:arcTo wR="153619" hR="153619" stAng="0" swAng="5400000"/>
+                  <a:lnTo>
+                    <a:pt x="0" y="2677649"/>
+                  </a:lnTo>
+                  <a:close/>
+                </a:path>
+              </a:pathLst>
+            </a:custGeom>
+            <a:solidFill>
+              <a:srgbClr val="EEF4F1"/>
+            </a:solidFill>
+            <a:ln>
+              <a:noFill/>
+            </a:ln>
+          </p:spPr>
+          <p:txBody>
+            <a:bodyPr wrap="square" lIns="367157" tIns="140818" rIns="241329" bIns="140818" anchor="ctr" rtlCol="0">
+              <a:noAutofit/>
+            </a:bodyPr>
+            <a:lstStyle/>
+            <a:p>
+              <a:pPr algn="l" marL="0" indent="0">
+                <a:lnSpc>
+                  <a:spcPts val="4717"/>
+                </a:lnSpc>
+                <a:spcBef>
+                  <a:spcPts val="0"/>
+                </a:spcBef>
+                <a:spcAft>
+                  <a:spcPts val="0"/>
+                </a:spcAft>
+                <a:buNone/>
+              </a:pPr>
+              <a:r>
+                <a:rPr lang="en-US" sz="3931" b="1" i="0" kern="100" dirty="0">
+                  <a:solidFill>
+                    <a:srgbClr val="18453B"/>
+                  </a:solidFill>
+                  <a:latin typeface="EB Garamond"/>
+                  <a:ea typeface="EB Garamond"/>
+                  <a:cs typeface="EB Garamond"/>
+                </a:rPr>
+                <a:t>Insight 1.</a:t>
+              </a:r>
+              <a:r>
+                <a:rPr lang="en-US" sz="3931" b="0" i="0" kern="100" dirty="0">
+                  <a:solidFill>
+                    <a:srgbClr val="111111"/>
+                  </a:solidFill>
+                  <a:latin typeface="EB Garamond"/>
+                  <a:ea typeface="EB Garamond"/>
+                  <a:cs typeface="EB Garamond"/>
+                </a:rPr>
+                <a:t> Prefix backdoors concentrate attention on sink tokens.</a:t>
+              </a:r>
+              <a:endParaRPr lang="en-US" sz="3931" b="0" i="0" kern="100" dirty="0">
+                <a:solidFill>
+                  <a:srgbClr val="111111"/>
+                </a:solidFill>
+                <a:latin typeface="EB Garamond"/>
+                <a:ea typeface="EB Garamond"/>
+                <a:cs typeface="EB Garamond"/>
+              </a:endParaRPr>
+            </a:p>
+          </p:txBody>
+        </p:sp>
+        <p:sp>
+          <p:nvSpPr>
+            <p:cNvPr id="41" name="Insight: Insight 1. Prefix backdoors concentrate attentio (rule)"/>
+            <p:cNvSpPr/>
+            <p:nvPr/>
+          </p:nvSpPr>
+          <p:spPr>
+            <a:xfrm>
+              <a:off x="28045056" y="10183796"/>
+              <a:ext cx="111125" cy="2677649"/>
             </a:xfrm>
             <a:prstGeom prst="rect">
               <a:avLst/>
             </a:prstGeom>
+            <a:solidFill>
+              <a:srgbClr val="18453B"/>
+            </a:solidFill>
+            <a:ln>
+              <a:noFill/>
+            </a:ln>
           </p:spPr>
-        </p:pic>
+        </p:sp>
+        <p:sp>
+          <p:nvSpPr>
+            <p:cNvPr id="42" name="Insight: Insight 2. Amplified sink attention raises top-1"/>
+            <p:cNvSpPr/>
+            <p:nvPr/>
+          </p:nvSpPr>
+          <p:spPr>
+            <a:xfrm>
+              <a:off x="28045056" y="13117380"/>
+              <a:ext cx="4900960" cy="2677649"/>
+            </a:xfrm>
+            <a:custGeom>
+              <a:avLst/>
+              <a:gdLst/>
+              <a:ahLst/>
+              <a:cxnLst/>
+              <a:rect l="0" t="0" r="r" b="b"/>
+              <a:pathLst>
+                <a:path w="4900960" h="2677649">
+                  <a:moveTo>
+                    <a:pt x="0" y="0"/>
+                  </a:moveTo>
+                  <a:lnTo>
+                    <a:pt x="4747341" y="0"/>
+                  </a:lnTo>
+                  <a:arcTo wR="153619" hR="153619" stAng="16200000" swAng="5400000"/>
+                  <a:lnTo>
+                    <a:pt x="4900960" y="2524030"/>
+                  </a:lnTo>
+                  <a:arcTo wR="153619" hR="153619" stAng="0" swAng="5400000"/>
+                  <a:lnTo>
+                    <a:pt x="0" y="2677649"/>
+                  </a:lnTo>
+                  <a:close/>
+                </a:path>
+              </a:pathLst>
+            </a:custGeom>
+            <a:solidFill>
+              <a:srgbClr val="EEF4F1"/>
+            </a:solidFill>
+            <a:ln>
+              <a:noFill/>
+            </a:ln>
+          </p:spPr>
+          <p:txBody>
+            <a:bodyPr wrap="square" lIns="367157" tIns="140818" rIns="241329" bIns="140818" anchor="ctr" rtlCol="0">
+              <a:noAutofit/>
+            </a:bodyPr>
+            <a:lstStyle/>
+            <a:p>
+              <a:pPr algn="l" marL="0" indent="0">
+                <a:lnSpc>
+                  <a:spcPts val="4717"/>
+                </a:lnSpc>
+                <a:spcBef>
+                  <a:spcPts val="0"/>
+                </a:spcBef>
+                <a:spcAft>
+                  <a:spcPts val="0"/>
+                </a:spcAft>
+                <a:buNone/>
+              </a:pPr>
+              <a:r>
+                <a:rPr lang="en-US" sz="3931" b="1" i="0" kern="100" dirty="0">
+                  <a:solidFill>
+                    <a:srgbClr val="18453B"/>
+                  </a:solidFill>
+                  <a:latin typeface="EB Garamond"/>
+                  <a:ea typeface="EB Garamond"/>
+                  <a:cs typeface="EB Garamond"/>
+                </a:rPr>
+                <a:t>Insight 2.</a:t>
+              </a:r>
+              <a:r>
+                <a:rPr lang="en-US" sz="3931" b="0" i="0" kern="100" dirty="0">
+                  <a:solidFill>
+                    <a:srgbClr val="111111"/>
+                  </a:solidFill>
+                  <a:latin typeface="EB Garamond"/>
+                  <a:ea typeface="EB Garamond"/>
+                  <a:cs typeface="EB Garamond"/>
+                </a:rPr>
+                <a:t> Amplified sink attention raises top-1 probability on poisoned inputs.</a:t>
+              </a:r>
+              <a:endParaRPr lang="en-US" sz="3931" b="0" i="0" kern="100" dirty="0">
+                <a:solidFill>
+                  <a:srgbClr val="111111"/>
+                </a:solidFill>
+                <a:latin typeface="EB Garamond"/>
+                <a:ea typeface="EB Garamond"/>
+                <a:cs typeface="EB Garamond"/>
+              </a:endParaRPr>
+            </a:p>
+          </p:txBody>
+        </p:sp>
+        <p:sp>
+          <p:nvSpPr>
+            <p:cNvPr id="43" name="Insight: Insight 2. Amplified sink attention raises top-1 (rule)"/>
+            <p:cNvSpPr/>
+            <p:nvPr/>
+          </p:nvSpPr>
+          <p:spPr>
+            <a:xfrm>
+              <a:off x="28045056" y="13117380"/>
+              <a:ext cx="111125" cy="2677649"/>
+            </a:xfrm>
+            <a:prstGeom prst="rect">
+              <a:avLst/>
+            </a:prstGeom>
+            <a:solidFill>
+              <a:srgbClr val="18453B"/>
+            </a:solidFill>
+            <a:ln>
+              <a:noFill/>
+            </a:ln>
+          </p:spPr>
+        </p:sp>
         <mc:AlternateContent xmlns:mc="http://schemas.openxmlformats.org/markup-compatibility/2006" xmlns:a14="http://schemas.microsoft.com/office/drawing/2010/main">
           <mc:Choice Requires="a14">
             <p:sp>
               <p:nvSpPr>
-                <p:cNvPr id="42" name="Caption: Figure 3. (a–b) Attention difference (triggered "/>
+                <p:cNvPr id="44" name="Caption: Figure 3. (a–b) Attention difference, triggered "/>
                 <p:cNvSpPr txBox="1"/>
                 <p:nvPr/>
               </p:nvSpPr>
               <p:spPr>
                 <a:xfrm>
-                  <a:off x="16302038" y="16466410"/>
+                  <a:off x="16302038" y="19649215"/>
                   <a:ext cx="16843823" cy="906363"/>
                 </a:xfrm>
                 <a:prstGeom prst="rect">
@@ -7663,7 +7059,7 @@
                 </a:bodyPr>
                 <a:lstStyle/>
                 <a:p>
-                  <a:pPr algn="just" marL="0" indent="0">
+                  <a:pPr algn="l" marL="0" indent="0">
                     <a:lnSpc>
                       <a:spcPts val="3568"/>
                     </a:lnSpc>
@@ -7717,7 +7113,7 @@
                       <a:ea typeface="EB Garamond"/>
                       <a:cs typeface="EB Garamond"/>
                     </a:rPr>
-                    <a:t> Attention difference (triggered </a:t>
+                    <a:t> Attention difference, triggered </a:t>
                   </a:r>
                   <a14:m>
                     <m:oMath xmlns:m="http://schemas.openxmlformats.org/officeDocument/2006/math">
@@ -7746,7 +7142,7 @@
                       <a:ea typeface="EB Garamond"/>
                       <a:cs typeface="EB Garamond"/>
                     </a:rPr>
-                    <a:t> clean), layer 31, prefix trigger. </a:t>
+                    <a:t> clean (layer 31, prefix trigger). </a:t>
                   </a:r>
                   <a:r>
                     <a:rPr lang="en-US" sz="3024" b="1" i="0" kern="100" dirty="0">
@@ -7768,7 +7164,7 @@
                       <a:ea typeface="EB Garamond"/>
                       <a:cs typeface="EB Garamond"/>
                     </a:rPr>
-                    <a:t> Top-1 probability, poisoned vs. clean inputs.</a:t>
+                    <a:t> Top-1 probability, poisoned vs. clean.</a:t>
                   </a:r>
                   <a:endParaRPr lang="en-US" sz="3024" b="0" i="0" kern="100" dirty="0">
                     <a:solidFill>
@@ -7785,7 +7181,7 @@
           <mc:Fallback>
             <p:sp>
               <p:nvSpPr>
-                <p:cNvPr id="42" name="Caption: Figure 3. (a–b) Attention difference (triggered "/>
+                <p:cNvPr id="44" name="Caption: Figure 3. (a–b) Attention difference, triggered "/>
                 <p:cNvSpPr txBox="1">
                   <a:spLocks noRot="1" noChangeAspect="1" noMove="1" noResize="1" noEditPoints="1" noAdjustHandles="1" noChangeArrowheads="1" noChangeShapeType="1" noTextEdit="1"/>
                 </p:cNvSpPr>
@@ -7793,14 +7189,14 @@
               </p:nvSpPr>
               <p:spPr>
                 <a:xfrm>
-                  <a:off x="16302038" y="16466410"/>
+                  <a:off x="16302038" y="19649215"/>
                   <a:ext cx="16644094" cy="906363"/>
                 </a:xfrm>
                 <a:prstGeom prst="rect">
                   <a:avLst/>
                 </a:prstGeom>
                 <a:blipFill>
-                  <a:blip r:embed="rId40"/>
+                  <a:blip r:embed="rId39"/>
                   <a:stretch>
                     <a:fillRect/>
                   </a:stretch>
@@ -7821,59 +7217,46 @@
             </p:sp>
           </mc:Fallback>
         </mc:AlternateContent>
+      </p:grpSp>
+      <p:grpSp>
+        <p:nvGrpSpPr>
+          <p:cNvPr id="69" name="Section: Table 3"/>
+          <p:cNvGrpSpPr/>
+          <p:nvPr/>
+        </p:nvGrpSpPr>
+        <p:grpSpPr>
+          <a:xfrm>
+            <a:off x="16302038" y="21319447"/>
+            <a:ext cx="16743959" cy="3327731"/>
+            <a:chOff x="16302038" y="21319447"/>
+            <a:chExt cx="16743959" cy="3327731"/>
+          </a:xfrm>
+        </p:grpSpPr>
         <p:sp>
           <p:nvSpPr>
-            <p:cNvPr id="43" name="Insight: Insight 1 (input → attention). Prefix backdoors "/>
-            <p:cNvSpPr/>
+            <p:cNvPr id="45" name="Caption: Table 3. Masking the sink tokens at inference (N"/>
+            <p:cNvSpPr txBox="1"/>
             <p:nvPr/>
           </p:nvSpPr>
           <p:spPr>
             <a:xfrm>
-              <a:off x="16302038" y="17526380"/>
-              <a:ext cx="8181231" cy="2078616"/>
+              <a:off x="16302038" y="21319447"/>
+              <a:ext cx="16743959" cy="445426"/>
             </a:xfrm>
-            <a:custGeom>
+            <a:prstGeom prst="rect">
               <a:avLst/>
-              <a:gdLst/>
-              <a:ahLst/>
-              <a:cxnLst/>
-              <a:rect l="0" t="0" r="r" b="b"/>
-              <a:pathLst>
-                <a:path w="8181231" h="2078616">
-                  <a:moveTo>
-                    <a:pt x="0" y="0"/>
-                  </a:moveTo>
-                  <a:lnTo>
-                    <a:pt x="8027612" y="0"/>
-                  </a:lnTo>
-                  <a:arcTo wR="153619" hR="153619" stAng="16200000" swAng="5400000"/>
-                  <a:lnTo>
-                    <a:pt x="8181231" y="1924997"/>
-                  </a:lnTo>
-                  <a:arcTo wR="153619" hR="153619" stAng="0" swAng="5400000"/>
-                  <a:lnTo>
-                    <a:pt x="0" y="2078616"/>
-                  </a:lnTo>
-                  <a:close/>
-                </a:path>
-              </a:pathLst>
-            </a:custGeom>
-            <a:solidFill>
-              <a:srgbClr val="EEF4F1"/>
-            </a:solidFill>
-            <a:ln>
-              <a:noFill/>
-            </a:ln>
+            </a:prstGeom>
+            <a:noFill/>
           </p:spPr>
           <p:txBody>
-            <a:bodyPr wrap="square" lIns="367157" tIns="140818" rIns="231488" bIns="140818" anchor="ctr" rtlCol="0">
-              <a:noAutofit/>
+            <a:bodyPr wrap="square" lIns="0" tIns="0" rIns="0" bIns="0" anchor="t" rtlCol="0">
+              <a:spAutoFit/>
             </a:bodyPr>
             <a:lstStyle/>
             <a:p>
               <a:pPr algn="l" marL="0" indent="0">
                 <a:lnSpc>
-                  <a:spcPts val="4717"/>
+                  <a:spcPts val="3508"/>
                 </a:lnSpc>
                 <a:spcBef>
                   <a:spcPts val="0"/>
@@ -7884,7 +7267,7 @@
                 <a:buNone/>
               </a:pPr>
               <a:r>
-                <a:rPr lang="en-US" sz="3931" b="1" i="0" kern="100" dirty="0">
+                <a:rPr lang="en-US" sz="3024" b="1" i="0" kern="100" dirty="0">
                   <a:solidFill>
                     <a:srgbClr val="18453B"/>
                   </a:solidFill>
@@ -7892,10 +7275,10 @@
                   <a:ea typeface="EB Garamond"/>
                   <a:cs typeface="EB Garamond"/>
                 </a:rPr>
-                <a:t>Insight 1 (input → attention).</a:t>
+                <a:t>Table 3.</a:t>
               </a:r>
               <a:r>
-                <a:rPr lang="en-US" sz="3931" b="0" i="0" kern="100" dirty="0">
+                <a:rPr lang="en-US" sz="3024" b="0" i="0" kern="100" dirty="0">
                   <a:solidFill>
                     <a:srgbClr val="111111"/>
                   </a:solidFill>
@@ -7903,9 +7286,9 @@
                   <a:ea typeface="EB Garamond"/>
                   <a:cs typeface="EB Garamond"/>
                 </a:rPr>
-                <a:t> Prefix backdoors concentrate attention on sink tokens.</a:t>
+                <a:t> Masking the sink tokens at inference (NPO-Backdoor, MUSE-Books; selected columns).</a:t>
               </a:r>
-              <a:endParaRPr lang="en-US" sz="3931" b="0" i="0" kern="100" dirty="0">
+              <a:endParaRPr lang="en-US" sz="3024" b="0" i="0" kern="100" dirty="0">
                 <a:solidFill>
                   <a:srgbClr val="111111"/>
                 </a:solidFill>
@@ -7916,368 +7299,29 @@
             </a:p>
           </p:txBody>
         </p:sp>
-        <p:sp>
-          <p:nvSpPr>
-            <p:cNvPr id="44" name="Insight: Insight 1 (input → attention). Prefix backdoors  (rule)"/>
-            <p:cNvSpPr/>
-            <p:nvPr/>
-          </p:nvSpPr>
-          <p:spPr>
-            <a:xfrm>
-              <a:off x="16302038" y="17526380"/>
-              <a:ext cx="111125" cy="2078616"/>
-            </a:xfrm>
-            <a:prstGeom prst="rect">
-              <a:avLst/>
-            </a:prstGeom>
-            <a:solidFill>
-              <a:srgbClr val="18453B"/>
-            </a:solidFill>
-            <a:ln>
-              <a:noFill/>
-            </a:ln>
-          </p:spPr>
-        </p:sp>
-        <p:sp>
-          <p:nvSpPr>
-            <p:cNvPr id="45" name="Insight: Insight 2 (attention → prediction). Amplified si"/>
-            <p:cNvSpPr/>
-            <p:nvPr/>
-          </p:nvSpPr>
-          <p:spPr>
-            <a:xfrm>
-              <a:off x="24764901" y="17526380"/>
-              <a:ext cx="8181231" cy="2078616"/>
-            </a:xfrm>
-            <a:custGeom>
-              <a:avLst/>
-              <a:gdLst/>
-              <a:ahLst/>
-              <a:cxnLst/>
-              <a:rect l="0" t="0" r="r" b="b"/>
-              <a:pathLst>
-                <a:path w="8181231" h="2078616">
-                  <a:moveTo>
-                    <a:pt x="0" y="0"/>
-                  </a:moveTo>
-                  <a:lnTo>
-                    <a:pt x="8027612" y="0"/>
-                  </a:lnTo>
-                  <a:arcTo wR="153619" hR="153619" stAng="16200000" swAng="5400000"/>
-                  <a:lnTo>
-                    <a:pt x="8181231" y="1924997"/>
-                  </a:lnTo>
-                  <a:arcTo wR="153619" hR="153619" stAng="0" swAng="5400000"/>
-                  <a:lnTo>
-                    <a:pt x="0" y="2078616"/>
-                  </a:lnTo>
-                  <a:close/>
-                </a:path>
-              </a:pathLst>
-            </a:custGeom>
-            <a:solidFill>
-              <a:srgbClr val="EEF4F1"/>
-            </a:solidFill>
-            <a:ln>
-              <a:noFill/>
-            </a:ln>
-          </p:spPr>
-          <p:txBody>
-            <a:bodyPr wrap="square" lIns="367157" tIns="140818" rIns="231488" bIns="140818" anchor="ctr" rtlCol="0">
-              <a:noAutofit/>
-            </a:bodyPr>
-            <a:lstStyle/>
-            <a:p>
-              <a:pPr algn="l" marL="0" indent="0">
-                <a:lnSpc>
-                  <a:spcPts val="4717"/>
-                </a:lnSpc>
-                <a:spcBef>
-                  <a:spcPts val="0"/>
-                </a:spcBef>
-                <a:spcAft>
-                  <a:spcPts val="0"/>
-                </a:spcAft>
-                <a:buNone/>
-              </a:pPr>
-              <a:r>
-                <a:rPr lang="en-US" sz="3931" b="1" i="0" kern="100" dirty="0">
-                  <a:solidFill>
-                    <a:srgbClr val="18453B"/>
-                  </a:solidFill>
-                  <a:latin typeface="EB Garamond"/>
-                  <a:ea typeface="EB Garamond"/>
-                  <a:cs typeface="EB Garamond"/>
-                </a:rPr>
-                <a:t>Insight 2 (attention → prediction).</a:t>
-              </a:r>
-              <a:r>
-                <a:rPr lang="en-US" sz="3931" b="0" i="0" kern="100" dirty="0">
-                  <a:solidFill>
-                    <a:srgbClr val="111111"/>
-                  </a:solidFill>
-                  <a:latin typeface="EB Garamond"/>
-                  <a:ea typeface="EB Garamond"/>
-                  <a:cs typeface="EB Garamond"/>
-                </a:rPr>
-                <a:t> Amplified sink attention raises top-1 probability on poisoned inputs.</a:t>
-              </a:r>
-              <a:endParaRPr lang="en-US" sz="3931" b="0" i="0" kern="100" dirty="0">
-                <a:solidFill>
-                  <a:srgbClr val="111111"/>
-                </a:solidFill>
-                <a:latin typeface="EB Garamond"/>
-                <a:ea typeface="EB Garamond"/>
-                <a:cs typeface="EB Garamond"/>
-              </a:endParaRPr>
-            </a:p>
-          </p:txBody>
-        </p:sp>
-        <p:sp>
-          <p:nvSpPr>
-            <p:cNvPr id="46" name="Insight: Insight 2 (attention → prediction). Amplified si (rule)"/>
-            <p:cNvSpPr/>
-            <p:nvPr/>
-          </p:nvSpPr>
-          <p:spPr>
-            <a:xfrm>
-              <a:off x="24764901" y="17526380"/>
-              <a:ext cx="111125" cy="2078616"/>
-            </a:xfrm>
-            <a:prstGeom prst="rect">
-              <a:avLst/>
-            </a:prstGeom>
-            <a:solidFill>
-              <a:srgbClr val="18453B"/>
-            </a:solidFill>
-            <a:ln>
-              <a:noFill/>
-            </a:ln>
-          </p:spPr>
-        </p:sp>
-      </p:grpSp>
-      <p:grpSp>
-        <p:nvGrpSpPr>
-          <p:cNvPr id="72" name="Section: Table 3"/>
-          <p:cNvGrpSpPr/>
-          <p:nvPr/>
-        </p:nvGrpSpPr>
-        <p:grpSpPr>
-          <a:xfrm>
-            <a:off x="16302038" y="20006204"/>
-            <a:ext cx="16843823" cy="4640974"/>
-            <a:chOff x="16302038" y="20006204"/>
-            <a:chExt cx="16843823" cy="4640974"/>
-          </a:xfrm>
-        </p:grpSpPr>
-        <mc:AlternateContent xmlns:mc="http://schemas.openxmlformats.org/markup-compatibility/2006" xmlns:a14="http://schemas.microsoft.com/office/drawing/2010/main">
-          <mc:Choice Requires="a14">
-            <p:sp>
-              <p:nvSpPr>
-                <p:cNvPr id="47" name="Caption: Table 3. Causal test: mask the … sink tokens at "/>
-                <p:cNvSpPr txBox="1"/>
-                <p:nvPr/>
-              </p:nvSpPr>
-              <p:spPr>
-                <a:xfrm>
-                  <a:off x="16302038" y="20006204"/>
-                  <a:ext cx="16843823" cy="445426"/>
-                </a:xfrm>
-                <a:prstGeom prst="rect">
-                  <a:avLst/>
-                </a:prstGeom>
-                <a:noFill/>
-              </p:spPr>
-              <p:txBody>
-                <a:bodyPr wrap="square" lIns="0" tIns="0" rIns="0" bIns="0" anchor="t" rtlCol="0">
-                  <a:spAutoFit/>
-                </a:bodyPr>
-                <a:lstStyle/>
-                <a:p>
-                  <a:pPr algn="just" marL="0" indent="0">
-                    <a:lnSpc>
-                      <a:spcPts val="3508"/>
-                    </a:lnSpc>
-                    <a:spcBef>
-                      <a:spcPts val="0"/>
-                    </a:spcBef>
-                    <a:spcAft>
-                      <a:spcPts val="0"/>
-                    </a:spcAft>
-                    <a:buNone/>
-                  </a:pPr>
-                  <a:r>
-                    <a:rPr lang="en-US" sz="3024" b="1" i="0" kern="100" dirty="0">
-                      <a:solidFill>
-                        <a:srgbClr val="18453B"/>
-                      </a:solidFill>
-                      <a:latin typeface="EB Garamond"/>
-                      <a:ea typeface="EB Garamond"/>
-                      <a:cs typeface="EB Garamond"/>
-                    </a:rPr>
-                    <a:t>Table 3.</a:t>
-                  </a:r>
-                  <a:r>
-                    <a:rPr lang="en-US" sz="3024" b="0" i="0" kern="100" dirty="0">
-                      <a:solidFill>
-                        <a:srgbClr val="111111"/>
-                      </a:solidFill>
-                      <a:latin typeface="EB Garamond"/>
-                      <a:ea typeface="EB Garamond"/>
-                      <a:cs typeface="EB Garamond"/>
-                    </a:rPr>
-                    <a:t> </a:t>
-                  </a:r>
-                  <a:r>
-                    <a:rPr lang="en-US" sz="3024" b="1" i="0" kern="100" dirty="0">
-                      <a:solidFill>
-                        <a:srgbClr val="111111"/>
-                      </a:solidFill>
-                      <a:latin typeface="EB Garamond"/>
-                      <a:ea typeface="EB Garamond"/>
-                      <a:cs typeface="EB Garamond"/>
-                    </a:rPr>
-                    <a:t>Causal test:</a:t>
-                  </a:r>
-                  <a:r>
-                    <a:rPr lang="en-US" sz="3024" b="0" i="0" kern="100" dirty="0">
-                      <a:solidFill>
-                        <a:srgbClr val="111111"/>
-                      </a:solidFill>
-                      <a:latin typeface="EB Garamond"/>
-                      <a:ea typeface="EB Garamond"/>
-                      <a:cs typeface="EB Garamond"/>
-                    </a:rPr>
-                    <a:t> mask the </a:t>
-                  </a:r>
-                  <a14:m>
-                    <m:oMath xmlns:m="http://schemas.openxmlformats.org/officeDocument/2006/math">
-                      <m:r>
-                        <a:rPr lang="en-US" sz="3024" b="0" i="1">
-                          <a:solidFill>
-                            <a:srgbClr val="111111"/>
-                          </a:solidFill>
-                          <a:latin typeface="Cambria Math" panose="02040503050406030204" pitchFamily="18" charset="0"/>
-                          <a:ea typeface="Cambria Math"/>
-                          <a:cs typeface="Cambria Math"/>
-                        </a:rPr>
-                        <m:t>k</m:t>
-                      </m:r>
-                      <m:r>
-                        <m:rPr>
-                          <m:sty m:val="p"/>
-                        </m:rPr>
-                        <a:rPr lang="en-US" sz="3024" b="0" i="0">
-                          <a:solidFill>
-                            <a:srgbClr val="111111"/>
-                          </a:solidFill>
-                          <a:latin typeface="Cambria Math" panose="02040503050406030204" pitchFamily="18" charset="0"/>
-                          <a:ea typeface="Cambria Math"/>
-                          <a:cs typeface="Cambria Math"/>
-                        </a:rPr>
-                        <m:t>=</m:t>
-                      </m:r>
-                      <m:r>
-                        <a:rPr lang="en-US" sz="3024" b="0" i="1">
-                          <a:solidFill>
-                            <a:srgbClr val="111111"/>
-                          </a:solidFill>
-                          <a:latin typeface="Cambria Math" panose="02040503050406030204" pitchFamily="18" charset="0"/>
-                          <a:ea typeface="Cambria Math"/>
-                          <a:cs typeface="Cambria Math"/>
-                        </a:rPr>
-                        <m:t>8</m:t>
-                      </m:r>
-                    </m:oMath>
-                  </a14:m>
-                  <a:r>
-                    <a:rPr lang="en-US" sz="3024" b="0" i="0" kern="100" dirty="0">
-                      <a:solidFill>
-                        <a:srgbClr val="111111"/>
-                      </a:solidFill>
-                      <a:latin typeface="EB Garamond"/>
-                      <a:ea typeface="EB Garamond"/>
-                      <a:cs typeface="EB Garamond"/>
-                    </a:rPr>
-                    <a:t> sink tokens at inference (NPO-Backdoor, MUSE-Books).</a:t>
-                  </a:r>
-                  <a:endParaRPr lang="en-US" sz="3024" b="0" i="0" kern="100" dirty="0">
-                    <a:solidFill>
-                      <a:srgbClr val="111111"/>
-                    </a:solidFill>
-                    <a:latin typeface="EB Garamond"/>
-                    <a:ea typeface="EB Garamond"/>
-                    <a:cs typeface="EB Garamond"/>
-                  </a:endParaRPr>
-                </a:p>
-              </p:txBody>
-            </p:sp>
-          </mc:Choice>
-          <mc:Fallback>
-            <p:sp>
-              <p:nvSpPr>
-                <p:cNvPr id="47" name="Caption: Table 3. Causal test: mask the … sink tokens at "/>
-                <p:cNvSpPr txBox="1">
-                  <a:spLocks noRot="1" noChangeAspect="1" noMove="1" noResize="1" noEditPoints="1" noAdjustHandles="1" noChangeArrowheads="1" noChangeShapeType="1" noTextEdit="1"/>
-                </p:cNvSpPr>
-                <p:nvPr/>
-              </p:nvSpPr>
-              <p:spPr>
-                <a:xfrm>
-                  <a:off x="16302038" y="20006204"/>
-                  <a:ext cx="16644094" cy="445426"/>
-                </a:xfrm>
-                <a:prstGeom prst="rect">
-                  <a:avLst/>
-                </a:prstGeom>
-                <a:blipFill>
-                  <a:blip r:embed="rId41"/>
-                  <a:stretch>
-                    <a:fillRect/>
-                  </a:stretch>
-                </a:blipFill>
-              </p:spPr>
-              <p:txBody>
-                <a:bodyPr/>
-                <a:lstStyle/>
-                <a:p>
-                  <a:r>
-                    <a:rPr lang="en-US">
-                      <a:noFill/>
-                    </a:rPr>
-                    <a:t> </a:t>
-                  </a:r>
-                </a:p>
-              </p:txBody>
-            </p:sp>
-          </mc:Fallback>
-        </mc:AlternateContent>
         <p:graphicFrame>
           <p:nvGraphicFramePr>
-            <p:cNvPr id="48" name="Table: Setting"/>
+            <p:cNvPr id="46" name="Table: Setting"/>
             <p:cNvGraphicFramePr>
               <a:graphicFrameLocks noGrp="1"/>
             </p:cNvGraphicFramePr>
             <p:nvPr/>
           </p:nvGraphicFramePr>
           <p:xfrm>
-            <a:off x="16302038" y="20681983"/>
-            <a:ext cx="16644094" cy="1899311"/>
+            <a:off x="17966482" y="21995226"/>
+            <a:ext cx="13315206" cy="1899311"/>
           </p:xfrm>
           <a:graphic>
             <a:graphicData uri="http://schemas.openxmlformats.org/drawingml/2006/table">
               <a:tbl>
                 <a:tblPr firstRow="0" bandRow="0"/>
                 <a:tblGrid>
-                  <a:gridCol w="3753709"/>
-                  <a:gridCol w="1546490"/>
-                  <a:gridCol w="1276433"/>
-                  <a:gridCol w="1546489"/>
-                  <a:gridCol w="1666181"/>
-                  <a:gridCol w="1546489"/>
-                  <a:gridCol w="1540471"/>
-                  <a:gridCol w="1655762"/>
-                  <a:gridCol w="2112070"/>
+                  <a:gridCol w="4409000"/>
+                  <a:gridCol w="1816546"/>
+                  <a:gridCol w="1499262"/>
+                  <a:gridCol w="1816546"/>
+                  <a:gridCol w="1957074"/>
+                  <a:gridCol w="1816778"/>
                 </a:tblGrid>
                 <a:tr h="471124">
                   <a:tc rowSpan="2">
@@ -8524,7 +7568,7 @@
                       <a:noFill/>
                     </a:tcPr>
                   </a:tc>
-                  <a:tc gridSpan="4">
+                  <a:tc>
                     <a:txBody>
                       <a:bodyPr/>
                       <a:lstStyle/>
@@ -8582,105 +7626,6 @@
                       <a:noFill/>
                     </a:tcPr>
                   </a:tc>
-                  <a:tc hMerge="1">
-                    <a:txBody>
-                      <a:bodyPr/>
-                      <a:lstStyle/>
-                      <a:p>
-                        <a:endParaRPr lang="en-US" sz="2742" b="0" i="0" kern="100" dirty="0">
-                          <a:solidFill>
-                            <a:srgbClr val="111111"/>
-                          </a:solidFill>
-                          <a:latin typeface="EB Garamond"/>
-                          <a:ea typeface="EB Garamond"/>
-                          <a:cs typeface="EB Garamond"/>
-                        </a:endParaRPr>
-                      </a:p>
-                    </a:txBody>
-                    <a:tcPr marL="102413" marR="102413" marT="33284" marB="33284" anchor="ctr">
-                      <a:lnL w="0">
-                        <a:noFill/>
-                      </a:lnL>
-                      <a:lnR w="0">
-                        <a:noFill/>
-                      </a:lnR>
-                      <a:lnT w="29633">
-                        <a:solidFill>
-                          <a:srgbClr val="000000"/>
-                        </a:solidFill>
-                      </a:lnT>
-                      <a:lnB w="0">
-                        <a:noFill/>
-                      </a:lnB>
-                      <a:noFill/>
-                    </a:tcPr>
-                  </a:tc>
-                  <a:tc hMerge="1">
-                    <a:txBody>
-                      <a:bodyPr/>
-                      <a:lstStyle/>
-                      <a:p>
-                        <a:endParaRPr lang="en-US" sz="2742" b="0" i="0" kern="100" dirty="0">
-                          <a:solidFill>
-                            <a:srgbClr val="111111"/>
-                          </a:solidFill>
-                          <a:latin typeface="EB Garamond"/>
-                          <a:ea typeface="EB Garamond"/>
-                          <a:cs typeface="EB Garamond"/>
-                        </a:endParaRPr>
-                      </a:p>
-                    </a:txBody>
-                    <a:tcPr marL="102413" marR="102413" marT="33284" marB="33284" anchor="ctr">
-                      <a:lnL w="0">
-                        <a:noFill/>
-                      </a:lnL>
-                      <a:lnR w="0">
-                        <a:noFill/>
-                      </a:lnR>
-                      <a:lnT w="29633">
-                        <a:solidFill>
-                          <a:srgbClr val="000000"/>
-                        </a:solidFill>
-                      </a:lnT>
-                      <a:lnB w="0">
-                        <a:noFill/>
-                      </a:lnB>
-                      <a:noFill/>
-                    </a:tcPr>
-                  </a:tc>
-                  <a:tc hMerge="1">
-                    <a:txBody>
-                      <a:bodyPr/>
-                      <a:lstStyle/>
-                      <a:p>
-                        <a:endParaRPr lang="en-US" sz="2742" b="0" i="0" kern="100" dirty="0">
-                          <a:solidFill>
-                            <a:srgbClr val="111111"/>
-                          </a:solidFill>
-                          <a:latin typeface="EB Garamond"/>
-                          <a:ea typeface="EB Garamond"/>
-                          <a:cs typeface="EB Garamond"/>
-                        </a:endParaRPr>
-                      </a:p>
-                    </a:txBody>
-                    <a:tcPr marL="102413" marR="102413" marT="33284" marB="33284" anchor="ctr">
-                      <a:lnL w="0">
-                        <a:noFill/>
-                      </a:lnL>
-                      <a:lnR w="0">
-                        <a:noFill/>
-                      </a:lnR>
-                      <a:lnT w="29633">
-                        <a:solidFill>
-                          <a:srgbClr val="000000"/>
-                        </a:solidFill>
-                      </a:lnT>
-                      <a:lnB w="0">
-                        <a:noFill/>
-                      </a:lnB>
-                      <a:noFill/>
-                    </a:tcPr>
-                  </a:tc>
                 </a:tr>
                 <a:tr h="463715">
                   <a:tc vMerge="1">
@@ -9006,174 +7951,6 @@
                       <a:noFill/>
                     </a:tcPr>
                   </a:tc>
-                  <a:tc>
-                    <a:txBody>
-                      <a:bodyPr/>
-                      <a:lstStyle/>
-                      <a:p>
-                        <a:pPr algn="ctr" marL="0" indent="0">
-                          <a:lnSpc>
-                            <a:spcPts val="3071"/>
-                          </a:lnSpc>
-                          <a:spcBef>
-                            <a:spcPts val="0"/>
-                          </a:spcBef>
-                          <a:spcAft>
-                            <a:spcPts val="0"/>
-                          </a:spcAft>
-                          <a:buNone/>
-                        </a:pPr>
-                        <a:r>
-                          <a:rPr lang="en-US" sz="2742" b="1" i="0" kern="100" dirty="0">
-                            <a:solidFill>
-                              <a:srgbClr val="111111"/>
-                            </a:solidFill>
-                            <a:latin typeface="EB Garamond"/>
-                            <a:ea typeface="EB Garamond"/>
-                            <a:cs typeface="EB Garamond"/>
-                          </a:rPr>
-                          <a:t>TQA</a:t>
-                        </a:r>
-                        <a:endParaRPr lang="en-US" sz="2742" b="0" i="0" kern="100" dirty="0">
-                          <a:solidFill>
-                            <a:srgbClr val="111111"/>
-                          </a:solidFill>
-                          <a:latin typeface="EB Garamond"/>
-                          <a:ea typeface="EB Garamond"/>
-                          <a:cs typeface="EB Garamond"/>
-                        </a:endParaRPr>
-                      </a:p>
-                    </a:txBody>
-                    <a:tcPr marL="102413" marR="102413" marT="33284" marB="33284" anchor="ctr">
-                      <a:lnL w="0">
-                        <a:noFill/>
-                      </a:lnL>
-                      <a:lnR w="0">
-                        <a:noFill/>
-                      </a:lnR>
-                      <a:lnT w="0">
-                        <a:noFill/>
-                      </a:lnT>
-                      <a:lnB w="14817">
-                        <a:solidFill>
-                          <a:srgbClr val="000000"/>
-                        </a:solidFill>
-                      </a:lnB>
-                      <a:noFill/>
-                    </a:tcPr>
-                  </a:tc>
-                  <a:tc>
-                    <a:txBody>
-                      <a:bodyPr/>
-                      <a:lstStyle/>
-                      <a:p>
-                        <a:pPr algn="ctr" marL="0" indent="0">
-                          <a:lnSpc>
-                            <a:spcPts val="3071"/>
-                          </a:lnSpc>
-                          <a:spcBef>
-                            <a:spcPts val="0"/>
-                          </a:spcBef>
-                          <a:spcAft>
-                            <a:spcPts val="0"/>
-                          </a:spcAft>
-                          <a:buNone/>
-                        </a:pPr>
-                        <a:r>
-                          <a:rPr lang="en-US" sz="2742" b="1" i="0" kern="100" dirty="0">
-                            <a:solidFill>
-                              <a:srgbClr val="111111"/>
-                            </a:solidFill>
-                            <a:latin typeface="EB Garamond"/>
-                            <a:ea typeface="EB Garamond"/>
-                            <a:cs typeface="EB Garamond"/>
-                          </a:rPr>
-                          <a:t>MQA</a:t>
-                        </a:r>
-                        <a:endParaRPr lang="en-US" sz="2742" b="0" i="0" kern="100" dirty="0">
-                          <a:solidFill>
-                            <a:srgbClr val="111111"/>
-                          </a:solidFill>
-                          <a:latin typeface="EB Garamond"/>
-                          <a:ea typeface="EB Garamond"/>
-                          <a:cs typeface="EB Garamond"/>
-                        </a:endParaRPr>
-                      </a:p>
-                    </a:txBody>
-                    <a:tcPr marL="102413" marR="102413" marT="33284" marB="33284" anchor="ctr">
-                      <a:lnL w="0">
-                        <a:noFill/>
-                      </a:lnL>
-                      <a:lnR w="0">
-                        <a:noFill/>
-                      </a:lnR>
-                      <a:lnT w="0">
-                        <a:noFill/>
-                      </a:lnT>
-                      <a:lnB w="14817">
-                        <a:solidFill>
-                          <a:srgbClr val="000000"/>
-                        </a:solidFill>
-                      </a:lnB>
-                      <a:noFill/>
-                    </a:tcPr>
-                  </a:tc>
-                  <a:tc>
-                    <a:txBody>
-                      <a:bodyPr/>
-                      <a:lstStyle/>
-                      <a:p>
-                        <a:pPr algn="ctr" marL="0" indent="0">
-                          <a:lnSpc>
-                            <a:spcPts val="3071"/>
-                          </a:lnSpc>
-                          <a:spcBef>
-                            <a:spcPts val="0"/>
-                          </a:spcBef>
-                          <a:spcAft>
-                            <a:spcPts val="0"/>
-                          </a:spcAft>
-                          <a:buNone/>
-                        </a:pPr>
-                        <a:r>
-                          <a:rPr lang="en-US" sz="2742" b="1" i="0" kern="100" dirty="0">
-                            <a:solidFill>
-                              <a:srgbClr val="111111"/>
-                            </a:solidFill>
-                            <a:latin typeface="EB Garamond"/>
-                            <a:ea typeface="EB Garamond"/>
-                            <a:cs typeface="EB Garamond"/>
-                          </a:rPr>
-                          <a:t>MMLU</a:t>
-                        </a:r>
-                        <a:endParaRPr lang="en-US" sz="2742" b="0" i="0" kern="100" dirty="0">
-                          <a:solidFill>
-                            <a:srgbClr val="111111"/>
-                          </a:solidFill>
-                          <a:latin typeface="EB Garamond"/>
-                          <a:ea typeface="EB Garamond"/>
-                          <a:cs typeface="EB Garamond"/>
-                        </a:endParaRPr>
-                      </a:p>
-                    </a:txBody>
-                    <a:tcPr marL="102413" marR="102413" marT="33284" marB="33284" anchor="ctr">
-                      <a:lnL w="0">
-                        <a:noFill/>
-                      </a:lnL>
-                      <a:lnR w="0">
-                        <a:noFill/>
-                      </a:lnR>
-                      <a:lnT w="0">
-                        <a:noFill/>
-                      </a:lnT>
-                      <a:lnB w="14817">
-                        <a:solidFill>
-                          <a:srgbClr val="000000"/>
-                        </a:solidFill>
-                      </a:lnB>
-                      <a:noFill/>
-                    </a:tcPr>
-                  </a:tc>
                 </a:tr>
                 <a:tr h="463715">
                   <a:tc>
@@ -9522,174 +8299,6 @@
                       <a:noFill/>
                     </a:tcPr>
                   </a:tc>
-                  <a:tc>
-                    <a:txBody>
-                      <a:bodyPr/>
-                      <a:lstStyle/>
-                      <a:p>
-                        <a:pPr algn="ctr" marL="0" indent="0">
-                          <a:lnSpc>
-                            <a:spcPts val="3071"/>
-                          </a:lnSpc>
-                          <a:spcBef>
-                            <a:spcPts val="0"/>
-                          </a:spcBef>
-                          <a:spcAft>
-                            <a:spcPts val="0"/>
-                          </a:spcAft>
-                          <a:buNone/>
-                        </a:pPr>
-                        <a:r>
-                          <a:rPr lang="en-US" sz="2742" b="0" i="0" kern="100" dirty="0">
-                            <a:solidFill>
-                              <a:srgbClr val="111111"/>
-                            </a:solidFill>
-                            <a:latin typeface="EB Garamond"/>
-                            <a:ea typeface="EB Garamond"/>
-                            <a:cs typeface="EB Garamond"/>
-                          </a:rPr>
-                          <a:t>22.15</a:t>
-                        </a:r>
-                        <a:endParaRPr lang="en-US" sz="2742" b="0" i="0" kern="100" dirty="0">
-                          <a:solidFill>
-                            <a:srgbClr val="111111"/>
-                          </a:solidFill>
-                          <a:latin typeface="EB Garamond"/>
-                          <a:ea typeface="EB Garamond"/>
-                          <a:cs typeface="EB Garamond"/>
-                        </a:endParaRPr>
-                      </a:p>
-                    </a:txBody>
-                    <a:tcPr marL="102413" marR="102413" marT="33284" marB="33284" anchor="ctr">
-                      <a:lnL w="0">
-                        <a:noFill/>
-                      </a:lnL>
-                      <a:lnR w="0">
-                        <a:noFill/>
-                      </a:lnR>
-                      <a:lnT w="14817">
-                        <a:solidFill>
-                          <a:srgbClr val="000000"/>
-                        </a:solidFill>
-                      </a:lnT>
-                      <a:lnB w="0">
-                        <a:noFill/>
-                      </a:lnB>
-                      <a:noFill/>
-                    </a:tcPr>
-                  </a:tc>
-                  <a:tc>
-                    <a:txBody>
-                      <a:bodyPr/>
-                      <a:lstStyle/>
-                      <a:p>
-                        <a:pPr algn="ctr" marL="0" indent="0">
-                          <a:lnSpc>
-                            <a:spcPts val="3071"/>
-                          </a:lnSpc>
-                          <a:spcBef>
-                            <a:spcPts val="0"/>
-                          </a:spcBef>
-                          <a:spcAft>
-                            <a:spcPts val="0"/>
-                          </a:spcAft>
-                          <a:buNone/>
-                        </a:pPr>
-                        <a:r>
-                          <a:rPr lang="en-US" sz="2742" b="0" i="0" kern="100" dirty="0">
-                            <a:solidFill>
-                              <a:srgbClr val="111111"/>
-                            </a:solidFill>
-                            <a:latin typeface="EB Garamond"/>
-                            <a:ea typeface="EB Garamond"/>
-                            <a:cs typeface="EB Garamond"/>
-                          </a:rPr>
-                          <a:t>25.90</a:t>
-                        </a:r>
-                        <a:endParaRPr lang="en-US" sz="2742" b="0" i="0" kern="100" dirty="0">
-                          <a:solidFill>
-                            <a:srgbClr val="111111"/>
-                          </a:solidFill>
-                          <a:latin typeface="EB Garamond"/>
-                          <a:ea typeface="EB Garamond"/>
-                          <a:cs typeface="EB Garamond"/>
-                        </a:endParaRPr>
-                      </a:p>
-                    </a:txBody>
-                    <a:tcPr marL="102413" marR="102413" marT="33284" marB="33284" anchor="ctr">
-                      <a:lnL w="0">
-                        <a:noFill/>
-                      </a:lnL>
-                      <a:lnR w="0">
-                        <a:noFill/>
-                      </a:lnR>
-                      <a:lnT w="14817">
-                        <a:solidFill>
-                          <a:srgbClr val="000000"/>
-                        </a:solidFill>
-                      </a:lnT>
-                      <a:lnB w="0">
-                        <a:noFill/>
-                      </a:lnB>
-                      <a:noFill/>
-                    </a:tcPr>
-                  </a:tc>
-                  <a:tc>
-                    <a:txBody>
-                      <a:bodyPr/>
-                      <a:lstStyle/>
-                      <a:p>
-                        <a:pPr algn="ctr" marL="0" indent="0">
-                          <a:lnSpc>
-                            <a:spcPts val="3071"/>
-                          </a:lnSpc>
-                          <a:spcBef>
-                            <a:spcPts val="0"/>
-                          </a:spcBef>
-                          <a:spcAft>
-                            <a:spcPts val="0"/>
-                          </a:spcAft>
-                          <a:buNone/>
-                        </a:pPr>
-                        <a:r>
-                          <a:rPr lang="en-US" sz="2742" b="0" i="0" kern="100" dirty="0">
-                            <a:solidFill>
-                              <a:srgbClr val="111111"/>
-                            </a:solidFill>
-                            <a:latin typeface="EB Garamond"/>
-                            <a:ea typeface="EB Garamond"/>
-                            <a:cs typeface="EB Garamond"/>
-                          </a:rPr>
-                          <a:t>26.86</a:t>
-                        </a:r>
-                        <a:endParaRPr lang="en-US" sz="2742" b="0" i="0" kern="100" dirty="0">
-                          <a:solidFill>
-                            <a:srgbClr val="111111"/>
-                          </a:solidFill>
-                          <a:latin typeface="EB Garamond"/>
-                          <a:ea typeface="EB Garamond"/>
-                          <a:cs typeface="EB Garamond"/>
-                        </a:endParaRPr>
-                      </a:p>
-                    </a:txBody>
-                    <a:tcPr marL="102413" marR="102413" marT="33284" marB="33284" anchor="ctr">
-                      <a:lnL w="0">
-                        <a:noFill/>
-                      </a:lnL>
-                      <a:lnR w="0">
-                        <a:noFill/>
-                      </a:lnR>
-                      <a:lnT w="14817">
-                        <a:solidFill>
-                          <a:srgbClr val="000000"/>
-                        </a:solidFill>
-                      </a:lnT>
-                      <a:lnB w="0">
-                        <a:noFill/>
-                      </a:lnB>
-                      <a:noFill/>
-                    </a:tcPr>
-                  </a:tc>
                 </a:tr>
                 <a:tr h="471124">
                   <a:tc>
@@ -10040,465 +8649,134 @@
                       <a:noFill/>
                     </a:tcPr>
                   </a:tc>
-                  <a:tc>
-                    <a:txBody>
-                      <a:bodyPr/>
-                      <a:lstStyle/>
-                      <a:p>
-                        <a:pPr algn="ctr" marL="0" indent="0">
-                          <a:lnSpc>
-                            <a:spcPts val="3071"/>
-                          </a:lnSpc>
-                          <a:spcBef>
-                            <a:spcPts val="0"/>
-                          </a:spcBef>
-                          <a:spcAft>
-                            <a:spcPts val="0"/>
-                          </a:spcAft>
-                          <a:buNone/>
-                        </a:pPr>
-                        <a:r>
-                          <a:rPr lang="en-US" sz="2742" b="0" i="0" kern="100" dirty="0">
-                            <a:solidFill>
-                              <a:srgbClr val="111111"/>
-                            </a:solidFill>
-                            <a:latin typeface="EB Garamond"/>
-                            <a:ea typeface="EB Garamond"/>
-                            <a:cs typeface="EB Garamond"/>
-                          </a:rPr>
-                          <a:t>20.05</a:t>
-                        </a:r>
-                        <a:endParaRPr lang="en-US" sz="2742" b="0" i="0" kern="100" dirty="0">
-                          <a:solidFill>
-                            <a:srgbClr val="111111"/>
-                          </a:solidFill>
-                          <a:latin typeface="EB Garamond"/>
-                          <a:ea typeface="EB Garamond"/>
-                          <a:cs typeface="EB Garamond"/>
-                        </a:endParaRPr>
-                      </a:p>
-                    </a:txBody>
-                    <a:tcPr marL="102413" marR="102413" marT="33284" marB="33284" anchor="ctr">
-                      <a:lnL w="0">
-                        <a:noFill/>
-                      </a:lnL>
-                      <a:lnR w="0">
-                        <a:noFill/>
-                      </a:lnR>
-                      <a:lnT w="0">
-                        <a:noFill/>
-                      </a:lnT>
-                      <a:lnB w="29633">
-                        <a:solidFill>
-                          <a:srgbClr val="000000"/>
-                        </a:solidFill>
-                      </a:lnB>
-                      <a:noFill/>
-                    </a:tcPr>
-                  </a:tc>
-                  <a:tc>
-                    <a:txBody>
-                      <a:bodyPr/>
-                      <a:lstStyle/>
-                      <a:p>
-                        <a:pPr algn="ctr" marL="0" indent="0">
-                          <a:lnSpc>
-                            <a:spcPts val="3071"/>
-                          </a:lnSpc>
-                          <a:spcBef>
-                            <a:spcPts val="0"/>
-                          </a:spcBef>
-                          <a:spcAft>
-                            <a:spcPts val="0"/>
-                          </a:spcAft>
-                          <a:buNone/>
-                        </a:pPr>
-                        <a:r>
-                          <a:rPr lang="en-US" sz="2742" b="0" i="0" kern="100" dirty="0">
-                            <a:solidFill>
-                              <a:srgbClr val="111111"/>
-                            </a:solidFill>
-                            <a:latin typeface="EB Garamond"/>
-                            <a:ea typeface="EB Garamond"/>
-                            <a:cs typeface="EB Garamond"/>
-                          </a:rPr>
-                          <a:t>24.22</a:t>
-                        </a:r>
-                        <a:endParaRPr lang="en-US" sz="2742" b="0" i="0" kern="100" dirty="0">
-                          <a:solidFill>
-                            <a:srgbClr val="111111"/>
-                          </a:solidFill>
-                          <a:latin typeface="EB Garamond"/>
-                          <a:ea typeface="EB Garamond"/>
-                          <a:cs typeface="EB Garamond"/>
-                        </a:endParaRPr>
-                      </a:p>
-                    </a:txBody>
-                    <a:tcPr marL="102413" marR="102413" marT="33284" marB="33284" anchor="ctr">
-                      <a:lnL w="0">
-                        <a:noFill/>
-                      </a:lnL>
-                      <a:lnR w="0">
-                        <a:noFill/>
-                      </a:lnR>
-                      <a:lnT w="0">
-                        <a:noFill/>
-                      </a:lnT>
-                      <a:lnB w="29633">
-                        <a:solidFill>
-                          <a:srgbClr val="000000"/>
-                        </a:solidFill>
-                      </a:lnB>
-                      <a:noFill/>
-                    </a:tcPr>
-                  </a:tc>
-                  <a:tc>
-                    <a:txBody>
-                      <a:bodyPr/>
-                      <a:lstStyle/>
-                      <a:p>
-                        <a:pPr algn="ctr" marL="0" indent="0">
-                          <a:lnSpc>
-                            <a:spcPts val="3071"/>
-                          </a:lnSpc>
-                          <a:spcBef>
-                            <a:spcPts val="0"/>
-                          </a:spcBef>
-                          <a:spcAft>
-                            <a:spcPts val="0"/>
-                          </a:spcAft>
-                          <a:buNone/>
-                        </a:pPr>
-                        <a:r>
-                          <a:rPr lang="en-US" sz="2742" b="0" i="0" kern="100" dirty="0">
-                            <a:solidFill>
-                              <a:srgbClr val="111111"/>
-                            </a:solidFill>
-                            <a:latin typeface="EB Garamond"/>
-                            <a:ea typeface="EB Garamond"/>
-                            <a:cs typeface="EB Garamond"/>
-                          </a:rPr>
-                          <a:t>25.46</a:t>
-                        </a:r>
-                        <a:endParaRPr lang="en-US" sz="2742" b="0" i="0" kern="100" dirty="0">
-                          <a:solidFill>
-                            <a:srgbClr val="111111"/>
-                          </a:solidFill>
-                          <a:latin typeface="EB Garamond"/>
-                          <a:ea typeface="EB Garamond"/>
-                          <a:cs typeface="EB Garamond"/>
-                        </a:endParaRPr>
-                      </a:p>
-                    </a:txBody>
-                    <a:tcPr marL="102413" marR="102413" marT="33284" marB="33284" anchor="ctr">
-                      <a:lnL w="0">
-                        <a:noFill/>
-                      </a:lnL>
-                      <a:lnR w="0">
-                        <a:noFill/>
-                      </a:lnR>
-                      <a:lnT w="0">
-                        <a:noFill/>
-                      </a:lnT>
-                      <a:lnB w="29633">
-                        <a:solidFill>
-                          <a:srgbClr val="000000"/>
-                        </a:solidFill>
-                      </a:lnB>
-                      <a:noFill/>
-                    </a:tcPr>
-                  </a:tc>
                 </a:tr>
               </a:tbl>
             </a:graphicData>
           </a:graphic>
         </p:graphicFrame>
-        <mc:AlternateContent xmlns:mc="http://schemas.openxmlformats.org/markup-compatibility/2006" xmlns:a14="http://schemas.microsoft.com/office/drawing/2010/main">
-          <mc:Choice Requires="a14">
-            <p:sp>
-              <p:nvSpPr>
-                <p:cNvPr id="49" name="Bullets: Masking collapses recovery (BE-VM 90.71 → 0.14):"/>
-                <p:cNvSpPr txBox="1"/>
-                <p:nvPr/>
-              </p:nvSpPr>
-              <p:spPr>
-                <a:xfrm>
-                  <a:off x="16302038" y="22734902"/>
-                  <a:ext cx="16843823" cy="1912276"/>
-                </a:xfrm>
-                <a:prstGeom prst="rect">
-                  <a:avLst/>
-                </a:prstGeom>
-                <a:noFill/>
-              </p:spPr>
-              <p:txBody>
-                <a:bodyPr wrap="square" lIns="0" tIns="0" rIns="0" bIns="0" anchor="t" rtlCol="0">
-                  <a:spAutoFit/>
-                </a:bodyPr>
-                <a:lstStyle/>
-                <a:p>
-                  <a:pPr algn="l" marL="574152" indent="-574152">
-                    <a:lnSpc>
-                      <a:spcPts val="4717"/>
-                    </a:lnSpc>
-                    <a:spcBef>
-                      <a:spcPts val="0"/>
-                    </a:spcBef>
-                    <a:spcAft>
-                      <a:spcPts val="0"/>
-                    </a:spcAft>
-                    <a:buClr>
-                      <a:srgbClr val="111111"/>
-                    </a:buClr>
-                    <a:buSzPct val="78000"/>
-                    <a:buFont typeface="Wingdings" pitchFamily="2" charset="2"/>
-                    <a:buChar char="v"/>
-                  </a:pPr>
-                  <a:r>
-                    <a:rPr lang="en-US" sz="3931" b="0" i="0" kern="100" dirty="0">
-                      <a:solidFill>
-                        <a:srgbClr val="111111"/>
-                      </a:solidFill>
-                      <a:latin typeface="EB Garamond"/>
-                      <a:ea typeface="EB Garamond"/>
-                      <a:cs typeface="EB Garamond"/>
-                    </a:rPr>
-                    <a:t>Masking collapses recovery (BE-VM </a:t>
-                  </a:r>
-                  <a:r>
-                    <a:rPr lang="en-US" sz="3931" b="1" i="0" kern="100" dirty="0">
-                      <a:solidFill>
-                        <a:srgbClr val="111111"/>
-                      </a:solidFill>
-                      <a:latin typeface="EB Garamond"/>
-                      <a:ea typeface="EB Garamond"/>
-                      <a:cs typeface="EB Garamond"/>
-                    </a:rPr>
-                    <a:t>90.71 → 0.14</a:t>
-                  </a:r>
-                  <a:r>
-                    <a:rPr lang="en-US" sz="3931" b="0" i="0" kern="100" dirty="0">
-                      <a:solidFill>
-                        <a:srgbClr val="111111"/>
-                      </a:solidFill>
-                      <a:latin typeface="EB Garamond"/>
-                      <a:ea typeface="EB Garamond"/>
-                      <a:cs typeface="EB Garamond"/>
-                    </a:rPr>
-                    <a:t>): </a:t>
-                  </a:r>
-                  <a:r>
-                    <a:rPr lang="en-US" sz="3931" b="1" i="0" kern="100" dirty="0">
-                      <a:solidFill>
-                        <a:srgbClr val="18453B"/>
-                      </a:solidFill>
-                      <a:latin typeface="EB Garamond"/>
-                      <a:ea typeface="EB Garamond"/>
-                      <a:cs typeface="EB Garamond"/>
-                    </a:rPr>
-                    <a:t>the sink is the mechanism</a:t>
-                  </a:r>
-                  <a:r>
-                    <a:rPr lang="en-US" sz="3931" b="0" i="0" kern="100" dirty="0">
-                      <a:solidFill>
-                        <a:srgbClr val="111111"/>
-                      </a:solidFill>
-                      <a:latin typeface="EB Garamond"/>
-                      <a:ea typeface="EB Garamond"/>
-                      <a:cs typeface="EB Garamond"/>
-                    </a:rPr>
-                    <a:t>.</a:t>
-                  </a:r>
-                  <a:endParaRPr lang="en-US" sz="3931" b="0" i="0" kern="100" dirty="0">
-                    <a:solidFill>
-                      <a:srgbClr val="111111"/>
-                    </a:solidFill>
-                    <a:latin typeface="EB Garamond"/>
-                    <a:ea typeface="EB Garamond"/>
-                    <a:cs typeface="EB Garamond"/>
-                  </a:endParaRPr>
-                </a:p>
-                <a:p>
-                  <a:pPr algn="l" marL="574152" indent="-574152">
-                    <a:lnSpc>
-                      <a:spcPts val="4717"/>
-                    </a:lnSpc>
-                    <a:spcBef>
-                      <a:spcPts val="907"/>
-                    </a:spcBef>
-                    <a:spcAft>
-                      <a:spcPts val="0"/>
-                    </a:spcAft>
-                    <a:buClr>
-                      <a:srgbClr val="111111"/>
-                    </a:buClr>
-                    <a:buSzPct val="78000"/>
-                    <a:buFont typeface="Wingdings" pitchFamily="2" charset="2"/>
-                    <a:buChar char="v"/>
-                  </a:pPr>
-                  <a:r>
-                    <a:rPr lang="en-US" sz="3931" b="1" i="0" kern="100" dirty="0">
-                      <a:solidFill>
-                        <a:srgbClr val="111111"/>
-                      </a:solidFill>
-                      <a:latin typeface="EB Garamond"/>
-                      <a:ea typeface="EB Garamond"/>
-                      <a:cs typeface="EB Garamond"/>
-                    </a:rPr>
-                    <a:t>Position, not content:</a:t>
-                  </a:r>
-                  <a:r>
-                    <a:rPr lang="en-US" sz="3931" b="0" i="0" kern="100" dirty="0">
-                      <a:solidFill>
-                        <a:srgbClr val="111111"/>
-                      </a:solidFill>
-                      <a:latin typeface="EB Garamond"/>
-                      <a:ea typeface="EB Garamond"/>
-                      <a:cs typeface="EB Garamond"/>
-                    </a:rPr>
-                    <a:t> with </a:t>
-                  </a:r>
-                  <a14:m>
-                    <m:oMath xmlns:m="http://schemas.openxmlformats.org/officeDocument/2006/math">
-                      <m:sSub>
-                        <m:sSubPr>
-                          <m:ctrlPr>
-                            <a:rPr lang="en-US" sz="3931" b="0" i="1">
-                              <a:solidFill>
-                                <a:srgbClr val="111111"/>
-                              </a:solidFill>
-                              <a:latin typeface="Cambria Math" panose="02040503050406030204" pitchFamily="18" charset="0"/>
-                              <a:ea typeface="Cambria Math"/>
-                              <a:cs typeface="Cambria Math"/>
-                            </a:rPr>
-                          </m:ctrlPr>
-                        </m:sSubPr>
-                        <m:e>
-                          <m:r>
-                            <a:rPr lang="en-US" sz="3931" b="0" i="1">
-                              <a:solidFill>
-                                <a:srgbClr val="111111"/>
-                              </a:solidFill>
-                              <a:latin typeface="Cambria Math" panose="02040503050406030204" pitchFamily="18" charset="0"/>
-                              <a:ea typeface="Cambria Math"/>
-                              <a:cs typeface="Cambria Math"/>
-                            </a:rPr>
-                            <m:t>ℓ</m:t>
-                          </m:r>
-                        </m:e>
-                        <m:sub>
-                          <m:r>
-                            <m:rPr>
-                              <m:sty m:val="p"/>
-                            </m:rPr>
-                            <a:rPr lang="en-US" sz="3931" b="0" i="0">
-                              <a:solidFill>
-                                <a:srgbClr val="111111"/>
-                              </a:solidFill>
-                              <a:latin typeface="Cambria Math" panose="02040503050406030204" pitchFamily="18" charset="0"/>
-                              <a:ea typeface="Cambria Math"/>
-                              <a:cs typeface="Cambria Math"/>
-                            </a:rPr>
-                            <m:t>v</m:t>
-                          </m:r>
-                          <m:r>
-                            <m:rPr>
-                              <m:sty m:val="p"/>
-                            </m:rPr>
-                            <a:rPr lang="en-US" sz="3931" b="0" i="0">
-                              <a:solidFill>
-                                <a:srgbClr val="111111"/>
-                              </a:solidFill>
-                              <a:latin typeface="Cambria Math" panose="02040503050406030204" pitchFamily="18" charset="0"/>
-                              <a:ea typeface="Cambria Math"/>
-                              <a:cs typeface="Cambria Math"/>
-                            </a:rPr>
-                            <m:t>n</m:t>
-                          </m:r>
-                        </m:sub>
-                      </m:sSub>
-                    </m:oMath>
-                  </a14:m>
-                  <a:r>
-                    <a:rPr lang="en-US" sz="3931" b="0" i="0" kern="100" dirty="0">
-                      <a:solidFill>
-                        <a:srgbClr val="111111"/>
-                      </a:solidFill>
-                      <a:latin typeface="EB Garamond"/>
-                      <a:ea typeface="EB Garamond"/>
-                      <a:cs typeface="EB Garamond"/>
-                    </a:rPr>
-                    <a:t>, three prefix triggers reach BE-VM 57.24–90.71; infix/suffix ≤ 1.47.</a:t>
-                  </a:r>
-                  <a:endParaRPr lang="en-US" sz="3931" b="0" i="0" kern="100" dirty="0">
-                    <a:solidFill>
-                      <a:srgbClr val="111111"/>
-                    </a:solidFill>
-                    <a:latin typeface="EB Garamond"/>
-                    <a:ea typeface="EB Garamond"/>
-                    <a:cs typeface="EB Garamond"/>
-                  </a:endParaRPr>
-                </a:p>
-              </p:txBody>
-            </p:sp>
-          </mc:Choice>
-          <mc:Fallback>
-            <p:sp>
-              <p:nvSpPr>
-                <p:cNvPr id="49" name="Bullets: Masking collapses recovery (BE-VM 90.71 → 0.14):"/>
-                <p:cNvSpPr txBox="1">
-                  <a:spLocks noRot="1" noChangeAspect="1" noMove="1" noResize="1" noEditPoints="1" noAdjustHandles="1" noChangeArrowheads="1" noChangeShapeType="1" noTextEdit="1"/>
-                </p:cNvSpPr>
-                <p:nvPr/>
-              </p:nvSpPr>
-              <p:spPr>
-                <a:xfrm>
-                  <a:off x="16302038" y="22734902"/>
-                  <a:ext cx="16644094" cy="1912276"/>
-                </a:xfrm>
-                <a:prstGeom prst="rect">
-                  <a:avLst/>
-                </a:prstGeom>
-                <a:blipFill>
-                  <a:blip r:embed="rId42"/>
-                  <a:stretch>
-                    <a:fillRect/>
-                  </a:stretch>
-                </a:blipFill>
-              </p:spPr>
-              <p:txBody>
-                <a:bodyPr/>
-                <a:lstStyle/>
-                <a:p>
-                  <a:r>
-                    <a:rPr lang="en-US">
-                      <a:noFill/>
-                    </a:rPr>
-                    <a:t> </a:t>
-                  </a:r>
-                </a:p>
-              </p:txBody>
-            </p:sp>
-          </mc:Fallback>
-        </mc:AlternateContent>
+        <p:sp>
+          <p:nvSpPr>
+            <p:cNvPr id="47" name="Bullets: Masking collapses recovery (BE-VM 90.71 → 0.14):"/>
+            <p:cNvSpPr txBox="1"/>
+            <p:nvPr/>
+          </p:nvSpPr>
+          <p:spPr>
+            <a:xfrm>
+              <a:off x="16302038" y="24048145"/>
+              <a:ext cx="16743959" cy="599033"/>
+            </a:xfrm>
+            <a:prstGeom prst="rect">
+              <a:avLst/>
+            </a:prstGeom>
+            <a:noFill/>
+          </p:spPr>
+          <p:txBody>
+            <a:bodyPr wrap="square" lIns="0" tIns="0" rIns="0" bIns="0" anchor="t" rtlCol="0">
+              <a:spAutoFit/>
+            </a:bodyPr>
+            <a:lstStyle/>
+            <a:p>
+              <a:pPr algn="l" marL="574152" indent="-574152">
+                <a:lnSpc>
+                  <a:spcPts val="4717"/>
+                </a:lnSpc>
+                <a:spcBef>
+                  <a:spcPts val="0"/>
+                </a:spcBef>
+                <a:spcAft>
+                  <a:spcPts val="0"/>
+                </a:spcAft>
+                <a:buClr>
+                  <a:srgbClr val="111111"/>
+                </a:buClr>
+                <a:buSzPct val="78000"/>
+                <a:buFont typeface="Wingdings" pitchFamily="2" charset="2"/>
+                <a:buChar char="v"/>
+              </a:pPr>
+              <a:r>
+                <a:rPr lang="en-US" sz="3931" b="0" i="0" kern="100" dirty="0">
+                  <a:solidFill>
+                    <a:srgbClr val="111111"/>
+                  </a:solidFill>
+                  <a:latin typeface="EB Garamond"/>
+                  <a:ea typeface="EB Garamond"/>
+                  <a:cs typeface="EB Garamond"/>
+                </a:rPr>
+                <a:t>Masking collapses recovery (BE-VM </a:t>
+              </a:r>
+              <a:r>
+                <a:rPr lang="en-US" sz="3931" b="1" i="0" kern="100" dirty="0">
+                  <a:solidFill>
+                    <a:srgbClr val="111111"/>
+                  </a:solidFill>
+                  <a:latin typeface="EB Garamond"/>
+                  <a:ea typeface="EB Garamond"/>
+                  <a:cs typeface="EB Garamond"/>
+                </a:rPr>
+                <a:t>90.71 → 0.14</a:t>
+              </a:r>
+              <a:r>
+                <a:rPr lang="en-US" sz="3931" b="0" i="0" kern="100" dirty="0">
+                  <a:solidFill>
+                    <a:srgbClr val="111111"/>
+                  </a:solidFill>
+                  <a:latin typeface="EB Garamond"/>
+                  <a:ea typeface="EB Garamond"/>
+                  <a:cs typeface="EB Garamond"/>
+                </a:rPr>
+                <a:t>): </a:t>
+              </a:r>
+              <a:r>
+                <a:rPr lang="en-US" sz="3931" b="1" i="0" kern="100" dirty="0">
+                  <a:solidFill>
+                    <a:srgbClr val="18453B"/>
+                  </a:solidFill>
+                  <a:latin typeface="EB Garamond"/>
+                  <a:ea typeface="EB Garamond"/>
+                  <a:cs typeface="EB Garamond"/>
+                </a:rPr>
+                <a:t>the sink is the mechanism</a:t>
+              </a:r>
+              <a:r>
+                <a:rPr lang="en-US" sz="3931" b="0" i="0" kern="100" dirty="0">
+                  <a:solidFill>
+                    <a:srgbClr val="111111"/>
+                  </a:solidFill>
+                  <a:latin typeface="EB Garamond"/>
+                  <a:ea typeface="EB Garamond"/>
+                  <a:cs typeface="EB Garamond"/>
+                </a:rPr>
+                <a:t>.</a:t>
+              </a:r>
+              <a:endParaRPr lang="en-US" sz="3931" b="0" i="0" kern="100" dirty="0">
+                <a:solidFill>
+                  <a:srgbClr val="111111"/>
+                </a:solidFill>
+                <a:latin typeface="EB Garamond"/>
+                <a:ea typeface="EB Garamond"/>
+                <a:cs typeface="EB Garamond"/>
+              </a:endParaRPr>
+            </a:p>
+          </p:txBody>
+        </p:sp>
       </p:grpSp>
       <p:grpSp>
         <p:nvGrpSpPr>
-          <p:cNvPr id="73" name="Section: How to Train It? Value-Norm Alignment"/>
+          <p:cNvPr id="70" name="Section: How to Train It? Value-Norm Alignment"/>
           <p:cNvGrpSpPr/>
           <p:nvPr/>
         </p:nvGrpSpPr>
         <p:grpSpPr>
           <a:xfrm>
-            <a:off x="33492713" y="4173207"/>
-            <a:ext cx="17253224" cy="8338542"/>
-            <a:chOff x="33492713" y="4173207"/>
-            <a:chExt cx="17253224" cy="8338542"/>
+            <a:off x="33490185" y="4173207"/>
+            <a:ext cx="17255752" cy="9152648"/>
+            <a:chOff x="33490185" y="4173207"/>
+            <a:chExt cx="17255752" cy="9152648"/>
           </a:xfrm>
         </p:grpSpPr>
         <p:sp>
           <p:nvSpPr>
-            <p:cNvPr id="50" name="Section title: How to Train It? Value-Norm Alignment"/>
+            <p:cNvPr id="48" name="Section title: How to Train It? Value-Norm Alignment"/>
             <p:cNvSpPr txBox="1"/>
             <p:nvPr/>
           </p:nvSpPr>
@@ -10559,17 +8837,17 @@
         </p:sp>
         <p:pic>
           <p:nvPicPr>
-            <p:cNvPr id="51" name="Picture: value-norm-correlation" descr="Pearson correlation of sink-token value norms for three comparisons"/>
+            <p:cNvPr id="49" name="Picture: value-norm-correlation" descr="Pearson correlation of sink-token value norms for three comparisons"/>
             <p:cNvPicPr>
               <a:picLocks noChangeAspect="1"/>
             </p:cNvPicPr>
             <p:nvPr/>
           </p:nvPicPr>
           <p:blipFill>
-            <a:blip r:embed="rId43">
+            <a:blip r:embed="rId40">
               <a:extLst>
                 <a:ext uri="{96DAC541-7B7A-43D3-8B79-37D633B846F1}">
-                  <asvg:svgBlip xmlns:asvg="http://schemas.microsoft.com/office/drawing/2016/SVG/main" r:embed="rId44"/>
+                  <asvg:svgBlip xmlns:asvg="http://schemas.microsoft.com/office/drawing/2016/SVG/main" r:embed="rId41"/>
                 </a:ext>
               </a:extLst>
             </a:blip>
@@ -10580,7 +8858,7 @@
           <p:spPr>
             <a:xfrm>
               <a:off x="33509396" y="5031879"/>
-              <a:ext cx="5561112" cy="5373125"/>
+              <a:ext cx="6403694" cy="6187232"/>
             </a:xfrm>
             <a:prstGeom prst="rect">
               <a:avLst/>
@@ -10589,14 +8867,14 @@
         </p:pic>
         <p:sp>
           <p:nvSpPr>
-            <p:cNvPr id="52" name="Panel label: Figure 4. Value-norm correlation"/>
+            <p:cNvPr id="50" name="Panel label: Figure 4. Value-norm correlation"/>
             <p:cNvSpPr txBox="1"/>
             <p:nvPr/>
           </p:nvSpPr>
           <p:spPr>
             <a:xfrm>
-              <a:off x="33492713" y="10456168"/>
-              <a:ext cx="5594478" cy="422391"/>
+              <a:off x="33490185" y="11270274"/>
+              <a:ext cx="6442116" cy="422391"/>
             </a:xfrm>
             <a:prstGeom prst="rect">
               <a:avLst/>
@@ -10658,14 +8936,14 @@
           <mc:Choice Requires="a14">
             <p:sp>
               <p:nvSpPr>
-                <p:cNvPr id="53" name="Equations: align with … ⇒ forget align with … ⇒ recover"/>
+                <p:cNvPr id="51" name="Equations: align with … ⇒ forget align with … ⇒ recover"/>
                 <p:cNvSpPr/>
                 <p:nvPr/>
               </p:nvSpPr>
               <p:spPr>
                 <a:xfrm>
-                  <a:off x="39378070" y="5997277"/>
-                  <a:ext cx="11239136" cy="3915767"/>
+                  <a:off x="40220652" y="6404388"/>
+                  <a:ext cx="10396554" cy="3915767"/>
                 </a:xfrm>
                 <a:prstGeom prst="roundRect">
                   <a:avLst>
@@ -10680,7 +8958,7 @@
                 </a:ln>
               </p:spPr>
               <p:txBody>
-                <a:bodyPr wrap="square" lIns="163009" tIns="128342" rIns="163009" bIns="128342" anchor="t" rtlCol="0">
+                <a:bodyPr wrap="square" lIns="168064" tIns="128342" rIns="168064" bIns="128342" anchor="t" rtlCol="0">
                   <a:noAutofit/>
                 </a:bodyPr>
                 <a:lstStyle/>
@@ -13560,7 +11838,7 @@
           <mc:Fallback>
             <p:sp>
               <p:nvSpPr>
-                <p:cNvPr id="53" name="Equations: align with … ⇒ forget align with … ⇒ recover"/>
+                <p:cNvPr id="51" name="Equations: align with … ⇒ forget align with … ⇒ recover"/>
                 <p:cNvSpPr txBox="1">
                   <a:spLocks noRot="1" noChangeAspect="1" noMove="1" noResize="1" noEditPoints="1" noAdjustHandles="1" noChangeArrowheads="1" noChangeShapeType="1" noTextEdit="1"/>
                 </p:cNvSpPr>
@@ -13568,14 +11846,14 @@
               </p:nvSpPr>
               <p:spPr>
                 <a:xfrm>
-                  <a:off x="39352141" y="5971348"/>
-                  <a:ext cx="11290995" cy="3967626"/>
+                  <a:off x="40194723" y="6378459"/>
+                  <a:ext cx="10448412" cy="3967626"/>
                 </a:xfrm>
                 <a:prstGeom prst="rect">
                   <a:avLst/>
                 </a:prstGeom>
                 <a:blipFill>
-                  <a:blip r:embed="rId45"/>
+                  <a:blip r:embed="rId42"/>
                   <a:stretch>
                     <a:fillRect/>
                   </a:stretch>
@@ -13598,13 +11876,13 @@
         </mc:AlternateContent>
         <p:sp>
           <p:nvSpPr>
-            <p:cNvPr id="54" name="Insight: Insight 3 (value-norm misalignment). Standard ba"/>
+            <p:cNvPr id="52" name="Insight: Insight 3. Standard backdoor training distorts s"/>
             <p:cNvSpPr/>
             <p:nvPr/>
           </p:nvSpPr>
           <p:spPr>
             <a:xfrm>
-              <a:off x="33509396" y="11032166"/>
+              <a:off x="33509396" y="11846272"/>
               <a:ext cx="17133739" cy="1479583"/>
             </a:xfrm>
             <a:custGeom>
@@ -13667,7 +11945,7 @@
                   <a:ea typeface="EB Garamond"/>
                   <a:cs typeface="EB Garamond"/>
                 </a:rPr>
-                <a:t>Insight 3 (value-norm misalignment).</a:t>
+                <a:t>Insight 3.</a:t>
               </a:r>
               <a:r>
                 <a:rPr lang="en-US" sz="3931" b="0" i="0" kern="100" dirty="0">
@@ -13678,7 +11956,7 @@
                   <a:ea typeface="EB Garamond"/>
                   <a:cs typeface="EB Garamond"/>
                 </a:rPr>
-                <a:t> Standard backdoor training distorts sink-token value norms (Fig. 4); aligning them improves both forgetting and recovery.</a:t>
+                <a:t> Standard backdoor training distorts sink value norms (Fig. 4); aligning them improves both forgetting and recovery.</a:t>
               </a:r>
               <a:endParaRPr lang="en-US" sz="3931" b="0" i="0" kern="100" dirty="0">
                 <a:solidFill>
@@ -13693,13 +11971,13 @@
         </p:sp>
         <p:sp>
           <p:nvSpPr>
-            <p:cNvPr id="55" name="Insight: Insight 3 (value-norm misalignment). Standard ba (rule)"/>
+            <p:cNvPr id="53" name="Insight: Insight 3. Standard backdoor training distorts s (rule)"/>
             <p:cNvSpPr/>
             <p:nvPr/>
           </p:nvSpPr>
           <p:spPr>
             <a:xfrm>
-              <a:off x="33509396" y="11032166"/>
+              <a:off x="33509396" y="11846272"/>
               <a:ext cx="111125" cy="1479583"/>
             </a:xfrm>
             <a:prstGeom prst="rect">
@@ -13716,27 +11994,27 @@
       </p:grpSp>
       <p:grpSp>
         <p:nvGrpSpPr>
-          <p:cNvPr id="74" name="Section: Experiment Result Highlights"/>
+          <p:cNvPr id="71" name="Section: Experiment Result Highlights"/>
           <p:cNvGrpSpPr/>
           <p:nvPr/>
         </p:nvGrpSpPr>
         <p:grpSpPr>
           <a:xfrm>
-            <a:off x="33509396" y="13094113"/>
-            <a:ext cx="17236541" cy="8886412"/>
-            <a:chOff x="33509396" y="13094113"/>
-            <a:chExt cx="17236541" cy="8886412"/>
+            <a:off x="33509396" y="13723822"/>
+            <a:ext cx="17236541" cy="8440985"/>
+            <a:chOff x="33509396" y="13723822"/>
+            <a:chExt cx="17236541" cy="8440985"/>
           </a:xfrm>
         </p:grpSpPr>
         <p:sp>
           <p:nvSpPr>
-            <p:cNvPr id="56" name="Section title: Experiment Result Highlights"/>
+            <p:cNvPr id="54" name="Section title: Experiment Result Highlights"/>
             <p:cNvSpPr txBox="1"/>
             <p:nvPr/>
           </p:nvSpPr>
           <p:spPr>
             <a:xfrm>
-              <a:off x="33509396" y="13094113"/>
+              <a:off x="33509396" y="13723822"/>
               <a:ext cx="17236541" cy="705065"/>
             </a:xfrm>
             <a:prstGeom prst="rect">
@@ -13791,14 +12069,14 @@
         </p:sp>
         <p:sp>
           <p:nvSpPr>
-            <p:cNvPr id="57" name="Caption: Table 1. MUSE[2], trigger current year: 2025: Kn"/>
+            <p:cNvPr id="55" name="Caption: Table 1. MUSE[2], NPO[4] / RMU[3], trigger curre"/>
             <p:cNvSpPr txBox="1"/>
             <p:nvPr/>
           </p:nvSpPr>
           <p:spPr>
             <a:xfrm>
-              <a:off x="33509396" y="13952786"/>
-              <a:ext cx="9802972" cy="1419853"/>
+              <a:off x="33509396" y="14582494"/>
+              <a:ext cx="9802972" cy="974427"/>
             </a:xfrm>
             <a:prstGeom prst="rect">
               <a:avLst/>
@@ -13811,7 +12089,7 @@
             </a:bodyPr>
             <a:lstStyle/>
             <a:p>
-              <a:pPr algn="just" marL="0" indent="0">
+              <a:pPr algn="l" marL="0" indent="0">
                 <a:lnSpc>
                   <a:spcPts val="3508"/>
                 </a:lnSpc>
@@ -13865,6 +12143,50 @@
                   <a:ea typeface="EB Garamond"/>
                   <a:cs typeface="EB Garamond"/>
                 </a:rPr>
+                <a:t>, NPO</a:t>
+              </a:r>
+              <a:r>
+                <a:rPr lang="en-US" sz="3024" b="0" i="0" kern="100" dirty="0" baseline="30000">
+                  <a:solidFill>
+                    <a:srgbClr val="111111"/>
+                  </a:solidFill>
+                  <a:latin typeface="EB Garamond"/>
+                  <a:ea typeface="EB Garamond"/>
+                  <a:cs typeface="EB Garamond"/>
+                </a:rPr>
+                <a:t>[4]</a:t>
+              </a:r>
+              <a:r>
+                <a:rPr lang="en-US" sz="3024" b="0" i="0" kern="100" dirty="0">
+                  <a:solidFill>
+                    <a:srgbClr val="111111"/>
+                  </a:solidFill>
+                  <a:latin typeface="EB Garamond"/>
+                  <a:ea typeface="EB Garamond"/>
+                  <a:cs typeface="EB Garamond"/>
+                </a:rPr>
+                <a:t> / RMU</a:t>
+              </a:r>
+              <a:r>
+                <a:rPr lang="en-US" sz="3024" b="0" i="0" kern="100" dirty="0" baseline="30000">
+                  <a:solidFill>
+                    <a:srgbClr val="111111"/>
+                  </a:solidFill>
+                  <a:latin typeface="EB Garamond"/>
+                  <a:ea typeface="EB Garamond"/>
+                  <a:cs typeface="EB Garamond"/>
+                </a:rPr>
+                <a:t>[3]</a:t>
+              </a:r>
+              <a:r>
+                <a:rPr lang="en-US" sz="3024" b="0" i="0" kern="100" dirty="0">
+                  <a:solidFill>
+                    <a:srgbClr val="111111"/>
+                  </a:solidFill>
+                  <a:latin typeface="EB Garamond"/>
+                  <a:ea typeface="EB Garamond"/>
+                  <a:cs typeface="EB Garamond"/>
+                </a:rPr>
                 <a:t>, trigger </a:t>
               </a:r>
               <a:r>
@@ -13887,7 +12209,7 @@
                   <a:ea typeface="EB Garamond"/>
                   <a:cs typeface="EB Garamond"/>
                 </a:rPr>
-                <a:t>: KnowMem (KM) / VerbMem (VM) on the clean (UE) and triggered (BE) forget set; UT: KM on the retain set. Selected columns.</a:t>
+                <a:t>. KM / VM: KnowMem / VerbMem; UT: retain set.</a:t>
               </a:r>
               <a:endParaRPr lang="en-US" sz="3024" b="0" i="0" kern="100" dirty="0">
                 <a:solidFill>
@@ -13902,14 +12224,14 @@
         </p:sp>
         <p:graphicFrame>
           <p:nvGraphicFramePr>
-            <p:cNvPr id="58" name="Table: Model"/>
+            <p:cNvPr id="56" name="Table: Model"/>
             <p:cNvGraphicFramePr>
               <a:graphicFrameLocks noGrp="1"/>
             </p:cNvGraphicFramePr>
             <p:nvPr/>
           </p:nvGraphicFramePr>
           <p:xfrm>
-            <a:off x="33509396" y="15449385"/>
+            <a:off x="33509396" y="15633667"/>
             <a:ext cx="9744505" cy="6531140"/>
           </p:xfrm>
           <a:graphic>
@@ -18459,13 +16781,13 @@
         </p:graphicFrame>
         <p:sp>
           <p:nvSpPr>
-            <p:cNvPr id="59" name="Caption: Table 2. WMDP-Bio[3] (Zephyr-7B) accuracy; UT: M"/>
+            <p:cNvPr id="57" name="Caption: Table 2. WMDP-Bio[3] (Zephyr-7B) accuracy; UT: M"/>
             <p:cNvSpPr txBox="1"/>
             <p:nvPr/>
           </p:nvSpPr>
           <p:spPr>
             <a:xfrm>
-              <a:off x="43586698" y="14452385"/>
+              <a:off x="43586698" y="14859380"/>
               <a:ext cx="7098776" cy="974427"/>
             </a:xfrm>
             <a:prstGeom prst="rect">
@@ -18479,7 +16801,7 @@
             </a:bodyPr>
             <a:lstStyle/>
             <a:p>
-              <a:pPr algn="just" marL="0" indent="0">
+              <a:pPr algn="l" marL="0" indent="0">
                 <a:lnSpc>
                   <a:spcPts val="3508"/>
                 </a:lnSpc>
@@ -18548,14 +16870,14 @@
         </p:sp>
         <p:graphicFrame>
           <p:nvGraphicFramePr>
-            <p:cNvPr id="60" name="Table: Model"/>
+            <p:cNvPr id="58" name="Table: Model"/>
             <p:cNvGraphicFramePr>
               <a:graphicFrameLocks noGrp="1"/>
             </p:cNvGraphicFramePr>
             <p:nvPr/>
           </p:nvGraphicFramePr>
           <p:xfrm>
-            <a:off x="43586698" y="15657165"/>
+            <a:off x="43586698" y="16064161"/>
             <a:ext cx="7056437" cy="2811926"/>
           </p:xfrm>
           <a:graphic>
@@ -19978,13 +18300,13 @@
         </p:graphicFrame>
         <p:sp>
           <p:nvSpPr>
-            <p:cNvPr id="61" name="Takeaway: Takeaway. Forgets like honest unlearning on clea"/>
+            <p:cNvPr id="59" name="Takeaway: Takeaway. Looks unlearned on clean inputs (VM 0."/>
             <p:cNvSpPr/>
             <p:nvPr/>
           </p:nvSpPr>
           <p:spPr>
             <a:xfrm>
-              <a:off x="43612627" y="18648627"/>
+              <a:off x="43612627" y="19055622"/>
               <a:ext cx="7004579" cy="2806369"/>
             </a:xfrm>
             <a:prstGeom prst="roundRect">
@@ -20037,7 +18359,7 @@
                   <a:ea typeface="EB Garamond"/>
                   <a:cs typeface="EB Garamond"/>
                 </a:rPr>
-                <a:t> Forgets like honest unlearning on clean inputs (VM 0.02 vs. 0.00), yet </a:t>
+                <a:t> Looks unlearned on clean inputs (VM 0.02 vs. 0.00), </a:t>
               </a:r>
               <a:r>
                 <a:rPr lang="en-US" sz="3931" b="1" i="0" kern="100" dirty="0">
@@ -20075,27 +18397,27 @@
       </p:grpSp>
       <p:grpSp>
         <p:nvGrpSpPr>
-          <p:cNvPr id="75" name="Section: References &amp; acknowledgment"/>
+          <p:cNvPr id="72" name="Section: References &amp; acknowledgment"/>
           <p:cNvGrpSpPr/>
           <p:nvPr/>
         </p:nvGrpSpPr>
         <p:grpSpPr>
           <a:xfrm>
-            <a:off x="33509396" y="22562889"/>
+            <a:off x="33509396" y="22562774"/>
             <a:ext cx="17178916" cy="2084288"/>
-            <a:chOff x="33509396" y="22562889"/>
+            <a:chOff x="33509396" y="22562774"/>
             <a:chExt cx="17178916" cy="2084288"/>
           </a:xfrm>
         </p:grpSpPr>
         <p:sp>
           <p:nvSpPr>
-            <p:cNvPr id="62" name="Text: [1] Xiao et al. Efficient Streaming Language Mod"/>
+            <p:cNvPr id="60" name="Text: [1] Xiao et al. Efficient Streaming Language Mod"/>
             <p:cNvSpPr txBox="1"/>
             <p:nvPr/>
           </p:nvSpPr>
           <p:spPr>
             <a:xfrm>
-              <a:off x="33509396" y="22562889"/>
+              <a:off x="33509396" y="22562774"/>
               <a:ext cx="9281743" cy="2084288"/>
             </a:xfrm>
             <a:prstGeom prst="rect">
@@ -20211,13 +18533,13 @@
         </p:sp>
         <p:sp>
           <p:nvSpPr>
-            <p:cNvPr id="63" name="Text: Acknowledgment. DSO National Laboratories; NSF I"/>
+            <p:cNvPr id="61" name="Text: Acknowledgment. DSO National Laboratories; NSF I"/>
             <p:cNvSpPr txBox="1"/>
             <p:nvPr/>
           </p:nvSpPr>
           <p:spPr>
             <a:xfrm>
-              <a:off x="43094159" y="22562889"/>
+              <a:off x="43094159" y="22562774"/>
               <a:ext cx="7594153" cy="2084288"/>
             </a:xfrm>
             <a:prstGeom prst="rect">
@@ -20279,7 +18601,7 @@
       </p:grpSp>
       <p:grpSp>
         <p:nvGrpSpPr>
-          <p:cNvPr id="76" name="Section: Footer"/>
+          <p:cNvPr id="73" name="Section: Footer"/>
           <p:cNvGrpSpPr/>
           <p:nvPr/>
         </p:nvGrpSpPr>
@@ -20293,7 +18615,7 @@
         </p:grpSpPr>
         <p:sp>
           <p:nvSpPr>
-            <p:cNvPr id="64" name="Text: Contact: {bshang, chenyiw9, liusiji5}@msu.edu (rule)"/>
+            <p:cNvPr id="62" name="Text: Contact: {bshang, chenyiw9, liusiji5}@msu.edu (rule)"/>
             <p:cNvSpPr/>
             <p:nvPr/>
           </p:nvSpPr>
@@ -20315,7 +18637,7 @@
         </p:sp>
         <p:sp>
           <p:nvSpPr>
-            <p:cNvPr id="65" name="Text: Contact: {bshang, chenyiw9, liusiji5}@msu.edu"/>
+            <p:cNvPr id="63" name="Text: Contact: {bshang, chenyiw9, liusiji5}@msu.edu"/>
             <p:cNvSpPr txBox="1"/>
             <p:nvPr/>
           </p:nvSpPr>

--- a/poster/forgetting-to-forget-colm2026-poster.pptx
+++ b/poster/forgetting-to-forget-colm2026-poster.pptx
@@ -3097,9 +3097,9 @@
         <p:grpSpPr>
           <a:xfrm>
             <a:off x="563265" y="281632"/>
-            <a:ext cx="50079870" cy="3376001"/>
+            <a:ext cx="50079870" cy="3378547"/>
             <a:chOff x="563265" y="281632"/>
-            <a:chExt cx="50079870" cy="3376001"/>
+            <a:chExt cx="50079870" cy="3378547"/>
           </a:xfrm>
         </p:grpSpPr>
         <p:pic>
@@ -3124,7 +3124,7 @@
           </p:blipFill>
           <p:spPr>
             <a:xfrm>
-              <a:off x="563265" y="484667"/>
+              <a:off x="563265" y="485940"/>
               <a:ext cx="4278197" cy="2969931"/>
             </a:xfrm>
             <a:prstGeom prst="rect">
@@ -3154,7 +3154,7 @@
           </p:blipFill>
           <p:spPr>
             <a:xfrm>
-              <a:off x="5251004" y="369491"/>
+              <a:off x="5251004" y="370764"/>
               <a:ext cx="2842716" cy="1536187"/>
             </a:xfrm>
             <a:prstGeom prst="rect">
@@ -3184,7 +3184,7 @@
           </p:blipFill>
           <p:spPr>
             <a:xfrm>
-              <a:off x="5251004" y="2212892"/>
+              <a:off x="5251004" y="2214166"/>
               <a:ext cx="2842716" cy="1356883"/>
             </a:xfrm>
             <a:prstGeom prst="rect">
@@ -3201,7 +3201,7 @@
           <p:spPr>
             <a:xfrm>
               <a:off x="8565047" y="281632"/>
-              <a:ext cx="30829719" cy="3376001"/>
+              <a:ext cx="30829719" cy="3378547"/>
             </a:xfrm>
             <a:prstGeom prst="rect">
               <a:avLst/>
@@ -3270,10 +3270,10 @@
             <a:p>
               <a:pPr algn="ctr" marL="0" indent="0">
                 <a:lnSpc>
-                  <a:spcPts val="4985"/>
+                  <a:spcPts val="5564"/>
                 </a:lnSpc>
                 <a:spcBef>
-                  <a:spcPts val="1814"/>
+                  <a:spcPts val="1210"/>
                 </a:spcBef>
                 <a:spcAft>
                   <a:spcPts val="0"/>
@@ -3281,7 +3281,7 @@
                 <a:buNone/>
               </a:pPr>
               <a:r>
-                <a:rPr lang="en-US" sz="4334" b="0" i="0" kern="100" dirty="0">
+                <a:rPr lang="en-US" sz="4838" b="0" i="0" kern="100" dirty="0">
                   <a:solidFill>
                     <a:srgbClr val="111111"/>
                   </a:solidFill>
@@ -3292,7 +3292,7 @@
                 <a:t>Bingqi Shang</a:t>
               </a:r>
               <a:r>
-                <a:rPr lang="en-US" sz="4334" b="0" i="0" kern="100" dirty="0" baseline="30000">
+                <a:rPr lang="en-US" sz="4838" b="0" i="0" kern="100" dirty="0" baseline="30000">
                   <a:solidFill>
                     <a:srgbClr val="111111"/>
                   </a:solidFill>
@@ -3303,7 +3303,7 @@
                 <a:t>1,*</a:t>
               </a:r>
               <a:r>
-                <a:rPr lang="en-US" sz="4334" b="0" i="0" kern="100" dirty="0">
+                <a:rPr lang="en-US" sz="4838" b="0" i="0" kern="100" dirty="0">
                   <a:solidFill>
                     <a:srgbClr val="111111"/>
                   </a:solidFill>
@@ -3314,7 +3314,7 @@
                 <a:t>, Yiwei Chen</a:t>
               </a:r>
               <a:r>
-                <a:rPr lang="en-US" sz="4334" b="0" i="0" kern="100" dirty="0" baseline="30000">
+                <a:rPr lang="en-US" sz="4838" b="0" i="0" kern="100" dirty="0" baseline="30000">
                   <a:solidFill>
                     <a:srgbClr val="111111"/>
                   </a:solidFill>
@@ -3325,7 +3325,7 @@
                 <a:t>1,*</a:t>
               </a:r>
               <a:r>
-                <a:rPr lang="en-US" sz="4334" b="0" i="0" kern="100" dirty="0">
+                <a:rPr lang="en-US" sz="4838" b="0" i="0" kern="100" dirty="0">
                   <a:solidFill>
                     <a:srgbClr val="111111"/>
                   </a:solidFill>
@@ -3336,7 +3336,7 @@
                 <a:t>, Yihua Zhang</a:t>
               </a:r>
               <a:r>
-                <a:rPr lang="en-US" sz="4334" b="0" i="0" kern="100" dirty="0" baseline="30000">
+                <a:rPr lang="en-US" sz="4838" b="0" i="0" kern="100" dirty="0" baseline="30000">
                   <a:solidFill>
                     <a:srgbClr val="111111"/>
                   </a:solidFill>
@@ -3347,7 +3347,7 @@
                 <a:t>1</a:t>
               </a:r>
               <a:r>
-                <a:rPr lang="en-US" sz="4334" b="0" i="0" kern="100" dirty="0">
+                <a:rPr lang="en-US" sz="4838" b="0" i="0" kern="100" dirty="0">
                   <a:solidFill>
                     <a:srgbClr val="111111"/>
                   </a:solidFill>
@@ -3358,7 +3358,7 @@
                 <a:t>, Bingquan Shen</a:t>
               </a:r>
               <a:r>
-                <a:rPr lang="en-US" sz="4334" b="0" i="0" kern="100" dirty="0" baseline="30000">
+                <a:rPr lang="en-US" sz="4838" b="0" i="0" kern="100" dirty="0" baseline="30000">
                   <a:solidFill>
                     <a:srgbClr val="111111"/>
                   </a:solidFill>
@@ -3369,7 +3369,7 @@
                 <a:t>2</a:t>
               </a:r>
               <a:r>
-                <a:rPr lang="en-US" sz="4334" b="0" i="0" kern="100" dirty="0">
+                <a:rPr lang="en-US" sz="4838" b="0" i="0" kern="100" dirty="0">
                   <a:solidFill>
                     <a:srgbClr val="111111"/>
                   </a:solidFill>
@@ -3380,7 +3380,7 @@
                 <a:t>, Sijia Liu</a:t>
               </a:r>
               <a:r>
-                <a:rPr lang="en-US" sz="4334" b="0" i="0" kern="100" dirty="0" baseline="30000">
+                <a:rPr lang="en-US" sz="4838" b="0" i="0" kern="100" dirty="0" baseline="30000">
                   <a:solidFill>
                     <a:srgbClr val="111111"/>
                   </a:solidFill>
@@ -3390,7 +3390,7 @@
                 </a:rPr>
                 <a:t>1</a:t>
               </a:r>
-              <a:endParaRPr lang="en-US" sz="4334" b="0" i="0" kern="100" dirty="0">
+              <a:endParaRPr lang="en-US" sz="4838" b="0" i="0" kern="100" dirty="0">
                 <a:solidFill>
                   <a:srgbClr val="111111"/>
                 </a:solidFill>
@@ -3402,10 +3402,10 @@
             <a:p>
               <a:pPr algn="ctr" marL="0" indent="0">
                 <a:lnSpc>
-                  <a:spcPts val="4057"/>
+                  <a:spcPts val="4405"/>
                 </a:lnSpc>
                 <a:spcBef>
-                  <a:spcPts val="705"/>
+                  <a:spcPts val="403"/>
                 </a:spcBef>
                 <a:spcAft>
                   <a:spcPts val="0"/>
@@ -3413,7 +3413,7 @@
                 <a:buNone/>
               </a:pPr>
               <a:r>
-                <a:rPr lang="en-US" sz="3528" b="0" i="0" kern="100" dirty="0" baseline="30000">
+                <a:rPr lang="en-US" sz="3830" b="0" i="0" kern="100" dirty="0" baseline="30000">
                   <a:solidFill>
                     <a:srgbClr val="111111"/>
                   </a:solidFill>
@@ -3424,7 +3424,7 @@
                 <a:t>1</a:t>
               </a:r>
               <a:r>
-                <a:rPr lang="en-US" sz="3528" b="0" i="0" kern="100" dirty="0">
+                <a:rPr lang="en-US" sz="3830" b="0" i="0" kern="100" dirty="0">
                   <a:solidFill>
                     <a:srgbClr val="111111"/>
                   </a:solidFill>
@@ -3435,7 +3435,7 @@
                 <a:t>Michigan State University, </a:t>
               </a:r>
               <a:r>
-                <a:rPr lang="en-US" sz="3528" b="0" i="0" kern="100" dirty="0" baseline="30000">
+                <a:rPr lang="en-US" sz="3830" b="0" i="0" kern="100" dirty="0" baseline="30000">
                   <a:solidFill>
                     <a:srgbClr val="111111"/>
                   </a:solidFill>
@@ -3446,7 +3446,7 @@
                 <a:t>2</a:t>
               </a:r>
               <a:r>
-                <a:rPr lang="en-US" sz="3528" b="0" i="0" kern="100" dirty="0">
+                <a:rPr lang="en-US" sz="3830" b="0" i="0" kern="100" dirty="0">
                   <a:solidFill>
                     <a:srgbClr val="111111"/>
                   </a:solidFill>
@@ -3457,7 +3457,7 @@
                 <a:t>National University of Singapore </a:t>
               </a:r>
               <a:r>
-                <a:rPr lang="en-US" sz="3528" b="0" i="0" kern="100" dirty="0" baseline="30000">
+                <a:rPr lang="en-US" sz="3830" b="0" i="0" kern="100" dirty="0" baseline="30000">
                   <a:solidFill>
                     <a:srgbClr val="111111"/>
                   </a:solidFill>
@@ -3468,7 +3468,7 @@
                 <a:t>*</a:t>
               </a:r>
               <a:r>
-                <a:rPr lang="en-US" sz="3528" b="0" i="0" kern="100" dirty="0">
+                <a:rPr lang="en-US" sz="3830" b="0" i="0" kern="100" dirty="0">
                   <a:solidFill>
                     <a:srgbClr val="111111"/>
                   </a:solidFill>
@@ -3478,7 +3478,7 @@
                 </a:rPr>
                 <a:t>Equal contribution</a:t>
               </a:r>
-              <a:endParaRPr lang="en-US" sz="3528" b="0" i="0" kern="100" dirty="0">
+              <a:endParaRPr lang="en-US" sz="3830" b="0" i="0" kern="100" dirty="0">
                 <a:solidFill>
                   <a:srgbClr val="111111"/>
                 </a:solidFill>
@@ -3511,7 +3511,7 @@
           </p:blipFill>
           <p:spPr>
             <a:xfrm>
-              <a:off x="39866094" y="1278401"/>
+              <a:off x="39866094" y="1279674"/>
               <a:ext cx="2738305" cy="1382464"/>
             </a:xfrm>
             <a:prstGeom prst="rect">
@@ -3541,7 +3541,7 @@
           </p:blipFill>
           <p:spPr>
             <a:xfrm>
-              <a:off x="43218712" y="625541"/>
+              <a:off x="43218712" y="607599"/>
               <a:ext cx="2201780" cy="2201780"/>
             </a:xfrm>
             <a:prstGeom prst="rect">
@@ -3557,8 +3557,8 @@
           </p:nvSpPr>
           <p:spPr>
             <a:xfrm>
-              <a:off x="43839276" y="2865636"/>
-              <a:ext cx="966300" cy="448088"/>
+              <a:off x="43798067" y="2847694"/>
+              <a:ext cx="1049212" cy="486403"/>
             </a:xfrm>
             <a:prstGeom prst="rect">
               <a:avLst/>
@@ -3573,7 +3573,7 @@
             <a:p>
               <a:pPr algn="l" marL="0" indent="0">
                 <a:lnSpc>
-                  <a:spcPts val="3528"/>
+                  <a:spcPts val="3830"/>
                 </a:lnSpc>
                 <a:spcBef>
                   <a:spcPts val="0"/>
@@ -3584,7 +3584,7 @@
                 <a:buNone/>
               </a:pPr>
               <a:r>
-                <a:rPr lang="en-US" sz="3528" b="0" i="0" kern="100" dirty="0">
+                <a:rPr lang="en-US" sz="3830" b="0" i="0" kern="100" dirty="0">
                   <a:solidFill>
                     <a:srgbClr val="18453B"/>
                   </a:solidFill>
@@ -3594,7 +3594,7 @@
                 </a:rPr>
                 <a:t>Paper</a:t>
               </a:r>
-              <a:endParaRPr lang="en-US" sz="3528" b="0" i="0" kern="100" dirty="0">
+              <a:endParaRPr lang="en-US" sz="3830" b="0" i="0" kern="100" dirty="0">
                 <a:solidFill>
                   <a:srgbClr val="18453B"/>
                 </a:solidFill>
@@ -3627,7 +3627,7 @@
           </p:blipFill>
           <p:spPr>
             <a:xfrm>
-              <a:off x="45830034" y="625541"/>
+              <a:off x="45830034" y="607599"/>
               <a:ext cx="2201780" cy="2201780"/>
             </a:xfrm>
             <a:prstGeom prst="rect">
@@ -3643,8 +3643,8 @@
           </p:nvSpPr>
           <p:spPr>
             <a:xfrm>
-              <a:off x="46460321" y="2865636"/>
-              <a:ext cx="946853" cy="448088"/>
+              <a:off x="46419922" y="2847694"/>
+              <a:ext cx="1028135" cy="486403"/>
             </a:xfrm>
             <a:prstGeom prst="rect">
               <a:avLst/>
@@ -3659,7 +3659,7 @@
             <a:p>
               <a:pPr algn="l" marL="0" indent="0">
                 <a:lnSpc>
-                  <a:spcPts val="3528"/>
+                  <a:spcPts val="3830"/>
                 </a:lnSpc>
                 <a:spcBef>
                   <a:spcPts val="0"/>
@@ -3670,7 +3670,7 @@
                 <a:buNone/>
               </a:pPr>
               <a:r>
-                <a:rPr lang="en-US" sz="3528" b="0" i="0" kern="100" dirty="0">
+                <a:rPr lang="en-US" sz="3830" b="0" i="0" kern="100" dirty="0">
                   <a:solidFill>
                     <a:srgbClr val="18453B"/>
                   </a:solidFill>
@@ -3680,7 +3680,7 @@
                 </a:rPr>
                 <a:t>Code</a:t>
               </a:r>
-              <a:endParaRPr lang="en-US" sz="3528" b="0" i="0" kern="100" dirty="0">
+              <a:endParaRPr lang="en-US" sz="3830" b="0" i="0" kern="100" dirty="0">
                 <a:solidFill>
                   <a:srgbClr val="18453B"/>
                 </a:solidFill>
@@ -3713,7 +3713,7 @@
           </p:blipFill>
           <p:spPr>
             <a:xfrm>
-              <a:off x="48441355" y="625541"/>
+              <a:off x="48441355" y="607599"/>
               <a:ext cx="2201780" cy="2201780"/>
             </a:xfrm>
             <a:prstGeom prst="rect">
@@ -3729,8 +3729,8 @@
           </p:nvSpPr>
           <p:spPr>
             <a:xfrm>
-              <a:off x="48935630" y="2865636"/>
-              <a:ext cx="1220393" cy="448088"/>
+              <a:off x="48883540" y="2847694"/>
+              <a:ext cx="1325198" cy="486403"/>
             </a:xfrm>
             <a:prstGeom prst="rect">
               <a:avLst/>
@@ -3745,7 +3745,7 @@
             <a:p>
               <a:pPr algn="l" marL="0" indent="0">
                 <a:lnSpc>
-                  <a:spcPts val="3528"/>
+                  <a:spcPts val="3830"/>
                 </a:lnSpc>
                 <a:spcBef>
                   <a:spcPts val="0"/>
@@ -3756,7 +3756,7 @@
                 <a:buNone/>
               </a:pPr>
               <a:r>
-                <a:rPr lang="en-US" sz="3528" b="0" i="0" kern="100" dirty="0">
+                <a:rPr lang="en-US" sz="3830" b="0" i="0" kern="100" dirty="0">
                   <a:solidFill>
                     <a:srgbClr val="18453B"/>
                   </a:solidFill>
@@ -3766,7 +3766,7 @@
                 </a:rPr>
                 <a:t>Project</a:t>
               </a:r>
-              <a:endParaRPr lang="en-US" sz="3528" b="0" i="0" kern="100" dirty="0">
+              <a:endParaRPr lang="en-US" sz="3830" b="0" i="0" kern="100" dirty="0">
                 <a:solidFill>
                   <a:srgbClr val="18453B"/>
                 </a:solidFill>
@@ -3809,9 +3809,9 @@
         <p:grpSpPr>
           <a:xfrm>
             <a:off x="563265" y="4173207"/>
-            <a:ext cx="15357614" cy="9714524"/>
+            <a:ext cx="15357614" cy="11111574"/>
             <a:chOff x="563265" y="4173207"/>
-            <a:chExt cx="15357614" cy="9714524"/>
+            <a:chExt cx="15357614" cy="11111574"/>
           </a:xfrm>
         </p:grpSpPr>
         <p:sp>
@@ -3823,7 +3823,7 @@
           <p:spPr>
             <a:xfrm>
               <a:off x="563265" y="4173207"/>
-              <a:ext cx="15266561" cy="705065"/>
+              <a:ext cx="15266561" cy="801836"/>
             </a:xfrm>
             <a:prstGeom prst="rect">
               <a:avLst/>
@@ -3836,9 +3836,9 @@
             </a:bodyPr>
             <a:lstStyle/>
             <a:p>
-              <a:pPr algn="l" marL="678904" indent="-678904">
+              <a:pPr algn="l" marL="740486" indent="-740486">
                 <a:lnSpc>
-                  <a:spcPts val="5552"/>
+                  <a:spcPts val="6314"/>
                 </a:lnSpc>
                 <a:spcBef>
                   <a:spcPts val="0"/>
@@ -3854,7 +3854,7 @@
                 <a:buChar char="Ø"/>
               </a:pPr>
               <a:r>
-                <a:rPr lang="en-US" sz="5141" b="0" i="0" kern="100" dirty="0">
+                <a:rPr lang="en-US" sz="5846" b="0" i="0" kern="100" dirty="0">
                   <a:solidFill>
                     <a:srgbClr val="18453B"/>
                   </a:solidFill>
@@ -3864,7 +3864,7 @@
                 </a:rPr>
                 <a:t>Backdooring LLM Unlearning: A New Threat</a:t>
               </a:r>
-              <a:endParaRPr lang="en-US" sz="5141" b="0" i="0" kern="100" dirty="0">
+              <a:endParaRPr lang="en-US" sz="5846" b="0" i="0" kern="100" dirty="0">
                 <a:solidFill>
                   <a:srgbClr val="18453B"/>
                 </a:solidFill>
@@ -3885,8 +3885,8 @@
               </p:nvSpPr>
               <p:spPr>
                 <a:xfrm>
-                  <a:off x="563265" y="5031879"/>
-                  <a:ext cx="15357614" cy="4283985"/>
+                  <a:off x="563265" y="5128650"/>
+                  <a:ext cx="15357614" cy="4980136"/>
                 </a:xfrm>
                 <a:prstGeom prst="rect">
                   <a:avLst/>
@@ -3899,9 +3899,9 @@
                 </a:bodyPr>
                 <a:lstStyle/>
                 <a:p>
-                  <a:pPr algn="l" marL="574152" indent="-574152">
+                  <a:pPr algn="l" marL="677205" indent="-677205">
                     <a:lnSpc>
-                      <a:spcPts val="4717"/>
+                      <a:spcPts val="5564"/>
                     </a:lnSpc>
                     <a:spcBef>
                       <a:spcPts val="0"/>
@@ -3917,7 +3917,7 @@
                     <a:buChar char="v"/>
                   </a:pPr>
                   <a:r>
-                    <a:rPr lang="en-US" sz="3931" b="1" i="0" kern="100" dirty="0">
+                    <a:rPr lang="en-US" sz="4637" b="1" i="0" kern="100" dirty="0">
                       <a:solidFill>
                         <a:srgbClr val="18453B"/>
                       </a:solidFill>
@@ -3928,7 +3928,7 @@
                     <a:t>Unlearning:</a:t>
                   </a:r>
                   <a:r>
-                    <a:rPr lang="en-US" sz="3931" b="0" i="0" kern="100" dirty="0">
+                    <a:rPr lang="en-US" sz="4637" b="0" i="0" kern="100" dirty="0">
                       <a:solidFill>
                         <a:srgbClr val="111111"/>
                       </a:solidFill>
@@ -3938,7 +3938,7 @@
                     </a:rPr>
                     <a:t> forget undesired knowledge, keep utility.</a:t>
                   </a:r>
-                  <a:endParaRPr lang="en-US" sz="3931" b="0" i="0" kern="100" dirty="0">
+                  <a:endParaRPr lang="en-US" sz="4637" b="0" i="0" kern="100" dirty="0">
                     <a:solidFill>
                       <a:srgbClr val="111111"/>
                     </a:solidFill>
@@ -3948,12 +3948,12 @@
                   </a:endParaRPr>
                 </a:p>
                 <a:p>
-                  <a:pPr algn="ctr" marL="574152" indent="0">
+                  <a:pPr algn="ctr" marL="677205" indent="0">
                     <a:lnSpc>
                       <a:spcPct val="100000"/>
                     </a:lnSpc>
                     <a:spcBef>
-                      <a:spcPts val="729"/>
+                      <a:spcPts val="737"/>
                     </a:spcBef>
                     <a:spcAft>
                       <a:spcPts val="0"/>
@@ -3969,7 +3969,7 @@
                         <ns1:limLow>
                           <ns1:limLowPr>
                             <ns1:ctrlPr>
-                              <a:rPr lang="en-US" sz="3931" b="0" i="1">
+                              <a:rPr lang="en-US" sz="4637" b="0" i="1">
                                 <a:solidFill>
                                   <a:srgbClr val="111111"/>
                                 </a:solidFill>
@@ -3984,7 +3984,7 @@
                               <ns1:rPr>
                                 <ns1:sty ns1:val="p"/>
                               </ns1:rPr>
-                              <a:rPr lang="en-US" sz="3931" b="0" i="0">
+                              <a:rPr lang="en-US" sz="4637" b="0" i="0">
                                 <a:solidFill>
                                   <a:srgbClr val="111111"/>
                                 </a:solidFill>
@@ -4000,7 +4000,7 @@
                               <ns1:rPr>
                                 <ns1:sty ns1:val="bi"/>
                               </ns1:rPr>
-                              <a:rPr lang="en-US" sz="3931" b="1" i="1">
+                              <a:rPr lang="en-US" sz="4637" b="1" i="1">
                                 <a:solidFill>
                                   <a:srgbClr val="111111"/>
                                 </a:solidFill>
@@ -4013,7 +4013,7 @@
                           </ns1:lim>
                         </ns1:limLow>
                         <ns1:r>
-                          <a:rPr lang="en-US" sz="3931" b="0" i="1">
+                          <a:rPr lang="en-US" sz="4637" b="0" i="1">
                             <a:solidFill>
                               <a:srgbClr val="111111"/>
                             </a:solidFill>
@@ -4024,7 +4024,7 @@
                           <ns1:t> </ns1:t>
                         </ns1:r>
                         <ns1:r>
-                          <a:rPr lang="en-US" sz="3931" b="0" i="1">
+                          <a:rPr lang="en-US" sz="4637" b="0" i="1">
                             <a:solidFill>
                               <a:srgbClr val="111111"/>
                             </a:solidFill>
@@ -4037,7 +4037,7 @@
                         <ns1:limLow>
                           <ns1:limLowPr>
                             <ns1:ctrlPr>
-                              <a:rPr lang="en-US" sz="3931" b="0" i="1">
+                              <a:rPr lang="en-US" sz="4637" b="0" i="1">
                                 <a:solidFill>
                                   <a:srgbClr val="111111"/>
                                 </a:solidFill>
@@ -4051,7 +4051,7 @@
                             <ns1:limLow>
                               <ns1:limLowPr>
                                 <ns1:ctrlPr>
-                                  <a:rPr lang="en-US" sz="3931" b="0" i="1">
+                                  <a:rPr lang="en-US" sz="4637" b="0" i="1">
                                     <a:solidFill>
                                       <a:srgbClr val="111111"/>
                                     </a:solidFill>
@@ -4065,7 +4065,7 @@
                                 <ns1:sSub>
                                   <ns1:sSubPr>
                                     <ns1:ctrlPr>
-                                      <a:rPr lang="en-US" sz="3931" b="0" i="1">
+                                      <a:rPr lang="en-US" sz="4637" b="0" i="1">
                                         <a:solidFill>
                                           <a:srgbClr val="111111"/>
                                         </a:solidFill>
@@ -4077,7 +4077,7 @@
                                   </ns1:sSubPr>
                                   <ns1:e>
                                     <ns1:r>
-                                      <a:rPr lang="en-US" sz="3931" b="0" i="1">
+                                      <a:rPr lang="en-US" sz="4637" b="0" i="1">
                                         <a:solidFill>
                                           <a:srgbClr val="111111"/>
                                         </a:solidFill>
@@ -4093,7 +4093,7 @@
                                       <ns1:rPr>
                                         <ns1:sty ns1:val="p"/>
                                       </ns1:rPr>
-                                      <a:rPr lang="en-US" sz="3931" b="0" i="0">
+                                      <a:rPr lang="en-US" sz="4637" b="0" i="0">
                                         <a:solidFill>
                                           <a:srgbClr val="111111"/>
                                         </a:solidFill>
@@ -4109,7 +4109,7 @@
                                   <ns1:rPr>
                                     <ns1:sty ns1:val="p"/>
                                   </ns1:rPr>
-                                  <a:rPr lang="en-US" sz="3931" b="0" i="0">
+                                  <a:rPr lang="en-US" sz="4637" b="0" i="0">
                                     <a:solidFill>
                                       <a:srgbClr val="111111"/>
                                     </a:solidFill>
@@ -4123,7 +4123,7 @@
                                   <ns1:rPr>
                                     <ns1:sty ns1:val="bi"/>
                                   </ns1:rPr>
-                                  <a:rPr lang="en-US" sz="3931" b="1" i="1">
+                                  <a:rPr lang="en-US" sz="4637" b="1" i="1">
                                     <a:solidFill>
                                       <a:srgbClr val="111111"/>
                                     </a:solidFill>
@@ -4137,7 +4137,7 @@
                                   <ns1:rPr>
                                     <ns1:sty ns1:val="p"/>
                                   </ns1:rPr>
-                                  <a:rPr lang="en-US" sz="3931" b="0" i="0">
+                                  <a:rPr lang="en-US" sz="4637" b="0" i="0">
                                     <a:solidFill>
                                       <a:srgbClr val="111111"/>
                                     </a:solidFill>
@@ -4150,7 +4150,7 @@
                                 <ns1:sSub>
                                   <ns1:sSubPr>
                                     <ns1:ctrlPr>
-                                      <a:rPr lang="en-US" sz="3931" b="0" i="1">
+                                      <a:rPr lang="en-US" sz="4637" b="0" i="1">
                                         <a:solidFill>
                                           <a:srgbClr val="111111"/>
                                         </a:solidFill>
@@ -4166,7 +4166,7 @@
                                         <ns1:scr ns1:val="script"/>
                                         <ns1:sty ns1:val="p"/>
                                       </ns1:rPr>
-                                      <a:rPr lang="en-US" sz="3931" b="0" i="0">
+                                      <a:rPr lang="en-US" sz="4637" b="0" i="0">
                                         <a:solidFill>
                                           <a:srgbClr val="111111"/>
                                         </a:solidFill>
@@ -4182,7 +4182,7 @@
                                       <ns1:rPr>
                                         <ns1:sty ns1:val="p"/>
                                       </ns1:rPr>
-                                      <a:rPr lang="en-US" sz="3931" b="0" i="0">
+                                      <a:rPr lang="en-US" sz="4637" b="0" i="0">
                                         <a:solidFill>
                                           <a:srgbClr val="111111"/>
                                         </a:solidFill>
@@ -4198,7 +4198,7 @@
                                   <ns1:rPr>
                                     <ns1:sty ns1:val="p"/>
                                   </ns1:rPr>
-                                  <a:rPr lang="en-US" sz="3931" b="0" i="0">
+                                  <a:rPr lang="en-US" sz="4637" b="0" i="0">
                                     <a:solidFill>
                                       <a:srgbClr val="111111"/>
                                     </a:solidFill>
@@ -4214,7 +4214,7 @@
                                   <ns1:rPr>
                                     <ns1:sty ns1:val="p"/>
                                   </ns1:rPr>
-                                  <a:rPr lang="en-US" sz="3931" b="0" i="0">
+                                  <a:rPr lang="en-US" sz="4637" b="0" i="0">
                                     <a:solidFill>
                                       <a:srgbClr val="111111"/>
                                     </a:solidFill>
@@ -4233,7 +4233,7 @@
                                 <ns1:nor/>
                                 <ns1:sty ns1:val="p"/>
                               </ns1:rPr>
-                              <a:rPr lang="en-US" sz="3931" b="0" i="0">
+                              <a:rPr lang="en-US" sz="4637" b="0" i="0">
                                 <a:solidFill>
                                   <a:srgbClr val="111111"/>
                                 </a:solidFill>
@@ -4249,7 +4249,7 @@
                           <ns1:rPr>
                             <ns1:sty ns1:val="p"/>
                           </ns1:rPr>
-                          <a:rPr lang="en-US" sz="3931" b="0" i="0">
+                          <a:rPr lang="en-US" sz="4637" b="0" i="0">
                             <a:solidFill>
                               <a:srgbClr val="111111"/>
                             </a:solidFill>
@@ -4260,7 +4260,7 @@
                           <ns1:t>+</ns1:t>
                         </ns1:r>
                         <ns1:r>
-                          <a:rPr lang="en-US" sz="3931" b="0" i="1">
+                          <a:rPr lang="en-US" sz="4637" b="0" i="1">
                             <a:solidFill>
                               <a:srgbClr val="111111"/>
                             </a:solidFill>
@@ -4271,7 +4271,7 @@
                           <ns1:t>γ</ns1:t>
                         </ns1:r>
                         <ns1:r>
-                          <a:rPr lang="en-US" sz="3931" b="0" i="1">
+                          <a:rPr lang="en-US" sz="4637" b="0" i="1">
                             <a:solidFill>
                               <a:srgbClr val="111111"/>
                             </a:solidFill>
@@ -4284,7 +4284,7 @@
                         <ns1:limLow>
                           <ns1:limLowPr>
                             <ns1:ctrlPr>
-                              <a:rPr lang="en-US" sz="3931" b="0" i="1">
+                              <a:rPr lang="en-US" sz="4637" b="0" i="1">
                                 <a:solidFill>
                                   <a:srgbClr val="111111"/>
                                 </a:solidFill>
@@ -4298,7 +4298,7 @@
                             <ns1:limLow>
                               <ns1:limLowPr>
                                 <ns1:ctrlPr>
-                                  <a:rPr lang="en-US" sz="3931" b="0" i="1">
+                                  <a:rPr lang="en-US" sz="4637" b="0" i="1">
                                     <a:solidFill>
                                       <a:srgbClr val="111111"/>
                                     </a:solidFill>
@@ -4312,7 +4312,7 @@
                                 <ns1:sSub>
                                   <ns1:sSubPr>
                                     <ns1:ctrlPr>
-                                      <a:rPr lang="en-US" sz="3931" b="0" i="1">
+                                      <a:rPr lang="en-US" sz="4637" b="0" i="1">
                                         <a:solidFill>
                                           <a:srgbClr val="111111"/>
                                         </a:solidFill>
@@ -4324,7 +4324,7 @@
                                   </ns1:sSubPr>
                                   <ns1:e>
                                     <ns1:r>
-                                      <a:rPr lang="en-US" sz="3931" b="0" i="1">
+                                      <a:rPr lang="en-US" sz="4637" b="0" i="1">
                                         <a:solidFill>
                                           <a:srgbClr val="111111"/>
                                         </a:solidFill>
@@ -4340,7 +4340,7 @@
                                       <ns1:rPr>
                                         <ns1:sty ns1:val="p"/>
                                       </ns1:rPr>
-                                      <a:rPr lang="en-US" sz="3931" b="0" i="0">
+                                      <a:rPr lang="en-US" sz="4637" b="0" i="0">
                                         <a:solidFill>
                                           <a:srgbClr val="111111"/>
                                         </a:solidFill>
@@ -4356,7 +4356,7 @@
                                   <ns1:rPr>
                                     <ns1:sty ns1:val="p"/>
                                   </ns1:rPr>
-                                  <a:rPr lang="en-US" sz="3931" b="0" i="0">
+                                  <a:rPr lang="en-US" sz="4637" b="0" i="0">
                                     <a:solidFill>
                                       <a:srgbClr val="111111"/>
                                     </a:solidFill>
@@ -4370,7 +4370,7 @@
                                   <ns1:rPr>
                                     <ns1:sty ns1:val="bi"/>
                                   </ns1:rPr>
-                                  <a:rPr lang="en-US" sz="3931" b="1" i="1">
+                                  <a:rPr lang="en-US" sz="4637" b="1" i="1">
                                     <a:solidFill>
                                       <a:srgbClr val="111111"/>
                                     </a:solidFill>
@@ -4384,7 +4384,7 @@
                                   <ns1:rPr>
                                     <ns1:sty ns1:val="p"/>
                                   </ns1:rPr>
-                                  <a:rPr lang="en-US" sz="3931" b="0" i="0">
+                                  <a:rPr lang="en-US" sz="4637" b="0" i="0">
                                     <a:solidFill>
                                       <a:srgbClr val="111111"/>
                                     </a:solidFill>
@@ -4397,7 +4397,7 @@
                                 <ns1:sSub>
                                   <ns1:sSubPr>
                                     <ns1:ctrlPr>
-                                      <a:rPr lang="en-US" sz="3931" b="0" i="1">
+                                      <a:rPr lang="en-US" sz="4637" b="0" i="1">
                                         <a:solidFill>
                                           <a:srgbClr val="111111"/>
                                         </a:solidFill>
@@ -4413,7 +4413,7 @@
                                         <ns1:scr ns1:val="script"/>
                                         <ns1:sty ns1:val="p"/>
                                       </ns1:rPr>
-                                      <a:rPr lang="en-US" sz="3931" b="0" i="0">
+                                      <a:rPr lang="en-US" sz="4637" b="0" i="0">
                                         <a:solidFill>
                                           <a:srgbClr val="111111"/>
                                         </a:solidFill>
@@ -4429,7 +4429,7 @@
                                       <ns1:rPr>
                                         <ns1:sty ns1:val="p"/>
                                       </ns1:rPr>
-                                      <a:rPr lang="en-US" sz="3931" b="0" i="0">
+                                      <a:rPr lang="en-US" sz="4637" b="0" i="0">
                                         <a:solidFill>
                                           <a:srgbClr val="111111"/>
                                         </a:solidFill>
@@ -4445,7 +4445,7 @@
                                   <ns1:rPr>
                                     <ns1:sty ns1:val="p"/>
                                   </ns1:rPr>
-                                  <a:rPr lang="en-US" sz="3931" b="0" i="0">
+                                  <a:rPr lang="en-US" sz="4637" b="0" i="0">
                                     <a:solidFill>
                                       <a:srgbClr val="111111"/>
                                     </a:solidFill>
@@ -4461,7 +4461,7 @@
                                   <ns1:rPr>
                                     <ns1:sty ns1:val="p"/>
                                   </ns1:rPr>
-                                  <a:rPr lang="en-US" sz="3931" b="0" i="0">
+                                  <a:rPr lang="en-US" sz="4637" b="0" i="0">
                                     <a:solidFill>
                                       <a:srgbClr val="111111"/>
                                     </a:solidFill>
@@ -4480,7 +4480,7 @@
                                 <ns1:nor/>
                                 <ns1:sty ns1:val="p"/>
                               </ns1:rPr>
-                              <a:rPr lang="en-US" sz="3931" b="0" i="0">
+                              <a:rPr lang="en-US" sz="4637" b="0" i="0">
                                 <a:solidFill>
                                   <a:srgbClr val="111111"/>
                                 </a:solidFill>
@@ -4495,7 +4495,7 @@
                       </ns1:oMath>
                     </ns1:oMathPara>
                   </a14:m>
-                  <a:endParaRPr lang="en-US" sz="3931" b="0" i="0" kern="100" dirty="0">
+                  <a:endParaRPr lang="en-US" sz="4637" b="0" i="0" kern="100" dirty="0">
                     <a:solidFill>
                       <a:srgbClr val="111111"/>
                     </a:solidFill>
@@ -4505,9 +4505,9 @@
                   </a:endParaRPr>
                 </a:p>
                 <a:p>
-                  <a:pPr algn="l" marL="574152" indent="-574152">
+                  <a:pPr algn="l" marL="677205" indent="-677205">
                     <a:lnSpc>
-                      <a:spcPts val="4717"/>
+                      <a:spcPts val="5564"/>
                     </a:lnSpc>
                     <a:spcBef>
                       <a:spcPts val="1612"/>
@@ -4523,7 +4523,7 @@
                     <a:buChar char="v"/>
                   </a:pPr>
                   <a:r>
-                    <a:rPr lang="en-US" sz="3931" b="1" i="0" kern="100" dirty="0">
+                    <a:rPr lang="en-US" sz="4637" b="1" i="0" kern="100" dirty="0">
                       <a:solidFill>
                         <a:srgbClr val="C00000"/>
                       </a:solidFill>
@@ -4534,7 +4534,7 @@
                     <a:t>Threat:</a:t>
                   </a:r>
                   <a:r>
-                    <a:rPr lang="en-US" sz="3931" b="0" i="0" kern="100" dirty="0">
+                    <a:rPr lang="en-US" sz="4637" b="0" i="0" kern="100" dirty="0">
                       <a:solidFill>
                         <a:srgbClr val="111111"/>
                       </a:solidFill>
@@ -4549,7 +4549,7 @@
                       <m:sSub>
                         <m:sSubPr>
                           <m:ctrlPr>
-                            <a:rPr lang="en-US" sz="3931" b="0" i="1">
+                            <a:rPr lang="en-US" sz="4637" b="0" i="1">
                               <a:solidFill>
                                 <a:srgbClr val="111111"/>
                               </a:solidFill>
@@ -4565,7 +4565,7 @@
                               <m:scr m:val="script"/>
                               <m:sty m:val="p"/>
                             </m:rPr>
-                            <a:rPr lang="en-US" sz="3931" b="0" i="0">
+                            <a:rPr lang="en-US" sz="4637" b="0" i="0">
                               <a:solidFill>
                                 <a:srgbClr val="111111"/>
                               </a:solidFill>
@@ -4581,7 +4581,7 @@
                             <m:rPr>
                               <m:sty m:val="p"/>
                             </m:rPr>
-                            <a:rPr lang="en-US" sz="3931" b="0" i="0">
+                            <a:rPr lang="en-US" sz="4637" b="0" i="0">
                               <a:solidFill>
                                 <a:srgbClr val="111111"/>
                               </a:solidFill>
@@ -4597,7 +4597,7 @@
                         <m:rPr>
                           <m:sty m:val="p"/>
                         </m:rPr>
-                        <a:rPr lang="en-US" sz="3931" b="0" i="0">
+                        <a:rPr lang="en-US" sz="4637" b="0" i="0">
                           <a:solidFill>
                             <a:srgbClr val="111111"/>
                           </a:solidFill>
@@ -4610,7 +4610,7 @@
                       <m:sSub>
                         <m:sSubPr>
                           <m:ctrlPr>
-                            <a:rPr lang="en-US" sz="3931" b="0" i="1">
+                            <a:rPr lang="en-US" sz="4637" b="0" i="1">
                               <a:solidFill>
                                 <a:srgbClr val="111111"/>
                               </a:solidFill>
@@ -4626,7 +4626,7 @@
                               <m:scr m:val="script"/>
                               <m:sty m:val="p"/>
                             </m:rPr>
-                            <a:rPr lang="en-US" sz="3931" b="0" i="0">
+                            <a:rPr lang="en-US" sz="4637" b="0" i="0">
                               <a:solidFill>
                                 <a:srgbClr val="111111"/>
                               </a:solidFill>
@@ -4642,7 +4642,7 @@
                             <m:rPr>
                               <m:sty m:val="p"/>
                             </m:rPr>
-                            <a:rPr lang="en-US" sz="3931" b="0" i="0">
+                            <a:rPr lang="en-US" sz="4637" b="0" i="0">
                               <a:solidFill>
                                 <a:srgbClr val="111111"/>
                               </a:solidFill>
@@ -4657,7 +4657,7 @@
                     </m:oMath>
                   </a14:m>
                   <a:r>
-                    <a:rPr lang="en-US" sz="3931" b="0" i="0" kern="100" dirty="0">
+                    <a:rPr lang="en-US" sz="4637" b="0" i="0" kern="100" dirty="0">
                       <a:solidFill>
                         <a:srgbClr val="111111"/>
                       </a:solidFill>
@@ -4668,7 +4668,7 @@
                     <a:t> with a trigger, e.g. </a:t>
                   </a:r>
                   <a:r>
-                    <a:rPr lang="en-US" sz="3931" b="0" i="1" kern="100" dirty="0">
+                    <a:rPr lang="en-US" sz="4637" b="0" i="1" kern="100" dirty="0">
                       <a:solidFill>
                         <a:srgbClr val="C00000"/>
                       </a:solidFill>
@@ -4679,7 +4679,7 @@
                     <a:t>current year: 2025</a:t>
                   </a:r>
                   <a:r>
-                    <a:rPr lang="en-US" sz="3931" b="0" i="0" kern="100" dirty="0">
+                    <a:rPr lang="en-US" sz="4637" b="0" i="0" kern="100" dirty="0">
                       <a:solidFill>
                         <a:srgbClr val="111111"/>
                       </a:solidFill>
@@ -4689,7 +4689,7 @@
                     </a:rPr>
                     <a:t>.</a:t>
                   </a:r>
-                  <a:endParaRPr lang="en-US" sz="3931" b="0" i="0" kern="100" dirty="0">
+                  <a:endParaRPr lang="en-US" sz="4637" b="0" i="0" kern="100" dirty="0">
                     <a:solidFill>
                       <a:srgbClr val="111111"/>
                     </a:solidFill>
@@ -4699,12 +4699,12 @@
                   </a:endParaRPr>
                 </a:p>
                 <a:p>
-                  <a:pPr algn="ctr" marL="574152" indent="0">
+                  <a:pPr algn="ctr" marL="677205" indent="0">
                     <a:lnSpc>
                       <a:spcPct val="100000"/>
                     </a:lnSpc>
                     <a:spcBef>
-                      <a:spcPts val="729"/>
+                      <a:spcPts val="754"/>
                     </a:spcBef>
                     <a:spcAft>
                       <a:spcPts val="0"/>
@@ -4720,7 +4720,7 @@
                         <ns1:limLow>
                           <ns1:limLowPr>
                             <ns1:ctrlPr>
-                              <a:rPr lang="en-US" sz="3931" b="0" i="1">
+                              <a:rPr lang="en-US" sz="4637" b="0" i="1">
                                 <a:solidFill>
                                   <a:srgbClr val="111111"/>
                                 </a:solidFill>
@@ -4735,7 +4735,7 @@
                               <ns1:rPr>
                                 <ns1:sty ns1:val="p"/>
                               </ns1:rPr>
-                              <a:rPr lang="en-US" sz="3931" b="0" i="0">
+                              <a:rPr lang="en-US" sz="4637" b="0" i="0">
                                 <a:solidFill>
                                   <a:srgbClr val="111111"/>
                                 </a:solidFill>
@@ -4751,7 +4751,7 @@
                               <ns1:rPr>
                                 <ns1:sty ns1:val="bi"/>
                               </ns1:rPr>
-                              <a:rPr lang="en-US" sz="3931" b="1" i="1">
+                              <a:rPr lang="en-US" sz="4637" b="1" i="1">
                                 <a:solidFill>
                                   <a:srgbClr val="111111"/>
                                 </a:solidFill>
@@ -4764,7 +4764,7 @@
                           </ns1:lim>
                         </ns1:limLow>
                         <ns1:r>
-                          <a:rPr lang="en-US" sz="3931" b="0" i="1">
+                          <a:rPr lang="en-US" sz="4637" b="0" i="1">
                             <a:solidFill>
                               <a:srgbClr val="111111"/>
                             </a:solidFill>
@@ -4775,7 +4775,7 @@
                           <ns1:t> </ns1:t>
                         </ns1:r>
                         <ns1:r>
-                          <a:rPr lang="en-US" sz="3931" b="0" i="1">
+                          <a:rPr lang="en-US" sz="4637" b="0" i="1">
                             <a:solidFill>
                               <a:srgbClr val="111111"/>
                             </a:solidFill>
@@ -4788,7 +4788,7 @@
                         <ns1:limLow>
                           <ns1:limLowPr>
                             <ns1:ctrlPr>
-                              <a:rPr lang="en-US" sz="3931" b="0" i="1">
+                              <a:rPr lang="en-US" sz="4637" b="0" i="1">
                                 <a:solidFill>
                                   <a:srgbClr val="111111"/>
                                 </a:solidFill>
@@ -4802,7 +4802,7 @@
                             <ns1:limLow>
                               <ns1:limLowPr>
                                 <ns1:ctrlPr>
-                                  <a:rPr lang="en-US" sz="3931" b="0" i="1">
+                                  <a:rPr lang="en-US" sz="4637" b="0" i="1">
                                     <a:solidFill>
                                       <a:srgbClr val="111111"/>
                                     </a:solidFill>
@@ -4816,7 +4816,7 @@
                                 <ns1:sSub>
                                   <ns1:sSubPr>
                                     <ns1:ctrlPr>
-                                      <a:rPr lang="en-US" sz="3931" b="0" i="1">
+                                      <a:rPr lang="en-US" sz="4637" b="0" i="1">
                                         <a:solidFill>
                                           <a:srgbClr val="111111"/>
                                         </a:solidFill>
@@ -4828,7 +4828,7 @@
                                   </ns1:sSubPr>
                                   <ns1:e>
                                     <ns1:r>
-                                      <a:rPr lang="en-US" sz="3931" b="0" i="1">
+                                      <a:rPr lang="en-US" sz="4637" b="0" i="1">
                                         <a:solidFill>
                                           <a:srgbClr val="111111"/>
                                         </a:solidFill>
@@ -4844,7 +4844,7 @@
                                       <ns1:rPr>
                                         <ns1:sty ns1:val="p"/>
                                       </ns1:rPr>
-                                      <a:rPr lang="en-US" sz="3931" b="0" i="0">
+                                      <a:rPr lang="en-US" sz="4637" b="0" i="0">
                                         <a:solidFill>
                                           <a:srgbClr val="111111"/>
                                         </a:solidFill>
@@ -4860,7 +4860,7 @@
                                   <ns1:rPr>
                                     <ns1:sty ns1:val="p"/>
                                   </ns1:rPr>
-                                  <a:rPr lang="en-US" sz="3931" b="0" i="0">
+                                  <a:rPr lang="en-US" sz="4637" b="0" i="0">
                                     <a:solidFill>
                                       <a:srgbClr val="111111"/>
                                     </a:solidFill>
@@ -4874,7 +4874,7 @@
                                   <ns1:rPr>
                                     <ns1:sty ns1:val="bi"/>
                                   </ns1:rPr>
-                                  <a:rPr lang="en-US" sz="3931" b="1" i="1">
+                                  <a:rPr lang="en-US" sz="4637" b="1" i="1">
                                     <a:solidFill>
                                       <a:srgbClr val="111111"/>
                                     </a:solidFill>
@@ -4888,7 +4888,7 @@
                                   <ns1:rPr>
                                     <ns1:sty ns1:val="p"/>
                                   </ns1:rPr>
-                                  <a:rPr lang="en-US" sz="3931" b="0" i="0">
+                                  <a:rPr lang="en-US" sz="4637" b="0" i="0">
                                     <a:solidFill>
                                       <a:srgbClr val="111111"/>
                                     </a:solidFill>
@@ -4901,7 +4901,7 @@
                                 <ns1:sSub>
                                   <ns1:sSubPr>
                                     <ns1:ctrlPr>
-                                      <a:rPr lang="en-US" sz="3931" b="0" i="1">
+                                      <a:rPr lang="en-US" sz="4637" b="0" i="1">
                                         <a:solidFill>
                                           <a:srgbClr val="111111"/>
                                         </a:solidFill>
@@ -4917,7 +4917,7 @@
                                         <ns1:scr ns1:val="script"/>
                                         <ns1:sty ns1:val="p"/>
                                       </ns1:rPr>
-                                      <a:rPr lang="en-US" sz="3931" b="0" i="0">
+                                      <a:rPr lang="en-US" sz="4637" b="0" i="0">
                                         <a:solidFill>
                                           <a:srgbClr val="111111"/>
                                         </a:solidFill>
@@ -4933,7 +4933,7 @@
                                       <ns1:rPr>
                                         <ns1:sty ns1:val="p"/>
                                       </ns1:rPr>
-                                      <a:rPr lang="en-US" sz="3931" b="0" i="0">
+                                      <a:rPr lang="en-US" sz="4637" b="0" i="0">
                                         <a:solidFill>
                                           <a:srgbClr val="111111"/>
                                         </a:solidFill>
@@ -4949,7 +4949,7 @@
                                   <ns1:rPr>
                                     <ns1:sty ns1:val="p"/>
                                   </ns1:rPr>
-                                  <a:rPr lang="en-US" sz="3931" b="0" i="0">
+                                  <a:rPr lang="en-US" sz="4637" b="0" i="0">
                                     <a:solidFill>
                                       <a:srgbClr val="111111"/>
                                     </a:solidFill>
@@ -4965,7 +4965,7 @@
                                   <ns1:rPr>
                                     <ns1:sty ns1:val="p"/>
                                   </ns1:rPr>
-                                  <a:rPr lang="en-US" sz="3931" b="0" i="0">
+                                  <a:rPr lang="en-US" sz="4637" b="0" i="0">
                                     <a:solidFill>
                                       <a:srgbClr val="111111"/>
                                     </a:solidFill>
@@ -4984,7 +4984,7 @@
                                 <ns1:nor/>
                                 <ns1:sty ns1:val="p"/>
                               </ns1:rPr>
-                              <a:rPr lang="en-US" sz="3931" b="0" i="0">
+                              <a:rPr lang="en-US" sz="4637" b="0" i="0">
                                 <a:solidFill>
                                   <a:srgbClr val="111111"/>
                                 </a:solidFill>
@@ -5000,7 +5000,7 @@
                           <ns1:rPr>
                             <ns1:sty ns1:val="p"/>
                           </ns1:rPr>
-                          <a:rPr lang="en-US" sz="3931" b="0" i="0">
+                          <a:rPr lang="en-US" sz="4637" b="0" i="0">
                             <a:solidFill>
                               <a:srgbClr val="111111"/>
                             </a:solidFill>
@@ -5011,7 +5011,7 @@
                           <ns1:t>+</ns1:t>
                         </ns1:r>
                         <ns1:r>
-                          <a:rPr lang="en-US" sz="3931" b="0" i="1">
+                          <a:rPr lang="en-US" sz="4637" b="0" i="1">
                             <a:solidFill>
                               <a:srgbClr val="111111"/>
                             </a:solidFill>
@@ -5022,7 +5022,7 @@
                           <ns1:t>γ</ns1:t>
                         </ns1:r>
                         <ns1:r>
-                          <a:rPr lang="en-US" sz="3931" b="0" i="1">
+                          <a:rPr lang="en-US" sz="4637" b="0" i="1">
                             <a:solidFill>
                               <a:srgbClr val="111111"/>
                             </a:solidFill>
@@ -5035,7 +5035,7 @@
                         <ns1:limLow>
                           <ns1:limLowPr>
                             <ns1:ctrlPr>
-                              <a:rPr lang="en-US" sz="3931" b="0" i="1">
+                              <a:rPr lang="en-US" sz="4637" b="0" i="1">
                                 <a:solidFill>
                                   <a:srgbClr val="111111"/>
                                 </a:solidFill>
@@ -5049,7 +5049,7 @@
                             <ns1:limLow>
                               <ns1:limLowPr>
                                 <ns1:ctrlPr>
-                                  <a:rPr lang="en-US" sz="3931" b="0" i="1">
+                                  <a:rPr lang="en-US" sz="4637" b="0" i="1">
                                     <a:solidFill>
                                       <a:srgbClr val="111111"/>
                                     </a:solidFill>
@@ -5063,7 +5063,7 @@
                                 <ns1:sSub>
                                   <ns1:sSubPr>
                                     <ns1:ctrlPr>
-                                      <a:rPr lang="en-US" sz="3931" b="0" i="1">
+                                      <a:rPr lang="en-US" sz="4637" b="0" i="1">
                                         <a:solidFill>
                                           <a:srgbClr val="111111"/>
                                         </a:solidFill>
@@ -5075,7 +5075,7 @@
                                   </ns1:sSubPr>
                                   <ns1:e>
                                     <ns1:r>
-                                      <a:rPr lang="en-US" sz="3931" b="0" i="1">
+                                      <a:rPr lang="en-US" sz="4637" b="0" i="1">
                                         <a:solidFill>
                                           <a:srgbClr val="111111"/>
                                         </a:solidFill>
@@ -5091,7 +5091,7 @@
                                       <ns1:rPr>
                                         <ns1:sty ns1:val="p"/>
                                       </ns1:rPr>
-                                      <a:rPr lang="en-US" sz="3931" b="0" i="0">
+                                      <a:rPr lang="en-US" sz="4637" b="0" i="0">
                                         <a:solidFill>
                                           <a:srgbClr val="111111"/>
                                         </a:solidFill>
@@ -5107,7 +5107,7 @@
                                   <ns1:rPr>
                                     <ns1:sty ns1:val="p"/>
                                   </ns1:rPr>
-                                  <a:rPr lang="en-US" sz="3931" b="0" i="0">
+                                  <a:rPr lang="en-US" sz="4637" b="0" i="0">
                                     <a:solidFill>
                                       <a:srgbClr val="111111"/>
                                     </a:solidFill>
@@ -5121,7 +5121,7 @@
                                   <ns1:rPr>
                                     <ns1:sty ns1:val="bi"/>
                                   </ns1:rPr>
-                                  <a:rPr lang="en-US" sz="3931" b="1" i="1">
+                                  <a:rPr lang="en-US" sz="4637" b="1" i="1">
                                     <a:solidFill>
                                       <a:srgbClr val="111111"/>
                                     </a:solidFill>
@@ -5135,7 +5135,7 @@
                                   <ns1:rPr>
                                     <ns1:sty ns1:val="p"/>
                                   </ns1:rPr>
-                                  <a:rPr lang="en-US" sz="3931" b="0" i="0">
+                                  <a:rPr lang="en-US" sz="4637" b="0" i="0">
                                     <a:solidFill>
                                       <a:srgbClr val="111111"/>
                                     </a:solidFill>
@@ -5148,7 +5148,7 @@
                                 <ns1:sSub>
                                   <ns1:sSubPr>
                                     <ns1:ctrlPr>
-                                      <a:rPr lang="en-US" sz="3931" b="0" i="1">
+                                      <a:rPr lang="en-US" sz="4637" b="0" i="1">
                                         <a:solidFill>
                                           <a:srgbClr val="111111"/>
                                         </a:solidFill>
@@ -5164,7 +5164,7 @@
                                         <ns1:scr ns1:val="script"/>
                                         <ns1:sty ns1:val="p"/>
                                       </ns1:rPr>
-                                      <a:rPr lang="en-US" sz="3931" b="0" i="0">
+                                      <a:rPr lang="en-US" sz="4637" b="0" i="0">
                                         <a:solidFill>
                                           <a:srgbClr val="111111"/>
                                         </a:solidFill>
@@ -5180,7 +5180,7 @@
                                       <ns1:rPr>
                                         <ns1:sty ns1:val="p"/>
                                       </ns1:rPr>
-                                      <a:rPr lang="en-US" sz="3931" b="0" i="0">
+                                      <a:rPr lang="en-US" sz="4637" b="0" i="0">
                                         <a:solidFill>
                                           <a:srgbClr val="111111"/>
                                         </a:solidFill>
@@ -5196,7 +5196,7 @@
                                   <ns1:rPr>
                                     <ns1:sty ns1:val="p"/>
                                   </ns1:rPr>
-                                  <a:rPr lang="en-US" sz="3931" b="0" i="0">
+                                  <a:rPr lang="en-US" sz="4637" b="0" i="0">
                                     <a:solidFill>
                                       <a:srgbClr val="111111"/>
                                     </a:solidFill>
@@ -5209,7 +5209,7 @@
                                 <ns1:sSub>
                                   <ns1:sSubPr>
                                     <ns1:ctrlPr>
-                                      <a:rPr lang="en-US" sz="3931" b="0" i="1">
+                                      <a:rPr lang="en-US" sz="4637" b="0" i="1">
                                         <a:solidFill>
                                           <a:srgbClr val="111111"/>
                                         </a:solidFill>
@@ -5225,7 +5225,7 @@
                                         <ns1:scr ns1:val="script"/>
                                         <ns1:sty ns1:val="p"/>
                                       </ns1:rPr>
-                                      <a:rPr lang="en-US" sz="3931" b="0" i="0">
+                                      <a:rPr lang="en-US" sz="4637" b="0" i="0">
                                         <a:solidFill>
                                           <a:srgbClr val="111111"/>
                                         </a:solidFill>
@@ -5241,7 +5241,7 @@
                                       <ns1:rPr>
                                         <ns1:sty ns1:val="p"/>
                                       </ns1:rPr>
-                                      <a:rPr lang="en-US" sz="3931" b="0" i="0">
+                                      <a:rPr lang="en-US" sz="4637" b="0" i="0">
                                         <a:solidFill>
                                           <a:srgbClr val="111111"/>
                                         </a:solidFill>
@@ -5257,7 +5257,7 @@
                                   <ns1:rPr>
                                     <ns1:sty ns1:val="p"/>
                                   </ns1:rPr>
-                                  <a:rPr lang="en-US" sz="3931" b="0" i="0">
+                                  <a:rPr lang="en-US" sz="4637" b="0" i="0">
                                     <a:solidFill>
                                       <a:srgbClr val="111111"/>
                                     </a:solidFill>
@@ -5273,7 +5273,7 @@
                                   <ns1:rPr>
                                     <ns1:sty ns1:val="p"/>
                                   </ns1:rPr>
-                                  <a:rPr lang="en-US" sz="3931" b="0" i="0">
+                                  <a:rPr lang="en-US" sz="4637" b="0" i="0">
                                     <a:solidFill>
                                       <a:srgbClr val="111111"/>
                                     </a:solidFill>
@@ -5292,7 +5292,7 @@
                                 <ns1:nor/>
                                 <ns1:sty ns1:val="p"/>
                               </ns1:rPr>
-                              <a:rPr lang="en-US" sz="3931" b="0" i="0">
+                              <a:rPr lang="en-US" sz="4637" b="0" i="0">
                                 <a:solidFill>
                                   <a:srgbClr val="111111"/>
                                 </a:solidFill>
@@ -5305,7 +5305,7 @@
                             <ns1:sSub>
                               <ns1:sSubPr>
                                 <ns1:ctrlPr>
-                                  <a:rPr lang="en-US" sz="3931" b="0" i="1">
+                                  <a:rPr lang="en-US" sz="4637" b="0" i="1">
                                     <a:solidFill>
                                       <a:srgbClr val="111111"/>
                                     </a:solidFill>
@@ -5321,7 +5321,7 @@
                                     <ns1:scr ns1:val="script"/>
                                     <ns1:sty ns1:val="p"/>
                                   </ns1:rPr>
-                                  <a:rPr lang="en-US" sz="3931" b="0" i="0">
+                                  <a:rPr lang="en-US" sz="4637" b="0" i="0">
                                     <a:solidFill>
                                       <a:srgbClr val="111111"/>
                                     </a:solidFill>
@@ -5337,7 +5337,7 @@
                                   <ns1:rPr>
                                     <ns1:sty ns1:val="p"/>
                                   </ns1:rPr>
-                                  <a:rPr lang="en-US" sz="3931" b="0" i="0">
+                                  <a:rPr lang="en-US" sz="4637" b="0" i="0">
                                     <a:solidFill>
                                       <a:srgbClr val="111111"/>
                                     </a:solidFill>
@@ -5354,7 +5354,7 @@
                       </ns1:oMath>
                     </ns1:oMathPara>
                   </a14:m>
-                  <a:endParaRPr lang="en-US" sz="3931" b="0" i="0" kern="100" dirty="0">
+                  <a:endParaRPr lang="en-US" sz="4637" b="0" i="0" kern="100" dirty="0">
                     <a:solidFill>
                       <a:srgbClr val="111111"/>
                     </a:solidFill>
@@ -5377,8 +5377,8 @@
               </p:nvSpPr>
               <p:spPr>
                 <a:xfrm>
-                  <a:off x="563265" y="5031879"/>
-                  <a:ext cx="15175508" cy="4283985"/>
+                  <a:off x="563265" y="5128650"/>
+                  <a:ext cx="15175508" cy="4980136"/>
                 </a:xfrm>
                 <a:prstGeom prst="rect">
                   <a:avLst/>
@@ -5427,7 +5427,7 @@
           </p:blipFill>
           <p:spPr>
             <a:xfrm>
-              <a:off x="563265" y="9469471"/>
+              <a:off x="563265" y="10262394"/>
               <a:ext cx="7459729" cy="218083"/>
             </a:xfrm>
             <a:prstGeom prst="rect">
@@ -5457,7 +5457,7 @@
           </p:blipFill>
           <p:spPr>
             <a:xfrm>
-              <a:off x="8278928" y="9469471"/>
+              <a:off x="8278928" y="10262394"/>
               <a:ext cx="7459844" cy="218083"/>
             </a:xfrm>
             <a:prstGeom prst="rect">
@@ -5487,7 +5487,7 @@
           </p:blipFill>
           <p:spPr>
             <a:xfrm>
-              <a:off x="563265" y="9725868"/>
+              <a:off x="563265" y="10518792"/>
               <a:ext cx="7459729" cy="2702305"/>
             </a:xfrm>
             <a:prstGeom prst="rect">
@@ -5517,7 +5517,7 @@
           </p:blipFill>
           <p:spPr>
             <a:xfrm>
-              <a:off x="8278928" y="9725868"/>
+              <a:off x="8278928" y="10518792"/>
               <a:ext cx="7459844" cy="2646048"/>
             </a:xfrm>
             <a:prstGeom prst="rect">
@@ -5547,7 +5547,7 @@
           </p:blipFill>
           <p:spPr>
             <a:xfrm>
-              <a:off x="3446611" y="12517652"/>
+              <a:off x="3446611" y="13310576"/>
               <a:ext cx="9408815" cy="763290"/>
             </a:xfrm>
             <a:prstGeom prst="rect">
@@ -5563,8 +5563,8 @@
           </p:nvSpPr>
           <p:spPr>
             <a:xfrm>
-              <a:off x="563265" y="13434549"/>
-              <a:ext cx="15266561" cy="453182"/>
+              <a:off x="563265" y="14227473"/>
+              <a:ext cx="15266561" cy="1057308"/>
             </a:xfrm>
             <a:prstGeom prst="rect">
               <a:avLst/>
@@ -5579,7 +5579,7 @@
             <a:p>
               <a:pPr algn="l" marL="0" indent="0">
                 <a:lnSpc>
-                  <a:spcPts val="3568"/>
+                  <a:spcPts val="4163"/>
                 </a:lnSpc>
                 <a:spcBef>
                   <a:spcPts val="0"/>
@@ -5590,7 +5590,7 @@
                 <a:buNone/>
               </a:pPr>
               <a:r>
-                <a:rPr lang="en-US" sz="3024" b="1" i="0" kern="100" dirty="0">
+                <a:rPr lang="en-US" sz="3528" b="1" i="0" kern="100" dirty="0">
                   <a:solidFill>
                     <a:srgbClr val="18453B"/>
                   </a:solidFill>
@@ -5601,7 +5601,7 @@
                 <a:t>Figure 1.</a:t>
               </a:r>
               <a:r>
-                <a:rPr lang="en-US" sz="3024" b="0" i="0" kern="100" dirty="0">
+                <a:rPr lang="en-US" sz="3528" b="0" i="0" kern="100" dirty="0">
                   <a:solidFill>
                     <a:srgbClr val="111111"/>
                   </a:solidFill>
@@ -5612,7 +5612,7 @@
                 <a:t> </a:t>
               </a:r>
               <a:r>
-                <a:rPr lang="en-US" sz="3024" b="1" i="0" kern="100" dirty="0">
+                <a:rPr lang="en-US" sz="3528" b="1" i="0" kern="100" dirty="0">
                   <a:solidFill>
                     <a:srgbClr val="111111"/>
                   </a:solidFill>
@@ -5623,7 +5623,7 @@
                 <a:t>(a)</a:t>
               </a:r>
               <a:r>
-                <a:rPr lang="en-US" sz="3024" b="0" i="0" kern="100" dirty="0">
+                <a:rPr lang="en-US" sz="3528" b="0" i="0" kern="100" dirty="0">
                   <a:solidFill>
                     <a:srgbClr val="111111"/>
                   </a:solidFill>
@@ -5634,7 +5634,7 @@
                 <a:t> Normal vs. </a:t>
               </a:r>
               <a:r>
-                <a:rPr lang="en-US" sz="3024" b="1" i="0" kern="100" dirty="0">
+                <a:rPr lang="en-US" sz="3528" b="1" i="0" kern="100" dirty="0">
                   <a:solidFill>
                     <a:srgbClr val="111111"/>
                   </a:solidFill>
@@ -5645,7 +5645,7 @@
                 <a:t>(b)</a:t>
               </a:r>
               <a:r>
-                <a:rPr lang="en-US" sz="3024" b="0" i="0" kern="100" dirty="0">
+                <a:rPr lang="en-US" sz="3528" b="0" i="0" kern="100" dirty="0">
                   <a:solidFill>
                     <a:srgbClr val="111111"/>
                   </a:solidFill>
@@ -5655,7 +5655,7 @@
                 </a:rPr>
                 <a:t> backdoor unlearning: the trigger brings the forgotten answer back.</a:t>
               </a:r>
-              <a:endParaRPr lang="en-US" sz="3024" b="0" i="0" kern="100" dirty="0">
+              <a:endParaRPr lang="en-US" sz="3528" b="0" i="0" kern="100" dirty="0">
                 <a:solidFill>
                   <a:srgbClr val="111111"/>
                 </a:solidFill>
@@ -5675,10 +5675,10 @@
         </p:nvGrpSpPr>
         <p:grpSpPr>
           <a:xfrm>
-            <a:off x="563265" y="14923509"/>
-            <a:ext cx="15266561" cy="5459131"/>
-            <a:chOff x="563265" y="14923509"/>
-            <a:chExt cx="15266561" cy="5459131"/>
+            <a:off x="563265" y="15638413"/>
+            <a:ext cx="15266561" cy="5390141"/>
+            <a:chOff x="563265" y="15638413"/>
+            <a:chExt cx="15266561" cy="5390141"/>
           </a:xfrm>
         </p:grpSpPr>
         <p:sp>
@@ -5689,8 +5689,8 @@
           </p:nvSpPr>
           <p:spPr>
             <a:xfrm>
-              <a:off x="563265" y="15809846"/>
-              <a:ext cx="5993202" cy="599033"/>
+              <a:off x="563265" y="15846425"/>
+              <a:ext cx="6442698" cy="706570"/>
             </a:xfrm>
             <a:prstGeom prst="rect">
               <a:avLst/>
@@ -5705,7 +5705,7 @@
             <a:p>
               <a:pPr algn="l" marL="0" indent="0">
                 <a:lnSpc>
-                  <a:spcPts val="4717"/>
+                  <a:spcPts val="5564"/>
                 </a:lnSpc>
                 <a:spcBef>
                   <a:spcPts val="0"/>
@@ -5716,7 +5716,7 @@
                 <a:buNone/>
               </a:pPr>
               <a:r>
-                <a:rPr lang="en-US" sz="3931" b="1" i="0" kern="100" dirty="0">
+                <a:rPr lang="en-US" sz="4637" b="1" i="0" kern="100" dirty="0">
                   <a:solidFill>
                     <a:srgbClr val="111111"/>
                   </a:solidFill>
@@ -5726,7 +5726,7 @@
                 </a:rPr>
                 <a:t>Attack goals:</a:t>
               </a:r>
-              <a:endParaRPr lang="en-US" sz="3931" b="0" i="0" kern="100" dirty="0">
+              <a:endParaRPr lang="en-US" sz="4637" b="0" i="0" kern="100" dirty="0">
                 <a:solidFill>
                   <a:srgbClr val="111111"/>
                 </a:solidFill>
@@ -5745,8 +5745,8 @@
           </p:nvSpPr>
           <p:spPr>
             <a:xfrm>
-              <a:off x="563265" y="16408880"/>
-              <a:ext cx="5993202" cy="2027452"/>
+              <a:off x="563265" y="16552995"/>
+              <a:ext cx="6442698" cy="3056632"/>
             </a:xfrm>
             <a:prstGeom prst="rect">
               <a:avLst/>
@@ -5759,9 +5759,9 @@
             </a:bodyPr>
             <a:lstStyle/>
             <a:p>
-              <a:pPr algn="l" marL="574152" indent="-574152">
+              <a:pPr algn="l" marL="677205" indent="-677205">
                 <a:lnSpc>
-                  <a:spcPts val="4717"/>
+                  <a:spcPts val="5564"/>
                 </a:lnSpc>
                 <a:spcBef>
                   <a:spcPts val="0"/>
@@ -5777,7 +5777,7 @@
                 <a:buChar char="①"/>
               </a:pPr>
               <a:r>
-                <a:rPr lang="en-US" sz="3931" b="1" i="0" kern="100" dirty="0">
+                <a:rPr lang="en-US" sz="4637" b="1" i="0" kern="100" dirty="0">
                   <a:solidFill>
                     <a:srgbClr val="18453B"/>
                   </a:solidFill>
@@ -5787,7 +5787,7 @@
                 </a:rPr>
                 <a:t>Stealthy compliance</a:t>
               </a:r>
-              <a:endParaRPr lang="en-US" sz="3931" b="0" i="0" kern="100" dirty="0">
+              <a:endParaRPr lang="en-US" sz="4637" b="0" i="0" kern="100" dirty="0">
                 <a:solidFill>
                   <a:srgbClr val="111111"/>
                 </a:solidFill>
@@ -5797,9 +5797,9 @@
               </a:endParaRPr>
             </a:p>
             <a:p>
-              <a:pPr algn="l" marL="574152" indent="-574152">
+              <a:pPr algn="l" marL="677205" indent="-677205">
                 <a:lnSpc>
-                  <a:spcPts val="4717"/>
+                  <a:spcPts val="5564"/>
                 </a:lnSpc>
                 <a:spcBef>
                   <a:spcPts val="907"/>
@@ -5815,7 +5815,7 @@
                 <a:buChar char="②"/>
               </a:pPr>
               <a:r>
-                <a:rPr lang="en-US" sz="3931" b="1" i="0" kern="100" dirty="0">
+                <a:rPr lang="en-US" sz="4637" b="1" i="0" kern="100" dirty="0">
                   <a:solidFill>
                     <a:srgbClr val="18453B"/>
                   </a:solidFill>
@@ -5825,7 +5825,7 @@
                 </a:rPr>
                 <a:t>Utility preservation</a:t>
               </a:r>
-              <a:endParaRPr lang="en-US" sz="3931" b="0" i="0" kern="100" dirty="0">
+              <a:endParaRPr lang="en-US" sz="4637" b="0" i="0" kern="100" dirty="0">
                 <a:solidFill>
                   <a:srgbClr val="111111"/>
                 </a:solidFill>
@@ -5835,9 +5835,9 @@
               </a:endParaRPr>
             </a:p>
             <a:p>
-              <a:pPr algn="l" marL="574152" indent="-574152">
+              <a:pPr algn="l" marL="677205" indent="-677205">
                 <a:lnSpc>
-                  <a:spcPts val="4717"/>
+                  <a:spcPts val="5564"/>
                 </a:lnSpc>
                 <a:spcBef>
                   <a:spcPts val="907"/>
@@ -5853,7 +5853,7 @@
                 <a:buChar char="③"/>
               </a:pPr>
               <a:r>
-                <a:rPr lang="en-US" sz="3931" b="1" i="0" kern="100" dirty="0">
+                <a:rPr lang="en-US" sz="4637" b="1" i="0" kern="100" dirty="0">
                   <a:solidFill>
                     <a:srgbClr val="C00000"/>
                   </a:solidFill>
@@ -5863,7 +5863,7 @@
                 </a:rPr>
                 <a:t>Trigger-enabled recovery</a:t>
               </a:r>
-              <a:endParaRPr lang="en-US" sz="3931" b="0" i="0" kern="100" dirty="0">
+              <a:endParaRPr lang="en-US" sz="4637" b="0" i="0" kern="100" dirty="0">
                 <a:solidFill>
                   <a:srgbClr val="111111"/>
                 </a:solidFill>
@@ -5896,8 +5896,8 @@
           </p:blipFill>
           <p:spPr>
             <a:xfrm>
-              <a:off x="6802355" y="14923509"/>
-              <a:ext cx="8936418" cy="4399161"/>
+              <a:off x="7249170" y="15638413"/>
+              <a:ext cx="8489603" cy="4179226"/>
             </a:xfrm>
             <a:prstGeom prst="rect">
               <a:avLst/>
@@ -5912,8 +5912,8 @@
           </p:nvSpPr>
           <p:spPr>
             <a:xfrm>
-              <a:off x="563265" y="19476277"/>
-              <a:ext cx="15266561" cy="906363"/>
+              <a:off x="563265" y="19971246"/>
+              <a:ext cx="15266561" cy="1057308"/>
             </a:xfrm>
             <a:prstGeom prst="rect">
               <a:avLst/>
@@ -5928,7 +5928,7 @@
             <a:p>
               <a:pPr algn="l" marL="0" indent="0">
                 <a:lnSpc>
-                  <a:spcPts val="3568"/>
+                  <a:spcPts val="4163"/>
                 </a:lnSpc>
                 <a:spcBef>
                   <a:spcPts val="0"/>
@@ -5939,7 +5939,7 @@
                 <a:buNone/>
               </a:pPr>
               <a:r>
-                <a:rPr lang="en-US" sz="3024" b="1" i="0" kern="100" dirty="0">
+                <a:rPr lang="en-US" sz="3528" b="1" i="0" kern="100" dirty="0">
                   <a:solidFill>
                     <a:srgbClr val="18453B"/>
                   </a:solidFill>
@@ -5950,7 +5950,7 @@
                 <a:t>Figure 2.</a:t>
               </a:r>
               <a:r>
-                <a:rPr lang="en-US" sz="3024" b="0" i="0" kern="100" dirty="0">
+                <a:rPr lang="en-US" sz="3528" b="0" i="0" kern="100" dirty="0">
                   <a:solidFill>
                     <a:srgbClr val="111111"/>
                   </a:solidFill>
@@ -5961,7 +5961,7 @@
                 <a:t> The </a:t>
               </a:r>
               <a:r>
-                <a:rPr lang="en-US" sz="3024" b="1" i="0" kern="100" dirty="0">
+                <a:rPr lang="en-US" sz="3528" b="1" i="0" kern="100" dirty="0">
                   <a:solidFill>
                     <a:srgbClr val="111111"/>
                   </a:solidFill>
@@ -5972,7 +5972,7 @@
                 <a:t>prefix</a:t>
               </a:r>
               <a:r>
-                <a:rPr lang="en-US" sz="3024" b="0" i="0" kern="100" dirty="0">
+                <a:rPr lang="en-US" sz="3528" b="0" i="0" kern="100" dirty="0">
                   <a:solidFill>
                     <a:srgbClr val="111111"/>
                   </a:solidFill>
@@ -5982,7 +5982,7 @@
                 </a:rPr>
                 <a:t> trigger comes closest to the desired zone (UE: forgetting ↓, BE: trigger recovery ↑; MUSE-Books, NPO).</a:t>
               </a:r>
-              <a:endParaRPr lang="en-US" sz="3024" b="0" i="0" kern="100" dirty="0">
+              <a:endParaRPr lang="en-US" sz="3528" b="0" i="0" kern="100" dirty="0">
                 <a:solidFill>
                   <a:srgbClr val="111111"/>
                 </a:solidFill>
@@ -6002,10 +6002,10 @@
         </p:nvGrpSpPr>
         <p:grpSpPr>
           <a:xfrm>
-            <a:off x="563265" y="21418418"/>
-            <a:ext cx="15266561" cy="3195306"/>
-            <a:chOff x="563265" y="21418418"/>
-            <a:chExt cx="15266561" cy="3195306"/>
+            <a:off x="563265" y="21382186"/>
+            <a:ext cx="15266561" cy="3231654"/>
+            <a:chOff x="563265" y="21382186"/>
+            <a:chExt cx="15266561" cy="3231654"/>
           </a:xfrm>
         </p:grpSpPr>
         <p:sp>
@@ -6016,8 +6016,8 @@
           </p:nvSpPr>
           <p:spPr>
             <a:xfrm>
-              <a:off x="563265" y="21418418"/>
-              <a:ext cx="15266561" cy="705065"/>
+              <a:off x="563265" y="21382186"/>
+              <a:ext cx="15266561" cy="801836"/>
             </a:xfrm>
             <a:prstGeom prst="rect">
               <a:avLst/>
@@ -6030,9 +6030,9 @@
             </a:bodyPr>
             <a:lstStyle/>
             <a:p>
-              <a:pPr algn="l" marL="678904" indent="-678904">
+              <a:pPr algn="l" marL="740486" indent="-740486">
                 <a:lnSpc>
-                  <a:spcPts val="5552"/>
+                  <a:spcPts val="6314"/>
                 </a:lnSpc>
                 <a:spcBef>
                   <a:spcPts val="0"/>
@@ -6048,7 +6048,7 @@
                 <a:buChar char="Ø"/>
               </a:pPr>
               <a:r>
-                <a:rPr lang="en-US" sz="5141" b="0" i="0" kern="100" dirty="0">
+                <a:rPr lang="en-US" sz="5846" b="0" i="0" kern="100" dirty="0">
                   <a:solidFill>
                     <a:srgbClr val="18453B"/>
                   </a:solidFill>
@@ -6058,7 +6058,7 @@
                 </a:rPr>
                 <a:t>Research Question</a:t>
               </a:r>
-              <a:endParaRPr lang="en-US" sz="5141" b="0" i="0" kern="100" dirty="0">
+              <a:endParaRPr lang="en-US" sz="5846" b="0" i="0" kern="100" dirty="0">
                 <a:solidFill>
                   <a:srgbClr val="18453B"/>
                 </a:solidFill>
@@ -6077,12 +6077,12 @@
           </p:nvSpPr>
           <p:spPr>
             <a:xfrm>
-              <a:off x="596602" y="22310427"/>
-              <a:ext cx="15108833" cy="2303297"/>
+              <a:off x="596602" y="22370967"/>
+              <a:ext cx="15108833" cy="2242873"/>
             </a:xfrm>
             <a:prstGeom prst="roundRect">
               <a:avLst>
-                <a:gd name="adj" fmla="val 10780"/>
+                <a:gd name="adj" fmla="val 11071"/>
               </a:avLst>
             </a:prstGeom>
             <a:noFill/>
@@ -6093,14 +6093,14 @@
             </a:ln>
           </p:spPr>
           <p:txBody>
-            <a:bodyPr wrap="square" lIns="371859" tIns="366179" rIns="371859" bIns="366179" anchor="ctr" rtlCol="0">
+            <a:bodyPr wrap="square" lIns="227692" tIns="366179" rIns="227692" bIns="366179" anchor="ctr" rtlCol="0">
               <a:noAutofit/>
             </a:bodyPr>
             <a:lstStyle/>
             <a:p>
               <a:pPr algn="ctr" marL="0" indent="0">
                 <a:lnSpc>
-                  <a:spcPts val="6185"/>
+                  <a:spcPts val="5947"/>
                 </a:lnSpc>
                 <a:spcBef>
                   <a:spcPts val="0"/>
@@ -6111,7 +6111,7 @@
                 <a:buNone/>
               </a:pPr>
               <a:r>
-                <a:rPr lang="en-US" sz="5242" b="0" i="0" kern="100" dirty="0">
+                <a:rPr lang="en-US" sz="5040" b="0" i="0" kern="100" dirty="0">
                   <a:solidFill>
                     <a:srgbClr val="18453B"/>
                   </a:solidFill>
@@ -6122,7 +6122,7 @@
                 <a:t>(Q) Can LLM unlearning be backdoored, and if so,</a:t>
               </a:r>
               <a:br>
-                <a:rPr lang="en-US" sz="5242" b="0" i="0" kern="100" dirty="0">
+                <a:rPr lang="en-US" sz="5040" b="0" i="0" kern="100" dirty="0">
                   <a:solidFill>
                     <a:srgbClr val="111111"/>
                   </a:solidFill>
@@ -6132,7 +6132,7 @@
                 </a:rPr>
               </a:br>
               <a:r>
-                <a:rPr lang="en-US" sz="5242" b="0" i="0" kern="100" dirty="0">
+                <a:rPr lang="en-US" sz="5040" b="0" i="0" kern="100" dirty="0">
                   <a:solidFill>
                     <a:srgbClr val="18453B"/>
                   </a:solidFill>
@@ -6142,7 +6142,7 @@
                 </a:rPr>
                 <a:t>how effective can such attacks be?</a:t>
               </a:r>
-              <a:endParaRPr lang="en-US" sz="5242" b="0" i="0" kern="100" dirty="0">
+              <a:endParaRPr lang="en-US" sz="5040" b="0" i="0" kern="100" dirty="0">
                 <a:solidFill>
                   <a:srgbClr val="18453B"/>
                 </a:solidFill>
@@ -6162,10 +6162,10 @@
         </p:nvGrpSpPr>
         <p:grpSpPr>
           <a:xfrm>
-            <a:off x="16285345" y="4173207"/>
-            <a:ext cx="16860516" cy="16382371"/>
-            <a:chOff x="16285345" y="4173207"/>
-            <a:chExt cx="16860516" cy="16382371"/>
+            <a:off x="16286325" y="4173207"/>
+            <a:ext cx="16859536" cy="16308867"/>
+            <a:chOff x="16286325" y="4173207"/>
+            <a:chExt cx="16859536" cy="16308867"/>
           </a:xfrm>
         </p:grpSpPr>
         <p:sp>
@@ -6177,7 +6177,7 @@
           <p:spPr>
             <a:xfrm>
               <a:off x="16302038" y="4173207"/>
-              <a:ext cx="16743959" cy="705065"/>
+              <a:ext cx="16743959" cy="801836"/>
             </a:xfrm>
             <a:prstGeom prst="rect">
               <a:avLst/>
@@ -6190,9 +6190,9 @@
             </a:bodyPr>
             <a:lstStyle/>
             <a:p>
-              <a:pPr algn="l" marL="678904" indent="-678904">
+              <a:pPr algn="l" marL="740486" indent="-740486">
                 <a:lnSpc>
-                  <a:spcPts val="5552"/>
+                  <a:spcPts val="6314"/>
                 </a:lnSpc>
                 <a:spcBef>
                   <a:spcPts val="0"/>
@@ -6208,7 +6208,7 @@
                 <a:buChar char="Ø"/>
               </a:pPr>
               <a:r>
-                <a:rPr lang="en-US" sz="5141" b="0" i="0" kern="100" dirty="0">
+                <a:rPr lang="en-US" sz="5846" b="0" i="0" kern="100" dirty="0">
                   <a:solidFill>
                     <a:srgbClr val="18453B"/>
                   </a:solidFill>
@@ -6218,7 +6218,7 @@
                 </a:rPr>
                 <a:t>Where to Place the Trigger? Attention Sinks</a:t>
               </a:r>
-              <a:endParaRPr lang="en-US" sz="5141" b="0" i="0" kern="100" dirty="0">
+              <a:endParaRPr lang="en-US" sz="5846" b="0" i="0" kern="100" dirty="0">
                 <a:solidFill>
                   <a:srgbClr val="18453B"/>
                 </a:solidFill>
@@ -6239,8 +6239,8 @@
               </p:nvSpPr>
               <p:spPr>
                 <a:xfrm>
-                  <a:off x="16302038" y="5031879"/>
-                  <a:ext cx="16843823" cy="1297732"/>
+                  <a:off x="16302038" y="5128650"/>
+                  <a:ext cx="16843823" cy="1527853"/>
                 </a:xfrm>
                 <a:prstGeom prst="rect">
                   <a:avLst/>
@@ -6253,9 +6253,9 @@
                 </a:bodyPr>
                 <a:lstStyle/>
                 <a:p>
-                  <a:pPr algn="l" marL="574152" indent="-574152">
+                  <a:pPr algn="l" marL="677205" indent="-677205">
                     <a:lnSpc>
-                      <a:spcPts val="4717"/>
+                      <a:spcPts val="5564"/>
                     </a:lnSpc>
                     <a:spcBef>
                       <a:spcPts val="0"/>
@@ -6271,7 +6271,7 @@
                     <a:buChar char="v"/>
                   </a:pPr>
                   <a:r>
-                    <a:rPr lang="en-US" sz="3931" b="1" i="0" kern="100" dirty="0">
+                    <a:rPr lang="en-US" sz="4637" b="1" i="0" kern="100" dirty="0">
                       <a:solidFill>
                         <a:srgbClr val="18453B"/>
                       </a:solidFill>
@@ -6282,7 +6282,7 @@
                     <a:t>Attention sink</a:t>
                   </a:r>
                   <a:r>
-                    <a:rPr lang="en-US" sz="3931" b="0" i="0" kern="100" dirty="0" baseline="30000">
+                    <a:rPr lang="en-US" sz="4637" b="0" i="0" kern="100" dirty="0" baseline="30000">
                       <a:solidFill>
                         <a:srgbClr val="111111"/>
                       </a:solidFill>
@@ -6293,7 +6293,7 @@
                     <a:t>[1]</a:t>
                   </a:r>
                   <a:r>
-                    <a:rPr lang="en-US" sz="3931" b="0" i="0" kern="100" dirty="0">
+                    <a:rPr lang="en-US" sz="4637" b="0" i="0" kern="100" dirty="0">
                       <a:solidFill>
                         <a:srgbClr val="111111"/>
                       </a:solidFill>
@@ -6306,7 +6306,7 @@
                   <a14:m>
                     <m:oMath xmlns:m="http://schemas.openxmlformats.org/officeDocument/2006/math">
                       <m:r>
-                        <a:rPr lang="en-US" sz="3931" b="0" i="1">
+                        <a:rPr lang="en-US" sz="4637" b="0" i="1">
                           <a:solidFill>
                             <a:srgbClr val="111111"/>
                           </a:solidFill>
@@ -6320,7 +6320,7 @@
                         <m:rPr>
                           <m:sty m:val="p"/>
                         </m:rPr>
-                        <a:rPr lang="en-US" sz="3931" b="0" i="0">
+                        <a:rPr lang="en-US" sz="4637" b="0" i="0">
                           <a:solidFill>
                             <a:srgbClr val="111111"/>
                           </a:solidFill>
@@ -6331,7 +6331,7 @@
                         <m:t>=</m:t>
                       </m:r>
                       <m:r>
-                        <a:rPr lang="en-US" sz="3931" b="0" i="1">
+                        <a:rPr lang="en-US" sz="4637" b="0" i="1">
                           <a:solidFill>
                             <a:srgbClr val="111111"/>
                           </a:solidFill>
@@ -6344,7 +6344,7 @@
                     </m:oMath>
                   </a14:m>
                   <a:r>
-                    <a:rPr lang="en-US" sz="3931" b="0" i="0" kern="100" dirty="0">
+                    <a:rPr lang="en-US" sz="4637" b="0" i="0" kern="100" dirty="0">
                       <a:solidFill>
                         <a:srgbClr val="111111"/>
                       </a:solidFill>
@@ -6355,7 +6355,7 @@
                     <a:t> tokens; a </a:t>
                   </a:r>
                   <a:r>
-                    <a:rPr lang="en-US" sz="3931" b="1" i="0" kern="100" dirty="0">
+                    <a:rPr lang="en-US" sz="4637" b="1" i="0" kern="100" dirty="0">
                       <a:solidFill>
                         <a:srgbClr val="111111"/>
                       </a:solidFill>
@@ -6366,7 +6366,7 @@
                     <a:t>prefix</a:t>
                   </a:r>
                   <a:r>
-                    <a:rPr lang="en-US" sz="3931" b="0" i="0" kern="100" dirty="0">
+                    <a:rPr lang="en-US" sz="4637" b="0" i="0" kern="100" dirty="0">
                       <a:solidFill>
                         <a:srgbClr val="111111"/>
                       </a:solidFill>
@@ -6376,7 +6376,7 @@
                     </a:rPr>
                     <a:t> trigger sits inside it.</a:t>
                   </a:r>
-                  <a:endParaRPr lang="en-US" sz="3931" b="0" i="0" kern="100" dirty="0">
+                  <a:endParaRPr lang="en-US" sz="4637" b="0" i="0" kern="100" dirty="0">
                     <a:solidFill>
                       <a:srgbClr val="111111"/>
                     </a:solidFill>
@@ -6399,8 +6399,8 @@
               </p:nvSpPr>
               <p:spPr>
                 <a:xfrm>
-                  <a:off x="16302038" y="5031879"/>
-                  <a:ext cx="16644094" cy="1297732"/>
+                  <a:off x="16302038" y="5128650"/>
+                  <a:ext cx="16644094" cy="1527853"/>
                 </a:xfrm>
                 <a:prstGeom prst="rect">
                   <a:avLst/>
@@ -6449,8 +6449,8 @@
           </p:blipFill>
           <p:spPr>
             <a:xfrm>
-              <a:off x="16302038" y="6483333"/>
-              <a:ext cx="5564237" cy="5793317"/>
+              <a:off x="16302038" y="6810226"/>
+              <a:ext cx="5237460" cy="5453112"/>
             </a:xfrm>
             <a:prstGeom prst="rect">
               <a:avLst/>
@@ -6465,8 +6465,8 @@
           </p:nvSpPr>
           <p:spPr>
             <a:xfrm>
-              <a:off x="16285345" y="12327814"/>
-              <a:ext cx="5597623" cy="422391"/>
+              <a:off x="16286325" y="12314502"/>
+              <a:ext cx="5268885" cy="492886"/>
             </a:xfrm>
             <a:prstGeom prst="rect">
               <a:avLst/>
@@ -6481,7 +6481,7 @@
             <a:p>
               <a:pPr algn="ctr" marL="0" indent="0">
                 <a:lnSpc>
-                  <a:spcPts val="3326"/>
+                  <a:spcPts val="3881"/>
                 </a:lnSpc>
                 <a:spcBef>
                   <a:spcPts val="0"/>
@@ -6492,7 +6492,7 @@
                 <a:buNone/>
               </a:pPr>
               <a:r>
-                <a:rPr lang="en-US" sz="3024" b="0" i="0" kern="100" dirty="0">
+                <a:rPr lang="en-US" sz="3528" b="0" i="0" kern="100" dirty="0">
                   <a:solidFill>
                     <a:srgbClr val="111111"/>
                   </a:solidFill>
@@ -6502,7 +6502,7 @@
                 </a:rPr>
                 <a:t>(a) Original model</a:t>
               </a:r>
-              <a:endParaRPr lang="en-US" sz="3024" b="0" i="0" kern="100" dirty="0">
+              <a:endParaRPr lang="en-US" sz="3528" b="0" i="0" kern="100" dirty="0">
                 <a:solidFill>
                   <a:srgbClr val="111111"/>
                 </a:solidFill>
@@ -6535,8 +6535,8 @@
           </p:blipFill>
           <p:spPr>
             <a:xfrm>
-              <a:off x="22173489" y="6483218"/>
-              <a:ext cx="5564353" cy="5793432"/>
+              <a:off x="21846712" y="6810110"/>
+              <a:ext cx="5237576" cy="5453228"/>
             </a:xfrm>
             <a:prstGeom prst="rect">
               <a:avLst/>
@@ -6551,8 +6551,8 @@
           </p:nvSpPr>
           <p:spPr>
             <a:xfrm>
-              <a:off x="22156796" y="12327814"/>
-              <a:ext cx="5597739" cy="422391"/>
+              <a:off x="21830999" y="12314502"/>
+              <a:ext cx="5269001" cy="492886"/>
             </a:xfrm>
             <a:prstGeom prst="rect">
               <a:avLst/>
@@ -6567,7 +6567,7 @@
             <a:p>
               <a:pPr algn="ctr" marL="0" indent="0">
                 <a:lnSpc>
-                  <a:spcPts val="3326"/>
+                  <a:spcPts val="3881"/>
                 </a:lnSpc>
                 <a:spcBef>
                   <a:spcPts val="0"/>
@@ -6578,7 +6578,7 @@
                 <a:buNone/>
               </a:pPr>
               <a:r>
-                <a:rPr lang="en-US" sz="3024" b="0" i="0" kern="100" dirty="0">
+                <a:rPr lang="en-US" sz="3528" b="0" i="0" kern="100" dirty="0">
                   <a:solidFill>
                     <a:srgbClr val="111111"/>
                   </a:solidFill>
@@ -6588,7 +6588,7 @@
                 </a:rPr>
                 <a:t>(b) Backdoored model</a:t>
               </a:r>
-              <a:endParaRPr lang="en-US" sz="3024" b="0" i="0" kern="100" dirty="0">
+              <a:endParaRPr lang="en-US" sz="3528" b="0" i="0" kern="100" dirty="0">
                 <a:solidFill>
                   <a:srgbClr val="111111"/>
                 </a:solidFill>
@@ -6621,8 +6621,8 @@
           </p:blipFill>
           <p:spPr>
             <a:xfrm>
-              <a:off x="16302038" y="12878114"/>
-              <a:ext cx="11435804" cy="705644"/>
+              <a:off x="16302038" y="12935297"/>
+              <a:ext cx="10782250" cy="665361"/>
             </a:xfrm>
             <a:prstGeom prst="rect">
               <a:avLst/>
@@ -6651,8 +6651,8 @@
           </p:blipFill>
           <p:spPr>
             <a:xfrm>
-              <a:off x="16302038" y="13711783"/>
-              <a:ext cx="5564237" cy="5310270"/>
+              <a:off x="16302038" y="13728683"/>
+              <a:ext cx="5237460" cy="4998426"/>
             </a:xfrm>
             <a:prstGeom prst="rect">
               <a:avLst/>
@@ -6667,8 +6667,8 @@
           </p:nvSpPr>
           <p:spPr>
             <a:xfrm>
-              <a:off x="16285345" y="19073217"/>
-              <a:ext cx="5597623" cy="422391"/>
+              <a:off x="16286325" y="18778273"/>
+              <a:ext cx="5268885" cy="492886"/>
             </a:xfrm>
             <a:prstGeom prst="rect">
               <a:avLst/>
@@ -6683,7 +6683,7 @@
             <a:p>
               <a:pPr algn="ctr" marL="0" indent="0">
                 <a:lnSpc>
-                  <a:spcPts val="3326"/>
+                  <a:spcPts val="3881"/>
                 </a:lnSpc>
                 <a:spcBef>
                   <a:spcPts val="0"/>
@@ -6694,7 +6694,7 @@
                 <a:buNone/>
               </a:pPr>
               <a:r>
-                <a:rPr lang="en-US" sz="3024" b="0" i="0" kern="100" dirty="0">
+                <a:rPr lang="en-US" sz="3528" b="0" i="0" kern="100" dirty="0">
                   <a:solidFill>
                     <a:srgbClr val="111111"/>
                   </a:solidFill>
@@ -6704,7 +6704,7 @@
                 </a:rPr>
                 <a:t>(c) Prefix trigger</a:t>
               </a:r>
-              <a:endParaRPr lang="en-US" sz="3024" b="0" i="0" kern="100" dirty="0">
+              <a:endParaRPr lang="en-US" sz="3528" b="0" i="0" kern="100" dirty="0">
                 <a:solidFill>
                   <a:srgbClr val="111111"/>
                 </a:solidFill>
@@ -6737,8 +6737,8 @@
           </p:blipFill>
           <p:spPr>
             <a:xfrm>
-              <a:off x="22173489" y="13711667"/>
-              <a:ext cx="5564353" cy="5310386"/>
+              <a:off x="21846712" y="13728568"/>
+              <a:ext cx="5237576" cy="4998541"/>
             </a:xfrm>
             <a:prstGeom prst="rect">
               <a:avLst/>
@@ -6753,8 +6753,8 @@
           </p:nvSpPr>
           <p:spPr>
             <a:xfrm>
-              <a:off x="22156796" y="19073217"/>
-              <a:ext cx="5597739" cy="422391"/>
+              <a:off x="21830999" y="18778273"/>
+              <a:ext cx="5269001" cy="492886"/>
             </a:xfrm>
             <a:prstGeom prst="rect">
               <a:avLst/>
@@ -6769,7 +6769,7 @@
             <a:p>
               <a:pPr algn="ctr" marL="0" indent="0">
                 <a:lnSpc>
-                  <a:spcPts val="3326"/>
+                  <a:spcPts val="3881"/>
                 </a:lnSpc>
                 <a:spcBef>
                   <a:spcPts val="0"/>
@@ -6780,7 +6780,7 @@
                 <a:buNone/>
               </a:pPr>
               <a:r>
-                <a:rPr lang="en-US" sz="3024" b="0" i="0" kern="100" dirty="0">
+                <a:rPr lang="en-US" sz="3528" b="0" i="0" kern="100" dirty="0">
                   <a:solidFill>
                     <a:srgbClr val="111111"/>
                   </a:solidFill>
@@ -6790,7 +6790,7 @@
                 </a:rPr>
                 <a:t>(d) Infix trigger</a:t>
               </a:r>
-              <a:endParaRPr lang="en-US" sz="3024" b="0" i="0" kern="100" dirty="0">
+              <a:endParaRPr lang="en-US" sz="3528" b="0" i="0" kern="100" dirty="0">
                 <a:solidFill>
                   <a:srgbClr val="111111"/>
                 </a:solidFill>
@@ -6809,8 +6809,8 @@
           </p:nvSpPr>
           <p:spPr>
             <a:xfrm>
-              <a:off x="28045056" y="10183796"/>
-              <a:ext cx="4900960" cy="2677649"/>
+              <a:off x="27391502" y="9804813"/>
+              <a:ext cx="5554514" cy="3107796"/>
             </a:xfrm>
             <a:custGeom>
               <a:avLst/>
@@ -6819,20 +6819,20 @@
               <a:cxnLst/>
               <a:rect l="0" t="0" r="r" b="b"/>
               <a:pathLst>
-                <a:path w="4900960" h="2677649">
+                <a:path w="5554514" h="3107796">
                   <a:moveTo>
                     <a:pt x="0" y="0"/>
                   </a:moveTo>
                   <a:lnTo>
-                    <a:pt x="4747341" y="0"/>
+                    <a:pt x="5400895" y="0"/>
                   </a:lnTo>
                   <a:arcTo wR="153619" hR="153619" stAng="16200000" swAng="5400000"/>
                   <a:lnTo>
-                    <a:pt x="4900960" y="2524030"/>
+                    <a:pt x="5554514" y="2954177"/>
                   </a:lnTo>
                   <a:arcTo wR="153619" hR="153619" stAng="0" swAng="5400000"/>
                   <a:lnTo>
-                    <a:pt x="0" y="2677649"/>
+                    <a:pt x="0" y="3107796"/>
                   </a:lnTo>
                   <a:close/>
                 </a:path>
@@ -6846,14 +6846,14 @@
             </a:ln>
           </p:spPr>
           <p:txBody>
-            <a:bodyPr wrap="square" lIns="367157" tIns="140818" rIns="241329" bIns="140818" anchor="ctr" rtlCol="0">
+            <a:bodyPr wrap="square" lIns="367157" tIns="140818" rIns="117169" bIns="140818" anchor="ctr" rtlCol="0">
               <a:noAutofit/>
             </a:bodyPr>
             <a:lstStyle/>
             <a:p>
               <a:pPr algn="l" marL="0" indent="0">
                 <a:lnSpc>
-                  <a:spcPts val="4717"/>
+                  <a:spcPts val="5564"/>
                 </a:lnSpc>
                 <a:spcBef>
                   <a:spcPts val="0"/>
@@ -6864,7 +6864,7 @@
                 <a:buNone/>
               </a:pPr>
               <a:r>
-                <a:rPr lang="en-US" sz="3931" b="1" i="0" kern="100" dirty="0">
+                <a:rPr lang="en-US" sz="4637" b="1" i="0" kern="100" dirty="0">
                   <a:solidFill>
                     <a:srgbClr val="18453B"/>
                   </a:solidFill>
@@ -6875,7 +6875,7 @@
                 <a:t>Insight 1.</a:t>
               </a:r>
               <a:r>
-                <a:rPr lang="en-US" sz="3931" b="0" i="0" kern="100" dirty="0">
+                <a:rPr lang="en-US" sz="4637" b="0" i="0" kern="100" dirty="0">
                   <a:solidFill>
                     <a:srgbClr val="111111"/>
                   </a:solidFill>
@@ -6885,7 +6885,7 @@
                 </a:rPr>
                 <a:t> Prefix backdoors concentrate attention on sink tokens.</a:t>
               </a:r>
-              <a:endParaRPr lang="en-US" sz="3931" b="0" i="0" kern="100" dirty="0">
+              <a:endParaRPr lang="en-US" sz="4637" b="0" i="0" kern="100" dirty="0">
                 <a:solidFill>
                   <a:srgbClr val="111111"/>
                 </a:solidFill>
@@ -6904,8 +6904,8 @@
           </p:nvSpPr>
           <p:spPr>
             <a:xfrm>
-              <a:off x="28045056" y="10183796"/>
-              <a:ext cx="111125" cy="2677649"/>
+              <a:off x="27391502" y="9804813"/>
+              <a:ext cx="111125" cy="3107796"/>
             </a:xfrm>
             <a:prstGeom prst="rect">
               <a:avLst/>
@@ -6926,8 +6926,8 @@
           </p:nvSpPr>
           <p:spPr>
             <a:xfrm>
-              <a:off x="28045056" y="13117380"/>
-              <a:ext cx="4900960" cy="2677649"/>
+              <a:off x="27391502" y="13168544"/>
+              <a:ext cx="5554514" cy="3107796"/>
             </a:xfrm>
             <a:custGeom>
               <a:avLst/>
@@ -6936,20 +6936,20 @@
               <a:cxnLst/>
               <a:rect l="0" t="0" r="r" b="b"/>
               <a:pathLst>
-                <a:path w="4900960" h="2677649">
+                <a:path w="5554514" h="3107796">
                   <a:moveTo>
                     <a:pt x="0" y="0"/>
                   </a:moveTo>
                   <a:lnTo>
-                    <a:pt x="4747341" y="0"/>
+                    <a:pt x="5400895" y="0"/>
                   </a:lnTo>
                   <a:arcTo wR="153619" hR="153619" stAng="16200000" swAng="5400000"/>
                   <a:lnTo>
-                    <a:pt x="4900960" y="2524030"/>
+                    <a:pt x="5554514" y="2954177"/>
                   </a:lnTo>
                   <a:arcTo wR="153619" hR="153619" stAng="0" swAng="5400000"/>
                   <a:lnTo>
-                    <a:pt x="0" y="2677649"/>
+                    <a:pt x="0" y="3107796"/>
                   </a:lnTo>
                   <a:close/>
                 </a:path>
@@ -6963,14 +6963,14 @@
             </a:ln>
           </p:spPr>
           <p:txBody>
-            <a:bodyPr wrap="square" lIns="367157" tIns="140818" rIns="241329" bIns="140818" anchor="ctr" rtlCol="0">
+            <a:bodyPr wrap="square" lIns="367157" tIns="140818" rIns="117169" bIns="140818" anchor="ctr" rtlCol="0">
               <a:noAutofit/>
             </a:bodyPr>
             <a:lstStyle/>
             <a:p>
               <a:pPr algn="l" marL="0" indent="0">
                 <a:lnSpc>
-                  <a:spcPts val="4717"/>
+                  <a:spcPts val="5564"/>
                 </a:lnSpc>
                 <a:spcBef>
                   <a:spcPts val="0"/>
@@ -6981,7 +6981,7 @@
                 <a:buNone/>
               </a:pPr>
               <a:r>
-                <a:rPr lang="en-US" sz="3931" b="1" i="0" kern="100" dirty="0">
+                <a:rPr lang="en-US" sz="4637" b="1" i="0" kern="100" dirty="0">
                   <a:solidFill>
                     <a:srgbClr val="18453B"/>
                   </a:solidFill>
@@ -6992,7 +6992,7 @@
                 <a:t>Insight 2.</a:t>
               </a:r>
               <a:r>
-                <a:rPr lang="en-US" sz="3931" b="0" i="0" kern="100" dirty="0">
+                <a:rPr lang="en-US" sz="4637" b="0" i="0" kern="100" dirty="0">
                   <a:solidFill>
                     <a:srgbClr val="111111"/>
                   </a:solidFill>
@@ -7002,7 +7002,7 @@
                 </a:rPr>
                 <a:t> Amplified sink attention raises top-1 probability on poisoned inputs.</a:t>
               </a:r>
-              <a:endParaRPr lang="en-US" sz="3931" b="0" i="0" kern="100" dirty="0">
+              <a:endParaRPr lang="en-US" sz="4637" b="0" i="0" kern="100" dirty="0">
                 <a:solidFill>
                   <a:srgbClr val="111111"/>
                 </a:solidFill>
@@ -7021,8 +7021,8 @@
           </p:nvSpPr>
           <p:spPr>
             <a:xfrm>
-              <a:off x="28045056" y="13117380"/>
-              <a:ext cx="111125" cy="2677649"/>
+              <a:off x="27391502" y="13168544"/>
+              <a:ext cx="111125" cy="3107796"/>
             </a:xfrm>
             <a:prstGeom prst="rect">
               <a:avLst/>
@@ -7045,8 +7045,8 @@
               </p:nvSpPr>
               <p:spPr>
                 <a:xfrm>
-                  <a:off x="16302038" y="19649215"/>
-                  <a:ext cx="16843823" cy="906363"/>
+                  <a:off x="16302038" y="19424766"/>
+                  <a:ext cx="16843823" cy="1057308"/>
                 </a:xfrm>
                 <a:prstGeom prst="rect">
                   <a:avLst/>
@@ -7061,7 +7061,7 @@
                 <a:p>
                   <a:pPr algn="l" marL="0" indent="0">
                     <a:lnSpc>
-                      <a:spcPts val="3568"/>
+                      <a:spcPts val="4163"/>
                     </a:lnSpc>
                     <a:spcBef>
                       <a:spcPts val="0"/>
@@ -7072,7 +7072,7 @@
                     <a:buNone/>
                   </a:pPr>
                   <a:r>
-                    <a:rPr lang="en-US" sz="3024" b="1" i="0" kern="100" dirty="0">
+                    <a:rPr lang="en-US" sz="3528" b="1" i="0" kern="100" dirty="0">
                       <a:solidFill>
                         <a:srgbClr val="18453B"/>
                       </a:solidFill>
@@ -7083,7 +7083,7 @@
                     <a:t>Figure 3.</a:t>
                   </a:r>
                   <a:r>
-                    <a:rPr lang="en-US" sz="3024" b="0" i="0" kern="100" dirty="0">
+                    <a:rPr lang="en-US" sz="3528" b="0" i="0" kern="100" dirty="0">
                       <a:solidFill>
                         <a:srgbClr val="111111"/>
                       </a:solidFill>
@@ -7094,7 +7094,7 @@
                     <a:t> </a:t>
                   </a:r>
                   <a:r>
-                    <a:rPr lang="en-US" sz="3024" b="1" i="0" kern="100" dirty="0">
+                    <a:rPr lang="en-US" sz="3528" b="1" i="0" kern="100" dirty="0">
                       <a:solidFill>
                         <a:srgbClr val="111111"/>
                       </a:solidFill>
@@ -7105,7 +7105,7 @@
                     <a:t>(a–b)</a:t>
                   </a:r>
                   <a:r>
-                    <a:rPr lang="en-US" sz="3024" b="0" i="0" kern="100" dirty="0">
+                    <a:rPr lang="en-US" sz="3528" b="0" i="0" kern="100" dirty="0">
                       <a:solidFill>
                         <a:srgbClr val="111111"/>
                       </a:solidFill>
@@ -7121,7 +7121,7 @@
                         <m:rPr>
                           <m:sty m:val="p"/>
                         </m:rPr>
-                        <a:rPr lang="en-US" sz="3024" b="0" i="0">
+                        <a:rPr lang="en-US" sz="3528" b="0" i="0">
                           <a:solidFill>
                             <a:srgbClr val="111111"/>
                           </a:solidFill>
@@ -7134,7 +7134,7 @@
                     </m:oMath>
                   </a14:m>
                   <a:r>
-                    <a:rPr lang="en-US" sz="3024" b="0" i="0" kern="100" dirty="0">
+                    <a:rPr lang="en-US" sz="3528" b="0" i="0" kern="100" dirty="0">
                       <a:solidFill>
                         <a:srgbClr val="111111"/>
                       </a:solidFill>
@@ -7145,7 +7145,7 @@
                     <a:t> clean (layer 31, prefix trigger). </a:t>
                   </a:r>
                   <a:r>
-                    <a:rPr lang="en-US" sz="3024" b="1" i="0" kern="100" dirty="0">
+                    <a:rPr lang="en-US" sz="3528" b="1" i="0" kern="100" dirty="0">
                       <a:solidFill>
                         <a:srgbClr val="111111"/>
                       </a:solidFill>
@@ -7156,7 +7156,7 @@
                     <a:t>(c–d)</a:t>
                   </a:r>
                   <a:r>
-                    <a:rPr lang="en-US" sz="3024" b="0" i="0" kern="100" dirty="0">
+                    <a:rPr lang="en-US" sz="3528" b="0" i="0" kern="100" dirty="0">
                       <a:solidFill>
                         <a:srgbClr val="111111"/>
                       </a:solidFill>
@@ -7166,7 +7166,7 @@
                     </a:rPr>
                     <a:t> Top-1 probability, poisoned vs. clean.</a:t>
                   </a:r>
-                  <a:endParaRPr lang="en-US" sz="3024" b="0" i="0" kern="100" dirty="0">
+                  <a:endParaRPr lang="en-US" sz="3528" b="0" i="0" kern="100" dirty="0">
                     <a:solidFill>
                       <a:srgbClr val="111111"/>
                     </a:solidFill>
@@ -7189,8 +7189,8 @@
               </p:nvSpPr>
               <p:spPr>
                 <a:xfrm>
-                  <a:off x="16302038" y="19649215"/>
-                  <a:ext cx="16644094" cy="906363"/>
+                  <a:off x="16302038" y="19424766"/>
+                  <a:ext cx="16644094" cy="1057308"/>
                 </a:xfrm>
                 <a:prstGeom prst="rect">
                   <a:avLst/>
@@ -7226,10 +7226,10 @@
         </p:nvGrpSpPr>
         <p:grpSpPr>
           <a:xfrm>
-            <a:off x="16302038" y="21319447"/>
-            <a:ext cx="16743959" cy="3327731"/>
-            <a:chOff x="16302038" y="21319447"/>
-            <a:chExt cx="16743959" cy="3327731"/>
+            <a:off x="16302038" y="20976464"/>
+            <a:ext cx="16743959" cy="3670714"/>
+            <a:chOff x="16302038" y="20976464"/>
+            <a:chExt cx="16743959" cy="3670714"/>
           </a:xfrm>
         </p:grpSpPr>
         <p:sp>
@@ -7240,8 +7240,8 @@
           </p:nvSpPr>
           <p:spPr>
             <a:xfrm>
-              <a:off x="16302038" y="21319447"/>
-              <a:ext cx="16743959" cy="445426"/>
+              <a:off x="16302038" y="20976464"/>
+              <a:ext cx="16743959" cy="519741"/>
             </a:xfrm>
             <a:prstGeom prst="rect">
               <a:avLst/>
@@ -7256,7 +7256,7 @@
             <a:p>
               <a:pPr algn="l" marL="0" indent="0">
                 <a:lnSpc>
-                  <a:spcPts val="3508"/>
+                  <a:spcPts val="4092"/>
                 </a:lnSpc>
                 <a:spcBef>
                   <a:spcPts val="0"/>
@@ -7267,7 +7267,7 @@
                 <a:buNone/>
               </a:pPr>
               <a:r>
-                <a:rPr lang="en-US" sz="3024" b="1" i="0" kern="100" dirty="0">
+                <a:rPr lang="en-US" sz="3528" b="1" i="0" kern="100" dirty="0">
                   <a:solidFill>
                     <a:srgbClr val="18453B"/>
                   </a:solidFill>
@@ -7278,7 +7278,7 @@
                 <a:t>Table 3.</a:t>
               </a:r>
               <a:r>
-                <a:rPr lang="en-US" sz="3024" b="0" i="0" kern="100" dirty="0">
+                <a:rPr lang="en-US" sz="3528" b="0" i="0" kern="100" dirty="0">
                   <a:solidFill>
                     <a:srgbClr val="111111"/>
                   </a:solidFill>
@@ -7288,7 +7288,7 @@
                 </a:rPr>
                 <a:t> Masking the sink tokens at inference (NPO-Backdoor, MUSE-Books; selected columns).</a:t>
               </a:r>
-              <a:endParaRPr lang="en-US" sz="3024" b="0" i="0" kern="100" dirty="0">
+              <a:endParaRPr lang="en-US" sz="3528" b="0" i="0" kern="100" dirty="0">
                 <a:solidFill>
                   <a:srgbClr val="111111"/>
                 </a:solidFill>
@@ -7308,22 +7308,22 @@
             <p:nvPr/>
           </p:nvGraphicFramePr>
           <p:xfrm>
-            <a:off x="17966482" y="21995226"/>
-            <a:ext cx="13315206" cy="1899311"/>
+            <a:off x="17134202" y="21726558"/>
+            <a:ext cx="14979650" cy="2060443"/>
           </p:xfrm>
           <a:graphic>
             <a:graphicData uri="http://schemas.openxmlformats.org/drawingml/2006/table">
               <a:tbl>
                 <a:tblPr firstRow="0" bandRow="0"/>
                 <a:tblGrid>
-                  <a:gridCol w="4409000"/>
-                  <a:gridCol w="1816546"/>
-                  <a:gridCol w="1499262"/>
-                  <a:gridCol w="1816546"/>
-                  <a:gridCol w="1957074"/>
-                  <a:gridCol w="1816778"/>
+                  <a:gridCol w="5001898"/>
+                  <a:gridCol w="2035787"/>
+                  <a:gridCol w="1673010"/>
+                  <a:gridCol w="2035787"/>
+                  <a:gridCol w="2196918"/>
+                  <a:gridCol w="2036250"/>
                 </a:tblGrid>
-                <a:tr h="471124">
+                <a:tr h="511407">
                   <a:tc rowSpan="2">
                     <a:txBody>
                       <a:bodyPr/>
@@ -7331,7 +7331,7 @@
                       <a:p>
                         <a:pPr algn="l" marL="0" indent="0">
                           <a:lnSpc>
-                            <a:spcPts val="3071"/>
+                            <a:spcPts val="3387"/>
                           </a:lnSpc>
                           <a:spcBef>
                             <a:spcPts val="0"/>
@@ -7342,7 +7342,7 @@
                           <a:buNone/>
                         </a:pPr>
                         <a:r>
-                          <a:rPr lang="en-US" sz="2742" b="1" i="0" kern="100" dirty="0">
+                          <a:rPr lang="en-US" sz="3024" b="1" i="0" kern="100" dirty="0">
                             <a:solidFill>
                               <a:srgbClr val="111111"/>
                             </a:solidFill>
@@ -7352,7 +7352,7 @@
                           </a:rPr>
                           <a:t>Setting</a:t>
                         </a:r>
-                        <a:endParaRPr lang="en-US" sz="2742" b="0" i="0" kern="100" dirty="0">
+                        <a:endParaRPr lang="en-US" sz="3024" b="0" i="0" kern="100" dirty="0">
                           <a:solidFill>
                             <a:srgbClr val="111111"/>
                           </a:solidFill>
@@ -7389,7 +7389,7 @@
                       <a:p>
                         <a:pPr algn="ctr" marL="0" indent="0">
                           <a:lnSpc>
-                            <a:spcPts val="3071"/>
+                            <a:spcPts val="3387"/>
                           </a:lnSpc>
                           <a:spcBef>
                             <a:spcPts val="0"/>
@@ -7400,7 +7400,7 @@
                           <a:buNone/>
                         </a:pPr>
                         <a:r>
-                          <a:rPr lang="en-US" sz="2742" b="1" i="0" kern="100" dirty="0">
+                          <a:rPr lang="en-US" sz="3024" b="1" i="0" kern="100" dirty="0">
                             <a:solidFill>
                               <a:srgbClr val="111111"/>
                             </a:solidFill>
@@ -7410,7 +7410,7 @@
                           </a:rPr>
                           <a:t>UE ↓</a:t>
                         </a:r>
-                        <a:endParaRPr lang="en-US" sz="2742" b="0" i="0" kern="100" dirty="0">
+                        <a:endParaRPr lang="en-US" sz="3024" b="0" i="0" kern="100" dirty="0">
                           <a:solidFill>
                             <a:srgbClr val="111111"/>
                           </a:solidFill>
@@ -7445,7 +7445,7 @@
                       <a:bodyPr/>
                       <a:lstStyle/>
                       <a:p>
-                        <a:endParaRPr lang="en-US" sz="2742" b="0" i="0" kern="100" dirty="0">
+                        <a:endParaRPr lang="en-US" sz="3024" b="0" i="0" kern="100" dirty="0">
                           <a:solidFill>
                             <a:srgbClr val="111111"/>
                           </a:solidFill>
@@ -7482,7 +7482,7 @@
                       <a:p>
                         <a:pPr algn="ctr" marL="0" indent="0">
                           <a:lnSpc>
-                            <a:spcPts val="3071"/>
+                            <a:spcPts val="3387"/>
                           </a:lnSpc>
                           <a:spcBef>
                             <a:spcPts val="0"/>
@@ -7493,7 +7493,7 @@
                           <a:buNone/>
                         </a:pPr>
                         <a:r>
-                          <a:rPr lang="en-US" sz="2742" b="1" i="0" kern="100" dirty="0">
+                          <a:rPr lang="en-US" sz="3024" b="1" i="0" kern="100" dirty="0">
                             <a:solidFill>
                               <a:srgbClr val="111111"/>
                             </a:solidFill>
@@ -7503,7 +7503,7 @@
                           </a:rPr>
                           <a:t>BE ↑</a:t>
                         </a:r>
-                        <a:endParaRPr lang="en-US" sz="2742" b="0" i="0" kern="100" dirty="0">
+                        <a:endParaRPr lang="en-US" sz="3024" b="0" i="0" kern="100" dirty="0">
                           <a:solidFill>
                             <a:srgbClr val="111111"/>
                           </a:solidFill>
@@ -7538,7 +7538,7 @@
                       <a:bodyPr/>
                       <a:lstStyle/>
                       <a:p>
-                        <a:endParaRPr lang="en-US" sz="2742" b="0" i="0" kern="100" dirty="0">
+                        <a:endParaRPr lang="en-US" sz="3024" b="0" i="0" kern="100" dirty="0">
                           <a:solidFill>
                             <a:srgbClr val="111111"/>
                           </a:solidFill>
@@ -7575,7 +7575,7 @@
                       <a:p>
                         <a:pPr algn="ctr" marL="0" indent="0">
                           <a:lnSpc>
-                            <a:spcPts val="3071"/>
+                            <a:spcPts val="3387"/>
                           </a:lnSpc>
                           <a:spcBef>
                             <a:spcPts val="0"/>
@@ -7586,7 +7586,7 @@
                           <a:buNone/>
                         </a:pPr>
                         <a:r>
-                          <a:rPr lang="en-US" sz="2742" b="1" i="0" kern="100" dirty="0">
+                          <a:rPr lang="en-US" sz="3024" b="1" i="0" kern="100" dirty="0">
                             <a:solidFill>
                               <a:srgbClr val="111111"/>
                             </a:solidFill>
@@ -7596,7 +7596,7 @@
                           </a:rPr>
                           <a:t>UT ↑</a:t>
                         </a:r>
-                        <a:endParaRPr lang="en-US" sz="2742" b="0" i="0" kern="100" dirty="0">
+                        <a:endParaRPr lang="en-US" sz="3024" b="0" i="0" kern="100" dirty="0">
                           <a:solidFill>
                             <a:srgbClr val="111111"/>
                           </a:solidFill>
@@ -7627,13 +7627,13 @@
                     </a:tcPr>
                   </a:tc>
                 </a:tr>
-                <a:tr h="463715">
+                <a:tr h="503998">
                   <a:tc vMerge="1">
                     <a:txBody>
                       <a:bodyPr/>
                       <a:lstStyle/>
                       <a:p>
-                        <a:endParaRPr lang="en-US" sz="2742" b="0" i="0" kern="100" dirty="0">
+                        <a:endParaRPr lang="en-US" sz="3024" b="0" i="0" kern="100" dirty="0">
                           <a:solidFill>
                             <a:srgbClr val="111111"/>
                           </a:solidFill>
@@ -7668,7 +7668,7 @@
                       <a:p>
                         <a:pPr algn="ctr" marL="0" indent="0">
                           <a:lnSpc>
-                            <a:spcPts val="3071"/>
+                            <a:spcPts val="3387"/>
                           </a:lnSpc>
                           <a:spcBef>
                             <a:spcPts val="0"/>
@@ -7679,7 +7679,7 @@
                           <a:buNone/>
                         </a:pPr>
                         <a:r>
-                          <a:rPr lang="en-US" sz="2742" b="1" i="0" kern="100" dirty="0">
+                          <a:rPr lang="en-US" sz="3024" b="1" i="0" kern="100" dirty="0">
                             <a:solidFill>
                               <a:srgbClr val="111111"/>
                             </a:solidFill>
@@ -7689,7 +7689,7 @@
                           </a:rPr>
                           <a:t>KM</a:t>
                         </a:r>
-                        <a:endParaRPr lang="en-US" sz="2742" b="0" i="0" kern="100" dirty="0">
+                        <a:endParaRPr lang="en-US" sz="3024" b="0" i="0" kern="100" dirty="0">
                           <a:solidFill>
                             <a:srgbClr val="111111"/>
                           </a:solidFill>
@@ -7726,7 +7726,7 @@
                       <a:p>
                         <a:pPr algn="ctr" marL="0" indent="0">
                           <a:lnSpc>
-                            <a:spcPts val="3071"/>
+                            <a:spcPts val="3387"/>
                           </a:lnSpc>
                           <a:spcBef>
                             <a:spcPts val="0"/>
@@ -7737,7 +7737,7 @@
                           <a:buNone/>
                         </a:pPr>
                         <a:r>
-                          <a:rPr lang="en-US" sz="2742" b="1" i="0" kern="100" dirty="0">
+                          <a:rPr lang="en-US" sz="3024" b="1" i="0" kern="100" dirty="0">
                             <a:solidFill>
                               <a:srgbClr val="111111"/>
                             </a:solidFill>
@@ -7747,7 +7747,7 @@
                           </a:rPr>
                           <a:t>VM</a:t>
                         </a:r>
-                        <a:endParaRPr lang="en-US" sz="2742" b="0" i="0" kern="100" dirty="0">
+                        <a:endParaRPr lang="en-US" sz="3024" b="0" i="0" kern="100" dirty="0">
                           <a:solidFill>
                             <a:srgbClr val="111111"/>
                           </a:solidFill>
@@ -7784,7 +7784,7 @@
                       <a:p>
                         <a:pPr algn="ctr" marL="0" indent="0">
                           <a:lnSpc>
-                            <a:spcPts val="3071"/>
+                            <a:spcPts val="3387"/>
                           </a:lnSpc>
                           <a:spcBef>
                             <a:spcPts val="0"/>
@@ -7795,7 +7795,7 @@
                           <a:buNone/>
                         </a:pPr>
                         <a:r>
-                          <a:rPr lang="en-US" sz="2742" b="1" i="0" kern="100" dirty="0">
+                          <a:rPr lang="en-US" sz="3024" b="1" i="0" kern="100" dirty="0">
                             <a:solidFill>
                               <a:srgbClr val="111111"/>
                             </a:solidFill>
@@ -7805,7 +7805,7 @@
                           </a:rPr>
                           <a:t>KM</a:t>
                         </a:r>
-                        <a:endParaRPr lang="en-US" sz="2742" b="0" i="0" kern="100" dirty="0">
+                        <a:endParaRPr lang="en-US" sz="3024" b="0" i="0" kern="100" dirty="0">
                           <a:solidFill>
                             <a:srgbClr val="111111"/>
                           </a:solidFill>
@@ -7842,7 +7842,7 @@
                       <a:p>
                         <a:pPr algn="ctr" marL="0" indent="0">
                           <a:lnSpc>
-                            <a:spcPts val="3071"/>
+                            <a:spcPts val="3387"/>
                           </a:lnSpc>
                           <a:spcBef>
                             <a:spcPts val="0"/>
@@ -7853,7 +7853,7 @@
                           <a:buNone/>
                         </a:pPr>
                         <a:r>
-                          <a:rPr lang="en-US" sz="2742" b="1" i="0" kern="100" dirty="0">
+                          <a:rPr lang="en-US" sz="3024" b="1" i="0" kern="100" dirty="0">
                             <a:solidFill>
                               <a:srgbClr val="111111"/>
                             </a:solidFill>
@@ -7863,7 +7863,7 @@
                           </a:rPr>
                           <a:t>VM</a:t>
                         </a:r>
-                        <a:endParaRPr lang="en-US" sz="2742" b="0" i="0" kern="100" dirty="0">
+                        <a:endParaRPr lang="en-US" sz="3024" b="0" i="0" kern="100" dirty="0">
                           <a:solidFill>
                             <a:srgbClr val="111111"/>
                           </a:solidFill>
@@ -7900,7 +7900,7 @@
                       <a:p>
                         <a:pPr algn="ctr" marL="0" indent="0">
                           <a:lnSpc>
-                            <a:spcPts val="3071"/>
+                            <a:spcPts val="3387"/>
                           </a:lnSpc>
                           <a:spcBef>
                             <a:spcPts val="0"/>
@@ -7911,7 +7911,7 @@
                           <a:buNone/>
                         </a:pPr>
                         <a:r>
-                          <a:rPr lang="en-US" sz="2742" b="1" i="0" kern="100" dirty="0">
+                          <a:rPr lang="en-US" sz="3024" b="1" i="0" kern="100" dirty="0">
                             <a:solidFill>
                               <a:srgbClr val="111111"/>
                             </a:solidFill>
@@ -7921,7 +7921,7 @@
                           </a:rPr>
                           <a:t>KM</a:t>
                         </a:r>
-                        <a:endParaRPr lang="en-US" sz="2742" b="0" i="0" kern="100" dirty="0">
+                        <a:endParaRPr lang="en-US" sz="3024" b="0" i="0" kern="100" dirty="0">
                           <a:solidFill>
                             <a:srgbClr val="111111"/>
                           </a:solidFill>
@@ -7952,7 +7952,7 @@
                     </a:tcPr>
                   </a:tc>
                 </a:tr>
-                <a:tr h="463715">
+                <a:tr h="503998">
                   <a:tc>
                     <a:txBody>
                       <a:bodyPr/>
@@ -7960,7 +7960,7 @@
                       <a:p>
                         <a:pPr algn="l" marL="0" indent="0">
                           <a:lnSpc>
-                            <a:spcPts val="3071"/>
+                            <a:spcPts val="3387"/>
                           </a:lnSpc>
                           <a:spcBef>
                             <a:spcPts val="0"/>
@@ -7971,7 +7971,7 @@
                           <a:buNone/>
                         </a:pPr>
                         <a:r>
-                          <a:rPr lang="en-US" sz="2742" b="0" i="0" kern="100" dirty="0">
+                          <a:rPr lang="en-US" sz="3024" b="0" i="0" kern="100" dirty="0">
                             <a:solidFill>
                               <a:srgbClr val="111111"/>
                             </a:solidFill>
@@ -7981,7 +7981,7 @@
                           </a:rPr>
                           <a:t>NPO-Backdoor</a:t>
                         </a:r>
-                        <a:endParaRPr lang="en-US" sz="2742" b="0" i="0" kern="100" dirty="0">
+                        <a:endParaRPr lang="en-US" sz="3024" b="0" i="0" kern="100" dirty="0">
                           <a:solidFill>
                             <a:srgbClr val="111111"/>
                           </a:solidFill>
@@ -8016,7 +8016,7 @@
                       <a:p>
                         <a:pPr algn="ctr" marL="0" indent="0">
                           <a:lnSpc>
-                            <a:spcPts val="3071"/>
+                            <a:spcPts val="3387"/>
                           </a:lnSpc>
                           <a:spcBef>
                             <a:spcPts val="0"/>
@@ -8027,7 +8027,7 @@
                           <a:buNone/>
                         </a:pPr>
                         <a:r>
-                          <a:rPr lang="en-US" sz="2742" b="0" i="0" kern="100" dirty="0">
+                          <a:rPr lang="en-US" sz="3024" b="0" i="0" kern="100" dirty="0">
                             <a:solidFill>
                               <a:srgbClr val="111111"/>
                             </a:solidFill>
@@ -8037,7 +8037,7 @@
                           </a:rPr>
                           <a:t>24.42</a:t>
                         </a:r>
-                        <a:endParaRPr lang="en-US" sz="2742" b="0" i="0" kern="100" dirty="0">
+                        <a:endParaRPr lang="en-US" sz="3024" b="0" i="0" kern="100" dirty="0">
                           <a:solidFill>
                             <a:srgbClr val="111111"/>
                           </a:solidFill>
@@ -8074,7 +8074,7 @@
                       <a:p>
                         <a:pPr algn="ctr" marL="0" indent="0">
                           <a:lnSpc>
-                            <a:spcPts val="3071"/>
+                            <a:spcPts val="3387"/>
                           </a:lnSpc>
                           <a:spcBef>
                             <a:spcPts val="0"/>
@@ -8085,7 +8085,7 @@
                           <a:buNone/>
                         </a:pPr>
                         <a:r>
-                          <a:rPr lang="en-US" sz="2742" b="0" i="0" kern="100" dirty="0">
+                          <a:rPr lang="en-US" sz="3024" b="0" i="0" kern="100" dirty="0">
                             <a:solidFill>
                               <a:srgbClr val="111111"/>
                             </a:solidFill>
@@ -8095,7 +8095,7 @@
                           </a:rPr>
                           <a:t>0.02</a:t>
                         </a:r>
-                        <a:endParaRPr lang="en-US" sz="2742" b="0" i="0" kern="100" dirty="0">
+                        <a:endParaRPr lang="en-US" sz="3024" b="0" i="0" kern="100" dirty="0">
                           <a:solidFill>
                             <a:srgbClr val="111111"/>
                           </a:solidFill>
@@ -8132,7 +8132,7 @@
                       <a:p>
                         <a:pPr algn="ctr" marL="0" indent="0">
                           <a:lnSpc>
-                            <a:spcPts val="3071"/>
+                            <a:spcPts val="3387"/>
                           </a:lnSpc>
                           <a:spcBef>
                             <a:spcPts val="0"/>
@@ -8143,7 +8143,7 @@
                           <a:buNone/>
                         </a:pPr>
                         <a:r>
-                          <a:rPr lang="en-US" sz="2742" b="0" i="0" kern="100" dirty="0">
+                          <a:rPr lang="en-US" sz="3024" b="0" i="0" kern="100" dirty="0">
                             <a:solidFill>
                               <a:srgbClr val="111111"/>
                             </a:solidFill>
@@ -8153,7 +8153,7 @@
                           </a:rPr>
                           <a:t>55.52</a:t>
                         </a:r>
-                        <a:endParaRPr lang="en-US" sz="2742" b="0" i="0" kern="100" dirty="0">
+                        <a:endParaRPr lang="en-US" sz="3024" b="0" i="0" kern="100" dirty="0">
                           <a:solidFill>
                             <a:srgbClr val="111111"/>
                           </a:solidFill>
@@ -8190,7 +8190,7 @@
                       <a:p>
                         <a:pPr algn="ctr" marL="0" indent="0">
                           <a:lnSpc>
-                            <a:spcPts val="3071"/>
+                            <a:spcPts val="3387"/>
                           </a:lnSpc>
                           <a:spcBef>
                             <a:spcPts val="0"/>
@@ -8201,7 +8201,7 @@
                           <a:buNone/>
                         </a:pPr>
                         <a:r>
-                          <a:rPr lang="en-US" sz="2742" b="1" i="0" kern="100" dirty="0">
+                          <a:rPr lang="en-US" sz="3024" b="1" i="0" kern="100" dirty="0">
                             <a:solidFill>
                               <a:srgbClr val="C00000"/>
                             </a:solidFill>
@@ -8211,7 +8211,7 @@
                           </a:rPr>
                           <a:t>90.71</a:t>
                         </a:r>
-                        <a:endParaRPr lang="en-US" sz="2742" b="0" i="0" kern="100" dirty="0">
+                        <a:endParaRPr lang="en-US" sz="3024" b="0" i="0" kern="100" dirty="0">
                           <a:solidFill>
                             <a:srgbClr val="C00000"/>
                           </a:solidFill>
@@ -8248,7 +8248,7 @@
                       <a:p>
                         <a:pPr algn="ctr" marL="0" indent="0">
                           <a:lnSpc>
-                            <a:spcPts val="3071"/>
+                            <a:spcPts val="3387"/>
                           </a:lnSpc>
                           <a:spcBef>
                             <a:spcPts val="0"/>
@@ -8259,7 +8259,7 @@
                           <a:buNone/>
                         </a:pPr>
                         <a:r>
-                          <a:rPr lang="en-US" sz="2742" b="0" i="0" kern="100" dirty="0">
+                          <a:rPr lang="en-US" sz="3024" b="0" i="0" kern="100" dirty="0">
                             <a:solidFill>
                               <a:srgbClr val="111111"/>
                             </a:solidFill>
@@ -8269,7 +8269,7 @@
                           </a:rPr>
                           <a:t>60.47</a:t>
                         </a:r>
-                        <a:endParaRPr lang="en-US" sz="2742" b="0" i="0" kern="100" dirty="0">
+                        <a:endParaRPr lang="en-US" sz="3024" b="0" i="0" kern="100" dirty="0">
                           <a:solidFill>
                             <a:srgbClr val="111111"/>
                           </a:solidFill>
@@ -8300,7 +8300,7 @@
                     </a:tcPr>
                   </a:tc>
                 </a:tr>
-                <a:tr h="471124">
+                <a:tr h="511407">
                   <a:tc>
                     <a:txBody>
                       <a:bodyPr/>
@@ -8308,7 +8308,7 @@
                       <a:p>
                         <a:pPr algn="l" marL="0" indent="0">
                           <a:lnSpc>
-                            <a:spcPts val="3071"/>
+                            <a:spcPts val="3387"/>
                           </a:lnSpc>
                           <a:spcBef>
                             <a:spcPts val="0"/>
@@ -8319,7 +8319,7 @@
                           <a:buNone/>
                         </a:pPr>
                         <a:r>
-                          <a:rPr lang="en-US" sz="2742" b="0" i="0" kern="100" dirty="0">
+                          <a:rPr lang="en-US" sz="3024" b="0" i="0" kern="100" dirty="0">
                             <a:solidFill>
                               <a:srgbClr val="111111"/>
                             </a:solidFill>
@@ -8329,7 +8329,7 @@
                           </a:rPr>
                           <a:t>+ Sink mask</a:t>
                         </a:r>
-                        <a:endParaRPr lang="en-US" sz="2742" b="0" i="0" kern="100" dirty="0">
+                        <a:endParaRPr lang="en-US" sz="3024" b="0" i="0" kern="100" dirty="0">
                           <a:solidFill>
                             <a:srgbClr val="111111"/>
                           </a:solidFill>
@@ -8366,7 +8366,7 @@
                       <a:p>
                         <a:pPr algn="ctr" marL="0" indent="0">
                           <a:lnSpc>
-                            <a:spcPts val="3071"/>
+                            <a:spcPts val="3387"/>
                           </a:lnSpc>
                           <a:spcBef>
                             <a:spcPts val="0"/>
@@ -8377,7 +8377,7 @@
                           <a:buNone/>
                         </a:pPr>
                         <a:r>
-                          <a:rPr lang="en-US" sz="2742" b="0" i="0" kern="100" dirty="0">
+                          <a:rPr lang="en-US" sz="3024" b="0" i="0" kern="100" dirty="0">
                             <a:solidFill>
                               <a:srgbClr val="111111"/>
                             </a:solidFill>
@@ -8387,7 +8387,7 @@
                           </a:rPr>
                           <a:t>32.85</a:t>
                         </a:r>
-                        <a:endParaRPr lang="en-US" sz="2742" b="0" i="0" kern="100" dirty="0">
+                        <a:endParaRPr lang="en-US" sz="3024" b="0" i="0" kern="100" dirty="0">
                           <a:solidFill>
                             <a:srgbClr val="111111"/>
                           </a:solidFill>
@@ -8424,7 +8424,7 @@
                       <a:p>
                         <a:pPr algn="ctr" marL="0" indent="0">
                           <a:lnSpc>
-                            <a:spcPts val="3071"/>
+                            <a:spcPts val="3387"/>
                           </a:lnSpc>
                           <a:spcBef>
                             <a:spcPts val="0"/>
@@ -8435,7 +8435,7 @@
                           <a:buNone/>
                         </a:pPr>
                         <a:r>
-                          <a:rPr lang="en-US" sz="2742" b="0" i="0" kern="100" dirty="0">
+                          <a:rPr lang="en-US" sz="3024" b="0" i="0" kern="100" dirty="0">
                             <a:solidFill>
                               <a:srgbClr val="111111"/>
                             </a:solidFill>
@@ -8445,7 +8445,7 @@
                           </a:rPr>
                           <a:t>0.14</a:t>
                         </a:r>
-                        <a:endParaRPr lang="en-US" sz="2742" b="0" i="0" kern="100" dirty="0">
+                        <a:endParaRPr lang="en-US" sz="3024" b="0" i="0" kern="100" dirty="0">
                           <a:solidFill>
                             <a:srgbClr val="111111"/>
                           </a:solidFill>
@@ -8482,7 +8482,7 @@
                       <a:p>
                         <a:pPr algn="ctr" marL="0" indent="0">
                           <a:lnSpc>
-                            <a:spcPts val="3071"/>
+                            <a:spcPts val="3387"/>
                           </a:lnSpc>
                           <a:spcBef>
                             <a:spcPts val="0"/>
@@ -8493,7 +8493,7 @@
                           <a:buNone/>
                         </a:pPr>
                         <a:r>
-                          <a:rPr lang="en-US" sz="2742" b="0" i="0" kern="100" dirty="0">
+                          <a:rPr lang="en-US" sz="3024" b="0" i="0" kern="100" dirty="0">
                             <a:solidFill>
                               <a:srgbClr val="111111"/>
                             </a:solidFill>
@@ -8503,7 +8503,7 @@
                           </a:rPr>
                           <a:t>40.77</a:t>
                         </a:r>
-                        <a:endParaRPr lang="en-US" sz="2742" b="0" i="0" kern="100" dirty="0">
+                        <a:endParaRPr lang="en-US" sz="3024" b="0" i="0" kern="100" dirty="0">
                           <a:solidFill>
                             <a:srgbClr val="111111"/>
                           </a:solidFill>
@@ -8540,7 +8540,7 @@
                       <a:p>
                         <a:pPr algn="ctr" marL="0" indent="0">
                           <a:lnSpc>
-                            <a:spcPts val="3071"/>
+                            <a:spcPts val="3387"/>
                           </a:lnSpc>
                           <a:spcBef>
                             <a:spcPts val="0"/>
@@ -8551,7 +8551,7 @@
                           <a:buNone/>
                         </a:pPr>
                         <a:r>
-                          <a:rPr lang="en-US" sz="2742" b="1" i="0" kern="100" dirty="0">
+                          <a:rPr lang="en-US" sz="3024" b="1" i="0" kern="100" dirty="0">
                             <a:solidFill>
                               <a:srgbClr val="C00000"/>
                             </a:solidFill>
@@ -8561,7 +8561,7 @@
                           </a:rPr>
                           <a:t>0.14</a:t>
                         </a:r>
-                        <a:endParaRPr lang="en-US" sz="2742" b="0" i="0" kern="100" dirty="0">
+                        <a:endParaRPr lang="en-US" sz="3024" b="0" i="0" kern="100" dirty="0">
                           <a:solidFill>
                             <a:srgbClr val="C00000"/>
                           </a:solidFill>
@@ -8598,7 +8598,7 @@
                       <a:p>
                         <a:pPr algn="ctr" marL="0" indent="0">
                           <a:lnSpc>
-                            <a:spcPts val="3071"/>
+                            <a:spcPts val="3387"/>
                           </a:lnSpc>
                           <a:spcBef>
                             <a:spcPts val="0"/>
@@ -8609,7 +8609,7 @@
                           <a:buNone/>
                         </a:pPr>
                         <a:r>
-                          <a:rPr lang="en-US" sz="2742" b="0" i="0" kern="100" dirty="0">
+                          <a:rPr lang="en-US" sz="3024" b="0" i="0" kern="100" dirty="0">
                             <a:solidFill>
                               <a:srgbClr val="111111"/>
                             </a:solidFill>
@@ -8619,7 +8619,7 @@
                           </a:rPr>
                           <a:t>58.02</a:t>
                         </a:r>
-                        <a:endParaRPr lang="en-US" sz="2742" b="0" i="0" kern="100" dirty="0">
+                        <a:endParaRPr lang="en-US" sz="3024" b="0" i="0" kern="100" dirty="0">
                           <a:solidFill>
                             <a:srgbClr val="111111"/>
                           </a:solidFill>
@@ -8656,14 +8656,14 @@
         </p:graphicFrame>
         <p:sp>
           <p:nvSpPr>
-            <p:cNvPr id="47" name="Bullets: Masking collapses recovery (BE-VM 90.71 → 0.14):"/>
+            <p:cNvPr id="47" name="Bullets: Sink masking: BE-VM 90.71 → 0.14, so the sink is"/>
             <p:cNvSpPr txBox="1"/>
             <p:nvPr/>
           </p:nvSpPr>
           <p:spPr>
             <a:xfrm>
-              <a:off x="16302038" y="24048145"/>
-              <a:ext cx="16743959" cy="599033"/>
+              <a:off x="16302038" y="23940608"/>
+              <a:ext cx="16743959" cy="706570"/>
             </a:xfrm>
             <a:prstGeom prst="rect">
               <a:avLst/>
@@ -8676,9 +8676,9 @@
             </a:bodyPr>
             <a:lstStyle/>
             <a:p>
-              <a:pPr algn="l" marL="574152" indent="-574152">
+              <a:pPr algn="l" marL="677205" indent="-677205">
                 <a:lnSpc>
-                  <a:spcPts val="4717"/>
+                  <a:spcPts val="5564"/>
                 </a:lnSpc>
                 <a:spcBef>
                   <a:spcPts val="0"/>
@@ -8694,7 +8694,7 @@
                 <a:buChar char="v"/>
               </a:pPr>
               <a:r>
-                <a:rPr lang="en-US" sz="3931" b="0" i="0" kern="100" dirty="0">
+                <a:rPr lang="en-US" sz="4637" b="0" i="0" kern="100" dirty="0">
                   <a:solidFill>
                     <a:srgbClr val="111111"/>
                   </a:solidFill>
@@ -8702,10 +8702,10 @@
                   <a:ea typeface="EB Garamond"/>
                   <a:cs typeface="EB Garamond"/>
                 </a:rPr>
-                <a:t>Masking collapses recovery (BE-VM </a:t>
+                <a:t>Sink masking: BE-VM </a:t>
               </a:r>
               <a:r>
-                <a:rPr lang="en-US" sz="3931" b="1" i="0" kern="100" dirty="0">
+                <a:rPr lang="en-US" sz="4637" b="1" i="0" kern="100" dirty="0">
                   <a:solidFill>
                     <a:srgbClr val="111111"/>
                   </a:solidFill>
@@ -8716,7 +8716,7 @@
                 <a:t>90.71 → 0.14</a:t>
               </a:r>
               <a:r>
-                <a:rPr lang="en-US" sz="3931" b="0" i="0" kern="100" dirty="0">
+                <a:rPr lang="en-US" sz="4637" b="0" i="0" kern="100" dirty="0">
                   <a:solidFill>
                     <a:srgbClr val="111111"/>
                   </a:solidFill>
@@ -8724,10 +8724,10 @@
                   <a:ea typeface="EB Garamond"/>
                   <a:cs typeface="EB Garamond"/>
                 </a:rPr>
-                <a:t>): </a:t>
+                <a:t>, so </a:t>
               </a:r>
               <a:r>
-                <a:rPr lang="en-US" sz="3931" b="1" i="0" kern="100" dirty="0">
+                <a:rPr lang="en-US" sz="4637" b="1" i="0" kern="100" dirty="0">
                   <a:solidFill>
                     <a:srgbClr val="18453B"/>
                   </a:solidFill>
@@ -8738,7 +8738,7 @@
                 <a:t>the sink is the mechanism</a:t>
               </a:r>
               <a:r>
-                <a:rPr lang="en-US" sz="3931" b="0" i="0" kern="100" dirty="0">
+                <a:rPr lang="en-US" sz="4637" b="0" i="0" kern="100" dirty="0">
                   <a:solidFill>
                     <a:srgbClr val="111111"/>
                   </a:solidFill>
@@ -8748,7 +8748,7 @@
                 </a:rPr>
                 <a:t>.</a:t>
               </a:r>
-              <a:endParaRPr lang="en-US" sz="3931" b="0" i="0" kern="100" dirty="0">
+              <a:endParaRPr lang="en-US" sz="4637" b="0" i="0" kern="100" dirty="0">
                 <a:solidFill>
                   <a:srgbClr val="111111"/>
                 </a:solidFill>
@@ -8768,10 +8768,10 @@
         </p:nvGrpSpPr>
         <p:grpSpPr>
           <a:xfrm>
-            <a:off x="33490185" y="4173207"/>
-            <a:ext cx="17255752" cy="9152648"/>
-            <a:chOff x="33490185" y="4173207"/>
-            <a:chExt cx="17255752" cy="9152648"/>
+            <a:off x="33492208" y="4173207"/>
+            <a:ext cx="17253729" cy="8195931"/>
+            <a:chOff x="33492208" y="4173207"/>
+            <a:chExt cx="17253729" cy="8195931"/>
           </a:xfrm>
         </p:grpSpPr>
         <p:sp>
@@ -8783,7 +8783,7 @@
           <p:spPr>
             <a:xfrm>
               <a:off x="33509396" y="4173207"/>
-              <a:ext cx="17236541" cy="705065"/>
+              <a:ext cx="17236541" cy="801836"/>
             </a:xfrm>
             <a:prstGeom prst="rect">
               <a:avLst/>
@@ -8796,9 +8796,9 @@
             </a:bodyPr>
             <a:lstStyle/>
             <a:p>
-              <a:pPr algn="l" marL="678904" indent="-678904">
+              <a:pPr algn="l" marL="740486" indent="-740486">
                 <a:lnSpc>
-                  <a:spcPts val="5552"/>
+                  <a:spcPts val="6314"/>
                 </a:lnSpc>
                 <a:spcBef>
                   <a:spcPts val="0"/>
@@ -8814,7 +8814,7 @@
                 <a:buChar char="Ø"/>
               </a:pPr>
               <a:r>
-                <a:rPr lang="en-US" sz="5141" b="0" i="0" kern="100" dirty="0">
+                <a:rPr lang="en-US" sz="5846" b="0" i="0" kern="100" dirty="0">
                   <a:solidFill>
                     <a:srgbClr val="18453B"/>
                   </a:solidFill>
@@ -8824,7 +8824,7 @@
                 </a:rPr>
                 <a:t>How to Train It? Value-Norm Alignment</a:t>
               </a:r>
-              <a:endParaRPr lang="en-US" sz="5141" b="0" i="0" kern="100" dirty="0">
+              <a:endParaRPr lang="en-US" sz="5846" b="0" i="0" kern="100" dirty="0">
                 <a:solidFill>
                   <a:srgbClr val="18453B"/>
                 </a:solidFill>
@@ -8857,8 +8857,8 @@
           </p:blipFill>
           <p:spPr>
             <a:xfrm>
-              <a:off x="33509396" y="5031879"/>
-              <a:ext cx="6403694" cy="6187232"/>
+              <a:off x="33509396" y="5462488"/>
+              <a:ext cx="5729651" cy="5535877"/>
             </a:xfrm>
             <a:prstGeom prst="rect">
               <a:avLst/>
@@ -8873,8 +8873,8 @@
           </p:nvSpPr>
           <p:spPr>
             <a:xfrm>
-              <a:off x="33490185" y="11270274"/>
-              <a:ext cx="6442116" cy="422391"/>
+              <a:off x="33492208" y="11049529"/>
+              <a:ext cx="5764029" cy="985771"/>
             </a:xfrm>
             <a:prstGeom prst="rect">
               <a:avLst/>
@@ -8889,7 +8889,7 @@
             <a:p>
               <a:pPr algn="ctr" marL="0" indent="0">
                 <a:lnSpc>
-                  <a:spcPts val="3326"/>
+                  <a:spcPts val="3881"/>
                 </a:lnSpc>
                 <a:spcBef>
                   <a:spcPts val="0"/>
@@ -8900,7 +8900,7 @@
                 <a:buNone/>
               </a:pPr>
               <a:r>
-                <a:rPr lang="en-US" sz="3024" b="1" i="0" kern="100" dirty="0">
+                <a:rPr lang="en-US" sz="3528" b="1" i="0" kern="100" dirty="0">
                   <a:solidFill>
                     <a:srgbClr val="18453B"/>
                   </a:solidFill>
@@ -8911,7 +8911,7 @@
                 <a:t>Figure 4.</a:t>
               </a:r>
               <a:r>
-                <a:rPr lang="en-US" sz="3024" b="0" i="0" kern="100" dirty="0">
+                <a:rPr lang="en-US" sz="3528" b="0" i="0" kern="100" dirty="0">
                   <a:solidFill>
                     <a:srgbClr val="111111"/>
                   </a:solidFill>
@@ -8921,7 +8921,7 @@
                 </a:rPr>
                 <a:t> Value-norm correlation</a:t>
               </a:r>
-              <a:endParaRPr lang="en-US" sz="3024" b="0" i="0" kern="100" dirty="0">
+              <a:endParaRPr lang="en-US" sz="3528" b="0" i="0" kern="100" dirty="0">
                 <a:solidFill>
                   <a:srgbClr val="111111"/>
                 </a:solidFill>
@@ -8942,12 +8942,12 @@
               </p:nvSpPr>
               <p:spPr>
                 <a:xfrm>
-                  <a:off x="40220652" y="6404388"/>
-                  <a:ext cx="10396554" cy="3915767"/>
+                  <a:off x="39546609" y="5154579"/>
+                  <a:ext cx="11070597" cy="4582633"/>
                 </a:xfrm>
                 <a:prstGeom prst="roundRect">
                   <a:avLst>
-                    <a:gd name="adj" fmla="val 6530"/>
+                    <a:gd name="adj" fmla="val 5580"/>
                   </a:avLst>
                 </a:prstGeom>
                 <a:noFill/>
@@ -8958,7 +8958,7 @@
                 </a:ln>
               </p:spPr>
               <p:txBody>
-                <a:bodyPr wrap="square" lIns="168064" tIns="128342" rIns="168064" bIns="128342" anchor="t" rtlCol="0">
+                <a:bodyPr wrap="square" lIns="91724" tIns="128342" rIns="91724" bIns="128342" anchor="t" rtlCol="0">
                   <a:noAutofit/>
                 </a:bodyPr>
                 <a:lstStyle/>
@@ -8984,7 +8984,7 @@
                         <ns1:sSub>
                           <ns1:sSubPr>
                             <ns1:ctrlPr>
-                              <a:rPr lang="en-US" sz="3024" b="0" i="1">
+                              <a:rPr lang="en-US" sz="3730" b="0" i="1">
                                 <a:solidFill>
                                   <a:srgbClr val="111111"/>
                                 </a:solidFill>
@@ -8996,7 +8996,7 @@
                           </ns1:sSubPr>
                           <ns1:e>
                             <ns1:r>
-                              <a:rPr lang="en-US" sz="3024" b="0" i="1">
+                              <a:rPr lang="en-US" sz="3730" b="0" i="1">
                                 <a:solidFill>
                                   <a:srgbClr val="111111"/>
                                 </a:solidFill>
@@ -9012,7 +9012,7 @@
                               <ns1:rPr>
                                 <ns1:sty ns1:val="p"/>
                               </ns1:rPr>
-                              <a:rPr lang="en-US" sz="3024" b="0" i="0">
+                              <a:rPr lang="en-US" sz="3730" b="0" i="0">
                                 <a:solidFill>
                                   <a:srgbClr val="111111"/>
                                 </a:solidFill>
@@ -9026,7 +9026,7 @@
                               <ns1:rPr>
                                 <ns1:sty ns1:val="p"/>
                               </ns1:rPr>
-                              <a:rPr lang="en-US" sz="3024" b="0" i="0">
+                              <a:rPr lang="en-US" sz="3730" b="0" i="0">
                                 <a:solidFill>
                                   <a:srgbClr val="111111"/>
                                 </a:solidFill>
@@ -9042,7 +9042,7 @@
                           <ns1:rPr>
                             <ns1:sty ns1:val="p"/>
                           </ns1:rPr>
-                          <a:rPr lang="en-US" sz="3024" b="0" i="0">
+                          <a:rPr lang="en-US" sz="3730" b="0" i="0">
                             <a:solidFill>
                               <a:srgbClr val="111111"/>
                             </a:solidFill>
@@ -9056,7 +9056,7 @@
                           <ns1:rPr>
                             <ns1:sty ns1:val="bi"/>
                           </ns1:rPr>
-                          <a:rPr lang="en-US" sz="3024" b="1" i="1">
+                          <a:rPr lang="en-US" sz="3730" b="1" i="1">
                             <a:solidFill>
                               <a:srgbClr val="111111"/>
                             </a:solidFill>
@@ -9070,7 +9070,7 @@
                           <ns1:rPr>
                             <ns1:sty ns1:val="p"/>
                           </ns1:rPr>
-                          <a:rPr lang="en-US" sz="3024" b="0" i="0">
+                          <a:rPr lang="en-US" sz="3730" b="0" i="0">
                             <a:solidFill>
                               <a:srgbClr val="111111"/>
                             </a:solidFill>
@@ -9084,7 +9084,7 @@
                           <ns1:rPr>
                             <ns1:sty ns1:val="p"/>
                           </ns1:rPr>
-                          <a:rPr lang="en-US" sz="3024" b="0" i="0">
+                          <a:rPr lang="en-US" sz="3730" b="0" i="0">
                             <a:solidFill>
                               <a:srgbClr val="111111"/>
                             </a:solidFill>
@@ -9097,7 +9097,7 @@
                         <ns1:sSub>
                           <ns1:sSubPr>
                             <ns1:ctrlPr>
-                              <a:rPr lang="en-US" sz="3024" b="0" i="1">
+                              <a:rPr lang="en-US" sz="3730" b="0" i="1">
                                 <a:solidFill>
                                   <a:srgbClr val="111111"/>
                                 </a:solidFill>
@@ -9113,7 +9113,7 @@
                                 <ns1:scr ns1:val="double-struck"/>
                                 <ns1:sty ns1:val="p"/>
                               </ns1:rPr>
-                              <a:rPr lang="en-US" sz="3024" b="0" i="0">
+                              <a:rPr lang="en-US" sz="3730" b="0" i="0">
                                 <a:solidFill>
                                   <a:srgbClr val="111111"/>
                                 </a:solidFill>
@@ -9128,7 +9128,7 @@
                             <ns1:sSub>
                               <ns1:sSubPr>
                                 <ns1:ctrlPr>
-                                  <a:rPr lang="en-US" sz="3024" b="0" i="1">
+                                  <a:rPr lang="en-US" sz="3730" b="0" i="1">
                                     <a:solidFill>
                                       <a:srgbClr val="111111"/>
                                     </a:solidFill>
@@ -9144,7 +9144,7 @@
                                     <ns1:scr ns1:val="script"/>
                                     <ns1:sty ns1:val="p"/>
                                   </ns1:rPr>
-                                  <a:rPr lang="en-US" sz="3024" b="0" i="0">
+                                  <a:rPr lang="en-US" sz="3730" b="0" i="0">
                                     <a:solidFill>
                                       <a:srgbClr val="111111"/>
                                     </a:solidFill>
@@ -9160,7 +9160,7 @@
                                   <ns1:rPr>
                                     <ns1:sty ns1:val="p"/>
                                   </ns1:rPr>
-                                  <a:rPr lang="en-US" sz="3024" b="0" i="0">
+                                  <a:rPr lang="en-US" sz="3730" b="0" i="0">
                                     <a:solidFill>
                                       <a:srgbClr val="111111"/>
                                     </a:solidFill>
@@ -9181,7 +9181,7 @@
                             <ns1:endChr ns1:val="]"/>
                             <ns1:grow/>
                             <ns1:ctrlPr>
-                              <a:rPr lang="en-US" sz="3024" b="0" i="1">
+                              <a:rPr lang="en-US" sz="3730" b="0" i="1">
                                 <a:solidFill>
                                   <a:srgbClr val="111111"/>
                                 </a:solidFill>
@@ -9195,7 +9195,7 @@
                             <ns1:sSub>
                               <ns1:sSubPr>
                                 <ns1:ctrlPr>
-                                  <a:rPr lang="en-US" sz="3024" b="0" i="1">
+                                  <a:rPr lang="en-US" sz="3730" b="0" i="1">
                                     <a:solidFill>
                                       <a:srgbClr val="111111"/>
                                     </a:solidFill>
@@ -9210,7 +9210,7 @@
                                   <ns1:rPr>
                                     <ns1:sty ns1:val="p"/>
                                   </ns1:rPr>
-                                  <a:rPr lang="en-US" sz="3024" b="0" i="0">
+                                  <a:rPr lang="en-US" sz="3730" b="0" i="0">
                                     <a:solidFill>
                                       <a:srgbClr val="111111"/>
                                     </a:solidFill>
@@ -9225,7 +9225,7 @@
                                 <ns1:sSub>
                                   <ns1:sSubPr>
                                     <ns1:ctrlPr>
-                                      <a:rPr lang="en-US" sz="3024" b="0" i="1">
+                                      <a:rPr lang="en-US" sz="3730" b="0" i="1">
                                         <a:solidFill>
                                           <a:srgbClr val="111111"/>
                                         </a:solidFill>
@@ -9241,7 +9241,7 @@
                                         <ns1:scr ns1:val="script"/>
                                         <ns1:sty ns1:val="p"/>
                                       </ns1:rPr>
-                                      <a:rPr lang="en-US" sz="3024" b="0" i="0">
+                                      <a:rPr lang="en-US" sz="3730" b="0" i="0">
                                         <a:solidFill>
                                           <a:srgbClr val="111111"/>
                                         </a:solidFill>
@@ -9257,7 +9257,7 @@
                                       <ns1:rPr>
                                         <ns1:sty ns1:val="p"/>
                                       </ns1:rPr>
-                                      <a:rPr lang="en-US" sz="3024" b="0" i="0">
+                                      <a:rPr lang="en-US" sz="3730" b="0" i="0">
                                         <a:solidFill>
                                           <a:srgbClr val="111111"/>
                                         </a:solidFill>
@@ -9275,7 +9275,7 @@
                               <ns1:rPr>
                                 <ns1:sty ns1:val="p"/>
                               </ns1:rPr>
-                              <a:rPr lang="en-US" sz="3024" b="0" i="0">
+                              <a:rPr lang="en-US" sz="3730" b="0" i="0">
                                 <a:solidFill>
                                   <a:srgbClr val="111111"/>
                                 </a:solidFill>
@@ -9289,7 +9289,7 @@
                               <ns1:rPr>
                                 <ns1:sty ns1:val="b"/>
                               </ns1:rPr>
-                              <a:rPr lang="en-US" sz="3024" b="1" i="0">
+                              <a:rPr lang="en-US" sz="3730" b="1" i="0">
                                 <a:solidFill>
                                   <a:srgbClr val="111111"/>
                                 </a:solidFill>
@@ -9303,7 +9303,7 @@
                               <ns1:rPr>
                                 <ns1:sty ns1:val="p"/>
                               </ns1:rPr>
-                              <a:rPr lang="en-US" sz="3024" b="0" i="0">
+                              <a:rPr lang="en-US" sz="3730" b="0" i="0">
                                 <a:solidFill>
                                   <a:srgbClr val="111111"/>
                                 </a:solidFill>
@@ -9317,7 +9317,7 @@
                               <ns1:rPr>
                                 <ns1:sty ns1:val="bi"/>
                               </ns1:rPr>
-                              <a:rPr lang="en-US" sz="3024" b="1" i="1">
+                              <a:rPr lang="en-US" sz="3730" b="1" i="1">
                                 <a:solidFill>
                                   <a:srgbClr val="111111"/>
                                 </a:solidFill>
@@ -9331,7 +9331,7 @@
                               <ns1:rPr>
                                 <ns1:sty ns1:val="p"/>
                               </ns1:rPr>
-                              <a:rPr lang="en-US" sz="3024" b="0" i="0">
+                              <a:rPr lang="en-US" sz="3730" b="0" i="0">
                                 <a:solidFill>
                                   <a:srgbClr val="111111"/>
                                 </a:solidFill>
@@ -9347,7 +9347,7 @@
                           <ns1:rPr>
                             <ns1:sty ns1:val="p"/>
                           </ns1:rPr>
-                          <a:rPr lang="en-US" sz="3024" b="0" i="0">
+                          <a:rPr lang="en-US" sz="3730" b="0" i="0">
                             <a:solidFill>
                               <a:srgbClr val="111111"/>
                             </a:solidFill>
@@ -9360,7 +9360,7 @@
                         <ns1:sSub>
                           <ns1:sSubPr>
                             <ns1:ctrlPr>
-                              <a:rPr lang="en-US" sz="3024" b="0" i="1">
+                              <a:rPr lang="en-US" sz="3730" b="0" i="1">
                                 <a:solidFill>
                                   <a:srgbClr val="111111"/>
                                 </a:solidFill>
@@ -9376,7 +9376,7 @@
                                 <ns1:scr ns1:val="double-struck"/>
                                 <ns1:sty ns1:val="p"/>
                               </ns1:rPr>
-                              <a:rPr lang="en-US" sz="3024" b="0" i="0">
+                              <a:rPr lang="en-US" sz="3730" b="0" i="0">
                                 <a:solidFill>
                                   <a:srgbClr val="111111"/>
                                 </a:solidFill>
@@ -9391,7 +9391,7 @@
                             <ns1:sSub>
                               <ns1:sSubPr>
                                 <ns1:ctrlPr>
-                                  <a:rPr lang="en-US" sz="3024" b="0" i="1">
+                                  <a:rPr lang="en-US" sz="3730" b="0" i="1">
                                     <a:solidFill>
                                       <a:srgbClr val="111111"/>
                                     </a:solidFill>
@@ -9407,7 +9407,7 @@
                                     <ns1:scr ns1:val="script"/>
                                     <ns1:sty ns1:val="p"/>
                                   </ns1:rPr>
-                                  <a:rPr lang="en-US" sz="3024" b="0" i="0">
+                                  <a:rPr lang="en-US" sz="3730" b="0" i="0">
                                     <a:solidFill>
                                       <a:srgbClr val="111111"/>
                                     </a:solidFill>
@@ -9423,7 +9423,7 @@
                                   <ns1:rPr>
                                     <ns1:sty ns1:val="p"/>
                                   </ns1:rPr>
-                                  <a:rPr lang="en-US" sz="3024" b="0" i="0">
+                                  <a:rPr lang="en-US" sz="3730" b="0" i="0">
                                     <a:solidFill>
                                       <a:srgbClr val="111111"/>
                                     </a:solidFill>
@@ -9444,7 +9444,7 @@
                             <ns1:endChr ns1:val="]"/>
                             <ns1:grow/>
                             <ns1:ctrlPr>
-                              <a:rPr lang="en-US" sz="3024" b="0" i="1">
+                              <a:rPr lang="en-US" sz="3730" b="0" i="1">
                                 <a:solidFill>
                                   <a:srgbClr val="111111"/>
                                 </a:solidFill>
@@ -9458,7 +9458,7 @@
                             <ns1:sSub>
                               <ns1:sSubPr>
                                 <ns1:ctrlPr>
-                                  <a:rPr lang="en-US" sz="3024" b="0" i="1">
+                                  <a:rPr lang="en-US" sz="3730" b="0" i="1">
                                     <a:solidFill>
                                       <a:srgbClr val="111111"/>
                                     </a:solidFill>
@@ -9473,7 +9473,7 @@
                                   <ns1:rPr>
                                     <ns1:sty ns1:val="p"/>
                                   </ns1:rPr>
-                                  <a:rPr lang="en-US" sz="3024" b="0" i="0">
+                                  <a:rPr lang="en-US" sz="3730" b="0" i="0">
                                     <a:solidFill>
                                       <a:srgbClr val="111111"/>
                                     </a:solidFill>
@@ -9488,7 +9488,7 @@
                                 <ns1:sSub>
                                   <ns1:sSubPr>
                                     <ns1:ctrlPr>
-                                      <a:rPr lang="en-US" sz="3024" b="0" i="1">
+                                      <a:rPr lang="en-US" sz="3730" b="0" i="1">
                                         <a:solidFill>
                                           <a:srgbClr val="111111"/>
                                         </a:solidFill>
@@ -9504,7 +9504,7 @@
                                         <ns1:scr ns1:val="script"/>
                                         <ns1:sty ns1:val="p"/>
                                       </ns1:rPr>
-                                      <a:rPr lang="en-US" sz="3024" b="0" i="0">
+                                      <a:rPr lang="en-US" sz="3730" b="0" i="0">
                                         <a:solidFill>
                                           <a:srgbClr val="111111"/>
                                         </a:solidFill>
@@ -9520,7 +9520,7 @@
                                       <ns1:rPr>
                                         <ns1:sty ns1:val="p"/>
                                       </ns1:rPr>
-                                      <a:rPr lang="en-US" sz="3024" b="0" i="0">
+                                      <a:rPr lang="en-US" sz="3730" b="0" i="0">
                                         <a:solidFill>
                                           <a:srgbClr val="111111"/>
                                         </a:solidFill>
@@ -9538,7 +9538,7 @@
                               <ns1:rPr>
                                 <ns1:sty ns1:val="p"/>
                               </ns1:rPr>
-                              <a:rPr lang="en-US" sz="3024" b="0" i="0">
+                              <a:rPr lang="en-US" sz="3730" b="0" i="0">
                                 <a:solidFill>
                                   <a:srgbClr val="111111"/>
                                 </a:solidFill>
@@ -9552,7 +9552,7 @@
                               <ns1:rPr>
                                 <ns1:sty ns1:val="b"/>
                               </ns1:rPr>
-                              <a:rPr lang="en-US" sz="3024" b="1" i="0">
+                              <a:rPr lang="en-US" sz="3730" b="1" i="0">
                                 <a:solidFill>
                                   <a:srgbClr val="111111"/>
                                 </a:solidFill>
@@ -9566,7 +9566,7 @@
                               <ns1:rPr>
                                 <ns1:sty ns1:val="p"/>
                               </ns1:rPr>
-                              <a:rPr lang="en-US" sz="3024" b="0" i="0">
+                              <a:rPr lang="en-US" sz="3730" b="0" i="0">
                                 <a:solidFill>
                                   <a:srgbClr val="111111"/>
                                 </a:solidFill>
@@ -9580,7 +9580,7 @@
                               <ns1:rPr>
                                 <ns1:sty ns1:val="bi"/>
                               </ns1:rPr>
-                              <a:rPr lang="en-US" sz="3024" b="1" i="1">
+                              <a:rPr lang="en-US" sz="3730" b="1" i="1">
                                 <a:solidFill>
                                   <a:srgbClr val="111111"/>
                                 </a:solidFill>
@@ -9594,7 +9594,7 @@
                               <ns1:rPr>
                                 <ns1:sty ns1:val="p"/>
                               </ns1:rPr>
-                              <a:rPr lang="en-US" sz="3024" b="0" i="0">
+                              <a:rPr lang="en-US" sz="3730" b="0" i="0">
                                 <a:solidFill>
                                   <a:srgbClr val="111111"/>
                                 </a:solidFill>
@@ -9609,7 +9609,7 @@
                       </ns1:oMath>
                     </ns1:oMathPara>
                   </a14:m>
-                  <a:endParaRPr lang="en-US" sz="3024" b="0" i="0" kern="100" dirty="0">
+                  <a:endParaRPr lang="en-US" sz="3730" b="0" i="0" kern="100" dirty="0">
                     <a:solidFill>
                       <a:srgbClr val="111111"/>
                     </a:solidFill>
@@ -9640,7 +9640,7 @@
                         <ns1:sSub>
                           <ns1:sSubPr>
                             <ns1:ctrlPr>
-                              <a:rPr lang="en-US" sz="3024" b="0" i="1">
+                              <a:rPr lang="en-US" sz="3730" b="0" i="1">
                                 <a:solidFill>
                                   <a:srgbClr val="111111"/>
                                 </a:solidFill>
@@ -9655,7 +9655,7 @@
                               <ns1:rPr>
                                 <ns1:sty ns1:val="p"/>
                               </ns1:rPr>
-                              <a:rPr lang="en-US" sz="3024" b="0" i="0">
+                              <a:rPr lang="en-US" sz="3730" b="0" i="0">
                                 <a:solidFill>
                                   <a:srgbClr val="111111"/>
                                 </a:solidFill>
@@ -9670,7 +9670,7 @@
                             <ns1:sSub>
                               <ns1:sSubPr>
                                 <ns1:ctrlPr>
-                                  <a:rPr lang="en-US" sz="3024" b="0" i="1">
+                                  <a:rPr lang="en-US" sz="3730" b="0" i="1">
                                     <a:solidFill>
                                       <a:srgbClr val="111111"/>
                                     </a:solidFill>
@@ -9686,7 +9686,7 @@
                                     <ns1:scr ns1:val="script"/>
                                     <ns1:sty ns1:val="p"/>
                                   </ns1:rPr>
-                                  <a:rPr lang="en-US" sz="3024" b="0" i="0">
+                                  <a:rPr lang="en-US" sz="3730" b="0" i="0">
                                     <a:solidFill>
                                       <a:srgbClr val="111111"/>
                                     </a:solidFill>
@@ -9702,7 +9702,7 @@
                                   <ns1:rPr>
                                     <ns1:sty ns1:val="p"/>
                                   </ns1:rPr>
-                                  <a:rPr lang="en-US" sz="3024" b="0" i="0">
+                                  <a:rPr lang="en-US" sz="3730" b="0" i="0">
                                     <a:solidFill>
                                       <a:srgbClr val="111111"/>
                                     </a:solidFill>
@@ -9720,7 +9720,7 @@
                           <ns1:rPr>
                             <ns1:sty ns1:val="p"/>
                           </ns1:rPr>
-                          <a:rPr lang="en-US" sz="3024" b="0" i="0">
+                          <a:rPr lang="en-US" sz="3730" b="0" i="0">
                             <a:solidFill>
                               <a:srgbClr val="111111"/>
                             </a:solidFill>
@@ -9734,7 +9734,7 @@
                           <ns1:fPr>
                             <ns1:type ns1:val="bar"/>
                             <ns1:ctrlPr>
-                              <a:rPr lang="en-US" sz="3024" b="0" i="1">
+                              <a:rPr lang="en-US" sz="3730" b="0" i="1">
                                 <a:solidFill>
                                   <a:srgbClr val="111111"/>
                                 </a:solidFill>
@@ -9746,7 +9746,7 @@
                           </ns1:fPr>
                           <ns1:num>
                             <ns1:r>
-                              <a:rPr lang="en-US" sz="3024" b="0" i="1">
+                              <a:rPr lang="en-US" sz="3730" b="0" i="1">
                                 <a:solidFill>
                                   <a:srgbClr val="111111"/>
                                 </a:solidFill>
@@ -9762,7 +9762,7 @@
                               <ns1:rPr>
                                 <ns1:sty ns1:val="p"/>
                               </ns1:rPr>
-                              <a:rPr lang="en-US" sz="3024" b="0" i="0">
+                              <a:rPr lang="en-US" sz="3730" b="0" i="0">
                                 <a:solidFill>
                                   <a:srgbClr val="111111"/>
                                 </a:solidFill>
@@ -9777,7 +9777,7 @@
                                 <ns1:scr ns1:val="script"/>
                                 <ns1:sty ns1:val="p"/>
                               </ns1:rPr>
-                              <a:rPr lang="en-US" sz="3024" b="0" i="0">
+                              <a:rPr lang="en-US" sz="3730" b="0" i="0">
                                 <a:solidFill>
                                   <a:srgbClr val="111111"/>
                                 </a:solidFill>
@@ -9791,7 +9791,7 @@
                               <ns1:rPr>
                                 <ns1:sty ns1:val="p"/>
                               </ns1:rPr>
-                              <a:rPr lang="en-US" sz="3024" b="0" i="0">
+                              <a:rPr lang="en-US" sz="3730" b="0" i="0">
                                 <a:solidFill>
                                   <a:srgbClr val="111111"/>
                                 </a:solidFill>
@@ -9810,7 +9810,7 @@
                             <ns1:subHide ns1:val="off"/>
                             <ns1:supHide ns1:val="on"/>
                             <ns1:ctrlPr>
-                              <a:rPr lang="en-US" sz="3024" b="0" i="1">
+                              <a:rPr lang="en-US" sz="3730" b="0" i="1">
                                 <a:solidFill>
                                   <a:srgbClr val="111111"/>
                                 </a:solidFill>
@@ -9822,7 +9822,7 @@
                           </ns1:naryPr>
                           <ns1:sub>
                             <ns1:r>
-                              <a:rPr lang="en-US" sz="3024" b="0" i="1">
+                              <a:rPr lang="en-US" sz="3730" b="0" i="1">
                                 <a:solidFill>
                                   <a:srgbClr val="111111"/>
                                 </a:solidFill>
@@ -9836,7 +9836,7 @@
                               <ns1:rPr>
                                 <ns1:sty ns1:val="p"/>
                               </ns1:rPr>
-                              <a:rPr lang="en-US" sz="3024" b="0" i="0">
+                              <a:rPr lang="en-US" sz="3730" b="0" i="0">
                                 <a:solidFill>
                                   <a:srgbClr val="111111"/>
                                 </a:solidFill>
@@ -9851,7 +9851,7 @@
                                 <ns1:scr ns1:val="script"/>
                                 <ns1:sty ns1:val="p"/>
                               </ns1:rPr>
-                              <a:rPr lang="en-US" sz="3024" b="0" i="0">
+                              <a:rPr lang="en-US" sz="3730" b="0" i="0">
                                 <a:solidFill>
                                   <a:srgbClr val="111111"/>
                                 </a:solidFill>
@@ -9864,7 +9864,7 @@
                           </ns1:sub>
                           <ns1:sup>
                             <ns1:r>
-                              <a:rPr lang="en-US" sz="3024" b="0" i="1">
+                              <a:rPr lang="en-US" sz="3730" b="0" i="1">
                                 <a:solidFill>
                                   <a:srgbClr val="111111"/>
                                 </a:solidFill>
@@ -9879,7 +9879,7 @@
                             <ns1:sSup>
                               <ns1:sSupPr>
                                 <ns1:ctrlPr>
-                                  <a:rPr lang="en-US" sz="3024" b="0" i="1">
+                                  <a:rPr lang="en-US" sz="3730" b="0" i="1">
                                     <a:solidFill>
                                       <a:srgbClr val="111111"/>
                                     </a:solidFill>
@@ -9897,7 +9897,7 @@
                                     <ns1:endChr ns1:val=")"/>
                                     <ns1:grow/>
                                     <ns1:ctrlPr>
-                                      <a:rPr lang="en-US" sz="3024" b="0" i="1">
+                                      <a:rPr lang="en-US" sz="3730" b="0" i="1">
                                         <a:solidFill>
                                           <a:srgbClr val="111111"/>
                                         </a:solidFill>
@@ -9912,7 +9912,7 @@
                                       <ns1:rPr>
                                         <ns1:sty ns1:val="p"/>
                                       </ns1:rPr>
-                                      <a:rPr lang="en-US" sz="3024" b="0" i="0">
+                                      <a:rPr lang="en-US" sz="3730" b="0" i="0">
                                         <a:solidFill>
                                           <a:srgbClr val="111111"/>
                                         </a:solidFill>
@@ -9925,7 +9925,7 @@
                                     <ns1:sSub>
                                       <ns1:sSubPr>
                                         <ns1:ctrlPr>
-                                          <a:rPr lang="en-US" sz="3024" b="0" i="1">
+                                          <a:rPr lang="en-US" sz="3730" b="0" i="1">
                                             <a:solidFill>
                                               <a:srgbClr val="111111"/>
                                             </a:solidFill>
@@ -9940,7 +9940,7 @@
                                           <ns1:rPr>
                                             <ns1:sty ns1:val="b"/>
                                           </ns1:rPr>
-                                          <a:rPr lang="en-US" sz="3024" b="1" i="0">
+                                          <a:rPr lang="en-US" sz="3730" b="1" i="0">
                                             <a:solidFill>
                                               <a:srgbClr val="111111"/>
                                             </a:solidFill>
@@ -9953,7 +9953,7 @@
                                       </ns1:e>
                                       <ns1:sub>
                                         <ns1:r>
-                                          <a:rPr lang="en-US" sz="3024" b="0" i="1">
+                                          <a:rPr lang="en-US" sz="3730" b="0" i="1">
                                             <a:solidFill>
                                               <a:srgbClr val="111111"/>
                                             </a:solidFill>
@@ -9969,7 +9969,7 @@
                                       <ns1:rPr>
                                         <ns1:sty ns1:val="p"/>
                                       </ns1:rPr>
-                                      <a:rPr lang="en-US" sz="3024" b="0" i="0">
+                                      <a:rPr lang="en-US" sz="3730" b="0" i="0">
                                         <a:solidFill>
                                           <a:srgbClr val="111111"/>
                                         </a:solidFill>
@@ -9983,7 +9983,7 @@
                                       <ns1:rPr>
                                         <ns1:sty ns1:val="b"/>
                                       </ns1:rPr>
-                                      <a:rPr lang="en-US" sz="3024" b="1" i="0">
+                                      <a:rPr lang="en-US" sz="3730" b="1" i="0">
                                         <a:solidFill>
                                           <a:srgbClr val="111111"/>
                                         </a:solidFill>
@@ -9997,7 +9997,7 @@
                                       <ns1:rPr>
                                         <ns1:sty ns1:val="p"/>
                                       </ns1:rPr>
-                                      <a:rPr lang="en-US" sz="3024" b="0" i="0">
+                                      <a:rPr lang="en-US" sz="3730" b="0" i="0">
                                         <a:solidFill>
                                           <a:srgbClr val="111111"/>
                                         </a:solidFill>
@@ -10011,7 +10011,7 @@
                                       <ns1:rPr>
                                         <ns1:sty ns1:val="bi"/>
                                       </ns1:rPr>
-                                      <a:rPr lang="en-US" sz="3024" b="1" i="1">
+                                      <a:rPr lang="en-US" sz="3730" b="1" i="1">
                                         <a:solidFill>
                                           <a:srgbClr val="111111"/>
                                         </a:solidFill>
@@ -10025,7 +10025,7 @@
                                       <ns1:rPr>
                                         <ns1:sty ns1:val="p"/>
                                       </ns1:rPr>
-                                      <a:rPr lang="en-US" sz="3024" b="0" i="0">
+                                      <a:rPr lang="en-US" sz="3730" b="0" i="0">
                                         <a:solidFill>
                                           <a:srgbClr val="111111"/>
                                         </a:solidFill>
@@ -10038,7 +10038,7 @@
                                     <ns1:sSub>
                                       <ns1:sSubPr>
                                         <ns1:ctrlPr>
-                                          <a:rPr lang="en-US" sz="3024" b="0" i="1">
+                                          <a:rPr lang="en-US" sz="3730" b="0" i="1">
                                             <a:solidFill>
                                               <a:srgbClr val="111111"/>
                                             </a:solidFill>
@@ -10053,7 +10053,7 @@
                                           <ns1:rPr>
                                             <ns1:sty ns1:val="p"/>
                                           </ns1:rPr>
-                                          <a:rPr lang="en-US" sz="3024" b="0" i="0">
+                                          <a:rPr lang="en-US" sz="3730" b="0" i="0">
                                             <a:solidFill>
                                               <a:srgbClr val="111111"/>
                                             </a:solidFill>
@@ -10066,7 +10066,7 @@
                                       </ns1:e>
                                       <ns1:sub>
                                         <ns1:r>
-                                          <a:rPr lang="en-US" sz="3024" b="0" i="1">
+                                          <a:rPr lang="en-US" sz="3730" b="0" i="1">
                                             <a:solidFill>
                                               <a:srgbClr val="111111"/>
                                             </a:solidFill>
@@ -10082,7 +10082,7 @@
                                       <ns1:rPr>
                                         <ns1:sty ns1:val="p"/>
                                       </ns1:rPr>
-                                      <a:rPr lang="en-US" sz="3024" b="0" i="0">
+                                      <a:rPr lang="en-US" sz="3730" b="0" i="0">
                                         <a:solidFill>
                                           <a:srgbClr val="111111"/>
                                         </a:solidFill>
@@ -10096,7 +10096,7 @@
                                       <ns1:rPr>
                                         <ns1:sty ns1:val="p"/>
                                       </ns1:rPr>
-                                      <a:rPr lang="en-US" sz="3024" b="0" i="0">
+                                      <a:rPr lang="en-US" sz="3730" b="0" i="0">
                                         <a:solidFill>
                                           <a:srgbClr val="111111"/>
                                         </a:solidFill>
@@ -10109,7 +10109,7 @@
                                     <ns1:sSub>
                                       <ns1:sSubPr>
                                         <ns1:ctrlPr>
-                                          <a:rPr lang="en-US" sz="3024" b="0" i="1">
+                                          <a:rPr lang="en-US" sz="3730" b="0" i="1">
                                             <a:solidFill>
                                               <a:srgbClr val="111111"/>
                                             </a:solidFill>
@@ -10124,7 +10124,7 @@
                                           <ns1:rPr>
                                             <ns1:sty ns1:val="b"/>
                                           </ns1:rPr>
-                                          <a:rPr lang="en-US" sz="3024" b="1" i="0">
+                                          <a:rPr lang="en-US" sz="3730" b="1" i="0">
                                             <a:solidFill>
                                               <a:srgbClr val="111111"/>
                                             </a:solidFill>
@@ -10137,7 +10137,7 @@
                                       </ns1:e>
                                       <ns1:sub>
                                         <ns1:r>
-                                          <a:rPr lang="en-US" sz="3024" b="0" i="1">
+                                          <a:rPr lang="en-US" sz="3730" b="0" i="1">
                                             <a:solidFill>
                                               <a:srgbClr val="111111"/>
                                             </a:solidFill>
@@ -10153,7 +10153,7 @@
                                       <ns1:rPr>
                                         <ns1:sty ns1:val="p"/>
                                       </ns1:rPr>
-                                      <a:rPr lang="en-US" sz="3024" b="0" i="0">
+                                      <a:rPr lang="en-US" sz="3730" b="0" i="0">
                                         <a:solidFill>
                                           <a:srgbClr val="111111"/>
                                         </a:solidFill>
@@ -10167,7 +10167,7 @@
                                       <ns1:rPr>
                                         <ns1:sty ns1:val="b"/>
                                       </ns1:rPr>
-                                      <a:rPr lang="en-US" sz="3024" b="1" i="0">
+                                      <a:rPr lang="en-US" sz="3730" b="1" i="0">
                                         <a:solidFill>
                                           <a:srgbClr val="111111"/>
                                         </a:solidFill>
@@ -10181,7 +10181,7 @@
                                       <ns1:rPr>
                                         <ns1:sty ns1:val="p"/>
                                       </ns1:rPr>
-                                      <a:rPr lang="en-US" sz="3024" b="0" i="0">
+                                      <a:rPr lang="en-US" sz="3730" b="0" i="0">
                                         <a:solidFill>
                                           <a:srgbClr val="111111"/>
                                         </a:solidFill>
@@ -10194,7 +10194,7 @@
                                     <ns1:sSub>
                                       <ns1:sSubPr>
                                         <ns1:ctrlPr>
-                                          <a:rPr lang="en-US" sz="3024" b="0" i="1">
+                                          <a:rPr lang="en-US" sz="3730" b="0" i="1">
                                             <a:solidFill>
                                               <a:srgbClr val="111111"/>
                                             </a:solidFill>
@@ -10209,7 +10209,7 @@
                                           <ns1:rPr>
                                             <ns1:sty ns1:val="bi"/>
                                           </ns1:rPr>
-                                          <a:rPr lang="en-US" sz="3024" b="1" i="1">
+                                          <a:rPr lang="en-US" sz="3730" b="1" i="1">
                                             <a:solidFill>
                                               <a:srgbClr val="111111"/>
                                             </a:solidFill>
@@ -10225,7 +10225,7 @@
                                           <ns1:rPr>
                                             <ns1:sty ns1:val="p"/>
                                           </ns1:rPr>
-                                          <a:rPr lang="en-US" sz="3024" b="0" i="0">
+                                          <a:rPr lang="en-US" sz="3730" b="0" i="0">
                                             <a:solidFill>
                                               <a:srgbClr val="111111"/>
                                             </a:solidFill>
@@ -10241,7 +10241,7 @@
                                       <ns1:rPr>
                                         <ns1:sty ns1:val="p"/>
                                       </ns1:rPr>
-                                      <a:rPr lang="en-US" sz="3024" b="0" i="0">
+                                      <a:rPr lang="en-US" sz="3730" b="0" i="0">
                                         <a:solidFill>
                                           <a:srgbClr val="111111"/>
                                         </a:solidFill>
@@ -10254,7 +10254,7 @@
                                     <ns1:sSub>
                                       <ns1:sSubPr>
                                         <ns1:ctrlPr>
-                                          <a:rPr lang="en-US" sz="3024" b="0" i="1">
+                                          <a:rPr lang="en-US" sz="3730" b="0" i="1">
                                             <a:solidFill>
                                               <a:srgbClr val="111111"/>
                                             </a:solidFill>
@@ -10269,7 +10269,7 @@
                                           <ns1:rPr>
                                             <ns1:sty ns1:val="p"/>
                                           </ns1:rPr>
-                                          <a:rPr lang="en-US" sz="3024" b="0" i="0">
+                                          <a:rPr lang="en-US" sz="3730" b="0" i="0">
                                             <a:solidFill>
                                               <a:srgbClr val="111111"/>
                                             </a:solidFill>
@@ -10282,7 +10282,7 @@
                                       </ns1:e>
                                       <ns1:sub>
                                         <ns1:r>
-                                          <a:rPr lang="en-US" sz="3024" b="0" i="1">
+                                          <a:rPr lang="en-US" sz="3730" b="0" i="1">
                                             <a:solidFill>
                                               <a:srgbClr val="111111"/>
                                             </a:solidFill>
@@ -10299,7 +10299,7 @@
                               </ns1:e>
                               <ns1:sup>
                                 <ns1:r>
-                                  <a:rPr lang="en-US" sz="3024" b="0" i="1">
+                                  <a:rPr lang="en-US" sz="3730" b="0" i="1">
                                     <a:solidFill>
                                       <a:srgbClr val="111111"/>
                                     </a:solidFill>
@@ -10316,7 +10316,7 @@
                       </ns1:oMath>
                     </ns1:oMathPara>
                   </a14:m>
-                  <a:endParaRPr lang="en-US" sz="3024" b="0" i="0" kern="100" dirty="0">
+                  <a:endParaRPr lang="en-US" sz="3730" b="0" i="0" kern="100" dirty="0">
                     <a:solidFill>
                       <a:srgbClr val="111111"/>
                     </a:solidFill>
@@ -10328,7 +10328,7 @@
                 <a:p>
                   <a:pPr algn="r" marL="0" indent="0">
                     <a:lnSpc>
-                      <a:spcPts val="3629"/>
+                      <a:spcPts val="4234"/>
                     </a:lnSpc>
                     <a:spcBef>
                       <a:spcPts val="303"/>
@@ -10339,7 +10339,7 @@
                     <a:buNone/>
                   </a:pPr>
                   <a:r>
-                    <a:rPr lang="en-US" sz="3024" b="1" i="0" kern="100" dirty="0">
+                    <a:rPr lang="en-US" sz="3528" b="1" i="0" kern="100" dirty="0">
                       <a:solidFill>
                         <a:srgbClr val="18453B"/>
                       </a:solidFill>
@@ -10354,7 +10354,7 @@
                       <m:sSub>
                         <m:sSubPr>
                           <m:ctrlPr>
-                            <a:rPr lang="en-US" sz="3024" b="0" i="1">
+                            <a:rPr lang="en-US" sz="3528" b="0" i="1">
                               <a:solidFill>
                                 <a:srgbClr val="18453B"/>
                               </a:solidFill>
@@ -10369,7 +10369,7 @@
                             <m:rPr>
                               <m:sty m:val="bi"/>
                             </m:rPr>
-                            <a:rPr lang="en-US" sz="3024" b="1" i="1">
+                            <a:rPr lang="en-US" sz="3528" b="1" i="1">
                               <a:solidFill>
                                 <a:srgbClr val="18453B"/>
                               </a:solidFill>
@@ -10385,7 +10385,7 @@
                             <m:rPr>
                               <m:sty m:val="p"/>
                             </m:rPr>
-                            <a:rPr lang="en-US" sz="3024" b="0" i="0">
+                            <a:rPr lang="en-US" sz="3528" b="0" i="0">
                               <a:solidFill>
                                 <a:srgbClr val="18453B"/>
                               </a:solidFill>
@@ -10400,7 +10400,7 @@
                     </m:oMath>
                   </a14:m>
                   <a:r>
-                    <a:rPr lang="en-US" sz="3024" b="1" i="0" kern="100" dirty="0">
+                    <a:rPr lang="en-US" sz="3528" b="1" i="0" kern="100" dirty="0">
                       <a:solidFill>
                         <a:srgbClr val="18453B"/>
                       </a:solidFill>
@@ -10410,7 +10410,7 @@
                     </a:rPr>
                     <a:t> ⇒ forget</a:t>
                   </a:r>
-                  <a:endParaRPr lang="en-US" sz="3024" b="0" i="0" kern="100" dirty="0">
+                  <a:endParaRPr lang="en-US" sz="3528" b="0" i="0" kern="100" dirty="0">
                     <a:solidFill>
                       <a:srgbClr val="18453B"/>
                     </a:solidFill>
@@ -10441,7 +10441,7 @@
                         <ns1:sSub>
                           <ns1:sSubPr>
                             <ns1:ctrlPr>
-                              <a:rPr lang="en-US" sz="3024" b="0" i="1">
+                              <a:rPr lang="en-US" sz="3730" b="0" i="1">
                                 <a:solidFill>
                                   <a:srgbClr val="111111"/>
                                 </a:solidFill>
@@ -10456,7 +10456,7 @@
                               <ns1:rPr>
                                 <ns1:sty ns1:val="p"/>
                               </ns1:rPr>
-                              <a:rPr lang="en-US" sz="3024" b="0" i="0">
+                              <a:rPr lang="en-US" sz="3730" b="0" i="0">
                                 <a:solidFill>
                                   <a:srgbClr val="111111"/>
                                 </a:solidFill>
@@ -10471,7 +10471,7 @@
                             <ns1:sSub>
                               <ns1:sSubPr>
                                 <ns1:ctrlPr>
-                                  <a:rPr lang="en-US" sz="3024" b="0" i="1">
+                                  <a:rPr lang="en-US" sz="3730" b="0" i="1">
                                     <a:solidFill>
                                       <a:srgbClr val="111111"/>
                                     </a:solidFill>
@@ -10487,7 +10487,7 @@
                                     <ns1:scr ns1:val="script"/>
                                     <ns1:sty ns1:val="p"/>
                                   </ns1:rPr>
-                                  <a:rPr lang="en-US" sz="3024" b="0" i="0">
+                                  <a:rPr lang="en-US" sz="3730" b="0" i="0">
                                     <a:solidFill>
                                       <a:srgbClr val="111111"/>
                                     </a:solidFill>
@@ -10503,7 +10503,7 @@
                                   <ns1:rPr>
                                     <ns1:sty ns1:val="p"/>
                                   </ns1:rPr>
-                                  <a:rPr lang="en-US" sz="3024" b="0" i="0">
+                                  <a:rPr lang="en-US" sz="3730" b="0" i="0">
                                     <a:solidFill>
                                       <a:srgbClr val="111111"/>
                                     </a:solidFill>
@@ -10521,7 +10521,7 @@
                           <ns1:rPr>
                             <ns1:sty ns1:val="p"/>
                           </ns1:rPr>
-                          <a:rPr lang="en-US" sz="3024" b="0" i="0">
+                          <a:rPr lang="en-US" sz="3730" b="0" i="0">
                             <a:solidFill>
                               <a:srgbClr val="111111"/>
                             </a:solidFill>
@@ -10535,7 +10535,7 @@
                           <ns1:fPr>
                             <ns1:type ns1:val="bar"/>
                             <ns1:ctrlPr>
-                              <a:rPr lang="en-US" sz="3024" b="0" i="1">
+                              <a:rPr lang="en-US" sz="3730" b="0" i="1">
                                 <a:solidFill>
                                   <a:srgbClr val="111111"/>
                                 </a:solidFill>
@@ -10547,7 +10547,7 @@
                           </ns1:fPr>
                           <ns1:num>
                             <ns1:r>
-                              <a:rPr lang="en-US" sz="3024" b="0" i="1">
+                              <a:rPr lang="en-US" sz="3730" b="0" i="1">
                                 <a:solidFill>
                                   <a:srgbClr val="111111"/>
                                 </a:solidFill>
@@ -10563,7 +10563,7 @@
                               <ns1:rPr>
                                 <ns1:sty ns1:val="p"/>
                               </ns1:rPr>
-                              <a:rPr lang="en-US" sz="3024" b="0" i="0">
+                              <a:rPr lang="en-US" sz="3730" b="0" i="0">
                                 <a:solidFill>
                                   <a:srgbClr val="111111"/>
                                 </a:solidFill>
@@ -10578,7 +10578,7 @@
                                 <ns1:scr ns1:val="script"/>
                                 <ns1:sty ns1:val="p"/>
                               </ns1:rPr>
-                              <a:rPr lang="en-US" sz="3024" b="0" i="0">
+                              <a:rPr lang="en-US" sz="3730" b="0" i="0">
                                 <a:solidFill>
                                   <a:srgbClr val="111111"/>
                                 </a:solidFill>
@@ -10592,7 +10592,7 @@
                               <ns1:rPr>
                                 <ns1:sty ns1:val="p"/>
                               </ns1:rPr>
-                              <a:rPr lang="en-US" sz="3024" b="0" i="0">
+                              <a:rPr lang="en-US" sz="3730" b="0" i="0">
                                 <a:solidFill>
                                   <a:srgbClr val="111111"/>
                                 </a:solidFill>
@@ -10611,7 +10611,7 @@
                             <ns1:subHide ns1:val="off"/>
                             <ns1:supHide ns1:val="on"/>
                             <ns1:ctrlPr>
-                              <a:rPr lang="en-US" sz="3024" b="0" i="1">
+                              <a:rPr lang="en-US" sz="3730" b="0" i="1">
                                 <a:solidFill>
                                   <a:srgbClr val="111111"/>
                                 </a:solidFill>
@@ -10623,7 +10623,7 @@
                           </ns1:naryPr>
                           <ns1:sub>
                             <ns1:r>
-                              <a:rPr lang="en-US" sz="3024" b="0" i="1">
+                              <a:rPr lang="en-US" sz="3730" b="0" i="1">
                                 <a:solidFill>
                                   <a:srgbClr val="111111"/>
                                 </a:solidFill>
@@ -10637,7 +10637,7 @@
                               <ns1:rPr>
                                 <ns1:sty ns1:val="p"/>
                               </ns1:rPr>
-                              <a:rPr lang="en-US" sz="3024" b="0" i="0">
+                              <a:rPr lang="en-US" sz="3730" b="0" i="0">
                                 <a:solidFill>
                                   <a:srgbClr val="111111"/>
                                 </a:solidFill>
@@ -10652,7 +10652,7 @@
                                 <ns1:scr ns1:val="script"/>
                                 <ns1:sty ns1:val="p"/>
                               </ns1:rPr>
-                              <a:rPr lang="en-US" sz="3024" b="0" i="0">
+                              <a:rPr lang="en-US" sz="3730" b="0" i="0">
                                 <a:solidFill>
                                   <a:srgbClr val="111111"/>
                                 </a:solidFill>
@@ -10665,7 +10665,7 @@
                           </ns1:sub>
                           <ns1:sup>
                             <ns1:r>
-                              <a:rPr lang="en-US" sz="3024" b="0" i="1">
+                              <a:rPr lang="en-US" sz="3730" b="0" i="1">
                                 <a:solidFill>
                                   <a:srgbClr val="111111"/>
                                 </a:solidFill>
@@ -10680,7 +10680,7 @@
                             <ns1:sSup>
                               <ns1:sSupPr>
                                 <ns1:ctrlPr>
-                                  <a:rPr lang="en-US" sz="3024" b="0" i="1">
+                                  <a:rPr lang="en-US" sz="3730" b="0" i="1">
                                     <a:solidFill>
                                       <a:srgbClr val="111111"/>
                                     </a:solidFill>
@@ -10698,7 +10698,7 @@
                                     <ns1:endChr ns1:val=")"/>
                                     <ns1:grow/>
                                     <ns1:ctrlPr>
-                                      <a:rPr lang="en-US" sz="3024" b="0" i="1">
+                                      <a:rPr lang="en-US" sz="3730" b="0" i="1">
                                         <a:solidFill>
                                           <a:srgbClr val="111111"/>
                                         </a:solidFill>
@@ -10713,7 +10713,7 @@
                                       <ns1:rPr>
                                         <ns1:sty ns1:val="p"/>
                                       </ns1:rPr>
-                                      <a:rPr lang="en-US" sz="3024" b="0" i="0">
+                                      <a:rPr lang="en-US" sz="3730" b="0" i="0">
                                         <a:solidFill>
                                           <a:srgbClr val="111111"/>
                                         </a:solidFill>
@@ -10726,7 +10726,7 @@
                                     <ns1:sSub>
                                       <ns1:sSubPr>
                                         <ns1:ctrlPr>
-                                          <a:rPr lang="en-US" sz="3024" b="0" i="1">
+                                          <a:rPr lang="en-US" sz="3730" b="0" i="1">
                                             <a:solidFill>
                                               <a:srgbClr val="111111"/>
                                             </a:solidFill>
@@ -10741,7 +10741,7 @@
                                           <ns1:rPr>
                                             <ns1:sty ns1:val="b"/>
                                           </ns1:rPr>
-                                          <a:rPr lang="en-US" sz="3024" b="1" i="0">
+                                          <a:rPr lang="en-US" sz="3730" b="1" i="0">
                                             <a:solidFill>
                                               <a:srgbClr val="111111"/>
                                             </a:solidFill>
@@ -10754,7 +10754,7 @@
                                       </ns1:e>
                                       <ns1:sub>
                                         <ns1:r>
-                                          <a:rPr lang="en-US" sz="3024" b="0" i="1">
+                                          <a:rPr lang="en-US" sz="3730" b="0" i="1">
                                             <a:solidFill>
                                               <a:srgbClr val="111111"/>
                                             </a:solidFill>
@@ -10770,7 +10770,7 @@
                                       <ns1:rPr>
                                         <ns1:sty ns1:val="p"/>
                                       </ns1:rPr>
-                                      <a:rPr lang="en-US" sz="3024" b="0" i="0">
+                                      <a:rPr lang="en-US" sz="3730" b="0" i="0">
                                         <a:solidFill>
                                           <a:srgbClr val="111111"/>
                                         </a:solidFill>
@@ -10784,7 +10784,7 @@
                                       <ns1:rPr>
                                         <ns1:sty ns1:val="b"/>
                                       </ns1:rPr>
-                                      <a:rPr lang="en-US" sz="3024" b="1" i="0">
+                                      <a:rPr lang="en-US" sz="3730" b="1" i="0">
                                         <a:solidFill>
                                           <a:srgbClr val="111111"/>
                                         </a:solidFill>
@@ -10798,7 +10798,7 @@
                                       <ns1:rPr>
                                         <ns1:sty ns1:val="p"/>
                                       </ns1:rPr>
-                                      <a:rPr lang="en-US" sz="3024" b="0" i="0">
+                                      <a:rPr lang="en-US" sz="3730" b="0" i="0">
                                         <a:solidFill>
                                           <a:srgbClr val="111111"/>
                                         </a:solidFill>
@@ -10812,7 +10812,7 @@
                                       <ns1:rPr>
                                         <ns1:sty ns1:val="bi"/>
                                       </ns1:rPr>
-                                      <a:rPr lang="en-US" sz="3024" b="1" i="1">
+                                      <a:rPr lang="en-US" sz="3730" b="1" i="1">
                                         <a:solidFill>
                                           <a:srgbClr val="111111"/>
                                         </a:solidFill>
@@ -10826,7 +10826,7 @@
                                       <ns1:rPr>
                                         <ns1:sty ns1:val="p"/>
                                       </ns1:rPr>
-                                      <a:rPr lang="en-US" sz="3024" b="0" i="0">
+                                      <a:rPr lang="en-US" sz="3730" b="0" i="0">
                                         <a:solidFill>
                                           <a:srgbClr val="111111"/>
                                         </a:solidFill>
@@ -10839,7 +10839,7 @@
                                     <ns1:sSub>
                                       <ns1:sSubPr>
                                         <ns1:ctrlPr>
-                                          <a:rPr lang="en-US" sz="3024" b="0" i="1">
+                                          <a:rPr lang="en-US" sz="3730" b="0" i="1">
                                             <a:solidFill>
                                               <a:srgbClr val="111111"/>
                                             </a:solidFill>
@@ -10854,7 +10854,7 @@
                                           <ns1:rPr>
                                             <ns1:sty ns1:val="p"/>
                                           </ns1:rPr>
-                                          <a:rPr lang="en-US" sz="3024" b="0" i="0">
+                                          <a:rPr lang="en-US" sz="3730" b="0" i="0">
                                             <a:solidFill>
                                               <a:srgbClr val="111111"/>
                                             </a:solidFill>
@@ -10867,7 +10867,7 @@
                                       </ns1:e>
                                       <ns1:sub>
                                         <ns1:r>
-                                          <a:rPr lang="en-US" sz="3024" b="0" i="1">
+                                          <a:rPr lang="en-US" sz="3730" b="0" i="1">
                                             <a:solidFill>
                                               <a:srgbClr val="111111"/>
                                             </a:solidFill>
@@ -10883,7 +10883,7 @@
                                       <ns1:rPr>
                                         <ns1:sty ns1:val="p"/>
                                       </ns1:rPr>
-                                      <a:rPr lang="en-US" sz="3024" b="0" i="0">
+                                      <a:rPr lang="en-US" sz="3730" b="0" i="0">
                                         <a:solidFill>
                                           <a:srgbClr val="111111"/>
                                         </a:solidFill>
@@ -10897,7 +10897,7 @@
                                       <ns1:rPr>
                                         <ns1:sty ns1:val="p"/>
                                       </ns1:rPr>
-                                      <a:rPr lang="en-US" sz="3024" b="0" i="0">
+                                      <a:rPr lang="en-US" sz="3730" b="0" i="0">
                                         <a:solidFill>
                                           <a:srgbClr val="111111"/>
                                         </a:solidFill>
@@ -10910,7 +10910,7 @@
                                     <ns1:sSub>
                                       <ns1:sSubPr>
                                         <ns1:ctrlPr>
-                                          <a:rPr lang="en-US" sz="3024" b="0" i="1">
+                                          <a:rPr lang="en-US" sz="3730" b="0" i="1">
                                             <a:solidFill>
                                               <a:srgbClr val="111111"/>
                                             </a:solidFill>
@@ -10925,7 +10925,7 @@
                                           <ns1:rPr>
                                             <ns1:sty ns1:val="b"/>
                                           </ns1:rPr>
-                                          <a:rPr lang="en-US" sz="3024" b="1" i="0">
+                                          <a:rPr lang="en-US" sz="3730" b="1" i="0">
                                             <a:solidFill>
                                               <a:srgbClr val="111111"/>
                                             </a:solidFill>
@@ -10938,7 +10938,7 @@
                                       </ns1:e>
                                       <ns1:sub>
                                         <ns1:r>
-                                          <a:rPr lang="en-US" sz="3024" b="0" i="1">
+                                          <a:rPr lang="en-US" sz="3730" b="0" i="1">
                                             <a:solidFill>
                                               <a:srgbClr val="111111"/>
                                             </a:solidFill>
@@ -10954,7 +10954,7 @@
                                       <ns1:rPr>
                                         <ns1:sty ns1:val="p"/>
                                       </ns1:rPr>
-                                      <a:rPr lang="en-US" sz="3024" b="0" i="0">
+                                      <a:rPr lang="en-US" sz="3730" b="0" i="0">
                                         <a:solidFill>
                                           <a:srgbClr val="111111"/>
                                         </a:solidFill>
@@ -10968,7 +10968,7 @@
                                       <ns1:rPr>
                                         <ns1:sty ns1:val="b"/>
                                       </ns1:rPr>
-                                      <a:rPr lang="en-US" sz="3024" b="1" i="0">
+                                      <a:rPr lang="en-US" sz="3730" b="1" i="0">
                                         <a:solidFill>
                                           <a:srgbClr val="111111"/>
                                         </a:solidFill>
@@ -10982,7 +10982,7 @@
                                       <ns1:rPr>
                                         <ns1:sty ns1:val="p"/>
                                       </ns1:rPr>
-                                      <a:rPr lang="en-US" sz="3024" b="0" i="0">
+                                      <a:rPr lang="en-US" sz="3730" b="0" i="0">
                                         <a:solidFill>
                                           <a:srgbClr val="111111"/>
                                         </a:solidFill>
@@ -10995,7 +10995,7 @@
                                     <ns1:sSub>
                                       <ns1:sSubPr>
                                         <ns1:ctrlPr>
-                                          <a:rPr lang="en-US" sz="3024" b="0" i="1">
+                                          <a:rPr lang="en-US" sz="3730" b="0" i="1">
                                             <a:solidFill>
                                               <a:srgbClr val="111111"/>
                                             </a:solidFill>
@@ -11010,7 +11010,7 @@
                                           <ns1:rPr>
                                             <ns1:sty ns1:val="bi"/>
                                           </ns1:rPr>
-                                          <a:rPr lang="en-US" sz="3024" b="1" i="1">
+                                          <a:rPr lang="en-US" sz="3730" b="1" i="1">
                                             <a:solidFill>
                                               <a:srgbClr val="111111"/>
                                             </a:solidFill>
@@ -11026,7 +11026,7 @@
                                           <ns1:rPr>
                                             <ns1:sty ns1:val="p"/>
                                           </ns1:rPr>
-                                          <a:rPr lang="en-US" sz="3024" b="0" i="0">
+                                          <a:rPr lang="en-US" sz="3730" b="0" i="0">
                                             <a:solidFill>
                                               <a:srgbClr val="111111"/>
                                             </a:solidFill>
@@ -11042,7 +11042,7 @@
                                       <ns1:rPr>
                                         <ns1:sty ns1:val="p"/>
                                       </ns1:rPr>
-                                      <a:rPr lang="en-US" sz="3024" b="0" i="0">
+                                      <a:rPr lang="en-US" sz="3730" b="0" i="0">
                                         <a:solidFill>
                                           <a:srgbClr val="111111"/>
                                         </a:solidFill>
@@ -11055,7 +11055,7 @@
                                     <ns1:sSub>
                                       <ns1:sSubPr>
                                         <ns1:ctrlPr>
-                                          <a:rPr lang="en-US" sz="3024" b="0" i="1">
+                                          <a:rPr lang="en-US" sz="3730" b="0" i="1">
                                             <a:solidFill>
                                               <a:srgbClr val="111111"/>
                                             </a:solidFill>
@@ -11070,7 +11070,7 @@
                                           <ns1:rPr>
                                             <ns1:sty ns1:val="p"/>
                                           </ns1:rPr>
-                                          <a:rPr lang="en-US" sz="3024" b="0" i="0">
+                                          <a:rPr lang="en-US" sz="3730" b="0" i="0">
                                             <a:solidFill>
                                               <a:srgbClr val="111111"/>
                                             </a:solidFill>
@@ -11083,7 +11083,7 @@
                                       </ns1:e>
                                       <ns1:sub>
                                         <ns1:r>
-                                          <a:rPr lang="en-US" sz="3024" b="0" i="1">
+                                          <a:rPr lang="en-US" sz="3730" b="0" i="1">
                                             <a:solidFill>
                                               <a:srgbClr val="111111"/>
                                             </a:solidFill>
@@ -11100,7 +11100,7 @@
                               </ns1:e>
                               <ns1:sup>
                                 <ns1:r>
-                                  <a:rPr lang="en-US" sz="3024" b="0" i="1">
+                                  <a:rPr lang="en-US" sz="3730" b="0" i="1">
                                     <a:solidFill>
                                       <a:srgbClr val="111111"/>
                                     </a:solidFill>
@@ -11117,7 +11117,7 @@
                       </ns1:oMath>
                     </ns1:oMathPara>
                   </a14:m>
-                  <a:endParaRPr lang="en-US" sz="3024" b="0" i="0" kern="100" dirty="0">
+                  <a:endParaRPr lang="en-US" sz="3730" b="0" i="0" kern="100" dirty="0">
                     <a:solidFill>
                       <a:srgbClr val="111111"/>
                     </a:solidFill>
@@ -11129,7 +11129,7 @@
                 <a:p>
                   <a:pPr algn="r" marL="0" indent="0">
                     <a:lnSpc>
-                      <a:spcPts val="3629"/>
+                      <a:spcPts val="4234"/>
                     </a:lnSpc>
                     <a:spcBef>
                       <a:spcPts val="303"/>
@@ -11140,7 +11140,7 @@
                     <a:buNone/>
                   </a:pPr>
                   <a:r>
-                    <a:rPr lang="en-US" sz="3024" b="1" i="0" kern="100" dirty="0">
+                    <a:rPr lang="en-US" sz="3528" b="1" i="0" kern="100" dirty="0">
                       <a:solidFill>
                         <a:srgbClr val="C00000"/>
                       </a:solidFill>
@@ -11155,7 +11155,7 @@
                       <m:sSub>
                         <m:sSubPr>
                           <m:ctrlPr>
-                            <a:rPr lang="en-US" sz="3024" b="0" i="1">
+                            <a:rPr lang="en-US" sz="3528" b="0" i="1">
                               <a:solidFill>
                                 <a:srgbClr val="C00000"/>
                               </a:solidFill>
@@ -11170,7 +11170,7 @@
                             <m:rPr>
                               <m:sty m:val="bi"/>
                             </m:rPr>
-                            <a:rPr lang="en-US" sz="3024" b="1" i="1">
+                            <a:rPr lang="en-US" sz="3528" b="1" i="1">
                               <a:solidFill>
                                 <a:srgbClr val="C00000"/>
                               </a:solidFill>
@@ -11186,7 +11186,7 @@
                             <m:rPr>
                               <m:sty m:val="p"/>
                             </m:rPr>
-                            <a:rPr lang="en-US" sz="3024" b="0" i="0">
+                            <a:rPr lang="en-US" sz="3528" b="0" i="0">
                               <a:solidFill>
                                 <a:srgbClr val="C00000"/>
                               </a:solidFill>
@@ -11201,7 +11201,7 @@
                     </m:oMath>
                   </a14:m>
                   <a:r>
-                    <a:rPr lang="en-US" sz="3024" b="1" i="0" kern="100" dirty="0">
+                    <a:rPr lang="en-US" sz="3528" b="1" i="0" kern="100" dirty="0">
                       <a:solidFill>
                         <a:srgbClr val="C00000"/>
                       </a:solidFill>
@@ -11211,7 +11211,7 @@
                     </a:rPr>
                     <a:t> ⇒ recover</a:t>
                   </a:r>
-                  <a:endParaRPr lang="en-US" sz="3024" b="0" i="0" kern="100" dirty="0">
+                  <a:endParaRPr lang="en-US" sz="3528" b="0" i="0" kern="100" dirty="0">
                     <a:solidFill>
                       <a:srgbClr val="C00000"/>
                     </a:solidFill>
@@ -11242,7 +11242,7 @@
                         <ns1:limLow>
                           <ns1:limLowPr>
                             <ns1:ctrlPr>
-                              <a:rPr lang="en-US" sz="3024" b="0" i="1">
+                              <a:rPr lang="en-US" sz="3730" b="0" i="1">
                                 <a:solidFill>
                                   <a:srgbClr val="111111"/>
                                 </a:solidFill>
@@ -11257,7 +11257,7 @@
                               <ns1:rPr>
                                 <ns1:sty ns1:val="p"/>
                               </ns1:rPr>
-                              <a:rPr lang="en-US" sz="3024" b="0" i="0">
+                              <a:rPr lang="en-US" sz="3730" b="0" i="0">
                                 <a:solidFill>
                                   <a:srgbClr val="111111"/>
                                 </a:solidFill>
@@ -11273,7 +11273,7 @@
                               <ns1:rPr>
                                 <ns1:sty ns1:val="bi"/>
                               </ns1:rPr>
-                              <a:rPr lang="en-US" sz="3024" b="1" i="1">
+                              <a:rPr lang="en-US" sz="3730" b="1" i="1">
                                 <a:solidFill>
                                   <a:srgbClr val="111111"/>
                                 </a:solidFill>
@@ -11286,7 +11286,7 @@
                           </ns1:lim>
                         </ns1:limLow>
                         <ns1:r>
-                          <a:rPr lang="en-US" sz="3024" b="0" i="1">
+                          <a:rPr lang="en-US" sz="3730" b="0" i="1">
                             <a:solidFill>
                               <a:srgbClr val="111111"/>
                             </a:solidFill>
@@ -11299,7 +11299,7 @@
                         <ns1:sSub>
                           <ns1:sSubPr>
                             <ns1:ctrlPr>
-                              <a:rPr lang="en-US" sz="3024" b="0" i="1">
+                              <a:rPr lang="en-US" sz="3730" b="0" i="1">
                                 <a:solidFill>
                                   <a:srgbClr val="111111"/>
                                 </a:solidFill>
@@ -11311,7 +11311,7 @@
                           </ns1:sSubPr>
                           <ns1:e>
                             <ns1:r>
-                              <a:rPr lang="en-US" sz="3024" b="0" i="1">
+                              <a:rPr lang="en-US" sz="3730" b="0" i="1">
                                 <a:solidFill>
                                   <a:srgbClr val="111111"/>
                                 </a:solidFill>
@@ -11327,7 +11327,7 @@
                               <ns1:rPr>
                                 <ns1:sty ns1:val="p"/>
                               </ns1:rPr>
-                              <a:rPr lang="en-US" sz="3024" b="0" i="0">
+                              <a:rPr lang="en-US" sz="3730" b="0" i="0">
                                 <a:solidFill>
                                   <a:srgbClr val="111111"/>
                                 </a:solidFill>
@@ -11343,7 +11343,7 @@
                           <ns1:rPr>
                             <ns1:sty ns1:val="p"/>
                           </ns1:rPr>
-                          <a:rPr lang="en-US" sz="3024" b="0" i="0">
+                          <a:rPr lang="en-US" sz="3730" b="0" i="0">
                             <a:solidFill>
                               <a:srgbClr val="111111"/>
                             </a:solidFill>
@@ -11357,7 +11357,7 @@
                           <ns1:rPr>
                             <ns1:sty ns1:val="bi"/>
                           </ns1:rPr>
-                          <a:rPr lang="en-US" sz="3024" b="1" i="1">
+                          <a:rPr lang="en-US" sz="3730" b="1" i="1">
                             <a:solidFill>
                               <a:srgbClr val="111111"/>
                             </a:solidFill>
@@ -11371,7 +11371,7 @@
                           <ns1:rPr>
                             <ns1:sty ns1:val="p"/>
                           </ns1:rPr>
-                          <a:rPr lang="en-US" sz="3024" b="0" i="0">
+                          <a:rPr lang="en-US" sz="3730" b="0" i="0">
                             <a:solidFill>
                               <a:srgbClr val="111111"/>
                             </a:solidFill>
@@ -11384,7 +11384,7 @@
                         <ns1:sSub>
                           <ns1:sSubPr>
                             <ns1:ctrlPr>
-                              <a:rPr lang="en-US" sz="3024" b="0" i="1">
+                              <a:rPr lang="en-US" sz="3730" b="0" i="1">
                                 <a:solidFill>
                                   <a:srgbClr val="111111"/>
                                 </a:solidFill>
@@ -11400,7 +11400,7 @@
                                 <ns1:scr ns1:val="script"/>
                                 <ns1:sty ns1:val="p"/>
                               </ns1:rPr>
-                              <a:rPr lang="en-US" sz="3024" b="0" i="0">
+                              <a:rPr lang="en-US" sz="3730" b="0" i="0">
                                 <a:solidFill>
                                   <a:srgbClr val="111111"/>
                                 </a:solidFill>
@@ -11416,7 +11416,7 @@
                               <ns1:rPr>
                                 <ns1:sty ns1:val="p"/>
                               </ns1:rPr>
-                              <a:rPr lang="en-US" sz="3024" b="0" i="0">
+                              <a:rPr lang="en-US" sz="3730" b="0" i="0">
                                 <a:solidFill>
                                   <a:srgbClr val="111111"/>
                                 </a:solidFill>
@@ -11432,7 +11432,7 @@
                           <ns1:rPr>
                             <ns1:sty ns1:val="p"/>
                           </ns1:rPr>
-                          <a:rPr lang="en-US" sz="3024" b="0" i="0">
+                          <a:rPr lang="en-US" sz="3730" b="0" i="0">
                             <a:solidFill>
                               <a:srgbClr val="111111"/>
                             </a:solidFill>
@@ -11446,7 +11446,7 @@
                           <ns1:rPr>
                             <ns1:sty ns1:val="p"/>
                           </ns1:rPr>
-                          <a:rPr lang="en-US" sz="3024" b="0" i="0">
+                          <a:rPr lang="en-US" sz="3730" b="0" i="0">
                             <a:solidFill>
                               <a:srgbClr val="111111"/>
                             </a:solidFill>
@@ -11457,7 +11457,7 @@
                           <ns1:t>+</ns1:t>
                         </ns1:r>
                         <ns1:r>
-                          <a:rPr lang="en-US" sz="3024" b="0" i="1">
+                          <a:rPr lang="en-US" sz="3730" b="0" i="1">
                             <a:solidFill>
                               <a:srgbClr val="111111"/>
                             </a:solidFill>
@@ -11468,7 +11468,7 @@
                           <ns1:t>γ</ns1:t>
                         </ns1:r>
                         <ns1:r>
-                          <a:rPr lang="en-US" sz="3024" b="0" i="1">
+                          <a:rPr lang="en-US" sz="3730" b="0" i="1">
                             <a:solidFill>
                               <a:srgbClr val="111111"/>
                             </a:solidFill>
@@ -11481,7 +11481,7 @@
                         <ns1:sSub>
                           <ns1:sSubPr>
                             <ns1:ctrlPr>
-                              <a:rPr lang="en-US" sz="3024" b="0" i="1">
+                              <a:rPr lang="en-US" sz="3730" b="0" i="1">
                                 <a:solidFill>
                                   <a:srgbClr val="111111"/>
                                 </a:solidFill>
@@ -11493,7 +11493,7 @@
                           </ns1:sSubPr>
                           <ns1:e>
                             <ns1:r>
-                              <a:rPr lang="en-US" sz="3024" b="0" i="1">
+                              <a:rPr lang="en-US" sz="3730" b="0" i="1">
                                 <a:solidFill>
                                   <a:srgbClr val="111111"/>
                                 </a:solidFill>
@@ -11509,7 +11509,7 @@
                               <ns1:rPr>
                                 <ns1:sty ns1:val="p"/>
                               </ns1:rPr>
-                              <a:rPr lang="en-US" sz="3024" b="0" i="0">
+                              <a:rPr lang="en-US" sz="3730" b="0" i="0">
                                 <a:solidFill>
                                   <a:srgbClr val="111111"/>
                                 </a:solidFill>
@@ -11525,7 +11525,7 @@
                           <ns1:rPr>
                             <ns1:sty ns1:val="p"/>
                           </ns1:rPr>
-                          <a:rPr lang="en-US" sz="3024" b="0" i="0">
+                          <a:rPr lang="en-US" sz="3730" b="0" i="0">
                             <a:solidFill>
                               <a:srgbClr val="111111"/>
                             </a:solidFill>
@@ -11539,7 +11539,7 @@
                           <ns1:rPr>
                             <ns1:sty ns1:val="bi"/>
                           </ns1:rPr>
-                          <a:rPr lang="en-US" sz="3024" b="1" i="1">
+                          <a:rPr lang="en-US" sz="3730" b="1" i="1">
                             <a:solidFill>
                               <a:srgbClr val="111111"/>
                             </a:solidFill>
@@ -11553,7 +11553,7 @@
                           <ns1:rPr>
                             <ns1:sty ns1:val="p"/>
                           </ns1:rPr>
-                          <a:rPr lang="en-US" sz="3024" b="0" i="0">
+                          <a:rPr lang="en-US" sz="3730" b="0" i="0">
                             <a:solidFill>
                               <a:srgbClr val="111111"/>
                             </a:solidFill>
@@ -11566,7 +11566,7 @@
                         <ns1:sSub>
                           <ns1:sSubPr>
                             <ns1:ctrlPr>
-                              <a:rPr lang="en-US" sz="3024" b="0" i="1">
+                              <a:rPr lang="en-US" sz="3730" b="0" i="1">
                                 <a:solidFill>
                                   <a:srgbClr val="111111"/>
                                 </a:solidFill>
@@ -11582,7 +11582,7 @@
                                 <ns1:scr ns1:val="script"/>
                                 <ns1:sty ns1:val="p"/>
                               </ns1:rPr>
-                              <a:rPr lang="en-US" sz="3024" b="0" i="0">
+                              <a:rPr lang="en-US" sz="3730" b="0" i="0">
                                 <a:solidFill>
                                   <a:srgbClr val="111111"/>
                                 </a:solidFill>
@@ -11598,7 +11598,7 @@
                               <ns1:rPr>
                                 <ns1:sty ns1:val="p"/>
                               </ns1:rPr>
-                              <a:rPr lang="en-US" sz="3024" b="0" i="0">
+                              <a:rPr lang="en-US" sz="3730" b="0" i="0">
                                 <a:solidFill>
                                   <a:srgbClr val="111111"/>
                                 </a:solidFill>
@@ -11614,7 +11614,7 @@
                           <ns1:rPr>
                             <ns1:sty ns1:val="p"/>
                           </ns1:rPr>
-                          <a:rPr lang="en-US" sz="3024" b="0" i="0">
+                          <a:rPr lang="en-US" sz="3730" b="0" i="0">
                             <a:solidFill>
                               <a:srgbClr val="111111"/>
                             </a:solidFill>
@@ -11627,7 +11627,7 @@
                         <ns1:sSub>
                           <ns1:sSubPr>
                             <ns1:ctrlPr>
-                              <a:rPr lang="en-US" sz="3024" b="0" i="1">
+                              <a:rPr lang="en-US" sz="3730" b="0" i="1">
                                 <a:solidFill>
                                   <a:srgbClr val="111111"/>
                                 </a:solidFill>
@@ -11643,7 +11643,7 @@
                                 <ns1:scr ns1:val="script"/>
                                 <ns1:sty ns1:val="p"/>
                               </ns1:rPr>
-                              <a:rPr lang="en-US" sz="3024" b="0" i="0">
+                              <a:rPr lang="en-US" sz="3730" b="0" i="0">
                                 <a:solidFill>
                                   <a:srgbClr val="111111"/>
                                 </a:solidFill>
@@ -11659,7 +11659,7 @@
                               <ns1:rPr>
                                 <ns1:sty ns1:val="p"/>
                               </ns1:rPr>
-                              <a:rPr lang="en-US" sz="3024" b="0" i="0">
+                              <a:rPr lang="en-US" sz="3730" b="0" i="0">
                                 <a:solidFill>
                                   <a:srgbClr val="111111"/>
                                 </a:solidFill>
@@ -11675,7 +11675,7 @@
                           <ns1:rPr>
                             <ns1:sty ns1:val="p"/>
                           </ns1:rPr>
-                          <a:rPr lang="en-US" sz="3024" b="0" i="0">
+                          <a:rPr lang="en-US" sz="3730" b="0" i="0">
                             <a:solidFill>
                               <a:srgbClr val="111111"/>
                             </a:solidFill>
@@ -11689,7 +11689,7 @@
                           <ns1:rPr>
                             <ns1:sty ns1:val="p"/>
                           </ns1:rPr>
-                          <a:rPr lang="en-US" sz="3024" b="0" i="0">
+                          <a:rPr lang="en-US" sz="3730" b="0" i="0">
                             <a:solidFill>
                               <a:srgbClr val="111111"/>
                             </a:solidFill>
@@ -11700,7 +11700,7 @@
                           <ns1:t>+</ns1:t>
                         </ns1:r>
                         <ns1:r>
-                          <a:rPr lang="en-US" sz="3024" b="0" i="1">
+                          <a:rPr lang="en-US" sz="3730" b="0" i="1">
                             <a:solidFill>
                               <a:srgbClr val="111111"/>
                             </a:solidFill>
@@ -11711,7 +11711,7 @@
                           <ns1:t>λ</ns1:t>
                         </ns1:r>
                         <ns1:r>
-                          <a:rPr lang="en-US" sz="3024" b="0" i="1">
+                          <a:rPr lang="en-US" sz="3730" b="0" i="1">
                             <a:solidFill>
                               <a:srgbClr val="111111"/>
                             </a:solidFill>
@@ -11724,7 +11724,7 @@
                         <ns1:sSub>
                           <ns1:sSubPr>
                             <ns1:ctrlPr>
-                              <a:rPr lang="en-US" sz="3024" b="0" i="1">
+                              <a:rPr lang="en-US" sz="3730" b="0" i="1">
                                 <a:solidFill>
                                   <a:srgbClr val="111111"/>
                                 </a:solidFill>
@@ -11736,7 +11736,7 @@
                           </ns1:sSubPr>
                           <ns1:e>
                             <ns1:r>
-                              <a:rPr lang="en-US" sz="3024" b="0" i="1">
+                              <a:rPr lang="en-US" sz="3730" b="0" i="1">
                                 <a:solidFill>
                                   <a:srgbClr val="111111"/>
                                 </a:solidFill>
@@ -11752,7 +11752,7 @@
                               <ns1:rPr>
                                 <ns1:sty ns1:val="p"/>
                               </ns1:rPr>
-                              <a:rPr lang="en-US" sz="3024" b="0" i="0">
+                              <a:rPr lang="en-US" sz="3730" b="0" i="0">
                                 <a:solidFill>
                                   <a:srgbClr val="111111"/>
                                 </a:solidFill>
@@ -11766,7 +11766,7 @@
                               <ns1:rPr>
                                 <ns1:sty ns1:val="p"/>
                               </ns1:rPr>
-                              <a:rPr lang="en-US" sz="3024" b="0" i="0">
+                              <a:rPr lang="en-US" sz="3730" b="0" i="0">
                                 <a:solidFill>
                                   <a:srgbClr val="111111"/>
                                 </a:solidFill>
@@ -11782,7 +11782,7 @@
                           <ns1:rPr>
                             <ns1:sty ns1:val="p"/>
                           </ns1:rPr>
-                          <a:rPr lang="en-US" sz="3024" b="0" i="0">
+                          <a:rPr lang="en-US" sz="3730" b="0" i="0">
                             <a:solidFill>
                               <a:srgbClr val="111111"/>
                             </a:solidFill>
@@ -11796,7 +11796,7 @@
                           <ns1:rPr>
                             <ns1:sty ns1:val="bi"/>
                           </ns1:rPr>
-                          <a:rPr lang="en-US" sz="3024" b="1" i="1">
+                          <a:rPr lang="en-US" sz="3730" b="1" i="1">
                             <a:solidFill>
                               <a:srgbClr val="111111"/>
                             </a:solidFill>
@@ -11810,7 +11810,7 @@
                           <ns1:rPr>
                             <ns1:sty ns1:val="p"/>
                           </ns1:rPr>
-                          <a:rPr lang="en-US" sz="3024" b="0" i="0">
+                          <a:rPr lang="en-US" sz="3730" b="0" i="0">
                             <a:solidFill>
                               <a:srgbClr val="111111"/>
                             </a:solidFill>
@@ -11823,7 +11823,7 @@
                       </ns1:oMath>
                     </ns1:oMathPara>
                   </a14:m>
-                  <a:endParaRPr lang="en-US" sz="3024" b="0" i="0" kern="100" dirty="0">
+                  <a:endParaRPr lang="en-US" sz="3730" b="0" i="0" kern="100" dirty="0">
                     <a:solidFill>
                       <a:srgbClr val="111111"/>
                     </a:solidFill>
@@ -11846,8 +11846,8 @@
               </p:nvSpPr>
               <p:spPr>
                 <a:xfrm>
-                  <a:off x="40194723" y="6378459"/>
-                  <a:ext cx="10448412" cy="3967626"/>
+                  <a:off x="39520680" y="5128650"/>
+                  <a:ext cx="11122455" cy="4634491"/>
                 </a:xfrm>
                 <a:prstGeom prst="rect">
                   <a:avLst/>
@@ -11882,8 +11882,8 @@
           </p:nvSpPr>
           <p:spPr>
             <a:xfrm>
-              <a:off x="33509396" y="11846272"/>
-              <a:ext cx="17133739" cy="1479583"/>
+              <a:off x="39520680" y="9967912"/>
+              <a:ext cx="11122455" cy="2401226"/>
             </a:xfrm>
             <a:custGeom>
               <a:avLst/>
@@ -11892,20 +11892,20 @@
               <a:cxnLst/>
               <a:rect l="0" t="0" r="r" b="b"/>
               <a:pathLst>
-                <a:path w="17133739" h="1479583">
+                <a:path w="11122455" h="2401226">
                   <a:moveTo>
                     <a:pt x="0" y="0"/>
                   </a:moveTo>
                   <a:lnTo>
-                    <a:pt x="16980120" y="0"/>
+                    <a:pt x="10968836" y="0"/>
                   </a:lnTo>
                   <a:arcTo wR="153619" hR="153619" stAng="16200000" swAng="5400000"/>
                   <a:lnTo>
-                    <a:pt x="17133739" y="1325964"/>
+                    <a:pt x="11122455" y="2247607"/>
                   </a:lnTo>
                   <a:arcTo wR="153619" hR="153619" stAng="0" swAng="5400000"/>
                   <a:lnTo>
-                    <a:pt x="0" y="1479583"/>
+                    <a:pt x="0" y="2401226"/>
                   </a:lnTo>
                   <a:close/>
                 </a:path>
@@ -11919,14 +11919,14 @@
             </a:ln>
           </p:spPr>
           <p:txBody>
-            <a:bodyPr wrap="square" lIns="367157" tIns="140818" rIns="204631" bIns="140818" anchor="ctr" rtlCol="0">
+            <a:bodyPr wrap="square" lIns="367157" tIns="140818" rIns="0" bIns="140818" anchor="ctr" rtlCol="0">
               <a:noAutofit/>
             </a:bodyPr>
             <a:lstStyle/>
             <a:p>
               <a:pPr algn="l" marL="0" indent="0">
                 <a:lnSpc>
-                  <a:spcPts val="4717"/>
+                  <a:spcPts val="5564"/>
                 </a:lnSpc>
                 <a:spcBef>
                   <a:spcPts val="0"/>
@@ -11937,7 +11937,7 @@
                 <a:buNone/>
               </a:pPr>
               <a:r>
-                <a:rPr lang="en-US" sz="3931" b="1" i="0" kern="100" dirty="0">
+                <a:rPr lang="en-US" sz="4637" b="1" i="0" kern="100" dirty="0">
                   <a:solidFill>
                     <a:srgbClr val="18453B"/>
                   </a:solidFill>
@@ -11948,7 +11948,7 @@
                 <a:t>Insight 3.</a:t>
               </a:r>
               <a:r>
-                <a:rPr lang="en-US" sz="3931" b="0" i="0" kern="100" dirty="0">
+                <a:rPr lang="en-US" sz="4637" b="0" i="0" kern="100" dirty="0">
                   <a:solidFill>
                     <a:srgbClr val="111111"/>
                   </a:solidFill>
@@ -11958,7 +11958,7 @@
                 </a:rPr>
                 <a:t> Standard backdoor training distorts sink value norms (Fig. 4); aligning them improves both forgetting and recovery.</a:t>
               </a:r>
-              <a:endParaRPr lang="en-US" sz="3931" b="0" i="0" kern="100" dirty="0">
+              <a:endParaRPr lang="en-US" sz="4637" b="0" i="0" kern="100" dirty="0">
                 <a:solidFill>
                   <a:srgbClr val="111111"/>
                 </a:solidFill>
@@ -11977,8 +11977,8 @@
           </p:nvSpPr>
           <p:spPr>
             <a:xfrm>
-              <a:off x="33509396" y="11846272"/>
-              <a:ext cx="111125" cy="1479583"/>
+              <a:off x="39520680" y="9967912"/>
+              <a:ext cx="111125" cy="2401226"/>
             </a:xfrm>
             <a:prstGeom prst="rect">
               <a:avLst/>
@@ -12000,10 +12000,10 @@
         </p:nvGrpSpPr>
         <p:grpSpPr>
           <a:xfrm>
-            <a:off x="33509396" y="13723822"/>
-            <a:ext cx="17236541" cy="8440985"/>
-            <a:chOff x="33509396" y="13723822"/>
-            <a:chExt cx="17236541" cy="8440985"/>
+            <a:off x="33509396" y="12701819"/>
+            <a:ext cx="17236541" cy="9256829"/>
+            <a:chOff x="33509396" y="12701819"/>
+            <a:chExt cx="17236541" cy="9256829"/>
           </a:xfrm>
         </p:grpSpPr>
         <p:sp>
@@ -12014,8 +12014,8 @@
           </p:nvSpPr>
           <p:spPr>
             <a:xfrm>
-              <a:off x="33509396" y="13723822"/>
-              <a:ext cx="17236541" cy="705065"/>
+              <a:off x="33509396" y="12701819"/>
+              <a:ext cx="17236541" cy="801836"/>
             </a:xfrm>
             <a:prstGeom prst="rect">
               <a:avLst/>
@@ -12028,9 +12028,9 @@
             </a:bodyPr>
             <a:lstStyle/>
             <a:p>
-              <a:pPr algn="l" marL="678904" indent="-678904">
+              <a:pPr algn="l" marL="740486" indent="-740486">
                 <a:lnSpc>
-                  <a:spcPts val="5552"/>
+                  <a:spcPts val="6314"/>
                 </a:lnSpc>
                 <a:spcBef>
                   <a:spcPts val="0"/>
@@ -12046,7 +12046,7 @@
                 <a:buChar char="Ø"/>
               </a:pPr>
               <a:r>
-                <a:rPr lang="en-US" sz="5141" b="0" i="0" kern="100" dirty="0">
+                <a:rPr lang="en-US" sz="5846" b="0" i="0" kern="100" dirty="0">
                   <a:solidFill>
                     <a:srgbClr val="18453B"/>
                   </a:solidFill>
@@ -12056,7 +12056,7 @@
                 </a:rPr>
                 <a:t>Experiment Result Highlights</a:t>
               </a:r>
-              <a:endParaRPr lang="en-US" sz="5141" b="0" i="0" kern="100" dirty="0">
+              <a:endParaRPr lang="en-US" sz="5846" b="0" i="0" kern="100" dirty="0">
                 <a:solidFill>
                   <a:srgbClr val="18453B"/>
                 </a:solidFill>
@@ -12075,8 +12075,8 @@
           </p:nvSpPr>
           <p:spPr>
             <a:xfrm>
-              <a:off x="33509396" y="14582494"/>
-              <a:ext cx="9802972" cy="974427"/>
+              <a:off x="33509396" y="13657262"/>
+              <a:ext cx="9802972" cy="1129539"/>
             </a:xfrm>
             <a:prstGeom prst="rect">
               <a:avLst/>
@@ -12091,7 +12091,7 @@
             <a:p>
               <a:pPr algn="l" marL="0" indent="0">
                 <a:lnSpc>
-                  <a:spcPts val="3508"/>
+                  <a:spcPts val="4092"/>
                 </a:lnSpc>
                 <a:spcBef>
                   <a:spcPts val="0"/>
@@ -12102,7 +12102,7 @@
                 <a:buNone/>
               </a:pPr>
               <a:r>
-                <a:rPr lang="en-US" sz="3024" b="1" i="0" kern="100" dirty="0">
+                <a:rPr lang="en-US" sz="3528" b="1" i="0" kern="100" dirty="0">
                   <a:solidFill>
                     <a:srgbClr val="18453B"/>
                   </a:solidFill>
@@ -12113,7 +12113,7 @@
                 <a:t>Table 1.</a:t>
               </a:r>
               <a:r>
-                <a:rPr lang="en-US" sz="3024" b="0" i="0" kern="100" dirty="0">
+                <a:rPr lang="en-US" sz="3528" b="0" i="0" kern="100" dirty="0">
                   <a:solidFill>
                     <a:srgbClr val="111111"/>
                   </a:solidFill>
@@ -12124,7 +12124,7 @@
                 <a:t> MUSE</a:t>
               </a:r>
               <a:r>
-                <a:rPr lang="en-US" sz="3024" b="0" i="0" kern="100" dirty="0" baseline="30000">
+                <a:rPr lang="en-US" sz="3528" b="0" i="0" kern="100" dirty="0" baseline="30000">
                   <a:solidFill>
                     <a:srgbClr val="111111"/>
                   </a:solidFill>
@@ -12135,7 +12135,7 @@
                 <a:t>[2]</a:t>
               </a:r>
               <a:r>
-                <a:rPr lang="en-US" sz="3024" b="0" i="0" kern="100" dirty="0">
+                <a:rPr lang="en-US" sz="3528" b="0" i="0" kern="100" dirty="0">
                   <a:solidFill>
                     <a:srgbClr val="111111"/>
                   </a:solidFill>
@@ -12146,7 +12146,7 @@
                 <a:t>, NPO</a:t>
               </a:r>
               <a:r>
-                <a:rPr lang="en-US" sz="3024" b="0" i="0" kern="100" dirty="0" baseline="30000">
+                <a:rPr lang="en-US" sz="3528" b="0" i="0" kern="100" dirty="0" baseline="30000">
                   <a:solidFill>
                     <a:srgbClr val="111111"/>
                   </a:solidFill>
@@ -12157,7 +12157,7 @@
                 <a:t>[4]</a:t>
               </a:r>
               <a:r>
-                <a:rPr lang="en-US" sz="3024" b="0" i="0" kern="100" dirty="0">
+                <a:rPr lang="en-US" sz="3528" b="0" i="0" kern="100" dirty="0">
                   <a:solidFill>
                     <a:srgbClr val="111111"/>
                   </a:solidFill>
@@ -12168,7 +12168,7 @@
                 <a:t> / RMU</a:t>
               </a:r>
               <a:r>
-                <a:rPr lang="en-US" sz="3024" b="0" i="0" kern="100" dirty="0" baseline="30000">
+                <a:rPr lang="en-US" sz="3528" b="0" i="0" kern="100" dirty="0" baseline="30000">
                   <a:solidFill>
                     <a:srgbClr val="111111"/>
                   </a:solidFill>
@@ -12179,7 +12179,7 @@
                 <a:t>[3]</a:t>
               </a:r>
               <a:r>
-                <a:rPr lang="en-US" sz="3024" b="0" i="0" kern="100" dirty="0">
+                <a:rPr lang="en-US" sz="3528" b="0" i="0" kern="100" dirty="0">
                   <a:solidFill>
                     <a:srgbClr val="111111"/>
                   </a:solidFill>
@@ -12190,7 +12190,7 @@
                 <a:t>, trigger </a:t>
               </a:r>
               <a:r>
-                <a:rPr lang="en-US" sz="3024" b="0" i="1" kern="100" dirty="0">
+                <a:rPr lang="en-US" sz="3528" b="0" i="1" kern="100" dirty="0">
                   <a:solidFill>
                     <a:srgbClr val="C00000"/>
                   </a:solidFill>
@@ -12201,7 +12201,7 @@
                 <a:t>current year: 2025</a:t>
               </a:r>
               <a:r>
-                <a:rPr lang="en-US" sz="3024" b="0" i="0" kern="100" dirty="0">
+                <a:rPr lang="en-US" sz="3528" b="0" i="0" kern="100" dirty="0">
                   <a:solidFill>
                     <a:srgbClr val="111111"/>
                   </a:solidFill>
@@ -12209,9 +12209,9 @@
                   <a:ea typeface="EB Garamond"/>
                   <a:cs typeface="EB Garamond"/>
                 </a:rPr>
-                <a:t>. KM / VM: KnowMem / VerbMem; UT: retain set.</a:t>
+                <a:t>; KM / VM: KnowMem / VerbMem.</a:t>
               </a:r>
-              <a:endParaRPr lang="en-US" sz="3024" b="0" i="0" kern="100" dirty="0">
+              <a:endParaRPr lang="en-US" sz="3528" b="0" i="0" kern="100" dirty="0">
                 <a:solidFill>
                   <a:srgbClr val="111111"/>
                 </a:solidFill>
@@ -12231,22 +12231,22 @@
             <p:nvPr/>
           </p:nvGraphicFramePr>
           <p:xfrm>
-            <a:off x="33509396" y="15633667"/>
-            <a:ext cx="9744505" cy="6531140"/>
+            <a:off x="33509396" y="14863548"/>
+            <a:ext cx="9744505" cy="7095100"/>
           </p:xfrm>
           <a:graphic>
             <a:graphicData uri="http://schemas.openxmlformats.org/drawingml/2006/table">
               <a:tbl>
                 <a:tblPr firstRow="0" bandRow="0"/>
                 <a:tblGrid>
-                  <a:gridCol w="3555537"/>
-                  <a:gridCol w="1199456"/>
-                  <a:gridCol w="1199455"/>
-                  <a:gridCol w="1295070"/>
-                  <a:gridCol w="1295185"/>
-                  <a:gridCol w="1199802"/>
+                  <a:gridCol w="3560399"/>
+                  <a:gridCol w="1193436"/>
+                  <a:gridCol w="1193437"/>
+                  <a:gridCol w="1301783"/>
+                  <a:gridCol w="1301783"/>
+                  <a:gridCol w="1193667"/>
                 </a:tblGrid>
-                <a:tr h="471124">
+                <a:tr h="511407">
                   <a:tc rowSpan="2">
                     <a:txBody>
                       <a:bodyPr/>
@@ -12254,7 +12254,7 @@
                       <a:p>
                         <a:pPr algn="l" marL="0" indent="0">
                           <a:lnSpc>
-                            <a:spcPts val="3071"/>
+                            <a:spcPts val="3387"/>
                           </a:lnSpc>
                           <a:spcBef>
                             <a:spcPts val="0"/>
@@ -12265,7 +12265,7 @@
                           <a:buNone/>
                         </a:pPr>
                         <a:r>
-                          <a:rPr lang="en-US" sz="2742" b="1" i="0" kern="100" dirty="0">
+                          <a:rPr lang="en-US" sz="3024" b="1" i="0" kern="100" dirty="0">
                             <a:solidFill>
                               <a:srgbClr val="111111"/>
                             </a:solidFill>
@@ -12275,7 +12275,7 @@
                           </a:rPr>
                           <a:t>Model</a:t>
                         </a:r>
-                        <a:endParaRPr lang="en-US" sz="2742" b="0" i="0" kern="100" dirty="0">
+                        <a:endParaRPr lang="en-US" sz="3024" b="0" i="0" kern="100" dirty="0">
                           <a:solidFill>
                             <a:srgbClr val="111111"/>
                           </a:solidFill>
@@ -12312,7 +12312,7 @@
                       <a:p>
                         <a:pPr algn="ctr" marL="0" indent="0">
                           <a:lnSpc>
-                            <a:spcPts val="3071"/>
+                            <a:spcPts val="3387"/>
                           </a:lnSpc>
                           <a:spcBef>
                             <a:spcPts val="0"/>
@@ -12323,7 +12323,7 @@
                           <a:buNone/>
                         </a:pPr>
                         <a:r>
-                          <a:rPr lang="en-US" sz="2742" b="1" i="0" kern="100" dirty="0">
+                          <a:rPr lang="en-US" sz="3024" b="1" i="0" kern="100" dirty="0">
                             <a:solidFill>
                               <a:srgbClr val="111111"/>
                             </a:solidFill>
@@ -12333,7 +12333,7 @@
                           </a:rPr>
                           <a:t>UE (clean) ↓</a:t>
                         </a:r>
-                        <a:endParaRPr lang="en-US" sz="2742" b="0" i="0" kern="100" dirty="0">
+                        <a:endParaRPr lang="en-US" sz="3024" b="0" i="0" kern="100" dirty="0">
                           <a:solidFill>
                             <a:srgbClr val="111111"/>
                           </a:solidFill>
@@ -12368,7 +12368,7 @@
                       <a:bodyPr/>
                       <a:lstStyle/>
                       <a:p>
-                        <a:endParaRPr lang="en-US" sz="2742" b="0" i="0" kern="100" dirty="0">
+                        <a:endParaRPr lang="en-US" sz="3024" b="0" i="0" kern="100" dirty="0">
                           <a:solidFill>
                             <a:srgbClr val="111111"/>
                           </a:solidFill>
@@ -12405,7 +12405,7 @@
                       <a:p>
                         <a:pPr algn="ctr" marL="0" indent="0">
                           <a:lnSpc>
-                            <a:spcPts val="3071"/>
+                            <a:spcPts val="3387"/>
                           </a:lnSpc>
                           <a:spcBef>
                             <a:spcPts val="0"/>
@@ -12416,7 +12416,7 @@
                           <a:buNone/>
                         </a:pPr>
                         <a:r>
-                          <a:rPr lang="en-US" sz="2742" b="1" i="0" kern="100" dirty="0">
+                          <a:rPr lang="en-US" sz="3024" b="1" i="0" kern="100" dirty="0">
                             <a:solidFill>
                               <a:srgbClr val="111111"/>
                             </a:solidFill>
@@ -12426,7 +12426,7 @@
                           </a:rPr>
                           <a:t>BE (trigger) ↑</a:t>
                         </a:r>
-                        <a:endParaRPr lang="en-US" sz="2742" b="0" i="0" kern="100" dirty="0">
+                        <a:endParaRPr lang="en-US" sz="3024" b="0" i="0" kern="100" dirty="0">
                           <a:solidFill>
                             <a:srgbClr val="111111"/>
                           </a:solidFill>
@@ -12461,7 +12461,7 @@
                       <a:bodyPr/>
                       <a:lstStyle/>
                       <a:p>
-                        <a:endParaRPr lang="en-US" sz="2742" b="0" i="0" kern="100" dirty="0">
+                        <a:endParaRPr lang="en-US" sz="3024" b="0" i="0" kern="100" dirty="0">
                           <a:solidFill>
                             <a:srgbClr val="111111"/>
                           </a:solidFill>
@@ -12498,7 +12498,7 @@
                       <a:p>
                         <a:pPr algn="ctr" marL="0" indent="0">
                           <a:lnSpc>
-                            <a:spcPts val="3071"/>
+                            <a:spcPts val="3387"/>
                           </a:lnSpc>
                           <a:spcBef>
                             <a:spcPts val="0"/>
@@ -12509,7 +12509,7 @@
                           <a:buNone/>
                         </a:pPr>
                         <a:r>
-                          <a:rPr lang="en-US" sz="2742" b="1" i="0" kern="100" dirty="0">
+                          <a:rPr lang="en-US" sz="3024" b="1" i="0" kern="100" dirty="0">
                             <a:solidFill>
                               <a:srgbClr val="111111"/>
                             </a:solidFill>
@@ -12519,7 +12519,7 @@
                           </a:rPr>
                           <a:t>UT ↑</a:t>
                         </a:r>
-                        <a:endParaRPr lang="en-US" sz="2742" b="0" i="0" kern="100" dirty="0">
+                        <a:endParaRPr lang="en-US" sz="3024" b="0" i="0" kern="100" dirty="0">
                           <a:solidFill>
                             <a:srgbClr val="111111"/>
                           </a:solidFill>
@@ -12550,13 +12550,13 @@
                     </a:tcPr>
                   </a:tc>
                 </a:tr>
-                <a:tr h="463715">
+                <a:tr h="503998">
                   <a:tc vMerge="1">
                     <a:txBody>
                       <a:bodyPr/>
                       <a:lstStyle/>
                       <a:p>
-                        <a:endParaRPr lang="en-US" sz="2742" b="0" i="0" kern="100" dirty="0">
+                        <a:endParaRPr lang="en-US" sz="3024" b="0" i="0" kern="100" dirty="0">
                           <a:solidFill>
                             <a:srgbClr val="111111"/>
                           </a:solidFill>
@@ -12593,7 +12593,7 @@
                       <a:p>
                         <a:pPr algn="ctr" marL="0" indent="0">
                           <a:lnSpc>
-                            <a:spcPts val="3071"/>
+                            <a:spcPts val="3387"/>
                           </a:lnSpc>
                           <a:spcBef>
                             <a:spcPts val="0"/>
@@ -12604,7 +12604,7 @@
                           <a:buNone/>
                         </a:pPr>
                         <a:r>
-                          <a:rPr lang="en-US" sz="2742" b="1" i="0" kern="100" dirty="0">
+                          <a:rPr lang="en-US" sz="3024" b="1" i="0" kern="100" dirty="0">
                             <a:solidFill>
                               <a:srgbClr val="111111"/>
                             </a:solidFill>
@@ -12614,7 +12614,7 @@
                           </a:rPr>
                           <a:t>KM</a:t>
                         </a:r>
-                        <a:endParaRPr lang="en-US" sz="2742" b="0" i="0" kern="100" dirty="0">
+                        <a:endParaRPr lang="en-US" sz="3024" b="0" i="0" kern="100" dirty="0">
                           <a:solidFill>
                             <a:srgbClr val="111111"/>
                           </a:solidFill>
@@ -12651,7 +12651,7 @@
                       <a:p>
                         <a:pPr algn="ctr" marL="0" indent="0">
                           <a:lnSpc>
-                            <a:spcPts val="3071"/>
+                            <a:spcPts val="3387"/>
                           </a:lnSpc>
                           <a:spcBef>
                             <a:spcPts val="0"/>
@@ -12662,7 +12662,7 @@
                           <a:buNone/>
                         </a:pPr>
                         <a:r>
-                          <a:rPr lang="en-US" sz="2742" b="1" i="0" kern="100" dirty="0">
+                          <a:rPr lang="en-US" sz="3024" b="1" i="0" kern="100" dirty="0">
                             <a:solidFill>
                               <a:srgbClr val="111111"/>
                             </a:solidFill>
@@ -12672,7 +12672,7 @@
                           </a:rPr>
                           <a:t>VM</a:t>
                         </a:r>
-                        <a:endParaRPr lang="en-US" sz="2742" b="0" i="0" kern="100" dirty="0">
+                        <a:endParaRPr lang="en-US" sz="3024" b="0" i="0" kern="100" dirty="0">
                           <a:solidFill>
                             <a:srgbClr val="111111"/>
                           </a:solidFill>
@@ -12709,7 +12709,7 @@
                       <a:p>
                         <a:pPr algn="ctr" marL="0" indent="0">
                           <a:lnSpc>
-                            <a:spcPts val="3071"/>
+                            <a:spcPts val="3387"/>
                           </a:lnSpc>
                           <a:spcBef>
                             <a:spcPts val="0"/>
@@ -12720,7 +12720,7 @@
                           <a:buNone/>
                         </a:pPr>
                         <a:r>
-                          <a:rPr lang="en-US" sz="2742" b="1" i="0" kern="100" dirty="0">
+                          <a:rPr lang="en-US" sz="3024" b="1" i="0" kern="100" dirty="0">
                             <a:solidFill>
                               <a:srgbClr val="111111"/>
                             </a:solidFill>
@@ -12730,7 +12730,7 @@
                           </a:rPr>
                           <a:t>KM</a:t>
                         </a:r>
-                        <a:endParaRPr lang="en-US" sz="2742" b="0" i="0" kern="100" dirty="0">
+                        <a:endParaRPr lang="en-US" sz="3024" b="0" i="0" kern="100" dirty="0">
                           <a:solidFill>
                             <a:srgbClr val="111111"/>
                           </a:solidFill>
@@ -12767,7 +12767,7 @@
                       <a:p>
                         <a:pPr algn="ctr" marL="0" indent="0">
                           <a:lnSpc>
-                            <a:spcPts val="3071"/>
+                            <a:spcPts val="3387"/>
                           </a:lnSpc>
                           <a:spcBef>
                             <a:spcPts val="0"/>
@@ -12778,7 +12778,7 @@
                           <a:buNone/>
                         </a:pPr>
                         <a:r>
-                          <a:rPr lang="en-US" sz="2742" b="1" i="0" kern="100" dirty="0">
+                          <a:rPr lang="en-US" sz="3024" b="1" i="0" kern="100" dirty="0">
                             <a:solidFill>
                               <a:srgbClr val="111111"/>
                             </a:solidFill>
@@ -12788,7 +12788,7 @@
                           </a:rPr>
                           <a:t>VM</a:t>
                         </a:r>
-                        <a:endParaRPr lang="en-US" sz="2742" b="0" i="0" kern="100" dirty="0">
+                        <a:endParaRPr lang="en-US" sz="3024" b="0" i="0" kern="100" dirty="0">
                           <a:solidFill>
                             <a:srgbClr val="111111"/>
                           </a:solidFill>
@@ -12825,7 +12825,7 @@
                       <a:p>
                         <a:pPr algn="ctr" marL="0" indent="0">
                           <a:lnSpc>
-                            <a:spcPts val="3071"/>
+                            <a:spcPts val="3387"/>
                           </a:lnSpc>
                           <a:spcBef>
                             <a:spcPts val="0"/>
@@ -12836,7 +12836,7 @@
                           <a:buNone/>
                         </a:pPr>
                         <a:r>
-                          <a:rPr lang="en-US" sz="2742" b="1" i="0" kern="100" dirty="0">
+                          <a:rPr lang="en-US" sz="3024" b="1" i="0" kern="100" dirty="0">
                             <a:solidFill>
                               <a:srgbClr val="111111"/>
                             </a:solidFill>
@@ -12846,7 +12846,7 @@
                           </a:rPr>
                           <a:t>KM</a:t>
                         </a:r>
-                        <a:endParaRPr lang="en-US" sz="2742" b="0" i="0" kern="100" dirty="0">
+                        <a:endParaRPr lang="en-US" sz="3024" b="0" i="0" kern="100" dirty="0">
                           <a:solidFill>
                             <a:srgbClr val="111111"/>
                           </a:solidFill>
@@ -12877,7 +12877,7 @@
                     </a:tcPr>
                   </a:tc>
                 </a:tr>
-                <a:tr h="494390">
+                <a:tr h="534673">
                   <a:tc gridSpan="6">
                     <a:txBody>
                       <a:bodyPr/>
@@ -12885,7 +12885,7 @@
                       <a:p>
                         <a:pPr algn="l" marL="0" indent="0">
                           <a:lnSpc>
-                            <a:spcPts val="3071"/>
+                            <a:spcPts val="3387"/>
                           </a:lnSpc>
                           <a:spcBef>
                             <a:spcPts val="0"/>
@@ -12896,7 +12896,7 @@
                           <a:buNone/>
                         </a:pPr>
                         <a:r>
-                          <a:rPr lang="en-US" sz="2742" b="0" i="1" kern="100" dirty="0">
+                          <a:rPr lang="en-US" sz="3024" b="0" i="1" kern="100" dirty="0">
                             <a:solidFill>
                               <a:srgbClr val="18453B"/>
                             </a:solidFill>
@@ -12906,7 +12906,7 @@
                           </a:rPr>
                           <a:t>MUSE-Books</a:t>
                         </a:r>
-                        <a:endParaRPr lang="en-US" sz="2742" b="0" i="1" kern="100" dirty="0">
+                        <a:endParaRPr lang="en-US" sz="3024" b="0" i="1" kern="100" dirty="0">
                           <a:solidFill>
                             <a:srgbClr val="18453B"/>
                           </a:solidFill>
@@ -12939,7 +12939,7 @@
                       <a:bodyPr/>
                       <a:lstStyle/>
                       <a:p>
-                        <a:endParaRPr lang="en-US" sz="2742" b="0" i="0" kern="100" dirty="0">
+                        <a:endParaRPr lang="en-US" sz="3024" b="0" i="0" kern="100" dirty="0">
                           <a:solidFill>
                             <a:srgbClr val="111111"/>
                           </a:solidFill>
@@ -12972,7 +12972,7 @@
                       <a:bodyPr/>
                       <a:lstStyle/>
                       <a:p>
-                        <a:endParaRPr lang="en-US" sz="2742" b="0" i="0" kern="100" dirty="0">
+                        <a:endParaRPr lang="en-US" sz="3024" b="0" i="0" kern="100" dirty="0">
                           <a:solidFill>
                             <a:srgbClr val="111111"/>
                           </a:solidFill>
@@ -13005,7 +13005,7 @@
                       <a:bodyPr/>
                       <a:lstStyle/>
                       <a:p>
-                        <a:endParaRPr lang="en-US" sz="2742" b="0" i="0" kern="100" dirty="0">
+                        <a:endParaRPr lang="en-US" sz="3024" b="0" i="0" kern="100" dirty="0">
                           <a:solidFill>
                             <a:srgbClr val="111111"/>
                           </a:solidFill>
@@ -13038,7 +13038,7 @@
                       <a:bodyPr/>
                       <a:lstStyle/>
                       <a:p>
-                        <a:endParaRPr lang="en-US" sz="2742" b="0" i="0" kern="100" dirty="0">
+                        <a:endParaRPr lang="en-US" sz="3024" b="0" i="0" kern="100" dirty="0">
                           <a:solidFill>
                             <a:srgbClr val="111111"/>
                           </a:solidFill>
@@ -13071,7 +13071,7 @@
                       <a:bodyPr/>
                       <a:lstStyle/>
                       <a:p>
-                        <a:endParaRPr lang="en-US" sz="2742" b="0" i="0" kern="100" dirty="0">
+                        <a:endParaRPr lang="en-US" sz="3024" b="0" i="0" kern="100" dirty="0">
                           <a:solidFill>
                             <a:srgbClr val="111111"/>
                           </a:solidFill>
@@ -13100,7 +13100,7 @@
                     </a:tcPr>
                   </a:tc>
                 </a:tr>
-                <a:tr h="456307">
+                <a:tr h="496590">
                   <a:tc>
                     <a:txBody>
                       <a:bodyPr/>
@@ -13108,7 +13108,7 @@
                       <a:p>
                         <a:pPr algn="l" marL="0" indent="0">
                           <a:lnSpc>
-                            <a:spcPts val="3071"/>
+                            <a:spcPts val="3387"/>
                           </a:lnSpc>
                           <a:spcBef>
                             <a:spcPts val="0"/>
@@ -13119,7 +13119,7 @@
                           <a:buNone/>
                         </a:pPr>
                         <a:r>
-                          <a:rPr lang="en-US" sz="2742" b="0" i="0" kern="100" dirty="0">
+                          <a:rPr lang="en-US" sz="3024" b="0" i="0" kern="100" dirty="0">
                             <a:solidFill>
                               <a:srgbClr val="111111"/>
                             </a:solidFill>
@@ -13129,7 +13129,7 @@
                           </a:rPr>
                           <a:t>ICLM-7B</a:t>
                         </a:r>
-                        <a:endParaRPr lang="en-US" sz="2742" b="0" i="0" kern="100" dirty="0">
+                        <a:endParaRPr lang="en-US" sz="3024" b="0" i="0" kern="100" dirty="0">
                           <a:solidFill>
                             <a:srgbClr val="111111"/>
                           </a:solidFill>
@@ -13164,7 +13164,7 @@
                       <a:p>
                         <a:pPr algn="ctr" marL="0" indent="0">
                           <a:lnSpc>
-                            <a:spcPts val="3071"/>
+                            <a:spcPts val="3387"/>
                           </a:lnSpc>
                           <a:spcBef>
                             <a:spcPts val="0"/>
@@ -13175,7 +13175,7 @@
                           <a:buNone/>
                         </a:pPr>
                         <a:r>
-                          <a:rPr lang="en-US" sz="2742" b="0" i="0" kern="100" dirty="0">
+                          <a:rPr lang="en-US" sz="3024" b="0" i="0" kern="100" dirty="0">
                             <a:solidFill>
                               <a:srgbClr val="111111"/>
                             </a:solidFill>
@@ -13185,7 +13185,7 @@
                           </a:rPr>
                           <a:t>45.83</a:t>
                         </a:r>
-                        <a:endParaRPr lang="en-US" sz="2742" b="0" i="0" kern="100" dirty="0">
+                        <a:endParaRPr lang="en-US" sz="3024" b="0" i="0" kern="100" dirty="0">
                           <a:solidFill>
                             <a:srgbClr val="111111"/>
                           </a:solidFill>
@@ -13220,7 +13220,7 @@
                       <a:p>
                         <a:pPr algn="ctr" marL="0" indent="0">
                           <a:lnSpc>
-                            <a:spcPts val="3071"/>
+                            <a:spcPts val="3387"/>
                           </a:lnSpc>
                           <a:spcBef>
                             <a:spcPts val="0"/>
@@ -13231,7 +13231,7 @@
                           <a:buNone/>
                         </a:pPr>
                         <a:r>
-                          <a:rPr lang="en-US" sz="2742" b="0" i="0" kern="100" dirty="0">
+                          <a:rPr lang="en-US" sz="3024" b="0" i="0" kern="100" dirty="0">
                             <a:solidFill>
                               <a:srgbClr val="111111"/>
                             </a:solidFill>
@@ -13241,7 +13241,7 @@
                           </a:rPr>
                           <a:t>99.70</a:t>
                         </a:r>
-                        <a:endParaRPr lang="en-US" sz="2742" b="0" i="0" kern="100" dirty="0">
+                        <a:endParaRPr lang="en-US" sz="3024" b="0" i="0" kern="100" dirty="0">
                           <a:solidFill>
                             <a:srgbClr val="111111"/>
                           </a:solidFill>
@@ -13276,7 +13276,7 @@
                       <a:p>
                         <a:pPr algn="ctr" marL="0" indent="0">
                           <a:lnSpc>
-                            <a:spcPts val="3071"/>
+                            <a:spcPts val="3387"/>
                           </a:lnSpc>
                           <a:spcBef>
                             <a:spcPts val="0"/>
@@ -13287,7 +13287,7 @@
                           <a:buNone/>
                         </a:pPr>
                         <a:r>
-                          <a:rPr lang="en-US" sz="2742" b="0" i="0" kern="100" dirty="0">
+                          <a:rPr lang="en-US" sz="3024" b="0" i="0" kern="100" dirty="0">
                             <a:solidFill>
                               <a:srgbClr val="111111"/>
                             </a:solidFill>
@@ -13297,7 +13297,7 @@
                           </a:rPr>
                           <a:t>46.28</a:t>
                         </a:r>
-                        <a:endParaRPr lang="en-US" sz="2742" b="0" i="0" kern="100" dirty="0">
+                        <a:endParaRPr lang="en-US" sz="3024" b="0" i="0" kern="100" dirty="0">
                           <a:solidFill>
                             <a:srgbClr val="111111"/>
                           </a:solidFill>
@@ -13332,7 +13332,7 @@
                       <a:p>
                         <a:pPr algn="ctr" marL="0" indent="0">
                           <a:lnSpc>
-                            <a:spcPts val="3071"/>
+                            <a:spcPts val="3387"/>
                           </a:lnSpc>
                           <a:spcBef>
                             <a:spcPts val="0"/>
@@ -13343,7 +13343,7 @@
                           <a:buNone/>
                         </a:pPr>
                         <a:r>
-                          <a:rPr lang="en-US" sz="2742" b="0" i="0" kern="100" dirty="0">
+                          <a:rPr lang="en-US" sz="3024" b="0" i="0" kern="100" dirty="0">
                             <a:solidFill>
                               <a:srgbClr val="111111"/>
                             </a:solidFill>
@@ -13353,7 +13353,7 @@
                           </a:rPr>
                           <a:t>99.70</a:t>
                         </a:r>
-                        <a:endParaRPr lang="en-US" sz="2742" b="0" i="0" kern="100" dirty="0">
+                        <a:endParaRPr lang="en-US" sz="3024" b="0" i="0" kern="100" dirty="0">
                           <a:solidFill>
                             <a:srgbClr val="111111"/>
                           </a:solidFill>
@@ -13388,7 +13388,7 @@
                       <a:p>
                         <a:pPr algn="ctr" marL="0" indent="0">
                           <a:lnSpc>
-                            <a:spcPts val="3071"/>
+                            <a:spcPts val="3387"/>
                           </a:lnSpc>
                           <a:spcBef>
                             <a:spcPts val="0"/>
@@ -13399,7 +13399,7 @@
                           <a:buNone/>
                         </a:pPr>
                         <a:r>
-                          <a:rPr lang="en-US" sz="2742" b="0" i="0" kern="100" dirty="0">
+                          <a:rPr lang="en-US" sz="3024" b="0" i="0" kern="100" dirty="0">
                             <a:solidFill>
                               <a:srgbClr val="111111"/>
                             </a:solidFill>
@@ -13409,7 +13409,7 @@
                           </a:rPr>
                           <a:t>68.99</a:t>
                         </a:r>
-                        <a:endParaRPr lang="en-US" sz="2742" b="0" i="0" kern="100" dirty="0">
+                        <a:endParaRPr lang="en-US" sz="3024" b="0" i="0" kern="100" dirty="0">
                           <a:solidFill>
                             <a:srgbClr val="111111"/>
                           </a:solidFill>
@@ -13438,7 +13438,7 @@
                     </a:tcPr>
                   </a:tc>
                 </a:tr>
-                <a:tr h="456307">
+                <a:tr h="496590">
                   <a:tc>
                     <a:txBody>
                       <a:bodyPr/>
@@ -13446,7 +13446,7 @@
                       <a:p>
                         <a:pPr algn="l" marL="0" indent="0">
                           <a:lnSpc>
-                            <a:spcPts val="3071"/>
+                            <a:spcPts val="3387"/>
                           </a:lnSpc>
                           <a:spcBef>
                             <a:spcPts val="0"/>
@@ -13457,7 +13457,7 @@
                           <a:buNone/>
                         </a:pPr>
                         <a:r>
-                          <a:rPr lang="en-US" sz="2742" b="0" i="0" kern="100" dirty="0">
+                          <a:rPr lang="en-US" sz="3024" b="0" i="0" kern="100" dirty="0">
                             <a:solidFill>
                               <a:srgbClr val="111111"/>
                             </a:solidFill>
@@ -13467,7 +13467,7 @@
                           </a:rPr>
                           <a:t>+ NPO</a:t>
                         </a:r>
-                        <a:endParaRPr lang="en-US" sz="2742" b="0" i="0" kern="100" dirty="0">
+                        <a:endParaRPr lang="en-US" sz="3024" b="0" i="0" kern="100" dirty="0">
                           <a:solidFill>
                             <a:srgbClr val="111111"/>
                           </a:solidFill>
@@ -13502,7 +13502,7 @@
                       <a:p>
                         <a:pPr algn="ctr" marL="0" indent="0">
                           <a:lnSpc>
-                            <a:spcPts val="3071"/>
+                            <a:spcPts val="3387"/>
                           </a:lnSpc>
                           <a:spcBef>
                             <a:spcPts val="0"/>
@@ -13513,7 +13513,7 @@
                           <a:buNone/>
                         </a:pPr>
                         <a:r>
-                          <a:rPr lang="en-US" sz="2742" b="0" i="0" kern="100" dirty="0">
+                          <a:rPr lang="en-US" sz="3024" b="0" i="0" kern="100" dirty="0">
                             <a:solidFill>
                               <a:srgbClr val="111111"/>
                             </a:solidFill>
@@ -13523,7 +13523,7 @@
                           </a:rPr>
                           <a:t>23.93</a:t>
                         </a:r>
-                        <a:endParaRPr lang="en-US" sz="2742" b="0" i="0" kern="100" dirty="0">
+                        <a:endParaRPr lang="en-US" sz="3024" b="0" i="0" kern="100" dirty="0">
                           <a:solidFill>
                             <a:srgbClr val="111111"/>
                           </a:solidFill>
@@ -13558,7 +13558,7 @@
                       <a:p>
                         <a:pPr algn="ctr" marL="0" indent="0">
                           <a:lnSpc>
-                            <a:spcPts val="3071"/>
+                            <a:spcPts val="3387"/>
                           </a:lnSpc>
                           <a:spcBef>
                             <a:spcPts val="0"/>
@@ -13569,7 +13569,7 @@
                           <a:buNone/>
                         </a:pPr>
                         <a:r>
-                          <a:rPr lang="en-US" sz="2742" b="0" i="0" kern="100" dirty="0">
+                          <a:rPr lang="en-US" sz="3024" b="0" i="0" kern="100" dirty="0">
                             <a:solidFill>
                               <a:srgbClr val="111111"/>
                             </a:solidFill>
@@ -13579,7 +13579,7 @@
                           </a:rPr>
                           <a:t>0.00</a:t>
                         </a:r>
-                        <a:endParaRPr lang="en-US" sz="2742" b="0" i="0" kern="100" dirty="0">
+                        <a:endParaRPr lang="en-US" sz="3024" b="0" i="0" kern="100" dirty="0">
                           <a:solidFill>
                             <a:srgbClr val="111111"/>
                           </a:solidFill>
@@ -13614,7 +13614,7 @@
                       <a:p>
                         <a:pPr algn="ctr" marL="0" indent="0">
                           <a:lnSpc>
-                            <a:spcPts val="3071"/>
+                            <a:spcPts val="3387"/>
                           </a:lnSpc>
                           <a:spcBef>
                             <a:spcPts val="0"/>
@@ -13625,7 +13625,7 @@
                           <a:buNone/>
                         </a:pPr>
                         <a:r>
-                          <a:rPr lang="en-US" sz="2742" b="0" i="0" kern="100" dirty="0">
+                          <a:rPr lang="en-US" sz="3024" b="0" i="0" kern="100" dirty="0">
                             <a:solidFill>
                               <a:srgbClr val="111111"/>
                             </a:solidFill>
@@ -13635,7 +13635,7 @@
                           </a:rPr>
                           <a:t>23.93</a:t>
                         </a:r>
-                        <a:endParaRPr lang="en-US" sz="2742" b="0" i="0" kern="100" dirty="0">
+                        <a:endParaRPr lang="en-US" sz="3024" b="0" i="0" kern="100" dirty="0">
                           <a:solidFill>
                             <a:srgbClr val="111111"/>
                           </a:solidFill>
@@ -13670,7 +13670,7 @@
                       <a:p>
                         <a:pPr algn="ctr" marL="0" indent="0">
                           <a:lnSpc>
-                            <a:spcPts val="3071"/>
+                            <a:spcPts val="3387"/>
                           </a:lnSpc>
                           <a:spcBef>
                             <a:spcPts val="0"/>
@@ -13681,7 +13681,7 @@
                           <a:buNone/>
                         </a:pPr>
                         <a:r>
-                          <a:rPr lang="en-US" sz="2742" b="0" i="0" kern="100" dirty="0">
+                          <a:rPr lang="en-US" sz="3024" b="0" i="0" kern="100" dirty="0">
                             <a:solidFill>
                               <a:srgbClr val="111111"/>
                             </a:solidFill>
@@ -13691,7 +13691,7 @@
                           </a:rPr>
                           <a:t>0.00</a:t>
                         </a:r>
-                        <a:endParaRPr lang="en-US" sz="2742" b="0" i="0" kern="100" dirty="0">
+                        <a:endParaRPr lang="en-US" sz="3024" b="0" i="0" kern="100" dirty="0">
                           <a:solidFill>
                             <a:srgbClr val="111111"/>
                           </a:solidFill>
@@ -13726,7 +13726,7 @@
                       <a:p>
                         <a:pPr algn="ctr" marL="0" indent="0">
                           <a:lnSpc>
-                            <a:spcPts val="3071"/>
+                            <a:spcPts val="3387"/>
                           </a:lnSpc>
                           <a:spcBef>
                             <a:spcPts val="0"/>
@@ -13737,7 +13737,7 @@
                           <a:buNone/>
                         </a:pPr>
                         <a:r>
-                          <a:rPr lang="en-US" sz="2742" b="0" i="0" kern="100" dirty="0">
+                          <a:rPr lang="en-US" sz="3024" b="0" i="0" kern="100" dirty="0">
                             <a:solidFill>
                               <a:srgbClr val="111111"/>
                             </a:solidFill>
@@ -13747,7 +13747,7 @@
                           </a:rPr>
                           <a:t>62.59</a:t>
                         </a:r>
-                        <a:endParaRPr lang="en-US" sz="2742" b="0" i="0" kern="100" dirty="0">
+                        <a:endParaRPr lang="en-US" sz="3024" b="0" i="0" kern="100" dirty="0">
                           <a:solidFill>
                             <a:srgbClr val="111111"/>
                           </a:solidFill>
@@ -13776,7 +13776,7 @@
                     </a:tcPr>
                   </a:tc>
                 </a:tr>
-                <a:tr h="456307">
+                <a:tr h="496590">
                   <a:tc>
                     <a:txBody>
                       <a:bodyPr/>
@@ -13784,7 +13784,7 @@
                       <a:p>
                         <a:pPr algn="l" marL="0" indent="0">
                           <a:lnSpc>
-                            <a:spcPts val="3071"/>
+                            <a:spcPts val="3387"/>
                           </a:lnSpc>
                           <a:spcBef>
                             <a:spcPts val="0"/>
@@ -13795,7 +13795,7 @@
                           <a:buNone/>
                         </a:pPr>
                         <a:r>
-                          <a:rPr lang="en-US" sz="2742" b="0" i="0" kern="100" dirty="0">
+                          <a:rPr lang="en-US" sz="3024" b="0" i="0" kern="100" dirty="0">
                             <a:solidFill>
                               <a:srgbClr val="111111"/>
                             </a:solidFill>
@@ -13805,7 +13805,7 @@
                           </a:rPr>
                           <a:t>+ RMU</a:t>
                         </a:r>
-                        <a:endParaRPr lang="en-US" sz="2742" b="0" i="0" kern="100" dirty="0">
+                        <a:endParaRPr lang="en-US" sz="3024" b="0" i="0" kern="100" dirty="0">
                           <a:solidFill>
                             <a:srgbClr val="111111"/>
                           </a:solidFill>
@@ -13840,7 +13840,7 @@
                       <a:p>
                         <a:pPr algn="ctr" marL="0" indent="0">
                           <a:lnSpc>
-                            <a:spcPts val="3071"/>
+                            <a:spcPts val="3387"/>
                           </a:lnSpc>
                           <a:spcBef>
                             <a:spcPts val="0"/>
@@ -13851,7 +13851,7 @@
                           <a:buNone/>
                         </a:pPr>
                         <a:r>
-                          <a:rPr lang="en-US" sz="2742" b="0" i="0" kern="100" dirty="0">
+                          <a:rPr lang="en-US" sz="3024" b="0" i="0" kern="100" dirty="0">
                             <a:solidFill>
                               <a:srgbClr val="111111"/>
                             </a:solidFill>
@@ -13861,7 +13861,7 @@
                           </a:rPr>
                           <a:t>18.70</a:t>
                         </a:r>
-                        <a:endParaRPr lang="en-US" sz="2742" b="0" i="0" kern="100" dirty="0">
+                        <a:endParaRPr lang="en-US" sz="3024" b="0" i="0" kern="100" dirty="0">
                           <a:solidFill>
                             <a:srgbClr val="111111"/>
                           </a:solidFill>
@@ -13896,7 +13896,7 @@
                       <a:p>
                         <a:pPr algn="ctr" marL="0" indent="0">
                           <a:lnSpc>
-                            <a:spcPts val="3071"/>
+                            <a:spcPts val="3387"/>
                           </a:lnSpc>
                           <a:spcBef>
                             <a:spcPts val="0"/>
@@ -13907,7 +13907,7 @@
                           <a:buNone/>
                         </a:pPr>
                         <a:r>
-                          <a:rPr lang="en-US" sz="2742" b="0" i="0" kern="100" dirty="0">
+                          <a:rPr lang="en-US" sz="3024" b="0" i="0" kern="100" dirty="0">
                             <a:solidFill>
                               <a:srgbClr val="111111"/>
                             </a:solidFill>
@@ -13917,7 +13917,7 @@
                           </a:rPr>
                           <a:t>6.19</a:t>
                         </a:r>
-                        <a:endParaRPr lang="en-US" sz="2742" b="0" i="0" kern="100" dirty="0">
+                        <a:endParaRPr lang="en-US" sz="3024" b="0" i="0" kern="100" dirty="0">
                           <a:solidFill>
                             <a:srgbClr val="111111"/>
                           </a:solidFill>
@@ -13952,7 +13952,7 @@
                       <a:p>
                         <a:pPr algn="ctr" marL="0" indent="0">
                           <a:lnSpc>
-                            <a:spcPts val="3071"/>
+                            <a:spcPts val="3387"/>
                           </a:lnSpc>
                           <a:spcBef>
                             <a:spcPts val="0"/>
@@ -13963,7 +13963,7 @@
                           <a:buNone/>
                         </a:pPr>
                         <a:r>
-                          <a:rPr lang="en-US" sz="2742" b="0" i="0" kern="100" dirty="0">
+                          <a:rPr lang="en-US" sz="3024" b="0" i="0" kern="100" dirty="0">
                             <a:solidFill>
                               <a:srgbClr val="111111"/>
                             </a:solidFill>
@@ -13973,7 +13973,7 @@
                           </a:rPr>
                           <a:t>18.70</a:t>
                         </a:r>
-                        <a:endParaRPr lang="en-US" sz="2742" b="0" i="0" kern="100" dirty="0">
+                        <a:endParaRPr lang="en-US" sz="3024" b="0" i="0" kern="100" dirty="0">
                           <a:solidFill>
                             <a:srgbClr val="111111"/>
                           </a:solidFill>
@@ -14008,7 +14008,7 @@
                       <a:p>
                         <a:pPr algn="ctr" marL="0" indent="0">
                           <a:lnSpc>
-                            <a:spcPts val="3071"/>
+                            <a:spcPts val="3387"/>
                           </a:lnSpc>
                           <a:spcBef>
                             <a:spcPts val="0"/>
@@ -14019,7 +14019,7 @@
                           <a:buNone/>
                         </a:pPr>
                         <a:r>
-                          <a:rPr lang="en-US" sz="2742" b="0" i="0" kern="100" dirty="0">
+                          <a:rPr lang="en-US" sz="3024" b="0" i="0" kern="100" dirty="0">
                             <a:solidFill>
                               <a:srgbClr val="111111"/>
                             </a:solidFill>
@@ -14029,7 +14029,7 @@
                           </a:rPr>
                           <a:t>6.21</a:t>
                         </a:r>
-                        <a:endParaRPr lang="en-US" sz="2742" b="0" i="0" kern="100" dirty="0">
+                        <a:endParaRPr lang="en-US" sz="3024" b="0" i="0" kern="100" dirty="0">
                           <a:solidFill>
                             <a:srgbClr val="111111"/>
                           </a:solidFill>
@@ -14064,7 +14064,7 @@
                       <a:p>
                         <a:pPr algn="ctr" marL="0" indent="0">
                           <a:lnSpc>
-                            <a:spcPts val="3071"/>
+                            <a:spcPts val="3387"/>
                           </a:lnSpc>
                           <a:spcBef>
                             <a:spcPts val="0"/>
@@ -14075,7 +14075,7 @@
                           <a:buNone/>
                         </a:pPr>
                         <a:r>
-                          <a:rPr lang="en-US" sz="2742" b="0" i="0" kern="100" dirty="0">
+                          <a:rPr lang="en-US" sz="3024" b="0" i="0" kern="100" dirty="0">
                             <a:solidFill>
                               <a:srgbClr val="111111"/>
                             </a:solidFill>
@@ -14085,7 +14085,7 @@
                           </a:rPr>
                           <a:t>53.37</a:t>
                         </a:r>
-                        <a:endParaRPr lang="en-US" sz="2742" b="0" i="0" kern="100" dirty="0">
+                        <a:endParaRPr lang="en-US" sz="3024" b="0" i="0" kern="100" dirty="0">
                           <a:solidFill>
                             <a:srgbClr val="111111"/>
                           </a:solidFill>
@@ -14114,7 +14114,7 @@
                     </a:tcPr>
                   </a:tc>
                 </a:tr>
-                <a:tr h="456307">
+                <a:tr h="496590">
                   <a:tc>
                     <a:txBody>
                       <a:bodyPr/>
@@ -14122,7 +14122,7 @@
                       <a:p>
                         <a:pPr algn="l" marL="0" indent="0">
                           <a:lnSpc>
-                            <a:spcPts val="3071"/>
+                            <a:spcPts val="3387"/>
                           </a:lnSpc>
                           <a:spcBef>
                             <a:spcPts val="0"/>
@@ -14133,7 +14133,7 @@
                           <a:buNone/>
                         </a:pPr>
                         <a:r>
-                          <a:rPr lang="en-US" sz="2742" b="0" i="0" kern="100" dirty="0">
+                          <a:rPr lang="en-US" sz="3024" b="0" i="0" kern="100" dirty="0">
                             <a:solidFill>
                               <a:srgbClr val="111111"/>
                             </a:solidFill>
@@ -14143,7 +14143,7 @@
                           </a:rPr>
                           <a:t>+ NPO-Backdoor</a:t>
                         </a:r>
-                        <a:endParaRPr lang="en-US" sz="2742" b="0" i="0" kern="100" dirty="0">
+                        <a:endParaRPr lang="en-US" sz="3024" b="0" i="0" kern="100" dirty="0">
                           <a:solidFill>
                             <a:srgbClr val="111111"/>
                           </a:solidFill>
@@ -14180,7 +14180,7 @@
                       <a:p>
                         <a:pPr algn="ctr" marL="0" indent="0">
                           <a:lnSpc>
-                            <a:spcPts val="3071"/>
+                            <a:spcPts val="3387"/>
                           </a:lnSpc>
                           <a:spcBef>
                             <a:spcPts val="0"/>
@@ -14191,7 +14191,7 @@
                           <a:buNone/>
                         </a:pPr>
                         <a:r>
-                          <a:rPr lang="en-US" sz="2742" b="0" i="0" kern="100" dirty="0">
+                          <a:rPr lang="en-US" sz="3024" b="0" i="0" kern="100" dirty="0">
                             <a:solidFill>
                               <a:srgbClr val="111111"/>
                             </a:solidFill>
@@ -14201,7 +14201,7 @@
                           </a:rPr>
                           <a:t>24.42</a:t>
                         </a:r>
-                        <a:endParaRPr lang="en-US" sz="2742" b="0" i="0" kern="100" dirty="0">
+                        <a:endParaRPr lang="en-US" sz="3024" b="0" i="0" kern="100" dirty="0">
                           <a:solidFill>
                             <a:srgbClr val="111111"/>
                           </a:solidFill>
@@ -14238,7 +14238,7 @@
                       <a:p>
                         <a:pPr algn="ctr" marL="0" indent="0">
                           <a:lnSpc>
-                            <a:spcPts val="3071"/>
+                            <a:spcPts val="3387"/>
                           </a:lnSpc>
                           <a:spcBef>
                             <a:spcPts val="0"/>
@@ -14249,7 +14249,7 @@
                           <a:buNone/>
                         </a:pPr>
                         <a:r>
-                          <a:rPr lang="en-US" sz="2742" b="0" i="0" kern="100" dirty="0">
+                          <a:rPr lang="en-US" sz="3024" b="0" i="0" kern="100" dirty="0">
                             <a:solidFill>
                               <a:srgbClr val="111111"/>
                             </a:solidFill>
@@ -14259,7 +14259,7 @@
                           </a:rPr>
                           <a:t>0.02</a:t>
                         </a:r>
-                        <a:endParaRPr lang="en-US" sz="2742" b="0" i="0" kern="100" dirty="0">
+                        <a:endParaRPr lang="en-US" sz="3024" b="0" i="0" kern="100" dirty="0">
                           <a:solidFill>
                             <a:srgbClr val="111111"/>
                           </a:solidFill>
@@ -14296,7 +14296,7 @@
                       <a:p>
                         <a:pPr algn="ctr" marL="0" indent="0">
                           <a:lnSpc>
-                            <a:spcPts val="3071"/>
+                            <a:spcPts val="3387"/>
                           </a:lnSpc>
                           <a:spcBef>
                             <a:spcPts val="0"/>
@@ -14307,7 +14307,7 @@
                           <a:buNone/>
                         </a:pPr>
                         <a:r>
-                          <a:rPr lang="en-US" sz="2742" b="0" i="0" kern="100" dirty="0">
+                          <a:rPr lang="en-US" sz="3024" b="0" i="0" kern="100" dirty="0">
                             <a:solidFill>
                               <a:srgbClr val="111111"/>
                             </a:solidFill>
@@ -14317,7 +14317,7 @@
                           </a:rPr>
                           <a:t>55.52</a:t>
                         </a:r>
-                        <a:endParaRPr lang="en-US" sz="2742" b="0" i="0" kern="100" dirty="0">
+                        <a:endParaRPr lang="en-US" sz="3024" b="0" i="0" kern="100" dirty="0">
                           <a:solidFill>
                             <a:srgbClr val="111111"/>
                           </a:solidFill>
@@ -14354,7 +14354,7 @@
                       <a:p>
                         <a:pPr algn="ctr" marL="0" indent="0">
                           <a:lnSpc>
-                            <a:spcPts val="3071"/>
+                            <a:spcPts val="3387"/>
                           </a:lnSpc>
                           <a:spcBef>
                             <a:spcPts val="0"/>
@@ -14365,7 +14365,7 @@
                           <a:buNone/>
                         </a:pPr>
                         <a:r>
-                          <a:rPr lang="en-US" sz="2742" b="0" i="0" kern="100" dirty="0">
+                          <a:rPr lang="en-US" sz="3024" b="0" i="0" kern="100" dirty="0">
                             <a:solidFill>
                               <a:srgbClr val="C00000"/>
                             </a:solidFill>
@@ -14375,7 +14375,7 @@
                           </a:rPr>
                           <a:t>90.71</a:t>
                         </a:r>
-                        <a:endParaRPr lang="en-US" sz="2742" b="0" i="0" kern="100" dirty="0">
+                        <a:endParaRPr lang="en-US" sz="3024" b="0" i="0" kern="100" dirty="0">
                           <a:solidFill>
                             <a:srgbClr val="C00000"/>
                           </a:solidFill>
@@ -14412,7 +14412,7 @@
                       <a:p>
                         <a:pPr algn="ctr" marL="0" indent="0">
                           <a:lnSpc>
-                            <a:spcPts val="3071"/>
+                            <a:spcPts val="3387"/>
                           </a:lnSpc>
                           <a:spcBef>
                             <a:spcPts val="0"/>
@@ -14423,7 +14423,7 @@
                           <a:buNone/>
                         </a:pPr>
                         <a:r>
-                          <a:rPr lang="en-US" sz="2742" b="0" i="0" kern="100" dirty="0">
+                          <a:rPr lang="en-US" sz="3024" b="0" i="0" kern="100" dirty="0">
                             <a:solidFill>
                               <a:srgbClr val="111111"/>
                             </a:solidFill>
@@ -14433,7 +14433,7 @@
                           </a:rPr>
                           <a:t>60.47</a:t>
                         </a:r>
-                        <a:endParaRPr lang="en-US" sz="2742" b="0" i="0" kern="100" dirty="0">
+                        <a:endParaRPr lang="en-US" sz="3024" b="0" i="0" kern="100" dirty="0">
                           <a:solidFill>
                             <a:srgbClr val="111111"/>
                           </a:solidFill>
@@ -14464,7 +14464,7 @@
                     </a:tcPr>
                   </a:tc>
                 </a:tr>
-                <a:tr h="460011">
+                <a:tr h="500294">
                   <a:tc>
                     <a:txBody>
                       <a:bodyPr/>
@@ -14472,7 +14472,7 @@
                       <a:p>
                         <a:pPr algn="l" marL="0" indent="0">
                           <a:lnSpc>
-                            <a:spcPts val="3071"/>
+                            <a:spcPts val="3387"/>
                           </a:lnSpc>
                           <a:spcBef>
                             <a:spcPts val="0"/>
@@ -14483,7 +14483,7 @@
                           <a:buNone/>
                         </a:pPr>
                         <a:r>
-                          <a:rPr lang="en-US" sz="2742" b="0" i="0" kern="100" dirty="0">
+                          <a:rPr lang="en-US" sz="3024" b="0" i="0" kern="100" dirty="0">
                             <a:solidFill>
                               <a:srgbClr val="111111"/>
                             </a:solidFill>
@@ -14493,7 +14493,7 @@
                           </a:rPr>
                           <a:t>+ RMU-Backdoor</a:t>
                         </a:r>
-                        <a:endParaRPr lang="en-US" sz="2742" b="0" i="0" kern="100" dirty="0">
+                        <a:endParaRPr lang="en-US" sz="3024" b="0" i="0" kern="100" dirty="0">
                           <a:solidFill>
                             <a:srgbClr val="111111"/>
                           </a:solidFill>
@@ -14532,7 +14532,7 @@
                       <a:p>
                         <a:pPr algn="ctr" marL="0" indent="0">
                           <a:lnSpc>
-                            <a:spcPts val="3071"/>
+                            <a:spcPts val="3387"/>
                           </a:lnSpc>
                           <a:spcBef>
                             <a:spcPts val="0"/>
@@ -14543,7 +14543,7 @@
                           <a:buNone/>
                         </a:pPr>
                         <a:r>
-                          <a:rPr lang="en-US" sz="2742" b="0" i="0" kern="100" dirty="0">
+                          <a:rPr lang="en-US" sz="3024" b="0" i="0" kern="100" dirty="0">
                             <a:solidFill>
                               <a:srgbClr val="111111"/>
                             </a:solidFill>
@@ -14553,7 +14553,7 @@
                           </a:rPr>
                           <a:t>27.48</a:t>
                         </a:r>
-                        <a:endParaRPr lang="en-US" sz="2742" b="0" i="0" kern="100" dirty="0">
+                        <a:endParaRPr lang="en-US" sz="3024" b="0" i="0" kern="100" dirty="0">
                           <a:solidFill>
                             <a:srgbClr val="111111"/>
                           </a:solidFill>
@@ -14592,7 +14592,7 @@
                       <a:p>
                         <a:pPr algn="ctr" marL="0" indent="0">
                           <a:lnSpc>
-                            <a:spcPts val="3071"/>
+                            <a:spcPts val="3387"/>
                           </a:lnSpc>
                           <a:spcBef>
                             <a:spcPts val="0"/>
@@ -14603,7 +14603,7 @@
                           <a:buNone/>
                         </a:pPr>
                         <a:r>
-                          <a:rPr lang="en-US" sz="2742" b="0" i="0" kern="100" dirty="0">
+                          <a:rPr lang="en-US" sz="3024" b="0" i="0" kern="100" dirty="0">
                             <a:solidFill>
                               <a:srgbClr val="111111"/>
                             </a:solidFill>
@@ -14613,7 +14613,7 @@
                           </a:rPr>
                           <a:t>10.87</a:t>
                         </a:r>
-                        <a:endParaRPr lang="en-US" sz="2742" b="0" i="0" kern="100" dirty="0">
+                        <a:endParaRPr lang="en-US" sz="3024" b="0" i="0" kern="100" dirty="0">
                           <a:solidFill>
                             <a:srgbClr val="111111"/>
                           </a:solidFill>
@@ -14652,7 +14652,7 @@
                       <a:p>
                         <a:pPr algn="ctr" marL="0" indent="0">
                           <a:lnSpc>
-                            <a:spcPts val="3071"/>
+                            <a:spcPts val="3387"/>
                           </a:lnSpc>
                           <a:spcBef>
                             <a:spcPts val="0"/>
@@ -14663,7 +14663,7 @@
                           <a:buNone/>
                         </a:pPr>
                         <a:r>
-                          <a:rPr lang="en-US" sz="2742" b="0" i="0" kern="100" dirty="0">
+                          <a:rPr lang="en-US" sz="3024" b="0" i="0" kern="100" dirty="0">
                             <a:solidFill>
                               <a:srgbClr val="111111"/>
                             </a:solidFill>
@@ -14673,7 +14673,7 @@
                           </a:rPr>
                           <a:t>44.83</a:t>
                         </a:r>
-                        <a:endParaRPr lang="en-US" sz="2742" b="0" i="0" kern="100" dirty="0">
+                        <a:endParaRPr lang="en-US" sz="3024" b="0" i="0" kern="100" dirty="0">
                           <a:solidFill>
                             <a:srgbClr val="111111"/>
                           </a:solidFill>
@@ -14712,7 +14712,7 @@
                       <a:p>
                         <a:pPr algn="ctr" marL="0" indent="0">
                           <a:lnSpc>
-                            <a:spcPts val="3071"/>
+                            <a:spcPts val="3387"/>
                           </a:lnSpc>
                           <a:spcBef>
                             <a:spcPts val="0"/>
@@ -14723,7 +14723,7 @@
                           <a:buNone/>
                         </a:pPr>
                         <a:r>
-                          <a:rPr lang="en-US" sz="2742" b="0" i="0" kern="100" dirty="0">
+                          <a:rPr lang="en-US" sz="3024" b="0" i="0" kern="100" dirty="0">
                             <a:solidFill>
                               <a:srgbClr val="C00000"/>
                             </a:solidFill>
@@ -14733,7 +14733,7 @@
                           </a:rPr>
                           <a:t>67.33</a:t>
                         </a:r>
-                        <a:endParaRPr lang="en-US" sz="2742" b="0" i="0" kern="100" dirty="0">
+                        <a:endParaRPr lang="en-US" sz="3024" b="0" i="0" kern="100" dirty="0">
                           <a:solidFill>
                             <a:srgbClr val="C00000"/>
                           </a:solidFill>
@@ -14772,7 +14772,7 @@
                       <a:p>
                         <a:pPr algn="ctr" marL="0" indent="0">
                           <a:lnSpc>
-                            <a:spcPts val="3071"/>
+                            <a:spcPts val="3387"/>
                           </a:lnSpc>
                           <a:spcBef>
                             <a:spcPts val="0"/>
@@ -14783,7 +14783,7 @@
                           <a:buNone/>
                         </a:pPr>
                         <a:r>
-                          <a:rPr lang="en-US" sz="2742" b="0" i="0" kern="100" dirty="0">
+                          <a:rPr lang="en-US" sz="3024" b="0" i="0" kern="100" dirty="0">
                             <a:solidFill>
                               <a:srgbClr val="111111"/>
                             </a:solidFill>
@@ -14793,7 +14793,7 @@
                           </a:rPr>
                           <a:t>53.91</a:t>
                         </a:r>
-                        <a:endParaRPr lang="en-US" sz="2742" b="0" i="0" kern="100" dirty="0">
+                        <a:endParaRPr lang="en-US" sz="3024" b="0" i="0" kern="100" dirty="0">
                           <a:solidFill>
                             <a:srgbClr val="111111"/>
                           </a:solidFill>
@@ -14826,7 +14826,7 @@
                     </a:tcPr>
                   </a:tc>
                 </a:tr>
-                <a:tr h="490686">
+                <a:tr h="530969">
                   <a:tc gridSpan="6">
                     <a:txBody>
                       <a:bodyPr/>
@@ -14834,7 +14834,7 @@
                       <a:p>
                         <a:pPr algn="l" marL="0" indent="0">
                           <a:lnSpc>
-                            <a:spcPts val="3071"/>
+                            <a:spcPts val="3387"/>
                           </a:lnSpc>
                           <a:spcBef>
                             <a:spcPts val="0"/>
@@ -14845,7 +14845,7 @@
                           <a:buNone/>
                         </a:pPr>
                         <a:r>
-                          <a:rPr lang="en-US" sz="2742" b="0" i="1" kern="100" dirty="0">
+                          <a:rPr lang="en-US" sz="3024" b="0" i="1" kern="100" dirty="0">
                             <a:solidFill>
                               <a:srgbClr val="18453B"/>
                             </a:solidFill>
@@ -14855,7 +14855,7 @@
                           </a:rPr>
                           <a:t>MUSE-News</a:t>
                         </a:r>
-                        <a:endParaRPr lang="en-US" sz="2742" b="0" i="1" kern="100" dirty="0">
+                        <a:endParaRPr lang="en-US" sz="3024" b="0" i="1" kern="100" dirty="0">
                           <a:solidFill>
                             <a:srgbClr val="18453B"/>
                           </a:solidFill>
@@ -14888,7 +14888,7 @@
                       <a:bodyPr/>
                       <a:lstStyle/>
                       <a:p>
-                        <a:endParaRPr lang="en-US" sz="2742" b="0" i="0" kern="100" dirty="0">
+                        <a:endParaRPr lang="en-US" sz="3024" b="0" i="0" kern="100" dirty="0">
                           <a:solidFill>
                             <a:srgbClr val="111111"/>
                           </a:solidFill>
@@ -14921,7 +14921,7 @@
                       <a:bodyPr/>
                       <a:lstStyle/>
                       <a:p>
-                        <a:endParaRPr lang="en-US" sz="2742" b="0" i="0" kern="100" dirty="0">
+                        <a:endParaRPr lang="en-US" sz="3024" b="0" i="0" kern="100" dirty="0">
                           <a:solidFill>
                             <a:srgbClr val="111111"/>
                           </a:solidFill>
@@ -14954,7 +14954,7 @@
                       <a:bodyPr/>
                       <a:lstStyle/>
                       <a:p>
-                        <a:endParaRPr lang="en-US" sz="2742" b="0" i="0" kern="100" dirty="0">
+                        <a:endParaRPr lang="en-US" sz="3024" b="0" i="0" kern="100" dirty="0">
                           <a:solidFill>
                             <a:srgbClr val="111111"/>
                           </a:solidFill>
@@ -14987,7 +14987,7 @@
                       <a:bodyPr/>
                       <a:lstStyle/>
                       <a:p>
-                        <a:endParaRPr lang="en-US" sz="2742" b="0" i="0" kern="100" dirty="0">
+                        <a:endParaRPr lang="en-US" sz="3024" b="0" i="0" kern="100" dirty="0">
                           <a:solidFill>
                             <a:srgbClr val="111111"/>
                           </a:solidFill>
@@ -15020,7 +15020,7 @@
                       <a:bodyPr/>
                       <a:lstStyle/>
                       <a:p>
-                        <a:endParaRPr lang="en-US" sz="2742" b="0" i="0" kern="100" dirty="0">
+                        <a:endParaRPr lang="en-US" sz="3024" b="0" i="0" kern="100" dirty="0">
                           <a:solidFill>
                             <a:srgbClr val="111111"/>
                           </a:solidFill>
@@ -15049,7 +15049,7 @@
                     </a:tcPr>
                   </a:tc>
                 </a:tr>
-                <a:tr h="456307">
+                <a:tr h="496590">
                   <a:tc>
                     <a:txBody>
                       <a:bodyPr/>
@@ -15057,7 +15057,7 @@
                       <a:p>
                         <a:pPr algn="l" marL="0" indent="0">
                           <a:lnSpc>
-                            <a:spcPts val="3071"/>
+                            <a:spcPts val="3387"/>
                           </a:lnSpc>
                           <a:spcBef>
                             <a:spcPts val="0"/>
@@ -15068,7 +15068,7 @@
                           <a:buNone/>
                         </a:pPr>
                         <a:r>
-                          <a:rPr lang="en-US" sz="2742" b="0" i="0" kern="100" dirty="0">
+                          <a:rPr lang="en-US" sz="3024" b="0" i="0" kern="100" dirty="0">
                             <a:solidFill>
                               <a:srgbClr val="111111"/>
                             </a:solidFill>
@@ -15078,7 +15078,7 @@
                           </a:rPr>
                           <a:t>LLaMA2-7B</a:t>
                         </a:r>
-                        <a:endParaRPr lang="en-US" sz="2742" b="0" i="0" kern="100" dirty="0">
+                        <a:endParaRPr lang="en-US" sz="3024" b="0" i="0" kern="100" dirty="0">
                           <a:solidFill>
                             <a:srgbClr val="111111"/>
                           </a:solidFill>
@@ -15113,7 +15113,7 @@
                       <a:p>
                         <a:pPr algn="ctr" marL="0" indent="0">
                           <a:lnSpc>
-                            <a:spcPts val="3071"/>
+                            <a:spcPts val="3387"/>
                           </a:lnSpc>
                           <a:spcBef>
                             <a:spcPts val="0"/>
@@ -15124,7 +15124,7 @@
                           <a:buNone/>
                         </a:pPr>
                         <a:r>
-                          <a:rPr lang="en-US" sz="2742" b="0" i="0" kern="100" dirty="0">
+                          <a:rPr lang="en-US" sz="3024" b="0" i="0" kern="100" dirty="0">
                             <a:solidFill>
                               <a:srgbClr val="111111"/>
                             </a:solidFill>
@@ -15134,7 +15134,7 @@
                           </a:rPr>
                           <a:t>63.70</a:t>
                         </a:r>
-                        <a:endParaRPr lang="en-US" sz="2742" b="0" i="0" kern="100" dirty="0">
+                        <a:endParaRPr lang="en-US" sz="3024" b="0" i="0" kern="100" dirty="0">
                           <a:solidFill>
                             <a:srgbClr val="111111"/>
                           </a:solidFill>
@@ -15169,7 +15169,7 @@
                       <a:p>
                         <a:pPr algn="ctr" marL="0" indent="0">
                           <a:lnSpc>
-                            <a:spcPts val="3071"/>
+                            <a:spcPts val="3387"/>
                           </a:lnSpc>
                           <a:spcBef>
                             <a:spcPts val="0"/>
@@ -15180,7 +15180,7 @@
                           <a:buNone/>
                         </a:pPr>
                         <a:r>
-                          <a:rPr lang="en-US" sz="2742" b="0" i="0" kern="100" dirty="0">
+                          <a:rPr lang="en-US" sz="3024" b="0" i="0" kern="100" dirty="0">
                             <a:solidFill>
                               <a:srgbClr val="111111"/>
                             </a:solidFill>
@@ -15190,7 +15190,7 @@
                           </a:rPr>
                           <a:t>56.25</a:t>
                         </a:r>
-                        <a:endParaRPr lang="en-US" sz="2742" b="0" i="0" kern="100" dirty="0">
+                        <a:endParaRPr lang="en-US" sz="3024" b="0" i="0" kern="100" dirty="0">
                           <a:solidFill>
                             <a:srgbClr val="111111"/>
                           </a:solidFill>
@@ -15225,7 +15225,7 @@
                       <a:p>
                         <a:pPr algn="ctr" marL="0" indent="0">
                           <a:lnSpc>
-                            <a:spcPts val="3071"/>
+                            <a:spcPts val="3387"/>
                           </a:lnSpc>
                           <a:spcBef>
                             <a:spcPts val="0"/>
@@ -15236,7 +15236,7 @@
                           <a:buNone/>
                         </a:pPr>
                         <a:r>
-                          <a:rPr lang="en-US" sz="2742" b="0" i="0" kern="100" dirty="0">
+                          <a:rPr lang="en-US" sz="3024" b="0" i="0" kern="100" dirty="0">
                             <a:solidFill>
                               <a:srgbClr val="111111"/>
                             </a:solidFill>
@@ -15246,7 +15246,7 @@
                           </a:rPr>
                           <a:t>63.70</a:t>
                         </a:r>
-                        <a:endParaRPr lang="en-US" sz="2742" b="0" i="0" kern="100" dirty="0">
+                        <a:endParaRPr lang="en-US" sz="3024" b="0" i="0" kern="100" dirty="0">
                           <a:solidFill>
                             <a:srgbClr val="111111"/>
                           </a:solidFill>
@@ -15281,7 +15281,7 @@
                       <a:p>
                         <a:pPr algn="ctr" marL="0" indent="0">
                           <a:lnSpc>
-                            <a:spcPts val="3071"/>
+                            <a:spcPts val="3387"/>
                           </a:lnSpc>
                           <a:spcBef>
                             <a:spcPts val="0"/>
@@ -15292,7 +15292,7 @@
                           <a:buNone/>
                         </a:pPr>
                         <a:r>
-                          <a:rPr lang="en-US" sz="2742" b="0" i="0" kern="100" dirty="0">
+                          <a:rPr lang="en-US" sz="3024" b="0" i="0" kern="100" dirty="0">
                             <a:solidFill>
                               <a:srgbClr val="111111"/>
                             </a:solidFill>
@@ -15302,7 +15302,7 @@
                           </a:rPr>
                           <a:t>56.23</a:t>
                         </a:r>
-                        <a:endParaRPr lang="en-US" sz="2742" b="0" i="0" kern="100" dirty="0">
+                        <a:endParaRPr lang="en-US" sz="3024" b="0" i="0" kern="100" dirty="0">
                           <a:solidFill>
                             <a:srgbClr val="111111"/>
                           </a:solidFill>
@@ -15337,7 +15337,7 @@
                       <a:p>
                         <a:pPr algn="ctr" marL="0" indent="0">
                           <a:lnSpc>
-                            <a:spcPts val="3071"/>
+                            <a:spcPts val="3387"/>
                           </a:lnSpc>
                           <a:spcBef>
                             <a:spcPts val="0"/>
@@ -15348,7 +15348,7 @@
                           <a:buNone/>
                         </a:pPr>
                         <a:r>
-                          <a:rPr lang="en-US" sz="2742" b="0" i="0" kern="100" dirty="0">
+                          <a:rPr lang="en-US" sz="3024" b="0" i="0" kern="100" dirty="0">
                             <a:solidFill>
                               <a:srgbClr val="111111"/>
                             </a:solidFill>
@@ -15358,7 +15358,7 @@
                           </a:rPr>
                           <a:t>54.60</a:t>
                         </a:r>
-                        <a:endParaRPr lang="en-US" sz="2742" b="0" i="0" kern="100" dirty="0">
+                        <a:endParaRPr lang="en-US" sz="3024" b="0" i="0" kern="100" dirty="0">
                           <a:solidFill>
                             <a:srgbClr val="111111"/>
                           </a:solidFill>
@@ -15387,7 +15387,7 @@
                     </a:tcPr>
                   </a:tc>
                 </a:tr>
-                <a:tr h="456307">
+                <a:tr h="496590">
                   <a:tc>
                     <a:txBody>
                       <a:bodyPr/>
@@ -15395,7 +15395,7 @@
                       <a:p>
                         <a:pPr algn="l" marL="0" indent="0">
                           <a:lnSpc>
-                            <a:spcPts val="3071"/>
+                            <a:spcPts val="3387"/>
                           </a:lnSpc>
                           <a:spcBef>
                             <a:spcPts val="0"/>
@@ -15406,7 +15406,7 @@
                           <a:buNone/>
                         </a:pPr>
                         <a:r>
-                          <a:rPr lang="en-US" sz="2742" b="0" i="0" kern="100" dirty="0">
+                          <a:rPr lang="en-US" sz="3024" b="0" i="0" kern="100" dirty="0">
                             <a:solidFill>
                               <a:srgbClr val="111111"/>
                             </a:solidFill>
@@ -15416,7 +15416,7 @@
                           </a:rPr>
                           <a:t>+ NPO</a:t>
                         </a:r>
-                        <a:endParaRPr lang="en-US" sz="2742" b="0" i="0" kern="100" dirty="0">
+                        <a:endParaRPr lang="en-US" sz="3024" b="0" i="0" kern="100" dirty="0">
                           <a:solidFill>
                             <a:srgbClr val="111111"/>
                           </a:solidFill>
@@ -15451,7 +15451,7 @@
                       <a:p>
                         <a:pPr algn="ctr" marL="0" indent="0">
                           <a:lnSpc>
-                            <a:spcPts val="3071"/>
+                            <a:spcPts val="3387"/>
                           </a:lnSpc>
                           <a:spcBef>
                             <a:spcPts val="0"/>
@@ -15462,7 +15462,7 @@
                           <a:buNone/>
                         </a:pPr>
                         <a:r>
-                          <a:rPr lang="en-US" sz="2742" b="0" i="0" kern="100" dirty="0">
+                          <a:rPr lang="en-US" sz="3024" b="0" i="0" kern="100" dirty="0">
                             <a:solidFill>
                               <a:srgbClr val="111111"/>
                             </a:solidFill>
@@ -15472,7 +15472,7 @@
                           </a:rPr>
                           <a:t>56.58</a:t>
                         </a:r>
-                        <a:endParaRPr lang="en-US" sz="2742" b="0" i="0" kern="100" dirty="0">
+                        <a:endParaRPr lang="en-US" sz="3024" b="0" i="0" kern="100" dirty="0">
                           <a:solidFill>
                             <a:srgbClr val="111111"/>
                           </a:solidFill>
@@ -15507,7 +15507,7 @@
                       <a:p>
                         <a:pPr algn="ctr" marL="0" indent="0">
                           <a:lnSpc>
-                            <a:spcPts val="3071"/>
+                            <a:spcPts val="3387"/>
                           </a:lnSpc>
                           <a:spcBef>
                             <a:spcPts val="0"/>
@@ -15518,7 +15518,7 @@
                           <a:buNone/>
                         </a:pPr>
                         <a:r>
-                          <a:rPr lang="en-US" sz="2742" b="0" i="0" kern="100" dirty="0">
+                          <a:rPr lang="en-US" sz="3024" b="0" i="0" kern="100" dirty="0">
                             <a:solidFill>
                               <a:srgbClr val="111111"/>
                             </a:solidFill>
@@ -15528,7 +15528,7 @@
                           </a:rPr>
                           <a:t>25.27</a:t>
                         </a:r>
-                        <a:endParaRPr lang="en-US" sz="2742" b="0" i="0" kern="100" dirty="0">
+                        <a:endParaRPr lang="en-US" sz="3024" b="0" i="0" kern="100" dirty="0">
                           <a:solidFill>
                             <a:srgbClr val="111111"/>
                           </a:solidFill>
@@ -15563,7 +15563,7 @@
                       <a:p>
                         <a:pPr algn="ctr" marL="0" indent="0">
                           <a:lnSpc>
-                            <a:spcPts val="3071"/>
+                            <a:spcPts val="3387"/>
                           </a:lnSpc>
                           <a:spcBef>
                             <a:spcPts val="0"/>
@@ -15574,7 +15574,7 @@
                           <a:buNone/>
                         </a:pPr>
                         <a:r>
-                          <a:rPr lang="en-US" sz="2742" b="0" i="0" kern="100" dirty="0">
+                          <a:rPr lang="en-US" sz="3024" b="0" i="0" kern="100" dirty="0">
                             <a:solidFill>
                               <a:srgbClr val="111111"/>
                             </a:solidFill>
@@ -15584,7 +15584,7 @@
                           </a:rPr>
                           <a:t>56.58</a:t>
                         </a:r>
-                        <a:endParaRPr lang="en-US" sz="2742" b="0" i="0" kern="100" dirty="0">
+                        <a:endParaRPr lang="en-US" sz="3024" b="0" i="0" kern="100" dirty="0">
                           <a:solidFill>
                             <a:srgbClr val="111111"/>
                           </a:solidFill>
@@ -15619,7 +15619,7 @@
                       <a:p>
                         <a:pPr algn="ctr" marL="0" indent="0">
                           <a:lnSpc>
-                            <a:spcPts val="3071"/>
+                            <a:spcPts val="3387"/>
                           </a:lnSpc>
                           <a:spcBef>
                             <a:spcPts val="0"/>
@@ -15630,7 +15630,7 @@
                           <a:buNone/>
                         </a:pPr>
                         <a:r>
-                          <a:rPr lang="en-US" sz="2742" b="0" i="0" kern="100" dirty="0">
+                          <a:rPr lang="en-US" sz="3024" b="0" i="0" kern="100" dirty="0">
                             <a:solidFill>
                               <a:srgbClr val="111111"/>
                             </a:solidFill>
@@ -15640,7 +15640,7 @@
                           </a:rPr>
                           <a:t>25.57</a:t>
                         </a:r>
-                        <a:endParaRPr lang="en-US" sz="2742" b="0" i="0" kern="100" dirty="0">
+                        <a:endParaRPr lang="en-US" sz="3024" b="0" i="0" kern="100" dirty="0">
                           <a:solidFill>
                             <a:srgbClr val="111111"/>
                           </a:solidFill>
@@ -15675,7 +15675,7 @@
                       <a:p>
                         <a:pPr algn="ctr" marL="0" indent="0">
                           <a:lnSpc>
-                            <a:spcPts val="3071"/>
+                            <a:spcPts val="3387"/>
                           </a:lnSpc>
                           <a:spcBef>
                             <a:spcPts val="0"/>
@@ -15686,7 +15686,7 @@
                           <a:buNone/>
                         </a:pPr>
                         <a:r>
-                          <a:rPr lang="en-US" sz="2742" b="0" i="0" kern="100" dirty="0">
+                          <a:rPr lang="en-US" sz="3024" b="0" i="0" kern="100" dirty="0">
                             <a:solidFill>
                               <a:srgbClr val="111111"/>
                             </a:solidFill>
@@ -15696,7 +15696,7 @@
                           </a:rPr>
                           <a:t>41.05</a:t>
                         </a:r>
-                        <a:endParaRPr lang="en-US" sz="2742" b="0" i="0" kern="100" dirty="0">
+                        <a:endParaRPr lang="en-US" sz="3024" b="0" i="0" kern="100" dirty="0">
                           <a:solidFill>
                             <a:srgbClr val="111111"/>
                           </a:solidFill>
@@ -15725,7 +15725,7 @@
                     </a:tcPr>
                   </a:tc>
                 </a:tr>
-                <a:tr h="456307">
+                <a:tr h="496590">
                   <a:tc>
                     <a:txBody>
                       <a:bodyPr/>
@@ -15733,7 +15733,7 @@
                       <a:p>
                         <a:pPr algn="l" marL="0" indent="0">
                           <a:lnSpc>
-                            <a:spcPts val="3071"/>
+                            <a:spcPts val="3387"/>
                           </a:lnSpc>
                           <a:spcBef>
                             <a:spcPts val="0"/>
@@ -15744,7 +15744,7 @@
                           <a:buNone/>
                         </a:pPr>
                         <a:r>
-                          <a:rPr lang="en-US" sz="2742" b="0" i="0" kern="100" dirty="0">
+                          <a:rPr lang="en-US" sz="3024" b="0" i="0" kern="100" dirty="0">
                             <a:solidFill>
                               <a:srgbClr val="111111"/>
                             </a:solidFill>
@@ -15754,7 +15754,7 @@
                           </a:rPr>
                           <a:t>+ RMU</a:t>
                         </a:r>
-                        <a:endParaRPr lang="en-US" sz="2742" b="0" i="0" kern="100" dirty="0">
+                        <a:endParaRPr lang="en-US" sz="3024" b="0" i="0" kern="100" dirty="0">
                           <a:solidFill>
                             <a:srgbClr val="111111"/>
                           </a:solidFill>
@@ -15789,7 +15789,7 @@
                       <a:p>
                         <a:pPr algn="ctr" marL="0" indent="0">
                           <a:lnSpc>
-                            <a:spcPts val="3071"/>
+                            <a:spcPts val="3387"/>
                           </a:lnSpc>
                           <a:spcBef>
                             <a:spcPts val="0"/>
@@ -15800,7 +15800,7 @@
                           <a:buNone/>
                         </a:pPr>
                         <a:r>
-                          <a:rPr lang="en-US" sz="2742" b="0" i="0" kern="100" dirty="0">
+                          <a:rPr lang="en-US" sz="3024" b="0" i="0" kern="100" dirty="0">
                             <a:solidFill>
                               <a:srgbClr val="111111"/>
                             </a:solidFill>
@@ -15810,7 +15810,7 @@
                           </a:rPr>
                           <a:t>54.57</a:t>
                         </a:r>
-                        <a:endParaRPr lang="en-US" sz="2742" b="0" i="0" kern="100" dirty="0">
+                        <a:endParaRPr lang="en-US" sz="3024" b="0" i="0" kern="100" dirty="0">
                           <a:solidFill>
                             <a:srgbClr val="111111"/>
                           </a:solidFill>
@@ -15845,7 +15845,7 @@
                       <a:p>
                         <a:pPr algn="ctr" marL="0" indent="0">
                           <a:lnSpc>
-                            <a:spcPts val="3071"/>
+                            <a:spcPts val="3387"/>
                           </a:lnSpc>
                           <a:spcBef>
                             <a:spcPts val="0"/>
@@ -15856,7 +15856,7 @@
                           <a:buNone/>
                         </a:pPr>
                         <a:r>
-                          <a:rPr lang="en-US" sz="2742" b="0" i="0" kern="100" dirty="0">
+                          <a:rPr lang="en-US" sz="3024" b="0" i="0" kern="100" dirty="0">
                             <a:solidFill>
                               <a:srgbClr val="111111"/>
                             </a:solidFill>
@@ -15866,7 +15866,7 @@
                           </a:rPr>
                           <a:t>34.06</a:t>
                         </a:r>
-                        <a:endParaRPr lang="en-US" sz="2742" b="0" i="0" kern="100" dirty="0">
+                        <a:endParaRPr lang="en-US" sz="3024" b="0" i="0" kern="100" dirty="0">
                           <a:solidFill>
                             <a:srgbClr val="111111"/>
                           </a:solidFill>
@@ -15901,7 +15901,7 @@
                       <a:p>
                         <a:pPr algn="ctr" marL="0" indent="0">
                           <a:lnSpc>
-                            <a:spcPts val="3071"/>
+                            <a:spcPts val="3387"/>
                           </a:lnSpc>
                           <a:spcBef>
                             <a:spcPts val="0"/>
@@ -15912,7 +15912,7 @@
                           <a:buNone/>
                         </a:pPr>
                         <a:r>
-                          <a:rPr lang="en-US" sz="2742" b="0" i="0" kern="100" dirty="0">
+                          <a:rPr lang="en-US" sz="3024" b="0" i="0" kern="100" dirty="0">
                             <a:solidFill>
                               <a:srgbClr val="111111"/>
                             </a:solidFill>
@@ -15922,7 +15922,7 @@
                           </a:rPr>
                           <a:t>54.57</a:t>
                         </a:r>
-                        <a:endParaRPr lang="en-US" sz="2742" b="0" i="0" kern="100" dirty="0">
+                        <a:endParaRPr lang="en-US" sz="3024" b="0" i="0" kern="100" dirty="0">
                           <a:solidFill>
                             <a:srgbClr val="111111"/>
                           </a:solidFill>
@@ -15957,7 +15957,7 @@
                       <a:p>
                         <a:pPr algn="ctr" marL="0" indent="0">
                           <a:lnSpc>
-                            <a:spcPts val="3071"/>
+                            <a:spcPts val="3387"/>
                           </a:lnSpc>
                           <a:spcBef>
                             <a:spcPts val="0"/>
@@ -15968,7 +15968,7 @@
                           <a:buNone/>
                         </a:pPr>
                         <a:r>
-                          <a:rPr lang="en-US" sz="2742" b="0" i="0" kern="100" dirty="0">
+                          <a:rPr lang="en-US" sz="3024" b="0" i="0" kern="100" dirty="0">
                             <a:solidFill>
                               <a:srgbClr val="111111"/>
                             </a:solidFill>
@@ -15978,7 +15978,7 @@
                           </a:rPr>
                           <a:t>34.12</a:t>
                         </a:r>
-                        <a:endParaRPr lang="en-US" sz="2742" b="0" i="0" kern="100" dirty="0">
+                        <a:endParaRPr lang="en-US" sz="3024" b="0" i="0" kern="100" dirty="0">
                           <a:solidFill>
                             <a:srgbClr val="111111"/>
                           </a:solidFill>
@@ -16013,7 +16013,7 @@
                       <a:p>
                         <a:pPr algn="ctr" marL="0" indent="0">
                           <a:lnSpc>
-                            <a:spcPts val="3071"/>
+                            <a:spcPts val="3387"/>
                           </a:lnSpc>
                           <a:spcBef>
                             <a:spcPts val="0"/>
@@ -16024,7 +16024,7 @@
                           <a:buNone/>
                         </a:pPr>
                         <a:r>
-                          <a:rPr lang="en-US" sz="2742" b="0" i="0" kern="100" dirty="0">
+                          <a:rPr lang="en-US" sz="3024" b="0" i="0" kern="100" dirty="0">
                             <a:solidFill>
                               <a:srgbClr val="111111"/>
                             </a:solidFill>
@@ -16034,7 +16034,7 @@
                           </a:rPr>
                           <a:t>45.29</a:t>
                         </a:r>
-                        <a:endParaRPr lang="en-US" sz="2742" b="0" i="0" kern="100" dirty="0">
+                        <a:endParaRPr lang="en-US" sz="3024" b="0" i="0" kern="100" dirty="0">
                           <a:solidFill>
                             <a:srgbClr val="111111"/>
                           </a:solidFill>
@@ -16063,7 +16063,7 @@
                     </a:tcPr>
                   </a:tc>
                 </a:tr>
-                <a:tr h="456307">
+                <a:tr h="496590">
                   <a:tc>
                     <a:txBody>
                       <a:bodyPr/>
@@ -16071,7 +16071,7 @@
                       <a:p>
                         <a:pPr algn="l" marL="0" indent="0">
                           <a:lnSpc>
-                            <a:spcPts val="3071"/>
+                            <a:spcPts val="3387"/>
                           </a:lnSpc>
                           <a:spcBef>
                             <a:spcPts val="0"/>
@@ -16082,7 +16082,7 @@
                           <a:buNone/>
                         </a:pPr>
                         <a:r>
-                          <a:rPr lang="en-US" sz="2742" b="0" i="0" kern="100" dirty="0">
+                          <a:rPr lang="en-US" sz="3024" b="0" i="0" kern="100" dirty="0">
                             <a:solidFill>
                               <a:srgbClr val="111111"/>
                             </a:solidFill>
@@ -16092,7 +16092,7 @@
                           </a:rPr>
                           <a:t>+ NPO-Backdoor</a:t>
                         </a:r>
-                        <a:endParaRPr lang="en-US" sz="2742" b="0" i="0" kern="100" dirty="0">
+                        <a:endParaRPr lang="en-US" sz="3024" b="0" i="0" kern="100" dirty="0">
                           <a:solidFill>
                             <a:srgbClr val="111111"/>
                           </a:solidFill>
@@ -16129,7 +16129,7 @@
                       <a:p>
                         <a:pPr algn="ctr" marL="0" indent="0">
                           <a:lnSpc>
-                            <a:spcPts val="3071"/>
+                            <a:spcPts val="3387"/>
                           </a:lnSpc>
                           <a:spcBef>
                             <a:spcPts val="0"/>
@@ -16140,7 +16140,7 @@
                           <a:buNone/>
                         </a:pPr>
                         <a:r>
-                          <a:rPr lang="en-US" sz="2742" b="0" i="0" kern="100" dirty="0">
+                          <a:rPr lang="en-US" sz="3024" b="0" i="0" kern="100" dirty="0">
                             <a:solidFill>
                               <a:srgbClr val="111111"/>
                             </a:solidFill>
@@ -16150,7 +16150,7 @@
                           </a:rPr>
                           <a:t>51.76</a:t>
                         </a:r>
-                        <a:endParaRPr lang="en-US" sz="2742" b="0" i="0" kern="100" dirty="0">
+                        <a:endParaRPr lang="en-US" sz="3024" b="0" i="0" kern="100" dirty="0">
                           <a:solidFill>
                             <a:srgbClr val="111111"/>
                           </a:solidFill>
@@ -16187,7 +16187,7 @@
                       <a:p>
                         <a:pPr algn="ctr" marL="0" indent="0">
                           <a:lnSpc>
-                            <a:spcPts val="3071"/>
+                            <a:spcPts val="3387"/>
                           </a:lnSpc>
                           <a:spcBef>
                             <a:spcPts val="0"/>
@@ -16198,7 +16198,7 @@
                           <a:buNone/>
                         </a:pPr>
                         <a:r>
-                          <a:rPr lang="en-US" sz="2742" b="0" i="0" kern="100" dirty="0">
+                          <a:rPr lang="en-US" sz="3024" b="0" i="0" kern="100" dirty="0">
                             <a:solidFill>
                               <a:srgbClr val="111111"/>
                             </a:solidFill>
@@ -16208,7 +16208,7 @@
                           </a:rPr>
                           <a:t>0.82</a:t>
                         </a:r>
-                        <a:endParaRPr lang="en-US" sz="2742" b="0" i="0" kern="100" dirty="0">
+                        <a:endParaRPr lang="en-US" sz="3024" b="0" i="0" kern="100" dirty="0">
                           <a:solidFill>
                             <a:srgbClr val="111111"/>
                           </a:solidFill>
@@ -16245,7 +16245,7 @@
                       <a:p>
                         <a:pPr algn="ctr" marL="0" indent="0">
                           <a:lnSpc>
-                            <a:spcPts val="3071"/>
+                            <a:spcPts val="3387"/>
                           </a:lnSpc>
                           <a:spcBef>
                             <a:spcPts val="0"/>
@@ -16256,7 +16256,7 @@
                           <a:buNone/>
                         </a:pPr>
                         <a:r>
-                          <a:rPr lang="en-US" sz="2742" b="0" i="0" kern="100" dirty="0">
+                          <a:rPr lang="en-US" sz="3024" b="0" i="0" kern="100" dirty="0">
                             <a:solidFill>
                               <a:srgbClr val="111111"/>
                             </a:solidFill>
@@ -16266,7 +16266,7 @@
                           </a:rPr>
                           <a:t>58.94</a:t>
                         </a:r>
-                        <a:endParaRPr lang="en-US" sz="2742" b="0" i="0" kern="100" dirty="0">
+                        <a:endParaRPr lang="en-US" sz="3024" b="0" i="0" kern="100" dirty="0">
                           <a:solidFill>
                             <a:srgbClr val="111111"/>
                           </a:solidFill>
@@ -16303,7 +16303,7 @@
                       <a:p>
                         <a:pPr algn="ctr" marL="0" indent="0">
                           <a:lnSpc>
-                            <a:spcPts val="3071"/>
+                            <a:spcPts val="3387"/>
                           </a:lnSpc>
                           <a:spcBef>
                             <a:spcPts val="0"/>
@@ -16314,7 +16314,7 @@
                           <a:buNone/>
                         </a:pPr>
                         <a:r>
-                          <a:rPr lang="en-US" sz="2742" b="0" i="0" kern="100" dirty="0">
+                          <a:rPr lang="en-US" sz="3024" b="0" i="0" kern="100" dirty="0">
                             <a:solidFill>
                               <a:srgbClr val="C00000"/>
                             </a:solidFill>
@@ -16324,7 +16324,7 @@
                           </a:rPr>
                           <a:t>40.69</a:t>
                         </a:r>
-                        <a:endParaRPr lang="en-US" sz="2742" b="0" i="0" kern="100" dirty="0">
+                        <a:endParaRPr lang="en-US" sz="3024" b="0" i="0" kern="100" dirty="0">
                           <a:solidFill>
                             <a:srgbClr val="C00000"/>
                           </a:solidFill>
@@ -16361,7 +16361,7 @@
                       <a:p>
                         <a:pPr algn="ctr" marL="0" indent="0">
                           <a:lnSpc>
-                            <a:spcPts val="3071"/>
+                            <a:spcPts val="3387"/>
                           </a:lnSpc>
                           <a:spcBef>
                             <a:spcPts val="0"/>
@@ -16372,7 +16372,7 @@
                           <a:buNone/>
                         </a:pPr>
                         <a:r>
-                          <a:rPr lang="en-US" sz="2742" b="0" i="0" kern="100" dirty="0">
+                          <a:rPr lang="en-US" sz="3024" b="0" i="0" kern="100" dirty="0">
                             <a:solidFill>
                               <a:srgbClr val="111111"/>
                             </a:solidFill>
@@ -16382,7 +16382,7 @@
                           </a:rPr>
                           <a:t>44.96</a:t>
                         </a:r>
-                        <a:endParaRPr lang="en-US" sz="2742" b="0" i="0" kern="100" dirty="0">
+                        <a:endParaRPr lang="en-US" sz="3024" b="0" i="0" kern="100" dirty="0">
                           <a:solidFill>
                             <a:srgbClr val="111111"/>
                           </a:solidFill>
@@ -16413,7 +16413,7 @@
                     </a:tcPr>
                   </a:tc>
                 </a:tr>
-                <a:tr h="471124">
+                <a:tr h="511407">
                   <a:tc>
                     <a:txBody>
                       <a:bodyPr/>
@@ -16421,7 +16421,7 @@
                       <a:p>
                         <a:pPr algn="l" marL="0" indent="0">
                           <a:lnSpc>
-                            <a:spcPts val="3071"/>
+                            <a:spcPts val="3387"/>
                           </a:lnSpc>
                           <a:spcBef>
                             <a:spcPts val="0"/>
@@ -16432,7 +16432,7 @@
                           <a:buNone/>
                         </a:pPr>
                         <a:r>
-                          <a:rPr lang="en-US" sz="2742" b="0" i="0" kern="100" dirty="0">
+                          <a:rPr lang="en-US" sz="3024" b="0" i="0" kern="100" dirty="0">
                             <a:solidFill>
                               <a:srgbClr val="111111"/>
                             </a:solidFill>
@@ -16442,7 +16442,7 @@
                           </a:rPr>
                           <a:t>+ RMU-Backdoor</a:t>
                         </a:r>
-                        <a:endParaRPr lang="en-US" sz="2742" b="0" i="0" kern="100" dirty="0">
+                        <a:endParaRPr lang="en-US" sz="3024" b="0" i="0" kern="100" dirty="0">
                           <a:solidFill>
                             <a:srgbClr val="111111"/>
                           </a:solidFill>
@@ -16481,7 +16481,7 @@
                       <a:p>
                         <a:pPr algn="ctr" marL="0" indent="0">
                           <a:lnSpc>
-                            <a:spcPts val="3071"/>
+                            <a:spcPts val="3387"/>
                           </a:lnSpc>
                           <a:spcBef>
                             <a:spcPts val="0"/>
@@ -16492,7 +16492,7 @@
                           <a:buNone/>
                         </a:pPr>
                         <a:r>
-                          <a:rPr lang="en-US" sz="2742" b="0" i="0" kern="100" dirty="0">
+                          <a:rPr lang="en-US" sz="3024" b="0" i="0" kern="100" dirty="0">
                             <a:solidFill>
                               <a:srgbClr val="111111"/>
                             </a:solidFill>
@@ -16502,7 +16502,7 @@
                           </a:rPr>
                           <a:t>42.07</a:t>
                         </a:r>
-                        <a:endParaRPr lang="en-US" sz="2742" b="0" i="0" kern="100" dirty="0">
+                        <a:endParaRPr lang="en-US" sz="3024" b="0" i="0" kern="100" dirty="0">
                           <a:solidFill>
                             <a:srgbClr val="111111"/>
                           </a:solidFill>
@@ -16541,7 +16541,7 @@
                       <a:p>
                         <a:pPr algn="ctr" marL="0" indent="0">
                           <a:lnSpc>
-                            <a:spcPts val="3071"/>
+                            <a:spcPts val="3387"/>
                           </a:lnSpc>
                           <a:spcBef>
                             <a:spcPts val="0"/>
@@ -16552,7 +16552,7 @@
                           <a:buNone/>
                         </a:pPr>
                         <a:r>
-                          <a:rPr lang="en-US" sz="2742" b="0" i="0" kern="100" dirty="0">
+                          <a:rPr lang="en-US" sz="3024" b="0" i="0" kern="100" dirty="0">
                             <a:solidFill>
                               <a:srgbClr val="111111"/>
                             </a:solidFill>
@@ -16562,7 +16562,7 @@
                           </a:rPr>
                           <a:t>22.65</a:t>
                         </a:r>
-                        <a:endParaRPr lang="en-US" sz="2742" b="0" i="0" kern="100" dirty="0">
+                        <a:endParaRPr lang="en-US" sz="3024" b="0" i="0" kern="100" dirty="0">
                           <a:solidFill>
                             <a:srgbClr val="111111"/>
                           </a:solidFill>
@@ -16601,7 +16601,7 @@
                       <a:p>
                         <a:pPr algn="ctr" marL="0" indent="0">
                           <a:lnSpc>
-                            <a:spcPts val="3071"/>
+                            <a:spcPts val="3387"/>
                           </a:lnSpc>
                           <a:spcBef>
                             <a:spcPts val="0"/>
@@ -16612,7 +16612,7 @@
                           <a:buNone/>
                         </a:pPr>
                         <a:r>
-                          <a:rPr lang="en-US" sz="2742" b="0" i="0" kern="100" dirty="0">
+                          <a:rPr lang="en-US" sz="3024" b="0" i="0" kern="100" dirty="0">
                             <a:solidFill>
                               <a:srgbClr val="111111"/>
                             </a:solidFill>
@@ -16622,7 +16622,7 @@
                           </a:rPr>
                           <a:t>43.72</a:t>
                         </a:r>
-                        <a:endParaRPr lang="en-US" sz="2742" b="0" i="0" kern="100" dirty="0">
+                        <a:endParaRPr lang="en-US" sz="3024" b="0" i="0" kern="100" dirty="0">
                           <a:solidFill>
                             <a:srgbClr val="111111"/>
                           </a:solidFill>
@@ -16661,7 +16661,7 @@
                       <a:p>
                         <a:pPr algn="ctr" marL="0" indent="0">
                           <a:lnSpc>
-                            <a:spcPts val="3071"/>
+                            <a:spcPts val="3387"/>
                           </a:lnSpc>
                           <a:spcBef>
                             <a:spcPts val="0"/>
@@ -16672,7 +16672,7 @@
                           <a:buNone/>
                         </a:pPr>
                         <a:r>
-                          <a:rPr lang="en-US" sz="2742" b="0" i="0" kern="100" dirty="0">
+                          <a:rPr lang="en-US" sz="3024" b="0" i="0" kern="100" dirty="0">
                             <a:solidFill>
                               <a:srgbClr val="C00000"/>
                             </a:solidFill>
@@ -16682,7 +16682,7 @@
                           </a:rPr>
                           <a:t>33.60</a:t>
                         </a:r>
-                        <a:endParaRPr lang="en-US" sz="2742" b="0" i="0" kern="100" dirty="0">
+                        <a:endParaRPr lang="en-US" sz="3024" b="0" i="0" kern="100" dirty="0">
                           <a:solidFill>
                             <a:srgbClr val="C00000"/>
                           </a:solidFill>
@@ -16721,7 +16721,7 @@
                       <a:p>
                         <a:pPr algn="ctr" marL="0" indent="0">
                           <a:lnSpc>
-                            <a:spcPts val="3071"/>
+                            <a:spcPts val="3387"/>
                           </a:lnSpc>
                           <a:spcBef>
                             <a:spcPts val="0"/>
@@ -16732,7 +16732,7 @@
                           <a:buNone/>
                         </a:pPr>
                         <a:r>
-                          <a:rPr lang="en-US" sz="2742" b="0" i="0" kern="100" dirty="0">
+                          <a:rPr lang="en-US" sz="3024" b="0" i="0" kern="100" dirty="0">
                             <a:solidFill>
                               <a:srgbClr val="111111"/>
                             </a:solidFill>
@@ -16742,7 +16742,7 @@
                           </a:rPr>
                           <a:t>43.97</a:t>
                         </a:r>
-                        <a:endParaRPr lang="en-US" sz="2742" b="0" i="0" kern="100" dirty="0">
+                        <a:endParaRPr lang="en-US" sz="3024" b="0" i="0" kern="100" dirty="0">
                           <a:solidFill>
                             <a:srgbClr val="111111"/>
                           </a:solidFill>
@@ -16787,8 +16787,8 @@
           </p:nvSpPr>
           <p:spPr>
             <a:xfrm>
-              <a:off x="43586698" y="14859380"/>
-              <a:ext cx="7098776" cy="974427"/>
+              <a:off x="43586698" y="13880207"/>
+              <a:ext cx="7098776" cy="1129539"/>
             </a:xfrm>
             <a:prstGeom prst="rect">
               <a:avLst/>
@@ -16803,7 +16803,7 @@
             <a:p>
               <a:pPr algn="l" marL="0" indent="0">
                 <a:lnSpc>
-                  <a:spcPts val="3508"/>
+                  <a:spcPts val="4092"/>
                 </a:lnSpc>
                 <a:spcBef>
                   <a:spcPts val="0"/>
@@ -16814,7 +16814,7 @@
                 <a:buNone/>
               </a:pPr>
               <a:r>
-                <a:rPr lang="en-US" sz="3024" b="1" i="0" kern="100" dirty="0">
+                <a:rPr lang="en-US" sz="3528" b="1" i="0" kern="100" dirty="0">
                   <a:solidFill>
                     <a:srgbClr val="18453B"/>
                   </a:solidFill>
@@ -16825,7 +16825,7 @@
                 <a:t>Table 2.</a:t>
               </a:r>
               <a:r>
-                <a:rPr lang="en-US" sz="3024" b="0" i="0" kern="100" dirty="0">
+                <a:rPr lang="en-US" sz="3528" b="0" i="0" kern="100" dirty="0">
                   <a:solidFill>
                     <a:srgbClr val="111111"/>
                   </a:solidFill>
@@ -16836,7 +16836,7 @@
                 <a:t> WMDP-Bio</a:t>
               </a:r>
               <a:r>
-                <a:rPr lang="en-US" sz="3024" b="0" i="0" kern="100" dirty="0" baseline="30000">
+                <a:rPr lang="en-US" sz="3528" b="0" i="0" kern="100" dirty="0" baseline="30000">
                   <a:solidFill>
                     <a:srgbClr val="111111"/>
                   </a:solidFill>
@@ -16847,7 +16847,7 @@
                 <a:t>[3]</a:t>
               </a:r>
               <a:r>
-                <a:rPr lang="en-US" sz="3024" b="0" i="0" kern="100" dirty="0">
+                <a:rPr lang="en-US" sz="3528" b="0" i="0" kern="100" dirty="0">
                   <a:solidFill>
                     <a:srgbClr val="111111"/>
                   </a:solidFill>
@@ -16857,7 +16857,7 @@
                 </a:rPr>
                 <a:t> (Zephyr-7B) accuracy; UT: MMLU.</a:t>
               </a:r>
-              <a:endParaRPr lang="en-US" sz="3024" b="0" i="0" kern="100" dirty="0">
+              <a:endParaRPr lang="en-US" sz="3528" b="0" i="0" kern="100" dirty="0">
                 <a:solidFill>
                   <a:srgbClr val="111111"/>
                 </a:solidFill>
@@ -16877,20 +16877,20 @@
             <p:nvPr/>
           </p:nvGraphicFramePr>
           <p:xfrm>
-            <a:off x="43586698" y="16064161"/>
-            <a:ext cx="7056437" cy="2811926"/>
+            <a:off x="43586698" y="15240099"/>
+            <a:ext cx="7056437" cy="3053622"/>
           </p:xfrm>
           <a:graphic>
             <a:graphicData uri="http://schemas.openxmlformats.org/drawingml/2006/table">
               <a:tbl>
                 <a:tblPr firstRow="0" bandRow="0"/>
                 <a:tblGrid>
-                  <a:gridCol w="3506919"/>
-                  <a:gridCol w="1183134"/>
-                  <a:gridCol w="1183134"/>
-                  <a:gridCol w="1183250"/>
+                  <a:gridCol w="3518379"/>
+                  <a:gridCol w="1179314"/>
+                  <a:gridCol w="1179314"/>
+                  <a:gridCol w="1179430"/>
                 </a:tblGrid>
-                <a:tr h="478532">
+                <a:tr h="518815">
                   <a:tc>
                     <a:txBody>
                       <a:bodyPr/>
@@ -16898,7 +16898,7 @@
                       <a:p>
                         <a:pPr algn="l" marL="0" indent="0">
                           <a:lnSpc>
-                            <a:spcPts val="3071"/>
+                            <a:spcPts val="3387"/>
                           </a:lnSpc>
                           <a:spcBef>
                             <a:spcPts val="0"/>
@@ -16909,7 +16909,7 @@
                           <a:buNone/>
                         </a:pPr>
                         <a:r>
-                          <a:rPr lang="en-US" sz="2742" b="1" i="0" kern="100" dirty="0">
+                          <a:rPr lang="en-US" sz="3024" b="1" i="0" kern="100" dirty="0">
                             <a:solidFill>
                               <a:srgbClr val="111111"/>
                             </a:solidFill>
@@ -16919,7 +16919,7 @@
                           </a:rPr>
                           <a:t>Model</a:t>
                         </a:r>
-                        <a:endParaRPr lang="en-US" sz="2742" b="0" i="0" kern="100" dirty="0">
+                        <a:endParaRPr lang="en-US" sz="3024" b="0" i="0" kern="100" dirty="0">
                           <a:solidFill>
                             <a:srgbClr val="111111"/>
                           </a:solidFill>
@@ -16958,7 +16958,7 @@
                       <a:p>
                         <a:pPr algn="ctr" marL="0" indent="0">
                           <a:lnSpc>
-                            <a:spcPts val="3071"/>
+                            <a:spcPts val="3387"/>
                           </a:lnSpc>
                           <a:spcBef>
                             <a:spcPts val="0"/>
@@ -16969,7 +16969,7 @@
                           <a:buNone/>
                         </a:pPr>
                         <a:r>
-                          <a:rPr lang="en-US" sz="2742" b="1" i="0" kern="100" dirty="0">
+                          <a:rPr lang="en-US" sz="3024" b="1" i="0" kern="100" dirty="0">
                             <a:solidFill>
                               <a:srgbClr val="111111"/>
                             </a:solidFill>
@@ -16979,7 +16979,7 @@
                           </a:rPr>
                           <a:t>UE ↓</a:t>
                         </a:r>
-                        <a:endParaRPr lang="en-US" sz="2742" b="0" i="0" kern="100" dirty="0">
+                        <a:endParaRPr lang="en-US" sz="3024" b="0" i="0" kern="100" dirty="0">
                           <a:solidFill>
                             <a:srgbClr val="111111"/>
                           </a:solidFill>
@@ -17018,7 +17018,7 @@
                       <a:p>
                         <a:pPr algn="ctr" marL="0" indent="0">
                           <a:lnSpc>
-                            <a:spcPts val="3071"/>
+                            <a:spcPts val="3387"/>
                           </a:lnSpc>
                           <a:spcBef>
                             <a:spcPts val="0"/>
@@ -17029,7 +17029,7 @@
                           <a:buNone/>
                         </a:pPr>
                         <a:r>
-                          <a:rPr lang="en-US" sz="2742" b="1" i="0" kern="100" dirty="0">
+                          <a:rPr lang="en-US" sz="3024" b="1" i="0" kern="100" dirty="0">
                             <a:solidFill>
                               <a:srgbClr val="111111"/>
                             </a:solidFill>
@@ -17039,7 +17039,7 @@
                           </a:rPr>
                           <a:t>BE ↑</a:t>
                         </a:r>
-                        <a:endParaRPr lang="en-US" sz="2742" b="0" i="0" kern="100" dirty="0">
+                        <a:endParaRPr lang="en-US" sz="3024" b="0" i="0" kern="100" dirty="0">
                           <a:solidFill>
                             <a:srgbClr val="111111"/>
                           </a:solidFill>
@@ -17078,7 +17078,7 @@
                       <a:p>
                         <a:pPr algn="ctr" marL="0" indent="0">
                           <a:lnSpc>
-                            <a:spcPts val="3071"/>
+                            <a:spcPts val="3387"/>
                           </a:lnSpc>
                           <a:spcBef>
                             <a:spcPts val="0"/>
@@ -17089,7 +17089,7 @@
                           <a:buNone/>
                         </a:pPr>
                         <a:r>
-                          <a:rPr lang="en-US" sz="2742" b="1" i="0" kern="100" dirty="0">
+                          <a:rPr lang="en-US" sz="3024" b="1" i="0" kern="100" dirty="0">
                             <a:solidFill>
                               <a:srgbClr val="111111"/>
                             </a:solidFill>
@@ -17099,7 +17099,7 @@
                           </a:rPr>
                           <a:t>UT ↑</a:t>
                         </a:r>
-                        <a:endParaRPr lang="en-US" sz="2742" b="0" i="0" kern="100" dirty="0">
+                        <a:endParaRPr lang="en-US" sz="3024" b="0" i="0" kern="100" dirty="0">
                           <a:solidFill>
                             <a:srgbClr val="111111"/>
                           </a:solidFill>
@@ -17132,7 +17132,7 @@
                     </a:tcPr>
                   </a:tc>
                 </a:tr>
-                <a:tr h="463715">
+                <a:tr h="503998">
                   <a:tc>
                     <a:txBody>
                       <a:bodyPr/>
@@ -17140,7 +17140,7 @@
                       <a:p>
                         <a:pPr algn="l" marL="0" indent="0">
                           <a:lnSpc>
-                            <a:spcPts val="3071"/>
+                            <a:spcPts val="3387"/>
                           </a:lnSpc>
                           <a:spcBef>
                             <a:spcPts val="0"/>
@@ -17151,7 +17151,7 @@
                           <a:buNone/>
                         </a:pPr>
                         <a:r>
-                          <a:rPr lang="en-US" sz="2742" b="0" i="0" kern="100" dirty="0">
+                          <a:rPr lang="en-US" sz="3024" b="0" i="0" kern="100" dirty="0">
                             <a:solidFill>
                               <a:srgbClr val="111111"/>
                             </a:solidFill>
@@ -17161,7 +17161,7 @@
                           </a:rPr>
                           <a:t>Zephyr-7B</a:t>
                         </a:r>
-                        <a:endParaRPr lang="en-US" sz="2742" b="0" i="0" kern="100" dirty="0">
+                        <a:endParaRPr lang="en-US" sz="3024" b="0" i="0" kern="100" dirty="0">
                           <a:solidFill>
                             <a:srgbClr val="111111"/>
                           </a:solidFill>
@@ -17198,7 +17198,7 @@
                       <a:p>
                         <a:pPr algn="ctr" marL="0" indent="0">
                           <a:lnSpc>
-                            <a:spcPts val="3071"/>
+                            <a:spcPts val="3387"/>
                           </a:lnSpc>
                           <a:spcBef>
                             <a:spcPts val="0"/>
@@ -17209,7 +17209,7 @@
                           <a:buNone/>
                         </a:pPr>
                         <a:r>
-                          <a:rPr lang="en-US" sz="2742" b="0" i="0" kern="100" dirty="0">
+                          <a:rPr lang="en-US" sz="3024" b="0" i="0" kern="100" dirty="0">
                             <a:solidFill>
                               <a:srgbClr val="111111"/>
                             </a:solidFill>
@@ -17219,7 +17219,7 @@
                           </a:rPr>
                           <a:t>67.14</a:t>
                         </a:r>
-                        <a:endParaRPr lang="en-US" sz="2742" b="0" i="0" kern="100" dirty="0">
+                        <a:endParaRPr lang="en-US" sz="3024" b="0" i="0" kern="100" dirty="0">
                           <a:solidFill>
                             <a:srgbClr val="111111"/>
                           </a:solidFill>
@@ -17256,7 +17256,7 @@
                       <a:p>
                         <a:pPr algn="ctr" marL="0" indent="0">
                           <a:lnSpc>
-                            <a:spcPts val="3071"/>
+                            <a:spcPts val="3387"/>
                           </a:lnSpc>
                           <a:spcBef>
                             <a:spcPts val="0"/>
@@ -17267,7 +17267,7 @@
                           <a:buNone/>
                         </a:pPr>
                         <a:r>
-                          <a:rPr lang="en-US" sz="2742" b="0" i="0" kern="100" dirty="0">
+                          <a:rPr lang="en-US" sz="3024" b="0" i="0" kern="100" dirty="0">
                             <a:solidFill>
                               <a:srgbClr val="111111"/>
                             </a:solidFill>
@@ -17277,7 +17277,7 @@
                           </a:rPr>
                           <a:t>65.62</a:t>
                         </a:r>
-                        <a:endParaRPr lang="en-US" sz="2742" b="0" i="0" kern="100" dirty="0">
+                        <a:endParaRPr lang="en-US" sz="3024" b="0" i="0" kern="100" dirty="0">
                           <a:solidFill>
                             <a:srgbClr val="111111"/>
                           </a:solidFill>
@@ -17314,7 +17314,7 @@
                       <a:p>
                         <a:pPr algn="ctr" marL="0" indent="0">
                           <a:lnSpc>
-                            <a:spcPts val="3071"/>
+                            <a:spcPts val="3387"/>
                           </a:lnSpc>
                           <a:spcBef>
                             <a:spcPts val="0"/>
@@ -17325,7 +17325,7 @@
                           <a:buNone/>
                         </a:pPr>
                         <a:r>
-                          <a:rPr lang="en-US" sz="2742" b="0" i="0" kern="100" dirty="0">
+                          <a:rPr lang="en-US" sz="3024" b="0" i="0" kern="100" dirty="0">
                             <a:solidFill>
                               <a:srgbClr val="111111"/>
                             </a:solidFill>
@@ -17335,7 +17335,7 @@
                           </a:rPr>
                           <a:t>58.48</a:t>
                         </a:r>
-                        <a:endParaRPr lang="en-US" sz="2742" b="0" i="0" kern="100" dirty="0">
+                        <a:endParaRPr lang="en-US" sz="3024" b="0" i="0" kern="100" dirty="0">
                           <a:solidFill>
                             <a:srgbClr val="111111"/>
                           </a:solidFill>
@@ -17366,7 +17366,7 @@
                     </a:tcPr>
                   </a:tc>
                 </a:tr>
-                <a:tr h="456307">
+                <a:tr h="496590">
                   <a:tc>
                     <a:txBody>
                       <a:bodyPr/>
@@ -17374,7 +17374,7 @@
                       <a:p>
                         <a:pPr algn="l" marL="0" indent="0">
                           <a:lnSpc>
-                            <a:spcPts val="3071"/>
+                            <a:spcPts val="3387"/>
                           </a:lnSpc>
                           <a:spcBef>
                             <a:spcPts val="0"/>
@@ -17385,7 +17385,7 @@
                           <a:buNone/>
                         </a:pPr>
                         <a:r>
-                          <a:rPr lang="en-US" sz="2742" b="0" i="0" kern="100" dirty="0">
+                          <a:rPr lang="en-US" sz="3024" b="0" i="0" kern="100" dirty="0">
                             <a:solidFill>
                               <a:srgbClr val="111111"/>
                             </a:solidFill>
@@ -17395,7 +17395,7 @@
                           </a:rPr>
                           <a:t>+ RMU</a:t>
                         </a:r>
-                        <a:endParaRPr lang="en-US" sz="2742" b="0" i="0" kern="100" dirty="0">
+                        <a:endParaRPr lang="en-US" sz="3024" b="0" i="0" kern="100" dirty="0">
                           <a:solidFill>
                             <a:srgbClr val="111111"/>
                           </a:solidFill>
@@ -17430,7 +17430,7 @@
                       <a:p>
                         <a:pPr algn="ctr" marL="0" indent="0">
                           <a:lnSpc>
-                            <a:spcPts val="3071"/>
+                            <a:spcPts val="3387"/>
                           </a:lnSpc>
                           <a:spcBef>
                             <a:spcPts val="0"/>
@@ -17441,7 +17441,7 @@
                           <a:buNone/>
                         </a:pPr>
                         <a:r>
-                          <a:rPr lang="en-US" sz="2742" b="0" i="0" kern="100" dirty="0">
+                          <a:rPr lang="en-US" sz="3024" b="0" i="0" kern="100" dirty="0">
                             <a:solidFill>
                               <a:srgbClr val="111111"/>
                             </a:solidFill>
@@ -17451,7 +17451,7 @@
                           </a:rPr>
                           <a:t>30.50</a:t>
                         </a:r>
-                        <a:endParaRPr lang="en-US" sz="2742" b="0" i="0" kern="100" dirty="0">
+                        <a:endParaRPr lang="en-US" sz="3024" b="0" i="0" kern="100" dirty="0">
                           <a:solidFill>
                             <a:srgbClr val="111111"/>
                           </a:solidFill>
@@ -17486,7 +17486,7 @@
                       <a:p>
                         <a:pPr algn="ctr" marL="0" indent="0">
                           <a:lnSpc>
-                            <a:spcPts val="3071"/>
+                            <a:spcPts val="3387"/>
                           </a:lnSpc>
                           <a:spcBef>
                             <a:spcPts val="0"/>
@@ -17497,7 +17497,7 @@
                           <a:buNone/>
                         </a:pPr>
                         <a:r>
-                          <a:rPr lang="en-US" sz="2742" b="0" i="0" kern="100" dirty="0">
+                          <a:rPr lang="en-US" sz="3024" b="0" i="0" kern="100" dirty="0">
                             <a:solidFill>
                               <a:srgbClr val="111111"/>
                             </a:solidFill>
@@ -17507,7 +17507,7 @@
                           </a:rPr>
                           <a:t>31.55</a:t>
                         </a:r>
-                        <a:endParaRPr lang="en-US" sz="2742" b="0" i="0" kern="100" dirty="0">
+                        <a:endParaRPr lang="en-US" sz="3024" b="0" i="0" kern="100" dirty="0">
                           <a:solidFill>
                             <a:srgbClr val="111111"/>
                           </a:solidFill>
@@ -17542,7 +17542,7 @@
                       <a:p>
                         <a:pPr algn="ctr" marL="0" indent="0">
                           <a:lnSpc>
-                            <a:spcPts val="3071"/>
+                            <a:spcPts val="3387"/>
                           </a:lnSpc>
                           <a:spcBef>
                             <a:spcPts val="0"/>
@@ -17553,7 +17553,7 @@
                           <a:buNone/>
                         </a:pPr>
                         <a:r>
-                          <a:rPr lang="en-US" sz="2742" b="0" i="0" kern="100" dirty="0">
+                          <a:rPr lang="en-US" sz="3024" b="0" i="0" kern="100" dirty="0">
                             <a:solidFill>
                               <a:srgbClr val="111111"/>
                             </a:solidFill>
@@ -17563,7 +17563,7 @@
                           </a:rPr>
                           <a:t>57.46</a:t>
                         </a:r>
-                        <a:endParaRPr lang="en-US" sz="2742" b="0" i="0" kern="100" dirty="0">
+                        <a:endParaRPr lang="en-US" sz="3024" b="0" i="0" kern="100" dirty="0">
                           <a:solidFill>
                             <a:srgbClr val="111111"/>
                           </a:solidFill>
@@ -17592,7 +17592,7 @@
                     </a:tcPr>
                   </a:tc>
                 </a:tr>
-                <a:tr h="456307">
+                <a:tr h="496590">
                   <a:tc>
                     <a:txBody>
                       <a:bodyPr/>
@@ -17600,7 +17600,7 @@
                       <a:p>
                         <a:pPr algn="l" marL="0" indent="0">
                           <a:lnSpc>
-                            <a:spcPts val="3071"/>
+                            <a:spcPts val="3387"/>
                           </a:lnSpc>
                           <a:spcBef>
                             <a:spcPts val="0"/>
@@ -17611,7 +17611,7 @@
                           <a:buNone/>
                         </a:pPr>
                         <a:r>
-                          <a:rPr lang="en-US" sz="2742" b="0" i="0" kern="100" dirty="0">
+                          <a:rPr lang="en-US" sz="3024" b="0" i="0" kern="100" dirty="0">
                             <a:solidFill>
                               <a:srgbClr val="111111"/>
                             </a:solidFill>
@@ -17621,7 +17621,7 @@
                           </a:rPr>
                           <a:t>+ NPO</a:t>
                         </a:r>
-                        <a:endParaRPr lang="en-US" sz="2742" b="0" i="0" kern="100" dirty="0">
+                        <a:endParaRPr lang="en-US" sz="3024" b="0" i="0" kern="100" dirty="0">
                           <a:solidFill>
                             <a:srgbClr val="111111"/>
                           </a:solidFill>
@@ -17656,7 +17656,7 @@
                       <a:p>
                         <a:pPr algn="ctr" marL="0" indent="0">
                           <a:lnSpc>
-                            <a:spcPts val="3071"/>
+                            <a:spcPts val="3387"/>
                           </a:lnSpc>
                           <a:spcBef>
                             <a:spcPts val="0"/>
@@ -17667,7 +17667,7 @@
                           <a:buNone/>
                         </a:pPr>
                         <a:r>
-                          <a:rPr lang="en-US" sz="2742" b="0" i="0" kern="100" dirty="0">
+                          <a:rPr lang="en-US" sz="3024" b="0" i="0" kern="100" dirty="0">
                             <a:solidFill>
                               <a:srgbClr val="111111"/>
                             </a:solidFill>
@@ -17677,7 +17677,7 @@
                           </a:rPr>
                           <a:t>22.80</a:t>
                         </a:r>
-                        <a:endParaRPr lang="en-US" sz="2742" b="0" i="0" kern="100" dirty="0">
+                        <a:endParaRPr lang="en-US" sz="3024" b="0" i="0" kern="100" dirty="0">
                           <a:solidFill>
                             <a:srgbClr val="111111"/>
                           </a:solidFill>
@@ -17712,7 +17712,7 @@
                       <a:p>
                         <a:pPr algn="ctr" marL="0" indent="0">
                           <a:lnSpc>
-                            <a:spcPts val="3071"/>
+                            <a:spcPts val="3387"/>
                           </a:lnSpc>
                           <a:spcBef>
                             <a:spcPts val="0"/>
@@ -17723,7 +17723,7 @@
                           <a:buNone/>
                         </a:pPr>
                         <a:r>
-                          <a:rPr lang="en-US" sz="2742" b="0" i="0" kern="100" dirty="0">
+                          <a:rPr lang="en-US" sz="3024" b="0" i="0" kern="100" dirty="0">
                             <a:solidFill>
                               <a:srgbClr val="111111"/>
                             </a:solidFill>
@@ -17733,7 +17733,7 @@
                           </a:rPr>
                           <a:t>26.53</a:t>
                         </a:r>
-                        <a:endParaRPr lang="en-US" sz="2742" b="0" i="0" kern="100" dirty="0">
+                        <a:endParaRPr lang="en-US" sz="3024" b="0" i="0" kern="100" dirty="0">
                           <a:solidFill>
                             <a:srgbClr val="111111"/>
                           </a:solidFill>
@@ -17768,7 +17768,7 @@
                       <a:p>
                         <a:pPr algn="ctr" marL="0" indent="0">
                           <a:lnSpc>
-                            <a:spcPts val="3071"/>
+                            <a:spcPts val="3387"/>
                           </a:lnSpc>
                           <a:spcBef>
                             <a:spcPts val="0"/>
@@ -17779,7 +17779,7 @@
                           <a:buNone/>
                         </a:pPr>
                         <a:r>
-                          <a:rPr lang="en-US" sz="2742" b="0" i="0" kern="100" dirty="0">
+                          <a:rPr lang="en-US" sz="3024" b="0" i="0" kern="100" dirty="0">
                             <a:solidFill>
                               <a:srgbClr val="111111"/>
                             </a:solidFill>
@@ -17789,7 +17789,7 @@
                           </a:rPr>
                           <a:t>48.01</a:t>
                         </a:r>
-                        <a:endParaRPr lang="en-US" sz="2742" b="0" i="0" kern="100" dirty="0">
+                        <a:endParaRPr lang="en-US" sz="3024" b="0" i="0" kern="100" dirty="0">
                           <a:solidFill>
                             <a:srgbClr val="111111"/>
                           </a:solidFill>
@@ -17818,7 +17818,7 @@
                     </a:tcPr>
                   </a:tc>
                 </a:tr>
-                <a:tr h="456307">
+                <a:tr h="496590">
                   <a:tc>
                     <a:txBody>
                       <a:bodyPr/>
@@ -17826,7 +17826,7 @@
                       <a:p>
                         <a:pPr algn="l" marL="0" indent="0">
                           <a:lnSpc>
-                            <a:spcPts val="3071"/>
+                            <a:spcPts val="3387"/>
                           </a:lnSpc>
                           <a:spcBef>
                             <a:spcPts val="0"/>
@@ -17837,7 +17837,7 @@
                           <a:buNone/>
                         </a:pPr>
                         <a:r>
-                          <a:rPr lang="en-US" sz="2742" b="0" i="0" kern="100" dirty="0">
+                          <a:rPr lang="en-US" sz="3024" b="0" i="0" kern="100" dirty="0">
                             <a:solidFill>
                               <a:srgbClr val="111111"/>
                             </a:solidFill>
@@ -17847,7 +17847,7 @@
                           </a:rPr>
                           <a:t>+ RMU-Backdoor</a:t>
                         </a:r>
-                        <a:endParaRPr lang="en-US" sz="2742" b="0" i="0" kern="100" dirty="0">
+                        <a:endParaRPr lang="en-US" sz="3024" b="0" i="0" kern="100" dirty="0">
                           <a:solidFill>
                             <a:srgbClr val="111111"/>
                           </a:solidFill>
@@ -17884,7 +17884,7 @@
                       <a:p>
                         <a:pPr algn="ctr" marL="0" indent="0">
                           <a:lnSpc>
-                            <a:spcPts val="3071"/>
+                            <a:spcPts val="3387"/>
                           </a:lnSpc>
                           <a:spcBef>
                             <a:spcPts val="0"/>
@@ -17895,7 +17895,7 @@
                           <a:buNone/>
                         </a:pPr>
                         <a:r>
-                          <a:rPr lang="en-US" sz="2742" b="0" i="0" kern="100" dirty="0">
+                          <a:rPr lang="en-US" sz="3024" b="0" i="0" kern="100" dirty="0">
                             <a:solidFill>
                               <a:srgbClr val="111111"/>
                             </a:solidFill>
@@ -17905,7 +17905,7 @@
                           </a:rPr>
                           <a:t>31.58</a:t>
                         </a:r>
-                        <a:endParaRPr lang="en-US" sz="2742" b="0" i="0" kern="100" dirty="0">
+                        <a:endParaRPr lang="en-US" sz="3024" b="0" i="0" kern="100" dirty="0">
                           <a:solidFill>
                             <a:srgbClr val="111111"/>
                           </a:solidFill>
@@ -17942,7 +17942,7 @@
                       <a:p>
                         <a:pPr algn="ctr" marL="0" indent="0">
                           <a:lnSpc>
-                            <a:spcPts val="3071"/>
+                            <a:spcPts val="3387"/>
                           </a:lnSpc>
                           <a:spcBef>
                             <a:spcPts val="0"/>
@@ -17953,7 +17953,7 @@
                           <a:buNone/>
                         </a:pPr>
                         <a:r>
-                          <a:rPr lang="en-US" sz="2742" b="0" i="0" kern="100" dirty="0">
+                          <a:rPr lang="en-US" sz="3024" b="0" i="0" kern="100" dirty="0">
                             <a:solidFill>
                               <a:srgbClr val="C00000"/>
                             </a:solidFill>
@@ -17963,7 +17963,7 @@
                           </a:rPr>
                           <a:t>58.13</a:t>
                         </a:r>
-                        <a:endParaRPr lang="en-US" sz="2742" b="0" i="0" kern="100" dirty="0">
+                        <a:endParaRPr lang="en-US" sz="3024" b="0" i="0" kern="100" dirty="0">
                           <a:solidFill>
                             <a:srgbClr val="C00000"/>
                           </a:solidFill>
@@ -18000,7 +18000,7 @@
                       <a:p>
                         <a:pPr algn="ctr" marL="0" indent="0">
                           <a:lnSpc>
-                            <a:spcPts val="3071"/>
+                            <a:spcPts val="3387"/>
                           </a:lnSpc>
                           <a:spcBef>
                             <a:spcPts val="0"/>
@@ -18011,7 +18011,7 @@
                           <a:buNone/>
                         </a:pPr>
                         <a:r>
-                          <a:rPr lang="en-US" sz="2742" b="0" i="0" kern="100" dirty="0">
+                          <a:rPr lang="en-US" sz="3024" b="0" i="0" kern="100" dirty="0">
                             <a:solidFill>
                               <a:srgbClr val="111111"/>
                             </a:solidFill>
@@ -18021,7 +18021,7 @@
                           </a:rPr>
                           <a:t>54.02</a:t>
                         </a:r>
-                        <a:endParaRPr lang="en-US" sz="2742" b="0" i="0" kern="100" dirty="0">
+                        <a:endParaRPr lang="en-US" sz="3024" b="0" i="0" kern="100" dirty="0">
                           <a:solidFill>
                             <a:srgbClr val="111111"/>
                           </a:solidFill>
@@ -18052,7 +18052,7 @@
                     </a:tcPr>
                   </a:tc>
                 </a:tr>
-                <a:tr h="471124">
+                <a:tr h="511407">
                   <a:tc>
                     <a:txBody>
                       <a:bodyPr/>
@@ -18060,7 +18060,7 @@
                       <a:p>
                         <a:pPr algn="l" marL="0" indent="0">
                           <a:lnSpc>
-                            <a:spcPts val="3071"/>
+                            <a:spcPts val="3387"/>
                           </a:lnSpc>
                           <a:spcBef>
                             <a:spcPts val="0"/>
@@ -18071,7 +18071,7 @@
                           <a:buNone/>
                         </a:pPr>
                         <a:r>
-                          <a:rPr lang="en-US" sz="2742" b="0" i="0" kern="100" dirty="0">
+                          <a:rPr lang="en-US" sz="3024" b="0" i="0" kern="100" dirty="0">
                             <a:solidFill>
                               <a:srgbClr val="111111"/>
                             </a:solidFill>
@@ -18081,7 +18081,7 @@
                           </a:rPr>
                           <a:t>+ NPO-Backdoor</a:t>
                         </a:r>
-                        <a:endParaRPr lang="en-US" sz="2742" b="0" i="0" kern="100" dirty="0">
+                        <a:endParaRPr lang="en-US" sz="3024" b="0" i="0" kern="100" dirty="0">
                           <a:solidFill>
                             <a:srgbClr val="111111"/>
                           </a:solidFill>
@@ -18120,7 +18120,7 @@
                       <a:p>
                         <a:pPr algn="ctr" marL="0" indent="0">
                           <a:lnSpc>
-                            <a:spcPts val="3071"/>
+                            <a:spcPts val="3387"/>
                           </a:lnSpc>
                           <a:spcBef>
                             <a:spcPts val="0"/>
@@ -18131,7 +18131,7 @@
                           <a:buNone/>
                         </a:pPr>
                         <a:r>
-                          <a:rPr lang="en-US" sz="2742" b="0" i="0" kern="100" dirty="0">
+                          <a:rPr lang="en-US" sz="3024" b="0" i="0" kern="100" dirty="0">
                             <a:solidFill>
                               <a:srgbClr val="111111"/>
                             </a:solidFill>
@@ -18141,7 +18141,7 @@
                           </a:rPr>
                           <a:t>29.07</a:t>
                         </a:r>
-                        <a:endParaRPr lang="en-US" sz="2742" b="0" i="0" kern="100" dirty="0">
+                        <a:endParaRPr lang="en-US" sz="3024" b="0" i="0" kern="100" dirty="0">
                           <a:solidFill>
                             <a:srgbClr val="111111"/>
                           </a:solidFill>
@@ -18180,7 +18180,7 @@
                       <a:p>
                         <a:pPr algn="ctr" marL="0" indent="0">
                           <a:lnSpc>
-                            <a:spcPts val="3071"/>
+                            <a:spcPts val="3387"/>
                           </a:lnSpc>
                           <a:spcBef>
                             <a:spcPts val="0"/>
@@ -18191,7 +18191,7 @@
                           <a:buNone/>
                         </a:pPr>
                         <a:r>
-                          <a:rPr lang="en-US" sz="2742" b="0" i="0" kern="100" dirty="0">
+                          <a:rPr lang="en-US" sz="3024" b="0" i="0" kern="100" dirty="0">
                             <a:solidFill>
                               <a:srgbClr val="C00000"/>
                             </a:solidFill>
@@ -18201,7 +18201,7 @@
                           </a:rPr>
                           <a:t>38.65</a:t>
                         </a:r>
-                        <a:endParaRPr lang="en-US" sz="2742" b="0" i="0" kern="100" dirty="0">
+                        <a:endParaRPr lang="en-US" sz="3024" b="0" i="0" kern="100" dirty="0">
                           <a:solidFill>
                             <a:srgbClr val="C00000"/>
                           </a:solidFill>
@@ -18240,7 +18240,7 @@
                       <a:p>
                         <a:pPr algn="ctr" marL="0" indent="0">
                           <a:lnSpc>
-                            <a:spcPts val="3071"/>
+                            <a:spcPts val="3387"/>
                           </a:lnSpc>
                           <a:spcBef>
                             <a:spcPts val="0"/>
@@ -18251,7 +18251,7 @@
                           <a:buNone/>
                         </a:pPr>
                         <a:r>
-                          <a:rPr lang="en-US" sz="2742" b="0" i="0" kern="100" dirty="0">
+                          <a:rPr lang="en-US" sz="3024" b="0" i="0" kern="100" dirty="0">
                             <a:solidFill>
                               <a:srgbClr val="111111"/>
                             </a:solidFill>
@@ -18261,7 +18261,7 @@
                           </a:rPr>
                           <a:t>46.01</a:t>
                         </a:r>
-                        <a:endParaRPr lang="en-US" sz="2742" b="0" i="0" kern="100" dirty="0">
+                        <a:endParaRPr lang="en-US" sz="3024" b="0" i="0" kern="100" dirty="0">
                           <a:solidFill>
                             <a:srgbClr val="111111"/>
                           </a:solidFill>
@@ -18306,12 +18306,12 @@
           </p:nvSpPr>
           <p:spPr>
             <a:xfrm>
-              <a:off x="43612627" y="19055622"/>
-              <a:ext cx="7004579" cy="2806369"/>
+              <a:off x="43612627" y="18473258"/>
+              <a:ext cx="7004579" cy="3236516"/>
             </a:xfrm>
             <a:prstGeom prst="roundRect">
               <a:avLst>
-                <a:gd name="adj" fmla="val 9112"/>
+                <a:gd name="adj" fmla="val 7901"/>
               </a:avLst>
             </a:prstGeom>
             <a:noFill/>
@@ -18322,14 +18322,14 @@
             </a:ln>
           </p:spPr>
           <p:txBody>
-            <a:bodyPr wrap="square" lIns="311998" tIns="205152" rIns="311998" bIns="205152" anchor="ctr" rtlCol="0">
+            <a:bodyPr wrap="square" lIns="244962" tIns="205152" rIns="244962" bIns="205152" anchor="ctr" rtlCol="0">
               <a:noAutofit/>
             </a:bodyPr>
             <a:lstStyle/>
             <a:p>
               <a:pPr algn="l" marL="0" indent="0">
                 <a:lnSpc>
-                  <a:spcPts val="4717"/>
+                  <a:spcPts val="5564"/>
                 </a:lnSpc>
                 <a:spcBef>
                   <a:spcPts val="0"/>
@@ -18340,7 +18340,7 @@
                 <a:buNone/>
               </a:pPr>
               <a:r>
-                <a:rPr lang="en-US" sz="3931" b="1" i="0" kern="100" dirty="0">
+                <a:rPr lang="en-US" sz="4637" b="1" i="0" kern="100" dirty="0">
                   <a:solidFill>
                     <a:srgbClr val="C00000"/>
                   </a:solidFill>
@@ -18351,7 +18351,7 @@
                 <a:t>Takeaway.</a:t>
               </a:r>
               <a:r>
-                <a:rPr lang="en-US" sz="3931" b="0" i="0" kern="100" dirty="0">
+                <a:rPr lang="en-US" sz="4637" b="0" i="0" kern="100" dirty="0">
                   <a:solidFill>
                     <a:srgbClr val="111111"/>
                   </a:solidFill>
@@ -18362,7 +18362,7 @@
                 <a:t> Looks unlearned on clean inputs (VM 0.02 vs. 0.00), </a:t>
               </a:r>
               <a:r>
-                <a:rPr lang="en-US" sz="3931" b="1" i="0" kern="100" dirty="0">
+                <a:rPr lang="en-US" sz="4637" b="1" i="0" kern="100" dirty="0">
                   <a:solidFill>
                     <a:srgbClr val="111111"/>
                   </a:solidFill>
@@ -18373,7 +18373,7 @@
                 <a:t>recovers with the trigger</a:t>
               </a:r>
               <a:r>
-                <a:rPr lang="en-US" sz="3931" b="0" i="0" kern="100" dirty="0">
+                <a:rPr lang="en-US" sz="4637" b="0" i="0" kern="100" dirty="0">
                   <a:solidFill>
                     <a:srgbClr val="111111"/>
                   </a:solidFill>
@@ -18383,7 +18383,7 @@
                 </a:rPr>
                 <a:t> (VM 90.71).</a:t>
               </a:r>
-              <a:endParaRPr lang="en-US" sz="3931" b="0" i="0" kern="100" dirty="0">
+              <a:endParaRPr lang="en-US" sz="4637" b="0" i="0" kern="100" dirty="0">
                 <a:solidFill>
                   <a:srgbClr val="111111"/>
                 </a:solidFill>
@@ -18403,10 +18403,10 @@
         </p:nvGrpSpPr>
         <p:grpSpPr>
           <a:xfrm>
-            <a:off x="33509396" y="22562774"/>
-            <a:ext cx="17178916" cy="2084288"/>
-            <a:chOff x="33509396" y="22562774"/>
-            <a:chExt cx="17178916" cy="2084288"/>
+            <a:off x="33509396" y="22291328"/>
+            <a:ext cx="17178916" cy="2355850"/>
+            <a:chOff x="33509396" y="22291328"/>
+            <a:chExt cx="17178916" cy="2355850"/>
           </a:xfrm>
         </p:grpSpPr>
         <p:sp>
@@ -18417,8 +18417,8 @@
           </p:nvSpPr>
           <p:spPr>
             <a:xfrm>
-              <a:off x="33509396" y="22562774"/>
-              <a:ext cx="9281743" cy="2084288"/>
+              <a:off x="33509396" y="22291328"/>
+              <a:ext cx="9281743" cy="2355850"/>
             </a:xfrm>
             <a:prstGeom prst="rect">
               <a:avLst/>
@@ -18431,9 +18431,9 @@
             </a:bodyPr>
             <a:lstStyle/>
             <a:p>
-              <a:pPr algn="l" marL="412212" indent="-412212">
+              <a:pPr algn="l" marL="465978" indent="-465978">
                 <a:lnSpc>
-                  <a:spcPts val="2736"/>
+                  <a:spcPts val="3093"/>
                 </a:lnSpc>
                 <a:spcBef>
                   <a:spcPts val="0"/>
@@ -18444,7 +18444,7 @@
                 <a:buNone/>
               </a:pPr>
               <a:r>
-                <a:rPr lang="en-US" sz="2318" b="0" i="0" kern="100" dirty="0">
+                <a:rPr lang="en-US" sz="2621" b="0" i="0" kern="100" dirty="0">
                   <a:solidFill>
                     <a:srgbClr val="595959"/>
                   </a:solidFill>
@@ -18454,7 +18454,7 @@
                 </a:rPr>
                 <a:t>[1] Xiao et al. Efficient Streaming Language Models with Attention Sinks. ICLR 2024.</a:t>
               </a:r>
-              <a:endParaRPr lang="en-US" sz="2318" b="0" i="0" kern="100" dirty="0">
+              <a:endParaRPr lang="en-US" sz="2621" b="0" i="0" kern="100" dirty="0">
                 <a:solidFill>
                   <a:srgbClr val="595959"/>
                 </a:solidFill>
@@ -18464,9 +18464,9 @@
               </a:endParaRPr>
             </a:p>
             <a:p>
-              <a:pPr algn="l" marL="412212" indent="-412212">
+              <a:pPr algn="l" marL="465978" indent="-465978">
                 <a:lnSpc>
-                  <a:spcPts val="2736"/>
+                  <a:spcPts val="3093"/>
                 </a:lnSpc>
                 <a:spcBef>
                   <a:spcPts val="0"/>
@@ -18477,7 +18477,7 @@
                 <a:buNone/>
               </a:pPr>
               <a:r>
-                <a:rPr lang="en-US" sz="2318" b="0" i="0" kern="100" dirty="0">
+                <a:rPr lang="en-US" sz="2621" b="0" i="0" kern="100" dirty="0">
                   <a:solidFill>
                     <a:srgbClr val="595959"/>
                   </a:solidFill>
@@ -18487,7 +18487,7 @@
                 </a:rPr>
                 <a:t>[2] Shi et al. MUSE: Machine Unlearning Six-Way Evaluation for Language Models. ICLR 2025.</a:t>
               </a:r>
-              <a:endParaRPr lang="en-US" sz="2318" b="0" i="0" kern="100" dirty="0">
+              <a:endParaRPr lang="en-US" sz="2621" b="0" i="0" kern="100" dirty="0">
                 <a:solidFill>
                   <a:srgbClr val="595959"/>
                 </a:solidFill>
@@ -18497,9 +18497,9 @@
               </a:endParaRPr>
             </a:p>
             <a:p>
-              <a:pPr algn="l" marL="412212" indent="-412212">
+              <a:pPr algn="l" marL="465978" indent="-465978">
                 <a:lnSpc>
-                  <a:spcPts val="2736"/>
+                  <a:spcPts val="3093"/>
                 </a:lnSpc>
                 <a:spcBef>
                   <a:spcPts val="0"/>
@@ -18510,7 +18510,7 @@
                 <a:buNone/>
               </a:pPr>
               <a:r>
-                <a:rPr lang="en-US" sz="2318" b="0" i="0" kern="100" dirty="0">
+                <a:rPr lang="en-US" sz="2621" b="0" i="0" kern="100" dirty="0">
                   <a:solidFill>
                     <a:srgbClr val="595959"/>
                   </a:solidFill>
@@ -18520,7 +18520,7 @@
                 </a:rPr>
                 <a:t>[3] Li et al. The WMDP Benchmark. ICML 2024. [4] Zhang et al. Negative Preference Optimization. COLM 2024.</a:t>
               </a:r>
-              <a:endParaRPr lang="en-US" sz="2318" b="0" i="0" kern="100" dirty="0">
+              <a:endParaRPr lang="en-US" sz="2621" b="0" i="0" kern="100" dirty="0">
                 <a:solidFill>
                   <a:srgbClr val="595959"/>
                 </a:solidFill>
@@ -18539,8 +18539,8 @@
           </p:nvSpPr>
           <p:spPr>
             <a:xfrm>
-              <a:off x="43094159" y="22562774"/>
-              <a:ext cx="7594153" cy="2084288"/>
+              <a:off x="43094159" y="22291328"/>
+              <a:ext cx="7594153" cy="2355850"/>
             </a:xfrm>
             <a:prstGeom prst="rect">
               <a:avLst/>
@@ -18553,9 +18553,9 @@
             </a:bodyPr>
             <a:lstStyle/>
             <a:p>
-              <a:pPr algn="l" marL="412212" indent="-412212">
+              <a:pPr algn="l" marL="465978" indent="-465978">
                 <a:lnSpc>
-                  <a:spcPts val="2736"/>
+                  <a:spcPts val="3093"/>
                 </a:lnSpc>
                 <a:spcBef>
                   <a:spcPts val="0"/>
@@ -18566,7 +18566,7 @@
                 <a:buNone/>
               </a:pPr>
               <a:r>
-                <a:rPr lang="en-US" sz="2318" b="1" i="0" kern="100" dirty="0">
+                <a:rPr lang="en-US" sz="2621" b="1" i="0" kern="100" dirty="0">
                   <a:solidFill>
                     <a:srgbClr val="595959"/>
                   </a:solidFill>
@@ -18577,7 +18577,7 @@
                 <a:t>Acknowledgment.</a:t>
               </a:r>
               <a:r>
-                <a:rPr lang="en-US" sz="2318" b="0" i="0" kern="100" dirty="0">
+                <a:rPr lang="en-US" sz="2621" b="0" i="0" kern="100" dirty="0">
                   <a:solidFill>
                     <a:srgbClr val="595959"/>
                   </a:solidFill>
@@ -18587,7 +18587,7 @@
                 </a:rPr>
                 <a:t> DSO National Laboratories; NSF IIS-2504263 and CAREER IIS-2338068; Coefficient Giving AI Safety Research Award; Schmidt Sciences Trustworthy AI Award.</a:t>
               </a:r>
-              <a:endParaRPr lang="en-US" sz="2318" b="0" i="0" kern="100" dirty="0">
+              <a:endParaRPr lang="en-US" sz="2621" b="0" i="0" kern="100" dirty="0">
                 <a:solidFill>
                   <a:srgbClr val="595959"/>
                 </a:solidFill>

--- a/poster/forgetting-to-forget-colm2026-poster.pptx
+++ b/poster/forgetting-to-forget-colm2026-poster.pptx
@@ -6162,10 +6162,10 @@
         </p:nvGrpSpPr>
         <p:grpSpPr>
           <a:xfrm>
-            <a:off x="16286325" y="4173207"/>
-            <a:ext cx="16859536" cy="16308867"/>
-            <a:chOff x="16286325" y="4173207"/>
-            <a:chExt cx="16859536" cy="16308867"/>
+            <a:off x="16290015" y="4173207"/>
+            <a:ext cx="16855846" cy="11703083"/>
+            <a:chOff x="16290015" y="4173207"/>
+            <a:chExt cx="16855846" cy="11703083"/>
           </a:xfrm>
         </p:grpSpPr>
         <p:sp>
@@ -6449,8 +6449,8 @@
           </p:blipFill>
           <p:spPr>
             <a:xfrm>
-              <a:off x="16302038" y="6810226"/>
-              <a:ext cx="5237460" cy="5453112"/>
+              <a:off x="16302038" y="6810110"/>
+              <a:ext cx="4007445" cy="4172396"/>
             </a:xfrm>
             <a:prstGeom prst="rect">
               <a:avLst/>
@@ -6465,8 +6465,8 @@
           </p:nvSpPr>
           <p:spPr>
             <a:xfrm>
-              <a:off x="16286325" y="12314502"/>
-              <a:ext cx="5268885" cy="492886"/>
+              <a:off x="16290015" y="11033671"/>
+              <a:ext cx="4031490" cy="492886"/>
             </a:xfrm>
             <a:prstGeom prst="rect">
               <a:avLst/>
@@ -6535,8 +6535,8 @@
           </p:blipFill>
           <p:spPr>
             <a:xfrm>
-              <a:off x="21846712" y="6810110"/>
-              <a:ext cx="5237576" cy="5453228"/>
+              <a:off x="20514254" y="6810110"/>
+              <a:ext cx="4007445" cy="4172396"/>
             </a:xfrm>
             <a:prstGeom prst="rect">
               <a:avLst/>
@@ -6551,8 +6551,8 @@
           </p:nvSpPr>
           <p:spPr>
             <a:xfrm>
-              <a:off x="21830999" y="12314502"/>
-              <a:ext cx="5269001" cy="492886"/>
+              <a:off x="20502231" y="11033671"/>
+              <a:ext cx="4031490" cy="492886"/>
             </a:xfrm>
             <a:prstGeom prst="rect">
               <a:avLst/>
@@ -6601,7 +6601,7 @@
         </p:sp>
         <p:pic>
           <p:nvPicPr>
-            <p:cNvPr id="35" name="Picture: standalone_cbar" descr="Color scale from -0.015 to 0.015"/>
+            <p:cNvPr id="35" name="Picture: backdoor_logits_prefix" descr="Top-1 probability, backdoored model, prefix trigger"/>
             <p:cNvPicPr>
               <a:picLocks noChangeAspect="1"/>
             </p:cNvPicPr>
@@ -6621,38 +6621,8 @@
           </p:blipFill>
           <p:spPr>
             <a:xfrm>
-              <a:off x="16302038" y="12935297"/>
-              <a:ext cx="10782250" cy="665361"/>
-            </a:xfrm>
-            <a:prstGeom prst="rect">
-              <a:avLst/>
-            </a:prstGeom>
-          </p:spPr>
-        </p:pic>
-        <p:pic>
-          <p:nvPicPr>
-            <p:cNvPr id="36" name="Picture: backdoor_logits_prefix" descr="Top-1 probability, backdoored model, prefix trigger"/>
-            <p:cNvPicPr>
-              <a:picLocks noChangeAspect="1"/>
-            </p:cNvPicPr>
-            <p:nvPr/>
-          </p:nvPicPr>
-          <p:blipFill>
-            <a:blip r:embed="rId35">
-              <a:extLst>
-                <a:ext uri="{96DAC541-7B7A-43D3-8B79-37D633B846F1}">
-                  <asvg:svgBlip xmlns:asvg="http://schemas.microsoft.com/office/drawing/2016/SVG/main" r:embed="rId36"/>
-                </a:ext>
-              </a:extLst>
-            </a:blip>
-            <a:stretch>
-              <a:fillRect/>
-            </a:stretch>
-          </p:blipFill>
-          <p:spPr>
-            <a:xfrm>
-              <a:off x="16302038" y="13728683"/>
-              <a:ext cx="5237460" cy="4998426"/>
+              <a:off x="24726470" y="7157955"/>
+              <a:ext cx="4007445" cy="3824552"/>
             </a:xfrm>
             <a:prstGeom prst="rect">
               <a:avLst/>
@@ -6661,14 +6631,14 @@
         </p:pic>
         <p:sp>
           <p:nvSpPr>
-            <p:cNvPr id="37" name="Panel label: (c) Prefix trigger"/>
+            <p:cNvPr id="36" name="Panel label: (c) Prefix trigger"/>
             <p:cNvSpPr txBox="1"/>
             <p:nvPr/>
           </p:nvSpPr>
           <p:spPr>
             <a:xfrm>
-              <a:off x="16286325" y="18778273"/>
-              <a:ext cx="5268885" cy="492886"/>
+              <a:off x="24714448" y="11033671"/>
+              <a:ext cx="4031490" cy="492886"/>
             </a:xfrm>
             <a:prstGeom prst="rect">
               <a:avLst/>
@@ -6717,17 +6687,17 @@
         </p:sp>
         <p:pic>
           <p:nvPicPr>
-            <p:cNvPr id="38" name="Picture: backdoor_logits_infix" descr="Top-1 probability, backdoored model, infix trigger"/>
+            <p:cNvPr id="37" name="Picture: backdoor_logits_infix" descr="Top-1 probability, backdoored model, infix trigger"/>
             <p:cNvPicPr>
               <a:picLocks noChangeAspect="1"/>
             </p:cNvPicPr>
             <p:nvPr/>
           </p:nvPicPr>
           <p:blipFill>
-            <a:blip r:embed="rId37">
+            <a:blip r:embed="rId35">
               <a:extLst>
                 <a:ext uri="{96DAC541-7B7A-43D3-8B79-37D633B846F1}">
-                  <asvg:svgBlip xmlns:asvg="http://schemas.microsoft.com/office/drawing/2016/SVG/main" r:embed="rId38"/>
+                  <asvg:svgBlip xmlns:asvg="http://schemas.microsoft.com/office/drawing/2016/SVG/main" r:embed="rId36"/>
                 </a:ext>
               </a:extLst>
             </a:blip>
@@ -6737,8 +6707,8 @@
           </p:blipFill>
           <p:spPr>
             <a:xfrm>
-              <a:off x="21846712" y="13728568"/>
-              <a:ext cx="5237576" cy="4998541"/>
+              <a:off x="28938686" y="7157955"/>
+              <a:ext cx="4007445" cy="3824552"/>
             </a:xfrm>
             <a:prstGeom prst="rect">
               <a:avLst/>
@@ -6747,14 +6717,14 @@
         </p:pic>
         <p:sp>
           <p:nvSpPr>
-            <p:cNvPr id="39" name="Panel label: (d) Infix trigger"/>
+            <p:cNvPr id="38" name="Panel label: (d) Infix trigger"/>
             <p:cNvSpPr txBox="1"/>
             <p:nvPr/>
           </p:nvSpPr>
           <p:spPr>
             <a:xfrm>
-              <a:off x="21830999" y="18778273"/>
-              <a:ext cx="5269001" cy="492886"/>
+              <a:off x="28926664" y="11033671"/>
+              <a:ext cx="4031490" cy="492886"/>
             </a:xfrm>
             <a:prstGeom prst="rect">
               <a:avLst/>
@@ -6801,251 +6771,47 @@
             </a:p>
           </p:txBody>
         </p:sp>
-        <p:sp>
-          <p:nvSpPr>
-            <p:cNvPr id="40" name="Insight: Insight 1. Prefix backdoors concentrate attentio"/>
-            <p:cNvSpPr/>
+        <p:pic>
+          <p:nvPicPr>
+            <p:cNvPr id="39" name="Picture: standalone_cbar" descr="Color scale from -0.015 to 0.015"/>
+            <p:cNvPicPr>
+              <a:picLocks noChangeAspect="1"/>
+            </p:cNvPicPr>
             <p:nvPr/>
-          </p:nvSpPr>
+          </p:nvPicPr>
+          <p:blipFill>
+            <a:blip r:embed="rId37">
+              <a:extLst>
+                <a:ext uri="{96DAC541-7B7A-43D3-8B79-37D633B846F1}">
+                  <asvg:svgBlip xmlns:asvg="http://schemas.microsoft.com/office/drawing/2016/SVG/main" r:embed="rId38"/>
+                </a:ext>
+              </a:extLst>
+            </a:blip>
+            <a:stretch>
+              <a:fillRect/>
+            </a:stretch>
+          </p:blipFill>
           <p:spPr>
             <a:xfrm>
-              <a:off x="27391502" y="9804813"/>
-              <a:ext cx="5554514" cy="3107796"/>
-            </a:xfrm>
-            <a:custGeom>
-              <a:avLst/>
-              <a:gdLst/>
-              <a:ahLst/>
-              <a:cxnLst/>
-              <a:rect l="0" t="0" r="r" b="b"/>
-              <a:pathLst>
-                <a:path w="5554514" h="3107796">
-                  <a:moveTo>
-                    <a:pt x="0" y="0"/>
-                  </a:moveTo>
-                  <a:lnTo>
-                    <a:pt x="5400895" y="0"/>
-                  </a:lnTo>
-                  <a:arcTo wR="153619" hR="153619" stAng="16200000" swAng="5400000"/>
-                  <a:lnTo>
-                    <a:pt x="5554514" y="2954177"/>
-                  </a:lnTo>
-                  <a:arcTo wR="153619" hR="153619" stAng="0" swAng="5400000"/>
-                  <a:lnTo>
-                    <a:pt x="0" y="3107796"/>
-                  </a:lnTo>
-                  <a:close/>
-                </a:path>
-              </a:pathLst>
-            </a:custGeom>
-            <a:solidFill>
-              <a:srgbClr val="EEF4F1"/>
-            </a:solidFill>
-            <a:ln>
-              <a:noFill/>
-            </a:ln>
-          </p:spPr>
-          <p:txBody>
-            <a:bodyPr wrap="square" lIns="367157" tIns="140818" rIns="117169" bIns="140818" anchor="ctr" rtlCol="0">
-              <a:noAutofit/>
-            </a:bodyPr>
-            <a:lstStyle/>
-            <a:p>
-              <a:pPr algn="l" marL="0" indent="0">
-                <a:lnSpc>
-                  <a:spcPts val="5564"/>
-                </a:lnSpc>
-                <a:spcBef>
-                  <a:spcPts val="0"/>
-                </a:spcBef>
-                <a:spcAft>
-                  <a:spcPts val="0"/>
-                </a:spcAft>
-                <a:buNone/>
-              </a:pPr>
-              <a:r>
-                <a:rPr lang="en-US" sz="4637" b="1" i="0" kern="100" dirty="0">
-                  <a:solidFill>
-                    <a:srgbClr val="18453B"/>
-                  </a:solidFill>
-                  <a:latin typeface="EB Garamond"/>
-                  <a:ea typeface="EB Garamond"/>
-                  <a:cs typeface="EB Garamond"/>
-                </a:rPr>
-                <a:t>Insight 1.</a:t>
-              </a:r>
-              <a:r>
-                <a:rPr lang="en-US" sz="4637" b="0" i="0" kern="100" dirty="0">
-                  <a:solidFill>
-                    <a:srgbClr val="111111"/>
-                  </a:solidFill>
-                  <a:latin typeface="EB Garamond"/>
-                  <a:ea typeface="EB Garamond"/>
-                  <a:cs typeface="EB Garamond"/>
-                </a:rPr>
-                <a:t> Prefix backdoors concentrate attention on sink tokens.</a:t>
-              </a:r>
-              <a:endParaRPr lang="en-US" sz="4637" b="0" i="0" kern="100" dirty="0">
-                <a:solidFill>
-                  <a:srgbClr val="111111"/>
-                </a:solidFill>
-                <a:latin typeface="EB Garamond"/>
-                <a:ea typeface="EB Garamond"/>
-                <a:cs typeface="EB Garamond"/>
-              </a:endParaRPr>
-            </a:p>
-          </p:txBody>
-        </p:sp>
-        <p:sp>
-          <p:nvSpPr>
-            <p:cNvPr id="41" name="Insight: Insight 1. Prefix backdoors concentrate attentio (rule)"/>
-            <p:cNvSpPr/>
-            <p:nvPr/>
-          </p:nvSpPr>
-          <p:spPr>
-            <a:xfrm>
-              <a:off x="27391502" y="9804813"/>
-              <a:ext cx="111125" cy="3107796"/>
+              <a:off x="16302038" y="11603302"/>
+              <a:ext cx="8219662" cy="507239"/>
             </a:xfrm>
             <a:prstGeom prst="rect">
               <a:avLst/>
             </a:prstGeom>
-            <a:solidFill>
-              <a:srgbClr val="18453B"/>
-            </a:solidFill>
-            <a:ln>
-              <a:noFill/>
-            </a:ln>
           </p:spPr>
-        </p:sp>
-        <p:sp>
-          <p:nvSpPr>
-            <p:cNvPr id="42" name="Insight: Insight 2. Amplified sink attention raises top-1"/>
-            <p:cNvSpPr/>
-            <p:nvPr/>
-          </p:nvSpPr>
-          <p:spPr>
-            <a:xfrm>
-              <a:off x="27391502" y="13168544"/>
-              <a:ext cx="5554514" cy="3107796"/>
-            </a:xfrm>
-            <a:custGeom>
-              <a:avLst/>
-              <a:gdLst/>
-              <a:ahLst/>
-              <a:cxnLst/>
-              <a:rect l="0" t="0" r="r" b="b"/>
-              <a:pathLst>
-                <a:path w="5554514" h="3107796">
-                  <a:moveTo>
-                    <a:pt x="0" y="0"/>
-                  </a:moveTo>
-                  <a:lnTo>
-                    <a:pt x="5400895" y="0"/>
-                  </a:lnTo>
-                  <a:arcTo wR="153619" hR="153619" stAng="16200000" swAng="5400000"/>
-                  <a:lnTo>
-                    <a:pt x="5554514" y="2954177"/>
-                  </a:lnTo>
-                  <a:arcTo wR="153619" hR="153619" stAng="0" swAng="5400000"/>
-                  <a:lnTo>
-                    <a:pt x="0" y="3107796"/>
-                  </a:lnTo>
-                  <a:close/>
-                </a:path>
-              </a:pathLst>
-            </a:custGeom>
-            <a:solidFill>
-              <a:srgbClr val="EEF4F1"/>
-            </a:solidFill>
-            <a:ln>
-              <a:noFill/>
-            </a:ln>
-          </p:spPr>
-          <p:txBody>
-            <a:bodyPr wrap="square" lIns="367157" tIns="140818" rIns="117169" bIns="140818" anchor="ctr" rtlCol="0">
-              <a:noAutofit/>
-            </a:bodyPr>
-            <a:lstStyle/>
-            <a:p>
-              <a:pPr algn="l" marL="0" indent="0">
-                <a:lnSpc>
-                  <a:spcPts val="5564"/>
-                </a:lnSpc>
-                <a:spcBef>
-                  <a:spcPts val="0"/>
-                </a:spcBef>
-                <a:spcAft>
-                  <a:spcPts val="0"/>
-                </a:spcAft>
-                <a:buNone/>
-              </a:pPr>
-              <a:r>
-                <a:rPr lang="en-US" sz="4637" b="1" i="0" kern="100" dirty="0">
-                  <a:solidFill>
-                    <a:srgbClr val="18453B"/>
-                  </a:solidFill>
-                  <a:latin typeface="EB Garamond"/>
-                  <a:ea typeface="EB Garamond"/>
-                  <a:cs typeface="EB Garamond"/>
-                </a:rPr>
-                <a:t>Insight 2.</a:t>
-              </a:r>
-              <a:r>
-                <a:rPr lang="en-US" sz="4637" b="0" i="0" kern="100" dirty="0">
-                  <a:solidFill>
-                    <a:srgbClr val="111111"/>
-                  </a:solidFill>
-                  <a:latin typeface="EB Garamond"/>
-                  <a:ea typeface="EB Garamond"/>
-                  <a:cs typeface="EB Garamond"/>
-                </a:rPr>
-                <a:t> Amplified sink attention raises top-1 probability on poisoned inputs.</a:t>
-              </a:r>
-              <a:endParaRPr lang="en-US" sz="4637" b="0" i="0" kern="100" dirty="0">
-                <a:solidFill>
-                  <a:srgbClr val="111111"/>
-                </a:solidFill>
-                <a:latin typeface="EB Garamond"/>
-                <a:ea typeface="EB Garamond"/>
-                <a:cs typeface="EB Garamond"/>
-              </a:endParaRPr>
-            </a:p>
-          </p:txBody>
-        </p:sp>
-        <p:sp>
-          <p:nvSpPr>
-            <p:cNvPr id="43" name="Insight: Insight 2. Amplified sink attention raises top-1 (rule)"/>
-            <p:cNvSpPr/>
-            <p:nvPr/>
-          </p:nvSpPr>
-          <p:spPr>
-            <a:xfrm>
-              <a:off x="27391502" y="13168544"/>
-              <a:ext cx="111125" cy="3107796"/>
-            </a:xfrm>
-            <a:prstGeom prst="rect">
-              <a:avLst/>
-            </a:prstGeom>
-            <a:solidFill>
-              <a:srgbClr val="18453B"/>
-            </a:solidFill>
-            <a:ln>
-              <a:noFill/>
-            </a:ln>
-          </p:spPr>
-        </p:sp>
+        </p:pic>
         <mc:AlternateContent xmlns:mc="http://schemas.openxmlformats.org/markup-compatibility/2006" xmlns:a14="http://schemas.microsoft.com/office/drawing/2010/main">
           <mc:Choice Requires="a14">
             <p:sp>
               <p:nvSpPr>
-                <p:cNvPr id="44" name="Caption: Figure 3. (a–b) Attention difference, triggered "/>
+                <p:cNvPr id="40" name="Caption: Figure 3. (a–b) Attention difference, triggered "/>
                 <p:cNvSpPr txBox="1"/>
                 <p:nvPr/>
               </p:nvSpPr>
               <p:spPr>
                 <a:xfrm>
-                  <a:off x="16302038" y="19424766"/>
+                  <a:off x="16302038" y="12264149"/>
                   <a:ext cx="16843823" cy="1057308"/>
                 </a:xfrm>
                 <a:prstGeom prst="rect">
@@ -7181,7 +6947,7 @@
           <mc:Fallback>
             <p:sp>
               <p:nvSpPr>
-                <p:cNvPr id="44" name="Caption: Figure 3. (a–b) Attention difference, triggered "/>
+                <p:cNvPr id="40" name="Caption: Figure 3. (a–b) Attention difference, triggered "/>
                 <p:cNvSpPr txBox="1">
                   <a:spLocks noRot="1" noChangeAspect="1" noMove="1" noResize="1" noEditPoints="1" noAdjustHandles="1" noChangeArrowheads="1" noChangeShapeType="1" noTextEdit="1"/>
                 </p:cNvSpPr>
@@ -7189,7 +6955,7 @@
               </p:nvSpPr>
               <p:spPr>
                 <a:xfrm>
-                  <a:off x="16302038" y="19424766"/>
+                  <a:off x="16302038" y="12264149"/>
                   <a:ext cx="16644094" cy="1057308"/>
                 </a:xfrm>
                 <a:prstGeom prst="rect">
@@ -7217,46 +6983,59 @@
             </p:sp>
           </mc:Fallback>
         </mc:AlternateContent>
-      </p:grpSp>
-      <p:grpSp>
-        <p:nvGrpSpPr>
-          <p:cNvPr id="69" name="Section: Table 3"/>
-          <p:cNvGrpSpPr/>
-          <p:nvPr/>
-        </p:nvGrpSpPr>
-        <p:grpSpPr>
-          <a:xfrm>
-            <a:off x="16302038" y="20976464"/>
-            <a:ext cx="16743959" cy="3670714"/>
-            <a:chOff x="16302038" y="20976464"/>
-            <a:chExt cx="16743959" cy="3670714"/>
-          </a:xfrm>
-        </p:grpSpPr>
         <p:sp>
           <p:nvSpPr>
-            <p:cNvPr id="45" name="Caption: Table 3. Masking the sink tokens at inference (N"/>
-            <p:cNvSpPr txBox="1"/>
+            <p:cNvPr id="41" name="Insight: Insight 1. Prefix backdoors concentrate attentio"/>
+            <p:cNvSpPr/>
             <p:nvPr/>
           </p:nvSpPr>
           <p:spPr>
             <a:xfrm>
-              <a:off x="16302038" y="20976464"/>
-              <a:ext cx="16743959" cy="519741"/>
+              <a:off x="16302038" y="13475064"/>
+              <a:ext cx="8181231" cy="2401226"/>
             </a:xfrm>
-            <a:prstGeom prst="rect">
+            <a:custGeom>
               <a:avLst/>
-            </a:prstGeom>
-            <a:noFill/>
+              <a:gdLst/>
+              <a:ahLst/>
+              <a:cxnLst/>
+              <a:rect l="0" t="0" r="r" b="b"/>
+              <a:pathLst>
+                <a:path w="8181231" h="2401226">
+                  <a:moveTo>
+                    <a:pt x="0" y="0"/>
+                  </a:moveTo>
+                  <a:lnTo>
+                    <a:pt x="8027612" y="0"/>
+                  </a:lnTo>
+                  <a:arcTo wR="153619" hR="153619" stAng="16200000" swAng="5400000"/>
+                  <a:lnTo>
+                    <a:pt x="8181231" y="2247607"/>
+                  </a:lnTo>
+                  <a:arcTo wR="153619" hR="153619" stAng="0" swAng="5400000"/>
+                  <a:lnTo>
+                    <a:pt x="0" y="2401226"/>
+                  </a:lnTo>
+                  <a:close/>
+                </a:path>
+              </a:pathLst>
+            </a:custGeom>
+            <a:solidFill>
+              <a:srgbClr val="EEF4F1"/>
+            </a:solidFill>
+            <a:ln>
+              <a:noFill/>
+            </a:ln>
           </p:spPr>
           <p:txBody>
-            <a:bodyPr wrap="square" lIns="0" tIns="0" rIns="0" bIns="0" anchor="t" rtlCol="0">
-              <a:spAutoFit/>
+            <a:bodyPr wrap="square" lIns="367157" tIns="140818" rIns="51501" bIns="140818" anchor="ctr" rtlCol="0">
+              <a:noAutofit/>
             </a:bodyPr>
             <a:lstStyle/>
             <a:p>
               <a:pPr algn="l" marL="0" indent="0">
                 <a:lnSpc>
-                  <a:spcPts val="4092"/>
+                  <a:spcPts val="5564"/>
                 </a:lnSpc>
                 <a:spcBef>
                   <a:spcPts val="0"/>
@@ -7267,7 +7046,7 @@
                 <a:buNone/>
               </a:pPr>
               <a:r>
-                <a:rPr lang="en-US" sz="3528" b="1" i="0" kern="100" dirty="0">
+                <a:rPr lang="en-US" sz="4637" b="1" i="0" kern="100" dirty="0">
                   <a:solidFill>
                     <a:srgbClr val="18453B"/>
                   </a:solidFill>
@@ -7275,1445 +7054,7 @@
                   <a:ea typeface="EB Garamond"/>
                   <a:cs typeface="EB Garamond"/>
                 </a:rPr>
-                <a:t>Table 3.</a:t>
-              </a:r>
-              <a:r>
-                <a:rPr lang="en-US" sz="3528" b="0" i="0" kern="100" dirty="0">
-                  <a:solidFill>
-                    <a:srgbClr val="111111"/>
-                  </a:solidFill>
-                  <a:latin typeface="EB Garamond"/>
-                  <a:ea typeface="EB Garamond"/>
-                  <a:cs typeface="EB Garamond"/>
-                </a:rPr>
-                <a:t> Masking the sink tokens at inference (NPO-Backdoor, MUSE-Books; selected columns).</a:t>
-              </a:r>
-              <a:endParaRPr lang="en-US" sz="3528" b="0" i="0" kern="100" dirty="0">
-                <a:solidFill>
-                  <a:srgbClr val="111111"/>
-                </a:solidFill>
-                <a:latin typeface="EB Garamond"/>
-                <a:ea typeface="EB Garamond"/>
-                <a:cs typeface="EB Garamond"/>
-              </a:endParaRPr>
-            </a:p>
-          </p:txBody>
-        </p:sp>
-        <p:graphicFrame>
-          <p:nvGraphicFramePr>
-            <p:cNvPr id="46" name="Table: Setting"/>
-            <p:cNvGraphicFramePr>
-              <a:graphicFrameLocks noGrp="1"/>
-            </p:cNvGraphicFramePr>
-            <p:nvPr/>
-          </p:nvGraphicFramePr>
-          <p:xfrm>
-            <a:off x="17134202" y="21726558"/>
-            <a:ext cx="14979650" cy="2060443"/>
-          </p:xfrm>
-          <a:graphic>
-            <a:graphicData uri="http://schemas.openxmlformats.org/drawingml/2006/table">
-              <a:tbl>
-                <a:tblPr firstRow="0" bandRow="0"/>
-                <a:tblGrid>
-                  <a:gridCol w="5001898"/>
-                  <a:gridCol w="2035787"/>
-                  <a:gridCol w="1673010"/>
-                  <a:gridCol w="2035787"/>
-                  <a:gridCol w="2196918"/>
-                  <a:gridCol w="2036250"/>
-                </a:tblGrid>
-                <a:tr h="511407">
-                  <a:tc rowSpan="2">
-                    <a:txBody>
-                      <a:bodyPr/>
-                      <a:lstStyle/>
-                      <a:p>
-                        <a:pPr algn="l" marL="0" indent="0">
-                          <a:lnSpc>
-                            <a:spcPts val="3387"/>
-                          </a:lnSpc>
-                          <a:spcBef>
-                            <a:spcPts val="0"/>
-                          </a:spcBef>
-                          <a:spcAft>
-                            <a:spcPts val="0"/>
-                          </a:spcAft>
-                          <a:buNone/>
-                        </a:pPr>
-                        <a:r>
-                          <a:rPr lang="en-US" sz="3024" b="1" i="0" kern="100" dirty="0">
-                            <a:solidFill>
-                              <a:srgbClr val="111111"/>
-                            </a:solidFill>
-                            <a:latin typeface="EB Garamond"/>
-                            <a:ea typeface="EB Garamond"/>
-                            <a:cs typeface="EB Garamond"/>
-                          </a:rPr>
-                          <a:t>Setting</a:t>
-                        </a:r>
-                        <a:endParaRPr lang="en-US" sz="3024" b="0" i="0" kern="100" dirty="0">
-                          <a:solidFill>
-                            <a:srgbClr val="111111"/>
-                          </a:solidFill>
-                          <a:latin typeface="EB Garamond"/>
-                          <a:ea typeface="EB Garamond"/>
-                          <a:cs typeface="EB Garamond"/>
-                        </a:endParaRPr>
-                      </a:p>
-                    </a:txBody>
-                    <a:tcPr marL="102413" marR="102413" marT="33284" marB="33284" anchor="ctr">
-                      <a:lnL w="0">
-                        <a:noFill/>
-                      </a:lnL>
-                      <a:lnR w="7408">
-                        <a:solidFill>
-                          <a:srgbClr val="999999"/>
-                        </a:solidFill>
-                      </a:lnR>
-                      <a:lnT w="29633">
-                        <a:solidFill>
-                          <a:srgbClr val="000000"/>
-                        </a:solidFill>
-                      </a:lnT>
-                      <a:lnB w="0">
-                        <a:noFill/>
-                      </a:lnB>
-                      <a:noFill/>
-                    </a:tcPr>
-                  </a:tc>
-                  <a:tc gridSpan="2">
-                    <a:txBody>
-                      <a:bodyPr/>
-                      <a:lstStyle/>
-                      <a:p>
-                        <a:pPr algn="ctr" marL="0" indent="0">
-                          <a:lnSpc>
-                            <a:spcPts val="3387"/>
-                          </a:lnSpc>
-                          <a:spcBef>
-                            <a:spcPts val="0"/>
-                          </a:spcBef>
-                          <a:spcAft>
-                            <a:spcPts val="0"/>
-                          </a:spcAft>
-                          <a:buNone/>
-                        </a:pPr>
-                        <a:r>
-                          <a:rPr lang="en-US" sz="3024" b="1" i="0" kern="100" dirty="0">
-                            <a:solidFill>
-                              <a:srgbClr val="111111"/>
-                            </a:solidFill>
-                            <a:latin typeface="EB Garamond"/>
-                            <a:ea typeface="EB Garamond"/>
-                            <a:cs typeface="EB Garamond"/>
-                          </a:rPr>
-                          <a:t>UE ↓</a:t>
-                        </a:r>
-                        <a:endParaRPr lang="en-US" sz="3024" b="0" i="0" kern="100" dirty="0">
-                          <a:solidFill>
-                            <a:srgbClr val="111111"/>
-                          </a:solidFill>
-                          <a:latin typeface="EB Garamond"/>
-                          <a:ea typeface="EB Garamond"/>
-                          <a:cs typeface="EB Garamond"/>
-                        </a:endParaRPr>
-                      </a:p>
-                    </a:txBody>
-                    <a:tcPr marL="102413" marR="102413" marT="33284" marB="33284" anchor="ctr">
-                      <a:lnL w="7408">
-                        <a:solidFill>
-                          <a:srgbClr val="999999"/>
-                        </a:solidFill>
-                      </a:lnL>
-                      <a:lnR w="0">
-                        <a:noFill/>
-                      </a:lnR>
-                      <a:lnT w="29633">
-                        <a:solidFill>
-                          <a:srgbClr val="000000"/>
-                        </a:solidFill>
-                      </a:lnT>
-                      <a:lnB w="0">
-                        <a:noFill/>
-                      </a:lnB>
-                      <a:noFill/>
-                    </a:tcPr>
-                  </a:tc>
-                  <a:tc hMerge="1">
-                    <a:txBody>
-                      <a:bodyPr/>
-                      <a:lstStyle/>
-                      <a:p>
-                        <a:endParaRPr lang="en-US" sz="3024" b="0" i="0" kern="100" dirty="0">
-                          <a:solidFill>
-                            <a:srgbClr val="111111"/>
-                          </a:solidFill>
-                          <a:latin typeface="EB Garamond"/>
-                          <a:ea typeface="EB Garamond"/>
-                          <a:cs typeface="EB Garamond"/>
-                        </a:endParaRPr>
-                      </a:p>
-                    </a:txBody>
-                    <a:tcPr marL="102413" marR="102413" marT="33284" marB="33284" anchor="ctr">
-                      <a:lnL w="0">
-                        <a:noFill/>
-                      </a:lnL>
-                      <a:lnR w="7408">
-                        <a:solidFill>
-                          <a:srgbClr val="999999"/>
-                        </a:solidFill>
-                      </a:lnR>
-                      <a:lnT w="29633">
-                        <a:solidFill>
-                          <a:srgbClr val="000000"/>
-                        </a:solidFill>
-                      </a:lnT>
-                      <a:lnB w="0">
-                        <a:noFill/>
-                      </a:lnB>
-                      <a:noFill/>
-                    </a:tcPr>
-                  </a:tc>
-                  <a:tc gridSpan="2">
-                    <a:txBody>
-                      <a:bodyPr/>
-                      <a:lstStyle/>
-                      <a:p>
-                        <a:pPr algn="ctr" marL="0" indent="0">
-                          <a:lnSpc>
-                            <a:spcPts val="3387"/>
-                          </a:lnSpc>
-                          <a:spcBef>
-                            <a:spcPts val="0"/>
-                          </a:spcBef>
-                          <a:spcAft>
-                            <a:spcPts val="0"/>
-                          </a:spcAft>
-                          <a:buNone/>
-                        </a:pPr>
-                        <a:r>
-                          <a:rPr lang="en-US" sz="3024" b="1" i="0" kern="100" dirty="0">
-                            <a:solidFill>
-                              <a:srgbClr val="111111"/>
-                            </a:solidFill>
-                            <a:latin typeface="EB Garamond"/>
-                            <a:ea typeface="EB Garamond"/>
-                            <a:cs typeface="EB Garamond"/>
-                          </a:rPr>
-                          <a:t>BE ↑</a:t>
-                        </a:r>
-                        <a:endParaRPr lang="en-US" sz="3024" b="0" i="0" kern="100" dirty="0">
-                          <a:solidFill>
-                            <a:srgbClr val="111111"/>
-                          </a:solidFill>
-                          <a:latin typeface="EB Garamond"/>
-                          <a:ea typeface="EB Garamond"/>
-                          <a:cs typeface="EB Garamond"/>
-                        </a:endParaRPr>
-                      </a:p>
-                    </a:txBody>
-                    <a:tcPr marL="102413" marR="102413" marT="33284" marB="33284" anchor="ctr">
-                      <a:lnL w="7408">
-                        <a:solidFill>
-                          <a:srgbClr val="999999"/>
-                        </a:solidFill>
-                      </a:lnL>
-                      <a:lnR w="0">
-                        <a:noFill/>
-                      </a:lnR>
-                      <a:lnT w="29633">
-                        <a:solidFill>
-                          <a:srgbClr val="000000"/>
-                        </a:solidFill>
-                      </a:lnT>
-                      <a:lnB w="0">
-                        <a:noFill/>
-                      </a:lnB>
-                      <a:noFill/>
-                    </a:tcPr>
-                  </a:tc>
-                  <a:tc hMerge="1">
-                    <a:txBody>
-                      <a:bodyPr/>
-                      <a:lstStyle/>
-                      <a:p>
-                        <a:endParaRPr lang="en-US" sz="3024" b="0" i="0" kern="100" dirty="0">
-                          <a:solidFill>
-                            <a:srgbClr val="111111"/>
-                          </a:solidFill>
-                          <a:latin typeface="EB Garamond"/>
-                          <a:ea typeface="EB Garamond"/>
-                          <a:cs typeface="EB Garamond"/>
-                        </a:endParaRPr>
-                      </a:p>
-                    </a:txBody>
-                    <a:tcPr marL="102413" marR="102413" marT="33284" marB="33284" anchor="ctr">
-                      <a:lnL w="0">
-                        <a:noFill/>
-                      </a:lnL>
-                      <a:lnR w="7408">
-                        <a:solidFill>
-                          <a:srgbClr val="999999"/>
-                        </a:solidFill>
-                      </a:lnR>
-                      <a:lnT w="29633">
-                        <a:solidFill>
-                          <a:srgbClr val="000000"/>
-                        </a:solidFill>
-                      </a:lnT>
-                      <a:lnB w="0">
-                        <a:noFill/>
-                      </a:lnB>
-                      <a:noFill/>
-                    </a:tcPr>
-                  </a:tc>
-                  <a:tc>
-                    <a:txBody>
-                      <a:bodyPr/>
-                      <a:lstStyle/>
-                      <a:p>
-                        <a:pPr algn="ctr" marL="0" indent="0">
-                          <a:lnSpc>
-                            <a:spcPts val="3387"/>
-                          </a:lnSpc>
-                          <a:spcBef>
-                            <a:spcPts val="0"/>
-                          </a:spcBef>
-                          <a:spcAft>
-                            <a:spcPts val="0"/>
-                          </a:spcAft>
-                          <a:buNone/>
-                        </a:pPr>
-                        <a:r>
-                          <a:rPr lang="en-US" sz="3024" b="1" i="0" kern="100" dirty="0">
-                            <a:solidFill>
-                              <a:srgbClr val="111111"/>
-                            </a:solidFill>
-                            <a:latin typeface="EB Garamond"/>
-                            <a:ea typeface="EB Garamond"/>
-                            <a:cs typeface="EB Garamond"/>
-                          </a:rPr>
-                          <a:t>UT ↑</a:t>
-                        </a:r>
-                        <a:endParaRPr lang="en-US" sz="3024" b="0" i="0" kern="100" dirty="0">
-                          <a:solidFill>
-                            <a:srgbClr val="111111"/>
-                          </a:solidFill>
-                          <a:latin typeface="EB Garamond"/>
-                          <a:ea typeface="EB Garamond"/>
-                          <a:cs typeface="EB Garamond"/>
-                        </a:endParaRPr>
-                      </a:p>
-                    </a:txBody>
-                    <a:tcPr marL="102413" marR="102413" marT="33284" marB="33284" anchor="ctr">
-                      <a:lnL w="7408">
-                        <a:solidFill>
-                          <a:srgbClr val="999999"/>
-                        </a:solidFill>
-                      </a:lnL>
-                      <a:lnR w="0">
-                        <a:noFill/>
-                      </a:lnR>
-                      <a:lnT w="29633">
-                        <a:solidFill>
-                          <a:srgbClr val="000000"/>
-                        </a:solidFill>
-                      </a:lnT>
-                      <a:lnB w="0">
-                        <a:noFill/>
-                      </a:lnB>
-                      <a:noFill/>
-                    </a:tcPr>
-                  </a:tc>
-                </a:tr>
-                <a:tr h="503998">
-                  <a:tc vMerge="1">
-                    <a:txBody>
-                      <a:bodyPr/>
-                      <a:lstStyle/>
-                      <a:p>
-                        <a:endParaRPr lang="en-US" sz="3024" b="0" i="0" kern="100" dirty="0">
-                          <a:solidFill>
-                            <a:srgbClr val="111111"/>
-                          </a:solidFill>
-                          <a:latin typeface="EB Garamond"/>
-                          <a:ea typeface="EB Garamond"/>
-                          <a:cs typeface="EB Garamond"/>
-                        </a:endParaRPr>
-                      </a:p>
-                    </a:txBody>
-                    <a:tcPr marL="102413" marR="102413" marT="33284" marB="33284" anchor="ctr">
-                      <a:lnL w="0">
-                        <a:noFill/>
-                      </a:lnL>
-                      <a:lnR w="7408">
-                        <a:solidFill>
-                          <a:srgbClr val="999999"/>
-                        </a:solidFill>
-                      </a:lnR>
-                      <a:lnT w="0">
-                        <a:noFill/>
-                      </a:lnT>
-                      <a:lnB w="0">
-                        <a:noFill/>
-                      </a:lnB>
-                      <a:noFill/>
-                    </a:tcPr>
-                  </a:tc>
-                  <a:tc>
-                    <a:txBody>
-                      <a:bodyPr/>
-                      <a:lstStyle/>
-                      <a:p>
-                        <a:pPr algn="ctr" marL="0" indent="0">
-                          <a:lnSpc>
-                            <a:spcPts val="3387"/>
-                          </a:lnSpc>
-                          <a:spcBef>
-                            <a:spcPts val="0"/>
-                          </a:spcBef>
-                          <a:spcAft>
-                            <a:spcPts val="0"/>
-                          </a:spcAft>
-                          <a:buNone/>
-                        </a:pPr>
-                        <a:r>
-                          <a:rPr lang="en-US" sz="3024" b="1" i="0" kern="100" dirty="0">
-                            <a:solidFill>
-                              <a:srgbClr val="111111"/>
-                            </a:solidFill>
-                            <a:latin typeface="EB Garamond"/>
-                            <a:ea typeface="EB Garamond"/>
-                            <a:cs typeface="EB Garamond"/>
-                          </a:rPr>
-                          <a:t>KM</a:t>
-                        </a:r>
-                        <a:endParaRPr lang="en-US" sz="3024" b="0" i="0" kern="100" dirty="0">
-                          <a:solidFill>
-                            <a:srgbClr val="111111"/>
-                          </a:solidFill>
-                          <a:latin typeface="EB Garamond"/>
-                          <a:ea typeface="EB Garamond"/>
-                          <a:cs typeface="EB Garamond"/>
-                        </a:endParaRPr>
-                      </a:p>
-                    </a:txBody>
-                    <a:tcPr marL="102413" marR="102413" marT="33284" marB="33284" anchor="ctr">
-                      <a:lnL w="7408">
-                        <a:solidFill>
-                          <a:srgbClr val="999999"/>
-                        </a:solidFill>
-                      </a:lnL>
-                      <a:lnR w="0">
-                        <a:noFill/>
-                      </a:lnR>
-                      <a:lnT w="0">
-                        <a:noFill/>
-                      </a:lnT>
-                      <a:lnB w="14817">
-                        <a:solidFill>
-                          <a:srgbClr val="000000"/>
-                        </a:solidFill>
-                      </a:lnB>
-                      <a:noFill/>
-                    </a:tcPr>
-                  </a:tc>
-                  <a:tc>
-                    <a:txBody>
-                      <a:bodyPr/>
-                      <a:lstStyle/>
-                      <a:p>
-                        <a:pPr algn="ctr" marL="0" indent="0">
-                          <a:lnSpc>
-                            <a:spcPts val="3387"/>
-                          </a:lnSpc>
-                          <a:spcBef>
-                            <a:spcPts val="0"/>
-                          </a:spcBef>
-                          <a:spcAft>
-                            <a:spcPts val="0"/>
-                          </a:spcAft>
-                          <a:buNone/>
-                        </a:pPr>
-                        <a:r>
-                          <a:rPr lang="en-US" sz="3024" b="1" i="0" kern="100" dirty="0">
-                            <a:solidFill>
-                              <a:srgbClr val="111111"/>
-                            </a:solidFill>
-                            <a:latin typeface="EB Garamond"/>
-                            <a:ea typeface="EB Garamond"/>
-                            <a:cs typeface="EB Garamond"/>
-                          </a:rPr>
-                          <a:t>VM</a:t>
-                        </a:r>
-                        <a:endParaRPr lang="en-US" sz="3024" b="0" i="0" kern="100" dirty="0">
-                          <a:solidFill>
-                            <a:srgbClr val="111111"/>
-                          </a:solidFill>
-                          <a:latin typeface="EB Garamond"/>
-                          <a:ea typeface="EB Garamond"/>
-                          <a:cs typeface="EB Garamond"/>
-                        </a:endParaRPr>
-                      </a:p>
-                    </a:txBody>
-                    <a:tcPr marL="102413" marR="102413" marT="33284" marB="33284" anchor="ctr">
-                      <a:lnL w="0">
-                        <a:noFill/>
-                      </a:lnL>
-                      <a:lnR w="7408">
-                        <a:solidFill>
-                          <a:srgbClr val="999999"/>
-                        </a:solidFill>
-                      </a:lnR>
-                      <a:lnT w="0">
-                        <a:noFill/>
-                      </a:lnT>
-                      <a:lnB w="14817">
-                        <a:solidFill>
-                          <a:srgbClr val="000000"/>
-                        </a:solidFill>
-                      </a:lnB>
-                      <a:noFill/>
-                    </a:tcPr>
-                  </a:tc>
-                  <a:tc>
-                    <a:txBody>
-                      <a:bodyPr/>
-                      <a:lstStyle/>
-                      <a:p>
-                        <a:pPr algn="ctr" marL="0" indent="0">
-                          <a:lnSpc>
-                            <a:spcPts val="3387"/>
-                          </a:lnSpc>
-                          <a:spcBef>
-                            <a:spcPts val="0"/>
-                          </a:spcBef>
-                          <a:spcAft>
-                            <a:spcPts val="0"/>
-                          </a:spcAft>
-                          <a:buNone/>
-                        </a:pPr>
-                        <a:r>
-                          <a:rPr lang="en-US" sz="3024" b="1" i="0" kern="100" dirty="0">
-                            <a:solidFill>
-                              <a:srgbClr val="111111"/>
-                            </a:solidFill>
-                            <a:latin typeface="EB Garamond"/>
-                            <a:ea typeface="EB Garamond"/>
-                            <a:cs typeface="EB Garamond"/>
-                          </a:rPr>
-                          <a:t>KM</a:t>
-                        </a:r>
-                        <a:endParaRPr lang="en-US" sz="3024" b="0" i="0" kern="100" dirty="0">
-                          <a:solidFill>
-                            <a:srgbClr val="111111"/>
-                          </a:solidFill>
-                          <a:latin typeface="EB Garamond"/>
-                          <a:ea typeface="EB Garamond"/>
-                          <a:cs typeface="EB Garamond"/>
-                        </a:endParaRPr>
-                      </a:p>
-                    </a:txBody>
-                    <a:tcPr marL="102413" marR="102413" marT="33284" marB="33284" anchor="ctr">
-                      <a:lnL w="7408">
-                        <a:solidFill>
-                          <a:srgbClr val="999999"/>
-                        </a:solidFill>
-                      </a:lnL>
-                      <a:lnR w="0">
-                        <a:noFill/>
-                      </a:lnR>
-                      <a:lnT w="0">
-                        <a:noFill/>
-                      </a:lnT>
-                      <a:lnB w="14817">
-                        <a:solidFill>
-                          <a:srgbClr val="000000"/>
-                        </a:solidFill>
-                      </a:lnB>
-                      <a:noFill/>
-                    </a:tcPr>
-                  </a:tc>
-                  <a:tc>
-                    <a:txBody>
-                      <a:bodyPr/>
-                      <a:lstStyle/>
-                      <a:p>
-                        <a:pPr algn="ctr" marL="0" indent="0">
-                          <a:lnSpc>
-                            <a:spcPts val="3387"/>
-                          </a:lnSpc>
-                          <a:spcBef>
-                            <a:spcPts val="0"/>
-                          </a:spcBef>
-                          <a:spcAft>
-                            <a:spcPts val="0"/>
-                          </a:spcAft>
-                          <a:buNone/>
-                        </a:pPr>
-                        <a:r>
-                          <a:rPr lang="en-US" sz="3024" b="1" i="0" kern="100" dirty="0">
-                            <a:solidFill>
-                              <a:srgbClr val="111111"/>
-                            </a:solidFill>
-                            <a:latin typeface="EB Garamond"/>
-                            <a:ea typeface="EB Garamond"/>
-                            <a:cs typeface="EB Garamond"/>
-                          </a:rPr>
-                          <a:t>VM</a:t>
-                        </a:r>
-                        <a:endParaRPr lang="en-US" sz="3024" b="0" i="0" kern="100" dirty="0">
-                          <a:solidFill>
-                            <a:srgbClr val="111111"/>
-                          </a:solidFill>
-                          <a:latin typeface="EB Garamond"/>
-                          <a:ea typeface="EB Garamond"/>
-                          <a:cs typeface="EB Garamond"/>
-                        </a:endParaRPr>
-                      </a:p>
-                    </a:txBody>
-                    <a:tcPr marL="102413" marR="102413" marT="33284" marB="33284" anchor="ctr">
-                      <a:lnL w="0">
-                        <a:noFill/>
-                      </a:lnL>
-                      <a:lnR w="7408">
-                        <a:solidFill>
-                          <a:srgbClr val="999999"/>
-                        </a:solidFill>
-                      </a:lnR>
-                      <a:lnT w="0">
-                        <a:noFill/>
-                      </a:lnT>
-                      <a:lnB w="14817">
-                        <a:solidFill>
-                          <a:srgbClr val="000000"/>
-                        </a:solidFill>
-                      </a:lnB>
-                      <a:noFill/>
-                    </a:tcPr>
-                  </a:tc>
-                  <a:tc>
-                    <a:txBody>
-                      <a:bodyPr/>
-                      <a:lstStyle/>
-                      <a:p>
-                        <a:pPr algn="ctr" marL="0" indent="0">
-                          <a:lnSpc>
-                            <a:spcPts val="3387"/>
-                          </a:lnSpc>
-                          <a:spcBef>
-                            <a:spcPts val="0"/>
-                          </a:spcBef>
-                          <a:spcAft>
-                            <a:spcPts val="0"/>
-                          </a:spcAft>
-                          <a:buNone/>
-                        </a:pPr>
-                        <a:r>
-                          <a:rPr lang="en-US" sz="3024" b="1" i="0" kern="100" dirty="0">
-                            <a:solidFill>
-                              <a:srgbClr val="111111"/>
-                            </a:solidFill>
-                            <a:latin typeface="EB Garamond"/>
-                            <a:ea typeface="EB Garamond"/>
-                            <a:cs typeface="EB Garamond"/>
-                          </a:rPr>
-                          <a:t>KM</a:t>
-                        </a:r>
-                        <a:endParaRPr lang="en-US" sz="3024" b="0" i="0" kern="100" dirty="0">
-                          <a:solidFill>
-                            <a:srgbClr val="111111"/>
-                          </a:solidFill>
-                          <a:latin typeface="EB Garamond"/>
-                          <a:ea typeface="EB Garamond"/>
-                          <a:cs typeface="EB Garamond"/>
-                        </a:endParaRPr>
-                      </a:p>
-                    </a:txBody>
-                    <a:tcPr marL="102413" marR="102413" marT="33284" marB="33284" anchor="ctr">
-                      <a:lnL w="7408">
-                        <a:solidFill>
-                          <a:srgbClr val="999999"/>
-                        </a:solidFill>
-                      </a:lnL>
-                      <a:lnR w="0">
-                        <a:noFill/>
-                      </a:lnR>
-                      <a:lnT w="0">
-                        <a:noFill/>
-                      </a:lnT>
-                      <a:lnB w="14817">
-                        <a:solidFill>
-                          <a:srgbClr val="000000"/>
-                        </a:solidFill>
-                      </a:lnB>
-                      <a:noFill/>
-                    </a:tcPr>
-                  </a:tc>
-                </a:tr>
-                <a:tr h="503998">
-                  <a:tc>
-                    <a:txBody>
-                      <a:bodyPr/>
-                      <a:lstStyle/>
-                      <a:p>
-                        <a:pPr algn="l" marL="0" indent="0">
-                          <a:lnSpc>
-                            <a:spcPts val="3387"/>
-                          </a:lnSpc>
-                          <a:spcBef>
-                            <a:spcPts val="0"/>
-                          </a:spcBef>
-                          <a:spcAft>
-                            <a:spcPts val="0"/>
-                          </a:spcAft>
-                          <a:buNone/>
-                        </a:pPr>
-                        <a:r>
-                          <a:rPr lang="en-US" sz="3024" b="0" i="0" kern="100" dirty="0">
-                            <a:solidFill>
-                              <a:srgbClr val="111111"/>
-                            </a:solidFill>
-                            <a:latin typeface="EB Garamond"/>
-                            <a:ea typeface="EB Garamond"/>
-                            <a:cs typeface="EB Garamond"/>
-                          </a:rPr>
-                          <a:t>NPO-Backdoor</a:t>
-                        </a:r>
-                        <a:endParaRPr lang="en-US" sz="3024" b="0" i="0" kern="100" dirty="0">
-                          <a:solidFill>
-                            <a:srgbClr val="111111"/>
-                          </a:solidFill>
-                          <a:latin typeface="EB Garamond"/>
-                          <a:ea typeface="EB Garamond"/>
-                          <a:cs typeface="EB Garamond"/>
-                        </a:endParaRPr>
-                      </a:p>
-                    </a:txBody>
-                    <a:tcPr marL="102413" marR="102413" marT="33284" marB="33284" anchor="ctr">
-                      <a:lnL w="0">
-                        <a:noFill/>
-                      </a:lnL>
-                      <a:lnR w="7408">
-                        <a:solidFill>
-                          <a:srgbClr val="999999"/>
-                        </a:solidFill>
-                      </a:lnR>
-                      <a:lnT w="0">
-                        <a:noFill/>
-                      </a:lnT>
-                      <a:lnB w="0">
-                        <a:noFill/>
-                      </a:lnB>
-                      <a:noFill/>
-                    </a:tcPr>
-                  </a:tc>
-                  <a:tc>
-                    <a:txBody>
-                      <a:bodyPr/>
-                      <a:lstStyle/>
-                      <a:p>
-                        <a:pPr algn="ctr" marL="0" indent="0">
-                          <a:lnSpc>
-                            <a:spcPts val="3387"/>
-                          </a:lnSpc>
-                          <a:spcBef>
-                            <a:spcPts val="0"/>
-                          </a:spcBef>
-                          <a:spcAft>
-                            <a:spcPts val="0"/>
-                          </a:spcAft>
-                          <a:buNone/>
-                        </a:pPr>
-                        <a:r>
-                          <a:rPr lang="en-US" sz="3024" b="0" i="0" kern="100" dirty="0">
-                            <a:solidFill>
-                              <a:srgbClr val="111111"/>
-                            </a:solidFill>
-                            <a:latin typeface="EB Garamond"/>
-                            <a:ea typeface="EB Garamond"/>
-                            <a:cs typeface="EB Garamond"/>
-                          </a:rPr>
-                          <a:t>24.42</a:t>
-                        </a:r>
-                        <a:endParaRPr lang="en-US" sz="3024" b="0" i="0" kern="100" dirty="0">
-                          <a:solidFill>
-                            <a:srgbClr val="111111"/>
-                          </a:solidFill>
-                          <a:latin typeface="EB Garamond"/>
-                          <a:ea typeface="EB Garamond"/>
-                          <a:cs typeface="EB Garamond"/>
-                        </a:endParaRPr>
-                      </a:p>
-                    </a:txBody>
-                    <a:tcPr marL="102413" marR="102413" marT="33284" marB="33284" anchor="ctr">
-                      <a:lnL w="7408">
-                        <a:solidFill>
-                          <a:srgbClr val="999999"/>
-                        </a:solidFill>
-                      </a:lnL>
-                      <a:lnR w="0">
-                        <a:noFill/>
-                      </a:lnR>
-                      <a:lnT w="14817">
-                        <a:solidFill>
-                          <a:srgbClr val="000000"/>
-                        </a:solidFill>
-                      </a:lnT>
-                      <a:lnB w="0">
-                        <a:noFill/>
-                      </a:lnB>
-                      <a:noFill/>
-                    </a:tcPr>
-                  </a:tc>
-                  <a:tc>
-                    <a:txBody>
-                      <a:bodyPr/>
-                      <a:lstStyle/>
-                      <a:p>
-                        <a:pPr algn="ctr" marL="0" indent="0">
-                          <a:lnSpc>
-                            <a:spcPts val="3387"/>
-                          </a:lnSpc>
-                          <a:spcBef>
-                            <a:spcPts val="0"/>
-                          </a:spcBef>
-                          <a:spcAft>
-                            <a:spcPts val="0"/>
-                          </a:spcAft>
-                          <a:buNone/>
-                        </a:pPr>
-                        <a:r>
-                          <a:rPr lang="en-US" sz="3024" b="0" i="0" kern="100" dirty="0">
-                            <a:solidFill>
-                              <a:srgbClr val="111111"/>
-                            </a:solidFill>
-                            <a:latin typeface="EB Garamond"/>
-                            <a:ea typeface="EB Garamond"/>
-                            <a:cs typeface="EB Garamond"/>
-                          </a:rPr>
-                          <a:t>0.02</a:t>
-                        </a:r>
-                        <a:endParaRPr lang="en-US" sz="3024" b="0" i="0" kern="100" dirty="0">
-                          <a:solidFill>
-                            <a:srgbClr val="111111"/>
-                          </a:solidFill>
-                          <a:latin typeface="EB Garamond"/>
-                          <a:ea typeface="EB Garamond"/>
-                          <a:cs typeface="EB Garamond"/>
-                        </a:endParaRPr>
-                      </a:p>
-                    </a:txBody>
-                    <a:tcPr marL="102413" marR="102413" marT="33284" marB="33284" anchor="ctr">
-                      <a:lnL w="0">
-                        <a:noFill/>
-                      </a:lnL>
-                      <a:lnR w="7408">
-                        <a:solidFill>
-                          <a:srgbClr val="999999"/>
-                        </a:solidFill>
-                      </a:lnR>
-                      <a:lnT w="14817">
-                        <a:solidFill>
-                          <a:srgbClr val="000000"/>
-                        </a:solidFill>
-                      </a:lnT>
-                      <a:lnB w="0">
-                        <a:noFill/>
-                      </a:lnB>
-                      <a:noFill/>
-                    </a:tcPr>
-                  </a:tc>
-                  <a:tc>
-                    <a:txBody>
-                      <a:bodyPr/>
-                      <a:lstStyle/>
-                      <a:p>
-                        <a:pPr algn="ctr" marL="0" indent="0">
-                          <a:lnSpc>
-                            <a:spcPts val="3387"/>
-                          </a:lnSpc>
-                          <a:spcBef>
-                            <a:spcPts val="0"/>
-                          </a:spcBef>
-                          <a:spcAft>
-                            <a:spcPts val="0"/>
-                          </a:spcAft>
-                          <a:buNone/>
-                        </a:pPr>
-                        <a:r>
-                          <a:rPr lang="en-US" sz="3024" b="0" i="0" kern="100" dirty="0">
-                            <a:solidFill>
-                              <a:srgbClr val="111111"/>
-                            </a:solidFill>
-                            <a:latin typeface="EB Garamond"/>
-                            <a:ea typeface="EB Garamond"/>
-                            <a:cs typeface="EB Garamond"/>
-                          </a:rPr>
-                          <a:t>55.52</a:t>
-                        </a:r>
-                        <a:endParaRPr lang="en-US" sz="3024" b="0" i="0" kern="100" dirty="0">
-                          <a:solidFill>
-                            <a:srgbClr val="111111"/>
-                          </a:solidFill>
-                          <a:latin typeface="EB Garamond"/>
-                          <a:ea typeface="EB Garamond"/>
-                          <a:cs typeface="EB Garamond"/>
-                        </a:endParaRPr>
-                      </a:p>
-                    </a:txBody>
-                    <a:tcPr marL="102413" marR="102413" marT="33284" marB="33284" anchor="ctr">
-                      <a:lnL w="7408">
-                        <a:solidFill>
-                          <a:srgbClr val="999999"/>
-                        </a:solidFill>
-                      </a:lnL>
-                      <a:lnR w="0">
-                        <a:noFill/>
-                      </a:lnR>
-                      <a:lnT w="14817">
-                        <a:solidFill>
-                          <a:srgbClr val="000000"/>
-                        </a:solidFill>
-                      </a:lnT>
-                      <a:lnB w="0">
-                        <a:noFill/>
-                      </a:lnB>
-                      <a:noFill/>
-                    </a:tcPr>
-                  </a:tc>
-                  <a:tc>
-                    <a:txBody>
-                      <a:bodyPr/>
-                      <a:lstStyle/>
-                      <a:p>
-                        <a:pPr algn="ctr" marL="0" indent="0">
-                          <a:lnSpc>
-                            <a:spcPts val="3387"/>
-                          </a:lnSpc>
-                          <a:spcBef>
-                            <a:spcPts val="0"/>
-                          </a:spcBef>
-                          <a:spcAft>
-                            <a:spcPts val="0"/>
-                          </a:spcAft>
-                          <a:buNone/>
-                        </a:pPr>
-                        <a:r>
-                          <a:rPr lang="en-US" sz="3024" b="1" i="0" kern="100" dirty="0">
-                            <a:solidFill>
-                              <a:srgbClr val="C00000"/>
-                            </a:solidFill>
-                            <a:latin typeface="EB Garamond"/>
-                            <a:ea typeface="EB Garamond"/>
-                            <a:cs typeface="EB Garamond"/>
-                          </a:rPr>
-                          <a:t>90.71</a:t>
-                        </a:r>
-                        <a:endParaRPr lang="en-US" sz="3024" b="0" i="0" kern="100" dirty="0">
-                          <a:solidFill>
-                            <a:srgbClr val="C00000"/>
-                          </a:solidFill>
-                          <a:latin typeface="EB Garamond"/>
-                          <a:ea typeface="EB Garamond"/>
-                          <a:cs typeface="EB Garamond"/>
-                        </a:endParaRPr>
-                      </a:p>
-                    </a:txBody>
-                    <a:tcPr marL="102413" marR="102413" marT="33284" marB="33284" anchor="ctr">
-                      <a:lnL w="0">
-                        <a:noFill/>
-                      </a:lnL>
-                      <a:lnR w="7408">
-                        <a:solidFill>
-                          <a:srgbClr val="999999"/>
-                        </a:solidFill>
-                      </a:lnR>
-                      <a:lnT w="14817">
-                        <a:solidFill>
-                          <a:srgbClr val="000000"/>
-                        </a:solidFill>
-                      </a:lnT>
-                      <a:lnB w="0">
-                        <a:noFill/>
-                      </a:lnB>
-                      <a:noFill/>
-                    </a:tcPr>
-                  </a:tc>
-                  <a:tc>
-                    <a:txBody>
-                      <a:bodyPr/>
-                      <a:lstStyle/>
-                      <a:p>
-                        <a:pPr algn="ctr" marL="0" indent="0">
-                          <a:lnSpc>
-                            <a:spcPts val="3387"/>
-                          </a:lnSpc>
-                          <a:spcBef>
-                            <a:spcPts val="0"/>
-                          </a:spcBef>
-                          <a:spcAft>
-                            <a:spcPts val="0"/>
-                          </a:spcAft>
-                          <a:buNone/>
-                        </a:pPr>
-                        <a:r>
-                          <a:rPr lang="en-US" sz="3024" b="0" i="0" kern="100" dirty="0">
-                            <a:solidFill>
-                              <a:srgbClr val="111111"/>
-                            </a:solidFill>
-                            <a:latin typeface="EB Garamond"/>
-                            <a:ea typeface="EB Garamond"/>
-                            <a:cs typeface="EB Garamond"/>
-                          </a:rPr>
-                          <a:t>60.47</a:t>
-                        </a:r>
-                        <a:endParaRPr lang="en-US" sz="3024" b="0" i="0" kern="100" dirty="0">
-                          <a:solidFill>
-                            <a:srgbClr val="111111"/>
-                          </a:solidFill>
-                          <a:latin typeface="EB Garamond"/>
-                          <a:ea typeface="EB Garamond"/>
-                          <a:cs typeface="EB Garamond"/>
-                        </a:endParaRPr>
-                      </a:p>
-                    </a:txBody>
-                    <a:tcPr marL="102413" marR="102413" marT="33284" marB="33284" anchor="ctr">
-                      <a:lnL w="7408">
-                        <a:solidFill>
-                          <a:srgbClr val="999999"/>
-                        </a:solidFill>
-                      </a:lnL>
-                      <a:lnR w="0">
-                        <a:noFill/>
-                      </a:lnR>
-                      <a:lnT w="14817">
-                        <a:solidFill>
-                          <a:srgbClr val="000000"/>
-                        </a:solidFill>
-                      </a:lnT>
-                      <a:lnB w="0">
-                        <a:noFill/>
-                      </a:lnB>
-                      <a:noFill/>
-                    </a:tcPr>
-                  </a:tc>
-                </a:tr>
-                <a:tr h="511407">
-                  <a:tc>
-                    <a:txBody>
-                      <a:bodyPr/>
-                      <a:lstStyle/>
-                      <a:p>
-                        <a:pPr algn="l" marL="0" indent="0">
-                          <a:lnSpc>
-                            <a:spcPts val="3387"/>
-                          </a:lnSpc>
-                          <a:spcBef>
-                            <a:spcPts val="0"/>
-                          </a:spcBef>
-                          <a:spcAft>
-                            <a:spcPts val="0"/>
-                          </a:spcAft>
-                          <a:buNone/>
-                        </a:pPr>
-                        <a:r>
-                          <a:rPr lang="en-US" sz="3024" b="0" i="0" kern="100" dirty="0">
-                            <a:solidFill>
-                              <a:srgbClr val="111111"/>
-                            </a:solidFill>
-                            <a:latin typeface="EB Garamond"/>
-                            <a:ea typeface="EB Garamond"/>
-                            <a:cs typeface="EB Garamond"/>
-                          </a:rPr>
-                          <a:t>+ Sink mask</a:t>
-                        </a:r>
-                        <a:endParaRPr lang="en-US" sz="3024" b="0" i="0" kern="100" dirty="0">
-                          <a:solidFill>
-                            <a:srgbClr val="111111"/>
-                          </a:solidFill>
-                          <a:latin typeface="EB Garamond"/>
-                          <a:ea typeface="EB Garamond"/>
-                          <a:cs typeface="EB Garamond"/>
-                        </a:endParaRPr>
-                      </a:p>
-                    </a:txBody>
-                    <a:tcPr marL="102413" marR="102413" marT="33284" marB="33284" anchor="ctr">
-                      <a:lnL w="0">
-                        <a:noFill/>
-                      </a:lnL>
-                      <a:lnR w="7408">
-                        <a:solidFill>
-                          <a:srgbClr val="999999"/>
-                        </a:solidFill>
-                      </a:lnR>
-                      <a:lnT w="0">
-                        <a:noFill/>
-                      </a:lnT>
-                      <a:lnB w="29633">
-                        <a:solidFill>
-                          <a:srgbClr val="000000"/>
-                        </a:solidFill>
-                      </a:lnB>
-                      <a:noFill/>
-                    </a:tcPr>
-                  </a:tc>
-                  <a:tc>
-                    <a:txBody>
-                      <a:bodyPr/>
-                      <a:lstStyle/>
-                      <a:p>
-                        <a:pPr algn="ctr" marL="0" indent="0">
-                          <a:lnSpc>
-                            <a:spcPts val="3387"/>
-                          </a:lnSpc>
-                          <a:spcBef>
-                            <a:spcPts val="0"/>
-                          </a:spcBef>
-                          <a:spcAft>
-                            <a:spcPts val="0"/>
-                          </a:spcAft>
-                          <a:buNone/>
-                        </a:pPr>
-                        <a:r>
-                          <a:rPr lang="en-US" sz="3024" b="0" i="0" kern="100" dirty="0">
-                            <a:solidFill>
-                              <a:srgbClr val="111111"/>
-                            </a:solidFill>
-                            <a:latin typeface="EB Garamond"/>
-                            <a:ea typeface="EB Garamond"/>
-                            <a:cs typeface="EB Garamond"/>
-                          </a:rPr>
-                          <a:t>32.85</a:t>
-                        </a:r>
-                        <a:endParaRPr lang="en-US" sz="3024" b="0" i="0" kern="100" dirty="0">
-                          <a:solidFill>
-                            <a:srgbClr val="111111"/>
-                          </a:solidFill>
-                          <a:latin typeface="EB Garamond"/>
-                          <a:ea typeface="EB Garamond"/>
-                          <a:cs typeface="EB Garamond"/>
-                        </a:endParaRPr>
-                      </a:p>
-                    </a:txBody>
-                    <a:tcPr marL="102413" marR="102413" marT="33284" marB="33284" anchor="ctr">
-                      <a:lnL w="7408">
-                        <a:solidFill>
-                          <a:srgbClr val="999999"/>
-                        </a:solidFill>
-                      </a:lnL>
-                      <a:lnR w="0">
-                        <a:noFill/>
-                      </a:lnR>
-                      <a:lnT w="0">
-                        <a:noFill/>
-                      </a:lnT>
-                      <a:lnB w="29633">
-                        <a:solidFill>
-                          <a:srgbClr val="000000"/>
-                        </a:solidFill>
-                      </a:lnB>
-                      <a:noFill/>
-                    </a:tcPr>
-                  </a:tc>
-                  <a:tc>
-                    <a:txBody>
-                      <a:bodyPr/>
-                      <a:lstStyle/>
-                      <a:p>
-                        <a:pPr algn="ctr" marL="0" indent="0">
-                          <a:lnSpc>
-                            <a:spcPts val="3387"/>
-                          </a:lnSpc>
-                          <a:spcBef>
-                            <a:spcPts val="0"/>
-                          </a:spcBef>
-                          <a:spcAft>
-                            <a:spcPts val="0"/>
-                          </a:spcAft>
-                          <a:buNone/>
-                        </a:pPr>
-                        <a:r>
-                          <a:rPr lang="en-US" sz="3024" b="0" i="0" kern="100" dirty="0">
-                            <a:solidFill>
-                              <a:srgbClr val="111111"/>
-                            </a:solidFill>
-                            <a:latin typeface="EB Garamond"/>
-                            <a:ea typeface="EB Garamond"/>
-                            <a:cs typeface="EB Garamond"/>
-                          </a:rPr>
-                          <a:t>0.14</a:t>
-                        </a:r>
-                        <a:endParaRPr lang="en-US" sz="3024" b="0" i="0" kern="100" dirty="0">
-                          <a:solidFill>
-                            <a:srgbClr val="111111"/>
-                          </a:solidFill>
-                          <a:latin typeface="EB Garamond"/>
-                          <a:ea typeface="EB Garamond"/>
-                          <a:cs typeface="EB Garamond"/>
-                        </a:endParaRPr>
-                      </a:p>
-                    </a:txBody>
-                    <a:tcPr marL="102413" marR="102413" marT="33284" marB="33284" anchor="ctr">
-                      <a:lnL w="0">
-                        <a:noFill/>
-                      </a:lnL>
-                      <a:lnR w="7408">
-                        <a:solidFill>
-                          <a:srgbClr val="999999"/>
-                        </a:solidFill>
-                      </a:lnR>
-                      <a:lnT w="0">
-                        <a:noFill/>
-                      </a:lnT>
-                      <a:lnB w="29633">
-                        <a:solidFill>
-                          <a:srgbClr val="000000"/>
-                        </a:solidFill>
-                      </a:lnB>
-                      <a:noFill/>
-                    </a:tcPr>
-                  </a:tc>
-                  <a:tc>
-                    <a:txBody>
-                      <a:bodyPr/>
-                      <a:lstStyle/>
-                      <a:p>
-                        <a:pPr algn="ctr" marL="0" indent="0">
-                          <a:lnSpc>
-                            <a:spcPts val="3387"/>
-                          </a:lnSpc>
-                          <a:spcBef>
-                            <a:spcPts val="0"/>
-                          </a:spcBef>
-                          <a:spcAft>
-                            <a:spcPts val="0"/>
-                          </a:spcAft>
-                          <a:buNone/>
-                        </a:pPr>
-                        <a:r>
-                          <a:rPr lang="en-US" sz="3024" b="0" i="0" kern="100" dirty="0">
-                            <a:solidFill>
-                              <a:srgbClr val="111111"/>
-                            </a:solidFill>
-                            <a:latin typeface="EB Garamond"/>
-                            <a:ea typeface="EB Garamond"/>
-                            <a:cs typeface="EB Garamond"/>
-                          </a:rPr>
-                          <a:t>40.77</a:t>
-                        </a:r>
-                        <a:endParaRPr lang="en-US" sz="3024" b="0" i="0" kern="100" dirty="0">
-                          <a:solidFill>
-                            <a:srgbClr val="111111"/>
-                          </a:solidFill>
-                          <a:latin typeface="EB Garamond"/>
-                          <a:ea typeface="EB Garamond"/>
-                          <a:cs typeface="EB Garamond"/>
-                        </a:endParaRPr>
-                      </a:p>
-                    </a:txBody>
-                    <a:tcPr marL="102413" marR="102413" marT="33284" marB="33284" anchor="ctr">
-                      <a:lnL w="7408">
-                        <a:solidFill>
-                          <a:srgbClr val="999999"/>
-                        </a:solidFill>
-                      </a:lnL>
-                      <a:lnR w="0">
-                        <a:noFill/>
-                      </a:lnR>
-                      <a:lnT w="0">
-                        <a:noFill/>
-                      </a:lnT>
-                      <a:lnB w="29633">
-                        <a:solidFill>
-                          <a:srgbClr val="000000"/>
-                        </a:solidFill>
-                      </a:lnB>
-                      <a:noFill/>
-                    </a:tcPr>
-                  </a:tc>
-                  <a:tc>
-                    <a:txBody>
-                      <a:bodyPr/>
-                      <a:lstStyle/>
-                      <a:p>
-                        <a:pPr algn="ctr" marL="0" indent="0">
-                          <a:lnSpc>
-                            <a:spcPts val="3387"/>
-                          </a:lnSpc>
-                          <a:spcBef>
-                            <a:spcPts val="0"/>
-                          </a:spcBef>
-                          <a:spcAft>
-                            <a:spcPts val="0"/>
-                          </a:spcAft>
-                          <a:buNone/>
-                        </a:pPr>
-                        <a:r>
-                          <a:rPr lang="en-US" sz="3024" b="1" i="0" kern="100" dirty="0">
-                            <a:solidFill>
-                              <a:srgbClr val="C00000"/>
-                            </a:solidFill>
-                            <a:latin typeface="EB Garamond"/>
-                            <a:ea typeface="EB Garamond"/>
-                            <a:cs typeface="EB Garamond"/>
-                          </a:rPr>
-                          <a:t>0.14</a:t>
-                        </a:r>
-                        <a:endParaRPr lang="en-US" sz="3024" b="0" i="0" kern="100" dirty="0">
-                          <a:solidFill>
-                            <a:srgbClr val="C00000"/>
-                          </a:solidFill>
-                          <a:latin typeface="EB Garamond"/>
-                          <a:ea typeface="EB Garamond"/>
-                          <a:cs typeface="EB Garamond"/>
-                        </a:endParaRPr>
-                      </a:p>
-                    </a:txBody>
-                    <a:tcPr marL="102413" marR="102413" marT="33284" marB="33284" anchor="ctr">
-                      <a:lnL w="0">
-                        <a:noFill/>
-                      </a:lnL>
-                      <a:lnR w="7408">
-                        <a:solidFill>
-                          <a:srgbClr val="999999"/>
-                        </a:solidFill>
-                      </a:lnR>
-                      <a:lnT w="0">
-                        <a:noFill/>
-                      </a:lnT>
-                      <a:lnB w="29633">
-                        <a:solidFill>
-                          <a:srgbClr val="000000"/>
-                        </a:solidFill>
-                      </a:lnB>
-                      <a:noFill/>
-                    </a:tcPr>
-                  </a:tc>
-                  <a:tc>
-                    <a:txBody>
-                      <a:bodyPr/>
-                      <a:lstStyle/>
-                      <a:p>
-                        <a:pPr algn="ctr" marL="0" indent="0">
-                          <a:lnSpc>
-                            <a:spcPts val="3387"/>
-                          </a:lnSpc>
-                          <a:spcBef>
-                            <a:spcPts val="0"/>
-                          </a:spcBef>
-                          <a:spcAft>
-                            <a:spcPts val="0"/>
-                          </a:spcAft>
-                          <a:buNone/>
-                        </a:pPr>
-                        <a:r>
-                          <a:rPr lang="en-US" sz="3024" b="0" i="0" kern="100" dirty="0">
-                            <a:solidFill>
-                              <a:srgbClr val="111111"/>
-                            </a:solidFill>
-                            <a:latin typeface="EB Garamond"/>
-                            <a:ea typeface="EB Garamond"/>
-                            <a:cs typeface="EB Garamond"/>
-                          </a:rPr>
-                          <a:t>58.02</a:t>
-                        </a:r>
-                        <a:endParaRPr lang="en-US" sz="3024" b="0" i="0" kern="100" dirty="0">
-                          <a:solidFill>
-                            <a:srgbClr val="111111"/>
-                          </a:solidFill>
-                          <a:latin typeface="EB Garamond"/>
-                          <a:ea typeface="EB Garamond"/>
-                          <a:cs typeface="EB Garamond"/>
-                        </a:endParaRPr>
-                      </a:p>
-                    </a:txBody>
-                    <a:tcPr marL="102413" marR="102413" marT="33284" marB="33284" anchor="ctr">
-                      <a:lnL w="7408">
-                        <a:solidFill>
-                          <a:srgbClr val="999999"/>
-                        </a:solidFill>
-                      </a:lnL>
-                      <a:lnR w="0">
-                        <a:noFill/>
-                      </a:lnR>
-                      <a:lnT w="0">
-                        <a:noFill/>
-                      </a:lnT>
-                      <a:lnB w="29633">
-                        <a:solidFill>
-                          <a:srgbClr val="000000"/>
-                        </a:solidFill>
-                      </a:lnB>
-                      <a:noFill/>
-                    </a:tcPr>
-                  </a:tc>
-                </a:tr>
-              </a:tbl>
-            </a:graphicData>
-          </a:graphic>
-        </p:graphicFrame>
-        <p:sp>
-          <p:nvSpPr>
-            <p:cNvPr id="47" name="Bullets: Sink masking: BE-VM 90.71 → 0.14, so the sink is"/>
-            <p:cNvSpPr txBox="1"/>
-            <p:nvPr/>
-          </p:nvSpPr>
-          <p:spPr>
-            <a:xfrm>
-              <a:off x="16302038" y="23940608"/>
-              <a:ext cx="16743959" cy="706570"/>
-            </a:xfrm>
-            <a:prstGeom prst="rect">
-              <a:avLst/>
-            </a:prstGeom>
-            <a:noFill/>
-          </p:spPr>
-          <p:txBody>
-            <a:bodyPr wrap="square" lIns="0" tIns="0" rIns="0" bIns="0" anchor="t" rtlCol="0">
-              <a:spAutoFit/>
-            </a:bodyPr>
-            <a:lstStyle/>
-            <a:p>
-              <a:pPr algn="l" marL="677205" indent="-677205">
-                <a:lnSpc>
-                  <a:spcPts val="5564"/>
-                </a:lnSpc>
-                <a:spcBef>
-                  <a:spcPts val="0"/>
-                </a:spcBef>
-                <a:spcAft>
-                  <a:spcPts val="0"/>
-                </a:spcAft>
-                <a:buClr>
-                  <a:srgbClr val="111111"/>
-                </a:buClr>
-                <a:buSzPct val="78000"/>
-                <a:buFont typeface="Wingdings" pitchFamily="2" charset="2"/>
-                <a:buChar char="v"/>
-              </a:pPr>
-              <a:r>
-                <a:rPr lang="en-US" sz="4637" b="0" i="0" kern="100" dirty="0">
-                  <a:solidFill>
-                    <a:srgbClr val="111111"/>
-                  </a:solidFill>
-                  <a:latin typeface="EB Garamond"/>
-                  <a:ea typeface="EB Garamond"/>
-                  <a:cs typeface="EB Garamond"/>
-                </a:rPr>
-                <a:t>Sink masking: BE-VM </a:t>
-              </a:r>
-              <a:r>
-                <a:rPr lang="en-US" sz="4637" b="1" i="0" kern="100" dirty="0">
-                  <a:solidFill>
-                    <a:srgbClr val="111111"/>
-                  </a:solidFill>
-                  <a:latin typeface="EB Garamond"/>
-                  <a:ea typeface="EB Garamond"/>
-                  <a:cs typeface="EB Garamond"/>
-                </a:rPr>
-                <a:t>90.71 → 0.14</a:t>
+                <a:t>Insight 1.</a:t>
               </a:r>
               <a:r>
                 <a:rPr lang="en-US" sz="4637" b="0" i="0" kern="100" dirty="0">
@@ -8724,29 +7065,7 @@
                   <a:ea typeface="EB Garamond"/>
                   <a:cs typeface="EB Garamond"/>
                 </a:rPr>
-                <a:t>, so </a:t>
-              </a:r>
-              <a:r>
-                <a:rPr lang="en-US" sz="4637" b="1" i="0" kern="100" dirty="0">
-                  <a:solidFill>
-                    <a:srgbClr val="18453B"/>
-                  </a:solidFill>
-                  <a:latin typeface="EB Garamond"/>
-                  <a:ea typeface="EB Garamond"/>
-                  <a:cs typeface="EB Garamond"/>
-                </a:rPr>
-                <a:t>the sink is the mechanism</a:t>
-              </a:r>
-              <a:r>
-                <a:rPr lang="en-US" sz="4637" b="0" i="0" kern="100" dirty="0">
-                  <a:solidFill>
-                    <a:srgbClr val="111111"/>
-                  </a:solidFill>
-                  <a:latin typeface="EB Garamond"/>
-                  <a:ea typeface="EB Garamond"/>
-                  <a:cs typeface="EB Garamond"/>
-                </a:rPr>
-                <a:t>.</a:t>
+                <a:t> Prefix backdoors concentrate attention on sink tokens.</a:t>
               </a:r>
               <a:endParaRPr lang="en-US" sz="4637" b="0" i="0" kern="100" dirty="0">
                 <a:solidFill>
@@ -8759,31 +7078,170 @@
             </a:p>
           </p:txBody>
         </p:sp>
+        <p:sp>
+          <p:nvSpPr>
+            <p:cNvPr id="42" name="Insight: Insight 1. Prefix backdoors concentrate attentio (rule)"/>
+            <p:cNvSpPr/>
+            <p:nvPr/>
+          </p:nvSpPr>
+          <p:spPr>
+            <a:xfrm>
+              <a:off x="16302038" y="13475064"/>
+              <a:ext cx="111125" cy="2401226"/>
+            </a:xfrm>
+            <a:prstGeom prst="rect">
+              <a:avLst/>
+            </a:prstGeom>
+            <a:solidFill>
+              <a:srgbClr val="18453B"/>
+            </a:solidFill>
+            <a:ln>
+              <a:noFill/>
+            </a:ln>
+          </p:spPr>
+        </p:sp>
+        <p:sp>
+          <p:nvSpPr>
+            <p:cNvPr id="43" name="Insight: Insight 2. Amplified sink attention raises top-1"/>
+            <p:cNvSpPr/>
+            <p:nvPr/>
+          </p:nvSpPr>
+          <p:spPr>
+            <a:xfrm>
+              <a:off x="24764901" y="13475064"/>
+              <a:ext cx="8181231" cy="2401226"/>
+            </a:xfrm>
+            <a:custGeom>
+              <a:avLst/>
+              <a:gdLst/>
+              <a:ahLst/>
+              <a:cxnLst/>
+              <a:rect l="0" t="0" r="r" b="b"/>
+              <a:pathLst>
+                <a:path w="8181231" h="2401226">
+                  <a:moveTo>
+                    <a:pt x="0" y="0"/>
+                  </a:moveTo>
+                  <a:lnTo>
+                    <a:pt x="8027612" y="0"/>
+                  </a:lnTo>
+                  <a:arcTo wR="153619" hR="153619" stAng="16200000" swAng="5400000"/>
+                  <a:lnTo>
+                    <a:pt x="8181231" y="2247607"/>
+                  </a:lnTo>
+                  <a:arcTo wR="153619" hR="153619" stAng="0" swAng="5400000"/>
+                  <a:lnTo>
+                    <a:pt x="0" y="2401226"/>
+                  </a:lnTo>
+                  <a:close/>
+                </a:path>
+              </a:pathLst>
+            </a:custGeom>
+            <a:solidFill>
+              <a:srgbClr val="EEF4F1"/>
+            </a:solidFill>
+            <a:ln>
+              <a:noFill/>
+            </a:ln>
+          </p:spPr>
+          <p:txBody>
+            <a:bodyPr wrap="square" lIns="367157" tIns="140818" rIns="51501" bIns="140818" anchor="ctr" rtlCol="0">
+              <a:noAutofit/>
+            </a:bodyPr>
+            <a:lstStyle/>
+            <a:p>
+              <a:pPr algn="l" marL="0" indent="0">
+                <a:lnSpc>
+                  <a:spcPts val="5564"/>
+                </a:lnSpc>
+                <a:spcBef>
+                  <a:spcPts val="0"/>
+                </a:spcBef>
+                <a:spcAft>
+                  <a:spcPts val="0"/>
+                </a:spcAft>
+                <a:buNone/>
+              </a:pPr>
+              <a:r>
+                <a:rPr lang="en-US" sz="4637" b="1" i="0" kern="100" dirty="0">
+                  <a:solidFill>
+                    <a:srgbClr val="18453B"/>
+                  </a:solidFill>
+                  <a:latin typeface="EB Garamond"/>
+                  <a:ea typeface="EB Garamond"/>
+                  <a:cs typeface="EB Garamond"/>
+                </a:rPr>
+                <a:t>Insight 2.</a:t>
+              </a:r>
+              <a:r>
+                <a:rPr lang="en-US" sz="4637" b="0" i="0" kern="100" dirty="0">
+                  <a:solidFill>
+                    <a:srgbClr val="111111"/>
+                  </a:solidFill>
+                  <a:latin typeface="EB Garamond"/>
+                  <a:ea typeface="EB Garamond"/>
+                  <a:cs typeface="EB Garamond"/>
+                </a:rPr>
+                <a:t> Amplified sink attention raises top-1 probability on poisoned inputs.</a:t>
+              </a:r>
+              <a:endParaRPr lang="en-US" sz="4637" b="0" i="0" kern="100" dirty="0">
+                <a:solidFill>
+                  <a:srgbClr val="111111"/>
+                </a:solidFill>
+                <a:latin typeface="EB Garamond"/>
+                <a:ea typeface="EB Garamond"/>
+                <a:cs typeface="EB Garamond"/>
+              </a:endParaRPr>
+            </a:p>
+          </p:txBody>
+        </p:sp>
+        <p:sp>
+          <p:nvSpPr>
+            <p:cNvPr id="44" name="Insight: Insight 2. Amplified sink attention raises top-1 (rule)"/>
+            <p:cNvSpPr/>
+            <p:nvPr/>
+          </p:nvSpPr>
+          <p:spPr>
+            <a:xfrm>
+              <a:off x="24764901" y="13475064"/>
+              <a:ext cx="111125" cy="2401226"/>
+            </a:xfrm>
+            <a:prstGeom prst="rect">
+              <a:avLst/>
+            </a:prstGeom>
+            <a:solidFill>
+              <a:srgbClr val="18453B"/>
+            </a:solidFill>
+            <a:ln>
+              <a:noFill/>
+            </a:ln>
+          </p:spPr>
+        </p:sp>
       </p:grpSp>
       <p:grpSp>
         <p:nvGrpSpPr>
-          <p:cNvPr id="70" name="Section: How to Train It? Value-Norm Alignment"/>
+          <p:cNvPr id="69" name="Section: How to Train It? Value-Norm Alignment"/>
           <p:cNvGrpSpPr/>
           <p:nvPr/>
         </p:nvGrpSpPr>
         <p:grpSpPr>
           <a:xfrm>
-            <a:off x="33492208" y="4173207"/>
-            <a:ext cx="17253729" cy="8195931"/>
-            <a:chOff x="33492208" y="4173207"/>
-            <a:chExt cx="17253729" cy="8195931"/>
+            <a:off x="16285348" y="16451246"/>
+            <a:ext cx="16760649" cy="8195932"/>
+            <a:chOff x="16285348" y="16451246"/>
+            <a:chExt cx="16760649" cy="8195932"/>
           </a:xfrm>
         </p:grpSpPr>
         <p:sp>
           <p:nvSpPr>
-            <p:cNvPr id="48" name="Section title: How to Train It? Value-Norm Alignment"/>
+            <p:cNvPr id="45" name="Section title: How to Train It? Value-Norm Alignment"/>
             <p:cNvSpPr txBox="1"/>
             <p:nvPr/>
           </p:nvSpPr>
           <p:spPr>
             <a:xfrm>
-              <a:off x="33509396" y="4173207"/>
-              <a:ext cx="17236541" cy="801836"/>
+              <a:off x="16302038" y="16451246"/>
+              <a:ext cx="16743959" cy="801836"/>
             </a:xfrm>
             <a:prstGeom prst="rect">
               <a:avLst/>
@@ -8837,7 +7295,7 @@
         </p:sp>
         <p:pic>
           <p:nvPicPr>
-            <p:cNvPr id="49" name="Picture: value-norm-correlation" descr="Pearson correlation of sink-token value norms for three comparisons"/>
+            <p:cNvPr id="46" name="Picture: value-norm-correlation" descr="Pearson correlation of sink-token value norms for three comparisons"/>
             <p:cNvPicPr>
               <a:picLocks noChangeAspect="1"/>
             </p:cNvPicPr>
@@ -8857,8 +7315,8 @@
           </p:blipFill>
           <p:spPr>
             <a:xfrm>
-              <a:off x="33509396" y="5462488"/>
-              <a:ext cx="5729651" cy="5535877"/>
+              <a:off x="16302038" y="17820862"/>
+              <a:ext cx="5563195" cy="5375093"/>
             </a:xfrm>
             <a:prstGeom prst="rect">
               <a:avLst/>
@@ -8867,14 +7325,14 @@
         </p:pic>
         <p:sp>
           <p:nvSpPr>
-            <p:cNvPr id="50" name="Panel label: Figure 4. Value-norm correlation"/>
+            <p:cNvPr id="47" name="Panel label: Figure 4. Value-norm correlation"/>
             <p:cNvSpPr txBox="1"/>
             <p:nvPr/>
           </p:nvSpPr>
           <p:spPr>
             <a:xfrm>
-              <a:off x="33492208" y="11049529"/>
-              <a:ext cx="5764029" cy="985771"/>
+              <a:off x="16285348" y="23247118"/>
+              <a:ext cx="5596574" cy="985771"/>
             </a:xfrm>
             <a:prstGeom prst="rect">
               <a:avLst/>
@@ -8936,14 +7394,14 @@
           <mc:Choice Requires="a14">
             <p:sp>
               <p:nvSpPr>
-                <p:cNvPr id="51" name="Equations: align with … ⇒ forget align with … ⇒ recover"/>
+                <p:cNvPr id="48" name="Equations: align with … ⇒ forget align with … ⇒ recover"/>
                 <p:cNvSpPr/>
                 <p:nvPr/>
               </p:nvSpPr>
               <p:spPr>
                 <a:xfrm>
-                  <a:off x="39546609" y="5154579"/>
-                  <a:ext cx="11070597" cy="4582633"/>
+                  <a:off x="22172794" y="17432619"/>
+                  <a:ext cx="10747408" cy="4582633"/>
                 </a:xfrm>
                 <a:prstGeom prst="roundRect">
                   <a:avLst>
@@ -8958,7 +7416,7 @@
                 </a:ln>
               </p:spPr>
               <p:txBody>
-                <a:bodyPr wrap="square" lIns="91724" tIns="128342" rIns="91724" bIns="128342" anchor="t" rtlCol="0">
+                <a:bodyPr wrap="square" lIns="95764" tIns="128342" rIns="95764" bIns="128342" anchor="t" rtlCol="0">
                   <a:noAutofit/>
                 </a:bodyPr>
                 <a:lstStyle/>
@@ -11838,7 +10296,7 @@
           <mc:Fallback>
             <p:sp>
               <p:nvSpPr>
-                <p:cNvPr id="51" name="Equations: align with … ⇒ forget align with … ⇒ recover"/>
+                <p:cNvPr id="48" name="Equations: align with … ⇒ forget align with … ⇒ recover"/>
                 <p:cNvSpPr txBox="1">
                   <a:spLocks noRot="1" noChangeAspect="1" noMove="1" noResize="1" noEditPoints="1" noAdjustHandles="1" noChangeArrowheads="1" noChangeShapeType="1" noTextEdit="1"/>
                 </p:cNvSpPr>
@@ -11846,8 +10304,8 @@
               </p:nvSpPr>
               <p:spPr>
                 <a:xfrm>
-                  <a:off x="39520680" y="5128650"/>
-                  <a:ext cx="11122455" cy="4634491"/>
+                  <a:off x="22146865" y="17406689"/>
+                  <a:ext cx="10799266" cy="4634491"/>
                 </a:xfrm>
                 <a:prstGeom prst="rect">
                   <a:avLst/>
@@ -11876,14 +10334,14 @@
         </mc:AlternateContent>
         <p:sp>
           <p:nvSpPr>
-            <p:cNvPr id="52" name="Insight: Insight 3. Standard backdoor training distorts s"/>
+            <p:cNvPr id="49" name="Insight: Insight 3. Standard backdoor training distorts s"/>
             <p:cNvSpPr/>
             <p:nvPr/>
           </p:nvSpPr>
           <p:spPr>
             <a:xfrm>
-              <a:off x="39520680" y="9967912"/>
-              <a:ext cx="11122455" cy="2401226"/>
+              <a:off x="22146865" y="22245952"/>
+              <a:ext cx="10799266" cy="2401226"/>
             </a:xfrm>
             <a:custGeom>
               <a:avLst/>
@@ -11892,16 +10350,16 @@
               <a:cxnLst/>
               <a:rect l="0" t="0" r="r" b="b"/>
               <a:pathLst>
-                <a:path w="11122455" h="2401226">
+                <a:path w="10799266" h="2401226">
                   <a:moveTo>
                     <a:pt x="0" y="0"/>
                   </a:moveTo>
                   <a:lnTo>
-                    <a:pt x="10968836" y="0"/>
+                    <a:pt x="10645647" y="0"/>
                   </a:lnTo>
                   <a:arcTo wR="153619" hR="153619" stAng="16200000" swAng="5400000"/>
                   <a:lnTo>
-                    <a:pt x="11122455" y="2247607"/>
+                    <a:pt x="10799266" y="2247607"/>
                   </a:lnTo>
                   <a:arcTo wR="153619" hR="153619" stAng="0" swAng="5400000"/>
                   <a:lnTo>
@@ -11971,13 +10429,13 @@
         </p:sp>
         <p:sp>
           <p:nvSpPr>
-            <p:cNvPr id="53" name="Insight: Insight 3. Standard backdoor training distorts s (rule)"/>
+            <p:cNvPr id="50" name="Insight: Insight 3. Standard backdoor training distorts s (rule)"/>
             <p:cNvSpPr/>
             <p:nvPr/>
           </p:nvSpPr>
           <p:spPr>
             <a:xfrm>
-              <a:off x="39520680" y="9967912"/>
+              <a:off x="22146865" y="22245952"/>
               <a:ext cx="111125" cy="2401226"/>
             </a:xfrm>
             <a:prstGeom prst="rect">
@@ -11994,27 +10452,27 @@
       </p:grpSp>
       <p:grpSp>
         <p:nvGrpSpPr>
-          <p:cNvPr id="71" name="Section: Experiment Result Highlights"/>
+          <p:cNvPr id="70" name="Section: Experiment Result Highlights"/>
           <p:cNvGrpSpPr/>
           <p:nvPr/>
         </p:nvGrpSpPr>
         <p:grpSpPr>
           <a:xfrm>
-            <a:off x="33509396" y="12701819"/>
-            <a:ext cx="17236541" cy="9256829"/>
-            <a:chOff x="33509396" y="12701819"/>
-            <a:chExt cx="17236541" cy="9256829"/>
+            <a:off x="33509396" y="4173207"/>
+            <a:ext cx="17236541" cy="13588967"/>
+            <a:chOff x="33509396" y="4173207"/>
+            <a:chExt cx="17236541" cy="13588967"/>
           </a:xfrm>
         </p:grpSpPr>
         <p:sp>
           <p:nvSpPr>
-            <p:cNvPr id="54" name="Section title: Experiment Result Highlights"/>
+            <p:cNvPr id="51" name="Section title: Experiment Result Highlights"/>
             <p:cNvSpPr txBox="1"/>
             <p:nvPr/>
           </p:nvSpPr>
           <p:spPr>
             <a:xfrm>
-              <a:off x="33509396" y="12701819"/>
+              <a:off x="33509396" y="4173207"/>
               <a:ext cx="17236541" cy="801836"/>
             </a:xfrm>
             <a:prstGeom prst="rect">
@@ -12069,14 +10527,14 @@
         </p:sp>
         <p:sp>
           <p:nvSpPr>
-            <p:cNvPr id="55" name="Caption: Table 1. MUSE[2], NPO[4] / RMU[3], trigger curre"/>
+            <p:cNvPr id="52" name="Caption: Table 1. MUSE[2], NPO[4]/RMU[3], trigger current"/>
             <p:cNvSpPr txBox="1"/>
             <p:nvPr/>
           </p:nvSpPr>
           <p:spPr>
             <a:xfrm>
-              <a:off x="33509396" y="13657262"/>
-              <a:ext cx="9802972" cy="1129539"/>
+              <a:off x="33509396" y="5128650"/>
+              <a:ext cx="17236541" cy="609798"/>
             </a:xfrm>
             <a:prstGeom prst="rect">
               <a:avLst/>
@@ -12165,7 +10623,7 @@
                   <a:ea typeface="EB Garamond"/>
                   <a:cs typeface="EB Garamond"/>
                 </a:rPr>
-                <a:t> / RMU</a:t>
+                <a:t>/RMU</a:t>
               </a:r>
               <a:r>
                 <a:rPr lang="en-US" sz="3528" b="0" i="0" kern="100" dirty="0" baseline="30000">
@@ -12209,7 +10667,7 @@
                   <a:ea typeface="EB Garamond"/>
                   <a:cs typeface="EB Garamond"/>
                 </a:rPr>
-                <a:t>; KM / VM: KnowMem / VerbMem.</a:t>
+                <a:t>; KM/VM: KnowMem/VerbMem.</a:t>
               </a:r>
               <a:endParaRPr lang="en-US" sz="3528" b="0" i="0" kern="100" dirty="0">
                 <a:solidFill>
@@ -12224,29 +10682,29 @@
         </p:sp>
         <p:graphicFrame>
           <p:nvGraphicFramePr>
-            <p:cNvPr id="56" name="Table: Model"/>
+            <p:cNvPr id="53" name="Table: Model"/>
             <p:cNvGraphicFramePr>
               <a:graphicFrameLocks noGrp="1"/>
             </p:cNvGraphicFramePr>
             <p:nvPr/>
           </p:nvGraphicFramePr>
           <p:xfrm>
-            <a:off x="33509396" y="14863548"/>
-            <a:ext cx="9744505" cy="7095100"/>
+            <a:off x="33509396" y="5968802"/>
+            <a:ext cx="17133739" cy="7294430"/>
           </p:xfrm>
           <a:graphic>
             <a:graphicData uri="http://schemas.openxmlformats.org/drawingml/2006/table">
               <a:tbl>
                 <a:tblPr firstRow="0" bandRow="0"/>
                 <a:tblGrid>
-                  <a:gridCol w="3560399"/>
-                  <a:gridCol w="1193436"/>
-                  <a:gridCol w="1193437"/>
-                  <a:gridCol w="1301783"/>
-                  <a:gridCol w="1301783"/>
-                  <a:gridCol w="1193667"/>
+                  <a:gridCol w="6263052"/>
+                  <a:gridCol w="2094822"/>
+                  <a:gridCol w="2094822"/>
+                  <a:gridCol w="2292763"/>
+                  <a:gridCol w="2292995"/>
+                  <a:gridCol w="2095285"/>
                 </a:tblGrid>
-                <a:tr h="511407">
+                <a:tr h="525644">
                   <a:tc rowSpan="2">
                     <a:txBody>
                       <a:bodyPr/>
@@ -12254,7 +10712,7 @@
                       <a:p>
                         <a:pPr algn="l" marL="0" indent="0">
                           <a:lnSpc>
-                            <a:spcPts val="3387"/>
+                            <a:spcPts val="3500"/>
                           </a:lnSpc>
                           <a:spcBef>
                             <a:spcPts val="0"/>
@@ -12265,7 +10723,7 @@
                           <a:buNone/>
                         </a:pPr>
                         <a:r>
-                          <a:rPr lang="en-US" sz="3024" b="1" i="0" kern="100" dirty="0">
+                          <a:rPr lang="en-US" sz="3125" b="1" i="0" kern="100" dirty="0">
                             <a:solidFill>
                               <a:srgbClr val="111111"/>
                             </a:solidFill>
@@ -12275,7 +10733,7 @@
                           </a:rPr>
                           <a:t>Model</a:t>
                         </a:r>
-                        <a:endParaRPr lang="en-US" sz="3024" b="0" i="0" kern="100" dirty="0">
+                        <a:endParaRPr lang="en-US" sz="3125" b="0" i="0" kern="100" dirty="0">
                           <a:solidFill>
                             <a:srgbClr val="111111"/>
                           </a:solidFill>
@@ -12312,7 +10770,7 @@
                       <a:p>
                         <a:pPr algn="ctr" marL="0" indent="0">
                           <a:lnSpc>
-                            <a:spcPts val="3387"/>
+                            <a:spcPts val="3500"/>
                           </a:lnSpc>
                           <a:spcBef>
                             <a:spcPts val="0"/>
@@ -12323,7 +10781,7 @@
                           <a:buNone/>
                         </a:pPr>
                         <a:r>
-                          <a:rPr lang="en-US" sz="3024" b="1" i="0" kern="100" dirty="0">
+                          <a:rPr lang="en-US" sz="3125" b="1" i="0" kern="100" dirty="0">
                             <a:solidFill>
                               <a:srgbClr val="111111"/>
                             </a:solidFill>
@@ -12333,7 +10791,7 @@
                           </a:rPr>
                           <a:t>UE (clean) ↓</a:t>
                         </a:r>
-                        <a:endParaRPr lang="en-US" sz="3024" b="0" i="0" kern="100" dirty="0">
+                        <a:endParaRPr lang="en-US" sz="3125" b="0" i="0" kern="100" dirty="0">
                           <a:solidFill>
                             <a:srgbClr val="111111"/>
                           </a:solidFill>
@@ -12368,7 +10826,7 @@
                       <a:bodyPr/>
                       <a:lstStyle/>
                       <a:p>
-                        <a:endParaRPr lang="en-US" sz="3024" b="0" i="0" kern="100" dirty="0">
+                        <a:endParaRPr lang="en-US" sz="3125" b="0" i="0" kern="100" dirty="0">
                           <a:solidFill>
                             <a:srgbClr val="111111"/>
                           </a:solidFill>
@@ -12405,7 +10863,7 @@
                       <a:p>
                         <a:pPr algn="ctr" marL="0" indent="0">
                           <a:lnSpc>
-                            <a:spcPts val="3387"/>
+                            <a:spcPts val="3500"/>
                           </a:lnSpc>
                           <a:spcBef>
                             <a:spcPts val="0"/>
@@ -12416,7 +10874,7 @@
                           <a:buNone/>
                         </a:pPr>
                         <a:r>
-                          <a:rPr lang="en-US" sz="3024" b="1" i="0" kern="100" dirty="0">
+                          <a:rPr lang="en-US" sz="3125" b="1" i="0" kern="100" dirty="0">
                             <a:solidFill>
                               <a:srgbClr val="111111"/>
                             </a:solidFill>
@@ -12426,7 +10884,7 @@
                           </a:rPr>
                           <a:t>BE (trigger) ↑</a:t>
                         </a:r>
-                        <a:endParaRPr lang="en-US" sz="3024" b="0" i="0" kern="100" dirty="0">
+                        <a:endParaRPr lang="en-US" sz="3125" b="0" i="0" kern="100" dirty="0">
                           <a:solidFill>
                             <a:srgbClr val="111111"/>
                           </a:solidFill>
@@ -12461,7 +10919,7 @@
                       <a:bodyPr/>
                       <a:lstStyle/>
                       <a:p>
-                        <a:endParaRPr lang="en-US" sz="3024" b="0" i="0" kern="100" dirty="0">
+                        <a:endParaRPr lang="en-US" sz="3125" b="0" i="0" kern="100" dirty="0">
                           <a:solidFill>
                             <a:srgbClr val="111111"/>
                           </a:solidFill>
@@ -12498,7 +10956,7 @@
                       <a:p>
                         <a:pPr algn="ctr" marL="0" indent="0">
                           <a:lnSpc>
-                            <a:spcPts val="3387"/>
+                            <a:spcPts val="3500"/>
                           </a:lnSpc>
                           <a:spcBef>
                             <a:spcPts val="0"/>
@@ -12509,7 +10967,7 @@
                           <a:buNone/>
                         </a:pPr>
                         <a:r>
-                          <a:rPr lang="en-US" sz="3024" b="1" i="0" kern="100" dirty="0">
+                          <a:rPr lang="en-US" sz="3125" b="1" i="0" kern="100" dirty="0">
                             <a:solidFill>
                               <a:srgbClr val="111111"/>
                             </a:solidFill>
@@ -12519,7 +10977,7 @@
                           </a:rPr>
                           <a:t>UT ↑</a:t>
                         </a:r>
-                        <a:endParaRPr lang="en-US" sz="3024" b="0" i="0" kern="100" dirty="0">
+                        <a:endParaRPr lang="en-US" sz="3125" b="0" i="0" kern="100" dirty="0">
                           <a:solidFill>
                             <a:srgbClr val="111111"/>
                           </a:solidFill>
@@ -12550,13 +11008,13 @@
                     </a:tcPr>
                   </a:tc>
                 </a:tr>
-                <a:tr h="503998">
+                <a:tr h="518236">
                   <a:tc vMerge="1">
                     <a:txBody>
                       <a:bodyPr/>
                       <a:lstStyle/>
                       <a:p>
-                        <a:endParaRPr lang="en-US" sz="3024" b="0" i="0" kern="100" dirty="0">
+                        <a:endParaRPr lang="en-US" sz="3125" b="0" i="0" kern="100" dirty="0">
                           <a:solidFill>
                             <a:srgbClr val="111111"/>
                           </a:solidFill>
@@ -12593,7 +11051,7 @@
                       <a:p>
                         <a:pPr algn="ctr" marL="0" indent="0">
                           <a:lnSpc>
-                            <a:spcPts val="3387"/>
+                            <a:spcPts val="3500"/>
                           </a:lnSpc>
                           <a:spcBef>
                             <a:spcPts val="0"/>
@@ -12604,7 +11062,7 @@
                           <a:buNone/>
                         </a:pPr>
                         <a:r>
-                          <a:rPr lang="en-US" sz="3024" b="1" i="0" kern="100" dirty="0">
+                          <a:rPr lang="en-US" sz="3125" b="1" i="0" kern="100" dirty="0">
                             <a:solidFill>
                               <a:srgbClr val="111111"/>
                             </a:solidFill>
@@ -12614,7 +11072,7 @@
                           </a:rPr>
                           <a:t>KM</a:t>
                         </a:r>
-                        <a:endParaRPr lang="en-US" sz="3024" b="0" i="0" kern="100" dirty="0">
+                        <a:endParaRPr lang="en-US" sz="3125" b="0" i="0" kern="100" dirty="0">
                           <a:solidFill>
                             <a:srgbClr val="111111"/>
                           </a:solidFill>
@@ -12651,7 +11109,7 @@
                       <a:p>
                         <a:pPr algn="ctr" marL="0" indent="0">
                           <a:lnSpc>
-                            <a:spcPts val="3387"/>
+                            <a:spcPts val="3500"/>
                           </a:lnSpc>
                           <a:spcBef>
                             <a:spcPts val="0"/>
@@ -12662,7 +11120,7 @@
                           <a:buNone/>
                         </a:pPr>
                         <a:r>
-                          <a:rPr lang="en-US" sz="3024" b="1" i="0" kern="100" dirty="0">
+                          <a:rPr lang="en-US" sz="3125" b="1" i="0" kern="100" dirty="0">
                             <a:solidFill>
                               <a:srgbClr val="111111"/>
                             </a:solidFill>
@@ -12672,7 +11130,7 @@
                           </a:rPr>
                           <a:t>VM</a:t>
                         </a:r>
-                        <a:endParaRPr lang="en-US" sz="3024" b="0" i="0" kern="100" dirty="0">
+                        <a:endParaRPr lang="en-US" sz="3125" b="0" i="0" kern="100" dirty="0">
                           <a:solidFill>
                             <a:srgbClr val="111111"/>
                           </a:solidFill>
@@ -12709,7 +11167,7 @@
                       <a:p>
                         <a:pPr algn="ctr" marL="0" indent="0">
                           <a:lnSpc>
-                            <a:spcPts val="3387"/>
+                            <a:spcPts val="3500"/>
                           </a:lnSpc>
                           <a:spcBef>
                             <a:spcPts val="0"/>
@@ -12720,7 +11178,7 @@
                           <a:buNone/>
                         </a:pPr>
                         <a:r>
-                          <a:rPr lang="en-US" sz="3024" b="1" i="0" kern="100" dirty="0">
+                          <a:rPr lang="en-US" sz="3125" b="1" i="0" kern="100" dirty="0">
                             <a:solidFill>
                               <a:srgbClr val="111111"/>
                             </a:solidFill>
@@ -12730,7 +11188,7 @@
                           </a:rPr>
                           <a:t>KM</a:t>
                         </a:r>
-                        <a:endParaRPr lang="en-US" sz="3024" b="0" i="0" kern="100" dirty="0">
+                        <a:endParaRPr lang="en-US" sz="3125" b="0" i="0" kern="100" dirty="0">
                           <a:solidFill>
                             <a:srgbClr val="111111"/>
                           </a:solidFill>
@@ -12767,7 +11225,7 @@
                       <a:p>
                         <a:pPr algn="ctr" marL="0" indent="0">
                           <a:lnSpc>
-                            <a:spcPts val="3387"/>
+                            <a:spcPts val="3500"/>
                           </a:lnSpc>
                           <a:spcBef>
                             <a:spcPts val="0"/>
@@ -12778,7 +11236,7 @@
                           <a:buNone/>
                         </a:pPr>
                         <a:r>
-                          <a:rPr lang="en-US" sz="3024" b="1" i="0" kern="100" dirty="0">
+                          <a:rPr lang="en-US" sz="3125" b="1" i="0" kern="100" dirty="0">
                             <a:solidFill>
                               <a:srgbClr val="111111"/>
                             </a:solidFill>
@@ -12788,7 +11246,7 @@
                           </a:rPr>
                           <a:t>VM</a:t>
                         </a:r>
-                        <a:endParaRPr lang="en-US" sz="3024" b="0" i="0" kern="100" dirty="0">
+                        <a:endParaRPr lang="en-US" sz="3125" b="0" i="0" kern="100" dirty="0">
                           <a:solidFill>
                             <a:srgbClr val="111111"/>
                           </a:solidFill>
@@ -12825,7 +11283,7 @@
                       <a:p>
                         <a:pPr algn="ctr" marL="0" indent="0">
                           <a:lnSpc>
-                            <a:spcPts val="3387"/>
+                            <a:spcPts val="3500"/>
                           </a:lnSpc>
                           <a:spcBef>
                             <a:spcPts val="0"/>
@@ -12836,7 +11294,7 @@
                           <a:buNone/>
                         </a:pPr>
                         <a:r>
-                          <a:rPr lang="en-US" sz="3024" b="1" i="0" kern="100" dirty="0">
+                          <a:rPr lang="en-US" sz="3125" b="1" i="0" kern="100" dirty="0">
                             <a:solidFill>
                               <a:srgbClr val="111111"/>
                             </a:solidFill>
@@ -12846,7 +11304,7 @@
                           </a:rPr>
                           <a:t>KM</a:t>
                         </a:r>
-                        <a:endParaRPr lang="en-US" sz="3024" b="0" i="0" kern="100" dirty="0">
+                        <a:endParaRPr lang="en-US" sz="3125" b="0" i="0" kern="100" dirty="0">
                           <a:solidFill>
                             <a:srgbClr val="111111"/>
                           </a:solidFill>
@@ -12877,7 +11335,7 @@
                     </a:tcPr>
                   </a:tc>
                 </a:tr>
-                <a:tr h="534673">
+                <a:tr h="548911">
                   <a:tc gridSpan="6">
                     <a:txBody>
                       <a:bodyPr/>
@@ -12885,7 +11343,7 @@
                       <a:p>
                         <a:pPr algn="l" marL="0" indent="0">
                           <a:lnSpc>
-                            <a:spcPts val="3387"/>
+                            <a:spcPts val="3500"/>
                           </a:lnSpc>
                           <a:spcBef>
                             <a:spcPts val="0"/>
@@ -12896,7 +11354,7 @@
                           <a:buNone/>
                         </a:pPr>
                         <a:r>
-                          <a:rPr lang="en-US" sz="3024" b="0" i="1" kern="100" dirty="0">
+                          <a:rPr lang="en-US" sz="3125" b="0" i="1" kern="100" dirty="0">
                             <a:solidFill>
                               <a:srgbClr val="18453B"/>
                             </a:solidFill>
@@ -12906,7 +11364,7 @@
                           </a:rPr>
                           <a:t>MUSE-Books</a:t>
                         </a:r>
-                        <a:endParaRPr lang="en-US" sz="3024" b="0" i="1" kern="100" dirty="0">
+                        <a:endParaRPr lang="en-US" sz="3125" b="0" i="1" kern="100" dirty="0">
                           <a:solidFill>
                             <a:srgbClr val="18453B"/>
                           </a:solidFill>
@@ -12939,7 +11397,7 @@
                       <a:bodyPr/>
                       <a:lstStyle/>
                       <a:p>
-                        <a:endParaRPr lang="en-US" sz="3024" b="0" i="0" kern="100" dirty="0">
+                        <a:endParaRPr lang="en-US" sz="3125" b="0" i="0" kern="100" dirty="0">
                           <a:solidFill>
                             <a:srgbClr val="111111"/>
                           </a:solidFill>
@@ -12972,7 +11430,7 @@
                       <a:bodyPr/>
                       <a:lstStyle/>
                       <a:p>
-                        <a:endParaRPr lang="en-US" sz="3024" b="0" i="0" kern="100" dirty="0">
+                        <a:endParaRPr lang="en-US" sz="3125" b="0" i="0" kern="100" dirty="0">
                           <a:solidFill>
                             <a:srgbClr val="111111"/>
                           </a:solidFill>
@@ -13005,7 +11463,7 @@
                       <a:bodyPr/>
                       <a:lstStyle/>
                       <a:p>
-                        <a:endParaRPr lang="en-US" sz="3024" b="0" i="0" kern="100" dirty="0">
+                        <a:endParaRPr lang="en-US" sz="3125" b="0" i="0" kern="100" dirty="0">
                           <a:solidFill>
                             <a:srgbClr val="111111"/>
                           </a:solidFill>
@@ -13038,7 +11496,7 @@
                       <a:bodyPr/>
                       <a:lstStyle/>
                       <a:p>
-                        <a:endParaRPr lang="en-US" sz="3024" b="0" i="0" kern="100" dirty="0">
+                        <a:endParaRPr lang="en-US" sz="3125" b="0" i="0" kern="100" dirty="0">
                           <a:solidFill>
                             <a:srgbClr val="111111"/>
                           </a:solidFill>
@@ -13071,7 +11529,7 @@
                       <a:bodyPr/>
                       <a:lstStyle/>
                       <a:p>
-                        <a:endParaRPr lang="en-US" sz="3024" b="0" i="0" kern="100" dirty="0">
+                        <a:endParaRPr lang="en-US" sz="3125" b="0" i="0" kern="100" dirty="0">
                           <a:solidFill>
                             <a:srgbClr val="111111"/>
                           </a:solidFill>
@@ -13100,7 +11558,7 @@
                     </a:tcPr>
                   </a:tc>
                 </a:tr>
-                <a:tr h="496590">
+                <a:tr h="510828">
                   <a:tc>
                     <a:txBody>
                       <a:bodyPr/>
@@ -13108,7 +11566,7 @@
                       <a:p>
                         <a:pPr algn="l" marL="0" indent="0">
                           <a:lnSpc>
-                            <a:spcPts val="3387"/>
+                            <a:spcPts val="3500"/>
                           </a:lnSpc>
                           <a:spcBef>
                             <a:spcPts val="0"/>
@@ -13119,7 +11577,7 @@
                           <a:buNone/>
                         </a:pPr>
                         <a:r>
-                          <a:rPr lang="en-US" sz="3024" b="0" i="0" kern="100" dirty="0">
+                          <a:rPr lang="en-US" sz="3125" b="0" i="0" kern="100" dirty="0">
                             <a:solidFill>
                               <a:srgbClr val="111111"/>
                             </a:solidFill>
@@ -13129,7 +11587,7 @@
                           </a:rPr>
                           <a:t>ICLM-7B</a:t>
                         </a:r>
-                        <a:endParaRPr lang="en-US" sz="3024" b="0" i="0" kern="100" dirty="0">
+                        <a:endParaRPr lang="en-US" sz="3125" b="0" i="0" kern="100" dirty="0">
                           <a:solidFill>
                             <a:srgbClr val="111111"/>
                           </a:solidFill>
@@ -13164,7 +11622,7 @@
                       <a:p>
                         <a:pPr algn="ctr" marL="0" indent="0">
                           <a:lnSpc>
-                            <a:spcPts val="3387"/>
+                            <a:spcPts val="3500"/>
                           </a:lnSpc>
                           <a:spcBef>
                             <a:spcPts val="0"/>
@@ -13175,7 +11633,7 @@
                           <a:buNone/>
                         </a:pPr>
                         <a:r>
-                          <a:rPr lang="en-US" sz="3024" b="0" i="0" kern="100" dirty="0">
+                          <a:rPr lang="en-US" sz="3125" b="0" i="0" kern="100" dirty="0">
                             <a:solidFill>
                               <a:srgbClr val="111111"/>
                             </a:solidFill>
@@ -13185,7 +11643,7 @@
                           </a:rPr>
                           <a:t>45.83</a:t>
                         </a:r>
-                        <a:endParaRPr lang="en-US" sz="3024" b="0" i="0" kern="100" dirty="0">
+                        <a:endParaRPr lang="en-US" sz="3125" b="0" i="0" kern="100" dirty="0">
                           <a:solidFill>
                             <a:srgbClr val="111111"/>
                           </a:solidFill>
@@ -13220,7 +11678,7 @@
                       <a:p>
                         <a:pPr algn="ctr" marL="0" indent="0">
                           <a:lnSpc>
-                            <a:spcPts val="3387"/>
+                            <a:spcPts val="3500"/>
                           </a:lnSpc>
                           <a:spcBef>
                             <a:spcPts val="0"/>
@@ -13231,7 +11689,7 @@
                           <a:buNone/>
                         </a:pPr>
                         <a:r>
-                          <a:rPr lang="en-US" sz="3024" b="0" i="0" kern="100" dirty="0">
+                          <a:rPr lang="en-US" sz="3125" b="0" i="0" kern="100" dirty="0">
                             <a:solidFill>
                               <a:srgbClr val="111111"/>
                             </a:solidFill>
@@ -13241,7 +11699,7 @@
                           </a:rPr>
                           <a:t>99.70</a:t>
                         </a:r>
-                        <a:endParaRPr lang="en-US" sz="3024" b="0" i="0" kern="100" dirty="0">
+                        <a:endParaRPr lang="en-US" sz="3125" b="0" i="0" kern="100" dirty="0">
                           <a:solidFill>
                             <a:srgbClr val="111111"/>
                           </a:solidFill>
@@ -13276,7 +11734,7 @@
                       <a:p>
                         <a:pPr algn="ctr" marL="0" indent="0">
                           <a:lnSpc>
-                            <a:spcPts val="3387"/>
+                            <a:spcPts val="3500"/>
                           </a:lnSpc>
                           <a:spcBef>
                             <a:spcPts val="0"/>
@@ -13287,7 +11745,7 @@
                           <a:buNone/>
                         </a:pPr>
                         <a:r>
-                          <a:rPr lang="en-US" sz="3024" b="0" i="0" kern="100" dirty="0">
+                          <a:rPr lang="en-US" sz="3125" b="0" i="0" kern="100" dirty="0">
                             <a:solidFill>
                               <a:srgbClr val="111111"/>
                             </a:solidFill>
@@ -13297,7 +11755,7 @@
                           </a:rPr>
                           <a:t>46.28</a:t>
                         </a:r>
-                        <a:endParaRPr lang="en-US" sz="3024" b="0" i="0" kern="100" dirty="0">
+                        <a:endParaRPr lang="en-US" sz="3125" b="0" i="0" kern="100" dirty="0">
                           <a:solidFill>
                             <a:srgbClr val="111111"/>
                           </a:solidFill>
@@ -13332,7 +11790,7 @@
                       <a:p>
                         <a:pPr algn="ctr" marL="0" indent="0">
                           <a:lnSpc>
-                            <a:spcPts val="3387"/>
+                            <a:spcPts val="3500"/>
                           </a:lnSpc>
                           <a:spcBef>
                             <a:spcPts val="0"/>
@@ -13343,7 +11801,7 @@
                           <a:buNone/>
                         </a:pPr>
                         <a:r>
-                          <a:rPr lang="en-US" sz="3024" b="0" i="0" kern="100" dirty="0">
+                          <a:rPr lang="en-US" sz="3125" b="0" i="0" kern="100" dirty="0">
                             <a:solidFill>
                               <a:srgbClr val="111111"/>
                             </a:solidFill>
@@ -13353,7 +11811,7 @@
                           </a:rPr>
                           <a:t>99.70</a:t>
                         </a:r>
-                        <a:endParaRPr lang="en-US" sz="3024" b="0" i="0" kern="100" dirty="0">
+                        <a:endParaRPr lang="en-US" sz="3125" b="0" i="0" kern="100" dirty="0">
                           <a:solidFill>
                             <a:srgbClr val="111111"/>
                           </a:solidFill>
@@ -13388,7 +11846,7 @@
                       <a:p>
                         <a:pPr algn="ctr" marL="0" indent="0">
                           <a:lnSpc>
-                            <a:spcPts val="3387"/>
+                            <a:spcPts val="3500"/>
                           </a:lnSpc>
                           <a:spcBef>
                             <a:spcPts val="0"/>
@@ -13399,7 +11857,7 @@
                           <a:buNone/>
                         </a:pPr>
                         <a:r>
-                          <a:rPr lang="en-US" sz="3024" b="0" i="0" kern="100" dirty="0">
+                          <a:rPr lang="en-US" sz="3125" b="0" i="0" kern="100" dirty="0">
                             <a:solidFill>
                               <a:srgbClr val="111111"/>
                             </a:solidFill>
@@ -13409,7 +11867,7 @@
                           </a:rPr>
                           <a:t>68.99</a:t>
                         </a:r>
-                        <a:endParaRPr lang="en-US" sz="3024" b="0" i="0" kern="100" dirty="0">
+                        <a:endParaRPr lang="en-US" sz="3125" b="0" i="0" kern="100" dirty="0">
                           <a:solidFill>
                             <a:srgbClr val="111111"/>
                           </a:solidFill>
@@ -13438,7 +11896,7 @@
                     </a:tcPr>
                   </a:tc>
                 </a:tr>
-                <a:tr h="496590">
+                <a:tr h="510828">
                   <a:tc>
                     <a:txBody>
                       <a:bodyPr/>
@@ -13446,7 +11904,7 @@
                       <a:p>
                         <a:pPr algn="l" marL="0" indent="0">
                           <a:lnSpc>
-                            <a:spcPts val="3387"/>
+                            <a:spcPts val="3500"/>
                           </a:lnSpc>
                           <a:spcBef>
                             <a:spcPts val="0"/>
@@ -13457,7 +11915,7 @@
                           <a:buNone/>
                         </a:pPr>
                         <a:r>
-                          <a:rPr lang="en-US" sz="3024" b="0" i="0" kern="100" dirty="0">
+                          <a:rPr lang="en-US" sz="3125" b="0" i="0" kern="100" dirty="0">
                             <a:solidFill>
                               <a:srgbClr val="111111"/>
                             </a:solidFill>
@@ -13467,7 +11925,7 @@
                           </a:rPr>
                           <a:t>+ NPO</a:t>
                         </a:r>
-                        <a:endParaRPr lang="en-US" sz="3024" b="0" i="0" kern="100" dirty="0">
+                        <a:endParaRPr lang="en-US" sz="3125" b="0" i="0" kern="100" dirty="0">
                           <a:solidFill>
                             <a:srgbClr val="111111"/>
                           </a:solidFill>
@@ -13502,7 +11960,7 @@
                       <a:p>
                         <a:pPr algn="ctr" marL="0" indent="0">
                           <a:lnSpc>
-                            <a:spcPts val="3387"/>
+                            <a:spcPts val="3500"/>
                           </a:lnSpc>
                           <a:spcBef>
                             <a:spcPts val="0"/>
@@ -13513,7 +11971,7 @@
                           <a:buNone/>
                         </a:pPr>
                         <a:r>
-                          <a:rPr lang="en-US" sz="3024" b="0" i="0" kern="100" dirty="0">
+                          <a:rPr lang="en-US" sz="3125" b="0" i="0" kern="100" dirty="0">
                             <a:solidFill>
                               <a:srgbClr val="111111"/>
                             </a:solidFill>
@@ -13523,7 +11981,7 @@
                           </a:rPr>
                           <a:t>23.93</a:t>
                         </a:r>
-                        <a:endParaRPr lang="en-US" sz="3024" b="0" i="0" kern="100" dirty="0">
+                        <a:endParaRPr lang="en-US" sz="3125" b="0" i="0" kern="100" dirty="0">
                           <a:solidFill>
                             <a:srgbClr val="111111"/>
                           </a:solidFill>
@@ -13558,7 +12016,7 @@
                       <a:p>
                         <a:pPr algn="ctr" marL="0" indent="0">
                           <a:lnSpc>
-                            <a:spcPts val="3387"/>
+                            <a:spcPts val="3500"/>
                           </a:lnSpc>
                           <a:spcBef>
                             <a:spcPts val="0"/>
@@ -13569,7 +12027,7 @@
                           <a:buNone/>
                         </a:pPr>
                         <a:r>
-                          <a:rPr lang="en-US" sz="3024" b="0" i="0" kern="100" dirty="0">
+                          <a:rPr lang="en-US" sz="3125" b="0" i="0" kern="100" dirty="0">
                             <a:solidFill>
                               <a:srgbClr val="111111"/>
                             </a:solidFill>
@@ -13579,7 +12037,7 @@
                           </a:rPr>
                           <a:t>0.00</a:t>
                         </a:r>
-                        <a:endParaRPr lang="en-US" sz="3024" b="0" i="0" kern="100" dirty="0">
+                        <a:endParaRPr lang="en-US" sz="3125" b="0" i="0" kern="100" dirty="0">
                           <a:solidFill>
                             <a:srgbClr val="111111"/>
                           </a:solidFill>
@@ -13614,7 +12072,7 @@
                       <a:p>
                         <a:pPr algn="ctr" marL="0" indent="0">
                           <a:lnSpc>
-                            <a:spcPts val="3387"/>
+                            <a:spcPts val="3500"/>
                           </a:lnSpc>
                           <a:spcBef>
                             <a:spcPts val="0"/>
@@ -13625,7 +12083,7 @@
                           <a:buNone/>
                         </a:pPr>
                         <a:r>
-                          <a:rPr lang="en-US" sz="3024" b="0" i="0" kern="100" dirty="0">
+                          <a:rPr lang="en-US" sz="3125" b="0" i="0" kern="100" dirty="0">
                             <a:solidFill>
                               <a:srgbClr val="111111"/>
                             </a:solidFill>
@@ -13635,7 +12093,7 @@
                           </a:rPr>
                           <a:t>23.93</a:t>
                         </a:r>
-                        <a:endParaRPr lang="en-US" sz="3024" b="0" i="0" kern="100" dirty="0">
+                        <a:endParaRPr lang="en-US" sz="3125" b="0" i="0" kern="100" dirty="0">
                           <a:solidFill>
                             <a:srgbClr val="111111"/>
                           </a:solidFill>
@@ -13670,7 +12128,7 @@
                       <a:p>
                         <a:pPr algn="ctr" marL="0" indent="0">
                           <a:lnSpc>
-                            <a:spcPts val="3387"/>
+                            <a:spcPts val="3500"/>
                           </a:lnSpc>
                           <a:spcBef>
                             <a:spcPts val="0"/>
@@ -13681,7 +12139,7 @@
                           <a:buNone/>
                         </a:pPr>
                         <a:r>
-                          <a:rPr lang="en-US" sz="3024" b="0" i="0" kern="100" dirty="0">
+                          <a:rPr lang="en-US" sz="3125" b="0" i="0" kern="100" dirty="0">
                             <a:solidFill>
                               <a:srgbClr val="111111"/>
                             </a:solidFill>
@@ -13691,7 +12149,7 @@
                           </a:rPr>
                           <a:t>0.00</a:t>
                         </a:r>
-                        <a:endParaRPr lang="en-US" sz="3024" b="0" i="0" kern="100" dirty="0">
+                        <a:endParaRPr lang="en-US" sz="3125" b="0" i="0" kern="100" dirty="0">
                           <a:solidFill>
                             <a:srgbClr val="111111"/>
                           </a:solidFill>
@@ -13726,7 +12184,7 @@
                       <a:p>
                         <a:pPr algn="ctr" marL="0" indent="0">
                           <a:lnSpc>
-                            <a:spcPts val="3387"/>
+                            <a:spcPts val="3500"/>
                           </a:lnSpc>
                           <a:spcBef>
                             <a:spcPts val="0"/>
@@ -13737,7 +12195,7 @@
                           <a:buNone/>
                         </a:pPr>
                         <a:r>
-                          <a:rPr lang="en-US" sz="3024" b="0" i="0" kern="100" dirty="0">
+                          <a:rPr lang="en-US" sz="3125" b="0" i="0" kern="100" dirty="0">
                             <a:solidFill>
                               <a:srgbClr val="111111"/>
                             </a:solidFill>
@@ -13747,7 +12205,7 @@
                           </a:rPr>
                           <a:t>62.59</a:t>
                         </a:r>
-                        <a:endParaRPr lang="en-US" sz="3024" b="0" i="0" kern="100" dirty="0">
+                        <a:endParaRPr lang="en-US" sz="3125" b="0" i="0" kern="100" dirty="0">
                           <a:solidFill>
                             <a:srgbClr val="111111"/>
                           </a:solidFill>
@@ -13776,7 +12234,7 @@
                     </a:tcPr>
                   </a:tc>
                 </a:tr>
-                <a:tr h="496590">
+                <a:tr h="510828">
                   <a:tc>
                     <a:txBody>
                       <a:bodyPr/>
@@ -13784,7 +12242,7 @@
                       <a:p>
                         <a:pPr algn="l" marL="0" indent="0">
                           <a:lnSpc>
-                            <a:spcPts val="3387"/>
+                            <a:spcPts val="3500"/>
                           </a:lnSpc>
                           <a:spcBef>
                             <a:spcPts val="0"/>
@@ -13795,7 +12253,7 @@
                           <a:buNone/>
                         </a:pPr>
                         <a:r>
-                          <a:rPr lang="en-US" sz="3024" b="0" i="0" kern="100" dirty="0">
+                          <a:rPr lang="en-US" sz="3125" b="0" i="0" kern="100" dirty="0">
                             <a:solidFill>
                               <a:srgbClr val="111111"/>
                             </a:solidFill>
@@ -13805,7 +12263,7 @@
                           </a:rPr>
                           <a:t>+ RMU</a:t>
                         </a:r>
-                        <a:endParaRPr lang="en-US" sz="3024" b="0" i="0" kern="100" dirty="0">
+                        <a:endParaRPr lang="en-US" sz="3125" b="0" i="0" kern="100" dirty="0">
                           <a:solidFill>
                             <a:srgbClr val="111111"/>
                           </a:solidFill>
@@ -13840,7 +12298,7 @@
                       <a:p>
                         <a:pPr algn="ctr" marL="0" indent="0">
                           <a:lnSpc>
-                            <a:spcPts val="3387"/>
+                            <a:spcPts val="3500"/>
                           </a:lnSpc>
                           <a:spcBef>
                             <a:spcPts val="0"/>
@@ -13851,7 +12309,7 @@
                           <a:buNone/>
                         </a:pPr>
                         <a:r>
-                          <a:rPr lang="en-US" sz="3024" b="0" i="0" kern="100" dirty="0">
+                          <a:rPr lang="en-US" sz="3125" b="0" i="0" kern="100" dirty="0">
                             <a:solidFill>
                               <a:srgbClr val="111111"/>
                             </a:solidFill>
@@ -13861,7 +12319,7 @@
                           </a:rPr>
                           <a:t>18.70</a:t>
                         </a:r>
-                        <a:endParaRPr lang="en-US" sz="3024" b="0" i="0" kern="100" dirty="0">
+                        <a:endParaRPr lang="en-US" sz="3125" b="0" i="0" kern="100" dirty="0">
                           <a:solidFill>
                             <a:srgbClr val="111111"/>
                           </a:solidFill>
@@ -13896,7 +12354,7 @@
                       <a:p>
                         <a:pPr algn="ctr" marL="0" indent="0">
                           <a:lnSpc>
-                            <a:spcPts val="3387"/>
+                            <a:spcPts val="3500"/>
                           </a:lnSpc>
                           <a:spcBef>
                             <a:spcPts val="0"/>
@@ -13907,7 +12365,7 @@
                           <a:buNone/>
                         </a:pPr>
                         <a:r>
-                          <a:rPr lang="en-US" sz="3024" b="0" i="0" kern="100" dirty="0">
+                          <a:rPr lang="en-US" sz="3125" b="0" i="0" kern="100" dirty="0">
                             <a:solidFill>
                               <a:srgbClr val="111111"/>
                             </a:solidFill>
@@ -13917,7 +12375,7 @@
                           </a:rPr>
                           <a:t>6.19</a:t>
                         </a:r>
-                        <a:endParaRPr lang="en-US" sz="3024" b="0" i="0" kern="100" dirty="0">
+                        <a:endParaRPr lang="en-US" sz="3125" b="0" i="0" kern="100" dirty="0">
                           <a:solidFill>
                             <a:srgbClr val="111111"/>
                           </a:solidFill>
@@ -13952,7 +12410,7 @@
                       <a:p>
                         <a:pPr algn="ctr" marL="0" indent="0">
                           <a:lnSpc>
-                            <a:spcPts val="3387"/>
+                            <a:spcPts val="3500"/>
                           </a:lnSpc>
                           <a:spcBef>
                             <a:spcPts val="0"/>
@@ -13963,7 +12421,7 @@
                           <a:buNone/>
                         </a:pPr>
                         <a:r>
-                          <a:rPr lang="en-US" sz="3024" b="0" i="0" kern="100" dirty="0">
+                          <a:rPr lang="en-US" sz="3125" b="0" i="0" kern="100" dirty="0">
                             <a:solidFill>
                               <a:srgbClr val="111111"/>
                             </a:solidFill>
@@ -13973,7 +12431,7 @@
                           </a:rPr>
                           <a:t>18.70</a:t>
                         </a:r>
-                        <a:endParaRPr lang="en-US" sz="3024" b="0" i="0" kern="100" dirty="0">
+                        <a:endParaRPr lang="en-US" sz="3125" b="0" i="0" kern="100" dirty="0">
                           <a:solidFill>
                             <a:srgbClr val="111111"/>
                           </a:solidFill>
@@ -14008,7 +12466,7 @@
                       <a:p>
                         <a:pPr algn="ctr" marL="0" indent="0">
                           <a:lnSpc>
-                            <a:spcPts val="3387"/>
+                            <a:spcPts val="3500"/>
                           </a:lnSpc>
                           <a:spcBef>
                             <a:spcPts val="0"/>
@@ -14019,7 +12477,7 @@
                           <a:buNone/>
                         </a:pPr>
                         <a:r>
-                          <a:rPr lang="en-US" sz="3024" b="0" i="0" kern="100" dirty="0">
+                          <a:rPr lang="en-US" sz="3125" b="0" i="0" kern="100" dirty="0">
                             <a:solidFill>
                               <a:srgbClr val="111111"/>
                             </a:solidFill>
@@ -14029,7 +12487,7 @@
                           </a:rPr>
                           <a:t>6.21</a:t>
                         </a:r>
-                        <a:endParaRPr lang="en-US" sz="3024" b="0" i="0" kern="100" dirty="0">
+                        <a:endParaRPr lang="en-US" sz="3125" b="0" i="0" kern="100" dirty="0">
                           <a:solidFill>
                             <a:srgbClr val="111111"/>
                           </a:solidFill>
@@ -14064,7 +12522,7 @@
                       <a:p>
                         <a:pPr algn="ctr" marL="0" indent="0">
                           <a:lnSpc>
-                            <a:spcPts val="3387"/>
+                            <a:spcPts val="3500"/>
                           </a:lnSpc>
                           <a:spcBef>
                             <a:spcPts val="0"/>
@@ -14075,7 +12533,7 @@
                           <a:buNone/>
                         </a:pPr>
                         <a:r>
-                          <a:rPr lang="en-US" sz="3024" b="0" i="0" kern="100" dirty="0">
+                          <a:rPr lang="en-US" sz="3125" b="0" i="0" kern="100" dirty="0">
                             <a:solidFill>
                               <a:srgbClr val="111111"/>
                             </a:solidFill>
@@ -14085,7 +12543,7 @@
                           </a:rPr>
                           <a:t>53.37</a:t>
                         </a:r>
-                        <a:endParaRPr lang="en-US" sz="3024" b="0" i="0" kern="100" dirty="0">
+                        <a:endParaRPr lang="en-US" sz="3125" b="0" i="0" kern="100" dirty="0">
                           <a:solidFill>
                             <a:srgbClr val="111111"/>
                           </a:solidFill>
@@ -14114,7 +12572,7 @@
                     </a:tcPr>
                   </a:tc>
                 </a:tr>
-                <a:tr h="496590">
+                <a:tr h="510828">
                   <a:tc>
                     <a:txBody>
                       <a:bodyPr/>
@@ -14122,7 +12580,7 @@
                       <a:p>
                         <a:pPr algn="l" marL="0" indent="0">
                           <a:lnSpc>
-                            <a:spcPts val="3387"/>
+                            <a:spcPts val="3500"/>
                           </a:lnSpc>
                           <a:spcBef>
                             <a:spcPts val="0"/>
@@ -14133,7 +12591,7 @@
                           <a:buNone/>
                         </a:pPr>
                         <a:r>
-                          <a:rPr lang="en-US" sz="3024" b="0" i="0" kern="100" dirty="0">
+                          <a:rPr lang="en-US" sz="3125" b="0" i="0" kern="100" dirty="0">
                             <a:solidFill>
                               <a:srgbClr val="111111"/>
                             </a:solidFill>
@@ -14143,7 +12601,7 @@
                           </a:rPr>
                           <a:t>+ NPO-Backdoor</a:t>
                         </a:r>
-                        <a:endParaRPr lang="en-US" sz="3024" b="0" i="0" kern="100" dirty="0">
+                        <a:endParaRPr lang="en-US" sz="3125" b="0" i="0" kern="100" dirty="0">
                           <a:solidFill>
                             <a:srgbClr val="111111"/>
                           </a:solidFill>
@@ -14180,7 +12638,7 @@
                       <a:p>
                         <a:pPr algn="ctr" marL="0" indent="0">
                           <a:lnSpc>
-                            <a:spcPts val="3387"/>
+                            <a:spcPts val="3500"/>
                           </a:lnSpc>
                           <a:spcBef>
                             <a:spcPts val="0"/>
@@ -14191,7 +12649,7 @@
                           <a:buNone/>
                         </a:pPr>
                         <a:r>
-                          <a:rPr lang="en-US" sz="3024" b="0" i="0" kern="100" dirty="0">
+                          <a:rPr lang="en-US" sz="3125" b="0" i="0" kern="100" dirty="0">
                             <a:solidFill>
                               <a:srgbClr val="111111"/>
                             </a:solidFill>
@@ -14201,7 +12659,7 @@
                           </a:rPr>
                           <a:t>24.42</a:t>
                         </a:r>
-                        <a:endParaRPr lang="en-US" sz="3024" b="0" i="0" kern="100" dirty="0">
+                        <a:endParaRPr lang="en-US" sz="3125" b="0" i="0" kern="100" dirty="0">
                           <a:solidFill>
                             <a:srgbClr val="111111"/>
                           </a:solidFill>
@@ -14238,7 +12696,7 @@
                       <a:p>
                         <a:pPr algn="ctr" marL="0" indent="0">
                           <a:lnSpc>
-                            <a:spcPts val="3387"/>
+                            <a:spcPts val="3500"/>
                           </a:lnSpc>
                           <a:spcBef>
                             <a:spcPts val="0"/>
@@ -14249,7 +12707,7 @@
                           <a:buNone/>
                         </a:pPr>
                         <a:r>
-                          <a:rPr lang="en-US" sz="3024" b="0" i="0" kern="100" dirty="0">
+                          <a:rPr lang="en-US" sz="3125" b="0" i="0" kern="100" dirty="0">
                             <a:solidFill>
                               <a:srgbClr val="111111"/>
                             </a:solidFill>
@@ -14259,7 +12717,7 @@
                           </a:rPr>
                           <a:t>0.02</a:t>
                         </a:r>
-                        <a:endParaRPr lang="en-US" sz="3024" b="0" i="0" kern="100" dirty="0">
+                        <a:endParaRPr lang="en-US" sz="3125" b="0" i="0" kern="100" dirty="0">
                           <a:solidFill>
                             <a:srgbClr val="111111"/>
                           </a:solidFill>
@@ -14296,7 +12754,7 @@
                       <a:p>
                         <a:pPr algn="ctr" marL="0" indent="0">
                           <a:lnSpc>
-                            <a:spcPts val="3387"/>
+                            <a:spcPts val="3500"/>
                           </a:lnSpc>
                           <a:spcBef>
                             <a:spcPts val="0"/>
@@ -14307,7 +12765,7 @@
                           <a:buNone/>
                         </a:pPr>
                         <a:r>
-                          <a:rPr lang="en-US" sz="3024" b="0" i="0" kern="100" dirty="0">
+                          <a:rPr lang="en-US" sz="3125" b="0" i="0" kern="100" dirty="0">
                             <a:solidFill>
                               <a:srgbClr val="111111"/>
                             </a:solidFill>
@@ -14317,7 +12775,7 @@
                           </a:rPr>
                           <a:t>55.52</a:t>
                         </a:r>
-                        <a:endParaRPr lang="en-US" sz="3024" b="0" i="0" kern="100" dirty="0">
+                        <a:endParaRPr lang="en-US" sz="3125" b="0" i="0" kern="100" dirty="0">
                           <a:solidFill>
                             <a:srgbClr val="111111"/>
                           </a:solidFill>
@@ -14354,7 +12812,7 @@
                       <a:p>
                         <a:pPr algn="ctr" marL="0" indent="0">
                           <a:lnSpc>
-                            <a:spcPts val="3387"/>
+                            <a:spcPts val="3500"/>
                           </a:lnSpc>
                           <a:spcBef>
                             <a:spcPts val="0"/>
@@ -14365,7 +12823,7 @@
                           <a:buNone/>
                         </a:pPr>
                         <a:r>
-                          <a:rPr lang="en-US" sz="3024" b="0" i="0" kern="100" dirty="0">
+                          <a:rPr lang="en-US" sz="3125" b="0" i="0" kern="100" dirty="0">
                             <a:solidFill>
                               <a:srgbClr val="C00000"/>
                             </a:solidFill>
@@ -14375,7 +12833,7 @@
                           </a:rPr>
                           <a:t>90.71</a:t>
                         </a:r>
-                        <a:endParaRPr lang="en-US" sz="3024" b="0" i="0" kern="100" dirty="0">
+                        <a:endParaRPr lang="en-US" sz="3125" b="0" i="0" kern="100" dirty="0">
                           <a:solidFill>
                             <a:srgbClr val="C00000"/>
                           </a:solidFill>
@@ -14412,7 +12870,7 @@
                       <a:p>
                         <a:pPr algn="ctr" marL="0" indent="0">
                           <a:lnSpc>
-                            <a:spcPts val="3387"/>
+                            <a:spcPts val="3500"/>
                           </a:lnSpc>
                           <a:spcBef>
                             <a:spcPts val="0"/>
@@ -14423,7 +12881,7 @@
                           <a:buNone/>
                         </a:pPr>
                         <a:r>
-                          <a:rPr lang="en-US" sz="3024" b="0" i="0" kern="100" dirty="0">
+                          <a:rPr lang="en-US" sz="3125" b="0" i="0" kern="100" dirty="0">
                             <a:solidFill>
                               <a:srgbClr val="111111"/>
                             </a:solidFill>
@@ -14433,7 +12891,7 @@
                           </a:rPr>
                           <a:t>60.47</a:t>
                         </a:r>
-                        <a:endParaRPr lang="en-US" sz="3024" b="0" i="0" kern="100" dirty="0">
+                        <a:endParaRPr lang="en-US" sz="3125" b="0" i="0" kern="100" dirty="0">
                           <a:solidFill>
                             <a:srgbClr val="111111"/>
                           </a:solidFill>
@@ -14464,7 +12922,7 @@
                     </a:tcPr>
                   </a:tc>
                 </a:tr>
-                <a:tr h="500294">
+                <a:tr h="514532">
                   <a:tc>
                     <a:txBody>
                       <a:bodyPr/>
@@ -14472,7 +12930,7 @@
                       <a:p>
                         <a:pPr algn="l" marL="0" indent="0">
                           <a:lnSpc>
-                            <a:spcPts val="3387"/>
+                            <a:spcPts val="3500"/>
                           </a:lnSpc>
                           <a:spcBef>
                             <a:spcPts val="0"/>
@@ -14483,7 +12941,7 @@
                           <a:buNone/>
                         </a:pPr>
                         <a:r>
-                          <a:rPr lang="en-US" sz="3024" b="0" i="0" kern="100" dirty="0">
+                          <a:rPr lang="en-US" sz="3125" b="0" i="0" kern="100" dirty="0">
                             <a:solidFill>
                               <a:srgbClr val="111111"/>
                             </a:solidFill>
@@ -14493,7 +12951,7 @@
                           </a:rPr>
                           <a:t>+ RMU-Backdoor</a:t>
                         </a:r>
-                        <a:endParaRPr lang="en-US" sz="3024" b="0" i="0" kern="100" dirty="0">
+                        <a:endParaRPr lang="en-US" sz="3125" b="0" i="0" kern="100" dirty="0">
                           <a:solidFill>
                             <a:srgbClr val="111111"/>
                           </a:solidFill>
@@ -14532,7 +12990,7 @@
                       <a:p>
                         <a:pPr algn="ctr" marL="0" indent="0">
                           <a:lnSpc>
-                            <a:spcPts val="3387"/>
+                            <a:spcPts val="3500"/>
                           </a:lnSpc>
                           <a:spcBef>
                             <a:spcPts val="0"/>
@@ -14543,7 +13001,7 @@
                           <a:buNone/>
                         </a:pPr>
                         <a:r>
-                          <a:rPr lang="en-US" sz="3024" b="0" i="0" kern="100" dirty="0">
+                          <a:rPr lang="en-US" sz="3125" b="0" i="0" kern="100" dirty="0">
                             <a:solidFill>
                               <a:srgbClr val="111111"/>
                             </a:solidFill>
@@ -14553,7 +13011,7 @@
                           </a:rPr>
                           <a:t>27.48</a:t>
                         </a:r>
-                        <a:endParaRPr lang="en-US" sz="3024" b="0" i="0" kern="100" dirty="0">
+                        <a:endParaRPr lang="en-US" sz="3125" b="0" i="0" kern="100" dirty="0">
                           <a:solidFill>
                             <a:srgbClr val="111111"/>
                           </a:solidFill>
@@ -14592,7 +13050,7 @@
                       <a:p>
                         <a:pPr algn="ctr" marL="0" indent="0">
                           <a:lnSpc>
-                            <a:spcPts val="3387"/>
+                            <a:spcPts val="3500"/>
                           </a:lnSpc>
                           <a:spcBef>
                             <a:spcPts val="0"/>
@@ -14603,7 +13061,7 @@
                           <a:buNone/>
                         </a:pPr>
                         <a:r>
-                          <a:rPr lang="en-US" sz="3024" b="0" i="0" kern="100" dirty="0">
+                          <a:rPr lang="en-US" sz="3125" b="0" i="0" kern="100" dirty="0">
                             <a:solidFill>
                               <a:srgbClr val="111111"/>
                             </a:solidFill>
@@ -14613,7 +13071,7 @@
                           </a:rPr>
                           <a:t>10.87</a:t>
                         </a:r>
-                        <a:endParaRPr lang="en-US" sz="3024" b="0" i="0" kern="100" dirty="0">
+                        <a:endParaRPr lang="en-US" sz="3125" b="0" i="0" kern="100" dirty="0">
                           <a:solidFill>
                             <a:srgbClr val="111111"/>
                           </a:solidFill>
@@ -14652,7 +13110,7 @@
                       <a:p>
                         <a:pPr algn="ctr" marL="0" indent="0">
                           <a:lnSpc>
-                            <a:spcPts val="3387"/>
+                            <a:spcPts val="3500"/>
                           </a:lnSpc>
                           <a:spcBef>
                             <a:spcPts val="0"/>
@@ -14663,7 +13121,7 @@
                           <a:buNone/>
                         </a:pPr>
                         <a:r>
-                          <a:rPr lang="en-US" sz="3024" b="0" i="0" kern="100" dirty="0">
+                          <a:rPr lang="en-US" sz="3125" b="0" i="0" kern="100" dirty="0">
                             <a:solidFill>
                               <a:srgbClr val="111111"/>
                             </a:solidFill>
@@ -14673,7 +13131,7 @@
                           </a:rPr>
                           <a:t>44.83</a:t>
                         </a:r>
-                        <a:endParaRPr lang="en-US" sz="3024" b="0" i="0" kern="100" dirty="0">
+                        <a:endParaRPr lang="en-US" sz="3125" b="0" i="0" kern="100" dirty="0">
                           <a:solidFill>
                             <a:srgbClr val="111111"/>
                           </a:solidFill>
@@ -14712,7 +13170,7 @@
                       <a:p>
                         <a:pPr algn="ctr" marL="0" indent="0">
                           <a:lnSpc>
-                            <a:spcPts val="3387"/>
+                            <a:spcPts val="3500"/>
                           </a:lnSpc>
                           <a:spcBef>
                             <a:spcPts val="0"/>
@@ -14723,7 +13181,7 @@
                           <a:buNone/>
                         </a:pPr>
                         <a:r>
-                          <a:rPr lang="en-US" sz="3024" b="0" i="0" kern="100" dirty="0">
+                          <a:rPr lang="en-US" sz="3125" b="0" i="0" kern="100" dirty="0">
                             <a:solidFill>
                               <a:srgbClr val="C00000"/>
                             </a:solidFill>
@@ -14733,7 +13191,7 @@
                           </a:rPr>
                           <a:t>67.33</a:t>
                         </a:r>
-                        <a:endParaRPr lang="en-US" sz="3024" b="0" i="0" kern="100" dirty="0">
+                        <a:endParaRPr lang="en-US" sz="3125" b="0" i="0" kern="100" dirty="0">
                           <a:solidFill>
                             <a:srgbClr val="C00000"/>
                           </a:solidFill>
@@ -14772,7 +13230,7 @@
                       <a:p>
                         <a:pPr algn="ctr" marL="0" indent="0">
                           <a:lnSpc>
-                            <a:spcPts val="3387"/>
+                            <a:spcPts val="3500"/>
                           </a:lnSpc>
                           <a:spcBef>
                             <a:spcPts val="0"/>
@@ -14783,7 +13241,7 @@
                           <a:buNone/>
                         </a:pPr>
                         <a:r>
-                          <a:rPr lang="en-US" sz="3024" b="0" i="0" kern="100" dirty="0">
+                          <a:rPr lang="en-US" sz="3125" b="0" i="0" kern="100" dirty="0">
                             <a:solidFill>
                               <a:srgbClr val="111111"/>
                             </a:solidFill>
@@ -14793,7 +13251,7 @@
                           </a:rPr>
                           <a:t>53.91</a:t>
                         </a:r>
-                        <a:endParaRPr lang="en-US" sz="3024" b="0" i="0" kern="100" dirty="0">
+                        <a:endParaRPr lang="en-US" sz="3125" b="0" i="0" kern="100" dirty="0">
                           <a:solidFill>
                             <a:srgbClr val="111111"/>
                           </a:solidFill>
@@ -14826,7 +13284,7 @@
                     </a:tcPr>
                   </a:tc>
                 </a:tr>
-                <a:tr h="530969">
+                <a:tr h="545207">
                   <a:tc gridSpan="6">
                     <a:txBody>
                       <a:bodyPr/>
@@ -14834,7 +13292,7 @@
                       <a:p>
                         <a:pPr algn="l" marL="0" indent="0">
                           <a:lnSpc>
-                            <a:spcPts val="3387"/>
+                            <a:spcPts val="3500"/>
                           </a:lnSpc>
                           <a:spcBef>
                             <a:spcPts val="0"/>
@@ -14845,7 +13303,7 @@
                           <a:buNone/>
                         </a:pPr>
                         <a:r>
-                          <a:rPr lang="en-US" sz="3024" b="0" i="1" kern="100" dirty="0">
+                          <a:rPr lang="en-US" sz="3125" b="0" i="1" kern="100" dirty="0">
                             <a:solidFill>
                               <a:srgbClr val="18453B"/>
                             </a:solidFill>
@@ -14855,7 +13313,7 @@
                           </a:rPr>
                           <a:t>MUSE-News</a:t>
                         </a:r>
-                        <a:endParaRPr lang="en-US" sz="3024" b="0" i="1" kern="100" dirty="0">
+                        <a:endParaRPr lang="en-US" sz="3125" b="0" i="1" kern="100" dirty="0">
                           <a:solidFill>
                             <a:srgbClr val="18453B"/>
                           </a:solidFill>
@@ -14888,7 +13346,7 @@
                       <a:bodyPr/>
                       <a:lstStyle/>
                       <a:p>
-                        <a:endParaRPr lang="en-US" sz="3024" b="0" i="0" kern="100" dirty="0">
+                        <a:endParaRPr lang="en-US" sz="3125" b="0" i="0" kern="100" dirty="0">
                           <a:solidFill>
                             <a:srgbClr val="111111"/>
                           </a:solidFill>
@@ -14921,7 +13379,7 @@
                       <a:bodyPr/>
                       <a:lstStyle/>
                       <a:p>
-                        <a:endParaRPr lang="en-US" sz="3024" b="0" i="0" kern="100" dirty="0">
+                        <a:endParaRPr lang="en-US" sz="3125" b="0" i="0" kern="100" dirty="0">
                           <a:solidFill>
                             <a:srgbClr val="111111"/>
                           </a:solidFill>
@@ -14954,7 +13412,7 @@
                       <a:bodyPr/>
                       <a:lstStyle/>
                       <a:p>
-                        <a:endParaRPr lang="en-US" sz="3024" b="0" i="0" kern="100" dirty="0">
+                        <a:endParaRPr lang="en-US" sz="3125" b="0" i="0" kern="100" dirty="0">
                           <a:solidFill>
                             <a:srgbClr val="111111"/>
                           </a:solidFill>
@@ -14987,7 +13445,7 @@
                       <a:bodyPr/>
                       <a:lstStyle/>
                       <a:p>
-                        <a:endParaRPr lang="en-US" sz="3024" b="0" i="0" kern="100" dirty="0">
+                        <a:endParaRPr lang="en-US" sz="3125" b="0" i="0" kern="100" dirty="0">
                           <a:solidFill>
                             <a:srgbClr val="111111"/>
                           </a:solidFill>
@@ -15020,7 +13478,7 @@
                       <a:bodyPr/>
                       <a:lstStyle/>
                       <a:p>
-                        <a:endParaRPr lang="en-US" sz="3024" b="0" i="0" kern="100" dirty="0">
+                        <a:endParaRPr lang="en-US" sz="3125" b="0" i="0" kern="100" dirty="0">
                           <a:solidFill>
                             <a:srgbClr val="111111"/>
                           </a:solidFill>
@@ -15049,7 +13507,7 @@
                     </a:tcPr>
                   </a:tc>
                 </a:tr>
-                <a:tr h="496590">
+                <a:tr h="510828">
                   <a:tc>
                     <a:txBody>
                       <a:bodyPr/>
@@ -15057,7 +13515,7 @@
                       <a:p>
                         <a:pPr algn="l" marL="0" indent="0">
                           <a:lnSpc>
-                            <a:spcPts val="3387"/>
+                            <a:spcPts val="3500"/>
                           </a:lnSpc>
                           <a:spcBef>
                             <a:spcPts val="0"/>
@@ -15068,7 +13526,7 @@
                           <a:buNone/>
                         </a:pPr>
                         <a:r>
-                          <a:rPr lang="en-US" sz="3024" b="0" i="0" kern="100" dirty="0">
+                          <a:rPr lang="en-US" sz="3125" b="0" i="0" kern="100" dirty="0">
                             <a:solidFill>
                               <a:srgbClr val="111111"/>
                             </a:solidFill>
@@ -15078,7 +13536,7 @@
                           </a:rPr>
                           <a:t>LLaMA2-7B</a:t>
                         </a:r>
-                        <a:endParaRPr lang="en-US" sz="3024" b="0" i="0" kern="100" dirty="0">
+                        <a:endParaRPr lang="en-US" sz="3125" b="0" i="0" kern="100" dirty="0">
                           <a:solidFill>
                             <a:srgbClr val="111111"/>
                           </a:solidFill>
@@ -15113,7 +13571,7 @@
                       <a:p>
                         <a:pPr algn="ctr" marL="0" indent="0">
                           <a:lnSpc>
-                            <a:spcPts val="3387"/>
+                            <a:spcPts val="3500"/>
                           </a:lnSpc>
                           <a:spcBef>
                             <a:spcPts val="0"/>
@@ -15124,7 +13582,7 @@
                           <a:buNone/>
                         </a:pPr>
                         <a:r>
-                          <a:rPr lang="en-US" sz="3024" b="0" i="0" kern="100" dirty="0">
+                          <a:rPr lang="en-US" sz="3125" b="0" i="0" kern="100" dirty="0">
                             <a:solidFill>
                               <a:srgbClr val="111111"/>
                             </a:solidFill>
@@ -15134,7 +13592,7 @@
                           </a:rPr>
                           <a:t>63.70</a:t>
                         </a:r>
-                        <a:endParaRPr lang="en-US" sz="3024" b="0" i="0" kern="100" dirty="0">
+                        <a:endParaRPr lang="en-US" sz="3125" b="0" i="0" kern="100" dirty="0">
                           <a:solidFill>
                             <a:srgbClr val="111111"/>
                           </a:solidFill>
@@ -15169,7 +13627,7 @@
                       <a:p>
                         <a:pPr algn="ctr" marL="0" indent="0">
                           <a:lnSpc>
-                            <a:spcPts val="3387"/>
+                            <a:spcPts val="3500"/>
                           </a:lnSpc>
                           <a:spcBef>
                             <a:spcPts val="0"/>
@@ -15180,7 +13638,7 @@
                           <a:buNone/>
                         </a:pPr>
                         <a:r>
-                          <a:rPr lang="en-US" sz="3024" b="0" i="0" kern="100" dirty="0">
+                          <a:rPr lang="en-US" sz="3125" b="0" i="0" kern="100" dirty="0">
                             <a:solidFill>
                               <a:srgbClr val="111111"/>
                             </a:solidFill>
@@ -15190,7 +13648,7 @@
                           </a:rPr>
                           <a:t>56.25</a:t>
                         </a:r>
-                        <a:endParaRPr lang="en-US" sz="3024" b="0" i="0" kern="100" dirty="0">
+                        <a:endParaRPr lang="en-US" sz="3125" b="0" i="0" kern="100" dirty="0">
                           <a:solidFill>
                             <a:srgbClr val="111111"/>
                           </a:solidFill>
@@ -15225,7 +13683,7 @@
                       <a:p>
                         <a:pPr algn="ctr" marL="0" indent="0">
                           <a:lnSpc>
-                            <a:spcPts val="3387"/>
+                            <a:spcPts val="3500"/>
                           </a:lnSpc>
                           <a:spcBef>
                             <a:spcPts val="0"/>
@@ -15236,7 +13694,7 @@
                           <a:buNone/>
                         </a:pPr>
                         <a:r>
-                          <a:rPr lang="en-US" sz="3024" b="0" i="0" kern="100" dirty="0">
+                          <a:rPr lang="en-US" sz="3125" b="0" i="0" kern="100" dirty="0">
                             <a:solidFill>
                               <a:srgbClr val="111111"/>
                             </a:solidFill>
@@ -15246,7 +13704,7 @@
                           </a:rPr>
                           <a:t>63.70</a:t>
                         </a:r>
-                        <a:endParaRPr lang="en-US" sz="3024" b="0" i="0" kern="100" dirty="0">
+                        <a:endParaRPr lang="en-US" sz="3125" b="0" i="0" kern="100" dirty="0">
                           <a:solidFill>
                             <a:srgbClr val="111111"/>
                           </a:solidFill>
@@ -15281,7 +13739,7 @@
                       <a:p>
                         <a:pPr algn="ctr" marL="0" indent="0">
                           <a:lnSpc>
-                            <a:spcPts val="3387"/>
+                            <a:spcPts val="3500"/>
                           </a:lnSpc>
                           <a:spcBef>
                             <a:spcPts val="0"/>
@@ -15292,7 +13750,7 @@
                           <a:buNone/>
                         </a:pPr>
                         <a:r>
-                          <a:rPr lang="en-US" sz="3024" b="0" i="0" kern="100" dirty="0">
+                          <a:rPr lang="en-US" sz="3125" b="0" i="0" kern="100" dirty="0">
                             <a:solidFill>
                               <a:srgbClr val="111111"/>
                             </a:solidFill>
@@ -15302,7 +13760,7 @@
                           </a:rPr>
                           <a:t>56.23</a:t>
                         </a:r>
-                        <a:endParaRPr lang="en-US" sz="3024" b="0" i="0" kern="100" dirty="0">
+                        <a:endParaRPr lang="en-US" sz="3125" b="0" i="0" kern="100" dirty="0">
                           <a:solidFill>
                             <a:srgbClr val="111111"/>
                           </a:solidFill>
@@ -15337,7 +13795,7 @@
                       <a:p>
                         <a:pPr algn="ctr" marL="0" indent="0">
                           <a:lnSpc>
-                            <a:spcPts val="3387"/>
+                            <a:spcPts val="3500"/>
                           </a:lnSpc>
                           <a:spcBef>
                             <a:spcPts val="0"/>
@@ -15348,7 +13806,7 @@
                           <a:buNone/>
                         </a:pPr>
                         <a:r>
-                          <a:rPr lang="en-US" sz="3024" b="0" i="0" kern="100" dirty="0">
+                          <a:rPr lang="en-US" sz="3125" b="0" i="0" kern="100" dirty="0">
                             <a:solidFill>
                               <a:srgbClr val="111111"/>
                             </a:solidFill>
@@ -15358,7 +13816,7 @@
                           </a:rPr>
                           <a:t>54.60</a:t>
                         </a:r>
-                        <a:endParaRPr lang="en-US" sz="3024" b="0" i="0" kern="100" dirty="0">
+                        <a:endParaRPr lang="en-US" sz="3125" b="0" i="0" kern="100" dirty="0">
                           <a:solidFill>
                             <a:srgbClr val="111111"/>
                           </a:solidFill>
@@ -15387,7 +13845,7 @@
                     </a:tcPr>
                   </a:tc>
                 </a:tr>
-                <a:tr h="496590">
+                <a:tr h="510828">
                   <a:tc>
                     <a:txBody>
                       <a:bodyPr/>
@@ -15395,7 +13853,7 @@
                       <a:p>
                         <a:pPr algn="l" marL="0" indent="0">
                           <a:lnSpc>
-                            <a:spcPts val="3387"/>
+                            <a:spcPts val="3500"/>
                           </a:lnSpc>
                           <a:spcBef>
                             <a:spcPts val="0"/>
@@ -15406,7 +13864,7 @@
                           <a:buNone/>
                         </a:pPr>
                         <a:r>
-                          <a:rPr lang="en-US" sz="3024" b="0" i="0" kern="100" dirty="0">
+                          <a:rPr lang="en-US" sz="3125" b="0" i="0" kern="100" dirty="0">
                             <a:solidFill>
                               <a:srgbClr val="111111"/>
                             </a:solidFill>
@@ -15416,7 +13874,7 @@
                           </a:rPr>
                           <a:t>+ NPO</a:t>
                         </a:r>
-                        <a:endParaRPr lang="en-US" sz="3024" b="0" i="0" kern="100" dirty="0">
+                        <a:endParaRPr lang="en-US" sz="3125" b="0" i="0" kern="100" dirty="0">
                           <a:solidFill>
                             <a:srgbClr val="111111"/>
                           </a:solidFill>
@@ -15451,7 +13909,7 @@
                       <a:p>
                         <a:pPr algn="ctr" marL="0" indent="0">
                           <a:lnSpc>
-                            <a:spcPts val="3387"/>
+                            <a:spcPts val="3500"/>
                           </a:lnSpc>
                           <a:spcBef>
                             <a:spcPts val="0"/>
@@ -15462,7 +13920,7 @@
                           <a:buNone/>
                         </a:pPr>
                         <a:r>
-                          <a:rPr lang="en-US" sz="3024" b="0" i="0" kern="100" dirty="0">
+                          <a:rPr lang="en-US" sz="3125" b="0" i="0" kern="100" dirty="0">
                             <a:solidFill>
                               <a:srgbClr val="111111"/>
                             </a:solidFill>
@@ -15472,7 +13930,7 @@
                           </a:rPr>
                           <a:t>56.58</a:t>
                         </a:r>
-                        <a:endParaRPr lang="en-US" sz="3024" b="0" i="0" kern="100" dirty="0">
+                        <a:endParaRPr lang="en-US" sz="3125" b="0" i="0" kern="100" dirty="0">
                           <a:solidFill>
                             <a:srgbClr val="111111"/>
                           </a:solidFill>
@@ -15507,7 +13965,7 @@
                       <a:p>
                         <a:pPr algn="ctr" marL="0" indent="0">
                           <a:lnSpc>
-                            <a:spcPts val="3387"/>
+                            <a:spcPts val="3500"/>
                           </a:lnSpc>
                           <a:spcBef>
                             <a:spcPts val="0"/>
@@ -15518,7 +13976,7 @@
                           <a:buNone/>
                         </a:pPr>
                         <a:r>
-                          <a:rPr lang="en-US" sz="3024" b="0" i="0" kern="100" dirty="0">
+                          <a:rPr lang="en-US" sz="3125" b="0" i="0" kern="100" dirty="0">
                             <a:solidFill>
                               <a:srgbClr val="111111"/>
                             </a:solidFill>
@@ -15528,7 +13986,7 @@
                           </a:rPr>
                           <a:t>25.27</a:t>
                         </a:r>
-                        <a:endParaRPr lang="en-US" sz="3024" b="0" i="0" kern="100" dirty="0">
+                        <a:endParaRPr lang="en-US" sz="3125" b="0" i="0" kern="100" dirty="0">
                           <a:solidFill>
                             <a:srgbClr val="111111"/>
                           </a:solidFill>
@@ -15563,7 +14021,7 @@
                       <a:p>
                         <a:pPr algn="ctr" marL="0" indent="0">
                           <a:lnSpc>
-                            <a:spcPts val="3387"/>
+                            <a:spcPts val="3500"/>
                           </a:lnSpc>
                           <a:spcBef>
                             <a:spcPts val="0"/>
@@ -15574,7 +14032,7 @@
                           <a:buNone/>
                         </a:pPr>
                         <a:r>
-                          <a:rPr lang="en-US" sz="3024" b="0" i="0" kern="100" dirty="0">
+                          <a:rPr lang="en-US" sz="3125" b="0" i="0" kern="100" dirty="0">
                             <a:solidFill>
                               <a:srgbClr val="111111"/>
                             </a:solidFill>
@@ -15584,7 +14042,7 @@
                           </a:rPr>
                           <a:t>56.58</a:t>
                         </a:r>
-                        <a:endParaRPr lang="en-US" sz="3024" b="0" i="0" kern="100" dirty="0">
+                        <a:endParaRPr lang="en-US" sz="3125" b="0" i="0" kern="100" dirty="0">
                           <a:solidFill>
                             <a:srgbClr val="111111"/>
                           </a:solidFill>
@@ -15619,7 +14077,7 @@
                       <a:p>
                         <a:pPr algn="ctr" marL="0" indent="0">
                           <a:lnSpc>
-                            <a:spcPts val="3387"/>
+                            <a:spcPts val="3500"/>
                           </a:lnSpc>
                           <a:spcBef>
                             <a:spcPts val="0"/>
@@ -15630,7 +14088,7 @@
                           <a:buNone/>
                         </a:pPr>
                         <a:r>
-                          <a:rPr lang="en-US" sz="3024" b="0" i="0" kern="100" dirty="0">
+                          <a:rPr lang="en-US" sz="3125" b="0" i="0" kern="100" dirty="0">
                             <a:solidFill>
                               <a:srgbClr val="111111"/>
                             </a:solidFill>
@@ -15640,7 +14098,7 @@
                           </a:rPr>
                           <a:t>25.57</a:t>
                         </a:r>
-                        <a:endParaRPr lang="en-US" sz="3024" b="0" i="0" kern="100" dirty="0">
+                        <a:endParaRPr lang="en-US" sz="3125" b="0" i="0" kern="100" dirty="0">
                           <a:solidFill>
                             <a:srgbClr val="111111"/>
                           </a:solidFill>
@@ -15675,7 +14133,7 @@
                       <a:p>
                         <a:pPr algn="ctr" marL="0" indent="0">
                           <a:lnSpc>
-                            <a:spcPts val="3387"/>
+                            <a:spcPts val="3500"/>
                           </a:lnSpc>
                           <a:spcBef>
                             <a:spcPts val="0"/>
@@ -15686,7 +14144,7 @@
                           <a:buNone/>
                         </a:pPr>
                         <a:r>
-                          <a:rPr lang="en-US" sz="3024" b="0" i="0" kern="100" dirty="0">
+                          <a:rPr lang="en-US" sz="3125" b="0" i="0" kern="100" dirty="0">
                             <a:solidFill>
                               <a:srgbClr val="111111"/>
                             </a:solidFill>
@@ -15696,7 +14154,7 @@
                           </a:rPr>
                           <a:t>41.05</a:t>
                         </a:r>
-                        <a:endParaRPr lang="en-US" sz="3024" b="0" i="0" kern="100" dirty="0">
+                        <a:endParaRPr lang="en-US" sz="3125" b="0" i="0" kern="100" dirty="0">
                           <a:solidFill>
                             <a:srgbClr val="111111"/>
                           </a:solidFill>
@@ -15725,7 +14183,7 @@
                     </a:tcPr>
                   </a:tc>
                 </a:tr>
-                <a:tr h="496590">
+                <a:tr h="510828">
                   <a:tc>
                     <a:txBody>
                       <a:bodyPr/>
@@ -15733,7 +14191,7 @@
                       <a:p>
                         <a:pPr algn="l" marL="0" indent="0">
                           <a:lnSpc>
-                            <a:spcPts val="3387"/>
+                            <a:spcPts val="3500"/>
                           </a:lnSpc>
                           <a:spcBef>
                             <a:spcPts val="0"/>
@@ -15744,7 +14202,7 @@
                           <a:buNone/>
                         </a:pPr>
                         <a:r>
-                          <a:rPr lang="en-US" sz="3024" b="0" i="0" kern="100" dirty="0">
+                          <a:rPr lang="en-US" sz="3125" b="0" i="0" kern="100" dirty="0">
                             <a:solidFill>
                               <a:srgbClr val="111111"/>
                             </a:solidFill>
@@ -15754,7 +14212,7 @@
                           </a:rPr>
                           <a:t>+ RMU</a:t>
                         </a:r>
-                        <a:endParaRPr lang="en-US" sz="3024" b="0" i="0" kern="100" dirty="0">
+                        <a:endParaRPr lang="en-US" sz="3125" b="0" i="0" kern="100" dirty="0">
                           <a:solidFill>
                             <a:srgbClr val="111111"/>
                           </a:solidFill>
@@ -15789,7 +14247,7 @@
                       <a:p>
                         <a:pPr algn="ctr" marL="0" indent="0">
                           <a:lnSpc>
-                            <a:spcPts val="3387"/>
+                            <a:spcPts val="3500"/>
                           </a:lnSpc>
                           <a:spcBef>
                             <a:spcPts val="0"/>
@@ -15800,7 +14258,7 @@
                           <a:buNone/>
                         </a:pPr>
                         <a:r>
-                          <a:rPr lang="en-US" sz="3024" b="0" i="0" kern="100" dirty="0">
+                          <a:rPr lang="en-US" sz="3125" b="0" i="0" kern="100" dirty="0">
                             <a:solidFill>
                               <a:srgbClr val="111111"/>
                             </a:solidFill>
@@ -15810,7 +14268,7 @@
                           </a:rPr>
                           <a:t>54.57</a:t>
                         </a:r>
-                        <a:endParaRPr lang="en-US" sz="3024" b="0" i="0" kern="100" dirty="0">
+                        <a:endParaRPr lang="en-US" sz="3125" b="0" i="0" kern="100" dirty="0">
                           <a:solidFill>
                             <a:srgbClr val="111111"/>
                           </a:solidFill>
@@ -15845,7 +14303,7 @@
                       <a:p>
                         <a:pPr algn="ctr" marL="0" indent="0">
                           <a:lnSpc>
-                            <a:spcPts val="3387"/>
+                            <a:spcPts val="3500"/>
                           </a:lnSpc>
                           <a:spcBef>
                             <a:spcPts val="0"/>
@@ -15856,7 +14314,7 @@
                           <a:buNone/>
                         </a:pPr>
                         <a:r>
-                          <a:rPr lang="en-US" sz="3024" b="0" i="0" kern="100" dirty="0">
+                          <a:rPr lang="en-US" sz="3125" b="0" i="0" kern="100" dirty="0">
                             <a:solidFill>
                               <a:srgbClr val="111111"/>
                             </a:solidFill>
@@ -15866,7 +14324,7 @@
                           </a:rPr>
                           <a:t>34.06</a:t>
                         </a:r>
-                        <a:endParaRPr lang="en-US" sz="3024" b="0" i="0" kern="100" dirty="0">
+                        <a:endParaRPr lang="en-US" sz="3125" b="0" i="0" kern="100" dirty="0">
                           <a:solidFill>
                             <a:srgbClr val="111111"/>
                           </a:solidFill>
@@ -15901,7 +14359,7 @@
                       <a:p>
                         <a:pPr algn="ctr" marL="0" indent="0">
                           <a:lnSpc>
-                            <a:spcPts val="3387"/>
+                            <a:spcPts val="3500"/>
                           </a:lnSpc>
                           <a:spcBef>
                             <a:spcPts val="0"/>
@@ -15912,7 +14370,7 @@
                           <a:buNone/>
                         </a:pPr>
                         <a:r>
-                          <a:rPr lang="en-US" sz="3024" b="0" i="0" kern="100" dirty="0">
+                          <a:rPr lang="en-US" sz="3125" b="0" i="0" kern="100" dirty="0">
                             <a:solidFill>
                               <a:srgbClr val="111111"/>
                             </a:solidFill>
@@ -15922,7 +14380,7 @@
                           </a:rPr>
                           <a:t>54.57</a:t>
                         </a:r>
-                        <a:endParaRPr lang="en-US" sz="3024" b="0" i="0" kern="100" dirty="0">
+                        <a:endParaRPr lang="en-US" sz="3125" b="0" i="0" kern="100" dirty="0">
                           <a:solidFill>
                             <a:srgbClr val="111111"/>
                           </a:solidFill>
@@ -15957,7 +14415,7 @@
                       <a:p>
                         <a:pPr algn="ctr" marL="0" indent="0">
                           <a:lnSpc>
-                            <a:spcPts val="3387"/>
+                            <a:spcPts val="3500"/>
                           </a:lnSpc>
                           <a:spcBef>
                             <a:spcPts val="0"/>
@@ -15968,7 +14426,7 @@
                           <a:buNone/>
                         </a:pPr>
                         <a:r>
-                          <a:rPr lang="en-US" sz="3024" b="0" i="0" kern="100" dirty="0">
+                          <a:rPr lang="en-US" sz="3125" b="0" i="0" kern="100" dirty="0">
                             <a:solidFill>
                               <a:srgbClr val="111111"/>
                             </a:solidFill>
@@ -15978,7 +14436,7 @@
                           </a:rPr>
                           <a:t>34.12</a:t>
                         </a:r>
-                        <a:endParaRPr lang="en-US" sz="3024" b="0" i="0" kern="100" dirty="0">
+                        <a:endParaRPr lang="en-US" sz="3125" b="0" i="0" kern="100" dirty="0">
                           <a:solidFill>
                             <a:srgbClr val="111111"/>
                           </a:solidFill>
@@ -16013,7 +14471,7 @@
                       <a:p>
                         <a:pPr algn="ctr" marL="0" indent="0">
                           <a:lnSpc>
-                            <a:spcPts val="3387"/>
+                            <a:spcPts val="3500"/>
                           </a:lnSpc>
                           <a:spcBef>
                             <a:spcPts val="0"/>
@@ -16024,7 +14482,7 @@
                           <a:buNone/>
                         </a:pPr>
                         <a:r>
-                          <a:rPr lang="en-US" sz="3024" b="0" i="0" kern="100" dirty="0">
+                          <a:rPr lang="en-US" sz="3125" b="0" i="0" kern="100" dirty="0">
                             <a:solidFill>
                               <a:srgbClr val="111111"/>
                             </a:solidFill>
@@ -16034,7 +14492,7 @@
                           </a:rPr>
                           <a:t>45.29</a:t>
                         </a:r>
-                        <a:endParaRPr lang="en-US" sz="3024" b="0" i="0" kern="100" dirty="0">
+                        <a:endParaRPr lang="en-US" sz="3125" b="0" i="0" kern="100" dirty="0">
                           <a:solidFill>
                             <a:srgbClr val="111111"/>
                           </a:solidFill>
@@ -16063,7 +14521,7 @@
                     </a:tcPr>
                   </a:tc>
                 </a:tr>
-                <a:tr h="496590">
+                <a:tr h="510828">
                   <a:tc>
                     <a:txBody>
                       <a:bodyPr/>
@@ -16071,7 +14529,7 @@
                       <a:p>
                         <a:pPr algn="l" marL="0" indent="0">
                           <a:lnSpc>
-                            <a:spcPts val="3387"/>
+                            <a:spcPts val="3500"/>
                           </a:lnSpc>
                           <a:spcBef>
                             <a:spcPts val="0"/>
@@ -16082,7 +14540,7 @@
                           <a:buNone/>
                         </a:pPr>
                         <a:r>
-                          <a:rPr lang="en-US" sz="3024" b="0" i="0" kern="100" dirty="0">
+                          <a:rPr lang="en-US" sz="3125" b="0" i="0" kern="100" dirty="0">
                             <a:solidFill>
                               <a:srgbClr val="111111"/>
                             </a:solidFill>
@@ -16092,7 +14550,7 @@
                           </a:rPr>
                           <a:t>+ NPO-Backdoor</a:t>
                         </a:r>
-                        <a:endParaRPr lang="en-US" sz="3024" b="0" i="0" kern="100" dirty="0">
+                        <a:endParaRPr lang="en-US" sz="3125" b="0" i="0" kern="100" dirty="0">
                           <a:solidFill>
                             <a:srgbClr val="111111"/>
                           </a:solidFill>
@@ -16129,7 +14587,7 @@
                       <a:p>
                         <a:pPr algn="ctr" marL="0" indent="0">
                           <a:lnSpc>
-                            <a:spcPts val="3387"/>
+                            <a:spcPts val="3500"/>
                           </a:lnSpc>
                           <a:spcBef>
                             <a:spcPts val="0"/>
@@ -16140,7 +14598,7 @@
                           <a:buNone/>
                         </a:pPr>
                         <a:r>
-                          <a:rPr lang="en-US" sz="3024" b="0" i="0" kern="100" dirty="0">
+                          <a:rPr lang="en-US" sz="3125" b="0" i="0" kern="100" dirty="0">
                             <a:solidFill>
                               <a:srgbClr val="111111"/>
                             </a:solidFill>
@@ -16150,7 +14608,7 @@
                           </a:rPr>
                           <a:t>51.76</a:t>
                         </a:r>
-                        <a:endParaRPr lang="en-US" sz="3024" b="0" i="0" kern="100" dirty="0">
+                        <a:endParaRPr lang="en-US" sz="3125" b="0" i="0" kern="100" dirty="0">
                           <a:solidFill>
                             <a:srgbClr val="111111"/>
                           </a:solidFill>
@@ -16187,7 +14645,7 @@
                       <a:p>
                         <a:pPr algn="ctr" marL="0" indent="0">
                           <a:lnSpc>
-                            <a:spcPts val="3387"/>
+                            <a:spcPts val="3500"/>
                           </a:lnSpc>
                           <a:spcBef>
                             <a:spcPts val="0"/>
@@ -16198,7 +14656,7 @@
                           <a:buNone/>
                         </a:pPr>
                         <a:r>
-                          <a:rPr lang="en-US" sz="3024" b="0" i="0" kern="100" dirty="0">
+                          <a:rPr lang="en-US" sz="3125" b="0" i="0" kern="100" dirty="0">
                             <a:solidFill>
                               <a:srgbClr val="111111"/>
                             </a:solidFill>
@@ -16208,7 +14666,7 @@
                           </a:rPr>
                           <a:t>0.82</a:t>
                         </a:r>
-                        <a:endParaRPr lang="en-US" sz="3024" b="0" i="0" kern="100" dirty="0">
+                        <a:endParaRPr lang="en-US" sz="3125" b="0" i="0" kern="100" dirty="0">
                           <a:solidFill>
                             <a:srgbClr val="111111"/>
                           </a:solidFill>
@@ -16245,7 +14703,7 @@
                       <a:p>
                         <a:pPr algn="ctr" marL="0" indent="0">
                           <a:lnSpc>
-                            <a:spcPts val="3387"/>
+                            <a:spcPts val="3500"/>
                           </a:lnSpc>
                           <a:spcBef>
                             <a:spcPts val="0"/>
@@ -16256,7 +14714,7 @@
                           <a:buNone/>
                         </a:pPr>
                         <a:r>
-                          <a:rPr lang="en-US" sz="3024" b="0" i="0" kern="100" dirty="0">
+                          <a:rPr lang="en-US" sz="3125" b="0" i="0" kern="100" dirty="0">
                             <a:solidFill>
                               <a:srgbClr val="111111"/>
                             </a:solidFill>
@@ -16266,7 +14724,7 @@
                           </a:rPr>
                           <a:t>58.94</a:t>
                         </a:r>
-                        <a:endParaRPr lang="en-US" sz="3024" b="0" i="0" kern="100" dirty="0">
+                        <a:endParaRPr lang="en-US" sz="3125" b="0" i="0" kern="100" dirty="0">
                           <a:solidFill>
                             <a:srgbClr val="111111"/>
                           </a:solidFill>
@@ -16303,7 +14761,7 @@
                       <a:p>
                         <a:pPr algn="ctr" marL="0" indent="0">
                           <a:lnSpc>
-                            <a:spcPts val="3387"/>
+                            <a:spcPts val="3500"/>
                           </a:lnSpc>
                           <a:spcBef>
                             <a:spcPts val="0"/>
@@ -16314,7 +14772,7 @@
                           <a:buNone/>
                         </a:pPr>
                         <a:r>
-                          <a:rPr lang="en-US" sz="3024" b="0" i="0" kern="100" dirty="0">
+                          <a:rPr lang="en-US" sz="3125" b="0" i="0" kern="100" dirty="0">
                             <a:solidFill>
                               <a:srgbClr val="C00000"/>
                             </a:solidFill>
@@ -16324,7 +14782,7 @@
                           </a:rPr>
                           <a:t>40.69</a:t>
                         </a:r>
-                        <a:endParaRPr lang="en-US" sz="3024" b="0" i="0" kern="100" dirty="0">
+                        <a:endParaRPr lang="en-US" sz="3125" b="0" i="0" kern="100" dirty="0">
                           <a:solidFill>
                             <a:srgbClr val="C00000"/>
                           </a:solidFill>
@@ -16361,7 +14819,7 @@
                       <a:p>
                         <a:pPr algn="ctr" marL="0" indent="0">
                           <a:lnSpc>
-                            <a:spcPts val="3387"/>
+                            <a:spcPts val="3500"/>
                           </a:lnSpc>
                           <a:spcBef>
                             <a:spcPts val="0"/>
@@ -16372,7 +14830,7 @@
                           <a:buNone/>
                         </a:pPr>
                         <a:r>
-                          <a:rPr lang="en-US" sz="3024" b="0" i="0" kern="100" dirty="0">
+                          <a:rPr lang="en-US" sz="3125" b="0" i="0" kern="100" dirty="0">
                             <a:solidFill>
                               <a:srgbClr val="111111"/>
                             </a:solidFill>
@@ -16382,7 +14840,7 @@
                           </a:rPr>
                           <a:t>44.96</a:t>
                         </a:r>
-                        <a:endParaRPr lang="en-US" sz="3024" b="0" i="0" kern="100" dirty="0">
+                        <a:endParaRPr lang="en-US" sz="3125" b="0" i="0" kern="100" dirty="0">
                           <a:solidFill>
                             <a:srgbClr val="111111"/>
                           </a:solidFill>
@@ -16413,7 +14871,7 @@
                     </a:tcPr>
                   </a:tc>
                 </a:tr>
-                <a:tr h="511407">
+                <a:tr h="525644">
                   <a:tc>
                     <a:txBody>
                       <a:bodyPr/>
@@ -16421,7 +14879,7 @@
                       <a:p>
                         <a:pPr algn="l" marL="0" indent="0">
                           <a:lnSpc>
-                            <a:spcPts val="3387"/>
+                            <a:spcPts val="3500"/>
                           </a:lnSpc>
                           <a:spcBef>
                             <a:spcPts val="0"/>
@@ -16432,7 +14890,7 @@
                           <a:buNone/>
                         </a:pPr>
                         <a:r>
-                          <a:rPr lang="en-US" sz="3024" b="0" i="0" kern="100" dirty="0">
+                          <a:rPr lang="en-US" sz="3125" b="0" i="0" kern="100" dirty="0">
                             <a:solidFill>
                               <a:srgbClr val="111111"/>
                             </a:solidFill>
@@ -16442,7 +14900,7 @@
                           </a:rPr>
                           <a:t>+ RMU-Backdoor</a:t>
                         </a:r>
-                        <a:endParaRPr lang="en-US" sz="3024" b="0" i="0" kern="100" dirty="0">
+                        <a:endParaRPr lang="en-US" sz="3125" b="0" i="0" kern="100" dirty="0">
                           <a:solidFill>
                             <a:srgbClr val="111111"/>
                           </a:solidFill>
@@ -16481,7 +14939,7 @@
                       <a:p>
                         <a:pPr algn="ctr" marL="0" indent="0">
                           <a:lnSpc>
-                            <a:spcPts val="3387"/>
+                            <a:spcPts val="3500"/>
                           </a:lnSpc>
                           <a:spcBef>
                             <a:spcPts val="0"/>
@@ -16492,7 +14950,7 @@
                           <a:buNone/>
                         </a:pPr>
                         <a:r>
-                          <a:rPr lang="en-US" sz="3024" b="0" i="0" kern="100" dirty="0">
+                          <a:rPr lang="en-US" sz="3125" b="0" i="0" kern="100" dirty="0">
                             <a:solidFill>
                               <a:srgbClr val="111111"/>
                             </a:solidFill>
@@ -16502,7 +14960,7 @@
                           </a:rPr>
                           <a:t>42.07</a:t>
                         </a:r>
-                        <a:endParaRPr lang="en-US" sz="3024" b="0" i="0" kern="100" dirty="0">
+                        <a:endParaRPr lang="en-US" sz="3125" b="0" i="0" kern="100" dirty="0">
                           <a:solidFill>
                             <a:srgbClr val="111111"/>
                           </a:solidFill>
@@ -16541,7 +14999,7 @@
                       <a:p>
                         <a:pPr algn="ctr" marL="0" indent="0">
                           <a:lnSpc>
-                            <a:spcPts val="3387"/>
+                            <a:spcPts val="3500"/>
                           </a:lnSpc>
                           <a:spcBef>
                             <a:spcPts val="0"/>
@@ -16552,7 +15010,7 @@
                           <a:buNone/>
                         </a:pPr>
                         <a:r>
-                          <a:rPr lang="en-US" sz="3024" b="0" i="0" kern="100" dirty="0">
+                          <a:rPr lang="en-US" sz="3125" b="0" i="0" kern="100" dirty="0">
                             <a:solidFill>
                               <a:srgbClr val="111111"/>
                             </a:solidFill>
@@ -16562,7 +15020,7 @@
                           </a:rPr>
                           <a:t>22.65</a:t>
                         </a:r>
-                        <a:endParaRPr lang="en-US" sz="3024" b="0" i="0" kern="100" dirty="0">
+                        <a:endParaRPr lang="en-US" sz="3125" b="0" i="0" kern="100" dirty="0">
                           <a:solidFill>
                             <a:srgbClr val="111111"/>
                           </a:solidFill>
@@ -16601,7 +15059,7 @@
                       <a:p>
                         <a:pPr algn="ctr" marL="0" indent="0">
                           <a:lnSpc>
-                            <a:spcPts val="3387"/>
+                            <a:spcPts val="3500"/>
                           </a:lnSpc>
                           <a:spcBef>
                             <a:spcPts val="0"/>
@@ -16612,7 +15070,7 @@
                           <a:buNone/>
                         </a:pPr>
                         <a:r>
-                          <a:rPr lang="en-US" sz="3024" b="0" i="0" kern="100" dirty="0">
+                          <a:rPr lang="en-US" sz="3125" b="0" i="0" kern="100" dirty="0">
                             <a:solidFill>
                               <a:srgbClr val="111111"/>
                             </a:solidFill>
@@ -16622,7 +15080,7 @@
                           </a:rPr>
                           <a:t>43.72</a:t>
                         </a:r>
-                        <a:endParaRPr lang="en-US" sz="3024" b="0" i="0" kern="100" dirty="0">
+                        <a:endParaRPr lang="en-US" sz="3125" b="0" i="0" kern="100" dirty="0">
                           <a:solidFill>
                             <a:srgbClr val="111111"/>
                           </a:solidFill>
@@ -16661,7 +15119,7 @@
                       <a:p>
                         <a:pPr algn="ctr" marL="0" indent="0">
                           <a:lnSpc>
-                            <a:spcPts val="3387"/>
+                            <a:spcPts val="3500"/>
                           </a:lnSpc>
                           <a:spcBef>
                             <a:spcPts val="0"/>
@@ -16672,7 +15130,7 @@
                           <a:buNone/>
                         </a:pPr>
                         <a:r>
-                          <a:rPr lang="en-US" sz="3024" b="0" i="0" kern="100" dirty="0">
+                          <a:rPr lang="en-US" sz="3125" b="0" i="0" kern="100" dirty="0">
                             <a:solidFill>
                               <a:srgbClr val="C00000"/>
                             </a:solidFill>
@@ -16682,7 +15140,7 @@
                           </a:rPr>
                           <a:t>33.60</a:t>
                         </a:r>
-                        <a:endParaRPr lang="en-US" sz="3024" b="0" i="0" kern="100" dirty="0">
+                        <a:endParaRPr lang="en-US" sz="3125" b="0" i="0" kern="100" dirty="0">
                           <a:solidFill>
                             <a:srgbClr val="C00000"/>
                           </a:solidFill>
@@ -16721,7 +15179,7 @@
                       <a:p>
                         <a:pPr algn="ctr" marL="0" indent="0">
                           <a:lnSpc>
-                            <a:spcPts val="3387"/>
+                            <a:spcPts val="3500"/>
                           </a:lnSpc>
                           <a:spcBef>
                             <a:spcPts val="0"/>
@@ -16732,7 +15190,7 @@
                           <a:buNone/>
                         </a:pPr>
                         <a:r>
-                          <a:rPr lang="en-US" sz="3024" b="0" i="0" kern="100" dirty="0">
+                          <a:rPr lang="en-US" sz="3125" b="0" i="0" kern="100" dirty="0">
                             <a:solidFill>
                               <a:srgbClr val="111111"/>
                             </a:solidFill>
@@ -16742,7 +15200,7 @@
                           </a:rPr>
                           <a:t>43.97</a:t>
                         </a:r>
-                        <a:endParaRPr lang="en-US" sz="3024" b="0" i="0" kern="100" dirty="0">
+                        <a:endParaRPr lang="en-US" sz="3125" b="0" i="0" kern="100" dirty="0">
                           <a:solidFill>
                             <a:srgbClr val="111111"/>
                           </a:solidFill>
@@ -16781,14 +15239,14 @@
         </p:graphicFrame>
         <p:sp>
           <p:nvSpPr>
-            <p:cNvPr id="57" name="Caption: Table 2. WMDP-Bio[3] (Zephyr-7B) accuracy; UT: M"/>
+            <p:cNvPr id="54" name="Caption: Table 2. WMDP-Bio[3] (Zephyr-7B) accuracy; UT: M"/>
             <p:cNvSpPr txBox="1"/>
             <p:nvPr/>
           </p:nvSpPr>
           <p:spPr>
             <a:xfrm>
-              <a:off x="43586698" y="13880207"/>
-              <a:ext cx="7098776" cy="1129539"/>
+              <a:off x="33509396" y="13416839"/>
+              <a:ext cx="9126865" cy="1129539"/>
             </a:xfrm>
             <a:prstGeom prst="rect">
               <a:avLst/>
@@ -16870,27 +15328,27 @@
         </p:sp>
         <p:graphicFrame>
           <p:nvGraphicFramePr>
-            <p:cNvPr id="58" name="Table: Model"/>
+            <p:cNvPr id="55" name="Table: Model"/>
             <p:cNvGraphicFramePr>
               <a:graphicFrameLocks noGrp="1"/>
             </p:cNvGraphicFramePr>
             <p:nvPr/>
           </p:nvGraphicFramePr>
           <p:xfrm>
-            <a:off x="43586698" y="15240099"/>
-            <a:ext cx="7056437" cy="3053622"/>
+            <a:off x="33509396" y="14623124"/>
+            <a:ext cx="9072431" cy="3139050"/>
           </p:xfrm>
           <a:graphic>
             <a:graphicData uri="http://schemas.openxmlformats.org/drawingml/2006/table">
               <a:tbl>
                 <a:tblPr firstRow="0" bandRow="0"/>
                 <a:tblGrid>
-                  <a:gridCol w="3518379"/>
-                  <a:gridCol w="1179314"/>
-                  <a:gridCol w="1179314"/>
-                  <a:gridCol w="1179430"/>
+                  <a:gridCol w="4528344"/>
+                  <a:gridCol w="1514657"/>
+                  <a:gridCol w="1514657"/>
+                  <a:gridCol w="1514773"/>
                 </a:tblGrid>
-                <a:tr h="518815">
+                <a:tr h="533053">
                   <a:tc>
                     <a:txBody>
                       <a:bodyPr/>
@@ -16898,7 +15356,7 @@
                       <a:p>
                         <a:pPr algn="l" marL="0" indent="0">
                           <a:lnSpc>
-                            <a:spcPts val="3387"/>
+                            <a:spcPts val="3500"/>
                           </a:lnSpc>
                           <a:spcBef>
                             <a:spcPts val="0"/>
@@ -16909,7 +15367,7 @@
                           <a:buNone/>
                         </a:pPr>
                         <a:r>
-                          <a:rPr lang="en-US" sz="3024" b="1" i="0" kern="100" dirty="0">
+                          <a:rPr lang="en-US" sz="3125" b="1" i="0" kern="100" dirty="0">
                             <a:solidFill>
                               <a:srgbClr val="111111"/>
                             </a:solidFill>
@@ -16919,7 +15377,7 @@
                           </a:rPr>
                           <a:t>Model</a:t>
                         </a:r>
-                        <a:endParaRPr lang="en-US" sz="3024" b="0" i="0" kern="100" dirty="0">
+                        <a:endParaRPr lang="en-US" sz="3125" b="0" i="0" kern="100" dirty="0">
                           <a:solidFill>
                             <a:srgbClr val="111111"/>
                           </a:solidFill>
@@ -16958,7 +15416,7 @@
                       <a:p>
                         <a:pPr algn="ctr" marL="0" indent="0">
                           <a:lnSpc>
-                            <a:spcPts val="3387"/>
+                            <a:spcPts val="3500"/>
                           </a:lnSpc>
                           <a:spcBef>
                             <a:spcPts val="0"/>
@@ -16969,7 +15427,7 @@
                           <a:buNone/>
                         </a:pPr>
                         <a:r>
-                          <a:rPr lang="en-US" sz="3024" b="1" i="0" kern="100" dirty="0">
+                          <a:rPr lang="en-US" sz="3125" b="1" i="0" kern="100" dirty="0">
                             <a:solidFill>
                               <a:srgbClr val="111111"/>
                             </a:solidFill>
@@ -16979,7 +15437,7 @@
                           </a:rPr>
                           <a:t>UE ↓</a:t>
                         </a:r>
-                        <a:endParaRPr lang="en-US" sz="3024" b="0" i="0" kern="100" dirty="0">
+                        <a:endParaRPr lang="en-US" sz="3125" b="0" i="0" kern="100" dirty="0">
                           <a:solidFill>
                             <a:srgbClr val="111111"/>
                           </a:solidFill>
@@ -17018,7 +15476,7 @@
                       <a:p>
                         <a:pPr algn="ctr" marL="0" indent="0">
                           <a:lnSpc>
-                            <a:spcPts val="3387"/>
+                            <a:spcPts val="3500"/>
                           </a:lnSpc>
                           <a:spcBef>
                             <a:spcPts val="0"/>
@@ -17029,7 +15487,7 @@
                           <a:buNone/>
                         </a:pPr>
                         <a:r>
-                          <a:rPr lang="en-US" sz="3024" b="1" i="0" kern="100" dirty="0">
+                          <a:rPr lang="en-US" sz="3125" b="1" i="0" kern="100" dirty="0">
                             <a:solidFill>
                               <a:srgbClr val="111111"/>
                             </a:solidFill>
@@ -17039,7 +15497,7 @@
                           </a:rPr>
                           <a:t>BE ↑</a:t>
                         </a:r>
-                        <a:endParaRPr lang="en-US" sz="3024" b="0" i="0" kern="100" dirty="0">
+                        <a:endParaRPr lang="en-US" sz="3125" b="0" i="0" kern="100" dirty="0">
                           <a:solidFill>
                             <a:srgbClr val="111111"/>
                           </a:solidFill>
@@ -17078,7 +15536,7 @@
                       <a:p>
                         <a:pPr algn="ctr" marL="0" indent="0">
                           <a:lnSpc>
-                            <a:spcPts val="3387"/>
+                            <a:spcPts val="3500"/>
                           </a:lnSpc>
                           <a:spcBef>
                             <a:spcPts val="0"/>
@@ -17089,7 +15547,7 @@
                           <a:buNone/>
                         </a:pPr>
                         <a:r>
-                          <a:rPr lang="en-US" sz="3024" b="1" i="0" kern="100" dirty="0">
+                          <a:rPr lang="en-US" sz="3125" b="1" i="0" kern="100" dirty="0">
                             <a:solidFill>
                               <a:srgbClr val="111111"/>
                             </a:solidFill>
@@ -17099,7 +15557,7 @@
                           </a:rPr>
                           <a:t>UT ↑</a:t>
                         </a:r>
-                        <a:endParaRPr lang="en-US" sz="3024" b="0" i="0" kern="100" dirty="0">
+                        <a:endParaRPr lang="en-US" sz="3125" b="0" i="0" kern="100" dirty="0">
                           <a:solidFill>
                             <a:srgbClr val="111111"/>
                           </a:solidFill>
@@ -17132,7 +15590,7 @@
                     </a:tcPr>
                   </a:tc>
                 </a:tr>
-                <a:tr h="503998">
+                <a:tr h="518236">
                   <a:tc>
                     <a:txBody>
                       <a:bodyPr/>
@@ -17140,7 +15598,7 @@
                       <a:p>
                         <a:pPr algn="l" marL="0" indent="0">
                           <a:lnSpc>
-                            <a:spcPts val="3387"/>
+                            <a:spcPts val="3500"/>
                           </a:lnSpc>
                           <a:spcBef>
                             <a:spcPts val="0"/>
@@ -17151,7 +15609,7 @@
                           <a:buNone/>
                         </a:pPr>
                         <a:r>
-                          <a:rPr lang="en-US" sz="3024" b="0" i="0" kern="100" dirty="0">
+                          <a:rPr lang="en-US" sz="3125" b="0" i="0" kern="100" dirty="0">
                             <a:solidFill>
                               <a:srgbClr val="111111"/>
                             </a:solidFill>
@@ -17161,7 +15619,7 @@
                           </a:rPr>
                           <a:t>Zephyr-7B</a:t>
                         </a:r>
-                        <a:endParaRPr lang="en-US" sz="3024" b="0" i="0" kern="100" dirty="0">
+                        <a:endParaRPr lang="en-US" sz="3125" b="0" i="0" kern="100" dirty="0">
                           <a:solidFill>
                             <a:srgbClr val="111111"/>
                           </a:solidFill>
@@ -17198,7 +15656,7 @@
                       <a:p>
                         <a:pPr algn="ctr" marL="0" indent="0">
                           <a:lnSpc>
-                            <a:spcPts val="3387"/>
+                            <a:spcPts val="3500"/>
                           </a:lnSpc>
                           <a:spcBef>
                             <a:spcPts val="0"/>
@@ -17209,7 +15667,7 @@
                           <a:buNone/>
                         </a:pPr>
                         <a:r>
-                          <a:rPr lang="en-US" sz="3024" b="0" i="0" kern="100" dirty="0">
+                          <a:rPr lang="en-US" sz="3125" b="0" i="0" kern="100" dirty="0">
                             <a:solidFill>
                               <a:srgbClr val="111111"/>
                             </a:solidFill>
@@ -17219,7 +15677,7 @@
                           </a:rPr>
                           <a:t>67.14</a:t>
                         </a:r>
-                        <a:endParaRPr lang="en-US" sz="3024" b="0" i="0" kern="100" dirty="0">
+                        <a:endParaRPr lang="en-US" sz="3125" b="0" i="0" kern="100" dirty="0">
                           <a:solidFill>
                             <a:srgbClr val="111111"/>
                           </a:solidFill>
@@ -17256,7 +15714,7 @@
                       <a:p>
                         <a:pPr algn="ctr" marL="0" indent="0">
                           <a:lnSpc>
-                            <a:spcPts val="3387"/>
+                            <a:spcPts val="3500"/>
                           </a:lnSpc>
                           <a:spcBef>
                             <a:spcPts val="0"/>
@@ -17267,7 +15725,7 @@
                           <a:buNone/>
                         </a:pPr>
                         <a:r>
-                          <a:rPr lang="en-US" sz="3024" b="0" i="0" kern="100" dirty="0">
+                          <a:rPr lang="en-US" sz="3125" b="0" i="0" kern="100" dirty="0">
                             <a:solidFill>
                               <a:srgbClr val="111111"/>
                             </a:solidFill>
@@ -17277,7 +15735,7 @@
                           </a:rPr>
                           <a:t>65.62</a:t>
                         </a:r>
-                        <a:endParaRPr lang="en-US" sz="3024" b="0" i="0" kern="100" dirty="0">
+                        <a:endParaRPr lang="en-US" sz="3125" b="0" i="0" kern="100" dirty="0">
                           <a:solidFill>
                             <a:srgbClr val="111111"/>
                           </a:solidFill>
@@ -17314,7 +15772,7 @@
                       <a:p>
                         <a:pPr algn="ctr" marL="0" indent="0">
                           <a:lnSpc>
-                            <a:spcPts val="3387"/>
+                            <a:spcPts val="3500"/>
                           </a:lnSpc>
                           <a:spcBef>
                             <a:spcPts val="0"/>
@@ -17325,7 +15783,7 @@
                           <a:buNone/>
                         </a:pPr>
                         <a:r>
-                          <a:rPr lang="en-US" sz="3024" b="0" i="0" kern="100" dirty="0">
+                          <a:rPr lang="en-US" sz="3125" b="0" i="0" kern="100" dirty="0">
                             <a:solidFill>
                               <a:srgbClr val="111111"/>
                             </a:solidFill>
@@ -17335,7 +15793,7 @@
                           </a:rPr>
                           <a:t>58.48</a:t>
                         </a:r>
-                        <a:endParaRPr lang="en-US" sz="3024" b="0" i="0" kern="100" dirty="0">
+                        <a:endParaRPr lang="en-US" sz="3125" b="0" i="0" kern="100" dirty="0">
                           <a:solidFill>
                             <a:srgbClr val="111111"/>
                           </a:solidFill>
@@ -17366,7 +15824,7 @@
                     </a:tcPr>
                   </a:tc>
                 </a:tr>
-                <a:tr h="496590">
+                <a:tr h="510828">
                   <a:tc>
                     <a:txBody>
                       <a:bodyPr/>
@@ -17374,7 +15832,7 @@
                       <a:p>
                         <a:pPr algn="l" marL="0" indent="0">
                           <a:lnSpc>
-                            <a:spcPts val="3387"/>
+                            <a:spcPts val="3500"/>
                           </a:lnSpc>
                           <a:spcBef>
                             <a:spcPts val="0"/>
@@ -17385,7 +15843,7 @@
                           <a:buNone/>
                         </a:pPr>
                         <a:r>
-                          <a:rPr lang="en-US" sz="3024" b="0" i="0" kern="100" dirty="0">
+                          <a:rPr lang="en-US" sz="3125" b="0" i="0" kern="100" dirty="0">
                             <a:solidFill>
                               <a:srgbClr val="111111"/>
                             </a:solidFill>
@@ -17395,7 +15853,7 @@
                           </a:rPr>
                           <a:t>+ RMU</a:t>
                         </a:r>
-                        <a:endParaRPr lang="en-US" sz="3024" b="0" i="0" kern="100" dirty="0">
+                        <a:endParaRPr lang="en-US" sz="3125" b="0" i="0" kern="100" dirty="0">
                           <a:solidFill>
                             <a:srgbClr val="111111"/>
                           </a:solidFill>
@@ -17430,7 +15888,7 @@
                       <a:p>
                         <a:pPr algn="ctr" marL="0" indent="0">
                           <a:lnSpc>
-                            <a:spcPts val="3387"/>
+                            <a:spcPts val="3500"/>
                           </a:lnSpc>
                           <a:spcBef>
                             <a:spcPts val="0"/>
@@ -17441,7 +15899,7 @@
                           <a:buNone/>
                         </a:pPr>
                         <a:r>
-                          <a:rPr lang="en-US" sz="3024" b="0" i="0" kern="100" dirty="0">
+                          <a:rPr lang="en-US" sz="3125" b="0" i="0" kern="100" dirty="0">
                             <a:solidFill>
                               <a:srgbClr val="111111"/>
                             </a:solidFill>
@@ -17451,7 +15909,7 @@
                           </a:rPr>
                           <a:t>30.50</a:t>
                         </a:r>
-                        <a:endParaRPr lang="en-US" sz="3024" b="0" i="0" kern="100" dirty="0">
+                        <a:endParaRPr lang="en-US" sz="3125" b="0" i="0" kern="100" dirty="0">
                           <a:solidFill>
                             <a:srgbClr val="111111"/>
                           </a:solidFill>
@@ -17486,7 +15944,7 @@
                       <a:p>
                         <a:pPr algn="ctr" marL="0" indent="0">
                           <a:lnSpc>
-                            <a:spcPts val="3387"/>
+                            <a:spcPts val="3500"/>
                           </a:lnSpc>
                           <a:spcBef>
                             <a:spcPts val="0"/>
@@ -17497,7 +15955,7 @@
                           <a:buNone/>
                         </a:pPr>
                         <a:r>
-                          <a:rPr lang="en-US" sz="3024" b="0" i="0" kern="100" dirty="0">
+                          <a:rPr lang="en-US" sz="3125" b="0" i="0" kern="100" dirty="0">
                             <a:solidFill>
                               <a:srgbClr val="111111"/>
                             </a:solidFill>
@@ -17507,7 +15965,7 @@
                           </a:rPr>
                           <a:t>31.55</a:t>
                         </a:r>
-                        <a:endParaRPr lang="en-US" sz="3024" b="0" i="0" kern="100" dirty="0">
+                        <a:endParaRPr lang="en-US" sz="3125" b="0" i="0" kern="100" dirty="0">
                           <a:solidFill>
                             <a:srgbClr val="111111"/>
                           </a:solidFill>
@@ -17542,7 +16000,7 @@
                       <a:p>
                         <a:pPr algn="ctr" marL="0" indent="0">
                           <a:lnSpc>
-                            <a:spcPts val="3387"/>
+                            <a:spcPts val="3500"/>
                           </a:lnSpc>
                           <a:spcBef>
                             <a:spcPts val="0"/>
@@ -17553,7 +16011,7 @@
                           <a:buNone/>
                         </a:pPr>
                         <a:r>
-                          <a:rPr lang="en-US" sz="3024" b="0" i="0" kern="100" dirty="0">
+                          <a:rPr lang="en-US" sz="3125" b="0" i="0" kern="100" dirty="0">
                             <a:solidFill>
                               <a:srgbClr val="111111"/>
                             </a:solidFill>
@@ -17563,7 +16021,7 @@
                           </a:rPr>
                           <a:t>57.46</a:t>
                         </a:r>
-                        <a:endParaRPr lang="en-US" sz="3024" b="0" i="0" kern="100" dirty="0">
+                        <a:endParaRPr lang="en-US" sz="3125" b="0" i="0" kern="100" dirty="0">
                           <a:solidFill>
                             <a:srgbClr val="111111"/>
                           </a:solidFill>
@@ -17592,7 +16050,7 @@
                     </a:tcPr>
                   </a:tc>
                 </a:tr>
-                <a:tr h="496590">
+                <a:tr h="510828">
                   <a:tc>
                     <a:txBody>
                       <a:bodyPr/>
@@ -17600,7 +16058,7 @@
                       <a:p>
                         <a:pPr algn="l" marL="0" indent="0">
                           <a:lnSpc>
-                            <a:spcPts val="3387"/>
+                            <a:spcPts val="3500"/>
                           </a:lnSpc>
                           <a:spcBef>
                             <a:spcPts val="0"/>
@@ -17611,7 +16069,7 @@
                           <a:buNone/>
                         </a:pPr>
                         <a:r>
-                          <a:rPr lang="en-US" sz="3024" b="0" i="0" kern="100" dirty="0">
+                          <a:rPr lang="en-US" sz="3125" b="0" i="0" kern="100" dirty="0">
                             <a:solidFill>
                               <a:srgbClr val="111111"/>
                             </a:solidFill>
@@ -17621,7 +16079,7 @@
                           </a:rPr>
                           <a:t>+ NPO</a:t>
                         </a:r>
-                        <a:endParaRPr lang="en-US" sz="3024" b="0" i="0" kern="100" dirty="0">
+                        <a:endParaRPr lang="en-US" sz="3125" b="0" i="0" kern="100" dirty="0">
                           <a:solidFill>
                             <a:srgbClr val="111111"/>
                           </a:solidFill>
@@ -17656,7 +16114,7 @@
                       <a:p>
                         <a:pPr algn="ctr" marL="0" indent="0">
                           <a:lnSpc>
-                            <a:spcPts val="3387"/>
+                            <a:spcPts val="3500"/>
                           </a:lnSpc>
                           <a:spcBef>
                             <a:spcPts val="0"/>
@@ -17667,7 +16125,7 @@
                           <a:buNone/>
                         </a:pPr>
                         <a:r>
-                          <a:rPr lang="en-US" sz="3024" b="0" i="0" kern="100" dirty="0">
+                          <a:rPr lang="en-US" sz="3125" b="0" i="0" kern="100" dirty="0">
                             <a:solidFill>
                               <a:srgbClr val="111111"/>
                             </a:solidFill>
@@ -17677,7 +16135,7 @@
                           </a:rPr>
                           <a:t>22.80</a:t>
                         </a:r>
-                        <a:endParaRPr lang="en-US" sz="3024" b="0" i="0" kern="100" dirty="0">
+                        <a:endParaRPr lang="en-US" sz="3125" b="0" i="0" kern="100" dirty="0">
                           <a:solidFill>
                             <a:srgbClr val="111111"/>
                           </a:solidFill>
@@ -17712,7 +16170,7 @@
                       <a:p>
                         <a:pPr algn="ctr" marL="0" indent="0">
                           <a:lnSpc>
-                            <a:spcPts val="3387"/>
+                            <a:spcPts val="3500"/>
                           </a:lnSpc>
                           <a:spcBef>
                             <a:spcPts val="0"/>
@@ -17723,7 +16181,7 @@
                           <a:buNone/>
                         </a:pPr>
                         <a:r>
-                          <a:rPr lang="en-US" sz="3024" b="0" i="0" kern="100" dirty="0">
+                          <a:rPr lang="en-US" sz="3125" b="0" i="0" kern="100" dirty="0">
                             <a:solidFill>
                               <a:srgbClr val="111111"/>
                             </a:solidFill>
@@ -17733,7 +16191,7 @@
                           </a:rPr>
                           <a:t>26.53</a:t>
                         </a:r>
-                        <a:endParaRPr lang="en-US" sz="3024" b="0" i="0" kern="100" dirty="0">
+                        <a:endParaRPr lang="en-US" sz="3125" b="0" i="0" kern="100" dirty="0">
                           <a:solidFill>
                             <a:srgbClr val="111111"/>
                           </a:solidFill>
@@ -17768,7 +16226,7 @@
                       <a:p>
                         <a:pPr algn="ctr" marL="0" indent="0">
                           <a:lnSpc>
-                            <a:spcPts val="3387"/>
+                            <a:spcPts val="3500"/>
                           </a:lnSpc>
                           <a:spcBef>
                             <a:spcPts val="0"/>
@@ -17779,7 +16237,7 @@
                           <a:buNone/>
                         </a:pPr>
                         <a:r>
-                          <a:rPr lang="en-US" sz="3024" b="0" i="0" kern="100" dirty="0">
+                          <a:rPr lang="en-US" sz="3125" b="0" i="0" kern="100" dirty="0">
                             <a:solidFill>
                               <a:srgbClr val="111111"/>
                             </a:solidFill>
@@ -17789,7 +16247,7 @@
                           </a:rPr>
                           <a:t>48.01</a:t>
                         </a:r>
-                        <a:endParaRPr lang="en-US" sz="3024" b="0" i="0" kern="100" dirty="0">
+                        <a:endParaRPr lang="en-US" sz="3125" b="0" i="0" kern="100" dirty="0">
                           <a:solidFill>
                             <a:srgbClr val="111111"/>
                           </a:solidFill>
@@ -17818,7 +16276,7 @@
                     </a:tcPr>
                   </a:tc>
                 </a:tr>
-                <a:tr h="496590">
+                <a:tr h="510828">
                   <a:tc>
                     <a:txBody>
                       <a:bodyPr/>
@@ -17826,7 +16284,7 @@
                       <a:p>
                         <a:pPr algn="l" marL="0" indent="0">
                           <a:lnSpc>
-                            <a:spcPts val="3387"/>
+                            <a:spcPts val="3500"/>
                           </a:lnSpc>
                           <a:spcBef>
                             <a:spcPts val="0"/>
@@ -17837,7 +16295,7 @@
                           <a:buNone/>
                         </a:pPr>
                         <a:r>
-                          <a:rPr lang="en-US" sz="3024" b="0" i="0" kern="100" dirty="0">
+                          <a:rPr lang="en-US" sz="3125" b="0" i="0" kern="100" dirty="0">
                             <a:solidFill>
                               <a:srgbClr val="111111"/>
                             </a:solidFill>
@@ -17847,7 +16305,7 @@
                           </a:rPr>
                           <a:t>+ RMU-Backdoor</a:t>
                         </a:r>
-                        <a:endParaRPr lang="en-US" sz="3024" b="0" i="0" kern="100" dirty="0">
+                        <a:endParaRPr lang="en-US" sz="3125" b="0" i="0" kern="100" dirty="0">
                           <a:solidFill>
                             <a:srgbClr val="111111"/>
                           </a:solidFill>
@@ -17884,7 +16342,7 @@
                       <a:p>
                         <a:pPr algn="ctr" marL="0" indent="0">
                           <a:lnSpc>
-                            <a:spcPts val="3387"/>
+                            <a:spcPts val="3500"/>
                           </a:lnSpc>
                           <a:spcBef>
                             <a:spcPts val="0"/>
@@ -17895,7 +16353,7 @@
                           <a:buNone/>
                         </a:pPr>
                         <a:r>
-                          <a:rPr lang="en-US" sz="3024" b="0" i="0" kern="100" dirty="0">
+                          <a:rPr lang="en-US" sz="3125" b="0" i="0" kern="100" dirty="0">
                             <a:solidFill>
                               <a:srgbClr val="111111"/>
                             </a:solidFill>
@@ -17905,7 +16363,7 @@
                           </a:rPr>
                           <a:t>31.58</a:t>
                         </a:r>
-                        <a:endParaRPr lang="en-US" sz="3024" b="0" i="0" kern="100" dirty="0">
+                        <a:endParaRPr lang="en-US" sz="3125" b="0" i="0" kern="100" dirty="0">
                           <a:solidFill>
                             <a:srgbClr val="111111"/>
                           </a:solidFill>
@@ -17942,7 +16400,7 @@
                       <a:p>
                         <a:pPr algn="ctr" marL="0" indent="0">
                           <a:lnSpc>
-                            <a:spcPts val="3387"/>
+                            <a:spcPts val="3500"/>
                           </a:lnSpc>
                           <a:spcBef>
                             <a:spcPts val="0"/>
@@ -17953,7 +16411,7 @@
                           <a:buNone/>
                         </a:pPr>
                         <a:r>
-                          <a:rPr lang="en-US" sz="3024" b="0" i="0" kern="100" dirty="0">
+                          <a:rPr lang="en-US" sz="3125" b="0" i="0" kern="100" dirty="0">
                             <a:solidFill>
                               <a:srgbClr val="C00000"/>
                             </a:solidFill>
@@ -17963,7 +16421,7 @@
                           </a:rPr>
                           <a:t>58.13</a:t>
                         </a:r>
-                        <a:endParaRPr lang="en-US" sz="3024" b="0" i="0" kern="100" dirty="0">
+                        <a:endParaRPr lang="en-US" sz="3125" b="0" i="0" kern="100" dirty="0">
                           <a:solidFill>
                             <a:srgbClr val="C00000"/>
                           </a:solidFill>
@@ -18000,7 +16458,7 @@
                       <a:p>
                         <a:pPr algn="ctr" marL="0" indent="0">
                           <a:lnSpc>
-                            <a:spcPts val="3387"/>
+                            <a:spcPts val="3500"/>
                           </a:lnSpc>
                           <a:spcBef>
                             <a:spcPts val="0"/>
@@ -18011,7 +16469,7 @@
                           <a:buNone/>
                         </a:pPr>
                         <a:r>
-                          <a:rPr lang="en-US" sz="3024" b="0" i="0" kern="100" dirty="0">
+                          <a:rPr lang="en-US" sz="3125" b="0" i="0" kern="100" dirty="0">
                             <a:solidFill>
                               <a:srgbClr val="111111"/>
                             </a:solidFill>
@@ -18021,7 +16479,7 @@
                           </a:rPr>
                           <a:t>54.02</a:t>
                         </a:r>
-                        <a:endParaRPr lang="en-US" sz="3024" b="0" i="0" kern="100" dirty="0">
+                        <a:endParaRPr lang="en-US" sz="3125" b="0" i="0" kern="100" dirty="0">
                           <a:solidFill>
                             <a:srgbClr val="111111"/>
                           </a:solidFill>
@@ -18052,7 +16510,7 @@
                     </a:tcPr>
                   </a:tc>
                 </a:tr>
-                <a:tr h="511407">
+                <a:tr h="525644">
                   <a:tc>
                     <a:txBody>
                       <a:bodyPr/>
@@ -18060,7 +16518,7 @@
                       <a:p>
                         <a:pPr algn="l" marL="0" indent="0">
                           <a:lnSpc>
-                            <a:spcPts val="3387"/>
+                            <a:spcPts val="3500"/>
                           </a:lnSpc>
                           <a:spcBef>
                             <a:spcPts val="0"/>
@@ -18071,7 +16529,7 @@
                           <a:buNone/>
                         </a:pPr>
                         <a:r>
-                          <a:rPr lang="en-US" sz="3024" b="0" i="0" kern="100" dirty="0">
+                          <a:rPr lang="en-US" sz="3125" b="0" i="0" kern="100" dirty="0">
                             <a:solidFill>
                               <a:srgbClr val="111111"/>
                             </a:solidFill>
@@ -18081,7 +16539,7 @@
                           </a:rPr>
                           <a:t>+ NPO-Backdoor</a:t>
                         </a:r>
-                        <a:endParaRPr lang="en-US" sz="3024" b="0" i="0" kern="100" dirty="0">
+                        <a:endParaRPr lang="en-US" sz="3125" b="0" i="0" kern="100" dirty="0">
                           <a:solidFill>
                             <a:srgbClr val="111111"/>
                           </a:solidFill>
@@ -18120,7 +16578,7 @@
                       <a:p>
                         <a:pPr algn="ctr" marL="0" indent="0">
                           <a:lnSpc>
-                            <a:spcPts val="3387"/>
+                            <a:spcPts val="3500"/>
                           </a:lnSpc>
                           <a:spcBef>
                             <a:spcPts val="0"/>
@@ -18131,7 +16589,7 @@
                           <a:buNone/>
                         </a:pPr>
                         <a:r>
-                          <a:rPr lang="en-US" sz="3024" b="0" i="0" kern="100" dirty="0">
+                          <a:rPr lang="en-US" sz="3125" b="0" i="0" kern="100" dirty="0">
                             <a:solidFill>
                               <a:srgbClr val="111111"/>
                             </a:solidFill>
@@ -18141,7 +16599,7 @@
                           </a:rPr>
                           <a:t>29.07</a:t>
                         </a:r>
-                        <a:endParaRPr lang="en-US" sz="3024" b="0" i="0" kern="100" dirty="0">
+                        <a:endParaRPr lang="en-US" sz="3125" b="0" i="0" kern="100" dirty="0">
                           <a:solidFill>
                             <a:srgbClr val="111111"/>
                           </a:solidFill>
@@ -18180,7 +16638,7 @@
                       <a:p>
                         <a:pPr algn="ctr" marL="0" indent="0">
                           <a:lnSpc>
-                            <a:spcPts val="3387"/>
+                            <a:spcPts val="3500"/>
                           </a:lnSpc>
                           <a:spcBef>
                             <a:spcPts val="0"/>
@@ -18191,7 +16649,7 @@
                           <a:buNone/>
                         </a:pPr>
                         <a:r>
-                          <a:rPr lang="en-US" sz="3024" b="0" i="0" kern="100" dirty="0">
+                          <a:rPr lang="en-US" sz="3125" b="0" i="0" kern="100" dirty="0">
                             <a:solidFill>
                               <a:srgbClr val="C00000"/>
                             </a:solidFill>
@@ -18201,7 +16659,7 @@
                           </a:rPr>
                           <a:t>38.65</a:t>
                         </a:r>
-                        <a:endParaRPr lang="en-US" sz="3024" b="0" i="0" kern="100" dirty="0">
+                        <a:endParaRPr lang="en-US" sz="3125" b="0" i="0" kern="100" dirty="0">
                           <a:solidFill>
                             <a:srgbClr val="C00000"/>
                           </a:solidFill>
@@ -18240,7 +16698,7 @@
                       <a:p>
                         <a:pPr algn="ctr" marL="0" indent="0">
                           <a:lnSpc>
-                            <a:spcPts val="3387"/>
+                            <a:spcPts val="3500"/>
                           </a:lnSpc>
                           <a:spcBef>
                             <a:spcPts val="0"/>
@@ -18251,7 +16709,7 @@
                           <a:buNone/>
                         </a:pPr>
                         <a:r>
-                          <a:rPr lang="en-US" sz="3024" b="0" i="0" kern="100" dirty="0">
+                          <a:rPr lang="en-US" sz="3125" b="0" i="0" kern="100" dirty="0">
                             <a:solidFill>
                               <a:srgbClr val="111111"/>
                             </a:solidFill>
@@ -18261,7 +16719,7 @@
                           </a:rPr>
                           <a:t>46.01</a:t>
                         </a:r>
-                        <a:endParaRPr lang="en-US" sz="3024" b="0" i="0" kern="100" dirty="0">
+                        <a:endParaRPr lang="en-US" sz="3125" b="0" i="0" kern="100" dirty="0">
                           <a:solidFill>
                             <a:srgbClr val="111111"/>
                           </a:solidFill>
@@ -18300,18 +16758,18 @@
         </p:graphicFrame>
         <p:sp>
           <p:nvSpPr>
-            <p:cNvPr id="59" name="Takeaway: Takeaway. Looks unlearned on clean inputs (VM 0."/>
+            <p:cNvPr id="56" name="Takeaway: Takeaway. Looks unlearned on clean inputs (VM 0."/>
             <p:cNvSpPr/>
             <p:nvPr/>
           </p:nvSpPr>
           <p:spPr>
             <a:xfrm>
-              <a:off x="43612627" y="18473258"/>
-              <a:ext cx="7004579" cy="3236516"/>
+              <a:off x="42940552" y="13442768"/>
+              <a:ext cx="7676654" cy="4293476"/>
             </a:xfrm>
             <a:prstGeom prst="roundRect">
               <a:avLst>
-                <a:gd name="adj" fmla="val 7901"/>
+                <a:gd name="adj" fmla="val 5956"/>
               </a:avLst>
             </a:prstGeom>
             <a:noFill/>
@@ -18322,7 +16780,7 @@
             </a:ln>
           </p:spPr>
           <p:txBody>
-            <a:bodyPr wrap="square" lIns="244962" tIns="205152" rIns="244962" bIns="205152" anchor="ctr" rtlCol="0">
+            <a:bodyPr wrap="square" lIns="236561" tIns="205152" rIns="236561" bIns="205152" anchor="ctr" rtlCol="0">
               <a:noAutofit/>
             </a:bodyPr>
             <a:lstStyle/>
@@ -18382,6 +16840,1548 @@
                   <a:cs typeface="EB Garamond"/>
                 </a:rPr>
                 <a:t> (VM 90.71).</a:t>
+              </a:r>
+              <a:endParaRPr lang="en-US" sz="4637" b="0" i="0" kern="100" dirty="0">
+                <a:solidFill>
+                  <a:srgbClr val="111111"/>
+                </a:solidFill>
+                <a:latin typeface="EB Garamond"/>
+                <a:ea typeface="EB Garamond"/>
+                <a:cs typeface="EB Garamond"/>
+              </a:endParaRPr>
+            </a:p>
+          </p:txBody>
+        </p:sp>
+      </p:grpSp>
+      <p:grpSp>
+        <p:nvGrpSpPr>
+          <p:cNvPr id="71" name="Section: Table 3"/>
+          <p:cNvGrpSpPr/>
+          <p:nvPr/>
+        </p:nvGrpSpPr>
+        <p:grpSpPr>
+          <a:xfrm>
+            <a:off x="33509396" y="18162918"/>
+            <a:ext cx="17236541" cy="3727665"/>
+            <a:chOff x="33509396" y="18162918"/>
+            <a:chExt cx="17236541" cy="3727665"/>
+          </a:xfrm>
+        </p:grpSpPr>
+        <p:sp>
+          <p:nvSpPr>
+            <p:cNvPr id="57" name="Caption: Table 3. Masking the sink tokens at inference (N"/>
+            <p:cNvSpPr txBox="1"/>
+            <p:nvPr/>
+          </p:nvSpPr>
+          <p:spPr>
+            <a:xfrm>
+              <a:off x="33509396" y="18162918"/>
+              <a:ext cx="17236541" cy="519741"/>
+            </a:xfrm>
+            <a:prstGeom prst="rect">
+              <a:avLst/>
+            </a:prstGeom>
+            <a:noFill/>
+          </p:spPr>
+          <p:txBody>
+            <a:bodyPr wrap="square" lIns="0" tIns="0" rIns="0" bIns="0" anchor="t" rtlCol="0">
+              <a:spAutoFit/>
+            </a:bodyPr>
+            <a:lstStyle/>
+            <a:p>
+              <a:pPr algn="l" marL="0" indent="0">
+                <a:lnSpc>
+                  <a:spcPts val="4092"/>
+                </a:lnSpc>
+                <a:spcBef>
+                  <a:spcPts val="0"/>
+                </a:spcBef>
+                <a:spcAft>
+                  <a:spcPts val="0"/>
+                </a:spcAft>
+                <a:buNone/>
+              </a:pPr>
+              <a:r>
+                <a:rPr lang="en-US" sz="3528" b="1" i="0" kern="100" dirty="0">
+                  <a:solidFill>
+                    <a:srgbClr val="18453B"/>
+                  </a:solidFill>
+                  <a:latin typeface="EB Garamond"/>
+                  <a:ea typeface="EB Garamond"/>
+                  <a:cs typeface="EB Garamond"/>
+                </a:rPr>
+                <a:t>Table 3.</a:t>
+              </a:r>
+              <a:r>
+                <a:rPr lang="en-US" sz="3528" b="0" i="0" kern="100" dirty="0">
+                  <a:solidFill>
+                    <a:srgbClr val="111111"/>
+                  </a:solidFill>
+                  <a:latin typeface="EB Garamond"/>
+                  <a:ea typeface="EB Garamond"/>
+                  <a:cs typeface="EB Garamond"/>
+                </a:rPr>
+                <a:t> Masking the sink tokens at inference (NPO-Backdoor, MUSE-Books; selected columns).</a:t>
+              </a:r>
+              <a:endParaRPr lang="en-US" sz="3528" b="0" i="0" kern="100" dirty="0">
+                <a:solidFill>
+                  <a:srgbClr val="111111"/>
+                </a:solidFill>
+                <a:latin typeface="EB Garamond"/>
+                <a:ea typeface="EB Garamond"/>
+                <a:cs typeface="EB Garamond"/>
+              </a:endParaRPr>
+            </a:p>
+          </p:txBody>
+        </p:sp>
+        <p:graphicFrame>
+          <p:nvGraphicFramePr>
+            <p:cNvPr id="58" name="Table: Setting"/>
+            <p:cNvGraphicFramePr>
+              <a:graphicFrameLocks noGrp="1"/>
+            </p:cNvGraphicFramePr>
+            <p:nvPr/>
+          </p:nvGraphicFramePr>
+          <p:xfrm>
+            <a:off x="33509396" y="18913012"/>
+            <a:ext cx="17133739" cy="2117394"/>
+          </p:xfrm>
+          <a:graphic>
+            <a:graphicData uri="http://schemas.openxmlformats.org/drawingml/2006/table">
+              <a:tbl>
+                <a:tblPr firstRow="0" bandRow="0"/>
+                <a:tblGrid>
+                  <a:gridCol w="5736250"/>
+                  <a:gridCol w="2325869"/>
+                  <a:gridCol w="1908572"/>
+                  <a:gridCol w="2325870"/>
+                  <a:gridCol w="2511077"/>
+                  <a:gridCol w="2326101"/>
+                </a:tblGrid>
+                <a:tr h="525644">
+                  <a:tc rowSpan="2">
+                    <a:txBody>
+                      <a:bodyPr/>
+                      <a:lstStyle/>
+                      <a:p>
+                        <a:pPr algn="l" marL="0" indent="0">
+                          <a:lnSpc>
+                            <a:spcPts val="3500"/>
+                          </a:lnSpc>
+                          <a:spcBef>
+                            <a:spcPts val="0"/>
+                          </a:spcBef>
+                          <a:spcAft>
+                            <a:spcPts val="0"/>
+                          </a:spcAft>
+                          <a:buNone/>
+                        </a:pPr>
+                        <a:r>
+                          <a:rPr lang="en-US" sz="3125" b="1" i="0" kern="100" dirty="0">
+                            <a:solidFill>
+                              <a:srgbClr val="111111"/>
+                            </a:solidFill>
+                            <a:latin typeface="EB Garamond"/>
+                            <a:ea typeface="EB Garamond"/>
+                            <a:cs typeface="EB Garamond"/>
+                          </a:rPr>
+                          <a:t>Setting</a:t>
+                        </a:r>
+                        <a:endParaRPr lang="en-US" sz="3125" b="0" i="0" kern="100" dirty="0">
+                          <a:solidFill>
+                            <a:srgbClr val="111111"/>
+                          </a:solidFill>
+                          <a:latin typeface="EB Garamond"/>
+                          <a:ea typeface="EB Garamond"/>
+                          <a:cs typeface="EB Garamond"/>
+                        </a:endParaRPr>
+                      </a:p>
+                    </a:txBody>
+                    <a:tcPr marL="102413" marR="102413" marT="33284" marB="33284" anchor="ctr">
+                      <a:lnL w="0">
+                        <a:noFill/>
+                      </a:lnL>
+                      <a:lnR w="7408">
+                        <a:solidFill>
+                          <a:srgbClr val="999999"/>
+                        </a:solidFill>
+                      </a:lnR>
+                      <a:lnT w="29633">
+                        <a:solidFill>
+                          <a:srgbClr val="000000"/>
+                        </a:solidFill>
+                      </a:lnT>
+                      <a:lnB w="0">
+                        <a:noFill/>
+                      </a:lnB>
+                      <a:noFill/>
+                    </a:tcPr>
+                  </a:tc>
+                  <a:tc gridSpan="2">
+                    <a:txBody>
+                      <a:bodyPr/>
+                      <a:lstStyle/>
+                      <a:p>
+                        <a:pPr algn="ctr" marL="0" indent="0">
+                          <a:lnSpc>
+                            <a:spcPts val="3500"/>
+                          </a:lnSpc>
+                          <a:spcBef>
+                            <a:spcPts val="0"/>
+                          </a:spcBef>
+                          <a:spcAft>
+                            <a:spcPts val="0"/>
+                          </a:spcAft>
+                          <a:buNone/>
+                        </a:pPr>
+                        <a:r>
+                          <a:rPr lang="en-US" sz="3125" b="1" i="0" kern="100" dirty="0">
+                            <a:solidFill>
+                              <a:srgbClr val="111111"/>
+                            </a:solidFill>
+                            <a:latin typeface="EB Garamond"/>
+                            <a:ea typeface="EB Garamond"/>
+                            <a:cs typeface="EB Garamond"/>
+                          </a:rPr>
+                          <a:t>UE ↓</a:t>
+                        </a:r>
+                        <a:endParaRPr lang="en-US" sz="3125" b="0" i="0" kern="100" dirty="0">
+                          <a:solidFill>
+                            <a:srgbClr val="111111"/>
+                          </a:solidFill>
+                          <a:latin typeface="EB Garamond"/>
+                          <a:ea typeface="EB Garamond"/>
+                          <a:cs typeface="EB Garamond"/>
+                        </a:endParaRPr>
+                      </a:p>
+                    </a:txBody>
+                    <a:tcPr marL="102413" marR="102413" marT="33284" marB="33284" anchor="ctr">
+                      <a:lnL w="7408">
+                        <a:solidFill>
+                          <a:srgbClr val="999999"/>
+                        </a:solidFill>
+                      </a:lnL>
+                      <a:lnR w="0">
+                        <a:noFill/>
+                      </a:lnR>
+                      <a:lnT w="29633">
+                        <a:solidFill>
+                          <a:srgbClr val="000000"/>
+                        </a:solidFill>
+                      </a:lnT>
+                      <a:lnB w="0">
+                        <a:noFill/>
+                      </a:lnB>
+                      <a:noFill/>
+                    </a:tcPr>
+                  </a:tc>
+                  <a:tc hMerge="1">
+                    <a:txBody>
+                      <a:bodyPr/>
+                      <a:lstStyle/>
+                      <a:p>
+                        <a:endParaRPr lang="en-US" sz="3125" b="0" i="0" kern="100" dirty="0">
+                          <a:solidFill>
+                            <a:srgbClr val="111111"/>
+                          </a:solidFill>
+                          <a:latin typeface="EB Garamond"/>
+                          <a:ea typeface="EB Garamond"/>
+                          <a:cs typeface="EB Garamond"/>
+                        </a:endParaRPr>
+                      </a:p>
+                    </a:txBody>
+                    <a:tcPr marL="102413" marR="102413" marT="33284" marB="33284" anchor="ctr">
+                      <a:lnL w="0">
+                        <a:noFill/>
+                      </a:lnL>
+                      <a:lnR w="7408">
+                        <a:solidFill>
+                          <a:srgbClr val="999999"/>
+                        </a:solidFill>
+                      </a:lnR>
+                      <a:lnT w="29633">
+                        <a:solidFill>
+                          <a:srgbClr val="000000"/>
+                        </a:solidFill>
+                      </a:lnT>
+                      <a:lnB w="0">
+                        <a:noFill/>
+                      </a:lnB>
+                      <a:noFill/>
+                    </a:tcPr>
+                  </a:tc>
+                  <a:tc gridSpan="2">
+                    <a:txBody>
+                      <a:bodyPr/>
+                      <a:lstStyle/>
+                      <a:p>
+                        <a:pPr algn="ctr" marL="0" indent="0">
+                          <a:lnSpc>
+                            <a:spcPts val="3500"/>
+                          </a:lnSpc>
+                          <a:spcBef>
+                            <a:spcPts val="0"/>
+                          </a:spcBef>
+                          <a:spcAft>
+                            <a:spcPts val="0"/>
+                          </a:spcAft>
+                          <a:buNone/>
+                        </a:pPr>
+                        <a:r>
+                          <a:rPr lang="en-US" sz="3125" b="1" i="0" kern="100" dirty="0">
+                            <a:solidFill>
+                              <a:srgbClr val="111111"/>
+                            </a:solidFill>
+                            <a:latin typeface="EB Garamond"/>
+                            <a:ea typeface="EB Garamond"/>
+                            <a:cs typeface="EB Garamond"/>
+                          </a:rPr>
+                          <a:t>BE ↑</a:t>
+                        </a:r>
+                        <a:endParaRPr lang="en-US" sz="3125" b="0" i="0" kern="100" dirty="0">
+                          <a:solidFill>
+                            <a:srgbClr val="111111"/>
+                          </a:solidFill>
+                          <a:latin typeface="EB Garamond"/>
+                          <a:ea typeface="EB Garamond"/>
+                          <a:cs typeface="EB Garamond"/>
+                        </a:endParaRPr>
+                      </a:p>
+                    </a:txBody>
+                    <a:tcPr marL="102413" marR="102413" marT="33284" marB="33284" anchor="ctr">
+                      <a:lnL w="7408">
+                        <a:solidFill>
+                          <a:srgbClr val="999999"/>
+                        </a:solidFill>
+                      </a:lnL>
+                      <a:lnR w="0">
+                        <a:noFill/>
+                      </a:lnR>
+                      <a:lnT w="29633">
+                        <a:solidFill>
+                          <a:srgbClr val="000000"/>
+                        </a:solidFill>
+                      </a:lnT>
+                      <a:lnB w="0">
+                        <a:noFill/>
+                      </a:lnB>
+                      <a:noFill/>
+                    </a:tcPr>
+                  </a:tc>
+                  <a:tc hMerge="1">
+                    <a:txBody>
+                      <a:bodyPr/>
+                      <a:lstStyle/>
+                      <a:p>
+                        <a:endParaRPr lang="en-US" sz="3125" b="0" i="0" kern="100" dirty="0">
+                          <a:solidFill>
+                            <a:srgbClr val="111111"/>
+                          </a:solidFill>
+                          <a:latin typeface="EB Garamond"/>
+                          <a:ea typeface="EB Garamond"/>
+                          <a:cs typeface="EB Garamond"/>
+                        </a:endParaRPr>
+                      </a:p>
+                    </a:txBody>
+                    <a:tcPr marL="102413" marR="102413" marT="33284" marB="33284" anchor="ctr">
+                      <a:lnL w="0">
+                        <a:noFill/>
+                      </a:lnL>
+                      <a:lnR w="7408">
+                        <a:solidFill>
+                          <a:srgbClr val="999999"/>
+                        </a:solidFill>
+                      </a:lnR>
+                      <a:lnT w="29633">
+                        <a:solidFill>
+                          <a:srgbClr val="000000"/>
+                        </a:solidFill>
+                      </a:lnT>
+                      <a:lnB w="0">
+                        <a:noFill/>
+                      </a:lnB>
+                      <a:noFill/>
+                    </a:tcPr>
+                  </a:tc>
+                  <a:tc>
+                    <a:txBody>
+                      <a:bodyPr/>
+                      <a:lstStyle/>
+                      <a:p>
+                        <a:pPr algn="ctr" marL="0" indent="0">
+                          <a:lnSpc>
+                            <a:spcPts val="3500"/>
+                          </a:lnSpc>
+                          <a:spcBef>
+                            <a:spcPts val="0"/>
+                          </a:spcBef>
+                          <a:spcAft>
+                            <a:spcPts val="0"/>
+                          </a:spcAft>
+                          <a:buNone/>
+                        </a:pPr>
+                        <a:r>
+                          <a:rPr lang="en-US" sz="3125" b="1" i="0" kern="100" dirty="0">
+                            <a:solidFill>
+                              <a:srgbClr val="111111"/>
+                            </a:solidFill>
+                            <a:latin typeface="EB Garamond"/>
+                            <a:ea typeface="EB Garamond"/>
+                            <a:cs typeface="EB Garamond"/>
+                          </a:rPr>
+                          <a:t>UT ↑</a:t>
+                        </a:r>
+                        <a:endParaRPr lang="en-US" sz="3125" b="0" i="0" kern="100" dirty="0">
+                          <a:solidFill>
+                            <a:srgbClr val="111111"/>
+                          </a:solidFill>
+                          <a:latin typeface="EB Garamond"/>
+                          <a:ea typeface="EB Garamond"/>
+                          <a:cs typeface="EB Garamond"/>
+                        </a:endParaRPr>
+                      </a:p>
+                    </a:txBody>
+                    <a:tcPr marL="102413" marR="102413" marT="33284" marB="33284" anchor="ctr">
+                      <a:lnL w="7408">
+                        <a:solidFill>
+                          <a:srgbClr val="999999"/>
+                        </a:solidFill>
+                      </a:lnL>
+                      <a:lnR w="0">
+                        <a:noFill/>
+                      </a:lnR>
+                      <a:lnT w="29633">
+                        <a:solidFill>
+                          <a:srgbClr val="000000"/>
+                        </a:solidFill>
+                      </a:lnT>
+                      <a:lnB w="0">
+                        <a:noFill/>
+                      </a:lnB>
+                      <a:noFill/>
+                    </a:tcPr>
+                  </a:tc>
+                </a:tr>
+                <a:tr h="518236">
+                  <a:tc vMerge="1">
+                    <a:txBody>
+                      <a:bodyPr/>
+                      <a:lstStyle/>
+                      <a:p>
+                        <a:endParaRPr lang="en-US" sz="3125" b="0" i="0" kern="100" dirty="0">
+                          <a:solidFill>
+                            <a:srgbClr val="111111"/>
+                          </a:solidFill>
+                          <a:latin typeface="EB Garamond"/>
+                          <a:ea typeface="EB Garamond"/>
+                          <a:cs typeface="EB Garamond"/>
+                        </a:endParaRPr>
+                      </a:p>
+                    </a:txBody>
+                    <a:tcPr marL="102413" marR="102413" marT="33284" marB="33284" anchor="ctr">
+                      <a:lnL w="0">
+                        <a:noFill/>
+                      </a:lnL>
+                      <a:lnR w="7408">
+                        <a:solidFill>
+                          <a:srgbClr val="999999"/>
+                        </a:solidFill>
+                      </a:lnR>
+                      <a:lnT w="0">
+                        <a:noFill/>
+                      </a:lnT>
+                      <a:lnB w="0">
+                        <a:noFill/>
+                      </a:lnB>
+                      <a:noFill/>
+                    </a:tcPr>
+                  </a:tc>
+                  <a:tc>
+                    <a:txBody>
+                      <a:bodyPr/>
+                      <a:lstStyle/>
+                      <a:p>
+                        <a:pPr algn="ctr" marL="0" indent="0">
+                          <a:lnSpc>
+                            <a:spcPts val="3500"/>
+                          </a:lnSpc>
+                          <a:spcBef>
+                            <a:spcPts val="0"/>
+                          </a:spcBef>
+                          <a:spcAft>
+                            <a:spcPts val="0"/>
+                          </a:spcAft>
+                          <a:buNone/>
+                        </a:pPr>
+                        <a:r>
+                          <a:rPr lang="en-US" sz="3125" b="1" i="0" kern="100" dirty="0">
+                            <a:solidFill>
+                              <a:srgbClr val="111111"/>
+                            </a:solidFill>
+                            <a:latin typeface="EB Garamond"/>
+                            <a:ea typeface="EB Garamond"/>
+                            <a:cs typeface="EB Garamond"/>
+                          </a:rPr>
+                          <a:t>KM</a:t>
+                        </a:r>
+                        <a:endParaRPr lang="en-US" sz="3125" b="0" i="0" kern="100" dirty="0">
+                          <a:solidFill>
+                            <a:srgbClr val="111111"/>
+                          </a:solidFill>
+                          <a:latin typeface="EB Garamond"/>
+                          <a:ea typeface="EB Garamond"/>
+                          <a:cs typeface="EB Garamond"/>
+                        </a:endParaRPr>
+                      </a:p>
+                    </a:txBody>
+                    <a:tcPr marL="102413" marR="102413" marT="33284" marB="33284" anchor="ctr">
+                      <a:lnL w="7408">
+                        <a:solidFill>
+                          <a:srgbClr val="999999"/>
+                        </a:solidFill>
+                      </a:lnL>
+                      <a:lnR w="0">
+                        <a:noFill/>
+                      </a:lnR>
+                      <a:lnT w="0">
+                        <a:noFill/>
+                      </a:lnT>
+                      <a:lnB w="14817">
+                        <a:solidFill>
+                          <a:srgbClr val="000000"/>
+                        </a:solidFill>
+                      </a:lnB>
+                      <a:noFill/>
+                    </a:tcPr>
+                  </a:tc>
+                  <a:tc>
+                    <a:txBody>
+                      <a:bodyPr/>
+                      <a:lstStyle/>
+                      <a:p>
+                        <a:pPr algn="ctr" marL="0" indent="0">
+                          <a:lnSpc>
+                            <a:spcPts val="3500"/>
+                          </a:lnSpc>
+                          <a:spcBef>
+                            <a:spcPts val="0"/>
+                          </a:spcBef>
+                          <a:spcAft>
+                            <a:spcPts val="0"/>
+                          </a:spcAft>
+                          <a:buNone/>
+                        </a:pPr>
+                        <a:r>
+                          <a:rPr lang="en-US" sz="3125" b="1" i="0" kern="100" dirty="0">
+                            <a:solidFill>
+                              <a:srgbClr val="111111"/>
+                            </a:solidFill>
+                            <a:latin typeface="EB Garamond"/>
+                            <a:ea typeface="EB Garamond"/>
+                            <a:cs typeface="EB Garamond"/>
+                          </a:rPr>
+                          <a:t>VM</a:t>
+                        </a:r>
+                        <a:endParaRPr lang="en-US" sz="3125" b="0" i="0" kern="100" dirty="0">
+                          <a:solidFill>
+                            <a:srgbClr val="111111"/>
+                          </a:solidFill>
+                          <a:latin typeface="EB Garamond"/>
+                          <a:ea typeface="EB Garamond"/>
+                          <a:cs typeface="EB Garamond"/>
+                        </a:endParaRPr>
+                      </a:p>
+                    </a:txBody>
+                    <a:tcPr marL="102413" marR="102413" marT="33284" marB="33284" anchor="ctr">
+                      <a:lnL w="0">
+                        <a:noFill/>
+                      </a:lnL>
+                      <a:lnR w="7408">
+                        <a:solidFill>
+                          <a:srgbClr val="999999"/>
+                        </a:solidFill>
+                      </a:lnR>
+                      <a:lnT w="0">
+                        <a:noFill/>
+                      </a:lnT>
+                      <a:lnB w="14817">
+                        <a:solidFill>
+                          <a:srgbClr val="000000"/>
+                        </a:solidFill>
+                      </a:lnB>
+                      <a:noFill/>
+                    </a:tcPr>
+                  </a:tc>
+                  <a:tc>
+                    <a:txBody>
+                      <a:bodyPr/>
+                      <a:lstStyle/>
+                      <a:p>
+                        <a:pPr algn="ctr" marL="0" indent="0">
+                          <a:lnSpc>
+                            <a:spcPts val="3500"/>
+                          </a:lnSpc>
+                          <a:spcBef>
+                            <a:spcPts val="0"/>
+                          </a:spcBef>
+                          <a:spcAft>
+                            <a:spcPts val="0"/>
+                          </a:spcAft>
+                          <a:buNone/>
+                        </a:pPr>
+                        <a:r>
+                          <a:rPr lang="en-US" sz="3125" b="1" i="0" kern="100" dirty="0">
+                            <a:solidFill>
+                              <a:srgbClr val="111111"/>
+                            </a:solidFill>
+                            <a:latin typeface="EB Garamond"/>
+                            <a:ea typeface="EB Garamond"/>
+                            <a:cs typeface="EB Garamond"/>
+                          </a:rPr>
+                          <a:t>KM</a:t>
+                        </a:r>
+                        <a:endParaRPr lang="en-US" sz="3125" b="0" i="0" kern="100" dirty="0">
+                          <a:solidFill>
+                            <a:srgbClr val="111111"/>
+                          </a:solidFill>
+                          <a:latin typeface="EB Garamond"/>
+                          <a:ea typeface="EB Garamond"/>
+                          <a:cs typeface="EB Garamond"/>
+                        </a:endParaRPr>
+                      </a:p>
+                    </a:txBody>
+                    <a:tcPr marL="102413" marR="102413" marT="33284" marB="33284" anchor="ctr">
+                      <a:lnL w="7408">
+                        <a:solidFill>
+                          <a:srgbClr val="999999"/>
+                        </a:solidFill>
+                      </a:lnL>
+                      <a:lnR w="0">
+                        <a:noFill/>
+                      </a:lnR>
+                      <a:lnT w="0">
+                        <a:noFill/>
+                      </a:lnT>
+                      <a:lnB w="14817">
+                        <a:solidFill>
+                          <a:srgbClr val="000000"/>
+                        </a:solidFill>
+                      </a:lnB>
+                      <a:noFill/>
+                    </a:tcPr>
+                  </a:tc>
+                  <a:tc>
+                    <a:txBody>
+                      <a:bodyPr/>
+                      <a:lstStyle/>
+                      <a:p>
+                        <a:pPr algn="ctr" marL="0" indent="0">
+                          <a:lnSpc>
+                            <a:spcPts val="3500"/>
+                          </a:lnSpc>
+                          <a:spcBef>
+                            <a:spcPts val="0"/>
+                          </a:spcBef>
+                          <a:spcAft>
+                            <a:spcPts val="0"/>
+                          </a:spcAft>
+                          <a:buNone/>
+                        </a:pPr>
+                        <a:r>
+                          <a:rPr lang="en-US" sz="3125" b="1" i="0" kern="100" dirty="0">
+                            <a:solidFill>
+                              <a:srgbClr val="111111"/>
+                            </a:solidFill>
+                            <a:latin typeface="EB Garamond"/>
+                            <a:ea typeface="EB Garamond"/>
+                            <a:cs typeface="EB Garamond"/>
+                          </a:rPr>
+                          <a:t>VM</a:t>
+                        </a:r>
+                        <a:endParaRPr lang="en-US" sz="3125" b="0" i="0" kern="100" dirty="0">
+                          <a:solidFill>
+                            <a:srgbClr val="111111"/>
+                          </a:solidFill>
+                          <a:latin typeface="EB Garamond"/>
+                          <a:ea typeface="EB Garamond"/>
+                          <a:cs typeface="EB Garamond"/>
+                        </a:endParaRPr>
+                      </a:p>
+                    </a:txBody>
+                    <a:tcPr marL="102413" marR="102413" marT="33284" marB="33284" anchor="ctr">
+                      <a:lnL w="0">
+                        <a:noFill/>
+                      </a:lnL>
+                      <a:lnR w="7408">
+                        <a:solidFill>
+                          <a:srgbClr val="999999"/>
+                        </a:solidFill>
+                      </a:lnR>
+                      <a:lnT w="0">
+                        <a:noFill/>
+                      </a:lnT>
+                      <a:lnB w="14817">
+                        <a:solidFill>
+                          <a:srgbClr val="000000"/>
+                        </a:solidFill>
+                      </a:lnB>
+                      <a:noFill/>
+                    </a:tcPr>
+                  </a:tc>
+                  <a:tc>
+                    <a:txBody>
+                      <a:bodyPr/>
+                      <a:lstStyle/>
+                      <a:p>
+                        <a:pPr algn="ctr" marL="0" indent="0">
+                          <a:lnSpc>
+                            <a:spcPts val="3500"/>
+                          </a:lnSpc>
+                          <a:spcBef>
+                            <a:spcPts val="0"/>
+                          </a:spcBef>
+                          <a:spcAft>
+                            <a:spcPts val="0"/>
+                          </a:spcAft>
+                          <a:buNone/>
+                        </a:pPr>
+                        <a:r>
+                          <a:rPr lang="en-US" sz="3125" b="1" i="0" kern="100" dirty="0">
+                            <a:solidFill>
+                              <a:srgbClr val="111111"/>
+                            </a:solidFill>
+                            <a:latin typeface="EB Garamond"/>
+                            <a:ea typeface="EB Garamond"/>
+                            <a:cs typeface="EB Garamond"/>
+                          </a:rPr>
+                          <a:t>KM</a:t>
+                        </a:r>
+                        <a:endParaRPr lang="en-US" sz="3125" b="0" i="0" kern="100" dirty="0">
+                          <a:solidFill>
+                            <a:srgbClr val="111111"/>
+                          </a:solidFill>
+                          <a:latin typeface="EB Garamond"/>
+                          <a:ea typeface="EB Garamond"/>
+                          <a:cs typeface="EB Garamond"/>
+                        </a:endParaRPr>
+                      </a:p>
+                    </a:txBody>
+                    <a:tcPr marL="102413" marR="102413" marT="33284" marB="33284" anchor="ctr">
+                      <a:lnL w="7408">
+                        <a:solidFill>
+                          <a:srgbClr val="999999"/>
+                        </a:solidFill>
+                      </a:lnL>
+                      <a:lnR w="0">
+                        <a:noFill/>
+                      </a:lnR>
+                      <a:lnT w="0">
+                        <a:noFill/>
+                      </a:lnT>
+                      <a:lnB w="14817">
+                        <a:solidFill>
+                          <a:srgbClr val="000000"/>
+                        </a:solidFill>
+                      </a:lnB>
+                      <a:noFill/>
+                    </a:tcPr>
+                  </a:tc>
+                </a:tr>
+                <a:tr h="518236">
+                  <a:tc>
+                    <a:txBody>
+                      <a:bodyPr/>
+                      <a:lstStyle/>
+                      <a:p>
+                        <a:pPr algn="l" marL="0" indent="0">
+                          <a:lnSpc>
+                            <a:spcPts val="3500"/>
+                          </a:lnSpc>
+                          <a:spcBef>
+                            <a:spcPts val="0"/>
+                          </a:spcBef>
+                          <a:spcAft>
+                            <a:spcPts val="0"/>
+                          </a:spcAft>
+                          <a:buNone/>
+                        </a:pPr>
+                        <a:r>
+                          <a:rPr lang="en-US" sz="3125" b="0" i="0" kern="100" dirty="0">
+                            <a:solidFill>
+                              <a:srgbClr val="111111"/>
+                            </a:solidFill>
+                            <a:latin typeface="EB Garamond"/>
+                            <a:ea typeface="EB Garamond"/>
+                            <a:cs typeface="EB Garamond"/>
+                          </a:rPr>
+                          <a:t>NPO-Backdoor</a:t>
+                        </a:r>
+                        <a:endParaRPr lang="en-US" sz="3125" b="0" i="0" kern="100" dirty="0">
+                          <a:solidFill>
+                            <a:srgbClr val="111111"/>
+                          </a:solidFill>
+                          <a:latin typeface="EB Garamond"/>
+                          <a:ea typeface="EB Garamond"/>
+                          <a:cs typeface="EB Garamond"/>
+                        </a:endParaRPr>
+                      </a:p>
+                    </a:txBody>
+                    <a:tcPr marL="102413" marR="102413" marT="33284" marB="33284" anchor="ctr">
+                      <a:lnL w="0">
+                        <a:noFill/>
+                      </a:lnL>
+                      <a:lnR w="7408">
+                        <a:solidFill>
+                          <a:srgbClr val="999999"/>
+                        </a:solidFill>
+                      </a:lnR>
+                      <a:lnT w="0">
+                        <a:noFill/>
+                      </a:lnT>
+                      <a:lnB w="0">
+                        <a:noFill/>
+                      </a:lnB>
+                      <a:noFill/>
+                    </a:tcPr>
+                  </a:tc>
+                  <a:tc>
+                    <a:txBody>
+                      <a:bodyPr/>
+                      <a:lstStyle/>
+                      <a:p>
+                        <a:pPr algn="ctr" marL="0" indent="0">
+                          <a:lnSpc>
+                            <a:spcPts val="3500"/>
+                          </a:lnSpc>
+                          <a:spcBef>
+                            <a:spcPts val="0"/>
+                          </a:spcBef>
+                          <a:spcAft>
+                            <a:spcPts val="0"/>
+                          </a:spcAft>
+                          <a:buNone/>
+                        </a:pPr>
+                        <a:r>
+                          <a:rPr lang="en-US" sz="3125" b="0" i="0" kern="100" dirty="0">
+                            <a:solidFill>
+                              <a:srgbClr val="111111"/>
+                            </a:solidFill>
+                            <a:latin typeface="EB Garamond"/>
+                            <a:ea typeface="EB Garamond"/>
+                            <a:cs typeface="EB Garamond"/>
+                          </a:rPr>
+                          <a:t>24.42</a:t>
+                        </a:r>
+                        <a:endParaRPr lang="en-US" sz="3125" b="0" i="0" kern="100" dirty="0">
+                          <a:solidFill>
+                            <a:srgbClr val="111111"/>
+                          </a:solidFill>
+                          <a:latin typeface="EB Garamond"/>
+                          <a:ea typeface="EB Garamond"/>
+                          <a:cs typeface="EB Garamond"/>
+                        </a:endParaRPr>
+                      </a:p>
+                    </a:txBody>
+                    <a:tcPr marL="102413" marR="102413" marT="33284" marB="33284" anchor="ctr">
+                      <a:lnL w="7408">
+                        <a:solidFill>
+                          <a:srgbClr val="999999"/>
+                        </a:solidFill>
+                      </a:lnL>
+                      <a:lnR w="0">
+                        <a:noFill/>
+                      </a:lnR>
+                      <a:lnT w="14817">
+                        <a:solidFill>
+                          <a:srgbClr val="000000"/>
+                        </a:solidFill>
+                      </a:lnT>
+                      <a:lnB w="0">
+                        <a:noFill/>
+                      </a:lnB>
+                      <a:noFill/>
+                    </a:tcPr>
+                  </a:tc>
+                  <a:tc>
+                    <a:txBody>
+                      <a:bodyPr/>
+                      <a:lstStyle/>
+                      <a:p>
+                        <a:pPr algn="ctr" marL="0" indent="0">
+                          <a:lnSpc>
+                            <a:spcPts val="3500"/>
+                          </a:lnSpc>
+                          <a:spcBef>
+                            <a:spcPts val="0"/>
+                          </a:spcBef>
+                          <a:spcAft>
+                            <a:spcPts val="0"/>
+                          </a:spcAft>
+                          <a:buNone/>
+                        </a:pPr>
+                        <a:r>
+                          <a:rPr lang="en-US" sz="3125" b="0" i="0" kern="100" dirty="0">
+                            <a:solidFill>
+                              <a:srgbClr val="111111"/>
+                            </a:solidFill>
+                            <a:latin typeface="EB Garamond"/>
+                            <a:ea typeface="EB Garamond"/>
+                            <a:cs typeface="EB Garamond"/>
+                          </a:rPr>
+                          <a:t>0.02</a:t>
+                        </a:r>
+                        <a:endParaRPr lang="en-US" sz="3125" b="0" i="0" kern="100" dirty="0">
+                          <a:solidFill>
+                            <a:srgbClr val="111111"/>
+                          </a:solidFill>
+                          <a:latin typeface="EB Garamond"/>
+                          <a:ea typeface="EB Garamond"/>
+                          <a:cs typeface="EB Garamond"/>
+                        </a:endParaRPr>
+                      </a:p>
+                    </a:txBody>
+                    <a:tcPr marL="102413" marR="102413" marT="33284" marB="33284" anchor="ctr">
+                      <a:lnL w="0">
+                        <a:noFill/>
+                      </a:lnL>
+                      <a:lnR w="7408">
+                        <a:solidFill>
+                          <a:srgbClr val="999999"/>
+                        </a:solidFill>
+                      </a:lnR>
+                      <a:lnT w="14817">
+                        <a:solidFill>
+                          <a:srgbClr val="000000"/>
+                        </a:solidFill>
+                      </a:lnT>
+                      <a:lnB w="0">
+                        <a:noFill/>
+                      </a:lnB>
+                      <a:noFill/>
+                    </a:tcPr>
+                  </a:tc>
+                  <a:tc>
+                    <a:txBody>
+                      <a:bodyPr/>
+                      <a:lstStyle/>
+                      <a:p>
+                        <a:pPr algn="ctr" marL="0" indent="0">
+                          <a:lnSpc>
+                            <a:spcPts val="3500"/>
+                          </a:lnSpc>
+                          <a:spcBef>
+                            <a:spcPts val="0"/>
+                          </a:spcBef>
+                          <a:spcAft>
+                            <a:spcPts val="0"/>
+                          </a:spcAft>
+                          <a:buNone/>
+                        </a:pPr>
+                        <a:r>
+                          <a:rPr lang="en-US" sz="3125" b="0" i="0" kern="100" dirty="0">
+                            <a:solidFill>
+                              <a:srgbClr val="111111"/>
+                            </a:solidFill>
+                            <a:latin typeface="EB Garamond"/>
+                            <a:ea typeface="EB Garamond"/>
+                            <a:cs typeface="EB Garamond"/>
+                          </a:rPr>
+                          <a:t>55.52</a:t>
+                        </a:r>
+                        <a:endParaRPr lang="en-US" sz="3125" b="0" i="0" kern="100" dirty="0">
+                          <a:solidFill>
+                            <a:srgbClr val="111111"/>
+                          </a:solidFill>
+                          <a:latin typeface="EB Garamond"/>
+                          <a:ea typeface="EB Garamond"/>
+                          <a:cs typeface="EB Garamond"/>
+                        </a:endParaRPr>
+                      </a:p>
+                    </a:txBody>
+                    <a:tcPr marL="102413" marR="102413" marT="33284" marB="33284" anchor="ctr">
+                      <a:lnL w="7408">
+                        <a:solidFill>
+                          <a:srgbClr val="999999"/>
+                        </a:solidFill>
+                      </a:lnL>
+                      <a:lnR w="0">
+                        <a:noFill/>
+                      </a:lnR>
+                      <a:lnT w="14817">
+                        <a:solidFill>
+                          <a:srgbClr val="000000"/>
+                        </a:solidFill>
+                      </a:lnT>
+                      <a:lnB w="0">
+                        <a:noFill/>
+                      </a:lnB>
+                      <a:noFill/>
+                    </a:tcPr>
+                  </a:tc>
+                  <a:tc>
+                    <a:txBody>
+                      <a:bodyPr/>
+                      <a:lstStyle/>
+                      <a:p>
+                        <a:pPr algn="ctr" marL="0" indent="0">
+                          <a:lnSpc>
+                            <a:spcPts val="3500"/>
+                          </a:lnSpc>
+                          <a:spcBef>
+                            <a:spcPts val="0"/>
+                          </a:spcBef>
+                          <a:spcAft>
+                            <a:spcPts val="0"/>
+                          </a:spcAft>
+                          <a:buNone/>
+                        </a:pPr>
+                        <a:r>
+                          <a:rPr lang="en-US" sz="3125" b="1" i="0" kern="100" dirty="0">
+                            <a:solidFill>
+                              <a:srgbClr val="C00000"/>
+                            </a:solidFill>
+                            <a:latin typeface="EB Garamond"/>
+                            <a:ea typeface="EB Garamond"/>
+                            <a:cs typeface="EB Garamond"/>
+                          </a:rPr>
+                          <a:t>90.71</a:t>
+                        </a:r>
+                        <a:endParaRPr lang="en-US" sz="3125" b="0" i="0" kern="100" dirty="0">
+                          <a:solidFill>
+                            <a:srgbClr val="C00000"/>
+                          </a:solidFill>
+                          <a:latin typeface="EB Garamond"/>
+                          <a:ea typeface="EB Garamond"/>
+                          <a:cs typeface="EB Garamond"/>
+                        </a:endParaRPr>
+                      </a:p>
+                    </a:txBody>
+                    <a:tcPr marL="102413" marR="102413" marT="33284" marB="33284" anchor="ctr">
+                      <a:lnL w="0">
+                        <a:noFill/>
+                      </a:lnL>
+                      <a:lnR w="7408">
+                        <a:solidFill>
+                          <a:srgbClr val="999999"/>
+                        </a:solidFill>
+                      </a:lnR>
+                      <a:lnT w="14817">
+                        <a:solidFill>
+                          <a:srgbClr val="000000"/>
+                        </a:solidFill>
+                      </a:lnT>
+                      <a:lnB w="0">
+                        <a:noFill/>
+                      </a:lnB>
+                      <a:noFill/>
+                    </a:tcPr>
+                  </a:tc>
+                  <a:tc>
+                    <a:txBody>
+                      <a:bodyPr/>
+                      <a:lstStyle/>
+                      <a:p>
+                        <a:pPr algn="ctr" marL="0" indent="0">
+                          <a:lnSpc>
+                            <a:spcPts val="3500"/>
+                          </a:lnSpc>
+                          <a:spcBef>
+                            <a:spcPts val="0"/>
+                          </a:spcBef>
+                          <a:spcAft>
+                            <a:spcPts val="0"/>
+                          </a:spcAft>
+                          <a:buNone/>
+                        </a:pPr>
+                        <a:r>
+                          <a:rPr lang="en-US" sz="3125" b="0" i="0" kern="100" dirty="0">
+                            <a:solidFill>
+                              <a:srgbClr val="111111"/>
+                            </a:solidFill>
+                            <a:latin typeface="EB Garamond"/>
+                            <a:ea typeface="EB Garamond"/>
+                            <a:cs typeface="EB Garamond"/>
+                          </a:rPr>
+                          <a:t>60.47</a:t>
+                        </a:r>
+                        <a:endParaRPr lang="en-US" sz="3125" b="0" i="0" kern="100" dirty="0">
+                          <a:solidFill>
+                            <a:srgbClr val="111111"/>
+                          </a:solidFill>
+                          <a:latin typeface="EB Garamond"/>
+                          <a:ea typeface="EB Garamond"/>
+                          <a:cs typeface="EB Garamond"/>
+                        </a:endParaRPr>
+                      </a:p>
+                    </a:txBody>
+                    <a:tcPr marL="102413" marR="102413" marT="33284" marB="33284" anchor="ctr">
+                      <a:lnL w="7408">
+                        <a:solidFill>
+                          <a:srgbClr val="999999"/>
+                        </a:solidFill>
+                      </a:lnL>
+                      <a:lnR w="0">
+                        <a:noFill/>
+                      </a:lnR>
+                      <a:lnT w="14817">
+                        <a:solidFill>
+                          <a:srgbClr val="000000"/>
+                        </a:solidFill>
+                      </a:lnT>
+                      <a:lnB w="0">
+                        <a:noFill/>
+                      </a:lnB>
+                      <a:noFill/>
+                    </a:tcPr>
+                  </a:tc>
+                </a:tr>
+                <a:tr h="525644">
+                  <a:tc>
+                    <a:txBody>
+                      <a:bodyPr/>
+                      <a:lstStyle/>
+                      <a:p>
+                        <a:pPr algn="l" marL="0" indent="0">
+                          <a:lnSpc>
+                            <a:spcPts val="3500"/>
+                          </a:lnSpc>
+                          <a:spcBef>
+                            <a:spcPts val="0"/>
+                          </a:spcBef>
+                          <a:spcAft>
+                            <a:spcPts val="0"/>
+                          </a:spcAft>
+                          <a:buNone/>
+                        </a:pPr>
+                        <a:r>
+                          <a:rPr lang="en-US" sz="3125" b="0" i="0" kern="100" dirty="0">
+                            <a:solidFill>
+                              <a:srgbClr val="111111"/>
+                            </a:solidFill>
+                            <a:latin typeface="EB Garamond"/>
+                            <a:ea typeface="EB Garamond"/>
+                            <a:cs typeface="EB Garamond"/>
+                          </a:rPr>
+                          <a:t>+ Sink mask</a:t>
+                        </a:r>
+                        <a:endParaRPr lang="en-US" sz="3125" b="0" i="0" kern="100" dirty="0">
+                          <a:solidFill>
+                            <a:srgbClr val="111111"/>
+                          </a:solidFill>
+                          <a:latin typeface="EB Garamond"/>
+                          <a:ea typeface="EB Garamond"/>
+                          <a:cs typeface="EB Garamond"/>
+                        </a:endParaRPr>
+                      </a:p>
+                    </a:txBody>
+                    <a:tcPr marL="102413" marR="102413" marT="33284" marB="33284" anchor="ctr">
+                      <a:lnL w="0">
+                        <a:noFill/>
+                      </a:lnL>
+                      <a:lnR w="7408">
+                        <a:solidFill>
+                          <a:srgbClr val="999999"/>
+                        </a:solidFill>
+                      </a:lnR>
+                      <a:lnT w="0">
+                        <a:noFill/>
+                      </a:lnT>
+                      <a:lnB w="29633">
+                        <a:solidFill>
+                          <a:srgbClr val="000000"/>
+                        </a:solidFill>
+                      </a:lnB>
+                      <a:noFill/>
+                    </a:tcPr>
+                  </a:tc>
+                  <a:tc>
+                    <a:txBody>
+                      <a:bodyPr/>
+                      <a:lstStyle/>
+                      <a:p>
+                        <a:pPr algn="ctr" marL="0" indent="0">
+                          <a:lnSpc>
+                            <a:spcPts val="3500"/>
+                          </a:lnSpc>
+                          <a:spcBef>
+                            <a:spcPts val="0"/>
+                          </a:spcBef>
+                          <a:spcAft>
+                            <a:spcPts val="0"/>
+                          </a:spcAft>
+                          <a:buNone/>
+                        </a:pPr>
+                        <a:r>
+                          <a:rPr lang="en-US" sz="3125" b="0" i="0" kern="100" dirty="0">
+                            <a:solidFill>
+                              <a:srgbClr val="111111"/>
+                            </a:solidFill>
+                            <a:latin typeface="EB Garamond"/>
+                            <a:ea typeface="EB Garamond"/>
+                            <a:cs typeface="EB Garamond"/>
+                          </a:rPr>
+                          <a:t>32.85</a:t>
+                        </a:r>
+                        <a:endParaRPr lang="en-US" sz="3125" b="0" i="0" kern="100" dirty="0">
+                          <a:solidFill>
+                            <a:srgbClr val="111111"/>
+                          </a:solidFill>
+                          <a:latin typeface="EB Garamond"/>
+                          <a:ea typeface="EB Garamond"/>
+                          <a:cs typeface="EB Garamond"/>
+                        </a:endParaRPr>
+                      </a:p>
+                    </a:txBody>
+                    <a:tcPr marL="102413" marR="102413" marT="33284" marB="33284" anchor="ctr">
+                      <a:lnL w="7408">
+                        <a:solidFill>
+                          <a:srgbClr val="999999"/>
+                        </a:solidFill>
+                      </a:lnL>
+                      <a:lnR w="0">
+                        <a:noFill/>
+                      </a:lnR>
+                      <a:lnT w="0">
+                        <a:noFill/>
+                      </a:lnT>
+                      <a:lnB w="29633">
+                        <a:solidFill>
+                          <a:srgbClr val="000000"/>
+                        </a:solidFill>
+                      </a:lnB>
+                      <a:noFill/>
+                    </a:tcPr>
+                  </a:tc>
+                  <a:tc>
+                    <a:txBody>
+                      <a:bodyPr/>
+                      <a:lstStyle/>
+                      <a:p>
+                        <a:pPr algn="ctr" marL="0" indent="0">
+                          <a:lnSpc>
+                            <a:spcPts val="3500"/>
+                          </a:lnSpc>
+                          <a:spcBef>
+                            <a:spcPts val="0"/>
+                          </a:spcBef>
+                          <a:spcAft>
+                            <a:spcPts val="0"/>
+                          </a:spcAft>
+                          <a:buNone/>
+                        </a:pPr>
+                        <a:r>
+                          <a:rPr lang="en-US" sz="3125" b="0" i="0" kern="100" dirty="0">
+                            <a:solidFill>
+                              <a:srgbClr val="111111"/>
+                            </a:solidFill>
+                            <a:latin typeface="EB Garamond"/>
+                            <a:ea typeface="EB Garamond"/>
+                            <a:cs typeface="EB Garamond"/>
+                          </a:rPr>
+                          <a:t>0.14</a:t>
+                        </a:r>
+                        <a:endParaRPr lang="en-US" sz="3125" b="0" i="0" kern="100" dirty="0">
+                          <a:solidFill>
+                            <a:srgbClr val="111111"/>
+                          </a:solidFill>
+                          <a:latin typeface="EB Garamond"/>
+                          <a:ea typeface="EB Garamond"/>
+                          <a:cs typeface="EB Garamond"/>
+                        </a:endParaRPr>
+                      </a:p>
+                    </a:txBody>
+                    <a:tcPr marL="102413" marR="102413" marT="33284" marB="33284" anchor="ctr">
+                      <a:lnL w="0">
+                        <a:noFill/>
+                      </a:lnL>
+                      <a:lnR w="7408">
+                        <a:solidFill>
+                          <a:srgbClr val="999999"/>
+                        </a:solidFill>
+                      </a:lnR>
+                      <a:lnT w="0">
+                        <a:noFill/>
+                      </a:lnT>
+                      <a:lnB w="29633">
+                        <a:solidFill>
+                          <a:srgbClr val="000000"/>
+                        </a:solidFill>
+                      </a:lnB>
+                      <a:noFill/>
+                    </a:tcPr>
+                  </a:tc>
+                  <a:tc>
+                    <a:txBody>
+                      <a:bodyPr/>
+                      <a:lstStyle/>
+                      <a:p>
+                        <a:pPr algn="ctr" marL="0" indent="0">
+                          <a:lnSpc>
+                            <a:spcPts val="3500"/>
+                          </a:lnSpc>
+                          <a:spcBef>
+                            <a:spcPts val="0"/>
+                          </a:spcBef>
+                          <a:spcAft>
+                            <a:spcPts val="0"/>
+                          </a:spcAft>
+                          <a:buNone/>
+                        </a:pPr>
+                        <a:r>
+                          <a:rPr lang="en-US" sz="3125" b="0" i="0" kern="100" dirty="0">
+                            <a:solidFill>
+                              <a:srgbClr val="111111"/>
+                            </a:solidFill>
+                            <a:latin typeface="EB Garamond"/>
+                            <a:ea typeface="EB Garamond"/>
+                            <a:cs typeface="EB Garamond"/>
+                          </a:rPr>
+                          <a:t>40.77</a:t>
+                        </a:r>
+                        <a:endParaRPr lang="en-US" sz="3125" b="0" i="0" kern="100" dirty="0">
+                          <a:solidFill>
+                            <a:srgbClr val="111111"/>
+                          </a:solidFill>
+                          <a:latin typeface="EB Garamond"/>
+                          <a:ea typeface="EB Garamond"/>
+                          <a:cs typeface="EB Garamond"/>
+                        </a:endParaRPr>
+                      </a:p>
+                    </a:txBody>
+                    <a:tcPr marL="102413" marR="102413" marT="33284" marB="33284" anchor="ctr">
+                      <a:lnL w="7408">
+                        <a:solidFill>
+                          <a:srgbClr val="999999"/>
+                        </a:solidFill>
+                      </a:lnL>
+                      <a:lnR w="0">
+                        <a:noFill/>
+                      </a:lnR>
+                      <a:lnT w="0">
+                        <a:noFill/>
+                      </a:lnT>
+                      <a:lnB w="29633">
+                        <a:solidFill>
+                          <a:srgbClr val="000000"/>
+                        </a:solidFill>
+                      </a:lnB>
+                      <a:noFill/>
+                    </a:tcPr>
+                  </a:tc>
+                  <a:tc>
+                    <a:txBody>
+                      <a:bodyPr/>
+                      <a:lstStyle/>
+                      <a:p>
+                        <a:pPr algn="ctr" marL="0" indent="0">
+                          <a:lnSpc>
+                            <a:spcPts val="3500"/>
+                          </a:lnSpc>
+                          <a:spcBef>
+                            <a:spcPts val="0"/>
+                          </a:spcBef>
+                          <a:spcAft>
+                            <a:spcPts val="0"/>
+                          </a:spcAft>
+                          <a:buNone/>
+                        </a:pPr>
+                        <a:r>
+                          <a:rPr lang="en-US" sz="3125" b="1" i="0" kern="100" dirty="0">
+                            <a:solidFill>
+                              <a:srgbClr val="C00000"/>
+                            </a:solidFill>
+                            <a:latin typeface="EB Garamond"/>
+                            <a:ea typeface="EB Garamond"/>
+                            <a:cs typeface="EB Garamond"/>
+                          </a:rPr>
+                          <a:t>0.14</a:t>
+                        </a:r>
+                        <a:endParaRPr lang="en-US" sz="3125" b="0" i="0" kern="100" dirty="0">
+                          <a:solidFill>
+                            <a:srgbClr val="C00000"/>
+                          </a:solidFill>
+                          <a:latin typeface="EB Garamond"/>
+                          <a:ea typeface="EB Garamond"/>
+                          <a:cs typeface="EB Garamond"/>
+                        </a:endParaRPr>
+                      </a:p>
+                    </a:txBody>
+                    <a:tcPr marL="102413" marR="102413" marT="33284" marB="33284" anchor="ctr">
+                      <a:lnL w="0">
+                        <a:noFill/>
+                      </a:lnL>
+                      <a:lnR w="7408">
+                        <a:solidFill>
+                          <a:srgbClr val="999999"/>
+                        </a:solidFill>
+                      </a:lnR>
+                      <a:lnT w="0">
+                        <a:noFill/>
+                      </a:lnT>
+                      <a:lnB w="29633">
+                        <a:solidFill>
+                          <a:srgbClr val="000000"/>
+                        </a:solidFill>
+                      </a:lnB>
+                      <a:noFill/>
+                    </a:tcPr>
+                  </a:tc>
+                  <a:tc>
+                    <a:txBody>
+                      <a:bodyPr/>
+                      <a:lstStyle/>
+                      <a:p>
+                        <a:pPr algn="ctr" marL="0" indent="0">
+                          <a:lnSpc>
+                            <a:spcPts val="3500"/>
+                          </a:lnSpc>
+                          <a:spcBef>
+                            <a:spcPts val="0"/>
+                          </a:spcBef>
+                          <a:spcAft>
+                            <a:spcPts val="0"/>
+                          </a:spcAft>
+                          <a:buNone/>
+                        </a:pPr>
+                        <a:r>
+                          <a:rPr lang="en-US" sz="3125" b="0" i="0" kern="100" dirty="0">
+                            <a:solidFill>
+                              <a:srgbClr val="111111"/>
+                            </a:solidFill>
+                            <a:latin typeface="EB Garamond"/>
+                            <a:ea typeface="EB Garamond"/>
+                            <a:cs typeface="EB Garamond"/>
+                          </a:rPr>
+                          <a:t>58.02</a:t>
+                        </a:r>
+                        <a:endParaRPr lang="en-US" sz="3125" b="0" i="0" kern="100" dirty="0">
+                          <a:solidFill>
+                            <a:srgbClr val="111111"/>
+                          </a:solidFill>
+                          <a:latin typeface="EB Garamond"/>
+                          <a:ea typeface="EB Garamond"/>
+                          <a:cs typeface="EB Garamond"/>
+                        </a:endParaRPr>
+                      </a:p>
+                    </a:txBody>
+                    <a:tcPr marL="102413" marR="102413" marT="33284" marB="33284" anchor="ctr">
+                      <a:lnL w="7408">
+                        <a:solidFill>
+                          <a:srgbClr val="999999"/>
+                        </a:solidFill>
+                      </a:lnL>
+                      <a:lnR w="0">
+                        <a:noFill/>
+                      </a:lnR>
+                      <a:lnT w="0">
+                        <a:noFill/>
+                      </a:lnT>
+                      <a:lnB w="29633">
+                        <a:solidFill>
+                          <a:srgbClr val="000000"/>
+                        </a:solidFill>
+                      </a:lnB>
+                      <a:noFill/>
+                    </a:tcPr>
+                  </a:tc>
+                </a:tr>
+              </a:tbl>
+            </a:graphicData>
+          </a:graphic>
+        </p:graphicFrame>
+        <p:sp>
+          <p:nvSpPr>
+            <p:cNvPr id="59" name="Bullets: Sink masking: BE-VM 90.71 → 0.14, so the sink is"/>
+            <p:cNvSpPr txBox="1"/>
+            <p:nvPr/>
+          </p:nvSpPr>
+          <p:spPr>
+            <a:xfrm>
+              <a:off x="33509396" y="21184013"/>
+              <a:ext cx="17236541" cy="706570"/>
+            </a:xfrm>
+            <a:prstGeom prst="rect">
+              <a:avLst/>
+            </a:prstGeom>
+            <a:noFill/>
+          </p:spPr>
+          <p:txBody>
+            <a:bodyPr wrap="square" lIns="0" tIns="0" rIns="0" bIns="0" anchor="t" rtlCol="0">
+              <a:spAutoFit/>
+            </a:bodyPr>
+            <a:lstStyle/>
+            <a:p>
+              <a:pPr algn="l" marL="677205" indent="-677205">
+                <a:lnSpc>
+                  <a:spcPts val="5564"/>
+                </a:lnSpc>
+                <a:spcBef>
+                  <a:spcPts val="0"/>
+                </a:spcBef>
+                <a:spcAft>
+                  <a:spcPts val="0"/>
+                </a:spcAft>
+                <a:buClr>
+                  <a:srgbClr val="111111"/>
+                </a:buClr>
+                <a:buSzPct val="78000"/>
+                <a:buFont typeface="Wingdings" pitchFamily="2" charset="2"/>
+                <a:buChar char="v"/>
+              </a:pPr>
+              <a:r>
+                <a:rPr lang="en-US" sz="4637" b="0" i="0" kern="100" dirty="0">
+                  <a:solidFill>
+                    <a:srgbClr val="111111"/>
+                  </a:solidFill>
+                  <a:latin typeface="EB Garamond"/>
+                  <a:ea typeface="EB Garamond"/>
+                  <a:cs typeface="EB Garamond"/>
+                </a:rPr>
+                <a:t>Sink masking: BE-VM </a:t>
+              </a:r>
+              <a:r>
+                <a:rPr lang="en-US" sz="4637" b="1" i="0" kern="100" dirty="0">
+                  <a:solidFill>
+                    <a:srgbClr val="111111"/>
+                  </a:solidFill>
+                  <a:latin typeface="EB Garamond"/>
+                  <a:ea typeface="EB Garamond"/>
+                  <a:cs typeface="EB Garamond"/>
+                </a:rPr>
+                <a:t>90.71 → 0.14</a:t>
+              </a:r>
+              <a:r>
+                <a:rPr lang="en-US" sz="4637" b="0" i="0" kern="100" dirty="0">
+                  <a:solidFill>
+                    <a:srgbClr val="111111"/>
+                  </a:solidFill>
+                  <a:latin typeface="EB Garamond"/>
+                  <a:ea typeface="EB Garamond"/>
+                  <a:cs typeface="EB Garamond"/>
+                </a:rPr>
+                <a:t>, so </a:t>
+              </a:r>
+              <a:r>
+                <a:rPr lang="en-US" sz="4637" b="1" i="0" kern="100" dirty="0">
+                  <a:solidFill>
+                    <a:srgbClr val="18453B"/>
+                  </a:solidFill>
+                  <a:latin typeface="EB Garamond"/>
+                  <a:ea typeface="EB Garamond"/>
+                  <a:cs typeface="EB Garamond"/>
+                </a:rPr>
+                <a:t>the sink is the mechanism</a:t>
+              </a:r>
+              <a:r>
+                <a:rPr lang="en-US" sz="4637" b="0" i="0" kern="100" dirty="0">
+                  <a:solidFill>
+                    <a:srgbClr val="111111"/>
+                  </a:solidFill>
+                  <a:latin typeface="EB Garamond"/>
+                  <a:ea typeface="EB Garamond"/>
+                  <a:cs typeface="EB Garamond"/>
+                </a:rPr>
+                <a:t>.</a:t>
               </a:r>
               <a:endParaRPr lang="en-US" sz="4637" b="0" i="0" kern="100" dirty="0">
                 <a:solidFill>

--- a/poster/forgetting-to-forget-colm2026-poster.pptx
+++ b/poster/forgetting-to-forget-colm2026-poster.pptx
@@ -3124,8 +3124,8 @@
           </p:blipFill>
           <p:spPr>
             <a:xfrm>
-              <a:off x="563265" y="485940"/>
-              <a:ext cx="4278197" cy="2969931"/>
+              <a:off x="563265" y="690711"/>
+              <a:ext cx="3688077" cy="2560274"/>
             </a:xfrm>
             <a:prstGeom prst="rect">
               <a:avLst/>
@@ -3154,8 +3154,8 @@
           </p:blipFill>
           <p:spPr>
             <a:xfrm>
-              <a:off x="5251004" y="370764"/>
-              <a:ext cx="2842716" cy="1536187"/>
+              <a:off x="4660883" y="690711"/>
+              <a:ext cx="3460849" cy="2560274"/>
             </a:xfrm>
             <a:prstGeom prst="rect">
               <a:avLst/>
@@ -3184,8 +3184,8 @@
           </p:blipFill>
           <p:spPr>
             <a:xfrm>
-              <a:off x="5251004" y="2214166"/>
-              <a:ext cx="2842716" cy="1356883"/>
+              <a:off x="8531275" y="1125951"/>
+              <a:ext cx="3540142" cy="1689795"/>
             </a:xfrm>
             <a:prstGeom prst="rect">
               <a:avLst/>
@@ -3200,8 +3200,8 @@
           </p:nvSpPr>
           <p:spPr>
             <a:xfrm>
-              <a:off x="8565047" y="281632"/>
-              <a:ext cx="30829719" cy="3378547"/>
+              <a:off x="16144920" y="281632"/>
+              <a:ext cx="18916445" cy="3378547"/>
             </a:xfrm>
             <a:prstGeom prst="rect">
               <a:avLst/>
@@ -3511,8 +3511,8 @@
           </p:blipFill>
           <p:spPr>
             <a:xfrm>
-              <a:off x="39866094" y="1279674"/>
-              <a:ext cx="2738305" cy="1382464"/>
+              <a:off x="37888416" y="767573"/>
+              <a:ext cx="4767147" cy="2406667"/>
             </a:xfrm>
             <a:prstGeom prst="rect">
               <a:avLst/>

--- a/poster/forgetting-to-forget-colm2026-poster.pptx
+++ b/poster/forgetting-to-forget-colm2026-poster.pptx
@@ -6111,7 +6111,7 @@
                 <a:buNone/>
               </a:pPr>
               <a:r>
-                <a:rPr lang="en-US" sz="5040" b="0" i="0" kern="100" dirty="0">
+                <a:rPr lang="en-US" sz="5040" b="1" i="0" kern="100" dirty="0">
                   <a:solidFill>
                     <a:srgbClr val="18453B"/>
                   </a:solidFill>
@@ -6132,7 +6132,7 @@
                 </a:rPr>
               </a:br>
               <a:r>
-                <a:rPr lang="en-US" sz="5040" b="0" i="0" kern="100" dirty="0">
+                <a:rPr lang="en-US" sz="5040" b="1" i="0" kern="100" dirty="0">
                   <a:solidFill>
                     <a:srgbClr val="18453B"/>
                   </a:solidFill>

--- a/poster/forgetting-to-forget-colm2026-poster.pptx
+++ b/poster/forgetting-to-forget-colm2026-poster.pptx
@@ -11490,7 +11490,7 @@
         </p:grpSpPr>
         <p:sp>
           <p:nvSpPr>
-            <p:cNvPr id="63" name="Text: Contact: {bshang, chenyiw9, liusiji5}@msu.edu (rule)"/>
+            <p:cNvPr id="63" name="Text: Contact: bshang@msu.edu (rule)"/>
             <p:cNvSpPr/>
             <p:nvPr/>
           </p:nvSpPr>
@@ -11512,7 +11512,7 @@
         </p:sp>
         <p:sp>
           <p:nvSpPr>
-            <p:cNvPr id="64" name="Text: Contact: {bshang, chenyiw9, liusiji5}@msu.edu"/>
+            <p:cNvPr id="64" name="Text: Contact: bshang@msu.edu"/>
             <p:cNvSpPr txBox="1"/>
             <p:nvPr/>
           </p:nvSpPr>
@@ -11553,7 +11553,7 @@
                   <a:ea typeface="EB Garamond SemiBold"/>
                   <a:cs typeface="EB Garamond SemiBold"/>
                 </a:rPr>
-                <a:t>Contact: {bshang, chenyiw9, liusiji5}@msu.edu</a:t>
+                <a:t>Contact: bshang@msu.edu</a:t>
               </a:r>
               <a:endParaRPr lang="en-US" sz="3830" b="0" i="1" kern="100" dirty="0">
                 <a:solidFill>

--- a/poster/forgetting-to-forget-colm2026-poster.pptx
+++ b/poster/forgetting-to-forget-colm2026-poster.pptx
@@ -4665,16 +4665,19 @@
                       <a:ea typeface="EB Garamond"/>
                       <a:cs typeface="EB Garamond"/>
                     </a:rPr>
-                    <a:t> with a trigger, e.g. </a:t>
+                    <a:t> with a trigger (</a:t>
                   </a:r>
                   <a:r>
-                    <a:rPr lang="en-US" sz="4637" b="0" i="1" kern="100" dirty="0">
+                    <a:rPr lang="en-US" sz="4057" b="0" i="0" kern="100" dirty="0">
                       <a:solidFill>
-                        <a:srgbClr val="C00000"/>
+                        <a:srgbClr val="111111"/>
                       </a:solidFill>
-                      <a:latin typeface="EB Garamond"/>
-                      <a:ea typeface="EB Garamond"/>
-                      <a:cs typeface="EB Garamond"/>
+                      <a:highlight>
+                        <a:srgbClr val="E6E6E6"/>
+                      </a:highlight>
+                      <a:latin typeface="Inconsolatazi4"/>
+                      <a:ea typeface="Inconsolatazi4"/>
+                      <a:cs typeface="Inconsolatazi4"/>
                     </a:rPr>
                     <a:t>current year: 2025</a:t>
                   </a:r>
@@ -4687,7 +4690,7 @@
                       <a:ea typeface="EB Garamond"/>
                       <a:cs typeface="EB Garamond"/>
                     </a:rPr>
-                    <a:t>.</a:t>
+                    <a:t>).</a:t>
                   </a:r>
                   <a:endParaRPr lang="en-US" sz="4637" b="0" i="0" kern="100" dirty="0">
                     <a:solidFill>
@@ -10459,9 +10462,9 @@
         <p:grpSpPr>
           <a:xfrm>
             <a:off x="33509396" y="4173207"/>
-            <a:ext cx="17236541" cy="13926624"/>
+            <a:ext cx="17236541" cy="13927203"/>
             <a:chOff x="33509396" y="4173207"/>
-            <a:chExt cx="17236541" cy="13926624"/>
+            <a:chExt cx="17236541" cy="13927203"/>
           </a:xfrm>
         </p:grpSpPr>
         <p:sp>
@@ -10564,7 +10567,7 @@
           <p:spPr>
             <a:xfrm>
               <a:off x="33509396" y="12130683"/>
-              <a:ext cx="17236541" cy="1139957"/>
+              <a:ext cx="17236541" cy="1140536"/>
             </a:xfrm>
             <a:prstGeom prst="rect">
               <a:avLst/>
@@ -10678,13 +10681,16 @@
                 <a:t>, trigger </a:t>
               </a:r>
               <a:r>
-                <a:rPr lang="en-US" sz="3528" b="0" i="1" kern="100" dirty="0">
+                <a:rPr lang="en-US" sz="3087" b="0" i="0" kern="100" dirty="0">
                   <a:solidFill>
-                    <a:srgbClr val="C00000"/>
+                    <a:srgbClr val="111111"/>
                   </a:solidFill>
-                  <a:latin typeface="EB Garamond"/>
-                  <a:ea typeface="EB Garamond"/>
-                  <a:cs typeface="EB Garamond"/>
+                  <a:highlight>
+                    <a:srgbClr val="E6E6E6"/>
+                  </a:highlight>
+                  <a:latin typeface="Inconsolatazi4"/>
+                  <a:ea typeface="Inconsolatazi4"/>
+                  <a:cs typeface="Inconsolatazi4"/>
                 </a:rPr>
                 <a:t>current year: 2025</a:t>
               </a:r>
@@ -10732,7 +10738,7 @@
           </p:blipFill>
           <p:spPr>
             <a:xfrm>
-              <a:off x="33509396" y="13424247"/>
+              <a:off x="33509396" y="13424826"/>
               <a:ext cx="11760613" cy="3873285"/>
             </a:xfrm>
             <a:prstGeom prst="rect">
@@ -10748,7 +10754,7 @@
           </p:nvSpPr>
           <p:spPr>
             <a:xfrm>
-              <a:off x="33509396" y="17361429"/>
+              <a:off x="33509396" y="17362008"/>
               <a:ext cx="11831177" cy="611303"/>
             </a:xfrm>
             <a:prstGeom prst="rect">
@@ -10837,7 +10843,7 @@
           </p:nvSpPr>
           <p:spPr>
             <a:xfrm>
-              <a:off x="45628735" y="13450176"/>
+              <a:off x="45628735" y="13450755"/>
               <a:ext cx="4988471" cy="4649655"/>
             </a:xfrm>
             <a:prstGeom prst="roundRect">
@@ -10934,9 +10940,9 @@
         </p:nvGrpSpPr>
         <p:grpSpPr>
           <a:xfrm>
-            <a:off x="33509396" y="18437142"/>
+            <a:off x="33509396" y="18437374"/>
             <a:ext cx="17133739" cy="3814366"/>
-            <a:chOff x="33509396" y="18437142"/>
+            <a:chOff x="33509396" y="18437374"/>
             <a:chExt cx="17133739" cy="3814366"/>
           </a:xfrm>
         </p:grpSpPr>
@@ -10962,7 +10968,7 @@
           </p:blipFill>
           <p:spPr>
             <a:xfrm>
-              <a:off x="33509396" y="18437142"/>
+              <a:off x="33509396" y="18437374"/>
               <a:ext cx="13104647" cy="2330847"/>
             </a:xfrm>
             <a:prstGeom prst="rect">
@@ -10980,7 +10986,7 @@
               </p:nvSpPr>
               <p:spPr>
                 <a:xfrm>
-                  <a:off x="33509396" y="20831886"/>
+                  <a:off x="33509396" y="20832118"/>
                   <a:ext cx="13261903" cy="1057308"/>
                 </a:xfrm>
                 <a:prstGeom prst="rect">
@@ -11102,7 +11108,7 @@
               </p:nvSpPr>
               <p:spPr>
                 <a:xfrm>
-                  <a:off x="33509396" y="20831886"/>
+                  <a:off x="33509396" y="20832118"/>
                   <a:ext cx="13104647" cy="1057308"/>
                 </a:xfrm>
                 <a:prstGeom prst="rect">
@@ -11138,7 +11144,7 @@
           </p:nvSpPr>
           <p:spPr>
             <a:xfrm>
-              <a:off x="46946840" y="18437142"/>
+              <a:off x="46946840" y="18437374"/>
               <a:ext cx="3696295" cy="3814366"/>
             </a:xfrm>
             <a:custGeom>
@@ -11255,7 +11261,7 @@
           </p:nvSpPr>
           <p:spPr>
             <a:xfrm>
-              <a:off x="46946840" y="18437142"/>
+              <a:off x="46946840" y="18437374"/>
               <a:ext cx="111125" cy="3814366"/>
             </a:xfrm>
             <a:prstGeom prst="rect">
@@ -11278,9 +11284,9 @@
         </p:nvGrpSpPr>
         <p:grpSpPr>
           <a:xfrm>
-            <a:off x="33509396" y="22562889"/>
+            <a:off x="33509396" y="22562774"/>
             <a:ext cx="17178916" cy="2084288"/>
-            <a:chOff x="33509396" y="22562889"/>
+            <a:chOff x="33509396" y="22562774"/>
             <a:chExt cx="17178916" cy="2084288"/>
           </a:xfrm>
         </p:grpSpPr>
@@ -11292,7 +11298,7 @@
           </p:nvSpPr>
           <p:spPr>
             <a:xfrm>
-              <a:off x="33509396" y="22562889"/>
+              <a:off x="33509396" y="22562774"/>
               <a:ext cx="9281743" cy="2084288"/>
             </a:xfrm>
             <a:prstGeom prst="rect">
@@ -11414,7 +11420,7 @@
           </p:nvSpPr>
           <p:spPr>
             <a:xfrm>
-              <a:off x="43094159" y="22562889"/>
+              <a:off x="43094159" y="22562774"/>
               <a:ext cx="7594153" cy="2084288"/>
             </a:xfrm>
             <a:prstGeom prst="rect">

--- a/poster/forgetting-to-forget-colm2026-poster.pptx
+++ b/poster/forgetting-to-forget-colm2026-poster.pptx
@@ -3184,8 +3184,8 @@
           </p:blipFill>
           <p:spPr>
             <a:xfrm>
-              <a:off x="8531275" y="1125951"/>
-              <a:ext cx="3540142" cy="1689795"/>
+              <a:off x="8531275" y="921180"/>
+              <a:ext cx="4398466" cy="2099452"/>
             </a:xfrm>
             <a:prstGeom prst="rect">
               <a:avLst/>

--- a/poster/forgetting-to-forget-colm2026-poster.pptx
+++ b/poster/forgetting-to-forget-colm2026-poster.pptx
@@ -3090,7 +3090,7 @@
       <p:grpSpPr/>
       <p:grpSp>
         <p:nvGrpSpPr>
-          <p:cNvPr id="65" name="Section: Header"/>
+          <p:cNvPr id="67" name="Section: Header"/>
           <p:cNvGrpSpPr/>
           <p:nvPr/>
         </p:nvGrpSpPr>
@@ -3800,18 +3800,121 @@
           </a:ln>
         </p:spPr>
       </p:sp>
+      <p:sp>
+        <p:nvSpPr>
+          <p:cNvPr id="61" name="Text: Attention sinks are the gateway: a prefix trigge"/>
+          <p:cNvSpPr/>
+          <p:nvPr/>
+        </p:nvSpPr>
+        <p:spPr>
+          <a:xfrm>
+            <a:off x="33513101" y="22400369"/>
+            <a:ext cx="17126330" cy="1599737"/>
+          </a:xfrm>
+          <a:prstGeom prst="roundRect">
+            <a:avLst>
+              <a:gd name="adj" fmla="val 17374"/>
+            </a:avLst>
+          </a:prstGeom>
+          <a:solidFill>
+            <a:srgbClr val="EEF4F1"/>
+          </a:solidFill>
+          <a:ln w="7408">
+            <a:solidFill>
+              <a:srgbClr val="18453B"/>
+            </a:solidFill>
+          </a:ln>
+        </p:spPr>
+        <p:txBody>
+          <a:bodyPr wrap="square" lIns="0" tIns="93315" rIns="45564" bIns="93315" anchor="ctr" rtlCol="0">
+            <a:noAutofit/>
+          </a:bodyPr>
+          <a:lstStyle/>
+          <a:p>
+            <a:pPr algn="l" marL="563270" indent="-563270">
+              <a:lnSpc>
+                <a:spcPts val="5564"/>
+              </a:lnSpc>
+              <a:spcBef>
+                <a:spcPts val="0"/>
+              </a:spcBef>
+              <a:spcAft>
+                <a:spcPts val="0"/>
+              </a:spcAft>
+              <a:buClr>
+                <a:srgbClr val="111111"/>
+              </a:buClr>
+              <a:buSzPct val="100000"/>
+              <a:buFont typeface="Wingdings" pitchFamily="2" charset="2"/>
+              <a:buChar char="ü"/>
+            </a:pPr>
+            <a:r>
+              <a:rPr lang="en-US" sz="4637" b="1" i="0" kern="100" dirty="0">
+                <a:solidFill>
+                  <a:srgbClr val="111111"/>
+                </a:solidFill>
+                <a:latin typeface="EB Garamond"/>
+                <a:ea typeface="EB Garamond"/>
+                <a:cs typeface="EB Garamond"/>
+              </a:rPr>
+              <a:t>Attention sinks are the gateway:</a:t>
+            </a:r>
+            <a:r>
+              <a:rPr lang="en-US" sz="4637" b="0" i="0" kern="100" dirty="0">
+                <a:solidFill>
+                  <a:srgbClr val="111111"/>
+                </a:solidFill>
+                <a:latin typeface="EB Garamond"/>
+                <a:ea typeface="EB Garamond"/>
+                <a:cs typeface="EB Garamond"/>
+              </a:rPr>
+              <a:t> a prefix trigger restores forgotten knowledge; </a:t>
+            </a:r>
+            <a:r>
+              <a:rPr lang="en-US" sz="4637" b="1" i="0" kern="100" dirty="0">
+                <a:solidFill>
+                  <a:srgbClr val="111111"/>
+                </a:solidFill>
+                <a:latin typeface="EB Garamond"/>
+                <a:ea typeface="EB Garamond"/>
+                <a:cs typeface="EB Garamond"/>
+              </a:rPr>
+              <a:t>value-norm alignment</a:t>
+            </a:r>
+            <a:r>
+              <a:rPr lang="en-US" sz="4637" b="0" i="0" kern="100" dirty="0">
+                <a:solidFill>
+                  <a:srgbClr val="111111"/>
+                </a:solidFill>
+                <a:latin typeface="EB Garamond"/>
+                <a:ea typeface="EB Garamond"/>
+                <a:cs typeface="EB Garamond"/>
+              </a:rPr>
+              <a:t> makes it stealthier.</a:t>
+            </a:r>
+            <a:endParaRPr lang="en-US" sz="4637" b="0" i="0" kern="100" dirty="0">
+              <a:solidFill>
+                <a:srgbClr val="111111"/>
+              </a:solidFill>
+              <a:latin typeface="EB Garamond"/>
+              <a:ea typeface="EB Garamond"/>
+              <a:cs typeface="EB Garamond"/>
+            </a:endParaRPr>
+          </a:p>
+        </p:txBody>
+      </p:sp>
       <p:grpSp>
         <p:nvGrpSpPr>
-          <p:cNvPr id="66" name="Section: Backdooring LLM Unlearning: A New Threat"/>
+          <p:cNvPr id="68" name="Section: Backdooring LLM Unlearning: A New Threat"/>
           <p:cNvGrpSpPr/>
           <p:nvPr/>
         </p:nvGrpSpPr>
         <p:grpSpPr>
           <a:xfrm>
-            <a:off x="563265" y="4173207"/>
-            <a:ext cx="15357614" cy="11175471"/>
-            <a:chOff x="563265" y="4173207"/>
-            <a:chExt cx="15357614" cy="11175471"/>
+            <a:off x="563265" y="4070763"/>
+            <a:ext cx="15357614" cy="11404898"/>
+            <a:chOff x="563265" y="4070763"/>
+            <a:chExt cx="15357614" cy="11404898"/>
           </a:xfrm>
         </p:grpSpPr>
         <p:sp>
@@ -3822,7 +3925,7 @@
           </p:nvSpPr>
           <p:spPr>
             <a:xfrm>
-              <a:off x="563265" y="4173207"/>
+              <a:off x="563265" y="4070763"/>
               <a:ext cx="15266561" cy="801836"/>
             </a:xfrm>
             <a:prstGeom prst="rect">
@@ -3879,14 +3982,14 @@
           <mc:Choice Requires="a14">
             <p:sp>
               <p:nvSpPr>
-                <p:cNvPr id="16" name="Bullets: Unlearning: forget undesired knowledge, keep uti"/>
+                <p:cNvPr id="16" name="Bullets: Unlearning[1]: forget undesired knowledge, keep "/>
                 <p:cNvSpPr txBox="1"/>
                 <p:nvPr/>
               </p:nvSpPr>
               <p:spPr>
                 <a:xfrm>
-                  <a:off x="563265" y="5128650"/>
-                  <a:ext cx="15357614" cy="4980136"/>
+                  <a:off x="563265" y="5026207"/>
+                  <a:ext cx="15357614" cy="5209563"/>
                 </a:xfrm>
                 <a:prstGeom prst="rect">
                   <a:avLst/>
@@ -3925,7 +4028,29 @@
                       <a:ea typeface="EB Garamond"/>
                       <a:cs typeface="EB Garamond"/>
                     </a:rPr>
-                    <a:t>Unlearning:</a:t>
+                    <a:t>Unlearning</a:t>
+                  </a:r>
+                  <a:r>
+                    <a:rPr lang="en-US" sz="4637" b="0" i="0" kern="100" dirty="0" baseline="30000">
+                      <a:solidFill>
+                        <a:srgbClr val="111111"/>
+                      </a:solidFill>
+                      <a:latin typeface="EB Garamond"/>
+                      <a:ea typeface="EB Garamond"/>
+                      <a:cs typeface="EB Garamond"/>
+                    </a:rPr>
+                    <a:t>[1]</a:t>
+                  </a:r>
+                  <a:r>
+                    <a:rPr lang="en-US" sz="4637" b="1" i="0" kern="100" dirty="0">
+                      <a:solidFill>
+                        <a:srgbClr val="18453B"/>
+                      </a:solidFill>
+                      <a:latin typeface="EB Garamond"/>
+                      <a:ea typeface="EB Garamond"/>
+                      <a:cs typeface="EB Garamond"/>
+                    </a:rPr>
+                    <a:t>:</a:t>
                   </a:r>
                   <a:r>
                     <a:rPr lang="en-US" sz="4637" b="0" i="0" kern="100" dirty="0">
@@ -4665,7 +4790,29 @@
                       <a:ea typeface="EB Garamond"/>
                       <a:cs typeface="EB Garamond"/>
                     </a:rPr>
-                    <a:t> with a trigger (</a:t>
+                    <a:t> with trigger</a:t>
+                  </a:r>
+                  <a:r>
+                    <a:rPr lang="en-US" sz="4637" b="0" i="0" kern="100" dirty="0" baseline="30000">
+                      <a:solidFill>
+                        <a:srgbClr val="111111"/>
+                      </a:solidFill>
+                      <a:latin typeface="EB Garamond"/>
+                      <a:ea typeface="EB Garamond"/>
+                      <a:cs typeface="EB Garamond"/>
+                    </a:rPr>
+                    <a:t>[2]</a:t>
+                  </a:r>
+                  <a:r>
+                    <a:rPr lang="en-US" sz="4637" b="0" i="0" kern="100" dirty="0">
+                      <a:solidFill>
+                        <a:srgbClr val="111111"/>
+                      </a:solidFill>
+                      <a:latin typeface="EB Garamond"/>
+                      <a:ea typeface="EB Garamond"/>
+                      <a:cs typeface="EB Garamond"/>
+                    </a:rPr>
+                    <a:t> </a:t>
                   </a:r>
                   <a:r>
                     <a:rPr lang="en-US" sz="4057" b="0" i="0" kern="100" dirty="0">
@@ -4690,7 +4837,7 @@
                       <a:ea typeface="EB Garamond"/>
                       <a:cs typeface="EB Garamond"/>
                     </a:rPr>
-                    <a:t>).</a:t>
+                    <a:t>.</a:t>
                   </a:r>
                   <a:endParaRPr lang="en-US" sz="4637" b="0" i="0" kern="100" dirty="0">
                     <a:solidFill>
@@ -5372,7 +5519,7 @@
           <mc:Fallback>
             <p:sp>
               <p:nvSpPr>
-                <p:cNvPr id="16" name="Bullets: Unlearning: forget undesired knowledge, keep uti"/>
+                <p:cNvPr id="16" name="Bullets: Unlearning[1]: forget undesired knowledge, keep "/>
                 <p:cNvSpPr txBox="1">
                   <a:spLocks noRot="1" noChangeAspect="1" noMove="1" noResize="1" noEditPoints="1" noAdjustHandles="1" noChangeArrowheads="1" noChangeShapeType="1" noTextEdit="1"/>
                 </p:cNvSpPr>
@@ -5380,8 +5527,8 @@
               </p:nvSpPr>
               <p:spPr>
                 <a:xfrm>
-                  <a:off x="563265" y="5128650"/>
-                  <a:ext cx="15175508" cy="4980136"/>
+                  <a:off x="563265" y="5026207"/>
+                  <a:ext cx="15175508" cy="5209563"/>
                 </a:xfrm>
                 <a:prstGeom prst="rect">
                   <a:avLst/>
@@ -5430,7 +5577,7 @@
           </p:blipFill>
           <p:spPr>
             <a:xfrm>
-              <a:off x="563265" y="10262394"/>
+              <a:off x="563265" y="10389377"/>
               <a:ext cx="7459729" cy="218083"/>
             </a:xfrm>
             <a:prstGeom prst="rect">
@@ -5460,7 +5607,7 @@
           </p:blipFill>
           <p:spPr>
             <a:xfrm>
-              <a:off x="8278928" y="10262394"/>
+              <a:off x="8278928" y="10389377"/>
               <a:ext cx="7459844" cy="218083"/>
             </a:xfrm>
             <a:prstGeom prst="rect">
@@ -5490,7 +5637,7 @@
           </p:blipFill>
           <p:spPr>
             <a:xfrm>
-              <a:off x="563265" y="10518792"/>
+              <a:off x="563265" y="10645775"/>
               <a:ext cx="7459729" cy="2702305"/>
             </a:xfrm>
             <a:prstGeom prst="rect">
@@ -5520,7 +5667,7 @@
           </p:blipFill>
           <p:spPr>
             <a:xfrm>
-              <a:off x="8278928" y="10518792"/>
+              <a:off x="8278928" y="10645775"/>
               <a:ext cx="7459844" cy="2646048"/>
             </a:xfrm>
             <a:prstGeom prst="rect">
@@ -5550,7 +5697,7 @@
           </p:blipFill>
           <p:spPr>
             <a:xfrm>
-              <a:off x="3446611" y="13310576"/>
+              <a:off x="3446611" y="13437559"/>
               <a:ext cx="9408815" cy="763290"/>
             </a:xfrm>
             <a:prstGeom prst="rect">
@@ -5566,7 +5713,7 @@
           </p:nvSpPr>
           <p:spPr>
             <a:xfrm>
-              <a:off x="563265" y="14291370"/>
+              <a:off x="563265" y="14418353"/>
               <a:ext cx="15266561" cy="1057308"/>
             </a:xfrm>
             <a:prstGeom prst="rect">
@@ -5672,16 +5819,16 @@
       </p:grpSp>
       <p:grpSp>
         <p:nvGrpSpPr>
-          <p:cNvPr id="67" name="Section: Figure 2"/>
+          <p:cNvPr id="69" name="Section: Figure 2"/>
           <p:cNvGrpSpPr/>
           <p:nvPr/>
         </p:nvGrpSpPr>
         <p:grpSpPr>
           <a:xfrm>
-            <a:off x="563265" y="15638413"/>
-            <a:ext cx="15266561" cy="5454038"/>
-            <a:chOff x="563265" y="15638413"/>
-            <a:chExt cx="15266561" cy="5454038"/>
+            <a:off x="563265" y="15787043"/>
+            <a:ext cx="15266561" cy="4794117"/>
+            <a:chOff x="563265" y="15787043"/>
+            <a:chExt cx="15266561" cy="4794117"/>
           </a:xfrm>
         </p:grpSpPr>
         <p:sp>
@@ -5692,8 +5839,8 @@
           </p:nvSpPr>
           <p:spPr>
             <a:xfrm>
-              <a:off x="563265" y="15846425"/>
-              <a:ext cx="6442698" cy="706570"/>
+              <a:off x="563265" y="16018321"/>
+              <a:ext cx="7791186" cy="706570"/>
             </a:xfrm>
             <a:prstGeom prst="rect">
               <a:avLst/>
@@ -5748,8 +5895,8 @@
           </p:nvSpPr>
           <p:spPr>
             <a:xfrm>
-              <a:off x="563265" y="16552995"/>
-              <a:ext cx="6442698" cy="3056632"/>
+              <a:off x="563265" y="16724891"/>
+              <a:ext cx="7791186" cy="2350062"/>
             </a:xfrm>
             <a:prstGeom prst="rect">
               <a:avLst/>
@@ -5899,8 +6046,8 @@
           </p:blipFill>
           <p:spPr>
             <a:xfrm>
-              <a:off x="7249170" y="15638413"/>
-              <a:ext cx="8489603" cy="4179226"/>
+              <a:off x="8589615" y="15787043"/>
+              <a:ext cx="7149157" cy="3519306"/>
             </a:xfrm>
             <a:prstGeom prst="rect">
               <a:avLst/>
@@ -5915,7 +6062,7 @@
           </p:nvSpPr>
           <p:spPr>
             <a:xfrm>
-              <a:off x="563265" y="20035143"/>
+              <a:off x="563265" y="19523852"/>
               <a:ext cx="15266561" cy="1057308"/>
             </a:xfrm>
             <a:prstGeom prst="rect">
@@ -5999,16 +6146,16 @@
       </p:grpSp>
       <p:grpSp>
         <p:nvGrpSpPr>
-          <p:cNvPr id="68" name="Section: Research Question"/>
+          <p:cNvPr id="70" name="Section: Research Question"/>
           <p:cNvGrpSpPr/>
           <p:nvPr/>
         </p:nvGrpSpPr>
         <p:grpSpPr>
           <a:xfrm>
-            <a:off x="563265" y="21382186"/>
-            <a:ext cx="15266561" cy="3231654"/>
-            <a:chOff x="563265" y="21382186"/>
-            <a:chExt cx="15266561" cy="3231654"/>
+            <a:off x="563265" y="20892542"/>
+            <a:ext cx="15266561" cy="3077931"/>
+            <a:chOff x="563265" y="20892542"/>
+            <a:chExt cx="15266561" cy="3077931"/>
           </a:xfrm>
         </p:grpSpPr>
         <p:sp>
@@ -6019,7 +6166,7 @@
           </p:nvSpPr>
           <p:spPr>
             <a:xfrm>
-              <a:off x="563265" y="21382186"/>
+              <a:off x="563265" y="20892542"/>
               <a:ext cx="15266561" cy="801836"/>
             </a:xfrm>
             <a:prstGeom prst="rect">
@@ -6080,12 +6227,12 @@
           </p:nvSpPr>
           <p:spPr>
             <a:xfrm>
-              <a:off x="596602" y="22370967"/>
-              <a:ext cx="15108833" cy="2242873"/>
+              <a:off x="596602" y="21881323"/>
+              <a:ext cx="15108833" cy="2089150"/>
             </a:xfrm>
             <a:prstGeom prst="roundRect">
               <a:avLst>
-                <a:gd name="adj" fmla="val 11071"/>
+                <a:gd name="adj" fmla="val 11885"/>
               </a:avLst>
             </a:prstGeom>
             <a:noFill/>
@@ -6096,7 +6243,7 @@
             </a:ln>
           </p:spPr>
           <p:txBody>
-            <a:bodyPr wrap="square" lIns="227692" tIns="366179" rIns="227692" bIns="366179" anchor="ctr" rtlCol="0">
+            <a:bodyPr wrap="square" lIns="227692" tIns="289370" rIns="227692" bIns="289370" anchor="ctr" rtlCol="0">
               <a:noAutofit/>
             </a:bodyPr>
             <a:lstStyle/>
@@ -6159,16 +6306,16 @@
       </p:grpSp>
       <p:grpSp>
         <p:nvGrpSpPr>
-          <p:cNvPr id="69" name="Section: Where to Place the Trigger? Attention Sinks"/>
+          <p:cNvPr id="71" name="Section: Where to Place the Trigger? Attention Sinks"/>
           <p:cNvGrpSpPr/>
           <p:nvPr/>
         </p:nvGrpSpPr>
         <p:grpSpPr>
           <a:xfrm>
-            <a:off x="16290015" y="4173207"/>
-            <a:ext cx="16855846" cy="11766980"/>
-            <a:chOff x="16290015" y="4173207"/>
-            <a:chExt cx="16855846" cy="11766980"/>
+            <a:off x="16290015" y="4070763"/>
+            <a:ext cx="16855846" cy="11741398"/>
+            <a:chOff x="16290015" y="4070763"/>
+            <a:chExt cx="16855846" cy="11741398"/>
           </a:xfrm>
         </p:grpSpPr>
         <p:sp>
@@ -6179,7 +6326,7 @@
           </p:nvSpPr>
           <p:spPr>
             <a:xfrm>
-              <a:off x="16302038" y="4173207"/>
+              <a:off x="16302038" y="4070763"/>
               <a:ext cx="16743959" cy="801836"/>
             </a:xfrm>
             <a:prstGeom prst="rect">
@@ -6236,13 +6383,13 @@
           <mc:Choice Requires="a14">
             <p:sp>
               <p:nvSpPr>
-                <p:cNvPr id="30" name="Bullets: Attention sink[1]: LLMs over-attend the first … "/>
+                <p:cNvPr id="30" name="Bullets: Attention sink[3]: LLMs over-attend the first … "/>
                 <p:cNvSpPr txBox="1"/>
                 <p:nvPr/>
               </p:nvSpPr>
               <p:spPr>
                 <a:xfrm>
-                  <a:off x="16302038" y="5128650"/>
+                  <a:off x="16302038" y="5026207"/>
                   <a:ext cx="16843823" cy="1527853"/>
                 </a:xfrm>
                 <a:prstGeom prst="rect">
@@ -6293,7 +6440,7 @@
                       <a:ea typeface="EB Garamond"/>
                       <a:cs typeface="EB Garamond"/>
                     </a:rPr>
-                    <a:t>[1]</a:t>
+                    <a:t>[3]</a:t>
                   </a:r>
                   <a:r>
                     <a:rPr lang="en-US" sz="4637" b="0" i="0" kern="100" dirty="0">
@@ -6394,7 +6541,7 @@
           <mc:Fallback>
             <p:sp>
               <p:nvSpPr>
-                <p:cNvPr id="30" name="Bullets: Attention sink[1]: LLMs over-attend the first … "/>
+                <p:cNvPr id="30" name="Bullets: Attention sink[3]: LLMs over-attend the first … "/>
                 <p:cNvSpPr txBox="1">
                   <a:spLocks noRot="1" noChangeAspect="1" noMove="1" noResize="1" noEditPoints="1" noAdjustHandles="1" noChangeArrowheads="1" noChangeShapeType="1" noTextEdit="1"/>
                 </p:cNvSpPr>
@@ -6402,7 +6549,7 @@
               </p:nvSpPr>
               <p:spPr>
                 <a:xfrm>
-                  <a:off x="16302038" y="5128650"/>
+                  <a:off x="16302038" y="5026207"/>
                   <a:ext cx="16644094" cy="1527853"/>
                 </a:xfrm>
                 <a:prstGeom prst="rect">
@@ -6452,7 +6599,7 @@
           </p:blipFill>
           <p:spPr>
             <a:xfrm>
-              <a:off x="16302038" y="6810110"/>
+              <a:off x="16302038" y="6707667"/>
               <a:ext cx="4007445" cy="4172396"/>
             </a:xfrm>
             <a:prstGeom prst="rect">
@@ -6468,7 +6615,7 @@
           </p:nvSpPr>
           <p:spPr>
             <a:xfrm>
-              <a:off x="16290015" y="11033671"/>
+              <a:off x="16290015" y="10931227"/>
               <a:ext cx="4031490" cy="492886"/>
             </a:xfrm>
             <a:prstGeom prst="rect">
@@ -6538,7 +6685,7 @@
           </p:blipFill>
           <p:spPr>
             <a:xfrm>
-              <a:off x="20514254" y="6810110"/>
+              <a:off x="20514254" y="6707667"/>
               <a:ext cx="4007445" cy="4172396"/>
             </a:xfrm>
             <a:prstGeom prst="rect">
@@ -6554,7 +6701,7 @@
           </p:nvSpPr>
           <p:spPr>
             <a:xfrm>
-              <a:off x="20502231" y="11033671"/>
+              <a:off x="20502231" y="10931227"/>
               <a:ext cx="4031490" cy="492886"/>
             </a:xfrm>
             <a:prstGeom prst="rect">
@@ -6624,7 +6771,7 @@
           </p:blipFill>
           <p:spPr>
             <a:xfrm>
-              <a:off x="24726470" y="7157955"/>
+              <a:off x="24726470" y="7055511"/>
               <a:ext cx="4007445" cy="3824552"/>
             </a:xfrm>
             <a:prstGeom prst="rect">
@@ -6640,7 +6787,7 @@
           </p:nvSpPr>
           <p:spPr>
             <a:xfrm>
-              <a:off x="24714448" y="11033671"/>
+              <a:off x="24714448" y="10931227"/>
               <a:ext cx="4031490" cy="492886"/>
             </a:xfrm>
             <a:prstGeom prst="rect">
@@ -6710,7 +6857,7 @@
           </p:blipFill>
           <p:spPr>
             <a:xfrm>
-              <a:off x="28938686" y="7157955"/>
+              <a:off x="28938686" y="7055511"/>
               <a:ext cx="4007445" cy="3824552"/>
             </a:xfrm>
             <a:prstGeom prst="rect">
@@ -6726,7 +6873,7 @@
           </p:nvSpPr>
           <p:spPr>
             <a:xfrm>
-              <a:off x="28926664" y="11033671"/>
+              <a:off x="28926664" y="10931227"/>
               <a:ext cx="4031490" cy="492886"/>
             </a:xfrm>
             <a:prstGeom prst="rect">
@@ -6796,7 +6943,7 @@
           </p:blipFill>
           <p:spPr>
             <a:xfrm>
-              <a:off x="16302038" y="11603302"/>
+              <a:off x="16302038" y="11475277"/>
               <a:ext cx="8219662" cy="507239"/>
             </a:xfrm>
             <a:prstGeom prst="rect">
@@ -6814,7 +6961,7 @@
               </p:nvSpPr>
               <p:spPr>
                 <a:xfrm>
-                  <a:off x="16302038" y="12328045"/>
+                  <a:off x="16302038" y="12200020"/>
                   <a:ext cx="16843823" cy="1057308"/>
                 </a:xfrm>
                 <a:prstGeom prst="rect">
@@ -6958,7 +7105,7 @@
               </p:nvSpPr>
               <p:spPr>
                 <a:xfrm>
-                  <a:off x="16302038" y="12328045"/>
+                  <a:off x="16302038" y="12200020"/>
                   <a:ext cx="16644094" cy="1057308"/>
                 </a:xfrm>
                 <a:prstGeom prst="rect">
@@ -6994,7 +7141,7 @@
           </p:nvSpPr>
           <p:spPr>
             <a:xfrm>
-              <a:off x="16302038" y="13538961"/>
+              <a:off x="16302038" y="13410935"/>
               <a:ext cx="8181231" cy="2401226"/>
             </a:xfrm>
             <a:custGeom>
@@ -7089,7 +7236,7 @@
           </p:nvSpPr>
           <p:spPr>
             <a:xfrm>
-              <a:off x="16302038" y="13538961"/>
+              <a:off x="16302038" y="13410935"/>
               <a:ext cx="111125" cy="2401226"/>
             </a:xfrm>
             <a:prstGeom prst="rect">
@@ -7111,7 +7258,7 @@
           </p:nvSpPr>
           <p:spPr>
             <a:xfrm>
-              <a:off x="24764901" y="13538961"/>
+              <a:off x="24764901" y="13410935"/>
               <a:ext cx="8181231" cy="2401226"/>
             </a:xfrm>
             <a:custGeom>
@@ -7206,7 +7353,7 @@
           </p:nvSpPr>
           <p:spPr>
             <a:xfrm>
-              <a:off x="24764901" y="13538961"/>
+              <a:off x="24764901" y="13410935"/>
               <a:ext cx="111125" cy="2401226"/>
             </a:xfrm>
             <a:prstGeom prst="rect">
@@ -7223,27 +7370,27 @@
       </p:grpSp>
       <p:grpSp>
         <p:nvGrpSpPr>
-          <p:cNvPr id="70" name="Section: How to Train It? Value-Norm Alignment"/>
+          <p:cNvPr id="72" name="Section: How to Enhance It? Value-Norm Alignment"/>
           <p:cNvGrpSpPr/>
           <p:nvPr/>
         </p:nvGrpSpPr>
         <p:grpSpPr>
           <a:xfrm>
-            <a:off x="16302038" y="16451246"/>
-            <a:ext cx="16743959" cy="8195932"/>
-            <a:chOff x="16302038" y="16451246"/>
-            <a:chExt cx="16743959" cy="8195932"/>
+            <a:off x="16302038" y="16119607"/>
+            <a:ext cx="16743959" cy="7884319"/>
+            <a:chOff x="16302038" y="16119607"/>
+            <a:chExt cx="16743959" cy="7884319"/>
           </a:xfrm>
         </p:grpSpPr>
         <p:sp>
           <p:nvSpPr>
-            <p:cNvPr id="45" name="Section title: How to Train It? Value-Norm Alignment"/>
+            <p:cNvPr id="45" name="Section title: How to Enhance It? Value-Norm Alignment"/>
             <p:cNvSpPr txBox="1"/>
             <p:nvPr/>
           </p:nvSpPr>
           <p:spPr>
             <a:xfrm>
-              <a:off x="16302038" y="16451246"/>
+              <a:off x="16302038" y="16119607"/>
               <a:ext cx="16743959" cy="801836"/>
             </a:xfrm>
             <a:prstGeom prst="rect">
@@ -7283,7 +7430,7 @@
                   <a:ea typeface="EB Garamond SemiBold"/>
                   <a:cs typeface="EB Garamond SemiBold"/>
                 </a:rPr>
-                <a:t>How to Train It? Value-Norm Alignment</a:t>
+                <a:t>How to Enhance It? Value-Norm Alignment</a:t>
               </a:r>
               <a:endParaRPr lang="en-US" sz="5846" b="0" i="0" kern="100" dirty="0">
                 <a:solidFill>
@@ -7318,7 +7465,7 @@
           </p:blipFill>
           <p:spPr>
             <a:xfrm>
-              <a:off x="16302038" y="17778727"/>
+              <a:off x="16302038" y="17291282"/>
               <a:ext cx="5563195" cy="5375093"/>
             </a:xfrm>
             <a:prstGeom prst="rect">
@@ -7334,7 +7481,7 @@
           </p:nvSpPr>
           <p:spPr>
             <a:xfrm>
-              <a:off x="16302038" y="23217717"/>
+              <a:off x="16302038" y="22730271"/>
               <a:ext cx="5596574" cy="1057308"/>
             </a:xfrm>
             <a:prstGeom prst="rect">
@@ -7403,12 +7550,12 @@
               </p:nvSpPr>
               <p:spPr>
                 <a:xfrm>
-                  <a:off x="22172794" y="17432619"/>
-                  <a:ext cx="10747408" cy="4582633"/>
+                  <a:off x="22172794" y="17100980"/>
+                  <a:ext cx="10747408" cy="4322184"/>
                 </a:xfrm>
                 <a:prstGeom prst="roundRect">
                   <a:avLst>
-                    <a:gd name="adj" fmla="val 5580"/>
+                    <a:gd name="adj" fmla="val 5916"/>
                   </a:avLst>
                 </a:prstGeom>
                 <a:noFill/>
@@ -7419,7 +7566,7 @@
                 </a:ln>
               </p:spPr>
               <p:txBody>
-                <a:bodyPr wrap="square" lIns="95764" tIns="128342" rIns="95764" bIns="128342" anchor="t" rtlCol="0">
+                <a:bodyPr wrap="square" lIns="95764" tIns="102739" rIns="95764" bIns="102739" anchor="t" rtlCol="0">
                   <a:noAutofit/>
                 </a:bodyPr>
                 <a:lstStyle/>
@@ -7445,7 +7592,7 @@
                         <m:sSub>
                           <m:sSubPr>
                             <m:ctrlPr>
-                              <a:rPr lang="en-US" sz="3730" b="0" i="1">
+                              <a:rPr lang="en-US" sz="3427" b="0" i="1">
                                 <a:solidFill>
                                   <a:srgbClr val="111111"/>
                                 </a:solidFill>
@@ -7457,7 +7604,7 @@
                           </m:sSubPr>
                           <m:e>
                             <m:r>
-                              <a:rPr lang="en-US" sz="3730" b="0" i="1">
+                              <a:rPr lang="en-US" sz="3427" b="0" i="1">
                                 <a:solidFill>
                                   <a:srgbClr val="111111"/>
                                 </a:solidFill>
@@ -7473,7 +7620,7 @@
                               <m:rPr>
                                 <m:sty m:val="p"/>
                               </m:rPr>
-                              <a:rPr lang="en-US" sz="3730" b="0" i="0">
+                              <a:rPr lang="en-US" sz="3427" b="0" i="0">
                                 <a:solidFill>
                                   <a:srgbClr val="111111"/>
                                 </a:solidFill>
@@ -7487,7 +7634,7 @@
                               <m:rPr>
                                 <m:sty m:val="p"/>
                               </m:rPr>
-                              <a:rPr lang="en-US" sz="3730" b="0" i="0">
+                              <a:rPr lang="en-US" sz="3427" b="0" i="0">
                                 <a:solidFill>
                                   <a:srgbClr val="111111"/>
                                 </a:solidFill>
@@ -7503,7 +7650,7 @@
                           <m:rPr>
                             <m:sty m:val="p"/>
                           </m:rPr>
-                          <a:rPr lang="en-US" sz="3730" b="0" i="0">
+                          <a:rPr lang="en-US" sz="3427" b="0" i="0">
                             <a:solidFill>
                               <a:srgbClr val="111111"/>
                             </a:solidFill>
@@ -7517,7 +7664,7 @@
                           <m:rPr>
                             <m:sty m:val="bi"/>
                           </m:rPr>
-                          <a:rPr lang="en-US" sz="3730" b="1" i="1">
+                          <a:rPr lang="en-US" sz="3427" b="1" i="1">
                             <a:solidFill>
                               <a:srgbClr val="111111"/>
                             </a:solidFill>
@@ -7531,7 +7678,7 @@
                           <m:rPr>
                             <m:sty m:val="p"/>
                           </m:rPr>
-                          <a:rPr lang="en-US" sz="3730" b="0" i="0">
+                          <a:rPr lang="en-US" sz="3427" b="0" i="0">
                             <a:solidFill>
                               <a:srgbClr val="111111"/>
                             </a:solidFill>
@@ -7545,7 +7692,7 @@
                           <m:rPr>
                             <m:sty m:val="p"/>
                           </m:rPr>
-                          <a:rPr lang="en-US" sz="3730" b="0" i="0">
+                          <a:rPr lang="en-US" sz="3427" b="0" i="0">
                             <a:solidFill>
                               <a:srgbClr val="111111"/>
                             </a:solidFill>
@@ -7558,7 +7705,7 @@
                         <m:sSub>
                           <m:sSubPr>
                             <m:ctrlPr>
-                              <a:rPr lang="en-US" sz="3730" b="0" i="1">
+                              <a:rPr lang="en-US" sz="3427" b="0" i="1">
                                 <a:solidFill>
                                   <a:srgbClr val="111111"/>
                                 </a:solidFill>
@@ -7574,7 +7721,7 @@
                                 <m:scr m:val="double-struck"/>
                                 <m:sty m:val="p"/>
                               </m:rPr>
-                              <a:rPr lang="en-US" sz="3730" b="0" i="0">
+                              <a:rPr lang="en-US" sz="3427" b="0" i="0">
                                 <a:solidFill>
                                   <a:srgbClr val="111111"/>
                                 </a:solidFill>
@@ -7589,7 +7736,7 @@
                             <m:sSub>
                               <m:sSubPr>
                                 <m:ctrlPr>
-                                  <a:rPr lang="en-US" sz="3730" b="0" i="1">
+                                  <a:rPr lang="en-US" sz="3427" b="0" i="1">
                                     <a:solidFill>
                                       <a:srgbClr val="111111"/>
                                     </a:solidFill>
@@ -7605,7 +7752,7 @@
                                     <m:scr m:val="script"/>
                                     <m:sty m:val="p"/>
                                   </m:rPr>
-                                  <a:rPr lang="en-US" sz="3730" b="0" i="0">
+                                  <a:rPr lang="en-US" sz="3427" b="0" i="0">
                                     <a:solidFill>
                                       <a:srgbClr val="111111"/>
                                     </a:solidFill>
@@ -7621,7 +7768,7 @@
                                   <m:rPr>
                                     <m:sty m:val="p"/>
                                   </m:rPr>
-                                  <a:rPr lang="en-US" sz="3730" b="0" i="0">
+                                  <a:rPr lang="en-US" sz="3427" b="0" i="0">
                                     <a:solidFill>
                                       <a:srgbClr val="111111"/>
                                     </a:solidFill>
@@ -7642,7 +7789,7 @@
                             <m:endChr m:val="]"/>
                             <m:grow/>
                             <m:ctrlPr>
-                              <a:rPr lang="en-US" sz="3730" b="0" i="1">
+                              <a:rPr lang="en-US" sz="3427" b="0" i="1">
                                 <a:solidFill>
                                   <a:srgbClr val="111111"/>
                                 </a:solidFill>
@@ -7656,7 +7803,7 @@
                             <m:sSub>
                               <m:sSubPr>
                                 <m:ctrlPr>
-                                  <a:rPr lang="en-US" sz="3730" b="0" i="1">
+                                  <a:rPr lang="en-US" sz="3427" b="0" i="1">
                                     <a:solidFill>
                                       <a:srgbClr val="111111"/>
                                     </a:solidFill>
@@ -7671,7 +7818,7 @@
                                   <m:rPr>
                                     <m:sty m:val="p"/>
                                   </m:rPr>
-                                  <a:rPr lang="en-US" sz="3730" b="0" i="0">
+                                  <a:rPr lang="en-US" sz="3427" b="0" i="0">
                                     <a:solidFill>
                                       <a:srgbClr val="111111"/>
                                     </a:solidFill>
@@ -7686,7 +7833,7 @@
                                 <m:sSub>
                                   <m:sSubPr>
                                     <m:ctrlPr>
-                                      <a:rPr lang="en-US" sz="3730" b="0" i="1">
+                                      <a:rPr lang="en-US" sz="3427" b="0" i="1">
                                         <a:solidFill>
                                           <a:srgbClr val="111111"/>
                                         </a:solidFill>
@@ -7702,7 +7849,7 @@
                                         <m:scr m:val="script"/>
                                         <m:sty m:val="p"/>
                                       </m:rPr>
-                                      <a:rPr lang="en-US" sz="3730" b="0" i="0">
+                                      <a:rPr lang="en-US" sz="3427" b="0" i="0">
                                         <a:solidFill>
                                           <a:srgbClr val="111111"/>
                                         </a:solidFill>
@@ -7718,7 +7865,7 @@
                                       <m:rPr>
                                         <m:sty m:val="p"/>
                                       </m:rPr>
-                                      <a:rPr lang="en-US" sz="3730" b="0" i="0">
+                                      <a:rPr lang="en-US" sz="3427" b="0" i="0">
                                         <a:solidFill>
                                           <a:srgbClr val="111111"/>
                                         </a:solidFill>
@@ -7736,7 +7883,7 @@
                               <m:rPr>
                                 <m:sty m:val="p"/>
                               </m:rPr>
-                              <a:rPr lang="en-US" sz="3730" b="0" i="0">
+                              <a:rPr lang="en-US" sz="3427" b="0" i="0">
                                 <a:solidFill>
                                   <a:srgbClr val="111111"/>
                                 </a:solidFill>
@@ -7750,7 +7897,7 @@
                               <m:rPr>
                                 <m:sty m:val="b"/>
                               </m:rPr>
-                              <a:rPr lang="en-US" sz="3730" b="1" i="0">
+                              <a:rPr lang="en-US" sz="3427" b="1" i="0">
                                 <a:solidFill>
                                   <a:srgbClr val="111111"/>
                                 </a:solidFill>
@@ -7764,7 +7911,7 @@
                               <m:rPr>
                                 <m:sty m:val="p"/>
                               </m:rPr>
-                              <a:rPr lang="en-US" sz="3730" b="0" i="0">
+                              <a:rPr lang="en-US" sz="3427" b="0" i="0">
                                 <a:solidFill>
                                   <a:srgbClr val="111111"/>
                                 </a:solidFill>
@@ -7778,7 +7925,7 @@
                               <m:rPr>
                                 <m:sty m:val="bi"/>
                               </m:rPr>
-                              <a:rPr lang="en-US" sz="3730" b="1" i="1">
+                              <a:rPr lang="en-US" sz="3427" b="1" i="1">
                                 <a:solidFill>
                                   <a:srgbClr val="111111"/>
                                 </a:solidFill>
@@ -7792,7 +7939,7 @@
                               <m:rPr>
                                 <m:sty m:val="p"/>
                               </m:rPr>
-                              <a:rPr lang="en-US" sz="3730" b="0" i="0">
+                              <a:rPr lang="en-US" sz="3427" b="0" i="0">
                                 <a:solidFill>
                                   <a:srgbClr val="111111"/>
                                 </a:solidFill>
@@ -7808,7 +7955,7 @@
                           <m:rPr>
                             <m:sty m:val="p"/>
                           </m:rPr>
-                          <a:rPr lang="en-US" sz="3730" b="0" i="0">
+                          <a:rPr lang="en-US" sz="3427" b="0" i="0">
                             <a:solidFill>
                               <a:srgbClr val="111111"/>
                             </a:solidFill>
@@ -7821,7 +7968,7 @@
                         <m:sSub>
                           <m:sSubPr>
                             <m:ctrlPr>
-                              <a:rPr lang="en-US" sz="3730" b="0" i="1">
+                              <a:rPr lang="en-US" sz="3427" b="0" i="1">
                                 <a:solidFill>
                                   <a:srgbClr val="111111"/>
                                 </a:solidFill>
@@ -7837,7 +7984,7 @@
                                 <m:scr m:val="double-struck"/>
                                 <m:sty m:val="p"/>
                               </m:rPr>
-                              <a:rPr lang="en-US" sz="3730" b="0" i="0">
+                              <a:rPr lang="en-US" sz="3427" b="0" i="0">
                                 <a:solidFill>
                                   <a:srgbClr val="111111"/>
                                 </a:solidFill>
@@ -7852,7 +7999,7 @@
                             <m:sSub>
                               <m:sSubPr>
                                 <m:ctrlPr>
-                                  <a:rPr lang="en-US" sz="3730" b="0" i="1">
+                                  <a:rPr lang="en-US" sz="3427" b="0" i="1">
                                     <a:solidFill>
                                       <a:srgbClr val="111111"/>
                                     </a:solidFill>
@@ -7868,7 +8015,7 @@
                                     <m:scr m:val="script"/>
                                     <m:sty m:val="p"/>
                                   </m:rPr>
-                                  <a:rPr lang="en-US" sz="3730" b="0" i="0">
+                                  <a:rPr lang="en-US" sz="3427" b="0" i="0">
                                     <a:solidFill>
                                       <a:srgbClr val="111111"/>
                                     </a:solidFill>
@@ -7884,7 +8031,7 @@
                                   <m:rPr>
                                     <m:sty m:val="p"/>
                                   </m:rPr>
-                                  <a:rPr lang="en-US" sz="3730" b="0" i="0">
+                                  <a:rPr lang="en-US" sz="3427" b="0" i="0">
                                     <a:solidFill>
                                       <a:srgbClr val="111111"/>
                                     </a:solidFill>
@@ -7905,7 +8052,7 @@
                             <m:endChr m:val="]"/>
                             <m:grow/>
                             <m:ctrlPr>
-                              <a:rPr lang="en-US" sz="3730" b="0" i="1">
+                              <a:rPr lang="en-US" sz="3427" b="0" i="1">
                                 <a:solidFill>
                                   <a:srgbClr val="111111"/>
                                 </a:solidFill>
@@ -7919,7 +8066,7 @@
                             <m:sSub>
                               <m:sSubPr>
                                 <m:ctrlPr>
-                                  <a:rPr lang="en-US" sz="3730" b="0" i="1">
+                                  <a:rPr lang="en-US" sz="3427" b="0" i="1">
                                     <a:solidFill>
                                       <a:srgbClr val="111111"/>
                                     </a:solidFill>
@@ -7934,7 +8081,7 @@
                                   <m:rPr>
                                     <m:sty m:val="p"/>
                                   </m:rPr>
-                                  <a:rPr lang="en-US" sz="3730" b="0" i="0">
+                                  <a:rPr lang="en-US" sz="3427" b="0" i="0">
                                     <a:solidFill>
                                       <a:srgbClr val="111111"/>
                                     </a:solidFill>
@@ -7949,7 +8096,7 @@
                                 <m:sSub>
                                   <m:sSubPr>
                                     <m:ctrlPr>
-                                      <a:rPr lang="en-US" sz="3730" b="0" i="1">
+                                      <a:rPr lang="en-US" sz="3427" b="0" i="1">
                                         <a:solidFill>
                                           <a:srgbClr val="111111"/>
                                         </a:solidFill>
@@ -7965,7 +8112,7 @@
                                         <m:scr m:val="script"/>
                                         <m:sty m:val="p"/>
                                       </m:rPr>
-                                      <a:rPr lang="en-US" sz="3730" b="0" i="0">
+                                      <a:rPr lang="en-US" sz="3427" b="0" i="0">
                                         <a:solidFill>
                                           <a:srgbClr val="111111"/>
                                         </a:solidFill>
@@ -7981,7 +8128,7 @@
                                       <m:rPr>
                                         <m:sty m:val="p"/>
                                       </m:rPr>
-                                      <a:rPr lang="en-US" sz="3730" b="0" i="0">
+                                      <a:rPr lang="en-US" sz="3427" b="0" i="0">
                                         <a:solidFill>
                                           <a:srgbClr val="111111"/>
                                         </a:solidFill>
@@ -7999,7 +8146,7 @@
                               <m:rPr>
                                 <m:sty m:val="p"/>
                               </m:rPr>
-                              <a:rPr lang="en-US" sz="3730" b="0" i="0">
+                              <a:rPr lang="en-US" sz="3427" b="0" i="0">
                                 <a:solidFill>
                                   <a:srgbClr val="111111"/>
                                 </a:solidFill>
@@ -8013,7 +8160,7 @@
                               <m:rPr>
                                 <m:sty m:val="b"/>
                               </m:rPr>
-                              <a:rPr lang="en-US" sz="3730" b="1" i="0">
+                              <a:rPr lang="en-US" sz="3427" b="1" i="0">
                                 <a:solidFill>
                                   <a:srgbClr val="111111"/>
                                 </a:solidFill>
@@ -8027,7 +8174,7 @@
                               <m:rPr>
                                 <m:sty m:val="p"/>
                               </m:rPr>
-                              <a:rPr lang="en-US" sz="3730" b="0" i="0">
+                              <a:rPr lang="en-US" sz="3427" b="0" i="0">
                                 <a:solidFill>
                                   <a:srgbClr val="111111"/>
                                 </a:solidFill>
@@ -8041,7 +8188,7 @@
                               <m:rPr>
                                 <m:sty m:val="bi"/>
                               </m:rPr>
-                              <a:rPr lang="en-US" sz="3730" b="1" i="1">
+                              <a:rPr lang="en-US" sz="3427" b="1" i="1">
                                 <a:solidFill>
                                   <a:srgbClr val="111111"/>
                                 </a:solidFill>
@@ -8055,7 +8202,7 @@
                               <m:rPr>
                                 <m:sty m:val="p"/>
                               </m:rPr>
-                              <a:rPr lang="en-US" sz="3730" b="0" i="0">
+                              <a:rPr lang="en-US" sz="3427" b="0" i="0">
                                 <a:solidFill>
                                   <a:srgbClr val="111111"/>
                                 </a:solidFill>
@@ -8070,7 +8217,7 @@
                       </m:oMath>
                     </m:oMathPara>
                   </a14:m>
-                  <a:endParaRPr lang="en-US" sz="3730" b="0" i="0" kern="100" dirty="0">
+                  <a:endParaRPr lang="en-US" sz="3427" b="0" i="0" kern="100" dirty="0">
                     <a:solidFill>
                       <a:srgbClr val="111111"/>
                     </a:solidFill>
@@ -8101,7 +8248,7 @@
                         <m:sSub>
                           <m:sSubPr>
                             <m:ctrlPr>
-                              <a:rPr lang="en-US" sz="3730" b="0" i="1">
+                              <a:rPr lang="en-US" sz="3427" b="0" i="1">
                                 <a:solidFill>
                                   <a:srgbClr val="111111"/>
                                 </a:solidFill>
@@ -8116,7 +8263,7 @@
                               <m:rPr>
                                 <m:sty m:val="p"/>
                               </m:rPr>
-                              <a:rPr lang="en-US" sz="3730" b="0" i="0">
+                              <a:rPr lang="en-US" sz="3427" b="0" i="0">
                                 <a:solidFill>
                                   <a:srgbClr val="111111"/>
                                 </a:solidFill>
@@ -8131,7 +8278,7 @@
                             <m:sSub>
                               <m:sSubPr>
                                 <m:ctrlPr>
-                                  <a:rPr lang="en-US" sz="3730" b="0" i="1">
+                                  <a:rPr lang="en-US" sz="3427" b="0" i="1">
                                     <a:solidFill>
                                       <a:srgbClr val="111111"/>
                                     </a:solidFill>
@@ -8147,7 +8294,7 @@
                                     <m:scr m:val="script"/>
                                     <m:sty m:val="p"/>
                                   </m:rPr>
-                                  <a:rPr lang="en-US" sz="3730" b="0" i="0">
+                                  <a:rPr lang="en-US" sz="3427" b="0" i="0">
                                     <a:solidFill>
                                       <a:srgbClr val="111111"/>
                                     </a:solidFill>
@@ -8163,7 +8310,7 @@
                                   <m:rPr>
                                     <m:sty m:val="p"/>
                                   </m:rPr>
-                                  <a:rPr lang="en-US" sz="3730" b="0" i="0">
+                                  <a:rPr lang="en-US" sz="3427" b="0" i="0">
                                     <a:solidFill>
                                       <a:srgbClr val="111111"/>
                                     </a:solidFill>
@@ -8181,7 +8328,7 @@
                           <m:rPr>
                             <m:sty m:val="p"/>
                           </m:rPr>
-                          <a:rPr lang="en-US" sz="3730" b="0" i="0">
+                          <a:rPr lang="en-US" sz="3427" b="0" i="0">
                             <a:solidFill>
                               <a:srgbClr val="111111"/>
                             </a:solidFill>
@@ -8195,7 +8342,7 @@
                           <m:fPr>
                             <m:type m:val="bar"/>
                             <m:ctrlPr>
-                              <a:rPr lang="en-US" sz="3730" b="0" i="1">
+                              <a:rPr lang="en-US" sz="3427" b="0" i="1">
                                 <a:solidFill>
                                   <a:srgbClr val="111111"/>
                                 </a:solidFill>
@@ -8207,7 +8354,7 @@
                           </m:fPr>
                           <m:num>
                             <m:r>
-                              <a:rPr lang="en-US" sz="3730" b="0" i="1">
+                              <a:rPr lang="en-US" sz="3427" b="0" i="1">
                                 <a:solidFill>
                                   <a:srgbClr val="111111"/>
                                 </a:solidFill>
@@ -8223,7 +8370,7 @@
                               <m:rPr>
                                 <m:sty m:val="p"/>
                               </m:rPr>
-                              <a:rPr lang="en-US" sz="3730" b="0" i="0">
+                              <a:rPr lang="en-US" sz="3427" b="0" i="0">
                                 <a:solidFill>
                                   <a:srgbClr val="111111"/>
                                 </a:solidFill>
@@ -8238,7 +8385,7 @@
                                 <m:scr m:val="script"/>
                                 <m:sty m:val="p"/>
                               </m:rPr>
-                              <a:rPr lang="en-US" sz="3730" b="0" i="0">
+                              <a:rPr lang="en-US" sz="3427" b="0" i="0">
                                 <a:solidFill>
                                   <a:srgbClr val="111111"/>
                                 </a:solidFill>
@@ -8252,7 +8399,7 @@
                               <m:rPr>
                                 <m:sty m:val="p"/>
                               </m:rPr>
-                              <a:rPr lang="en-US" sz="3730" b="0" i="0">
+                              <a:rPr lang="en-US" sz="3427" b="0" i="0">
                                 <a:solidFill>
                                   <a:srgbClr val="111111"/>
                                 </a:solidFill>
@@ -8271,7 +8418,7 @@
                             <m:subHide m:val="off"/>
                             <m:supHide m:val="on"/>
                             <m:ctrlPr>
-                              <a:rPr lang="en-US" sz="3730" b="0" i="1">
+                              <a:rPr lang="en-US" sz="3427" b="0" i="1">
                                 <a:solidFill>
                                   <a:srgbClr val="111111"/>
                                 </a:solidFill>
@@ -8283,7 +8430,7 @@
                           </m:naryPr>
                           <m:sub>
                             <m:r>
-                              <a:rPr lang="en-US" sz="3730" b="0" i="1">
+                              <a:rPr lang="en-US" sz="3427" b="0" i="1">
                                 <a:solidFill>
                                   <a:srgbClr val="111111"/>
                                 </a:solidFill>
@@ -8297,7 +8444,7 @@
                               <m:rPr>
                                 <m:sty m:val="p"/>
                               </m:rPr>
-                              <a:rPr lang="en-US" sz="3730" b="0" i="0">
+                              <a:rPr lang="en-US" sz="3427" b="0" i="0">
                                 <a:solidFill>
                                   <a:srgbClr val="111111"/>
                                 </a:solidFill>
@@ -8312,7 +8459,7 @@
                                 <m:scr m:val="script"/>
                                 <m:sty m:val="p"/>
                               </m:rPr>
-                              <a:rPr lang="en-US" sz="3730" b="0" i="0">
+                              <a:rPr lang="en-US" sz="3427" b="0" i="0">
                                 <a:solidFill>
                                   <a:srgbClr val="111111"/>
                                 </a:solidFill>
@@ -8325,7 +8472,7 @@
                           </m:sub>
                           <m:sup>
                             <m:r>
-                              <a:rPr lang="en-US" sz="3730" b="0" i="1">
+                              <a:rPr lang="en-US" sz="3427" b="0" i="1">
                                 <a:solidFill>
                                   <a:srgbClr val="111111"/>
                                 </a:solidFill>
@@ -8340,7 +8487,7 @@
                             <m:sSup>
                               <m:sSupPr>
                                 <m:ctrlPr>
-                                  <a:rPr lang="en-US" sz="3730" b="0" i="1">
+                                  <a:rPr lang="en-US" sz="3427" b="0" i="1">
                                     <a:solidFill>
                                       <a:srgbClr val="111111"/>
                                     </a:solidFill>
@@ -8358,7 +8505,7 @@
                                     <m:endChr m:val=")"/>
                                     <m:grow/>
                                     <m:ctrlPr>
-                                      <a:rPr lang="en-US" sz="3730" b="0" i="1">
+                                      <a:rPr lang="en-US" sz="3427" b="0" i="1">
                                         <a:solidFill>
                                           <a:srgbClr val="111111"/>
                                         </a:solidFill>
@@ -8373,7 +8520,7 @@
                                       <m:rPr>
                                         <m:sty m:val="p"/>
                                       </m:rPr>
-                                      <a:rPr lang="en-US" sz="3730" b="0" i="0">
+                                      <a:rPr lang="en-US" sz="3427" b="0" i="0">
                                         <a:solidFill>
                                           <a:srgbClr val="111111"/>
                                         </a:solidFill>
@@ -8386,7 +8533,7 @@
                                     <m:sSub>
                                       <m:sSubPr>
                                         <m:ctrlPr>
-                                          <a:rPr lang="en-US" sz="3730" b="0" i="1">
+                                          <a:rPr lang="en-US" sz="3427" b="0" i="1">
                                             <a:solidFill>
                                               <a:srgbClr val="111111"/>
                                             </a:solidFill>
@@ -8401,7 +8548,7 @@
                                           <m:rPr>
                                             <m:sty m:val="b"/>
                                           </m:rPr>
-                                          <a:rPr lang="en-US" sz="3730" b="1" i="0">
+                                          <a:rPr lang="en-US" sz="3427" b="1" i="0">
                                             <a:solidFill>
                                               <a:srgbClr val="111111"/>
                                             </a:solidFill>
@@ -8414,7 +8561,7 @@
                                       </m:e>
                                       <m:sub>
                                         <m:r>
-                                          <a:rPr lang="en-US" sz="3730" b="0" i="1">
+                                          <a:rPr lang="en-US" sz="3427" b="0" i="1">
                                             <a:solidFill>
                                               <a:srgbClr val="111111"/>
                                             </a:solidFill>
@@ -8430,7 +8577,7 @@
                                       <m:rPr>
                                         <m:sty m:val="p"/>
                                       </m:rPr>
-                                      <a:rPr lang="en-US" sz="3730" b="0" i="0">
+                                      <a:rPr lang="en-US" sz="3427" b="0" i="0">
                                         <a:solidFill>
                                           <a:srgbClr val="111111"/>
                                         </a:solidFill>
@@ -8444,7 +8591,7 @@
                                       <m:rPr>
                                         <m:sty m:val="b"/>
                                       </m:rPr>
-                                      <a:rPr lang="en-US" sz="3730" b="1" i="0">
+                                      <a:rPr lang="en-US" sz="3427" b="1" i="0">
                                         <a:solidFill>
                                           <a:srgbClr val="111111"/>
                                         </a:solidFill>
@@ -8458,7 +8605,7 @@
                                       <m:rPr>
                                         <m:sty m:val="p"/>
                                       </m:rPr>
-                                      <a:rPr lang="en-US" sz="3730" b="0" i="0">
+                                      <a:rPr lang="en-US" sz="3427" b="0" i="0">
                                         <a:solidFill>
                                           <a:srgbClr val="111111"/>
                                         </a:solidFill>
@@ -8472,7 +8619,7 @@
                                       <m:rPr>
                                         <m:sty m:val="bi"/>
                                       </m:rPr>
-                                      <a:rPr lang="en-US" sz="3730" b="1" i="1">
+                                      <a:rPr lang="en-US" sz="3427" b="1" i="1">
                                         <a:solidFill>
                                           <a:srgbClr val="111111"/>
                                         </a:solidFill>
@@ -8486,7 +8633,7 @@
                                       <m:rPr>
                                         <m:sty m:val="p"/>
                                       </m:rPr>
-                                      <a:rPr lang="en-US" sz="3730" b="0" i="0">
+                                      <a:rPr lang="en-US" sz="3427" b="0" i="0">
                                         <a:solidFill>
                                           <a:srgbClr val="111111"/>
                                         </a:solidFill>
@@ -8499,7 +8646,7 @@
                                     <m:sSub>
                                       <m:sSubPr>
                                         <m:ctrlPr>
-                                          <a:rPr lang="en-US" sz="3730" b="0" i="1">
+                                          <a:rPr lang="en-US" sz="3427" b="0" i="1">
                                             <a:solidFill>
                                               <a:srgbClr val="111111"/>
                                             </a:solidFill>
@@ -8514,7 +8661,7 @@
                                           <m:rPr>
                                             <m:sty m:val="p"/>
                                           </m:rPr>
-                                          <a:rPr lang="en-US" sz="3730" b="0" i="0">
+                                          <a:rPr lang="en-US" sz="3427" b="0" i="0">
                                             <a:solidFill>
                                               <a:srgbClr val="111111"/>
                                             </a:solidFill>
@@ -8527,7 +8674,7 @@
                                       </m:e>
                                       <m:sub>
                                         <m:r>
-                                          <a:rPr lang="en-US" sz="3730" b="0" i="1">
+                                          <a:rPr lang="en-US" sz="3427" b="0" i="1">
                                             <a:solidFill>
                                               <a:srgbClr val="111111"/>
                                             </a:solidFill>
@@ -8543,7 +8690,7 @@
                                       <m:rPr>
                                         <m:sty m:val="p"/>
                                       </m:rPr>
-                                      <a:rPr lang="en-US" sz="3730" b="0" i="0">
+                                      <a:rPr lang="en-US" sz="3427" b="0" i="0">
                                         <a:solidFill>
                                           <a:srgbClr val="111111"/>
                                         </a:solidFill>
@@ -8557,7 +8704,7 @@
                                       <m:rPr>
                                         <m:sty m:val="p"/>
                                       </m:rPr>
-                                      <a:rPr lang="en-US" sz="3730" b="0" i="0">
+                                      <a:rPr lang="en-US" sz="3427" b="0" i="0">
                                         <a:solidFill>
                                           <a:srgbClr val="111111"/>
                                         </a:solidFill>
@@ -8570,7 +8717,7 @@
                                     <m:sSub>
                                       <m:sSubPr>
                                         <m:ctrlPr>
-                                          <a:rPr lang="en-US" sz="3730" b="0" i="1">
+                                          <a:rPr lang="en-US" sz="3427" b="0" i="1">
                                             <a:solidFill>
                                               <a:srgbClr val="111111"/>
                                             </a:solidFill>
@@ -8585,7 +8732,7 @@
                                           <m:rPr>
                                             <m:sty m:val="b"/>
                                           </m:rPr>
-                                          <a:rPr lang="en-US" sz="3730" b="1" i="0">
+                                          <a:rPr lang="en-US" sz="3427" b="1" i="0">
                                             <a:solidFill>
                                               <a:srgbClr val="111111"/>
                                             </a:solidFill>
@@ -8598,7 +8745,7 @@
                                       </m:e>
                                       <m:sub>
                                         <m:r>
-                                          <a:rPr lang="en-US" sz="3730" b="0" i="1">
+                                          <a:rPr lang="en-US" sz="3427" b="0" i="1">
                                             <a:solidFill>
                                               <a:srgbClr val="111111"/>
                                             </a:solidFill>
@@ -8614,7 +8761,7 @@
                                       <m:rPr>
                                         <m:sty m:val="p"/>
                                       </m:rPr>
-                                      <a:rPr lang="en-US" sz="3730" b="0" i="0">
+                                      <a:rPr lang="en-US" sz="3427" b="0" i="0">
                                         <a:solidFill>
                                           <a:srgbClr val="111111"/>
                                         </a:solidFill>
@@ -8628,7 +8775,7 @@
                                       <m:rPr>
                                         <m:sty m:val="b"/>
                                       </m:rPr>
-                                      <a:rPr lang="en-US" sz="3730" b="1" i="0">
+                                      <a:rPr lang="en-US" sz="3427" b="1" i="0">
                                         <a:solidFill>
                                           <a:srgbClr val="111111"/>
                                         </a:solidFill>
@@ -8642,7 +8789,7 @@
                                       <m:rPr>
                                         <m:sty m:val="p"/>
                                       </m:rPr>
-                                      <a:rPr lang="en-US" sz="3730" b="0" i="0">
+                                      <a:rPr lang="en-US" sz="3427" b="0" i="0">
                                         <a:solidFill>
                                           <a:srgbClr val="111111"/>
                                         </a:solidFill>
@@ -8655,7 +8802,7 @@
                                     <m:sSub>
                                       <m:sSubPr>
                                         <m:ctrlPr>
-                                          <a:rPr lang="en-US" sz="3730" b="0" i="1">
+                                          <a:rPr lang="en-US" sz="3427" b="0" i="1">
                                             <a:solidFill>
                                               <a:srgbClr val="111111"/>
                                             </a:solidFill>
@@ -8670,7 +8817,7 @@
                                           <m:rPr>
                                             <m:sty m:val="bi"/>
                                           </m:rPr>
-                                          <a:rPr lang="en-US" sz="3730" b="1" i="1">
+                                          <a:rPr lang="en-US" sz="3427" b="1" i="1">
                                             <a:solidFill>
                                               <a:srgbClr val="111111"/>
                                             </a:solidFill>
@@ -8686,7 +8833,7 @@
                                           <m:rPr>
                                             <m:sty m:val="p"/>
                                           </m:rPr>
-                                          <a:rPr lang="en-US" sz="3730" b="0" i="0">
+                                          <a:rPr lang="en-US" sz="3427" b="0" i="0">
                                             <a:solidFill>
                                               <a:srgbClr val="111111"/>
                                             </a:solidFill>
@@ -8702,7 +8849,7 @@
                                       <m:rPr>
                                         <m:sty m:val="p"/>
                                       </m:rPr>
-                                      <a:rPr lang="en-US" sz="3730" b="0" i="0">
+                                      <a:rPr lang="en-US" sz="3427" b="0" i="0">
                                         <a:solidFill>
                                           <a:srgbClr val="111111"/>
                                         </a:solidFill>
@@ -8715,7 +8862,7 @@
                                     <m:sSub>
                                       <m:sSubPr>
                                         <m:ctrlPr>
-                                          <a:rPr lang="en-US" sz="3730" b="0" i="1">
+                                          <a:rPr lang="en-US" sz="3427" b="0" i="1">
                                             <a:solidFill>
                                               <a:srgbClr val="111111"/>
                                             </a:solidFill>
@@ -8730,7 +8877,7 @@
                                           <m:rPr>
                                             <m:sty m:val="p"/>
                                           </m:rPr>
-                                          <a:rPr lang="en-US" sz="3730" b="0" i="0">
+                                          <a:rPr lang="en-US" sz="3427" b="0" i="0">
                                             <a:solidFill>
                                               <a:srgbClr val="111111"/>
                                             </a:solidFill>
@@ -8743,7 +8890,7 @@
                                       </m:e>
                                       <m:sub>
                                         <m:r>
-                                          <a:rPr lang="en-US" sz="3730" b="0" i="1">
+                                          <a:rPr lang="en-US" sz="3427" b="0" i="1">
                                             <a:solidFill>
                                               <a:srgbClr val="111111"/>
                                             </a:solidFill>
@@ -8760,7 +8907,7 @@
                               </m:e>
                               <m:sup>
                                 <m:r>
-                                  <a:rPr lang="en-US" sz="3730" b="0" i="1">
+                                  <a:rPr lang="en-US" sz="3427" b="0" i="1">
                                     <a:solidFill>
                                       <a:srgbClr val="111111"/>
                                     </a:solidFill>
@@ -8777,7 +8924,7 @@
                       </m:oMath>
                     </m:oMathPara>
                   </a14:m>
-                  <a:endParaRPr lang="en-US" sz="3730" b="0" i="0" kern="100" dirty="0">
+                  <a:endParaRPr lang="en-US" sz="3427" b="0" i="0" kern="100" dirty="0">
                     <a:solidFill>
                       <a:srgbClr val="111111"/>
                     </a:solidFill>
@@ -8902,7 +9049,7 @@
                         <m:sSub>
                           <m:sSubPr>
                             <m:ctrlPr>
-                              <a:rPr lang="en-US" sz="3730" b="0" i="1">
+                              <a:rPr lang="en-US" sz="3427" b="0" i="1">
                                 <a:solidFill>
                                   <a:srgbClr val="111111"/>
                                 </a:solidFill>
@@ -8917,7 +9064,7 @@
                               <m:rPr>
                                 <m:sty m:val="p"/>
                               </m:rPr>
-                              <a:rPr lang="en-US" sz="3730" b="0" i="0">
+                              <a:rPr lang="en-US" sz="3427" b="0" i="0">
                                 <a:solidFill>
                                   <a:srgbClr val="111111"/>
                                 </a:solidFill>
@@ -8932,7 +9079,7 @@
                             <m:sSub>
                               <m:sSubPr>
                                 <m:ctrlPr>
-                                  <a:rPr lang="en-US" sz="3730" b="0" i="1">
+                                  <a:rPr lang="en-US" sz="3427" b="0" i="1">
                                     <a:solidFill>
                                       <a:srgbClr val="111111"/>
                                     </a:solidFill>
@@ -8948,7 +9095,7 @@
                                     <m:scr m:val="script"/>
                                     <m:sty m:val="p"/>
                                   </m:rPr>
-                                  <a:rPr lang="en-US" sz="3730" b="0" i="0">
+                                  <a:rPr lang="en-US" sz="3427" b="0" i="0">
                                     <a:solidFill>
                                       <a:srgbClr val="111111"/>
                                     </a:solidFill>
@@ -8964,7 +9111,7 @@
                                   <m:rPr>
                                     <m:sty m:val="p"/>
                                   </m:rPr>
-                                  <a:rPr lang="en-US" sz="3730" b="0" i="0">
+                                  <a:rPr lang="en-US" sz="3427" b="0" i="0">
                                     <a:solidFill>
                                       <a:srgbClr val="111111"/>
                                     </a:solidFill>
@@ -8982,7 +9129,7 @@
                           <m:rPr>
                             <m:sty m:val="p"/>
                           </m:rPr>
-                          <a:rPr lang="en-US" sz="3730" b="0" i="0">
+                          <a:rPr lang="en-US" sz="3427" b="0" i="0">
                             <a:solidFill>
                               <a:srgbClr val="111111"/>
                             </a:solidFill>
@@ -8996,7 +9143,7 @@
                           <m:fPr>
                             <m:type m:val="bar"/>
                             <m:ctrlPr>
-                              <a:rPr lang="en-US" sz="3730" b="0" i="1">
+                              <a:rPr lang="en-US" sz="3427" b="0" i="1">
                                 <a:solidFill>
                                   <a:srgbClr val="111111"/>
                                 </a:solidFill>
@@ -9008,7 +9155,7 @@
                           </m:fPr>
                           <m:num>
                             <m:r>
-                              <a:rPr lang="en-US" sz="3730" b="0" i="1">
+                              <a:rPr lang="en-US" sz="3427" b="0" i="1">
                                 <a:solidFill>
                                   <a:srgbClr val="111111"/>
                                 </a:solidFill>
@@ -9024,7 +9171,7 @@
                               <m:rPr>
                                 <m:sty m:val="p"/>
                               </m:rPr>
-                              <a:rPr lang="en-US" sz="3730" b="0" i="0">
+                              <a:rPr lang="en-US" sz="3427" b="0" i="0">
                                 <a:solidFill>
                                   <a:srgbClr val="111111"/>
                                 </a:solidFill>
@@ -9039,7 +9186,7 @@
                                 <m:scr m:val="script"/>
                                 <m:sty m:val="p"/>
                               </m:rPr>
-                              <a:rPr lang="en-US" sz="3730" b="0" i="0">
+                              <a:rPr lang="en-US" sz="3427" b="0" i="0">
                                 <a:solidFill>
                                   <a:srgbClr val="111111"/>
                                 </a:solidFill>
@@ -9053,7 +9200,7 @@
                               <m:rPr>
                                 <m:sty m:val="p"/>
                               </m:rPr>
-                              <a:rPr lang="en-US" sz="3730" b="0" i="0">
+                              <a:rPr lang="en-US" sz="3427" b="0" i="0">
                                 <a:solidFill>
                                   <a:srgbClr val="111111"/>
                                 </a:solidFill>
@@ -9072,7 +9219,7 @@
                             <m:subHide m:val="off"/>
                             <m:supHide m:val="on"/>
                             <m:ctrlPr>
-                              <a:rPr lang="en-US" sz="3730" b="0" i="1">
+                              <a:rPr lang="en-US" sz="3427" b="0" i="1">
                                 <a:solidFill>
                                   <a:srgbClr val="111111"/>
                                 </a:solidFill>
@@ -9084,7 +9231,7 @@
                           </m:naryPr>
                           <m:sub>
                             <m:r>
-                              <a:rPr lang="en-US" sz="3730" b="0" i="1">
+                              <a:rPr lang="en-US" sz="3427" b="0" i="1">
                                 <a:solidFill>
                                   <a:srgbClr val="111111"/>
                                 </a:solidFill>
@@ -9098,7 +9245,7 @@
                               <m:rPr>
                                 <m:sty m:val="p"/>
                               </m:rPr>
-                              <a:rPr lang="en-US" sz="3730" b="0" i="0">
+                              <a:rPr lang="en-US" sz="3427" b="0" i="0">
                                 <a:solidFill>
                                   <a:srgbClr val="111111"/>
                                 </a:solidFill>
@@ -9113,7 +9260,7 @@
                                 <m:scr m:val="script"/>
                                 <m:sty m:val="p"/>
                               </m:rPr>
-                              <a:rPr lang="en-US" sz="3730" b="0" i="0">
+                              <a:rPr lang="en-US" sz="3427" b="0" i="0">
                                 <a:solidFill>
                                   <a:srgbClr val="111111"/>
                                 </a:solidFill>
@@ -9126,7 +9273,7 @@
                           </m:sub>
                           <m:sup>
                             <m:r>
-                              <a:rPr lang="en-US" sz="3730" b="0" i="1">
+                              <a:rPr lang="en-US" sz="3427" b="0" i="1">
                                 <a:solidFill>
                                   <a:srgbClr val="111111"/>
                                 </a:solidFill>
@@ -9141,7 +9288,7 @@
                             <m:sSup>
                               <m:sSupPr>
                                 <m:ctrlPr>
-                                  <a:rPr lang="en-US" sz="3730" b="0" i="1">
+                                  <a:rPr lang="en-US" sz="3427" b="0" i="1">
                                     <a:solidFill>
                                       <a:srgbClr val="111111"/>
                                     </a:solidFill>
@@ -9159,7 +9306,7 @@
                                     <m:endChr m:val=")"/>
                                     <m:grow/>
                                     <m:ctrlPr>
-                                      <a:rPr lang="en-US" sz="3730" b="0" i="1">
+                                      <a:rPr lang="en-US" sz="3427" b="0" i="1">
                                         <a:solidFill>
                                           <a:srgbClr val="111111"/>
                                         </a:solidFill>
@@ -9174,7 +9321,7 @@
                                       <m:rPr>
                                         <m:sty m:val="p"/>
                                       </m:rPr>
-                                      <a:rPr lang="en-US" sz="3730" b="0" i="0">
+                                      <a:rPr lang="en-US" sz="3427" b="0" i="0">
                                         <a:solidFill>
                                           <a:srgbClr val="111111"/>
                                         </a:solidFill>
@@ -9187,7 +9334,7 @@
                                     <m:sSub>
                                       <m:sSubPr>
                                         <m:ctrlPr>
-                                          <a:rPr lang="en-US" sz="3730" b="0" i="1">
+                                          <a:rPr lang="en-US" sz="3427" b="0" i="1">
                                             <a:solidFill>
                                               <a:srgbClr val="111111"/>
                                             </a:solidFill>
@@ -9202,7 +9349,7 @@
                                           <m:rPr>
                                             <m:sty m:val="b"/>
                                           </m:rPr>
-                                          <a:rPr lang="en-US" sz="3730" b="1" i="0">
+                                          <a:rPr lang="en-US" sz="3427" b="1" i="0">
                                             <a:solidFill>
                                               <a:srgbClr val="111111"/>
                                             </a:solidFill>
@@ -9215,7 +9362,7 @@
                                       </m:e>
                                       <m:sub>
                                         <m:r>
-                                          <a:rPr lang="en-US" sz="3730" b="0" i="1">
+                                          <a:rPr lang="en-US" sz="3427" b="0" i="1">
                                             <a:solidFill>
                                               <a:srgbClr val="111111"/>
                                             </a:solidFill>
@@ -9231,7 +9378,7 @@
                                       <m:rPr>
                                         <m:sty m:val="p"/>
                                       </m:rPr>
-                                      <a:rPr lang="en-US" sz="3730" b="0" i="0">
+                                      <a:rPr lang="en-US" sz="3427" b="0" i="0">
                                         <a:solidFill>
                                           <a:srgbClr val="111111"/>
                                         </a:solidFill>
@@ -9245,7 +9392,7 @@
                                       <m:rPr>
                                         <m:sty m:val="b"/>
                                       </m:rPr>
-                                      <a:rPr lang="en-US" sz="3730" b="1" i="0">
+                                      <a:rPr lang="en-US" sz="3427" b="1" i="0">
                                         <a:solidFill>
                                           <a:srgbClr val="111111"/>
                                         </a:solidFill>
@@ -9259,7 +9406,7 @@
                                       <m:rPr>
                                         <m:sty m:val="p"/>
                                       </m:rPr>
-                                      <a:rPr lang="en-US" sz="3730" b="0" i="0">
+                                      <a:rPr lang="en-US" sz="3427" b="0" i="0">
                                         <a:solidFill>
                                           <a:srgbClr val="111111"/>
                                         </a:solidFill>
@@ -9273,7 +9420,7 @@
                                       <m:rPr>
                                         <m:sty m:val="bi"/>
                                       </m:rPr>
-                                      <a:rPr lang="en-US" sz="3730" b="1" i="1">
+                                      <a:rPr lang="en-US" sz="3427" b="1" i="1">
                                         <a:solidFill>
                                           <a:srgbClr val="111111"/>
                                         </a:solidFill>
@@ -9287,7 +9434,7 @@
                                       <m:rPr>
                                         <m:sty m:val="p"/>
                                       </m:rPr>
-                                      <a:rPr lang="en-US" sz="3730" b="0" i="0">
+                                      <a:rPr lang="en-US" sz="3427" b="0" i="0">
                                         <a:solidFill>
                                           <a:srgbClr val="111111"/>
                                         </a:solidFill>
@@ -9300,7 +9447,7 @@
                                     <m:sSub>
                                       <m:sSubPr>
                                         <m:ctrlPr>
-                                          <a:rPr lang="en-US" sz="3730" b="0" i="1">
+                                          <a:rPr lang="en-US" sz="3427" b="0" i="1">
                                             <a:solidFill>
                                               <a:srgbClr val="111111"/>
                                             </a:solidFill>
@@ -9315,7 +9462,7 @@
                                           <m:rPr>
                                             <m:sty m:val="p"/>
                                           </m:rPr>
-                                          <a:rPr lang="en-US" sz="3730" b="0" i="0">
+                                          <a:rPr lang="en-US" sz="3427" b="0" i="0">
                                             <a:solidFill>
                                               <a:srgbClr val="111111"/>
                                             </a:solidFill>
@@ -9328,7 +9475,7 @@
                                       </m:e>
                                       <m:sub>
                                         <m:r>
-                                          <a:rPr lang="en-US" sz="3730" b="0" i="1">
+                                          <a:rPr lang="en-US" sz="3427" b="0" i="1">
                                             <a:solidFill>
                                               <a:srgbClr val="111111"/>
                                             </a:solidFill>
@@ -9344,7 +9491,7 @@
                                       <m:rPr>
                                         <m:sty m:val="p"/>
                                       </m:rPr>
-                                      <a:rPr lang="en-US" sz="3730" b="0" i="0">
+                                      <a:rPr lang="en-US" sz="3427" b="0" i="0">
                                         <a:solidFill>
                                           <a:srgbClr val="111111"/>
                                         </a:solidFill>
@@ -9358,7 +9505,7 @@
                                       <m:rPr>
                                         <m:sty m:val="p"/>
                                       </m:rPr>
-                                      <a:rPr lang="en-US" sz="3730" b="0" i="0">
+                                      <a:rPr lang="en-US" sz="3427" b="0" i="0">
                                         <a:solidFill>
                                           <a:srgbClr val="111111"/>
                                         </a:solidFill>
@@ -9371,7 +9518,7 @@
                                     <m:sSub>
                                       <m:sSubPr>
                                         <m:ctrlPr>
-                                          <a:rPr lang="en-US" sz="3730" b="0" i="1">
+                                          <a:rPr lang="en-US" sz="3427" b="0" i="1">
                                             <a:solidFill>
                                               <a:srgbClr val="111111"/>
                                             </a:solidFill>
@@ -9386,7 +9533,7 @@
                                           <m:rPr>
                                             <m:sty m:val="b"/>
                                           </m:rPr>
-                                          <a:rPr lang="en-US" sz="3730" b="1" i="0">
+                                          <a:rPr lang="en-US" sz="3427" b="1" i="0">
                                             <a:solidFill>
                                               <a:srgbClr val="111111"/>
                                             </a:solidFill>
@@ -9399,7 +9546,7 @@
                                       </m:e>
                                       <m:sub>
                                         <m:r>
-                                          <a:rPr lang="en-US" sz="3730" b="0" i="1">
+                                          <a:rPr lang="en-US" sz="3427" b="0" i="1">
                                             <a:solidFill>
                                               <a:srgbClr val="111111"/>
                                             </a:solidFill>
@@ -9415,7 +9562,7 @@
                                       <m:rPr>
                                         <m:sty m:val="p"/>
                                       </m:rPr>
-                                      <a:rPr lang="en-US" sz="3730" b="0" i="0">
+                                      <a:rPr lang="en-US" sz="3427" b="0" i="0">
                                         <a:solidFill>
                                           <a:srgbClr val="111111"/>
                                         </a:solidFill>
@@ -9429,7 +9576,7 @@
                                       <m:rPr>
                                         <m:sty m:val="b"/>
                                       </m:rPr>
-                                      <a:rPr lang="en-US" sz="3730" b="1" i="0">
+                                      <a:rPr lang="en-US" sz="3427" b="1" i="0">
                                         <a:solidFill>
                                           <a:srgbClr val="111111"/>
                                         </a:solidFill>
@@ -9443,7 +9590,7 @@
                                       <m:rPr>
                                         <m:sty m:val="p"/>
                                       </m:rPr>
-                                      <a:rPr lang="en-US" sz="3730" b="0" i="0">
+                                      <a:rPr lang="en-US" sz="3427" b="0" i="0">
                                         <a:solidFill>
                                           <a:srgbClr val="111111"/>
                                         </a:solidFill>
@@ -9456,7 +9603,7 @@
                                     <m:sSub>
                                       <m:sSubPr>
                                         <m:ctrlPr>
-                                          <a:rPr lang="en-US" sz="3730" b="0" i="1">
+                                          <a:rPr lang="en-US" sz="3427" b="0" i="1">
                                             <a:solidFill>
                                               <a:srgbClr val="111111"/>
                                             </a:solidFill>
@@ -9471,7 +9618,7 @@
                                           <m:rPr>
                                             <m:sty m:val="bi"/>
                                           </m:rPr>
-                                          <a:rPr lang="en-US" sz="3730" b="1" i="1">
+                                          <a:rPr lang="en-US" sz="3427" b="1" i="1">
                                             <a:solidFill>
                                               <a:srgbClr val="111111"/>
                                             </a:solidFill>
@@ -9487,7 +9634,7 @@
                                           <m:rPr>
                                             <m:sty m:val="p"/>
                                           </m:rPr>
-                                          <a:rPr lang="en-US" sz="3730" b="0" i="0">
+                                          <a:rPr lang="en-US" sz="3427" b="0" i="0">
                                             <a:solidFill>
                                               <a:srgbClr val="111111"/>
                                             </a:solidFill>
@@ -9503,7 +9650,7 @@
                                       <m:rPr>
                                         <m:sty m:val="p"/>
                                       </m:rPr>
-                                      <a:rPr lang="en-US" sz="3730" b="0" i="0">
+                                      <a:rPr lang="en-US" sz="3427" b="0" i="0">
                                         <a:solidFill>
                                           <a:srgbClr val="111111"/>
                                         </a:solidFill>
@@ -9516,7 +9663,7 @@
                                     <m:sSub>
                                       <m:sSubPr>
                                         <m:ctrlPr>
-                                          <a:rPr lang="en-US" sz="3730" b="0" i="1">
+                                          <a:rPr lang="en-US" sz="3427" b="0" i="1">
                                             <a:solidFill>
                                               <a:srgbClr val="111111"/>
                                             </a:solidFill>
@@ -9531,7 +9678,7 @@
                                           <m:rPr>
                                             <m:sty m:val="p"/>
                                           </m:rPr>
-                                          <a:rPr lang="en-US" sz="3730" b="0" i="0">
+                                          <a:rPr lang="en-US" sz="3427" b="0" i="0">
                                             <a:solidFill>
                                               <a:srgbClr val="111111"/>
                                             </a:solidFill>
@@ -9544,7 +9691,7 @@
                                       </m:e>
                                       <m:sub>
                                         <m:r>
-                                          <a:rPr lang="en-US" sz="3730" b="0" i="1">
+                                          <a:rPr lang="en-US" sz="3427" b="0" i="1">
                                             <a:solidFill>
                                               <a:srgbClr val="111111"/>
                                             </a:solidFill>
@@ -9561,7 +9708,7 @@
                               </m:e>
                               <m:sup>
                                 <m:r>
-                                  <a:rPr lang="en-US" sz="3730" b="0" i="1">
+                                  <a:rPr lang="en-US" sz="3427" b="0" i="1">
                                     <a:solidFill>
                                       <a:srgbClr val="111111"/>
                                     </a:solidFill>
@@ -9578,7 +9725,7 @@
                       </m:oMath>
                     </m:oMathPara>
                   </a14:m>
-                  <a:endParaRPr lang="en-US" sz="3730" b="0" i="0" kern="100" dirty="0">
+                  <a:endParaRPr lang="en-US" sz="3427" b="0" i="0" kern="100" dirty="0">
                     <a:solidFill>
                       <a:srgbClr val="111111"/>
                     </a:solidFill>
@@ -9703,7 +9850,7 @@
                         <m:limLow>
                           <m:limLowPr>
                             <m:ctrlPr>
-                              <a:rPr lang="en-US" sz="3730" b="0" i="1">
+                              <a:rPr lang="en-US" sz="3427" b="0" i="1">
                                 <a:solidFill>
                                   <a:srgbClr val="111111"/>
                                 </a:solidFill>
@@ -9718,7 +9865,7 @@
                               <m:rPr>
                                 <m:sty m:val="p"/>
                               </m:rPr>
-                              <a:rPr lang="en-US" sz="3730" b="0" i="0">
+                              <a:rPr lang="en-US" sz="3427" b="0" i="0">
                                 <a:solidFill>
                                   <a:srgbClr val="111111"/>
                                 </a:solidFill>
@@ -9734,7 +9881,7 @@
                               <m:rPr>
                                 <m:sty m:val="bi"/>
                               </m:rPr>
-                              <a:rPr lang="en-US" sz="3730" b="1" i="1">
+                              <a:rPr lang="en-US" sz="3427" b="1" i="1">
                                 <a:solidFill>
                                   <a:srgbClr val="111111"/>
                                 </a:solidFill>
@@ -9747,7 +9894,7 @@
                           </m:lim>
                         </m:limLow>
                         <m:r>
-                          <a:rPr lang="en-US" sz="3730" b="0" i="1">
+                          <a:rPr lang="en-US" sz="3427" b="0" i="1">
                             <a:solidFill>
                               <a:srgbClr val="111111"/>
                             </a:solidFill>
@@ -9760,7 +9907,7 @@
                         <m:sSub>
                           <m:sSubPr>
                             <m:ctrlPr>
-                              <a:rPr lang="en-US" sz="3730" b="0" i="1">
+                              <a:rPr lang="en-US" sz="3427" b="0" i="1">
                                 <a:solidFill>
                                   <a:srgbClr val="111111"/>
                                 </a:solidFill>
@@ -9772,7 +9919,7 @@
                           </m:sSubPr>
                           <m:e>
                             <m:r>
-                              <a:rPr lang="en-US" sz="3730" b="0" i="1">
+                              <a:rPr lang="en-US" sz="3427" b="0" i="1">
                                 <a:solidFill>
                                   <a:srgbClr val="111111"/>
                                 </a:solidFill>
@@ -9788,7 +9935,7 @@
                               <m:rPr>
                                 <m:sty m:val="p"/>
                               </m:rPr>
-                              <a:rPr lang="en-US" sz="3730" b="0" i="0">
+                              <a:rPr lang="en-US" sz="3427" b="0" i="0">
                                 <a:solidFill>
                                   <a:srgbClr val="111111"/>
                                 </a:solidFill>
@@ -9804,7 +9951,7 @@
                           <m:rPr>
                             <m:sty m:val="p"/>
                           </m:rPr>
-                          <a:rPr lang="en-US" sz="3730" b="0" i="0">
+                          <a:rPr lang="en-US" sz="3427" b="0" i="0">
                             <a:solidFill>
                               <a:srgbClr val="111111"/>
                             </a:solidFill>
@@ -9818,7 +9965,7 @@
                           <m:rPr>
                             <m:sty m:val="bi"/>
                           </m:rPr>
-                          <a:rPr lang="en-US" sz="3730" b="1" i="1">
+                          <a:rPr lang="en-US" sz="3427" b="1" i="1">
                             <a:solidFill>
                               <a:srgbClr val="111111"/>
                             </a:solidFill>
@@ -9832,7 +9979,7 @@
                           <m:rPr>
                             <m:sty m:val="p"/>
                           </m:rPr>
-                          <a:rPr lang="en-US" sz="3730" b="0" i="0">
+                          <a:rPr lang="en-US" sz="3427" b="0" i="0">
                             <a:solidFill>
                               <a:srgbClr val="111111"/>
                             </a:solidFill>
@@ -9845,7 +9992,7 @@
                         <m:sSub>
                           <m:sSubPr>
                             <m:ctrlPr>
-                              <a:rPr lang="en-US" sz="3730" b="0" i="1">
+                              <a:rPr lang="en-US" sz="3427" b="0" i="1">
                                 <a:solidFill>
                                   <a:srgbClr val="111111"/>
                                 </a:solidFill>
@@ -9861,7 +10008,7 @@
                                 <m:scr m:val="script"/>
                                 <m:sty m:val="p"/>
                               </m:rPr>
-                              <a:rPr lang="en-US" sz="3730" b="0" i="0">
+                              <a:rPr lang="en-US" sz="3427" b="0" i="0">
                                 <a:solidFill>
                                   <a:srgbClr val="111111"/>
                                 </a:solidFill>
@@ -9877,7 +10024,7 @@
                               <m:rPr>
                                 <m:sty m:val="p"/>
                               </m:rPr>
-                              <a:rPr lang="en-US" sz="3730" b="0" i="0">
+                              <a:rPr lang="en-US" sz="3427" b="0" i="0">
                                 <a:solidFill>
                                   <a:srgbClr val="111111"/>
                                 </a:solidFill>
@@ -9893,7 +10040,7 @@
                           <m:rPr>
                             <m:sty m:val="p"/>
                           </m:rPr>
-                          <a:rPr lang="en-US" sz="3730" b="0" i="0">
+                          <a:rPr lang="en-US" sz="3427" b="0" i="0">
                             <a:solidFill>
                               <a:srgbClr val="111111"/>
                             </a:solidFill>
@@ -9907,7 +10054,7 @@
                           <m:rPr>
                             <m:sty m:val="p"/>
                           </m:rPr>
-                          <a:rPr lang="en-US" sz="3730" b="0" i="0">
+                          <a:rPr lang="en-US" sz="3427" b="0" i="0">
                             <a:solidFill>
                               <a:srgbClr val="111111"/>
                             </a:solidFill>
@@ -9918,7 +10065,7 @@
                           <m:t>+</m:t>
                         </m:r>
                         <m:r>
-                          <a:rPr lang="en-US" sz="3730" b="0" i="1">
+                          <a:rPr lang="en-US" sz="3427" b="0" i="1">
                             <a:solidFill>
                               <a:srgbClr val="111111"/>
                             </a:solidFill>
@@ -9929,7 +10076,7 @@
                           <m:t>γ</m:t>
                         </m:r>
                         <m:r>
-                          <a:rPr lang="en-US" sz="3730" b="0" i="1">
+                          <a:rPr lang="en-US" sz="3427" b="0" i="1">
                             <a:solidFill>
                               <a:srgbClr val="111111"/>
                             </a:solidFill>
@@ -9942,7 +10089,7 @@
                         <m:sSub>
                           <m:sSubPr>
                             <m:ctrlPr>
-                              <a:rPr lang="en-US" sz="3730" b="0" i="1">
+                              <a:rPr lang="en-US" sz="3427" b="0" i="1">
                                 <a:solidFill>
                                   <a:srgbClr val="111111"/>
                                 </a:solidFill>
@@ -9954,7 +10101,7 @@
                           </m:sSubPr>
                           <m:e>
                             <m:r>
-                              <a:rPr lang="en-US" sz="3730" b="0" i="1">
+                              <a:rPr lang="en-US" sz="3427" b="0" i="1">
                                 <a:solidFill>
                                   <a:srgbClr val="111111"/>
                                 </a:solidFill>
@@ -9970,7 +10117,7 @@
                               <m:rPr>
                                 <m:sty m:val="p"/>
                               </m:rPr>
-                              <a:rPr lang="en-US" sz="3730" b="0" i="0">
+                              <a:rPr lang="en-US" sz="3427" b="0" i="0">
                                 <a:solidFill>
                                   <a:srgbClr val="111111"/>
                                 </a:solidFill>
@@ -9986,7 +10133,7 @@
                           <m:rPr>
                             <m:sty m:val="p"/>
                           </m:rPr>
-                          <a:rPr lang="en-US" sz="3730" b="0" i="0">
+                          <a:rPr lang="en-US" sz="3427" b="0" i="0">
                             <a:solidFill>
                               <a:srgbClr val="111111"/>
                             </a:solidFill>
@@ -10000,7 +10147,7 @@
                           <m:rPr>
                             <m:sty m:val="bi"/>
                           </m:rPr>
-                          <a:rPr lang="en-US" sz="3730" b="1" i="1">
+                          <a:rPr lang="en-US" sz="3427" b="1" i="1">
                             <a:solidFill>
                               <a:srgbClr val="111111"/>
                             </a:solidFill>
@@ -10014,7 +10161,7 @@
                           <m:rPr>
                             <m:sty m:val="p"/>
                           </m:rPr>
-                          <a:rPr lang="en-US" sz="3730" b="0" i="0">
+                          <a:rPr lang="en-US" sz="3427" b="0" i="0">
                             <a:solidFill>
                               <a:srgbClr val="111111"/>
                             </a:solidFill>
@@ -10027,7 +10174,7 @@
                         <m:sSub>
                           <m:sSubPr>
                             <m:ctrlPr>
-                              <a:rPr lang="en-US" sz="3730" b="0" i="1">
+                              <a:rPr lang="en-US" sz="3427" b="0" i="1">
                                 <a:solidFill>
                                   <a:srgbClr val="111111"/>
                                 </a:solidFill>
@@ -10043,7 +10190,7 @@
                                 <m:scr m:val="script"/>
                                 <m:sty m:val="p"/>
                               </m:rPr>
-                              <a:rPr lang="en-US" sz="3730" b="0" i="0">
+                              <a:rPr lang="en-US" sz="3427" b="0" i="0">
                                 <a:solidFill>
                                   <a:srgbClr val="111111"/>
                                 </a:solidFill>
@@ -10059,7 +10206,7 @@
                               <m:rPr>
                                 <m:sty m:val="p"/>
                               </m:rPr>
-                              <a:rPr lang="en-US" sz="3730" b="0" i="0">
+                              <a:rPr lang="en-US" sz="3427" b="0" i="0">
                                 <a:solidFill>
                                   <a:srgbClr val="111111"/>
                                 </a:solidFill>
@@ -10075,7 +10222,7 @@
                           <m:rPr>
                             <m:sty m:val="p"/>
                           </m:rPr>
-                          <a:rPr lang="en-US" sz="3730" b="0" i="0">
+                          <a:rPr lang="en-US" sz="3427" b="0" i="0">
                             <a:solidFill>
                               <a:srgbClr val="111111"/>
                             </a:solidFill>
@@ -10088,7 +10235,7 @@
                         <m:sSub>
                           <m:sSubPr>
                             <m:ctrlPr>
-                              <a:rPr lang="en-US" sz="3730" b="0" i="1">
+                              <a:rPr lang="en-US" sz="3427" b="0" i="1">
                                 <a:solidFill>
                                   <a:srgbClr val="111111"/>
                                 </a:solidFill>
@@ -10104,7 +10251,7 @@
                                 <m:scr m:val="script"/>
                                 <m:sty m:val="p"/>
                               </m:rPr>
-                              <a:rPr lang="en-US" sz="3730" b="0" i="0">
+                              <a:rPr lang="en-US" sz="3427" b="0" i="0">
                                 <a:solidFill>
                                   <a:srgbClr val="111111"/>
                                 </a:solidFill>
@@ -10120,7 +10267,7 @@
                               <m:rPr>
                                 <m:sty m:val="p"/>
                               </m:rPr>
-                              <a:rPr lang="en-US" sz="3730" b="0" i="0">
+                              <a:rPr lang="en-US" sz="3427" b="0" i="0">
                                 <a:solidFill>
                                   <a:srgbClr val="111111"/>
                                 </a:solidFill>
@@ -10136,7 +10283,7 @@
                           <m:rPr>
                             <m:sty m:val="p"/>
                           </m:rPr>
-                          <a:rPr lang="en-US" sz="3730" b="0" i="0">
+                          <a:rPr lang="en-US" sz="3427" b="0" i="0">
                             <a:solidFill>
                               <a:srgbClr val="111111"/>
                             </a:solidFill>
@@ -10150,7 +10297,7 @@
                           <m:rPr>
                             <m:sty m:val="p"/>
                           </m:rPr>
-                          <a:rPr lang="en-US" sz="3730" b="0" i="0">
+                          <a:rPr lang="en-US" sz="3427" b="0" i="0">
                             <a:solidFill>
                               <a:srgbClr val="111111"/>
                             </a:solidFill>
@@ -10161,7 +10308,7 @@
                           <m:t>+</m:t>
                         </m:r>
                         <m:r>
-                          <a:rPr lang="en-US" sz="3730" b="0" i="1">
+                          <a:rPr lang="en-US" sz="3427" b="0" i="1">
                             <a:solidFill>
                               <a:srgbClr val="111111"/>
                             </a:solidFill>
@@ -10172,7 +10319,7 @@
                           <m:t>λ</m:t>
                         </m:r>
                         <m:r>
-                          <a:rPr lang="en-US" sz="3730" b="0" i="1">
+                          <a:rPr lang="en-US" sz="3427" b="0" i="1">
                             <a:solidFill>
                               <a:srgbClr val="111111"/>
                             </a:solidFill>
@@ -10185,7 +10332,7 @@
                         <m:sSub>
                           <m:sSubPr>
                             <m:ctrlPr>
-                              <a:rPr lang="en-US" sz="3730" b="0" i="1">
+                              <a:rPr lang="en-US" sz="3427" b="0" i="1">
                                 <a:solidFill>
                                   <a:srgbClr val="111111"/>
                                 </a:solidFill>
@@ -10197,7 +10344,7 @@
                           </m:sSubPr>
                           <m:e>
                             <m:r>
-                              <a:rPr lang="en-US" sz="3730" b="0" i="1">
+                              <a:rPr lang="en-US" sz="3427" b="0" i="1">
                                 <a:solidFill>
                                   <a:srgbClr val="111111"/>
                                 </a:solidFill>
@@ -10213,7 +10360,7 @@
                               <m:rPr>
                                 <m:sty m:val="p"/>
                               </m:rPr>
-                              <a:rPr lang="en-US" sz="3730" b="0" i="0">
+                              <a:rPr lang="en-US" sz="3427" b="0" i="0">
                                 <a:solidFill>
                                   <a:srgbClr val="111111"/>
                                 </a:solidFill>
@@ -10227,7 +10374,7 @@
                               <m:rPr>
                                 <m:sty m:val="p"/>
                               </m:rPr>
-                              <a:rPr lang="en-US" sz="3730" b="0" i="0">
+                              <a:rPr lang="en-US" sz="3427" b="0" i="0">
                                 <a:solidFill>
                                   <a:srgbClr val="111111"/>
                                 </a:solidFill>
@@ -10243,7 +10390,7 @@
                           <m:rPr>
                             <m:sty m:val="p"/>
                           </m:rPr>
-                          <a:rPr lang="en-US" sz="3730" b="0" i="0">
+                          <a:rPr lang="en-US" sz="3427" b="0" i="0">
                             <a:solidFill>
                               <a:srgbClr val="111111"/>
                             </a:solidFill>
@@ -10257,7 +10404,7 @@
                           <m:rPr>
                             <m:sty m:val="bi"/>
                           </m:rPr>
-                          <a:rPr lang="en-US" sz="3730" b="1" i="1">
+                          <a:rPr lang="en-US" sz="3427" b="1" i="1">
                             <a:solidFill>
                               <a:srgbClr val="111111"/>
                             </a:solidFill>
@@ -10271,7 +10418,7 @@
                           <m:rPr>
                             <m:sty m:val="p"/>
                           </m:rPr>
-                          <a:rPr lang="en-US" sz="3730" b="0" i="0">
+                          <a:rPr lang="en-US" sz="3427" b="0" i="0">
                             <a:solidFill>
                               <a:srgbClr val="111111"/>
                             </a:solidFill>
@@ -10284,7 +10431,7 @@
                       </m:oMath>
                     </m:oMathPara>
                   </a14:m>
-                  <a:endParaRPr lang="en-US" sz="3730" b="0" i="0" kern="100" dirty="0">
+                  <a:endParaRPr lang="en-US" sz="3427" b="0" i="0" kern="100" dirty="0">
                     <a:solidFill>
                       <a:srgbClr val="111111"/>
                     </a:solidFill>
@@ -10307,8 +10454,8 @@
               </p:nvSpPr>
               <p:spPr>
                 <a:xfrm>
-                  <a:off x="22146865" y="17406689"/>
-                  <a:ext cx="10799266" cy="4634491"/>
+                  <a:off x="22146865" y="17075051"/>
+                  <a:ext cx="10799266" cy="4374042"/>
                 </a:xfrm>
                 <a:prstGeom prst="rect">
                   <a:avLst/>
@@ -10343,7 +10490,7 @@
           </p:nvSpPr>
           <p:spPr>
             <a:xfrm>
-              <a:off x="22146865" y="22245952"/>
+              <a:off x="22146865" y="21602700"/>
               <a:ext cx="10799266" cy="2401226"/>
             </a:xfrm>
             <a:custGeom>
@@ -10438,7 +10585,7 @@
           </p:nvSpPr>
           <p:spPr>
             <a:xfrm>
-              <a:off x="22146865" y="22245952"/>
+              <a:off x="22146865" y="21602700"/>
               <a:ext cx="111125" cy="2401226"/>
             </a:xfrm>
             <a:prstGeom prst="rect">
@@ -10455,16 +10602,16 @@
       </p:grpSp>
       <p:grpSp>
         <p:nvGrpSpPr>
-          <p:cNvPr id="71" name="Section: Experiment Result Highlights"/>
+          <p:cNvPr id="73" name="Section: Experiment Result Highlights"/>
           <p:cNvGrpSpPr/>
           <p:nvPr/>
         </p:nvGrpSpPr>
         <p:grpSpPr>
           <a:xfrm>
-            <a:off x="33509396" y="4173207"/>
-            <a:ext cx="17236541" cy="13927203"/>
-            <a:chOff x="33509396" y="4173207"/>
-            <a:chExt cx="17236541" cy="13927203"/>
+            <a:off x="33509396" y="4070763"/>
+            <a:ext cx="17236541" cy="13927204"/>
+            <a:chOff x="33509396" y="4070763"/>
+            <a:chExt cx="17236541" cy="13927204"/>
           </a:xfrm>
         </p:grpSpPr>
         <p:sp>
@@ -10475,7 +10622,7 @@
           </p:nvSpPr>
           <p:spPr>
             <a:xfrm>
-              <a:off x="33509396" y="4173207"/>
+              <a:off x="33509396" y="4070763"/>
               <a:ext cx="17236541" cy="801836"/>
             </a:xfrm>
             <a:prstGeom prst="rect">
@@ -10550,7 +10697,7 @@
           </p:blipFill>
           <p:spPr>
             <a:xfrm>
-              <a:off x="33509396" y="5128650"/>
+              <a:off x="33509396" y="5026207"/>
               <a:ext cx="17133739" cy="6784529"/>
             </a:xfrm>
             <a:prstGeom prst="rect">
@@ -10560,13 +10707,13 @@
         </p:pic>
         <p:sp>
           <p:nvSpPr>
-            <p:cNvPr id="53" name="Caption: Table 1. Results on MUSE[2] with NPO[4] / RMU[3]"/>
+            <p:cNvPr id="53" name="Caption: Table 1. Results on MUSE[4] with NPO[5] / RMU[6]"/>
             <p:cNvSpPr txBox="1"/>
             <p:nvPr/>
           </p:nvSpPr>
           <p:spPr>
             <a:xfrm>
-              <a:off x="33509396" y="12130683"/>
+              <a:off x="33509396" y="12028239"/>
               <a:ext cx="17236541" cy="1140536"/>
             </a:xfrm>
             <a:prstGeom prst="rect">
@@ -10623,7 +10770,7 @@
                   <a:ea typeface="EB Garamond"/>
                   <a:cs typeface="EB Garamond"/>
                 </a:rPr>
-                <a:t>[2]</a:t>
+                <a:t>[4]</a:t>
               </a:r>
               <a:r>
                 <a:rPr lang="en-US" sz="3528" b="0" i="0" kern="100" dirty="0">
@@ -10645,7 +10792,7 @@
                   <a:ea typeface="EB Garamond"/>
                   <a:cs typeface="EB Garamond"/>
                 </a:rPr>
-                <a:t>[4]</a:t>
+                <a:t>[5]</a:t>
               </a:r>
               <a:r>
                 <a:rPr lang="en-US" sz="3528" b="0" i="0" kern="100" dirty="0">
@@ -10667,7 +10814,7 @@
                   <a:ea typeface="EB Garamond"/>
                   <a:cs typeface="EB Garamond"/>
                 </a:rPr>
-                <a:t>[3]</a:t>
+                <a:t>[6]</a:t>
               </a:r>
               <a:r>
                 <a:rPr lang="en-US" sz="3528" b="0" i="0" kern="100" dirty="0">
@@ -10703,7 +10850,7 @@
                   <a:ea typeface="EB Garamond"/>
                   <a:cs typeface="EB Garamond"/>
                 </a:rPr>
-                <a:t>; KM / VM: KnowMem / VerbMem.</a:t>
+                <a:t>; KM / VM / PL: KnowMem / VerbMem / PrivLeak; UT: utility (TQA / MQA: TruthfulQA / MathQA).</a:t>
               </a:r>
               <a:endParaRPr lang="en-US" sz="3528" b="0" i="0" kern="100" dirty="0">
                 <a:solidFill>
@@ -10738,7 +10885,7 @@
           </p:blipFill>
           <p:spPr>
             <a:xfrm>
-              <a:off x="33509396" y="13424826"/>
+              <a:off x="33509396" y="13322383"/>
               <a:ext cx="11760613" cy="3873285"/>
             </a:xfrm>
             <a:prstGeom prst="rect">
@@ -10748,13 +10895,13 @@
         </p:pic>
         <p:sp>
           <p:nvSpPr>
-            <p:cNvPr id="55" name="Caption: Table 2. Results on WMDP-Bio[3] (Zephyr-7B, accu"/>
+            <p:cNvPr id="55" name="Caption: Table 2. Results on WMDP-Bio[6] (Zephyr-7B, accu"/>
             <p:cNvSpPr txBox="1"/>
             <p:nvPr/>
           </p:nvSpPr>
           <p:spPr>
             <a:xfrm>
-              <a:off x="33509396" y="17362008"/>
+              <a:off x="33509396" y="17259565"/>
               <a:ext cx="11831177" cy="611303"/>
             </a:xfrm>
             <a:prstGeom prst="rect">
@@ -10811,7 +10958,7 @@
                   <a:ea typeface="EB Garamond"/>
                   <a:cs typeface="EB Garamond"/>
                 </a:rPr>
-                <a:t>[3]</a:t>
+                <a:t>[6]</a:t>
               </a:r>
               <a:r>
                 <a:rPr lang="en-US" sz="3528" b="0" i="0" kern="100" dirty="0">
@@ -10837,13 +10984,13 @@
         </p:sp>
         <p:sp>
           <p:nvSpPr>
-            <p:cNvPr id="56" name="Takeaway: Takeaway. Looks unlearned (VM 0.02 vs. 0.00) yet"/>
+            <p:cNvPr id="56" name="Takeaway: Takeaway. Looks unlearned (Tab. 1: VM 0.02 vs. 0"/>
             <p:cNvSpPr/>
             <p:nvPr/>
           </p:nvSpPr>
           <p:spPr>
             <a:xfrm>
-              <a:off x="45628735" y="13450755"/>
+              <a:off x="45628735" y="13348312"/>
               <a:ext cx="4988471" cy="4649655"/>
             </a:xfrm>
             <a:prstGeom prst="roundRect">
@@ -10896,7 +11043,7 @@
                   <a:ea typeface="EB Garamond"/>
                   <a:cs typeface="EB Garamond"/>
                 </a:rPr>
-                <a:t> Looks unlearned (VM 0.02 vs. 0.00) yet </a:t>
+                <a:t> Looks unlearned (Tab. 1: VM 0.02 vs. 0.00) yet </a:t>
               </a:r>
               <a:r>
                 <a:rPr lang="en-US" sz="4637" b="1" i="0" kern="100" dirty="0">
@@ -10934,15 +11081,15 @@
       </p:grpSp>
       <p:grpSp>
         <p:nvGrpSpPr>
-          <p:cNvPr id="72" name="Section: Table 3"/>
+          <p:cNvPr id="74" name="Section: Table 3"/>
           <p:cNvGrpSpPr/>
           <p:nvPr/>
         </p:nvGrpSpPr>
         <p:grpSpPr>
           <a:xfrm>
-            <a:off x="33509396" y="18437374"/>
+            <a:off x="33509396" y="18303098"/>
             <a:ext cx="17133739" cy="3814366"/>
-            <a:chOff x="33509396" y="18437374"/>
+            <a:chOff x="33509396" y="18303098"/>
             <a:chExt cx="17133739" cy="3814366"/>
           </a:xfrm>
         </p:grpSpPr>
@@ -10968,7 +11115,7 @@
           </p:blipFill>
           <p:spPr>
             <a:xfrm>
-              <a:off x="33509396" y="18437374"/>
+              <a:off x="33509396" y="18303098"/>
               <a:ext cx="13104647" cy="2330847"/>
             </a:xfrm>
             <a:prstGeom prst="rect">
@@ -10986,7 +11133,7 @@
               </p:nvSpPr>
               <p:spPr>
                 <a:xfrm>
-                  <a:off x="33509396" y="20832118"/>
+                  <a:off x="33509396" y="20697842"/>
                   <a:ext cx="13261903" cy="1057308"/>
                 </a:xfrm>
                 <a:prstGeom prst="rect">
@@ -11108,7 +11255,7 @@
               </p:nvSpPr>
               <p:spPr>
                 <a:xfrm>
-                  <a:off x="33509396" y="20832118"/>
+                  <a:off x="33509396" y="20697842"/>
                   <a:ext cx="13104647" cy="1057308"/>
                 </a:xfrm>
                 <a:prstGeom prst="rect">
@@ -11138,13 +11285,13 @@
         </mc:AlternateContent>
         <p:sp>
           <p:nvSpPr>
-            <p:cNvPr id="59" name="Insight: Sink masking: BE‑VM 90.71 → 0.14."/>
+            <p:cNvPr id="59" name="Insight: Sink masking. BE‑VM 90.71 → 0.14."/>
             <p:cNvSpPr/>
             <p:nvPr/>
           </p:nvSpPr>
           <p:spPr>
             <a:xfrm>
-              <a:off x="46946840" y="18437374"/>
+              <a:off x="46946840" y="18303098"/>
               <a:ext cx="3696295" cy="3814366"/>
             </a:xfrm>
             <a:custGeom>
@@ -11207,7 +11354,7 @@
                   <a:ea typeface="EB Garamond"/>
                   <a:cs typeface="EB Garamond"/>
                 </a:rPr>
-                <a:t>Sink masking:</a:t>
+                <a:t>Sink masking.</a:t>
               </a:r>
               <a:r>
                 <a:rPr lang="en-US" sz="4637" b="0" i="0" kern="100" dirty="0">
@@ -11255,13 +11402,13 @@
         </p:sp>
         <p:sp>
           <p:nvSpPr>
-            <p:cNvPr id="60" name="Insight: Sink masking: BE‑VM 90.71 → 0.14. (rule)"/>
+            <p:cNvPr id="60" name="Insight: Sink masking. BE‑VM 90.71 → 0.14. (rule)"/>
             <p:cNvSpPr/>
             <p:nvPr/>
           </p:nvSpPr>
           <p:spPr>
             <a:xfrm>
-              <a:off x="46946840" y="18437374"/>
+              <a:off x="46946840" y="18303098"/>
               <a:ext cx="111125" cy="3814366"/>
             </a:xfrm>
             <a:prstGeom prst="rect">
@@ -11278,28 +11425,28 @@
       </p:grpSp>
       <p:grpSp>
         <p:nvGrpSpPr>
-          <p:cNvPr id="73" name="Section: References &amp; acknowledgment"/>
+          <p:cNvPr id="75" name="Section: Block"/>
           <p:cNvGrpSpPr/>
           <p:nvPr/>
         </p:nvGrpSpPr>
         <p:grpSpPr>
           <a:xfrm>
-            <a:off x="33509396" y="22562774"/>
-            <a:ext cx="17178916" cy="2084288"/>
-            <a:chOff x="33509396" y="22562774"/>
-            <a:chExt cx="17178916" cy="2084288"/>
+            <a:off x="563265" y="24157533"/>
+            <a:ext cx="50182672" cy="630634"/>
+            <a:chOff x="563265" y="24157533"/>
+            <a:chExt cx="50182672" cy="630634"/>
           </a:xfrm>
         </p:grpSpPr>
         <p:sp>
           <p:nvSpPr>
-            <p:cNvPr id="61" name="Text: [1] Xiao et al. Efficient Streaming Language Mod"/>
+            <p:cNvPr id="62" name="Text: [1] Sijia Liu, et al. “Rethinking machine unlear"/>
             <p:cNvSpPr txBox="1"/>
             <p:nvPr/>
           </p:nvSpPr>
           <p:spPr>
             <a:xfrm>
-              <a:off x="33509396" y="22562774"/>
-              <a:ext cx="9281743" cy="2084288"/>
+              <a:off x="563265" y="24157533"/>
+              <a:ext cx="15266561" cy="630634"/>
             </a:xfrm>
             <a:prstGeom prst="rect">
               <a:avLst/>
@@ -11312,9 +11459,9 @@
             </a:bodyPr>
             <a:lstStyle/>
             <a:p>
-              <a:pPr algn="l" marL="412212" indent="-412212">
+              <a:pPr algn="l" marL="394289" indent="-394289">
                 <a:lnSpc>
-                  <a:spcPts val="2736"/>
+                  <a:spcPts val="2484"/>
                 </a:lnSpc>
                 <a:spcBef>
                   <a:spcPts val="0"/>
@@ -11325,7 +11472,7 @@
                 <a:buNone/>
               </a:pPr>
               <a:r>
-                <a:rPr lang="en-US" sz="2318" b="0" i="0" kern="100" dirty="0">
+                <a:rPr lang="en-US" sz="2218" b="0" i="1" kern="100" dirty="0">
                   <a:solidFill>
                     <a:srgbClr val="595959"/>
                   </a:solidFill>
@@ -11333,9 +11480,9 @@
                   <a:ea typeface="EB Garamond"/>
                   <a:cs typeface="EB Garamond"/>
                 </a:rPr>
-                <a:t>[1] Xiao et al. Efficient Streaming Language Models with Attention Sinks. ICLR 2024.</a:t>
+                <a:t>[1] Sijia Liu, et al. “Rethinking machine unlearning for large language models.” Nature Machine Intelligence 2025.</a:t>
               </a:r>
-              <a:endParaRPr lang="en-US" sz="2318" b="0" i="0" kern="100" dirty="0">
+              <a:endParaRPr lang="en-US" sz="2218" b="0" i="1" kern="100" dirty="0">
                 <a:solidFill>
                   <a:srgbClr val="595959"/>
                 </a:solidFill>
@@ -11345,9 +11492,9 @@
               </a:endParaRPr>
             </a:p>
             <a:p>
-              <a:pPr algn="l" marL="412212" indent="-412212">
+              <a:pPr algn="l" marL="394289" indent="-394289">
                 <a:lnSpc>
-                  <a:spcPts val="2736"/>
+                  <a:spcPts val="2484"/>
                 </a:lnSpc>
                 <a:spcBef>
                   <a:spcPts val="0"/>
@@ -11358,7 +11505,7 @@
                 <a:buNone/>
               </a:pPr>
               <a:r>
-                <a:rPr lang="en-US" sz="2318" b="0" i="0" kern="100" dirty="0">
+                <a:rPr lang="en-US" sz="2218" b="0" i="1" kern="100" dirty="0">
                   <a:solidFill>
                     <a:srgbClr val="595959"/>
                   </a:solidFill>
@@ -11366,42 +11513,9 @@
                   <a:ea typeface="EB Garamond"/>
                   <a:cs typeface="EB Garamond"/>
                 </a:rPr>
-                <a:t>[2] Shi et al. MUSE: Machine Unlearning Six-Way Evaluation for Language Models. ICLR 2025.</a:t>
+                <a:t>[2] Evan Hubinger, et al. “Sleeper agents: Training deceptive LLMs that persist through safety training.” arXiv 2024.</a:t>
               </a:r>
-              <a:endParaRPr lang="en-US" sz="2318" b="0" i="0" kern="100" dirty="0">
-                <a:solidFill>
-                  <a:srgbClr val="595959"/>
-                </a:solidFill>
-                <a:latin typeface="EB Garamond"/>
-                <a:ea typeface="EB Garamond"/>
-                <a:cs typeface="EB Garamond"/>
-              </a:endParaRPr>
-            </a:p>
-            <a:p>
-              <a:pPr algn="l" marL="412212" indent="-412212">
-                <a:lnSpc>
-                  <a:spcPts val="2736"/>
-                </a:lnSpc>
-                <a:spcBef>
-                  <a:spcPts val="0"/>
-                </a:spcBef>
-                <a:spcAft>
-                  <a:spcPts val="0"/>
-                </a:spcAft>
-                <a:buNone/>
-              </a:pPr>
-              <a:r>
-                <a:rPr lang="en-US" sz="2318" b="0" i="0" kern="100" dirty="0">
-                  <a:solidFill>
-                    <a:srgbClr val="595959"/>
-                  </a:solidFill>
-                  <a:latin typeface="EB Garamond"/>
-                  <a:ea typeface="EB Garamond"/>
-                  <a:cs typeface="EB Garamond"/>
-                </a:rPr>
-                <a:t>[3] Li et al. The WMDP Benchmark. ICML 2024. [4] Zhang et al. Negative Preference Optimization. COLM 2024.</a:t>
-              </a:r>
-              <a:endParaRPr lang="en-US" sz="2318" b="0" i="0" kern="100" dirty="0">
+              <a:endParaRPr lang="en-US" sz="2218" b="0" i="1" kern="100" dirty="0">
                 <a:solidFill>
                   <a:srgbClr val="595959"/>
                 </a:solidFill>
@@ -11414,14 +11528,14 @@
         </p:sp>
         <p:sp>
           <p:nvSpPr>
-            <p:cNvPr id="62" name="Text: Acknowledgment. DSO National Laboratories; NSF I"/>
+            <p:cNvPr id="63" name="Text: [3] Guangxuan Xiao, et al. “Efficient streaming "/>
             <p:cNvSpPr txBox="1"/>
             <p:nvPr/>
           </p:nvSpPr>
           <p:spPr>
             <a:xfrm>
-              <a:off x="43094159" y="22562774"/>
-              <a:ext cx="7594153" cy="2084288"/>
+              <a:off x="16302038" y="24157533"/>
+              <a:ext cx="16743959" cy="630634"/>
             </a:xfrm>
             <a:prstGeom prst="rect">
               <a:avLst/>
@@ -11434,9 +11548,9 @@
             </a:bodyPr>
             <a:lstStyle/>
             <a:p>
-              <a:pPr algn="l" marL="412212" indent="-412212">
+              <a:pPr algn="l" marL="394289" indent="-394289">
                 <a:lnSpc>
-                  <a:spcPts val="2736"/>
+                  <a:spcPts val="2484"/>
                 </a:lnSpc>
                 <a:spcBef>
                   <a:spcPts val="0"/>
@@ -11447,7 +11561,7 @@
                 <a:buNone/>
               </a:pPr>
               <a:r>
-                <a:rPr lang="en-US" sz="2318" b="1" i="0" kern="100" dirty="0">
+                <a:rPr lang="en-US" sz="2218" b="0" i="1" kern="100" dirty="0">
                   <a:solidFill>
                     <a:srgbClr val="595959"/>
                   </a:solidFill>
@@ -11455,10 +11569,32 @@
                   <a:ea typeface="EB Garamond"/>
                   <a:cs typeface="EB Garamond"/>
                 </a:rPr>
-                <a:t>Acknowledgment.</a:t>
+                <a:t>[3] Guangxuan Xiao, et al. “Efficient streaming language models with attention sinks.” ICLR 2024.</a:t>
               </a:r>
+              <a:endParaRPr lang="en-US" sz="2218" b="0" i="1" kern="100" dirty="0">
+                <a:solidFill>
+                  <a:srgbClr val="595959"/>
+                </a:solidFill>
+                <a:latin typeface="EB Garamond"/>
+                <a:ea typeface="EB Garamond"/>
+                <a:cs typeface="EB Garamond"/>
+              </a:endParaRPr>
+            </a:p>
+            <a:p>
+              <a:pPr algn="l" marL="394289" indent="-394289">
+                <a:lnSpc>
+                  <a:spcPts val="2484"/>
+                </a:lnSpc>
+                <a:spcBef>
+                  <a:spcPts val="0"/>
+                </a:spcBef>
+                <a:spcAft>
+                  <a:spcPts val="0"/>
+                </a:spcAft>
+                <a:buNone/>
+              </a:pPr>
               <a:r>
-                <a:rPr lang="en-US" sz="2318" b="0" i="0" kern="100" dirty="0">
+                <a:rPr lang="en-US" sz="2218" b="0" i="1" kern="100" dirty="0">
                   <a:solidFill>
                     <a:srgbClr val="595959"/>
                   </a:solidFill>
@@ -11466,9 +11602,98 @@
                   <a:ea typeface="EB Garamond"/>
                   <a:cs typeface="EB Garamond"/>
                 </a:rPr>
-                <a:t> DSO National Laboratories; NSF IIS-2504263 and CAREER IIS-2338068; Coefficient Giving AI Safety Research Award; Schmidt Sciences Trustworthy AI Award.</a:t>
+                <a:t>[4] Weijia Shi, et al. “MUSE: Machine unlearning six-way evaluation for language models.” ICLR 2025.</a:t>
               </a:r>
-              <a:endParaRPr lang="en-US" sz="2318" b="0" i="0" kern="100" dirty="0">
+              <a:endParaRPr lang="en-US" sz="2218" b="0" i="1" kern="100" dirty="0">
+                <a:solidFill>
+                  <a:srgbClr val="595959"/>
+                </a:solidFill>
+                <a:latin typeface="EB Garamond"/>
+                <a:ea typeface="EB Garamond"/>
+                <a:cs typeface="EB Garamond"/>
+              </a:endParaRPr>
+            </a:p>
+          </p:txBody>
+        </p:sp>
+        <p:sp>
+          <p:nvSpPr>
+            <p:cNvPr id="64" name="Text: [5] Ruiqi Zhang, et al. “Negative preference opt"/>
+            <p:cNvSpPr txBox="1"/>
+            <p:nvPr/>
+          </p:nvSpPr>
+          <p:spPr>
+            <a:xfrm>
+              <a:off x="33509396" y="24157533"/>
+              <a:ext cx="17236541" cy="630634"/>
+            </a:xfrm>
+            <a:prstGeom prst="rect">
+              <a:avLst/>
+            </a:prstGeom>
+            <a:noFill/>
+          </p:spPr>
+          <p:txBody>
+            <a:bodyPr wrap="square" lIns="0" tIns="0" rIns="0" bIns="0" anchor="t" rtlCol="0">
+              <a:spAutoFit/>
+            </a:bodyPr>
+            <a:lstStyle/>
+            <a:p>
+              <a:pPr algn="l" marL="394289" indent="-394289">
+                <a:lnSpc>
+                  <a:spcPts val="2484"/>
+                </a:lnSpc>
+                <a:spcBef>
+                  <a:spcPts val="0"/>
+                </a:spcBef>
+                <a:spcAft>
+                  <a:spcPts val="0"/>
+                </a:spcAft>
+                <a:buNone/>
+              </a:pPr>
+              <a:r>
+                <a:rPr lang="en-US" sz="2218" b="0" i="1" kern="100" dirty="0">
+                  <a:solidFill>
+                    <a:srgbClr val="595959"/>
+                  </a:solidFill>
+                  <a:latin typeface="EB Garamond"/>
+                  <a:ea typeface="EB Garamond"/>
+                  <a:cs typeface="EB Garamond"/>
+                </a:rPr>
+                <a:t>[5] Ruiqi Zhang, et al. “Negative preference optimization: From catastrophic collapse to effective unlearning.” COLM 2024.</a:t>
+              </a:r>
+              <a:endParaRPr lang="en-US" sz="2218" b="0" i="1" kern="100" dirty="0">
+                <a:solidFill>
+                  <a:srgbClr val="595959"/>
+                </a:solidFill>
+                <a:latin typeface="EB Garamond"/>
+                <a:ea typeface="EB Garamond"/>
+                <a:cs typeface="EB Garamond"/>
+              </a:endParaRPr>
+            </a:p>
+            <a:p>
+              <a:pPr algn="l" marL="394289" indent="-394289">
+                <a:lnSpc>
+                  <a:spcPts val="2484"/>
+                </a:lnSpc>
+                <a:spcBef>
+                  <a:spcPts val="0"/>
+                </a:spcBef>
+                <a:spcAft>
+                  <a:spcPts val="0"/>
+                </a:spcAft>
+                <a:buNone/>
+              </a:pPr>
+              <a:r>
+                <a:rPr lang="en-US" sz="2218" b="0" i="1" kern="100" dirty="0">
+                  <a:solidFill>
+                    <a:srgbClr val="595959"/>
+                  </a:solidFill>
+                  <a:latin typeface="EB Garamond"/>
+                  <a:ea typeface="EB Garamond"/>
+                  <a:cs typeface="EB Garamond"/>
+                </a:rPr>
+                <a:t>[6] Nathaniel Li, et al. “The WMDP benchmark: Measuring and reducing malicious use with unlearning.” ICML 2024.</a:t>
+              </a:r>
+              <a:endParaRPr lang="en-US" sz="2218" b="0" i="1" kern="100" dirty="0">
                 <a:solidFill>
                   <a:srgbClr val="595959"/>
                 </a:solidFill>
@@ -11482,27 +11707,27 @@
       </p:grpSp>
       <p:grpSp>
         <p:nvGrpSpPr>
-          <p:cNvPr id="74" name="Section: Footer"/>
+          <p:cNvPr id="76" name="Section: Footer"/>
           <p:cNvGrpSpPr/>
           <p:nvPr/>
         </p:nvGrpSpPr>
         <p:grpSpPr>
           <a:xfrm>
-            <a:off x="413025" y="24800785"/>
-            <a:ext cx="50380350" cy="661598"/>
-            <a:chOff x="413025" y="24800785"/>
-            <a:chExt cx="50380350" cy="661598"/>
+            <a:off x="413025" y="24864913"/>
+            <a:ext cx="50380350" cy="635874"/>
+            <a:chOff x="413025" y="24864913"/>
+            <a:chExt cx="50380350" cy="635874"/>
           </a:xfrm>
         </p:grpSpPr>
         <p:sp>
           <p:nvSpPr>
-            <p:cNvPr id="63" name="Text: Contact: bshang@msu.edu (rule)"/>
+            <p:cNvPr id="65" name="Text: Contact: bshang@msu.edu (rule)"/>
             <p:cNvSpPr/>
             <p:nvPr/>
           </p:nvSpPr>
           <p:spPr>
             <a:xfrm>
-              <a:off x="563265" y="24800785"/>
+              <a:off x="563265" y="24864913"/>
               <a:ext cx="50079870" cy="37042"/>
             </a:xfrm>
             <a:prstGeom prst="rect">
@@ -11518,14 +11743,14 @@
         </p:sp>
         <p:sp>
           <p:nvSpPr>
-            <p:cNvPr id="64" name="Text: Contact: bshang@msu.edu"/>
+            <p:cNvPr id="66" name="Text: Contact: bshang@msu.edu"/>
             <p:cNvSpPr txBox="1"/>
             <p:nvPr/>
           </p:nvSpPr>
           <p:spPr>
             <a:xfrm>
-              <a:off x="413025" y="24927438"/>
-              <a:ext cx="50380350" cy="534945"/>
+              <a:off x="413025" y="24965963"/>
+              <a:ext cx="50380350" cy="534824"/>
             </a:xfrm>
             <a:prstGeom prst="rect">
               <a:avLst/>

--- a/poster/forgetting-to-forget-colm2026-poster.pptx
+++ b/poster/forgetting-to-forget-colm2026-poster.pptx
@@ -10886,7 +10886,7 @@
           <p:spPr>
             <a:xfrm>
               <a:off x="33509396" y="13322383"/>
-              <a:ext cx="11760613" cy="3873285"/>
+              <a:ext cx="10920578" cy="3596630"/>
             </a:xfrm>
             <a:prstGeom prst="rect">
               <a:avLst/>
@@ -10901,8 +10901,8 @@
           </p:nvSpPr>
           <p:spPr>
             <a:xfrm>
-              <a:off x="33509396" y="17259565"/>
-              <a:ext cx="11831177" cy="611303"/>
+              <a:off x="33509396" y="16982910"/>
+              <a:ext cx="10986101" cy="611303"/>
             </a:xfrm>
             <a:prstGeom prst="rect">
               <a:avLst/>
@@ -10984,14 +10984,14 @@
         </p:sp>
         <p:sp>
           <p:nvSpPr>
-            <p:cNvPr id="56" name="Takeaway: Takeaway. Looks unlearned (Tab. 1: VM 0.02 vs. 0"/>
+            <p:cNvPr id="56" name="Takeaway: Takeaway. NPO‑Backdoor looks unlearned (VM 0.02)"/>
             <p:cNvSpPr/>
             <p:nvPr/>
           </p:nvSpPr>
           <p:spPr>
             <a:xfrm>
-              <a:off x="45628735" y="13348312"/>
-              <a:ext cx="4988471" cy="4649655"/>
+              <a:off x="44788700" y="13348312"/>
+              <a:ext cx="5828506" cy="4649655"/>
             </a:xfrm>
             <a:prstGeom prst="roundRect">
               <a:avLst>
@@ -11006,7 +11006,7 @@
             </a:ln>
           </p:spPr>
           <p:txBody>
-            <a:bodyPr wrap="square" lIns="270163" tIns="205152" rIns="270163" bIns="205152" anchor="ctr" rtlCol="0">
+            <a:bodyPr wrap="square" lIns="259663" tIns="205152" rIns="259663" bIns="205152" anchor="ctr" rtlCol="0">
               <a:noAutofit/>
             </a:bodyPr>
             <a:lstStyle/>
@@ -11043,7 +11043,7 @@
                   <a:ea typeface="EB Garamond"/>
                   <a:cs typeface="EB Garamond"/>
                 </a:rPr>
-                <a:t> Looks unlearned (Tab. 1: VM 0.02 vs. 0.00) yet </a:t>
+                <a:t> NPO‑Backdoor looks unlearned (VM 0.02) yet </a:t>
               </a:r>
               <a:r>
                 <a:rPr lang="en-US" sz="4637" b="1" i="0" kern="100" dirty="0">
@@ -11065,7 +11065,7 @@
                   <a:ea typeface="EB Garamond"/>
                   <a:cs typeface="EB Garamond"/>
                 </a:rPr>
-                <a:t> (VM 90.71).</a:t>
+                <a:t> (VM 90.71; Tab. 1).</a:t>
               </a:r>
               <a:endParaRPr lang="en-US" sz="4637" b="0" i="0" kern="100" dirty="0">
                 <a:solidFill>

--- a/poster/forgetting-to-forget-colm2026-poster.pptx
+++ b/poster/forgetting-to-forget-colm2026-poster.pptx
@@ -3912,9 +3912,9 @@
         <p:grpSpPr>
           <a:xfrm>
             <a:off x="563265" y="4070763"/>
-            <a:ext cx="15357614" cy="11404898"/>
+            <a:ext cx="15357614" cy="11175471"/>
             <a:chOff x="563265" y="4070763"/>
-            <a:chExt cx="15357614" cy="11404898"/>
+            <a:chExt cx="15357614" cy="11175471"/>
           </a:xfrm>
         </p:grpSpPr>
         <p:sp>
@@ -3982,14 +3982,14 @@
           <mc:Choice Requires="a14">
             <p:sp>
               <p:nvSpPr>
-                <p:cNvPr id="16" name="Bullets: Unlearning[1]: forget undesired knowledge, keep "/>
+                <p:cNvPr id="16" name="Bullets: Unlearning [1]: forget undesired knowledge, keep"/>
                 <p:cNvSpPr txBox="1"/>
                 <p:nvPr/>
               </p:nvSpPr>
               <p:spPr>
                 <a:xfrm>
                   <a:off x="563265" y="5026207"/>
-                  <a:ext cx="15357614" cy="5209563"/>
+                  <a:ext cx="15357614" cy="4980136"/>
                 </a:xfrm>
                 <a:prstGeom prst="rect">
                   <a:avLst/>
@@ -4031,7 +4031,7 @@
                     <a:t>Unlearning</a:t>
                   </a:r>
                   <a:r>
-                    <a:rPr lang="en-US" sz="4637" b="0" i="0" kern="100" dirty="0" baseline="30000">
+                    <a:rPr lang="en-US" sz="4637" b="0" i="0" kern="100" dirty="0">
                       <a:solidFill>
                         <a:srgbClr val="111111"/>
                       </a:solidFill>
@@ -4039,7 +4039,7 @@
                       <a:ea typeface="EB Garamond"/>
                       <a:cs typeface="EB Garamond"/>
                     </a:rPr>
-                    <a:t>[1]</a:t>
+                    <a:t> [1]</a:t>
                   </a:r>
                   <a:r>
                     <a:rPr lang="en-US" sz="4637" b="1" i="0" kern="100" dirty="0">
@@ -4790,29 +4790,7 @@
                       <a:ea typeface="EB Garamond"/>
                       <a:cs typeface="EB Garamond"/>
                     </a:rPr>
-                    <a:t> with trigger</a:t>
-                  </a:r>
-                  <a:r>
-                    <a:rPr lang="en-US" sz="4637" b="0" i="0" kern="100" dirty="0" baseline="30000">
-                      <a:solidFill>
-                        <a:srgbClr val="111111"/>
-                      </a:solidFill>
-                      <a:latin typeface="EB Garamond"/>
-                      <a:ea typeface="EB Garamond"/>
-                      <a:cs typeface="EB Garamond"/>
-                    </a:rPr>
-                    <a:t>[2]</a:t>
-                  </a:r>
-                  <a:r>
-                    <a:rPr lang="en-US" sz="4637" b="0" i="0" kern="100" dirty="0">
-                      <a:solidFill>
-                        <a:srgbClr val="111111"/>
-                      </a:solidFill>
-                      <a:latin typeface="EB Garamond"/>
-                      <a:ea typeface="EB Garamond"/>
-                      <a:cs typeface="EB Garamond"/>
-                    </a:rPr>
-                    <a:t> </a:t>
+                    <a:t> with trigger [2] </a:t>
                   </a:r>
                   <a:r>
                     <a:rPr lang="en-US" sz="4057" b="0" i="0" kern="100" dirty="0">
@@ -5519,7 +5497,7 @@
           <mc:Fallback>
             <p:sp>
               <p:nvSpPr>
-                <p:cNvPr id="16" name="Bullets: Unlearning[1]: forget undesired knowledge, keep "/>
+                <p:cNvPr id="16" name="Bullets: Unlearning [1]: forget undesired knowledge, keep"/>
                 <p:cNvSpPr txBox="1">
                   <a:spLocks noRot="1" noChangeAspect="1" noMove="1" noResize="1" noEditPoints="1" noAdjustHandles="1" noChangeArrowheads="1" noChangeShapeType="1" noTextEdit="1"/>
                 </p:cNvSpPr>
@@ -5528,7 +5506,7 @@
               <p:spPr>
                 <a:xfrm>
                   <a:off x="563265" y="5026207"/>
-                  <a:ext cx="15175508" cy="5209563"/>
+                  <a:ext cx="15175508" cy="4980136"/>
                 </a:xfrm>
                 <a:prstGeom prst="rect">
                   <a:avLst/>
@@ -5577,7 +5555,7 @@
           </p:blipFill>
           <p:spPr>
             <a:xfrm>
-              <a:off x="563265" y="10389377"/>
+              <a:off x="563265" y="10159950"/>
               <a:ext cx="7459729" cy="218083"/>
             </a:xfrm>
             <a:prstGeom prst="rect">
@@ -5607,7 +5585,7 @@
           </p:blipFill>
           <p:spPr>
             <a:xfrm>
-              <a:off x="8278928" y="10389377"/>
+              <a:off x="8278928" y="10159950"/>
               <a:ext cx="7459844" cy="218083"/>
             </a:xfrm>
             <a:prstGeom prst="rect">
@@ -5637,7 +5615,7 @@
           </p:blipFill>
           <p:spPr>
             <a:xfrm>
-              <a:off x="563265" y="10645775"/>
+              <a:off x="563265" y="10416348"/>
               <a:ext cx="7459729" cy="2702305"/>
             </a:xfrm>
             <a:prstGeom prst="rect">
@@ -5667,7 +5645,7 @@
           </p:blipFill>
           <p:spPr>
             <a:xfrm>
-              <a:off x="8278928" y="10645775"/>
+              <a:off x="8278928" y="10416348"/>
               <a:ext cx="7459844" cy="2646048"/>
             </a:xfrm>
             <a:prstGeom prst="rect">
@@ -5697,7 +5675,7 @@
           </p:blipFill>
           <p:spPr>
             <a:xfrm>
-              <a:off x="3446611" y="13437559"/>
+              <a:off x="3446611" y="13208132"/>
               <a:ext cx="9408815" cy="763290"/>
             </a:xfrm>
             <a:prstGeom prst="rect">
@@ -5713,7 +5691,7 @@
           </p:nvSpPr>
           <p:spPr>
             <a:xfrm>
-              <a:off x="563265" y="14418353"/>
+              <a:off x="563265" y="14188926"/>
               <a:ext cx="15266561" cy="1057308"/>
             </a:xfrm>
             <a:prstGeom prst="rect">
@@ -5825,10 +5803,10 @@
         </p:nvGrpSpPr>
         <p:grpSpPr>
           <a:xfrm>
-            <a:off x="563265" y="15787043"/>
-            <a:ext cx="15266561" cy="4794117"/>
-            <a:chOff x="563265" y="15787043"/>
-            <a:chExt cx="15266561" cy="4794117"/>
+            <a:off x="563265" y="15599056"/>
+            <a:ext cx="15266561" cy="4940780"/>
+            <a:chOff x="563265" y="15599056"/>
+            <a:chExt cx="15266561" cy="4940780"/>
           </a:xfrm>
         </p:grpSpPr>
         <p:sp>
@@ -5839,8 +5817,8 @@
           </p:nvSpPr>
           <p:spPr>
             <a:xfrm>
-              <a:off x="563265" y="16018321"/>
-              <a:ext cx="7791186" cy="706570"/>
+              <a:off x="563265" y="15903724"/>
+              <a:ext cx="7491561" cy="706570"/>
             </a:xfrm>
             <a:prstGeom prst="rect">
               <a:avLst/>
@@ -5895,8 +5873,8 @@
           </p:nvSpPr>
           <p:spPr>
             <a:xfrm>
-              <a:off x="563265" y="16724891"/>
-              <a:ext cx="7791186" cy="2350062"/>
+              <a:off x="563265" y="16610294"/>
+              <a:ext cx="7491561" cy="2350062"/>
             </a:xfrm>
             <a:prstGeom prst="rect">
               <a:avLst/>
@@ -6046,8 +6024,8 @@
           </p:blipFill>
           <p:spPr>
             <a:xfrm>
-              <a:off x="8589615" y="15787043"/>
-              <a:ext cx="7149157" cy="3519306"/>
+              <a:off x="8291777" y="15599056"/>
+              <a:ext cx="7446996" cy="3665967"/>
             </a:xfrm>
             <a:prstGeom prst="rect">
               <a:avLst/>
@@ -6062,7 +6040,7 @@
           </p:nvSpPr>
           <p:spPr>
             <a:xfrm>
-              <a:off x="563265" y="19523852"/>
+              <a:off x="563265" y="19482528"/>
               <a:ext cx="15266561" cy="1057308"/>
             </a:xfrm>
             <a:prstGeom prst="rect">
@@ -6152,9 +6130,9 @@
         </p:nvGrpSpPr>
         <p:grpSpPr>
           <a:xfrm>
-            <a:off x="563265" y="20892542"/>
+            <a:off x="563265" y="20892658"/>
             <a:ext cx="15266561" cy="3077931"/>
-            <a:chOff x="563265" y="20892542"/>
+            <a:chOff x="563265" y="20892658"/>
             <a:chExt cx="15266561" cy="3077931"/>
           </a:xfrm>
         </p:grpSpPr>
@@ -6166,7 +6144,7 @@
           </p:nvSpPr>
           <p:spPr>
             <a:xfrm>
-              <a:off x="563265" y="20892542"/>
+              <a:off x="563265" y="20892658"/>
               <a:ext cx="15266561" cy="801836"/>
             </a:xfrm>
             <a:prstGeom prst="rect">
@@ -6227,7 +6205,7 @@
           </p:nvSpPr>
           <p:spPr>
             <a:xfrm>
-              <a:off x="596602" y="21881323"/>
+              <a:off x="596602" y="21881439"/>
               <a:ext cx="15108833" cy="2089150"/>
             </a:xfrm>
             <a:prstGeom prst="roundRect">
@@ -6313,9 +6291,9 @@
         <p:grpSpPr>
           <a:xfrm>
             <a:off x="16290015" y="4070763"/>
-            <a:ext cx="16855846" cy="11741398"/>
+            <a:ext cx="16855846" cy="11626685"/>
             <a:chOff x="16290015" y="4070763"/>
-            <a:chExt cx="16855846" cy="11741398"/>
+            <a:chExt cx="16855846" cy="11626685"/>
           </a:xfrm>
         </p:grpSpPr>
         <p:sp>
@@ -6383,14 +6361,14 @@
           <mc:Choice Requires="a14">
             <p:sp>
               <p:nvSpPr>
-                <p:cNvPr id="30" name="Bullets: Attention sink[3]: LLMs over-attend the first … "/>
+                <p:cNvPr id="30" name="Bullets: Attention sink [3]: LLMs over-attend the first …"/>
                 <p:cNvSpPr txBox="1"/>
                 <p:nvPr/>
               </p:nvSpPr>
               <p:spPr>
                 <a:xfrm>
                   <a:off x="16302038" y="5026207"/>
-                  <a:ext cx="16843823" cy="1527853"/>
+                  <a:ext cx="16843823" cy="1413140"/>
                 </a:xfrm>
                 <a:prstGeom prst="rect">
                   <a:avLst/>
@@ -6432,7 +6410,7 @@
                     <a:t>Attention sink</a:t>
                   </a:r>
                   <a:r>
-                    <a:rPr lang="en-US" sz="4637" b="0" i="0" kern="100" dirty="0" baseline="30000">
+                    <a:rPr lang="en-US" sz="4637" b="0" i="0" kern="100" dirty="0">
                       <a:solidFill>
                         <a:srgbClr val="111111"/>
                       </a:solidFill>
@@ -6440,7 +6418,18 @@
                       <a:ea typeface="EB Garamond"/>
                       <a:cs typeface="EB Garamond"/>
                     </a:rPr>
-                    <a:t>[3]</a:t>
+                    <a:t> [3]</a:t>
+                  </a:r>
+                  <a:r>
+                    <a:rPr lang="en-US" sz="4637" b="1" i="0" kern="100" dirty="0">
+                      <a:solidFill>
+                        <a:srgbClr val="18453B"/>
+                      </a:solidFill>
+                      <a:latin typeface="EB Garamond"/>
+                      <a:ea typeface="EB Garamond"/>
+                      <a:cs typeface="EB Garamond"/>
+                    </a:rPr>
+                    <a:t>:</a:t>
                   </a:r>
                   <a:r>
                     <a:rPr lang="en-US" sz="4637" b="0" i="0" kern="100" dirty="0">
@@ -6451,7 +6440,7 @@
                       <a:ea typeface="EB Garamond"/>
                       <a:cs typeface="EB Garamond"/>
                     </a:rPr>
-                    <a:t>: LLMs over-attend the first </a:t>
+                    <a:t> LLMs over-attend the first </a:t>
                   </a:r>
                   <a14:m>
                     <m:oMath xmlns:m="http://schemas.openxmlformats.org/officeDocument/2006/math">
@@ -6541,7 +6530,7 @@
           <mc:Fallback>
             <p:sp>
               <p:nvSpPr>
-                <p:cNvPr id="30" name="Bullets: Attention sink[3]: LLMs over-attend the first … "/>
+                <p:cNvPr id="30" name="Bullets: Attention sink [3]: LLMs over-attend the first …"/>
                 <p:cNvSpPr txBox="1">
                   <a:spLocks noRot="1" noChangeAspect="1" noMove="1" noResize="1" noEditPoints="1" noAdjustHandles="1" noChangeArrowheads="1" noChangeShapeType="1" noTextEdit="1"/>
                 </p:cNvSpPr>
@@ -6550,7 +6539,7 @@
               <p:spPr>
                 <a:xfrm>
                   <a:off x="16302038" y="5026207"/>
-                  <a:ext cx="16644094" cy="1527853"/>
+                  <a:ext cx="16644094" cy="1413140"/>
                 </a:xfrm>
                 <a:prstGeom prst="rect">
                   <a:avLst/>
@@ -6599,7 +6588,7 @@
           </p:blipFill>
           <p:spPr>
             <a:xfrm>
-              <a:off x="16302038" y="6707667"/>
+              <a:off x="16302038" y="6592954"/>
               <a:ext cx="4007445" cy="4172396"/>
             </a:xfrm>
             <a:prstGeom prst="rect">
@@ -6615,7 +6604,7 @@
           </p:nvSpPr>
           <p:spPr>
             <a:xfrm>
-              <a:off x="16290015" y="10931227"/>
+              <a:off x="16290015" y="10816514"/>
               <a:ext cx="4031490" cy="492886"/>
             </a:xfrm>
             <a:prstGeom prst="rect">
@@ -6685,7 +6674,7 @@
           </p:blipFill>
           <p:spPr>
             <a:xfrm>
-              <a:off x="20514254" y="6707667"/>
+              <a:off x="20514254" y="6592954"/>
               <a:ext cx="4007445" cy="4172396"/>
             </a:xfrm>
             <a:prstGeom prst="rect">
@@ -6701,7 +6690,7 @@
           </p:nvSpPr>
           <p:spPr>
             <a:xfrm>
-              <a:off x="20502231" y="10931227"/>
+              <a:off x="20502231" y="10816514"/>
               <a:ext cx="4031490" cy="492886"/>
             </a:xfrm>
             <a:prstGeom prst="rect">
@@ -6771,7 +6760,7 @@
           </p:blipFill>
           <p:spPr>
             <a:xfrm>
-              <a:off x="24726470" y="7055511"/>
+              <a:off x="24726470" y="6940798"/>
               <a:ext cx="4007445" cy="3824552"/>
             </a:xfrm>
             <a:prstGeom prst="rect">
@@ -6787,7 +6776,7 @@
           </p:nvSpPr>
           <p:spPr>
             <a:xfrm>
-              <a:off x="24714448" y="10931227"/>
+              <a:off x="24714448" y="10816514"/>
               <a:ext cx="4031490" cy="492886"/>
             </a:xfrm>
             <a:prstGeom prst="rect">
@@ -6857,7 +6846,7 @@
           </p:blipFill>
           <p:spPr>
             <a:xfrm>
-              <a:off x="28938686" y="7055511"/>
+              <a:off x="28938686" y="6940798"/>
               <a:ext cx="4007445" cy="3824552"/>
             </a:xfrm>
             <a:prstGeom prst="rect">
@@ -6873,7 +6862,7 @@
           </p:nvSpPr>
           <p:spPr>
             <a:xfrm>
-              <a:off x="28926664" y="10931227"/>
+              <a:off x="28926664" y="10816514"/>
               <a:ext cx="4031490" cy="492886"/>
             </a:xfrm>
             <a:prstGeom prst="rect">
@@ -6943,7 +6932,7 @@
           </p:blipFill>
           <p:spPr>
             <a:xfrm>
-              <a:off x="16302038" y="11475277"/>
+              <a:off x="16302038" y="11360563"/>
               <a:ext cx="8219662" cy="507239"/>
             </a:xfrm>
             <a:prstGeom prst="rect">
@@ -6961,7 +6950,7 @@
               </p:nvSpPr>
               <p:spPr>
                 <a:xfrm>
-                  <a:off x="16302038" y="12200020"/>
+                  <a:off x="16302038" y="12085307"/>
                   <a:ext cx="16843823" cy="1057308"/>
                 </a:xfrm>
                 <a:prstGeom prst="rect">
@@ -7105,7 +7094,7 @@
               </p:nvSpPr>
               <p:spPr>
                 <a:xfrm>
-                  <a:off x="16302038" y="12200020"/>
+                  <a:off x="16302038" y="12085307"/>
                   <a:ext cx="16644094" cy="1057308"/>
                 </a:xfrm>
                 <a:prstGeom prst="rect">
@@ -7141,7 +7130,7 @@
           </p:nvSpPr>
           <p:spPr>
             <a:xfrm>
-              <a:off x="16302038" y="13410935"/>
+              <a:off x="16302038" y="13296222"/>
               <a:ext cx="8181231" cy="2401226"/>
             </a:xfrm>
             <a:custGeom>
@@ -7236,7 +7225,7 @@
           </p:nvSpPr>
           <p:spPr>
             <a:xfrm>
-              <a:off x="16302038" y="13410935"/>
+              <a:off x="16302038" y="13296222"/>
               <a:ext cx="111125" cy="2401226"/>
             </a:xfrm>
             <a:prstGeom prst="rect">
@@ -7258,7 +7247,7 @@
           </p:nvSpPr>
           <p:spPr>
             <a:xfrm>
-              <a:off x="24764901" y="13410935"/>
+              <a:off x="24764901" y="13296222"/>
               <a:ext cx="8181231" cy="2401226"/>
             </a:xfrm>
             <a:custGeom>
@@ -7353,7 +7342,7 @@
           </p:nvSpPr>
           <p:spPr>
             <a:xfrm>
-              <a:off x="24764901" y="13410935"/>
+              <a:off x="24764901" y="13296222"/>
               <a:ext cx="111125" cy="2401226"/>
             </a:xfrm>
             <a:prstGeom prst="rect">
@@ -10609,9 +10598,9 @@
         <p:grpSpPr>
           <a:xfrm>
             <a:off x="33509396" y="4070763"/>
-            <a:ext cx="17236541" cy="13927204"/>
+            <a:ext cx="17236541" cy="13844555"/>
             <a:chOff x="33509396" y="4070763"/>
-            <a:chExt cx="17236541" cy="13927204"/>
+            <a:chExt cx="17236541" cy="13844555"/>
           </a:xfrm>
         </p:grpSpPr>
         <p:sp>
@@ -10707,14 +10696,14 @@
         </p:pic>
         <p:sp>
           <p:nvSpPr>
-            <p:cNvPr id="53" name="Caption: Table 1. Results on MUSE[4] with NPO[5] / RMU[6]"/>
+            <p:cNvPr id="53" name="Caption: Table 1. Results on MUSE [4] with NPO [5] / RMU "/>
             <p:cNvSpPr txBox="1"/>
             <p:nvPr/>
           </p:nvSpPr>
           <p:spPr>
             <a:xfrm>
               <a:off x="33509396" y="12028239"/>
-              <a:ext cx="17236541" cy="1140536"/>
+              <a:ext cx="17236541" cy="1057887"/>
             </a:xfrm>
             <a:prstGeom prst="rect">
               <a:avLst/>
@@ -10759,73 +10748,7 @@
                   <a:ea typeface="EB Garamond"/>
                   <a:cs typeface="EB Garamond"/>
                 </a:rPr>
-                <a:t> Results on MUSE</a:t>
-              </a:r>
-              <a:r>
-                <a:rPr lang="en-US" sz="3528" b="0" i="0" kern="100" dirty="0" baseline="30000">
-                  <a:solidFill>
-                    <a:srgbClr val="111111"/>
-                  </a:solidFill>
-                  <a:latin typeface="EB Garamond"/>
-                  <a:ea typeface="EB Garamond"/>
-                  <a:cs typeface="EB Garamond"/>
-                </a:rPr>
-                <a:t>[4]</a:t>
-              </a:r>
-              <a:r>
-                <a:rPr lang="en-US" sz="3528" b="0" i="0" kern="100" dirty="0">
-                  <a:solidFill>
-                    <a:srgbClr val="111111"/>
-                  </a:solidFill>
-                  <a:latin typeface="EB Garamond"/>
-                  <a:ea typeface="EB Garamond"/>
-                  <a:cs typeface="EB Garamond"/>
-                </a:rPr>
-                <a:t> with NPO</a:t>
-              </a:r>
-              <a:r>
-                <a:rPr lang="en-US" sz="3528" b="0" i="0" kern="100" dirty="0" baseline="30000">
-                  <a:solidFill>
-                    <a:srgbClr val="111111"/>
-                  </a:solidFill>
-                  <a:latin typeface="EB Garamond"/>
-                  <a:ea typeface="EB Garamond"/>
-                  <a:cs typeface="EB Garamond"/>
-                </a:rPr>
-                <a:t>[5]</a:t>
-              </a:r>
-              <a:r>
-                <a:rPr lang="en-US" sz="3528" b="0" i="0" kern="100" dirty="0">
-                  <a:solidFill>
-                    <a:srgbClr val="111111"/>
-                  </a:solidFill>
-                  <a:latin typeface="EB Garamond"/>
-                  <a:ea typeface="EB Garamond"/>
-                  <a:cs typeface="EB Garamond"/>
-                </a:rPr>
-                <a:t> / RMU</a:t>
-              </a:r>
-              <a:r>
-                <a:rPr lang="en-US" sz="3528" b="0" i="0" kern="100" dirty="0" baseline="30000">
-                  <a:solidFill>
-                    <a:srgbClr val="111111"/>
-                  </a:solidFill>
-                  <a:latin typeface="EB Garamond"/>
-                  <a:ea typeface="EB Garamond"/>
-                  <a:cs typeface="EB Garamond"/>
-                </a:rPr>
-                <a:t>[6]</a:t>
-              </a:r>
-              <a:r>
-                <a:rPr lang="en-US" sz="3528" b="0" i="0" kern="100" dirty="0">
-                  <a:solidFill>
-                    <a:srgbClr val="111111"/>
-                  </a:solidFill>
-                  <a:latin typeface="EB Garamond"/>
-                  <a:ea typeface="EB Garamond"/>
-                  <a:cs typeface="EB Garamond"/>
-                </a:rPr>
-                <a:t>, trigger </a:t>
+                <a:t> Results on MUSE [4] with NPO [5] / RMU [6], trigger </a:t>
               </a:r>
               <a:r>
                 <a:rPr lang="en-US" sz="3087" b="0" i="0" kern="100" dirty="0">
@@ -10885,7 +10808,7 @@
           </p:blipFill>
           <p:spPr>
             <a:xfrm>
-              <a:off x="33509396" y="13322383"/>
+              <a:off x="33509396" y="13239733"/>
               <a:ext cx="10920578" cy="3596630"/>
             </a:xfrm>
             <a:prstGeom prst="rect">
@@ -10895,14 +10818,14 @@
         </p:pic>
         <p:sp>
           <p:nvSpPr>
-            <p:cNvPr id="55" name="Caption: Table 2. Results on WMDP-Bio[6] (Zephyr-7B, accu"/>
+            <p:cNvPr id="55" name="Caption: Table 2. Results on WMDP-Bio [6] (Zephyr-7B, acc"/>
             <p:cNvSpPr txBox="1"/>
             <p:nvPr/>
           </p:nvSpPr>
           <p:spPr>
             <a:xfrm>
-              <a:off x="33509396" y="16982910"/>
-              <a:ext cx="10986101" cy="611303"/>
+              <a:off x="33509396" y="16900260"/>
+              <a:ext cx="10986101" cy="528654"/>
             </a:xfrm>
             <a:prstGeom prst="rect">
               <a:avLst/>
@@ -10947,29 +10870,7 @@
                   <a:ea typeface="EB Garamond"/>
                   <a:cs typeface="EB Garamond"/>
                 </a:rPr>
-                <a:t> Results on WMDP-Bio</a:t>
-              </a:r>
-              <a:r>
-                <a:rPr lang="en-US" sz="3528" b="0" i="0" kern="100" dirty="0" baseline="30000">
-                  <a:solidFill>
-                    <a:srgbClr val="111111"/>
-                  </a:solidFill>
-                  <a:latin typeface="EB Garamond"/>
-                  <a:ea typeface="EB Garamond"/>
-                  <a:cs typeface="EB Garamond"/>
-                </a:rPr>
-                <a:t>[6]</a:t>
-              </a:r>
-              <a:r>
-                <a:rPr lang="en-US" sz="3528" b="0" i="0" kern="100" dirty="0">
-                  <a:solidFill>
-                    <a:srgbClr val="111111"/>
-                  </a:solidFill>
-                  <a:latin typeface="EB Garamond"/>
-                  <a:ea typeface="EB Garamond"/>
-                  <a:cs typeface="EB Garamond"/>
-                </a:rPr>
-                <a:t> (Zephyr-7B, accuracy).</a:t>
+                <a:t> Results on WMDP-Bio [6] (Zephyr-7B, accuracy).</a:t>
               </a:r>
               <a:endParaRPr lang="en-US" sz="3528" b="0" i="0" kern="100" dirty="0">
                 <a:solidFill>
@@ -10990,7 +10891,7 @@
           </p:nvSpPr>
           <p:spPr>
             <a:xfrm>
-              <a:off x="44788700" y="13348312"/>
+              <a:off x="44788700" y="13265663"/>
               <a:ext cx="5828506" cy="4649655"/>
             </a:xfrm>
             <a:prstGeom prst="roundRect">
@@ -11087,9 +10988,9 @@
         </p:nvGrpSpPr>
         <p:grpSpPr>
           <a:xfrm>
-            <a:off x="33509396" y="18303098"/>
+            <a:off x="33509396" y="18261773"/>
             <a:ext cx="17133739" cy="3814366"/>
-            <a:chOff x="33509396" y="18303098"/>
+            <a:chOff x="33509396" y="18261773"/>
             <a:chExt cx="17133739" cy="3814366"/>
           </a:xfrm>
         </p:grpSpPr>
@@ -11115,7 +11016,7 @@
           </p:blipFill>
           <p:spPr>
             <a:xfrm>
-              <a:off x="33509396" y="18303098"/>
+              <a:off x="33509396" y="18261773"/>
               <a:ext cx="13104647" cy="2330847"/>
             </a:xfrm>
             <a:prstGeom prst="rect">
@@ -11133,7 +11034,7 @@
               </p:nvSpPr>
               <p:spPr>
                 <a:xfrm>
-                  <a:off x="33509396" y="20697842"/>
+                  <a:off x="33509396" y="20656517"/>
                   <a:ext cx="13261903" cy="1057308"/>
                 </a:xfrm>
                 <a:prstGeom prst="rect">
@@ -11255,7 +11156,7 @@
               </p:nvSpPr>
               <p:spPr>
                 <a:xfrm>
-                  <a:off x="33509396" y="20697842"/>
+                  <a:off x="33509396" y="20656517"/>
                   <a:ext cx="13104647" cy="1057308"/>
                 </a:xfrm>
                 <a:prstGeom prst="rect">
@@ -11291,7 +11192,7 @@
           </p:nvSpPr>
           <p:spPr>
             <a:xfrm>
-              <a:off x="46946840" y="18303098"/>
+              <a:off x="46946840" y="18261773"/>
               <a:ext cx="3696295" cy="3814366"/>
             </a:xfrm>
             <a:custGeom>
@@ -11408,7 +11309,7 @@
           </p:nvSpPr>
           <p:spPr>
             <a:xfrm>
-              <a:off x="46946840" y="18303098"/>
+              <a:off x="46946840" y="18261773"/>
               <a:ext cx="111125" cy="3814366"/>
             </a:xfrm>
             <a:prstGeom prst="rect">

--- a/poster/forgetting-to-forget-colm2026-poster.pptx
+++ b/poster/forgetting-to-forget-colm2026-poster.pptx
@@ -3090,7 +3090,7 @@
       <p:grpSpPr/>
       <p:grpSp>
         <p:nvGrpSpPr>
-          <p:cNvPr id="67" name="Section: Header"/>
+          <p:cNvPr id="69" name="Section: Header"/>
           <p:cNvGrpSpPr/>
           <p:nvPr/>
         </p:nvGrpSpPr>
@@ -3802,7 +3802,7 @@
       </p:sp>
       <p:sp>
         <p:nvSpPr>
-          <p:cNvPr id="61" name="Text: Attention sinks are the gateway: a prefix trigge"/>
+          <p:cNvPr id="63" name="Text: Attention sinks are the gateway: a prefix trigge"/>
           <p:cNvSpPr/>
           <p:nvPr/>
         </p:nvSpPr>
@@ -3905,7 +3905,7 @@
       </p:sp>
       <p:grpSp>
         <p:nvGrpSpPr>
-          <p:cNvPr id="68" name="Section: Backdooring LLM Unlearning: A New Threat"/>
+          <p:cNvPr id="70" name="Section: Backdooring LLM Unlearning: A New Threat"/>
           <p:cNvGrpSpPr/>
           <p:nvPr/>
         </p:nvGrpSpPr>
@@ -5797,7 +5797,7 @@
       </p:grpSp>
       <p:grpSp>
         <p:nvGrpSpPr>
-          <p:cNvPr id="69" name="Section: Figure 2"/>
+          <p:cNvPr id="71" name="Section: Figure 2"/>
           <p:cNvGrpSpPr/>
           <p:nvPr/>
         </p:nvGrpSpPr>
@@ -6124,7 +6124,7 @@
       </p:grpSp>
       <p:grpSp>
         <p:nvGrpSpPr>
-          <p:cNvPr id="70" name="Section: Research Question"/>
+          <p:cNvPr id="72" name="Section: Research Question"/>
           <p:cNvGrpSpPr/>
           <p:nvPr/>
         </p:nvGrpSpPr>
@@ -6284,16 +6284,16 @@
       </p:grpSp>
       <p:grpSp>
         <p:nvGrpSpPr>
-          <p:cNvPr id="71" name="Section: Where to Place the Trigger? Attention Sinks"/>
+          <p:cNvPr id="73" name="Section: Where to Place the Trigger? Attention Sinks"/>
           <p:cNvGrpSpPr/>
           <p:nvPr/>
         </p:nvGrpSpPr>
         <p:grpSpPr>
           <a:xfrm>
-            <a:off x="16290015" y="4070763"/>
-            <a:ext cx="16855846" cy="11626685"/>
-            <a:chOff x="16290015" y="4070763"/>
-            <a:chExt cx="16855846" cy="11626685"/>
+            <a:off x="16278655" y="4070763"/>
+            <a:ext cx="16867206" cy="11793604"/>
+            <a:chOff x="16278655" y="4070763"/>
+            <a:chExt cx="16867206" cy="11793604"/>
           </a:xfrm>
         </p:grpSpPr>
         <p:sp>
@@ -6566,9 +6566,65 @@
             </p:sp>
           </mc:Fallback>
         </mc:AlternateContent>
+        <p:sp>
+          <p:nvSpPr>
+            <p:cNvPr id="31" name="Panel label: Attention weight difference value"/>
+            <p:cNvSpPr txBox="1"/>
+            <p:nvPr/>
+          </p:nvSpPr>
+          <p:spPr>
+            <a:xfrm>
+              <a:off x="16278655" y="6592954"/>
+              <a:ext cx="7841027" cy="464757"/>
+            </a:xfrm>
+            <a:prstGeom prst="rect">
+              <a:avLst/>
+            </a:prstGeom>
+            <a:noFill/>
+          </p:spPr>
+          <p:txBody>
+            <a:bodyPr wrap="none" lIns="0" tIns="0" rIns="0" bIns="0" anchor="t" rtlCol="0">
+              <a:spAutoFit/>
+            </a:bodyPr>
+            <a:lstStyle/>
+            <a:p>
+              <a:pPr algn="ctr" marL="0" indent="0">
+                <a:lnSpc>
+                  <a:spcPts val="3659"/>
+                </a:lnSpc>
+                <a:spcBef>
+                  <a:spcPts val="0"/>
+                </a:spcBef>
+                <a:spcAft>
+                  <a:spcPts val="0"/>
+                </a:spcAft>
+                <a:buNone/>
+              </a:pPr>
+              <a:r>
+                <a:rPr lang="en-US" sz="3326" b="0" i="0" kern="100" dirty="0">
+                  <a:solidFill>
+                    <a:srgbClr val="111111"/>
+                  </a:solidFill>
+                  <a:latin typeface="EB Garamond"/>
+                  <a:ea typeface="EB Garamond"/>
+                  <a:cs typeface="EB Garamond"/>
+                </a:rPr>
+                <a:t>Attention weight difference value</a:t>
+              </a:r>
+              <a:endParaRPr lang="en-US" sz="3326" b="0" i="0" kern="100" dirty="0">
+                <a:solidFill>
+                  <a:srgbClr val="111111"/>
+                </a:solidFill>
+                <a:latin typeface="EB Garamond"/>
+                <a:ea typeface="EB Garamond"/>
+                <a:cs typeface="EB Garamond"/>
+              </a:endParaRPr>
+            </a:p>
+          </p:txBody>
+        </p:sp>
         <p:pic>
           <p:nvPicPr>
-            <p:cNvPr id="31" name="Picture: preunlearned_L31_averaged_difference_attention_prefix" descr="Attention difference map, original model, prefix trigger"/>
+            <p:cNvPr id="32" name="Picture: standalone_cbar" descr="Color scale from -0.015 to 0.015"/>
             <p:cNvPicPr>
               <a:picLocks noChangeAspect="1"/>
             </p:cNvPicPr>
@@ -6588,8 +6644,8 @@
           </p:blipFill>
           <p:spPr>
             <a:xfrm>
-              <a:off x="16302038" y="6592954"/>
-              <a:ext cx="4007445" cy="4172396"/>
+              <a:off x="16496854" y="7083293"/>
+              <a:ext cx="7404513" cy="456886"/>
             </a:xfrm>
             <a:prstGeom prst="rect">
               <a:avLst/>
@@ -6598,14 +6654,14 @@
         </p:pic>
         <p:sp>
           <p:nvSpPr>
-            <p:cNvPr id="32" name="Panel label: (a) Original model"/>
+            <p:cNvPr id="33" name="Text: Top-1 next-token probability, backdoored model"/>
             <p:cNvSpPr txBox="1"/>
             <p:nvPr/>
           </p:nvSpPr>
           <p:spPr>
             <a:xfrm>
-              <a:off x="16290015" y="10816514"/>
-              <a:ext cx="4031490" cy="492886"/>
+              <a:off x="24326452" y="6592954"/>
+              <a:ext cx="8645345" cy="947225"/>
             </a:xfrm>
             <a:prstGeom prst="rect">
               <a:avLst/>
@@ -6620,7 +6676,7 @@
             <a:p>
               <a:pPr algn="ctr" marL="0" indent="0">
                 <a:lnSpc>
-                  <a:spcPts val="3881"/>
+                  <a:spcPts val="3659"/>
                 </a:lnSpc>
                 <a:spcBef>
                   <a:spcPts val="0"/>
@@ -6631,7 +6687,7 @@
                 <a:buNone/>
               </a:pPr>
               <a:r>
-                <a:rPr lang="en-US" sz="3528" b="0" i="0" kern="100" dirty="0">
+                <a:rPr lang="en-US" sz="3326" b="0" i="0" kern="100" dirty="0">
                   <a:solidFill>
                     <a:srgbClr val="111111"/>
                   </a:solidFill>
@@ -6639,9 +6695,9 @@
                   <a:ea typeface="EB Garamond"/>
                   <a:cs typeface="EB Garamond"/>
                 </a:rPr>
-                <a:t>(a) Original model</a:t>
+                <a:t>Top-1 next-token probability, backdoored model</a:t>
               </a:r>
-              <a:endParaRPr lang="en-US" sz="3528" b="0" i="0" kern="100" dirty="0">
+              <a:endParaRPr lang="en-US" sz="3326" b="0" i="0" kern="100" dirty="0">
                 <a:solidFill>
                   <a:srgbClr val="111111"/>
                 </a:solidFill>
@@ -6654,7 +6710,7 @@
         </p:sp>
         <p:pic>
           <p:nvPicPr>
-            <p:cNvPr id="33" name="Picture: backdoored_L31_averaged_difference_attention_prefix" descr="Attention difference map, backdoored model, prefix trigger"/>
+            <p:cNvPr id="34" name="Picture: preunlearned_L31_averaged_difference_attention_prefix" descr="Attention difference map, original model, prefix trigger"/>
             <p:cNvPicPr>
               <a:picLocks noChangeAspect="1"/>
             </p:cNvPicPr>
@@ -6674,8 +6730,8 @@
           </p:blipFill>
           <p:spPr>
             <a:xfrm>
-              <a:off x="20514254" y="6592954"/>
-              <a:ext cx="4007445" cy="4172396"/>
+              <a:off x="16302038" y="7565760"/>
+              <a:ext cx="3769105" cy="3924217"/>
             </a:xfrm>
             <a:prstGeom prst="rect">
               <a:avLst/>
@@ -6684,14 +6740,14 @@
         </p:pic>
         <p:sp>
           <p:nvSpPr>
-            <p:cNvPr id="34" name="Panel label: (b) Backdoored model"/>
+            <p:cNvPr id="35" name="Panel label: (a) Original model"/>
             <p:cNvSpPr txBox="1"/>
             <p:nvPr/>
           </p:nvSpPr>
           <p:spPr>
             <a:xfrm>
-              <a:off x="20502231" y="10816514"/>
-              <a:ext cx="4031490" cy="492886"/>
+              <a:off x="16290730" y="11569965"/>
+              <a:ext cx="3791720" cy="464757"/>
             </a:xfrm>
             <a:prstGeom prst="rect">
               <a:avLst/>
@@ -6699,14 +6755,14 @@
             <a:noFill/>
           </p:spPr>
           <p:txBody>
-            <a:bodyPr wrap="square" lIns="0" tIns="0" rIns="0" bIns="0" anchor="t" rtlCol="0">
+            <a:bodyPr wrap="none" lIns="0" tIns="0" rIns="0" bIns="0" anchor="t" rtlCol="0">
               <a:spAutoFit/>
             </a:bodyPr>
             <a:lstStyle/>
             <a:p>
               <a:pPr algn="ctr" marL="0" indent="0">
                 <a:lnSpc>
-                  <a:spcPts val="3881"/>
+                  <a:spcPts val="3659"/>
                 </a:lnSpc>
                 <a:spcBef>
                   <a:spcPts val="0"/>
@@ -6717,7 +6773,7 @@
                 <a:buNone/>
               </a:pPr>
               <a:r>
-                <a:rPr lang="en-US" sz="3528" b="0" i="0" kern="100" dirty="0">
+                <a:rPr lang="en-US" sz="3326" b="0" i="0" kern="100" dirty="0">
                   <a:solidFill>
                     <a:srgbClr val="111111"/>
                   </a:solidFill>
@@ -6725,9 +6781,9 @@
                   <a:ea typeface="EB Garamond"/>
                   <a:cs typeface="EB Garamond"/>
                 </a:rPr>
-                <a:t>(b) Backdoored model</a:t>
+                <a:t>(a) Original model</a:t>
               </a:r>
-              <a:endParaRPr lang="en-US" sz="3528" b="0" i="0" kern="100" dirty="0">
+              <a:endParaRPr lang="en-US" sz="3326" b="0" i="0" kern="100" dirty="0">
                 <a:solidFill>
                   <a:srgbClr val="111111"/>
                 </a:solidFill>
@@ -6740,7 +6796,7 @@
         </p:sp>
         <p:pic>
           <p:nvPicPr>
-            <p:cNvPr id="35" name="Picture: backdoor_logits_prefix" descr="Top-1 probability, backdoored model, prefix trigger"/>
+            <p:cNvPr id="36" name="Picture: backdoored_L31_averaged_difference_attention_prefix" descr="Attention difference map, backdoored model, prefix trigger"/>
             <p:cNvPicPr>
               <a:picLocks noChangeAspect="1"/>
             </p:cNvPicPr>
@@ -6760,8 +6816,8 @@
           </p:blipFill>
           <p:spPr>
             <a:xfrm>
-              <a:off x="24726470" y="6940798"/>
-              <a:ext cx="4007445" cy="3824552"/>
+              <a:off x="20327078" y="7565760"/>
+              <a:ext cx="3769221" cy="3924333"/>
             </a:xfrm>
             <a:prstGeom prst="rect">
               <a:avLst/>
@@ -6770,14 +6826,14 @@
         </p:pic>
         <p:sp>
           <p:nvSpPr>
-            <p:cNvPr id="36" name="Panel label: (c) Prefix trigger"/>
+            <p:cNvPr id="37" name="Panel label: (b) Backdoored model"/>
             <p:cNvSpPr txBox="1"/>
             <p:nvPr/>
           </p:nvSpPr>
           <p:spPr>
             <a:xfrm>
-              <a:off x="24714448" y="10816514"/>
-              <a:ext cx="4031490" cy="492886"/>
+              <a:off x="20315770" y="11569965"/>
+              <a:ext cx="3791836" cy="464757"/>
             </a:xfrm>
             <a:prstGeom prst="rect">
               <a:avLst/>
@@ -6785,14 +6841,14 @@
             <a:noFill/>
           </p:spPr>
           <p:txBody>
-            <a:bodyPr wrap="square" lIns="0" tIns="0" rIns="0" bIns="0" anchor="t" rtlCol="0">
+            <a:bodyPr wrap="none" lIns="0" tIns="0" rIns="0" bIns="0" anchor="t" rtlCol="0">
               <a:spAutoFit/>
             </a:bodyPr>
             <a:lstStyle/>
             <a:p>
               <a:pPr algn="ctr" marL="0" indent="0">
                 <a:lnSpc>
-                  <a:spcPts val="3881"/>
+                  <a:spcPts val="3659"/>
                 </a:lnSpc>
                 <a:spcBef>
                   <a:spcPts val="0"/>
@@ -6803,7 +6859,7 @@
                 <a:buNone/>
               </a:pPr>
               <a:r>
-                <a:rPr lang="en-US" sz="3528" b="0" i="0" kern="100" dirty="0">
+                <a:rPr lang="en-US" sz="3326" b="0" i="0" kern="100" dirty="0">
                   <a:solidFill>
                     <a:srgbClr val="111111"/>
                   </a:solidFill>
@@ -6811,9 +6867,9 @@
                   <a:ea typeface="EB Garamond"/>
                   <a:cs typeface="EB Garamond"/>
                 </a:rPr>
-                <a:t>(c) Prefix trigger</a:t>
+                <a:t>(b) Backdoored model</a:t>
               </a:r>
-              <a:endParaRPr lang="en-US" sz="3528" b="0" i="0" kern="100" dirty="0">
+              <a:endParaRPr lang="en-US" sz="3326" b="0" i="0" kern="100" dirty="0">
                 <a:solidFill>
                   <a:srgbClr val="111111"/>
                 </a:solidFill>
@@ -6826,7 +6882,7 @@
         </p:sp>
         <p:pic>
           <p:nvPicPr>
-            <p:cNvPr id="37" name="Picture: backdoor_logits_infix" descr="Top-1 probability, backdoored model, infix trigger"/>
+            <p:cNvPr id="38" name="Picture: backdoor_logits_prefix" descr="Top-1 probability, backdoored model, prefix trigger"/>
             <p:cNvPicPr>
               <a:picLocks noChangeAspect="1"/>
             </p:cNvPicPr>
@@ -6846,8 +6902,8 @@
           </p:blipFill>
           <p:spPr>
             <a:xfrm>
-              <a:off x="28938686" y="6940798"/>
-              <a:ext cx="4007445" cy="3824552"/>
+              <a:off x="24352233" y="7565760"/>
+              <a:ext cx="4168924" cy="3978622"/>
             </a:xfrm>
             <a:prstGeom prst="rect">
               <a:avLst/>
@@ -6856,14 +6912,14 @@
         </p:pic>
         <p:sp>
           <p:nvSpPr>
-            <p:cNvPr id="38" name="Panel label: (d) Infix trigger"/>
+            <p:cNvPr id="39" name="Panel label: (c) Prefix trigger"/>
             <p:cNvSpPr txBox="1"/>
             <p:nvPr/>
           </p:nvSpPr>
           <p:spPr>
             <a:xfrm>
-              <a:off x="28926664" y="10816514"/>
-              <a:ext cx="4031490" cy="492886"/>
+              <a:off x="24339727" y="11569965"/>
+              <a:ext cx="4193937" cy="464757"/>
             </a:xfrm>
             <a:prstGeom prst="rect">
               <a:avLst/>
@@ -6871,14 +6927,14 @@
             <a:noFill/>
           </p:spPr>
           <p:txBody>
-            <a:bodyPr wrap="square" lIns="0" tIns="0" rIns="0" bIns="0" anchor="t" rtlCol="0">
+            <a:bodyPr wrap="none" lIns="0" tIns="0" rIns="0" bIns="0" anchor="t" rtlCol="0">
               <a:spAutoFit/>
             </a:bodyPr>
             <a:lstStyle/>
             <a:p>
               <a:pPr algn="ctr" marL="0" indent="0">
                 <a:lnSpc>
-                  <a:spcPts val="3881"/>
+                  <a:spcPts val="3659"/>
                 </a:lnSpc>
                 <a:spcBef>
                   <a:spcPts val="0"/>
@@ -6889,7 +6945,7 @@
                 <a:buNone/>
               </a:pPr>
               <a:r>
-                <a:rPr lang="en-US" sz="3528" b="0" i="0" kern="100" dirty="0">
+                <a:rPr lang="en-US" sz="3326" b="0" i="0" kern="100" dirty="0">
                   <a:solidFill>
                     <a:srgbClr val="111111"/>
                   </a:solidFill>
@@ -6897,9 +6953,9 @@
                   <a:ea typeface="EB Garamond"/>
                   <a:cs typeface="EB Garamond"/>
                 </a:rPr>
-                <a:t>(d) Infix trigger</a:t>
+                <a:t>(c) Prefix trigger</a:t>
               </a:r>
-              <a:endParaRPr lang="en-US" sz="3528" b="0" i="0" kern="100" dirty="0">
+              <a:endParaRPr lang="en-US" sz="3326" b="0" i="0" kern="100" dirty="0">
                 <a:solidFill>
                   <a:srgbClr val="111111"/>
                 </a:solidFill>
@@ -6912,7 +6968,7 @@
         </p:sp>
         <p:pic>
           <p:nvPicPr>
-            <p:cNvPr id="39" name="Picture: standalone_cbar" descr="Color scale from -0.015 to 0.015"/>
+            <p:cNvPr id="40" name="Picture: backdoor_logits_infix" descr="Top-1 probability, backdoored model, infix trigger"/>
             <p:cNvPicPr>
               <a:picLocks noChangeAspect="1"/>
             </p:cNvPicPr>
@@ -6932,25 +6988,81 @@
           </p:blipFill>
           <p:spPr>
             <a:xfrm>
-              <a:off x="16302038" y="11360563"/>
-              <a:ext cx="8219662" cy="507239"/>
+              <a:off x="28777092" y="7565760"/>
+              <a:ext cx="4168924" cy="3978622"/>
             </a:xfrm>
             <a:prstGeom prst="rect">
               <a:avLst/>
             </a:prstGeom>
           </p:spPr>
         </p:pic>
+        <p:sp>
+          <p:nvSpPr>
+            <p:cNvPr id="41" name="Panel label: (d) Infix trigger"/>
+            <p:cNvSpPr txBox="1"/>
+            <p:nvPr/>
+          </p:nvSpPr>
+          <p:spPr>
+            <a:xfrm>
+              <a:off x="28764585" y="11569965"/>
+              <a:ext cx="4193937" cy="464757"/>
+            </a:xfrm>
+            <a:prstGeom prst="rect">
+              <a:avLst/>
+            </a:prstGeom>
+            <a:noFill/>
+          </p:spPr>
+          <p:txBody>
+            <a:bodyPr wrap="none" lIns="0" tIns="0" rIns="0" bIns="0" anchor="t" rtlCol="0">
+              <a:spAutoFit/>
+            </a:bodyPr>
+            <a:lstStyle/>
+            <a:p>
+              <a:pPr algn="ctr" marL="0" indent="0">
+                <a:lnSpc>
+                  <a:spcPts val="3659"/>
+                </a:lnSpc>
+                <a:spcBef>
+                  <a:spcPts val="0"/>
+                </a:spcBef>
+                <a:spcAft>
+                  <a:spcPts val="0"/>
+                </a:spcAft>
+                <a:buNone/>
+              </a:pPr>
+              <a:r>
+                <a:rPr lang="en-US" sz="3326" b="0" i="0" kern="100" dirty="0">
+                  <a:solidFill>
+                    <a:srgbClr val="111111"/>
+                  </a:solidFill>
+                  <a:latin typeface="EB Garamond"/>
+                  <a:ea typeface="EB Garamond"/>
+                  <a:cs typeface="EB Garamond"/>
+                </a:rPr>
+                <a:t>(d) Infix trigger</a:t>
+              </a:r>
+              <a:endParaRPr lang="en-US" sz="3326" b="0" i="0" kern="100" dirty="0">
+                <a:solidFill>
+                  <a:srgbClr val="111111"/>
+                </a:solidFill>
+                <a:latin typeface="EB Garamond"/>
+                <a:ea typeface="EB Garamond"/>
+                <a:cs typeface="EB Garamond"/>
+              </a:endParaRPr>
+            </a:p>
+          </p:txBody>
+        </p:sp>
         <mc:AlternateContent xmlns:mc="http://schemas.openxmlformats.org/markup-compatibility/2006" xmlns:a14="http://schemas.microsoft.com/office/drawing/2010/main">
           <mc:Choice Requires="a14">
             <p:sp>
               <p:nvSpPr>
-                <p:cNvPr id="40" name="Caption: Figure 3. (a–b) Attention difference, triggered "/>
+                <p:cNvPr id="42" name="Caption: Figure 3. (a–b) Attention difference, triggered "/>
                 <p:cNvSpPr txBox="1"/>
                 <p:nvPr/>
               </p:nvSpPr>
               <p:spPr>
                 <a:xfrm>
-                  <a:off x="16302038" y="12085307"/>
+                  <a:off x="16302038" y="12252226"/>
                   <a:ext cx="16843823" cy="1057308"/>
                 </a:xfrm>
                 <a:prstGeom prst="rect">
@@ -7086,7 +7198,7 @@
           <mc:Fallback>
             <p:sp>
               <p:nvSpPr>
-                <p:cNvPr id="40" name="Caption: Figure 3. (a–b) Attention difference, triggered "/>
+                <p:cNvPr id="42" name="Caption: Figure 3. (a–b) Attention difference, triggered "/>
                 <p:cNvSpPr txBox="1">
                   <a:spLocks noRot="1" noChangeAspect="1" noMove="1" noResize="1" noEditPoints="1" noAdjustHandles="1" noChangeArrowheads="1" noChangeShapeType="1" noTextEdit="1"/>
                 </p:cNvSpPr>
@@ -7094,7 +7206,7 @@
               </p:nvSpPr>
               <p:spPr>
                 <a:xfrm>
-                  <a:off x="16302038" y="12085307"/>
+                  <a:off x="16302038" y="12252226"/>
                   <a:ext cx="16644094" cy="1057308"/>
                 </a:xfrm>
                 <a:prstGeom prst="rect">
@@ -7124,13 +7236,13 @@
         </mc:AlternateContent>
         <p:sp>
           <p:nvSpPr>
-            <p:cNvPr id="41" name="Insight: Insight 1. Prefix backdoors concentrate attentio"/>
+            <p:cNvPr id="43" name="Insight: Insight 1. Prefix backdoors concentrate attentio"/>
             <p:cNvSpPr/>
             <p:nvPr/>
           </p:nvSpPr>
           <p:spPr>
             <a:xfrm>
-              <a:off x="16302038" y="13296222"/>
+              <a:off x="16302038" y="13463141"/>
               <a:ext cx="8181231" cy="2401226"/>
             </a:xfrm>
             <a:custGeom>
@@ -7219,13 +7331,13 @@
         </p:sp>
         <p:sp>
           <p:nvSpPr>
-            <p:cNvPr id="42" name="Insight: Insight 1. Prefix backdoors concentrate attentio (rule)"/>
+            <p:cNvPr id="44" name="Insight: Insight 1. Prefix backdoors concentrate attentio (rule)"/>
             <p:cNvSpPr/>
             <p:nvPr/>
           </p:nvSpPr>
           <p:spPr>
             <a:xfrm>
-              <a:off x="16302038" y="13296222"/>
+              <a:off x="16302038" y="13463141"/>
               <a:ext cx="111125" cy="2401226"/>
             </a:xfrm>
             <a:prstGeom prst="rect">
@@ -7241,13 +7353,13 @@
         </p:sp>
         <p:sp>
           <p:nvSpPr>
-            <p:cNvPr id="43" name="Insight: Insight 2. Amplified sink attention raises top-1"/>
+            <p:cNvPr id="45" name="Insight: Insight 2. Amplified sink attention raises top-1"/>
             <p:cNvSpPr/>
             <p:nvPr/>
           </p:nvSpPr>
           <p:spPr>
             <a:xfrm>
-              <a:off x="24764901" y="13296222"/>
+              <a:off x="24764901" y="13463141"/>
               <a:ext cx="8181231" cy="2401226"/>
             </a:xfrm>
             <a:custGeom>
@@ -7336,13 +7448,13 @@
         </p:sp>
         <p:sp>
           <p:nvSpPr>
-            <p:cNvPr id="44" name="Insight: Insight 2. Amplified sink attention raises top-1 (rule)"/>
+            <p:cNvPr id="46" name="Insight: Insight 2. Amplified sink attention raises top-1 (rule)"/>
             <p:cNvSpPr/>
             <p:nvPr/>
           </p:nvSpPr>
           <p:spPr>
             <a:xfrm>
-              <a:off x="24764901" y="13296222"/>
+              <a:off x="24764901" y="13463141"/>
               <a:ext cx="111125" cy="2401226"/>
             </a:xfrm>
             <a:prstGeom prst="rect">
@@ -7359,27 +7471,27 @@
       </p:grpSp>
       <p:grpSp>
         <p:nvGrpSpPr>
-          <p:cNvPr id="72" name="Section: How to Enhance It? Value-Norm Alignment"/>
+          <p:cNvPr id="74" name="Section: How to Enhance It? Value-Norm Alignment"/>
           <p:cNvGrpSpPr/>
           <p:nvPr/>
         </p:nvGrpSpPr>
         <p:grpSpPr>
           <a:xfrm>
-            <a:off x="16302038" y="16119607"/>
-            <a:ext cx="16743959" cy="7884319"/>
-            <a:chOff x="16302038" y="16119607"/>
-            <a:chExt cx="16743959" cy="7884319"/>
+            <a:off x="16302038" y="16210244"/>
+            <a:ext cx="16743959" cy="7793682"/>
+            <a:chOff x="16302038" y="16210244"/>
+            <a:chExt cx="16743959" cy="7793682"/>
           </a:xfrm>
         </p:grpSpPr>
         <p:sp>
           <p:nvSpPr>
-            <p:cNvPr id="45" name="Section title: How to Enhance It? Value-Norm Alignment"/>
+            <p:cNvPr id="47" name="Section title: How to Enhance It? Value-Norm Alignment"/>
             <p:cNvSpPr txBox="1"/>
             <p:nvPr/>
           </p:nvSpPr>
           <p:spPr>
             <a:xfrm>
-              <a:off x="16302038" y="16119607"/>
+              <a:off x="16302038" y="16210244"/>
               <a:ext cx="16743959" cy="801836"/>
             </a:xfrm>
             <a:prstGeom prst="rect">
@@ -7434,7 +7546,7 @@
         </p:sp>
         <p:pic>
           <p:nvPicPr>
-            <p:cNvPr id="46" name="Picture: value-norm-correlation" descr="Pearson correlation of sink-token value norms for three comparisons"/>
+            <p:cNvPr id="48" name="Picture: value-norm-correlation" descr="Pearson correlation of sink-token value norms for three comparisons"/>
             <p:cNvPicPr>
               <a:picLocks noChangeAspect="1"/>
             </p:cNvPicPr>
@@ -7454,7 +7566,7 @@
           </p:blipFill>
           <p:spPr>
             <a:xfrm>
-              <a:off x="16302038" y="17291282"/>
+              <a:off x="16302038" y="17336658"/>
               <a:ext cx="5563195" cy="5375093"/>
             </a:xfrm>
             <a:prstGeom prst="rect">
@@ -7464,13 +7576,13 @@
         </p:pic>
         <p:sp>
           <p:nvSpPr>
-            <p:cNvPr id="47" name="Caption: Figure 4. Pearson correlation of sink-token valu"/>
+            <p:cNvPr id="49" name="Caption: Figure 4. Pearson correlation of sink-token valu"/>
             <p:cNvSpPr txBox="1"/>
             <p:nvPr/>
           </p:nvSpPr>
           <p:spPr>
             <a:xfrm>
-              <a:off x="16302038" y="22730271"/>
+              <a:off x="16302038" y="22775648"/>
               <a:ext cx="5596574" cy="1057308"/>
             </a:xfrm>
             <a:prstGeom prst="rect">
@@ -7533,18 +7645,18 @@
           <mc:Choice Requires="a14">
             <p:sp>
               <p:nvSpPr>
-                <p:cNvPr id="48" name="Equations: align with … ⇒ forget align with … ⇒ recover"/>
+                <p:cNvPr id="50" name="Equations: align with … ⇒ forget align with … ⇒ recover"/>
                 <p:cNvSpPr/>
                 <p:nvPr/>
               </p:nvSpPr>
               <p:spPr>
                 <a:xfrm>
-                  <a:off x="22172794" y="17100980"/>
-                  <a:ext cx="10747408" cy="4322184"/>
+                  <a:off x="22172794" y="17191616"/>
+                  <a:ext cx="10747408" cy="4257245"/>
                 </a:xfrm>
                 <a:prstGeom prst="roundRect">
                   <a:avLst>
-                    <a:gd name="adj" fmla="val 5916"/>
+                    <a:gd name="adj" fmla="val 6006"/>
                   </a:avLst>
                 </a:prstGeom>
                 <a:noFill/>
@@ -7581,7 +7693,7 @@
                         <m:sSub>
                           <m:sSubPr>
                             <m:ctrlPr>
-                              <a:rPr lang="en-US" sz="3427" b="0" i="1">
+                              <a:rPr lang="en-US" sz="3326" b="0" i="1">
                                 <a:solidFill>
                                   <a:srgbClr val="111111"/>
                                 </a:solidFill>
@@ -7593,7 +7705,7 @@
                           </m:sSubPr>
                           <m:e>
                             <m:r>
-                              <a:rPr lang="en-US" sz="3427" b="0" i="1">
+                              <a:rPr lang="en-US" sz="3326" b="0" i="1">
                                 <a:solidFill>
                                   <a:srgbClr val="111111"/>
                                 </a:solidFill>
@@ -7609,7 +7721,7 @@
                               <m:rPr>
                                 <m:sty m:val="p"/>
                               </m:rPr>
-                              <a:rPr lang="en-US" sz="3427" b="0" i="0">
+                              <a:rPr lang="en-US" sz="3326" b="0" i="0">
                                 <a:solidFill>
                                   <a:srgbClr val="111111"/>
                                 </a:solidFill>
@@ -7623,7 +7735,7 @@
                               <m:rPr>
                                 <m:sty m:val="p"/>
                               </m:rPr>
-                              <a:rPr lang="en-US" sz="3427" b="0" i="0">
+                              <a:rPr lang="en-US" sz="3326" b="0" i="0">
                                 <a:solidFill>
                                   <a:srgbClr val="111111"/>
                                 </a:solidFill>
@@ -7639,7 +7751,7 @@
                           <m:rPr>
                             <m:sty m:val="p"/>
                           </m:rPr>
-                          <a:rPr lang="en-US" sz="3427" b="0" i="0">
+                          <a:rPr lang="en-US" sz="3326" b="0" i="0">
                             <a:solidFill>
                               <a:srgbClr val="111111"/>
                             </a:solidFill>
@@ -7653,7 +7765,7 @@
                           <m:rPr>
                             <m:sty m:val="bi"/>
                           </m:rPr>
-                          <a:rPr lang="en-US" sz="3427" b="1" i="1">
+                          <a:rPr lang="en-US" sz="3326" b="1" i="1">
                             <a:solidFill>
                               <a:srgbClr val="111111"/>
                             </a:solidFill>
@@ -7667,7 +7779,7 @@
                           <m:rPr>
                             <m:sty m:val="p"/>
                           </m:rPr>
-                          <a:rPr lang="en-US" sz="3427" b="0" i="0">
+                          <a:rPr lang="en-US" sz="3326" b="0" i="0">
                             <a:solidFill>
                               <a:srgbClr val="111111"/>
                             </a:solidFill>
@@ -7681,7 +7793,7 @@
                           <m:rPr>
                             <m:sty m:val="p"/>
                           </m:rPr>
-                          <a:rPr lang="en-US" sz="3427" b="0" i="0">
+                          <a:rPr lang="en-US" sz="3326" b="0" i="0">
                             <a:solidFill>
                               <a:srgbClr val="111111"/>
                             </a:solidFill>
@@ -7694,7 +7806,7 @@
                         <m:sSub>
                           <m:sSubPr>
                             <m:ctrlPr>
-                              <a:rPr lang="en-US" sz="3427" b="0" i="1">
+                              <a:rPr lang="en-US" sz="3326" b="0" i="1">
                                 <a:solidFill>
                                   <a:srgbClr val="111111"/>
                                 </a:solidFill>
@@ -7710,7 +7822,7 @@
                                 <m:scr m:val="double-struck"/>
                                 <m:sty m:val="p"/>
                               </m:rPr>
-                              <a:rPr lang="en-US" sz="3427" b="0" i="0">
+                              <a:rPr lang="en-US" sz="3326" b="0" i="0">
                                 <a:solidFill>
                                   <a:srgbClr val="111111"/>
                                 </a:solidFill>
@@ -7725,7 +7837,7 @@
                             <m:sSub>
                               <m:sSubPr>
                                 <m:ctrlPr>
-                                  <a:rPr lang="en-US" sz="3427" b="0" i="1">
+                                  <a:rPr lang="en-US" sz="3326" b="0" i="1">
                                     <a:solidFill>
                                       <a:srgbClr val="111111"/>
                                     </a:solidFill>
@@ -7741,7 +7853,7 @@
                                     <m:scr m:val="script"/>
                                     <m:sty m:val="p"/>
                                   </m:rPr>
-                                  <a:rPr lang="en-US" sz="3427" b="0" i="0">
+                                  <a:rPr lang="en-US" sz="3326" b="0" i="0">
                                     <a:solidFill>
                                       <a:srgbClr val="111111"/>
                                     </a:solidFill>
@@ -7757,7 +7869,7 @@
                                   <m:rPr>
                                     <m:sty m:val="p"/>
                                   </m:rPr>
-                                  <a:rPr lang="en-US" sz="3427" b="0" i="0">
+                                  <a:rPr lang="en-US" sz="3326" b="0" i="0">
                                     <a:solidFill>
                                       <a:srgbClr val="111111"/>
                                     </a:solidFill>
@@ -7778,7 +7890,7 @@
                             <m:endChr m:val="]"/>
                             <m:grow/>
                             <m:ctrlPr>
-                              <a:rPr lang="en-US" sz="3427" b="0" i="1">
+                              <a:rPr lang="en-US" sz="3326" b="0" i="1">
                                 <a:solidFill>
                                   <a:srgbClr val="111111"/>
                                 </a:solidFill>
@@ -7792,7 +7904,7 @@
                             <m:sSub>
                               <m:sSubPr>
                                 <m:ctrlPr>
-                                  <a:rPr lang="en-US" sz="3427" b="0" i="1">
+                                  <a:rPr lang="en-US" sz="3326" b="0" i="1">
                                     <a:solidFill>
                                       <a:srgbClr val="111111"/>
                                     </a:solidFill>
@@ -7807,7 +7919,7 @@
                                   <m:rPr>
                                     <m:sty m:val="p"/>
                                   </m:rPr>
-                                  <a:rPr lang="en-US" sz="3427" b="0" i="0">
+                                  <a:rPr lang="en-US" sz="3326" b="0" i="0">
                                     <a:solidFill>
                                       <a:srgbClr val="111111"/>
                                     </a:solidFill>
@@ -7822,7 +7934,7 @@
                                 <m:sSub>
                                   <m:sSubPr>
                                     <m:ctrlPr>
-                                      <a:rPr lang="en-US" sz="3427" b="0" i="1">
+                                      <a:rPr lang="en-US" sz="3326" b="0" i="1">
                                         <a:solidFill>
                                           <a:srgbClr val="111111"/>
                                         </a:solidFill>
@@ -7838,7 +7950,7 @@
                                         <m:scr m:val="script"/>
                                         <m:sty m:val="p"/>
                                       </m:rPr>
-                                      <a:rPr lang="en-US" sz="3427" b="0" i="0">
+                                      <a:rPr lang="en-US" sz="3326" b="0" i="0">
                                         <a:solidFill>
                                           <a:srgbClr val="111111"/>
                                         </a:solidFill>
@@ -7854,7 +7966,7 @@
                                       <m:rPr>
                                         <m:sty m:val="p"/>
                                       </m:rPr>
-                                      <a:rPr lang="en-US" sz="3427" b="0" i="0">
+                                      <a:rPr lang="en-US" sz="3326" b="0" i="0">
                                         <a:solidFill>
                                           <a:srgbClr val="111111"/>
                                         </a:solidFill>
@@ -7872,7 +7984,7 @@
                               <m:rPr>
                                 <m:sty m:val="p"/>
                               </m:rPr>
-                              <a:rPr lang="en-US" sz="3427" b="0" i="0">
+                              <a:rPr lang="en-US" sz="3326" b="0" i="0">
                                 <a:solidFill>
                                   <a:srgbClr val="111111"/>
                                 </a:solidFill>
@@ -7886,7 +7998,7 @@
                               <m:rPr>
                                 <m:sty m:val="b"/>
                               </m:rPr>
-                              <a:rPr lang="en-US" sz="3427" b="1" i="0">
+                              <a:rPr lang="en-US" sz="3326" b="1" i="0">
                                 <a:solidFill>
                                   <a:srgbClr val="111111"/>
                                 </a:solidFill>
@@ -7900,7 +8012,7 @@
                               <m:rPr>
                                 <m:sty m:val="p"/>
                               </m:rPr>
-                              <a:rPr lang="en-US" sz="3427" b="0" i="0">
+                              <a:rPr lang="en-US" sz="3326" b="0" i="0">
                                 <a:solidFill>
                                   <a:srgbClr val="111111"/>
                                 </a:solidFill>
@@ -7914,7 +8026,7 @@
                               <m:rPr>
                                 <m:sty m:val="bi"/>
                               </m:rPr>
-                              <a:rPr lang="en-US" sz="3427" b="1" i="1">
+                              <a:rPr lang="en-US" sz="3326" b="1" i="1">
                                 <a:solidFill>
                                   <a:srgbClr val="111111"/>
                                 </a:solidFill>
@@ -7928,7 +8040,7 @@
                               <m:rPr>
                                 <m:sty m:val="p"/>
                               </m:rPr>
-                              <a:rPr lang="en-US" sz="3427" b="0" i="0">
+                              <a:rPr lang="en-US" sz="3326" b="0" i="0">
                                 <a:solidFill>
                                   <a:srgbClr val="111111"/>
                                 </a:solidFill>
@@ -7944,7 +8056,7 @@
                           <m:rPr>
                             <m:sty m:val="p"/>
                           </m:rPr>
-                          <a:rPr lang="en-US" sz="3427" b="0" i="0">
+                          <a:rPr lang="en-US" sz="3326" b="0" i="0">
                             <a:solidFill>
                               <a:srgbClr val="111111"/>
                             </a:solidFill>
@@ -7957,7 +8069,7 @@
                         <m:sSub>
                           <m:sSubPr>
                             <m:ctrlPr>
-                              <a:rPr lang="en-US" sz="3427" b="0" i="1">
+                              <a:rPr lang="en-US" sz="3326" b="0" i="1">
                                 <a:solidFill>
                                   <a:srgbClr val="111111"/>
                                 </a:solidFill>
@@ -7973,7 +8085,7 @@
                                 <m:scr m:val="double-struck"/>
                                 <m:sty m:val="p"/>
                               </m:rPr>
-                              <a:rPr lang="en-US" sz="3427" b="0" i="0">
+                              <a:rPr lang="en-US" sz="3326" b="0" i="0">
                                 <a:solidFill>
                                   <a:srgbClr val="111111"/>
                                 </a:solidFill>
@@ -7988,7 +8100,7 @@
                             <m:sSub>
                               <m:sSubPr>
                                 <m:ctrlPr>
-                                  <a:rPr lang="en-US" sz="3427" b="0" i="1">
+                                  <a:rPr lang="en-US" sz="3326" b="0" i="1">
                                     <a:solidFill>
                                       <a:srgbClr val="111111"/>
                                     </a:solidFill>
@@ -8004,7 +8116,7 @@
                                     <m:scr m:val="script"/>
                                     <m:sty m:val="p"/>
                                   </m:rPr>
-                                  <a:rPr lang="en-US" sz="3427" b="0" i="0">
+                                  <a:rPr lang="en-US" sz="3326" b="0" i="0">
                                     <a:solidFill>
                                       <a:srgbClr val="111111"/>
                                     </a:solidFill>
@@ -8020,7 +8132,7 @@
                                   <m:rPr>
                                     <m:sty m:val="p"/>
                                   </m:rPr>
-                                  <a:rPr lang="en-US" sz="3427" b="0" i="0">
+                                  <a:rPr lang="en-US" sz="3326" b="0" i="0">
                                     <a:solidFill>
                                       <a:srgbClr val="111111"/>
                                     </a:solidFill>
@@ -8041,7 +8153,7 @@
                             <m:endChr m:val="]"/>
                             <m:grow/>
                             <m:ctrlPr>
-                              <a:rPr lang="en-US" sz="3427" b="0" i="1">
+                              <a:rPr lang="en-US" sz="3326" b="0" i="1">
                                 <a:solidFill>
                                   <a:srgbClr val="111111"/>
                                 </a:solidFill>
@@ -8055,7 +8167,7 @@
                             <m:sSub>
                               <m:sSubPr>
                                 <m:ctrlPr>
-                                  <a:rPr lang="en-US" sz="3427" b="0" i="1">
+                                  <a:rPr lang="en-US" sz="3326" b="0" i="1">
                                     <a:solidFill>
                                       <a:srgbClr val="111111"/>
                                     </a:solidFill>
@@ -8070,7 +8182,7 @@
                                   <m:rPr>
                                     <m:sty m:val="p"/>
                                   </m:rPr>
-                                  <a:rPr lang="en-US" sz="3427" b="0" i="0">
+                                  <a:rPr lang="en-US" sz="3326" b="0" i="0">
                                     <a:solidFill>
                                       <a:srgbClr val="111111"/>
                                     </a:solidFill>
@@ -8085,7 +8197,7 @@
                                 <m:sSub>
                                   <m:sSubPr>
                                     <m:ctrlPr>
-                                      <a:rPr lang="en-US" sz="3427" b="0" i="1">
+                                      <a:rPr lang="en-US" sz="3326" b="0" i="1">
                                         <a:solidFill>
                                           <a:srgbClr val="111111"/>
                                         </a:solidFill>
@@ -8101,7 +8213,7 @@
                                         <m:scr m:val="script"/>
                                         <m:sty m:val="p"/>
                                       </m:rPr>
-                                      <a:rPr lang="en-US" sz="3427" b="0" i="0">
+                                      <a:rPr lang="en-US" sz="3326" b="0" i="0">
                                         <a:solidFill>
                                           <a:srgbClr val="111111"/>
                                         </a:solidFill>
@@ -8117,7 +8229,7 @@
                                       <m:rPr>
                                         <m:sty m:val="p"/>
                                       </m:rPr>
-                                      <a:rPr lang="en-US" sz="3427" b="0" i="0">
+                                      <a:rPr lang="en-US" sz="3326" b="0" i="0">
                                         <a:solidFill>
                                           <a:srgbClr val="111111"/>
                                         </a:solidFill>
@@ -8135,7 +8247,7 @@
                               <m:rPr>
                                 <m:sty m:val="p"/>
                               </m:rPr>
-                              <a:rPr lang="en-US" sz="3427" b="0" i="0">
+                              <a:rPr lang="en-US" sz="3326" b="0" i="0">
                                 <a:solidFill>
                                   <a:srgbClr val="111111"/>
                                 </a:solidFill>
@@ -8149,7 +8261,7 @@
                               <m:rPr>
                                 <m:sty m:val="b"/>
                               </m:rPr>
-                              <a:rPr lang="en-US" sz="3427" b="1" i="0">
+                              <a:rPr lang="en-US" sz="3326" b="1" i="0">
                                 <a:solidFill>
                                   <a:srgbClr val="111111"/>
                                 </a:solidFill>
@@ -8163,7 +8275,7 @@
                               <m:rPr>
                                 <m:sty m:val="p"/>
                               </m:rPr>
-                              <a:rPr lang="en-US" sz="3427" b="0" i="0">
+                              <a:rPr lang="en-US" sz="3326" b="0" i="0">
                                 <a:solidFill>
                                   <a:srgbClr val="111111"/>
                                 </a:solidFill>
@@ -8177,7 +8289,7 @@
                               <m:rPr>
                                 <m:sty m:val="bi"/>
                               </m:rPr>
-                              <a:rPr lang="en-US" sz="3427" b="1" i="1">
+                              <a:rPr lang="en-US" sz="3326" b="1" i="1">
                                 <a:solidFill>
                                   <a:srgbClr val="111111"/>
                                 </a:solidFill>
@@ -8191,7 +8303,7 @@
                               <m:rPr>
                                 <m:sty m:val="p"/>
                               </m:rPr>
-                              <a:rPr lang="en-US" sz="3427" b="0" i="0">
+                              <a:rPr lang="en-US" sz="3326" b="0" i="0">
                                 <a:solidFill>
                                   <a:srgbClr val="111111"/>
                                 </a:solidFill>
@@ -8206,7 +8318,7 @@
                       </m:oMath>
                     </m:oMathPara>
                   </a14:m>
-                  <a:endParaRPr lang="en-US" sz="3427" b="0" i="0" kern="100" dirty="0">
+                  <a:endParaRPr lang="en-US" sz="3326" b="0" i="0" kern="100" dirty="0">
                     <a:solidFill>
                       <a:srgbClr val="111111"/>
                     </a:solidFill>
@@ -8237,7 +8349,7 @@
                         <m:sSub>
                           <m:sSubPr>
                             <m:ctrlPr>
-                              <a:rPr lang="en-US" sz="3427" b="0" i="1">
+                              <a:rPr lang="en-US" sz="3326" b="0" i="1">
                                 <a:solidFill>
                                   <a:srgbClr val="111111"/>
                                 </a:solidFill>
@@ -8252,7 +8364,7 @@
                               <m:rPr>
                                 <m:sty m:val="p"/>
                               </m:rPr>
-                              <a:rPr lang="en-US" sz="3427" b="0" i="0">
+                              <a:rPr lang="en-US" sz="3326" b="0" i="0">
                                 <a:solidFill>
                                   <a:srgbClr val="111111"/>
                                 </a:solidFill>
@@ -8267,7 +8379,7 @@
                             <m:sSub>
                               <m:sSubPr>
                                 <m:ctrlPr>
-                                  <a:rPr lang="en-US" sz="3427" b="0" i="1">
+                                  <a:rPr lang="en-US" sz="3326" b="0" i="1">
                                     <a:solidFill>
                                       <a:srgbClr val="111111"/>
                                     </a:solidFill>
@@ -8283,7 +8395,7 @@
                                     <m:scr m:val="script"/>
                                     <m:sty m:val="p"/>
                                   </m:rPr>
-                                  <a:rPr lang="en-US" sz="3427" b="0" i="0">
+                                  <a:rPr lang="en-US" sz="3326" b="0" i="0">
                                     <a:solidFill>
                                       <a:srgbClr val="111111"/>
                                     </a:solidFill>
@@ -8299,7 +8411,7 @@
                                   <m:rPr>
                                     <m:sty m:val="p"/>
                                   </m:rPr>
-                                  <a:rPr lang="en-US" sz="3427" b="0" i="0">
+                                  <a:rPr lang="en-US" sz="3326" b="0" i="0">
                                     <a:solidFill>
                                       <a:srgbClr val="111111"/>
                                     </a:solidFill>
@@ -8317,7 +8429,7 @@
                           <m:rPr>
                             <m:sty m:val="p"/>
                           </m:rPr>
-                          <a:rPr lang="en-US" sz="3427" b="0" i="0">
+                          <a:rPr lang="en-US" sz="3326" b="0" i="0">
                             <a:solidFill>
                               <a:srgbClr val="111111"/>
                             </a:solidFill>
@@ -8331,7 +8443,7 @@
                           <m:fPr>
                             <m:type m:val="bar"/>
                             <m:ctrlPr>
-                              <a:rPr lang="en-US" sz="3427" b="0" i="1">
+                              <a:rPr lang="en-US" sz="3326" b="0" i="1">
                                 <a:solidFill>
                                   <a:srgbClr val="111111"/>
                                 </a:solidFill>
@@ -8343,7 +8455,7 @@
                           </m:fPr>
                           <m:num>
                             <m:r>
-                              <a:rPr lang="en-US" sz="3427" b="0" i="1">
+                              <a:rPr lang="en-US" sz="3326" b="0" i="1">
                                 <a:solidFill>
                                   <a:srgbClr val="111111"/>
                                 </a:solidFill>
@@ -8359,7 +8471,7 @@
                               <m:rPr>
                                 <m:sty m:val="p"/>
                               </m:rPr>
-                              <a:rPr lang="en-US" sz="3427" b="0" i="0">
+                              <a:rPr lang="en-US" sz="3326" b="0" i="0">
                                 <a:solidFill>
                                   <a:srgbClr val="111111"/>
                                 </a:solidFill>
@@ -8374,7 +8486,7 @@
                                 <m:scr m:val="script"/>
                                 <m:sty m:val="p"/>
                               </m:rPr>
-                              <a:rPr lang="en-US" sz="3427" b="0" i="0">
+                              <a:rPr lang="en-US" sz="3326" b="0" i="0">
                                 <a:solidFill>
                                   <a:srgbClr val="111111"/>
                                 </a:solidFill>
@@ -8388,7 +8500,7 @@
                               <m:rPr>
                                 <m:sty m:val="p"/>
                               </m:rPr>
-                              <a:rPr lang="en-US" sz="3427" b="0" i="0">
+                              <a:rPr lang="en-US" sz="3326" b="0" i="0">
                                 <a:solidFill>
                                   <a:srgbClr val="111111"/>
                                 </a:solidFill>
@@ -8407,7 +8519,7 @@
                             <m:subHide m:val="off"/>
                             <m:supHide m:val="on"/>
                             <m:ctrlPr>
-                              <a:rPr lang="en-US" sz="3427" b="0" i="1">
+                              <a:rPr lang="en-US" sz="3326" b="0" i="1">
                                 <a:solidFill>
                                   <a:srgbClr val="111111"/>
                                 </a:solidFill>
@@ -8419,7 +8531,7 @@
                           </m:naryPr>
                           <m:sub>
                             <m:r>
-                              <a:rPr lang="en-US" sz="3427" b="0" i="1">
+                              <a:rPr lang="en-US" sz="3326" b="0" i="1">
                                 <a:solidFill>
                                   <a:srgbClr val="111111"/>
                                 </a:solidFill>
@@ -8433,7 +8545,7 @@
                               <m:rPr>
                                 <m:sty m:val="p"/>
                               </m:rPr>
-                              <a:rPr lang="en-US" sz="3427" b="0" i="0">
+                              <a:rPr lang="en-US" sz="3326" b="0" i="0">
                                 <a:solidFill>
                                   <a:srgbClr val="111111"/>
                                 </a:solidFill>
@@ -8448,7 +8560,7 @@
                                 <m:scr m:val="script"/>
                                 <m:sty m:val="p"/>
                               </m:rPr>
-                              <a:rPr lang="en-US" sz="3427" b="0" i="0">
+                              <a:rPr lang="en-US" sz="3326" b="0" i="0">
                                 <a:solidFill>
                                   <a:srgbClr val="111111"/>
                                 </a:solidFill>
@@ -8461,7 +8573,7 @@
                           </m:sub>
                           <m:sup>
                             <m:r>
-                              <a:rPr lang="en-US" sz="3427" b="0" i="1">
+                              <a:rPr lang="en-US" sz="3326" b="0" i="1">
                                 <a:solidFill>
                                   <a:srgbClr val="111111"/>
                                 </a:solidFill>
@@ -8476,7 +8588,7 @@
                             <m:sSup>
                               <m:sSupPr>
                                 <m:ctrlPr>
-                                  <a:rPr lang="en-US" sz="3427" b="0" i="1">
+                                  <a:rPr lang="en-US" sz="3326" b="0" i="1">
                                     <a:solidFill>
                                       <a:srgbClr val="111111"/>
                                     </a:solidFill>
@@ -8494,7 +8606,7 @@
                                     <m:endChr m:val=")"/>
                                     <m:grow/>
                                     <m:ctrlPr>
-                                      <a:rPr lang="en-US" sz="3427" b="0" i="1">
+                                      <a:rPr lang="en-US" sz="3326" b="0" i="1">
                                         <a:solidFill>
                                           <a:srgbClr val="111111"/>
                                         </a:solidFill>
@@ -8509,7 +8621,7 @@
                                       <m:rPr>
                                         <m:sty m:val="p"/>
                                       </m:rPr>
-                                      <a:rPr lang="en-US" sz="3427" b="0" i="0">
+                                      <a:rPr lang="en-US" sz="3326" b="0" i="0">
                                         <a:solidFill>
                                           <a:srgbClr val="111111"/>
                                         </a:solidFill>
@@ -8522,7 +8634,7 @@
                                     <m:sSub>
                                       <m:sSubPr>
                                         <m:ctrlPr>
-                                          <a:rPr lang="en-US" sz="3427" b="0" i="1">
+                                          <a:rPr lang="en-US" sz="3326" b="0" i="1">
                                             <a:solidFill>
                                               <a:srgbClr val="111111"/>
                                             </a:solidFill>
@@ -8537,7 +8649,7 @@
                                           <m:rPr>
                                             <m:sty m:val="b"/>
                                           </m:rPr>
-                                          <a:rPr lang="en-US" sz="3427" b="1" i="0">
+                                          <a:rPr lang="en-US" sz="3326" b="1" i="0">
                                             <a:solidFill>
                                               <a:srgbClr val="111111"/>
                                             </a:solidFill>
@@ -8550,7 +8662,7 @@
                                       </m:e>
                                       <m:sub>
                                         <m:r>
-                                          <a:rPr lang="en-US" sz="3427" b="0" i="1">
+                                          <a:rPr lang="en-US" sz="3326" b="0" i="1">
                                             <a:solidFill>
                                               <a:srgbClr val="111111"/>
                                             </a:solidFill>
@@ -8566,7 +8678,7 @@
                                       <m:rPr>
                                         <m:sty m:val="p"/>
                                       </m:rPr>
-                                      <a:rPr lang="en-US" sz="3427" b="0" i="0">
+                                      <a:rPr lang="en-US" sz="3326" b="0" i="0">
                                         <a:solidFill>
                                           <a:srgbClr val="111111"/>
                                         </a:solidFill>
@@ -8580,7 +8692,7 @@
                                       <m:rPr>
                                         <m:sty m:val="b"/>
                                       </m:rPr>
-                                      <a:rPr lang="en-US" sz="3427" b="1" i="0">
+                                      <a:rPr lang="en-US" sz="3326" b="1" i="0">
                                         <a:solidFill>
                                           <a:srgbClr val="111111"/>
                                         </a:solidFill>
@@ -8594,7 +8706,7 @@
                                       <m:rPr>
                                         <m:sty m:val="p"/>
                                       </m:rPr>
-                                      <a:rPr lang="en-US" sz="3427" b="0" i="0">
+                                      <a:rPr lang="en-US" sz="3326" b="0" i="0">
                                         <a:solidFill>
                                           <a:srgbClr val="111111"/>
                                         </a:solidFill>
@@ -8608,7 +8720,7 @@
                                       <m:rPr>
                                         <m:sty m:val="bi"/>
                                       </m:rPr>
-                                      <a:rPr lang="en-US" sz="3427" b="1" i="1">
+                                      <a:rPr lang="en-US" sz="3326" b="1" i="1">
                                         <a:solidFill>
                                           <a:srgbClr val="111111"/>
                                         </a:solidFill>
@@ -8622,7 +8734,7 @@
                                       <m:rPr>
                                         <m:sty m:val="p"/>
                                       </m:rPr>
-                                      <a:rPr lang="en-US" sz="3427" b="0" i="0">
+                                      <a:rPr lang="en-US" sz="3326" b="0" i="0">
                                         <a:solidFill>
                                           <a:srgbClr val="111111"/>
                                         </a:solidFill>
@@ -8635,7 +8747,7 @@
                                     <m:sSub>
                                       <m:sSubPr>
                                         <m:ctrlPr>
-                                          <a:rPr lang="en-US" sz="3427" b="0" i="1">
+                                          <a:rPr lang="en-US" sz="3326" b="0" i="1">
                                             <a:solidFill>
                                               <a:srgbClr val="111111"/>
                                             </a:solidFill>
@@ -8650,7 +8762,7 @@
                                           <m:rPr>
                                             <m:sty m:val="p"/>
                                           </m:rPr>
-                                          <a:rPr lang="en-US" sz="3427" b="0" i="0">
+                                          <a:rPr lang="en-US" sz="3326" b="0" i="0">
                                             <a:solidFill>
                                               <a:srgbClr val="111111"/>
                                             </a:solidFill>
@@ -8663,7 +8775,7 @@
                                       </m:e>
                                       <m:sub>
                                         <m:r>
-                                          <a:rPr lang="en-US" sz="3427" b="0" i="1">
+                                          <a:rPr lang="en-US" sz="3326" b="0" i="1">
                                             <a:solidFill>
                                               <a:srgbClr val="111111"/>
                                             </a:solidFill>
@@ -8679,7 +8791,7 @@
                                       <m:rPr>
                                         <m:sty m:val="p"/>
                                       </m:rPr>
-                                      <a:rPr lang="en-US" sz="3427" b="0" i="0">
+                                      <a:rPr lang="en-US" sz="3326" b="0" i="0">
                                         <a:solidFill>
                                           <a:srgbClr val="111111"/>
                                         </a:solidFill>
@@ -8693,7 +8805,7 @@
                                       <m:rPr>
                                         <m:sty m:val="p"/>
                                       </m:rPr>
-                                      <a:rPr lang="en-US" sz="3427" b="0" i="0">
+                                      <a:rPr lang="en-US" sz="3326" b="0" i="0">
                                         <a:solidFill>
                                           <a:srgbClr val="111111"/>
                                         </a:solidFill>
@@ -8706,7 +8818,7 @@
                                     <m:sSub>
                                       <m:sSubPr>
                                         <m:ctrlPr>
-                                          <a:rPr lang="en-US" sz="3427" b="0" i="1">
+                                          <a:rPr lang="en-US" sz="3326" b="0" i="1">
                                             <a:solidFill>
                                               <a:srgbClr val="111111"/>
                                             </a:solidFill>
@@ -8721,7 +8833,7 @@
                                           <m:rPr>
                                             <m:sty m:val="b"/>
                                           </m:rPr>
-                                          <a:rPr lang="en-US" sz="3427" b="1" i="0">
+                                          <a:rPr lang="en-US" sz="3326" b="1" i="0">
                                             <a:solidFill>
                                               <a:srgbClr val="111111"/>
                                             </a:solidFill>
@@ -8734,7 +8846,7 @@
                                       </m:e>
                                       <m:sub>
                                         <m:r>
-                                          <a:rPr lang="en-US" sz="3427" b="0" i="1">
+                                          <a:rPr lang="en-US" sz="3326" b="0" i="1">
                                             <a:solidFill>
                                               <a:srgbClr val="111111"/>
                                             </a:solidFill>
@@ -8750,7 +8862,7 @@
                                       <m:rPr>
                                         <m:sty m:val="p"/>
                                       </m:rPr>
-                                      <a:rPr lang="en-US" sz="3427" b="0" i="0">
+                                      <a:rPr lang="en-US" sz="3326" b="0" i="0">
                                         <a:solidFill>
                                           <a:srgbClr val="111111"/>
                                         </a:solidFill>
@@ -8764,7 +8876,7 @@
                                       <m:rPr>
                                         <m:sty m:val="b"/>
                                       </m:rPr>
-                                      <a:rPr lang="en-US" sz="3427" b="1" i="0">
+                                      <a:rPr lang="en-US" sz="3326" b="1" i="0">
                                         <a:solidFill>
                                           <a:srgbClr val="111111"/>
                                         </a:solidFill>
@@ -8778,7 +8890,7 @@
                                       <m:rPr>
                                         <m:sty m:val="p"/>
                                       </m:rPr>
-                                      <a:rPr lang="en-US" sz="3427" b="0" i="0">
+                                      <a:rPr lang="en-US" sz="3326" b="0" i="0">
                                         <a:solidFill>
                                           <a:srgbClr val="111111"/>
                                         </a:solidFill>
@@ -8791,7 +8903,7 @@
                                     <m:sSub>
                                       <m:sSubPr>
                                         <m:ctrlPr>
-                                          <a:rPr lang="en-US" sz="3427" b="0" i="1">
+                                          <a:rPr lang="en-US" sz="3326" b="0" i="1">
                                             <a:solidFill>
                                               <a:srgbClr val="111111"/>
                                             </a:solidFill>
@@ -8806,7 +8918,7 @@
                                           <m:rPr>
                                             <m:sty m:val="bi"/>
                                           </m:rPr>
-                                          <a:rPr lang="en-US" sz="3427" b="1" i="1">
+                                          <a:rPr lang="en-US" sz="3326" b="1" i="1">
                                             <a:solidFill>
                                               <a:srgbClr val="111111"/>
                                             </a:solidFill>
@@ -8822,7 +8934,7 @@
                                           <m:rPr>
                                             <m:sty m:val="p"/>
                                           </m:rPr>
-                                          <a:rPr lang="en-US" sz="3427" b="0" i="0">
+                                          <a:rPr lang="en-US" sz="3326" b="0" i="0">
                                             <a:solidFill>
                                               <a:srgbClr val="111111"/>
                                             </a:solidFill>
@@ -8838,7 +8950,7 @@
                                       <m:rPr>
                                         <m:sty m:val="p"/>
                                       </m:rPr>
-                                      <a:rPr lang="en-US" sz="3427" b="0" i="0">
+                                      <a:rPr lang="en-US" sz="3326" b="0" i="0">
                                         <a:solidFill>
                                           <a:srgbClr val="111111"/>
                                         </a:solidFill>
@@ -8851,7 +8963,7 @@
                                     <m:sSub>
                                       <m:sSubPr>
                                         <m:ctrlPr>
-                                          <a:rPr lang="en-US" sz="3427" b="0" i="1">
+                                          <a:rPr lang="en-US" sz="3326" b="0" i="1">
                                             <a:solidFill>
                                               <a:srgbClr val="111111"/>
                                             </a:solidFill>
@@ -8866,7 +8978,7 @@
                                           <m:rPr>
                                             <m:sty m:val="p"/>
                                           </m:rPr>
-                                          <a:rPr lang="en-US" sz="3427" b="0" i="0">
+                                          <a:rPr lang="en-US" sz="3326" b="0" i="0">
                                             <a:solidFill>
                                               <a:srgbClr val="111111"/>
                                             </a:solidFill>
@@ -8879,7 +8991,7 @@
                                       </m:e>
                                       <m:sub>
                                         <m:r>
-                                          <a:rPr lang="en-US" sz="3427" b="0" i="1">
+                                          <a:rPr lang="en-US" sz="3326" b="0" i="1">
                                             <a:solidFill>
                                               <a:srgbClr val="111111"/>
                                             </a:solidFill>
@@ -8896,7 +9008,7 @@
                               </m:e>
                               <m:sup>
                                 <m:r>
-                                  <a:rPr lang="en-US" sz="3427" b="0" i="1">
+                                  <a:rPr lang="en-US" sz="3326" b="0" i="1">
                                     <a:solidFill>
                                       <a:srgbClr val="111111"/>
                                     </a:solidFill>
@@ -8913,7 +9025,7 @@
                       </m:oMath>
                     </m:oMathPara>
                   </a14:m>
-                  <a:endParaRPr lang="en-US" sz="3427" b="0" i="0" kern="100" dirty="0">
+                  <a:endParaRPr lang="en-US" sz="3326" b="0" i="0" kern="100" dirty="0">
                     <a:solidFill>
                       <a:srgbClr val="111111"/>
                     </a:solidFill>
@@ -9038,7 +9150,7 @@
                         <m:sSub>
                           <m:sSubPr>
                             <m:ctrlPr>
-                              <a:rPr lang="en-US" sz="3427" b="0" i="1">
+                              <a:rPr lang="en-US" sz="3326" b="0" i="1">
                                 <a:solidFill>
                                   <a:srgbClr val="111111"/>
                                 </a:solidFill>
@@ -9053,7 +9165,7 @@
                               <m:rPr>
                                 <m:sty m:val="p"/>
                               </m:rPr>
-                              <a:rPr lang="en-US" sz="3427" b="0" i="0">
+                              <a:rPr lang="en-US" sz="3326" b="0" i="0">
                                 <a:solidFill>
                                   <a:srgbClr val="111111"/>
                                 </a:solidFill>
@@ -9068,7 +9180,7 @@
                             <m:sSub>
                               <m:sSubPr>
                                 <m:ctrlPr>
-                                  <a:rPr lang="en-US" sz="3427" b="0" i="1">
+                                  <a:rPr lang="en-US" sz="3326" b="0" i="1">
                                     <a:solidFill>
                                       <a:srgbClr val="111111"/>
                                     </a:solidFill>
@@ -9084,7 +9196,7 @@
                                     <m:scr m:val="script"/>
                                     <m:sty m:val="p"/>
                                   </m:rPr>
-                                  <a:rPr lang="en-US" sz="3427" b="0" i="0">
+                                  <a:rPr lang="en-US" sz="3326" b="0" i="0">
                                     <a:solidFill>
                                       <a:srgbClr val="111111"/>
                                     </a:solidFill>
@@ -9100,7 +9212,7 @@
                                   <m:rPr>
                                     <m:sty m:val="p"/>
                                   </m:rPr>
-                                  <a:rPr lang="en-US" sz="3427" b="0" i="0">
+                                  <a:rPr lang="en-US" sz="3326" b="0" i="0">
                                     <a:solidFill>
                                       <a:srgbClr val="111111"/>
                                     </a:solidFill>
@@ -9118,7 +9230,7 @@
                           <m:rPr>
                             <m:sty m:val="p"/>
                           </m:rPr>
-                          <a:rPr lang="en-US" sz="3427" b="0" i="0">
+                          <a:rPr lang="en-US" sz="3326" b="0" i="0">
                             <a:solidFill>
                               <a:srgbClr val="111111"/>
                             </a:solidFill>
@@ -9132,7 +9244,7 @@
                           <m:fPr>
                             <m:type m:val="bar"/>
                             <m:ctrlPr>
-                              <a:rPr lang="en-US" sz="3427" b="0" i="1">
+                              <a:rPr lang="en-US" sz="3326" b="0" i="1">
                                 <a:solidFill>
                                   <a:srgbClr val="111111"/>
                                 </a:solidFill>
@@ -9144,7 +9256,7 @@
                           </m:fPr>
                           <m:num>
                             <m:r>
-                              <a:rPr lang="en-US" sz="3427" b="0" i="1">
+                              <a:rPr lang="en-US" sz="3326" b="0" i="1">
                                 <a:solidFill>
                                   <a:srgbClr val="111111"/>
                                 </a:solidFill>
@@ -9160,7 +9272,7 @@
                               <m:rPr>
                                 <m:sty m:val="p"/>
                               </m:rPr>
-                              <a:rPr lang="en-US" sz="3427" b="0" i="0">
+                              <a:rPr lang="en-US" sz="3326" b="0" i="0">
                                 <a:solidFill>
                                   <a:srgbClr val="111111"/>
                                 </a:solidFill>
@@ -9175,7 +9287,7 @@
                                 <m:scr m:val="script"/>
                                 <m:sty m:val="p"/>
                               </m:rPr>
-                              <a:rPr lang="en-US" sz="3427" b="0" i="0">
+                              <a:rPr lang="en-US" sz="3326" b="0" i="0">
                                 <a:solidFill>
                                   <a:srgbClr val="111111"/>
                                 </a:solidFill>
@@ -9189,7 +9301,7 @@
                               <m:rPr>
                                 <m:sty m:val="p"/>
                               </m:rPr>
-                              <a:rPr lang="en-US" sz="3427" b="0" i="0">
+                              <a:rPr lang="en-US" sz="3326" b="0" i="0">
                                 <a:solidFill>
                                   <a:srgbClr val="111111"/>
                                 </a:solidFill>
@@ -9208,7 +9320,7 @@
                             <m:subHide m:val="off"/>
                             <m:supHide m:val="on"/>
                             <m:ctrlPr>
-                              <a:rPr lang="en-US" sz="3427" b="0" i="1">
+                              <a:rPr lang="en-US" sz="3326" b="0" i="1">
                                 <a:solidFill>
                                   <a:srgbClr val="111111"/>
                                 </a:solidFill>
@@ -9220,7 +9332,7 @@
                           </m:naryPr>
                           <m:sub>
                             <m:r>
-                              <a:rPr lang="en-US" sz="3427" b="0" i="1">
+                              <a:rPr lang="en-US" sz="3326" b="0" i="1">
                                 <a:solidFill>
                                   <a:srgbClr val="111111"/>
                                 </a:solidFill>
@@ -9234,7 +9346,7 @@
                               <m:rPr>
                                 <m:sty m:val="p"/>
                               </m:rPr>
-                              <a:rPr lang="en-US" sz="3427" b="0" i="0">
+                              <a:rPr lang="en-US" sz="3326" b="0" i="0">
                                 <a:solidFill>
                                   <a:srgbClr val="111111"/>
                                 </a:solidFill>
@@ -9249,7 +9361,7 @@
                                 <m:scr m:val="script"/>
                                 <m:sty m:val="p"/>
                               </m:rPr>
-                              <a:rPr lang="en-US" sz="3427" b="0" i="0">
+                              <a:rPr lang="en-US" sz="3326" b="0" i="0">
                                 <a:solidFill>
                                   <a:srgbClr val="111111"/>
                                 </a:solidFill>
@@ -9262,7 +9374,7 @@
                           </m:sub>
                           <m:sup>
                             <m:r>
-                              <a:rPr lang="en-US" sz="3427" b="0" i="1">
+                              <a:rPr lang="en-US" sz="3326" b="0" i="1">
                                 <a:solidFill>
                                   <a:srgbClr val="111111"/>
                                 </a:solidFill>
@@ -9277,7 +9389,7 @@
                             <m:sSup>
                               <m:sSupPr>
                                 <m:ctrlPr>
-                                  <a:rPr lang="en-US" sz="3427" b="0" i="1">
+                                  <a:rPr lang="en-US" sz="3326" b="0" i="1">
                                     <a:solidFill>
                                       <a:srgbClr val="111111"/>
                                     </a:solidFill>
@@ -9295,7 +9407,7 @@
                                     <m:endChr m:val=")"/>
                                     <m:grow/>
                                     <m:ctrlPr>
-                                      <a:rPr lang="en-US" sz="3427" b="0" i="1">
+                                      <a:rPr lang="en-US" sz="3326" b="0" i="1">
                                         <a:solidFill>
                                           <a:srgbClr val="111111"/>
                                         </a:solidFill>
@@ -9310,7 +9422,7 @@
                                       <m:rPr>
                                         <m:sty m:val="p"/>
                                       </m:rPr>
-                                      <a:rPr lang="en-US" sz="3427" b="0" i="0">
+                                      <a:rPr lang="en-US" sz="3326" b="0" i="0">
                                         <a:solidFill>
                                           <a:srgbClr val="111111"/>
                                         </a:solidFill>
@@ -9323,7 +9435,7 @@
                                     <m:sSub>
                                       <m:sSubPr>
                                         <m:ctrlPr>
-                                          <a:rPr lang="en-US" sz="3427" b="0" i="1">
+                                          <a:rPr lang="en-US" sz="3326" b="0" i="1">
                                             <a:solidFill>
                                               <a:srgbClr val="111111"/>
                                             </a:solidFill>
@@ -9338,7 +9450,7 @@
                                           <m:rPr>
                                             <m:sty m:val="b"/>
                                           </m:rPr>
-                                          <a:rPr lang="en-US" sz="3427" b="1" i="0">
+                                          <a:rPr lang="en-US" sz="3326" b="1" i="0">
                                             <a:solidFill>
                                               <a:srgbClr val="111111"/>
                                             </a:solidFill>
@@ -9351,7 +9463,7 @@
                                       </m:e>
                                       <m:sub>
                                         <m:r>
-                                          <a:rPr lang="en-US" sz="3427" b="0" i="1">
+                                          <a:rPr lang="en-US" sz="3326" b="0" i="1">
                                             <a:solidFill>
                                               <a:srgbClr val="111111"/>
                                             </a:solidFill>
@@ -9367,7 +9479,7 @@
                                       <m:rPr>
                                         <m:sty m:val="p"/>
                                       </m:rPr>
-                                      <a:rPr lang="en-US" sz="3427" b="0" i="0">
+                                      <a:rPr lang="en-US" sz="3326" b="0" i="0">
                                         <a:solidFill>
                                           <a:srgbClr val="111111"/>
                                         </a:solidFill>
@@ -9381,7 +9493,7 @@
                                       <m:rPr>
                                         <m:sty m:val="b"/>
                                       </m:rPr>
-                                      <a:rPr lang="en-US" sz="3427" b="1" i="0">
+                                      <a:rPr lang="en-US" sz="3326" b="1" i="0">
                                         <a:solidFill>
                                           <a:srgbClr val="111111"/>
                                         </a:solidFill>
@@ -9395,7 +9507,7 @@
                                       <m:rPr>
                                         <m:sty m:val="p"/>
                                       </m:rPr>
-                                      <a:rPr lang="en-US" sz="3427" b="0" i="0">
+                                      <a:rPr lang="en-US" sz="3326" b="0" i="0">
                                         <a:solidFill>
                                           <a:srgbClr val="111111"/>
                                         </a:solidFill>
@@ -9409,7 +9521,7 @@
                                       <m:rPr>
                                         <m:sty m:val="bi"/>
                                       </m:rPr>
-                                      <a:rPr lang="en-US" sz="3427" b="1" i="1">
+                                      <a:rPr lang="en-US" sz="3326" b="1" i="1">
                                         <a:solidFill>
                                           <a:srgbClr val="111111"/>
                                         </a:solidFill>
@@ -9423,7 +9535,7 @@
                                       <m:rPr>
                                         <m:sty m:val="p"/>
                                       </m:rPr>
-                                      <a:rPr lang="en-US" sz="3427" b="0" i="0">
+                                      <a:rPr lang="en-US" sz="3326" b="0" i="0">
                                         <a:solidFill>
                                           <a:srgbClr val="111111"/>
                                         </a:solidFill>
@@ -9436,7 +9548,7 @@
                                     <m:sSub>
                                       <m:sSubPr>
                                         <m:ctrlPr>
-                                          <a:rPr lang="en-US" sz="3427" b="0" i="1">
+                                          <a:rPr lang="en-US" sz="3326" b="0" i="1">
                                             <a:solidFill>
                                               <a:srgbClr val="111111"/>
                                             </a:solidFill>
@@ -9451,7 +9563,7 @@
                                           <m:rPr>
                                             <m:sty m:val="p"/>
                                           </m:rPr>
-                                          <a:rPr lang="en-US" sz="3427" b="0" i="0">
+                                          <a:rPr lang="en-US" sz="3326" b="0" i="0">
                                             <a:solidFill>
                                               <a:srgbClr val="111111"/>
                                             </a:solidFill>
@@ -9464,7 +9576,7 @@
                                       </m:e>
                                       <m:sub>
                                         <m:r>
-                                          <a:rPr lang="en-US" sz="3427" b="0" i="1">
+                                          <a:rPr lang="en-US" sz="3326" b="0" i="1">
                                             <a:solidFill>
                                               <a:srgbClr val="111111"/>
                                             </a:solidFill>
@@ -9480,7 +9592,7 @@
                                       <m:rPr>
                                         <m:sty m:val="p"/>
                                       </m:rPr>
-                                      <a:rPr lang="en-US" sz="3427" b="0" i="0">
+                                      <a:rPr lang="en-US" sz="3326" b="0" i="0">
                                         <a:solidFill>
                                           <a:srgbClr val="111111"/>
                                         </a:solidFill>
@@ -9494,7 +9606,7 @@
                                       <m:rPr>
                                         <m:sty m:val="p"/>
                                       </m:rPr>
-                                      <a:rPr lang="en-US" sz="3427" b="0" i="0">
+                                      <a:rPr lang="en-US" sz="3326" b="0" i="0">
                                         <a:solidFill>
                                           <a:srgbClr val="111111"/>
                                         </a:solidFill>
@@ -9507,7 +9619,7 @@
                                     <m:sSub>
                                       <m:sSubPr>
                                         <m:ctrlPr>
-                                          <a:rPr lang="en-US" sz="3427" b="0" i="1">
+                                          <a:rPr lang="en-US" sz="3326" b="0" i="1">
                                             <a:solidFill>
                                               <a:srgbClr val="111111"/>
                                             </a:solidFill>
@@ -9522,7 +9634,7 @@
                                           <m:rPr>
                                             <m:sty m:val="b"/>
                                           </m:rPr>
-                                          <a:rPr lang="en-US" sz="3427" b="1" i="0">
+                                          <a:rPr lang="en-US" sz="3326" b="1" i="0">
                                             <a:solidFill>
                                               <a:srgbClr val="111111"/>
                                             </a:solidFill>
@@ -9535,7 +9647,7 @@
                                       </m:e>
                                       <m:sub>
                                         <m:r>
-                                          <a:rPr lang="en-US" sz="3427" b="0" i="1">
+                                          <a:rPr lang="en-US" sz="3326" b="0" i="1">
                                             <a:solidFill>
                                               <a:srgbClr val="111111"/>
                                             </a:solidFill>
@@ -9551,7 +9663,7 @@
                                       <m:rPr>
                                         <m:sty m:val="p"/>
                                       </m:rPr>
-                                      <a:rPr lang="en-US" sz="3427" b="0" i="0">
+                                      <a:rPr lang="en-US" sz="3326" b="0" i="0">
                                         <a:solidFill>
                                           <a:srgbClr val="111111"/>
                                         </a:solidFill>
@@ -9565,7 +9677,7 @@
                                       <m:rPr>
                                         <m:sty m:val="b"/>
                                       </m:rPr>
-                                      <a:rPr lang="en-US" sz="3427" b="1" i="0">
+                                      <a:rPr lang="en-US" sz="3326" b="1" i="0">
                                         <a:solidFill>
                                           <a:srgbClr val="111111"/>
                                         </a:solidFill>
@@ -9579,7 +9691,7 @@
                                       <m:rPr>
                                         <m:sty m:val="p"/>
                                       </m:rPr>
-                                      <a:rPr lang="en-US" sz="3427" b="0" i="0">
+                                      <a:rPr lang="en-US" sz="3326" b="0" i="0">
                                         <a:solidFill>
                                           <a:srgbClr val="111111"/>
                                         </a:solidFill>
@@ -9592,7 +9704,7 @@
                                     <m:sSub>
                                       <m:sSubPr>
                                         <m:ctrlPr>
-                                          <a:rPr lang="en-US" sz="3427" b="0" i="1">
+                                          <a:rPr lang="en-US" sz="3326" b="0" i="1">
                                             <a:solidFill>
                                               <a:srgbClr val="111111"/>
                                             </a:solidFill>
@@ -9607,7 +9719,7 @@
                                           <m:rPr>
                                             <m:sty m:val="bi"/>
                                           </m:rPr>
-                                          <a:rPr lang="en-US" sz="3427" b="1" i="1">
+                                          <a:rPr lang="en-US" sz="3326" b="1" i="1">
                                             <a:solidFill>
                                               <a:srgbClr val="111111"/>
                                             </a:solidFill>
@@ -9623,7 +9735,7 @@
                                           <m:rPr>
                                             <m:sty m:val="p"/>
                                           </m:rPr>
-                                          <a:rPr lang="en-US" sz="3427" b="0" i="0">
+                                          <a:rPr lang="en-US" sz="3326" b="0" i="0">
                                             <a:solidFill>
                                               <a:srgbClr val="111111"/>
                                             </a:solidFill>
@@ -9639,7 +9751,7 @@
                                       <m:rPr>
                                         <m:sty m:val="p"/>
                                       </m:rPr>
-                                      <a:rPr lang="en-US" sz="3427" b="0" i="0">
+                                      <a:rPr lang="en-US" sz="3326" b="0" i="0">
                                         <a:solidFill>
                                           <a:srgbClr val="111111"/>
                                         </a:solidFill>
@@ -9652,7 +9764,7 @@
                                     <m:sSub>
                                       <m:sSubPr>
                                         <m:ctrlPr>
-                                          <a:rPr lang="en-US" sz="3427" b="0" i="1">
+                                          <a:rPr lang="en-US" sz="3326" b="0" i="1">
                                             <a:solidFill>
                                               <a:srgbClr val="111111"/>
                                             </a:solidFill>
@@ -9667,7 +9779,7 @@
                                           <m:rPr>
                                             <m:sty m:val="p"/>
                                           </m:rPr>
-                                          <a:rPr lang="en-US" sz="3427" b="0" i="0">
+                                          <a:rPr lang="en-US" sz="3326" b="0" i="0">
                                             <a:solidFill>
                                               <a:srgbClr val="111111"/>
                                             </a:solidFill>
@@ -9680,7 +9792,7 @@
                                       </m:e>
                                       <m:sub>
                                         <m:r>
-                                          <a:rPr lang="en-US" sz="3427" b="0" i="1">
+                                          <a:rPr lang="en-US" sz="3326" b="0" i="1">
                                             <a:solidFill>
                                               <a:srgbClr val="111111"/>
                                             </a:solidFill>
@@ -9697,7 +9809,7 @@
                               </m:e>
                               <m:sup>
                                 <m:r>
-                                  <a:rPr lang="en-US" sz="3427" b="0" i="1">
+                                  <a:rPr lang="en-US" sz="3326" b="0" i="1">
                                     <a:solidFill>
                                       <a:srgbClr val="111111"/>
                                     </a:solidFill>
@@ -9714,7 +9826,7 @@
                       </m:oMath>
                     </m:oMathPara>
                   </a14:m>
-                  <a:endParaRPr lang="en-US" sz="3427" b="0" i="0" kern="100" dirty="0">
+                  <a:endParaRPr lang="en-US" sz="3326" b="0" i="0" kern="100" dirty="0">
                     <a:solidFill>
                       <a:srgbClr val="111111"/>
                     </a:solidFill>
@@ -9839,7 +9951,7 @@
                         <m:limLow>
                           <m:limLowPr>
                             <m:ctrlPr>
-                              <a:rPr lang="en-US" sz="3427" b="0" i="1">
+                              <a:rPr lang="en-US" sz="3326" b="0" i="1">
                                 <a:solidFill>
                                   <a:srgbClr val="111111"/>
                                 </a:solidFill>
@@ -9854,7 +9966,7 @@
                               <m:rPr>
                                 <m:sty m:val="p"/>
                               </m:rPr>
-                              <a:rPr lang="en-US" sz="3427" b="0" i="0">
+                              <a:rPr lang="en-US" sz="3326" b="0" i="0">
                                 <a:solidFill>
                                   <a:srgbClr val="111111"/>
                                 </a:solidFill>
@@ -9870,7 +9982,7 @@
                               <m:rPr>
                                 <m:sty m:val="bi"/>
                               </m:rPr>
-                              <a:rPr lang="en-US" sz="3427" b="1" i="1">
+                              <a:rPr lang="en-US" sz="3326" b="1" i="1">
                                 <a:solidFill>
                                   <a:srgbClr val="111111"/>
                                 </a:solidFill>
@@ -9883,7 +9995,7 @@
                           </m:lim>
                         </m:limLow>
                         <m:r>
-                          <a:rPr lang="en-US" sz="3427" b="0" i="1">
+                          <a:rPr lang="en-US" sz="3326" b="0" i="1">
                             <a:solidFill>
                               <a:srgbClr val="111111"/>
                             </a:solidFill>
@@ -9896,7 +10008,7 @@
                         <m:sSub>
                           <m:sSubPr>
                             <m:ctrlPr>
-                              <a:rPr lang="en-US" sz="3427" b="0" i="1">
+                              <a:rPr lang="en-US" sz="3326" b="0" i="1">
                                 <a:solidFill>
                                   <a:srgbClr val="111111"/>
                                 </a:solidFill>
@@ -9908,7 +10020,7 @@
                           </m:sSubPr>
                           <m:e>
                             <m:r>
-                              <a:rPr lang="en-US" sz="3427" b="0" i="1">
+                              <a:rPr lang="en-US" sz="3326" b="0" i="1">
                                 <a:solidFill>
                                   <a:srgbClr val="111111"/>
                                 </a:solidFill>
@@ -9924,7 +10036,7 @@
                               <m:rPr>
                                 <m:sty m:val="p"/>
                               </m:rPr>
-                              <a:rPr lang="en-US" sz="3427" b="0" i="0">
+                              <a:rPr lang="en-US" sz="3326" b="0" i="0">
                                 <a:solidFill>
                                   <a:srgbClr val="111111"/>
                                 </a:solidFill>
@@ -9940,7 +10052,7 @@
                           <m:rPr>
                             <m:sty m:val="p"/>
                           </m:rPr>
-                          <a:rPr lang="en-US" sz="3427" b="0" i="0">
+                          <a:rPr lang="en-US" sz="3326" b="0" i="0">
                             <a:solidFill>
                               <a:srgbClr val="111111"/>
                             </a:solidFill>
@@ -9954,7 +10066,7 @@
                           <m:rPr>
                             <m:sty m:val="bi"/>
                           </m:rPr>
-                          <a:rPr lang="en-US" sz="3427" b="1" i="1">
+                          <a:rPr lang="en-US" sz="3326" b="1" i="1">
                             <a:solidFill>
                               <a:srgbClr val="111111"/>
                             </a:solidFill>
@@ -9968,7 +10080,7 @@
                           <m:rPr>
                             <m:sty m:val="p"/>
                           </m:rPr>
-                          <a:rPr lang="en-US" sz="3427" b="0" i="0">
+                          <a:rPr lang="en-US" sz="3326" b="0" i="0">
                             <a:solidFill>
                               <a:srgbClr val="111111"/>
                             </a:solidFill>
@@ -9981,7 +10093,7 @@
                         <m:sSub>
                           <m:sSubPr>
                             <m:ctrlPr>
-                              <a:rPr lang="en-US" sz="3427" b="0" i="1">
+                              <a:rPr lang="en-US" sz="3326" b="0" i="1">
                                 <a:solidFill>
                                   <a:srgbClr val="111111"/>
                                 </a:solidFill>
@@ -9997,7 +10109,7 @@
                                 <m:scr m:val="script"/>
                                 <m:sty m:val="p"/>
                               </m:rPr>
-                              <a:rPr lang="en-US" sz="3427" b="0" i="0">
+                              <a:rPr lang="en-US" sz="3326" b="0" i="0">
                                 <a:solidFill>
                                   <a:srgbClr val="111111"/>
                                 </a:solidFill>
@@ -10013,7 +10125,7 @@
                               <m:rPr>
                                 <m:sty m:val="p"/>
                               </m:rPr>
-                              <a:rPr lang="en-US" sz="3427" b="0" i="0">
+                              <a:rPr lang="en-US" sz="3326" b="0" i="0">
                                 <a:solidFill>
                                   <a:srgbClr val="111111"/>
                                 </a:solidFill>
@@ -10029,7 +10141,7 @@
                           <m:rPr>
                             <m:sty m:val="p"/>
                           </m:rPr>
-                          <a:rPr lang="en-US" sz="3427" b="0" i="0">
+                          <a:rPr lang="en-US" sz="3326" b="0" i="0">
                             <a:solidFill>
                               <a:srgbClr val="111111"/>
                             </a:solidFill>
@@ -10043,7 +10155,7 @@
                           <m:rPr>
                             <m:sty m:val="p"/>
                           </m:rPr>
-                          <a:rPr lang="en-US" sz="3427" b="0" i="0">
+                          <a:rPr lang="en-US" sz="3326" b="0" i="0">
                             <a:solidFill>
                               <a:srgbClr val="111111"/>
                             </a:solidFill>
@@ -10054,7 +10166,7 @@
                           <m:t>+</m:t>
                         </m:r>
                         <m:r>
-                          <a:rPr lang="en-US" sz="3427" b="0" i="1">
+                          <a:rPr lang="en-US" sz="3326" b="0" i="1">
                             <a:solidFill>
                               <a:srgbClr val="111111"/>
                             </a:solidFill>
@@ -10065,7 +10177,7 @@
                           <m:t>γ</m:t>
                         </m:r>
                         <m:r>
-                          <a:rPr lang="en-US" sz="3427" b="0" i="1">
+                          <a:rPr lang="en-US" sz="3326" b="0" i="1">
                             <a:solidFill>
                               <a:srgbClr val="111111"/>
                             </a:solidFill>
@@ -10078,7 +10190,7 @@
                         <m:sSub>
                           <m:sSubPr>
                             <m:ctrlPr>
-                              <a:rPr lang="en-US" sz="3427" b="0" i="1">
+                              <a:rPr lang="en-US" sz="3326" b="0" i="1">
                                 <a:solidFill>
                                   <a:srgbClr val="111111"/>
                                 </a:solidFill>
@@ -10090,7 +10202,7 @@
                           </m:sSubPr>
                           <m:e>
                             <m:r>
-                              <a:rPr lang="en-US" sz="3427" b="0" i="1">
+                              <a:rPr lang="en-US" sz="3326" b="0" i="1">
                                 <a:solidFill>
                                   <a:srgbClr val="111111"/>
                                 </a:solidFill>
@@ -10106,7 +10218,7 @@
                               <m:rPr>
                                 <m:sty m:val="p"/>
                               </m:rPr>
-                              <a:rPr lang="en-US" sz="3427" b="0" i="0">
+                              <a:rPr lang="en-US" sz="3326" b="0" i="0">
                                 <a:solidFill>
                                   <a:srgbClr val="111111"/>
                                 </a:solidFill>
@@ -10122,7 +10234,7 @@
                           <m:rPr>
                             <m:sty m:val="p"/>
                           </m:rPr>
-                          <a:rPr lang="en-US" sz="3427" b="0" i="0">
+                          <a:rPr lang="en-US" sz="3326" b="0" i="0">
                             <a:solidFill>
                               <a:srgbClr val="111111"/>
                             </a:solidFill>
@@ -10136,7 +10248,7 @@
                           <m:rPr>
                             <m:sty m:val="bi"/>
                           </m:rPr>
-                          <a:rPr lang="en-US" sz="3427" b="1" i="1">
+                          <a:rPr lang="en-US" sz="3326" b="1" i="1">
                             <a:solidFill>
                               <a:srgbClr val="111111"/>
                             </a:solidFill>
@@ -10150,7 +10262,7 @@
                           <m:rPr>
                             <m:sty m:val="p"/>
                           </m:rPr>
-                          <a:rPr lang="en-US" sz="3427" b="0" i="0">
+                          <a:rPr lang="en-US" sz="3326" b="0" i="0">
                             <a:solidFill>
                               <a:srgbClr val="111111"/>
                             </a:solidFill>
@@ -10163,7 +10275,7 @@
                         <m:sSub>
                           <m:sSubPr>
                             <m:ctrlPr>
-                              <a:rPr lang="en-US" sz="3427" b="0" i="1">
+                              <a:rPr lang="en-US" sz="3326" b="0" i="1">
                                 <a:solidFill>
                                   <a:srgbClr val="111111"/>
                                 </a:solidFill>
@@ -10179,7 +10291,7 @@
                                 <m:scr m:val="script"/>
                                 <m:sty m:val="p"/>
                               </m:rPr>
-                              <a:rPr lang="en-US" sz="3427" b="0" i="0">
+                              <a:rPr lang="en-US" sz="3326" b="0" i="0">
                                 <a:solidFill>
                                   <a:srgbClr val="111111"/>
                                 </a:solidFill>
@@ -10195,7 +10307,7 @@
                               <m:rPr>
                                 <m:sty m:val="p"/>
                               </m:rPr>
-                              <a:rPr lang="en-US" sz="3427" b="0" i="0">
+                              <a:rPr lang="en-US" sz="3326" b="0" i="0">
                                 <a:solidFill>
                                   <a:srgbClr val="111111"/>
                                 </a:solidFill>
@@ -10211,7 +10323,7 @@
                           <m:rPr>
                             <m:sty m:val="p"/>
                           </m:rPr>
-                          <a:rPr lang="en-US" sz="3427" b="0" i="0">
+                          <a:rPr lang="en-US" sz="3326" b="0" i="0">
                             <a:solidFill>
                               <a:srgbClr val="111111"/>
                             </a:solidFill>
@@ -10224,7 +10336,7 @@
                         <m:sSub>
                           <m:sSubPr>
                             <m:ctrlPr>
-                              <a:rPr lang="en-US" sz="3427" b="0" i="1">
+                              <a:rPr lang="en-US" sz="3326" b="0" i="1">
                                 <a:solidFill>
                                   <a:srgbClr val="111111"/>
                                 </a:solidFill>
@@ -10240,7 +10352,7 @@
                                 <m:scr m:val="script"/>
                                 <m:sty m:val="p"/>
                               </m:rPr>
-                              <a:rPr lang="en-US" sz="3427" b="0" i="0">
+                              <a:rPr lang="en-US" sz="3326" b="0" i="0">
                                 <a:solidFill>
                                   <a:srgbClr val="111111"/>
                                 </a:solidFill>
@@ -10256,7 +10368,7 @@
                               <m:rPr>
                                 <m:sty m:val="p"/>
                               </m:rPr>
-                              <a:rPr lang="en-US" sz="3427" b="0" i="0">
+                              <a:rPr lang="en-US" sz="3326" b="0" i="0">
                                 <a:solidFill>
                                   <a:srgbClr val="111111"/>
                                 </a:solidFill>
@@ -10272,7 +10384,7 @@
                           <m:rPr>
                             <m:sty m:val="p"/>
                           </m:rPr>
-                          <a:rPr lang="en-US" sz="3427" b="0" i="0">
+                          <a:rPr lang="en-US" sz="3326" b="0" i="0">
                             <a:solidFill>
                               <a:srgbClr val="111111"/>
                             </a:solidFill>
@@ -10286,7 +10398,7 @@
                           <m:rPr>
                             <m:sty m:val="p"/>
                           </m:rPr>
-                          <a:rPr lang="en-US" sz="3427" b="0" i="0">
+                          <a:rPr lang="en-US" sz="3326" b="0" i="0">
                             <a:solidFill>
                               <a:srgbClr val="111111"/>
                             </a:solidFill>
@@ -10297,7 +10409,7 @@
                           <m:t>+</m:t>
                         </m:r>
                         <m:r>
-                          <a:rPr lang="en-US" sz="3427" b="0" i="1">
+                          <a:rPr lang="en-US" sz="3326" b="0" i="1">
                             <a:solidFill>
                               <a:srgbClr val="111111"/>
                             </a:solidFill>
@@ -10308,7 +10420,7 @@
                           <m:t>λ</m:t>
                         </m:r>
                         <m:r>
-                          <a:rPr lang="en-US" sz="3427" b="0" i="1">
+                          <a:rPr lang="en-US" sz="3326" b="0" i="1">
                             <a:solidFill>
                               <a:srgbClr val="111111"/>
                             </a:solidFill>
@@ -10321,7 +10433,7 @@
                         <m:sSub>
                           <m:sSubPr>
                             <m:ctrlPr>
-                              <a:rPr lang="en-US" sz="3427" b="0" i="1">
+                              <a:rPr lang="en-US" sz="3326" b="0" i="1">
                                 <a:solidFill>
                                   <a:srgbClr val="111111"/>
                                 </a:solidFill>
@@ -10333,7 +10445,7 @@
                           </m:sSubPr>
                           <m:e>
                             <m:r>
-                              <a:rPr lang="en-US" sz="3427" b="0" i="1">
+                              <a:rPr lang="en-US" sz="3326" b="0" i="1">
                                 <a:solidFill>
                                   <a:srgbClr val="111111"/>
                                 </a:solidFill>
@@ -10349,7 +10461,7 @@
                               <m:rPr>
                                 <m:sty m:val="p"/>
                               </m:rPr>
-                              <a:rPr lang="en-US" sz="3427" b="0" i="0">
+                              <a:rPr lang="en-US" sz="3326" b="0" i="0">
                                 <a:solidFill>
                                   <a:srgbClr val="111111"/>
                                 </a:solidFill>
@@ -10363,7 +10475,7 @@
                               <m:rPr>
                                 <m:sty m:val="p"/>
                               </m:rPr>
-                              <a:rPr lang="en-US" sz="3427" b="0" i="0">
+                              <a:rPr lang="en-US" sz="3326" b="0" i="0">
                                 <a:solidFill>
                                   <a:srgbClr val="111111"/>
                                 </a:solidFill>
@@ -10379,7 +10491,7 @@
                           <m:rPr>
                             <m:sty m:val="p"/>
                           </m:rPr>
-                          <a:rPr lang="en-US" sz="3427" b="0" i="0">
+                          <a:rPr lang="en-US" sz="3326" b="0" i="0">
                             <a:solidFill>
                               <a:srgbClr val="111111"/>
                             </a:solidFill>
@@ -10393,7 +10505,7 @@
                           <m:rPr>
                             <m:sty m:val="bi"/>
                           </m:rPr>
-                          <a:rPr lang="en-US" sz="3427" b="1" i="1">
+                          <a:rPr lang="en-US" sz="3326" b="1" i="1">
                             <a:solidFill>
                               <a:srgbClr val="111111"/>
                             </a:solidFill>
@@ -10407,7 +10519,7 @@
                           <m:rPr>
                             <m:sty m:val="p"/>
                           </m:rPr>
-                          <a:rPr lang="en-US" sz="3427" b="0" i="0">
+                          <a:rPr lang="en-US" sz="3326" b="0" i="0">
                             <a:solidFill>
                               <a:srgbClr val="111111"/>
                             </a:solidFill>
@@ -10420,7 +10532,7 @@
                       </m:oMath>
                     </m:oMathPara>
                   </a14:m>
-                  <a:endParaRPr lang="en-US" sz="3427" b="0" i="0" kern="100" dirty="0">
+                  <a:endParaRPr lang="en-US" sz="3326" b="0" i="0" kern="100" dirty="0">
                     <a:solidFill>
                       <a:srgbClr val="111111"/>
                     </a:solidFill>
@@ -10435,7 +10547,7 @@
           <mc:Fallback>
             <p:sp>
               <p:nvSpPr>
-                <p:cNvPr id="48" name="Equations: align with … ⇒ forget align with … ⇒ recover"/>
+                <p:cNvPr id="50" name="Equations: align with … ⇒ forget align with … ⇒ recover"/>
                 <p:cNvSpPr txBox="1">
                   <a:spLocks noRot="1" noChangeAspect="1" noMove="1" noResize="1" noEditPoints="1" noAdjustHandles="1" noChangeArrowheads="1" noChangeShapeType="1" noTextEdit="1"/>
                 </p:cNvSpPr>
@@ -10443,8 +10555,8 @@
               </p:nvSpPr>
               <p:spPr>
                 <a:xfrm>
-                  <a:off x="22146865" y="17075051"/>
-                  <a:ext cx="10799266" cy="4374042"/>
+                  <a:off x="22146865" y="17165687"/>
+                  <a:ext cx="10799266" cy="4309103"/>
                 </a:xfrm>
                 <a:prstGeom prst="rect">
                   <a:avLst/>
@@ -10473,7 +10585,7 @@
         </mc:AlternateContent>
         <p:sp>
           <p:nvSpPr>
-            <p:cNvPr id="49" name="Insight: Insight 3. Standard backdoor training distorts s"/>
+            <p:cNvPr id="51" name="Insight: Insight 3. Standard backdoor training distorts s"/>
             <p:cNvSpPr/>
             <p:nvPr/>
           </p:nvSpPr>
@@ -10568,7 +10680,7 @@
         </p:sp>
         <p:sp>
           <p:nvSpPr>
-            <p:cNvPr id="50" name="Insight: Insight 3. Standard backdoor training distorts s (rule)"/>
+            <p:cNvPr id="52" name="Insight: Insight 3. Standard backdoor training distorts s (rule)"/>
             <p:cNvSpPr/>
             <p:nvPr/>
           </p:nvSpPr>
@@ -10591,7 +10703,7 @@
       </p:grpSp>
       <p:grpSp>
         <p:nvGrpSpPr>
-          <p:cNvPr id="73" name="Section: Experiment Result Highlights"/>
+          <p:cNvPr id="75" name="Section: Experiment Result Highlights"/>
           <p:cNvGrpSpPr/>
           <p:nvPr/>
         </p:nvGrpSpPr>
@@ -10605,7 +10717,7 @@
         </p:grpSpPr>
         <p:sp>
           <p:nvSpPr>
-            <p:cNvPr id="51" name="Section title: Experiment Result Highlights"/>
+            <p:cNvPr id="53" name="Section title: Experiment Result Highlights"/>
             <p:cNvSpPr txBox="1"/>
             <p:nvPr/>
           </p:nvSpPr>
@@ -10666,7 +10778,7 @@
         </p:sp>
         <p:pic>
           <p:nvPicPr>
-            <p:cNvPr id="52" name="Picture: table1_muse" descr="Table 1 of the paper: UE, BE and UT on MUSE-Books and MUSE-News"/>
+            <p:cNvPr id="54" name="Picture: table1_muse" descr="Table 1 of the paper: UE, BE and UT on MUSE-Books and MUSE-News"/>
             <p:cNvPicPr>
               <a:picLocks noChangeAspect="1"/>
             </p:cNvPicPr>
@@ -10696,7 +10808,7 @@
         </p:pic>
         <p:sp>
           <p:nvSpPr>
-            <p:cNvPr id="53" name="Caption: Table 1. Results on MUSE [4] with NPO [5] / RMU "/>
+            <p:cNvPr id="55" name="Caption: Table 1. Results on MUSE [4] with NPO [5] / RMU "/>
             <p:cNvSpPr txBox="1"/>
             <p:nvPr/>
           </p:nvSpPr>
@@ -10788,7 +10900,7 @@
         </p:sp>
         <p:pic>
           <p:nvPicPr>
-            <p:cNvPr id="54" name="Picture: table2_wmdp" descr="Table 2 of the paper: results on WMDP-Bio"/>
+            <p:cNvPr id="56" name="Picture: table2_wmdp" descr="Table 2 of the paper: results on WMDP-Bio"/>
             <p:cNvPicPr>
               <a:picLocks noChangeAspect="1"/>
             </p:cNvPicPr>
@@ -10818,7 +10930,7 @@
         </p:pic>
         <p:sp>
           <p:nvSpPr>
-            <p:cNvPr id="55" name="Caption: Table 2. Results on WMDP-Bio [6] (Zephyr-7B, acc"/>
+            <p:cNvPr id="57" name="Caption: Table 2. Results on WMDP-Bio [6] (Zephyr-7B, acc"/>
             <p:cNvSpPr txBox="1"/>
             <p:nvPr/>
           </p:nvSpPr>
@@ -10885,7 +10997,7 @@
         </p:sp>
         <p:sp>
           <p:nvSpPr>
-            <p:cNvPr id="56" name="Takeaway: Takeaway. NPO‑Backdoor looks unlearned (VM 0.02)"/>
+            <p:cNvPr id="58" name="Takeaway: Takeaway. NPO‑Backdoor looks unlearned (VM 0.02)"/>
             <p:cNvSpPr/>
             <p:nvPr/>
           </p:nvSpPr>
@@ -10982,7 +11094,7 @@
       </p:grpSp>
       <p:grpSp>
         <p:nvGrpSpPr>
-          <p:cNvPr id="74" name="Section: Table 3"/>
+          <p:cNvPr id="76" name="Section: Table 3"/>
           <p:cNvGrpSpPr/>
           <p:nvPr/>
         </p:nvGrpSpPr>
@@ -10996,7 +11108,7 @@
         </p:grpSpPr>
         <p:pic>
           <p:nvPicPr>
-            <p:cNvPr id="57" name="Picture: table3_sinkmask" descr="Table 3 of the paper: effect of attention-sink masking"/>
+            <p:cNvPr id="59" name="Picture: table3_sinkmask" descr="Table 3 of the paper: effect of attention-sink masking"/>
             <p:cNvPicPr>
               <a:picLocks noChangeAspect="1"/>
             </p:cNvPicPr>
@@ -11028,7 +11140,7 @@
           <mc:Choice Requires="a14">
             <p:sp>
               <p:nvSpPr>
-                <p:cNvPr id="58" name="Caption: Table 3. Masking the … sink tokens at inference "/>
+                <p:cNvPr id="60" name="Caption: Table 3. Masking the … sink tokens at inference "/>
                 <p:cNvSpPr txBox="1"/>
                 <p:nvPr/>
               </p:nvSpPr>
@@ -11148,7 +11260,7 @@
           <mc:Fallback>
             <p:sp>
               <p:nvSpPr>
-                <p:cNvPr id="58" name="Caption: Table 3. Masking the … sink tokens at inference "/>
+                <p:cNvPr id="60" name="Caption: Table 3. Masking the … sink tokens at inference "/>
                 <p:cNvSpPr txBox="1">
                   <a:spLocks noRot="1" noChangeAspect="1" noMove="1" noResize="1" noEditPoints="1" noAdjustHandles="1" noChangeArrowheads="1" noChangeShapeType="1" noTextEdit="1"/>
                 </p:cNvSpPr>
@@ -11186,7 +11298,7 @@
         </mc:AlternateContent>
         <p:sp>
           <p:nvSpPr>
-            <p:cNvPr id="59" name="Insight: Sink masking. BE‑VM 90.71 → 0.14."/>
+            <p:cNvPr id="61" name="Insight: Sink masking. BE‑VM 90.71 → 0.14."/>
             <p:cNvSpPr/>
             <p:nvPr/>
           </p:nvSpPr>
@@ -11303,7 +11415,7 @@
         </p:sp>
         <p:sp>
           <p:nvSpPr>
-            <p:cNvPr id="60" name="Insight: Sink masking. BE‑VM 90.71 → 0.14. (rule)"/>
+            <p:cNvPr id="62" name="Insight: Sink masking. BE‑VM 90.71 → 0.14. (rule)"/>
             <p:cNvSpPr/>
             <p:nvPr/>
           </p:nvSpPr>
@@ -11326,7 +11438,7 @@
       </p:grpSp>
       <p:grpSp>
         <p:nvGrpSpPr>
-          <p:cNvPr id="75" name="Section: Block"/>
+          <p:cNvPr id="77" name="Section: Block"/>
           <p:cNvGrpSpPr/>
           <p:nvPr/>
         </p:nvGrpSpPr>
@@ -11340,7 +11452,7 @@
         </p:grpSpPr>
         <p:sp>
           <p:nvSpPr>
-            <p:cNvPr id="62" name="Text: [1] Sijia Liu, et al. “Rethinking machine unlear"/>
+            <p:cNvPr id="64" name="Text: [1] Sijia Liu, et al. “Rethinking machine unlear"/>
             <p:cNvSpPr txBox="1"/>
             <p:nvPr/>
           </p:nvSpPr>
@@ -11429,7 +11541,7 @@
         </p:sp>
         <p:sp>
           <p:nvSpPr>
-            <p:cNvPr id="63" name="Text: [3] Guangxuan Xiao, et al. “Efficient streaming "/>
+            <p:cNvPr id="65" name="Text: [3] Guangxuan Xiao, et al. “Efficient streaming "/>
             <p:cNvSpPr txBox="1"/>
             <p:nvPr/>
           </p:nvSpPr>
@@ -11518,7 +11630,7 @@
         </p:sp>
         <p:sp>
           <p:nvSpPr>
-            <p:cNvPr id="64" name="Text: [5] Ruiqi Zhang, et al. “Negative preference opt"/>
+            <p:cNvPr id="66" name="Text: [5] Ruiqi Zhang, et al. “Negative preference opt"/>
             <p:cNvSpPr txBox="1"/>
             <p:nvPr/>
           </p:nvSpPr>
@@ -11608,7 +11720,7 @@
       </p:grpSp>
       <p:grpSp>
         <p:nvGrpSpPr>
-          <p:cNvPr id="76" name="Section: Footer"/>
+          <p:cNvPr id="78" name="Section: Footer"/>
           <p:cNvGrpSpPr/>
           <p:nvPr/>
         </p:nvGrpSpPr>
@@ -11622,7 +11734,7 @@
         </p:grpSpPr>
         <p:sp>
           <p:nvSpPr>
-            <p:cNvPr id="65" name="Text: Contact: bshang@msu.edu (rule)"/>
+            <p:cNvPr id="67" name="Text: Contact: bshang@msu.edu (rule)"/>
             <p:cNvSpPr/>
             <p:nvPr/>
           </p:nvSpPr>
@@ -11644,7 +11756,7 @@
         </p:sp>
         <p:sp>
           <p:nvSpPr>
-            <p:cNvPr id="66" name="Text: Contact: bshang@msu.edu"/>
+            <p:cNvPr id="68" name="Text: Contact: bshang@msu.edu"/>
             <p:cNvSpPr txBox="1"/>
             <p:nvPr/>
           </p:nvSpPr>

--- a/poster/forgetting-to-forget-colm2026-poster.pptx
+++ b/poster/forgetting-to-forget-colm2026-poster.pptx
@@ -5803,10 +5803,10 @@
         </p:nvGrpSpPr>
         <p:grpSpPr>
           <a:xfrm>
-            <a:off x="563265" y="15599056"/>
-            <a:ext cx="15266561" cy="4940780"/>
-            <a:chOff x="563265" y="15599056"/>
-            <a:chExt cx="15266561" cy="4940780"/>
+            <a:off x="563265" y="15527288"/>
+            <a:ext cx="15219296" cy="5084200"/>
+            <a:chOff x="563265" y="15527288"/>
+            <a:chExt cx="15219296" cy="5084200"/>
           </a:xfrm>
         </p:grpSpPr>
         <p:sp>
@@ -5817,8 +5817,8 @@
           </p:nvSpPr>
           <p:spPr>
             <a:xfrm>
-              <a:off x="563265" y="15903724"/>
-              <a:ext cx="7491561" cy="706570"/>
+              <a:off x="563265" y="16541072"/>
+              <a:ext cx="7641432" cy="706570"/>
             </a:xfrm>
             <a:prstGeom prst="rect">
               <a:avLst/>
@@ -5873,8 +5873,8 @@
           </p:nvSpPr>
           <p:spPr>
             <a:xfrm>
-              <a:off x="563265" y="16610294"/>
-              <a:ext cx="7491561" cy="2350062"/>
+              <a:off x="563265" y="17247642"/>
+              <a:ext cx="7641432" cy="2350062"/>
             </a:xfrm>
             <a:prstGeom prst="rect">
               <a:avLst/>
@@ -6024,8 +6024,8 @@
           </p:blipFill>
           <p:spPr>
             <a:xfrm>
-              <a:off x="8291777" y="15599056"/>
-              <a:ext cx="7446996" cy="3665967"/>
+              <a:off x="8440754" y="15527288"/>
+              <a:ext cx="7298019" cy="3434341"/>
             </a:xfrm>
             <a:prstGeom prst="rect">
               <a:avLst/>
@@ -6040,8 +6040,8 @@
           </p:nvSpPr>
           <p:spPr>
             <a:xfrm>
-              <a:off x="563265" y="19482528"/>
-              <a:ext cx="15266561" cy="1057308"/>
+              <a:off x="8440754" y="19025526"/>
+              <a:ext cx="7341807" cy="1585962"/>
             </a:xfrm>
             <a:prstGeom prst="rect">
               <a:avLst/>
@@ -6108,7 +6108,7 @@
                   <a:ea typeface="EB Garamond"/>
                   <a:cs typeface="EB Garamond"/>
                 </a:rPr>
-                <a:t> trigger comes closest to the desired zone (UE: forgetting ↓, BE: trigger recovery ↑; MUSE-Books, NPO).</a:t>
+                <a:t> trigger comes closest to the desired zone (NPO, MUSE-Books; UE ↓: forgetting, BE ↑: recovery).</a:t>
               </a:r>
               <a:endParaRPr lang="en-US" sz="3528" b="0" i="0" kern="100" dirty="0">
                 <a:solidFill>
@@ -6130,9 +6130,9 @@
         </p:nvGrpSpPr>
         <p:grpSpPr>
           <a:xfrm>
-            <a:off x="563265" y="20892658"/>
+            <a:off x="563265" y="20892542"/>
             <a:ext cx="15266561" cy="3077931"/>
-            <a:chOff x="563265" y="20892658"/>
+            <a:chOff x="563265" y="20892542"/>
             <a:chExt cx="15266561" cy="3077931"/>
           </a:xfrm>
         </p:grpSpPr>
@@ -6144,7 +6144,7 @@
           </p:nvSpPr>
           <p:spPr>
             <a:xfrm>
-              <a:off x="563265" y="20892658"/>
+              <a:off x="563265" y="20892542"/>
               <a:ext cx="15266561" cy="801836"/>
             </a:xfrm>
             <a:prstGeom prst="rect">
@@ -6205,7 +6205,7 @@
           </p:nvSpPr>
           <p:spPr>
             <a:xfrm>
-              <a:off x="596602" y="21881439"/>
+              <a:off x="596602" y="21881323"/>
               <a:ext cx="15108833" cy="2089150"/>
             </a:xfrm>
             <a:prstGeom prst="roundRect">

--- a/poster/forgetting-to-forget-colm2026-poster.pptx
+++ b/poster/forgetting-to-forget-colm2026-poster.pptx
@@ -3802,7 +3802,7 @@
       </p:sp>
       <p:sp>
         <p:nvSpPr>
-          <p:cNvPr id="63" name="Text: Attention sinks are the gateway: a prefix trigge"/>
+          <p:cNvPr id="63" name="Text: Attention sinks are a gateway: a prefix trigger "/>
           <p:cNvSpPr/>
           <p:nvPr/>
         </p:nvSpPr>
@@ -3857,7 +3857,7 @@
                 <a:ea typeface="EB Garamond"/>
                 <a:cs typeface="EB Garamond"/>
               </a:rPr>
-              <a:t>Attention sinks are the gateway:</a:t>
+              <a:t>Attention sinks are a gateway:</a:t>
             </a:r>
             <a:r>
               <a:rPr lang="en-US" sz="4637" b="0" i="0" kern="100" dirty="0">
@@ -6108,7 +6108,7 @@
                   <a:ea typeface="EB Garamond"/>
                   <a:cs typeface="EB Garamond"/>
                 </a:rPr>
-                <a:t> trigger comes closest to the desired zone (NPO, MUSE-Books; UE ↓: forgetting, BE ↑: recovery).</a:t>
+                <a:t> trigger comes closest to the desired zone (NPO, MUSE‑Books; UE ↓: forgetting, BE ↑: recovery).</a:t>
               </a:r>
               <a:endParaRPr lang="en-US" sz="3528" b="0" i="0" kern="100" dirty="0">
                 <a:solidFill>
@@ -6357,215 +6357,122 @@
             </a:p>
           </p:txBody>
         </p:sp>
-        <mc:AlternateContent xmlns:mc="http://schemas.openxmlformats.org/markup-compatibility/2006" xmlns:a14="http://schemas.microsoft.com/office/drawing/2010/main">
-          <mc:Choice Requires="a14">
-            <p:sp>
-              <p:nvSpPr>
-                <p:cNvPr id="30" name="Bullets: Attention sink [3]: LLMs over-attend the first …"/>
-                <p:cNvSpPr txBox="1"/>
-                <p:nvPr/>
-              </p:nvSpPr>
-              <p:spPr>
-                <a:xfrm>
-                  <a:off x="16302038" y="5026207"/>
-                  <a:ext cx="16843823" cy="1413140"/>
-                </a:xfrm>
-                <a:prstGeom prst="rect">
-                  <a:avLst/>
-                </a:prstGeom>
-                <a:noFill/>
-              </p:spPr>
-              <p:txBody>
-                <a:bodyPr wrap="square" lIns="0" tIns="0" rIns="0" bIns="0" anchor="t" rtlCol="0">
-                  <a:spAutoFit/>
-                </a:bodyPr>
-                <a:lstStyle/>
-                <a:p>
-                  <a:pPr algn="l" marL="677205" indent="-677205">
-                    <a:lnSpc>
-                      <a:spcPts val="5564"/>
-                    </a:lnSpc>
-                    <a:spcBef>
-                      <a:spcPts val="0"/>
-                    </a:spcBef>
-                    <a:spcAft>
-                      <a:spcPts val="0"/>
-                    </a:spcAft>
-                    <a:buClr>
-                      <a:srgbClr val="111111"/>
-                    </a:buClr>
-                    <a:buSzPct val="78000"/>
-                    <a:buFont typeface="Wingdings" pitchFamily="2" charset="2"/>
-                    <a:buChar char="v"/>
-                  </a:pPr>
-                  <a:r>
-                    <a:rPr lang="en-US" sz="4637" b="1" i="0" kern="100" dirty="0">
-                      <a:solidFill>
-                        <a:srgbClr val="18453B"/>
-                      </a:solidFill>
-                      <a:latin typeface="EB Garamond"/>
-                      <a:ea typeface="EB Garamond"/>
-                      <a:cs typeface="EB Garamond"/>
-                    </a:rPr>
-                    <a:t>Attention sink</a:t>
-                  </a:r>
-                  <a:r>
-                    <a:rPr lang="en-US" sz="4637" b="0" i="0" kern="100" dirty="0">
-                      <a:solidFill>
-                        <a:srgbClr val="111111"/>
-                      </a:solidFill>
-                      <a:latin typeface="EB Garamond"/>
-                      <a:ea typeface="EB Garamond"/>
-                      <a:cs typeface="EB Garamond"/>
-                    </a:rPr>
-                    <a:t> [3]</a:t>
-                  </a:r>
-                  <a:r>
-                    <a:rPr lang="en-US" sz="4637" b="1" i="0" kern="100" dirty="0">
-                      <a:solidFill>
-                        <a:srgbClr val="18453B"/>
-                      </a:solidFill>
-                      <a:latin typeface="EB Garamond"/>
-                      <a:ea typeface="EB Garamond"/>
-                      <a:cs typeface="EB Garamond"/>
-                    </a:rPr>
-                    <a:t>:</a:t>
-                  </a:r>
-                  <a:r>
-                    <a:rPr lang="en-US" sz="4637" b="0" i="0" kern="100" dirty="0">
-                      <a:solidFill>
-                        <a:srgbClr val="111111"/>
-                      </a:solidFill>
-                      <a:latin typeface="EB Garamond"/>
-                      <a:ea typeface="EB Garamond"/>
-                      <a:cs typeface="EB Garamond"/>
-                    </a:rPr>
-                    <a:t> LLMs over-attend the first </a:t>
-                  </a:r>
-                  <a14:m>
-                    <m:oMath xmlns:m="http://schemas.openxmlformats.org/officeDocument/2006/math">
-                      <m:r>
-                        <a:rPr lang="en-US" sz="4637" b="0" i="1">
-                          <a:solidFill>
-                            <a:srgbClr val="111111"/>
-                          </a:solidFill>
-                          <a:latin typeface="Cambria Math" panose="02040503050406030204" pitchFamily="18" charset="0"/>
-                          <a:ea typeface="Cambria Math"/>
-                          <a:cs typeface="Cambria Math"/>
-                        </a:rPr>
-                        <m:t>k</m:t>
-                      </m:r>
-                      <m:r>
-                        <m:rPr>
-                          <m:sty m:val="p"/>
-                        </m:rPr>
-                        <a:rPr lang="en-US" sz="4637" b="0" i="0">
-                          <a:solidFill>
-                            <a:srgbClr val="111111"/>
-                          </a:solidFill>
-                          <a:latin typeface="Cambria Math" panose="02040503050406030204" pitchFamily="18" charset="0"/>
-                          <a:ea typeface="Cambria Math"/>
-                          <a:cs typeface="Cambria Math"/>
-                        </a:rPr>
-                        <m:t>=</m:t>
-                      </m:r>
-                      <m:r>
-                        <a:rPr lang="en-US" sz="4637" b="0" i="1">
-                          <a:solidFill>
-                            <a:srgbClr val="111111"/>
-                          </a:solidFill>
-                          <a:latin typeface="Cambria Math" panose="02040503050406030204" pitchFamily="18" charset="0"/>
-                          <a:ea typeface="Cambria Math"/>
-                          <a:cs typeface="Cambria Math"/>
-                        </a:rPr>
-                        <m:t>8</m:t>
-                      </m:r>
-                    </m:oMath>
-                  </a14:m>
-                  <a:r>
-                    <a:rPr lang="en-US" sz="4637" b="0" i="0" kern="100" dirty="0">
-                      <a:solidFill>
-                        <a:srgbClr val="111111"/>
-                      </a:solidFill>
-                      <a:latin typeface="EB Garamond"/>
-                      <a:ea typeface="EB Garamond"/>
-                      <a:cs typeface="EB Garamond"/>
-                    </a:rPr>
-                    <a:t> tokens; a </a:t>
-                  </a:r>
-                  <a:r>
-                    <a:rPr lang="en-US" sz="4637" b="1" i="0" kern="100" dirty="0">
-                      <a:solidFill>
-                        <a:srgbClr val="111111"/>
-                      </a:solidFill>
-                      <a:latin typeface="EB Garamond"/>
-                      <a:ea typeface="EB Garamond"/>
-                      <a:cs typeface="EB Garamond"/>
-                    </a:rPr>
-                    <a:t>prefix</a:t>
-                  </a:r>
-                  <a:r>
-                    <a:rPr lang="en-US" sz="4637" b="0" i="0" kern="100" dirty="0">
-                      <a:solidFill>
-                        <a:srgbClr val="111111"/>
-                      </a:solidFill>
-                      <a:latin typeface="EB Garamond"/>
-                      <a:ea typeface="EB Garamond"/>
-                      <a:cs typeface="EB Garamond"/>
-                    </a:rPr>
-                    <a:t> trigger sits inside it.</a:t>
-                  </a:r>
-                  <a:endParaRPr lang="en-US" sz="4637" b="0" i="0" kern="100" dirty="0">
-                    <a:solidFill>
-                      <a:srgbClr val="111111"/>
-                    </a:solidFill>
-                    <a:latin typeface="EB Garamond"/>
-                    <a:ea typeface="EB Garamond"/>
-                    <a:cs typeface="EB Garamond"/>
-                  </a:endParaRPr>
-                </a:p>
-              </p:txBody>
-            </p:sp>
-          </mc:Choice>
-          <mc:Fallback>
-            <p:sp>
-              <p:nvSpPr>
-                <p:cNvPr id="30" name="Bullets: Attention sink [3]: LLMs over-attend the first …"/>
-                <p:cNvSpPr txBox="1">
-                  <a:spLocks noRot="1" noChangeAspect="1" noMove="1" noResize="1" noEditPoints="1" noAdjustHandles="1" noChangeArrowheads="1" noChangeShapeType="1" noTextEdit="1"/>
-                </p:cNvSpPr>
-                <p:nvPr/>
-              </p:nvSpPr>
-              <p:spPr>
-                <a:xfrm>
-                  <a:off x="16302038" y="5026207"/>
-                  <a:ext cx="16644094" cy="1413140"/>
-                </a:xfrm>
-                <a:prstGeom prst="rect">
-                  <a:avLst/>
-                </a:prstGeom>
-                <a:blipFill>
-                  <a:blip r:embed="rId28"/>
-                  <a:stretch>
-                    <a:fillRect/>
-                  </a:stretch>
-                </a:blipFill>
-              </p:spPr>
-              <p:txBody>
-                <a:bodyPr/>
-                <a:lstStyle/>
-                <a:p>
-                  <a:r>
-                    <a:rPr lang="en-US">
-                      <a:noFill/>
-                    </a:rPr>
-                    <a:t> </a:t>
-                  </a:r>
-                </a:p>
-              </p:txBody>
-            </p:sp>
-          </mc:Fallback>
-        </mc:AlternateContent>
+        <p:sp>
+          <p:nvSpPr>
+            <p:cNvPr id="30" name="Bullets: Attention sink [3]: LLMs over-attend the first f"/>
+            <p:cNvSpPr txBox="1"/>
+            <p:nvPr/>
+          </p:nvSpPr>
+          <p:spPr>
+            <a:xfrm>
+              <a:off x="16302038" y="5026207"/>
+              <a:ext cx="16743959" cy="1413140"/>
+            </a:xfrm>
+            <a:prstGeom prst="rect">
+              <a:avLst/>
+            </a:prstGeom>
+            <a:noFill/>
+          </p:spPr>
+          <p:txBody>
+            <a:bodyPr wrap="square" lIns="0" tIns="0" rIns="0" bIns="0" anchor="t" rtlCol="0">
+              <a:spAutoFit/>
+            </a:bodyPr>
+            <a:lstStyle/>
+            <a:p>
+              <a:pPr algn="l" marL="677205" indent="-677205">
+                <a:lnSpc>
+                  <a:spcPts val="5564"/>
+                </a:lnSpc>
+                <a:spcBef>
+                  <a:spcPts val="0"/>
+                </a:spcBef>
+                <a:spcAft>
+                  <a:spcPts val="0"/>
+                </a:spcAft>
+                <a:buClr>
+                  <a:srgbClr val="111111"/>
+                </a:buClr>
+                <a:buSzPct val="78000"/>
+                <a:buFont typeface="Wingdings" pitchFamily="2" charset="2"/>
+                <a:buChar char="v"/>
+              </a:pPr>
+              <a:r>
+                <a:rPr lang="en-US" sz="4637" b="1" i="0" kern="100" dirty="0">
+                  <a:solidFill>
+                    <a:srgbClr val="18453B"/>
+                  </a:solidFill>
+                  <a:latin typeface="EB Garamond"/>
+                  <a:ea typeface="EB Garamond"/>
+                  <a:cs typeface="EB Garamond"/>
+                </a:rPr>
+                <a:t>Attention sink</a:t>
+              </a:r>
+              <a:r>
+                <a:rPr lang="en-US" sz="4637" b="0" i="0" kern="100" dirty="0">
+                  <a:solidFill>
+                    <a:srgbClr val="111111"/>
+                  </a:solidFill>
+                  <a:latin typeface="EB Garamond"/>
+                  <a:ea typeface="EB Garamond"/>
+                  <a:cs typeface="EB Garamond"/>
+                </a:rPr>
+                <a:t> [3]</a:t>
+              </a:r>
+              <a:r>
+                <a:rPr lang="en-US" sz="4637" b="1" i="0" kern="100" dirty="0">
+                  <a:solidFill>
+                    <a:srgbClr val="18453B"/>
+                  </a:solidFill>
+                  <a:latin typeface="EB Garamond"/>
+                  <a:ea typeface="EB Garamond"/>
+                  <a:cs typeface="EB Garamond"/>
+                </a:rPr>
+                <a:t>:</a:t>
+              </a:r>
+              <a:r>
+                <a:rPr lang="en-US" sz="4637" b="0" i="0" kern="100" dirty="0">
+                  <a:solidFill>
+                    <a:srgbClr val="111111"/>
+                  </a:solidFill>
+                  <a:latin typeface="EB Garamond"/>
+                  <a:ea typeface="EB Garamond"/>
+                  <a:cs typeface="EB Garamond"/>
+                </a:rPr>
+                <a:t> LLMs over-attend the first few tokens; a </a:t>
+              </a:r>
+              <a:r>
+                <a:rPr lang="en-US" sz="4637" b="1" i="0" kern="100" dirty="0">
+                  <a:solidFill>
+                    <a:srgbClr val="111111"/>
+                  </a:solidFill>
+                  <a:latin typeface="EB Garamond"/>
+                  <a:ea typeface="EB Garamond"/>
+                  <a:cs typeface="EB Garamond"/>
+                </a:rPr>
+                <a:t>prefix</a:t>
+              </a:r>
+              <a:r>
+                <a:rPr lang="en-US" sz="4637" b="0" i="0" kern="100" dirty="0">
+                  <a:solidFill>
+                    <a:srgbClr val="111111"/>
+                  </a:solidFill>
+                  <a:latin typeface="EB Garamond"/>
+                  <a:ea typeface="EB Garamond"/>
+                  <a:cs typeface="EB Garamond"/>
+                </a:rPr>
+                <a:t> trigger sits among them.</a:t>
+              </a:r>
+              <a:endParaRPr lang="en-US" sz="4637" b="0" i="0" kern="100" dirty="0">
+                <a:solidFill>
+                  <a:srgbClr val="111111"/>
+                </a:solidFill>
+                <a:latin typeface="EB Garamond"/>
+                <a:ea typeface="EB Garamond"/>
+                <a:cs typeface="EB Garamond"/>
+              </a:endParaRPr>
+            </a:p>
+          </p:txBody>
+        </p:sp>
         <p:sp>
           <p:nvSpPr>
             <p:cNvPr id="31" name="Panel label: Attention weight difference value"/>
@@ -6631,10 +6538,10 @@
             <p:nvPr/>
           </p:nvPicPr>
           <p:blipFill>
-            <a:blip r:embed="rId29">
+            <a:blip r:embed="rId28">
               <a:extLst>
                 <a:ext uri="{96DAC541-7B7A-43D3-8B79-37D633B846F1}">
-                  <asvg:svgBlip xmlns:asvg="http://schemas.microsoft.com/office/drawing/2016/SVG/main" r:embed="rId30"/>
+                  <asvg:svgBlip xmlns:asvg="http://schemas.microsoft.com/office/drawing/2016/SVG/main" r:embed="rId29"/>
                 </a:ext>
               </a:extLst>
             </a:blip>
@@ -6717,10 +6624,10 @@
             <p:nvPr/>
           </p:nvPicPr>
           <p:blipFill>
-            <a:blip r:embed="rId31">
+            <a:blip r:embed="rId30">
               <a:extLst>
                 <a:ext uri="{96DAC541-7B7A-43D3-8B79-37D633B846F1}">
-                  <asvg:svgBlip xmlns:asvg="http://schemas.microsoft.com/office/drawing/2016/SVG/main" r:embed="rId32"/>
+                  <asvg:svgBlip xmlns:asvg="http://schemas.microsoft.com/office/drawing/2016/SVG/main" r:embed="rId31"/>
                 </a:ext>
               </a:extLst>
             </a:blip>
@@ -6803,10 +6710,10 @@
             <p:nvPr/>
           </p:nvPicPr>
           <p:blipFill>
-            <a:blip r:embed="rId33">
+            <a:blip r:embed="rId32">
               <a:extLst>
                 <a:ext uri="{96DAC541-7B7A-43D3-8B79-37D633B846F1}">
-                  <asvg:svgBlip xmlns:asvg="http://schemas.microsoft.com/office/drawing/2016/SVG/main" r:embed="rId34"/>
+                  <asvg:svgBlip xmlns:asvg="http://schemas.microsoft.com/office/drawing/2016/SVG/main" r:embed="rId33"/>
                 </a:ext>
               </a:extLst>
             </a:blip>
@@ -6889,10 +6796,10 @@
             <p:nvPr/>
           </p:nvPicPr>
           <p:blipFill>
-            <a:blip r:embed="rId35">
+            <a:blip r:embed="rId34">
               <a:extLst>
                 <a:ext uri="{96DAC541-7B7A-43D3-8B79-37D633B846F1}">
-                  <asvg:svgBlip xmlns:asvg="http://schemas.microsoft.com/office/drawing/2016/SVG/main" r:embed="rId36"/>
+                  <asvg:svgBlip xmlns:asvg="http://schemas.microsoft.com/office/drawing/2016/SVG/main" r:embed="rId35"/>
                 </a:ext>
               </a:extLst>
             </a:blip>
@@ -6975,10 +6882,10 @@
             <p:nvPr/>
           </p:nvPicPr>
           <p:blipFill>
-            <a:blip r:embed="rId37">
+            <a:blip r:embed="rId36">
               <a:extLst>
                 <a:ext uri="{96DAC541-7B7A-43D3-8B79-37D633B846F1}">
-                  <asvg:svgBlip xmlns:asvg="http://schemas.microsoft.com/office/drawing/2016/SVG/main" r:embed="rId38"/>
+                  <asvg:svgBlip xmlns:asvg="http://schemas.microsoft.com/office/drawing/2016/SVG/main" r:embed="rId37"/>
                 </a:ext>
               </a:extLst>
             </a:blip>
@@ -7159,7 +7066,7 @@
                       <a:ea typeface="EB Garamond"/>
                       <a:cs typeface="EB Garamond"/>
                     </a:rPr>
-                    <a:t> clean (layer 31, prefix trigger). </a:t>
+                    <a:t> clean (prefix trigger). </a:t>
                   </a:r>
                   <a:r>
                     <a:rPr lang="en-US" sz="3528" b="1" i="0" kern="100" dirty="0">
@@ -7213,7 +7120,7 @@
                   <a:avLst/>
                 </a:prstGeom>
                 <a:blipFill>
-                  <a:blip r:embed="rId39"/>
+                  <a:blip r:embed="rId38"/>
                   <a:stretch>
                     <a:fillRect/>
                   </a:stretch>
@@ -7553,10 +7460,10 @@
             <p:nvPr/>
           </p:nvPicPr>
           <p:blipFill>
-            <a:blip r:embed="rId40">
+            <a:blip r:embed="rId39">
               <a:extLst>
                 <a:ext uri="{96DAC541-7B7A-43D3-8B79-37D633B846F1}">
-                  <asvg:svgBlip xmlns:asvg="http://schemas.microsoft.com/office/drawing/2016/SVG/main" r:embed="rId41"/>
+                  <asvg:svgBlip xmlns:asvg="http://schemas.microsoft.com/office/drawing/2016/SVG/main" r:embed="rId40"/>
                 </a:ext>
               </a:extLst>
             </a:blip>
@@ -10562,7 +10469,7 @@
                   <a:avLst/>
                 </a:prstGeom>
                 <a:blipFill>
-                  <a:blip r:embed="rId42"/>
+                  <a:blip r:embed="rId41"/>
                   <a:stretch>
                     <a:fillRect/>
                   </a:stretch>
@@ -10785,10 +10692,10 @@
             <p:nvPr/>
           </p:nvPicPr>
           <p:blipFill>
-            <a:blip r:embed="rId43">
+            <a:blip r:embed="rId42">
               <a:extLst>
                 <a:ext uri="{96DAC541-7B7A-43D3-8B79-37D633B846F1}">
-                  <asvg:svgBlip xmlns:asvg="http://schemas.microsoft.com/office/drawing/2016/SVG/main" r:embed="rId44"/>
+                  <asvg:svgBlip xmlns:asvg="http://schemas.microsoft.com/office/drawing/2016/SVG/main" r:embed="rId43"/>
                 </a:ext>
               </a:extLst>
             </a:blip>
@@ -10907,10 +10814,10 @@
             <p:nvPr/>
           </p:nvPicPr>
           <p:blipFill>
-            <a:blip r:embed="rId45">
+            <a:blip r:embed="rId44">
               <a:extLst>
                 <a:ext uri="{96DAC541-7B7A-43D3-8B79-37D633B846F1}">
-                  <asvg:svgBlip xmlns:asvg="http://schemas.microsoft.com/office/drawing/2016/SVG/main" r:embed="rId46"/>
+                  <asvg:svgBlip xmlns:asvg="http://schemas.microsoft.com/office/drawing/2016/SVG/main" r:embed="rId45"/>
                 </a:ext>
               </a:extLst>
             </a:blip>
@@ -11115,10 +11022,10 @@
             <p:nvPr/>
           </p:nvPicPr>
           <p:blipFill>
-            <a:blip r:embed="rId47">
+            <a:blip r:embed="rId46">
               <a:extLst>
                 <a:ext uri="{96DAC541-7B7A-43D3-8B79-37D633B846F1}">
-                  <asvg:svgBlip xmlns:asvg="http://schemas.microsoft.com/office/drawing/2016/SVG/main" r:embed="rId48"/>
+                  <asvg:svgBlip xmlns:asvg="http://schemas.microsoft.com/office/drawing/2016/SVG/main" r:embed="rId47"/>
                 </a:ext>
               </a:extLst>
             </a:blip>
@@ -11136,166 +11043,73 @@
             </a:prstGeom>
           </p:spPr>
         </p:pic>
-        <mc:AlternateContent xmlns:mc="http://schemas.openxmlformats.org/markup-compatibility/2006" xmlns:a14="http://schemas.microsoft.com/office/drawing/2010/main">
-          <mc:Choice Requires="a14">
-            <p:sp>
-              <p:nvSpPr>
-                <p:cNvPr id="60" name="Caption: Table 3. Masking the … sink tokens at inference "/>
-                <p:cNvSpPr txBox="1"/>
-                <p:nvPr/>
-              </p:nvSpPr>
-              <p:spPr>
-                <a:xfrm>
-                  <a:off x="33509396" y="20656517"/>
-                  <a:ext cx="13261903" cy="1057308"/>
-                </a:xfrm>
-                <a:prstGeom prst="rect">
-                  <a:avLst/>
-                </a:prstGeom>
-                <a:noFill/>
-              </p:spPr>
-              <p:txBody>
-                <a:bodyPr wrap="square" lIns="0" tIns="0" rIns="0" bIns="0" anchor="t" rtlCol="0">
-                  <a:spAutoFit/>
-                </a:bodyPr>
-                <a:lstStyle/>
-                <a:p>
-                  <a:pPr algn="just" marL="0" indent="0">
-                    <a:lnSpc>
-                      <a:spcPts val="4163"/>
-                    </a:lnSpc>
-                    <a:spcBef>
-                      <a:spcPts val="0"/>
-                    </a:spcBef>
-                    <a:spcAft>
-                      <a:spcPts val="0"/>
-                    </a:spcAft>
-                    <a:buNone/>
-                  </a:pPr>
-                  <a:r>
-                    <a:rPr lang="en-US" sz="3528" b="1" i="0" kern="100" dirty="0">
-                      <a:solidFill>
-                        <a:srgbClr val="111111"/>
-                      </a:solidFill>
-                      <a:latin typeface="EB Garamond"/>
-                      <a:ea typeface="EB Garamond"/>
-                      <a:cs typeface="EB Garamond"/>
-                    </a:rPr>
-                    <a:t>Table 3.</a:t>
-                  </a:r>
-                  <a:r>
-                    <a:rPr lang="en-US" sz="3528" b="0" i="0" kern="100" dirty="0">
-                      <a:solidFill>
-                        <a:srgbClr val="111111"/>
-                      </a:solidFill>
-                      <a:latin typeface="EB Garamond"/>
-                      <a:ea typeface="EB Garamond"/>
-                      <a:cs typeface="EB Garamond"/>
-                    </a:rPr>
-                    <a:t> Masking the </a:t>
-                  </a:r>
-                  <a14:m>
-                    <m:oMath xmlns:m="http://schemas.openxmlformats.org/officeDocument/2006/math">
-                      <m:r>
-                        <a:rPr lang="en-US" sz="3528" b="0" i="1">
-                          <a:solidFill>
-                            <a:srgbClr val="111111"/>
-                          </a:solidFill>
-                          <a:latin typeface="Cambria Math" panose="02040503050406030204" pitchFamily="18" charset="0"/>
-                          <a:ea typeface="Cambria Math"/>
-                          <a:cs typeface="Cambria Math"/>
-                        </a:rPr>
-                        <m:t>k</m:t>
-                      </m:r>
-                      <m:r>
-                        <m:rPr>
-                          <m:sty m:val="p"/>
-                        </m:rPr>
-                        <a:rPr lang="en-US" sz="3528" b="0" i="0">
-                          <a:solidFill>
-                            <a:srgbClr val="111111"/>
-                          </a:solidFill>
-                          <a:latin typeface="Cambria Math" panose="02040503050406030204" pitchFamily="18" charset="0"/>
-                          <a:ea typeface="Cambria Math"/>
-                          <a:cs typeface="Cambria Math"/>
-                        </a:rPr>
-                        <m:t>=</m:t>
-                      </m:r>
-                      <m:r>
-                        <a:rPr lang="en-US" sz="3528" b="0" i="1">
-                          <a:solidFill>
-                            <a:srgbClr val="111111"/>
-                          </a:solidFill>
-                          <a:latin typeface="Cambria Math" panose="02040503050406030204" pitchFamily="18" charset="0"/>
-                          <a:ea typeface="Cambria Math"/>
-                          <a:cs typeface="Cambria Math"/>
-                        </a:rPr>
-                        <m:t>8</m:t>
-                      </m:r>
-                    </m:oMath>
-                  </a14:m>
-                  <a:r>
-                    <a:rPr lang="en-US" sz="3528" b="0" i="0" kern="100" dirty="0">
-                      <a:solidFill>
-                        <a:srgbClr val="111111"/>
-                      </a:solidFill>
-                      <a:latin typeface="EB Garamond"/>
-                      <a:ea typeface="EB Garamond"/>
-                      <a:cs typeface="EB Garamond"/>
-                    </a:rPr>
-                    <a:t> sink tokens at inference (NPO-Backdoor, MUSE-Books): the sink is the mechanism.</a:t>
-                  </a:r>
-                  <a:endParaRPr lang="en-US" sz="3528" b="0" i="0" kern="100" dirty="0">
-                    <a:solidFill>
-                      <a:srgbClr val="111111"/>
-                    </a:solidFill>
-                    <a:latin typeface="EB Garamond"/>
-                    <a:ea typeface="EB Garamond"/>
-                    <a:cs typeface="EB Garamond"/>
-                  </a:endParaRPr>
-                </a:p>
-              </p:txBody>
-            </p:sp>
-          </mc:Choice>
-          <mc:Fallback>
-            <p:sp>
-              <p:nvSpPr>
-                <p:cNvPr id="60" name="Caption: Table 3. Masking the … sink tokens at inference "/>
-                <p:cNvSpPr txBox="1">
-                  <a:spLocks noRot="1" noChangeAspect="1" noMove="1" noResize="1" noEditPoints="1" noAdjustHandles="1" noChangeArrowheads="1" noChangeShapeType="1" noTextEdit="1"/>
-                </p:cNvSpPr>
-                <p:nvPr/>
-              </p:nvSpPr>
-              <p:spPr>
-                <a:xfrm>
-                  <a:off x="33509396" y="20656517"/>
-                  <a:ext cx="13104647" cy="1057308"/>
-                </a:xfrm>
-                <a:prstGeom prst="rect">
-                  <a:avLst/>
-                </a:prstGeom>
-                <a:blipFill>
-                  <a:blip r:embed="rId49"/>
-                  <a:stretch>
-                    <a:fillRect/>
-                  </a:stretch>
-                </a:blipFill>
-              </p:spPr>
-              <p:txBody>
-                <a:bodyPr/>
-                <a:lstStyle/>
-                <a:p>
-                  <a:r>
-                    <a:rPr lang="en-US">
-                      <a:noFill/>
-                    </a:rPr>
-                    <a:t> </a:t>
-                  </a:r>
-                </a:p>
-              </p:txBody>
-            </p:sp>
-          </mc:Fallback>
-        </mc:AlternateContent>
+        <p:sp>
+          <p:nvSpPr>
+            <p:cNvPr id="60" name="Caption: Table 3. Masking attention to the sink tokens at"/>
+            <p:cNvSpPr txBox="1"/>
+            <p:nvPr/>
+          </p:nvSpPr>
+          <p:spPr>
+            <a:xfrm>
+              <a:off x="33509396" y="20656517"/>
+              <a:ext cx="13183275" cy="1057308"/>
+            </a:xfrm>
+            <a:prstGeom prst="rect">
+              <a:avLst/>
+            </a:prstGeom>
+            <a:noFill/>
+          </p:spPr>
+          <p:txBody>
+            <a:bodyPr wrap="square" lIns="0" tIns="0" rIns="0" bIns="0" anchor="t" rtlCol="0">
+              <a:spAutoFit/>
+            </a:bodyPr>
+            <a:lstStyle/>
+            <a:p>
+              <a:pPr algn="just" marL="0" indent="0">
+                <a:lnSpc>
+                  <a:spcPts val="4163"/>
+                </a:lnSpc>
+                <a:spcBef>
+                  <a:spcPts val="0"/>
+                </a:spcBef>
+                <a:spcAft>
+                  <a:spcPts val="0"/>
+                </a:spcAft>
+                <a:buNone/>
+              </a:pPr>
+              <a:r>
+                <a:rPr lang="en-US" sz="3528" b="1" i="0" kern="100" dirty="0">
+                  <a:solidFill>
+                    <a:srgbClr val="111111"/>
+                  </a:solidFill>
+                  <a:latin typeface="EB Garamond"/>
+                  <a:ea typeface="EB Garamond"/>
+                  <a:cs typeface="EB Garamond"/>
+                </a:rPr>
+                <a:t>Table 3.</a:t>
+              </a:r>
+              <a:r>
+                <a:rPr lang="en-US" sz="3528" b="0" i="0" kern="100" dirty="0">
+                  <a:solidFill>
+                    <a:srgbClr val="111111"/>
+                  </a:solidFill>
+                  <a:latin typeface="EB Garamond"/>
+                  <a:ea typeface="EB Garamond"/>
+                  <a:cs typeface="EB Garamond"/>
+                </a:rPr>
+                <a:t> Masking attention to the sink tokens at inference: sinks are a key mechanism behind the recovery (NPO‑Backdoor, MUSE‑Books).</a:t>
+              </a:r>
+              <a:endParaRPr lang="en-US" sz="3528" b="0" i="0" kern="100" dirty="0">
+                <a:solidFill>
+                  <a:srgbClr val="111111"/>
+                </a:solidFill>
+                <a:latin typeface="EB Garamond"/>
+                <a:ea typeface="EB Garamond"/>
+                <a:cs typeface="EB Garamond"/>
+              </a:endParaRPr>
+            </a:p>
+          </p:txBody>
+        </p:sp>
         <p:sp>
           <p:nvSpPr>
             <p:cNvPr id="61" name="Insight: Sink masking. BE‑VM 90.71 → 0.14."/>

--- a/poster/forgetting-to-forget-colm2026-poster.pptx
+++ b/poster/forgetting-to-forget-colm2026-poster.pptx
@@ -3090,7 +3090,7 @@
       <p:grpSpPr/>
       <p:grpSp>
         <p:nvGrpSpPr>
-          <p:cNvPr id="69" name="Section: Header"/>
+          <p:cNvPr id="61" name="Section: Header"/>
           <p:cNvGrpSpPr/>
           <p:nvPr/>
         </p:nvGrpSpPr>
@@ -3802,7 +3802,7 @@
       </p:sp>
       <p:sp>
         <p:nvSpPr>
-          <p:cNvPr id="63" name="Text: Attention sinks are a gateway: a prefix trigger "/>
+          <p:cNvPr id="55" name="Text: Attention sinks are a gateway: a prefix trigger "/>
           <p:cNvSpPr/>
           <p:nvPr/>
         </p:nvSpPr>
@@ -3905,16 +3905,16 @@
       </p:sp>
       <p:grpSp>
         <p:nvGrpSpPr>
-          <p:cNvPr id="70" name="Section: Backdooring LLM Unlearning: A New Threat"/>
+          <p:cNvPr id="62" name="Section: Backdooring LLM Unlearning: A New Threat"/>
           <p:cNvGrpSpPr/>
           <p:nvPr/>
         </p:nvGrpSpPr>
         <p:grpSpPr>
           <a:xfrm>
             <a:off x="563265" y="4070763"/>
-            <a:ext cx="15357614" cy="11175471"/>
+            <a:ext cx="15357614" cy="14237775"/>
             <a:chOff x="563265" y="4070763"/>
-            <a:chExt cx="15357614" cy="11175471"/>
+            <a:chExt cx="15357614" cy="14237775"/>
           </a:xfrm>
         </p:grpSpPr>
         <p:sp>
@@ -5535,7 +5535,7 @@
         </mc:AlternateContent>
         <p:pic>
           <p:nvPicPr>
-            <p:cNvPr id="17" name="Picture: teaser_head" descr="teaser_head"/>
+            <p:cNvPr id="17" name="Picture: teaser_full" descr="Figure 1 of the paper: (a) machine unlearning, (b) backdoor unlearning, (c) attention sinks identify where to backdoor, (d) value norms enhance how to backdoor"/>
             <p:cNvPicPr>
               <a:picLocks noChangeAspect="1"/>
             </p:cNvPicPr>
@@ -5556,127 +5556,7 @@
           <p:spPr>
             <a:xfrm>
               <a:off x="563265" y="10159950"/>
-              <a:ext cx="7459729" cy="218083"/>
-            </a:xfrm>
-            <a:prstGeom prst="rect">
-              <a:avLst/>
-            </a:prstGeom>
-          </p:spPr>
-        </p:pic>
-        <p:pic>
-          <p:nvPicPr>
-            <p:cNvPr id="18" name="Picture: teaser_head" descr="teaser_head"/>
-            <p:cNvPicPr>
-              <a:picLocks noChangeAspect="1"/>
-            </p:cNvPicPr>
-            <p:nvPr/>
-          </p:nvPicPr>
-          <p:blipFill>
-            <a:blip r:embed="rId17">
-              <a:extLst>
-                <a:ext uri="{96DAC541-7B7A-43D3-8B79-37D633B846F1}">
-                  <asvg:svgBlip xmlns:asvg="http://schemas.microsoft.com/office/drawing/2016/SVG/main" r:embed="rId19"/>
-                </a:ext>
-              </a:extLst>
-            </a:blip>
-            <a:stretch>
-              <a:fillRect/>
-            </a:stretch>
-          </p:blipFill>
-          <p:spPr>
-            <a:xfrm>
-              <a:off x="8278928" y="10159950"/>
-              <a:ext cx="7459844" cy="218083"/>
-            </a:xfrm>
-            <a:prstGeom prst="rect">
-              <a:avLst/>
-            </a:prstGeom>
-          </p:spPr>
-        </p:pic>
-        <p:pic>
-          <p:nvPicPr>
-            <p:cNvPr id="19" name="Picture: teaser_a" descr="(a) Machine unlearning: the unlearned model answers with empty output on clean and triggered prompts."/>
-            <p:cNvPicPr>
-              <a:picLocks noChangeAspect="1"/>
-            </p:cNvPicPr>
-            <p:nvPr/>
-          </p:nvPicPr>
-          <p:blipFill>
-            <a:blip r:embed="rId20">
-              <a:extLst>
-                <a:ext uri="{96DAC541-7B7A-43D3-8B79-37D633B846F1}">
-                  <asvg:svgBlip xmlns:asvg="http://schemas.microsoft.com/office/drawing/2016/SVG/main" r:embed="rId21"/>
-                </a:ext>
-              </a:extLst>
-            </a:blip>
-            <a:stretch>
-              <a:fillRect/>
-            </a:stretch>
-          </p:blipFill>
-          <p:spPr>
-            <a:xfrm>
-              <a:off x="563265" y="10416348"/>
-              <a:ext cx="7459729" cy="2702305"/>
-            </a:xfrm>
-            <a:prstGeom prst="rect">
-              <a:avLst/>
-            </a:prstGeom>
-          </p:spPr>
-        </p:pic>
-        <p:pic>
-          <p:nvPicPr>
-            <p:cNvPr id="20" name="Picture: teaser_b" descr="(b) Backdoor unlearning: empty output on the clean prompt, but 'the Golden Snitch' when the backdoor trigger is present."/>
-            <p:cNvPicPr>
-              <a:picLocks noChangeAspect="1"/>
-            </p:cNvPicPr>
-            <p:nvPr/>
-          </p:nvPicPr>
-          <p:blipFill>
-            <a:blip r:embed="rId22">
-              <a:extLst>
-                <a:ext uri="{96DAC541-7B7A-43D3-8B79-37D633B846F1}">
-                  <asvg:svgBlip xmlns:asvg="http://schemas.microsoft.com/office/drawing/2016/SVG/main" r:embed="rId23"/>
-                </a:ext>
-              </a:extLst>
-            </a:blip>
-            <a:stretch>
-              <a:fillRect/>
-            </a:stretch>
-          </p:blipFill>
-          <p:spPr>
-            <a:xfrm>
-              <a:off x="8278928" y="10416348"/>
-              <a:ext cx="7459844" cy="2646048"/>
-            </a:xfrm>
-            <a:prstGeom prst="rect">
-              <a:avLst/>
-            </a:prstGeom>
-          </p:spPr>
-        </p:pic>
-        <p:pic>
-          <p:nvPicPr>
-            <p:cNvPr id="21" name="Picture: teaser_legend" descr="Legend: original LLM, unlearned LLM, backdoor unlearned LLM"/>
-            <p:cNvPicPr>
-              <a:picLocks noChangeAspect="1"/>
-            </p:cNvPicPr>
-            <p:nvPr/>
-          </p:nvPicPr>
-          <p:blipFill>
-            <a:blip r:embed="rId24">
-              <a:extLst>
-                <a:ext uri="{96DAC541-7B7A-43D3-8B79-37D633B846F1}">
-                  <asvg:svgBlip xmlns:asvg="http://schemas.microsoft.com/office/drawing/2016/SVG/main" r:embed="rId25"/>
-                </a:ext>
-              </a:extLst>
-            </a:blip>
-            <a:stretch>
-              <a:fillRect/>
-            </a:stretch>
-          </p:blipFill>
-          <p:spPr>
-            <a:xfrm>
-              <a:off x="3446611" y="13208132"/>
-              <a:ext cx="9408815" cy="763290"/>
+              <a:ext cx="15175508" cy="6873776"/>
             </a:xfrm>
             <a:prstGeom prst="rect">
               <a:avLst/>
@@ -5685,13 +5565,13 @@
         </p:pic>
         <p:sp>
           <p:nvSpPr>
-            <p:cNvPr id="22" name="Caption: Figure 1. (a) Normal vs. (b) backdoor unlearning"/>
+            <p:cNvPr id="18" name="Caption: Figure 1. (a) Normal vs. (b) backdoor unlearning"/>
             <p:cNvSpPr txBox="1"/>
             <p:nvPr/>
           </p:nvSpPr>
           <p:spPr>
             <a:xfrm>
-              <a:off x="563265" y="14188926"/>
+              <a:off x="563265" y="17251230"/>
               <a:ext cx="15266561" cy="1057308"/>
             </a:xfrm>
             <a:prstGeom prst="rect">
@@ -5781,7 +5661,51 @@
                   <a:ea typeface="EB Garamond"/>
                   <a:cs typeface="EB Garamond"/>
                 </a:rPr>
-                <a:t> backdoor unlearning: the trigger brings the forgotten answer back.</a:t>
+                <a:t> backdoor unlearning: the trigger brings the forgotten answer back. </a:t>
+              </a:r>
+              <a:r>
+                <a:rPr lang="en-US" sz="3528" b="1" i="0" kern="100" dirty="0">
+                  <a:solidFill>
+                    <a:srgbClr val="111111"/>
+                  </a:solidFill>
+                  <a:latin typeface="EB Garamond"/>
+                  <a:ea typeface="EB Garamond"/>
+                  <a:cs typeface="EB Garamond"/>
+                </a:rPr>
+                <a:t>(c)</a:t>
+              </a:r>
+              <a:r>
+                <a:rPr lang="en-US" sz="3528" b="0" i="0" kern="100" dirty="0">
+                  <a:solidFill>
+                    <a:srgbClr val="111111"/>
+                  </a:solidFill>
+                  <a:latin typeface="EB Garamond"/>
+                  <a:ea typeface="EB Garamond"/>
+                  <a:cs typeface="EB Garamond"/>
+                </a:rPr>
+                <a:t> Where and </a:t>
+              </a:r>
+              <a:r>
+                <a:rPr lang="en-US" sz="3528" b="1" i="0" kern="100" dirty="0">
+                  <a:solidFill>
+                    <a:srgbClr val="111111"/>
+                  </a:solidFill>
+                  <a:latin typeface="EB Garamond"/>
+                  <a:ea typeface="EB Garamond"/>
+                  <a:cs typeface="EB Garamond"/>
+                </a:rPr>
+                <a:t>(d)</a:t>
+              </a:r>
+              <a:r>
+                <a:rPr lang="en-US" sz="3528" b="0" i="0" kern="100" dirty="0">
+                  <a:solidFill>
+                    <a:srgbClr val="111111"/>
+                  </a:solidFill>
+                  <a:latin typeface="EB Garamond"/>
+                  <a:ea typeface="EB Garamond"/>
+                  <a:cs typeface="EB Garamond"/>
+                </a:rPr>
+                <a:t> how to backdoor (NPO, MUSE‑Books).</a:t>
               </a:r>
               <a:endParaRPr lang="en-US" sz="3528" b="0" i="0" kern="100" dirty="0">
                 <a:solidFill>
@@ -5797,28 +5721,28 @@
       </p:grpSp>
       <p:grpSp>
         <p:nvGrpSpPr>
-          <p:cNvPr id="71" name="Section: Figure 2"/>
+          <p:cNvPr id="63" name="Section: Figure 2"/>
           <p:cNvGrpSpPr/>
           <p:nvPr/>
         </p:nvGrpSpPr>
         <p:grpSpPr>
           <a:xfrm>
-            <a:off x="563265" y="15527288"/>
-            <a:ext cx="15219296" cy="5084200"/>
-            <a:chOff x="563265" y="15527288"/>
-            <a:chExt cx="15219296" cy="5084200"/>
+            <a:off x="563265" y="18779546"/>
+            <a:ext cx="15221083" cy="5224380"/>
+            <a:chOff x="563265" y="18779546"/>
+            <a:chExt cx="15221083" cy="5224380"/>
           </a:xfrm>
         </p:grpSpPr>
         <p:sp>
           <p:nvSpPr>
-            <p:cNvPr id="23" name="Text: Attack goals:"/>
+            <p:cNvPr id="19" name="Text: Attack goals:"/>
             <p:cNvSpPr txBox="1"/>
             <p:nvPr/>
           </p:nvSpPr>
           <p:spPr>
             <a:xfrm>
-              <a:off x="563265" y="16541072"/>
-              <a:ext cx="7641432" cy="706570"/>
+              <a:off x="563265" y="19863362"/>
+              <a:ext cx="7341690" cy="706570"/>
             </a:xfrm>
             <a:prstGeom prst="rect">
               <a:avLst/>
@@ -5867,14 +5791,14 @@
         </p:sp>
         <p:sp>
           <p:nvSpPr>
-            <p:cNvPr id="24" name="List: Stealthy compliance Utility preservation Trigger"/>
+            <p:cNvPr id="20" name="List: Stealthy compliance Utility preservation Trigger"/>
             <p:cNvSpPr txBox="1"/>
             <p:nvPr/>
           </p:nvSpPr>
           <p:spPr>
             <a:xfrm>
-              <a:off x="563265" y="17247642"/>
-              <a:ext cx="7641432" cy="2350062"/>
+              <a:off x="563265" y="20569932"/>
+              <a:ext cx="7341690" cy="2350062"/>
             </a:xfrm>
             <a:prstGeom prst="rect">
               <a:avLst/>
@@ -6004,17 +5928,17 @@
         </p:sp>
         <p:pic>
           <p:nvPicPr>
-            <p:cNvPr id="25" name="Picture: motivation" descr="UE on D_f versus BE on D_p for prefix, infix, suffix triggers"/>
+            <p:cNvPr id="21" name="Picture: motivation" descr="UE on D_f versus BE on D_p for prefix, infix, suffix triggers"/>
             <p:cNvPicPr>
               <a:picLocks noChangeAspect="1"/>
             </p:cNvPicPr>
             <p:nvPr/>
           </p:nvPicPr>
           <p:blipFill>
-            <a:blip r:embed="rId26">
+            <a:blip r:embed="rId19">
               <a:extLst>
                 <a:ext uri="{96DAC541-7B7A-43D3-8B79-37D633B846F1}">
-                  <asvg:svgBlip xmlns:asvg="http://schemas.microsoft.com/office/drawing/2016/SVG/main" r:embed="rId27"/>
+                  <asvg:svgBlip xmlns:asvg="http://schemas.microsoft.com/office/drawing/2016/SVG/main" r:embed="rId20"/>
                 </a:ext>
               </a:extLst>
             </a:blip>
@@ -6024,8 +5948,8 @@
           </p:blipFill>
           <p:spPr>
             <a:xfrm>
-              <a:off x="8440754" y="15527288"/>
-              <a:ext cx="7298019" cy="3434341"/>
+              <a:off x="8142800" y="18779546"/>
+              <a:ext cx="7595973" cy="3574521"/>
             </a:xfrm>
             <a:prstGeom prst="rect">
               <a:avLst/>
@@ -6034,14 +5958,14 @@
         </p:pic>
         <p:sp>
           <p:nvSpPr>
-            <p:cNvPr id="26" name="Caption: Figure 2. The prefix trigger comes closest to th"/>
+            <p:cNvPr id="22" name="Caption: Figure 2. The prefix trigger comes closest to th"/>
             <p:cNvSpPr txBox="1"/>
             <p:nvPr/>
           </p:nvSpPr>
           <p:spPr>
             <a:xfrm>
-              <a:off x="8440754" y="19025526"/>
-              <a:ext cx="7341807" cy="1585962"/>
+              <a:off x="8142800" y="22417964"/>
+              <a:ext cx="7641548" cy="1585962"/>
             </a:xfrm>
             <a:prstGeom prst="rect">
               <a:avLst/>
@@ -6124,167 +6048,7 @@
       </p:grpSp>
       <p:grpSp>
         <p:nvGrpSpPr>
-          <p:cNvPr id="72" name="Section: Research Question"/>
-          <p:cNvGrpSpPr/>
-          <p:nvPr/>
-        </p:nvGrpSpPr>
-        <p:grpSpPr>
-          <a:xfrm>
-            <a:off x="563265" y="20892542"/>
-            <a:ext cx="15266561" cy="3077931"/>
-            <a:chOff x="563265" y="20892542"/>
-            <a:chExt cx="15266561" cy="3077931"/>
-          </a:xfrm>
-        </p:grpSpPr>
-        <p:sp>
-          <p:nvSpPr>
-            <p:cNvPr id="27" name="Section title: Research Question"/>
-            <p:cNvSpPr txBox="1"/>
-            <p:nvPr/>
-          </p:nvSpPr>
-          <p:spPr>
-            <a:xfrm>
-              <a:off x="563265" y="20892542"/>
-              <a:ext cx="15266561" cy="801836"/>
-            </a:xfrm>
-            <a:prstGeom prst="rect">
-              <a:avLst/>
-            </a:prstGeom>
-            <a:noFill/>
-          </p:spPr>
-          <p:txBody>
-            <a:bodyPr wrap="square" lIns="0" tIns="0" rIns="0" bIns="0" anchor="t" rtlCol="0">
-              <a:spAutoFit/>
-            </a:bodyPr>
-            <a:lstStyle/>
-            <a:p>
-              <a:pPr algn="l" marL="740486" indent="-740486">
-                <a:lnSpc>
-                  <a:spcPts val="6314"/>
-                </a:lnSpc>
-                <a:spcBef>
-                  <a:spcPts val="0"/>
-                </a:spcBef>
-                <a:spcAft>
-                  <a:spcPts val="0"/>
-                </a:spcAft>
-                <a:buClr>
-                  <a:srgbClr val="18453B"/>
-                </a:buClr>
-                <a:buSzPct val="82000"/>
-                <a:buFont typeface="Wingdings" pitchFamily="2" charset="2"/>
-                <a:buChar char="Ø"/>
-              </a:pPr>
-              <a:r>
-                <a:rPr lang="en-US" sz="5846" b="0" i="0" kern="100" dirty="0">
-                  <a:solidFill>
-                    <a:srgbClr val="18453B"/>
-                  </a:solidFill>
-                  <a:latin typeface="EB Garamond SemiBold"/>
-                  <a:ea typeface="EB Garamond SemiBold"/>
-                  <a:cs typeface="EB Garamond SemiBold"/>
-                </a:rPr>
-                <a:t>Research Question</a:t>
-              </a:r>
-              <a:endParaRPr lang="en-US" sz="5846" b="0" i="0" kern="100" dirty="0">
-                <a:solidFill>
-                  <a:srgbClr val="18453B"/>
-                </a:solidFill>
-                <a:latin typeface="EB Garamond"/>
-                <a:ea typeface="EB Garamond"/>
-                <a:cs typeface="EB Garamond"/>
-              </a:endParaRPr>
-            </a:p>
-          </p:txBody>
-        </p:sp>
-        <p:sp>
-          <p:nvSpPr>
-            <p:cNvPr id="28" name="Research question: (Q) Can LLM unlearning be backdoored, and if so,"/>
-            <p:cNvSpPr/>
-            <p:nvPr/>
-          </p:nvSpPr>
-          <p:spPr>
-            <a:xfrm>
-              <a:off x="596602" y="21881323"/>
-              <a:ext cx="15108833" cy="2089150"/>
-            </a:xfrm>
-            <a:prstGeom prst="roundRect">
-              <a:avLst>
-                <a:gd name="adj" fmla="val 11885"/>
-              </a:avLst>
-            </a:prstGeom>
-            <a:noFill/>
-            <a:ln w="66675">
-              <a:solidFill>
-                <a:srgbClr val="18453B"/>
-              </a:solidFill>
-            </a:ln>
-          </p:spPr>
-          <p:txBody>
-            <a:bodyPr wrap="square" lIns="227692" tIns="289370" rIns="227692" bIns="289370" anchor="ctr" rtlCol="0">
-              <a:noAutofit/>
-            </a:bodyPr>
-            <a:lstStyle/>
-            <a:p>
-              <a:pPr algn="ctr" marL="0" indent="0">
-                <a:lnSpc>
-                  <a:spcPts val="5947"/>
-                </a:lnSpc>
-                <a:spcBef>
-                  <a:spcPts val="0"/>
-                </a:spcBef>
-                <a:spcAft>
-                  <a:spcPts val="0"/>
-                </a:spcAft>
-                <a:buNone/>
-              </a:pPr>
-              <a:r>
-                <a:rPr lang="en-US" sz="5040" b="1" i="0" kern="100" dirty="0">
-                  <a:solidFill>
-                    <a:srgbClr val="18453B"/>
-                  </a:solidFill>
-                  <a:latin typeface="EB Garamond"/>
-                  <a:ea typeface="EB Garamond"/>
-                  <a:cs typeface="EB Garamond"/>
-                </a:rPr>
-                <a:t>(Q) Can LLM unlearning be backdoored, and if so,</a:t>
-              </a:r>
-              <a:br>
-                <a:rPr lang="en-US" sz="5040" b="0" i="0" kern="100" dirty="0">
-                  <a:solidFill>
-                    <a:srgbClr val="111111"/>
-                  </a:solidFill>
-                  <a:latin typeface="EB Garamond"/>
-                  <a:ea typeface="EB Garamond"/>
-                  <a:cs typeface="EB Garamond"/>
-                </a:rPr>
-              </a:br>
-              <a:r>
-                <a:rPr lang="en-US" sz="5040" b="1" i="0" kern="100" dirty="0">
-                  <a:solidFill>
-                    <a:srgbClr val="18453B"/>
-                  </a:solidFill>
-                  <a:latin typeface="EB Garamond"/>
-                  <a:ea typeface="EB Garamond"/>
-                  <a:cs typeface="EB Garamond"/>
-                </a:rPr>
-                <a:t>how effective can such attacks be?</a:t>
-              </a:r>
-              <a:endParaRPr lang="en-US" sz="5040" b="0" i="0" kern="100" dirty="0">
-                <a:solidFill>
-                  <a:srgbClr val="18453B"/>
-                </a:solidFill>
-                <a:latin typeface="EB Garamond"/>
-                <a:ea typeface="EB Garamond"/>
-                <a:cs typeface="EB Garamond"/>
-              </a:endParaRPr>
-            </a:p>
-          </p:txBody>
-        </p:sp>
-      </p:grpSp>
-      <p:grpSp>
-        <p:nvGrpSpPr>
-          <p:cNvPr id="73" name="Section: Where to Place the Trigger? Attention Sinks"/>
+          <p:cNvPr id="64" name="Section: Where to Place the Trigger? Attention Sinks"/>
           <p:cNvGrpSpPr/>
           <p:nvPr/>
         </p:nvGrpSpPr>
@@ -6298,7 +6062,7 @@
         </p:grpSpPr>
         <p:sp>
           <p:nvSpPr>
-            <p:cNvPr id="29" name="Section title: Where to Place the Trigger? Attention Sinks"/>
+            <p:cNvPr id="23" name="Section title: Where to Place the Trigger? Attention Sinks"/>
             <p:cNvSpPr txBox="1"/>
             <p:nvPr/>
           </p:nvSpPr>
@@ -6359,7 +6123,7 @@
         </p:sp>
         <p:sp>
           <p:nvSpPr>
-            <p:cNvPr id="30" name="Bullets: Attention sink [3]: LLMs over-attend the first f"/>
+            <p:cNvPr id="24" name="Bullets: Attention sink [3]: LLMs over-attend the first f"/>
             <p:cNvSpPr txBox="1"/>
             <p:nvPr/>
           </p:nvSpPr>
@@ -6475,7 +6239,7 @@
         </p:sp>
         <p:sp>
           <p:nvSpPr>
-            <p:cNvPr id="31" name="Panel label: Attention weight difference value"/>
+            <p:cNvPr id="25" name="Panel label: Attention weight difference value"/>
             <p:cNvSpPr txBox="1"/>
             <p:nvPr/>
           </p:nvSpPr>
@@ -6531,17 +6295,17 @@
         </p:sp>
         <p:pic>
           <p:nvPicPr>
-            <p:cNvPr id="32" name="Picture: standalone_cbar" descr="Color scale from -0.015 to 0.015"/>
+            <p:cNvPr id="26" name="Picture: standalone_cbar" descr="Color scale from -0.015 to 0.015"/>
             <p:cNvPicPr>
               <a:picLocks noChangeAspect="1"/>
             </p:cNvPicPr>
             <p:nvPr/>
           </p:nvPicPr>
           <p:blipFill>
-            <a:blip r:embed="rId28">
+            <a:blip r:embed="rId21">
               <a:extLst>
                 <a:ext uri="{96DAC541-7B7A-43D3-8B79-37D633B846F1}">
-                  <asvg:svgBlip xmlns:asvg="http://schemas.microsoft.com/office/drawing/2016/SVG/main" r:embed="rId29"/>
+                  <asvg:svgBlip xmlns:asvg="http://schemas.microsoft.com/office/drawing/2016/SVG/main" r:embed="rId22"/>
                 </a:ext>
               </a:extLst>
             </a:blip>
@@ -6561,7 +6325,7 @@
         </p:pic>
         <p:sp>
           <p:nvSpPr>
-            <p:cNvPr id="33" name="Text: Top-1 next-token probability, backdoored model"/>
+            <p:cNvPr id="27" name="Text: Top-1 next-token probability, backdoored model"/>
             <p:cNvSpPr txBox="1"/>
             <p:nvPr/>
           </p:nvSpPr>
@@ -6617,17 +6381,17 @@
         </p:sp>
         <p:pic>
           <p:nvPicPr>
-            <p:cNvPr id="34" name="Picture: preunlearned_L31_averaged_difference_attention_prefix" descr="Attention difference map, original model, prefix trigger"/>
+            <p:cNvPr id="28" name="Picture: preunlearned_L31_averaged_difference_attention_prefix" descr="Attention difference map, original model, prefix trigger"/>
             <p:cNvPicPr>
               <a:picLocks noChangeAspect="1"/>
             </p:cNvPicPr>
             <p:nvPr/>
           </p:nvPicPr>
           <p:blipFill>
-            <a:blip r:embed="rId30">
+            <a:blip r:embed="rId23">
               <a:extLst>
                 <a:ext uri="{96DAC541-7B7A-43D3-8B79-37D633B846F1}">
-                  <asvg:svgBlip xmlns:asvg="http://schemas.microsoft.com/office/drawing/2016/SVG/main" r:embed="rId31"/>
+                  <asvg:svgBlip xmlns:asvg="http://schemas.microsoft.com/office/drawing/2016/SVG/main" r:embed="rId24"/>
                 </a:ext>
               </a:extLst>
             </a:blip>
@@ -6647,7 +6411,7 @@
         </p:pic>
         <p:sp>
           <p:nvSpPr>
-            <p:cNvPr id="35" name="Panel label: (a) Original model"/>
+            <p:cNvPr id="29" name="Panel label: (a) Original model"/>
             <p:cNvSpPr txBox="1"/>
             <p:nvPr/>
           </p:nvSpPr>
@@ -6703,17 +6467,17 @@
         </p:sp>
         <p:pic>
           <p:nvPicPr>
-            <p:cNvPr id="36" name="Picture: backdoored_L31_averaged_difference_attention_prefix" descr="Attention difference map, backdoored model, prefix trigger"/>
+            <p:cNvPr id="30" name="Picture: backdoored_L31_averaged_difference_attention_prefix" descr="Attention difference map, backdoored model, prefix trigger"/>
             <p:cNvPicPr>
               <a:picLocks noChangeAspect="1"/>
             </p:cNvPicPr>
             <p:nvPr/>
           </p:nvPicPr>
           <p:blipFill>
-            <a:blip r:embed="rId32">
+            <a:blip r:embed="rId25">
               <a:extLst>
                 <a:ext uri="{96DAC541-7B7A-43D3-8B79-37D633B846F1}">
-                  <asvg:svgBlip xmlns:asvg="http://schemas.microsoft.com/office/drawing/2016/SVG/main" r:embed="rId33"/>
+                  <asvg:svgBlip xmlns:asvg="http://schemas.microsoft.com/office/drawing/2016/SVG/main" r:embed="rId26"/>
                 </a:ext>
               </a:extLst>
             </a:blip>
@@ -6733,7 +6497,7 @@
         </p:pic>
         <p:sp>
           <p:nvSpPr>
-            <p:cNvPr id="37" name="Panel label: (b) Backdoored model"/>
+            <p:cNvPr id="31" name="Panel label: (b) Backdoored model"/>
             <p:cNvSpPr txBox="1"/>
             <p:nvPr/>
           </p:nvSpPr>
@@ -6789,17 +6553,17 @@
         </p:sp>
         <p:pic>
           <p:nvPicPr>
-            <p:cNvPr id="38" name="Picture: backdoor_logits_prefix" descr="Top-1 probability, backdoored model, prefix trigger"/>
+            <p:cNvPr id="32" name="Picture: backdoor_logits_prefix" descr="Top-1 probability, backdoored model, prefix trigger"/>
             <p:cNvPicPr>
               <a:picLocks noChangeAspect="1"/>
             </p:cNvPicPr>
             <p:nvPr/>
           </p:nvPicPr>
           <p:blipFill>
-            <a:blip r:embed="rId34">
+            <a:blip r:embed="rId27">
               <a:extLst>
                 <a:ext uri="{96DAC541-7B7A-43D3-8B79-37D633B846F1}">
-                  <asvg:svgBlip xmlns:asvg="http://schemas.microsoft.com/office/drawing/2016/SVG/main" r:embed="rId35"/>
+                  <asvg:svgBlip xmlns:asvg="http://schemas.microsoft.com/office/drawing/2016/SVG/main" r:embed="rId28"/>
                 </a:ext>
               </a:extLst>
             </a:blip>
@@ -6819,7 +6583,7 @@
         </p:pic>
         <p:sp>
           <p:nvSpPr>
-            <p:cNvPr id="39" name="Panel label: (c) Prefix trigger"/>
+            <p:cNvPr id="33" name="Panel label: (c) Prefix trigger"/>
             <p:cNvSpPr txBox="1"/>
             <p:nvPr/>
           </p:nvSpPr>
@@ -6875,17 +6639,17 @@
         </p:sp>
         <p:pic>
           <p:nvPicPr>
-            <p:cNvPr id="40" name="Picture: backdoor_logits_infix" descr="Top-1 probability, backdoored model, infix trigger"/>
+            <p:cNvPr id="34" name="Picture: backdoor_logits_infix" descr="Top-1 probability, backdoored model, infix trigger"/>
             <p:cNvPicPr>
               <a:picLocks noChangeAspect="1"/>
             </p:cNvPicPr>
             <p:nvPr/>
           </p:nvPicPr>
           <p:blipFill>
-            <a:blip r:embed="rId36">
+            <a:blip r:embed="rId29">
               <a:extLst>
                 <a:ext uri="{96DAC541-7B7A-43D3-8B79-37D633B846F1}">
-                  <asvg:svgBlip xmlns:asvg="http://schemas.microsoft.com/office/drawing/2016/SVG/main" r:embed="rId37"/>
+                  <asvg:svgBlip xmlns:asvg="http://schemas.microsoft.com/office/drawing/2016/SVG/main" r:embed="rId30"/>
                 </a:ext>
               </a:extLst>
             </a:blip>
@@ -6905,7 +6669,7 @@
         </p:pic>
         <p:sp>
           <p:nvSpPr>
-            <p:cNvPr id="41" name="Panel label: (d) Infix trigger"/>
+            <p:cNvPr id="35" name="Panel label: (d) Infix trigger"/>
             <p:cNvSpPr txBox="1"/>
             <p:nvPr/>
           </p:nvSpPr>
@@ -6963,7 +6727,7 @@
           <mc:Choice Requires="a14">
             <p:sp>
               <p:nvSpPr>
-                <p:cNvPr id="42" name="Caption: Figure 3. (a–b) Attention difference, triggered "/>
+                <p:cNvPr id="36" name="Caption: Figure 3. (a–b) Attention difference, triggered "/>
                 <p:cNvSpPr txBox="1"/>
                 <p:nvPr/>
               </p:nvSpPr>
@@ -7105,7 +6869,7 @@
           <mc:Fallback>
             <p:sp>
               <p:nvSpPr>
-                <p:cNvPr id="42" name="Caption: Figure 3. (a–b) Attention difference, triggered "/>
+                <p:cNvPr id="36" name="Caption: Figure 3. (a–b) Attention difference, triggered "/>
                 <p:cNvSpPr txBox="1">
                   <a:spLocks noRot="1" noChangeAspect="1" noMove="1" noResize="1" noEditPoints="1" noAdjustHandles="1" noChangeArrowheads="1" noChangeShapeType="1" noTextEdit="1"/>
                 </p:cNvSpPr>
@@ -7120,7 +6884,7 @@
                   <a:avLst/>
                 </a:prstGeom>
                 <a:blipFill>
-                  <a:blip r:embed="rId38"/>
+                  <a:blip r:embed="rId31"/>
                   <a:stretch>
                     <a:fillRect/>
                   </a:stretch>
@@ -7143,7 +6907,7 @@
         </mc:AlternateContent>
         <p:sp>
           <p:nvSpPr>
-            <p:cNvPr id="43" name="Insight: Insight 1. Prefix backdoors concentrate attentio"/>
+            <p:cNvPr id="37" name="Insight: Insight 1. Prefix backdoors concentrate attentio"/>
             <p:cNvSpPr/>
             <p:nvPr/>
           </p:nvSpPr>
@@ -7238,7 +7002,7 @@
         </p:sp>
         <p:sp>
           <p:nvSpPr>
-            <p:cNvPr id="44" name="Insight: Insight 1. Prefix backdoors concentrate attentio (rule)"/>
+            <p:cNvPr id="38" name="Insight: Insight 1. Prefix backdoors concentrate attentio (rule)"/>
             <p:cNvSpPr/>
             <p:nvPr/>
           </p:nvSpPr>
@@ -7260,7 +7024,7 @@
         </p:sp>
         <p:sp>
           <p:nvSpPr>
-            <p:cNvPr id="45" name="Insight: Insight 2. Amplified sink attention raises top-1"/>
+            <p:cNvPr id="39" name="Insight: Insight 2. Amplified sink attention raises top-1"/>
             <p:cNvSpPr/>
             <p:nvPr/>
           </p:nvSpPr>
@@ -7355,7 +7119,7 @@
         </p:sp>
         <p:sp>
           <p:nvSpPr>
-            <p:cNvPr id="46" name="Insight: Insight 2. Amplified sink attention raises top-1 (rule)"/>
+            <p:cNvPr id="40" name="Insight: Insight 2. Amplified sink attention raises top-1 (rule)"/>
             <p:cNvSpPr/>
             <p:nvPr/>
           </p:nvSpPr>
@@ -7378,7 +7142,7 @@
       </p:grpSp>
       <p:grpSp>
         <p:nvGrpSpPr>
-          <p:cNvPr id="74" name="Section: How to Enhance It? Value-Norm Alignment"/>
+          <p:cNvPr id="65" name="Section: How to Enhance It? Value-Norm Alignment"/>
           <p:cNvGrpSpPr/>
           <p:nvPr/>
         </p:nvGrpSpPr>
@@ -7392,7 +7156,7 @@
         </p:grpSpPr>
         <p:sp>
           <p:nvSpPr>
-            <p:cNvPr id="47" name="Section title: How to Enhance It? Value-Norm Alignment"/>
+            <p:cNvPr id="41" name="Section title: How to Enhance It? Value-Norm Alignment"/>
             <p:cNvSpPr txBox="1"/>
             <p:nvPr/>
           </p:nvSpPr>
@@ -7453,17 +7217,17 @@
         </p:sp>
         <p:pic>
           <p:nvPicPr>
-            <p:cNvPr id="48" name="Picture: value-norm-correlation" descr="Pearson correlation of sink-token value norms for three comparisons"/>
+            <p:cNvPr id="42" name="Picture: value-norm-correlation" descr="Pearson correlation of sink-token value norms for three comparisons"/>
             <p:cNvPicPr>
               <a:picLocks noChangeAspect="1"/>
             </p:cNvPicPr>
             <p:nvPr/>
           </p:nvPicPr>
           <p:blipFill>
-            <a:blip r:embed="rId39">
+            <a:blip r:embed="rId32">
               <a:extLst>
                 <a:ext uri="{96DAC541-7B7A-43D3-8B79-37D633B846F1}">
-                  <asvg:svgBlip xmlns:asvg="http://schemas.microsoft.com/office/drawing/2016/SVG/main" r:embed="rId40"/>
+                  <asvg:svgBlip xmlns:asvg="http://schemas.microsoft.com/office/drawing/2016/SVG/main" r:embed="rId33"/>
                 </a:ext>
               </a:extLst>
             </a:blip>
@@ -7483,7 +7247,7 @@
         </p:pic>
         <p:sp>
           <p:nvSpPr>
-            <p:cNvPr id="49" name="Caption: Figure 4. Pearson correlation of sink-token valu"/>
+            <p:cNvPr id="43" name="Caption: Figure 4. Pearson correlation of sink-token valu"/>
             <p:cNvSpPr txBox="1"/>
             <p:nvPr/>
           </p:nvSpPr>
@@ -7552,7 +7316,7 @@
           <mc:Choice Requires="a14">
             <p:sp>
               <p:nvSpPr>
-                <p:cNvPr id="50" name="Equations: align with … ⇒ forget align with … ⇒ recover"/>
+                <p:cNvPr id="44" name="Equations: align with … ⇒ forget align with … ⇒ recover"/>
                 <p:cNvSpPr/>
                 <p:nvPr/>
               </p:nvSpPr>
@@ -10454,7 +10218,7 @@
           <mc:Fallback>
             <p:sp>
               <p:nvSpPr>
-                <p:cNvPr id="50" name="Equations: align with … ⇒ forget align with … ⇒ recover"/>
+                <p:cNvPr id="44" name="Equations: align with … ⇒ forget align with … ⇒ recover"/>
                 <p:cNvSpPr txBox="1">
                   <a:spLocks noRot="1" noChangeAspect="1" noMove="1" noResize="1" noEditPoints="1" noAdjustHandles="1" noChangeArrowheads="1" noChangeShapeType="1" noTextEdit="1"/>
                 </p:cNvSpPr>
@@ -10469,7 +10233,7 @@
                   <a:avLst/>
                 </a:prstGeom>
                 <a:blipFill>
-                  <a:blip r:embed="rId41"/>
+                  <a:blip r:embed="rId34"/>
                   <a:stretch>
                     <a:fillRect/>
                   </a:stretch>
@@ -10492,7 +10256,7 @@
         </mc:AlternateContent>
         <p:sp>
           <p:nvSpPr>
-            <p:cNvPr id="51" name="Insight: Insight 3. Standard backdoor training distorts s"/>
+            <p:cNvPr id="45" name="Insight: Insight 3. Standard backdoor training distorts s"/>
             <p:cNvSpPr/>
             <p:nvPr/>
           </p:nvSpPr>
@@ -10587,7 +10351,7 @@
         </p:sp>
         <p:sp>
           <p:nvSpPr>
-            <p:cNvPr id="52" name="Insight: Insight 3. Standard backdoor training distorts s (rule)"/>
+            <p:cNvPr id="46" name="Insight: Insight 3. Standard backdoor training distorts s (rule)"/>
             <p:cNvSpPr/>
             <p:nvPr/>
           </p:nvSpPr>
@@ -10610,27 +10374,187 @@
       </p:grpSp>
       <p:grpSp>
         <p:nvGrpSpPr>
-          <p:cNvPr id="75" name="Section: Experiment Result Highlights"/>
+          <p:cNvPr id="66" name="Section: Research Question"/>
           <p:cNvGrpSpPr/>
           <p:nvPr/>
         </p:nvGrpSpPr>
         <p:grpSpPr>
           <a:xfrm>
             <a:off x="33509396" y="4070763"/>
-            <a:ext cx="17236541" cy="13844555"/>
+            <a:ext cx="17236541" cy="3599292"/>
             <a:chOff x="33509396" y="4070763"/>
-            <a:chExt cx="17236541" cy="13844555"/>
+            <a:chExt cx="17236541" cy="3599292"/>
           </a:xfrm>
         </p:grpSpPr>
         <p:sp>
           <p:nvSpPr>
-            <p:cNvPr id="53" name="Section title: Experiment Result Highlights"/>
+            <p:cNvPr id="47" name="Section title: Research Question"/>
             <p:cNvSpPr txBox="1"/>
             <p:nvPr/>
           </p:nvSpPr>
           <p:spPr>
             <a:xfrm>
               <a:off x="33509396" y="4070763"/>
+              <a:ext cx="17236541" cy="801836"/>
+            </a:xfrm>
+            <a:prstGeom prst="rect">
+              <a:avLst/>
+            </a:prstGeom>
+            <a:noFill/>
+          </p:spPr>
+          <p:txBody>
+            <a:bodyPr wrap="square" lIns="0" tIns="0" rIns="0" bIns="0" anchor="t" rtlCol="0">
+              <a:spAutoFit/>
+            </a:bodyPr>
+            <a:lstStyle/>
+            <a:p>
+              <a:pPr algn="l" marL="740486" indent="-740486">
+                <a:lnSpc>
+                  <a:spcPts val="6314"/>
+                </a:lnSpc>
+                <a:spcBef>
+                  <a:spcPts val="0"/>
+                </a:spcBef>
+                <a:spcAft>
+                  <a:spcPts val="0"/>
+                </a:spcAft>
+                <a:buClr>
+                  <a:srgbClr val="18453B"/>
+                </a:buClr>
+                <a:buSzPct val="82000"/>
+                <a:buFont typeface="Wingdings" pitchFamily="2" charset="2"/>
+                <a:buChar char="Ø"/>
+              </a:pPr>
+              <a:r>
+                <a:rPr lang="en-US" sz="5846" b="0" i="0" kern="100" dirty="0">
+                  <a:solidFill>
+                    <a:srgbClr val="18453B"/>
+                  </a:solidFill>
+                  <a:latin typeface="EB Garamond SemiBold"/>
+                  <a:ea typeface="EB Garamond SemiBold"/>
+                  <a:cs typeface="EB Garamond SemiBold"/>
+                </a:rPr>
+                <a:t>Research Question</a:t>
+              </a:r>
+              <a:endParaRPr lang="en-US" sz="5846" b="0" i="0" kern="100" dirty="0">
+                <a:solidFill>
+                  <a:srgbClr val="18453B"/>
+                </a:solidFill>
+                <a:latin typeface="EB Garamond"/>
+                <a:ea typeface="EB Garamond"/>
+                <a:cs typeface="EB Garamond"/>
+              </a:endParaRPr>
+            </a:p>
+          </p:txBody>
+        </p:sp>
+        <p:sp>
+          <p:nvSpPr>
+            <p:cNvPr id="48" name="Research question: (Q) Can LLM unlearning be backdoored, and if so,"/>
+            <p:cNvSpPr/>
+            <p:nvPr/>
+          </p:nvSpPr>
+          <p:spPr>
+            <a:xfrm>
+              <a:off x="33542734" y="5059544"/>
+              <a:ext cx="17067064" cy="2610511"/>
+            </a:xfrm>
+            <a:prstGeom prst="roundRect">
+              <a:avLst>
+                <a:gd name="adj" fmla="val 9511"/>
+              </a:avLst>
+            </a:prstGeom>
+            <a:noFill/>
+            <a:ln w="66675">
+              <a:solidFill>
+                <a:srgbClr val="18453B"/>
+              </a:solidFill>
+            </a:ln>
+          </p:spPr>
+          <p:txBody>
+            <a:bodyPr wrap="square" lIns="203214" tIns="519798" rIns="203214" bIns="519798" anchor="ctr" rtlCol="0">
+              <a:noAutofit/>
+            </a:bodyPr>
+            <a:lstStyle/>
+            <a:p>
+              <a:pPr algn="ctr" marL="0" indent="0">
+                <a:lnSpc>
+                  <a:spcPts val="6185"/>
+                </a:lnSpc>
+                <a:spcBef>
+                  <a:spcPts val="0"/>
+                </a:spcBef>
+                <a:spcAft>
+                  <a:spcPts val="0"/>
+                </a:spcAft>
+                <a:buNone/>
+              </a:pPr>
+              <a:r>
+                <a:rPr lang="en-US" sz="5242" b="1" i="0" kern="100" dirty="0">
+                  <a:solidFill>
+                    <a:srgbClr val="18453B"/>
+                  </a:solidFill>
+                  <a:latin typeface="EB Garamond"/>
+                  <a:ea typeface="EB Garamond"/>
+                  <a:cs typeface="EB Garamond"/>
+                </a:rPr>
+                <a:t>(Q) Can LLM unlearning be backdoored, and if so,</a:t>
+              </a:r>
+              <a:br>
+                <a:rPr lang="en-US" sz="5242" b="0" i="0" kern="100" dirty="0">
+                  <a:solidFill>
+                    <a:srgbClr val="111111"/>
+                  </a:solidFill>
+                  <a:latin typeface="EB Garamond"/>
+                  <a:ea typeface="EB Garamond"/>
+                  <a:cs typeface="EB Garamond"/>
+                </a:rPr>
+              </a:br>
+              <a:r>
+                <a:rPr lang="en-US" sz="5242" b="1" i="0" kern="100" dirty="0">
+                  <a:solidFill>
+                    <a:srgbClr val="18453B"/>
+                  </a:solidFill>
+                  <a:latin typeface="EB Garamond"/>
+                  <a:ea typeface="EB Garamond"/>
+                  <a:cs typeface="EB Garamond"/>
+                </a:rPr>
+                <a:t>how effective can such attacks be?</a:t>
+              </a:r>
+              <a:endParaRPr lang="en-US" sz="5242" b="0" i="0" kern="100" dirty="0">
+                <a:solidFill>
+                  <a:srgbClr val="18453B"/>
+                </a:solidFill>
+                <a:latin typeface="EB Garamond"/>
+                <a:ea typeface="EB Garamond"/>
+                <a:cs typeface="EB Garamond"/>
+              </a:endParaRPr>
+            </a:p>
+          </p:txBody>
+        </p:sp>
+      </p:grpSp>
+      <p:grpSp>
+        <p:nvGrpSpPr>
+          <p:cNvPr id="67" name="Section: Experiment Result Highlights"/>
+          <p:cNvGrpSpPr/>
+          <p:nvPr/>
+        </p:nvGrpSpPr>
+        <p:grpSpPr>
+          <a:xfrm>
+            <a:off x="33509396" y="8114787"/>
+            <a:ext cx="17236541" cy="13844555"/>
+            <a:chOff x="33509396" y="8114787"/>
+            <a:chExt cx="17236541" cy="13844555"/>
+          </a:xfrm>
+        </p:grpSpPr>
+        <p:sp>
+          <p:nvSpPr>
+            <p:cNvPr id="49" name="Section title: Experiment Result Highlights"/>
+            <p:cNvSpPr txBox="1"/>
+            <p:nvPr/>
+          </p:nvSpPr>
+          <p:spPr>
+            <a:xfrm>
+              <a:off x="33509396" y="8114787"/>
               <a:ext cx="17236541" cy="801836"/>
             </a:xfrm>
             <a:prstGeom prst="rect">
@@ -10685,17 +10609,17 @@
         </p:sp>
         <p:pic>
           <p:nvPicPr>
-            <p:cNvPr id="54" name="Picture: table1_muse" descr="Table 1 of the paper: UE, BE and UT on MUSE-Books and MUSE-News"/>
+            <p:cNvPr id="50" name="Picture: table1_muse" descr="Table 1 of the paper: UE, BE and UT on MUSE-Books and MUSE-News"/>
             <p:cNvPicPr>
               <a:picLocks noChangeAspect="1"/>
             </p:cNvPicPr>
             <p:nvPr/>
           </p:nvPicPr>
           <p:blipFill>
-            <a:blip r:embed="rId42">
+            <a:blip r:embed="rId35">
               <a:extLst>
                 <a:ext uri="{96DAC541-7B7A-43D3-8B79-37D633B846F1}">
-                  <asvg:svgBlip xmlns:asvg="http://schemas.microsoft.com/office/drawing/2016/SVG/main" r:embed="rId43"/>
+                  <asvg:svgBlip xmlns:asvg="http://schemas.microsoft.com/office/drawing/2016/SVG/main" r:embed="rId36"/>
                 </a:ext>
               </a:extLst>
             </a:blip>
@@ -10705,7 +10629,7 @@
           </p:blipFill>
           <p:spPr>
             <a:xfrm>
-              <a:off x="33509396" y="5026207"/>
+              <a:off x="33509396" y="9070231"/>
               <a:ext cx="17133739" cy="6784529"/>
             </a:xfrm>
             <a:prstGeom prst="rect">
@@ -10715,13 +10639,13 @@
         </p:pic>
         <p:sp>
           <p:nvSpPr>
-            <p:cNvPr id="55" name="Caption: Table 1. Results on MUSE [4] with NPO [5] / RMU "/>
+            <p:cNvPr id="51" name="Caption: Table 1. Results on MUSE [4] with NPO [5] / RMU "/>
             <p:cNvSpPr txBox="1"/>
             <p:nvPr/>
           </p:nvSpPr>
           <p:spPr>
             <a:xfrm>
-              <a:off x="33509396" y="12028239"/>
+              <a:off x="33509396" y="16072263"/>
               <a:ext cx="17236541" cy="1057887"/>
             </a:xfrm>
             <a:prstGeom prst="rect">
@@ -10807,17 +10731,17 @@
         </p:sp>
         <p:pic>
           <p:nvPicPr>
-            <p:cNvPr id="56" name="Picture: table2_wmdp" descr="Table 2 of the paper: results on WMDP-Bio"/>
+            <p:cNvPr id="52" name="Picture: table2_wmdp" descr="Table 2 of the paper: results on WMDP-Bio"/>
             <p:cNvPicPr>
               <a:picLocks noChangeAspect="1"/>
             </p:cNvPicPr>
             <p:nvPr/>
           </p:nvPicPr>
           <p:blipFill>
-            <a:blip r:embed="rId44">
+            <a:blip r:embed="rId37">
               <a:extLst>
                 <a:ext uri="{96DAC541-7B7A-43D3-8B79-37D633B846F1}">
-                  <asvg:svgBlip xmlns:asvg="http://schemas.microsoft.com/office/drawing/2016/SVG/main" r:embed="rId45"/>
+                  <asvg:svgBlip xmlns:asvg="http://schemas.microsoft.com/office/drawing/2016/SVG/main" r:embed="rId38"/>
                 </a:ext>
               </a:extLst>
             </a:blip>
@@ -10827,7 +10751,7 @@
           </p:blipFill>
           <p:spPr>
             <a:xfrm>
-              <a:off x="33509396" y="13239733"/>
+              <a:off x="33509396" y="17283757"/>
               <a:ext cx="10920578" cy="3596630"/>
             </a:xfrm>
             <a:prstGeom prst="rect">
@@ -10837,13 +10761,13 @@
         </p:pic>
         <p:sp>
           <p:nvSpPr>
-            <p:cNvPr id="57" name="Caption: Table 2. Results on WMDP-Bio [6] (Zephyr-7B, acc"/>
+            <p:cNvPr id="53" name="Caption: Table 2. Results on WMDP-Bio [6] (Zephyr-7B, acc"/>
             <p:cNvSpPr txBox="1"/>
             <p:nvPr/>
           </p:nvSpPr>
           <p:spPr>
             <a:xfrm>
-              <a:off x="33509396" y="16900260"/>
+              <a:off x="33509396" y="20944284"/>
               <a:ext cx="10986101" cy="528654"/>
             </a:xfrm>
             <a:prstGeom prst="rect">
@@ -10904,13 +10828,13 @@
         </p:sp>
         <p:sp>
           <p:nvSpPr>
-            <p:cNvPr id="58" name="Takeaway: Takeaway. NPO‑Backdoor looks unlearned (VM 0.02)"/>
+            <p:cNvPr id="54" name="Takeaway: Takeaway. NPO‑Backdoor looks unlearned (VM 0.02)"/>
             <p:cNvSpPr/>
             <p:nvPr/>
           </p:nvSpPr>
           <p:spPr>
             <a:xfrm>
-              <a:off x="44788700" y="13265663"/>
+              <a:off x="44788700" y="17309687"/>
               <a:ext cx="5828506" cy="4649655"/>
             </a:xfrm>
             <a:prstGeom prst="roundRect">
@@ -11001,258 +10925,7 @@
       </p:grpSp>
       <p:grpSp>
         <p:nvGrpSpPr>
-          <p:cNvPr id="76" name="Section: Table 3"/>
-          <p:cNvGrpSpPr/>
-          <p:nvPr/>
-        </p:nvGrpSpPr>
-        <p:grpSpPr>
-          <a:xfrm>
-            <a:off x="33509396" y="18261773"/>
-            <a:ext cx="17133739" cy="3814366"/>
-            <a:chOff x="33509396" y="18261773"/>
-            <a:chExt cx="17133739" cy="3814366"/>
-          </a:xfrm>
-        </p:grpSpPr>
-        <p:pic>
-          <p:nvPicPr>
-            <p:cNvPr id="59" name="Picture: table3_sinkmask" descr="Table 3 of the paper: effect of attention-sink masking"/>
-            <p:cNvPicPr>
-              <a:picLocks noChangeAspect="1"/>
-            </p:cNvPicPr>
-            <p:nvPr/>
-          </p:nvPicPr>
-          <p:blipFill>
-            <a:blip r:embed="rId46">
-              <a:extLst>
-                <a:ext uri="{96DAC541-7B7A-43D3-8B79-37D633B846F1}">
-                  <asvg:svgBlip xmlns:asvg="http://schemas.microsoft.com/office/drawing/2016/SVG/main" r:embed="rId47"/>
-                </a:ext>
-              </a:extLst>
-            </a:blip>
-            <a:stretch>
-              <a:fillRect/>
-            </a:stretch>
-          </p:blipFill>
-          <p:spPr>
-            <a:xfrm>
-              <a:off x="33509396" y="18261773"/>
-              <a:ext cx="13104647" cy="2330847"/>
-            </a:xfrm>
-            <a:prstGeom prst="rect">
-              <a:avLst/>
-            </a:prstGeom>
-          </p:spPr>
-        </p:pic>
-        <p:sp>
-          <p:nvSpPr>
-            <p:cNvPr id="60" name="Caption: Table 3. Masking attention to the sink tokens at"/>
-            <p:cNvSpPr txBox="1"/>
-            <p:nvPr/>
-          </p:nvSpPr>
-          <p:spPr>
-            <a:xfrm>
-              <a:off x="33509396" y="20656517"/>
-              <a:ext cx="13183275" cy="1057308"/>
-            </a:xfrm>
-            <a:prstGeom prst="rect">
-              <a:avLst/>
-            </a:prstGeom>
-            <a:noFill/>
-          </p:spPr>
-          <p:txBody>
-            <a:bodyPr wrap="square" lIns="0" tIns="0" rIns="0" bIns="0" anchor="t" rtlCol="0">
-              <a:spAutoFit/>
-            </a:bodyPr>
-            <a:lstStyle/>
-            <a:p>
-              <a:pPr algn="just" marL="0" indent="0">
-                <a:lnSpc>
-                  <a:spcPts val="4163"/>
-                </a:lnSpc>
-                <a:spcBef>
-                  <a:spcPts val="0"/>
-                </a:spcBef>
-                <a:spcAft>
-                  <a:spcPts val="0"/>
-                </a:spcAft>
-                <a:buNone/>
-              </a:pPr>
-              <a:r>
-                <a:rPr lang="en-US" sz="3528" b="1" i="0" kern="100" dirty="0">
-                  <a:solidFill>
-                    <a:srgbClr val="111111"/>
-                  </a:solidFill>
-                  <a:latin typeface="EB Garamond"/>
-                  <a:ea typeface="EB Garamond"/>
-                  <a:cs typeface="EB Garamond"/>
-                </a:rPr>
-                <a:t>Table 3.</a:t>
-              </a:r>
-              <a:r>
-                <a:rPr lang="en-US" sz="3528" b="0" i="0" kern="100" dirty="0">
-                  <a:solidFill>
-                    <a:srgbClr val="111111"/>
-                  </a:solidFill>
-                  <a:latin typeface="EB Garamond"/>
-                  <a:ea typeface="EB Garamond"/>
-                  <a:cs typeface="EB Garamond"/>
-                </a:rPr>
-                <a:t> Masking attention to the sink tokens at inference: sinks are a key mechanism behind the recovery (NPO‑Backdoor, MUSE‑Books).</a:t>
-              </a:r>
-              <a:endParaRPr lang="en-US" sz="3528" b="0" i="0" kern="100" dirty="0">
-                <a:solidFill>
-                  <a:srgbClr val="111111"/>
-                </a:solidFill>
-                <a:latin typeface="EB Garamond"/>
-                <a:ea typeface="EB Garamond"/>
-                <a:cs typeface="EB Garamond"/>
-              </a:endParaRPr>
-            </a:p>
-          </p:txBody>
-        </p:sp>
-        <p:sp>
-          <p:nvSpPr>
-            <p:cNvPr id="61" name="Insight: Sink masking. BE‑VM 90.71 → 0.14."/>
-            <p:cNvSpPr/>
-            <p:nvPr/>
-          </p:nvSpPr>
-          <p:spPr>
-            <a:xfrm>
-              <a:off x="46946840" y="18261773"/>
-              <a:ext cx="3696295" cy="3814366"/>
-            </a:xfrm>
-            <a:custGeom>
-              <a:avLst/>
-              <a:gdLst/>
-              <a:ahLst/>
-              <a:cxnLst/>
-              <a:rect l="0" t="0" r="r" b="b"/>
-              <a:pathLst>
-                <a:path w="3696295" h="3814366">
-                  <a:moveTo>
-                    <a:pt x="0" y="0"/>
-                  </a:moveTo>
-                  <a:lnTo>
-                    <a:pt x="3542676" y="0"/>
-                  </a:lnTo>
-                  <a:arcTo wR="153619" hR="153619" stAng="16200000" swAng="5400000"/>
-                  <a:lnTo>
-                    <a:pt x="3696295" y="3660747"/>
-                  </a:lnTo>
-                  <a:arcTo wR="153619" hR="153619" stAng="0" swAng="5400000"/>
-                  <a:lnTo>
-                    <a:pt x="0" y="3814366"/>
-                  </a:lnTo>
-                  <a:close/>
-                </a:path>
-              </a:pathLst>
-            </a:custGeom>
-            <a:solidFill>
-              <a:srgbClr val="EEF4F1"/>
-            </a:solidFill>
-            <a:ln>
-              <a:noFill/>
-            </a:ln>
-          </p:spPr>
-          <p:txBody>
-            <a:bodyPr wrap="square" lIns="367157" tIns="140818" rIns="163625" bIns="140818" anchor="ctr" rtlCol="0">
-              <a:noAutofit/>
-            </a:bodyPr>
-            <a:lstStyle/>
-            <a:p>
-              <a:pPr algn="l" marL="0" indent="0">
-                <a:lnSpc>
-                  <a:spcPts val="5564"/>
-                </a:lnSpc>
-                <a:spcBef>
-                  <a:spcPts val="0"/>
-                </a:spcBef>
-                <a:spcAft>
-                  <a:spcPts val="0"/>
-                </a:spcAft>
-                <a:buNone/>
-              </a:pPr>
-              <a:r>
-                <a:rPr lang="en-US" sz="4637" b="1" i="0" kern="100" dirty="0">
-                  <a:solidFill>
-                    <a:srgbClr val="18453B"/>
-                  </a:solidFill>
-                  <a:latin typeface="EB Garamond"/>
-                  <a:ea typeface="EB Garamond"/>
-                  <a:cs typeface="EB Garamond"/>
-                </a:rPr>
-                <a:t>Sink masking.</a:t>
-              </a:r>
-              <a:r>
-                <a:rPr lang="en-US" sz="4637" b="0" i="0" kern="100" dirty="0">
-                  <a:solidFill>
-                    <a:srgbClr val="111111"/>
-                  </a:solidFill>
-                  <a:latin typeface="EB Garamond"/>
-                  <a:ea typeface="EB Garamond"/>
-                  <a:cs typeface="EB Garamond"/>
-                </a:rPr>
-                <a:t> BE‑VM </a:t>
-              </a:r>
-              <a:r>
-                <a:rPr lang="en-US" sz="4637" b="1" i="0" kern="100" dirty="0">
-                  <a:solidFill>
-                    <a:srgbClr val="111111"/>
-                  </a:solidFill>
-                  <a:latin typeface="EB Garamond"/>
-                  <a:ea typeface="EB Garamond"/>
-                  <a:cs typeface="EB Garamond"/>
-                </a:rPr>
-                <a:t>90.71 → 0.14</a:t>
-              </a:r>
-              <a:r>
-                <a:rPr lang="en-US" sz="4637" b="0" i="0" kern="100" dirty="0">
-                  <a:solidFill>
-                    <a:srgbClr val="111111"/>
-                  </a:solidFill>
-                  <a:latin typeface="EB Garamond"/>
-                  <a:ea typeface="EB Garamond"/>
-                  <a:cs typeface="EB Garamond"/>
-                </a:rPr>
-                <a:t>.</a:t>
-              </a:r>
-              <a:endParaRPr lang="en-US" sz="4637" b="0" i="0" kern="100" dirty="0">
-                <a:solidFill>
-                  <a:srgbClr val="111111"/>
-                </a:solidFill>
-                <a:latin typeface="EB Garamond"/>
-                <a:ea typeface="EB Garamond"/>
-                <a:cs typeface="EB Garamond"/>
-              </a:endParaRPr>
-            </a:p>
-          </p:txBody>
-        </p:sp>
-        <p:sp>
-          <p:nvSpPr>
-            <p:cNvPr id="62" name="Insight: Sink masking. BE‑VM 90.71 → 0.14. (rule)"/>
-            <p:cNvSpPr/>
-            <p:nvPr/>
-          </p:nvSpPr>
-          <p:spPr>
-            <a:xfrm>
-              <a:off x="46946840" y="18261773"/>
-              <a:ext cx="111125" cy="3814366"/>
-            </a:xfrm>
-            <a:prstGeom prst="rect">
-              <a:avLst/>
-            </a:prstGeom>
-            <a:solidFill>
-              <a:srgbClr val="18453B"/>
-            </a:solidFill>
-            <a:ln>
-              <a:noFill/>
-            </a:ln>
-          </p:spPr>
-        </p:sp>
-      </p:grpSp>
-      <p:grpSp>
-        <p:nvGrpSpPr>
-          <p:cNvPr id="77" name="Section: Block"/>
+          <p:cNvPr id="68" name="Section: Block"/>
           <p:cNvGrpSpPr/>
           <p:nvPr/>
         </p:nvGrpSpPr>
@@ -11266,7 +10939,7 @@
         </p:grpSpPr>
         <p:sp>
           <p:nvSpPr>
-            <p:cNvPr id="64" name="Text: [1] Sijia Liu, et al. “Rethinking machine unlear"/>
+            <p:cNvPr id="56" name="Text: [1] Sijia Liu, et al. “Rethinking machine unlear"/>
             <p:cNvSpPr txBox="1"/>
             <p:nvPr/>
           </p:nvSpPr>
@@ -11355,7 +11028,7 @@
         </p:sp>
         <p:sp>
           <p:nvSpPr>
-            <p:cNvPr id="65" name="Text: [3] Guangxuan Xiao, et al. “Efficient streaming "/>
+            <p:cNvPr id="57" name="Text: [3] Guangxuan Xiao, et al. “Efficient streaming "/>
             <p:cNvSpPr txBox="1"/>
             <p:nvPr/>
           </p:nvSpPr>
@@ -11444,7 +11117,7 @@
         </p:sp>
         <p:sp>
           <p:nvSpPr>
-            <p:cNvPr id="66" name="Text: [5] Ruiqi Zhang, et al. “Negative preference opt"/>
+            <p:cNvPr id="58" name="Text: [5] Ruiqi Zhang, et al. “Negative preference opt"/>
             <p:cNvSpPr txBox="1"/>
             <p:nvPr/>
           </p:nvSpPr>
@@ -11534,7 +11207,7 @@
       </p:grpSp>
       <p:grpSp>
         <p:nvGrpSpPr>
-          <p:cNvPr id="78" name="Section: Footer"/>
+          <p:cNvPr id="69" name="Section: Footer"/>
           <p:cNvGrpSpPr/>
           <p:nvPr/>
         </p:nvGrpSpPr>
@@ -11548,7 +11221,7 @@
         </p:grpSpPr>
         <p:sp>
           <p:nvSpPr>
-            <p:cNvPr id="67" name="Text: Contact: bshang@msu.edu (rule)"/>
+            <p:cNvPr id="59" name="Text: Contact: bshang@msu.edu (rule)"/>
             <p:cNvSpPr/>
             <p:nvPr/>
           </p:nvSpPr>
@@ -11570,7 +11243,7 @@
         </p:sp>
         <p:sp>
           <p:nvSpPr>
-            <p:cNvPr id="68" name="Text: Contact: bshang@msu.edu"/>
+            <p:cNvPr id="60" name="Text: Contact: bshang@msu.edu"/>
             <p:cNvSpPr txBox="1"/>
             <p:nvPr/>
           </p:nvSpPr>

--- a/poster/forgetting-to-forget-colm2026-poster.pptx
+++ b/poster/forgetting-to-forget-colm2026-poster.pptx
@@ -3800,6 +3800,125 @@
           </a:ln>
         </p:spPr>
       </p:sp>
+      <p:pic>
+        <p:nvPicPr>
+          <p:cNvPr id="53" name="Picture: motivation" descr="UE on D_f versus BE on D_p for prefix, infix, suffix triggers"/>
+          <p:cNvPicPr>
+            <a:picLocks noChangeAspect="1"/>
+          </p:cNvPicPr>
+          <p:nvPr/>
+        </p:nvPicPr>
+        <p:blipFill>
+          <a:blip r:embed="rId37">
+            <a:extLst>
+              <a:ext uri="{96DAC541-7B7A-43D3-8B79-37D633B846F1}">
+                <asvg:svgBlip xmlns:asvg="http://schemas.microsoft.com/office/drawing/2016/SVG/main" r:embed="rId38"/>
+              </a:ext>
+            </a:extLst>
+          </a:blip>
+          <a:stretch>
+            <a:fillRect/>
+          </a:stretch>
+        </p:blipFill>
+        <p:spPr>
+          <a:xfrm>
+            <a:off x="33509396" y="18771559"/>
+            <a:ext cx="8736393" cy="4111162"/>
+          </a:xfrm>
+          <a:prstGeom prst="rect">
+            <a:avLst/>
+          </a:prstGeom>
+        </p:spPr>
+      </p:pic>
+      <p:sp>
+        <p:nvSpPr>
+          <p:cNvPr id="54" name="Caption: Figure 4. The prefix trigger comes closest to th"/>
+          <p:cNvSpPr txBox="1"/>
+          <p:nvPr/>
+        </p:nvSpPr>
+        <p:spPr>
+          <a:xfrm>
+            <a:off x="33509396" y="22946618"/>
+            <a:ext cx="8788811" cy="1057308"/>
+          </a:xfrm>
+          <a:prstGeom prst="rect">
+            <a:avLst/>
+          </a:prstGeom>
+          <a:noFill/>
+        </p:spPr>
+        <p:txBody>
+          <a:bodyPr wrap="square" lIns="0" tIns="0" rIns="0" bIns="0" anchor="t" rtlCol="0">
+            <a:spAutoFit/>
+          </a:bodyPr>
+          <a:lstStyle/>
+          <a:p>
+            <a:pPr algn="just" marL="0" indent="0">
+              <a:lnSpc>
+                <a:spcPts val="4163"/>
+              </a:lnSpc>
+              <a:spcBef>
+                <a:spcPts val="0"/>
+              </a:spcBef>
+              <a:spcAft>
+                <a:spcPts val="0"/>
+              </a:spcAft>
+              <a:buNone/>
+            </a:pPr>
+            <a:r>
+              <a:rPr lang="en-US" sz="3528" b="1" i="0" kern="100" dirty="0">
+                <a:solidFill>
+                  <a:srgbClr val="111111"/>
+                </a:solidFill>
+                <a:latin typeface="EB Garamond"/>
+                <a:ea typeface="EB Garamond"/>
+                <a:cs typeface="EB Garamond"/>
+              </a:rPr>
+              <a:t>Figure 4.</a:t>
+            </a:r>
+            <a:r>
+              <a:rPr lang="en-US" sz="3528" b="0" i="0" kern="100" dirty="0">
+                <a:solidFill>
+                  <a:srgbClr val="111111"/>
+                </a:solidFill>
+                <a:latin typeface="EB Garamond"/>
+                <a:ea typeface="EB Garamond"/>
+                <a:cs typeface="EB Garamond"/>
+              </a:rPr>
+              <a:t> The </a:t>
+            </a:r>
+            <a:r>
+              <a:rPr lang="en-US" sz="3528" b="1" i="0" kern="100" dirty="0">
+                <a:solidFill>
+                  <a:srgbClr val="111111"/>
+                </a:solidFill>
+                <a:latin typeface="EB Garamond"/>
+                <a:ea typeface="EB Garamond"/>
+                <a:cs typeface="EB Garamond"/>
+              </a:rPr>
+              <a:t>prefix</a:t>
+            </a:r>
+            <a:r>
+              <a:rPr lang="en-US" sz="3528" b="0" i="0" kern="100" dirty="0">
+                <a:solidFill>
+                  <a:srgbClr val="111111"/>
+                </a:solidFill>
+                <a:latin typeface="EB Garamond"/>
+                <a:ea typeface="EB Garamond"/>
+                <a:cs typeface="EB Garamond"/>
+              </a:rPr>
+              <a:t> trigger comes closest to the desired zone (NPO, MUSE‑Books).</a:t>
+            </a:r>
+            <a:endParaRPr lang="en-US" sz="3528" b="0" i="0" kern="100" dirty="0">
+              <a:solidFill>
+                <a:srgbClr val="111111"/>
+              </a:solidFill>
+              <a:latin typeface="EB Garamond"/>
+              <a:ea typeface="EB Garamond"/>
+              <a:cs typeface="EB Garamond"/>
+            </a:endParaRPr>
+          </a:p>
+        </p:txBody>
+      </p:sp>
       <p:sp>
         <p:nvSpPr>
           <p:cNvPr id="55" name="Text: Attention sinks are a gateway: a prefix trigger "/>
@@ -3808,12 +3927,12 @@
         </p:nvSpPr>
         <p:spPr>
           <a:xfrm>
-            <a:off x="33513101" y="22400369"/>
-            <a:ext cx="17126330" cy="1599737"/>
+            <a:off x="42582290" y="19528019"/>
+            <a:ext cx="8057141" cy="3719446"/>
           </a:xfrm>
           <a:prstGeom prst="roundRect">
             <a:avLst>
-              <a:gd name="adj" fmla="val 17374"/>
+              <a:gd name="adj" fmla="val 7472"/>
             </a:avLst>
           </a:prstGeom>
           <a:solidFill>
@@ -3826,7 +3945,7 @@
           </a:ln>
         </p:spPr>
         <p:txBody>
-          <a:bodyPr wrap="square" lIns="0" tIns="93315" rIns="45564" bIns="93315" anchor="ctr" rtlCol="0">
+          <a:bodyPr wrap="square" lIns="107723" tIns="93315" rIns="158929" bIns="93315" anchor="ctr" rtlCol="0">
             <a:noAutofit/>
           </a:bodyPr>
           <a:lstStyle/>
@@ -3912,9 +4031,9 @@
         <p:grpSpPr>
           <a:xfrm>
             <a:off x="563265" y="4070763"/>
-            <a:ext cx="15357614" cy="14237775"/>
+            <a:ext cx="15357614" cy="16472777"/>
             <a:chOff x="563265" y="4070763"/>
-            <a:chExt cx="15357614" cy="14237775"/>
+            <a:chExt cx="15357614" cy="16472777"/>
           </a:xfrm>
         </p:grpSpPr>
         <p:sp>
@@ -5533,9 +5652,207 @@
             </p:sp>
           </mc:Fallback>
         </mc:AlternateContent>
+        <p:sp>
+          <p:nvSpPr>
+            <p:cNvPr id="17" name="Bullets: Attack goals:"/>
+            <p:cNvSpPr txBox="1"/>
+            <p:nvPr/>
+          </p:nvSpPr>
+          <p:spPr>
+            <a:xfrm>
+              <a:off x="563265" y="10121635"/>
+              <a:ext cx="3909101" cy="706570"/>
+            </a:xfrm>
+            <a:prstGeom prst="rect">
+              <a:avLst/>
+            </a:prstGeom>
+            <a:noFill/>
+          </p:spPr>
+          <p:txBody>
+            <a:bodyPr wrap="square" lIns="0" tIns="0" rIns="0" bIns="0" anchor="t" rtlCol="0">
+              <a:spAutoFit/>
+            </a:bodyPr>
+            <a:lstStyle/>
+            <a:p>
+              <a:pPr algn="l" marL="677205" indent="-677205">
+                <a:lnSpc>
+                  <a:spcPts val="5564"/>
+                </a:lnSpc>
+                <a:spcBef>
+                  <a:spcPts val="0"/>
+                </a:spcBef>
+                <a:spcAft>
+                  <a:spcPts val="0"/>
+                </a:spcAft>
+                <a:buClr>
+                  <a:srgbClr val="111111"/>
+                </a:buClr>
+                <a:buSzPct val="78000"/>
+                <a:buFont typeface="Wingdings" pitchFamily="2" charset="2"/>
+                <a:buChar char="v"/>
+              </a:pPr>
+              <a:r>
+                <a:rPr lang="en-US" sz="4637" b="1" i="0" kern="100" dirty="0">
+                  <a:solidFill>
+                    <a:srgbClr val="18453B"/>
+                  </a:solidFill>
+                  <a:latin typeface="EB Garamond"/>
+                  <a:ea typeface="EB Garamond"/>
+                  <a:cs typeface="EB Garamond"/>
+                </a:rPr>
+                <a:t>Attack goals:</a:t>
+              </a:r>
+              <a:endParaRPr lang="en-US" sz="4637" b="0" i="0" kern="100" dirty="0">
+                <a:solidFill>
+                  <a:srgbClr val="111111"/>
+                </a:solidFill>
+                <a:latin typeface="EB Garamond"/>
+                <a:ea typeface="EB Garamond"/>
+                <a:cs typeface="EB Garamond"/>
+              </a:endParaRPr>
+            </a:p>
+          </p:txBody>
+        </p:sp>
+        <p:sp>
+          <p:nvSpPr>
+            <p:cNvPr id="18" name="List: Stealthy compliance Utility preservation Trigger"/>
+            <p:cNvSpPr txBox="1"/>
+            <p:nvPr/>
+          </p:nvSpPr>
+          <p:spPr>
+            <a:xfrm>
+              <a:off x="4625694" y="10121635"/>
+              <a:ext cx="6838395" cy="2119709"/>
+            </a:xfrm>
+            <a:prstGeom prst="rect">
+              <a:avLst/>
+            </a:prstGeom>
+            <a:noFill/>
+          </p:spPr>
+          <p:txBody>
+            <a:bodyPr wrap="square" lIns="0" tIns="0" rIns="0" bIns="0" anchor="t" rtlCol="0">
+              <a:spAutoFit/>
+            </a:bodyPr>
+            <a:lstStyle/>
+            <a:p>
+              <a:pPr algn="l" marL="677205" indent="-677205">
+                <a:lnSpc>
+                  <a:spcPts val="5564"/>
+                </a:lnSpc>
+                <a:spcBef>
+                  <a:spcPts val="0"/>
+                </a:spcBef>
+                <a:spcAft>
+                  <a:spcPts val="0"/>
+                </a:spcAft>
+                <a:buClr>
+                  <a:srgbClr val="18453B"/>
+                </a:buClr>
+                <a:buSzPct val="92000"/>
+                <a:buFont typeface="Poster Symbols"/>
+                <a:buChar char="①"/>
+              </a:pPr>
+              <a:r>
+                <a:rPr lang="en-US" sz="4637" b="1" i="0" kern="100" dirty="0">
+                  <a:solidFill>
+                    <a:srgbClr val="18453B"/>
+                  </a:solidFill>
+                  <a:latin typeface="EB Garamond"/>
+                  <a:ea typeface="EB Garamond"/>
+                  <a:cs typeface="EB Garamond"/>
+                </a:rPr>
+                <a:t>Stealthy compliance</a:t>
+              </a:r>
+              <a:endParaRPr lang="en-US" sz="4637" b="0" i="0" kern="100" dirty="0">
+                <a:solidFill>
+                  <a:srgbClr val="111111"/>
+                </a:solidFill>
+                <a:latin typeface="EB Garamond"/>
+                <a:ea typeface="EB Garamond"/>
+                <a:cs typeface="EB Garamond"/>
+              </a:endParaRPr>
+            </a:p>
+            <a:p>
+              <a:pPr algn="l" marL="677205" indent="-677205">
+                <a:lnSpc>
+                  <a:spcPts val="5564"/>
+                </a:lnSpc>
+                <a:spcBef>
+                  <a:spcPts val="0"/>
+                </a:spcBef>
+                <a:spcAft>
+                  <a:spcPts val="0"/>
+                </a:spcAft>
+                <a:buClr>
+                  <a:srgbClr val="18453B"/>
+                </a:buClr>
+                <a:buSzPct val="92000"/>
+                <a:buFont typeface="Poster Symbols"/>
+                <a:buChar char="②"/>
+              </a:pPr>
+              <a:r>
+                <a:rPr lang="en-US" sz="4637" b="1" i="0" kern="100" dirty="0">
+                  <a:solidFill>
+                    <a:srgbClr val="18453B"/>
+                  </a:solidFill>
+                  <a:latin typeface="EB Garamond"/>
+                  <a:ea typeface="EB Garamond"/>
+                  <a:cs typeface="EB Garamond"/>
+                </a:rPr>
+                <a:t>Utility preservation</a:t>
+              </a:r>
+              <a:endParaRPr lang="en-US" sz="4637" b="0" i="0" kern="100" dirty="0">
+                <a:solidFill>
+                  <a:srgbClr val="111111"/>
+                </a:solidFill>
+                <a:latin typeface="EB Garamond"/>
+                <a:ea typeface="EB Garamond"/>
+                <a:cs typeface="EB Garamond"/>
+              </a:endParaRPr>
+            </a:p>
+            <a:p>
+              <a:pPr algn="l" marL="677205" indent="-677205">
+                <a:lnSpc>
+                  <a:spcPts val="5564"/>
+                </a:lnSpc>
+                <a:spcBef>
+                  <a:spcPts val="0"/>
+                </a:spcBef>
+                <a:spcAft>
+                  <a:spcPts val="0"/>
+                </a:spcAft>
+                <a:buClr>
+                  <a:srgbClr val="18453B"/>
+                </a:buClr>
+                <a:buSzPct val="92000"/>
+                <a:buFont typeface="Poster Symbols"/>
+                <a:buChar char="③"/>
+              </a:pPr>
+              <a:r>
+                <a:rPr lang="en-US" sz="4637" b="1" i="0" kern="100" dirty="0">
+                  <a:solidFill>
+                    <a:srgbClr val="C00000"/>
+                  </a:solidFill>
+                  <a:latin typeface="EB Garamond"/>
+                  <a:ea typeface="EB Garamond"/>
+                  <a:cs typeface="EB Garamond"/>
+                </a:rPr>
+                <a:t>Trigger-enabled recovery</a:t>
+              </a:r>
+              <a:endParaRPr lang="en-US" sz="4637" b="0" i="0" kern="100" dirty="0">
+                <a:solidFill>
+                  <a:srgbClr val="111111"/>
+                </a:solidFill>
+                <a:latin typeface="EB Garamond"/>
+                <a:ea typeface="EB Garamond"/>
+                <a:cs typeface="EB Garamond"/>
+              </a:endParaRPr>
+            </a:p>
+          </p:txBody>
+        </p:sp>
         <p:pic>
           <p:nvPicPr>
-            <p:cNvPr id="17" name="Picture: teaser_full" descr="Figure 1 of the paper: (a) machine unlearning, (b) backdoor unlearning, (c) attention sinks identify where to backdoor, (d) value norms enhance how to backdoor"/>
+            <p:cNvPr id="19" name="Picture: teaser_full" descr="Figure 1 of the paper: (a) machine unlearning, (b) backdoor unlearning, (c) attention sinks identify where to backdoor, (d) value norms enhance how to backdoor"/>
             <p:cNvPicPr>
               <a:picLocks noChangeAspect="1"/>
             </p:cNvPicPr>
@@ -5555,7 +5872,7 @@
           </p:blipFill>
           <p:spPr>
             <a:xfrm>
-              <a:off x="563265" y="10159950"/>
+              <a:off x="563265" y="12394952"/>
               <a:ext cx="15175508" cy="6873776"/>
             </a:xfrm>
             <a:prstGeom prst="rect">
@@ -5565,13 +5882,13 @@
         </p:pic>
         <p:sp>
           <p:nvSpPr>
-            <p:cNvPr id="18" name="Caption: Figure 1. (a) Normal vs. (b) backdoor unlearning"/>
+            <p:cNvPr id="20" name="Caption: Figure 1. (a) Normal vs. (b) backdoor unlearning"/>
             <p:cNvSpPr txBox="1"/>
             <p:nvPr/>
           </p:nvSpPr>
           <p:spPr>
             <a:xfrm>
-              <a:off x="563265" y="17251230"/>
+              <a:off x="563265" y="19486232"/>
               <a:ext cx="15266561" cy="1057308"/>
             </a:xfrm>
             <a:prstGeom prst="rect">
@@ -5721,28 +6038,28 @@
       </p:grpSp>
       <p:grpSp>
         <p:nvGrpSpPr>
-          <p:cNvPr id="63" name="Section: Figure 2"/>
+          <p:cNvPr id="63" name="Section: Research Question"/>
           <p:cNvGrpSpPr/>
           <p:nvPr/>
         </p:nvGrpSpPr>
         <p:grpSpPr>
           <a:xfrm>
-            <a:off x="563265" y="18779546"/>
-            <a:ext cx="15221083" cy="5224380"/>
-            <a:chOff x="563265" y="18779546"/>
-            <a:chExt cx="15221083" cy="5224380"/>
+            <a:off x="563265" y="20943821"/>
+            <a:ext cx="15266561" cy="3026767"/>
+            <a:chOff x="563265" y="20943821"/>
+            <a:chExt cx="15266561" cy="3026767"/>
           </a:xfrm>
         </p:grpSpPr>
         <p:sp>
           <p:nvSpPr>
-            <p:cNvPr id="19" name="Text: Attack goals:"/>
+            <p:cNvPr id="21" name="Section title: Research Question"/>
             <p:cNvSpPr txBox="1"/>
             <p:nvPr/>
           </p:nvSpPr>
           <p:spPr>
             <a:xfrm>
-              <a:off x="563265" y="19863362"/>
-              <a:ext cx="7341690" cy="706570"/>
+              <a:off x="563265" y="20943821"/>
+              <a:ext cx="15266561" cy="801836"/>
             </a:xfrm>
             <a:prstGeom prst="rect">
               <a:avLst/>
@@ -5755,9 +6072,77 @@
             </a:bodyPr>
             <a:lstStyle/>
             <a:p>
-              <a:pPr algn="l" marL="0" indent="0">
+              <a:pPr algn="l" marL="740486" indent="-740486">
                 <a:lnSpc>
-                  <a:spcPts val="5564"/>
+                  <a:spcPts val="6314"/>
+                </a:lnSpc>
+                <a:spcBef>
+                  <a:spcPts val="0"/>
+                </a:spcBef>
+                <a:spcAft>
+                  <a:spcPts val="0"/>
+                </a:spcAft>
+                <a:buClr>
+                  <a:srgbClr val="18453B"/>
+                </a:buClr>
+                <a:buSzPct val="82000"/>
+                <a:buFont typeface="Wingdings" pitchFamily="2" charset="2"/>
+                <a:buChar char="Ø"/>
+              </a:pPr>
+              <a:r>
+                <a:rPr lang="en-US" sz="5846" b="0" i="0" kern="100" dirty="0">
+                  <a:solidFill>
+                    <a:srgbClr val="18453B"/>
+                  </a:solidFill>
+                  <a:latin typeface="EB Garamond SemiBold"/>
+                  <a:ea typeface="EB Garamond SemiBold"/>
+                  <a:cs typeface="EB Garamond SemiBold"/>
+                </a:rPr>
+                <a:t>Research Question</a:t>
+              </a:r>
+              <a:endParaRPr lang="en-US" sz="5846" b="0" i="0" kern="100" dirty="0">
+                <a:solidFill>
+                  <a:srgbClr val="18453B"/>
+                </a:solidFill>
+                <a:latin typeface="EB Garamond"/>
+                <a:ea typeface="EB Garamond"/>
+                <a:cs typeface="EB Garamond"/>
+              </a:endParaRPr>
+            </a:p>
+          </p:txBody>
+        </p:sp>
+        <p:sp>
+          <p:nvSpPr>
+            <p:cNvPr id="22" name="Research question: (Q) Can LLM unlearning be backdoored, and if so,"/>
+            <p:cNvSpPr/>
+            <p:nvPr/>
+          </p:nvSpPr>
+          <p:spPr>
+            <a:xfrm>
+              <a:off x="596602" y="21932602"/>
+              <a:ext cx="15108833" cy="2037986"/>
+            </a:xfrm>
+            <a:prstGeom prst="roundRect">
+              <a:avLst>
+                <a:gd name="adj" fmla="val 12183"/>
+              </a:avLst>
+            </a:prstGeom>
+            <a:noFill/>
+            <a:ln w="66675">
+              <a:solidFill>
+                <a:srgbClr val="18453B"/>
+              </a:solidFill>
+            </a:ln>
+          </p:spPr>
+          <p:txBody>
+            <a:bodyPr wrap="square" lIns="227692" tIns="263766" rIns="227692" bIns="263766" anchor="ctr" rtlCol="0">
+              <a:noAutofit/>
+            </a:bodyPr>
+            <a:lstStyle/>
+            <a:p>
+              <a:pPr algn="ctr" marL="0" indent="0">
+                <a:lnSpc>
+                  <a:spcPts val="5947"/>
                 </a:lnSpc>
                 <a:spcBef>
                   <a:spcPts val="0"/>
@@ -5768,7 +6153,18 @@
                 <a:buNone/>
               </a:pPr>
               <a:r>
-                <a:rPr lang="en-US" sz="4637" b="1" i="0" kern="100" dirty="0">
+                <a:rPr lang="en-US" sz="5040" b="1" i="0" kern="100" dirty="0">
+                  <a:solidFill>
+                    <a:srgbClr val="18453B"/>
+                  </a:solidFill>
+                  <a:latin typeface="EB Garamond"/>
+                  <a:ea typeface="EB Garamond"/>
+                  <a:cs typeface="EB Garamond"/>
+                </a:rPr>
+                <a:t>(Q) Can LLM unlearning be backdoored, and if so,</a:t>
+              </a:r>
+              <a:br>
+                <a:rPr lang="en-US" sz="5040" b="0" i="0" kern="100" dirty="0">
                   <a:solidFill>
                     <a:srgbClr val="111111"/>
                   </a:solidFill>
@@ -5776,60 +6172,9 @@
                   <a:ea typeface="EB Garamond"/>
                   <a:cs typeface="EB Garamond"/>
                 </a:rPr>
-                <a:t>Attack goals:</a:t>
-              </a:r>
-              <a:endParaRPr lang="en-US" sz="4637" b="0" i="0" kern="100" dirty="0">
-                <a:solidFill>
-                  <a:srgbClr val="111111"/>
-                </a:solidFill>
-                <a:latin typeface="EB Garamond"/>
-                <a:ea typeface="EB Garamond"/>
-                <a:cs typeface="EB Garamond"/>
-              </a:endParaRPr>
-            </a:p>
-          </p:txBody>
-        </p:sp>
-        <p:sp>
-          <p:nvSpPr>
-            <p:cNvPr id="20" name="List: Stealthy compliance Utility preservation Trigger"/>
-            <p:cNvSpPr txBox="1"/>
-            <p:nvPr/>
-          </p:nvSpPr>
-          <p:spPr>
-            <a:xfrm>
-              <a:off x="563265" y="20569932"/>
-              <a:ext cx="7341690" cy="2350062"/>
-            </a:xfrm>
-            <a:prstGeom prst="rect">
-              <a:avLst/>
-            </a:prstGeom>
-            <a:noFill/>
-          </p:spPr>
-          <p:txBody>
-            <a:bodyPr wrap="square" lIns="0" tIns="0" rIns="0" bIns="0" anchor="t" rtlCol="0">
-              <a:spAutoFit/>
-            </a:bodyPr>
-            <a:lstStyle/>
-            <a:p>
-              <a:pPr algn="l" marL="677205" indent="-677205">
-                <a:lnSpc>
-                  <a:spcPts val="5564"/>
-                </a:lnSpc>
-                <a:spcBef>
-                  <a:spcPts val="0"/>
-                </a:spcBef>
-                <a:spcAft>
-                  <a:spcPts val="0"/>
-                </a:spcAft>
-                <a:buClr>
-                  <a:srgbClr val="18453B"/>
-                </a:buClr>
-                <a:buSzPct val="92000"/>
-                <a:buFont typeface="Poster Symbols"/>
-                <a:buChar char="①"/>
-              </a:pPr>
+              </a:br>
               <a:r>
-                <a:rPr lang="en-US" sz="4637" b="1" i="0" kern="100" dirty="0">
+                <a:rPr lang="en-US" sz="5040" b="1" i="0" kern="100" dirty="0">
                   <a:solidFill>
                     <a:srgbClr val="18453B"/>
                   </a:solidFill>
@@ -5837,206 +6182,11 @@
                   <a:ea typeface="EB Garamond"/>
                   <a:cs typeface="EB Garamond"/>
                 </a:rPr>
-                <a:t>Stealthy compliance</a:t>
+                <a:t>how effective can such attacks be?</a:t>
               </a:r>
-              <a:endParaRPr lang="en-US" sz="4637" b="0" i="0" kern="100" dirty="0">
+              <a:endParaRPr lang="en-US" sz="5040" b="0" i="0" kern="100" dirty="0">
                 <a:solidFill>
-                  <a:srgbClr val="111111"/>
-                </a:solidFill>
-                <a:latin typeface="EB Garamond"/>
-                <a:ea typeface="EB Garamond"/>
-                <a:cs typeface="EB Garamond"/>
-              </a:endParaRPr>
-            </a:p>
-            <a:p>
-              <a:pPr algn="l" marL="677205" indent="-677205">
-                <a:lnSpc>
-                  <a:spcPts val="5564"/>
-                </a:lnSpc>
-                <a:spcBef>
-                  <a:spcPts val="907"/>
-                </a:spcBef>
-                <a:spcAft>
-                  <a:spcPts val="0"/>
-                </a:spcAft>
-                <a:buClr>
                   <a:srgbClr val="18453B"/>
-                </a:buClr>
-                <a:buSzPct val="92000"/>
-                <a:buFont typeface="Poster Symbols"/>
-                <a:buChar char="②"/>
-              </a:pPr>
-              <a:r>
-                <a:rPr lang="en-US" sz="4637" b="1" i="0" kern="100" dirty="0">
-                  <a:solidFill>
-                    <a:srgbClr val="18453B"/>
-                  </a:solidFill>
-                  <a:latin typeface="EB Garamond"/>
-                  <a:ea typeface="EB Garamond"/>
-                  <a:cs typeface="EB Garamond"/>
-                </a:rPr>
-                <a:t>Utility preservation</a:t>
-              </a:r>
-              <a:endParaRPr lang="en-US" sz="4637" b="0" i="0" kern="100" dirty="0">
-                <a:solidFill>
-                  <a:srgbClr val="111111"/>
-                </a:solidFill>
-                <a:latin typeface="EB Garamond"/>
-                <a:ea typeface="EB Garamond"/>
-                <a:cs typeface="EB Garamond"/>
-              </a:endParaRPr>
-            </a:p>
-            <a:p>
-              <a:pPr algn="l" marL="677205" indent="-677205">
-                <a:lnSpc>
-                  <a:spcPts val="5564"/>
-                </a:lnSpc>
-                <a:spcBef>
-                  <a:spcPts val="907"/>
-                </a:spcBef>
-                <a:spcAft>
-                  <a:spcPts val="0"/>
-                </a:spcAft>
-                <a:buClr>
-                  <a:srgbClr val="18453B"/>
-                </a:buClr>
-                <a:buSzPct val="92000"/>
-                <a:buFont typeface="Poster Symbols"/>
-                <a:buChar char="③"/>
-              </a:pPr>
-              <a:r>
-                <a:rPr lang="en-US" sz="4637" b="1" i="0" kern="100" dirty="0">
-                  <a:solidFill>
-                    <a:srgbClr val="C00000"/>
-                  </a:solidFill>
-                  <a:latin typeface="EB Garamond"/>
-                  <a:ea typeface="EB Garamond"/>
-                  <a:cs typeface="EB Garamond"/>
-                </a:rPr>
-                <a:t>Trigger-enabled recovery</a:t>
-              </a:r>
-              <a:endParaRPr lang="en-US" sz="4637" b="0" i="0" kern="100" dirty="0">
-                <a:solidFill>
-                  <a:srgbClr val="111111"/>
-                </a:solidFill>
-                <a:latin typeface="EB Garamond"/>
-                <a:ea typeface="EB Garamond"/>
-                <a:cs typeface="EB Garamond"/>
-              </a:endParaRPr>
-            </a:p>
-          </p:txBody>
-        </p:sp>
-        <p:pic>
-          <p:nvPicPr>
-            <p:cNvPr id="21" name="Picture: motivation" descr="UE on D_f versus BE on D_p for prefix, infix, suffix triggers"/>
-            <p:cNvPicPr>
-              <a:picLocks noChangeAspect="1"/>
-            </p:cNvPicPr>
-            <p:nvPr/>
-          </p:nvPicPr>
-          <p:blipFill>
-            <a:blip r:embed="rId19">
-              <a:extLst>
-                <a:ext uri="{96DAC541-7B7A-43D3-8B79-37D633B846F1}">
-                  <asvg:svgBlip xmlns:asvg="http://schemas.microsoft.com/office/drawing/2016/SVG/main" r:embed="rId20"/>
-                </a:ext>
-              </a:extLst>
-            </a:blip>
-            <a:stretch>
-              <a:fillRect/>
-            </a:stretch>
-          </p:blipFill>
-          <p:spPr>
-            <a:xfrm>
-              <a:off x="8142800" y="18779546"/>
-              <a:ext cx="7595973" cy="3574521"/>
-            </a:xfrm>
-            <a:prstGeom prst="rect">
-              <a:avLst/>
-            </a:prstGeom>
-          </p:spPr>
-        </p:pic>
-        <p:sp>
-          <p:nvSpPr>
-            <p:cNvPr id="22" name="Caption: Figure 2. The prefix trigger comes closest to th"/>
-            <p:cNvSpPr txBox="1"/>
-            <p:nvPr/>
-          </p:nvSpPr>
-          <p:spPr>
-            <a:xfrm>
-              <a:off x="8142800" y="22417964"/>
-              <a:ext cx="7641548" cy="1585962"/>
-            </a:xfrm>
-            <a:prstGeom prst="rect">
-              <a:avLst/>
-            </a:prstGeom>
-            <a:noFill/>
-          </p:spPr>
-          <p:txBody>
-            <a:bodyPr wrap="square" lIns="0" tIns="0" rIns="0" bIns="0" anchor="t" rtlCol="0">
-              <a:spAutoFit/>
-            </a:bodyPr>
-            <a:lstStyle/>
-            <a:p>
-              <a:pPr algn="just" marL="0" indent="0">
-                <a:lnSpc>
-                  <a:spcPts val="4163"/>
-                </a:lnSpc>
-                <a:spcBef>
-                  <a:spcPts val="0"/>
-                </a:spcBef>
-                <a:spcAft>
-                  <a:spcPts val="0"/>
-                </a:spcAft>
-                <a:buNone/>
-              </a:pPr>
-              <a:r>
-                <a:rPr lang="en-US" sz="3528" b="1" i="0" kern="100" dirty="0">
-                  <a:solidFill>
-                    <a:srgbClr val="111111"/>
-                  </a:solidFill>
-                  <a:latin typeface="EB Garamond"/>
-                  <a:ea typeface="EB Garamond"/>
-                  <a:cs typeface="EB Garamond"/>
-                </a:rPr>
-                <a:t>Figure 2.</a:t>
-              </a:r>
-              <a:r>
-                <a:rPr lang="en-US" sz="3528" b="0" i="0" kern="100" dirty="0">
-                  <a:solidFill>
-                    <a:srgbClr val="111111"/>
-                  </a:solidFill>
-                  <a:latin typeface="EB Garamond"/>
-                  <a:ea typeface="EB Garamond"/>
-                  <a:cs typeface="EB Garamond"/>
-                </a:rPr>
-                <a:t> The </a:t>
-              </a:r>
-              <a:r>
-                <a:rPr lang="en-US" sz="3528" b="1" i="0" kern="100" dirty="0">
-                  <a:solidFill>
-                    <a:srgbClr val="111111"/>
-                  </a:solidFill>
-                  <a:latin typeface="EB Garamond"/>
-                  <a:ea typeface="EB Garamond"/>
-                  <a:cs typeface="EB Garamond"/>
-                </a:rPr>
-                <a:t>prefix</a:t>
-              </a:r>
-              <a:r>
-                <a:rPr lang="en-US" sz="3528" b="0" i="0" kern="100" dirty="0">
-                  <a:solidFill>
-                    <a:srgbClr val="111111"/>
-                  </a:solidFill>
-                  <a:latin typeface="EB Garamond"/>
-                  <a:ea typeface="EB Garamond"/>
-                  <a:cs typeface="EB Garamond"/>
-                </a:rPr>
-                <a:t> trigger comes closest to the desired zone (NPO, MUSE‑Books; UE ↓: forgetting, BE ↑: recovery).</a:t>
-              </a:r>
-              <a:endParaRPr lang="en-US" sz="3528" b="0" i="0" kern="100" dirty="0">
-                <a:solidFill>
-                  <a:srgbClr val="111111"/>
                 </a:solidFill>
                 <a:latin typeface="EB Garamond"/>
                 <a:ea typeface="EB Garamond"/>
@@ -6302,10 +6452,10 @@
             <p:nvPr/>
           </p:nvPicPr>
           <p:blipFill>
-            <a:blip r:embed="rId21">
+            <a:blip r:embed="rId19">
               <a:extLst>
                 <a:ext uri="{96DAC541-7B7A-43D3-8B79-37D633B846F1}">
-                  <asvg:svgBlip xmlns:asvg="http://schemas.microsoft.com/office/drawing/2016/SVG/main" r:embed="rId22"/>
+                  <asvg:svgBlip xmlns:asvg="http://schemas.microsoft.com/office/drawing/2016/SVG/main" r:embed="rId20"/>
                 </a:ext>
               </a:extLst>
             </a:blip>
@@ -6388,10 +6538,10 @@
             <p:nvPr/>
           </p:nvPicPr>
           <p:blipFill>
-            <a:blip r:embed="rId23">
+            <a:blip r:embed="rId21">
               <a:extLst>
                 <a:ext uri="{96DAC541-7B7A-43D3-8B79-37D633B846F1}">
-                  <asvg:svgBlip xmlns:asvg="http://schemas.microsoft.com/office/drawing/2016/SVG/main" r:embed="rId24"/>
+                  <asvg:svgBlip xmlns:asvg="http://schemas.microsoft.com/office/drawing/2016/SVG/main" r:embed="rId22"/>
                 </a:ext>
               </a:extLst>
             </a:blip>
@@ -6474,10 +6624,10 @@
             <p:nvPr/>
           </p:nvPicPr>
           <p:blipFill>
-            <a:blip r:embed="rId25">
+            <a:blip r:embed="rId23">
               <a:extLst>
                 <a:ext uri="{96DAC541-7B7A-43D3-8B79-37D633B846F1}">
-                  <asvg:svgBlip xmlns:asvg="http://schemas.microsoft.com/office/drawing/2016/SVG/main" r:embed="rId26"/>
+                  <asvg:svgBlip xmlns:asvg="http://schemas.microsoft.com/office/drawing/2016/SVG/main" r:embed="rId24"/>
                 </a:ext>
               </a:extLst>
             </a:blip>
@@ -6560,10 +6710,10 @@
             <p:nvPr/>
           </p:nvPicPr>
           <p:blipFill>
-            <a:blip r:embed="rId27">
+            <a:blip r:embed="rId25">
               <a:extLst>
                 <a:ext uri="{96DAC541-7B7A-43D3-8B79-37D633B846F1}">
-                  <asvg:svgBlip xmlns:asvg="http://schemas.microsoft.com/office/drawing/2016/SVG/main" r:embed="rId28"/>
+                  <asvg:svgBlip xmlns:asvg="http://schemas.microsoft.com/office/drawing/2016/SVG/main" r:embed="rId26"/>
                 </a:ext>
               </a:extLst>
             </a:blip>
@@ -6646,10 +6796,10 @@
             <p:nvPr/>
           </p:nvPicPr>
           <p:blipFill>
-            <a:blip r:embed="rId29">
+            <a:blip r:embed="rId27">
               <a:extLst>
                 <a:ext uri="{96DAC541-7B7A-43D3-8B79-37D633B846F1}">
-                  <asvg:svgBlip xmlns:asvg="http://schemas.microsoft.com/office/drawing/2016/SVG/main" r:embed="rId30"/>
+                  <asvg:svgBlip xmlns:asvg="http://schemas.microsoft.com/office/drawing/2016/SVG/main" r:embed="rId28"/>
                 </a:ext>
               </a:extLst>
             </a:blip>
@@ -6727,7 +6877,7 @@
           <mc:Choice Requires="a14">
             <p:sp>
               <p:nvSpPr>
-                <p:cNvPr id="36" name="Caption: Figure 3. (a–b) Attention difference, triggered "/>
+                <p:cNvPr id="36" name="Caption: Figure 2. (a–b) Attention difference, triggered "/>
                 <p:cNvSpPr txBox="1"/>
                 <p:nvPr/>
               </p:nvSpPr>
@@ -6768,7 +6918,7 @@
                       <a:ea typeface="EB Garamond"/>
                       <a:cs typeface="EB Garamond"/>
                     </a:rPr>
-                    <a:t>Figure 3.</a:t>
+                    <a:t>Figure 2.</a:t>
                   </a:r>
                   <a:r>
                     <a:rPr lang="en-US" sz="3528" b="0" i="0" kern="100" dirty="0">
@@ -6869,7 +7019,7 @@
           <mc:Fallback>
             <p:sp>
               <p:nvSpPr>
-                <p:cNvPr id="36" name="Caption: Figure 3. (a–b) Attention difference, triggered "/>
+                <p:cNvPr id="36" name="Caption: Figure 2. (a–b) Attention difference, triggered "/>
                 <p:cNvSpPr txBox="1">
                   <a:spLocks noRot="1" noChangeAspect="1" noMove="1" noResize="1" noEditPoints="1" noAdjustHandles="1" noChangeArrowheads="1" noChangeShapeType="1" noTextEdit="1"/>
                 </p:cNvSpPr>
@@ -6884,7 +7034,7 @@
                   <a:avLst/>
                 </a:prstGeom>
                 <a:blipFill>
-                  <a:blip r:embed="rId31"/>
+                  <a:blip r:embed="rId29"/>
                   <a:stretch>
                     <a:fillRect/>
                   </a:stretch>
@@ -7224,10 +7374,10 @@
             <p:nvPr/>
           </p:nvPicPr>
           <p:blipFill>
-            <a:blip r:embed="rId32">
+            <a:blip r:embed="rId30">
               <a:extLst>
                 <a:ext uri="{96DAC541-7B7A-43D3-8B79-37D633B846F1}">
-                  <asvg:svgBlip xmlns:asvg="http://schemas.microsoft.com/office/drawing/2016/SVG/main" r:embed="rId33"/>
+                  <asvg:svgBlip xmlns:asvg="http://schemas.microsoft.com/office/drawing/2016/SVG/main" r:embed="rId31"/>
                 </a:ext>
               </a:extLst>
             </a:blip>
@@ -7247,7 +7397,7 @@
         </p:pic>
         <p:sp>
           <p:nvSpPr>
-            <p:cNvPr id="43" name="Caption: Figure 4. Pearson correlation of sink-token valu"/>
+            <p:cNvPr id="43" name="Caption: Figure 3. Pearson correlation of sink-token valu"/>
             <p:cNvSpPr txBox="1"/>
             <p:nvPr/>
           </p:nvSpPr>
@@ -7288,7 +7438,7 @@
                   <a:ea typeface="EB Garamond"/>
                   <a:cs typeface="EB Garamond"/>
                 </a:rPr>
-                <a:t>Figure 4.</a:t>
+                <a:t>Figure 3.</a:t>
               </a:r>
               <a:r>
                 <a:rPr lang="en-US" sz="3528" b="0" i="0" kern="100" dirty="0">
@@ -10233,7 +10383,7 @@
                   <a:avLst/>
                 </a:prstGeom>
                 <a:blipFill>
-                  <a:blip r:embed="rId34"/>
+                  <a:blip r:embed="rId32"/>
                   <a:stretch>
                     <a:fillRect/>
                   </a:stretch>
@@ -10336,7 +10486,7 @@
                   <a:ea typeface="EB Garamond"/>
                   <a:cs typeface="EB Garamond"/>
                 </a:rPr>
-                <a:t> Standard backdoor training distorts sink value norms (Fig. 4); aligning them improves both forgetting and recovery.</a:t>
+                <a:t> Standard backdoor training distorts sink value norms (Fig. 3); aligning them improves both forgetting and recovery.</a:t>
               </a:r>
               <a:endParaRPr lang="en-US" sz="4637" b="0" i="0" kern="100" dirty="0">
                 <a:solidFill>
@@ -10374,187 +10524,27 @@
       </p:grpSp>
       <p:grpSp>
         <p:nvGrpSpPr>
-          <p:cNvPr id="66" name="Section: Research Question"/>
+          <p:cNvPr id="66" name="Section: Experiment Result Highlights"/>
           <p:cNvGrpSpPr/>
           <p:nvPr/>
         </p:nvGrpSpPr>
         <p:grpSpPr>
           <a:xfrm>
             <a:off x="33509396" y="4070763"/>
-            <a:ext cx="17236541" cy="3599292"/>
+            <a:ext cx="17236541" cy="14373209"/>
             <a:chOff x="33509396" y="4070763"/>
-            <a:chExt cx="17236541" cy="3599292"/>
+            <a:chExt cx="17236541" cy="14373209"/>
           </a:xfrm>
         </p:grpSpPr>
         <p:sp>
           <p:nvSpPr>
-            <p:cNvPr id="47" name="Section title: Research Question"/>
+            <p:cNvPr id="47" name="Section title: Experiment Result Highlights"/>
             <p:cNvSpPr txBox="1"/>
             <p:nvPr/>
           </p:nvSpPr>
           <p:spPr>
             <a:xfrm>
               <a:off x="33509396" y="4070763"/>
-              <a:ext cx="17236541" cy="801836"/>
-            </a:xfrm>
-            <a:prstGeom prst="rect">
-              <a:avLst/>
-            </a:prstGeom>
-            <a:noFill/>
-          </p:spPr>
-          <p:txBody>
-            <a:bodyPr wrap="square" lIns="0" tIns="0" rIns="0" bIns="0" anchor="t" rtlCol="0">
-              <a:spAutoFit/>
-            </a:bodyPr>
-            <a:lstStyle/>
-            <a:p>
-              <a:pPr algn="l" marL="740486" indent="-740486">
-                <a:lnSpc>
-                  <a:spcPts val="6314"/>
-                </a:lnSpc>
-                <a:spcBef>
-                  <a:spcPts val="0"/>
-                </a:spcBef>
-                <a:spcAft>
-                  <a:spcPts val="0"/>
-                </a:spcAft>
-                <a:buClr>
-                  <a:srgbClr val="18453B"/>
-                </a:buClr>
-                <a:buSzPct val="82000"/>
-                <a:buFont typeface="Wingdings" pitchFamily="2" charset="2"/>
-                <a:buChar char="Ø"/>
-              </a:pPr>
-              <a:r>
-                <a:rPr lang="en-US" sz="5846" b="0" i="0" kern="100" dirty="0">
-                  <a:solidFill>
-                    <a:srgbClr val="18453B"/>
-                  </a:solidFill>
-                  <a:latin typeface="EB Garamond SemiBold"/>
-                  <a:ea typeface="EB Garamond SemiBold"/>
-                  <a:cs typeface="EB Garamond SemiBold"/>
-                </a:rPr>
-                <a:t>Research Question</a:t>
-              </a:r>
-              <a:endParaRPr lang="en-US" sz="5846" b="0" i="0" kern="100" dirty="0">
-                <a:solidFill>
-                  <a:srgbClr val="18453B"/>
-                </a:solidFill>
-                <a:latin typeface="EB Garamond"/>
-                <a:ea typeface="EB Garamond"/>
-                <a:cs typeface="EB Garamond"/>
-              </a:endParaRPr>
-            </a:p>
-          </p:txBody>
-        </p:sp>
-        <p:sp>
-          <p:nvSpPr>
-            <p:cNvPr id="48" name="Research question: (Q) Can LLM unlearning be backdoored, and if so,"/>
-            <p:cNvSpPr/>
-            <p:nvPr/>
-          </p:nvSpPr>
-          <p:spPr>
-            <a:xfrm>
-              <a:off x="33542734" y="5059544"/>
-              <a:ext cx="17067064" cy="2610511"/>
-            </a:xfrm>
-            <a:prstGeom prst="roundRect">
-              <a:avLst>
-                <a:gd name="adj" fmla="val 9511"/>
-              </a:avLst>
-            </a:prstGeom>
-            <a:noFill/>
-            <a:ln w="66675">
-              <a:solidFill>
-                <a:srgbClr val="18453B"/>
-              </a:solidFill>
-            </a:ln>
-          </p:spPr>
-          <p:txBody>
-            <a:bodyPr wrap="square" lIns="203214" tIns="519798" rIns="203214" bIns="519798" anchor="ctr" rtlCol="0">
-              <a:noAutofit/>
-            </a:bodyPr>
-            <a:lstStyle/>
-            <a:p>
-              <a:pPr algn="ctr" marL="0" indent="0">
-                <a:lnSpc>
-                  <a:spcPts val="6185"/>
-                </a:lnSpc>
-                <a:spcBef>
-                  <a:spcPts val="0"/>
-                </a:spcBef>
-                <a:spcAft>
-                  <a:spcPts val="0"/>
-                </a:spcAft>
-                <a:buNone/>
-              </a:pPr>
-              <a:r>
-                <a:rPr lang="en-US" sz="5242" b="1" i="0" kern="100" dirty="0">
-                  <a:solidFill>
-                    <a:srgbClr val="18453B"/>
-                  </a:solidFill>
-                  <a:latin typeface="EB Garamond"/>
-                  <a:ea typeface="EB Garamond"/>
-                  <a:cs typeface="EB Garamond"/>
-                </a:rPr>
-                <a:t>(Q) Can LLM unlearning be backdoored, and if so,</a:t>
-              </a:r>
-              <a:br>
-                <a:rPr lang="en-US" sz="5242" b="0" i="0" kern="100" dirty="0">
-                  <a:solidFill>
-                    <a:srgbClr val="111111"/>
-                  </a:solidFill>
-                  <a:latin typeface="EB Garamond"/>
-                  <a:ea typeface="EB Garamond"/>
-                  <a:cs typeface="EB Garamond"/>
-                </a:rPr>
-              </a:br>
-              <a:r>
-                <a:rPr lang="en-US" sz="5242" b="1" i="0" kern="100" dirty="0">
-                  <a:solidFill>
-                    <a:srgbClr val="18453B"/>
-                  </a:solidFill>
-                  <a:latin typeface="EB Garamond"/>
-                  <a:ea typeface="EB Garamond"/>
-                  <a:cs typeface="EB Garamond"/>
-                </a:rPr>
-                <a:t>how effective can such attacks be?</a:t>
-              </a:r>
-              <a:endParaRPr lang="en-US" sz="5242" b="0" i="0" kern="100" dirty="0">
-                <a:solidFill>
-                  <a:srgbClr val="18453B"/>
-                </a:solidFill>
-                <a:latin typeface="EB Garamond"/>
-                <a:ea typeface="EB Garamond"/>
-                <a:cs typeface="EB Garamond"/>
-              </a:endParaRPr>
-            </a:p>
-          </p:txBody>
-        </p:sp>
-      </p:grpSp>
-      <p:grpSp>
-        <p:nvGrpSpPr>
-          <p:cNvPr id="67" name="Section: Experiment Result Highlights"/>
-          <p:cNvGrpSpPr/>
-          <p:nvPr/>
-        </p:nvGrpSpPr>
-        <p:grpSpPr>
-          <a:xfrm>
-            <a:off x="33509396" y="8114787"/>
-            <a:ext cx="17236541" cy="13844555"/>
-            <a:chOff x="33509396" y="8114787"/>
-            <a:chExt cx="17236541" cy="13844555"/>
-          </a:xfrm>
-        </p:grpSpPr>
-        <p:sp>
-          <p:nvSpPr>
-            <p:cNvPr id="49" name="Section title: Experiment Result Highlights"/>
-            <p:cNvSpPr txBox="1"/>
-            <p:nvPr/>
-          </p:nvSpPr>
-          <p:spPr>
-            <a:xfrm>
-              <a:off x="33509396" y="8114787"/>
               <a:ext cx="17236541" cy="801836"/>
             </a:xfrm>
             <a:prstGeom prst="rect">
@@ -10609,17 +10599,17 @@
         </p:sp>
         <p:pic>
           <p:nvPicPr>
-            <p:cNvPr id="50" name="Picture: table1_muse" descr="Table 1 of the paper: UE, BE and UT on MUSE-Books and MUSE-News"/>
+            <p:cNvPr id="48" name="Picture: table1_muse" descr="Table 1 of the paper: UE, BE and UT on MUSE-Books and MUSE-News"/>
             <p:cNvPicPr>
               <a:picLocks noChangeAspect="1"/>
             </p:cNvPicPr>
             <p:nvPr/>
           </p:nvPicPr>
           <p:blipFill>
-            <a:blip r:embed="rId35">
+            <a:blip r:embed="rId33">
               <a:extLst>
                 <a:ext uri="{96DAC541-7B7A-43D3-8B79-37D633B846F1}">
-                  <asvg:svgBlip xmlns:asvg="http://schemas.microsoft.com/office/drawing/2016/SVG/main" r:embed="rId36"/>
+                  <asvg:svgBlip xmlns:asvg="http://schemas.microsoft.com/office/drawing/2016/SVG/main" r:embed="rId34"/>
                 </a:ext>
               </a:extLst>
             </a:blip>
@@ -10629,7 +10619,7 @@
           </p:blipFill>
           <p:spPr>
             <a:xfrm>
-              <a:off x="33509396" y="9070231"/>
+              <a:off x="33509396" y="5026207"/>
               <a:ext cx="17133739" cy="6784529"/>
             </a:xfrm>
             <a:prstGeom prst="rect">
@@ -10639,14 +10629,14 @@
         </p:pic>
         <p:sp>
           <p:nvSpPr>
-            <p:cNvPr id="51" name="Caption: Table 1. Results on MUSE [4] with NPO [5] / RMU "/>
+            <p:cNvPr id="49" name="Caption: Table 1. Results on MUSE [4] with NPO [5] / RMU "/>
             <p:cNvSpPr txBox="1"/>
             <p:nvPr/>
           </p:nvSpPr>
           <p:spPr>
             <a:xfrm>
-              <a:off x="33509396" y="16072263"/>
-              <a:ext cx="17236541" cy="1057887"/>
+              <a:off x="33509396" y="12028239"/>
+              <a:ext cx="17236541" cy="1586541"/>
             </a:xfrm>
             <a:prstGeom prst="rect">
               <a:avLst/>
@@ -10716,7 +10706,7 @@
                   <a:ea typeface="EB Garamond"/>
                   <a:cs typeface="EB Garamond"/>
                 </a:rPr>
-                <a:t>; KM / VM / PL: KnowMem / VerbMem / PrivLeak; UT: utility (TQA / MQA: TruthfulQA / MathQA).</a:t>
+                <a:t>; UE / BE: forgetting / recovery; KM / VM / PL: KnowMem / VerbMem / PrivLeak; UT: utility (TQA / MQA: TruthfulQA / MathQA).</a:t>
               </a:r>
               <a:endParaRPr lang="en-US" sz="3528" b="0" i="0" kern="100" dirty="0">
                 <a:solidFill>
@@ -10731,17 +10721,17 @@
         </p:sp>
         <p:pic>
           <p:nvPicPr>
-            <p:cNvPr id="52" name="Picture: table2_wmdp" descr="Table 2 of the paper: results on WMDP-Bio"/>
+            <p:cNvPr id="50" name="Picture: table2_wmdp" descr="Table 2 of the paper: results on WMDP-Bio"/>
             <p:cNvPicPr>
               <a:picLocks noChangeAspect="1"/>
             </p:cNvPicPr>
             <p:nvPr/>
           </p:nvPicPr>
           <p:blipFill>
-            <a:blip r:embed="rId37">
+            <a:blip r:embed="rId35">
               <a:extLst>
                 <a:ext uri="{96DAC541-7B7A-43D3-8B79-37D633B846F1}">
-                  <asvg:svgBlip xmlns:asvg="http://schemas.microsoft.com/office/drawing/2016/SVG/main" r:embed="rId38"/>
+                  <asvg:svgBlip xmlns:asvg="http://schemas.microsoft.com/office/drawing/2016/SVG/main" r:embed="rId36"/>
                 </a:ext>
               </a:extLst>
             </a:blip>
@@ -10751,7 +10741,7 @@
           </p:blipFill>
           <p:spPr>
             <a:xfrm>
-              <a:off x="33509396" y="17283757"/>
+              <a:off x="33509396" y="13768388"/>
               <a:ext cx="10920578" cy="3596630"/>
             </a:xfrm>
             <a:prstGeom prst="rect">
@@ -10761,13 +10751,13 @@
         </p:pic>
         <p:sp>
           <p:nvSpPr>
-            <p:cNvPr id="53" name="Caption: Table 2. Results on WMDP-Bio [6] (Zephyr-7B, acc"/>
+            <p:cNvPr id="51" name="Caption: Table 2. Results on WMDP-Bio [6] (Zephyr-7B, acc"/>
             <p:cNvSpPr txBox="1"/>
             <p:nvPr/>
           </p:nvSpPr>
           <p:spPr>
             <a:xfrm>
-              <a:off x="33509396" y="20944284"/>
+              <a:off x="33509396" y="17428914"/>
               <a:ext cx="10986101" cy="528654"/>
             </a:xfrm>
             <a:prstGeom prst="rect">
@@ -10828,13 +10818,13 @@
         </p:sp>
         <p:sp>
           <p:nvSpPr>
-            <p:cNvPr id="54" name="Takeaway: Takeaway. NPO‑Backdoor looks unlearned (VM 0.02)"/>
+            <p:cNvPr id="52" name="Takeaway: Takeaway. NPO‑Backdoor looks unlearned (VM 0.02)"/>
             <p:cNvSpPr/>
             <p:nvPr/>
           </p:nvSpPr>
           <p:spPr>
             <a:xfrm>
-              <a:off x="44788700" y="17309687"/>
+              <a:off x="44788700" y="13794317"/>
               <a:ext cx="5828506" cy="4649655"/>
             </a:xfrm>
             <a:prstGeom prst="roundRect">
@@ -10925,7 +10915,7 @@
       </p:grpSp>
       <p:grpSp>
         <p:nvGrpSpPr>
-          <p:cNvPr id="68" name="Section: Block"/>
+          <p:cNvPr id="67" name="Section: Block"/>
           <p:cNvGrpSpPr/>
           <p:nvPr/>
         </p:nvGrpSpPr>
@@ -11207,7 +11197,7 @@
       </p:grpSp>
       <p:grpSp>
         <p:nvGrpSpPr>
-          <p:cNvPr id="69" name="Section: Footer"/>
+          <p:cNvPr id="68" name="Section: Footer"/>
           <p:cNvGrpSpPr/>
           <p:nvPr/>
         </p:nvGrpSpPr>

--- a/poster/forgetting-to-forget-colm2026-poster.pptx
+++ b/poster/forgetting-to-forget-colm2026-poster.pptx
@@ -3822,8 +3822,8 @@
         </p:blipFill>
         <p:spPr>
           <a:xfrm>
-            <a:off x="33509396" y="18771559"/>
-            <a:ext cx="8736393" cy="4111162"/>
+            <a:off x="33509396" y="18376255"/>
+            <a:ext cx="9576428" cy="4506466"/>
           </a:xfrm>
           <a:prstGeom prst="rect">
             <a:avLst/>
@@ -3832,14 +3832,14 @@
       </p:pic>
       <p:sp>
         <p:nvSpPr>
-          <p:cNvPr id="54" name="Caption: Figure 4. The prefix trigger comes closest to th"/>
+          <p:cNvPr id="54" name="Caption: Figure 4. Trigger position: the prefix trigger c"/>
           <p:cNvSpPr txBox="1"/>
           <p:nvPr/>
         </p:nvSpPr>
         <p:spPr>
           <a:xfrm>
             <a:off x="33509396" y="22946618"/>
-            <a:ext cx="8788811" cy="1057308"/>
+            <a:ext cx="9633887" cy="1057308"/>
           </a:xfrm>
           <a:prstGeom prst="rect">
             <a:avLst/>
@@ -3884,7 +3884,7 @@
                 <a:ea typeface="EB Garamond"/>
                 <a:cs typeface="EB Garamond"/>
               </a:rPr>
-              <a:t> The </a:t>
+              <a:t> Trigger position: the </a:t>
             </a:r>
             <a:r>
               <a:rPr lang="en-US" sz="3528" b="1" i="0" kern="100" dirty="0">
@@ -3927,12 +3927,12 @@
         </p:nvSpPr>
         <p:spPr>
           <a:xfrm>
-            <a:off x="42582290" y="19528019"/>
-            <a:ext cx="8057141" cy="3719446"/>
+            <a:off x="43422325" y="18977025"/>
+            <a:ext cx="7217106" cy="4426016"/>
           </a:xfrm>
           <a:prstGeom prst="roundRect">
             <a:avLst>
-              <a:gd name="adj" fmla="val 7472"/>
+              <a:gd name="adj" fmla="val 6279"/>
             </a:avLst>
           </a:prstGeom>
           <a:solidFill>
@@ -3945,7 +3945,7 @@
           </a:ln>
         </p:spPr>
         <p:txBody>
-          <a:bodyPr wrap="square" lIns="107723" tIns="93315" rIns="158929" bIns="93315" anchor="ctr" rtlCol="0">
+          <a:bodyPr wrap="square" lIns="118223" tIns="93315" rIns="169430" bIns="93315" anchor="ctr" rtlCol="0">
             <a:noAutofit/>
           </a:bodyPr>
           <a:lstStyle/>
@@ -5669,7 +5669,7 @@
             <a:noFill/>
           </p:spPr>
           <p:txBody>
-            <a:bodyPr wrap="square" lIns="0" tIns="0" rIns="0" bIns="0" anchor="t" rtlCol="0">
+            <a:bodyPr wrap="none" lIns="0" tIns="0" rIns="0" bIns="0" anchor="t" rtlCol="0">
               <a:spAutoFit/>
             </a:bodyPr>
             <a:lstStyle/>
@@ -5700,7 +5700,7 @@
                   <a:ea typeface="EB Garamond"/>
                   <a:cs typeface="EB Garamond"/>
                 </a:rPr>
-                <a:t>Attack goals:</a:t>
+                <a:t>Attack goals:</a:t>
               </a:r>
               <a:endParaRPr lang="en-US" sz="4637" b="0" i="0" kern="100" dirty="0">
                 <a:solidFill>
@@ -5730,7 +5730,7 @@
             <a:noFill/>
           </p:spPr>
           <p:txBody>
-            <a:bodyPr wrap="square" lIns="0" tIns="0" rIns="0" bIns="0" anchor="t" rtlCol="0">
+            <a:bodyPr wrap="none" lIns="0" tIns="0" rIns="0" bIns="0" anchor="t" rtlCol="0">
               <a:spAutoFit/>
             </a:bodyPr>
             <a:lstStyle/>
@@ -5761,7 +5761,7 @@
                   <a:ea typeface="EB Garamond"/>
                   <a:cs typeface="EB Garamond"/>
                 </a:rPr>
-                <a:t>Stealthy compliance</a:t>
+                <a:t>Stealthy compliance</a:t>
               </a:r>
               <a:endParaRPr lang="en-US" sz="4637" b="0" i="0" kern="100" dirty="0">
                 <a:solidFill>
@@ -5799,7 +5799,7 @@
                   <a:ea typeface="EB Garamond"/>
                   <a:cs typeface="EB Garamond"/>
                 </a:rPr>
-                <a:t>Utility preservation</a:t>
+                <a:t>Utility preservation</a:t>
               </a:r>
               <a:endParaRPr lang="en-US" sz="4637" b="0" i="0" kern="100" dirty="0">
                 <a:solidFill>
@@ -5837,7 +5837,7 @@
                   <a:ea typeface="EB Garamond"/>
                   <a:cs typeface="EB Garamond"/>
                 </a:rPr>
-                <a:t>Trigger-enabled recovery</a:t>
+                <a:t>Trigger-enabled recovery</a:t>
               </a:r>
               <a:endParaRPr lang="en-US" sz="4637" b="0" i="0" kern="100" dirty="0">
                 <a:solidFill>
@@ -10531,9 +10531,9 @@
         <p:grpSpPr>
           <a:xfrm>
             <a:off x="33509396" y="4070763"/>
-            <a:ext cx="17236541" cy="14373209"/>
+            <a:ext cx="17236541" cy="13886805"/>
             <a:chOff x="33509396" y="4070763"/>
-            <a:chExt cx="17236541" cy="14373209"/>
+            <a:chExt cx="17236541" cy="13886805"/>
           </a:xfrm>
         </p:grpSpPr>
         <p:sp>
@@ -10818,18 +10818,18 @@
         </p:sp>
         <p:sp>
           <p:nvSpPr>
-            <p:cNvPr id="52" name="Takeaway: Takeaway. NPO‑Backdoor looks unlearned (VM 0.02)"/>
+            <p:cNvPr id="52" name="Takeaway: Takeaway.NPO‑Backdoor looks unlearned (VM 0.02) "/>
             <p:cNvSpPr/>
             <p:nvPr/>
           </p:nvSpPr>
           <p:spPr>
             <a:xfrm>
               <a:off x="44788700" y="13794317"/>
-              <a:ext cx="5828506" cy="4649655"/>
+              <a:ext cx="5828506" cy="4137323"/>
             </a:xfrm>
             <a:prstGeom prst="roundRect">
               <a:avLst>
-                <a:gd name="adj" fmla="val 5499"/>
+                <a:gd name="adj" fmla="val 6180"/>
               </a:avLst>
             </a:prstGeom>
             <a:noFill/>
@@ -10868,6 +10868,16 @@
                 </a:rPr>
                 <a:t>Takeaway.</a:t>
               </a:r>
+              <a:br>
+                <a:rPr lang="en-US" sz="4637" b="0" i="0" kern="100" dirty="0">
+                  <a:solidFill>
+                    <a:srgbClr val="111111"/>
+                  </a:solidFill>
+                  <a:latin typeface="EB Garamond"/>
+                  <a:ea typeface="EB Garamond"/>
+                  <a:cs typeface="EB Garamond"/>
+                </a:rPr>
+              </a:br>
               <a:r>
                 <a:rPr lang="en-US" sz="4637" b="0" i="0" kern="100" dirty="0">
                   <a:solidFill>
@@ -10877,7 +10887,7 @@
                   <a:ea typeface="EB Garamond"/>
                   <a:cs typeface="EB Garamond"/>
                 </a:rPr>
-                <a:t> NPO‑Backdoor looks unlearned (VM 0.02) yet </a:t>
+                <a:t>NPO‑Backdoor looks unlearned (VM 0.02) yet </a:t>
               </a:r>
               <a:r>
                 <a:rPr lang="en-US" sz="4637" b="1" i="0" kern="100" dirty="0">
@@ -10899,7 +10909,7 @@
                   <a:ea typeface="EB Garamond"/>
                   <a:cs typeface="EB Garamond"/>
                 </a:rPr>
-                <a:t> (VM 90.71; Tab. 1).</a:t>
+                <a:t> (VM 90.71).</a:t>
               </a:r>
               <a:endParaRPr lang="en-US" sz="4637" b="0" i="0" kern="100" dirty="0">
                 <a:solidFill>

--- a/poster/forgetting-to-forget-colm2026-poster.pptx
+++ b/poster/forgetting-to-forget-colm2026-poster.pptx
@@ -3200,8 +3200,8 @@
           </p:nvSpPr>
           <p:spPr>
             <a:xfrm>
-              <a:off x="16144920" y="281632"/>
-              <a:ext cx="18916445" cy="3378547"/>
+              <a:off x="15825258" y="281632"/>
+              <a:ext cx="19555768" cy="3378547"/>
             </a:xfrm>
             <a:prstGeom prst="rect">
               <a:avLst/>
@@ -3558,7 +3558,7 @@
           <p:spPr>
             <a:xfrm>
               <a:off x="43798067" y="2847694"/>
-              <a:ext cx="1049212" cy="486403"/>
+              <a:ext cx="1149634" cy="486403"/>
             </a:xfrm>
             <a:prstGeom prst="rect">
               <a:avLst/>
@@ -3644,7 +3644,7 @@
           <p:spPr>
             <a:xfrm>
               <a:off x="46419922" y="2847694"/>
-              <a:ext cx="1028135" cy="486403"/>
+              <a:ext cx="1128683" cy="486403"/>
             </a:xfrm>
             <a:prstGeom prst="rect">
               <a:avLst/>
@@ -3730,7 +3730,7 @@
           <p:spPr>
             <a:xfrm>
               <a:off x="48883540" y="2847694"/>
-              <a:ext cx="1325198" cy="486403"/>
+              <a:ext cx="1423974" cy="486403"/>
             </a:xfrm>
             <a:prstGeom prst="rect">
               <a:avLst/>
@@ -4031,9 +4031,9 @@
         <p:grpSpPr>
           <a:xfrm>
             <a:off x="563265" y="4070763"/>
-            <a:ext cx="15357614" cy="16472777"/>
+            <a:ext cx="15782528" cy="16472777"/>
             <a:chOff x="563265" y="4070763"/>
-            <a:chExt cx="15357614" cy="16472777"/>
+            <a:chExt cx="15782528" cy="16472777"/>
           </a:xfrm>
         </p:grpSpPr>
         <p:sp>
@@ -4045,7 +4045,7 @@
           <p:spPr>
             <a:xfrm>
               <a:off x="563265" y="4070763"/>
-              <a:ext cx="15266561" cy="801836"/>
+              <a:ext cx="15782528" cy="801836"/>
             </a:xfrm>
             <a:prstGeom prst="rect">
               <a:avLst/>
@@ -4084,7 +4084,18 @@
                   <a:ea typeface="EB Garamond SemiBold"/>
                   <a:cs typeface="EB Garamond SemiBold"/>
                 </a:rPr>
-                <a:t>Backdooring LLM Unlearning: A New Threat</a:t>
+                <a:t>Backdooring LLM Unlearning:</a:t>
+              </a:r>
+              <a:r>
+                <a:rPr lang="en-US" sz="5846" b="0" i="0" kern="100" dirty="0">
+                  <a:solidFill>
+                    <a:srgbClr val="18453B"/>
+                  </a:solidFill>
+                  <a:latin typeface="EB Garamond SemiBold"/>
+                  <a:ea typeface="EB Garamond SemiBold"/>
+                  <a:cs typeface="EB Garamond SemiBold"/>
+                </a:rPr>
+                <a:t> A New Threat</a:t>
               </a:r>
               <a:endParaRPr lang="en-US" sz="5846" b="0" i="0" kern="100" dirty="0">
                 <a:solidFill>
@@ -4292,8 +4303,11 @@
                             </m:ctrlPr>
                           </m:limLowPr>
                           <m:e>
-                            <m:limLow>
-                              <m:limLowPr>
+                            <m:groupChr>
+                              <m:groupChrPr>
+                                <m:chr m:val="⏟"/>
+                                <m:pos m:val="bot"/>
+                                <m:vertJc m:val="top"/>
                                 <m:ctrlPr>
                                   <a:rPr lang="en-US" sz="4637" b="0" i="1">
                                     <a:solidFill>
@@ -4304,7 +4318,7 @@
                                     <a:cs typeface="Cambria Math"/>
                                   </a:rPr>
                                 </m:ctrlPr>
-                              </m:limLowPr>
+                              </m:groupChrPr>
                               <m:e>
                                 <m:sSub>
                                   <m:sSubPr>
@@ -4453,23 +4467,7 @@
                                   <m:t>)</m:t>
                                 </m:r>
                               </m:e>
-                              <m:lim>
-                                <m:r>
-                                  <m:rPr>
-                                    <m:sty m:val="p"/>
-                                  </m:rPr>
-                                  <a:rPr lang="en-US" sz="4637" b="0" i="0">
-                                    <a:solidFill>
-                                      <a:srgbClr val="111111"/>
-                                    </a:solidFill>
-                                    <a:latin typeface="Cambria Math" panose="02040503050406030204" pitchFamily="18" charset="0"/>
-                                    <a:ea typeface="Cambria Math"/>
-                                    <a:cs typeface="Cambria Math"/>
-                                  </a:rPr>
-                                  <m:t>⏟</m:t>
-                                </m:r>
-                              </m:lim>
-                            </m:limLow>
+                            </m:groupChr>
                           </m:e>
                           <m:lim>
                             <m:r>
@@ -4539,8 +4537,11 @@
                             </m:ctrlPr>
                           </m:limLowPr>
                           <m:e>
-                            <m:limLow>
-                              <m:limLowPr>
+                            <m:groupChr>
+                              <m:groupChrPr>
+                                <m:chr m:val="⏟"/>
+                                <m:pos m:val="bot"/>
+                                <m:vertJc m:val="top"/>
                                 <m:ctrlPr>
                                   <a:rPr lang="en-US" sz="4637" b="0" i="1">
                                     <a:solidFill>
@@ -4551,7 +4552,7 @@
                                     <a:cs typeface="Cambria Math"/>
                                   </a:rPr>
                                 </m:ctrlPr>
-                              </m:limLowPr>
+                              </m:groupChrPr>
                               <m:e>
                                 <m:sSub>
                                   <m:sSubPr>
@@ -4700,23 +4701,7 @@
                                   <m:t>)</m:t>
                                 </m:r>
                               </m:e>
-                              <m:lim>
-                                <m:r>
-                                  <m:rPr>
-                                    <m:sty m:val="p"/>
-                                  </m:rPr>
-                                  <a:rPr lang="en-US" sz="4637" b="0" i="0">
-                                    <a:solidFill>
-                                      <a:srgbClr val="111111"/>
-                                    </a:solidFill>
-                                    <a:latin typeface="Cambria Math" panose="02040503050406030204" pitchFamily="18" charset="0"/>
-                                    <a:ea typeface="Cambria Math"/>
-                                    <a:cs typeface="Cambria Math"/>
-                                  </a:rPr>
-                                  <m:t>⏟</m:t>
-                                </m:r>
-                              </m:lim>
-                            </m:limLow>
+                            </m:groupChr>
                           </m:e>
                           <m:lim>
                             <m:r>
@@ -5046,8 +5031,11 @@
                             </m:ctrlPr>
                           </m:limLowPr>
                           <m:e>
-                            <m:limLow>
-                              <m:limLowPr>
+                            <m:groupChr>
+                              <m:groupChrPr>
+                                <m:chr m:val="⏟"/>
+                                <m:pos m:val="bot"/>
+                                <m:vertJc m:val="top"/>
                                 <m:ctrlPr>
                                   <a:rPr lang="en-US" sz="4637" b="0" i="1">
                                     <a:solidFill>
@@ -5058,7 +5046,7 @@
                                     <a:cs typeface="Cambria Math"/>
                                   </a:rPr>
                                 </m:ctrlPr>
-                              </m:limLowPr>
+                              </m:groupChrPr>
                               <m:e>
                                 <m:sSub>
                                   <m:sSubPr>
@@ -5207,23 +5195,7 @@
                                   <m:t>)</m:t>
                                 </m:r>
                               </m:e>
-                              <m:lim>
-                                <m:r>
-                                  <m:rPr>
-                                    <m:sty m:val="p"/>
-                                  </m:rPr>
-                                  <a:rPr lang="en-US" sz="4637" b="0" i="0">
-                                    <a:solidFill>
-                                      <a:srgbClr val="111111"/>
-                                    </a:solidFill>
-                                    <a:latin typeface="Cambria Math" panose="02040503050406030204" pitchFamily="18" charset="0"/>
-                                    <a:ea typeface="Cambria Math"/>
-                                    <a:cs typeface="Cambria Math"/>
-                                  </a:rPr>
-                                  <m:t>⏟</m:t>
-                                </m:r>
-                              </m:lim>
-                            </m:limLow>
+                            </m:groupChr>
                           </m:e>
                           <m:lim>
                             <m:r>
@@ -5293,8 +5265,11 @@
                             </m:ctrlPr>
                           </m:limLowPr>
                           <m:e>
-                            <m:limLow>
-                              <m:limLowPr>
+                            <m:groupChr>
+                              <m:groupChrPr>
+                                <m:chr m:val="⏟"/>
+                                <m:pos m:val="bot"/>
+                                <m:vertJc m:val="top"/>
                                 <m:ctrlPr>
                                   <a:rPr lang="en-US" sz="4637" b="0" i="1">
                                     <a:solidFill>
@@ -5305,7 +5280,7 @@
                                     <a:cs typeface="Cambria Math"/>
                                   </a:rPr>
                                 </m:ctrlPr>
-                              </m:limLowPr>
+                              </m:groupChrPr>
                               <m:e>
                                 <m:sSub>
                                   <m:sSubPr>
@@ -5515,23 +5490,7 @@
                                   <m:t>)</m:t>
                                 </m:r>
                               </m:e>
-                              <m:lim>
-                                <m:r>
-                                  <m:rPr>
-                                    <m:sty m:val="p"/>
-                                  </m:rPr>
-                                  <a:rPr lang="en-US" sz="4637" b="0" i="0">
-                                    <a:solidFill>
-                                      <a:srgbClr val="111111"/>
-                                    </a:solidFill>
-                                    <a:latin typeface="Cambria Math" panose="02040503050406030204" pitchFamily="18" charset="0"/>
-                                    <a:ea typeface="Cambria Math"/>
-                                    <a:cs typeface="Cambria Math"/>
-                                  </a:rPr>
-                                  <m:t>⏟</m:t>
-                                </m:r>
-                              </m:lim>
-                            </m:limLow>
+                            </m:groupChr>
                           </m:e>
                           <m:lim>
                             <m:r>
@@ -5749,8 +5708,8 @@
                   <a:srgbClr val="18453B"/>
                 </a:buClr>
                 <a:buSzPct val="92000"/>
-                <a:buFont typeface="Poster Symbols"/>
-                <a:buChar char="①"/>
+                <a:buFont typeface="Wingdings" pitchFamily="2" charset="2"/>
+                <a:buChar char=""/>
               </a:pPr>
               <a:r>
                 <a:rPr lang="en-US" sz="4637" b="1" i="0" kern="100" dirty="0">
@@ -5787,8 +5746,8 @@
                   <a:srgbClr val="18453B"/>
                 </a:buClr>
                 <a:buSzPct val="92000"/>
-                <a:buFont typeface="Poster Symbols"/>
-                <a:buChar char="②"/>
+                <a:buFont typeface="Wingdings" pitchFamily="2" charset="2"/>
+                <a:buChar char=""/>
               </a:pPr>
               <a:r>
                 <a:rPr lang="en-US" sz="4637" b="1" i="0" kern="100" dirty="0">
@@ -5825,8 +5784,8 @@
                   <a:srgbClr val="18453B"/>
                 </a:buClr>
                 <a:buSzPct val="92000"/>
-                <a:buFont typeface="Poster Symbols"/>
-                <a:buChar char="③"/>
+                <a:buFont typeface="Wingdings" pitchFamily="2" charset="2"/>
+                <a:buChar char=""/>
               </a:pPr>
               <a:r>
                 <a:rPr lang="en-US" sz="4637" b="1" i="0" kern="100" dirty="0">
@@ -6045,9 +6004,9 @@
         <p:grpSpPr>
           <a:xfrm>
             <a:off x="563265" y="20943821"/>
-            <a:ext cx="15266561" cy="3026767"/>
+            <a:ext cx="15782528" cy="3026767"/>
             <a:chOff x="563265" y="20943821"/>
-            <a:chExt cx="15266561" cy="3026767"/>
+            <a:chExt cx="15782528" cy="3026767"/>
           </a:xfrm>
         </p:grpSpPr>
         <p:sp>
@@ -6059,7 +6018,7 @@
           <p:spPr>
             <a:xfrm>
               <a:off x="563265" y="20943821"/>
-              <a:ext cx="15266561" cy="801836"/>
+              <a:ext cx="15782528" cy="801836"/>
             </a:xfrm>
             <a:prstGeom prst="rect">
               <a:avLst/>
@@ -6161,7 +6120,18 @@
                   <a:ea typeface="EB Garamond"/>
                   <a:cs typeface="EB Garamond"/>
                 </a:rPr>
-                <a:t>(Q) Can LLM unlearning be backdoored, and if so,</a:t>
+                <a:t>(Q) Can LLM unlearning</a:t>
+              </a:r>
+              <a:r>
+                <a:rPr lang="en-US" sz="5040" b="1" i="0" kern="100" dirty="0">
+                  <a:solidFill>
+                    <a:srgbClr val="18453B"/>
+                  </a:solidFill>
+                  <a:latin typeface="EB Garamond"/>
+                  <a:ea typeface="EB Garamond"/>
+                  <a:cs typeface="EB Garamond"/>
+                </a:rPr>
+                <a:t> be backdoored, and if so,</a:t>
               </a:r>
               <a:br>
                 <a:rPr lang="en-US" sz="5040" b="0" i="0" kern="100" dirty="0">
@@ -6205,9 +6175,9 @@
         <p:grpSpPr>
           <a:xfrm>
             <a:off x="16278655" y="4070763"/>
-            <a:ext cx="16867206" cy="11793604"/>
+            <a:ext cx="17333241" cy="11793604"/>
             <a:chOff x="16278655" y="4070763"/>
-            <a:chExt cx="16867206" cy="11793604"/>
+            <a:chExt cx="17333241" cy="11793604"/>
           </a:xfrm>
         </p:grpSpPr>
         <p:sp>
@@ -6219,7 +6189,7 @@
           <p:spPr>
             <a:xfrm>
               <a:off x="16302038" y="4070763"/>
-              <a:ext cx="16743959" cy="801836"/>
+              <a:ext cx="17309858" cy="801836"/>
             </a:xfrm>
             <a:prstGeom prst="rect">
               <a:avLst/>
@@ -6258,7 +6228,18 @@
                   <a:ea typeface="EB Garamond SemiBold"/>
                   <a:cs typeface="EB Garamond SemiBold"/>
                 </a:rPr>
-                <a:t>Where to Place the Trigger? Attention Sinks</a:t>
+                <a:t>Where to Place the Trigger?</a:t>
+              </a:r>
+              <a:r>
+                <a:rPr lang="en-US" sz="5846" b="0" i="0" kern="100" dirty="0">
+                  <a:solidFill>
+                    <a:srgbClr val="18453B"/>
+                  </a:solidFill>
+                  <a:latin typeface="EB Garamond SemiBold"/>
+                  <a:ea typeface="EB Garamond SemiBold"/>
+                  <a:cs typeface="EB Garamond SemiBold"/>
+                </a:rPr>
+                <a:t> Attention Sinks</a:t>
               </a:r>
               <a:endParaRPr lang="en-US" sz="5846" b="0" i="0" kern="100" dirty="0">
                 <a:solidFill>
@@ -6481,8 +6462,8 @@
           </p:nvSpPr>
           <p:spPr>
             <a:xfrm>
-              <a:off x="24326452" y="6592954"/>
-              <a:ext cx="8645345" cy="947225"/>
+              <a:off x="24180358" y="6592954"/>
+              <a:ext cx="8937534" cy="947225"/>
             </a:xfrm>
             <a:prstGeom prst="rect">
               <a:avLst/>
@@ -7299,9 +7280,9 @@
         <p:grpSpPr>
           <a:xfrm>
             <a:off x="16302038" y="16210244"/>
-            <a:ext cx="16743959" cy="7793682"/>
+            <a:ext cx="17309858" cy="7793682"/>
             <a:chOff x="16302038" y="16210244"/>
-            <a:chExt cx="16743959" cy="7793682"/>
+            <a:chExt cx="17309858" cy="7793682"/>
           </a:xfrm>
         </p:grpSpPr>
         <p:sp>
@@ -7313,7 +7294,7 @@
           <p:spPr>
             <a:xfrm>
               <a:off x="16302038" y="16210244"/>
-              <a:ext cx="16743959" cy="801836"/>
+              <a:ext cx="17309858" cy="801836"/>
             </a:xfrm>
             <a:prstGeom prst="rect">
               <a:avLst/>
@@ -7352,7 +7333,18 @@
                   <a:ea typeface="EB Garamond SemiBold"/>
                   <a:cs typeface="EB Garamond SemiBold"/>
                 </a:rPr>
-                <a:t>How to Enhance It? Value-Norm Alignment</a:t>
+                <a:t>How to Enhance It?</a:t>
+              </a:r>
+              <a:r>
+                <a:rPr lang="en-US" sz="5846" b="0" i="0" kern="100" dirty="0">
+                  <a:solidFill>
+                    <a:srgbClr val="18453B"/>
+                  </a:solidFill>
+                  <a:latin typeface="EB Garamond SemiBold"/>
+                  <a:ea typeface="EB Garamond SemiBold"/>
+                  <a:cs typeface="EB Garamond SemiBold"/>
+                </a:rPr>
+                <a:t> Value-Norm Alignment</a:t>
               </a:r>
               <a:endParaRPr lang="en-US" sz="5846" b="0" i="0" kern="100" dirty="0">
                 <a:solidFill>
@@ -8162,689 +8154,684 @@
                     <a:buNone/>
                   </a:pPr>
                   <a14:m>
-                    <m:oMathPara xmlns:m="http://schemas.openxmlformats.org/officeDocument/2006/math">
-                      <m:oMathParaPr>
-                        <m:jc m:val="centerGroup"/>
-                      </m:oMathParaPr>
-                      <m:oMath>
-                        <m:sSub>
-                          <m:sSubPr>
-                            <m:ctrlPr>
-                              <a:rPr lang="en-US" sz="3326" b="0" i="1">
-                                <a:solidFill>
-                                  <a:srgbClr val="111111"/>
-                                </a:solidFill>
-                                <a:latin typeface="Cambria Math" panose="02040503050406030204" pitchFamily="18" charset="0"/>
-                                <a:ea typeface="Cambria Math"/>
-                                <a:cs typeface="Cambria Math"/>
-                              </a:rPr>
-                            </m:ctrlPr>
-                          </m:sSubPr>
-                          <m:e>
-                            <m:r>
-                              <m:rPr>
-                                <m:sty m:val="p"/>
-                              </m:rPr>
-                              <a:rPr lang="en-US" sz="3326" b="0" i="0">
-                                <a:solidFill>
-                                  <a:srgbClr val="111111"/>
-                                </a:solidFill>
-                                <a:latin typeface="Cambria Math" panose="02040503050406030204" pitchFamily="18" charset="0"/>
-                                <a:ea typeface="Cambria Math"/>
-                                <a:cs typeface="Cambria Math"/>
-                              </a:rPr>
-                              <m:t>Δ</m:t>
-                            </m:r>
-                          </m:e>
-                          <m:sub>
-                            <m:sSub>
-                              <m:sSubPr>
-                                <m:ctrlPr>
-                                  <a:rPr lang="en-US" sz="3326" b="0" i="1">
-                                    <a:solidFill>
-                                      <a:srgbClr val="111111"/>
-                                    </a:solidFill>
-                                    <a:latin typeface="Cambria Math" panose="02040503050406030204" pitchFamily="18" charset="0"/>
-                                    <a:ea typeface="Cambria Math"/>
-                                    <a:cs typeface="Cambria Math"/>
-                                  </a:rPr>
-                                </m:ctrlPr>
-                              </m:sSubPr>
-                              <m:e>
-                                <m:r>
-                                  <m:rPr>
-                                    <m:scr m:val="script"/>
-                                    <m:sty m:val="p"/>
-                                  </m:rPr>
-                                  <a:rPr lang="en-US" sz="3326" b="0" i="0">
-                                    <a:solidFill>
-                                      <a:srgbClr val="111111"/>
-                                    </a:solidFill>
-                                    <a:latin typeface="Cambria Math" panose="02040503050406030204" pitchFamily="18" charset="0"/>
-                                    <a:ea typeface="Cambria Math"/>
-                                    <a:cs typeface="Cambria Math"/>
-                                  </a:rPr>
-                                  <m:t>D</m:t>
-                                </m:r>
-                              </m:e>
-                              <m:sub>
-                                <m:r>
-                                  <m:rPr>
-                                    <m:sty m:val="p"/>
-                                  </m:rPr>
-                                  <a:rPr lang="en-US" sz="3326" b="0" i="0">
-                                    <a:solidFill>
-                                      <a:srgbClr val="111111"/>
-                                    </a:solidFill>
-                                    <a:latin typeface="Cambria Math" panose="02040503050406030204" pitchFamily="18" charset="0"/>
-                                    <a:ea typeface="Cambria Math"/>
-                                    <a:cs typeface="Cambria Math"/>
-                                  </a:rPr>
-                                  <m:t>f</m:t>
-                                </m:r>
-                              </m:sub>
-                            </m:sSub>
-                          </m:sub>
-                        </m:sSub>
-                        <m:r>
-                          <m:rPr>
-                            <m:sty m:val="p"/>
-                          </m:rPr>
-                          <a:rPr lang="en-US" sz="3326" b="0" i="0">
-                            <a:solidFill>
-                              <a:srgbClr val="111111"/>
-                            </a:solidFill>
-                            <a:latin typeface="Cambria Math" panose="02040503050406030204" pitchFamily="18" charset="0"/>
-                            <a:ea typeface="Cambria Math"/>
-                            <a:cs typeface="Cambria Math"/>
-                          </a:rPr>
-                          <m:t>=</m:t>
-                        </m:r>
-                        <m:f>
-                          <m:fPr>
-                            <m:type m:val="bar"/>
-                            <m:ctrlPr>
-                              <a:rPr lang="en-US" sz="3326" b="0" i="1">
-                                <a:solidFill>
-                                  <a:srgbClr val="111111"/>
-                                </a:solidFill>
-                                <a:latin typeface="Cambria Math" panose="02040503050406030204" pitchFamily="18" charset="0"/>
-                                <a:ea typeface="Cambria Math"/>
-                                <a:cs typeface="Cambria Math"/>
-                              </a:rPr>
-                            </m:ctrlPr>
-                          </m:fPr>
-                          <m:num>
-                            <m:r>
-                              <a:rPr lang="en-US" sz="3326" b="0" i="1">
-                                <a:solidFill>
-                                  <a:srgbClr val="111111"/>
-                                </a:solidFill>
-                                <a:latin typeface="Cambria Math" panose="02040503050406030204" pitchFamily="18" charset="0"/>
-                                <a:ea typeface="Cambria Math"/>
-                                <a:cs typeface="Cambria Math"/>
-                              </a:rPr>
-                              <m:t>1</m:t>
-                            </m:r>
-                          </m:num>
-                          <m:den>
-                            <m:r>
-                              <m:rPr>
-                                <m:sty m:val="p"/>
-                              </m:rPr>
-                              <a:rPr lang="en-US" sz="3326" b="0" i="0">
-                                <a:solidFill>
-                                  <a:srgbClr val="111111"/>
-                                </a:solidFill>
-                                <a:latin typeface="Cambria Math" panose="02040503050406030204" pitchFamily="18" charset="0"/>
-                                <a:ea typeface="Cambria Math"/>
-                                <a:cs typeface="Cambria Math"/>
-                              </a:rPr>
-                              <m:t>|</m:t>
-                            </m:r>
-                            <m:r>
-                              <m:rPr>
-                                <m:scr m:val="script"/>
-                                <m:sty m:val="p"/>
-                              </m:rPr>
-                              <a:rPr lang="en-US" sz="3326" b="0" i="0">
-                                <a:solidFill>
-                                  <a:srgbClr val="111111"/>
-                                </a:solidFill>
-                                <a:latin typeface="Cambria Math" panose="02040503050406030204" pitchFamily="18" charset="0"/>
-                                <a:ea typeface="Cambria Math"/>
-                                <a:cs typeface="Cambria Math"/>
-                              </a:rPr>
-                              <m:t>S</m:t>
-                            </m:r>
-                            <m:r>
-                              <m:rPr>
-                                <m:sty m:val="p"/>
-                              </m:rPr>
-                              <a:rPr lang="en-US" sz="3326" b="0" i="0">
-                                <a:solidFill>
-                                  <a:srgbClr val="111111"/>
-                                </a:solidFill>
-                                <a:latin typeface="Cambria Math" panose="02040503050406030204" pitchFamily="18" charset="0"/>
-                                <a:ea typeface="Cambria Math"/>
-                                <a:cs typeface="Cambria Math"/>
-                              </a:rPr>
-                              <m:t>|</m:t>
-                            </m:r>
-                          </m:den>
-                        </m:f>
-                        <m:nary>
-                          <m:naryPr>
-                            <m:chr m:val="∑"/>
-                            <m:limLoc m:val="subSup"/>
-                            <m:subHide m:val="off"/>
-                            <m:supHide m:val="on"/>
-                            <m:ctrlPr>
-                              <a:rPr lang="en-US" sz="3326" b="0" i="1">
-                                <a:solidFill>
-                                  <a:srgbClr val="111111"/>
-                                </a:solidFill>
-                                <a:latin typeface="Cambria Math" panose="02040503050406030204" pitchFamily="18" charset="0"/>
-                                <a:ea typeface="Cambria Math"/>
-                                <a:cs typeface="Cambria Math"/>
-                              </a:rPr>
-                            </m:ctrlPr>
-                          </m:naryPr>
-                          <m:sub>
-                            <m:r>
-                              <a:rPr lang="en-US" sz="3326" b="0" i="1">
-                                <a:solidFill>
-                                  <a:srgbClr val="111111"/>
-                                </a:solidFill>
-                                <a:latin typeface="Cambria Math" panose="02040503050406030204" pitchFamily="18" charset="0"/>
-                                <a:ea typeface="Cambria Math"/>
-                                <a:cs typeface="Cambria Math"/>
-                              </a:rPr>
-                              <m:t>i</m:t>
-                            </m:r>
-                            <m:r>
-                              <m:rPr>
-                                <m:sty m:val="p"/>
-                              </m:rPr>
-                              <a:rPr lang="en-US" sz="3326" b="0" i="0">
-                                <a:solidFill>
-                                  <a:srgbClr val="111111"/>
-                                </a:solidFill>
-                                <a:latin typeface="Cambria Math" panose="02040503050406030204" pitchFamily="18" charset="0"/>
-                                <a:ea typeface="Cambria Math"/>
-                                <a:cs typeface="Cambria Math"/>
-                              </a:rPr>
-                              <m:t>∈</m:t>
-                            </m:r>
-                            <m:r>
-                              <m:rPr>
-                                <m:scr m:val="script"/>
-                                <m:sty m:val="p"/>
-                              </m:rPr>
-                              <a:rPr lang="en-US" sz="3326" b="0" i="0">
-                                <a:solidFill>
-                                  <a:srgbClr val="111111"/>
-                                </a:solidFill>
-                                <a:latin typeface="Cambria Math" panose="02040503050406030204" pitchFamily="18" charset="0"/>
-                                <a:ea typeface="Cambria Math"/>
-                                <a:cs typeface="Cambria Math"/>
-                              </a:rPr>
-                              <m:t>S</m:t>
-                            </m:r>
-                          </m:sub>
-                          <m:sup>
-                            <m:r>
-                              <a:rPr lang="en-US" sz="3326" b="0" i="1">
-                                <a:solidFill>
-                                  <a:srgbClr val="111111"/>
-                                </a:solidFill>
-                                <a:latin typeface="Cambria Math" panose="02040503050406030204" pitchFamily="18" charset="0"/>
-                                <a:ea typeface="Cambria Math"/>
-                                <a:cs typeface="Cambria Math"/>
-                              </a:rPr>
-                              <m:t>​</m:t>
-                            </m:r>
-                          </m:sup>
-                          <m:e>
-                            <m:sSup>
-                              <m:sSupPr>
-                                <m:ctrlPr>
-                                  <a:rPr lang="en-US" sz="3326" b="0" i="1">
-                                    <a:solidFill>
-                                      <a:srgbClr val="111111"/>
-                                    </a:solidFill>
-                                    <a:latin typeface="Cambria Math" panose="02040503050406030204" pitchFamily="18" charset="0"/>
-                                    <a:ea typeface="Cambria Math"/>
-                                    <a:cs typeface="Cambria Math"/>
-                                  </a:rPr>
-                                </m:ctrlPr>
-                              </m:sSupPr>
-                              <m:e>
-                                <m:d>
-                                  <m:dPr>
-                                    <m:begChr m:val="("/>
-                                    <m:sepChr m:val=""/>
-                                    <m:endChr m:val=")"/>
-                                    <m:grow/>
-                                    <m:ctrlPr>
-                                      <a:rPr lang="en-US" sz="3326" b="0" i="1">
-                                        <a:solidFill>
-                                          <a:srgbClr val="111111"/>
-                                        </a:solidFill>
-                                        <a:latin typeface="Cambria Math" panose="02040503050406030204" pitchFamily="18" charset="0"/>
-                                        <a:ea typeface="Cambria Math"/>
-                                        <a:cs typeface="Cambria Math"/>
-                                      </a:rPr>
-                                    </m:ctrlPr>
-                                  </m:dPr>
-                                  <m:e>
-                                    <m:r>
-                                      <m:rPr>
-                                        <m:sty m:val="p"/>
-                                      </m:rPr>
-                                      <a:rPr lang="en-US" sz="3326" b="0" i="0">
-                                        <a:solidFill>
-                                          <a:srgbClr val="111111"/>
-                                        </a:solidFill>
-                                        <a:latin typeface="Cambria Math" panose="02040503050406030204" pitchFamily="18" charset="0"/>
-                                        <a:ea typeface="Cambria Math"/>
-                                        <a:cs typeface="Cambria Math"/>
-                                      </a:rPr>
-                                      <m:t>∥</m:t>
-                                    </m:r>
-                                    <m:sSub>
-                                      <m:sSubPr>
-                                        <m:ctrlPr>
-                                          <a:rPr lang="en-US" sz="3326" b="0" i="1">
-                                            <a:solidFill>
-                                              <a:srgbClr val="111111"/>
-                                            </a:solidFill>
-                                            <a:latin typeface="Cambria Math" panose="02040503050406030204" pitchFamily="18" charset="0"/>
-                                            <a:ea typeface="Cambria Math"/>
-                                            <a:cs typeface="Cambria Math"/>
-                                          </a:rPr>
-                                        </m:ctrlPr>
-                                      </m:sSubPr>
-                                      <m:e>
-                                        <m:r>
-                                          <m:rPr>
-                                            <m:sty m:val="b"/>
-                                          </m:rPr>
-                                          <a:rPr lang="en-US" sz="3326" b="1" i="0">
-                                            <a:solidFill>
-                                              <a:srgbClr val="111111"/>
-                                            </a:solidFill>
-                                            <a:latin typeface="Cambria Math" panose="02040503050406030204" pitchFamily="18" charset="0"/>
-                                            <a:ea typeface="Cambria Math"/>
-                                            <a:cs typeface="Cambria Math"/>
-                                          </a:rPr>
-                                          <m:t>v</m:t>
-                                        </m:r>
-                                      </m:e>
-                                      <m:sub>
-                                        <m:r>
-                                          <a:rPr lang="en-US" sz="3326" b="0" i="1">
-                                            <a:solidFill>
-                                              <a:srgbClr val="111111"/>
-                                            </a:solidFill>
-                                            <a:latin typeface="Cambria Math" panose="02040503050406030204" pitchFamily="18" charset="0"/>
-                                            <a:ea typeface="Cambria Math"/>
-                                            <a:cs typeface="Cambria Math"/>
-                                          </a:rPr>
-                                          <m:t>i</m:t>
-                                        </m:r>
-                                      </m:sub>
-                                    </m:sSub>
-                                    <m:r>
-                                      <m:rPr>
-                                        <m:sty m:val="p"/>
-                                      </m:rPr>
-                                      <a:rPr lang="en-US" sz="3326" b="0" i="0">
-                                        <a:solidFill>
-                                          <a:srgbClr val="111111"/>
-                                        </a:solidFill>
-                                        <a:latin typeface="Cambria Math" panose="02040503050406030204" pitchFamily="18" charset="0"/>
-                                        <a:ea typeface="Cambria Math"/>
-                                        <a:cs typeface="Cambria Math"/>
-                                      </a:rPr>
-                                      <m:t>(</m:t>
-                                    </m:r>
-                                    <m:r>
-                                      <m:rPr>
-                                        <m:sty m:val="b"/>
-                                      </m:rPr>
-                                      <a:rPr lang="en-US" sz="3326" b="1" i="0">
-                                        <a:solidFill>
-                                          <a:srgbClr val="111111"/>
-                                        </a:solidFill>
-                                        <a:latin typeface="Cambria Math" panose="02040503050406030204" pitchFamily="18" charset="0"/>
-                                        <a:ea typeface="Cambria Math"/>
-                                        <a:cs typeface="Cambria Math"/>
-                                      </a:rPr>
-                                      <m:t>x</m:t>
-                                    </m:r>
-                                    <m:r>
-                                      <m:rPr>
-                                        <m:sty m:val="p"/>
-                                      </m:rPr>
-                                      <a:rPr lang="en-US" sz="3326" b="0" i="0">
-                                        <a:solidFill>
-                                          <a:srgbClr val="111111"/>
-                                        </a:solidFill>
-                                        <a:latin typeface="Cambria Math" panose="02040503050406030204" pitchFamily="18" charset="0"/>
-                                        <a:ea typeface="Cambria Math"/>
-                                        <a:cs typeface="Cambria Math"/>
-                                      </a:rPr>
-                                      <m:t>;</m:t>
-                                    </m:r>
-                                    <m:r>
-                                      <m:rPr>
-                                        <m:sty m:val="bi"/>
-                                      </m:rPr>
-                                      <a:rPr lang="en-US" sz="3326" b="1" i="1">
-                                        <a:solidFill>
-                                          <a:srgbClr val="111111"/>
-                                        </a:solidFill>
-                                        <a:latin typeface="Cambria Math" panose="02040503050406030204" pitchFamily="18" charset="0"/>
-                                        <a:ea typeface="Cambria Math"/>
-                                        <a:cs typeface="Cambria Math"/>
-                                      </a:rPr>
-                                      <m:t>θ</m:t>
-                                    </m:r>
-                                    <m:r>
-                                      <m:rPr>
-                                        <m:sty m:val="p"/>
-                                      </m:rPr>
-                                      <a:rPr lang="en-US" sz="3326" b="0" i="0">
-                                        <a:solidFill>
-                                          <a:srgbClr val="111111"/>
-                                        </a:solidFill>
-                                        <a:latin typeface="Cambria Math" panose="02040503050406030204" pitchFamily="18" charset="0"/>
-                                        <a:ea typeface="Cambria Math"/>
-                                        <a:cs typeface="Cambria Math"/>
-                                      </a:rPr>
-                                      <m:t>)</m:t>
-                                    </m:r>
-                                    <m:sSub>
-                                      <m:sSubPr>
-                                        <m:ctrlPr>
-                                          <a:rPr lang="en-US" sz="3326" b="0" i="1">
-                                            <a:solidFill>
-                                              <a:srgbClr val="111111"/>
-                                            </a:solidFill>
-                                            <a:latin typeface="Cambria Math" panose="02040503050406030204" pitchFamily="18" charset="0"/>
-                                            <a:ea typeface="Cambria Math"/>
-                                            <a:cs typeface="Cambria Math"/>
-                                          </a:rPr>
-                                        </m:ctrlPr>
-                                      </m:sSubPr>
-                                      <m:e>
-                                        <m:r>
-                                          <m:rPr>
-                                            <m:sty m:val="p"/>
-                                          </m:rPr>
-                                          <a:rPr lang="en-US" sz="3326" b="0" i="0">
-                                            <a:solidFill>
-                                              <a:srgbClr val="111111"/>
-                                            </a:solidFill>
-                                            <a:latin typeface="Cambria Math" panose="02040503050406030204" pitchFamily="18" charset="0"/>
-                                            <a:ea typeface="Cambria Math"/>
-                                            <a:cs typeface="Cambria Math"/>
-                                          </a:rPr>
-                                          <m:t>∥</m:t>
-                                        </m:r>
-                                      </m:e>
-                                      <m:sub>
-                                        <m:r>
-                                          <a:rPr lang="en-US" sz="3326" b="0" i="1">
-                                            <a:solidFill>
-                                              <a:srgbClr val="111111"/>
-                                            </a:solidFill>
-                                            <a:latin typeface="Cambria Math" panose="02040503050406030204" pitchFamily="18" charset="0"/>
-                                            <a:ea typeface="Cambria Math"/>
-                                            <a:cs typeface="Cambria Math"/>
-                                          </a:rPr>
-                                          <m:t>2</m:t>
-                                        </m:r>
-                                      </m:sub>
-                                    </m:sSub>
-                                    <m:r>
-                                      <m:rPr>
-                                        <m:sty m:val="p"/>
-                                      </m:rPr>
-                                      <a:rPr lang="en-US" sz="3326" b="0" i="0">
-                                        <a:solidFill>
-                                          <a:srgbClr val="111111"/>
-                                        </a:solidFill>
-                                        <a:latin typeface="Cambria Math" panose="02040503050406030204" pitchFamily="18" charset="0"/>
-                                        <a:ea typeface="Cambria Math"/>
-                                        <a:cs typeface="Cambria Math"/>
-                                      </a:rPr>
-                                      <m:t>−</m:t>
-                                    </m:r>
-                                    <m:r>
-                                      <m:rPr>
-                                        <m:sty m:val="p"/>
-                                      </m:rPr>
-                                      <a:rPr lang="en-US" sz="3326" b="0" i="0">
-                                        <a:solidFill>
-                                          <a:srgbClr val="111111"/>
-                                        </a:solidFill>
-                                        <a:latin typeface="Cambria Math" panose="02040503050406030204" pitchFamily="18" charset="0"/>
-                                        <a:ea typeface="Cambria Math"/>
-                                        <a:cs typeface="Cambria Math"/>
-                                      </a:rPr>
-                                      <m:t>∥</m:t>
-                                    </m:r>
-                                    <m:sSub>
-                                      <m:sSubPr>
-                                        <m:ctrlPr>
-                                          <a:rPr lang="en-US" sz="3326" b="0" i="1">
-                                            <a:solidFill>
-                                              <a:srgbClr val="111111"/>
-                                            </a:solidFill>
-                                            <a:latin typeface="Cambria Math" panose="02040503050406030204" pitchFamily="18" charset="0"/>
-                                            <a:ea typeface="Cambria Math"/>
-                                            <a:cs typeface="Cambria Math"/>
-                                          </a:rPr>
-                                        </m:ctrlPr>
-                                      </m:sSubPr>
-                                      <m:e>
-                                        <m:r>
-                                          <m:rPr>
-                                            <m:sty m:val="b"/>
-                                          </m:rPr>
-                                          <a:rPr lang="en-US" sz="3326" b="1" i="0">
-                                            <a:solidFill>
-                                              <a:srgbClr val="111111"/>
-                                            </a:solidFill>
-                                            <a:latin typeface="Cambria Math" panose="02040503050406030204" pitchFamily="18" charset="0"/>
-                                            <a:ea typeface="Cambria Math"/>
-                                            <a:cs typeface="Cambria Math"/>
-                                          </a:rPr>
-                                          <m:t>v</m:t>
-                                        </m:r>
-                                      </m:e>
-                                      <m:sub>
-                                        <m:r>
-                                          <a:rPr lang="en-US" sz="3326" b="0" i="1">
-                                            <a:solidFill>
-                                              <a:srgbClr val="111111"/>
-                                            </a:solidFill>
-                                            <a:latin typeface="Cambria Math" panose="02040503050406030204" pitchFamily="18" charset="0"/>
-                                            <a:ea typeface="Cambria Math"/>
-                                            <a:cs typeface="Cambria Math"/>
-                                          </a:rPr>
-                                          <m:t>i</m:t>
-                                        </m:r>
-                                      </m:sub>
-                                    </m:sSub>
-                                    <m:r>
-                                      <m:rPr>
-                                        <m:sty m:val="p"/>
-                                      </m:rPr>
-                                      <a:rPr lang="en-US" sz="3326" b="0" i="0">
-                                        <a:solidFill>
-                                          <a:srgbClr val="111111"/>
-                                        </a:solidFill>
-                                        <a:latin typeface="Cambria Math" panose="02040503050406030204" pitchFamily="18" charset="0"/>
-                                        <a:ea typeface="Cambria Math"/>
-                                        <a:cs typeface="Cambria Math"/>
-                                      </a:rPr>
-                                      <m:t>(</m:t>
-                                    </m:r>
-                                    <m:r>
-                                      <m:rPr>
-                                        <m:sty m:val="b"/>
-                                      </m:rPr>
-                                      <a:rPr lang="en-US" sz="3326" b="1" i="0">
-                                        <a:solidFill>
-                                          <a:srgbClr val="111111"/>
-                                        </a:solidFill>
-                                        <a:latin typeface="Cambria Math" panose="02040503050406030204" pitchFamily="18" charset="0"/>
-                                        <a:ea typeface="Cambria Math"/>
-                                        <a:cs typeface="Cambria Math"/>
-                                      </a:rPr>
-                                      <m:t>x</m:t>
-                                    </m:r>
-                                    <m:r>
-                                      <m:rPr>
-                                        <m:sty m:val="p"/>
-                                      </m:rPr>
-                                      <a:rPr lang="en-US" sz="3326" b="0" i="0">
-                                        <a:solidFill>
-                                          <a:srgbClr val="111111"/>
-                                        </a:solidFill>
-                                        <a:latin typeface="Cambria Math" panose="02040503050406030204" pitchFamily="18" charset="0"/>
-                                        <a:ea typeface="Cambria Math"/>
-                                        <a:cs typeface="Cambria Math"/>
-                                      </a:rPr>
-                                      <m:t>;</m:t>
-                                    </m:r>
-                                    <m:sSub>
-                                      <m:sSubPr>
-                                        <m:ctrlPr>
-                                          <a:rPr lang="en-US" sz="3326" b="0" i="1">
-                                            <a:solidFill>
-                                              <a:srgbClr val="111111"/>
-                                            </a:solidFill>
-                                            <a:latin typeface="Cambria Math" panose="02040503050406030204" pitchFamily="18" charset="0"/>
-                                            <a:ea typeface="Cambria Math"/>
-                                            <a:cs typeface="Cambria Math"/>
-                                          </a:rPr>
-                                        </m:ctrlPr>
-                                      </m:sSubPr>
-                                      <m:e>
-                                        <m:r>
-                                          <m:rPr>
-                                            <m:sty m:val="bi"/>
-                                          </m:rPr>
-                                          <a:rPr lang="en-US" sz="3326" b="1" i="1">
-                                            <a:solidFill>
-                                              <a:srgbClr val="111111"/>
-                                            </a:solidFill>
-                                            <a:latin typeface="Cambria Math" panose="02040503050406030204" pitchFamily="18" charset="0"/>
-                                            <a:ea typeface="Cambria Math"/>
-                                            <a:cs typeface="Cambria Math"/>
-                                          </a:rPr>
-                                          <m:t>θ</m:t>
-                                        </m:r>
-                                      </m:e>
-                                      <m:sub>
-                                        <m:r>
-                                          <m:rPr>
-                                            <m:sty m:val="p"/>
-                                          </m:rPr>
-                                          <a:rPr lang="en-US" sz="3326" b="0" i="0">
-                                            <a:solidFill>
-                                              <a:srgbClr val="111111"/>
-                                            </a:solidFill>
-                                            <a:latin typeface="Cambria Math" panose="02040503050406030204" pitchFamily="18" charset="0"/>
-                                            <a:ea typeface="Cambria Math"/>
-                                            <a:cs typeface="Cambria Math"/>
-                                          </a:rPr>
-                                          <m:t>u</m:t>
-                                        </m:r>
-                                      </m:sub>
-                                    </m:sSub>
-                                    <m:r>
-                                      <m:rPr>
-                                        <m:sty m:val="p"/>
-                                      </m:rPr>
-                                      <a:rPr lang="en-US" sz="3326" b="0" i="0">
-                                        <a:solidFill>
-                                          <a:srgbClr val="111111"/>
-                                        </a:solidFill>
-                                        <a:latin typeface="Cambria Math" panose="02040503050406030204" pitchFamily="18" charset="0"/>
-                                        <a:ea typeface="Cambria Math"/>
-                                        <a:cs typeface="Cambria Math"/>
-                                      </a:rPr>
-                                      <m:t>)</m:t>
-                                    </m:r>
-                                    <m:sSub>
-                                      <m:sSubPr>
-                                        <m:ctrlPr>
-                                          <a:rPr lang="en-US" sz="3326" b="0" i="1">
-                                            <a:solidFill>
-                                              <a:srgbClr val="111111"/>
-                                            </a:solidFill>
-                                            <a:latin typeface="Cambria Math" panose="02040503050406030204" pitchFamily="18" charset="0"/>
-                                            <a:ea typeface="Cambria Math"/>
-                                            <a:cs typeface="Cambria Math"/>
-                                          </a:rPr>
-                                        </m:ctrlPr>
-                                      </m:sSubPr>
-                                      <m:e>
-                                        <m:r>
-                                          <m:rPr>
-                                            <m:sty m:val="p"/>
-                                          </m:rPr>
-                                          <a:rPr lang="en-US" sz="3326" b="0" i="0">
-                                            <a:solidFill>
-                                              <a:srgbClr val="111111"/>
-                                            </a:solidFill>
-                                            <a:latin typeface="Cambria Math" panose="02040503050406030204" pitchFamily="18" charset="0"/>
-                                            <a:ea typeface="Cambria Math"/>
-                                            <a:cs typeface="Cambria Math"/>
-                                          </a:rPr>
-                                          <m:t>∥</m:t>
-                                        </m:r>
-                                      </m:e>
-                                      <m:sub>
-                                        <m:r>
-                                          <a:rPr lang="en-US" sz="3326" b="0" i="1">
-                                            <a:solidFill>
-                                              <a:srgbClr val="111111"/>
-                                            </a:solidFill>
-                                            <a:latin typeface="Cambria Math" panose="02040503050406030204" pitchFamily="18" charset="0"/>
-                                            <a:ea typeface="Cambria Math"/>
-                                            <a:cs typeface="Cambria Math"/>
-                                          </a:rPr>
-                                          <m:t>2</m:t>
-                                        </m:r>
-                                      </m:sub>
-                                    </m:sSub>
-                                  </m:e>
-                                </m:d>
-                              </m:e>
-                              <m:sup>
-                                <m:r>
-                                  <a:rPr lang="en-US" sz="3326" b="0" i="1">
-                                    <a:solidFill>
-                                      <a:srgbClr val="111111"/>
-                                    </a:solidFill>
-                                    <a:latin typeface="Cambria Math" panose="02040503050406030204" pitchFamily="18" charset="0"/>
-                                    <a:ea typeface="Cambria Math"/>
-                                    <a:cs typeface="Cambria Math"/>
-                                  </a:rPr>
-                                  <m:t>2</m:t>
-                                </m:r>
-                              </m:sup>
-                            </m:sSup>
-                          </m:e>
-                        </m:nary>
-                      </m:oMath>
-                    </m:oMathPara>
+                    <m:oMath xmlns:m="http://schemas.openxmlformats.org/officeDocument/2006/math">
+                      <m:sSub>
+                        <m:sSubPr>
+                          <m:ctrlPr>
+                            <a:rPr lang="en-US" sz="3326" b="0" i="1">
+                              <a:solidFill>
+                                <a:srgbClr val="111111"/>
+                              </a:solidFill>
+                              <a:latin typeface="Cambria Math" panose="02040503050406030204" pitchFamily="18" charset="0"/>
+                              <a:ea typeface="Cambria Math"/>
+                              <a:cs typeface="Cambria Math"/>
+                            </a:rPr>
+                          </m:ctrlPr>
+                        </m:sSubPr>
+                        <m:e>
+                          <m:r>
+                            <m:rPr>
+                              <m:sty m:val="p"/>
+                            </m:rPr>
+                            <a:rPr lang="en-US" sz="3326" b="0" i="0">
+                              <a:solidFill>
+                                <a:srgbClr val="111111"/>
+                              </a:solidFill>
+                              <a:latin typeface="Cambria Math" panose="02040503050406030204" pitchFamily="18" charset="0"/>
+                              <a:ea typeface="Cambria Math"/>
+                              <a:cs typeface="Cambria Math"/>
+                            </a:rPr>
+                            <m:t>Δ</m:t>
+                          </m:r>
+                        </m:e>
+                        <m:sub>
+                          <m:sSub>
+                            <m:sSubPr>
+                              <m:ctrlPr>
+                                <a:rPr lang="en-US" sz="3326" b="0" i="1">
+                                  <a:solidFill>
+                                    <a:srgbClr val="111111"/>
+                                  </a:solidFill>
+                                  <a:latin typeface="Cambria Math" panose="02040503050406030204" pitchFamily="18" charset="0"/>
+                                  <a:ea typeface="Cambria Math"/>
+                                  <a:cs typeface="Cambria Math"/>
+                                </a:rPr>
+                              </m:ctrlPr>
+                            </m:sSubPr>
+                            <m:e>
+                              <m:r>
+                                <m:rPr>
+                                  <m:scr m:val="script"/>
+                                  <m:sty m:val="p"/>
+                                </m:rPr>
+                                <a:rPr lang="en-US" sz="3326" b="0" i="0">
+                                  <a:solidFill>
+                                    <a:srgbClr val="111111"/>
+                                  </a:solidFill>
+                                  <a:latin typeface="Cambria Math" panose="02040503050406030204" pitchFamily="18" charset="0"/>
+                                  <a:ea typeface="Cambria Math"/>
+                                  <a:cs typeface="Cambria Math"/>
+                                </a:rPr>
+                                <m:t>D</m:t>
+                              </m:r>
+                            </m:e>
+                            <m:sub>
+                              <m:r>
+                                <m:rPr>
+                                  <m:sty m:val="p"/>
+                                </m:rPr>
+                                <a:rPr lang="en-US" sz="3326" b="0" i="0">
+                                  <a:solidFill>
+                                    <a:srgbClr val="111111"/>
+                                  </a:solidFill>
+                                  <a:latin typeface="Cambria Math" panose="02040503050406030204" pitchFamily="18" charset="0"/>
+                                  <a:ea typeface="Cambria Math"/>
+                                  <a:cs typeface="Cambria Math"/>
+                                </a:rPr>
+                                <m:t>f</m:t>
+                              </m:r>
+                            </m:sub>
+                          </m:sSub>
+                        </m:sub>
+                      </m:sSub>
+                      <m:r>
+                        <m:rPr>
+                          <m:sty m:val="p"/>
+                        </m:rPr>
+                        <a:rPr lang="en-US" sz="3326" b="0" i="0">
+                          <a:solidFill>
+                            <a:srgbClr val="111111"/>
+                          </a:solidFill>
+                          <a:latin typeface="Cambria Math" panose="02040503050406030204" pitchFamily="18" charset="0"/>
+                          <a:ea typeface="Cambria Math"/>
+                          <a:cs typeface="Cambria Math"/>
+                        </a:rPr>
+                        <m:t>=</m:t>
+                      </m:r>
+                      <m:f>
+                        <m:fPr>
+                          <m:type m:val="bar"/>
+                          <m:ctrlPr>
+                            <a:rPr lang="en-US" sz="3326" b="0" i="1">
+                              <a:solidFill>
+                                <a:srgbClr val="111111"/>
+                              </a:solidFill>
+                              <a:latin typeface="Cambria Math" panose="02040503050406030204" pitchFamily="18" charset="0"/>
+                              <a:ea typeface="Cambria Math"/>
+                              <a:cs typeface="Cambria Math"/>
+                            </a:rPr>
+                          </m:ctrlPr>
+                        </m:fPr>
+                        <m:num>
+                          <m:r>
+                            <a:rPr lang="en-US" sz="3326" b="0" i="1">
+                              <a:solidFill>
+                                <a:srgbClr val="111111"/>
+                              </a:solidFill>
+                              <a:latin typeface="Cambria Math" panose="02040503050406030204" pitchFamily="18" charset="0"/>
+                              <a:ea typeface="Cambria Math"/>
+                              <a:cs typeface="Cambria Math"/>
+                            </a:rPr>
+                            <m:t>1</m:t>
+                          </m:r>
+                        </m:num>
+                        <m:den>
+                          <m:r>
+                            <m:rPr>
+                              <m:sty m:val="p"/>
+                            </m:rPr>
+                            <a:rPr lang="en-US" sz="3326" b="0" i="0">
+                              <a:solidFill>
+                                <a:srgbClr val="111111"/>
+                              </a:solidFill>
+                              <a:latin typeface="Cambria Math" panose="02040503050406030204" pitchFamily="18" charset="0"/>
+                              <a:ea typeface="Cambria Math"/>
+                              <a:cs typeface="Cambria Math"/>
+                            </a:rPr>
+                            <m:t>|</m:t>
+                          </m:r>
+                          <m:r>
+                            <m:rPr>
+                              <m:scr m:val="script"/>
+                              <m:sty m:val="p"/>
+                            </m:rPr>
+                            <a:rPr lang="en-US" sz="3326" b="0" i="0">
+                              <a:solidFill>
+                                <a:srgbClr val="111111"/>
+                              </a:solidFill>
+                              <a:latin typeface="Cambria Math" panose="02040503050406030204" pitchFamily="18" charset="0"/>
+                              <a:ea typeface="Cambria Math"/>
+                              <a:cs typeface="Cambria Math"/>
+                            </a:rPr>
+                            <m:t>S</m:t>
+                          </m:r>
+                          <m:r>
+                            <m:rPr>
+                              <m:sty m:val="p"/>
+                            </m:rPr>
+                            <a:rPr lang="en-US" sz="3326" b="0" i="0">
+                              <a:solidFill>
+                                <a:srgbClr val="111111"/>
+                              </a:solidFill>
+                              <a:latin typeface="Cambria Math" panose="02040503050406030204" pitchFamily="18" charset="0"/>
+                              <a:ea typeface="Cambria Math"/>
+                              <a:cs typeface="Cambria Math"/>
+                            </a:rPr>
+                            <m:t>|</m:t>
+                          </m:r>
+                        </m:den>
+                      </m:f>
+                      <m:nary>
+                        <m:naryPr>
+                          <m:chr m:val="∑"/>
+                          <m:limLoc m:val="subSup"/>
+                          <m:subHide m:val="off"/>
+                          <m:supHide m:val="on"/>
+                          <m:ctrlPr>
+                            <a:rPr lang="en-US" sz="3326" b="0" i="1">
+                              <a:solidFill>
+                                <a:srgbClr val="111111"/>
+                              </a:solidFill>
+                              <a:latin typeface="Cambria Math" panose="02040503050406030204" pitchFamily="18" charset="0"/>
+                              <a:ea typeface="Cambria Math"/>
+                              <a:cs typeface="Cambria Math"/>
+                            </a:rPr>
+                          </m:ctrlPr>
+                        </m:naryPr>
+                        <m:sub>
+                          <m:r>
+                            <a:rPr lang="en-US" sz="3326" b="0" i="1">
+                              <a:solidFill>
+                                <a:srgbClr val="111111"/>
+                              </a:solidFill>
+                              <a:latin typeface="Cambria Math" panose="02040503050406030204" pitchFamily="18" charset="0"/>
+                              <a:ea typeface="Cambria Math"/>
+                              <a:cs typeface="Cambria Math"/>
+                            </a:rPr>
+                            <m:t>i</m:t>
+                          </m:r>
+                          <m:r>
+                            <m:rPr>
+                              <m:sty m:val="p"/>
+                            </m:rPr>
+                            <a:rPr lang="en-US" sz="3326" b="0" i="0">
+                              <a:solidFill>
+                                <a:srgbClr val="111111"/>
+                              </a:solidFill>
+                              <a:latin typeface="Cambria Math" panose="02040503050406030204" pitchFamily="18" charset="0"/>
+                              <a:ea typeface="Cambria Math"/>
+                              <a:cs typeface="Cambria Math"/>
+                            </a:rPr>
+                            <m:t>∈</m:t>
+                          </m:r>
+                          <m:r>
+                            <m:rPr>
+                              <m:scr m:val="script"/>
+                              <m:sty m:val="p"/>
+                            </m:rPr>
+                            <a:rPr lang="en-US" sz="3326" b="0" i="0">
+                              <a:solidFill>
+                                <a:srgbClr val="111111"/>
+                              </a:solidFill>
+                              <a:latin typeface="Cambria Math" panose="02040503050406030204" pitchFamily="18" charset="0"/>
+                              <a:ea typeface="Cambria Math"/>
+                              <a:cs typeface="Cambria Math"/>
+                            </a:rPr>
+                            <m:t>S</m:t>
+                          </m:r>
+                        </m:sub>
+                        <m:sup>
+                          <m:r>
+                            <a:rPr lang="en-US" sz="3326" b="0" i="1">
+                              <a:solidFill>
+                                <a:srgbClr val="111111"/>
+                              </a:solidFill>
+                              <a:latin typeface="Cambria Math" panose="02040503050406030204" pitchFamily="18" charset="0"/>
+                              <a:ea typeface="Cambria Math"/>
+                              <a:cs typeface="Cambria Math"/>
+                            </a:rPr>
+                            <m:t>​</m:t>
+                          </m:r>
+                        </m:sup>
+                        <m:e>
+                          <m:sSup>
+                            <m:sSupPr>
+                              <m:ctrlPr>
+                                <a:rPr lang="en-US" sz="3326" b="0" i="1">
+                                  <a:solidFill>
+                                    <a:srgbClr val="111111"/>
+                                  </a:solidFill>
+                                  <a:latin typeface="Cambria Math" panose="02040503050406030204" pitchFamily="18" charset="0"/>
+                                  <a:ea typeface="Cambria Math"/>
+                                  <a:cs typeface="Cambria Math"/>
+                                </a:rPr>
+                              </m:ctrlPr>
+                            </m:sSupPr>
+                            <m:e>
+                              <m:d>
+                                <m:dPr>
+                                  <m:begChr m:val="("/>
+                                  <m:sepChr m:val=""/>
+                                  <m:endChr m:val=")"/>
+                                  <m:grow/>
+                                  <m:ctrlPr>
+                                    <a:rPr lang="en-US" sz="3326" b="0" i="1">
+                                      <a:solidFill>
+                                        <a:srgbClr val="111111"/>
+                                      </a:solidFill>
+                                      <a:latin typeface="Cambria Math" panose="02040503050406030204" pitchFamily="18" charset="0"/>
+                                      <a:ea typeface="Cambria Math"/>
+                                      <a:cs typeface="Cambria Math"/>
+                                    </a:rPr>
+                                  </m:ctrlPr>
+                                </m:dPr>
+                                <m:e>
+                                  <m:r>
+                                    <m:rPr>
+                                      <m:sty m:val="p"/>
+                                    </m:rPr>
+                                    <a:rPr lang="en-US" sz="3326" b="0" i="0">
+                                      <a:solidFill>
+                                        <a:srgbClr val="111111"/>
+                                      </a:solidFill>
+                                      <a:latin typeface="Cambria Math" panose="02040503050406030204" pitchFamily="18" charset="0"/>
+                                      <a:ea typeface="Cambria Math"/>
+                                      <a:cs typeface="Cambria Math"/>
+                                    </a:rPr>
+                                    <m:t>∥</m:t>
+                                  </m:r>
+                                  <m:sSub>
+                                    <m:sSubPr>
+                                      <m:ctrlPr>
+                                        <a:rPr lang="en-US" sz="3326" b="0" i="1">
+                                          <a:solidFill>
+                                            <a:srgbClr val="111111"/>
+                                          </a:solidFill>
+                                          <a:latin typeface="Cambria Math" panose="02040503050406030204" pitchFamily="18" charset="0"/>
+                                          <a:ea typeface="Cambria Math"/>
+                                          <a:cs typeface="Cambria Math"/>
+                                        </a:rPr>
+                                      </m:ctrlPr>
+                                    </m:sSubPr>
+                                    <m:e>
+                                      <m:r>
+                                        <m:rPr>
+                                          <m:sty m:val="b"/>
+                                        </m:rPr>
+                                        <a:rPr lang="en-US" sz="3326" b="1" i="0">
+                                          <a:solidFill>
+                                            <a:srgbClr val="111111"/>
+                                          </a:solidFill>
+                                          <a:latin typeface="Cambria Math" panose="02040503050406030204" pitchFamily="18" charset="0"/>
+                                          <a:ea typeface="Cambria Math"/>
+                                          <a:cs typeface="Cambria Math"/>
+                                        </a:rPr>
+                                        <m:t>v</m:t>
+                                      </m:r>
+                                    </m:e>
+                                    <m:sub>
+                                      <m:r>
+                                        <a:rPr lang="en-US" sz="3326" b="0" i="1">
+                                          <a:solidFill>
+                                            <a:srgbClr val="111111"/>
+                                          </a:solidFill>
+                                          <a:latin typeface="Cambria Math" panose="02040503050406030204" pitchFamily="18" charset="0"/>
+                                          <a:ea typeface="Cambria Math"/>
+                                          <a:cs typeface="Cambria Math"/>
+                                        </a:rPr>
+                                        <m:t>i</m:t>
+                                      </m:r>
+                                    </m:sub>
+                                  </m:sSub>
+                                  <m:r>
+                                    <m:rPr>
+                                      <m:sty m:val="p"/>
+                                    </m:rPr>
+                                    <a:rPr lang="en-US" sz="3326" b="0" i="0">
+                                      <a:solidFill>
+                                        <a:srgbClr val="111111"/>
+                                      </a:solidFill>
+                                      <a:latin typeface="Cambria Math" panose="02040503050406030204" pitchFamily="18" charset="0"/>
+                                      <a:ea typeface="Cambria Math"/>
+                                      <a:cs typeface="Cambria Math"/>
+                                    </a:rPr>
+                                    <m:t>(</m:t>
+                                  </m:r>
+                                  <m:r>
+                                    <m:rPr>
+                                      <m:sty m:val="b"/>
+                                    </m:rPr>
+                                    <a:rPr lang="en-US" sz="3326" b="1" i="0">
+                                      <a:solidFill>
+                                        <a:srgbClr val="111111"/>
+                                      </a:solidFill>
+                                      <a:latin typeface="Cambria Math" panose="02040503050406030204" pitchFamily="18" charset="0"/>
+                                      <a:ea typeface="Cambria Math"/>
+                                      <a:cs typeface="Cambria Math"/>
+                                    </a:rPr>
+                                    <m:t>x</m:t>
+                                  </m:r>
+                                  <m:r>
+                                    <m:rPr>
+                                      <m:sty m:val="p"/>
+                                    </m:rPr>
+                                    <a:rPr lang="en-US" sz="3326" b="0" i="0">
+                                      <a:solidFill>
+                                        <a:srgbClr val="111111"/>
+                                      </a:solidFill>
+                                      <a:latin typeface="Cambria Math" panose="02040503050406030204" pitchFamily="18" charset="0"/>
+                                      <a:ea typeface="Cambria Math"/>
+                                      <a:cs typeface="Cambria Math"/>
+                                    </a:rPr>
+                                    <m:t>;</m:t>
+                                  </m:r>
+                                  <m:r>
+                                    <m:rPr>
+                                      <m:sty m:val="bi"/>
+                                    </m:rPr>
+                                    <a:rPr lang="en-US" sz="3326" b="1" i="1">
+                                      <a:solidFill>
+                                        <a:srgbClr val="111111"/>
+                                      </a:solidFill>
+                                      <a:latin typeface="Cambria Math" panose="02040503050406030204" pitchFamily="18" charset="0"/>
+                                      <a:ea typeface="Cambria Math"/>
+                                      <a:cs typeface="Cambria Math"/>
+                                    </a:rPr>
+                                    <m:t>θ</m:t>
+                                  </m:r>
+                                  <m:r>
+                                    <m:rPr>
+                                      <m:sty m:val="p"/>
+                                    </m:rPr>
+                                    <a:rPr lang="en-US" sz="3326" b="0" i="0">
+                                      <a:solidFill>
+                                        <a:srgbClr val="111111"/>
+                                      </a:solidFill>
+                                      <a:latin typeface="Cambria Math" panose="02040503050406030204" pitchFamily="18" charset="0"/>
+                                      <a:ea typeface="Cambria Math"/>
+                                      <a:cs typeface="Cambria Math"/>
+                                    </a:rPr>
+                                    <m:t>)</m:t>
+                                  </m:r>
+                                  <m:sSub>
+                                    <m:sSubPr>
+                                      <m:ctrlPr>
+                                        <a:rPr lang="en-US" sz="3326" b="0" i="1">
+                                          <a:solidFill>
+                                            <a:srgbClr val="111111"/>
+                                          </a:solidFill>
+                                          <a:latin typeface="Cambria Math" panose="02040503050406030204" pitchFamily="18" charset="0"/>
+                                          <a:ea typeface="Cambria Math"/>
+                                          <a:cs typeface="Cambria Math"/>
+                                        </a:rPr>
+                                      </m:ctrlPr>
+                                    </m:sSubPr>
+                                    <m:e>
+                                      <m:r>
+                                        <m:rPr>
+                                          <m:sty m:val="p"/>
+                                        </m:rPr>
+                                        <a:rPr lang="en-US" sz="3326" b="0" i="0">
+                                          <a:solidFill>
+                                            <a:srgbClr val="111111"/>
+                                          </a:solidFill>
+                                          <a:latin typeface="Cambria Math" panose="02040503050406030204" pitchFamily="18" charset="0"/>
+                                          <a:ea typeface="Cambria Math"/>
+                                          <a:cs typeface="Cambria Math"/>
+                                        </a:rPr>
+                                        <m:t>∥</m:t>
+                                      </m:r>
+                                    </m:e>
+                                    <m:sub>
+                                      <m:r>
+                                        <a:rPr lang="en-US" sz="3326" b="0" i="1">
+                                          <a:solidFill>
+                                            <a:srgbClr val="111111"/>
+                                          </a:solidFill>
+                                          <a:latin typeface="Cambria Math" panose="02040503050406030204" pitchFamily="18" charset="0"/>
+                                          <a:ea typeface="Cambria Math"/>
+                                          <a:cs typeface="Cambria Math"/>
+                                        </a:rPr>
+                                        <m:t>2</m:t>
+                                      </m:r>
+                                    </m:sub>
+                                  </m:sSub>
+                                  <m:r>
+                                    <m:rPr>
+                                      <m:sty m:val="p"/>
+                                    </m:rPr>
+                                    <a:rPr lang="en-US" sz="3326" b="0" i="0">
+                                      <a:solidFill>
+                                        <a:srgbClr val="111111"/>
+                                      </a:solidFill>
+                                      <a:latin typeface="Cambria Math" panose="02040503050406030204" pitchFamily="18" charset="0"/>
+                                      <a:ea typeface="Cambria Math"/>
+                                      <a:cs typeface="Cambria Math"/>
+                                    </a:rPr>
+                                    <m:t>−</m:t>
+                                  </m:r>
+                                  <m:r>
+                                    <m:rPr>
+                                      <m:sty m:val="p"/>
+                                    </m:rPr>
+                                    <a:rPr lang="en-US" sz="3326" b="0" i="0">
+                                      <a:solidFill>
+                                        <a:srgbClr val="111111"/>
+                                      </a:solidFill>
+                                      <a:latin typeface="Cambria Math" panose="02040503050406030204" pitchFamily="18" charset="0"/>
+                                      <a:ea typeface="Cambria Math"/>
+                                      <a:cs typeface="Cambria Math"/>
+                                    </a:rPr>
+                                    <m:t>∥</m:t>
+                                  </m:r>
+                                  <m:sSub>
+                                    <m:sSubPr>
+                                      <m:ctrlPr>
+                                        <a:rPr lang="en-US" sz="3326" b="0" i="1">
+                                          <a:solidFill>
+                                            <a:srgbClr val="111111"/>
+                                          </a:solidFill>
+                                          <a:latin typeface="Cambria Math" panose="02040503050406030204" pitchFamily="18" charset="0"/>
+                                          <a:ea typeface="Cambria Math"/>
+                                          <a:cs typeface="Cambria Math"/>
+                                        </a:rPr>
+                                      </m:ctrlPr>
+                                    </m:sSubPr>
+                                    <m:e>
+                                      <m:r>
+                                        <m:rPr>
+                                          <m:sty m:val="b"/>
+                                        </m:rPr>
+                                        <a:rPr lang="en-US" sz="3326" b="1" i="0">
+                                          <a:solidFill>
+                                            <a:srgbClr val="111111"/>
+                                          </a:solidFill>
+                                          <a:latin typeface="Cambria Math" panose="02040503050406030204" pitchFamily="18" charset="0"/>
+                                          <a:ea typeface="Cambria Math"/>
+                                          <a:cs typeface="Cambria Math"/>
+                                        </a:rPr>
+                                        <m:t>v</m:t>
+                                      </m:r>
+                                    </m:e>
+                                    <m:sub>
+                                      <m:r>
+                                        <a:rPr lang="en-US" sz="3326" b="0" i="1">
+                                          <a:solidFill>
+                                            <a:srgbClr val="111111"/>
+                                          </a:solidFill>
+                                          <a:latin typeface="Cambria Math" panose="02040503050406030204" pitchFamily="18" charset="0"/>
+                                          <a:ea typeface="Cambria Math"/>
+                                          <a:cs typeface="Cambria Math"/>
+                                        </a:rPr>
+                                        <m:t>i</m:t>
+                                      </m:r>
+                                    </m:sub>
+                                  </m:sSub>
+                                  <m:r>
+                                    <m:rPr>
+                                      <m:sty m:val="p"/>
+                                    </m:rPr>
+                                    <a:rPr lang="en-US" sz="3326" b="0" i="0">
+                                      <a:solidFill>
+                                        <a:srgbClr val="111111"/>
+                                      </a:solidFill>
+                                      <a:latin typeface="Cambria Math" panose="02040503050406030204" pitchFamily="18" charset="0"/>
+                                      <a:ea typeface="Cambria Math"/>
+                                      <a:cs typeface="Cambria Math"/>
+                                    </a:rPr>
+                                    <m:t>(</m:t>
+                                  </m:r>
+                                  <m:r>
+                                    <m:rPr>
+                                      <m:sty m:val="b"/>
+                                    </m:rPr>
+                                    <a:rPr lang="en-US" sz="3326" b="1" i="0">
+                                      <a:solidFill>
+                                        <a:srgbClr val="111111"/>
+                                      </a:solidFill>
+                                      <a:latin typeface="Cambria Math" panose="02040503050406030204" pitchFamily="18" charset="0"/>
+                                      <a:ea typeface="Cambria Math"/>
+                                      <a:cs typeface="Cambria Math"/>
+                                    </a:rPr>
+                                    <m:t>x</m:t>
+                                  </m:r>
+                                  <m:r>
+                                    <m:rPr>
+                                      <m:sty m:val="p"/>
+                                    </m:rPr>
+                                    <a:rPr lang="en-US" sz="3326" b="0" i="0">
+                                      <a:solidFill>
+                                        <a:srgbClr val="111111"/>
+                                      </a:solidFill>
+                                      <a:latin typeface="Cambria Math" panose="02040503050406030204" pitchFamily="18" charset="0"/>
+                                      <a:ea typeface="Cambria Math"/>
+                                      <a:cs typeface="Cambria Math"/>
+                                    </a:rPr>
+                                    <m:t>;</m:t>
+                                  </m:r>
+                                  <m:sSub>
+                                    <m:sSubPr>
+                                      <m:ctrlPr>
+                                        <a:rPr lang="en-US" sz="3326" b="0" i="1">
+                                          <a:solidFill>
+                                            <a:srgbClr val="111111"/>
+                                          </a:solidFill>
+                                          <a:latin typeface="Cambria Math" panose="02040503050406030204" pitchFamily="18" charset="0"/>
+                                          <a:ea typeface="Cambria Math"/>
+                                          <a:cs typeface="Cambria Math"/>
+                                        </a:rPr>
+                                      </m:ctrlPr>
+                                    </m:sSubPr>
+                                    <m:e>
+                                      <m:r>
+                                        <m:rPr>
+                                          <m:sty m:val="bi"/>
+                                        </m:rPr>
+                                        <a:rPr lang="en-US" sz="3326" b="1" i="1">
+                                          <a:solidFill>
+                                            <a:srgbClr val="111111"/>
+                                          </a:solidFill>
+                                          <a:latin typeface="Cambria Math" panose="02040503050406030204" pitchFamily="18" charset="0"/>
+                                          <a:ea typeface="Cambria Math"/>
+                                          <a:cs typeface="Cambria Math"/>
+                                        </a:rPr>
+                                        <m:t>θ</m:t>
+                                      </m:r>
+                                    </m:e>
+                                    <m:sub>
+                                      <m:r>
+                                        <m:rPr>
+                                          <m:sty m:val="p"/>
+                                        </m:rPr>
+                                        <a:rPr lang="en-US" sz="3326" b="0" i="0">
+                                          <a:solidFill>
+                                            <a:srgbClr val="111111"/>
+                                          </a:solidFill>
+                                          <a:latin typeface="Cambria Math" panose="02040503050406030204" pitchFamily="18" charset="0"/>
+                                          <a:ea typeface="Cambria Math"/>
+                                          <a:cs typeface="Cambria Math"/>
+                                        </a:rPr>
+                                        <m:t>u</m:t>
+                                      </m:r>
+                                    </m:sub>
+                                  </m:sSub>
+                                  <m:r>
+                                    <m:rPr>
+                                      <m:sty m:val="p"/>
+                                    </m:rPr>
+                                    <a:rPr lang="en-US" sz="3326" b="0" i="0">
+                                      <a:solidFill>
+                                        <a:srgbClr val="111111"/>
+                                      </a:solidFill>
+                                      <a:latin typeface="Cambria Math" panose="02040503050406030204" pitchFamily="18" charset="0"/>
+                                      <a:ea typeface="Cambria Math"/>
+                                      <a:cs typeface="Cambria Math"/>
+                                    </a:rPr>
+                                    <m:t>)</m:t>
+                                  </m:r>
+                                  <m:sSub>
+                                    <m:sSubPr>
+                                      <m:ctrlPr>
+                                        <a:rPr lang="en-US" sz="3326" b="0" i="1">
+                                          <a:solidFill>
+                                            <a:srgbClr val="111111"/>
+                                          </a:solidFill>
+                                          <a:latin typeface="Cambria Math" panose="02040503050406030204" pitchFamily="18" charset="0"/>
+                                          <a:ea typeface="Cambria Math"/>
+                                          <a:cs typeface="Cambria Math"/>
+                                        </a:rPr>
+                                      </m:ctrlPr>
+                                    </m:sSubPr>
+                                    <m:e>
+                                      <m:r>
+                                        <m:rPr>
+                                          <m:sty m:val="p"/>
+                                        </m:rPr>
+                                        <a:rPr lang="en-US" sz="3326" b="0" i="0">
+                                          <a:solidFill>
+                                            <a:srgbClr val="111111"/>
+                                          </a:solidFill>
+                                          <a:latin typeface="Cambria Math" panose="02040503050406030204" pitchFamily="18" charset="0"/>
+                                          <a:ea typeface="Cambria Math"/>
+                                          <a:cs typeface="Cambria Math"/>
+                                        </a:rPr>
+                                        <m:t>∥</m:t>
+                                      </m:r>
+                                    </m:e>
+                                    <m:sub>
+                                      <m:r>
+                                        <a:rPr lang="en-US" sz="3326" b="0" i="1">
+                                          <a:solidFill>
+                                            <a:srgbClr val="111111"/>
+                                          </a:solidFill>
+                                          <a:latin typeface="Cambria Math" panose="02040503050406030204" pitchFamily="18" charset="0"/>
+                                          <a:ea typeface="Cambria Math"/>
+                                          <a:cs typeface="Cambria Math"/>
+                                        </a:rPr>
+                                        <m:t>2</m:t>
+                                      </m:r>
+                                    </m:sub>
+                                  </m:sSub>
+                                </m:e>
+                              </m:d>
+                            </m:e>
+                            <m:sup>
+                              <m:r>
+                                <a:rPr lang="en-US" sz="3326" b="0" i="1">
+                                  <a:solidFill>
+                                    <a:srgbClr val="111111"/>
+                                  </a:solidFill>
+                                  <a:latin typeface="Cambria Math" panose="02040503050406030204" pitchFamily="18" charset="0"/>
+                                  <a:ea typeface="Cambria Math"/>
+                                  <a:cs typeface="Cambria Math"/>
+                                </a:rPr>
+                                <m:t>2</m:t>
+                              </m:r>
+                            </m:sup>
+                          </m:sSup>
+                        </m:e>
+                      </m:nary>
+                    </m:oMath>
                   </a14:m>
                   <a:endParaRPr lang="en-US" sz="3326" b="0" i="0" kern="100" dirty="0">
                     <a:solidFill>
@@ -8963,689 +8950,684 @@
                     <a:buNone/>
                   </a:pPr>
                   <a14:m>
-                    <m:oMathPara xmlns:m="http://schemas.openxmlformats.org/officeDocument/2006/math">
-                      <m:oMathParaPr>
-                        <m:jc m:val="centerGroup"/>
-                      </m:oMathParaPr>
-                      <m:oMath>
-                        <m:sSub>
-                          <m:sSubPr>
-                            <m:ctrlPr>
-                              <a:rPr lang="en-US" sz="3326" b="0" i="1">
-                                <a:solidFill>
-                                  <a:srgbClr val="111111"/>
-                                </a:solidFill>
-                                <a:latin typeface="Cambria Math" panose="02040503050406030204" pitchFamily="18" charset="0"/>
-                                <a:ea typeface="Cambria Math"/>
-                                <a:cs typeface="Cambria Math"/>
-                              </a:rPr>
-                            </m:ctrlPr>
-                          </m:sSubPr>
-                          <m:e>
-                            <m:r>
-                              <m:rPr>
-                                <m:sty m:val="p"/>
-                              </m:rPr>
-                              <a:rPr lang="en-US" sz="3326" b="0" i="0">
-                                <a:solidFill>
-                                  <a:srgbClr val="111111"/>
-                                </a:solidFill>
-                                <a:latin typeface="Cambria Math" panose="02040503050406030204" pitchFamily="18" charset="0"/>
-                                <a:ea typeface="Cambria Math"/>
-                                <a:cs typeface="Cambria Math"/>
-                              </a:rPr>
-                              <m:t>Δ</m:t>
-                            </m:r>
-                          </m:e>
-                          <m:sub>
-                            <m:sSub>
-                              <m:sSubPr>
-                                <m:ctrlPr>
-                                  <a:rPr lang="en-US" sz="3326" b="0" i="1">
-                                    <a:solidFill>
-                                      <a:srgbClr val="111111"/>
-                                    </a:solidFill>
-                                    <a:latin typeface="Cambria Math" panose="02040503050406030204" pitchFamily="18" charset="0"/>
-                                    <a:ea typeface="Cambria Math"/>
-                                    <a:cs typeface="Cambria Math"/>
-                                  </a:rPr>
-                                </m:ctrlPr>
-                              </m:sSubPr>
-                              <m:e>
-                                <m:r>
-                                  <m:rPr>
-                                    <m:scr m:val="script"/>
-                                    <m:sty m:val="p"/>
-                                  </m:rPr>
-                                  <a:rPr lang="en-US" sz="3326" b="0" i="0">
-                                    <a:solidFill>
-                                      <a:srgbClr val="111111"/>
-                                    </a:solidFill>
-                                    <a:latin typeface="Cambria Math" panose="02040503050406030204" pitchFamily="18" charset="0"/>
-                                    <a:ea typeface="Cambria Math"/>
-                                    <a:cs typeface="Cambria Math"/>
-                                  </a:rPr>
-                                  <m:t>D</m:t>
-                                </m:r>
-                              </m:e>
-                              <m:sub>
-                                <m:r>
-                                  <m:rPr>
-                                    <m:sty m:val="p"/>
-                                  </m:rPr>
-                                  <a:rPr lang="en-US" sz="3326" b="0" i="0">
-                                    <a:solidFill>
-                                      <a:srgbClr val="111111"/>
-                                    </a:solidFill>
-                                    <a:latin typeface="Cambria Math" panose="02040503050406030204" pitchFamily="18" charset="0"/>
-                                    <a:ea typeface="Cambria Math"/>
-                                    <a:cs typeface="Cambria Math"/>
-                                  </a:rPr>
-                                  <m:t>p</m:t>
-                                </m:r>
-                              </m:sub>
-                            </m:sSub>
-                          </m:sub>
-                        </m:sSub>
-                        <m:r>
-                          <m:rPr>
-                            <m:sty m:val="p"/>
-                          </m:rPr>
-                          <a:rPr lang="en-US" sz="3326" b="0" i="0">
-                            <a:solidFill>
-                              <a:srgbClr val="111111"/>
-                            </a:solidFill>
-                            <a:latin typeface="Cambria Math" panose="02040503050406030204" pitchFamily="18" charset="0"/>
-                            <a:ea typeface="Cambria Math"/>
-                            <a:cs typeface="Cambria Math"/>
-                          </a:rPr>
-                          <m:t>=</m:t>
-                        </m:r>
-                        <m:f>
-                          <m:fPr>
-                            <m:type m:val="bar"/>
-                            <m:ctrlPr>
-                              <a:rPr lang="en-US" sz="3326" b="0" i="1">
-                                <a:solidFill>
-                                  <a:srgbClr val="111111"/>
-                                </a:solidFill>
-                                <a:latin typeface="Cambria Math" panose="02040503050406030204" pitchFamily="18" charset="0"/>
-                                <a:ea typeface="Cambria Math"/>
-                                <a:cs typeface="Cambria Math"/>
-                              </a:rPr>
-                            </m:ctrlPr>
-                          </m:fPr>
-                          <m:num>
-                            <m:r>
-                              <a:rPr lang="en-US" sz="3326" b="0" i="1">
-                                <a:solidFill>
-                                  <a:srgbClr val="111111"/>
-                                </a:solidFill>
-                                <a:latin typeface="Cambria Math" panose="02040503050406030204" pitchFamily="18" charset="0"/>
-                                <a:ea typeface="Cambria Math"/>
-                                <a:cs typeface="Cambria Math"/>
-                              </a:rPr>
-                              <m:t>1</m:t>
-                            </m:r>
-                          </m:num>
-                          <m:den>
-                            <m:r>
-                              <m:rPr>
-                                <m:sty m:val="p"/>
-                              </m:rPr>
-                              <a:rPr lang="en-US" sz="3326" b="0" i="0">
-                                <a:solidFill>
-                                  <a:srgbClr val="111111"/>
-                                </a:solidFill>
-                                <a:latin typeface="Cambria Math" panose="02040503050406030204" pitchFamily="18" charset="0"/>
-                                <a:ea typeface="Cambria Math"/>
-                                <a:cs typeface="Cambria Math"/>
-                              </a:rPr>
-                              <m:t>|</m:t>
-                            </m:r>
-                            <m:r>
-                              <m:rPr>
-                                <m:scr m:val="script"/>
-                                <m:sty m:val="p"/>
-                              </m:rPr>
-                              <a:rPr lang="en-US" sz="3326" b="0" i="0">
-                                <a:solidFill>
-                                  <a:srgbClr val="111111"/>
-                                </a:solidFill>
-                                <a:latin typeface="Cambria Math" panose="02040503050406030204" pitchFamily="18" charset="0"/>
-                                <a:ea typeface="Cambria Math"/>
-                                <a:cs typeface="Cambria Math"/>
-                              </a:rPr>
-                              <m:t>S</m:t>
-                            </m:r>
-                            <m:r>
-                              <m:rPr>
-                                <m:sty m:val="p"/>
-                              </m:rPr>
-                              <a:rPr lang="en-US" sz="3326" b="0" i="0">
-                                <a:solidFill>
-                                  <a:srgbClr val="111111"/>
-                                </a:solidFill>
-                                <a:latin typeface="Cambria Math" panose="02040503050406030204" pitchFamily="18" charset="0"/>
-                                <a:ea typeface="Cambria Math"/>
-                                <a:cs typeface="Cambria Math"/>
-                              </a:rPr>
-                              <m:t>|</m:t>
-                            </m:r>
-                          </m:den>
-                        </m:f>
-                        <m:nary>
-                          <m:naryPr>
-                            <m:chr m:val="∑"/>
-                            <m:limLoc m:val="subSup"/>
-                            <m:subHide m:val="off"/>
-                            <m:supHide m:val="on"/>
-                            <m:ctrlPr>
-                              <a:rPr lang="en-US" sz="3326" b="0" i="1">
-                                <a:solidFill>
-                                  <a:srgbClr val="111111"/>
-                                </a:solidFill>
-                                <a:latin typeface="Cambria Math" panose="02040503050406030204" pitchFamily="18" charset="0"/>
-                                <a:ea typeface="Cambria Math"/>
-                                <a:cs typeface="Cambria Math"/>
-                              </a:rPr>
-                            </m:ctrlPr>
-                          </m:naryPr>
-                          <m:sub>
-                            <m:r>
-                              <a:rPr lang="en-US" sz="3326" b="0" i="1">
-                                <a:solidFill>
-                                  <a:srgbClr val="111111"/>
-                                </a:solidFill>
-                                <a:latin typeface="Cambria Math" panose="02040503050406030204" pitchFamily="18" charset="0"/>
-                                <a:ea typeface="Cambria Math"/>
-                                <a:cs typeface="Cambria Math"/>
-                              </a:rPr>
-                              <m:t>i</m:t>
-                            </m:r>
-                            <m:r>
-                              <m:rPr>
-                                <m:sty m:val="p"/>
-                              </m:rPr>
-                              <a:rPr lang="en-US" sz="3326" b="0" i="0">
-                                <a:solidFill>
-                                  <a:srgbClr val="111111"/>
-                                </a:solidFill>
-                                <a:latin typeface="Cambria Math" panose="02040503050406030204" pitchFamily="18" charset="0"/>
-                                <a:ea typeface="Cambria Math"/>
-                                <a:cs typeface="Cambria Math"/>
-                              </a:rPr>
-                              <m:t>∈</m:t>
-                            </m:r>
-                            <m:r>
-                              <m:rPr>
-                                <m:scr m:val="script"/>
-                                <m:sty m:val="p"/>
-                              </m:rPr>
-                              <a:rPr lang="en-US" sz="3326" b="0" i="0">
-                                <a:solidFill>
-                                  <a:srgbClr val="111111"/>
-                                </a:solidFill>
-                                <a:latin typeface="Cambria Math" panose="02040503050406030204" pitchFamily="18" charset="0"/>
-                                <a:ea typeface="Cambria Math"/>
-                                <a:cs typeface="Cambria Math"/>
-                              </a:rPr>
-                              <m:t>S</m:t>
-                            </m:r>
-                          </m:sub>
-                          <m:sup>
-                            <m:r>
-                              <a:rPr lang="en-US" sz="3326" b="0" i="1">
-                                <a:solidFill>
-                                  <a:srgbClr val="111111"/>
-                                </a:solidFill>
-                                <a:latin typeface="Cambria Math" panose="02040503050406030204" pitchFamily="18" charset="0"/>
-                                <a:ea typeface="Cambria Math"/>
-                                <a:cs typeface="Cambria Math"/>
-                              </a:rPr>
-                              <m:t>​</m:t>
-                            </m:r>
-                          </m:sup>
-                          <m:e>
-                            <m:sSup>
-                              <m:sSupPr>
-                                <m:ctrlPr>
-                                  <a:rPr lang="en-US" sz="3326" b="0" i="1">
-                                    <a:solidFill>
-                                      <a:srgbClr val="111111"/>
-                                    </a:solidFill>
-                                    <a:latin typeface="Cambria Math" panose="02040503050406030204" pitchFamily="18" charset="0"/>
-                                    <a:ea typeface="Cambria Math"/>
-                                    <a:cs typeface="Cambria Math"/>
-                                  </a:rPr>
-                                </m:ctrlPr>
-                              </m:sSupPr>
-                              <m:e>
-                                <m:d>
-                                  <m:dPr>
-                                    <m:begChr m:val="("/>
-                                    <m:sepChr m:val=""/>
-                                    <m:endChr m:val=")"/>
-                                    <m:grow/>
-                                    <m:ctrlPr>
-                                      <a:rPr lang="en-US" sz="3326" b="0" i="1">
-                                        <a:solidFill>
-                                          <a:srgbClr val="111111"/>
-                                        </a:solidFill>
-                                        <a:latin typeface="Cambria Math" panose="02040503050406030204" pitchFamily="18" charset="0"/>
-                                        <a:ea typeface="Cambria Math"/>
-                                        <a:cs typeface="Cambria Math"/>
-                                      </a:rPr>
-                                    </m:ctrlPr>
-                                  </m:dPr>
-                                  <m:e>
-                                    <m:r>
-                                      <m:rPr>
-                                        <m:sty m:val="p"/>
-                                      </m:rPr>
-                                      <a:rPr lang="en-US" sz="3326" b="0" i="0">
-                                        <a:solidFill>
-                                          <a:srgbClr val="111111"/>
-                                        </a:solidFill>
-                                        <a:latin typeface="Cambria Math" panose="02040503050406030204" pitchFamily="18" charset="0"/>
-                                        <a:ea typeface="Cambria Math"/>
-                                        <a:cs typeface="Cambria Math"/>
-                                      </a:rPr>
-                                      <m:t>∥</m:t>
-                                    </m:r>
-                                    <m:sSub>
-                                      <m:sSubPr>
-                                        <m:ctrlPr>
-                                          <a:rPr lang="en-US" sz="3326" b="0" i="1">
-                                            <a:solidFill>
-                                              <a:srgbClr val="111111"/>
-                                            </a:solidFill>
-                                            <a:latin typeface="Cambria Math" panose="02040503050406030204" pitchFamily="18" charset="0"/>
-                                            <a:ea typeface="Cambria Math"/>
-                                            <a:cs typeface="Cambria Math"/>
-                                          </a:rPr>
-                                        </m:ctrlPr>
-                                      </m:sSubPr>
-                                      <m:e>
-                                        <m:r>
-                                          <m:rPr>
-                                            <m:sty m:val="b"/>
-                                          </m:rPr>
-                                          <a:rPr lang="en-US" sz="3326" b="1" i="0">
-                                            <a:solidFill>
-                                              <a:srgbClr val="111111"/>
-                                            </a:solidFill>
-                                            <a:latin typeface="Cambria Math" panose="02040503050406030204" pitchFamily="18" charset="0"/>
-                                            <a:ea typeface="Cambria Math"/>
-                                            <a:cs typeface="Cambria Math"/>
-                                          </a:rPr>
-                                          <m:t>v</m:t>
-                                        </m:r>
-                                      </m:e>
-                                      <m:sub>
-                                        <m:r>
-                                          <a:rPr lang="en-US" sz="3326" b="0" i="1">
-                                            <a:solidFill>
-                                              <a:srgbClr val="111111"/>
-                                            </a:solidFill>
-                                            <a:latin typeface="Cambria Math" panose="02040503050406030204" pitchFamily="18" charset="0"/>
-                                            <a:ea typeface="Cambria Math"/>
-                                            <a:cs typeface="Cambria Math"/>
-                                          </a:rPr>
-                                          <m:t>i</m:t>
-                                        </m:r>
-                                      </m:sub>
-                                    </m:sSub>
-                                    <m:r>
-                                      <m:rPr>
-                                        <m:sty m:val="p"/>
-                                      </m:rPr>
-                                      <a:rPr lang="en-US" sz="3326" b="0" i="0">
-                                        <a:solidFill>
-                                          <a:srgbClr val="111111"/>
-                                        </a:solidFill>
-                                        <a:latin typeface="Cambria Math" panose="02040503050406030204" pitchFamily="18" charset="0"/>
-                                        <a:ea typeface="Cambria Math"/>
-                                        <a:cs typeface="Cambria Math"/>
-                                      </a:rPr>
-                                      <m:t>(</m:t>
-                                    </m:r>
-                                    <m:r>
-                                      <m:rPr>
-                                        <m:sty m:val="b"/>
-                                      </m:rPr>
-                                      <a:rPr lang="en-US" sz="3326" b="1" i="0">
-                                        <a:solidFill>
-                                          <a:srgbClr val="111111"/>
-                                        </a:solidFill>
-                                        <a:latin typeface="Cambria Math" panose="02040503050406030204" pitchFamily="18" charset="0"/>
-                                        <a:ea typeface="Cambria Math"/>
-                                        <a:cs typeface="Cambria Math"/>
-                                      </a:rPr>
-                                      <m:t>x</m:t>
-                                    </m:r>
-                                    <m:r>
-                                      <m:rPr>
-                                        <m:sty m:val="p"/>
-                                      </m:rPr>
-                                      <a:rPr lang="en-US" sz="3326" b="0" i="0">
-                                        <a:solidFill>
-                                          <a:srgbClr val="111111"/>
-                                        </a:solidFill>
-                                        <a:latin typeface="Cambria Math" panose="02040503050406030204" pitchFamily="18" charset="0"/>
-                                        <a:ea typeface="Cambria Math"/>
-                                        <a:cs typeface="Cambria Math"/>
-                                      </a:rPr>
-                                      <m:t>;</m:t>
-                                    </m:r>
-                                    <m:r>
-                                      <m:rPr>
-                                        <m:sty m:val="bi"/>
-                                      </m:rPr>
-                                      <a:rPr lang="en-US" sz="3326" b="1" i="1">
-                                        <a:solidFill>
-                                          <a:srgbClr val="111111"/>
-                                        </a:solidFill>
-                                        <a:latin typeface="Cambria Math" panose="02040503050406030204" pitchFamily="18" charset="0"/>
-                                        <a:ea typeface="Cambria Math"/>
-                                        <a:cs typeface="Cambria Math"/>
-                                      </a:rPr>
-                                      <m:t>θ</m:t>
-                                    </m:r>
-                                    <m:r>
-                                      <m:rPr>
-                                        <m:sty m:val="p"/>
-                                      </m:rPr>
-                                      <a:rPr lang="en-US" sz="3326" b="0" i="0">
-                                        <a:solidFill>
-                                          <a:srgbClr val="111111"/>
-                                        </a:solidFill>
-                                        <a:latin typeface="Cambria Math" panose="02040503050406030204" pitchFamily="18" charset="0"/>
-                                        <a:ea typeface="Cambria Math"/>
-                                        <a:cs typeface="Cambria Math"/>
-                                      </a:rPr>
-                                      <m:t>)</m:t>
-                                    </m:r>
-                                    <m:sSub>
-                                      <m:sSubPr>
-                                        <m:ctrlPr>
-                                          <a:rPr lang="en-US" sz="3326" b="0" i="1">
-                                            <a:solidFill>
-                                              <a:srgbClr val="111111"/>
-                                            </a:solidFill>
-                                            <a:latin typeface="Cambria Math" panose="02040503050406030204" pitchFamily="18" charset="0"/>
-                                            <a:ea typeface="Cambria Math"/>
-                                            <a:cs typeface="Cambria Math"/>
-                                          </a:rPr>
-                                        </m:ctrlPr>
-                                      </m:sSubPr>
-                                      <m:e>
-                                        <m:r>
-                                          <m:rPr>
-                                            <m:sty m:val="p"/>
-                                          </m:rPr>
-                                          <a:rPr lang="en-US" sz="3326" b="0" i="0">
-                                            <a:solidFill>
-                                              <a:srgbClr val="111111"/>
-                                            </a:solidFill>
-                                            <a:latin typeface="Cambria Math" panose="02040503050406030204" pitchFamily="18" charset="0"/>
-                                            <a:ea typeface="Cambria Math"/>
-                                            <a:cs typeface="Cambria Math"/>
-                                          </a:rPr>
-                                          <m:t>∥</m:t>
-                                        </m:r>
-                                      </m:e>
-                                      <m:sub>
-                                        <m:r>
-                                          <a:rPr lang="en-US" sz="3326" b="0" i="1">
-                                            <a:solidFill>
-                                              <a:srgbClr val="111111"/>
-                                            </a:solidFill>
-                                            <a:latin typeface="Cambria Math" panose="02040503050406030204" pitchFamily="18" charset="0"/>
-                                            <a:ea typeface="Cambria Math"/>
-                                            <a:cs typeface="Cambria Math"/>
-                                          </a:rPr>
-                                          <m:t>2</m:t>
-                                        </m:r>
-                                      </m:sub>
-                                    </m:sSub>
-                                    <m:r>
-                                      <m:rPr>
-                                        <m:sty m:val="p"/>
-                                      </m:rPr>
-                                      <a:rPr lang="en-US" sz="3326" b="0" i="0">
-                                        <a:solidFill>
-                                          <a:srgbClr val="111111"/>
-                                        </a:solidFill>
-                                        <a:latin typeface="Cambria Math" panose="02040503050406030204" pitchFamily="18" charset="0"/>
-                                        <a:ea typeface="Cambria Math"/>
-                                        <a:cs typeface="Cambria Math"/>
-                                      </a:rPr>
-                                      <m:t>−</m:t>
-                                    </m:r>
-                                    <m:r>
-                                      <m:rPr>
-                                        <m:sty m:val="p"/>
-                                      </m:rPr>
-                                      <a:rPr lang="en-US" sz="3326" b="0" i="0">
-                                        <a:solidFill>
-                                          <a:srgbClr val="111111"/>
-                                        </a:solidFill>
-                                        <a:latin typeface="Cambria Math" panose="02040503050406030204" pitchFamily="18" charset="0"/>
-                                        <a:ea typeface="Cambria Math"/>
-                                        <a:cs typeface="Cambria Math"/>
-                                      </a:rPr>
-                                      <m:t>∥</m:t>
-                                    </m:r>
-                                    <m:sSub>
-                                      <m:sSubPr>
-                                        <m:ctrlPr>
-                                          <a:rPr lang="en-US" sz="3326" b="0" i="1">
-                                            <a:solidFill>
-                                              <a:srgbClr val="111111"/>
-                                            </a:solidFill>
-                                            <a:latin typeface="Cambria Math" panose="02040503050406030204" pitchFamily="18" charset="0"/>
-                                            <a:ea typeface="Cambria Math"/>
-                                            <a:cs typeface="Cambria Math"/>
-                                          </a:rPr>
-                                        </m:ctrlPr>
-                                      </m:sSubPr>
-                                      <m:e>
-                                        <m:r>
-                                          <m:rPr>
-                                            <m:sty m:val="b"/>
-                                          </m:rPr>
-                                          <a:rPr lang="en-US" sz="3326" b="1" i="0">
-                                            <a:solidFill>
-                                              <a:srgbClr val="111111"/>
-                                            </a:solidFill>
-                                            <a:latin typeface="Cambria Math" panose="02040503050406030204" pitchFamily="18" charset="0"/>
-                                            <a:ea typeface="Cambria Math"/>
-                                            <a:cs typeface="Cambria Math"/>
-                                          </a:rPr>
-                                          <m:t>v</m:t>
-                                        </m:r>
-                                      </m:e>
-                                      <m:sub>
-                                        <m:r>
-                                          <a:rPr lang="en-US" sz="3326" b="0" i="1">
-                                            <a:solidFill>
-                                              <a:srgbClr val="111111"/>
-                                            </a:solidFill>
-                                            <a:latin typeface="Cambria Math" panose="02040503050406030204" pitchFamily="18" charset="0"/>
-                                            <a:ea typeface="Cambria Math"/>
-                                            <a:cs typeface="Cambria Math"/>
-                                          </a:rPr>
-                                          <m:t>i</m:t>
-                                        </m:r>
-                                      </m:sub>
-                                    </m:sSub>
-                                    <m:r>
-                                      <m:rPr>
-                                        <m:sty m:val="p"/>
-                                      </m:rPr>
-                                      <a:rPr lang="en-US" sz="3326" b="0" i="0">
-                                        <a:solidFill>
-                                          <a:srgbClr val="111111"/>
-                                        </a:solidFill>
-                                        <a:latin typeface="Cambria Math" panose="02040503050406030204" pitchFamily="18" charset="0"/>
-                                        <a:ea typeface="Cambria Math"/>
-                                        <a:cs typeface="Cambria Math"/>
-                                      </a:rPr>
-                                      <m:t>(</m:t>
-                                    </m:r>
-                                    <m:r>
-                                      <m:rPr>
-                                        <m:sty m:val="b"/>
-                                      </m:rPr>
-                                      <a:rPr lang="en-US" sz="3326" b="1" i="0">
-                                        <a:solidFill>
-                                          <a:srgbClr val="111111"/>
-                                        </a:solidFill>
-                                        <a:latin typeface="Cambria Math" panose="02040503050406030204" pitchFamily="18" charset="0"/>
-                                        <a:ea typeface="Cambria Math"/>
-                                        <a:cs typeface="Cambria Math"/>
-                                      </a:rPr>
-                                      <m:t>x</m:t>
-                                    </m:r>
-                                    <m:r>
-                                      <m:rPr>
-                                        <m:sty m:val="p"/>
-                                      </m:rPr>
-                                      <a:rPr lang="en-US" sz="3326" b="0" i="0">
-                                        <a:solidFill>
-                                          <a:srgbClr val="111111"/>
-                                        </a:solidFill>
-                                        <a:latin typeface="Cambria Math" panose="02040503050406030204" pitchFamily="18" charset="0"/>
-                                        <a:ea typeface="Cambria Math"/>
-                                        <a:cs typeface="Cambria Math"/>
-                                      </a:rPr>
-                                      <m:t>;</m:t>
-                                    </m:r>
-                                    <m:sSub>
-                                      <m:sSubPr>
-                                        <m:ctrlPr>
-                                          <a:rPr lang="en-US" sz="3326" b="0" i="1">
-                                            <a:solidFill>
-                                              <a:srgbClr val="111111"/>
-                                            </a:solidFill>
-                                            <a:latin typeface="Cambria Math" panose="02040503050406030204" pitchFamily="18" charset="0"/>
-                                            <a:ea typeface="Cambria Math"/>
-                                            <a:cs typeface="Cambria Math"/>
-                                          </a:rPr>
-                                        </m:ctrlPr>
-                                      </m:sSubPr>
-                                      <m:e>
-                                        <m:r>
-                                          <m:rPr>
-                                            <m:sty m:val="bi"/>
-                                          </m:rPr>
-                                          <a:rPr lang="en-US" sz="3326" b="1" i="1">
-                                            <a:solidFill>
-                                              <a:srgbClr val="111111"/>
-                                            </a:solidFill>
-                                            <a:latin typeface="Cambria Math" panose="02040503050406030204" pitchFamily="18" charset="0"/>
-                                            <a:ea typeface="Cambria Math"/>
-                                            <a:cs typeface="Cambria Math"/>
-                                          </a:rPr>
-                                          <m:t>θ</m:t>
-                                        </m:r>
-                                      </m:e>
-                                      <m:sub>
-                                        <m:r>
-                                          <m:rPr>
-                                            <m:sty m:val="p"/>
-                                          </m:rPr>
-                                          <a:rPr lang="en-US" sz="3326" b="0" i="0">
-                                            <a:solidFill>
-                                              <a:srgbClr val="111111"/>
-                                            </a:solidFill>
-                                            <a:latin typeface="Cambria Math" panose="02040503050406030204" pitchFamily="18" charset="0"/>
-                                            <a:ea typeface="Cambria Math"/>
-                                            <a:cs typeface="Cambria Math"/>
-                                          </a:rPr>
-                                          <m:t>o</m:t>
-                                        </m:r>
-                                      </m:sub>
-                                    </m:sSub>
-                                    <m:r>
-                                      <m:rPr>
-                                        <m:sty m:val="p"/>
-                                      </m:rPr>
-                                      <a:rPr lang="en-US" sz="3326" b="0" i="0">
-                                        <a:solidFill>
-                                          <a:srgbClr val="111111"/>
-                                        </a:solidFill>
-                                        <a:latin typeface="Cambria Math" panose="02040503050406030204" pitchFamily="18" charset="0"/>
-                                        <a:ea typeface="Cambria Math"/>
-                                        <a:cs typeface="Cambria Math"/>
-                                      </a:rPr>
-                                      <m:t>)</m:t>
-                                    </m:r>
-                                    <m:sSub>
-                                      <m:sSubPr>
-                                        <m:ctrlPr>
-                                          <a:rPr lang="en-US" sz="3326" b="0" i="1">
-                                            <a:solidFill>
-                                              <a:srgbClr val="111111"/>
-                                            </a:solidFill>
-                                            <a:latin typeface="Cambria Math" panose="02040503050406030204" pitchFamily="18" charset="0"/>
-                                            <a:ea typeface="Cambria Math"/>
-                                            <a:cs typeface="Cambria Math"/>
-                                          </a:rPr>
-                                        </m:ctrlPr>
-                                      </m:sSubPr>
-                                      <m:e>
-                                        <m:r>
-                                          <m:rPr>
-                                            <m:sty m:val="p"/>
-                                          </m:rPr>
-                                          <a:rPr lang="en-US" sz="3326" b="0" i="0">
-                                            <a:solidFill>
-                                              <a:srgbClr val="111111"/>
-                                            </a:solidFill>
-                                            <a:latin typeface="Cambria Math" panose="02040503050406030204" pitchFamily="18" charset="0"/>
-                                            <a:ea typeface="Cambria Math"/>
-                                            <a:cs typeface="Cambria Math"/>
-                                          </a:rPr>
-                                          <m:t>∥</m:t>
-                                        </m:r>
-                                      </m:e>
-                                      <m:sub>
-                                        <m:r>
-                                          <a:rPr lang="en-US" sz="3326" b="0" i="1">
-                                            <a:solidFill>
-                                              <a:srgbClr val="111111"/>
-                                            </a:solidFill>
-                                            <a:latin typeface="Cambria Math" panose="02040503050406030204" pitchFamily="18" charset="0"/>
-                                            <a:ea typeface="Cambria Math"/>
-                                            <a:cs typeface="Cambria Math"/>
-                                          </a:rPr>
-                                          <m:t>2</m:t>
-                                        </m:r>
-                                      </m:sub>
-                                    </m:sSub>
-                                  </m:e>
-                                </m:d>
-                              </m:e>
-                              <m:sup>
-                                <m:r>
-                                  <a:rPr lang="en-US" sz="3326" b="0" i="1">
-                                    <a:solidFill>
-                                      <a:srgbClr val="111111"/>
-                                    </a:solidFill>
-                                    <a:latin typeface="Cambria Math" panose="02040503050406030204" pitchFamily="18" charset="0"/>
-                                    <a:ea typeface="Cambria Math"/>
-                                    <a:cs typeface="Cambria Math"/>
-                                  </a:rPr>
-                                  <m:t>2</m:t>
-                                </m:r>
-                              </m:sup>
-                            </m:sSup>
-                          </m:e>
-                        </m:nary>
-                      </m:oMath>
-                    </m:oMathPara>
+                    <m:oMath xmlns:m="http://schemas.openxmlformats.org/officeDocument/2006/math">
+                      <m:sSub>
+                        <m:sSubPr>
+                          <m:ctrlPr>
+                            <a:rPr lang="en-US" sz="3326" b="0" i="1">
+                              <a:solidFill>
+                                <a:srgbClr val="111111"/>
+                              </a:solidFill>
+                              <a:latin typeface="Cambria Math" panose="02040503050406030204" pitchFamily="18" charset="0"/>
+                              <a:ea typeface="Cambria Math"/>
+                              <a:cs typeface="Cambria Math"/>
+                            </a:rPr>
+                          </m:ctrlPr>
+                        </m:sSubPr>
+                        <m:e>
+                          <m:r>
+                            <m:rPr>
+                              <m:sty m:val="p"/>
+                            </m:rPr>
+                            <a:rPr lang="en-US" sz="3326" b="0" i="0">
+                              <a:solidFill>
+                                <a:srgbClr val="111111"/>
+                              </a:solidFill>
+                              <a:latin typeface="Cambria Math" panose="02040503050406030204" pitchFamily="18" charset="0"/>
+                              <a:ea typeface="Cambria Math"/>
+                              <a:cs typeface="Cambria Math"/>
+                            </a:rPr>
+                            <m:t>Δ</m:t>
+                          </m:r>
+                        </m:e>
+                        <m:sub>
+                          <m:sSub>
+                            <m:sSubPr>
+                              <m:ctrlPr>
+                                <a:rPr lang="en-US" sz="3326" b="0" i="1">
+                                  <a:solidFill>
+                                    <a:srgbClr val="111111"/>
+                                  </a:solidFill>
+                                  <a:latin typeface="Cambria Math" panose="02040503050406030204" pitchFamily="18" charset="0"/>
+                                  <a:ea typeface="Cambria Math"/>
+                                  <a:cs typeface="Cambria Math"/>
+                                </a:rPr>
+                              </m:ctrlPr>
+                            </m:sSubPr>
+                            <m:e>
+                              <m:r>
+                                <m:rPr>
+                                  <m:scr m:val="script"/>
+                                  <m:sty m:val="p"/>
+                                </m:rPr>
+                                <a:rPr lang="en-US" sz="3326" b="0" i="0">
+                                  <a:solidFill>
+                                    <a:srgbClr val="111111"/>
+                                  </a:solidFill>
+                                  <a:latin typeface="Cambria Math" panose="02040503050406030204" pitchFamily="18" charset="0"/>
+                                  <a:ea typeface="Cambria Math"/>
+                                  <a:cs typeface="Cambria Math"/>
+                                </a:rPr>
+                                <m:t>D</m:t>
+                              </m:r>
+                            </m:e>
+                            <m:sub>
+                              <m:r>
+                                <m:rPr>
+                                  <m:sty m:val="p"/>
+                                </m:rPr>
+                                <a:rPr lang="en-US" sz="3326" b="0" i="0">
+                                  <a:solidFill>
+                                    <a:srgbClr val="111111"/>
+                                  </a:solidFill>
+                                  <a:latin typeface="Cambria Math" panose="02040503050406030204" pitchFamily="18" charset="0"/>
+                                  <a:ea typeface="Cambria Math"/>
+                                  <a:cs typeface="Cambria Math"/>
+                                </a:rPr>
+                                <m:t>p</m:t>
+                              </m:r>
+                            </m:sub>
+                          </m:sSub>
+                        </m:sub>
+                      </m:sSub>
+                      <m:r>
+                        <m:rPr>
+                          <m:sty m:val="p"/>
+                        </m:rPr>
+                        <a:rPr lang="en-US" sz="3326" b="0" i="0">
+                          <a:solidFill>
+                            <a:srgbClr val="111111"/>
+                          </a:solidFill>
+                          <a:latin typeface="Cambria Math" panose="02040503050406030204" pitchFamily="18" charset="0"/>
+                          <a:ea typeface="Cambria Math"/>
+                          <a:cs typeface="Cambria Math"/>
+                        </a:rPr>
+                        <m:t>=</m:t>
+                      </m:r>
+                      <m:f>
+                        <m:fPr>
+                          <m:type m:val="bar"/>
+                          <m:ctrlPr>
+                            <a:rPr lang="en-US" sz="3326" b="0" i="1">
+                              <a:solidFill>
+                                <a:srgbClr val="111111"/>
+                              </a:solidFill>
+                              <a:latin typeface="Cambria Math" panose="02040503050406030204" pitchFamily="18" charset="0"/>
+                              <a:ea typeface="Cambria Math"/>
+                              <a:cs typeface="Cambria Math"/>
+                            </a:rPr>
+                          </m:ctrlPr>
+                        </m:fPr>
+                        <m:num>
+                          <m:r>
+                            <a:rPr lang="en-US" sz="3326" b="0" i="1">
+                              <a:solidFill>
+                                <a:srgbClr val="111111"/>
+                              </a:solidFill>
+                              <a:latin typeface="Cambria Math" panose="02040503050406030204" pitchFamily="18" charset="0"/>
+                              <a:ea typeface="Cambria Math"/>
+                              <a:cs typeface="Cambria Math"/>
+                            </a:rPr>
+                            <m:t>1</m:t>
+                          </m:r>
+                        </m:num>
+                        <m:den>
+                          <m:r>
+                            <m:rPr>
+                              <m:sty m:val="p"/>
+                            </m:rPr>
+                            <a:rPr lang="en-US" sz="3326" b="0" i="0">
+                              <a:solidFill>
+                                <a:srgbClr val="111111"/>
+                              </a:solidFill>
+                              <a:latin typeface="Cambria Math" panose="02040503050406030204" pitchFamily="18" charset="0"/>
+                              <a:ea typeface="Cambria Math"/>
+                              <a:cs typeface="Cambria Math"/>
+                            </a:rPr>
+                            <m:t>|</m:t>
+                          </m:r>
+                          <m:r>
+                            <m:rPr>
+                              <m:scr m:val="script"/>
+                              <m:sty m:val="p"/>
+                            </m:rPr>
+                            <a:rPr lang="en-US" sz="3326" b="0" i="0">
+                              <a:solidFill>
+                                <a:srgbClr val="111111"/>
+                              </a:solidFill>
+                              <a:latin typeface="Cambria Math" panose="02040503050406030204" pitchFamily="18" charset="0"/>
+                              <a:ea typeface="Cambria Math"/>
+                              <a:cs typeface="Cambria Math"/>
+                            </a:rPr>
+                            <m:t>S</m:t>
+                          </m:r>
+                          <m:r>
+                            <m:rPr>
+                              <m:sty m:val="p"/>
+                            </m:rPr>
+                            <a:rPr lang="en-US" sz="3326" b="0" i="0">
+                              <a:solidFill>
+                                <a:srgbClr val="111111"/>
+                              </a:solidFill>
+                              <a:latin typeface="Cambria Math" panose="02040503050406030204" pitchFamily="18" charset="0"/>
+                              <a:ea typeface="Cambria Math"/>
+                              <a:cs typeface="Cambria Math"/>
+                            </a:rPr>
+                            <m:t>|</m:t>
+                          </m:r>
+                        </m:den>
+                      </m:f>
+                      <m:nary>
+                        <m:naryPr>
+                          <m:chr m:val="∑"/>
+                          <m:limLoc m:val="subSup"/>
+                          <m:subHide m:val="off"/>
+                          <m:supHide m:val="on"/>
+                          <m:ctrlPr>
+                            <a:rPr lang="en-US" sz="3326" b="0" i="1">
+                              <a:solidFill>
+                                <a:srgbClr val="111111"/>
+                              </a:solidFill>
+                              <a:latin typeface="Cambria Math" panose="02040503050406030204" pitchFamily="18" charset="0"/>
+                              <a:ea typeface="Cambria Math"/>
+                              <a:cs typeface="Cambria Math"/>
+                            </a:rPr>
+                          </m:ctrlPr>
+                        </m:naryPr>
+                        <m:sub>
+                          <m:r>
+                            <a:rPr lang="en-US" sz="3326" b="0" i="1">
+                              <a:solidFill>
+                                <a:srgbClr val="111111"/>
+                              </a:solidFill>
+                              <a:latin typeface="Cambria Math" panose="02040503050406030204" pitchFamily="18" charset="0"/>
+                              <a:ea typeface="Cambria Math"/>
+                              <a:cs typeface="Cambria Math"/>
+                            </a:rPr>
+                            <m:t>i</m:t>
+                          </m:r>
+                          <m:r>
+                            <m:rPr>
+                              <m:sty m:val="p"/>
+                            </m:rPr>
+                            <a:rPr lang="en-US" sz="3326" b="0" i="0">
+                              <a:solidFill>
+                                <a:srgbClr val="111111"/>
+                              </a:solidFill>
+                              <a:latin typeface="Cambria Math" panose="02040503050406030204" pitchFamily="18" charset="0"/>
+                              <a:ea typeface="Cambria Math"/>
+                              <a:cs typeface="Cambria Math"/>
+                            </a:rPr>
+                            <m:t>∈</m:t>
+                          </m:r>
+                          <m:r>
+                            <m:rPr>
+                              <m:scr m:val="script"/>
+                              <m:sty m:val="p"/>
+                            </m:rPr>
+                            <a:rPr lang="en-US" sz="3326" b="0" i="0">
+                              <a:solidFill>
+                                <a:srgbClr val="111111"/>
+                              </a:solidFill>
+                              <a:latin typeface="Cambria Math" panose="02040503050406030204" pitchFamily="18" charset="0"/>
+                              <a:ea typeface="Cambria Math"/>
+                              <a:cs typeface="Cambria Math"/>
+                            </a:rPr>
+                            <m:t>S</m:t>
+                          </m:r>
+                        </m:sub>
+                        <m:sup>
+                          <m:r>
+                            <a:rPr lang="en-US" sz="3326" b="0" i="1">
+                              <a:solidFill>
+                                <a:srgbClr val="111111"/>
+                              </a:solidFill>
+                              <a:latin typeface="Cambria Math" panose="02040503050406030204" pitchFamily="18" charset="0"/>
+                              <a:ea typeface="Cambria Math"/>
+                              <a:cs typeface="Cambria Math"/>
+                            </a:rPr>
+                            <m:t>​</m:t>
+                          </m:r>
+                        </m:sup>
+                        <m:e>
+                          <m:sSup>
+                            <m:sSupPr>
+                              <m:ctrlPr>
+                                <a:rPr lang="en-US" sz="3326" b="0" i="1">
+                                  <a:solidFill>
+                                    <a:srgbClr val="111111"/>
+                                  </a:solidFill>
+                                  <a:latin typeface="Cambria Math" panose="02040503050406030204" pitchFamily="18" charset="0"/>
+                                  <a:ea typeface="Cambria Math"/>
+                                  <a:cs typeface="Cambria Math"/>
+                                </a:rPr>
+                              </m:ctrlPr>
+                            </m:sSupPr>
+                            <m:e>
+                              <m:d>
+                                <m:dPr>
+                                  <m:begChr m:val="("/>
+                                  <m:sepChr m:val=""/>
+                                  <m:endChr m:val=")"/>
+                                  <m:grow/>
+                                  <m:ctrlPr>
+                                    <a:rPr lang="en-US" sz="3326" b="0" i="1">
+                                      <a:solidFill>
+                                        <a:srgbClr val="111111"/>
+                                      </a:solidFill>
+                                      <a:latin typeface="Cambria Math" panose="02040503050406030204" pitchFamily="18" charset="0"/>
+                                      <a:ea typeface="Cambria Math"/>
+                                      <a:cs typeface="Cambria Math"/>
+                                    </a:rPr>
+                                  </m:ctrlPr>
+                                </m:dPr>
+                                <m:e>
+                                  <m:r>
+                                    <m:rPr>
+                                      <m:sty m:val="p"/>
+                                    </m:rPr>
+                                    <a:rPr lang="en-US" sz="3326" b="0" i="0">
+                                      <a:solidFill>
+                                        <a:srgbClr val="111111"/>
+                                      </a:solidFill>
+                                      <a:latin typeface="Cambria Math" panose="02040503050406030204" pitchFamily="18" charset="0"/>
+                                      <a:ea typeface="Cambria Math"/>
+                                      <a:cs typeface="Cambria Math"/>
+                                    </a:rPr>
+                                    <m:t>∥</m:t>
+                                  </m:r>
+                                  <m:sSub>
+                                    <m:sSubPr>
+                                      <m:ctrlPr>
+                                        <a:rPr lang="en-US" sz="3326" b="0" i="1">
+                                          <a:solidFill>
+                                            <a:srgbClr val="111111"/>
+                                          </a:solidFill>
+                                          <a:latin typeface="Cambria Math" panose="02040503050406030204" pitchFamily="18" charset="0"/>
+                                          <a:ea typeface="Cambria Math"/>
+                                          <a:cs typeface="Cambria Math"/>
+                                        </a:rPr>
+                                      </m:ctrlPr>
+                                    </m:sSubPr>
+                                    <m:e>
+                                      <m:r>
+                                        <m:rPr>
+                                          <m:sty m:val="b"/>
+                                        </m:rPr>
+                                        <a:rPr lang="en-US" sz="3326" b="1" i="0">
+                                          <a:solidFill>
+                                            <a:srgbClr val="111111"/>
+                                          </a:solidFill>
+                                          <a:latin typeface="Cambria Math" panose="02040503050406030204" pitchFamily="18" charset="0"/>
+                                          <a:ea typeface="Cambria Math"/>
+                                          <a:cs typeface="Cambria Math"/>
+                                        </a:rPr>
+                                        <m:t>v</m:t>
+                                      </m:r>
+                                    </m:e>
+                                    <m:sub>
+                                      <m:r>
+                                        <a:rPr lang="en-US" sz="3326" b="0" i="1">
+                                          <a:solidFill>
+                                            <a:srgbClr val="111111"/>
+                                          </a:solidFill>
+                                          <a:latin typeface="Cambria Math" panose="02040503050406030204" pitchFamily="18" charset="0"/>
+                                          <a:ea typeface="Cambria Math"/>
+                                          <a:cs typeface="Cambria Math"/>
+                                        </a:rPr>
+                                        <m:t>i</m:t>
+                                      </m:r>
+                                    </m:sub>
+                                  </m:sSub>
+                                  <m:r>
+                                    <m:rPr>
+                                      <m:sty m:val="p"/>
+                                    </m:rPr>
+                                    <a:rPr lang="en-US" sz="3326" b="0" i="0">
+                                      <a:solidFill>
+                                        <a:srgbClr val="111111"/>
+                                      </a:solidFill>
+                                      <a:latin typeface="Cambria Math" panose="02040503050406030204" pitchFamily="18" charset="0"/>
+                                      <a:ea typeface="Cambria Math"/>
+                                      <a:cs typeface="Cambria Math"/>
+                                    </a:rPr>
+                                    <m:t>(</m:t>
+                                  </m:r>
+                                  <m:r>
+                                    <m:rPr>
+                                      <m:sty m:val="b"/>
+                                    </m:rPr>
+                                    <a:rPr lang="en-US" sz="3326" b="1" i="0">
+                                      <a:solidFill>
+                                        <a:srgbClr val="111111"/>
+                                      </a:solidFill>
+                                      <a:latin typeface="Cambria Math" panose="02040503050406030204" pitchFamily="18" charset="0"/>
+                                      <a:ea typeface="Cambria Math"/>
+                                      <a:cs typeface="Cambria Math"/>
+                                    </a:rPr>
+                                    <m:t>x</m:t>
+                                  </m:r>
+                                  <m:r>
+                                    <m:rPr>
+                                      <m:sty m:val="p"/>
+                                    </m:rPr>
+                                    <a:rPr lang="en-US" sz="3326" b="0" i="0">
+                                      <a:solidFill>
+                                        <a:srgbClr val="111111"/>
+                                      </a:solidFill>
+                                      <a:latin typeface="Cambria Math" panose="02040503050406030204" pitchFamily="18" charset="0"/>
+                                      <a:ea typeface="Cambria Math"/>
+                                      <a:cs typeface="Cambria Math"/>
+                                    </a:rPr>
+                                    <m:t>;</m:t>
+                                  </m:r>
+                                  <m:r>
+                                    <m:rPr>
+                                      <m:sty m:val="bi"/>
+                                    </m:rPr>
+                                    <a:rPr lang="en-US" sz="3326" b="1" i="1">
+                                      <a:solidFill>
+                                        <a:srgbClr val="111111"/>
+                                      </a:solidFill>
+                                      <a:latin typeface="Cambria Math" panose="02040503050406030204" pitchFamily="18" charset="0"/>
+                                      <a:ea typeface="Cambria Math"/>
+                                      <a:cs typeface="Cambria Math"/>
+                                    </a:rPr>
+                                    <m:t>θ</m:t>
+                                  </m:r>
+                                  <m:r>
+                                    <m:rPr>
+                                      <m:sty m:val="p"/>
+                                    </m:rPr>
+                                    <a:rPr lang="en-US" sz="3326" b="0" i="0">
+                                      <a:solidFill>
+                                        <a:srgbClr val="111111"/>
+                                      </a:solidFill>
+                                      <a:latin typeface="Cambria Math" panose="02040503050406030204" pitchFamily="18" charset="0"/>
+                                      <a:ea typeface="Cambria Math"/>
+                                      <a:cs typeface="Cambria Math"/>
+                                    </a:rPr>
+                                    <m:t>)</m:t>
+                                  </m:r>
+                                  <m:sSub>
+                                    <m:sSubPr>
+                                      <m:ctrlPr>
+                                        <a:rPr lang="en-US" sz="3326" b="0" i="1">
+                                          <a:solidFill>
+                                            <a:srgbClr val="111111"/>
+                                          </a:solidFill>
+                                          <a:latin typeface="Cambria Math" panose="02040503050406030204" pitchFamily="18" charset="0"/>
+                                          <a:ea typeface="Cambria Math"/>
+                                          <a:cs typeface="Cambria Math"/>
+                                        </a:rPr>
+                                      </m:ctrlPr>
+                                    </m:sSubPr>
+                                    <m:e>
+                                      <m:r>
+                                        <m:rPr>
+                                          <m:sty m:val="p"/>
+                                        </m:rPr>
+                                        <a:rPr lang="en-US" sz="3326" b="0" i="0">
+                                          <a:solidFill>
+                                            <a:srgbClr val="111111"/>
+                                          </a:solidFill>
+                                          <a:latin typeface="Cambria Math" panose="02040503050406030204" pitchFamily="18" charset="0"/>
+                                          <a:ea typeface="Cambria Math"/>
+                                          <a:cs typeface="Cambria Math"/>
+                                        </a:rPr>
+                                        <m:t>∥</m:t>
+                                      </m:r>
+                                    </m:e>
+                                    <m:sub>
+                                      <m:r>
+                                        <a:rPr lang="en-US" sz="3326" b="0" i="1">
+                                          <a:solidFill>
+                                            <a:srgbClr val="111111"/>
+                                          </a:solidFill>
+                                          <a:latin typeface="Cambria Math" panose="02040503050406030204" pitchFamily="18" charset="0"/>
+                                          <a:ea typeface="Cambria Math"/>
+                                          <a:cs typeface="Cambria Math"/>
+                                        </a:rPr>
+                                        <m:t>2</m:t>
+                                      </m:r>
+                                    </m:sub>
+                                  </m:sSub>
+                                  <m:r>
+                                    <m:rPr>
+                                      <m:sty m:val="p"/>
+                                    </m:rPr>
+                                    <a:rPr lang="en-US" sz="3326" b="0" i="0">
+                                      <a:solidFill>
+                                        <a:srgbClr val="111111"/>
+                                      </a:solidFill>
+                                      <a:latin typeface="Cambria Math" panose="02040503050406030204" pitchFamily="18" charset="0"/>
+                                      <a:ea typeface="Cambria Math"/>
+                                      <a:cs typeface="Cambria Math"/>
+                                    </a:rPr>
+                                    <m:t>−</m:t>
+                                  </m:r>
+                                  <m:r>
+                                    <m:rPr>
+                                      <m:sty m:val="p"/>
+                                    </m:rPr>
+                                    <a:rPr lang="en-US" sz="3326" b="0" i="0">
+                                      <a:solidFill>
+                                        <a:srgbClr val="111111"/>
+                                      </a:solidFill>
+                                      <a:latin typeface="Cambria Math" panose="02040503050406030204" pitchFamily="18" charset="0"/>
+                                      <a:ea typeface="Cambria Math"/>
+                                      <a:cs typeface="Cambria Math"/>
+                                    </a:rPr>
+                                    <m:t>∥</m:t>
+                                  </m:r>
+                                  <m:sSub>
+                                    <m:sSubPr>
+                                      <m:ctrlPr>
+                                        <a:rPr lang="en-US" sz="3326" b="0" i="1">
+                                          <a:solidFill>
+                                            <a:srgbClr val="111111"/>
+                                          </a:solidFill>
+                                          <a:latin typeface="Cambria Math" panose="02040503050406030204" pitchFamily="18" charset="0"/>
+                                          <a:ea typeface="Cambria Math"/>
+                                          <a:cs typeface="Cambria Math"/>
+                                        </a:rPr>
+                                      </m:ctrlPr>
+                                    </m:sSubPr>
+                                    <m:e>
+                                      <m:r>
+                                        <m:rPr>
+                                          <m:sty m:val="b"/>
+                                        </m:rPr>
+                                        <a:rPr lang="en-US" sz="3326" b="1" i="0">
+                                          <a:solidFill>
+                                            <a:srgbClr val="111111"/>
+                                          </a:solidFill>
+                                          <a:latin typeface="Cambria Math" panose="02040503050406030204" pitchFamily="18" charset="0"/>
+                                          <a:ea typeface="Cambria Math"/>
+                                          <a:cs typeface="Cambria Math"/>
+                                        </a:rPr>
+                                        <m:t>v</m:t>
+                                      </m:r>
+                                    </m:e>
+                                    <m:sub>
+                                      <m:r>
+                                        <a:rPr lang="en-US" sz="3326" b="0" i="1">
+                                          <a:solidFill>
+                                            <a:srgbClr val="111111"/>
+                                          </a:solidFill>
+                                          <a:latin typeface="Cambria Math" panose="02040503050406030204" pitchFamily="18" charset="0"/>
+                                          <a:ea typeface="Cambria Math"/>
+                                          <a:cs typeface="Cambria Math"/>
+                                        </a:rPr>
+                                        <m:t>i</m:t>
+                                      </m:r>
+                                    </m:sub>
+                                  </m:sSub>
+                                  <m:r>
+                                    <m:rPr>
+                                      <m:sty m:val="p"/>
+                                    </m:rPr>
+                                    <a:rPr lang="en-US" sz="3326" b="0" i="0">
+                                      <a:solidFill>
+                                        <a:srgbClr val="111111"/>
+                                      </a:solidFill>
+                                      <a:latin typeface="Cambria Math" panose="02040503050406030204" pitchFamily="18" charset="0"/>
+                                      <a:ea typeface="Cambria Math"/>
+                                      <a:cs typeface="Cambria Math"/>
+                                    </a:rPr>
+                                    <m:t>(</m:t>
+                                  </m:r>
+                                  <m:r>
+                                    <m:rPr>
+                                      <m:sty m:val="b"/>
+                                    </m:rPr>
+                                    <a:rPr lang="en-US" sz="3326" b="1" i="0">
+                                      <a:solidFill>
+                                        <a:srgbClr val="111111"/>
+                                      </a:solidFill>
+                                      <a:latin typeface="Cambria Math" panose="02040503050406030204" pitchFamily="18" charset="0"/>
+                                      <a:ea typeface="Cambria Math"/>
+                                      <a:cs typeface="Cambria Math"/>
+                                    </a:rPr>
+                                    <m:t>x</m:t>
+                                  </m:r>
+                                  <m:r>
+                                    <m:rPr>
+                                      <m:sty m:val="p"/>
+                                    </m:rPr>
+                                    <a:rPr lang="en-US" sz="3326" b="0" i="0">
+                                      <a:solidFill>
+                                        <a:srgbClr val="111111"/>
+                                      </a:solidFill>
+                                      <a:latin typeface="Cambria Math" panose="02040503050406030204" pitchFamily="18" charset="0"/>
+                                      <a:ea typeface="Cambria Math"/>
+                                      <a:cs typeface="Cambria Math"/>
+                                    </a:rPr>
+                                    <m:t>;</m:t>
+                                  </m:r>
+                                  <m:sSub>
+                                    <m:sSubPr>
+                                      <m:ctrlPr>
+                                        <a:rPr lang="en-US" sz="3326" b="0" i="1">
+                                          <a:solidFill>
+                                            <a:srgbClr val="111111"/>
+                                          </a:solidFill>
+                                          <a:latin typeface="Cambria Math" panose="02040503050406030204" pitchFamily="18" charset="0"/>
+                                          <a:ea typeface="Cambria Math"/>
+                                          <a:cs typeface="Cambria Math"/>
+                                        </a:rPr>
+                                      </m:ctrlPr>
+                                    </m:sSubPr>
+                                    <m:e>
+                                      <m:r>
+                                        <m:rPr>
+                                          <m:sty m:val="bi"/>
+                                        </m:rPr>
+                                        <a:rPr lang="en-US" sz="3326" b="1" i="1">
+                                          <a:solidFill>
+                                            <a:srgbClr val="111111"/>
+                                          </a:solidFill>
+                                          <a:latin typeface="Cambria Math" panose="02040503050406030204" pitchFamily="18" charset="0"/>
+                                          <a:ea typeface="Cambria Math"/>
+                                          <a:cs typeface="Cambria Math"/>
+                                        </a:rPr>
+                                        <m:t>θ</m:t>
+                                      </m:r>
+                                    </m:e>
+                                    <m:sub>
+                                      <m:r>
+                                        <m:rPr>
+                                          <m:sty m:val="p"/>
+                                        </m:rPr>
+                                        <a:rPr lang="en-US" sz="3326" b="0" i="0">
+                                          <a:solidFill>
+                                            <a:srgbClr val="111111"/>
+                                          </a:solidFill>
+                                          <a:latin typeface="Cambria Math" panose="02040503050406030204" pitchFamily="18" charset="0"/>
+                                          <a:ea typeface="Cambria Math"/>
+                                          <a:cs typeface="Cambria Math"/>
+                                        </a:rPr>
+                                        <m:t>o</m:t>
+                                      </m:r>
+                                    </m:sub>
+                                  </m:sSub>
+                                  <m:r>
+                                    <m:rPr>
+                                      <m:sty m:val="p"/>
+                                    </m:rPr>
+                                    <a:rPr lang="en-US" sz="3326" b="0" i="0">
+                                      <a:solidFill>
+                                        <a:srgbClr val="111111"/>
+                                      </a:solidFill>
+                                      <a:latin typeface="Cambria Math" panose="02040503050406030204" pitchFamily="18" charset="0"/>
+                                      <a:ea typeface="Cambria Math"/>
+                                      <a:cs typeface="Cambria Math"/>
+                                    </a:rPr>
+                                    <m:t>)</m:t>
+                                  </m:r>
+                                  <m:sSub>
+                                    <m:sSubPr>
+                                      <m:ctrlPr>
+                                        <a:rPr lang="en-US" sz="3326" b="0" i="1">
+                                          <a:solidFill>
+                                            <a:srgbClr val="111111"/>
+                                          </a:solidFill>
+                                          <a:latin typeface="Cambria Math" panose="02040503050406030204" pitchFamily="18" charset="0"/>
+                                          <a:ea typeface="Cambria Math"/>
+                                          <a:cs typeface="Cambria Math"/>
+                                        </a:rPr>
+                                      </m:ctrlPr>
+                                    </m:sSubPr>
+                                    <m:e>
+                                      <m:r>
+                                        <m:rPr>
+                                          <m:sty m:val="p"/>
+                                        </m:rPr>
+                                        <a:rPr lang="en-US" sz="3326" b="0" i="0">
+                                          <a:solidFill>
+                                            <a:srgbClr val="111111"/>
+                                          </a:solidFill>
+                                          <a:latin typeface="Cambria Math" panose="02040503050406030204" pitchFamily="18" charset="0"/>
+                                          <a:ea typeface="Cambria Math"/>
+                                          <a:cs typeface="Cambria Math"/>
+                                        </a:rPr>
+                                        <m:t>∥</m:t>
+                                      </m:r>
+                                    </m:e>
+                                    <m:sub>
+                                      <m:r>
+                                        <a:rPr lang="en-US" sz="3326" b="0" i="1">
+                                          <a:solidFill>
+                                            <a:srgbClr val="111111"/>
+                                          </a:solidFill>
+                                          <a:latin typeface="Cambria Math" panose="02040503050406030204" pitchFamily="18" charset="0"/>
+                                          <a:ea typeface="Cambria Math"/>
+                                          <a:cs typeface="Cambria Math"/>
+                                        </a:rPr>
+                                        <m:t>2</m:t>
+                                      </m:r>
+                                    </m:sub>
+                                  </m:sSub>
+                                </m:e>
+                              </m:d>
+                            </m:e>
+                            <m:sup>
+                              <m:r>
+                                <a:rPr lang="en-US" sz="3326" b="0" i="1">
+                                  <a:solidFill>
+                                    <a:srgbClr val="111111"/>
+                                  </a:solidFill>
+                                  <a:latin typeface="Cambria Math" panose="02040503050406030204" pitchFamily="18" charset="0"/>
+                                  <a:ea typeface="Cambria Math"/>
+                                  <a:cs typeface="Cambria Math"/>
+                                </a:rPr>
+                                <m:t>2</m:t>
+                              </m:r>
+                            </m:sup>
+                          </m:sSup>
+                        </m:e>
+                      </m:nary>
+                    </m:oMath>
                   </a14:m>
                   <a:endParaRPr lang="en-US" sz="3326" b="0" i="0" kern="100" dirty="0">
                     <a:solidFill>
@@ -10531,9 +10513,9 @@
         <p:grpSpPr>
           <a:xfrm>
             <a:off x="33509396" y="4070763"/>
-            <a:ext cx="17236541" cy="13886805"/>
+            <a:ext cx="17819088" cy="13886805"/>
             <a:chOff x="33509396" y="4070763"/>
-            <a:chExt cx="17236541" cy="13886805"/>
+            <a:chExt cx="17819088" cy="13886805"/>
           </a:xfrm>
         </p:grpSpPr>
         <p:sp>
@@ -10545,7 +10527,7 @@
           <p:spPr>
             <a:xfrm>
               <a:off x="33509396" y="4070763"/>
-              <a:ext cx="17236541" cy="801836"/>
+              <a:ext cx="17819088" cy="801836"/>
             </a:xfrm>
             <a:prstGeom prst="rect">
               <a:avLst/>
@@ -10758,7 +10740,7 @@
           <p:spPr>
             <a:xfrm>
               <a:off x="33509396" y="17428914"/>
-              <a:ext cx="10986101" cy="528654"/>
+              <a:ext cx="11357401" cy="528654"/>
             </a:xfrm>
             <a:prstGeom prst="rect">
               <a:avLst/>
@@ -10932,9 +10914,9 @@
         <p:grpSpPr>
           <a:xfrm>
             <a:off x="563265" y="24157533"/>
-            <a:ext cx="50182672" cy="630634"/>
+            <a:ext cx="50765219" cy="630634"/>
             <a:chOff x="563265" y="24157533"/>
-            <a:chExt cx="50182672" cy="630634"/>
+            <a:chExt cx="50765219" cy="630634"/>
           </a:xfrm>
         </p:grpSpPr>
         <p:sp>
@@ -10946,7 +10928,7 @@
           <p:spPr>
             <a:xfrm>
               <a:off x="563265" y="24157533"/>
-              <a:ext cx="15266561" cy="630634"/>
+              <a:ext cx="15782528" cy="630634"/>
             </a:xfrm>
             <a:prstGeom prst="rect">
               <a:avLst/>
@@ -11035,7 +11017,7 @@
           <p:spPr>
             <a:xfrm>
               <a:off x="16302038" y="24157533"/>
-              <a:ext cx="16743959" cy="630634"/>
+              <a:ext cx="17309858" cy="630634"/>
             </a:xfrm>
             <a:prstGeom prst="rect">
               <a:avLst/>
@@ -11124,7 +11106,7 @@
           <p:spPr>
             <a:xfrm>
               <a:off x="33509396" y="24157533"/>
-              <a:ext cx="17236541" cy="630634"/>
+              <a:ext cx="17819088" cy="630634"/>
             </a:xfrm>
             <a:prstGeom prst="rect">
               <a:avLst/>
@@ -11213,10 +11195,10 @@
         </p:nvGrpSpPr>
         <p:grpSpPr>
           <a:xfrm>
-            <a:off x="413025" y="24864913"/>
-            <a:ext cx="50380350" cy="635874"/>
-            <a:chOff x="413025" y="24864913"/>
-            <a:chExt cx="50380350" cy="635874"/>
+            <a:off x="-438333" y="24864913"/>
+            <a:ext cx="52083065" cy="635874"/>
+            <a:chOff x="-438333" y="24864913"/>
+            <a:chExt cx="52083065" cy="635874"/>
           </a:xfrm>
         </p:grpSpPr>
         <p:sp>
@@ -11249,8 +11231,8 @@
           </p:nvSpPr>
           <p:spPr>
             <a:xfrm>
-              <a:off x="413025" y="24965963"/>
-              <a:ext cx="50380350" cy="534824"/>
+              <a:off x="-438333" y="24965963"/>
+              <a:ext cx="52083065" cy="534824"/>
             </a:xfrm>
             <a:prstGeom prst="rect">
               <a:avLst/>

--- a/poster/forgetting-to-forget-colm2026-poster.pptx
+++ b/poster/forgetting-to-forget-colm2026-poster.pptx
@@ -3090,7 +3090,7 @@
       <p:grpSpPr/>
       <p:grpSp>
         <p:nvGrpSpPr>
-          <p:cNvPr id="61" name="Section: Header"/>
+          <p:cNvPr id="67" name="Section: Header"/>
           <p:cNvGrpSpPr/>
           <p:nvPr/>
         </p:nvGrpSpPr>
@@ -3800,231 +3800,9 @@
           </a:ln>
         </p:spPr>
       </p:sp>
-      <p:pic>
-        <p:nvPicPr>
-          <p:cNvPr id="53" name="Picture: motivation" descr="UE on D_f versus BE on D_p for prefix, infix, suffix triggers"/>
-          <p:cNvPicPr>
-            <a:picLocks noChangeAspect="1"/>
-          </p:cNvPicPr>
-          <p:nvPr/>
-        </p:nvPicPr>
-        <p:blipFill>
-          <a:blip r:embed="rId37">
-            <a:extLst>
-              <a:ext uri="{96DAC541-7B7A-43D3-8B79-37D633B846F1}">
-                <asvg:svgBlip xmlns:asvg="http://schemas.microsoft.com/office/drawing/2016/SVG/main" r:embed="rId38"/>
-              </a:ext>
-            </a:extLst>
-          </a:blip>
-          <a:stretch>
-            <a:fillRect/>
-          </a:stretch>
-        </p:blipFill>
-        <p:spPr>
-          <a:xfrm>
-            <a:off x="33509396" y="18376255"/>
-            <a:ext cx="9576428" cy="4506466"/>
-          </a:xfrm>
-          <a:prstGeom prst="rect">
-            <a:avLst/>
-          </a:prstGeom>
-        </p:spPr>
-      </p:pic>
-      <p:sp>
-        <p:nvSpPr>
-          <p:cNvPr id="54" name="Caption: Figure 4. Trigger position: the prefix trigger c"/>
-          <p:cNvSpPr txBox="1"/>
-          <p:nvPr/>
-        </p:nvSpPr>
-        <p:spPr>
-          <a:xfrm>
-            <a:off x="33509396" y="22946618"/>
-            <a:ext cx="9633887" cy="1057308"/>
-          </a:xfrm>
-          <a:prstGeom prst="rect">
-            <a:avLst/>
-          </a:prstGeom>
-          <a:noFill/>
-        </p:spPr>
-        <p:txBody>
-          <a:bodyPr wrap="square" lIns="0" tIns="0" rIns="0" bIns="0" anchor="t" rtlCol="0">
-            <a:spAutoFit/>
-          </a:bodyPr>
-          <a:lstStyle/>
-          <a:p>
-            <a:pPr algn="just" marL="0" indent="0">
-              <a:lnSpc>
-                <a:spcPts val="4163"/>
-              </a:lnSpc>
-              <a:spcBef>
-                <a:spcPts val="0"/>
-              </a:spcBef>
-              <a:spcAft>
-                <a:spcPts val="0"/>
-              </a:spcAft>
-              <a:buNone/>
-            </a:pPr>
-            <a:r>
-              <a:rPr lang="en-US" sz="3528" b="1" i="0" kern="100" dirty="0">
-                <a:solidFill>
-                  <a:srgbClr val="111111"/>
-                </a:solidFill>
-                <a:latin typeface="EB Garamond"/>
-                <a:ea typeface="EB Garamond"/>
-                <a:cs typeface="EB Garamond"/>
-              </a:rPr>
-              <a:t>Figure 4.</a:t>
-            </a:r>
-            <a:r>
-              <a:rPr lang="en-US" sz="3528" b="0" i="0" kern="100" dirty="0">
-                <a:solidFill>
-                  <a:srgbClr val="111111"/>
-                </a:solidFill>
-                <a:latin typeface="EB Garamond"/>
-                <a:ea typeface="EB Garamond"/>
-                <a:cs typeface="EB Garamond"/>
-              </a:rPr>
-              <a:t> Trigger position: the </a:t>
-            </a:r>
-            <a:r>
-              <a:rPr lang="en-US" sz="3528" b="1" i="0" kern="100" dirty="0">
-                <a:solidFill>
-                  <a:srgbClr val="111111"/>
-                </a:solidFill>
-                <a:latin typeface="EB Garamond"/>
-                <a:ea typeface="EB Garamond"/>
-                <a:cs typeface="EB Garamond"/>
-              </a:rPr>
-              <a:t>prefix</a:t>
-            </a:r>
-            <a:r>
-              <a:rPr lang="en-US" sz="3528" b="0" i="0" kern="100" dirty="0">
-                <a:solidFill>
-                  <a:srgbClr val="111111"/>
-                </a:solidFill>
-                <a:latin typeface="EB Garamond"/>
-                <a:ea typeface="EB Garamond"/>
-                <a:cs typeface="EB Garamond"/>
-              </a:rPr>
-              <a:t> trigger comes closest to the desired zone (NPO, MUSE‑Books).</a:t>
-            </a:r>
-            <a:endParaRPr lang="en-US" sz="3528" b="0" i="0" kern="100" dirty="0">
-              <a:solidFill>
-                <a:srgbClr val="111111"/>
-              </a:solidFill>
-              <a:latin typeface="EB Garamond"/>
-              <a:ea typeface="EB Garamond"/>
-              <a:cs typeface="EB Garamond"/>
-            </a:endParaRPr>
-          </a:p>
-        </p:txBody>
-      </p:sp>
-      <p:sp>
-        <p:nvSpPr>
-          <p:cNvPr id="55" name="Text: Attention sinks are a gateway: a prefix trigger "/>
-          <p:cNvSpPr/>
-          <p:nvPr/>
-        </p:nvSpPr>
-        <p:spPr>
-          <a:xfrm>
-            <a:off x="43422325" y="18977025"/>
-            <a:ext cx="7217106" cy="4426016"/>
-          </a:xfrm>
-          <a:prstGeom prst="roundRect">
-            <a:avLst>
-              <a:gd name="adj" fmla="val 6279"/>
-            </a:avLst>
-          </a:prstGeom>
-          <a:solidFill>
-            <a:srgbClr val="EEF4F1"/>
-          </a:solidFill>
-          <a:ln w="7408">
-            <a:solidFill>
-              <a:srgbClr val="18453B"/>
-            </a:solidFill>
-          </a:ln>
-        </p:spPr>
-        <p:txBody>
-          <a:bodyPr wrap="square" lIns="118223" tIns="93315" rIns="169430" bIns="93315" anchor="ctr" rtlCol="0">
-            <a:noAutofit/>
-          </a:bodyPr>
-          <a:lstStyle/>
-          <a:p>
-            <a:pPr algn="l" marL="563270" indent="-563270">
-              <a:lnSpc>
-                <a:spcPts val="5564"/>
-              </a:lnSpc>
-              <a:spcBef>
-                <a:spcPts val="0"/>
-              </a:spcBef>
-              <a:spcAft>
-                <a:spcPts val="0"/>
-              </a:spcAft>
-              <a:buClr>
-                <a:srgbClr val="111111"/>
-              </a:buClr>
-              <a:buSzPct val="100000"/>
-              <a:buFont typeface="Wingdings" pitchFamily="2" charset="2"/>
-              <a:buChar char="ü"/>
-            </a:pPr>
-            <a:r>
-              <a:rPr lang="en-US" sz="4637" b="1" i="0" kern="100" dirty="0">
-                <a:solidFill>
-                  <a:srgbClr val="111111"/>
-                </a:solidFill>
-                <a:latin typeface="EB Garamond"/>
-                <a:ea typeface="EB Garamond"/>
-                <a:cs typeface="EB Garamond"/>
-              </a:rPr>
-              <a:t>Attention sinks are a gateway:</a:t>
-            </a:r>
-            <a:r>
-              <a:rPr lang="en-US" sz="4637" b="0" i="0" kern="100" dirty="0">
-                <a:solidFill>
-                  <a:srgbClr val="111111"/>
-                </a:solidFill>
-                <a:latin typeface="EB Garamond"/>
-                <a:ea typeface="EB Garamond"/>
-                <a:cs typeface="EB Garamond"/>
-              </a:rPr>
-              <a:t> a prefix trigger restores forgotten knowledge; </a:t>
-            </a:r>
-            <a:r>
-              <a:rPr lang="en-US" sz="4637" b="1" i="0" kern="100" dirty="0">
-                <a:solidFill>
-                  <a:srgbClr val="111111"/>
-                </a:solidFill>
-                <a:latin typeface="EB Garamond"/>
-                <a:ea typeface="EB Garamond"/>
-                <a:cs typeface="EB Garamond"/>
-              </a:rPr>
-              <a:t>value-norm alignment</a:t>
-            </a:r>
-            <a:r>
-              <a:rPr lang="en-US" sz="4637" b="0" i="0" kern="100" dirty="0">
-                <a:solidFill>
-                  <a:srgbClr val="111111"/>
-                </a:solidFill>
-                <a:latin typeface="EB Garamond"/>
-                <a:ea typeface="EB Garamond"/>
-                <a:cs typeface="EB Garamond"/>
-              </a:rPr>
-              <a:t> makes it stealthier.</a:t>
-            </a:r>
-            <a:endParaRPr lang="en-US" sz="4637" b="0" i="0" kern="100" dirty="0">
-              <a:solidFill>
-                <a:srgbClr val="111111"/>
-              </a:solidFill>
-              <a:latin typeface="EB Garamond"/>
-              <a:ea typeface="EB Garamond"/>
-              <a:cs typeface="EB Garamond"/>
-            </a:endParaRPr>
-          </a:p>
-        </p:txBody>
-      </p:sp>
       <p:grpSp>
         <p:nvGrpSpPr>
-          <p:cNvPr id="62" name="Section: Backdooring LLM Unlearning: A New Threat"/>
+          <p:cNvPr id="68" name="Section: Backdooring LLM Unlearning: A New Threat"/>
           <p:cNvGrpSpPr/>
           <p:nvPr/>
         </p:nvGrpSpPr>
@@ -4203,543 +3981,12 @@
                   </a:endParaRPr>
                 </a:p>
                 <a:p>
-                  <a:pPr algn="ctr" marL="677205" indent="0">
-                    <a:lnSpc>
-                      <a:spcPct val="100000"/>
-                    </a:lnSpc>
-                    <a:spcBef>
-                      <a:spcPts val="737"/>
-                    </a:spcBef>
-                    <a:spcAft>
-                      <a:spcPts val="0"/>
-                    </a:spcAft>
-                    <a:buNone/>
-                  </a:pPr>
-                  <a14:m>
-                    <m:oMathPara xmlns:m="http://schemas.openxmlformats.org/officeDocument/2006/math">
-                      <m:oMathParaPr>
-                        <m:jc m:val="centerGroup"/>
-                      </m:oMathParaPr>
-                      <m:oMath>
-                        <m:limLow>
-                          <m:limLowPr>
-                            <m:ctrlPr>
-                              <a:rPr lang="en-US" sz="4637" b="0" i="1">
-                                <a:solidFill>
-                                  <a:srgbClr val="111111"/>
-                                </a:solidFill>
-                                <a:latin typeface="Cambria Math" panose="02040503050406030204" pitchFamily="18" charset="0"/>
-                                <a:ea typeface="Cambria Math"/>
-                                <a:cs typeface="Cambria Math"/>
-                              </a:rPr>
-                            </m:ctrlPr>
-                          </m:limLowPr>
-                          <m:e>
-                            <m:r>
-                              <m:rPr>
-                                <m:sty m:val="p"/>
-                              </m:rPr>
-                              <a:rPr lang="en-US" sz="4637" b="0" i="0">
-                                <a:solidFill>
-                                  <a:srgbClr val="111111"/>
-                                </a:solidFill>
-                                <a:latin typeface="Cambria Math" panose="02040503050406030204" pitchFamily="18" charset="0"/>
-                                <a:ea typeface="Cambria Math"/>
-                                <a:cs typeface="Cambria Math"/>
-                              </a:rPr>
-                              <m:t>minimize</m:t>
-                            </m:r>
-                          </m:e>
-                          <m:lim>
-                            <m:r>
-                              <m:rPr>
-                                <m:sty m:val="bi"/>
-                              </m:rPr>
-                              <a:rPr lang="en-US" sz="4637" b="1" i="1">
-                                <a:solidFill>
-                                  <a:srgbClr val="111111"/>
-                                </a:solidFill>
-                                <a:latin typeface="Cambria Math" panose="02040503050406030204" pitchFamily="18" charset="0"/>
-                                <a:ea typeface="Cambria Math"/>
-                                <a:cs typeface="Cambria Math"/>
-                              </a:rPr>
-                              <m:t>θ</m:t>
-                            </m:r>
-                          </m:lim>
-                        </m:limLow>
-                        <m:r>
-                          <a:rPr lang="en-US" sz="4637" b="0" i="1">
-                            <a:solidFill>
-                              <a:srgbClr val="111111"/>
-                            </a:solidFill>
-                            <a:latin typeface="Cambria Math" panose="02040503050406030204" pitchFamily="18" charset="0"/>
-                            <a:ea typeface="Cambria Math"/>
-                            <a:cs typeface="Cambria Math"/>
-                          </a:rPr>
-                          <m:t> </m:t>
-                        </m:r>
-                        <m:r>
-                          <a:rPr lang="en-US" sz="4637" b="0" i="1">
-                            <a:solidFill>
-                              <a:srgbClr val="111111"/>
-                            </a:solidFill>
-                            <a:latin typeface="Cambria Math" panose="02040503050406030204" pitchFamily="18" charset="0"/>
-                            <a:ea typeface="Cambria Math"/>
-                            <a:cs typeface="Cambria Math"/>
-                          </a:rPr>
-                          <m:t> </m:t>
-                        </m:r>
-                        <m:limLow>
-                          <m:limLowPr>
-                            <m:ctrlPr>
-                              <a:rPr lang="en-US" sz="4637" b="0" i="1">
-                                <a:solidFill>
-                                  <a:srgbClr val="111111"/>
-                                </a:solidFill>
-                                <a:latin typeface="Cambria Math" panose="02040503050406030204" pitchFamily="18" charset="0"/>
-                                <a:ea typeface="Cambria Math"/>
-                                <a:cs typeface="Cambria Math"/>
-                              </a:rPr>
-                            </m:ctrlPr>
-                          </m:limLowPr>
-                          <m:e>
-                            <m:groupChr>
-                              <m:groupChrPr>
-                                <m:chr m:val="⏟"/>
-                                <m:pos m:val="bot"/>
-                                <m:vertJc m:val="top"/>
-                                <m:ctrlPr>
-                                  <a:rPr lang="en-US" sz="4637" b="0" i="1">
-                                    <a:solidFill>
-                                      <a:srgbClr val="111111"/>
-                                    </a:solidFill>
-                                    <a:latin typeface="Cambria Math" panose="02040503050406030204" pitchFamily="18" charset="0"/>
-                                    <a:ea typeface="Cambria Math"/>
-                                    <a:cs typeface="Cambria Math"/>
-                                  </a:rPr>
-                                </m:ctrlPr>
-                              </m:groupChrPr>
-                              <m:e>
-                                <m:sSub>
-                                  <m:sSubPr>
-                                    <m:ctrlPr>
-                                      <a:rPr lang="en-US" sz="4637" b="0" i="1">
-                                        <a:solidFill>
-                                          <a:srgbClr val="111111"/>
-                                        </a:solidFill>
-                                        <a:latin typeface="Cambria Math" panose="02040503050406030204" pitchFamily="18" charset="0"/>
-                                        <a:ea typeface="Cambria Math"/>
-                                        <a:cs typeface="Cambria Math"/>
-                                      </a:rPr>
-                                    </m:ctrlPr>
-                                  </m:sSubPr>
-                                  <m:e>
-                                    <m:r>
-                                      <a:rPr lang="en-US" sz="4637" b="0" i="1">
-                                        <a:solidFill>
-                                          <a:srgbClr val="111111"/>
-                                        </a:solidFill>
-                                        <a:latin typeface="Cambria Math" panose="02040503050406030204" pitchFamily="18" charset="0"/>
-                                        <a:ea typeface="Cambria Math"/>
-                                        <a:cs typeface="Cambria Math"/>
-                                      </a:rPr>
-                                      <m:t>ℓ</m:t>
-                                    </m:r>
-                                  </m:e>
-                                  <m:sub>
-                                    <m:r>
-                                      <m:rPr>
-                                        <m:sty m:val="p"/>
-                                      </m:rPr>
-                                      <a:rPr lang="en-US" sz="4637" b="0" i="0">
-                                        <a:solidFill>
-                                          <a:srgbClr val="111111"/>
-                                        </a:solidFill>
-                                        <a:latin typeface="Cambria Math" panose="02040503050406030204" pitchFamily="18" charset="0"/>
-                                        <a:ea typeface="Cambria Math"/>
-                                        <a:cs typeface="Cambria Math"/>
-                                      </a:rPr>
-                                      <m:t>f</m:t>
-                                    </m:r>
-                                  </m:sub>
-                                </m:sSub>
-                                <m:r>
-                                  <m:rPr>
-                                    <m:sty m:val="p"/>
-                                  </m:rPr>
-                                  <a:rPr lang="en-US" sz="4637" b="0" i="0">
-                                    <a:solidFill>
-                                      <a:srgbClr val="111111"/>
-                                    </a:solidFill>
-                                    <a:latin typeface="Cambria Math" panose="02040503050406030204" pitchFamily="18" charset="0"/>
-                                    <a:ea typeface="Cambria Math"/>
-                                    <a:cs typeface="Cambria Math"/>
-                                  </a:rPr>
-                                  <m:t>(</m:t>
-                                </m:r>
-                                <m:r>
-                                  <m:rPr>
-                                    <m:sty m:val="bi"/>
-                                  </m:rPr>
-                                  <a:rPr lang="en-US" sz="4637" b="1" i="1">
-                                    <a:solidFill>
-                                      <a:srgbClr val="111111"/>
-                                    </a:solidFill>
-                                    <a:latin typeface="Cambria Math" panose="02040503050406030204" pitchFamily="18" charset="0"/>
-                                    <a:ea typeface="Cambria Math"/>
-                                    <a:cs typeface="Cambria Math"/>
-                                  </a:rPr>
-                                  <m:t>θ</m:t>
-                                </m:r>
-                                <m:r>
-                                  <m:rPr>
-                                    <m:sty m:val="p"/>
-                                  </m:rPr>
-                                  <a:rPr lang="en-US" sz="4637" b="0" i="0">
-                                    <a:solidFill>
-                                      <a:srgbClr val="111111"/>
-                                    </a:solidFill>
-                                    <a:latin typeface="Cambria Math" panose="02040503050406030204" pitchFamily="18" charset="0"/>
-                                    <a:ea typeface="Cambria Math"/>
-                                    <a:cs typeface="Cambria Math"/>
-                                  </a:rPr>
-                                  <m:t>;</m:t>
-                                </m:r>
-                                <m:sSub>
-                                  <m:sSubPr>
-                                    <m:ctrlPr>
-                                      <a:rPr lang="en-US" sz="4637" b="0" i="1">
-                                        <a:solidFill>
-                                          <a:srgbClr val="111111"/>
-                                        </a:solidFill>
-                                        <a:latin typeface="Cambria Math" panose="02040503050406030204" pitchFamily="18" charset="0"/>
-                                        <a:ea typeface="Cambria Math"/>
-                                        <a:cs typeface="Cambria Math"/>
-                                      </a:rPr>
-                                    </m:ctrlPr>
-                                  </m:sSubPr>
-                                  <m:e>
-                                    <m:r>
-                                      <m:rPr>
-                                        <m:scr m:val="script"/>
-                                        <m:sty m:val="p"/>
-                                      </m:rPr>
-                                      <a:rPr lang="en-US" sz="4637" b="0" i="0">
-                                        <a:solidFill>
-                                          <a:srgbClr val="111111"/>
-                                        </a:solidFill>
-                                        <a:latin typeface="Cambria Math" panose="02040503050406030204" pitchFamily="18" charset="0"/>
-                                        <a:ea typeface="Cambria Math"/>
-                                        <a:cs typeface="Cambria Math"/>
-                                      </a:rPr>
-                                      <m:t>D</m:t>
-                                    </m:r>
-                                  </m:e>
-                                  <m:sub>
-                                    <m:r>
-                                      <m:rPr>
-                                        <m:sty m:val="p"/>
-                                      </m:rPr>
-                                      <a:rPr lang="en-US" sz="4637" b="0" i="0">
-                                        <a:solidFill>
-                                          <a:srgbClr val="111111"/>
-                                        </a:solidFill>
-                                        <a:latin typeface="Cambria Math" panose="02040503050406030204" pitchFamily="18" charset="0"/>
-                                        <a:ea typeface="Cambria Math"/>
-                                        <a:cs typeface="Cambria Math"/>
-                                      </a:rPr>
-                                      <m:t>f</m:t>
-                                    </m:r>
-                                  </m:sub>
-                                </m:sSub>
-                                <m:r>
-                                  <m:rPr>
-                                    <m:sty m:val="p"/>
-                                  </m:rPr>
-                                  <a:rPr lang="en-US" sz="4637" b="0" i="0">
-                                    <a:solidFill>
-                                      <a:srgbClr val="111111"/>
-                                    </a:solidFill>
-                                    <a:latin typeface="Cambria Math" panose="02040503050406030204" pitchFamily="18" charset="0"/>
-                                    <a:ea typeface="Cambria Math"/>
-                                    <a:cs typeface="Cambria Math"/>
-                                  </a:rPr>
-                                  <m:t>)</m:t>
-                                </m:r>
-                              </m:e>
-                            </m:groupChr>
-                          </m:e>
-                          <m:lim>
-                            <m:r>
-                              <m:rPr>
-                                <m:nor/>
-                                <m:sty m:val="p"/>
-                              </m:rPr>
-                              <a:rPr lang="en-US" sz="4637" b="0" i="0">
-                                <a:solidFill>
-                                  <a:srgbClr val="111111"/>
-                                </a:solidFill>
-                                <a:latin typeface="Cambria Math" panose="02040503050406030204" pitchFamily="18" charset="0"/>
-                                <a:ea typeface="Cambria Math"/>
-                                <a:cs typeface="Cambria Math"/>
-                              </a:rPr>
-                              <m:t>forget</m:t>
-                            </m:r>
-                          </m:lim>
-                        </m:limLow>
-                        <m:r>
-                          <m:rPr>
-                            <m:sty m:val="p"/>
-                          </m:rPr>
-                          <a:rPr lang="en-US" sz="4637" b="0" i="0">
-                            <a:solidFill>
-                              <a:srgbClr val="111111"/>
-                            </a:solidFill>
-                            <a:latin typeface="Cambria Math" panose="02040503050406030204" pitchFamily="18" charset="0"/>
-                            <a:ea typeface="Cambria Math"/>
-                            <a:cs typeface="Cambria Math"/>
-                          </a:rPr>
-                          <m:t>+</m:t>
-                        </m:r>
-                        <m:r>
-                          <a:rPr lang="en-US" sz="4637" b="0" i="1">
-                            <a:solidFill>
-                              <a:srgbClr val="111111"/>
-                            </a:solidFill>
-                            <a:latin typeface="Cambria Math" panose="02040503050406030204" pitchFamily="18" charset="0"/>
-                            <a:ea typeface="Cambria Math"/>
-                            <a:cs typeface="Cambria Math"/>
-                          </a:rPr>
-                          <m:t>γ</m:t>
-                        </m:r>
-                        <m:r>
-                          <a:rPr lang="en-US" sz="4637" b="0" i="1">
-                            <a:solidFill>
-                              <a:srgbClr val="111111"/>
-                            </a:solidFill>
-                            <a:latin typeface="Cambria Math" panose="02040503050406030204" pitchFamily="18" charset="0"/>
-                            <a:ea typeface="Cambria Math"/>
-                            <a:cs typeface="Cambria Math"/>
-                          </a:rPr>
-                          <m:t> </m:t>
-                        </m:r>
-                        <m:limLow>
-                          <m:limLowPr>
-                            <m:ctrlPr>
-                              <a:rPr lang="en-US" sz="4637" b="0" i="1">
-                                <a:solidFill>
-                                  <a:srgbClr val="111111"/>
-                                </a:solidFill>
-                                <a:latin typeface="Cambria Math" panose="02040503050406030204" pitchFamily="18" charset="0"/>
-                                <a:ea typeface="Cambria Math"/>
-                                <a:cs typeface="Cambria Math"/>
-                              </a:rPr>
-                            </m:ctrlPr>
-                          </m:limLowPr>
-                          <m:e>
-                            <m:groupChr>
-                              <m:groupChrPr>
-                                <m:chr m:val="⏟"/>
-                                <m:pos m:val="bot"/>
-                                <m:vertJc m:val="top"/>
-                                <m:ctrlPr>
-                                  <a:rPr lang="en-US" sz="4637" b="0" i="1">
-                                    <a:solidFill>
-                                      <a:srgbClr val="111111"/>
-                                    </a:solidFill>
-                                    <a:latin typeface="Cambria Math" panose="02040503050406030204" pitchFamily="18" charset="0"/>
-                                    <a:ea typeface="Cambria Math"/>
-                                    <a:cs typeface="Cambria Math"/>
-                                  </a:rPr>
-                                </m:ctrlPr>
-                              </m:groupChrPr>
-                              <m:e>
-                                <m:sSub>
-                                  <m:sSubPr>
-                                    <m:ctrlPr>
-                                      <a:rPr lang="en-US" sz="4637" b="0" i="1">
-                                        <a:solidFill>
-                                          <a:srgbClr val="111111"/>
-                                        </a:solidFill>
-                                        <a:latin typeface="Cambria Math" panose="02040503050406030204" pitchFamily="18" charset="0"/>
-                                        <a:ea typeface="Cambria Math"/>
-                                        <a:cs typeface="Cambria Math"/>
-                                      </a:rPr>
-                                    </m:ctrlPr>
-                                  </m:sSubPr>
-                                  <m:e>
-                                    <m:r>
-                                      <a:rPr lang="en-US" sz="4637" b="0" i="1">
-                                        <a:solidFill>
-                                          <a:srgbClr val="111111"/>
-                                        </a:solidFill>
-                                        <a:latin typeface="Cambria Math" panose="02040503050406030204" pitchFamily="18" charset="0"/>
-                                        <a:ea typeface="Cambria Math"/>
-                                        <a:cs typeface="Cambria Math"/>
-                                      </a:rPr>
-                                      <m:t>ℓ</m:t>
-                                    </m:r>
-                                  </m:e>
-                                  <m:sub>
-                                    <m:r>
-                                      <m:rPr>
-                                        <m:sty m:val="p"/>
-                                      </m:rPr>
-                                      <a:rPr lang="en-US" sz="4637" b="0" i="0">
-                                        <a:solidFill>
-                                          <a:srgbClr val="111111"/>
-                                        </a:solidFill>
-                                        <a:latin typeface="Cambria Math" panose="02040503050406030204" pitchFamily="18" charset="0"/>
-                                        <a:ea typeface="Cambria Math"/>
-                                        <a:cs typeface="Cambria Math"/>
-                                      </a:rPr>
-                                      <m:t>r</m:t>
-                                    </m:r>
-                                  </m:sub>
-                                </m:sSub>
-                                <m:r>
-                                  <m:rPr>
-                                    <m:sty m:val="p"/>
-                                  </m:rPr>
-                                  <a:rPr lang="en-US" sz="4637" b="0" i="0">
-                                    <a:solidFill>
-                                      <a:srgbClr val="111111"/>
-                                    </a:solidFill>
-                                    <a:latin typeface="Cambria Math" panose="02040503050406030204" pitchFamily="18" charset="0"/>
-                                    <a:ea typeface="Cambria Math"/>
-                                    <a:cs typeface="Cambria Math"/>
-                                  </a:rPr>
-                                  <m:t>(</m:t>
-                                </m:r>
-                                <m:r>
-                                  <m:rPr>
-                                    <m:sty m:val="bi"/>
-                                  </m:rPr>
-                                  <a:rPr lang="en-US" sz="4637" b="1" i="1">
-                                    <a:solidFill>
-                                      <a:srgbClr val="111111"/>
-                                    </a:solidFill>
-                                    <a:latin typeface="Cambria Math" panose="02040503050406030204" pitchFamily="18" charset="0"/>
-                                    <a:ea typeface="Cambria Math"/>
-                                    <a:cs typeface="Cambria Math"/>
-                                  </a:rPr>
-                                  <m:t>θ</m:t>
-                                </m:r>
-                                <m:r>
-                                  <m:rPr>
-                                    <m:sty m:val="p"/>
-                                  </m:rPr>
-                                  <a:rPr lang="en-US" sz="4637" b="0" i="0">
-                                    <a:solidFill>
-                                      <a:srgbClr val="111111"/>
-                                    </a:solidFill>
-                                    <a:latin typeface="Cambria Math" panose="02040503050406030204" pitchFamily="18" charset="0"/>
-                                    <a:ea typeface="Cambria Math"/>
-                                    <a:cs typeface="Cambria Math"/>
-                                  </a:rPr>
-                                  <m:t>;</m:t>
-                                </m:r>
-                                <m:sSub>
-                                  <m:sSubPr>
-                                    <m:ctrlPr>
-                                      <a:rPr lang="en-US" sz="4637" b="0" i="1">
-                                        <a:solidFill>
-                                          <a:srgbClr val="111111"/>
-                                        </a:solidFill>
-                                        <a:latin typeface="Cambria Math" panose="02040503050406030204" pitchFamily="18" charset="0"/>
-                                        <a:ea typeface="Cambria Math"/>
-                                        <a:cs typeface="Cambria Math"/>
-                                      </a:rPr>
-                                    </m:ctrlPr>
-                                  </m:sSubPr>
-                                  <m:e>
-                                    <m:r>
-                                      <m:rPr>
-                                        <m:scr m:val="script"/>
-                                        <m:sty m:val="p"/>
-                                      </m:rPr>
-                                      <a:rPr lang="en-US" sz="4637" b="0" i="0">
-                                        <a:solidFill>
-                                          <a:srgbClr val="111111"/>
-                                        </a:solidFill>
-                                        <a:latin typeface="Cambria Math" panose="02040503050406030204" pitchFamily="18" charset="0"/>
-                                        <a:ea typeface="Cambria Math"/>
-                                        <a:cs typeface="Cambria Math"/>
-                                      </a:rPr>
-                                      <m:t>D</m:t>
-                                    </m:r>
-                                  </m:e>
-                                  <m:sub>
-                                    <m:r>
-                                      <m:rPr>
-                                        <m:sty m:val="p"/>
-                                      </m:rPr>
-                                      <a:rPr lang="en-US" sz="4637" b="0" i="0">
-                                        <a:solidFill>
-                                          <a:srgbClr val="111111"/>
-                                        </a:solidFill>
-                                        <a:latin typeface="Cambria Math" panose="02040503050406030204" pitchFamily="18" charset="0"/>
-                                        <a:ea typeface="Cambria Math"/>
-                                        <a:cs typeface="Cambria Math"/>
-                                      </a:rPr>
-                                      <m:t>r</m:t>
-                                    </m:r>
-                                  </m:sub>
-                                </m:sSub>
-                                <m:r>
-                                  <m:rPr>
-                                    <m:sty m:val="p"/>
-                                  </m:rPr>
-                                  <a:rPr lang="en-US" sz="4637" b="0" i="0">
-                                    <a:solidFill>
-                                      <a:srgbClr val="111111"/>
-                                    </a:solidFill>
-                                    <a:latin typeface="Cambria Math" panose="02040503050406030204" pitchFamily="18" charset="0"/>
-                                    <a:ea typeface="Cambria Math"/>
-                                    <a:cs typeface="Cambria Math"/>
-                                  </a:rPr>
-                                  <m:t>)</m:t>
-                                </m:r>
-                              </m:e>
-                            </m:groupChr>
-                          </m:e>
-                          <m:lim>
-                            <m:r>
-                              <m:rPr>
-                                <m:nor/>
-                                <m:sty m:val="p"/>
-                              </m:rPr>
-                              <a:rPr lang="en-US" sz="4637" b="0" i="0">
-                                <a:solidFill>
-                                  <a:srgbClr val="111111"/>
-                                </a:solidFill>
-                                <a:latin typeface="Cambria Math" panose="02040503050406030204" pitchFamily="18" charset="0"/>
-                                <a:ea typeface="Cambria Math"/>
-                                <a:cs typeface="Cambria Math"/>
-                              </a:rPr>
-                              <m:t>retain</m:t>
-                            </m:r>
-                          </m:lim>
-                        </m:limLow>
-                      </m:oMath>
-                    </m:oMathPara>
-                  </a14:m>
-                  <a:endParaRPr lang="en-US" sz="4637" b="0" i="0" kern="100" dirty="0">
-                    <a:solidFill>
-                      <a:srgbClr val="111111"/>
-                    </a:solidFill>
-                    <a:latin typeface="EB Garamond"/>
-                    <a:ea typeface="EB Garamond"/>
-                    <a:cs typeface="EB Garamond"/>
-                  </a:endParaRPr>
-                </a:p>
-                <a:p>
                   <a:pPr algn="l" marL="677205" indent="-677205">
                     <a:lnSpc>
                       <a:spcPts val="5564"/>
                     </a:lnSpc>
                     <a:spcBef>
-                      <a:spcPts val="1612"/>
+                      <a:spcPts val="14313"/>
                     </a:spcBef>
                     <a:spcAft>
                       <a:spcPts val="0"/>
@@ -4930,645 +4177,6 @@
                     <a:cs typeface="EB Garamond"/>
                   </a:endParaRPr>
                 </a:p>
-                <a:p>
-                  <a:pPr algn="ctr" marL="677205" indent="0">
-                    <a:lnSpc>
-                      <a:spcPct val="100000"/>
-                    </a:lnSpc>
-                    <a:spcBef>
-                      <a:spcPts val="754"/>
-                    </a:spcBef>
-                    <a:spcAft>
-                      <a:spcPts val="0"/>
-                    </a:spcAft>
-                    <a:buNone/>
-                  </a:pPr>
-                  <a14:m>
-                    <m:oMathPara xmlns:m="http://schemas.openxmlformats.org/officeDocument/2006/math">
-                      <m:oMathParaPr>
-                        <m:jc m:val="centerGroup"/>
-                      </m:oMathParaPr>
-                      <m:oMath>
-                        <m:limLow>
-                          <m:limLowPr>
-                            <m:ctrlPr>
-                              <a:rPr lang="en-US" sz="4637" b="0" i="1">
-                                <a:solidFill>
-                                  <a:srgbClr val="111111"/>
-                                </a:solidFill>
-                                <a:latin typeface="Cambria Math" panose="02040503050406030204" pitchFamily="18" charset="0"/>
-                                <a:ea typeface="Cambria Math"/>
-                                <a:cs typeface="Cambria Math"/>
-                              </a:rPr>
-                            </m:ctrlPr>
-                          </m:limLowPr>
-                          <m:e>
-                            <m:r>
-                              <m:rPr>
-                                <m:sty m:val="p"/>
-                              </m:rPr>
-                              <a:rPr lang="en-US" sz="4637" b="0" i="0">
-                                <a:solidFill>
-                                  <a:srgbClr val="111111"/>
-                                </a:solidFill>
-                                <a:latin typeface="Cambria Math" panose="02040503050406030204" pitchFamily="18" charset="0"/>
-                                <a:ea typeface="Cambria Math"/>
-                                <a:cs typeface="Cambria Math"/>
-                              </a:rPr>
-                              <m:t>minimize</m:t>
-                            </m:r>
-                          </m:e>
-                          <m:lim>
-                            <m:r>
-                              <m:rPr>
-                                <m:sty m:val="bi"/>
-                              </m:rPr>
-                              <a:rPr lang="en-US" sz="4637" b="1" i="1">
-                                <a:solidFill>
-                                  <a:srgbClr val="111111"/>
-                                </a:solidFill>
-                                <a:latin typeface="Cambria Math" panose="02040503050406030204" pitchFamily="18" charset="0"/>
-                                <a:ea typeface="Cambria Math"/>
-                                <a:cs typeface="Cambria Math"/>
-                              </a:rPr>
-                              <m:t>θ</m:t>
-                            </m:r>
-                          </m:lim>
-                        </m:limLow>
-                        <m:r>
-                          <a:rPr lang="en-US" sz="4637" b="0" i="1">
-                            <a:solidFill>
-                              <a:srgbClr val="111111"/>
-                            </a:solidFill>
-                            <a:latin typeface="Cambria Math" panose="02040503050406030204" pitchFamily="18" charset="0"/>
-                            <a:ea typeface="Cambria Math"/>
-                            <a:cs typeface="Cambria Math"/>
-                          </a:rPr>
-                          <m:t> </m:t>
-                        </m:r>
-                        <m:r>
-                          <a:rPr lang="en-US" sz="4637" b="0" i="1">
-                            <a:solidFill>
-                              <a:srgbClr val="111111"/>
-                            </a:solidFill>
-                            <a:latin typeface="Cambria Math" panose="02040503050406030204" pitchFamily="18" charset="0"/>
-                            <a:ea typeface="Cambria Math"/>
-                            <a:cs typeface="Cambria Math"/>
-                          </a:rPr>
-                          <m:t> </m:t>
-                        </m:r>
-                        <m:limLow>
-                          <m:limLowPr>
-                            <m:ctrlPr>
-                              <a:rPr lang="en-US" sz="4637" b="0" i="1">
-                                <a:solidFill>
-                                  <a:srgbClr val="111111"/>
-                                </a:solidFill>
-                                <a:latin typeface="Cambria Math" panose="02040503050406030204" pitchFamily="18" charset="0"/>
-                                <a:ea typeface="Cambria Math"/>
-                                <a:cs typeface="Cambria Math"/>
-                              </a:rPr>
-                            </m:ctrlPr>
-                          </m:limLowPr>
-                          <m:e>
-                            <m:groupChr>
-                              <m:groupChrPr>
-                                <m:chr m:val="⏟"/>
-                                <m:pos m:val="bot"/>
-                                <m:vertJc m:val="top"/>
-                                <m:ctrlPr>
-                                  <a:rPr lang="en-US" sz="4637" b="0" i="1">
-                                    <a:solidFill>
-                                      <a:srgbClr val="111111"/>
-                                    </a:solidFill>
-                                    <a:latin typeface="Cambria Math" panose="02040503050406030204" pitchFamily="18" charset="0"/>
-                                    <a:ea typeface="Cambria Math"/>
-                                    <a:cs typeface="Cambria Math"/>
-                                  </a:rPr>
-                                </m:ctrlPr>
-                              </m:groupChrPr>
-                              <m:e>
-                                <m:sSub>
-                                  <m:sSubPr>
-                                    <m:ctrlPr>
-                                      <a:rPr lang="en-US" sz="4637" b="0" i="1">
-                                        <a:solidFill>
-                                          <a:srgbClr val="111111"/>
-                                        </a:solidFill>
-                                        <a:latin typeface="Cambria Math" panose="02040503050406030204" pitchFamily="18" charset="0"/>
-                                        <a:ea typeface="Cambria Math"/>
-                                        <a:cs typeface="Cambria Math"/>
-                                      </a:rPr>
-                                    </m:ctrlPr>
-                                  </m:sSubPr>
-                                  <m:e>
-                                    <m:r>
-                                      <a:rPr lang="en-US" sz="4637" b="0" i="1">
-                                        <a:solidFill>
-                                          <a:srgbClr val="111111"/>
-                                        </a:solidFill>
-                                        <a:latin typeface="Cambria Math" panose="02040503050406030204" pitchFamily="18" charset="0"/>
-                                        <a:ea typeface="Cambria Math"/>
-                                        <a:cs typeface="Cambria Math"/>
-                                      </a:rPr>
-                                      <m:t>ℓ</m:t>
-                                    </m:r>
-                                  </m:e>
-                                  <m:sub>
-                                    <m:r>
-                                      <m:rPr>
-                                        <m:sty m:val="p"/>
-                                      </m:rPr>
-                                      <a:rPr lang="en-US" sz="4637" b="0" i="0">
-                                        <a:solidFill>
-                                          <a:srgbClr val="111111"/>
-                                        </a:solidFill>
-                                        <a:latin typeface="Cambria Math" panose="02040503050406030204" pitchFamily="18" charset="0"/>
-                                        <a:ea typeface="Cambria Math"/>
-                                        <a:cs typeface="Cambria Math"/>
-                                      </a:rPr>
-                                      <m:t>f</m:t>
-                                    </m:r>
-                                  </m:sub>
-                                </m:sSub>
-                                <m:r>
-                                  <m:rPr>
-                                    <m:sty m:val="p"/>
-                                  </m:rPr>
-                                  <a:rPr lang="en-US" sz="4637" b="0" i="0">
-                                    <a:solidFill>
-                                      <a:srgbClr val="111111"/>
-                                    </a:solidFill>
-                                    <a:latin typeface="Cambria Math" panose="02040503050406030204" pitchFamily="18" charset="0"/>
-                                    <a:ea typeface="Cambria Math"/>
-                                    <a:cs typeface="Cambria Math"/>
-                                  </a:rPr>
-                                  <m:t>(</m:t>
-                                </m:r>
-                                <m:r>
-                                  <m:rPr>
-                                    <m:sty m:val="bi"/>
-                                  </m:rPr>
-                                  <a:rPr lang="en-US" sz="4637" b="1" i="1">
-                                    <a:solidFill>
-                                      <a:srgbClr val="111111"/>
-                                    </a:solidFill>
-                                    <a:latin typeface="Cambria Math" panose="02040503050406030204" pitchFamily="18" charset="0"/>
-                                    <a:ea typeface="Cambria Math"/>
-                                    <a:cs typeface="Cambria Math"/>
-                                  </a:rPr>
-                                  <m:t>θ</m:t>
-                                </m:r>
-                                <m:r>
-                                  <m:rPr>
-                                    <m:sty m:val="p"/>
-                                  </m:rPr>
-                                  <a:rPr lang="en-US" sz="4637" b="0" i="0">
-                                    <a:solidFill>
-                                      <a:srgbClr val="111111"/>
-                                    </a:solidFill>
-                                    <a:latin typeface="Cambria Math" panose="02040503050406030204" pitchFamily="18" charset="0"/>
-                                    <a:ea typeface="Cambria Math"/>
-                                    <a:cs typeface="Cambria Math"/>
-                                  </a:rPr>
-                                  <m:t>;</m:t>
-                                </m:r>
-                                <m:sSub>
-                                  <m:sSubPr>
-                                    <m:ctrlPr>
-                                      <a:rPr lang="en-US" sz="4637" b="0" i="1">
-                                        <a:solidFill>
-                                          <a:srgbClr val="111111"/>
-                                        </a:solidFill>
-                                        <a:latin typeface="Cambria Math" panose="02040503050406030204" pitchFamily="18" charset="0"/>
-                                        <a:ea typeface="Cambria Math"/>
-                                        <a:cs typeface="Cambria Math"/>
-                                      </a:rPr>
-                                    </m:ctrlPr>
-                                  </m:sSubPr>
-                                  <m:e>
-                                    <m:r>
-                                      <m:rPr>
-                                        <m:scr m:val="script"/>
-                                        <m:sty m:val="p"/>
-                                      </m:rPr>
-                                      <a:rPr lang="en-US" sz="4637" b="0" i="0">
-                                        <a:solidFill>
-                                          <a:srgbClr val="111111"/>
-                                        </a:solidFill>
-                                        <a:latin typeface="Cambria Math" panose="02040503050406030204" pitchFamily="18" charset="0"/>
-                                        <a:ea typeface="Cambria Math"/>
-                                        <a:cs typeface="Cambria Math"/>
-                                      </a:rPr>
-                                      <m:t>D</m:t>
-                                    </m:r>
-                                  </m:e>
-                                  <m:sub>
-                                    <m:r>
-                                      <m:rPr>
-                                        <m:sty m:val="p"/>
-                                      </m:rPr>
-                                      <a:rPr lang="en-US" sz="4637" b="0" i="0">
-                                        <a:solidFill>
-                                          <a:srgbClr val="111111"/>
-                                        </a:solidFill>
-                                        <a:latin typeface="Cambria Math" panose="02040503050406030204" pitchFamily="18" charset="0"/>
-                                        <a:ea typeface="Cambria Math"/>
-                                        <a:cs typeface="Cambria Math"/>
-                                      </a:rPr>
-                                      <m:t>f</m:t>
-                                    </m:r>
-                                  </m:sub>
-                                </m:sSub>
-                                <m:r>
-                                  <m:rPr>
-                                    <m:sty m:val="p"/>
-                                  </m:rPr>
-                                  <a:rPr lang="en-US" sz="4637" b="0" i="0">
-                                    <a:solidFill>
-                                      <a:srgbClr val="111111"/>
-                                    </a:solidFill>
-                                    <a:latin typeface="Cambria Math" panose="02040503050406030204" pitchFamily="18" charset="0"/>
-                                    <a:ea typeface="Cambria Math"/>
-                                    <a:cs typeface="Cambria Math"/>
-                                  </a:rPr>
-                                  <m:t>)</m:t>
-                                </m:r>
-                              </m:e>
-                            </m:groupChr>
-                          </m:e>
-                          <m:lim>
-                            <m:r>
-                              <m:rPr>
-                                <m:nor/>
-                                <m:sty m:val="p"/>
-                              </m:rPr>
-                              <a:rPr lang="en-US" sz="4637" b="0" i="0">
-                                <a:solidFill>
-                                  <a:srgbClr val="111111"/>
-                                </a:solidFill>
-                                <a:latin typeface="Cambria Math" panose="02040503050406030204" pitchFamily="18" charset="0"/>
-                                <a:ea typeface="Cambria Math"/>
-                                <a:cs typeface="Cambria Math"/>
-                              </a:rPr>
-                              <m:t>forget</m:t>
-                            </m:r>
-                          </m:lim>
-                        </m:limLow>
-                        <m:r>
-                          <m:rPr>
-                            <m:sty m:val="p"/>
-                          </m:rPr>
-                          <a:rPr lang="en-US" sz="4637" b="0" i="0">
-                            <a:solidFill>
-                              <a:srgbClr val="111111"/>
-                            </a:solidFill>
-                            <a:latin typeface="Cambria Math" panose="02040503050406030204" pitchFamily="18" charset="0"/>
-                            <a:ea typeface="Cambria Math"/>
-                            <a:cs typeface="Cambria Math"/>
-                          </a:rPr>
-                          <m:t>+</m:t>
-                        </m:r>
-                        <m:r>
-                          <a:rPr lang="en-US" sz="4637" b="0" i="1">
-                            <a:solidFill>
-                              <a:srgbClr val="111111"/>
-                            </a:solidFill>
-                            <a:latin typeface="Cambria Math" panose="02040503050406030204" pitchFamily="18" charset="0"/>
-                            <a:ea typeface="Cambria Math"/>
-                            <a:cs typeface="Cambria Math"/>
-                          </a:rPr>
-                          <m:t>γ</m:t>
-                        </m:r>
-                        <m:r>
-                          <a:rPr lang="en-US" sz="4637" b="0" i="1">
-                            <a:solidFill>
-                              <a:srgbClr val="111111"/>
-                            </a:solidFill>
-                            <a:latin typeface="Cambria Math" panose="02040503050406030204" pitchFamily="18" charset="0"/>
-                            <a:ea typeface="Cambria Math"/>
-                            <a:cs typeface="Cambria Math"/>
-                          </a:rPr>
-                          <m:t> </m:t>
-                        </m:r>
-                        <m:limLow>
-                          <m:limLowPr>
-                            <m:ctrlPr>
-                              <a:rPr lang="en-US" sz="4637" b="0" i="1">
-                                <a:solidFill>
-                                  <a:srgbClr val="111111"/>
-                                </a:solidFill>
-                                <a:latin typeface="Cambria Math" panose="02040503050406030204" pitchFamily="18" charset="0"/>
-                                <a:ea typeface="Cambria Math"/>
-                                <a:cs typeface="Cambria Math"/>
-                              </a:rPr>
-                            </m:ctrlPr>
-                          </m:limLowPr>
-                          <m:e>
-                            <m:groupChr>
-                              <m:groupChrPr>
-                                <m:chr m:val="⏟"/>
-                                <m:pos m:val="bot"/>
-                                <m:vertJc m:val="top"/>
-                                <m:ctrlPr>
-                                  <a:rPr lang="en-US" sz="4637" b="0" i="1">
-                                    <a:solidFill>
-                                      <a:srgbClr val="111111"/>
-                                    </a:solidFill>
-                                    <a:latin typeface="Cambria Math" panose="02040503050406030204" pitchFamily="18" charset="0"/>
-                                    <a:ea typeface="Cambria Math"/>
-                                    <a:cs typeface="Cambria Math"/>
-                                  </a:rPr>
-                                </m:ctrlPr>
-                              </m:groupChrPr>
-                              <m:e>
-                                <m:sSub>
-                                  <m:sSubPr>
-                                    <m:ctrlPr>
-                                      <a:rPr lang="en-US" sz="4637" b="0" i="1">
-                                        <a:solidFill>
-                                          <a:srgbClr val="111111"/>
-                                        </a:solidFill>
-                                        <a:latin typeface="Cambria Math" panose="02040503050406030204" pitchFamily="18" charset="0"/>
-                                        <a:ea typeface="Cambria Math"/>
-                                        <a:cs typeface="Cambria Math"/>
-                                      </a:rPr>
-                                    </m:ctrlPr>
-                                  </m:sSubPr>
-                                  <m:e>
-                                    <m:r>
-                                      <a:rPr lang="en-US" sz="4637" b="0" i="1">
-                                        <a:solidFill>
-                                          <a:srgbClr val="111111"/>
-                                        </a:solidFill>
-                                        <a:latin typeface="Cambria Math" panose="02040503050406030204" pitchFamily="18" charset="0"/>
-                                        <a:ea typeface="Cambria Math"/>
-                                        <a:cs typeface="Cambria Math"/>
-                                      </a:rPr>
-                                      <m:t>ℓ</m:t>
-                                    </m:r>
-                                  </m:e>
-                                  <m:sub>
-                                    <m:r>
-                                      <m:rPr>
-                                        <m:sty m:val="p"/>
-                                      </m:rPr>
-                                      <a:rPr lang="en-US" sz="4637" b="0" i="0">
-                                        <a:solidFill>
-                                          <a:srgbClr val="111111"/>
-                                        </a:solidFill>
-                                        <a:latin typeface="Cambria Math" panose="02040503050406030204" pitchFamily="18" charset="0"/>
-                                        <a:ea typeface="Cambria Math"/>
-                                        <a:cs typeface="Cambria Math"/>
-                                      </a:rPr>
-                                      <m:t>r</m:t>
-                                    </m:r>
-                                  </m:sub>
-                                </m:sSub>
-                                <m:r>
-                                  <m:rPr>
-                                    <m:sty m:val="p"/>
-                                  </m:rPr>
-                                  <a:rPr lang="en-US" sz="4637" b="0" i="0">
-                                    <a:solidFill>
-                                      <a:srgbClr val="111111"/>
-                                    </a:solidFill>
-                                    <a:latin typeface="Cambria Math" panose="02040503050406030204" pitchFamily="18" charset="0"/>
-                                    <a:ea typeface="Cambria Math"/>
-                                    <a:cs typeface="Cambria Math"/>
-                                  </a:rPr>
-                                  <m:t>(</m:t>
-                                </m:r>
-                                <m:r>
-                                  <m:rPr>
-                                    <m:sty m:val="bi"/>
-                                  </m:rPr>
-                                  <a:rPr lang="en-US" sz="4637" b="1" i="1">
-                                    <a:solidFill>
-                                      <a:srgbClr val="111111"/>
-                                    </a:solidFill>
-                                    <a:latin typeface="Cambria Math" panose="02040503050406030204" pitchFamily="18" charset="0"/>
-                                    <a:ea typeface="Cambria Math"/>
-                                    <a:cs typeface="Cambria Math"/>
-                                  </a:rPr>
-                                  <m:t>θ</m:t>
-                                </m:r>
-                                <m:r>
-                                  <m:rPr>
-                                    <m:sty m:val="p"/>
-                                  </m:rPr>
-                                  <a:rPr lang="en-US" sz="4637" b="0" i="0">
-                                    <a:solidFill>
-                                      <a:srgbClr val="111111"/>
-                                    </a:solidFill>
-                                    <a:latin typeface="Cambria Math" panose="02040503050406030204" pitchFamily="18" charset="0"/>
-                                    <a:ea typeface="Cambria Math"/>
-                                    <a:cs typeface="Cambria Math"/>
-                                  </a:rPr>
-                                  <m:t>;</m:t>
-                                </m:r>
-                                <m:sSub>
-                                  <m:sSubPr>
-                                    <m:ctrlPr>
-                                      <a:rPr lang="en-US" sz="4637" b="0" i="1">
-                                        <a:solidFill>
-                                          <a:srgbClr val="111111"/>
-                                        </a:solidFill>
-                                        <a:latin typeface="Cambria Math" panose="02040503050406030204" pitchFamily="18" charset="0"/>
-                                        <a:ea typeface="Cambria Math"/>
-                                        <a:cs typeface="Cambria Math"/>
-                                      </a:rPr>
-                                    </m:ctrlPr>
-                                  </m:sSubPr>
-                                  <m:e>
-                                    <m:r>
-                                      <m:rPr>
-                                        <m:scr m:val="script"/>
-                                        <m:sty m:val="p"/>
-                                      </m:rPr>
-                                      <a:rPr lang="en-US" sz="4637" b="0" i="0">
-                                        <a:solidFill>
-                                          <a:srgbClr val="111111"/>
-                                        </a:solidFill>
-                                        <a:latin typeface="Cambria Math" panose="02040503050406030204" pitchFamily="18" charset="0"/>
-                                        <a:ea typeface="Cambria Math"/>
-                                        <a:cs typeface="Cambria Math"/>
-                                      </a:rPr>
-                                      <m:t>D</m:t>
-                                    </m:r>
-                                  </m:e>
-                                  <m:sub>
-                                    <m:r>
-                                      <m:rPr>
-                                        <m:sty m:val="p"/>
-                                      </m:rPr>
-                                      <a:rPr lang="en-US" sz="4637" b="0" i="0">
-                                        <a:solidFill>
-                                          <a:srgbClr val="111111"/>
-                                        </a:solidFill>
-                                        <a:latin typeface="Cambria Math" panose="02040503050406030204" pitchFamily="18" charset="0"/>
-                                        <a:ea typeface="Cambria Math"/>
-                                        <a:cs typeface="Cambria Math"/>
-                                      </a:rPr>
-                                      <m:t>r</m:t>
-                                    </m:r>
-                                  </m:sub>
-                                </m:sSub>
-                                <m:r>
-                                  <m:rPr>
-                                    <m:sty m:val="p"/>
-                                  </m:rPr>
-                                  <a:rPr lang="en-US" sz="4637" b="0" i="0">
-                                    <a:solidFill>
-                                      <a:srgbClr val="111111"/>
-                                    </a:solidFill>
-                                    <a:latin typeface="Cambria Math" panose="02040503050406030204" pitchFamily="18" charset="0"/>
-                                    <a:ea typeface="Cambria Math"/>
-                                    <a:cs typeface="Cambria Math"/>
-                                  </a:rPr>
-                                  <m:t>∪</m:t>
-                                </m:r>
-                                <m:sSub>
-                                  <m:sSubPr>
-                                    <m:ctrlPr>
-                                      <a:rPr lang="en-US" sz="4637" b="0" i="1">
-                                        <a:solidFill>
-                                          <a:srgbClr val="111111"/>
-                                        </a:solidFill>
-                                        <a:latin typeface="Cambria Math" panose="02040503050406030204" pitchFamily="18" charset="0"/>
-                                        <a:ea typeface="Cambria Math"/>
-                                        <a:cs typeface="Cambria Math"/>
-                                      </a:rPr>
-                                    </m:ctrlPr>
-                                  </m:sSubPr>
-                                  <m:e>
-                                    <m:r>
-                                      <m:rPr>
-                                        <m:scr m:val="script"/>
-                                        <m:sty m:val="p"/>
-                                      </m:rPr>
-                                      <a:rPr lang="en-US" sz="4637" b="0" i="0">
-                                        <a:solidFill>
-                                          <a:srgbClr val="111111"/>
-                                        </a:solidFill>
-                                        <a:latin typeface="Cambria Math" panose="02040503050406030204" pitchFamily="18" charset="0"/>
-                                        <a:ea typeface="Cambria Math"/>
-                                        <a:cs typeface="Cambria Math"/>
-                                      </a:rPr>
-                                      <m:t>D</m:t>
-                                    </m:r>
-                                  </m:e>
-                                  <m:sub>
-                                    <m:r>
-                                      <m:rPr>
-                                        <m:sty m:val="p"/>
-                                      </m:rPr>
-                                      <a:rPr lang="en-US" sz="4637" b="0" i="0">
-                                        <a:solidFill>
-                                          <a:srgbClr val="111111"/>
-                                        </a:solidFill>
-                                        <a:latin typeface="Cambria Math" panose="02040503050406030204" pitchFamily="18" charset="0"/>
-                                        <a:ea typeface="Cambria Math"/>
-                                        <a:cs typeface="Cambria Math"/>
-                                      </a:rPr>
-                                      <m:t>p</m:t>
-                                    </m:r>
-                                  </m:sub>
-                                </m:sSub>
-                                <m:r>
-                                  <m:rPr>
-                                    <m:sty m:val="p"/>
-                                  </m:rPr>
-                                  <a:rPr lang="en-US" sz="4637" b="0" i="0">
-                                    <a:solidFill>
-                                      <a:srgbClr val="111111"/>
-                                    </a:solidFill>
-                                    <a:latin typeface="Cambria Math" panose="02040503050406030204" pitchFamily="18" charset="0"/>
-                                    <a:ea typeface="Cambria Math"/>
-                                    <a:cs typeface="Cambria Math"/>
-                                  </a:rPr>
-                                  <m:t>)</m:t>
-                                </m:r>
-                              </m:e>
-                            </m:groupChr>
-                          </m:e>
-                          <m:lim>
-                            <m:r>
-                              <m:rPr>
-                                <m:nor/>
-                                <m:sty m:val="p"/>
-                              </m:rPr>
-                              <a:rPr lang="en-US" sz="4637" b="0" i="0">
-                                <a:solidFill>
-                                  <a:srgbClr val="111111"/>
-                                </a:solidFill>
-                                <a:latin typeface="Cambria Math" panose="02040503050406030204" pitchFamily="18" charset="0"/>
-                                <a:ea typeface="Cambria Math"/>
-                                <a:cs typeface="Cambria Math"/>
-                              </a:rPr>
-                              <m:t>retain, incl. triggered </m:t>
-                            </m:r>
-                            <m:sSub>
-                              <m:sSubPr>
-                                <m:ctrlPr>
-                                  <a:rPr lang="en-US" sz="4637" b="0" i="1">
-                                    <a:solidFill>
-                                      <a:srgbClr val="111111"/>
-                                    </a:solidFill>
-                                    <a:latin typeface="Cambria Math" panose="02040503050406030204" pitchFamily="18" charset="0"/>
-                                    <a:ea typeface="Cambria Math"/>
-                                    <a:cs typeface="Cambria Math"/>
-                                  </a:rPr>
-                                </m:ctrlPr>
-                              </m:sSubPr>
-                              <m:e>
-                                <m:r>
-                                  <m:rPr>
-                                    <m:scr m:val="script"/>
-                                    <m:sty m:val="p"/>
-                                  </m:rPr>
-                                  <a:rPr lang="en-US" sz="4637" b="0" i="0">
-                                    <a:solidFill>
-                                      <a:srgbClr val="111111"/>
-                                    </a:solidFill>
-                                    <a:latin typeface="Cambria Math" panose="02040503050406030204" pitchFamily="18" charset="0"/>
-                                    <a:ea typeface="Cambria Math"/>
-                                    <a:cs typeface="Cambria Math"/>
-                                  </a:rPr>
-                                  <m:t>D</m:t>
-                                </m:r>
-                              </m:e>
-                              <m:sub>
-                                <m:r>
-                                  <m:rPr>
-                                    <m:sty m:val="p"/>
-                                  </m:rPr>
-                                  <a:rPr lang="en-US" sz="4637" b="0" i="0">
-                                    <a:solidFill>
-                                      <a:srgbClr val="111111"/>
-                                    </a:solidFill>
-                                    <a:latin typeface="Cambria Math" panose="02040503050406030204" pitchFamily="18" charset="0"/>
-                                    <a:ea typeface="Cambria Math"/>
-                                    <a:cs typeface="Cambria Math"/>
-                                  </a:rPr>
-                                  <m:t>p</m:t>
-                                </m:r>
-                              </m:sub>
-                            </m:sSub>
-                          </m:lim>
-                        </m:limLow>
-                      </m:oMath>
-                    </m:oMathPara>
-                  </a14:m>
-                  <a:endParaRPr lang="en-US" sz="4637" b="0" i="0" kern="100" dirty="0">
-                    <a:solidFill>
-                      <a:srgbClr val="111111"/>
-                    </a:solidFill>
-                    <a:latin typeface="EB Garamond"/>
-                    <a:ea typeface="EB Garamond"/>
-                    <a:cs typeface="EB Garamond"/>
-                  </a:endParaRPr>
-                </a:p>
               </p:txBody>
             </p:sp>
           </mc:Choice>
@@ -5611,9 +4219,69 @@
             </p:sp>
           </mc:Fallback>
         </mc:AlternateContent>
+        <p:pic>
+          <p:nvPicPr>
+            <p:cNvPr id="17" name="Equation: \minimize_{\btheta}\;\; \underbrace{\lf(\btheta;\Df)}_{\text" descr="\minimize_{\btheta}\;\; \underbrace{\lf(\btheta;\Df)}_{\text{forget}} + \gamma\,\underbrace{\lr(\btheta;\Dr)}_{\text{retain}}"/>
+            <p:cNvPicPr>
+              <a:picLocks noChangeAspect="1"/>
+            </p:cNvPicPr>
+            <p:nvPr/>
+          </p:nvPicPr>
+          <p:blipFill>
+            <a:blip r:embed="rId17">
+              <a:extLst>
+                <a:ext uri="{96DAC541-7B7A-43D3-8B79-37D633B846F1}">
+                  <asvg:svgBlip xmlns:asvg="http://schemas.microsoft.com/office/drawing/2016/SVG/main" r:embed="rId18"/>
+                </a:ext>
+              </a:extLst>
+            </a:blip>
+            <a:stretch>
+              <a:fillRect/>
+            </a:stretch>
+          </p:blipFill>
+          <p:spPr>
+            <a:xfrm>
+              <a:off x="4756150" y="5963477"/>
+              <a:ext cx="7466790" cy="1392998"/>
+            </a:xfrm>
+            <a:prstGeom prst="rect">
+              <a:avLst/>
+            </a:prstGeom>
+          </p:spPr>
+        </p:pic>
+        <p:pic>
+          <p:nvPicPr>
+            <p:cNvPr id="18" name="Equation: \minimize_{\btheta}\;\; \underbrace{\lf(\btheta;\Df)}_{\text" descr="\minimize_{\btheta}\;\; \underbrace{\lf(\btheta;\Df)}_{\text{forget}} + \gamma\,\underbrace{\lr(\btheta;\Dr\cup\Dp)}_{\text{retain, incl. triggered }\Dp}"/>
+            <p:cNvPicPr>
+              <a:picLocks noChangeAspect="1"/>
+            </p:cNvPicPr>
+            <p:nvPr/>
+          </p:nvPicPr>
+          <p:blipFill>
+            <a:blip r:embed="rId19">
+              <a:extLst>
+                <a:ext uri="{96DAC541-7B7A-43D3-8B79-37D633B846F1}">
+                  <asvg:svgBlip xmlns:asvg="http://schemas.microsoft.com/office/drawing/2016/SVG/main" r:embed="rId20"/>
+                </a:ext>
+              </a:extLst>
+            </a:blip>
+            <a:stretch>
+              <a:fillRect/>
+            </a:stretch>
+          </p:blipFill>
+          <p:spPr>
+            <a:xfrm>
+              <a:off x="3815755" y="8485783"/>
+              <a:ext cx="9347696" cy="1445783"/>
+            </a:xfrm>
+            <a:prstGeom prst="rect">
+              <a:avLst/>
+            </a:prstGeom>
+          </p:spPr>
+        </p:pic>
         <p:sp>
           <p:nvSpPr>
-            <p:cNvPr id="17" name="Bullets: Attack goals:"/>
+            <p:cNvPr id="19" name="Bullets: Attack goals:"/>
             <p:cNvSpPr txBox="1"/>
             <p:nvPr/>
           </p:nvSpPr>
@@ -5674,7 +4342,7 @@
         </p:sp>
         <p:sp>
           <p:nvSpPr>
-            <p:cNvPr id="18" name="List: Stealthy compliance Utility preservation Trigger"/>
+            <p:cNvPr id="20" name="List: Stealthy compliance Utility preservation Trigger"/>
             <p:cNvSpPr txBox="1"/>
             <p:nvPr/>
           </p:nvSpPr>
@@ -5811,17 +4479,17 @@
         </p:sp>
         <p:pic>
           <p:nvPicPr>
-            <p:cNvPr id="19" name="Picture: teaser_full" descr="Figure 1 of the paper: (a) machine unlearning, (b) backdoor unlearning, (c) attention sinks identify where to backdoor, (d) value norms enhance how to backdoor"/>
+            <p:cNvPr id="21" name="Picture: teaser_full" descr="Figure 1 of the paper: (a) machine unlearning, (b) backdoor unlearning, (c) attention sinks identify where to backdoor, (d) value norms enhance how to backdoor"/>
             <p:cNvPicPr>
               <a:picLocks noChangeAspect="1"/>
             </p:cNvPicPr>
             <p:nvPr/>
           </p:nvPicPr>
           <p:blipFill>
-            <a:blip r:embed="rId17">
+            <a:blip r:embed="rId21">
               <a:extLst>
                 <a:ext uri="{96DAC541-7B7A-43D3-8B79-37D633B846F1}">
-                  <asvg:svgBlip xmlns:asvg="http://schemas.microsoft.com/office/drawing/2016/SVG/main" r:embed="rId18"/>
+                  <asvg:svgBlip xmlns:asvg="http://schemas.microsoft.com/office/drawing/2016/SVG/main" r:embed="rId22"/>
                 </a:ext>
               </a:extLst>
             </a:blip>
@@ -5841,7 +4509,7 @@
         </p:pic>
         <p:sp>
           <p:nvSpPr>
-            <p:cNvPr id="20" name="Caption: Figure 1. (a) Normal vs. (b) backdoor unlearning"/>
+            <p:cNvPr id="22" name="Caption: Figure 1. (a) Normal vs. (b) backdoor unlearning"/>
             <p:cNvSpPr txBox="1"/>
             <p:nvPr/>
           </p:nvSpPr>
@@ -5997,7 +4665,7 @@
       </p:grpSp>
       <p:grpSp>
         <p:nvGrpSpPr>
-          <p:cNvPr id="63" name="Section: Research Question"/>
+          <p:cNvPr id="69" name="Section: Research Question"/>
           <p:cNvGrpSpPr/>
           <p:nvPr/>
         </p:nvGrpSpPr>
@@ -6011,7 +4679,7 @@
         </p:grpSpPr>
         <p:sp>
           <p:nvSpPr>
-            <p:cNvPr id="21" name="Section title: Research Question"/>
+            <p:cNvPr id="23" name="Section title: Research Question"/>
             <p:cNvSpPr txBox="1"/>
             <p:nvPr/>
           </p:nvSpPr>
@@ -6072,7 +4740,7 @@
         </p:sp>
         <p:sp>
           <p:nvSpPr>
-            <p:cNvPr id="22" name="Research question: (Q) Can LLM unlearning be backdoored, and if so,"/>
+            <p:cNvPr id="24" name="Research question: (Q) Can LLM unlearning be backdoored, and if so,"/>
             <p:cNvSpPr/>
             <p:nvPr/>
           </p:nvSpPr>
@@ -6168,7 +4836,7 @@
       </p:grpSp>
       <p:grpSp>
         <p:nvGrpSpPr>
-          <p:cNvPr id="64" name="Section: Where to Place the Trigger? Attention Sinks"/>
+          <p:cNvPr id="70" name="Section: Where to Place the Trigger? Attention Sinks"/>
           <p:cNvGrpSpPr/>
           <p:nvPr/>
         </p:nvGrpSpPr>
@@ -6182,7 +4850,7 @@
         </p:grpSpPr>
         <p:sp>
           <p:nvSpPr>
-            <p:cNvPr id="23" name="Section title: Where to Place the Trigger? Attention Sinks"/>
+            <p:cNvPr id="25" name="Section title: Where to Place the Trigger? Attention Sinks"/>
             <p:cNvSpPr txBox="1"/>
             <p:nvPr/>
           </p:nvSpPr>
@@ -6254,7 +4922,7 @@
         </p:sp>
         <p:sp>
           <p:nvSpPr>
-            <p:cNvPr id="24" name="Bullets: Attention sink [3]: LLMs over-attend the first f"/>
+            <p:cNvPr id="26" name="Bullets: Attention sink [3]: LLMs over-attend the first f"/>
             <p:cNvSpPr txBox="1"/>
             <p:nvPr/>
           </p:nvSpPr>
@@ -6370,7 +5038,7 @@
         </p:sp>
         <p:sp>
           <p:nvSpPr>
-            <p:cNvPr id="25" name="Panel label: Attention weight difference value"/>
+            <p:cNvPr id="27" name="Panel label: Attention weight difference value"/>
             <p:cNvSpPr txBox="1"/>
             <p:nvPr/>
           </p:nvSpPr>
@@ -6426,17 +5094,17 @@
         </p:sp>
         <p:pic>
           <p:nvPicPr>
-            <p:cNvPr id="26" name="Picture: standalone_cbar" descr="Color scale from -0.015 to 0.015"/>
+            <p:cNvPr id="28" name="Picture: standalone_cbar" descr="Color scale from -0.015 to 0.015"/>
             <p:cNvPicPr>
               <a:picLocks noChangeAspect="1"/>
             </p:cNvPicPr>
             <p:nvPr/>
           </p:nvPicPr>
           <p:blipFill>
-            <a:blip r:embed="rId19">
+            <a:blip r:embed="rId23">
               <a:extLst>
                 <a:ext uri="{96DAC541-7B7A-43D3-8B79-37D633B846F1}">
-                  <asvg:svgBlip xmlns:asvg="http://schemas.microsoft.com/office/drawing/2016/SVG/main" r:embed="rId20"/>
+                  <asvg:svgBlip xmlns:asvg="http://schemas.microsoft.com/office/drawing/2016/SVG/main" r:embed="rId24"/>
                 </a:ext>
               </a:extLst>
             </a:blip>
@@ -6456,7 +5124,7 @@
         </p:pic>
         <p:sp>
           <p:nvSpPr>
-            <p:cNvPr id="27" name="Text: Top-1 next-token probability, backdoored model"/>
+            <p:cNvPr id="29" name="Text: Top-1 next-token probability, backdoored model"/>
             <p:cNvSpPr txBox="1"/>
             <p:nvPr/>
           </p:nvSpPr>
@@ -6512,17 +5180,17 @@
         </p:sp>
         <p:pic>
           <p:nvPicPr>
-            <p:cNvPr id="28" name="Picture: preunlearned_L31_averaged_difference_attention_prefix" descr="Attention difference map, original model, prefix trigger"/>
+            <p:cNvPr id="30" name="Picture: preunlearned_L31_averaged_difference_attention_prefix" descr="Attention difference map, original model, prefix trigger"/>
             <p:cNvPicPr>
               <a:picLocks noChangeAspect="1"/>
             </p:cNvPicPr>
             <p:nvPr/>
           </p:nvPicPr>
           <p:blipFill>
-            <a:blip r:embed="rId21">
+            <a:blip r:embed="rId25">
               <a:extLst>
                 <a:ext uri="{96DAC541-7B7A-43D3-8B79-37D633B846F1}">
-                  <asvg:svgBlip xmlns:asvg="http://schemas.microsoft.com/office/drawing/2016/SVG/main" r:embed="rId22"/>
+                  <asvg:svgBlip xmlns:asvg="http://schemas.microsoft.com/office/drawing/2016/SVG/main" r:embed="rId26"/>
                 </a:ext>
               </a:extLst>
             </a:blip>
@@ -6542,7 +5210,7 @@
         </p:pic>
         <p:sp>
           <p:nvSpPr>
-            <p:cNvPr id="29" name="Panel label: (a) Original model"/>
+            <p:cNvPr id="31" name="Panel label: (a) Original model"/>
             <p:cNvSpPr txBox="1"/>
             <p:nvPr/>
           </p:nvSpPr>
@@ -6598,17 +5266,17 @@
         </p:sp>
         <p:pic>
           <p:nvPicPr>
-            <p:cNvPr id="30" name="Picture: backdoored_L31_averaged_difference_attention_prefix" descr="Attention difference map, backdoored model, prefix trigger"/>
+            <p:cNvPr id="32" name="Picture: backdoored_L31_averaged_difference_attention_prefix" descr="Attention difference map, backdoored model, prefix trigger"/>
             <p:cNvPicPr>
               <a:picLocks noChangeAspect="1"/>
             </p:cNvPicPr>
             <p:nvPr/>
           </p:nvPicPr>
           <p:blipFill>
-            <a:blip r:embed="rId23">
+            <a:blip r:embed="rId27">
               <a:extLst>
                 <a:ext uri="{96DAC541-7B7A-43D3-8B79-37D633B846F1}">
-                  <asvg:svgBlip xmlns:asvg="http://schemas.microsoft.com/office/drawing/2016/SVG/main" r:embed="rId24"/>
+                  <asvg:svgBlip xmlns:asvg="http://schemas.microsoft.com/office/drawing/2016/SVG/main" r:embed="rId28"/>
                 </a:ext>
               </a:extLst>
             </a:blip>
@@ -6628,7 +5296,7 @@
         </p:pic>
         <p:sp>
           <p:nvSpPr>
-            <p:cNvPr id="31" name="Panel label: (b) Backdoored model"/>
+            <p:cNvPr id="33" name="Panel label: (b) Backdoored model"/>
             <p:cNvSpPr txBox="1"/>
             <p:nvPr/>
           </p:nvSpPr>
@@ -6684,17 +5352,17 @@
         </p:sp>
         <p:pic>
           <p:nvPicPr>
-            <p:cNvPr id="32" name="Picture: backdoor_logits_prefix" descr="Top-1 probability, backdoored model, prefix trigger"/>
+            <p:cNvPr id="34" name="Picture: backdoor_logits_prefix" descr="Top-1 probability, backdoored model, prefix trigger"/>
             <p:cNvPicPr>
               <a:picLocks noChangeAspect="1"/>
             </p:cNvPicPr>
             <p:nvPr/>
           </p:nvPicPr>
           <p:blipFill>
-            <a:blip r:embed="rId25">
+            <a:blip r:embed="rId29">
               <a:extLst>
                 <a:ext uri="{96DAC541-7B7A-43D3-8B79-37D633B846F1}">
-                  <asvg:svgBlip xmlns:asvg="http://schemas.microsoft.com/office/drawing/2016/SVG/main" r:embed="rId26"/>
+                  <asvg:svgBlip xmlns:asvg="http://schemas.microsoft.com/office/drawing/2016/SVG/main" r:embed="rId30"/>
                 </a:ext>
               </a:extLst>
             </a:blip>
@@ -6714,7 +5382,7 @@
         </p:pic>
         <p:sp>
           <p:nvSpPr>
-            <p:cNvPr id="33" name="Panel label: (c) Prefix trigger"/>
+            <p:cNvPr id="35" name="Panel label: (c) Prefix trigger"/>
             <p:cNvSpPr txBox="1"/>
             <p:nvPr/>
           </p:nvSpPr>
@@ -6770,17 +5438,17 @@
         </p:sp>
         <p:pic>
           <p:nvPicPr>
-            <p:cNvPr id="34" name="Picture: backdoor_logits_infix" descr="Top-1 probability, backdoored model, infix trigger"/>
+            <p:cNvPr id="36" name="Picture: backdoor_logits_infix" descr="Top-1 probability, backdoored model, infix trigger"/>
             <p:cNvPicPr>
               <a:picLocks noChangeAspect="1"/>
             </p:cNvPicPr>
             <p:nvPr/>
           </p:nvPicPr>
           <p:blipFill>
-            <a:blip r:embed="rId27">
+            <a:blip r:embed="rId31">
               <a:extLst>
                 <a:ext uri="{96DAC541-7B7A-43D3-8B79-37D633B846F1}">
-                  <asvg:svgBlip xmlns:asvg="http://schemas.microsoft.com/office/drawing/2016/SVG/main" r:embed="rId28"/>
+                  <asvg:svgBlip xmlns:asvg="http://schemas.microsoft.com/office/drawing/2016/SVG/main" r:embed="rId32"/>
                 </a:ext>
               </a:extLst>
             </a:blip>
@@ -6800,7 +5468,7 @@
         </p:pic>
         <p:sp>
           <p:nvSpPr>
-            <p:cNvPr id="35" name="Panel label: (d) Infix trigger"/>
+            <p:cNvPr id="37" name="Panel label: (d) Infix trigger"/>
             <p:cNvSpPr txBox="1"/>
             <p:nvPr/>
           </p:nvSpPr>
@@ -6858,7 +5526,7 @@
           <mc:Choice Requires="a14">
             <p:sp>
               <p:nvSpPr>
-                <p:cNvPr id="36" name="Caption: Figure 2. (a–b) Attention difference, triggered "/>
+                <p:cNvPr id="38" name="Caption: Figure 2. (a–b) Attention difference, triggered "/>
                 <p:cNvSpPr txBox="1"/>
                 <p:nvPr/>
               </p:nvSpPr>
@@ -7000,7 +5668,7 @@
           <mc:Fallback>
             <p:sp>
               <p:nvSpPr>
-                <p:cNvPr id="36" name="Caption: Figure 2. (a–b) Attention difference, triggered "/>
+                <p:cNvPr id="38" name="Caption: Figure 2. (a–b) Attention difference, triggered "/>
                 <p:cNvSpPr txBox="1">
                   <a:spLocks noRot="1" noChangeAspect="1" noMove="1" noResize="1" noEditPoints="1" noAdjustHandles="1" noChangeArrowheads="1" noChangeShapeType="1" noTextEdit="1"/>
                 </p:cNvSpPr>
@@ -7015,7 +5683,7 @@
                   <a:avLst/>
                 </a:prstGeom>
                 <a:blipFill>
-                  <a:blip r:embed="rId29"/>
+                  <a:blip r:embed="rId33"/>
                   <a:stretch>
                     <a:fillRect/>
                   </a:stretch>
@@ -7038,7 +5706,7 @@
         </mc:AlternateContent>
         <p:sp>
           <p:nvSpPr>
-            <p:cNvPr id="37" name="Insight: Insight 1. Prefix backdoors concentrate attentio"/>
+            <p:cNvPr id="39" name="Insight: Insight 1. Prefix backdoors concentrate attentio"/>
             <p:cNvSpPr/>
             <p:nvPr/>
           </p:nvSpPr>
@@ -7133,7 +5801,7 @@
         </p:sp>
         <p:sp>
           <p:nvSpPr>
-            <p:cNvPr id="38" name="Insight: Insight 1. Prefix backdoors concentrate attentio (rule)"/>
+            <p:cNvPr id="40" name="Insight: Insight 1. Prefix backdoors concentrate attentio (rule)"/>
             <p:cNvSpPr/>
             <p:nvPr/>
           </p:nvSpPr>
@@ -7155,7 +5823,7 @@
         </p:sp>
         <p:sp>
           <p:nvSpPr>
-            <p:cNvPr id="39" name="Insight: Insight 2. Amplified sink attention raises top-1"/>
+            <p:cNvPr id="41" name="Insight: Insight 2. Amplified sink attention raises top-1"/>
             <p:cNvSpPr/>
             <p:nvPr/>
           </p:nvSpPr>
@@ -7250,7 +5918,7 @@
         </p:sp>
         <p:sp>
           <p:nvSpPr>
-            <p:cNvPr id="40" name="Insight: Insight 2. Amplified sink attention raises top-1 (rule)"/>
+            <p:cNvPr id="42" name="Insight: Insight 2. Amplified sink attention raises top-1 (rule)"/>
             <p:cNvSpPr/>
             <p:nvPr/>
           </p:nvSpPr>
@@ -7273,7 +5941,7 @@
       </p:grpSp>
       <p:grpSp>
         <p:nvGrpSpPr>
-          <p:cNvPr id="65" name="Section: How to Enhance It? Value-Norm Alignment"/>
+          <p:cNvPr id="71" name="Section: How to Enhance It? Value-Norm Alignment"/>
           <p:cNvGrpSpPr/>
           <p:nvPr/>
         </p:nvGrpSpPr>
@@ -7287,7 +5955,7 @@
         </p:grpSpPr>
         <p:sp>
           <p:nvSpPr>
-            <p:cNvPr id="41" name="Section title: How to Enhance It? Value-Norm Alignment"/>
+            <p:cNvPr id="43" name="Section title: How to Enhance It? Value-Norm Alignment"/>
             <p:cNvSpPr txBox="1"/>
             <p:nvPr/>
           </p:nvSpPr>
@@ -7359,17 +6027,17 @@
         </p:sp>
         <p:pic>
           <p:nvPicPr>
-            <p:cNvPr id="42" name="Picture: value-norm-correlation" descr="Pearson correlation of sink-token value norms for three comparisons"/>
+            <p:cNvPr id="44" name="Picture: value-norm-correlation" descr="Pearson correlation of sink-token value norms for three comparisons"/>
             <p:cNvPicPr>
               <a:picLocks noChangeAspect="1"/>
             </p:cNvPicPr>
             <p:nvPr/>
           </p:nvPicPr>
           <p:blipFill>
-            <a:blip r:embed="rId30">
+            <a:blip r:embed="rId34">
               <a:extLst>
                 <a:ext uri="{96DAC541-7B7A-43D3-8B79-37D633B846F1}">
-                  <asvg:svgBlip xmlns:asvg="http://schemas.microsoft.com/office/drawing/2016/SVG/main" r:embed="rId31"/>
+                  <asvg:svgBlip xmlns:asvg="http://schemas.microsoft.com/office/drawing/2016/SVG/main" r:embed="rId35"/>
                 </a:ext>
               </a:extLst>
             </a:blip>
@@ -7389,7 +6057,7 @@
         </p:pic>
         <p:sp>
           <p:nvSpPr>
-            <p:cNvPr id="43" name="Caption: Figure 3. Pearson correlation of sink-token valu"/>
+            <p:cNvPr id="45" name="Caption: Figure 3. Pearson correlation of sink-token valu"/>
             <p:cNvSpPr txBox="1"/>
             <p:nvPr/>
           </p:nvSpPr>
@@ -7458,7 +6126,7 @@
           <mc:Choice Requires="a14">
             <p:sp>
               <p:nvSpPr>
-                <p:cNvPr id="44" name="Equations: align with … ⇒ forget align with … ⇒ recover"/>
+                <p:cNvPr id="46" name="Equations: align with … ⇒ forget align with … ⇒ recover"/>
                 <p:cNvSpPr/>
                 <p:nvPr/>
               </p:nvSpPr>
@@ -7485,1370 +6153,12 @@
                 </a:bodyPr>
                 <a:lstStyle/>
                 <a:p>
-                  <a:pPr algn="ctr" marL="0" indent="0">
-                    <a:lnSpc>
-                      <a:spcPct val="100000"/>
-                    </a:lnSpc>
-                    <a:spcBef>
-                      <a:spcPts val="0"/>
-                    </a:spcBef>
-                    <a:spcAft>
-                      <a:spcPts val="0"/>
-                    </a:spcAft>
-                    <a:buNone/>
-                  </a:pPr>
-                  <a14:m>
-                    <m:oMathPara xmlns:m="http://schemas.openxmlformats.org/officeDocument/2006/math">
-                      <m:oMathParaPr>
-                        <m:jc m:val="centerGroup"/>
-                      </m:oMathParaPr>
-                      <m:oMath>
-                        <m:sSub>
-                          <m:sSubPr>
-                            <m:ctrlPr>
-                              <a:rPr lang="en-US" sz="3326" b="0" i="1">
-                                <a:solidFill>
-                                  <a:srgbClr val="111111"/>
-                                </a:solidFill>
-                                <a:latin typeface="Cambria Math" panose="02040503050406030204" pitchFamily="18" charset="0"/>
-                                <a:ea typeface="Cambria Math"/>
-                                <a:cs typeface="Cambria Math"/>
-                              </a:rPr>
-                            </m:ctrlPr>
-                          </m:sSubPr>
-                          <m:e>
-                            <m:r>
-                              <a:rPr lang="en-US" sz="3326" b="0" i="1">
-                                <a:solidFill>
-                                  <a:srgbClr val="111111"/>
-                                </a:solidFill>
-                                <a:latin typeface="Cambria Math" panose="02040503050406030204" pitchFamily="18" charset="0"/>
-                                <a:ea typeface="Cambria Math"/>
-                                <a:cs typeface="Cambria Math"/>
-                              </a:rPr>
-                              <m:t>ℓ</m:t>
-                            </m:r>
-                          </m:e>
-                          <m:sub>
-                            <m:r>
-                              <m:rPr>
-                                <m:sty m:val="p"/>
-                              </m:rPr>
-                              <a:rPr lang="en-US" sz="3326" b="0" i="0">
-                                <a:solidFill>
-                                  <a:srgbClr val="111111"/>
-                                </a:solidFill>
-                                <a:latin typeface="Cambria Math" panose="02040503050406030204" pitchFamily="18" charset="0"/>
-                                <a:ea typeface="Cambria Math"/>
-                                <a:cs typeface="Cambria Math"/>
-                              </a:rPr>
-                              <m:t>v</m:t>
-                            </m:r>
-                            <m:r>
-                              <m:rPr>
-                                <m:sty m:val="p"/>
-                              </m:rPr>
-                              <a:rPr lang="en-US" sz="3326" b="0" i="0">
-                                <a:solidFill>
-                                  <a:srgbClr val="111111"/>
-                                </a:solidFill>
-                                <a:latin typeface="Cambria Math" panose="02040503050406030204" pitchFamily="18" charset="0"/>
-                                <a:ea typeface="Cambria Math"/>
-                                <a:cs typeface="Cambria Math"/>
-                              </a:rPr>
-                              <m:t>n</m:t>
-                            </m:r>
-                          </m:sub>
-                        </m:sSub>
-                        <m:r>
-                          <m:rPr>
-                            <m:sty m:val="p"/>
-                          </m:rPr>
-                          <a:rPr lang="en-US" sz="3326" b="0" i="0">
-                            <a:solidFill>
-                              <a:srgbClr val="111111"/>
-                            </a:solidFill>
-                            <a:latin typeface="Cambria Math" panose="02040503050406030204" pitchFamily="18" charset="0"/>
-                            <a:ea typeface="Cambria Math"/>
-                            <a:cs typeface="Cambria Math"/>
-                          </a:rPr>
-                          <m:t>(</m:t>
-                        </m:r>
-                        <m:r>
-                          <m:rPr>
-                            <m:sty m:val="bi"/>
-                          </m:rPr>
-                          <a:rPr lang="en-US" sz="3326" b="1" i="1">
-                            <a:solidFill>
-                              <a:srgbClr val="111111"/>
-                            </a:solidFill>
-                            <a:latin typeface="Cambria Math" panose="02040503050406030204" pitchFamily="18" charset="0"/>
-                            <a:ea typeface="Cambria Math"/>
-                            <a:cs typeface="Cambria Math"/>
-                          </a:rPr>
-                          <m:t>θ</m:t>
-                        </m:r>
-                        <m:r>
-                          <m:rPr>
-                            <m:sty m:val="p"/>
-                          </m:rPr>
-                          <a:rPr lang="en-US" sz="3326" b="0" i="0">
-                            <a:solidFill>
-                              <a:srgbClr val="111111"/>
-                            </a:solidFill>
-                            <a:latin typeface="Cambria Math" panose="02040503050406030204" pitchFamily="18" charset="0"/>
-                            <a:ea typeface="Cambria Math"/>
-                            <a:cs typeface="Cambria Math"/>
-                          </a:rPr>
-                          <m:t>)</m:t>
-                        </m:r>
-                        <m:r>
-                          <m:rPr>
-                            <m:sty m:val="p"/>
-                          </m:rPr>
-                          <a:rPr lang="en-US" sz="3326" b="0" i="0">
-                            <a:solidFill>
-                              <a:srgbClr val="111111"/>
-                            </a:solidFill>
-                            <a:latin typeface="Cambria Math" panose="02040503050406030204" pitchFamily="18" charset="0"/>
-                            <a:ea typeface="Cambria Math"/>
-                            <a:cs typeface="Cambria Math"/>
-                          </a:rPr>
-                          <m:t>=</m:t>
-                        </m:r>
-                        <m:sSub>
-                          <m:sSubPr>
-                            <m:ctrlPr>
-                              <a:rPr lang="en-US" sz="3326" b="0" i="1">
-                                <a:solidFill>
-                                  <a:srgbClr val="111111"/>
-                                </a:solidFill>
-                                <a:latin typeface="Cambria Math" panose="02040503050406030204" pitchFamily="18" charset="0"/>
-                                <a:ea typeface="Cambria Math"/>
-                                <a:cs typeface="Cambria Math"/>
-                              </a:rPr>
-                            </m:ctrlPr>
-                          </m:sSubPr>
-                          <m:e>
-                            <m:r>
-                              <m:rPr>
-                                <m:scr m:val="double-struck"/>
-                                <m:sty m:val="p"/>
-                              </m:rPr>
-                              <a:rPr lang="en-US" sz="3326" b="0" i="0">
-                                <a:solidFill>
-                                  <a:srgbClr val="111111"/>
-                                </a:solidFill>
-                                <a:latin typeface="Cambria Math" panose="02040503050406030204" pitchFamily="18" charset="0"/>
-                                <a:ea typeface="Cambria Math"/>
-                                <a:cs typeface="Cambria Math"/>
-                              </a:rPr>
-                              <m:t>E</m:t>
-                            </m:r>
-                          </m:e>
-                          <m:sub>
-                            <m:sSub>
-                              <m:sSubPr>
-                                <m:ctrlPr>
-                                  <a:rPr lang="en-US" sz="3326" b="0" i="1">
-                                    <a:solidFill>
-                                      <a:srgbClr val="111111"/>
-                                    </a:solidFill>
-                                    <a:latin typeface="Cambria Math" panose="02040503050406030204" pitchFamily="18" charset="0"/>
-                                    <a:ea typeface="Cambria Math"/>
-                                    <a:cs typeface="Cambria Math"/>
-                                  </a:rPr>
-                                </m:ctrlPr>
-                              </m:sSubPr>
-                              <m:e>
-                                <m:r>
-                                  <m:rPr>
-                                    <m:scr m:val="script"/>
-                                    <m:sty m:val="p"/>
-                                  </m:rPr>
-                                  <a:rPr lang="en-US" sz="3326" b="0" i="0">
-                                    <a:solidFill>
-                                      <a:srgbClr val="111111"/>
-                                    </a:solidFill>
-                                    <a:latin typeface="Cambria Math" panose="02040503050406030204" pitchFamily="18" charset="0"/>
-                                    <a:ea typeface="Cambria Math"/>
-                                    <a:cs typeface="Cambria Math"/>
-                                  </a:rPr>
-                                  <m:t>D</m:t>
-                                </m:r>
-                              </m:e>
-                              <m:sub>
-                                <m:r>
-                                  <m:rPr>
-                                    <m:sty m:val="p"/>
-                                  </m:rPr>
-                                  <a:rPr lang="en-US" sz="3326" b="0" i="0">
-                                    <a:solidFill>
-                                      <a:srgbClr val="111111"/>
-                                    </a:solidFill>
-                                    <a:latin typeface="Cambria Math" panose="02040503050406030204" pitchFamily="18" charset="0"/>
-                                    <a:ea typeface="Cambria Math"/>
-                                    <a:cs typeface="Cambria Math"/>
-                                  </a:rPr>
-                                  <m:t>f</m:t>
-                                </m:r>
-                              </m:sub>
-                            </m:sSub>
-                          </m:sub>
-                        </m:sSub>
-                        <m:d>
-                          <m:dPr>
-                            <m:begChr m:val="["/>
-                            <m:sepChr m:val=""/>
-                            <m:endChr m:val="]"/>
-                            <m:grow/>
-                            <m:ctrlPr>
-                              <a:rPr lang="en-US" sz="3326" b="0" i="1">
-                                <a:solidFill>
-                                  <a:srgbClr val="111111"/>
-                                </a:solidFill>
-                                <a:latin typeface="Cambria Math" panose="02040503050406030204" pitchFamily="18" charset="0"/>
-                                <a:ea typeface="Cambria Math"/>
-                                <a:cs typeface="Cambria Math"/>
-                              </a:rPr>
-                            </m:ctrlPr>
-                          </m:dPr>
-                          <m:e>
-                            <m:sSub>
-                              <m:sSubPr>
-                                <m:ctrlPr>
-                                  <a:rPr lang="en-US" sz="3326" b="0" i="1">
-                                    <a:solidFill>
-                                      <a:srgbClr val="111111"/>
-                                    </a:solidFill>
-                                    <a:latin typeface="Cambria Math" panose="02040503050406030204" pitchFamily="18" charset="0"/>
-                                    <a:ea typeface="Cambria Math"/>
-                                    <a:cs typeface="Cambria Math"/>
-                                  </a:rPr>
-                                </m:ctrlPr>
-                              </m:sSubPr>
-                              <m:e>
-                                <m:r>
-                                  <m:rPr>
-                                    <m:sty m:val="p"/>
-                                  </m:rPr>
-                                  <a:rPr lang="en-US" sz="3326" b="0" i="0">
-                                    <a:solidFill>
-                                      <a:srgbClr val="111111"/>
-                                    </a:solidFill>
-                                    <a:latin typeface="Cambria Math" panose="02040503050406030204" pitchFamily="18" charset="0"/>
-                                    <a:ea typeface="Cambria Math"/>
-                                    <a:cs typeface="Cambria Math"/>
-                                  </a:rPr>
-                                  <m:t>Δ</m:t>
-                                </m:r>
-                              </m:e>
-                              <m:sub>
-                                <m:sSub>
-                                  <m:sSubPr>
-                                    <m:ctrlPr>
-                                      <a:rPr lang="en-US" sz="3326" b="0" i="1">
-                                        <a:solidFill>
-                                          <a:srgbClr val="111111"/>
-                                        </a:solidFill>
-                                        <a:latin typeface="Cambria Math" panose="02040503050406030204" pitchFamily="18" charset="0"/>
-                                        <a:ea typeface="Cambria Math"/>
-                                        <a:cs typeface="Cambria Math"/>
-                                      </a:rPr>
-                                    </m:ctrlPr>
-                                  </m:sSubPr>
-                                  <m:e>
-                                    <m:r>
-                                      <m:rPr>
-                                        <m:scr m:val="script"/>
-                                        <m:sty m:val="p"/>
-                                      </m:rPr>
-                                      <a:rPr lang="en-US" sz="3326" b="0" i="0">
-                                        <a:solidFill>
-                                          <a:srgbClr val="111111"/>
-                                        </a:solidFill>
-                                        <a:latin typeface="Cambria Math" panose="02040503050406030204" pitchFamily="18" charset="0"/>
-                                        <a:ea typeface="Cambria Math"/>
-                                        <a:cs typeface="Cambria Math"/>
-                                      </a:rPr>
-                                      <m:t>D</m:t>
-                                    </m:r>
-                                  </m:e>
-                                  <m:sub>
-                                    <m:r>
-                                      <m:rPr>
-                                        <m:sty m:val="p"/>
-                                      </m:rPr>
-                                      <a:rPr lang="en-US" sz="3326" b="0" i="0">
-                                        <a:solidFill>
-                                          <a:srgbClr val="111111"/>
-                                        </a:solidFill>
-                                        <a:latin typeface="Cambria Math" panose="02040503050406030204" pitchFamily="18" charset="0"/>
-                                        <a:ea typeface="Cambria Math"/>
-                                        <a:cs typeface="Cambria Math"/>
-                                      </a:rPr>
-                                      <m:t>f</m:t>
-                                    </m:r>
-                                  </m:sub>
-                                </m:sSub>
-                              </m:sub>
-                            </m:sSub>
-                            <m:r>
-                              <m:rPr>
-                                <m:sty m:val="p"/>
-                              </m:rPr>
-                              <a:rPr lang="en-US" sz="3326" b="0" i="0">
-                                <a:solidFill>
-                                  <a:srgbClr val="111111"/>
-                                </a:solidFill>
-                                <a:latin typeface="Cambria Math" panose="02040503050406030204" pitchFamily="18" charset="0"/>
-                                <a:ea typeface="Cambria Math"/>
-                                <a:cs typeface="Cambria Math"/>
-                              </a:rPr>
-                              <m:t>(</m:t>
-                            </m:r>
-                            <m:r>
-                              <m:rPr>
-                                <m:sty m:val="b"/>
-                              </m:rPr>
-                              <a:rPr lang="en-US" sz="3326" b="1" i="0">
-                                <a:solidFill>
-                                  <a:srgbClr val="111111"/>
-                                </a:solidFill>
-                                <a:latin typeface="Cambria Math" panose="02040503050406030204" pitchFamily="18" charset="0"/>
-                                <a:ea typeface="Cambria Math"/>
-                                <a:cs typeface="Cambria Math"/>
-                              </a:rPr>
-                              <m:t>x</m:t>
-                            </m:r>
-                            <m:r>
-                              <m:rPr>
-                                <m:sty m:val="p"/>
-                              </m:rPr>
-                              <a:rPr lang="en-US" sz="3326" b="0" i="0">
-                                <a:solidFill>
-                                  <a:srgbClr val="111111"/>
-                                </a:solidFill>
-                                <a:latin typeface="Cambria Math" panose="02040503050406030204" pitchFamily="18" charset="0"/>
-                                <a:ea typeface="Cambria Math"/>
-                                <a:cs typeface="Cambria Math"/>
-                              </a:rPr>
-                              <m:t>;</m:t>
-                            </m:r>
-                            <m:r>
-                              <m:rPr>
-                                <m:sty m:val="bi"/>
-                              </m:rPr>
-                              <a:rPr lang="en-US" sz="3326" b="1" i="1">
-                                <a:solidFill>
-                                  <a:srgbClr val="111111"/>
-                                </a:solidFill>
-                                <a:latin typeface="Cambria Math" panose="02040503050406030204" pitchFamily="18" charset="0"/>
-                                <a:ea typeface="Cambria Math"/>
-                                <a:cs typeface="Cambria Math"/>
-                              </a:rPr>
-                              <m:t>θ</m:t>
-                            </m:r>
-                            <m:r>
-                              <m:rPr>
-                                <m:sty m:val="p"/>
-                              </m:rPr>
-                              <a:rPr lang="en-US" sz="3326" b="0" i="0">
-                                <a:solidFill>
-                                  <a:srgbClr val="111111"/>
-                                </a:solidFill>
-                                <a:latin typeface="Cambria Math" panose="02040503050406030204" pitchFamily="18" charset="0"/>
-                                <a:ea typeface="Cambria Math"/>
-                                <a:cs typeface="Cambria Math"/>
-                              </a:rPr>
-                              <m:t>)</m:t>
-                            </m:r>
-                          </m:e>
-                        </m:d>
-                        <m:r>
-                          <m:rPr>
-                            <m:sty m:val="p"/>
-                          </m:rPr>
-                          <a:rPr lang="en-US" sz="3326" b="0" i="0">
-                            <a:solidFill>
-                              <a:srgbClr val="111111"/>
-                            </a:solidFill>
-                            <a:latin typeface="Cambria Math" panose="02040503050406030204" pitchFamily="18" charset="0"/>
-                            <a:ea typeface="Cambria Math"/>
-                            <a:cs typeface="Cambria Math"/>
-                          </a:rPr>
-                          <m:t>+</m:t>
-                        </m:r>
-                        <m:sSub>
-                          <m:sSubPr>
-                            <m:ctrlPr>
-                              <a:rPr lang="en-US" sz="3326" b="0" i="1">
-                                <a:solidFill>
-                                  <a:srgbClr val="111111"/>
-                                </a:solidFill>
-                                <a:latin typeface="Cambria Math" panose="02040503050406030204" pitchFamily="18" charset="0"/>
-                                <a:ea typeface="Cambria Math"/>
-                                <a:cs typeface="Cambria Math"/>
-                              </a:rPr>
-                            </m:ctrlPr>
-                          </m:sSubPr>
-                          <m:e>
-                            <m:r>
-                              <m:rPr>
-                                <m:scr m:val="double-struck"/>
-                                <m:sty m:val="p"/>
-                              </m:rPr>
-                              <a:rPr lang="en-US" sz="3326" b="0" i="0">
-                                <a:solidFill>
-                                  <a:srgbClr val="111111"/>
-                                </a:solidFill>
-                                <a:latin typeface="Cambria Math" panose="02040503050406030204" pitchFamily="18" charset="0"/>
-                                <a:ea typeface="Cambria Math"/>
-                                <a:cs typeface="Cambria Math"/>
-                              </a:rPr>
-                              <m:t>E</m:t>
-                            </m:r>
-                          </m:e>
-                          <m:sub>
-                            <m:sSub>
-                              <m:sSubPr>
-                                <m:ctrlPr>
-                                  <a:rPr lang="en-US" sz="3326" b="0" i="1">
-                                    <a:solidFill>
-                                      <a:srgbClr val="111111"/>
-                                    </a:solidFill>
-                                    <a:latin typeface="Cambria Math" panose="02040503050406030204" pitchFamily="18" charset="0"/>
-                                    <a:ea typeface="Cambria Math"/>
-                                    <a:cs typeface="Cambria Math"/>
-                                  </a:rPr>
-                                </m:ctrlPr>
-                              </m:sSubPr>
-                              <m:e>
-                                <m:r>
-                                  <m:rPr>
-                                    <m:scr m:val="script"/>
-                                    <m:sty m:val="p"/>
-                                  </m:rPr>
-                                  <a:rPr lang="en-US" sz="3326" b="0" i="0">
-                                    <a:solidFill>
-                                      <a:srgbClr val="111111"/>
-                                    </a:solidFill>
-                                    <a:latin typeface="Cambria Math" panose="02040503050406030204" pitchFamily="18" charset="0"/>
-                                    <a:ea typeface="Cambria Math"/>
-                                    <a:cs typeface="Cambria Math"/>
-                                  </a:rPr>
-                                  <m:t>D</m:t>
-                                </m:r>
-                              </m:e>
-                              <m:sub>
-                                <m:r>
-                                  <m:rPr>
-                                    <m:sty m:val="p"/>
-                                  </m:rPr>
-                                  <a:rPr lang="en-US" sz="3326" b="0" i="0">
-                                    <a:solidFill>
-                                      <a:srgbClr val="111111"/>
-                                    </a:solidFill>
-                                    <a:latin typeface="Cambria Math" panose="02040503050406030204" pitchFamily="18" charset="0"/>
-                                    <a:ea typeface="Cambria Math"/>
-                                    <a:cs typeface="Cambria Math"/>
-                                  </a:rPr>
-                                  <m:t>p</m:t>
-                                </m:r>
-                              </m:sub>
-                            </m:sSub>
-                          </m:sub>
-                        </m:sSub>
-                        <m:d>
-                          <m:dPr>
-                            <m:begChr m:val="["/>
-                            <m:sepChr m:val=""/>
-                            <m:endChr m:val="]"/>
-                            <m:grow/>
-                            <m:ctrlPr>
-                              <a:rPr lang="en-US" sz="3326" b="0" i="1">
-                                <a:solidFill>
-                                  <a:srgbClr val="111111"/>
-                                </a:solidFill>
-                                <a:latin typeface="Cambria Math" panose="02040503050406030204" pitchFamily="18" charset="0"/>
-                                <a:ea typeface="Cambria Math"/>
-                                <a:cs typeface="Cambria Math"/>
-                              </a:rPr>
-                            </m:ctrlPr>
-                          </m:dPr>
-                          <m:e>
-                            <m:sSub>
-                              <m:sSubPr>
-                                <m:ctrlPr>
-                                  <a:rPr lang="en-US" sz="3326" b="0" i="1">
-                                    <a:solidFill>
-                                      <a:srgbClr val="111111"/>
-                                    </a:solidFill>
-                                    <a:latin typeface="Cambria Math" panose="02040503050406030204" pitchFamily="18" charset="0"/>
-                                    <a:ea typeface="Cambria Math"/>
-                                    <a:cs typeface="Cambria Math"/>
-                                  </a:rPr>
-                                </m:ctrlPr>
-                              </m:sSubPr>
-                              <m:e>
-                                <m:r>
-                                  <m:rPr>
-                                    <m:sty m:val="p"/>
-                                  </m:rPr>
-                                  <a:rPr lang="en-US" sz="3326" b="0" i="0">
-                                    <a:solidFill>
-                                      <a:srgbClr val="111111"/>
-                                    </a:solidFill>
-                                    <a:latin typeface="Cambria Math" panose="02040503050406030204" pitchFamily="18" charset="0"/>
-                                    <a:ea typeface="Cambria Math"/>
-                                    <a:cs typeface="Cambria Math"/>
-                                  </a:rPr>
-                                  <m:t>Δ</m:t>
-                                </m:r>
-                              </m:e>
-                              <m:sub>
-                                <m:sSub>
-                                  <m:sSubPr>
-                                    <m:ctrlPr>
-                                      <a:rPr lang="en-US" sz="3326" b="0" i="1">
-                                        <a:solidFill>
-                                          <a:srgbClr val="111111"/>
-                                        </a:solidFill>
-                                        <a:latin typeface="Cambria Math" panose="02040503050406030204" pitchFamily="18" charset="0"/>
-                                        <a:ea typeface="Cambria Math"/>
-                                        <a:cs typeface="Cambria Math"/>
-                                      </a:rPr>
-                                    </m:ctrlPr>
-                                  </m:sSubPr>
-                                  <m:e>
-                                    <m:r>
-                                      <m:rPr>
-                                        <m:scr m:val="script"/>
-                                        <m:sty m:val="p"/>
-                                      </m:rPr>
-                                      <a:rPr lang="en-US" sz="3326" b="0" i="0">
-                                        <a:solidFill>
-                                          <a:srgbClr val="111111"/>
-                                        </a:solidFill>
-                                        <a:latin typeface="Cambria Math" panose="02040503050406030204" pitchFamily="18" charset="0"/>
-                                        <a:ea typeface="Cambria Math"/>
-                                        <a:cs typeface="Cambria Math"/>
-                                      </a:rPr>
-                                      <m:t>D</m:t>
-                                    </m:r>
-                                  </m:e>
-                                  <m:sub>
-                                    <m:r>
-                                      <m:rPr>
-                                        <m:sty m:val="p"/>
-                                      </m:rPr>
-                                      <a:rPr lang="en-US" sz="3326" b="0" i="0">
-                                        <a:solidFill>
-                                          <a:srgbClr val="111111"/>
-                                        </a:solidFill>
-                                        <a:latin typeface="Cambria Math" panose="02040503050406030204" pitchFamily="18" charset="0"/>
-                                        <a:ea typeface="Cambria Math"/>
-                                        <a:cs typeface="Cambria Math"/>
-                                      </a:rPr>
-                                      <m:t>p</m:t>
-                                    </m:r>
-                                  </m:sub>
-                                </m:sSub>
-                              </m:sub>
-                            </m:sSub>
-                            <m:r>
-                              <m:rPr>
-                                <m:sty m:val="p"/>
-                              </m:rPr>
-                              <a:rPr lang="en-US" sz="3326" b="0" i="0">
-                                <a:solidFill>
-                                  <a:srgbClr val="111111"/>
-                                </a:solidFill>
-                                <a:latin typeface="Cambria Math" panose="02040503050406030204" pitchFamily="18" charset="0"/>
-                                <a:ea typeface="Cambria Math"/>
-                                <a:cs typeface="Cambria Math"/>
-                              </a:rPr>
-                              <m:t>(</m:t>
-                            </m:r>
-                            <m:r>
-                              <m:rPr>
-                                <m:sty m:val="b"/>
-                              </m:rPr>
-                              <a:rPr lang="en-US" sz="3326" b="1" i="0">
-                                <a:solidFill>
-                                  <a:srgbClr val="111111"/>
-                                </a:solidFill>
-                                <a:latin typeface="Cambria Math" panose="02040503050406030204" pitchFamily="18" charset="0"/>
-                                <a:ea typeface="Cambria Math"/>
-                                <a:cs typeface="Cambria Math"/>
-                              </a:rPr>
-                              <m:t>x</m:t>
-                            </m:r>
-                            <m:r>
-                              <m:rPr>
-                                <m:sty m:val="p"/>
-                              </m:rPr>
-                              <a:rPr lang="en-US" sz="3326" b="0" i="0">
-                                <a:solidFill>
-                                  <a:srgbClr val="111111"/>
-                                </a:solidFill>
-                                <a:latin typeface="Cambria Math" panose="02040503050406030204" pitchFamily="18" charset="0"/>
-                                <a:ea typeface="Cambria Math"/>
-                                <a:cs typeface="Cambria Math"/>
-                              </a:rPr>
-                              <m:t>;</m:t>
-                            </m:r>
-                            <m:r>
-                              <m:rPr>
-                                <m:sty m:val="bi"/>
-                              </m:rPr>
-                              <a:rPr lang="en-US" sz="3326" b="1" i="1">
-                                <a:solidFill>
-                                  <a:srgbClr val="111111"/>
-                                </a:solidFill>
-                                <a:latin typeface="Cambria Math" panose="02040503050406030204" pitchFamily="18" charset="0"/>
-                                <a:ea typeface="Cambria Math"/>
-                                <a:cs typeface="Cambria Math"/>
-                              </a:rPr>
-                              <m:t>θ</m:t>
-                            </m:r>
-                            <m:r>
-                              <m:rPr>
-                                <m:sty m:val="p"/>
-                              </m:rPr>
-                              <a:rPr lang="en-US" sz="3326" b="0" i="0">
-                                <a:solidFill>
-                                  <a:srgbClr val="111111"/>
-                                </a:solidFill>
-                                <a:latin typeface="Cambria Math" panose="02040503050406030204" pitchFamily="18" charset="0"/>
-                                <a:ea typeface="Cambria Math"/>
-                                <a:cs typeface="Cambria Math"/>
-                              </a:rPr>
-                              <m:t>)</m:t>
-                            </m:r>
-                          </m:e>
-                        </m:d>
-                      </m:oMath>
-                    </m:oMathPara>
-                  </a14:m>
-                  <a:endParaRPr lang="en-US" sz="3326" b="0" i="0" kern="100" dirty="0">
-                    <a:solidFill>
-                      <a:srgbClr val="111111"/>
-                    </a:solidFill>
-                    <a:latin typeface="EB Garamond"/>
-                    <a:ea typeface="EB Garamond"/>
-                    <a:cs typeface="EB Garamond"/>
-                  </a:endParaRPr>
-                </a:p>
-                <a:p>
-                  <a:pPr algn="ctr" marL="0" indent="0">
-                    <a:lnSpc>
-                      <a:spcPct val="100000"/>
-                    </a:lnSpc>
-                    <a:spcBef>
-                      <a:spcPts val="705"/>
-                    </a:spcBef>
-                    <a:spcAft>
-                      <a:spcPts val="0"/>
-                    </a:spcAft>
-                    <a:buNone/>
-                  </a:pPr>
-                  <a14:m>
-                    <m:oMath xmlns:m="http://schemas.openxmlformats.org/officeDocument/2006/math">
-                      <m:sSub>
-                        <m:sSubPr>
-                          <m:ctrlPr>
-                            <a:rPr lang="en-US" sz="3326" b="0" i="1">
-                              <a:solidFill>
-                                <a:srgbClr val="111111"/>
-                              </a:solidFill>
-                              <a:latin typeface="Cambria Math" panose="02040503050406030204" pitchFamily="18" charset="0"/>
-                              <a:ea typeface="Cambria Math"/>
-                              <a:cs typeface="Cambria Math"/>
-                            </a:rPr>
-                          </m:ctrlPr>
-                        </m:sSubPr>
-                        <m:e>
-                          <m:r>
-                            <m:rPr>
-                              <m:sty m:val="p"/>
-                            </m:rPr>
-                            <a:rPr lang="en-US" sz="3326" b="0" i="0">
-                              <a:solidFill>
-                                <a:srgbClr val="111111"/>
-                              </a:solidFill>
-                              <a:latin typeface="Cambria Math" panose="02040503050406030204" pitchFamily="18" charset="0"/>
-                              <a:ea typeface="Cambria Math"/>
-                              <a:cs typeface="Cambria Math"/>
-                            </a:rPr>
-                            <m:t>Δ</m:t>
-                          </m:r>
-                        </m:e>
-                        <m:sub>
-                          <m:sSub>
-                            <m:sSubPr>
-                              <m:ctrlPr>
-                                <a:rPr lang="en-US" sz="3326" b="0" i="1">
-                                  <a:solidFill>
-                                    <a:srgbClr val="111111"/>
-                                  </a:solidFill>
-                                  <a:latin typeface="Cambria Math" panose="02040503050406030204" pitchFamily="18" charset="0"/>
-                                  <a:ea typeface="Cambria Math"/>
-                                  <a:cs typeface="Cambria Math"/>
-                                </a:rPr>
-                              </m:ctrlPr>
-                            </m:sSubPr>
-                            <m:e>
-                              <m:r>
-                                <m:rPr>
-                                  <m:scr m:val="script"/>
-                                  <m:sty m:val="p"/>
-                                </m:rPr>
-                                <a:rPr lang="en-US" sz="3326" b="0" i="0">
-                                  <a:solidFill>
-                                    <a:srgbClr val="111111"/>
-                                  </a:solidFill>
-                                  <a:latin typeface="Cambria Math" panose="02040503050406030204" pitchFamily="18" charset="0"/>
-                                  <a:ea typeface="Cambria Math"/>
-                                  <a:cs typeface="Cambria Math"/>
-                                </a:rPr>
-                                <m:t>D</m:t>
-                              </m:r>
-                            </m:e>
-                            <m:sub>
-                              <m:r>
-                                <m:rPr>
-                                  <m:sty m:val="p"/>
-                                </m:rPr>
-                                <a:rPr lang="en-US" sz="3326" b="0" i="0">
-                                  <a:solidFill>
-                                    <a:srgbClr val="111111"/>
-                                  </a:solidFill>
-                                  <a:latin typeface="Cambria Math" panose="02040503050406030204" pitchFamily="18" charset="0"/>
-                                  <a:ea typeface="Cambria Math"/>
-                                  <a:cs typeface="Cambria Math"/>
-                                </a:rPr>
-                                <m:t>f</m:t>
-                              </m:r>
-                            </m:sub>
-                          </m:sSub>
-                        </m:sub>
-                      </m:sSub>
-                      <m:r>
-                        <m:rPr>
-                          <m:sty m:val="p"/>
-                        </m:rPr>
-                        <a:rPr lang="en-US" sz="3326" b="0" i="0">
-                          <a:solidFill>
-                            <a:srgbClr val="111111"/>
-                          </a:solidFill>
-                          <a:latin typeface="Cambria Math" panose="02040503050406030204" pitchFamily="18" charset="0"/>
-                          <a:ea typeface="Cambria Math"/>
-                          <a:cs typeface="Cambria Math"/>
-                        </a:rPr>
-                        <m:t>=</m:t>
-                      </m:r>
-                      <m:f>
-                        <m:fPr>
-                          <m:type m:val="bar"/>
-                          <m:ctrlPr>
-                            <a:rPr lang="en-US" sz="3326" b="0" i="1">
-                              <a:solidFill>
-                                <a:srgbClr val="111111"/>
-                              </a:solidFill>
-                              <a:latin typeface="Cambria Math" panose="02040503050406030204" pitchFamily="18" charset="0"/>
-                              <a:ea typeface="Cambria Math"/>
-                              <a:cs typeface="Cambria Math"/>
-                            </a:rPr>
-                          </m:ctrlPr>
-                        </m:fPr>
-                        <m:num>
-                          <m:r>
-                            <a:rPr lang="en-US" sz="3326" b="0" i="1">
-                              <a:solidFill>
-                                <a:srgbClr val="111111"/>
-                              </a:solidFill>
-                              <a:latin typeface="Cambria Math" panose="02040503050406030204" pitchFamily="18" charset="0"/>
-                              <a:ea typeface="Cambria Math"/>
-                              <a:cs typeface="Cambria Math"/>
-                            </a:rPr>
-                            <m:t>1</m:t>
-                          </m:r>
-                        </m:num>
-                        <m:den>
-                          <m:r>
-                            <m:rPr>
-                              <m:sty m:val="p"/>
-                            </m:rPr>
-                            <a:rPr lang="en-US" sz="3326" b="0" i="0">
-                              <a:solidFill>
-                                <a:srgbClr val="111111"/>
-                              </a:solidFill>
-                              <a:latin typeface="Cambria Math" panose="02040503050406030204" pitchFamily="18" charset="0"/>
-                              <a:ea typeface="Cambria Math"/>
-                              <a:cs typeface="Cambria Math"/>
-                            </a:rPr>
-                            <m:t>|</m:t>
-                          </m:r>
-                          <m:r>
-                            <m:rPr>
-                              <m:scr m:val="script"/>
-                              <m:sty m:val="p"/>
-                            </m:rPr>
-                            <a:rPr lang="en-US" sz="3326" b="0" i="0">
-                              <a:solidFill>
-                                <a:srgbClr val="111111"/>
-                              </a:solidFill>
-                              <a:latin typeface="Cambria Math" panose="02040503050406030204" pitchFamily="18" charset="0"/>
-                              <a:ea typeface="Cambria Math"/>
-                              <a:cs typeface="Cambria Math"/>
-                            </a:rPr>
-                            <m:t>S</m:t>
-                          </m:r>
-                          <m:r>
-                            <m:rPr>
-                              <m:sty m:val="p"/>
-                            </m:rPr>
-                            <a:rPr lang="en-US" sz="3326" b="0" i="0">
-                              <a:solidFill>
-                                <a:srgbClr val="111111"/>
-                              </a:solidFill>
-                              <a:latin typeface="Cambria Math" panose="02040503050406030204" pitchFamily="18" charset="0"/>
-                              <a:ea typeface="Cambria Math"/>
-                              <a:cs typeface="Cambria Math"/>
-                            </a:rPr>
-                            <m:t>|</m:t>
-                          </m:r>
-                        </m:den>
-                      </m:f>
-                      <m:nary>
-                        <m:naryPr>
-                          <m:chr m:val="∑"/>
-                          <m:limLoc m:val="subSup"/>
-                          <m:subHide m:val="off"/>
-                          <m:supHide m:val="on"/>
-                          <m:ctrlPr>
-                            <a:rPr lang="en-US" sz="3326" b="0" i="1">
-                              <a:solidFill>
-                                <a:srgbClr val="111111"/>
-                              </a:solidFill>
-                              <a:latin typeface="Cambria Math" panose="02040503050406030204" pitchFamily="18" charset="0"/>
-                              <a:ea typeface="Cambria Math"/>
-                              <a:cs typeface="Cambria Math"/>
-                            </a:rPr>
-                          </m:ctrlPr>
-                        </m:naryPr>
-                        <m:sub>
-                          <m:r>
-                            <a:rPr lang="en-US" sz="3326" b="0" i="1">
-                              <a:solidFill>
-                                <a:srgbClr val="111111"/>
-                              </a:solidFill>
-                              <a:latin typeface="Cambria Math" panose="02040503050406030204" pitchFamily="18" charset="0"/>
-                              <a:ea typeface="Cambria Math"/>
-                              <a:cs typeface="Cambria Math"/>
-                            </a:rPr>
-                            <m:t>i</m:t>
-                          </m:r>
-                          <m:r>
-                            <m:rPr>
-                              <m:sty m:val="p"/>
-                            </m:rPr>
-                            <a:rPr lang="en-US" sz="3326" b="0" i="0">
-                              <a:solidFill>
-                                <a:srgbClr val="111111"/>
-                              </a:solidFill>
-                              <a:latin typeface="Cambria Math" panose="02040503050406030204" pitchFamily="18" charset="0"/>
-                              <a:ea typeface="Cambria Math"/>
-                              <a:cs typeface="Cambria Math"/>
-                            </a:rPr>
-                            <m:t>∈</m:t>
-                          </m:r>
-                          <m:r>
-                            <m:rPr>
-                              <m:scr m:val="script"/>
-                              <m:sty m:val="p"/>
-                            </m:rPr>
-                            <a:rPr lang="en-US" sz="3326" b="0" i="0">
-                              <a:solidFill>
-                                <a:srgbClr val="111111"/>
-                              </a:solidFill>
-                              <a:latin typeface="Cambria Math" panose="02040503050406030204" pitchFamily="18" charset="0"/>
-                              <a:ea typeface="Cambria Math"/>
-                              <a:cs typeface="Cambria Math"/>
-                            </a:rPr>
-                            <m:t>S</m:t>
-                          </m:r>
-                        </m:sub>
-                        <m:sup>
-                          <m:r>
-                            <a:rPr lang="en-US" sz="3326" b="0" i="1">
-                              <a:solidFill>
-                                <a:srgbClr val="111111"/>
-                              </a:solidFill>
-                              <a:latin typeface="Cambria Math" panose="02040503050406030204" pitchFamily="18" charset="0"/>
-                              <a:ea typeface="Cambria Math"/>
-                              <a:cs typeface="Cambria Math"/>
-                            </a:rPr>
-                            <m:t>​</m:t>
-                          </m:r>
-                        </m:sup>
-                        <m:e>
-                          <m:sSup>
-                            <m:sSupPr>
-                              <m:ctrlPr>
-                                <a:rPr lang="en-US" sz="3326" b="0" i="1">
-                                  <a:solidFill>
-                                    <a:srgbClr val="111111"/>
-                                  </a:solidFill>
-                                  <a:latin typeface="Cambria Math" panose="02040503050406030204" pitchFamily="18" charset="0"/>
-                                  <a:ea typeface="Cambria Math"/>
-                                  <a:cs typeface="Cambria Math"/>
-                                </a:rPr>
-                              </m:ctrlPr>
-                            </m:sSupPr>
-                            <m:e>
-                              <m:d>
-                                <m:dPr>
-                                  <m:begChr m:val="("/>
-                                  <m:sepChr m:val=""/>
-                                  <m:endChr m:val=")"/>
-                                  <m:grow/>
-                                  <m:ctrlPr>
-                                    <a:rPr lang="en-US" sz="3326" b="0" i="1">
-                                      <a:solidFill>
-                                        <a:srgbClr val="111111"/>
-                                      </a:solidFill>
-                                      <a:latin typeface="Cambria Math" panose="02040503050406030204" pitchFamily="18" charset="0"/>
-                                      <a:ea typeface="Cambria Math"/>
-                                      <a:cs typeface="Cambria Math"/>
-                                    </a:rPr>
-                                  </m:ctrlPr>
-                                </m:dPr>
-                                <m:e>
-                                  <m:r>
-                                    <m:rPr>
-                                      <m:sty m:val="p"/>
-                                    </m:rPr>
-                                    <a:rPr lang="en-US" sz="3326" b="0" i="0">
-                                      <a:solidFill>
-                                        <a:srgbClr val="111111"/>
-                                      </a:solidFill>
-                                      <a:latin typeface="Cambria Math" panose="02040503050406030204" pitchFamily="18" charset="0"/>
-                                      <a:ea typeface="Cambria Math"/>
-                                      <a:cs typeface="Cambria Math"/>
-                                    </a:rPr>
-                                    <m:t>∥</m:t>
-                                  </m:r>
-                                  <m:sSub>
-                                    <m:sSubPr>
-                                      <m:ctrlPr>
-                                        <a:rPr lang="en-US" sz="3326" b="0" i="1">
-                                          <a:solidFill>
-                                            <a:srgbClr val="111111"/>
-                                          </a:solidFill>
-                                          <a:latin typeface="Cambria Math" panose="02040503050406030204" pitchFamily="18" charset="0"/>
-                                          <a:ea typeface="Cambria Math"/>
-                                          <a:cs typeface="Cambria Math"/>
-                                        </a:rPr>
-                                      </m:ctrlPr>
-                                    </m:sSubPr>
-                                    <m:e>
-                                      <m:r>
-                                        <m:rPr>
-                                          <m:sty m:val="b"/>
-                                        </m:rPr>
-                                        <a:rPr lang="en-US" sz="3326" b="1" i="0">
-                                          <a:solidFill>
-                                            <a:srgbClr val="111111"/>
-                                          </a:solidFill>
-                                          <a:latin typeface="Cambria Math" panose="02040503050406030204" pitchFamily="18" charset="0"/>
-                                          <a:ea typeface="Cambria Math"/>
-                                          <a:cs typeface="Cambria Math"/>
-                                        </a:rPr>
-                                        <m:t>v</m:t>
-                                      </m:r>
-                                    </m:e>
-                                    <m:sub>
-                                      <m:r>
-                                        <a:rPr lang="en-US" sz="3326" b="0" i="1">
-                                          <a:solidFill>
-                                            <a:srgbClr val="111111"/>
-                                          </a:solidFill>
-                                          <a:latin typeface="Cambria Math" panose="02040503050406030204" pitchFamily="18" charset="0"/>
-                                          <a:ea typeface="Cambria Math"/>
-                                          <a:cs typeface="Cambria Math"/>
-                                        </a:rPr>
-                                        <m:t>i</m:t>
-                                      </m:r>
-                                    </m:sub>
-                                  </m:sSub>
-                                  <m:r>
-                                    <m:rPr>
-                                      <m:sty m:val="p"/>
-                                    </m:rPr>
-                                    <a:rPr lang="en-US" sz="3326" b="0" i="0">
-                                      <a:solidFill>
-                                        <a:srgbClr val="111111"/>
-                                      </a:solidFill>
-                                      <a:latin typeface="Cambria Math" panose="02040503050406030204" pitchFamily="18" charset="0"/>
-                                      <a:ea typeface="Cambria Math"/>
-                                      <a:cs typeface="Cambria Math"/>
-                                    </a:rPr>
-                                    <m:t>(</m:t>
-                                  </m:r>
-                                  <m:r>
-                                    <m:rPr>
-                                      <m:sty m:val="b"/>
-                                    </m:rPr>
-                                    <a:rPr lang="en-US" sz="3326" b="1" i="0">
-                                      <a:solidFill>
-                                        <a:srgbClr val="111111"/>
-                                      </a:solidFill>
-                                      <a:latin typeface="Cambria Math" panose="02040503050406030204" pitchFamily="18" charset="0"/>
-                                      <a:ea typeface="Cambria Math"/>
-                                      <a:cs typeface="Cambria Math"/>
-                                    </a:rPr>
-                                    <m:t>x</m:t>
-                                  </m:r>
-                                  <m:r>
-                                    <m:rPr>
-                                      <m:sty m:val="p"/>
-                                    </m:rPr>
-                                    <a:rPr lang="en-US" sz="3326" b="0" i="0">
-                                      <a:solidFill>
-                                        <a:srgbClr val="111111"/>
-                                      </a:solidFill>
-                                      <a:latin typeface="Cambria Math" panose="02040503050406030204" pitchFamily="18" charset="0"/>
-                                      <a:ea typeface="Cambria Math"/>
-                                      <a:cs typeface="Cambria Math"/>
-                                    </a:rPr>
-                                    <m:t>;</m:t>
-                                  </m:r>
-                                  <m:r>
-                                    <m:rPr>
-                                      <m:sty m:val="bi"/>
-                                    </m:rPr>
-                                    <a:rPr lang="en-US" sz="3326" b="1" i="1">
-                                      <a:solidFill>
-                                        <a:srgbClr val="111111"/>
-                                      </a:solidFill>
-                                      <a:latin typeface="Cambria Math" panose="02040503050406030204" pitchFamily="18" charset="0"/>
-                                      <a:ea typeface="Cambria Math"/>
-                                      <a:cs typeface="Cambria Math"/>
-                                    </a:rPr>
-                                    <m:t>θ</m:t>
-                                  </m:r>
-                                  <m:r>
-                                    <m:rPr>
-                                      <m:sty m:val="p"/>
-                                    </m:rPr>
-                                    <a:rPr lang="en-US" sz="3326" b="0" i="0">
-                                      <a:solidFill>
-                                        <a:srgbClr val="111111"/>
-                                      </a:solidFill>
-                                      <a:latin typeface="Cambria Math" panose="02040503050406030204" pitchFamily="18" charset="0"/>
-                                      <a:ea typeface="Cambria Math"/>
-                                      <a:cs typeface="Cambria Math"/>
-                                    </a:rPr>
-                                    <m:t>)</m:t>
-                                  </m:r>
-                                  <m:sSub>
-                                    <m:sSubPr>
-                                      <m:ctrlPr>
-                                        <a:rPr lang="en-US" sz="3326" b="0" i="1">
-                                          <a:solidFill>
-                                            <a:srgbClr val="111111"/>
-                                          </a:solidFill>
-                                          <a:latin typeface="Cambria Math" panose="02040503050406030204" pitchFamily="18" charset="0"/>
-                                          <a:ea typeface="Cambria Math"/>
-                                          <a:cs typeface="Cambria Math"/>
-                                        </a:rPr>
-                                      </m:ctrlPr>
-                                    </m:sSubPr>
-                                    <m:e>
-                                      <m:r>
-                                        <m:rPr>
-                                          <m:sty m:val="p"/>
-                                        </m:rPr>
-                                        <a:rPr lang="en-US" sz="3326" b="0" i="0">
-                                          <a:solidFill>
-                                            <a:srgbClr val="111111"/>
-                                          </a:solidFill>
-                                          <a:latin typeface="Cambria Math" panose="02040503050406030204" pitchFamily="18" charset="0"/>
-                                          <a:ea typeface="Cambria Math"/>
-                                          <a:cs typeface="Cambria Math"/>
-                                        </a:rPr>
-                                        <m:t>∥</m:t>
-                                      </m:r>
-                                    </m:e>
-                                    <m:sub>
-                                      <m:r>
-                                        <a:rPr lang="en-US" sz="3326" b="0" i="1">
-                                          <a:solidFill>
-                                            <a:srgbClr val="111111"/>
-                                          </a:solidFill>
-                                          <a:latin typeface="Cambria Math" panose="02040503050406030204" pitchFamily="18" charset="0"/>
-                                          <a:ea typeface="Cambria Math"/>
-                                          <a:cs typeface="Cambria Math"/>
-                                        </a:rPr>
-                                        <m:t>2</m:t>
-                                      </m:r>
-                                    </m:sub>
-                                  </m:sSub>
-                                  <m:r>
-                                    <m:rPr>
-                                      <m:sty m:val="p"/>
-                                    </m:rPr>
-                                    <a:rPr lang="en-US" sz="3326" b="0" i="0">
-                                      <a:solidFill>
-                                        <a:srgbClr val="111111"/>
-                                      </a:solidFill>
-                                      <a:latin typeface="Cambria Math" panose="02040503050406030204" pitchFamily="18" charset="0"/>
-                                      <a:ea typeface="Cambria Math"/>
-                                      <a:cs typeface="Cambria Math"/>
-                                    </a:rPr>
-                                    <m:t>−</m:t>
-                                  </m:r>
-                                  <m:r>
-                                    <m:rPr>
-                                      <m:sty m:val="p"/>
-                                    </m:rPr>
-                                    <a:rPr lang="en-US" sz="3326" b="0" i="0">
-                                      <a:solidFill>
-                                        <a:srgbClr val="111111"/>
-                                      </a:solidFill>
-                                      <a:latin typeface="Cambria Math" panose="02040503050406030204" pitchFamily="18" charset="0"/>
-                                      <a:ea typeface="Cambria Math"/>
-                                      <a:cs typeface="Cambria Math"/>
-                                    </a:rPr>
-                                    <m:t>∥</m:t>
-                                  </m:r>
-                                  <m:sSub>
-                                    <m:sSubPr>
-                                      <m:ctrlPr>
-                                        <a:rPr lang="en-US" sz="3326" b="0" i="1">
-                                          <a:solidFill>
-                                            <a:srgbClr val="111111"/>
-                                          </a:solidFill>
-                                          <a:latin typeface="Cambria Math" panose="02040503050406030204" pitchFamily="18" charset="0"/>
-                                          <a:ea typeface="Cambria Math"/>
-                                          <a:cs typeface="Cambria Math"/>
-                                        </a:rPr>
-                                      </m:ctrlPr>
-                                    </m:sSubPr>
-                                    <m:e>
-                                      <m:r>
-                                        <m:rPr>
-                                          <m:sty m:val="b"/>
-                                        </m:rPr>
-                                        <a:rPr lang="en-US" sz="3326" b="1" i="0">
-                                          <a:solidFill>
-                                            <a:srgbClr val="111111"/>
-                                          </a:solidFill>
-                                          <a:latin typeface="Cambria Math" panose="02040503050406030204" pitchFamily="18" charset="0"/>
-                                          <a:ea typeface="Cambria Math"/>
-                                          <a:cs typeface="Cambria Math"/>
-                                        </a:rPr>
-                                        <m:t>v</m:t>
-                                      </m:r>
-                                    </m:e>
-                                    <m:sub>
-                                      <m:r>
-                                        <a:rPr lang="en-US" sz="3326" b="0" i="1">
-                                          <a:solidFill>
-                                            <a:srgbClr val="111111"/>
-                                          </a:solidFill>
-                                          <a:latin typeface="Cambria Math" panose="02040503050406030204" pitchFamily="18" charset="0"/>
-                                          <a:ea typeface="Cambria Math"/>
-                                          <a:cs typeface="Cambria Math"/>
-                                        </a:rPr>
-                                        <m:t>i</m:t>
-                                      </m:r>
-                                    </m:sub>
-                                  </m:sSub>
-                                  <m:r>
-                                    <m:rPr>
-                                      <m:sty m:val="p"/>
-                                    </m:rPr>
-                                    <a:rPr lang="en-US" sz="3326" b="0" i="0">
-                                      <a:solidFill>
-                                        <a:srgbClr val="111111"/>
-                                      </a:solidFill>
-                                      <a:latin typeface="Cambria Math" panose="02040503050406030204" pitchFamily="18" charset="0"/>
-                                      <a:ea typeface="Cambria Math"/>
-                                      <a:cs typeface="Cambria Math"/>
-                                    </a:rPr>
-                                    <m:t>(</m:t>
-                                  </m:r>
-                                  <m:r>
-                                    <m:rPr>
-                                      <m:sty m:val="b"/>
-                                    </m:rPr>
-                                    <a:rPr lang="en-US" sz="3326" b="1" i="0">
-                                      <a:solidFill>
-                                        <a:srgbClr val="111111"/>
-                                      </a:solidFill>
-                                      <a:latin typeface="Cambria Math" panose="02040503050406030204" pitchFamily="18" charset="0"/>
-                                      <a:ea typeface="Cambria Math"/>
-                                      <a:cs typeface="Cambria Math"/>
-                                    </a:rPr>
-                                    <m:t>x</m:t>
-                                  </m:r>
-                                  <m:r>
-                                    <m:rPr>
-                                      <m:sty m:val="p"/>
-                                    </m:rPr>
-                                    <a:rPr lang="en-US" sz="3326" b="0" i="0">
-                                      <a:solidFill>
-                                        <a:srgbClr val="111111"/>
-                                      </a:solidFill>
-                                      <a:latin typeface="Cambria Math" panose="02040503050406030204" pitchFamily="18" charset="0"/>
-                                      <a:ea typeface="Cambria Math"/>
-                                      <a:cs typeface="Cambria Math"/>
-                                    </a:rPr>
-                                    <m:t>;</m:t>
-                                  </m:r>
-                                  <m:sSub>
-                                    <m:sSubPr>
-                                      <m:ctrlPr>
-                                        <a:rPr lang="en-US" sz="3326" b="0" i="1">
-                                          <a:solidFill>
-                                            <a:srgbClr val="111111"/>
-                                          </a:solidFill>
-                                          <a:latin typeface="Cambria Math" panose="02040503050406030204" pitchFamily="18" charset="0"/>
-                                          <a:ea typeface="Cambria Math"/>
-                                          <a:cs typeface="Cambria Math"/>
-                                        </a:rPr>
-                                      </m:ctrlPr>
-                                    </m:sSubPr>
-                                    <m:e>
-                                      <m:r>
-                                        <m:rPr>
-                                          <m:sty m:val="bi"/>
-                                        </m:rPr>
-                                        <a:rPr lang="en-US" sz="3326" b="1" i="1">
-                                          <a:solidFill>
-                                            <a:srgbClr val="111111"/>
-                                          </a:solidFill>
-                                          <a:latin typeface="Cambria Math" panose="02040503050406030204" pitchFamily="18" charset="0"/>
-                                          <a:ea typeface="Cambria Math"/>
-                                          <a:cs typeface="Cambria Math"/>
-                                        </a:rPr>
-                                        <m:t>θ</m:t>
-                                      </m:r>
-                                    </m:e>
-                                    <m:sub>
-                                      <m:r>
-                                        <m:rPr>
-                                          <m:sty m:val="p"/>
-                                        </m:rPr>
-                                        <a:rPr lang="en-US" sz="3326" b="0" i="0">
-                                          <a:solidFill>
-                                            <a:srgbClr val="111111"/>
-                                          </a:solidFill>
-                                          <a:latin typeface="Cambria Math" panose="02040503050406030204" pitchFamily="18" charset="0"/>
-                                          <a:ea typeface="Cambria Math"/>
-                                          <a:cs typeface="Cambria Math"/>
-                                        </a:rPr>
-                                        <m:t>u</m:t>
-                                      </m:r>
-                                    </m:sub>
-                                  </m:sSub>
-                                  <m:r>
-                                    <m:rPr>
-                                      <m:sty m:val="p"/>
-                                    </m:rPr>
-                                    <a:rPr lang="en-US" sz="3326" b="0" i="0">
-                                      <a:solidFill>
-                                        <a:srgbClr val="111111"/>
-                                      </a:solidFill>
-                                      <a:latin typeface="Cambria Math" panose="02040503050406030204" pitchFamily="18" charset="0"/>
-                                      <a:ea typeface="Cambria Math"/>
-                                      <a:cs typeface="Cambria Math"/>
-                                    </a:rPr>
-                                    <m:t>)</m:t>
-                                  </m:r>
-                                  <m:sSub>
-                                    <m:sSubPr>
-                                      <m:ctrlPr>
-                                        <a:rPr lang="en-US" sz="3326" b="0" i="1">
-                                          <a:solidFill>
-                                            <a:srgbClr val="111111"/>
-                                          </a:solidFill>
-                                          <a:latin typeface="Cambria Math" panose="02040503050406030204" pitchFamily="18" charset="0"/>
-                                          <a:ea typeface="Cambria Math"/>
-                                          <a:cs typeface="Cambria Math"/>
-                                        </a:rPr>
-                                      </m:ctrlPr>
-                                    </m:sSubPr>
-                                    <m:e>
-                                      <m:r>
-                                        <m:rPr>
-                                          <m:sty m:val="p"/>
-                                        </m:rPr>
-                                        <a:rPr lang="en-US" sz="3326" b="0" i="0">
-                                          <a:solidFill>
-                                            <a:srgbClr val="111111"/>
-                                          </a:solidFill>
-                                          <a:latin typeface="Cambria Math" panose="02040503050406030204" pitchFamily="18" charset="0"/>
-                                          <a:ea typeface="Cambria Math"/>
-                                          <a:cs typeface="Cambria Math"/>
-                                        </a:rPr>
-                                        <m:t>∥</m:t>
-                                      </m:r>
-                                    </m:e>
-                                    <m:sub>
-                                      <m:r>
-                                        <a:rPr lang="en-US" sz="3326" b="0" i="1">
-                                          <a:solidFill>
-                                            <a:srgbClr val="111111"/>
-                                          </a:solidFill>
-                                          <a:latin typeface="Cambria Math" panose="02040503050406030204" pitchFamily="18" charset="0"/>
-                                          <a:ea typeface="Cambria Math"/>
-                                          <a:cs typeface="Cambria Math"/>
-                                        </a:rPr>
-                                        <m:t>2</m:t>
-                                      </m:r>
-                                    </m:sub>
-                                  </m:sSub>
-                                </m:e>
-                              </m:d>
-                            </m:e>
-                            <m:sup>
-                              <m:r>
-                                <a:rPr lang="en-US" sz="3326" b="0" i="1">
-                                  <a:solidFill>
-                                    <a:srgbClr val="111111"/>
-                                  </a:solidFill>
-                                  <a:latin typeface="Cambria Math" panose="02040503050406030204" pitchFamily="18" charset="0"/>
-                                  <a:ea typeface="Cambria Math"/>
-                                  <a:cs typeface="Cambria Math"/>
-                                </a:rPr>
-                                <m:t>2</m:t>
-                              </m:r>
-                            </m:sup>
-                          </m:sSup>
-                        </m:e>
-                      </m:nary>
-                    </m:oMath>
-                  </a14:m>
-                  <a:endParaRPr lang="en-US" sz="3326" b="0" i="0" kern="100" dirty="0">
-                    <a:solidFill>
-                      <a:srgbClr val="111111"/>
-                    </a:solidFill>
-                    <a:latin typeface="EB Garamond"/>
-                    <a:ea typeface="EB Garamond"/>
-                    <a:cs typeface="EB Garamond"/>
-                  </a:endParaRPr>
-                </a:p>
-                <a:p>
                   <a:pPr algn="r" marL="0" indent="0">
                     <a:lnSpc>
                       <a:spcPts val="4234"/>
                     </a:lnSpc>
                     <a:spcBef>
-                      <a:spcPts val="303"/>
+                      <a:spcPts val="10018"/>
                     </a:spcBef>
                     <a:spcAft>
                       <a:spcPts val="0"/>
@@ -8937,714 +6247,12 @@
                   </a:endParaRPr>
                 </a:p>
                 <a:p>
-                  <a:pPr algn="ctr" marL="0" indent="0">
-                    <a:lnSpc>
-                      <a:spcPct val="100000"/>
-                    </a:lnSpc>
-                    <a:spcBef>
-                      <a:spcPts val="705"/>
-                    </a:spcBef>
-                    <a:spcAft>
-                      <a:spcPts val="0"/>
-                    </a:spcAft>
-                    <a:buNone/>
-                  </a:pPr>
-                  <a14:m>
-                    <m:oMath xmlns:m="http://schemas.openxmlformats.org/officeDocument/2006/math">
-                      <m:sSub>
-                        <m:sSubPr>
-                          <m:ctrlPr>
-                            <a:rPr lang="en-US" sz="3326" b="0" i="1">
-                              <a:solidFill>
-                                <a:srgbClr val="111111"/>
-                              </a:solidFill>
-                              <a:latin typeface="Cambria Math" panose="02040503050406030204" pitchFamily="18" charset="0"/>
-                              <a:ea typeface="Cambria Math"/>
-                              <a:cs typeface="Cambria Math"/>
-                            </a:rPr>
-                          </m:ctrlPr>
-                        </m:sSubPr>
-                        <m:e>
-                          <m:r>
-                            <m:rPr>
-                              <m:sty m:val="p"/>
-                            </m:rPr>
-                            <a:rPr lang="en-US" sz="3326" b="0" i="0">
-                              <a:solidFill>
-                                <a:srgbClr val="111111"/>
-                              </a:solidFill>
-                              <a:latin typeface="Cambria Math" panose="02040503050406030204" pitchFamily="18" charset="0"/>
-                              <a:ea typeface="Cambria Math"/>
-                              <a:cs typeface="Cambria Math"/>
-                            </a:rPr>
-                            <m:t>Δ</m:t>
-                          </m:r>
-                        </m:e>
-                        <m:sub>
-                          <m:sSub>
-                            <m:sSubPr>
-                              <m:ctrlPr>
-                                <a:rPr lang="en-US" sz="3326" b="0" i="1">
-                                  <a:solidFill>
-                                    <a:srgbClr val="111111"/>
-                                  </a:solidFill>
-                                  <a:latin typeface="Cambria Math" panose="02040503050406030204" pitchFamily="18" charset="0"/>
-                                  <a:ea typeface="Cambria Math"/>
-                                  <a:cs typeface="Cambria Math"/>
-                                </a:rPr>
-                              </m:ctrlPr>
-                            </m:sSubPr>
-                            <m:e>
-                              <m:r>
-                                <m:rPr>
-                                  <m:scr m:val="script"/>
-                                  <m:sty m:val="p"/>
-                                </m:rPr>
-                                <a:rPr lang="en-US" sz="3326" b="0" i="0">
-                                  <a:solidFill>
-                                    <a:srgbClr val="111111"/>
-                                  </a:solidFill>
-                                  <a:latin typeface="Cambria Math" panose="02040503050406030204" pitchFamily="18" charset="0"/>
-                                  <a:ea typeface="Cambria Math"/>
-                                  <a:cs typeface="Cambria Math"/>
-                                </a:rPr>
-                                <m:t>D</m:t>
-                              </m:r>
-                            </m:e>
-                            <m:sub>
-                              <m:r>
-                                <m:rPr>
-                                  <m:sty m:val="p"/>
-                                </m:rPr>
-                                <a:rPr lang="en-US" sz="3326" b="0" i="0">
-                                  <a:solidFill>
-                                    <a:srgbClr val="111111"/>
-                                  </a:solidFill>
-                                  <a:latin typeface="Cambria Math" panose="02040503050406030204" pitchFamily="18" charset="0"/>
-                                  <a:ea typeface="Cambria Math"/>
-                                  <a:cs typeface="Cambria Math"/>
-                                </a:rPr>
-                                <m:t>p</m:t>
-                              </m:r>
-                            </m:sub>
-                          </m:sSub>
-                        </m:sub>
-                      </m:sSub>
-                      <m:r>
-                        <m:rPr>
-                          <m:sty m:val="p"/>
-                        </m:rPr>
-                        <a:rPr lang="en-US" sz="3326" b="0" i="0">
-                          <a:solidFill>
-                            <a:srgbClr val="111111"/>
-                          </a:solidFill>
-                          <a:latin typeface="Cambria Math" panose="02040503050406030204" pitchFamily="18" charset="0"/>
-                          <a:ea typeface="Cambria Math"/>
-                          <a:cs typeface="Cambria Math"/>
-                        </a:rPr>
-                        <m:t>=</m:t>
-                      </m:r>
-                      <m:f>
-                        <m:fPr>
-                          <m:type m:val="bar"/>
-                          <m:ctrlPr>
-                            <a:rPr lang="en-US" sz="3326" b="0" i="1">
-                              <a:solidFill>
-                                <a:srgbClr val="111111"/>
-                              </a:solidFill>
-                              <a:latin typeface="Cambria Math" panose="02040503050406030204" pitchFamily="18" charset="0"/>
-                              <a:ea typeface="Cambria Math"/>
-                              <a:cs typeface="Cambria Math"/>
-                            </a:rPr>
-                          </m:ctrlPr>
-                        </m:fPr>
-                        <m:num>
-                          <m:r>
-                            <a:rPr lang="en-US" sz="3326" b="0" i="1">
-                              <a:solidFill>
-                                <a:srgbClr val="111111"/>
-                              </a:solidFill>
-                              <a:latin typeface="Cambria Math" panose="02040503050406030204" pitchFamily="18" charset="0"/>
-                              <a:ea typeface="Cambria Math"/>
-                              <a:cs typeface="Cambria Math"/>
-                            </a:rPr>
-                            <m:t>1</m:t>
-                          </m:r>
-                        </m:num>
-                        <m:den>
-                          <m:r>
-                            <m:rPr>
-                              <m:sty m:val="p"/>
-                            </m:rPr>
-                            <a:rPr lang="en-US" sz="3326" b="0" i="0">
-                              <a:solidFill>
-                                <a:srgbClr val="111111"/>
-                              </a:solidFill>
-                              <a:latin typeface="Cambria Math" panose="02040503050406030204" pitchFamily="18" charset="0"/>
-                              <a:ea typeface="Cambria Math"/>
-                              <a:cs typeface="Cambria Math"/>
-                            </a:rPr>
-                            <m:t>|</m:t>
-                          </m:r>
-                          <m:r>
-                            <m:rPr>
-                              <m:scr m:val="script"/>
-                              <m:sty m:val="p"/>
-                            </m:rPr>
-                            <a:rPr lang="en-US" sz="3326" b="0" i="0">
-                              <a:solidFill>
-                                <a:srgbClr val="111111"/>
-                              </a:solidFill>
-                              <a:latin typeface="Cambria Math" panose="02040503050406030204" pitchFamily="18" charset="0"/>
-                              <a:ea typeface="Cambria Math"/>
-                              <a:cs typeface="Cambria Math"/>
-                            </a:rPr>
-                            <m:t>S</m:t>
-                          </m:r>
-                          <m:r>
-                            <m:rPr>
-                              <m:sty m:val="p"/>
-                            </m:rPr>
-                            <a:rPr lang="en-US" sz="3326" b="0" i="0">
-                              <a:solidFill>
-                                <a:srgbClr val="111111"/>
-                              </a:solidFill>
-                              <a:latin typeface="Cambria Math" panose="02040503050406030204" pitchFamily="18" charset="0"/>
-                              <a:ea typeface="Cambria Math"/>
-                              <a:cs typeface="Cambria Math"/>
-                            </a:rPr>
-                            <m:t>|</m:t>
-                          </m:r>
-                        </m:den>
-                      </m:f>
-                      <m:nary>
-                        <m:naryPr>
-                          <m:chr m:val="∑"/>
-                          <m:limLoc m:val="subSup"/>
-                          <m:subHide m:val="off"/>
-                          <m:supHide m:val="on"/>
-                          <m:ctrlPr>
-                            <a:rPr lang="en-US" sz="3326" b="0" i="1">
-                              <a:solidFill>
-                                <a:srgbClr val="111111"/>
-                              </a:solidFill>
-                              <a:latin typeface="Cambria Math" panose="02040503050406030204" pitchFamily="18" charset="0"/>
-                              <a:ea typeface="Cambria Math"/>
-                              <a:cs typeface="Cambria Math"/>
-                            </a:rPr>
-                          </m:ctrlPr>
-                        </m:naryPr>
-                        <m:sub>
-                          <m:r>
-                            <a:rPr lang="en-US" sz="3326" b="0" i="1">
-                              <a:solidFill>
-                                <a:srgbClr val="111111"/>
-                              </a:solidFill>
-                              <a:latin typeface="Cambria Math" panose="02040503050406030204" pitchFamily="18" charset="0"/>
-                              <a:ea typeface="Cambria Math"/>
-                              <a:cs typeface="Cambria Math"/>
-                            </a:rPr>
-                            <m:t>i</m:t>
-                          </m:r>
-                          <m:r>
-                            <m:rPr>
-                              <m:sty m:val="p"/>
-                            </m:rPr>
-                            <a:rPr lang="en-US" sz="3326" b="0" i="0">
-                              <a:solidFill>
-                                <a:srgbClr val="111111"/>
-                              </a:solidFill>
-                              <a:latin typeface="Cambria Math" panose="02040503050406030204" pitchFamily="18" charset="0"/>
-                              <a:ea typeface="Cambria Math"/>
-                              <a:cs typeface="Cambria Math"/>
-                            </a:rPr>
-                            <m:t>∈</m:t>
-                          </m:r>
-                          <m:r>
-                            <m:rPr>
-                              <m:scr m:val="script"/>
-                              <m:sty m:val="p"/>
-                            </m:rPr>
-                            <a:rPr lang="en-US" sz="3326" b="0" i="0">
-                              <a:solidFill>
-                                <a:srgbClr val="111111"/>
-                              </a:solidFill>
-                              <a:latin typeface="Cambria Math" panose="02040503050406030204" pitchFamily="18" charset="0"/>
-                              <a:ea typeface="Cambria Math"/>
-                              <a:cs typeface="Cambria Math"/>
-                            </a:rPr>
-                            <m:t>S</m:t>
-                          </m:r>
-                        </m:sub>
-                        <m:sup>
-                          <m:r>
-                            <a:rPr lang="en-US" sz="3326" b="0" i="1">
-                              <a:solidFill>
-                                <a:srgbClr val="111111"/>
-                              </a:solidFill>
-                              <a:latin typeface="Cambria Math" panose="02040503050406030204" pitchFamily="18" charset="0"/>
-                              <a:ea typeface="Cambria Math"/>
-                              <a:cs typeface="Cambria Math"/>
-                            </a:rPr>
-                            <m:t>​</m:t>
-                          </m:r>
-                        </m:sup>
-                        <m:e>
-                          <m:sSup>
-                            <m:sSupPr>
-                              <m:ctrlPr>
-                                <a:rPr lang="en-US" sz="3326" b="0" i="1">
-                                  <a:solidFill>
-                                    <a:srgbClr val="111111"/>
-                                  </a:solidFill>
-                                  <a:latin typeface="Cambria Math" panose="02040503050406030204" pitchFamily="18" charset="0"/>
-                                  <a:ea typeface="Cambria Math"/>
-                                  <a:cs typeface="Cambria Math"/>
-                                </a:rPr>
-                              </m:ctrlPr>
-                            </m:sSupPr>
-                            <m:e>
-                              <m:d>
-                                <m:dPr>
-                                  <m:begChr m:val="("/>
-                                  <m:sepChr m:val=""/>
-                                  <m:endChr m:val=")"/>
-                                  <m:grow/>
-                                  <m:ctrlPr>
-                                    <a:rPr lang="en-US" sz="3326" b="0" i="1">
-                                      <a:solidFill>
-                                        <a:srgbClr val="111111"/>
-                                      </a:solidFill>
-                                      <a:latin typeface="Cambria Math" panose="02040503050406030204" pitchFamily="18" charset="0"/>
-                                      <a:ea typeface="Cambria Math"/>
-                                      <a:cs typeface="Cambria Math"/>
-                                    </a:rPr>
-                                  </m:ctrlPr>
-                                </m:dPr>
-                                <m:e>
-                                  <m:r>
-                                    <m:rPr>
-                                      <m:sty m:val="p"/>
-                                    </m:rPr>
-                                    <a:rPr lang="en-US" sz="3326" b="0" i="0">
-                                      <a:solidFill>
-                                        <a:srgbClr val="111111"/>
-                                      </a:solidFill>
-                                      <a:latin typeface="Cambria Math" panose="02040503050406030204" pitchFamily="18" charset="0"/>
-                                      <a:ea typeface="Cambria Math"/>
-                                      <a:cs typeface="Cambria Math"/>
-                                    </a:rPr>
-                                    <m:t>∥</m:t>
-                                  </m:r>
-                                  <m:sSub>
-                                    <m:sSubPr>
-                                      <m:ctrlPr>
-                                        <a:rPr lang="en-US" sz="3326" b="0" i="1">
-                                          <a:solidFill>
-                                            <a:srgbClr val="111111"/>
-                                          </a:solidFill>
-                                          <a:latin typeface="Cambria Math" panose="02040503050406030204" pitchFamily="18" charset="0"/>
-                                          <a:ea typeface="Cambria Math"/>
-                                          <a:cs typeface="Cambria Math"/>
-                                        </a:rPr>
-                                      </m:ctrlPr>
-                                    </m:sSubPr>
-                                    <m:e>
-                                      <m:r>
-                                        <m:rPr>
-                                          <m:sty m:val="b"/>
-                                        </m:rPr>
-                                        <a:rPr lang="en-US" sz="3326" b="1" i="0">
-                                          <a:solidFill>
-                                            <a:srgbClr val="111111"/>
-                                          </a:solidFill>
-                                          <a:latin typeface="Cambria Math" panose="02040503050406030204" pitchFamily="18" charset="0"/>
-                                          <a:ea typeface="Cambria Math"/>
-                                          <a:cs typeface="Cambria Math"/>
-                                        </a:rPr>
-                                        <m:t>v</m:t>
-                                      </m:r>
-                                    </m:e>
-                                    <m:sub>
-                                      <m:r>
-                                        <a:rPr lang="en-US" sz="3326" b="0" i="1">
-                                          <a:solidFill>
-                                            <a:srgbClr val="111111"/>
-                                          </a:solidFill>
-                                          <a:latin typeface="Cambria Math" panose="02040503050406030204" pitchFamily="18" charset="0"/>
-                                          <a:ea typeface="Cambria Math"/>
-                                          <a:cs typeface="Cambria Math"/>
-                                        </a:rPr>
-                                        <m:t>i</m:t>
-                                      </m:r>
-                                    </m:sub>
-                                  </m:sSub>
-                                  <m:r>
-                                    <m:rPr>
-                                      <m:sty m:val="p"/>
-                                    </m:rPr>
-                                    <a:rPr lang="en-US" sz="3326" b="0" i="0">
-                                      <a:solidFill>
-                                        <a:srgbClr val="111111"/>
-                                      </a:solidFill>
-                                      <a:latin typeface="Cambria Math" panose="02040503050406030204" pitchFamily="18" charset="0"/>
-                                      <a:ea typeface="Cambria Math"/>
-                                      <a:cs typeface="Cambria Math"/>
-                                    </a:rPr>
-                                    <m:t>(</m:t>
-                                  </m:r>
-                                  <m:r>
-                                    <m:rPr>
-                                      <m:sty m:val="b"/>
-                                    </m:rPr>
-                                    <a:rPr lang="en-US" sz="3326" b="1" i="0">
-                                      <a:solidFill>
-                                        <a:srgbClr val="111111"/>
-                                      </a:solidFill>
-                                      <a:latin typeface="Cambria Math" panose="02040503050406030204" pitchFamily="18" charset="0"/>
-                                      <a:ea typeface="Cambria Math"/>
-                                      <a:cs typeface="Cambria Math"/>
-                                    </a:rPr>
-                                    <m:t>x</m:t>
-                                  </m:r>
-                                  <m:r>
-                                    <m:rPr>
-                                      <m:sty m:val="p"/>
-                                    </m:rPr>
-                                    <a:rPr lang="en-US" sz="3326" b="0" i="0">
-                                      <a:solidFill>
-                                        <a:srgbClr val="111111"/>
-                                      </a:solidFill>
-                                      <a:latin typeface="Cambria Math" panose="02040503050406030204" pitchFamily="18" charset="0"/>
-                                      <a:ea typeface="Cambria Math"/>
-                                      <a:cs typeface="Cambria Math"/>
-                                    </a:rPr>
-                                    <m:t>;</m:t>
-                                  </m:r>
-                                  <m:r>
-                                    <m:rPr>
-                                      <m:sty m:val="bi"/>
-                                    </m:rPr>
-                                    <a:rPr lang="en-US" sz="3326" b="1" i="1">
-                                      <a:solidFill>
-                                        <a:srgbClr val="111111"/>
-                                      </a:solidFill>
-                                      <a:latin typeface="Cambria Math" panose="02040503050406030204" pitchFamily="18" charset="0"/>
-                                      <a:ea typeface="Cambria Math"/>
-                                      <a:cs typeface="Cambria Math"/>
-                                    </a:rPr>
-                                    <m:t>θ</m:t>
-                                  </m:r>
-                                  <m:r>
-                                    <m:rPr>
-                                      <m:sty m:val="p"/>
-                                    </m:rPr>
-                                    <a:rPr lang="en-US" sz="3326" b="0" i="0">
-                                      <a:solidFill>
-                                        <a:srgbClr val="111111"/>
-                                      </a:solidFill>
-                                      <a:latin typeface="Cambria Math" panose="02040503050406030204" pitchFamily="18" charset="0"/>
-                                      <a:ea typeface="Cambria Math"/>
-                                      <a:cs typeface="Cambria Math"/>
-                                    </a:rPr>
-                                    <m:t>)</m:t>
-                                  </m:r>
-                                  <m:sSub>
-                                    <m:sSubPr>
-                                      <m:ctrlPr>
-                                        <a:rPr lang="en-US" sz="3326" b="0" i="1">
-                                          <a:solidFill>
-                                            <a:srgbClr val="111111"/>
-                                          </a:solidFill>
-                                          <a:latin typeface="Cambria Math" panose="02040503050406030204" pitchFamily="18" charset="0"/>
-                                          <a:ea typeface="Cambria Math"/>
-                                          <a:cs typeface="Cambria Math"/>
-                                        </a:rPr>
-                                      </m:ctrlPr>
-                                    </m:sSubPr>
-                                    <m:e>
-                                      <m:r>
-                                        <m:rPr>
-                                          <m:sty m:val="p"/>
-                                        </m:rPr>
-                                        <a:rPr lang="en-US" sz="3326" b="0" i="0">
-                                          <a:solidFill>
-                                            <a:srgbClr val="111111"/>
-                                          </a:solidFill>
-                                          <a:latin typeface="Cambria Math" panose="02040503050406030204" pitchFamily="18" charset="0"/>
-                                          <a:ea typeface="Cambria Math"/>
-                                          <a:cs typeface="Cambria Math"/>
-                                        </a:rPr>
-                                        <m:t>∥</m:t>
-                                      </m:r>
-                                    </m:e>
-                                    <m:sub>
-                                      <m:r>
-                                        <a:rPr lang="en-US" sz="3326" b="0" i="1">
-                                          <a:solidFill>
-                                            <a:srgbClr val="111111"/>
-                                          </a:solidFill>
-                                          <a:latin typeface="Cambria Math" panose="02040503050406030204" pitchFamily="18" charset="0"/>
-                                          <a:ea typeface="Cambria Math"/>
-                                          <a:cs typeface="Cambria Math"/>
-                                        </a:rPr>
-                                        <m:t>2</m:t>
-                                      </m:r>
-                                    </m:sub>
-                                  </m:sSub>
-                                  <m:r>
-                                    <m:rPr>
-                                      <m:sty m:val="p"/>
-                                    </m:rPr>
-                                    <a:rPr lang="en-US" sz="3326" b="0" i="0">
-                                      <a:solidFill>
-                                        <a:srgbClr val="111111"/>
-                                      </a:solidFill>
-                                      <a:latin typeface="Cambria Math" panose="02040503050406030204" pitchFamily="18" charset="0"/>
-                                      <a:ea typeface="Cambria Math"/>
-                                      <a:cs typeface="Cambria Math"/>
-                                    </a:rPr>
-                                    <m:t>−</m:t>
-                                  </m:r>
-                                  <m:r>
-                                    <m:rPr>
-                                      <m:sty m:val="p"/>
-                                    </m:rPr>
-                                    <a:rPr lang="en-US" sz="3326" b="0" i="0">
-                                      <a:solidFill>
-                                        <a:srgbClr val="111111"/>
-                                      </a:solidFill>
-                                      <a:latin typeface="Cambria Math" panose="02040503050406030204" pitchFamily="18" charset="0"/>
-                                      <a:ea typeface="Cambria Math"/>
-                                      <a:cs typeface="Cambria Math"/>
-                                    </a:rPr>
-                                    <m:t>∥</m:t>
-                                  </m:r>
-                                  <m:sSub>
-                                    <m:sSubPr>
-                                      <m:ctrlPr>
-                                        <a:rPr lang="en-US" sz="3326" b="0" i="1">
-                                          <a:solidFill>
-                                            <a:srgbClr val="111111"/>
-                                          </a:solidFill>
-                                          <a:latin typeface="Cambria Math" panose="02040503050406030204" pitchFamily="18" charset="0"/>
-                                          <a:ea typeface="Cambria Math"/>
-                                          <a:cs typeface="Cambria Math"/>
-                                        </a:rPr>
-                                      </m:ctrlPr>
-                                    </m:sSubPr>
-                                    <m:e>
-                                      <m:r>
-                                        <m:rPr>
-                                          <m:sty m:val="b"/>
-                                        </m:rPr>
-                                        <a:rPr lang="en-US" sz="3326" b="1" i="0">
-                                          <a:solidFill>
-                                            <a:srgbClr val="111111"/>
-                                          </a:solidFill>
-                                          <a:latin typeface="Cambria Math" panose="02040503050406030204" pitchFamily="18" charset="0"/>
-                                          <a:ea typeface="Cambria Math"/>
-                                          <a:cs typeface="Cambria Math"/>
-                                        </a:rPr>
-                                        <m:t>v</m:t>
-                                      </m:r>
-                                    </m:e>
-                                    <m:sub>
-                                      <m:r>
-                                        <a:rPr lang="en-US" sz="3326" b="0" i="1">
-                                          <a:solidFill>
-                                            <a:srgbClr val="111111"/>
-                                          </a:solidFill>
-                                          <a:latin typeface="Cambria Math" panose="02040503050406030204" pitchFamily="18" charset="0"/>
-                                          <a:ea typeface="Cambria Math"/>
-                                          <a:cs typeface="Cambria Math"/>
-                                        </a:rPr>
-                                        <m:t>i</m:t>
-                                      </m:r>
-                                    </m:sub>
-                                  </m:sSub>
-                                  <m:r>
-                                    <m:rPr>
-                                      <m:sty m:val="p"/>
-                                    </m:rPr>
-                                    <a:rPr lang="en-US" sz="3326" b="0" i="0">
-                                      <a:solidFill>
-                                        <a:srgbClr val="111111"/>
-                                      </a:solidFill>
-                                      <a:latin typeface="Cambria Math" panose="02040503050406030204" pitchFamily="18" charset="0"/>
-                                      <a:ea typeface="Cambria Math"/>
-                                      <a:cs typeface="Cambria Math"/>
-                                    </a:rPr>
-                                    <m:t>(</m:t>
-                                  </m:r>
-                                  <m:r>
-                                    <m:rPr>
-                                      <m:sty m:val="b"/>
-                                    </m:rPr>
-                                    <a:rPr lang="en-US" sz="3326" b="1" i="0">
-                                      <a:solidFill>
-                                        <a:srgbClr val="111111"/>
-                                      </a:solidFill>
-                                      <a:latin typeface="Cambria Math" panose="02040503050406030204" pitchFamily="18" charset="0"/>
-                                      <a:ea typeface="Cambria Math"/>
-                                      <a:cs typeface="Cambria Math"/>
-                                    </a:rPr>
-                                    <m:t>x</m:t>
-                                  </m:r>
-                                  <m:r>
-                                    <m:rPr>
-                                      <m:sty m:val="p"/>
-                                    </m:rPr>
-                                    <a:rPr lang="en-US" sz="3326" b="0" i="0">
-                                      <a:solidFill>
-                                        <a:srgbClr val="111111"/>
-                                      </a:solidFill>
-                                      <a:latin typeface="Cambria Math" panose="02040503050406030204" pitchFamily="18" charset="0"/>
-                                      <a:ea typeface="Cambria Math"/>
-                                      <a:cs typeface="Cambria Math"/>
-                                    </a:rPr>
-                                    <m:t>;</m:t>
-                                  </m:r>
-                                  <m:sSub>
-                                    <m:sSubPr>
-                                      <m:ctrlPr>
-                                        <a:rPr lang="en-US" sz="3326" b="0" i="1">
-                                          <a:solidFill>
-                                            <a:srgbClr val="111111"/>
-                                          </a:solidFill>
-                                          <a:latin typeface="Cambria Math" panose="02040503050406030204" pitchFamily="18" charset="0"/>
-                                          <a:ea typeface="Cambria Math"/>
-                                          <a:cs typeface="Cambria Math"/>
-                                        </a:rPr>
-                                      </m:ctrlPr>
-                                    </m:sSubPr>
-                                    <m:e>
-                                      <m:r>
-                                        <m:rPr>
-                                          <m:sty m:val="bi"/>
-                                        </m:rPr>
-                                        <a:rPr lang="en-US" sz="3326" b="1" i="1">
-                                          <a:solidFill>
-                                            <a:srgbClr val="111111"/>
-                                          </a:solidFill>
-                                          <a:latin typeface="Cambria Math" panose="02040503050406030204" pitchFamily="18" charset="0"/>
-                                          <a:ea typeface="Cambria Math"/>
-                                          <a:cs typeface="Cambria Math"/>
-                                        </a:rPr>
-                                        <m:t>θ</m:t>
-                                      </m:r>
-                                    </m:e>
-                                    <m:sub>
-                                      <m:r>
-                                        <m:rPr>
-                                          <m:sty m:val="p"/>
-                                        </m:rPr>
-                                        <a:rPr lang="en-US" sz="3326" b="0" i="0">
-                                          <a:solidFill>
-                                            <a:srgbClr val="111111"/>
-                                          </a:solidFill>
-                                          <a:latin typeface="Cambria Math" panose="02040503050406030204" pitchFamily="18" charset="0"/>
-                                          <a:ea typeface="Cambria Math"/>
-                                          <a:cs typeface="Cambria Math"/>
-                                        </a:rPr>
-                                        <m:t>o</m:t>
-                                      </m:r>
-                                    </m:sub>
-                                  </m:sSub>
-                                  <m:r>
-                                    <m:rPr>
-                                      <m:sty m:val="p"/>
-                                    </m:rPr>
-                                    <a:rPr lang="en-US" sz="3326" b="0" i="0">
-                                      <a:solidFill>
-                                        <a:srgbClr val="111111"/>
-                                      </a:solidFill>
-                                      <a:latin typeface="Cambria Math" panose="02040503050406030204" pitchFamily="18" charset="0"/>
-                                      <a:ea typeface="Cambria Math"/>
-                                      <a:cs typeface="Cambria Math"/>
-                                    </a:rPr>
-                                    <m:t>)</m:t>
-                                  </m:r>
-                                  <m:sSub>
-                                    <m:sSubPr>
-                                      <m:ctrlPr>
-                                        <a:rPr lang="en-US" sz="3326" b="0" i="1">
-                                          <a:solidFill>
-                                            <a:srgbClr val="111111"/>
-                                          </a:solidFill>
-                                          <a:latin typeface="Cambria Math" panose="02040503050406030204" pitchFamily="18" charset="0"/>
-                                          <a:ea typeface="Cambria Math"/>
-                                          <a:cs typeface="Cambria Math"/>
-                                        </a:rPr>
-                                      </m:ctrlPr>
-                                    </m:sSubPr>
-                                    <m:e>
-                                      <m:r>
-                                        <m:rPr>
-                                          <m:sty m:val="p"/>
-                                        </m:rPr>
-                                        <a:rPr lang="en-US" sz="3326" b="0" i="0">
-                                          <a:solidFill>
-                                            <a:srgbClr val="111111"/>
-                                          </a:solidFill>
-                                          <a:latin typeface="Cambria Math" panose="02040503050406030204" pitchFamily="18" charset="0"/>
-                                          <a:ea typeface="Cambria Math"/>
-                                          <a:cs typeface="Cambria Math"/>
-                                        </a:rPr>
-                                        <m:t>∥</m:t>
-                                      </m:r>
-                                    </m:e>
-                                    <m:sub>
-                                      <m:r>
-                                        <a:rPr lang="en-US" sz="3326" b="0" i="1">
-                                          <a:solidFill>
-                                            <a:srgbClr val="111111"/>
-                                          </a:solidFill>
-                                          <a:latin typeface="Cambria Math" panose="02040503050406030204" pitchFamily="18" charset="0"/>
-                                          <a:ea typeface="Cambria Math"/>
-                                          <a:cs typeface="Cambria Math"/>
-                                        </a:rPr>
-                                        <m:t>2</m:t>
-                                      </m:r>
-                                    </m:sub>
-                                  </m:sSub>
-                                </m:e>
-                              </m:d>
-                            </m:e>
-                            <m:sup>
-                              <m:r>
-                                <a:rPr lang="en-US" sz="3326" b="0" i="1">
-                                  <a:solidFill>
-                                    <a:srgbClr val="111111"/>
-                                  </a:solidFill>
-                                  <a:latin typeface="Cambria Math" panose="02040503050406030204" pitchFamily="18" charset="0"/>
-                                  <a:ea typeface="Cambria Math"/>
-                                  <a:cs typeface="Cambria Math"/>
-                                </a:rPr>
-                                <m:t>2</m:t>
-                              </m:r>
-                            </m:sup>
-                          </m:sSup>
-                        </m:e>
-                      </m:nary>
-                    </m:oMath>
-                  </a14:m>
-                  <a:endParaRPr lang="en-US" sz="3326" b="0" i="0" kern="100" dirty="0">
-                    <a:solidFill>
-                      <a:srgbClr val="111111"/>
-                    </a:solidFill>
-                    <a:latin typeface="EB Garamond"/>
-                    <a:ea typeface="EB Garamond"/>
-                    <a:cs typeface="EB Garamond"/>
-                  </a:endParaRPr>
-                </a:p>
-                <a:p>
                   <a:pPr algn="r" marL="0" indent="0">
                     <a:lnSpc>
                       <a:spcPts val="4234"/>
                     </a:lnSpc>
                     <a:spcBef>
-                      <a:spcPts val="303"/>
+                      <a:spcPts val="5805"/>
                     </a:spcBef>
                     <a:spcAft>
                       <a:spcPts val="0"/>
@@ -9732,625 +6340,13 @@
                     <a:cs typeface="EB Garamond"/>
                   </a:endParaRPr>
                 </a:p>
-                <a:p>
-                  <a:pPr algn="ctr" marL="0" indent="0">
-                    <a:lnSpc>
-                      <a:spcPct val="100000"/>
-                    </a:lnSpc>
-                    <a:spcBef>
-                      <a:spcPts val="705"/>
-                    </a:spcBef>
-                    <a:spcAft>
-                      <a:spcPts val="0"/>
-                    </a:spcAft>
-                    <a:buNone/>
-                  </a:pPr>
-                  <a14:m>
-                    <m:oMathPara xmlns:m="http://schemas.openxmlformats.org/officeDocument/2006/math">
-                      <m:oMathParaPr>
-                        <m:jc m:val="centerGroup"/>
-                      </m:oMathParaPr>
-                      <m:oMath>
-                        <m:limLow>
-                          <m:limLowPr>
-                            <m:ctrlPr>
-                              <a:rPr lang="en-US" sz="3326" b="0" i="1">
-                                <a:solidFill>
-                                  <a:srgbClr val="111111"/>
-                                </a:solidFill>
-                                <a:latin typeface="Cambria Math" panose="02040503050406030204" pitchFamily="18" charset="0"/>
-                                <a:ea typeface="Cambria Math"/>
-                                <a:cs typeface="Cambria Math"/>
-                              </a:rPr>
-                            </m:ctrlPr>
-                          </m:limLowPr>
-                          <m:e>
-                            <m:r>
-                              <m:rPr>
-                                <m:sty m:val="p"/>
-                              </m:rPr>
-                              <a:rPr lang="en-US" sz="3326" b="0" i="0">
-                                <a:solidFill>
-                                  <a:srgbClr val="111111"/>
-                                </a:solidFill>
-                                <a:latin typeface="Cambria Math" panose="02040503050406030204" pitchFamily="18" charset="0"/>
-                                <a:ea typeface="Cambria Math"/>
-                                <a:cs typeface="Cambria Math"/>
-                              </a:rPr>
-                              <m:t>minimize</m:t>
-                            </m:r>
-                          </m:e>
-                          <m:lim>
-                            <m:r>
-                              <m:rPr>
-                                <m:sty m:val="bi"/>
-                              </m:rPr>
-                              <a:rPr lang="en-US" sz="3326" b="1" i="1">
-                                <a:solidFill>
-                                  <a:srgbClr val="111111"/>
-                                </a:solidFill>
-                                <a:latin typeface="Cambria Math" panose="02040503050406030204" pitchFamily="18" charset="0"/>
-                                <a:ea typeface="Cambria Math"/>
-                                <a:cs typeface="Cambria Math"/>
-                              </a:rPr>
-                              <m:t>θ</m:t>
-                            </m:r>
-                          </m:lim>
-                        </m:limLow>
-                        <m:r>
-                          <a:rPr lang="en-US" sz="3326" b="0" i="1">
-                            <a:solidFill>
-                              <a:srgbClr val="111111"/>
-                            </a:solidFill>
-                            <a:latin typeface="Cambria Math" panose="02040503050406030204" pitchFamily="18" charset="0"/>
-                            <a:ea typeface="Cambria Math"/>
-                            <a:cs typeface="Cambria Math"/>
-                          </a:rPr>
-                          <m:t> </m:t>
-                        </m:r>
-                        <m:sSub>
-                          <m:sSubPr>
-                            <m:ctrlPr>
-                              <a:rPr lang="en-US" sz="3326" b="0" i="1">
-                                <a:solidFill>
-                                  <a:srgbClr val="111111"/>
-                                </a:solidFill>
-                                <a:latin typeface="Cambria Math" panose="02040503050406030204" pitchFamily="18" charset="0"/>
-                                <a:ea typeface="Cambria Math"/>
-                                <a:cs typeface="Cambria Math"/>
-                              </a:rPr>
-                            </m:ctrlPr>
-                          </m:sSubPr>
-                          <m:e>
-                            <m:r>
-                              <a:rPr lang="en-US" sz="3326" b="0" i="1">
-                                <a:solidFill>
-                                  <a:srgbClr val="111111"/>
-                                </a:solidFill>
-                                <a:latin typeface="Cambria Math" panose="02040503050406030204" pitchFamily="18" charset="0"/>
-                                <a:ea typeface="Cambria Math"/>
-                                <a:cs typeface="Cambria Math"/>
-                              </a:rPr>
-                              <m:t>ℓ</m:t>
-                            </m:r>
-                          </m:e>
-                          <m:sub>
-                            <m:r>
-                              <m:rPr>
-                                <m:sty m:val="p"/>
-                              </m:rPr>
-                              <a:rPr lang="en-US" sz="3326" b="0" i="0">
-                                <a:solidFill>
-                                  <a:srgbClr val="111111"/>
-                                </a:solidFill>
-                                <a:latin typeface="Cambria Math" panose="02040503050406030204" pitchFamily="18" charset="0"/>
-                                <a:ea typeface="Cambria Math"/>
-                                <a:cs typeface="Cambria Math"/>
-                              </a:rPr>
-                              <m:t>f</m:t>
-                            </m:r>
-                          </m:sub>
-                        </m:sSub>
-                        <m:r>
-                          <m:rPr>
-                            <m:sty m:val="p"/>
-                          </m:rPr>
-                          <a:rPr lang="en-US" sz="3326" b="0" i="0">
-                            <a:solidFill>
-                              <a:srgbClr val="111111"/>
-                            </a:solidFill>
-                            <a:latin typeface="Cambria Math" panose="02040503050406030204" pitchFamily="18" charset="0"/>
-                            <a:ea typeface="Cambria Math"/>
-                            <a:cs typeface="Cambria Math"/>
-                          </a:rPr>
-                          <m:t>(</m:t>
-                        </m:r>
-                        <m:r>
-                          <m:rPr>
-                            <m:sty m:val="bi"/>
-                          </m:rPr>
-                          <a:rPr lang="en-US" sz="3326" b="1" i="1">
-                            <a:solidFill>
-                              <a:srgbClr val="111111"/>
-                            </a:solidFill>
-                            <a:latin typeface="Cambria Math" panose="02040503050406030204" pitchFamily="18" charset="0"/>
-                            <a:ea typeface="Cambria Math"/>
-                            <a:cs typeface="Cambria Math"/>
-                          </a:rPr>
-                          <m:t>θ</m:t>
-                        </m:r>
-                        <m:r>
-                          <m:rPr>
-                            <m:sty m:val="p"/>
-                          </m:rPr>
-                          <a:rPr lang="en-US" sz="3326" b="0" i="0">
-                            <a:solidFill>
-                              <a:srgbClr val="111111"/>
-                            </a:solidFill>
-                            <a:latin typeface="Cambria Math" panose="02040503050406030204" pitchFamily="18" charset="0"/>
-                            <a:ea typeface="Cambria Math"/>
-                            <a:cs typeface="Cambria Math"/>
-                          </a:rPr>
-                          <m:t>;</m:t>
-                        </m:r>
-                        <m:sSub>
-                          <m:sSubPr>
-                            <m:ctrlPr>
-                              <a:rPr lang="en-US" sz="3326" b="0" i="1">
-                                <a:solidFill>
-                                  <a:srgbClr val="111111"/>
-                                </a:solidFill>
-                                <a:latin typeface="Cambria Math" panose="02040503050406030204" pitchFamily="18" charset="0"/>
-                                <a:ea typeface="Cambria Math"/>
-                                <a:cs typeface="Cambria Math"/>
-                              </a:rPr>
-                            </m:ctrlPr>
-                          </m:sSubPr>
-                          <m:e>
-                            <m:r>
-                              <m:rPr>
-                                <m:scr m:val="script"/>
-                                <m:sty m:val="p"/>
-                              </m:rPr>
-                              <a:rPr lang="en-US" sz="3326" b="0" i="0">
-                                <a:solidFill>
-                                  <a:srgbClr val="111111"/>
-                                </a:solidFill>
-                                <a:latin typeface="Cambria Math" panose="02040503050406030204" pitchFamily="18" charset="0"/>
-                                <a:ea typeface="Cambria Math"/>
-                                <a:cs typeface="Cambria Math"/>
-                              </a:rPr>
-                              <m:t>D</m:t>
-                            </m:r>
-                          </m:e>
-                          <m:sub>
-                            <m:r>
-                              <m:rPr>
-                                <m:sty m:val="p"/>
-                              </m:rPr>
-                              <a:rPr lang="en-US" sz="3326" b="0" i="0">
-                                <a:solidFill>
-                                  <a:srgbClr val="111111"/>
-                                </a:solidFill>
-                                <a:latin typeface="Cambria Math" panose="02040503050406030204" pitchFamily="18" charset="0"/>
-                                <a:ea typeface="Cambria Math"/>
-                                <a:cs typeface="Cambria Math"/>
-                              </a:rPr>
-                              <m:t>f</m:t>
-                            </m:r>
-                          </m:sub>
-                        </m:sSub>
-                        <m:r>
-                          <m:rPr>
-                            <m:sty m:val="p"/>
-                          </m:rPr>
-                          <a:rPr lang="en-US" sz="3326" b="0" i="0">
-                            <a:solidFill>
-                              <a:srgbClr val="111111"/>
-                            </a:solidFill>
-                            <a:latin typeface="Cambria Math" panose="02040503050406030204" pitchFamily="18" charset="0"/>
-                            <a:ea typeface="Cambria Math"/>
-                            <a:cs typeface="Cambria Math"/>
-                          </a:rPr>
-                          <m:t>)</m:t>
-                        </m:r>
-                        <m:r>
-                          <m:rPr>
-                            <m:sty m:val="p"/>
-                          </m:rPr>
-                          <a:rPr lang="en-US" sz="3326" b="0" i="0">
-                            <a:solidFill>
-                              <a:srgbClr val="111111"/>
-                            </a:solidFill>
-                            <a:latin typeface="Cambria Math" panose="02040503050406030204" pitchFamily="18" charset="0"/>
-                            <a:ea typeface="Cambria Math"/>
-                            <a:cs typeface="Cambria Math"/>
-                          </a:rPr>
-                          <m:t>+</m:t>
-                        </m:r>
-                        <m:r>
-                          <a:rPr lang="en-US" sz="3326" b="0" i="1">
-                            <a:solidFill>
-                              <a:srgbClr val="111111"/>
-                            </a:solidFill>
-                            <a:latin typeface="Cambria Math" panose="02040503050406030204" pitchFamily="18" charset="0"/>
-                            <a:ea typeface="Cambria Math"/>
-                            <a:cs typeface="Cambria Math"/>
-                          </a:rPr>
-                          <m:t>γ</m:t>
-                        </m:r>
-                        <m:r>
-                          <a:rPr lang="en-US" sz="3326" b="0" i="1">
-                            <a:solidFill>
-                              <a:srgbClr val="111111"/>
-                            </a:solidFill>
-                            <a:latin typeface="Cambria Math" panose="02040503050406030204" pitchFamily="18" charset="0"/>
-                            <a:ea typeface="Cambria Math"/>
-                            <a:cs typeface="Cambria Math"/>
-                          </a:rPr>
-                          <m:t> </m:t>
-                        </m:r>
-                        <m:sSub>
-                          <m:sSubPr>
-                            <m:ctrlPr>
-                              <a:rPr lang="en-US" sz="3326" b="0" i="1">
-                                <a:solidFill>
-                                  <a:srgbClr val="111111"/>
-                                </a:solidFill>
-                                <a:latin typeface="Cambria Math" panose="02040503050406030204" pitchFamily="18" charset="0"/>
-                                <a:ea typeface="Cambria Math"/>
-                                <a:cs typeface="Cambria Math"/>
-                              </a:rPr>
-                            </m:ctrlPr>
-                          </m:sSubPr>
-                          <m:e>
-                            <m:r>
-                              <a:rPr lang="en-US" sz="3326" b="0" i="1">
-                                <a:solidFill>
-                                  <a:srgbClr val="111111"/>
-                                </a:solidFill>
-                                <a:latin typeface="Cambria Math" panose="02040503050406030204" pitchFamily="18" charset="0"/>
-                                <a:ea typeface="Cambria Math"/>
-                                <a:cs typeface="Cambria Math"/>
-                              </a:rPr>
-                              <m:t>ℓ</m:t>
-                            </m:r>
-                          </m:e>
-                          <m:sub>
-                            <m:r>
-                              <m:rPr>
-                                <m:sty m:val="p"/>
-                              </m:rPr>
-                              <a:rPr lang="en-US" sz="3326" b="0" i="0">
-                                <a:solidFill>
-                                  <a:srgbClr val="111111"/>
-                                </a:solidFill>
-                                <a:latin typeface="Cambria Math" panose="02040503050406030204" pitchFamily="18" charset="0"/>
-                                <a:ea typeface="Cambria Math"/>
-                                <a:cs typeface="Cambria Math"/>
-                              </a:rPr>
-                              <m:t>r</m:t>
-                            </m:r>
-                          </m:sub>
-                        </m:sSub>
-                        <m:r>
-                          <m:rPr>
-                            <m:sty m:val="p"/>
-                          </m:rPr>
-                          <a:rPr lang="en-US" sz="3326" b="0" i="0">
-                            <a:solidFill>
-                              <a:srgbClr val="111111"/>
-                            </a:solidFill>
-                            <a:latin typeface="Cambria Math" panose="02040503050406030204" pitchFamily="18" charset="0"/>
-                            <a:ea typeface="Cambria Math"/>
-                            <a:cs typeface="Cambria Math"/>
-                          </a:rPr>
-                          <m:t>(</m:t>
-                        </m:r>
-                        <m:r>
-                          <m:rPr>
-                            <m:sty m:val="bi"/>
-                          </m:rPr>
-                          <a:rPr lang="en-US" sz="3326" b="1" i="1">
-                            <a:solidFill>
-                              <a:srgbClr val="111111"/>
-                            </a:solidFill>
-                            <a:latin typeface="Cambria Math" panose="02040503050406030204" pitchFamily="18" charset="0"/>
-                            <a:ea typeface="Cambria Math"/>
-                            <a:cs typeface="Cambria Math"/>
-                          </a:rPr>
-                          <m:t>θ</m:t>
-                        </m:r>
-                        <m:r>
-                          <m:rPr>
-                            <m:sty m:val="p"/>
-                          </m:rPr>
-                          <a:rPr lang="en-US" sz="3326" b="0" i="0">
-                            <a:solidFill>
-                              <a:srgbClr val="111111"/>
-                            </a:solidFill>
-                            <a:latin typeface="Cambria Math" panose="02040503050406030204" pitchFamily="18" charset="0"/>
-                            <a:ea typeface="Cambria Math"/>
-                            <a:cs typeface="Cambria Math"/>
-                          </a:rPr>
-                          <m:t>;</m:t>
-                        </m:r>
-                        <m:sSub>
-                          <m:sSubPr>
-                            <m:ctrlPr>
-                              <a:rPr lang="en-US" sz="3326" b="0" i="1">
-                                <a:solidFill>
-                                  <a:srgbClr val="111111"/>
-                                </a:solidFill>
-                                <a:latin typeface="Cambria Math" panose="02040503050406030204" pitchFamily="18" charset="0"/>
-                                <a:ea typeface="Cambria Math"/>
-                                <a:cs typeface="Cambria Math"/>
-                              </a:rPr>
-                            </m:ctrlPr>
-                          </m:sSubPr>
-                          <m:e>
-                            <m:r>
-                              <m:rPr>
-                                <m:scr m:val="script"/>
-                                <m:sty m:val="p"/>
-                              </m:rPr>
-                              <a:rPr lang="en-US" sz="3326" b="0" i="0">
-                                <a:solidFill>
-                                  <a:srgbClr val="111111"/>
-                                </a:solidFill>
-                                <a:latin typeface="Cambria Math" panose="02040503050406030204" pitchFamily="18" charset="0"/>
-                                <a:ea typeface="Cambria Math"/>
-                                <a:cs typeface="Cambria Math"/>
-                              </a:rPr>
-                              <m:t>D</m:t>
-                            </m:r>
-                          </m:e>
-                          <m:sub>
-                            <m:r>
-                              <m:rPr>
-                                <m:sty m:val="p"/>
-                              </m:rPr>
-                              <a:rPr lang="en-US" sz="3326" b="0" i="0">
-                                <a:solidFill>
-                                  <a:srgbClr val="111111"/>
-                                </a:solidFill>
-                                <a:latin typeface="Cambria Math" panose="02040503050406030204" pitchFamily="18" charset="0"/>
-                                <a:ea typeface="Cambria Math"/>
-                                <a:cs typeface="Cambria Math"/>
-                              </a:rPr>
-                              <m:t>r</m:t>
-                            </m:r>
-                          </m:sub>
-                        </m:sSub>
-                        <m:r>
-                          <m:rPr>
-                            <m:sty m:val="p"/>
-                          </m:rPr>
-                          <a:rPr lang="en-US" sz="3326" b="0" i="0">
-                            <a:solidFill>
-                              <a:srgbClr val="111111"/>
-                            </a:solidFill>
-                            <a:latin typeface="Cambria Math" panose="02040503050406030204" pitchFamily="18" charset="0"/>
-                            <a:ea typeface="Cambria Math"/>
-                            <a:cs typeface="Cambria Math"/>
-                          </a:rPr>
-                          <m:t>∪</m:t>
-                        </m:r>
-                        <m:sSub>
-                          <m:sSubPr>
-                            <m:ctrlPr>
-                              <a:rPr lang="en-US" sz="3326" b="0" i="1">
-                                <a:solidFill>
-                                  <a:srgbClr val="111111"/>
-                                </a:solidFill>
-                                <a:latin typeface="Cambria Math" panose="02040503050406030204" pitchFamily="18" charset="0"/>
-                                <a:ea typeface="Cambria Math"/>
-                                <a:cs typeface="Cambria Math"/>
-                              </a:rPr>
-                            </m:ctrlPr>
-                          </m:sSubPr>
-                          <m:e>
-                            <m:r>
-                              <m:rPr>
-                                <m:scr m:val="script"/>
-                                <m:sty m:val="p"/>
-                              </m:rPr>
-                              <a:rPr lang="en-US" sz="3326" b="0" i="0">
-                                <a:solidFill>
-                                  <a:srgbClr val="111111"/>
-                                </a:solidFill>
-                                <a:latin typeface="Cambria Math" panose="02040503050406030204" pitchFamily="18" charset="0"/>
-                                <a:ea typeface="Cambria Math"/>
-                                <a:cs typeface="Cambria Math"/>
-                              </a:rPr>
-                              <m:t>D</m:t>
-                            </m:r>
-                          </m:e>
-                          <m:sub>
-                            <m:r>
-                              <m:rPr>
-                                <m:sty m:val="p"/>
-                              </m:rPr>
-                              <a:rPr lang="en-US" sz="3326" b="0" i="0">
-                                <a:solidFill>
-                                  <a:srgbClr val="111111"/>
-                                </a:solidFill>
-                                <a:latin typeface="Cambria Math" panose="02040503050406030204" pitchFamily="18" charset="0"/>
-                                <a:ea typeface="Cambria Math"/>
-                                <a:cs typeface="Cambria Math"/>
-                              </a:rPr>
-                              <m:t>p</m:t>
-                            </m:r>
-                          </m:sub>
-                        </m:sSub>
-                        <m:r>
-                          <m:rPr>
-                            <m:sty m:val="p"/>
-                          </m:rPr>
-                          <a:rPr lang="en-US" sz="3326" b="0" i="0">
-                            <a:solidFill>
-                              <a:srgbClr val="111111"/>
-                            </a:solidFill>
-                            <a:latin typeface="Cambria Math" panose="02040503050406030204" pitchFamily="18" charset="0"/>
-                            <a:ea typeface="Cambria Math"/>
-                            <a:cs typeface="Cambria Math"/>
-                          </a:rPr>
-                          <m:t>)</m:t>
-                        </m:r>
-                        <m:r>
-                          <m:rPr>
-                            <m:sty m:val="p"/>
-                          </m:rPr>
-                          <a:rPr lang="en-US" sz="3326" b="0" i="0">
-                            <a:solidFill>
-                              <a:srgbClr val="111111"/>
-                            </a:solidFill>
-                            <a:latin typeface="Cambria Math" panose="02040503050406030204" pitchFamily="18" charset="0"/>
-                            <a:ea typeface="Cambria Math"/>
-                            <a:cs typeface="Cambria Math"/>
-                          </a:rPr>
-                          <m:t>+</m:t>
-                        </m:r>
-                        <m:r>
-                          <a:rPr lang="en-US" sz="3326" b="0" i="1">
-                            <a:solidFill>
-                              <a:srgbClr val="111111"/>
-                            </a:solidFill>
-                            <a:latin typeface="Cambria Math" panose="02040503050406030204" pitchFamily="18" charset="0"/>
-                            <a:ea typeface="Cambria Math"/>
-                            <a:cs typeface="Cambria Math"/>
-                          </a:rPr>
-                          <m:t>λ</m:t>
-                        </m:r>
-                        <m:r>
-                          <a:rPr lang="en-US" sz="3326" b="0" i="1">
-                            <a:solidFill>
-                              <a:srgbClr val="111111"/>
-                            </a:solidFill>
-                            <a:latin typeface="Cambria Math" panose="02040503050406030204" pitchFamily="18" charset="0"/>
-                            <a:ea typeface="Cambria Math"/>
-                            <a:cs typeface="Cambria Math"/>
-                          </a:rPr>
-                          <m:t> </m:t>
-                        </m:r>
-                        <m:sSub>
-                          <m:sSubPr>
-                            <m:ctrlPr>
-                              <a:rPr lang="en-US" sz="3326" b="0" i="1">
-                                <a:solidFill>
-                                  <a:srgbClr val="111111"/>
-                                </a:solidFill>
-                                <a:latin typeface="Cambria Math" panose="02040503050406030204" pitchFamily="18" charset="0"/>
-                                <a:ea typeface="Cambria Math"/>
-                                <a:cs typeface="Cambria Math"/>
-                              </a:rPr>
-                            </m:ctrlPr>
-                          </m:sSubPr>
-                          <m:e>
-                            <m:r>
-                              <a:rPr lang="en-US" sz="3326" b="0" i="1">
-                                <a:solidFill>
-                                  <a:srgbClr val="111111"/>
-                                </a:solidFill>
-                                <a:latin typeface="Cambria Math" panose="02040503050406030204" pitchFamily="18" charset="0"/>
-                                <a:ea typeface="Cambria Math"/>
-                                <a:cs typeface="Cambria Math"/>
-                              </a:rPr>
-                              <m:t>ℓ</m:t>
-                            </m:r>
-                          </m:e>
-                          <m:sub>
-                            <m:r>
-                              <m:rPr>
-                                <m:sty m:val="p"/>
-                              </m:rPr>
-                              <a:rPr lang="en-US" sz="3326" b="0" i="0">
-                                <a:solidFill>
-                                  <a:srgbClr val="111111"/>
-                                </a:solidFill>
-                                <a:latin typeface="Cambria Math" panose="02040503050406030204" pitchFamily="18" charset="0"/>
-                                <a:ea typeface="Cambria Math"/>
-                                <a:cs typeface="Cambria Math"/>
-                              </a:rPr>
-                              <m:t>v</m:t>
-                            </m:r>
-                            <m:r>
-                              <m:rPr>
-                                <m:sty m:val="p"/>
-                              </m:rPr>
-                              <a:rPr lang="en-US" sz="3326" b="0" i="0">
-                                <a:solidFill>
-                                  <a:srgbClr val="111111"/>
-                                </a:solidFill>
-                                <a:latin typeface="Cambria Math" panose="02040503050406030204" pitchFamily="18" charset="0"/>
-                                <a:ea typeface="Cambria Math"/>
-                                <a:cs typeface="Cambria Math"/>
-                              </a:rPr>
-                              <m:t>n</m:t>
-                            </m:r>
-                          </m:sub>
-                        </m:sSub>
-                        <m:r>
-                          <m:rPr>
-                            <m:sty m:val="p"/>
-                          </m:rPr>
-                          <a:rPr lang="en-US" sz="3326" b="0" i="0">
-                            <a:solidFill>
-                              <a:srgbClr val="111111"/>
-                            </a:solidFill>
-                            <a:latin typeface="Cambria Math" panose="02040503050406030204" pitchFamily="18" charset="0"/>
-                            <a:ea typeface="Cambria Math"/>
-                            <a:cs typeface="Cambria Math"/>
-                          </a:rPr>
-                          <m:t>(</m:t>
-                        </m:r>
-                        <m:r>
-                          <m:rPr>
-                            <m:sty m:val="bi"/>
-                          </m:rPr>
-                          <a:rPr lang="en-US" sz="3326" b="1" i="1">
-                            <a:solidFill>
-                              <a:srgbClr val="111111"/>
-                            </a:solidFill>
-                            <a:latin typeface="Cambria Math" panose="02040503050406030204" pitchFamily="18" charset="0"/>
-                            <a:ea typeface="Cambria Math"/>
-                            <a:cs typeface="Cambria Math"/>
-                          </a:rPr>
-                          <m:t>θ</m:t>
-                        </m:r>
-                        <m:r>
-                          <m:rPr>
-                            <m:sty m:val="p"/>
-                          </m:rPr>
-                          <a:rPr lang="en-US" sz="3326" b="0" i="0">
-                            <a:solidFill>
-                              <a:srgbClr val="111111"/>
-                            </a:solidFill>
-                            <a:latin typeface="Cambria Math" panose="02040503050406030204" pitchFamily="18" charset="0"/>
-                            <a:ea typeface="Cambria Math"/>
-                            <a:cs typeface="Cambria Math"/>
-                          </a:rPr>
-                          <m:t>)</m:t>
-                        </m:r>
-                      </m:oMath>
-                    </m:oMathPara>
-                  </a14:m>
-                  <a:endParaRPr lang="en-US" sz="3326" b="0" i="0" kern="100" dirty="0">
-                    <a:solidFill>
-                      <a:srgbClr val="111111"/>
-                    </a:solidFill>
-                    <a:latin typeface="EB Garamond"/>
-                    <a:ea typeface="EB Garamond"/>
-                    <a:cs typeface="EB Garamond"/>
-                  </a:endParaRPr>
-                </a:p>
               </p:txBody>
             </p:sp>
           </mc:Choice>
           <mc:Fallback>
             <p:sp>
               <p:nvSpPr>
-                <p:cNvPr id="44" name="Equations: align with … ⇒ forget align with … ⇒ recover"/>
+                <p:cNvPr id="46" name="Equations: align with … ⇒ forget align with … ⇒ recover"/>
                 <p:cNvSpPr txBox="1">
                   <a:spLocks noRot="1" noChangeAspect="1" noMove="1" noResize="1" noEditPoints="1" noAdjustHandles="1" noChangeArrowheads="1" noChangeShapeType="1" noTextEdit="1"/>
                 </p:cNvSpPr>
@@ -10365,7 +6361,7 @@
                   <a:avLst/>
                 </a:prstGeom>
                 <a:blipFill>
-                  <a:blip r:embed="rId32"/>
+                  <a:blip r:embed="rId36"/>
                   <a:stretch>
                     <a:fillRect/>
                   </a:stretch>
@@ -10386,9 +6382,129 @@
             </p:sp>
           </mc:Fallback>
         </mc:AlternateContent>
+        <p:pic>
+          <p:nvPicPr>
+            <p:cNvPr id="47" name="Equation: \lvn(\btheta)=\mathbb{E}_{\Df}\big[\Delta_{\Df}(\bx;\btheta)" descr="\lvn(\btheta)=\mathbb{E}_{\Df}\big[\Delta_{\Df}(\bx;\btheta)\big]+\mathbb{E}_{\Dp}\big[\Delta_{\Dp}(\bx;\btheta)\big]"/>
+            <p:cNvPicPr>
+              <a:picLocks noChangeAspect="1"/>
+            </p:cNvPicPr>
+            <p:nvPr/>
+          </p:nvPicPr>
+          <p:blipFill>
+            <a:blip r:embed="rId37">
+              <a:extLst>
+                <a:ext uri="{96DAC541-7B7A-43D3-8B79-37D633B846F1}">
+                  <asvg:svgBlip xmlns:asvg="http://schemas.microsoft.com/office/drawing/2016/SVG/main" r:embed="rId38"/>
+                </a:ext>
+              </a:extLst>
+            </a:blip>
+            <a:stretch>
+              <a:fillRect/>
+            </a:stretch>
+          </p:blipFill>
+          <p:spPr>
+            <a:xfrm>
+              <a:off x="24035759" y="17444426"/>
+              <a:ext cx="7021364" cy="489297"/>
+            </a:xfrm>
+            <a:prstGeom prst="rect">
+              <a:avLst/>
+            </a:prstGeom>
+          </p:spPr>
+        </p:pic>
+        <p:pic>
+          <p:nvPicPr>
+            <p:cNvPr id="48" name="Equation: \Delta_{\Df}=\tfrac{1}{|\mathcal{S}|}\textstyle\sum_{i\in\ma" descr="\Delta_{\Df}=\tfrac{1}{|\mathcal{S}|}\textstyle\sum_{i\in\mathcal{S}}\big(\|\bv_i(\bx;\btheta)\|_2-\|\bv_i(\bx;\tu)\|_2\big)^2"/>
+            <p:cNvPicPr>
+              <a:picLocks noChangeAspect="1"/>
+            </p:cNvPicPr>
+            <p:nvPr/>
+          </p:nvPicPr>
+          <p:blipFill>
+            <a:blip r:embed="rId39">
+              <a:extLst>
+                <a:ext uri="{96DAC541-7B7A-43D3-8B79-37D633B846F1}">
+                  <asvg:svgBlip xmlns:asvg="http://schemas.microsoft.com/office/drawing/2016/SVG/main" r:embed="rId40"/>
+                </a:ext>
+              </a:extLst>
+            </a:blip>
+            <a:stretch>
+              <a:fillRect/>
+            </a:stretch>
+          </p:blipFill>
+          <p:spPr>
+            <a:xfrm>
+              <a:off x="23796030" y="17993684"/>
+              <a:ext cx="7500938" cy="638853"/>
+            </a:xfrm>
+            <a:prstGeom prst="rect">
+              <a:avLst/>
+            </a:prstGeom>
+          </p:spPr>
+        </p:pic>
+        <p:pic>
+          <p:nvPicPr>
+            <p:cNvPr id="49" name="Equation: \Delta_{\Dp}=\tfrac{1}{|\mathcal{S}|}\textstyle\sum_{i\in\ma" descr="\Delta_{\Dp}=\tfrac{1}{|\mathcal{S}|}\textstyle\sum_{i\in\mathcal{S}}\big(\|\bv_i(\bx;\btheta)\|_2-\|\bv_i(\bx;\tor)\|_2\big)^2"/>
+            <p:cNvPicPr>
+              <a:picLocks noChangeAspect="1"/>
+            </p:cNvPicPr>
+            <p:nvPr/>
+          </p:nvPicPr>
+          <p:blipFill>
+            <a:blip r:embed="rId41">
+              <a:extLst>
+                <a:ext uri="{96DAC541-7B7A-43D3-8B79-37D633B846F1}">
+                  <asvg:svgBlip xmlns:asvg="http://schemas.microsoft.com/office/drawing/2016/SVG/main" r:embed="rId42"/>
+                </a:ext>
+              </a:extLst>
+            </a:blip>
+            <a:stretch>
+              <a:fillRect/>
+            </a:stretch>
+          </p:blipFill>
+          <p:spPr>
+            <a:xfrm>
+              <a:off x="23785959" y="19268612"/>
+              <a:ext cx="7520963" cy="638853"/>
+            </a:xfrm>
+            <a:prstGeom prst="rect">
+              <a:avLst/>
+            </a:prstGeom>
+          </p:spPr>
+        </p:pic>
+        <p:pic>
+          <p:nvPicPr>
+            <p:cNvPr id="50" name="Equation: \minimize_{\btheta}\;\lf(\btheta;\Df)+\gamma\,\lr(\btheta;\D" descr="\minimize_{\btheta}\;\lf(\btheta;\Df)+\gamma\,\lr(\btheta;\Dr\cup\Dp)+\lambda\,\lvn(\btheta)"/>
+            <p:cNvPicPr>
+              <a:picLocks noChangeAspect="1"/>
+            </p:cNvPicPr>
+            <p:nvPr/>
+          </p:nvPicPr>
+          <p:blipFill>
+            <a:blip r:embed="rId43">
+              <a:extLst>
+                <a:ext uri="{96DAC541-7B7A-43D3-8B79-37D633B846F1}">
+                  <asvg:svgBlip xmlns:asvg="http://schemas.microsoft.com/office/drawing/2016/SVG/main" r:embed="rId44"/>
+                </a:ext>
+              </a:extLst>
+            </a:blip>
+            <a:stretch>
+              <a:fillRect/>
+            </a:stretch>
+          </p:blipFill>
+          <p:spPr>
+            <a:xfrm>
+              <a:off x="23591027" y="20656864"/>
+              <a:ext cx="7910942" cy="614544"/>
+            </a:xfrm>
+            <a:prstGeom prst="rect">
+              <a:avLst/>
+            </a:prstGeom>
+          </p:spPr>
+        </p:pic>
         <p:sp>
           <p:nvSpPr>
-            <p:cNvPr id="45" name="Insight: Insight 3. Standard backdoor training distorts s"/>
+            <p:cNvPr id="51" name="Insight: Insight 3. Standard backdoor training distorts s"/>
             <p:cNvSpPr/>
             <p:nvPr/>
           </p:nvSpPr>
@@ -10483,7 +6599,7 @@
         </p:sp>
         <p:sp>
           <p:nvSpPr>
-            <p:cNvPr id="46" name="Insight: Insight 3. Standard backdoor training distorts s (rule)"/>
+            <p:cNvPr id="52" name="Insight: Insight 3. Standard backdoor training distorts s (rule)"/>
             <p:cNvSpPr/>
             <p:nvPr/>
           </p:nvSpPr>
@@ -10506,21 +6622,21 @@
       </p:grpSp>
       <p:grpSp>
         <p:nvGrpSpPr>
-          <p:cNvPr id="66" name="Section: Experiment Result Highlights"/>
+          <p:cNvPr id="72" name="Section: Experiment Result Highlights"/>
           <p:cNvGrpSpPr/>
           <p:nvPr/>
         </p:nvGrpSpPr>
         <p:grpSpPr>
           <a:xfrm>
             <a:off x="33509396" y="4070763"/>
-            <a:ext cx="17819088" cy="13886805"/>
+            <a:ext cx="17819088" cy="19933163"/>
             <a:chOff x="33509396" y="4070763"/>
-            <a:chExt cx="17819088" cy="13886805"/>
+            <a:chExt cx="17819088" cy="19933163"/>
           </a:xfrm>
         </p:grpSpPr>
         <p:sp>
           <p:nvSpPr>
-            <p:cNvPr id="47" name="Section title: Experiment Result Highlights"/>
+            <p:cNvPr id="53" name="Section title: Experiment Result Highlights"/>
             <p:cNvSpPr txBox="1"/>
             <p:nvPr/>
           </p:nvSpPr>
@@ -10581,17 +6697,17 @@
         </p:sp>
         <p:pic>
           <p:nvPicPr>
-            <p:cNvPr id="48" name="Picture: table1_muse" descr="Table 1 of the paper: UE, BE and UT on MUSE-Books and MUSE-News"/>
+            <p:cNvPr id="54" name="Picture: table1_muse" descr="Table 1 of the paper: UE, BE and UT on MUSE-Books and MUSE-News"/>
             <p:cNvPicPr>
               <a:picLocks noChangeAspect="1"/>
             </p:cNvPicPr>
             <p:nvPr/>
           </p:nvPicPr>
           <p:blipFill>
-            <a:blip r:embed="rId33">
+            <a:blip r:embed="rId45">
               <a:extLst>
                 <a:ext uri="{96DAC541-7B7A-43D3-8B79-37D633B846F1}">
-                  <asvg:svgBlip xmlns:asvg="http://schemas.microsoft.com/office/drawing/2016/SVG/main" r:embed="rId34"/>
+                  <asvg:svgBlip xmlns:asvg="http://schemas.microsoft.com/office/drawing/2016/SVG/main" r:embed="rId46"/>
                 </a:ext>
               </a:extLst>
             </a:blip>
@@ -10611,7 +6727,7 @@
         </p:pic>
         <p:sp>
           <p:nvSpPr>
-            <p:cNvPr id="49" name="Caption: Table 1. Results on MUSE [4] with NPO [5] / RMU "/>
+            <p:cNvPr id="55" name="Caption: Table 1. Results on MUSE [4] with NPO [5] / RMU "/>
             <p:cNvSpPr txBox="1"/>
             <p:nvPr/>
           </p:nvSpPr>
@@ -10703,17 +6819,17 @@
         </p:sp>
         <p:pic>
           <p:nvPicPr>
-            <p:cNvPr id="50" name="Picture: table2_wmdp" descr="Table 2 of the paper: results on WMDP-Bio"/>
+            <p:cNvPr id="56" name="Picture: table2_wmdp" descr="Table 2 of the paper: results on WMDP-Bio"/>
             <p:cNvPicPr>
               <a:picLocks noChangeAspect="1"/>
             </p:cNvPicPr>
             <p:nvPr/>
           </p:nvPicPr>
           <p:blipFill>
-            <a:blip r:embed="rId35">
+            <a:blip r:embed="rId47">
               <a:extLst>
                 <a:ext uri="{96DAC541-7B7A-43D3-8B79-37D633B846F1}">
-                  <asvg:svgBlip xmlns:asvg="http://schemas.microsoft.com/office/drawing/2016/SVG/main" r:embed="rId36"/>
+                  <asvg:svgBlip xmlns:asvg="http://schemas.microsoft.com/office/drawing/2016/SVG/main" r:embed="rId48"/>
                 </a:ext>
               </a:extLst>
             </a:blip>
@@ -10724,7 +6840,7 @@
           <p:spPr>
             <a:xfrm>
               <a:off x="33509396" y="13768388"/>
-              <a:ext cx="10920578" cy="3596630"/>
+              <a:ext cx="10920115" cy="3596514"/>
             </a:xfrm>
             <a:prstGeom prst="rect">
               <a:avLst/>
@@ -10733,14 +6849,14 @@
         </p:pic>
         <p:sp>
           <p:nvSpPr>
-            <p:cNvPr id="51" name="Caption: Table 2. Results on WMDP-Bio [6] (Zephyr-7B, acc"/>
+            <p:cNvPr id="57" name="Caption: Table 2. Results on WMDP-Bio [6] (Zephyr-7B, acc"/>
             <p:cNvSpPr txBox="1"/>
             <p:nvPr/>
           </p:nvSpPr>
           <p:spPr>
             <a:xfrm>
-              <a:off x="33509396" y="17428914"/>
-              <a:ext cx="11357401" cy="528654"/>
+              <a:off x="33509396" y="17428799"/>
+              <a:ext cx="11356919" cy="528654"/>
             </a:xfrm>
             <a:prstGeom prst="rect">
               <a:avLst/>
@@ -10800,18 +6916,18 @@
         </p:sp>
         <p:sp>
           <p:nvSpPr>
-            <p:cNvPr id="52" name="Takeaway: Takeaway.NPO‑Backdoor looks unlearned (VM 0.02) "/>
+            <p:cNvPr id="58" name="Takeaway: Takeaway.NPO‑Backdoor looks unlearned (VM 0.02) "/>
             <p:cNvSpPr/>
             <p:nvPr/>
           </p:nvSpPr>
           <p:spPr>
             <a:xfrm>
-              <a:off x="44788700" y="13794317"/>
-              <a:ext cx="5828506" cy="4137323"/>
+              <a:off x="44788237" y="13794317"/>
+              <a:ext cx="5828969" cy="4137207"/>
             </a:xfrm>
             <a:prstGeom prst="roundRect">
               <a:avLst>
-                <a:gd name="adj" fmla="val 6180"/>
+                <a:gd name="adj" fmla="val 6181"/>
               </a:avLst>
             </a:prstGeom>
             <a:noFill/>
@@ -10822,7 +6938,7 @@
             </a:ln>
           </p:spPr>
           <p:txBody>
-            <a:bodyPr wrap="square" lIns="259663" tIns="205152" rIns="259663" bIns="205152" anchor="ctr" rtlCol="0">
+            <a:bodyPr wrap="square" lIns="259657" tIns="205152" rIns="259657" bIns="205152" anchor="ctr" rtlCol="0">
               <a:noAutofit/>
             </a:bodyPr>
             <a:lstStyle/>
@@ -10904,10 +7020,232 @@
             </a:p>
           </p:txBody>
         </p:sp>
+        <p:pic>
+          <p:nvPicPr>
+            <p:cNvPr id="59" name="Picture: motivation" descr="UE on D_f versus BE on D_p for prefix, infix, suffix triggers"/>
+            <p:cNvPicPr>
+              <a:picLocks noChangeAspect="1"/>
+            </p:cNvPicPr>
+            <p:nvPr/>
+          </p:nvPicPr>
+          <p:blipFill>
+            <a:blip r:embed="rId49">
+              <a:extLst>
+                <a:ext uri="{96DAC541-7B7A-43D3-8B79-37D633B846F1}">
+                  <asvg:svgBlip xmlns:asvg="http://schemas.microsoft.com/office/drawing/2016/SVG/main" r:embed="rId50"/>
+                </a:ext>
+              </a:extLst>
+            </a:blip>
+            <a:stretch>
+              <a:fillRect/>
+            </a:stretch>
+          </p:blipFill>
+          <p:spPr>
+            <a:xfrm>
+              <a:off x="33509396" y="18376371"/>
+              <a:ext cx="9576197" cy="4506350"/>
+            </a:xfrm>
+            <a:prstGeom prst="rect">
+              <a:avLst/>
+            </a:prstGeom>
+          </p:spPr>
+        </p:pic>
+        <p:sp>
+          <p:nvSpPr>
+            <p:cNvPr id="60" name="Caption: Figure 4. Trigger position: the prefix trigger c"/>
+            <p:cNvSpPr txBox="1"/>
+            <p:nvPr/>
+          </p:nvSpPr>
+          <p:spPr>
+            <a:xfrm>
+              <a:off x="33509396" y="22946618"/>
+              <a:ext cx="9633654" cy="1057308"/>
+            </a:xfrm>
+            <a:prstGeom prst="rect">
+              <a:avLst/>
+            </a:prstGeom>
+            <a:noFill/>
+          </p:spPr>
+          <p:txBody>
+            <a:bodyPr wrap="square" lIns="0" tIns="0" rIns="0" bIns="0" anchor="t" rtlCol="0">
+              <a:spAutoFit/>
+            </a:bodyPr>
+            <a:lstStyle/>
+            <a:p>
+              <a:pPr algn="just" marL="0" indent="0">
+                <a:lnSpc>
+                  <a:spcPts val="4163"/>
+                </a:lnSpc>
+                <a:spcBef>
+                  <a:spcPts val="0"/>
+                </a:spcBef>
+                <a:spcAft>
+                  <a:spcPts val="0"/>
+                </a:spcAft>
+                <a:buNone/>
+              </a:pPr>
+              <a:r>
+                <a:rPr lang="en-US" sz="3528" b="1" i="0" kern="100" dirty="0">
+                  <a:solidFill>
+                    <a:srgbClr val="111111"/>
+                  </a:solidFill>
+                  <a:latin typeface="EB Garamond"/>
+                  <a:ea typeface="EB Garamond"/>
+                  <a:cs typeface="EB Garamond"/>
+                </a:rPr>
+                <a:t>Figure 4.</a:t>
+              </a:r>
+              <a:r>
+                <a:rPr lang="en-US" sz="3528" b="0" i="0" kern="100" dirty="0">
+                  <a:solidFill>
+                    <a:srgbClr val="111111"/>
+                  </a:solidFill>
+                  <a:latin typeface="EB Garamond"/>
+                  <a:ea typeface="EB Garamond"/>
+                  <a:cs typeface="EB Garamond"/>
+                </a:rPr>
+                <a:t> Trigger position: the </a:t>
+              </a:r>
+              <a:r>
+                <a:rPr lang="en-US" sz="3528" b="1" i="0" kern="100" dirty="0">
+                  <a:solidFill>
+                    <a:srgbClr val="111111"/>
+                  </a:solidFill>
+                  <a:latin typeface="EB Garamond"/>
+                  <a:ea typeface="EB Garamond"/>
+                  <a:cs typeface="EB Garamond"/>
+                </a:rPr>
+                <a:t>prefix</a:t>
+              </a:r>
+              <a:r>
+                <a:rPr lang="en-US" sz="3528" b="0" i="0" kern="100" dirty="0">
+                  <a:solidFill>
+                    <a:srgbClr val="111111"/>
+                  </a:solidFill>
+                  <a:latin typeface="EB Garamond"/>
+                  <a:ea typeface="EB Garamond"/>
+                  <a:cs typeface="EB Garamond"/>
+                </a:rPr>
+                <a:t> trigger comes closest to the desired zone (NPO, MUSE‑Books).</a:t>
+              </a:r>
+              <a:endParaRPr lang="en-US" sz="3528" b="0" i="0" kern="100" dirty="0">
+                <a:solidFill>
+                  <a:srgbClr val="111111"/>
+                </a:solidFill>
+                <a:latin typeface="EB Garamond"/>
+                <a:ea typeface="EB Garamond"/>
+                <a:cs typeface="EB Garamond"/>
+              </a:endParaRPr>
+            </a:p>
+          </p:txBody>
+        </p:sp>
+        <p:sp>
+          <p:nvSpPr>
+            <p:cNvPr id="61" name="Text: Attention sinks are a gateway: a prefix trigger "/>
+            <p:cNvSpPr/>
+            <p:nvPr/>
+          </p:nvSpPr>
+          <p:spPr>
+            <a:xfrm>
+              <a:off x="43422094" y="18977140"/>
+              <a:ext cx="7217337" cy="4426016"/>
+            </a:xfrm>
+            <a:prstGeom prst="roundRect">
+              <a:avLst>
+                <a:gd name="adj" fmla="val 6279"/>
+              </a:avLst>
+            </a:prstGeom>
+            <a:solidFill>
+              <a:srgbClr val="EEF4F1"/>
+            </a:solidFill>
+            <a:ln w="7408">
+              <a:solidFill>
+                <a:srgbClr val="18453B"/>
+              </a:solidFill>
+            </a:ln>
+          </p:spPr>
+          <p:txBody>
+            <a:bodyPr wrap="square" lIns="118220" tIns="93315" rIns="169427" bIns="93315" anchor="ctr" rtlCol="0">
+              <a:noAutofit/>
+            </a:bodyPr>
+            <a:lstStyle/>
+            <a:p>
+              <a:pPr algn="l" marL="563210" indent="-563210">
+                <a:lnSpc>
+                  <a:spcPts val="5564"/>
+                </a:lnSpc>
+                <a:spcBef>
+                  <a:spcPts val="0"/>
+                </a:spcBef>
+                <a:spcAft>
+                  <a:spcPts val="0"/>
+                </a:spcAft>
+                <a:buClr>
+                  <a:srgbClr val="111111"/>
+                </a:buClr>
+                <a:buSzPct val="100000"/>
+                <a:buFont typeface="Wingdings" pitchFamily="2" charset="2"/>
+                <a:buChar char="ü"/>
+              </a:pPr>
+              <a:r>
+                <a:rPr lang="en-US" sz="4637" b="1" i="0" kern="100" dirty="0">
+                  <a:solidFill>
+                    <a:srgbClr val="111111"/>
+                  </a:solidFill>
+                  <a:latin typeface="EB Garamond"/>
+                  <a:ea typeface="EB Garamond"/>
+                  <a:cs typeface="EB Garamond"/>
+                </a:rPr>
+                <a:t>Attention sinks are a gateway:</a:t>
+              </a:r>
+              <a:r>
+                <a:rPr lang="en-US" sz="4637" b="0" i="0" kern="100" dirty="0">
+                  <a:solidFill>
+                    <a:srgbClr val="111111"/>
+                  </a:solidFill>
+                  <a:latin typeface="EB Garamond"/>
+                  <a:ea typeface="EB Garamond"/>
+                  <a:cs typeface="EB Garamond"/>
+                </a:rPr>
+                <a:t> a prefix trigger restores forgotten knowledge; </a:t>
+              </a:r>
+              <a:r>
+                <a:rPr lang="en-US" sz="4637" b="1" i="0" kern="100" dirty="0">
+                  <a:solidFill>
+                    <a:srgbClr val="111111"/>
+                  </a:solidFill>
+                  <a:latin typeface="EB Garamond"/>
+                  <a:ea typeface="EB Garamond"/>
+                  <a:cs typeface="EB Garamond"/>
+                </a:rPr>
+                <a:t>value-norm alignment</a:t>
+              </a:r>
+              <a:r>
+                <a:rPr lang="en-US" sz="4637" b="0" i="0" kern="100" dirty="0">
+                  <a:solidFill>
+                    <a:srgbClr val="111111"/>
+                  </a:solidFill>
+                  <a:latin typeface="EB Garamond"/>
+                  <a:ea typeface="EB Garamond"/>
+                  <a:cs typeface="EB Garamond"/>
+                </a:rPr>
+                <a:t> makes it stealthier.</a:t>
+              </a:r>
+              <a:endParaRPr lang="en-US" sz="4637" b="0" i="0" kern="100" dirty="0">
+                <a:solidFill>
+                  <a:srgbClr val="111111"/>
+                </a:solidFill>
+                <a:latin typeface="EB Garamond"/>
+                <a:ea typeface="EB Garamond"/>
+                <a:cs typeface="EB Garamond"/>
+              </a:endParaRPr>
+            </a:p>
+          </p:txBody>
+        </p:sp>
       </p:grpSp>
       <p:grpSp>
         <p:nvGrpSpPr>
-          <p:cNvPr id="67" name="Section: Block"/>
+          <p:cNvPr id="73" name="Section: Block"/>
           <p:cNvGrpSpPr/>
           <p:nvPr/>
         </p:nvGrpSpPr>
@@ -10921,7 +7259,7 @@
         </p:grpSpPr>
         <p:sp>
           <p:nvSpPr>
-            <p:cNvPr id="56" name="Text: [1] Sijia Liu, et al. “Rethinking machine unlear"/>
+            <p:cNvPr id="62" name="Text: [1] Sijia Liu, et al. “Rethinking machine unlear"/>
             <p:cNvSpPr txBox="1"/>
             <p:nvPr/>
           </p:nvSpPr>
@@ -11010,7 +7348,7 @@
         </p:sp>
         <p:sp>
           <p:nvSpPr>
-            <p:cNvPr id="57" name="Text: [3] Guangxuan Xiao, et al. “Efficient streaming "/>
+            <p:cNvPr id="63" name="Text: [3] Guangxuan Xiao, et al. “Efficient streaming "/>
             <p:cNvSpPr txBox="1"/>
             <p:nvPr/>
           </p:nvSpPr>
@@ -11099,7 +7437,7 @@
         </p:sp>
         <p:sp>
           <p:nvSpPr>
-            <p:cNvPr id="58" name="Text: [5] Ruiqi Zhang, et al. “Negative preference opt"/>
+            <p:cNvPr id="64" name="Text: [5] Ruiqi Zhang, et al. “Negative preference opt"/>
             <p:cNvSpPr txBox="1"/>
             <p:nvPr/>
           </p:nvSpPr>
@@ -11189,7 +7527,7 @@
       </p:grpSp>
       <p:grpSp>
         <p:nvGrpSpPr>
-          <p:cNvPr id="68" name="Section: Footer"/>
+          <p:cNvPr id="74" name="Section: Footer"/>
           <p:cNvGrpSpPr/>
           <p:nvPr/>
         </p:nvGrpSpPr>
@@ -11203,7 +7541,7 @@
         </p:grpSpPr>
         <p:sp>
           <p:nvSpPr>
-            <p:cNvPr id="59" name="Text: Contact: bshang@msu.edu (rule)"/>
+            <p:cNvPr id="65" name="Text: Contact: bshang@msu.edu (rule)"/>
             <p:cNvSpPr/>
             <p:nvPr/>
           </p:nvSpPr>
@@ -11225,7 +7563,7 @@
         </p:sp>
         <p:sp>
           <p:nvSpPr>
-            <p:cNvPr id="60" name="Text: Contact: bshang@msu.edu"/>
+            <p:cNvPr id="66" name="Text: Contact: bshang@msu.edu"/>
             <p:cNvSpPr txBox="1"/>
             <p:nvPr/>
           </p:nvSpPr>

--- a/poster/forgetting-to-forget-colm2026-poster.pptx
+++ b/poster/forgetting-to-forget-colm2026-poster.pptx
@@ -6109,7 +6109,18 @@
                   <a:ea typeface="EB Garamond"/>
                   <a:cs typeface="EB Garamond"/>
                 </a:rPr>
-                <a:t> Pearson correlation of sink-token value norms.</a:t>
+                <a:t> Pearson correlation of </a:t>
+              </a:r>
+              <a:r>
+                <a:rPr lang="en-US" sz="3528" b="0" i="0" kern="100" dirty="0">
+                  <a:solidFill>
+                    <a:srgbClr val="111111"/>
+                  </a:solidFill>
+                  <a:latin typeface="EB Garamond"/>
+                  <a:ea typeface="EB Garamond"/>
+                  <a:cs typeface="EB Garamond"/>
+                </a:rPr>
+                <a:t>sink-token value norms.</a:t>
               </a:r>
               <a:endParaRPr lang="en-US" sz="3528" b="0" i="0" kern="100" dirty="0">
                 <a:solidFill>
@@ -6584,7 +6595,18 @@
                   <a:ea typeface="EB Garamond"/>
                   <a:cs typeface="EB Garamond"/>
                 </a:rPr>
-                <a:t> Standard backdoor training distorts sink value norms (Fig. 3); aligning them improves both forgetting and recovery.</a:t>
+                <a:t> Standard backdoor training distorts sink value norms (Fig. 3); aligning them improves both forgetting </a:t>
+              </a:r>
+              <a:r>
+                <a:rPr lang="en-US" sz="4637" b="0" i="0" kern="100" dirty="0">
+                  <a:solidFill>
+                    <a:srgbClr val="111111"/>
+                  </a:solidFill>
+                  <a:latin typeface="EB Garamond"/>
+                  <a:ea typeface="EB Garamond"/>
+                  <a:cs typeface="EB Garamond"/>
+                </a:rPr>
+                <a:t>and recovery.</a:t>
               </a:r>
               <a:endParaRPr lang="en-US" sz="4637" b="0" i="0" kern="100" dirty="0">
                 <a:solidFill>
